--- a/.preview/pptx/deck.pptx
+++ b/.preview/pptx/deck.pptx
@@ -2,27 +2,27 @@
 <file path=ppt/presentation.xml><?xml version="1.0" encoding="utf-8"?>
 <p:presentation xmlns:p="http://schemas.openxmlformats.org/presentationml/2006/main">
   <p:sldMasterIdLst>
-    <p:sldMasterId xmlns:r="http://schemas.openxmlformats.org/officeDocument/2006/relationships" id="2147483648" r:id="R84750aeecf3640b3"/>
+    <p:sldMasterId xmlns:r="http://schemas.openxmlformats.org/officeDocument/2006/relationships" id="2147483648" r:id="R14ab1976f3844a5b"/>
   </p:sldMasterIdLst>
   <p:notesMasterIdLst>
-    <p:notesMasterId xmlns:r="http://schemas.openxmlformats.org/officeDocument/2006/relationships" r:id="Rb38e4b83060746ce"/>
+    <p:notesMasterId xmlns:r="http://schemas.openxmlformats.org/officeDocument/2006/relationships" r:id="R8c3bdbc595764e2b"/>
   </p:notesMasterIdLst>
   <p:sldIdLst>
-    <p:sldId xmlns:r="http://schemas.openxmlformats.org/officeDocument/2006/relationships" id="256" r:id="R84218ca74f104a3f"/>
-    <p:sldId xmlns:r="http://schemas.openxmlformats.org/officeDocument/2006/relationships" id="257" r:id="Reea372e4ef134035"/>
-    <p:sldId xmlns:r="http://schemas.openxmlformats.org/officeDocument/2006/relationships" id="258" r:id="Rade8c9e7cae74128"/>
-    <p:sldId xmlns:r="http://schemas.openxmlformats.org/officeDocument/2006/relationships" id="259" r:id="R8764b359e6e8414e"/>
-    <p:sldId xmlns:r="http://schemas.openxmlformats.org/officeDocument/2006/relationships" id="260" r:id="R08f23221334b4fc5"/>
-    <p:sldId xmlns:r="http://schemas.openxmlformats.org/officeDocument/2006/relationships" id="261" r:id="R0473c12f1f994608"/>
-    <p:sldId xmlns:r="http://schemas.openxmlformats.org/officeDocument/2006/relationships" id="262" r:id="R8e0ac56cefc84d62"/>
-    <p:sldId xmlns:r="http://schemas.openxmlformats.org/officeDocument/2006/relationships" id="263" r:id="R2eaf92694ddd4d40"/>
-    <p:sldId xmlns:r="http://schemas.openxmlformats.org/officeDocument/2006/relationships" id="264" r:id="R9e1ec38579ad4de5"/>
-    <p:sldId xmlns:r="http://schemas.openxmlformats.org/officeDocument/2006/relationships" id="265" r:id="Reb74a16236b84668"/>
-    <p:sldId xmlns:r="http://schemas.openxmlformats.org/officeDocument/2006/relationships" id="266" r:id="R7265832bb24a4068"/>
-    <p:sldId xmlns:r="http://schemas.openxmlformats.org/officeDocument/2006/relationships" id="267" r:id="R5fe799de009f4513"/>
-    <p:sldId xmlns:r="http://schemas.openxmlformats.org/officeDocument/2006/relationships" id="268" r:id="R0abb629733024234"/>
-    <p:sldId xmlns:r="http://schemas.openxmlformats.org/officeDocument/2006/relationships" id="269" r:id="Re04c1baac0414102"/>
-    <p:sldId xmlns:r="http://schemas.openxmlformats.org/officeDocument/2006/relationships" id="270" r:id="R0ae7e89b43c14924"/>
+    <p:sldId xmlns:r="http://schemas.openxmlformats.org/officeDocument/2006/relationships" id="256" r:id="R04d0efd9dcb94d8d"/>
+    <p:sldId xmlns:r="http://schemas.openxmlformats.org/officeDocument/2006/relationships" id="257" r:id="R32f0fa60f7f443f0"/>
+    <p:sldId xmlns:r="http://schemas.openxmlformats.org/officeDocument/2006/relationships" id="258" r:id="R4ccba82c402e4dde"/>
+    <p:sldId xmlns:r="http://schemas.openxmlformats.org/officeDocument/2006/relationships" id="259" r:id="R58067c8fe99b43bd"/>
+    <p:sldId xmlns:r="http://schemas.openxmlformats.org/officeDocument/2006/relationships" id="260" r:id="Rc5eb9d5a799c462d"/>
+    <p:sldId xmlns:r="http://schemas.openxmlformats.org/officeDocument/2006/relationships" id="261" r:id="R132b68ec3294428e"/>
+    <p:sldId xmlns:r="http://schemas.openxmlformats.org/officeDocument/2006/relationships" id="262" r:id="Rd8fa8c90ef5c46d9"/>
+    <p:sldId xmlns:r="http://schemas.openxmlformats.org/officeDocument/2006/relationships" id="263" r:id="R3f5d4247991c4c0b"/>
+    <p:sldId xmlns:r="http://schemas.openxmlformats.org/officeDocument/2006/relationships" id="264" r:id="Rc4ee61b092544aed"/>
+    <p:sldId xmlns:r="http://schemas.openxmlformats.org/officeDocument/2006/relationships" id="265" r:id="Rb10c16bb3f404e74"/>
+    <p:sldId xmlns:r="http://schemas.openxmlformats.org/officeDocument/2006/relationships" id="266" r:id="Rb76cce67329641dc"/>
+    <p:sldId xmlns:r="http://schemas.openxmlformats.org/officeDocument/2006/relationships" id="267" r:id="R2dbc3bed14244181"/>
+    <p:sldId xmlns:r="http://schemas.openxmlformats.org/officeDocument/2006/relationships" id="268" r:id="Rd4ceb509eee041af"/>
+    <p:sldId xmlns:r="http://schemas.openxmlformats.org/officeDocument/2006/relationships" id="269" r:id="R42103ceac2474460"/>
+    <p:sldId xmlns:r="http://schemas.openxmlformats.org/officeDocument/2006/relationships" id="270" r:id="Rd6ce3eb573c34233"/>
   </p:sldIdLst>
   <p:sldSz cx="12192000" cy="6858000"/>
   <p:notesSz cx="6858000" cy="9144000"/>
@@ -1879,7 +1879,7 @@
   </p:cSld>
   <p:clrMap bg1="lt1" tx1="dk1" bg2="lt2" tx2="dk2" accent1="accent1" accent2="accent2" accent3="accent3" accent4="accent4" accent5="accent5" accent6="accent6" hlink="hlink" folHlink="folHlink"/>
   <p:sldLayoutIdLst>
-    <p:sldLayoutId xmlns:r="http://schemas.openxmlformats.org/officeDocument/2006/relationships" id="2147483649" r:id="R3a9adfa6afe148d6"/>
+    <p:sldLayoutId xmlns:r="http://schemas.openxmlformats.org/officeDocument/2006/relationships" id="2147483649" r:id="R51370e2a9a09493c"/>
   </p:sldLayoutIdLst>
   <p:txStyles>
     <p:titleStyle>
@@ -2430,7 +2430,7 @@
           <p:cNvPr id="17" name="">
             <a:extLst xmlns:a="http://schemas.openxmlformats.org/drawingml/2006/main">
               <a:ext uri="{FF2B5EF4-FFF2-40B4-BE49-F238E27FC236}">
-                <a16:creationId xmlns:a16="http://schemas.microsoft.com/office/drawing/2014/main" id="{F272A174-B97A-4309-971B-F41E245B74FE}"/>
+                <a16:creationId xmlns:a16="http://schemas.microsoft.com/office/drawing/2014/main" id="{266C40F6-56DA-4B39-91E4-6E0F016CF192}"/>
               </a:ext>
             </a:extLst>
           </p:cNvPr>
@@ -2463,7 +2463,7 @@
           <p:cNvPr id="2" name="">
             <a:extLst xmlns:a="http://schemas.openxmlformats.org/drawingml/2006/main">
               <a:ext uri="{FF2B5EF4-FFF2-40B4-BE49-F238E27FC236}">
-                <a16:creationId xmlns:a16="http://schemas.microsoft.com/office/drawing/2014/main" id="{649773B5-31C4-4179-839B-78696FBA80C7}"/>
+                <a16:creationId xmlns:a16="http://schemas.microsoft.com/office/drawing/2014/main" id="{0B4A6DB8-ADA4-478D-9935-09BC858C38D1}"/>
               </a:ext>
             </a:extLst>
           </p:cNvPr>
@@ -2494,7 +2494,7 @@
           <p:cNvPr id="3" name="">
             <a:extLst xmlns:a="http://schemas.openxmlformats.org/drawingml/2006/main">
               <a:ext uri="{FF2B5EF4-FFF2-40B4-BE49-F238E27FC236}">
-                <a16:creationId xmlns:a16="http://schemas.microsoft.com/office/drawing/2014/main" id="{868BECDE-E63D-4074-B085-4C233E8E1A32}"/>
+                <a16:creationId xmlns:a16="http://schemas.microsoft.com/office/drawing/2014/main" id="{3B8CC9F4-5263-48CD-8F69-559EBC14A656}"/>
               </a:ext>
             </a:extLst>
           </p:cNvPr>
@@ -2529,7 +2529,7 @@
           <p:nvPr/>
         </p:nvPicPr>
         <p:blipFill>
-          <a:blip xmlns:r="http://schemas.openxmlformats.org/officeDocument/2006/relationships" xmlns:a="http://schemas.openxmlformats.org/drawingml/2006/main" r:embed="R197981d48de64c9f"/>
+          <a:blip xmlns:r="http://schemas.openxmlformats.org/officeDocument/2006/relationships" xmlns:a="http://schemas.openxmlformats.org/drawingml/2006/main" r:embed="R3af1824f58374d53"/>
           <a:stretch xmlns:a="http://schemas.openxmlformats.org/drawingml/2006/main"/>
         </p:blipFill>
         <p:spPr>
@@ -2547,7 +2547,7 @@
           <p:cNvPr id="5" name="">
             <a:extLst xmlns:a="http://schemas.openxmlformats.org/drawingml/2006/main">
               <a:ext uri="{FF2B5EF4-FFF2-40B4-BE49-F238E27FC236}">
-                <a16:creationId xmlns:a16="http://schemas.microsoft.com/office/drawing/2014/main" id="{84FBCE39-9CBF-4EF7-A9C0-FC4DE44C3F15}"/>
+                <a16:creationId xmlns:a16="http://schemas.microsoft.com/office/drawing/2014/main" id="{355F0507-E189-4A13-9BF4-4577219FCB20}"/>
               </a:ext>
             </a:extLst>
           </p:cNvPr>
@@ -2599,7 +2599,7 @@
           <p:cNvPr id="6" name="">
             <a:extLst xmlns:a="http://schemas.openxmlformats.org/drawingml/2006/main">
               <a:ext uri="{FF2B5EF4-FFF2-40B4-BE49-F238E27FC236}">
-                <a16:creationId xmlns:a16="http://schemas.microsoft.com/office/drawing/2014/main" id="{F6EC6C17-E71D-4BFB-88CF-DD010857D5BF}"/>
+                <a16:creationId xmlns:a16="http://schemas.microsoft.com/office/drawing/2014/main" id="{06E1B0FD-E002-4540-BA56-4BBC36716376}"/>
               </a:ext>
             </a:extLst>
           </p:cNvPr>
@@ -2655,7 +2655,7 @@
           <p:nvPr/>
         </p:nvPicPr>
         <p:blipFill>
-          <a:blip xmlns:r="http://schemas.openxmlformats.org/officeDocument/2006/relationships" xmlns:a="http://schemas.openxmlformats.org/drawingml/2006/main" r:embed="Rc0a382093dfd4274"/>
+          <a:blip xmlns:r="http://schemas.openxmlformats.org/officeDocument/2006/relationships" xmlns:a="http://schemas.openxmlformats.org/drawingml/2006/main" r:embed="R57fdf327c1b04930"/>
           <a:stretch xmlns:a="http://schemas.openxmlformats.org/drawingml/2006/main"/>
         </p:blipFill>
         <p:spPr>
@@ -2673,7 +2673,7 @@
           <p:cNvPr id="8" name="">
             <a:extLst xmlns:a="http://schemas.openxmlformats.org/drawingml/2006/main">
               <a:ext uri="{FF2B5EF4-FFF2-40B4-BE49-F238E27FC236}">
-                <a16:creationId xmlns:a16="http://schemas.microsoft.com/office/drawing/2014/main" id="{A40A916A-45F8-41C3-9097-E22B51C291B4}"/>
+                <a16:creationId xmlns:a16="http://schemas.microsoft.com/office/drawing/2014/main" id="{276401CC-7A45-4231-83EB-2A05A1A18C56}"/>
               </a:ext>
             </a:extLst>
           </p:cNvPr>
@@ -2706,7 +2706,7 @@
           <p:cNvPr id="9" name="">
             <a:extLst xmlns:a="http://schemas.openxmlformats.org/drawingml/2006/main">
               <a:ext uri="{FF2B5EF4-FFF2-40B4-BE49-F238E27FC236}">
-                <a16:creationId xmlns:a16="http://schemas.microsoft.com/office/drawing/2014/main" id="{C8F97153-E6EF-4EDE-B4CB-C24963B3D034}"/>
+                <a16:creationId xmlns:a16="http://schemas.microsoft.com/office/drawing/2014/main" id="{2C9D6B99-6599-464D-8585-B1C2EB458528}"/>
               </a:ext>
             </a:extLst>
           </p:cNvPr>
@@ -2758,7 +2758,7 @@
           <p:cNvPr id="10" name="">
             <a:extLst xmlns:a="http://schemas.openxmlformats.org/drawingml/2006/main">
               <a:ext uri="{FF2B5EF4-FFF2-40B4-BE49-F238E27FC236}">
-                <a16:creationId xmlns:a16="http://schemas.microsoft.com/office/drawing/2014/main" id="{91D6A39B-971D-4EFB-975C-113E8EFFB606}"/>
+                <a16:creationId xmlns:a16="http://schemas.microsoft.com/office/drawing/2014/main" id="{F517040D-8777-44D3-96E2-393BFF424FC1}"/>
               </a:ext>
             </a:extLst>
           </p:cNvPr>
@@ -2810,7 +2810,7 @@
           <p:cNvPr id="11" name="">
             <a:extLst xmlns:a="http://schemas.openxmlformats.org/drawingml/2006/main">
               <a:ext uri="{FF2B5EF4-FFF2-40B4-BE49-F238E27FC236}">
-                <a16:creationId xmlns:a16="http://schemas.microsoft.com/office/drawing/2014/main" id="{74F80468-7AEE-4FE5-8C09-167F16951B8C}"/>
+                <a16:creationId xmlns:a16="http://schemas.microsoft.com/office/drawing/2014/main" id="{C642D7BA-85D3-4B75-92CA-180AD4A839EA}"/>
               </a:ext>
             </a:extLst>
           </p:cNvPr>
@@ -2862,7 +2862,7 @@
           <p:cNvPr id="12" name="">
             <a:extLst xmlns:a="http://schemas.openxmlformats.org/drawingml/2006/main">
               <a:ext uri="{FF2B5EF4-FFF2-40B4-BE49-F238E27FC236}">
-                <a16:creationId xmlns:a16="http://schemas.microsoft.com/office/drawing/2014/main" id="{E64B41C7-58F8-44A1-947A-BCF728445B2D}"/>
+                <a16:creationId xmlns:a16="http://schemas.microsoft.com/office/drawing/2014/main" id="{508C7081-6526-4125-9213-EDF8DF65437E}"/>
               </a:ext>
             </a:extLst>
           </p:cNvPr>
@@ -2914,7 +2914,7 @@
           <p:cNvPr id="13" name="">
             <a:extLst xmlns:a="http://schemas.openxmlformats.org/drawingml/2006/main">
               <a:ext uri="{FF2B5EF4-FFF2-40B4-BE49-F238E27FC236}">
-                <a16:creationId xmlns:a16="http://schemas.microsoft.com/office/drawing/2014/main" id="{A253E143-B081-433C-8440-804B039CC01B}"/>
+                <a16:creationId xmlns:a16="http://schemas.microsoft.com/office/drawing/2014/main" id="{3BF0D199-3948-4A2A-92D0-2B2D035BACD0}"/>
               </a:ext>
             </a:extLst>
           </p:cNvPr>
@@ -2966,7 +2966,7 @@
           <p:cNvPr id="14" name="">
             <a:extLst xmlns:a="http://schemas.openxmlformats.org/drawingml/2006/main">
               <a:ext uri="{FF2B5EF4-FFF2-40B4-BE49-F238E27FC236}">
-                <a16:creationId xmlns:a16="http://schemas.microsoft.com/office/drawing/2014/main" id="{74E643CD-F192-411C-930A-7E96E040B75A}"/>
+                <a16:creationId xmlns:a16="http://schemas.microsoft.com/office/drawing/2014/main" id="{8BE9DF25-4B39-4DF0-B6DC-F8500DA03612}"/>
               </a:ext>
             </a:extLst>
           </p:cNvPr>
@@ -3018,7 +3018,7 @@
           <p:cNvPr id="15" name="">
             <a:extLst xmlns:a="http://schemas.openxmlformats.org/drawingml/2006/main">
               <a:ext uri="{FF2B5EF4-FFF2-40B4-BE49-F238E27FC236}">
-                <a16:creationId xmlns:a16="http://schemas.microsoft.com/office/drawing/2014/main" id="{BE227666-FA89-4AF4-8073-CB30E00D9D4D}"/>
+                <a16:creationId xmlns:a16="http://schemas.microsoft.com/office/drawing/2014/main" id="{B2429367-7237-4668-98F2-B66ACB557973}"/>
               </a:ext>
             </a:extLst>
           </p:cNvPr>
@@ -3070,7 +3070,7 @@
           <p:cNvPr id="16" name="">
             <a:extLst xmlns:a="http://schemas.openxmlformats.org/drawingml/2006/main">
               <a:ext uri="{FF2B5EF4-FFF2-40B4-BE49-F238E27FC236}">
-                <a16:creationId xmlns:a16="http://schemas.microsoft.com/office/drawing/2014/main" id="{D69A5080-028D-4131-9C9E-48996645CD28}"/>
+                <a16:creationId xmlns:a16="http://schemas.microsoft.com/office/drawing/2014/main" id="{321423F0-E735-425D-A596-DC0E6B303EE4}"/>
               </a:ext>
             </a:extLst>
           </p:cNvPr>
@@ -3120,7 +3120,7 @@
     </p:spTree>
     <p:extLst>
       <p:ext uri="{BB962C8B-B14F-4D97-AF65-F5344CB8AC3E}">
-        <p14:creationId xmlns:p14="http://schemas.microsoft.com/office/powerpoint/2010/main" val="925323844"/>
+        <p14:creationId xmlns:p14="http://schemas.microsoft.com/office/powerpoint/2010/main" val="2129502063"/>
       </p:ext>
     </p:extLst>
   </p:cSld>
@@ -3151,7 +3151,7 @@
           <p:cNvPr id="103" name="">
             <a:extLst xmlns:a="http://schemas.openxmlformats.org/drawingml/2006/main">
               <a:ext uri="{FF2B5EF4-FFF2-40B4-BE49-F238E27FC236}">
-                <a16:creationId xmlns:a16="http://schemas.microsoft.com/office/drawing/2014/main" id="{8F35B3F3-FF49-4B20-81B7-75F11DDC694A}"/>
+                <a16:creationId xmlns:a16="http://schemas.microsoft.com/office/drawing/2014/main" id="{B6506163-27BE-41A6-8FEA-4611441364A1}"/>
               </a:ext>
             </a:extLst>
           </p:cNvPr>
@@ -3184,7 +3184,7 @@
           <p:cNvPr id="2" name="">
             <a:extLst xmlns:a="http://schemas.openxmlformats.org/drawingml/2006/main">
               <a:ext uri="{FF2B5EF4-FFF2-40B4-BE49-F238E27FC236}">
-                <a16:creationId xmlns:a16="http://schemas.microsoft.com/office/drawing/2014/main" id="{163292BF-1F87-4558-92FB-87FCE7A283BF}"/>
+                <a16:creationId xmlns:a16="http://schemas.microsoft.com/office/drawing/2014/main" id="{649BEC5E-67F4-4820-8B16-B1C96656B0F1}"/>
               </a:ext>
             </a:extLst>
           </p:cNvPr>
@@ -3215,7 +3215,7 @@
           <p:cNvPr id="3" name="">
             <a:extLst xmlns:a="http://schemas.openxmlformats.org/drawingml/2006/main">
               <a:ext uri="{FF2B5EF4-FFF2-40B4-BE49-F238E27FC236}">
-                <a16:creationId xmlns:a16="http://schemas.microsoft.com/office/drawing/2014/main" id="{F07F220E-F9D8-43BF-8B80-4D0BC71D96B5}"/>
+                <a16:creationId xmlns:a16="http://schemas.microsoft.com/office/drawing/2014/main" id="{086FC9CF-FF7D-468F-AEFF-DEC8D788EAF9}"/>
               </a:ext>
             </a:extLst>
           </p:cNvPr>
@@ -3267,7 +3267,7 @@
           <p:cNvPr id="4" name="">
             <a:extLst xmlns:a="http://schemas.openxmlformats.org/drawingml/2006/main">
               <a:ext uri="{FF2B5EF4-FFF2-40B4-BE49-F238E27FC236}">
-                <a16:creationId xmlns:a16="http://schemas.microsoft.com/office/drawing/2014/main" id="{087F0550-B2B9-486A-BBBA-4741209CD2F1}"/>
+                <a16:creationId xmlns:a16="http://schemas.microsoft.com/office/drawing/2014/main" id="{0F1F8978-761C-4F8F-96FA-44D6E09B9DCF}"/>
               </a:ext>
             </a:extLst>
           </p:cNvPr>
@@ -3319,7 +3319,7 @@
           <p:cNvPr id="5" name="">
             <a:extLst xmlns:a="http://schemas.openxmlformats.org/drawingml/2006/main">
               <a:ext uri="{FF2B5EF4-FFF2-40B4-BE49-F238E27FC236}">
-                <a16:creationId xmlns:a16="http://schemas.microsoft.com/office/drawing/2014/main" id="{C1D19140-4023-40FC-85E8-7082B4A9864E}"/>
+                <a16:creationId xmlns:a16="http://schemas.microsoft.com/office/drawing/2014/main" id="{41AACDD0-6876-4262-945A-C0A41F611315}"/>
               </a:ext>
             </a:extLst>
           </p:cNvPr>
@@ -3354,7 +3354,7 @@
           <p:nvPr/>
         </p:nvPicPr>
         <p:blipFill>
-          <a:blip xmlns:r="http://schemas.openxmlformats.org/officeDocument/2006/relationships" xmlns:a="http://schemas.openxmlformats.org/drawingml/2006/main" r:embed="R2bf5e83ad1af488a"/>
+          <a:blip xmlns:r="http://schemas.openxmlformats.org/officeDocument/2006/relationships" xmlns:a="http://schemas.openxmlformats.org/drawingml/2006/main" r:embed="R6d4414e714864c4c"/>
           <a:stretch xmlns:a="http://schemas.openxmlformats.org/drawingml/2006/main"/>
         </p:blipFill>
         <p:spPr>
@@ -3372,7 +3372,7 @@
           <p:cNvPr id="7" name="">
             <a:extLst xmlns:a="http://schemas.openxmlformats.org/drawingml/2006/main">
               <a:ext uri="{FF2B5EF4-FFF2-40B4-BE49-F238E27FC236}">
-                <a16:creationId xmlns:a16="http://schemas.microsoft.com/office/drawing/2014/main" id="{CD34DF0B-638B-4008-A3BF-C863FDC5B89F}"/>
+                <a16:creationId xmlns:a16="http://schemas.microsoft.com/office/drawing/2014/main" id="{9C06A2C1-45A9-42D5-A69A-26AA06AA7E8C}"/>
               </a:ext>
             </a:extLst>
           </p:cNvPr>
@@ -3424,7 +3424,7 @@
           <p:cNvPr id="8" name="">
             <a:extLst xmlns:a="http://schemas.openxmlformats.org/drawingml/2006/main">
               <a:ext uri="{FF2B5EF4-FFF2-40B4-BE49-F238E27FC236}">
-                <a16:creationId xmlns:a16="http://schemas.microsoft.com/office/drawing/2014/main" id="{CB51A704-3903-4F1F-861B-143F67BFE36B}"/>
+                <a16:creationId xmlns:a16="http://schemas.microsoft.com/office/drawing/2014/main" id="{AF78BA0F-DB56-4672-9CB9-B80D9BE05307}"/>
               </a:ext>
             </a:extLst>
           </p:cNvPr>
@@ -3476,7 +3476,7 @@
           <p:cNvPr id="9" name="">
             <a:extLst xmlns:a="http://schemas.openxmlformats.org/drawingml/2006/main">
               <a:ext uri="{FF2B5EF4-FFF2-40B4-BE49-F238E27FC236}">
-                <a16:creationId xmlns:a16="http://schemas.microsoft.com/office/drawing/2014/main" id="{7C0DD5BC-D73D-4EFB-BF1C-A0A7A87EFB39}"/>
+                <a16:creationId xmlns:a16="http://schemas.microsoft.com/office/drawing/2014/main" id="{63BF213B-CCD1-4D95-AA4D-D4CC1E38E09F}"/>
               </a:ext>
             </a:extLst>
           </p:cNvPr>
@@ -3528,7 +3528,7 @@
           <p:cNvPr id="10" name="">
             <a:extLst xmlns:a="http://schemas.openxmlformats.org/drawingml/2006/main">
               <a:ext uri="{FF2B5EF4-FFF2-40B4-BE49-F238E27FC236}">
-                <a16:creationId xmlns:a16="http://schemas.microsoft.com/office/drawing/2014/main" id="{789CD739-DDDA-4AFB-8713-25BA02392087}"/>
+                <a16:creationId xmlns:a16="http://schemas.microsoft.com/office/drawing/2014/main" id="{DD91147D-E1AA-41BA-96CB-401E4E08FC44}"/>
               </a:ext>
             </a:extLst>
           </p:cNvPr>
@@ -3580,7 +3580,7 @@
           <p:cNvPr id="11" name="">
             <a:extLst xmlns:a="http://schemas.openxmlformats.org/drawingml/2006/main">
               <a:ext uri="{FF2B5EF4-FFF2-40B4-BE49-F238E27FC236}">
-                <a16:creationId xmlns:a16="http://schemas.microsoft.com/office/drawing/2014/main" id="{2807A835-C425-4C09-8D18-1EF6272BB866}"/>
+                <a16:creationId xmlns:a16="http://schemas.microsoft.com/office/drawing/2014/main" id="{590AA6B1-233C-4960-AADB-36D661535C74}"/>
               </a:ext>
             </a:extLst>
           </p:cNvPr>
@@ -3611,7 +3611,7 @@
           <p:cNvPr id="12" name="">
             <a:extLst xmlns:a="http://schemas.openxmlformats.org/drawingml/2006/main">
               <a:ext uri="{FF2B5EF4-FFF2-40B4-BE49-F238E27FC236}">
-                <a16:creationId xmlns:a16="http://schemas.microsoft.com/office/drawing/2014/main" id="{5C9880CF-0DD1-438E-8CE2-2DE7B2FC8EC2}"/>
+                <a16:creationId xmlns:a16="http://schemas.microsoft.com/office/drawing/2014/main" id="{4291591A-D0AD-4A70-80AB-32B6EA91B12E}"/>
               </a:ext>
             </a:extLst>
           </p:cNvPr>
@@ -3642,7 +3642,7 @@
           <p:cNvPr id="13" name="">
             <a:extLst xmlns:a="http://schemas.openxmlformats.org/drawingml/2006/main">
               <a:ext uri="{FF2B5EF4-FFF2-40B4-BE49-F238E27FC236}">
-                <a16:creationId xmlns:a16="http://schemas.microsoft.com/office/drawing/2014/main" id="{3B666868-E1A8-4629-B812-F94AED961A6C}"/>
+                <a16:creationId xmlns:a16="http://schemas.microsoft.com/office/drawing/2014/main" id="{FD1B2327-70DD-436F-9E34-53FDFEC03184}"/>
               </a:ext>
             </a:extLst>
           </p:cNvPr>
@@ -3694,7 +3694,7 @@
           <p:cNvPr id="14" name="">
             <a:extLst xmlns:a="http://schemas.openxmlformats.org/drawingml/2006/main">
               <a:ext uri="{FF2B5EF4-FFF2-40B4-BE49-F238E27FC236}">
-                <a16:creationId xmlns:a16="http://schemas.microsoft.com/office/drawing/2014/main" id="{AEC77126-FBEB-4160-BE6F-D1CE662CA4FD}"/>
+                <a16:creationId xmlns:a16="http://schemas.microsoft.com/office/drawing/2014/main" id="{19F4A268-2EFE-4B88-B5AC-3DC7C717E976}"/>
               </a:ext>
             </a:extLst>
           </p:cNvPr>
@@ -3746,7 +3746,7 @@
           <p:cNvPr id="15" name="">
             <a:extLst xmlns:a="http://schemas.openxmlformats.org/drawingml/2006/main">
               <a:ext uri="{FF2B5EF4-FFF2-40B4-BE49-F238E27FC236}">
-                <a16:creationId xmlns:a16="http://schemas.microsoft.com/office/drawing/2014/main" id="{0C9F10E8-0AF5-43C0-AC11-147FC40BF6AC}"/>
+                <a16:creationId xmlns:a16="http://schemas.microsoft.com/office/drawing/2014/main" id="{D02B430C-3BEA-48D1-A2CF-B33B2150DBD9}"/>
               </a:ext>
             </a:extLst>
           </p:cNvPr>
@@ -3798,7 +3798,7 @@
           <p:cNvPr id="16" name="">
             <a:extLst xmlns:a="http://schemas.openxmlformats.org/drawingml/2006/main">
               <a:ext uri="{FF2B5EF4-FFF2-40B4-BE49-F238E27FC236}">
-                <a16:creationId xmlns:a16="http://schemas.microsoft.com/office/drawing/2014/main" id="{B7D228C3-9911-40DD-9275-8D7328193792}"/>
+                <a16:creationId xmlns:a16="http://schemas.microsoft.com/office/drawing/2014/main" id="{F4E2851E-8F25-4D0D-AF33-460FD93FEE78}"/>
               </a:ext>
             </a:extLst>
           </p:cNvPr>
@@ -3850,7 +3850,7 @@
           <p:cNvPr id="17" name="">
             <a:extLst xmlns:a="http://schemas.openxmlformats.org/drawingml/2006/main">
               <a:ext uri="{FF2B5EF4-FFF2-40B4-BE49-F238E27FC236}">
-                <a16:creationId xmlns:a16="http://schemas.microsoft.com/office/drawing/2014/main" id="{274C79CC-98E6-49F4-A20E-0C3A867E883E}"/>
+                <a16:creationId xmlns:a16="http://schemas.microsoft.com/office/drawing/2014/main" id="{1A77CD2F-F66B-43D9-B6C1-0092F21EF76E}"/>
               </a:ext>
             </a:extLst>
           </p:cNvPr>
@@ -3902,7 +3902,7 @@
           <p:cNvPr id="18" name="">
             <a:extLst xmlns:a="http://schemas.openxmlformats.org/drawingml/2006/main">
               <a:ext uri="{FF2B5EF4-FFF2-40B4-BE49-F238E27FC236}">
-                <a16:creationId xmlns:a16="http://schemas.microsoft.com/office/drawing/2014/main" id="{EC6A62AC-72AF-4A1B-B8ED-3B00201AE820}"/>
+                <a16:creationId xmlns:a16="http://schemas.microsoft.com/office/drawing/2014/main" id="{D1766CC6-D1C7-430B-83B4-79B2B939D81B}"/>
               </a:ext>
             </a:extLst>
           </p:cNvPr>
@@ -3933,7 +3933,7 @@
           <p:cNvPr id="19" name="">
             <a:extLst xmlns:a="http://schemas.openxmlformats.org/drawingml/2006/main">
               <a:ext uri="{FF2B5EF4-FFF2-40B4-BE49-F238E27FC236}">
-                <a16:creationId xmlns:a16="http://schemas.microsoft.com/office/drawing/2014/main" id="{6FB9BF15-9C62-4BD4-9E5A-3AE1724755F4}"/>
+                <a16:creationId xmlns:a16="http://schemas.microsoft.com/office/drawing/2014/main" id="{6EC096A0-5681-4A3B-A6FA-7E432267BEFB}"/>
               </a:ext>
             </a:extLst>
           </p:cNvPr>
@@ -3964,7 +3964,7 @@
           <p:cNvPr id="20" name="">
             <a:extLst xmlns:a="http://schemas.openxmlformats.org/drawingml/2006/main">
               <a:ext uri="{FF2B5EF4-FFF2-40B4-BE49-F238E27FC236}">
-                <a16:creationId xmlns:a16="http://schemas.microsoft.com/office/drawing/2014/main" id="{856A3896-4630-422E-9987-B28EB66B28CD}"/>
+                <a16:creationId xmlns:a16="http://schemas.microsoft.com/office/drawing/2014/main" id="{D9FA8AFF-F264-421B-8525-2F5AD4ED7B85}"/>
               </a:ext>
             </a:extLst>
           </p:cNvPr>
@@ -4016,7 +4016,7 @@
           <p:cNvPr id="21" name="">
             <a:extLst xmlns:a="http://schemas.openxmlformats.org/drawingml/2006/main">
               <a:ext uri="{FF2B5EF4-FFF2-40B4-BE49-F238E27FC236}">
-                <a16:creationId xmlns:a16="http://schemas.microsoft.com/office/drawing/2014/main" id="{756A1952-01D6-4549-96D4-AB98F7A37931}"/>
+                <a16:creationId xmlns:a16="http://schemas.microsoft.com/office/drawing/2014/main" id="{FC6B58BF-C396-451A-9D47-C940B7AEE26E}"/>
               </a:ext>
             </a:extLst>
           </p:cNvPr>
@@ -4068,7 +4068,7 @@
           <p:cNvPr id="22" name="">
             <a:extLst xmlns:a="http://schemas.openxmlformats.org/drawingml/2006/main">
               <a:ext uri="{FF2B5EF4-FFF2-40B4-BE49-F238E27FC236}">
-                <a16:creationId xmlns:a16="http://schemas.microsoft.com/office/drawing/2014/main" id="{1AC17ADD-C787-403C-96C9-DA0DF8A6DF8E}"/>
+                <a16:creationId xmlns:a16="http://schemas.microsoft.com/office/drawing/2014/main" id="{AE65609A-5FEA-4978-9BC3-DAA0C1EDF0F7}"/>
               </a:ext>
             </a:extLst>
           </p:cNvPr>
@@ -4120,7 +4120,7 @@
           <p:cNvPr id="23" name="">
             <a:extLst xmlns:a="http://schemas.openxmlformats.org/drawingml/2006/main">
               <a:ext uri="{FF2B5EF4-FFF2-40B4-BE49-F238E27FC236}">
-                <a16:creationId xmlns:a16="http://schemas.microsoft.com/office/drawing/2014/main" id="{02820640-5499-4765-A372-5B78ED79A9F0}"/>
+                <a16:creationId xmlns:a16="http://schemas.microsoft.com/office/drawing/2014/main" id="{FD717266-6C76-4960-BE9D-7058969DA877}"/>
               </a:ext>
             </a:extLst>
           </p:cNvPr>
@@ -4172,7 +4172,7 @@
           <p:cNvPr id="24" name="">
             <a:extLst xmlns:a="http://schemas.openxmlformats.org/drawingml/2006/main">
               <a:ext uri="{FF2B5EF4-FFF2-40B4-BE49-F238E27FC236}">
-                <a16:creationId xmlns:a16="http://schemas.microsoft.com/office/drawing/2014/main" id="{550B1BC8-27B0-406F-BA8D-99C5074E0573}"/>
+                <a16:creationId xmlns:a16="http://schemas.microsoft.com/office/drawing/2014/main" id="{EB1C58D7-F5E3-457D-B183-57C736F36513}"/>
               </a:ext>
             </a:extLst>
           </p:cNvPr>
@@ -4224,7 +4224,7 @@
           <p:cNvPr id="25" name="">
             <a:extLst xmlns:a="http://schemas.openxmlformats.org/drawingml/2006/main">
               <a:ext uri="{FF2B5EF4-FFF2-40B4-BE49-F238E27FC236}">
-                <a16:creationId xmlns:a16="http://schemas.microsoft.com/office/drawing/2014/main" id="{EE92CDF6-535C-44FF-AADF-F63FD672057C}"/>
+                <a16:creationId xmlns:a16="http://schemas.microsoft.com/office/drawing/2014/main" id="{D85C89FF-2E1A-4F37-B44A-15C877ECD323}"/>
               </a:ext>
             </a:extLst>
           </p:cNvPr>
@@ -4255,7 +4255,7 @@
           <p:cNvPr id="26" name="">
             <a:extLst xmlns:a="http://schemas.openxmlformats.org/drawingml/2006/main">
               <a:ext uri="{FF2B5EF4-FFF2-40B4-BE49-F238E27FC236}">
-                <a16:creationId xmlns:a16="http://schemas.microsoft.com/office/drawing/2014/main" id="{AE3FEB35-282D-4D2A-990B-B02D6CBFA756}"/>
+                <a16:creationId xmlns:a16="http://schemas.microsoft.com/office/drawing/2014/main" id="{3456E161-0C07-4444-B8EC-E440536A51D6}"/>
               </a:ext>
             </a:extLst>
           </p:cNvPr>
@@ -4307,7 +4307,7 @@
           <p:cNvPr id="27" name="">
             <a:extLst xmlns:a="http://schemas.openxmlformats.org/drawingml/2006/main">
               <a:ext uri="{FF2B5EF4-FFF2-40B4-BE49-F238E27FC236}">
-                <a16:creationId xmlns:a16="http://schemas.microsoft.com/office/drawing/2014/main" id="{0215C588-8B37-4E66-BFBE-D7C475B08D00}"/>
+                <a16:creationId xmlns:a16="http://schemas.microsoft.com/office/drawing/2014/main" id="{8CAE3821-E93B-4FE5-AD1E-C41E51C382F2}"/>
               </a:ext>
             </a:extLst>
           </p:cNvPr>
@@ -4359,7 +4359,7 @@
           <p:cNvPr id="28" name="">
             <a:extLst xmlns:a="http://schemas.openxmlformats.org/drawingml/2006/main">
               <a:ext uri="{FF2B5EF4-FFF2-40B4-BE49-F238E27FC236}">
-                <a16:creationId xmlns:a16="http://schemas.microsoft.com/office/drawing/2014/main" id="{7081D35E-346C-42F4-A5EE-9EADEF3B186B}"/>
+                <a16:creationId xmlns:a16="http://schemas.microsoft.com/office/drawing/2014/main" id="{97D34E0F-DD54-46C1-8E1E-A03F40E42926}"/>
               </a:ext>
             </a:extLst>
           </p:cNvPr>
@@ -4411,7 +4411,7 @@
           <p:cNvPr id="29" name="">
             <a:extLst xmlns:a="http://schemas.openxmlformats.org/drawingml/2006/main">
               <a:ext uri="{FF2B5EF4-FFF2-40B4-BE49-F238E27FC236}">
-                <a16:creationId xmlns:a16="http://schemas.microsoft.com/office/drawing/2014/main" id="{5D8FCDB6-75D7-4A34-B2B8-0021D2EAD8B8}"/>
+                <a16:creationId xmlns:a16="http://schemas.microsoft.com/office/drawing/2014/main" id="{8EF24C5B-0738-4C4D-BB3D-61CC7E0CED1B}"/>
               </a:ext>
             </a:extLst>
           </p:cNvPr>
@@ -4463,7 +4463,7 @@
           <p:cNvPr id="30" name="">
             <a:extLst xmlns:a="http://schemas.openxmlformats.org/drawingml/2006/main">
               <a:ext uri="{FF2B5EF4-FFF2-40B4-BE49-F238E27FC236}">
-                <a16:creationId xmlns:a16="http://schemas.microsoft.com/office/drawing/2014/main" id="{7BA84F9B-C1F0-4721-99DA-19BB2DE963B8}"/>
+                <a16:creationId xmlns:a16="http://schemas.microsoft.com/office/drawing/2014/main" id="{87DF1274-FD38-4506-A290-5524A41D7710}"/>
               </a:ext>
             </a:extLst>
           </p:cNvPr>
@@ -4515,7 +4515,7 @@
           <p:cNvPr id="31" name="">
             <a:extLst xmlns:a="http://schemas.openxmlformats.org/drawingml/2006/main">
               <a:ext uri="{FF2B5EF4-FFF2-40B4-BE49-F238E27FC236}">
-                <a16:creationId xmlns:a16="http://schemas.microsoft.com/office/drawing/2014/main" id="{AF988955-8EFE-4B96-8ECB-1A21F882F875}"/>
+                <a16:creationId xmlns:a16="http://schemas.microsoft.com/office/drawing/2014/main" id="{4B540E13-67B2-4F3C-A9BD-B4B086D9E74D}"/>
               </a:ext>
             </a:extLst>
           </p:cNvPr>
@@ -4546,7 +4546,7 @@
           <p:cNvPr id="32" name="">
             <a:extLst xmlns:a="http://schemas.openxmlformats.org/drawingml/2006/main">
               <a:ext uri="{FF2B5EF4-FFF2-40B4-BE49-F238E27FC236}">
-                <a16:creationId xmlns:a16="http://schemas.microsoft.com/office/drawing/2014/main" id="{DF7571D8-1A5E-4230-8405-660BE7956018}"/>
+                <a16:creationId xmlns:a16="http://schemas.microsoft.com/office/drawing/2014/main" id="{E20535AE-25BA-4E43-8A41-60872779CBD4}"/>
               </a:ext>
             </a:extLst>
           </p:cNvPr>
@@ -4577,7 +4577,7 @@
           <p:cNvPr id="33" name="">
             <a:extLst xmlns:a="http://schemas.openxmlformats.org/drawingml/2006/main">
               <a:ext uri="{FF2B5EF4-FFF2-40B4-BE49-F238E27FC236}">
-                <a16:creationId xmlns:a16="http://schemas.microsoft.com/office/drawing/2014/main" id="{9695A491-041B-486C-B09F-B39605AB9219}"/>
+                <a16:creationId xmlns:a16="http://schemas.microsoft.com/office/drawing/2014/main" id="{68C5F187-72C8-48EB-A213-BA9F9EA52821}"/>
               </a:ext>
             </a:extLst>
           </p:cNvPr>
@@ -4629,7 +4629,7 @@
           <p:cNvPr id="34" name="">
             <a:extLst xmlns:a="http://schemas.openxmlformats.org/drawingml/2006/main">
               <a:ext uri="{FF2B5EF4-FFF2-40B4-BE49-F238E27FC236}">
-                <a16:creationId xmlns:a16="http://schemas.microsoft.com/office/drawing/2014/main" id="{FE4A5202-52D5-4985-8243-A532864C094E}"/>
+                <a16:creationId xmlns:a16="http://schemas.microsoft.com/office/drawing/2014/main" id="{040D8986-1484-41CB-A849-29CD025DB2D2}"/>
               </a:ext>
             </a:extLst>
           </p:cNvPr>
@@ -4681,7 +4681,7 @@
           <p:cNvPr id="35" name="">
             <a:extLst xmlns:a="http://schemas.openxmlformats.org/drawingml/2006/main">
               <a:ext uri="{FF2B5EF4-FFF2-40B4-BE49-F238E27FC236}">
-                <a16:creationId xmlns:a16="http://schemas.microsoft.com/office/drawing/2014/main" id="{706DB3C0-A91A-462A-B735-06F1B27E7CBA}"/>
+                <a16:creationId xmlns:a16="http://schemas.microsoft.com/office/drawing/2014/main" id="{3F4DC263-7EFE-4BFA-81A3-87ED04D351D9}"/>
               </a:ext>
             </a:extLst>
           </p:cNvPr>
@@ -4733,7 +4733,7 @@
           <p:cNvPr id="36" name="">
             <a:extLst xmlns:a="http://schemas.openxmlformats.org/drawingml/2006/main">
               <a:ext uri="{FF2B5EF4-FFF2-40B4-BE49-F238E27FC236}">
-                <a16:creationId xmlns:a16="http://schemas.microsoft.com/office/drawing/2014/main" id="{DF9AA116-DB24-4052-ABC7-F027382D7C0B}"/>
+                <a16:creationId xmlns:a16="http://schemas.microsoft.com/office/drawing/2014/main" id="{58A82221-F546-4992-8502-45AAE4792E0C}"/>
               </a:ext>
             </a:extLst>
           </p:cNvPr>
@@ -4785,7 +4785,7 @@
           <p:cNvPr id="37" name="">
             <a:extLst xmlns:a="http://schemas.openxmlformats.org/drawingml/2006/main">
               <a:ext uri="{FF2B5EF4-FFF2-40B4-BE49-F238E27FC236}">
-                <a16:creationId xmlns:a16="http://schemas.microsoft.com/office/drawing/2014/main" id="{196B3243-C259-4D9B-A3E5-976C09409EC0}"/>
+                <a16:creationId xmlns:a16="http://schemas.microsoft.com/office/drawing/2014/main" id="{C5CF036C-FCDB-440E-BBA9-AFCDBCBC55D3}"/>
               </a:ext>
             </a:extLst>
           </p:cNvPr>
@@ -4837,7 +4837,7 @@
           <p:cNvPr id="38" name="">
             <a:extLst xmlns:a="http://schemas.openxmlformats.org/drawingml/2006/main">
               <a:ext uri="{FF2B5EF4-FFF2-40B4-BE49-F238E27FC236}">
-                <a16:creationId xmlns:a16="http://schemas.microsoft.com/office/drawing/2014/main" id="{6AC8A50B-833C-43F7-96C0-5DB53DC5AAFD}"/>
+                <a16:creationId xmlns:a16="http://schemas.microsoft.com/office/drawing/2014/main" id="{572B6CD0-F909-464B-86E3-C6BB9BD5EFF8}"/>
               </a:ext>
             </a:extLst>
           </p:cNvPr>
@@ -4868,7 +4868,7 @@
           <p:cNvPr id="39" name="">
             <a:extLst xmlns:a="http://schemas.openxmlformats.org/drawingml/2006/main">
               <a:ext uri="{FF2B5EF4-FFF2-40B4-BE49-F238E27FC236}">
-                <a16:creationId xmlns:a16="http://schemas.microsoft.com/office/drawing/2014/main" id="{724086B1-B196-4A6F-AC1B-89386E75B148}"/>
+                <a16:creationId xmlns:a16="http://schemas.microsoft.com/office/drawing/2014/main" id="{11470BBE-3143-435A-BED5-0FF610E50A3A}"/>
               </a:ext>
             </a:extLst>
           </p:cNvPr>
@@ -4920,7 +4920,7 @@
           <p:cNvPr id="40" name="">
             <a:extLst xmlns:a="http://schemas.openxmlformats.org/drawingml/2006/main">
               <a:ext uri="{FF2B5EF4-FFF2-40B4-BE49-F238E27FC236}">
-                <a16:creationId xmlns:a16="http://schemas.microsoft.com/office/drawing/2014/main" id="{42164F18-D455-4383-BC1B-3379CDBF2FCC}"/>
+                <a16:creationId xmlns:a16="http://schemas.microsoft.com/office/drawing/2014/main" id="{59C94725-05D6-4698-B777-BC7479C3B87A}"/>
               </a:ext>
             </a:extLst>
           </p:cNvPr>
@@ -4972,7 +4972,7 @@
           <p:cNvPr id="41" name="">
             <a:extLst xmlns:a="http://schemas.openxmlformats.org/drawingml/2006/main">
               <a:ext uri="{FF2B5EF4-FFF2-40B4-BE49-F238E27FC236}">
-                <a16:creationId xmlns:a16="http://schemas.microsoft.com/office/drawing/2014/main" id="{0B5E1856-2BCB-461F-B68D-AD0AA7B4A3DC}"/>
+                <a16:creationId xmlns:a16="http://schemas.microsoft.com/office/drawing/2014/main" id="{A642F093-2B77-40D0-804D-FC69AFABE62E}"/>
               </a:ext>
             </a:extLst>
           </p:cNvPr>
@@ -5024,7 +5024,7 @@
           <p:cNvPr id="42" name="">
             <a:extLst xmlns:a="http://schemas.openxmlformats.org/drawingml/2006/main">
               <a:ext uri="{FF2B5EF4-FFF2-40B4-BE49-F238E27FC236}">
-                <a16:creationId xmlns:a16="http://schemas.microsoft.com/office/drawing/2014/main" id="{266A4897-F836-41AF-AEDA-E1611C55F035}"/>
+                <a16:creationId xmlns:a16="http://schemas.microsoft.com/office/drawing/2014/main" id="{D1C75EEF-AE06-4523-955F-91F77EADFD86}"/>
               </a:ext>
             </a:extLst>
           </p:cNvPr>
@@ -5076,7 +5076,7 @@
           <p:cNvPr id="43" name="">
             <a:extLst xmlns:a="http://schemas.openxmlformats.org/drawingml/2006/main">
               <a:ext uri="{FF2B5EF4-FFF2-40B4-BE49-F238E27FC236}">
-                <a16:creationId xmlns:a16="http://schemas.microsoft.com/office/drawing/2014/main" id="{71AB16D7-F3DD-4F7D-9FF9-3C28CA7B1113}"/>
+                <a16:creationId xmlns:a16="http://schemas.microsoft.com/office/drawing/2014/main" id="{2F91B538-43B2-44F5-A399-DF14F5179D1E}"/>
               </a:ext>
             </a:extLst>
           </p:cNvPr>
@@ -5128,7 +5128,7 @@
           <p:cNvPr id="44" name="">
             <a:extLst xmlns:a="http://schemas.openxmlformats.org/drawingml/2006/main">
               <a:ext uri="{FF2B5EF4-FFF2-40B4-BE49-F238E27FC236}">
-                <a16:creationId xmlns:a16="http://schemas.microsoft.com/office/drawing/2014/main" id="{57E56FFE-EE13-49F4-9ED9-1D7400D39C29}"/>
+                <a16:creationId xmlns:a16="http://schemas.microsoft.com/office/drawing/2014/main" id="{62C1CC38-6125-4EE0-AC42-200BBEC82FF5}"/>
               </a:ext>
             </a:extLst>
           </p:cNvPr>
@@ -5159,7 +5159,7 @@
           <p:cNvPr id="45" name="">
             <a:extLst xmlns:a="http://schemas.openxmlformats.org/drawingml/2006/main">
               <a:ext uri="{FF2B5EF4-FFF2-40B4-BE49-F238E27FC236}">
-                <a16:creationId xmlns:a16="http://schemas.microsoft.com/office/drawing/2014/main" id="{49BD4518-9E77-4A53-B770-AD9ECAF129FC}"/>
+                <a16:creationId xmlns:a16="http://schemas.microsoft.com/office/drawing/2014/main" id="{7D3FF496-04F2-4810-83DD-E00FB0E5CF7E}"/>
               </a:ext>
             </a:extLst>
           </p:cNvPr>
@@ -5190,7 +5190,7 @@
           <p:cNvPr id="46" name="">
             <a:extLst xmlns:a="http://schemas.openxmlformats.org/drawingml/2006/main">
               <a:ext uri="{FF2B5EF4-FFF2-40B4-BE49-F238E27FC236}">
-                <a16:creationId xmlns:a16="http://schemas.microsoft.com/office/drawing/2014/main" id="{9DBB2C0B-ECB3-4EBF-B9CE-E72A912FBBEA}"/>
+                <a16:creationId xmlns:a16="http://schemas.microsoft.com/office/drawing/2014/main" id="{C74F1284-D1EB-41D1-A36E-C30E85B66150}"/>
               </a:ext>
             </a:extLst>
           </p:cNvPr>
@@ -5242,7 +5242,7 @@
           <p:cNvPr id="47" name="">
             <a:extLst xmlns:a="http://schemas.openxmlformats.org/drawingml/2006/main">
               <a:ext uri="{FF2B5EF4-FFF2-40B4-BE49-F238E27FC236}">
-                <a16:creationId xmlns:a16="http://schemas.microsoft.com/office/drawing/2014/main" id="{B3710CAB-CA23-4F65-B064-FDE18C2B087D}"/>
+                <a16:creationId xmlns:a16="http://schemas.microsoft.com/office/drawing/2014/main" id="{936F1B3A-6EDB-4E8D-B1FA-871C9587464E}"/>
               </a:ext>
             </a:extLst>
           </p:cNvPr>
@@ -5294,7 +5294,7 @@
           <p:cNvPr id="48" name="">
             <a:extLst xmlns:a="http://schemas.openxmlformats.org/drawingml/2006/main">
               <a:ext uri="{FF2B5EF4-FFF2-40B4-BE49-F238E27FC236}">
-                <a16:creationId xmlns:a16="http://schemas.microsoft.com/office/drawing/2014/main" id="{602C70F7-EDB6-43E8-8C8B-90AA506F2627}"/>
+                <a16:creationId xmlns:a16="http://schemas.microsoft.com/office/drawing/2014/main" id="{CD71FCE2-694C-42F2-ACA7-B160CD373AB3}"/>
               </a:ext>
             </a:extLst>
           </p:cNvPr>
@@ -5346,7 +5346,7 @@
           <p:cNvPr id="49" name="">
             <a:extLst xmlns:a="http://schemas.openxmlformats.org/drawingml/2006/main">
               <a:ext uri="{FF2B5EF4-FFF2-40B4-BE49-F238E27FC236}">
-                <a16:creationId xmlns:a16="http://schemas.microsoft.com/office/drawing/2014/main" id="{746EF3B2-B176-4258-922B-A0514EF325B8}"/>
+                <a16:creationId xmlns:a16="http://schemas.microsoft.com/office/drawing/2014/main" id="{C658661E-1B63-43D3-A250-31AF31F6ABB4}"/>
               </a:ext>
             </a:extLst>
           </p:cNvPr>
@@ -5398,7 +5398,7 @@
           <p:cNvPr id="50" name="">
             <a:extLst xmlns:a="http://schemas.openxmlformats.org/drawingml/2006/main">
               <a:ext uri="{FF2B5EF4-FFF2-40B4-BE49-F238E27FC236}">
-                <a16:creationId xmlns:a16="http://schemas.microsoft.com/office/drawing/2014/main" id="{0F19B711-12EF-4366-93F9-914EB4D5FA9D}"/>
+                <a16:creationId xmlns:a16="http://schemas.microsoft.com/office/drawing/2014/main" id="{E3ECEE7B-55B9-4045-A71D-DAE3046BE7DC}"/>
               </a:ext>
             </a:extLst>
           </p:cNvPr>
@@ -5450,7 +5450,7 @@
           <p:cNvPr id="51" name="">
             <a:extLst xmlns:a="http://schemas.openxmlformats.org/drawingml/2006/main">
               <a:ext uri="{FF2B5EF4-FFF2-40B4-BE49-F238E27FC236}">
-                <a16:creationId xmlns:a16="http://schemas.microsoft.com/office/drawing/2014/main" id="{F5C8E02D-83C3-4BA9-ABCA-E1A69DC81BDA}"/>
+                <a16:creationId xmlns:a16="http://schemas.microsoft.com/office/drawing/2014/main" id="{DD61B26E-D7F9-45F3-9C0F-68D0E6223D4B}"/>
               </a:ext>
             </a:extLst>
           </p:cNvPr>
@@ -5481,7 +5481,7 @@
           <p:cNvPr id="52" name="">
             <a:extLst xmlns:a="http://schemas.openxmlformats.org/drawingml/2006/main">
               <a:ext uri="{FF2B5EF4-FFF2-40B4-BE49-F238E27FC236}">
-                <a16:creationId xmlns:a16="http://schemas.microsoft.com/office/drawing/2014/main" id="{4A9EBF02-1352-4925-8C6C-11D983B533F5}"/>
+                <a16:creationId xmlns:a16="http://schemas.microsoft.com/office/drawing/2014/main" id="{4CBF919A-D1EB-43D8-8622-CCA9666BBABF}"/>
               </a:ext>
             </a:extLst>
           </p:cNvPr>
@@ -5533,7 +5533,7 @@
           <p:cNvPr id="53" name="">
             <a:extLst xmlns:a="http://schemas.openxmlformats.org/drawingml/2006/main">
               <a:ext uri="{FF2B5EF4-FFF2-40B4-BE49-F238E27FC236}">
-                <a16:creationId xmlns:a16="http://schemas.microsoft.com/office/drawing/2014/main" id="{76F1D0DD-966C-4958-9011-50014C86EB91}"/>
+                <a16:creationId xmlns:a16="http://schemas.microsoft.com/office/drawing/2014/main" id="{171920FA-9801-4DC0-B12E-B4CAC0E4C314}"/>
               </a:ext>
             </a:extLst>
           </p:cNvPr>
@@ -5585,7 +5585,7 @@
           <p:cNvPr id="54" name="">
             <a:extLst xmlns:a="http://schemas.openxmlformats.org/drawingml/2006/main">
               <a:ext uri="{FF2B5EF4-FFF2-40B4-BE49-F238E27FC236}">
-                <a16:creationId xmlns:a16="http://schemas.microsoft.com/office/drawing/2014/main" id="{232BA724-3D3A-4B55-B8ED-F3A8E0CEC0BE}"/>
+                <a16:creationId xmlns:a16="http://schemas.microsoft.com/office/drawing/2014/main" id="{035C43F5-6E8B-4987-AEBF-007A3BC30924}"/>
               </a:ext>
             </a:extLst>
           </p:cNvPr>
@@ -5637,7 +5637,7 @@
           <p:cNvPr id="55" name="">
             <a:extLst xmlns:a="http://schemas.openxmlformats.org/drawingml/2006/main">
               <a:ext uri="{FF2B5EF4-FFF2-40B4-BE49-F238E27FC236}">
-                <a16:creationId xmlns:a16="http://schemas.microsoft.com/office/drawing/2014/main" id="{6A3795D7-EC93-4FB8-9EC8-2AB55DF351A7}"/>
+                <a16:creationId xmlns:a16="http://schemas.microsoft.com/office/drawing/2014/main" id="{A5AF1CAC-030D-4AF7-9797-73BB9DA1388D}"/>
               </a:ext>
             </a:extLst>
           </p:cNvPr>
@@ -5689,7 +5689,7 @@
           <p:cNvPr id="56" name="">
             <a:extLst xmlns:a="http://schemas.openxmlformats.org/drawingml/2006/main">
               <a:ext uri="{FF2B5EF4-FFF2-40B4-BE49-F238E27FC236}">
-                <a16:creationId xmlns:a16="http://schemas.microsoft.com/office/drawing/2014/main" id="{FD13308D-2A47-493B-A114-43D76205B0A8}"/>
+                <a16:creationId xmlns:a16="http://schemas.microsoft.com/office/drawing/2014/main" id="{04BC9ACB-CE4E-4043-90B8-293943F3955C}"/>
               </a:ext>
             </a:extLst>
           </p:cNvPr>
@@ -5741,7 +5741,7 @@
           <p:cNvPr id="57" name="">
             <a:extLst xmlns:a="http://schemas.openxmlformats.org/drawingml/2006/main">
               <a:ext uri="{FF2B5EF4-FFF2-40B4-BE49-F238E27FC236}">
-                <a16:creationId xmlns:a16="http://schemas.microsoft.com/office/drawing/2014/main" id="{019D775A-DCAA-4891-B41B-5B0AF3D3FA61}"/>
+                <a16:creationId xmlns:a16="http://schemas.microsoft.com/office/drawing/2014/main" id="{E5FCA25F-A004-432D-88CE-AE3C854AF79C}"/>
               </a:ext>
             </a:extLst>
           </p:cNvPr>
@@ -5772,7 +5772,7 @@
           <p:cNvPr id="58" name="">
             <a:extLst xmlns:a="http://schemas.openxmlformats.org/drawingml/2006/main">
               <a:ext uri="{FF2B5EF4-FFF2-40B4-BE49-F238E27FC236}">
-                <a16:creationId xmlns:a16="http://schemas.microsoft.com/office/drawing/2014/main" id="{96E180D5-13A7-42B3-A9C4-23C46AFBC628}"/>
+                <a16:creationId xmlns:a16="http://schemas.microsoft.com/office/drawing/2014/main" id="{16F1ECDF-A283-43D0-B633-2554AFF38C4C}"/>
               </a:ext>
             </a:extLst>
           </p:cNvPr>
@@ -5803,7 +5803,7 @@
           <p:cNvPr id="59" name="">
             <a:extLst xmlns:a="http://schemas.openxmlformats.org/drawingml/2006/main">
               <a:ext uri="{FF2B5EF4-FFF2-40B4-BE49-F238E27FC236}">
-                <a16:creationId xmlns:a16="http://schemas.microsoft.com/office/drawing/2014/main" id="{93CF9D08-EB39-4379-BE12-6D19FD89175C}"/>
+                <a16:creationId xmlns:a16="http://schemas.microsoft.com/office/drawing/2014/main" id="{217A978F-7F06-430C-85D9-5DD0705BD09C}"/>
               </a:ext>
             </a:extLst>
           </p:cNvPr>
@@ -5855,7 +5855,7 @@
           <p:cNvPr id="60" name="">
             <a:extLst xmlns:a="http://schemas.openxmlformats.org/drawingml/2006/main">
               <a:ext uri="{FF2B5EF4-FFF2-40B4-BE49-F238E27FC236}">
-                <a16:creationId xmlns:a16="http://schemas.microsoft.com/office/drawing/2014/main" id="{5558F446-D475-4E4B-9C8E-F2B650CEE2DF}"/>
+                <a16:creationId xmlns:a16="http://schemas.microsoft.com/office/drawing/2014/main" id="{7F36FB5F-1109-45A0-986E-CBD0B6CE3232}"/>
               </a:ext>
             </a:extLst>
           </p:cNvPr>
@@ -5907,7 +5907,7 @@
           <p:cNvPr id="61" name="">
             <a:extLst xmlns:a="http://schemas.openxmlformats.org/drawingml/2006/main">
               <a:ext uri="{FF2B5EF4-FFF2-40B4-BE49-F238E27FC236}">
-                <a16:creationId xmlns:a16="http://schemas.microsoft.com/office/drawing/2014/main" id="{48EBC543-49A1-474B-92D2-9AE568D6729D}"/>
+                <a16:creationId xmlns:a16="http://schemas.microsoft.com/office/drawing/2014/main" id="{B3988BC5-E62A-47DB-ACDA-8F05DE824B08}"/>
               </a:ext>
             </a:extLst>
           </p:cNvPr>
@@ -5959,7 +5959,7 @@
           <p:cNvPr id="62" name="">
             <a:extLst xmlns:a="http://schemas.openxmlformats.org/drawingml/2006/main">
               <a:ext uri="{FF2B5EF4-FFF2-40B4-BE49-F238E27FC236}">
-                <a16:creationId xmlns:a16="http://schemas.microsoft.com/office/drawing/2014/main" id="{8F7244C8-1B21-4EFC-BF85-A430D9AD00F6}"/>
+                <a16:creationId xmlns:a16="http://schemas.microsoft.com/office/drawing/2014/main" id="{D8556A91-6541-4CFC-B391-45C6563C1CD3}"/>
               </a:ext>
             </a:extLst>
           </p:cNvPr>
@@ -6011,7 +6011,7 @@
           <p:cNvPr id="63" name="">
             <a:extLst xmlns:a="http://schemas.openxmlformats.org/drawingml/2006/main">
               <a:ext uri="{FF2B5EF4-FFF2-40B4-BE49-F238E27FC236}">
-                <a16:creationId xmlns:a16="http://schemas.microsoft.com/office/drawing/2014/main" id="{F014E173-390D-4A6B-B366-63DC3A9355D3}"/>
+                <a16:creationId xmlns:a16="http://schemas.microsoft.com/office/drawing/2014/main" id="{F0220B50-1D49-4396-8325-E1FABA8E91CB}"/>
               </a:ext>
             </a:extLst>
           </p:cNvPr>
@@ -6063,7 +6063,7 @@
           <p:cNvPr id="64" name="">
             <a:extLst xmlns:a="http://schemas.openxmlformats.org/drawingml/2006/main">
               <a:ext uri="{FF2B5EF4-FFF2-40B4-BE49-F238E27FC236}">
-                <a16:creationId xmlns:a16="http://schemas.microsoft.com/office/drawing/2014/main" id="{55086FAD-4A2B-4EC3-9F71-FCE21E93639F}"/>
+                <a16:creationId xmlns:a16="http://schemas.microsoft.com/office/drawing/2014/main" id="{00819852-9E95-47D5-B49B-6E41D69ABE59}"/>
               </a:ext>
             </a:extLst>
           </p:cNvPr>
@@ -6094,7 +6094,7 @@
           <p:cNvPr id="65" name="">
             <a:extLst xmlns:a="http://schemas.openxmlformats.org/drawingml/2006/main">
               <a:ext uri="{FF2B5EF4-FFF2-40B4-BE49-F238E27FC236}">
-                <a16:creationId xmlns:a16="http://schemas.microsoft.com/office/drawing/2014/main" id="{904B0541-163F-4E72-8A01-BC5759838643}"/>
+                <a16:creationId xmlns:a16="http://schemas.microsoft.com/office/drawing/2014/main" id="{7718CD62-1D89-4CF4-8BFC-AB4D6D3B6EB2}"/>
               </a:ext>
             </a:extLst>
           </p:cNvPr>
@@ -6146,7 +6146,7 @@
           <p:cNvPr id="66" name="">
             <a:extLst xmlns:a="http://schemas.openxmlformats.org/drawingml/2006/main">
               <a:ext uri="{FF2B5EF4-FFF2-40B4-BE49-F238E27FC236}">
-                <a16:creationId xmlns:a16="http://schemas.microsoft.com/office/drawing/2014/main" id="{A1B79429-6F69-4531-B2E7-3A155B91D3E4}"/>
+                <a16:creationId xmlns:a16="http://schemas.microsoft.com/office/drawing/2014/main" id="{5BF2FA55-D10F-4973-9DF6-9735B580B07A}"/>
               </a:ext>
             </a:extLst>
           </p:cNvPr>
@@ -6198,7 +6198,7 @@
           <p:cNvPr id="67" name="">
             <a:extLst xmlns:a="http://schemas.openxmlformats.org/drawingml/2006/main">
               <a:ext uri="{FF2B5EF4-FFF2-40B4-BE49-F238E27FC236}">
-                <a16:creationId xmlns:a16="http://schemas.microsoft.com/office/drawing/2014/main" id="{5142B68E-9E51-48DA-9355-65486FB58185}"/>
+                <a16:creationId xmlns:a16="http://schemas.microsoft.com/office/drawing/2014/main" id="{2D2F5474-2FA3-4DD9-BBC4-C018DD29B88F}"/>
               </a:ext>
             </a:extLst>
           </p:cNvPr>
@@ -6250,7 +6250,7 @@
           <p:cNvPr id="68" name="">
             <a:extLst xmlns:a="http://schemas.openxmlformats.org/drawingml/2006/main">
               <a:ext uri="{FF2B5EF4-FFF2-40B4-BE49-F238E27FC236}">
-                <a16:creationId xmlns:a16="http://schemas.microsoft.com/office/drawing/2014/main" id="{D235087C-D7EF-4068-AF8B-46EBDDB2D764}"/>
+                <a16:creationId xmlns:a16="http://schemas.microsoft.com/office/drawing/2014/main" id="{A534A64F-12F2-4649-AFD2-6485198D34BE}"/>
               </a:ext>
             </a:extLst>
           </p:cNvPr>
@@ -6302,7 +6302,7 @@
           <p:cNvPr id="69" name="">
             <a:extLst xmlns:a="http://schemas.openxmlformats.org/drawingml/2006/main">
               <a:ext uri="{FF2B5EF4-FFF2-40B4-BE49-F238E27FC236}">
-                <a16:creationId xmlns:a16="http://schemas.microsoft.com/office/drawing/2014/main" id="{C5680F09-C7EB-4926-BCD9-BBC2970929F3}"/>
+                <a16:creationId xmlns:a16="http://schemas.microsoft.com/office/drawing/2014/main" id="{969DB2A0-583E-42E2-8DBE-B6B4D8977406}"/>
               </a:ext>
             </a:extLst>
           </p:cNvPr>
@@ -6354,7 +6354,7 @@
           <p:cNvPr id="70" name="">
             <a:extLst xmlns:a="http://schemas.openxmlformats.org/drawingml/2006/main">
               <a:ext uri="{FF2B5EF4-FFF2-40B4-BE49-F238E27FC236}">
-                <a16:creationId xmlns:a16="http://schemas.microsoft.com/office/drawing/2014/main" id="{611C9CD3-E5A9-429F-AA96-01009545946E}"/>
+                <a16:creationId xmlns:a16="http://schemas.microsoft.com/office/drawing/2014/main" id="{287BB2A6-0C65-47E1-92E1-6C8E41D3CAD6}"/>
               </a:ext>
             </a:extLst>
           </p:cNvPr>
@@ -6385,7 +6385,7 @@
           <p:cNvPr id="71" name="">
             <a:extLst xmlns:a="http://schemas.openxmlformats.org/drawingml/2006/main">
               <a:ext uri="{FF2B5EF4-FFF2-40B4-BE49-F238E27FC236}">
-                <a16:creationId xmlns:a16="http://schemas.microsoft.com/office/drawing/2014/main" id="{4D86B3DB-6402-41D3-8593-E2923366FB66}"/>
+                <a16:creationId xmlns:a16="http://schemas.microsoft.com/office/drawing/2014/main" id="{393A45A3-2C6F-4EDB-AD85-0F8FBB2E4FB6}"/>
               </a:ext>
             </a:extLst>
           </p:cNvPr>
@@ -6416,7 +6416,7 @@
           <p:cNvPr id="72" name="">
             <a:extLst xmlns:a="http://schemas.openxmlformats.org/drawingml/2006/main">
               <a:ext uri="{FF2B5EF4-FFF2-40B4-BE49-F238E27FC236}">
-                <a16:creationId xmlns:a16="http://schemas.microsoft.com/office/drawing/2014/main" id="{2578A5ED-C972-4A88-9C3D-2BD526E5A20B}"/>
+                <a16:creationId xmlns:a16="http://schemas.microsoft.com/office/drawing/2014/main" id="{3078CD9A-23E5-4A9E-9C2C-591BFCB208DD}"/>
               </a:ext>
             </a:extLst>
           </p:cNvPr>
@@ -6468,7 +6468,7 @@
           <p:cNvPr id="73" name="">
             <a:extLst xmlns:a="http://schemas.openxmlformats.org/drawingml/2006/main">
               <a:ext uri="{FF2B5EF4-FFF2-40B4-BE49-F238E27FC236}">
-                <a16:creationId xmlns:a16="http://schemas.microsoft.com/office/drawing/2014/main" id="{D461C8A9-8DF7-46B0-A825-84DFC078AEC6}"/>
+                <a16:creationId xmlns:a16="http://schemas.microsoft.com/office/drawing/2014/main" id="{E44668D4-2616-4DDB-B4D7-63B0FACD7378}"/>
               </a:ext>
             </a:extLst>
           </p:cNvPr>
@@ -6520,7 +6520,7 @@
           <p:cNvPr id="74" name="">
             <a:extLst xmlns:a="http://schemas.openxmlformats.org/drawingml/2006/main">
               <a:ext uri="{FF2B5EF4-FFF2-40B4-BE49-F238E27FC236}">
-                <a16:creationId xmlns:a16="http://schemas.microsoft.com/office/drawing/2014/main" id="{D335E68F-3236-4E17-A84D-FF74DAD9EF5E}"/>
+                <a16:creationId xmlns:a16="http://schemas.microsoft.com/office/drawing/2014/main" id="{50A22B1F-0E64-4E6F-A757-C196C8F856E9}"/>
               </a:ext>
             </a:extLst>
           </p:cNvPr>
@@ -6572,7 +6572,7 @@
           <p:cNvPr id="75" name="">
             <a:extLst xmlns:a="http://schemas.openxmlformats.org/drawingml/2006/main">
               <a:ext uri="{FF2B5EF4-FFF2-40B4-BE49-F238E27FC236}">
-                <a16:creationId xmlns:a16="http://schemas.microsoft.com/office/drawing/2014/main" id="{0E616F7D-7F2B-4383-B3CA-024C056A6CDA}"/>
+                <a16:creationId xmlns:a16="http://schemas.microsoft.com/office/drawing/2014/main" id="{CDA2E95F-2DD8-4497-8352-1EDCA50979DC}"/>
               </a:ext>
             </a:extLst>
           </p:cNvPr>
@@ -6624,7 +6624,7 @@
           <p:cNvPr id="76" name="">
             <a:extLst xmlns:a="http://schemas.openxmlformats.org/drawingml/2006/main">
               <a:ext uri="{FF2B5EF4-FFF2-40B4-BE49-F238E27FC236}">
-                <a16:creationId xmlns:a16="http://schemas.microsoft.com/office/drawing/2014/main" id="{F9748436-3FA0-4240-B1A2-3D1F033AB765}"/>
+                <a16:creationId xmlns:a16="http://schemas.microsoft.com/office/drawing/2014/main" id="{75E45887-1C4F-4B4E-97EA-93A98973D965}"/>
               </a:ext>
             </a:extLst>
           </p:cNvPr>
@@ -6676,7 +6676,7 @@
           <p:cNvPr id="77" name="">
             <a:extLst xmlns:a="http://schemas.openxmlformats.org/drawingml/2006/main">
               <a:ext uri="{FF2B5EF4-FFF2-40B4-BE49-F238E27FC236}">
-                <a16:creationId xmlns:a16="http://schemas.microsoft.com/office/drawing/2014/main" id="{C4057B36-3CF3-4904-8CA3-37210553EF25}"/>
+                <a16:creationId xmlns:a16="http://schemas.microsoft.com/office/drawing/2014/main" id="{CA5F1DD2-746F-46CF-B651-1EEDF956B5BD}"/>
               </a:ext>
             </a:extLst>
           </p:cNvPr>
@@ -6707,7 +6707,7 @@
           <p:cNvPr id="78" name="">
             <a:extLst xmlns:a="http://schemas.openxmlformats.org/drawingml/2006/main">
               <a:ext uri="{FF2B5EF4-FFF2-40B4-BE49-F238E27FC236}">
-                <a16:creationId xmlns:a16="http://schemas.microsoft.com/office/drawing/2014/main" id="{204EA2D3-B948-438B-A0DF-AF5C608F228B}"/>
+                <a16:creationId xmlns:a16="http://schemas.microsoft.com/office/drawing/2014/main" id="{D4E6CAF6-E702-4A31-9E7F-8C9AF1C050EF}"/>
               </a:ext>
             </a:extLst>
           </p:cNvPr>
@@ -6759,7 +6759,7 @@
           <p:cNvPr id="79" name="">
             <a:extLst xmlns:a="http://schemas.openxmlformats.org/drawingml/2006/main">
               <a:ext uri="{FF2B5EF4-FFF2-40B4-BE49-F238E27FC236}">
-                <a16:creationId xmlns:a16="http://schemas.microsoft.com/office/drawing/2014/main" id="{D2048530-17B8-4894-84FB-FF45CA42BFD2}"/>
+                <a16:creationId xmlns:a16="http://schemas.microsoft.com/office/drawing/2014/main" id="{CF7830D1-EFED-4F62-9983-1175C742073F}"/>
               </a:ext>
             </a:extLst>
           </p:cNvPr>
@@ -6811,7 +6811,7 @@
           <p:cNvPr id="80" name="">
             <a:extLst xmlns:a="http://schemas.openxmlformats.org/drawingml/2006/main">
               <a:ext uri="{FF2B5EF4-FFF2-40B4-BE49-F238E27FC236}">
-                <a16:creationId xmlns:a16="http://schemas.microsoft.com/office/drawing/2014/main" id="{30CB4990-ABF0-49EB-9631-32AD9A3449A3}"/>
+                <a16:creationId xmlns:a16="http://schemas.microsoft.com/office/drawing/2014/main" id="{9CCC2043-3DB2-4703-880B-EB24D0118189}"/>
               </a:ext>
             </a:extLst>
           </p:cNvPr>
@@ -6863,7 +6863,7 @@
           <p:cNvPr id="81" name="">
             <a:extLst xmlns:a="http://schemas.openxmlformats.org/drawingml/2006/main">
               <a:ext uri="{FF2B5EF4-FFF2-40B4-BE49-F238E27FC236}">
-                <a16:creationId xmlns:a16="http://schemas.microsoft.com/office/drawing/2014/main" id="{36497F82-8576-4278-B80D-48C8FEB8A40C}"/>
+                <a16:creationId xmlns:a16="http://schemas.microsoft.com/office/drawing/2014/main" id="{18E4DBE5-76AC-4F2C-B158-D29AFB5DA592}"/>
               </a:ext>
             </a:extLst>
           </p:cNvPr>
@@ -6915,7 +6915,7 @@
           <p:cNvPr id="82" name="">
             <a:extLst xmlns:a="http://schemas.openxmlformats.org/drawingml/2006/main">
               <a:ext uri="{FF2B5EF4-FFF2-40B4-BE49-F238E27FC236}">
-                <a16:creationId xmlns:a16="http://schemas.microsoft.com/office/drawing/2014/main" id="{DF8903A2-2BA3-429B-B947-7870818FE8C3}"/>
+                <a16:creationId xmlns:a16="http://schemas.microsoft.com/office/drawing/2014/main" id="{C332E3EF-93B5-4F10-8A92-4D6DCD08B812}"/>
               </a:ext>
             </a:extLst>
           </p:cNvPr>
@@ -6967,7 +6967,7 @@
           <p:cNvPr id="83" name="">
             <a:extLst xmlns:a="http://schemas.openxmlformats.org/drawingml/2006/main">
               <a:ext uri="{FF2B5EF4-FFF2-40B4-BE49-F238E27FC236}">
-                <a16:creationId xmlns:a16="http://schemas.microsoft.com/office/drawing/2014/main" id="{DF1EF742-3C11-4FBC-9F91-D0985CB99584}"/>
+                <a16:creationId xmlns:a16="http://schemas.microsoft.com/office/drawing/2014/main" id="{32DB58B0-2F10-4BB4-8CC2-DA6F19098EE9}"/>
               </a:ext>
             </a:extLst>
           </p:cNvPr>
@@ -6998,7 +6998,7 @@
           <p:cNvPr id="84" name="">
             <a:extLst xmlns:a="http://schemas.openxmlformats.org/drawingml/2006/main">
               <a:ext uri="{FF2B5EF4-FFF2-40B4-BE49-F238E27FC236}">
-                <a16:creationId xmlns:a16="http://schemas.microsoft.com/office/drawing/2014/main" id="{D6EA2E12-CC57-499F-81AE-C3DB40FCF203}"/>
+                <a16:creationId xmlns:a16="http://schemas.microsoft.com/office/drawing/2014/main" id="{55D81B9B-5A6A-4B14-ACD3-DE719643C9C0}"/>
               </a:ext>
             </a:extLst>
           </p:cNvPr>
@@ -7029,7 +7029,7 @@
           <p:cNvPr id="85" name="">
             <a:extLst xmlns:a="http://schemas.openxmlformats.org/drawingml/2006/main">
               <a:ext uri="{FF2B5EF4-FFF2-40B4-BE49-F238E27FC236}">
-                <a16:creationId xmlns:a16="http://schemas.microsoft.com/office/drawing/2014/main" id="{F4B60AD6-5F4E-448E-9F8C-B89819037751}"/>
+                <a16:creationId xmlns:a16="http://schemas.microsoft.com/office/drawing/2014/main" id="{09022E30-B9E2-4999-A12F-EE916C7647DF}"/>
               </a:ext>
             </a:extLst>
           </p:cNvPr>
@@ -7081,7 +7081,7 @@
           <p:cNvPr id="86" name="">
             <a:extLst xmlns:a="http://schemas.openxmlformats.org/drawingml/2006/main">
               <a:ext uri="{FF2B5EF4-FFF2-40B4-BE49-F238E27FC236}">
-                <a16:creationId xmlns:a16="http://schemas.microsoft.com/office/drawing/2014/main" id="{9F802ACA-1946-4A18-B920-977F1AA1C8F0}"/>
+                <a16:creationId xmlns:a16="http://schemas.microsoft.com/office/drawing/2014/main" id="{C5954B6B-A532-4033-8340-3582C7638B7C}"/>
               </a:ext>
             </a:extLst>
           </p:cNvPr>
@@ -7133,7 +7133,7 @@
           <p:cNvPr id="87" name="">
             <a:extLst xmlns:a="http://schemas.openxmlformats.org/drawingml/2006/main">
               <a:ext uri="{FF2B5EF4-FFF2-40B4-BE49-F238E27FC236}">
-                <a16:creationId xmlns:a16="http://schemas.microsoft.com/office/drawing/2014/main" id="{701BBBB3-F3E1-4C6C-A565-B5DA93F188B1}"/>
+                <a16:creationId xmlns:a16="http://schemas.microsoft.com/office/drawing/2014/main" id="{EA971C9E-B935-47A1-BE8E-C74A8BF9DDE4}"/>
               </a:ext>
             </a:extLst>
           </p:cNvPr>
@@ -7185,7 +7185,7 @@
           <p:cNvPr id="88" name="">
             <a:extLst xmlns:a="http://schemas.openxmlformats.org/drawingml/2006/main">
               <a:ext uri="{FF2B5EF4-FFF2-40B4-BE49-F238E27FC236}">
-                <a16:creationId xmlns:a16="http://schemas.microsoft.com/office/drawing/2014/main" id="{797DEAA6-1725-466A-B663-46C16148B550}"/>
+                <a16:creationId xmlns:a16="http://schemas.microsoft.com/office/drawing/2014/main" id="{59DE5506-A1A4-4D76-8E44-E7FA59019D9C}"/>
               </a:ext>
             </a:extLst>
           </p:cNvPr>
@@ -7237,7 +7237,7 @@
           <p:cNvPr id="89" name="">
             <a:extLst xmlns:a="http://schemas.openxmlformats.org/drawingml/2006/main">
               <a:ext uri="{FF2B5EF4-FFF2-40B4-BE49-F238E27FC236}">
-                <a16:creationId xmlns:a16="http://schemas.microsoft.com/office/drawing/2014/main" id="{B24D7FED-738E-4F95-8F42-C5BEFECAC475}"/>
+                <a16:creationId xmlns:a16="http://schemas.microsoft.com/office/drawing/2014/main" id="{D8C0EDA6-71CB-4F6C-B7FE-87710C5EFBCB}"/>
               </a:ext>
             </a:extLst>
           </p:cNvPr>
@@ -7289,7 +7289,7 @@
           <p:cNvPr id="90" name="">
             <a:extLst xmlns:a="http://schemas.openxmlformats.org/drawingml/2006/main">
               <a:ext uri="{FF2B5EF4-FFF2-40B4-BE49-F238E27FC236}">
-                <a16:creationId xmlns:a16="http://schemas.microsoft.com/office/drawing/2014/main" id="{7C905F3F-B140-4411-B26C-18264D44C329}"/>
+                <a16:creationId xmlns:a16="http://schemas.microsoft.com/office/drawing/2014/main" id="{7D6D731A-1C64-4D3E-9EA6-FBD7A50538E6}"/>
               </a:ext>
             </a:extLst>
           </p:cNvPr>
@@ -7320,7 +7320,7 @@
           <p:cNvPr id="91" name="">
             <a:extLst xmlns:a="http://schemas.openxmlformats.org/drawingml/2006/main">
               <a:ext uri="{FF2B5EF4-FFF2-40B4-BE49-F238E27FC236}">
-                <a16:creationId xmlns:a16="http://schemas.microsoft.com/office/drawing/2014/main" id="{454C648E-25A5-45C6-8E5D-FAD4F0AEDB29}"/>
+                <a16:creationId xmlns:a16="http://schemas.microsoft.com/office/drawing/2014/main" id="{C30EDF76-B345-4571-B340-2E4FAFA964C3}"/>
               </a:ext>
             </a:extLst>
           </p:cNvPr>
@@ -7372,7 +7372,7 @@
           <p:cNvPr id="92" name="">
             <a:extLst xmlns:a="http://schemas.openxmlformats.org/drawingml/2006/main">
               <a:ext uri="{FF2B5EF4-FFF2-40B4-BE49-F238E27FC236}">
-                <a16:creationId xmlns:a16="http://schemas.microsoft.com/office/drawing/2014/main" id="{2E2DA0FD-16B5-403C-99D4-32BD8F0F0857}"/>
+                <a16:creationId xmlns:a16="http://schemas.microsoft.com/office/drawing/2014/main" id="{54B6A2B4-9E82-4496-8DF4-754188718F07}"/>
               </a:ext>
             </a:extLst>
           </p:cNvPr>
@@ -7424,7 +7424,7 @@
           <p:cNvPr id="93" name="">
             <a:extLst xmlns:a="http://schemas.openxmlformats.org/drawingml/2006/main">
               <a:ext uri="{FF2B5EF4-FFF2-40B4-BE49-F238E27FC236}">
-                <a16:creationId xmlns:a16="http://schemas.microsoft.com/office/drawing/2014/main" id="{74976D6B-F4B0-4BD1-9693-8C9A44634824}"/>
+                <a16:creationId xmlns:a16="http://schemas.microsoft.com/office/drawing/2014/main" id="{2096CC48-465A-44E9-9F1D-4B8086109BFA}"/>
               </a:ext>
             </a:extLst>
           </p:cNvPr>
@@ -7476,7 +7476,7 @@
           <p:cNvPr id="94" name="">
             <a:extLst xmlns:a="http://schemas.openxmlformats.org/drawingml/2006/main">
               <a:ext uri="{FF2B5EF4-FFF2-40B4-BE49-F238E27FC236}">
-                <a16:creationId xmlns:a16="http://schemas.microsoft.com/office/drawing/2014/main" id="{1476FE0D-6459-41C2-87E2-7131FF046974}"/>
+                <a16:creationId xmlns:a16="http://schemas.microsoft.com/office/drawing/2014/main" id="{EE10E9C8-3506-41FB-9BE4-4B96269917F1}"/>
               </a:ext>
             </a:extLst>
           </p:cNvPr>
@@ -7528,7 +7528,7 @@
           <p:cNvPr id="95" name="">
             <a:extLst xmlns:a="http://schemas.openxmlformats.org/drawingml/2006/main">
               <a:ext uri="{FF2B5EF4-FFF2-40B4-BE49-F238E27FC236}">
-                <a16:creationId xmlns:a16="http://schemas.microsoft.com/office/drawing/2014/main" id="{7D769038-5C4B-4098-ABF4-A6B011D65777}"/>
+                <a16:creationId xmlns:a16="http://schemas.microsoft.com/office/drawing/2014/main" id="{72F22FE9-C197-4118-8403-79948E943C6D}"/>
               </a:ext>
             </a:extLst>
           </p:cNvPr>
@@ -7580,7 +7580,7 @@
           <p:cNvPr id="96" name="">
             <a:extLst xmlns:a="http://schemas.openxmlformats.org/drawingml/2006/main">
               <a:ext uri="{FF2B5EF4-FFF2-40B4-BE49-F238E27FC236}">
-                <a16:creationId xmlns:a16="http://schemas.microsoft.com/office/drawing/2014/main" id="{1CDDF303-99EC-4508-86DA-B3B2FDA6C647}"/>
+                <a16:creationId xmlns:a16="http://schemas.microsoft.com/office/drawing/2014/main" id="{A177F899-8BB3-4AEC-87C8-6AD0EF23AE06}"/>
               </a:ext>
             </a:extLst>
           </p:cNvPr>
@@ -7611,7 +7611,7 @@
           <p:cNvPr id="97" name="">
             <a:extLst xmlns:a="http://schemas.openxmlformats.org/drawingml/2006/main">
               <a:ext uri="{FF2B5EF4-FFF2-40B4-BE49-F238E27FC236}">
-                <a16:creationId xmlns:a16="http://schemas.microsoft.com/office/drawing/2014/main" id="{A4DA2DCC-E6BA-4152-88D4-4B94D804769F}"/>
+                <a16:creationId xmlns:a16="http://schemas.microsoft.com/office/drawing/2014/main" id="{B0BEB9AC-6819-4152-A13F-7ADDBF6990B9}"/>
               </a:ext>
             </a:extLst>
           </p:cNvPr>
@@ -7642,7 +7642,7 @@
           <p:cNvPr id="98" name="">
             <a:extLst xmlns:a="http://schemas.openxmlformats.org/drawingml/2006/main">
               <a:ext uri="{FF2B5EF4-FFF2-40B4-BE49-F238E27FC236}">
-                <a16:creationId xmlns:a16="http://schemas.microsoft.com/office/drawing/2014/main" id="{66809615-7266-4132-881D-FAD5A33A27B8}"/>
+                <a16:creationId xmlns:a16="http://schemas.microsoft.com/office/drawing/2014/main" id="{50EF6F9E-DF2C-41C2-B775-BE6267AEC75C}"/>
               </a:ext>
             </a:extLst>
           </p:cNvPr>
@@ -7694,7 +7694,7 @@
           <p:cNvPr id="99" name="">
             <a:extLst xmlns:a="http://schemas.openxmlformats.org/drawingml/2006/main">
               <a:ext uri="{FF2B5EF4-FFF2-40B4-BE49-F238E27FC236}">
-                <a16:creationId xmlns:a16="http://schemas.microsoft.com/office/drawing/2014/main" id="{207B30A2-C95D-4BF3-B0EA-FA3DACE659FB}"/>
+                <a16:creationId xmlns:a16="http://schemas.microsoft.com/office/drawing/2014/main" id="{6FB22646-A7E5-4288-878C-ABB25BD2B1D2}"/>
               </a:ext>
             </a:extLst>
           </p:cNvPr>
@@ -7746,7 +7746,7 @@
           <p:cNvPr id="100" name="">
             <a:extLst xmlns:a="http://schemas.openxmlformats.org/drawingml/2006/main">
               <a:ext uri="{FF2B5EF4-FFF2-40B4-BE49-F238E27FC236}">
-                <a16:creationId xmlns:a16="http://schemas.microsoft.com/office/drawing/2014/main" id="{77E75033-F189-4902-9DAE-DE980278715B}"/>
+                <a16:creationId xmlns:a16="http://schemas.microsoft.com/office/drawing/2014/main" id="{80559FA1-DAA2-4EF7-B432-66CCDE3546CD}"/>
               </a:ext>
             </a:extLst>
           </p:cNvPr>
@@ -7798,7 +7798,7 @@
           <p:cNvPr id="101" name="">
             <a:extLst xmlns:a="http://schemas.openxmlformats.org/drawingml/2006/main">
               <a:ext uri="{FF2B5EF4-FFF2-40B4-BE49-F238E27FC236}">
-                <a16:creationId xmlns:a16="http://schemas.microsoft.com/office/drawing/2014/main" id="{95FC5606-7496-4BF6-A538-2537F6DCAC8F}"/>
+                <a16:creationId xmlns:a16="http://schemas.microsoft.com/office/drawing/2014/main" id="{FF04389D-900E-4C44-9BF2-D7CD7669EB5E}"/>
               </a:ext>
             </a:extLst>
           </p:cNvPr>
@@ -7850,7 +7850,7 @@
           <p:cNvPr id="102" name="">
             <a:extLst xmlns:a="http://schemas.openxmlformats.org/drawingml/2006/main">
               <a:ext uri="{FF2B5EF4-FFF2-40B4-BE49-F238E27FC236}">
-                <a16:creationId xmlns:a16="http://schemas.microsoft.com/office/drawing/2014/main" id="{055B90E8-10E1-4543-8D2B-5586DA1B41D2}"/>
+                <a16:creationId xmlns:a16="http://schemas.microsoft.com/office/drawing/2014/main" id="{0198D58C-6679-4FBD-9337-DF14DB6C77C8}"/>
               </a:ext>
             </a:extLst>
           </p:cNvPr>
@@ -7900,7 +7900,7 @@
     </p:spTree>
     <p:extLst>
       <p:ext uri="{BB962C8B-B14F-4D97-AF65-F5344CB8AC3E}">
-        <p14:creationId xmlns:p14="http://schemas.microsoft.com/office/powerpoint/2010/main" val="710994751"/>
+        <p14:creationId xmlns:p14="http://schemas.microsoft.com/office/powerpoint/2010/main" val="944550391"/>
       </p:ext>
     </p:extLst>
   </p:cSld>
@@ -7931,7 +7931,7 @@
           <p:cNvPr id="98" name="">
             <a:extLst xmlns:a="http://schemas.openxmlformats.org/drawingml/2006/main">
               <a:ext uri="{FF2B5EF4-FFF2-40B4-BE49-F238E27FC236}">
-                <a16:creationId xmlns:a16="http://schemas.microsoft.com/office/drawing/2014/main" id="{E705CC11-9998-4A82-906F-E6CB1233A210}"/>
+                <a16:creationId xmlns:a16="http://schemas.microsoft.com/office/drawing/2014/main" id="{E08699C1-06C2-4C28-B2A4-9EEBDEFEE78B}"/>
               </a:ext>
             </a:extLst>
           </p:cNvPr>
@@ -7964,7 +7964,7 @@
           <p:cNvPr id="2" name="">
             <a:extLst xmlns:a="http://schemas.openxmlformats.org/drawingml/2006/main">
               <a:ext uri="{FF2B5EF4-FFF2-40B4-BE49-F238E27FC236}">
-                <a16:creationId xmlns:a16="http://schemas.microsoft.com/office/drawing/2014/main" id="{5A71D3CB-17ED-4FFD-9744-C2605F673C36}"/>
+                <a16:creationId xmlns:a16="http://schemas.microsoft.com/office/drawing/2014/main" id="{1CAF2BDC-FD39-4EFA-8FF6-DF981140C957}"/>
               </a:ext>
             </a:extLst>
           </p:cNvPr>
@@ -7995,7 +7995,7 @@
           <p:cNvPr id="3" name="">
             <a:extLst xmlns:a="http://schemas.openxmlformats.org/drawingml/2006/main">
               <a:ext uri="{FF2B5EF4-FFF2-40B4-BE49-F238E27FC236}">
-                <a16:creationId xmlns:a16="http://schemas.microsoft.com/office/drawing/2014/main" id="{93B70489-4B2A-4CE5-92B6-7A367F224D9D}"/>
+                <a16:creationId xmlns:a16="http://schemas.microsoft.com/office/drawing/2014/main" id="{8E290992-86F5-4207-B184-62C010399F3A}"/>
               </a:ext>
             </a:extLst>
           </p:cNvPr>
@@ -8047,7 +8047,7 @@
           <p:cNvPr id="4" name="">
             <a:extLst xmlns:a="http://schemas.openxmlformats.org/drawingml/2006/main">
               <a:ext uri="{FF2B5EF4-FFF2-40B4-BE49-F238E27FC236}">
-                <a16:creationId xmlns:a16="http://schemas.microsoft.com/office/drawing/2014/main" id="{F65B00DC-29E8-471B-8594-C7D88E9DAA16}"/>
+                <a16:creationId xmlns:a16="http://schemas.microsoft.com/office/drawing/2014/main" id="{236D49CB-E386-4C04-BE7C-A1E5EFB4D128}"/>
               </a:ext>
             </a:extLst>
           </p:cNvPr>
@@ -8099,7 +8099,7 @@
           <p:cNvPr id="5" name="">
             <a:extLst xmlns:a="http://schemas.openxmlformats.org/drawingml/2006/main">
               <a:ext uri="{FF2B5EF4-FFF2-40B4-BE49-F238E27FC236}">
-                <a16:creationId xmlns:a16="http://schemas.microsoft.com/office/drawing/2014/main" id="{FF0BCE36-D3D2-4CA0-BFB0-B6A33354D7F5}"/>
+                <a16:creationId xmlns:a16="http://schemas.microsoft.com/office/drawing/2014/main" id="{723333CB-FB05-4B16-AA1C-2F00898DEDD6}"/>
               </a:ext>
             </a:extLst>
           </p:cNvPr>
@@ -8134,7 +8134,7 @@
           <p:nvPr/>
         </p:nvPicPr>
         <p:blipFill>
-          <a:blip xmlns:r="http://schemas.openxmlformats.org/officeDocument/2006/relationships" xmlns:a="http://schemas.openxmlformats.org/drawingml/2006/main" r:embed="R0227ab2d77a74ac3"/>
+          <a:blip xmlns:r="http://schemas.openxmlformats.org/officeDocument/2006/relationships" xmlns:a="http://schemas.openxmlformats.org/drawingml/2006/main" r:embed="Rc082e6f2dff843f0"/>
           <a:stretch xmlns:a="http://schemas.openxmlformats.org/drawingml/2006/main"/>
         </p:blipFill>
         <p:spPr>
@@ -8152,7 +8152,7 @@
           <p:cNvPr id="7" name="">
             <a:extLst xmlns:a="http://schemas.openxmlformats.org/drawingml/2006/main">
               <a:ext uri="{FF2B5EF4-FFF2-40B4-BE49-F238E27FC236}">
-                <a16:creationId xmlns:a16="http://schemas.microsoft.com/office/drawing/2014/main" id="{B2B442E7-514A-4623-AE56-6D111E4161AB}"/>
+                <a16:creationId xmlns:a16="http://schemas.microsoft.com/office/drawing/2014/main" id="{FEBA04FF-E9AB-4865-A5D4-D822A609CC3A}"/>
               </a:ext>
             </a:extLst>
           </p:cNvPr>
@@ -8204,7 +8204,7 @@
           <p:cNvPr id="8" name="">
             <a:extLst xmlns:a="http://schemas.openxmlformats.org/drawingml/2006/main">
               <a:ext uri="{FF2B5EF4-FFF2-40B4-BE49-F238E27FC236}">
-                <a16:creationId xmlns:a16="http://schemas.microsoft.com/office/drawing/2014/main" id="{58AA77E0-2E95-4255-86F0-F75FA2B6958F}"/>
+                <a16:creationId xmlns:a16="http://schemas.microsoft.com/office/drawing/2014/main" id="{BA118372-39B7-47F0-8757-3C5D5BCCAAC8}"/>
               </a:ext>
             </a:extLst>
           </p:cNvPr>
@@ -8256,7 +8256,7 @@
           <p:cNvPr id="9" name="">
             <a:extLst xmlns:a="http://schemas.openxmlformats.org/drawingml/2006/main">
               <a:ext uri="{FF2B5EF4-FFF2-40B4-BE49-F238E27FC236}">
-                <a16:creationId xmlns:a16="http://schemas.microsoft.com/office/drawing/2014/main" id="{168A72DC-BFD9-4B55-BB1C-46049E3F8CC0}"/>
+                <a16:creationId xmlns:a16="http://schemas.microsoft.com/office/drawing/2014/main" id="{DADB8D9C-1AEF-431C-8CCA-EDF033379552}"/>
               </a:ext>
             </a:extLst>
           </p:cNvPr>
@@ -8308,7 +8308,7 @@
           <p:cNvPr id="10" name="">
             <a:extLst xmlns:a="http://schemas.openxmlformats.org/drawingml/2006/main">
               <a:ext uri="{FF2B5EF4-FFF2-40B4-BE49-F238E27FC236}">
-                <a16:creationId xmlns:a16="http://schemas.microsoft.com/office/drawing/2014/main" id="{AC17548D-798F-46EA-A44B-CED41FD710A4}"/>
+                <a16:creationId xmlns:a16="http://schemas.microsoft.com/office/drawing/2014/main" id="{F2C86EDB-7AF6-446C-AB09-1CDFE698922E}"/>
               </a:ext>
             </a:extLst>
           </p:cNvPr>
@@ -8360,7 +8360,7 @@
           <p:cNvPr id="11" name="">
             <a:extLst xmlns:a="http://schemas.openxmlformats.org/drawingml/2006/main">
               <a:ext uri="{FF2B5EF4-FFF2-40B4-BE49-F238E27FC236}">
-                <a16:creationId xmlns:a16="http://schemas.microsoft.com/office/drawing/2014/main" id="{BE8BD4A1-9F25-424B-A4F0-71F4DECDA21D}"/>
+                <a16:creationId xmlns:a16="http://schemas.microsoft.com/office/drawing/2014/main" id="{4F10633A-2149-4435-A7F7-F1E2C249E9F9}"/>
               </a:ext>
             </a:extLst>
           </p:cNvPr>
@@ -8391,7 +8391,7 @@
           <p:cNvPr id="12" name="">
             <a:extLst xmlns:a="http://schemas.openxmlformats.org/drawingml/2006/main">
               <a:ext uri="{FF2B5EF4-FFF2-40B4-BE49-F238E27FC236}">
-                <a16:creationId xmlns:a16="http://schemas.microsoft.com/office/drawing/2014/main" id="{8096FB0C-51F1-4AA0-A180-45E455A2D8AE}"/>
+                <a16:creationId xmlns:a16="http://schemas.microsoft.com/office/drawing/2014/main" id="{2615E25D-A33D-4069-9A2B-86C9861B99F7}"/>
               </a:ext>
             </a:extLst>
           </p:cNvPr>
@@ -8422,7 +8422,7 @@
           <p:cNvPr id="13" name="">
             <a:extLst xmlns:a="http://schemas.openxmlformats.org/drawingml/2006/main">
               <a:ext uri="{FF2B5EF4-FFF2-40B4-BE49-F238E27FC236}">
-                <a16:creationId xmlns:a16="http://schemas.microsoft.com/office/drawing/2014/main" id="{21E01B18-C7AD-4A76-9186-91A356FFEA7A}"/>
+                <a16:creationId xmlns:a16="http://schemas.microsoft.com/office/drawing/2014/main" id="{DCE68F39-9AB4-4B54-9635-76B45BEE7A96}"/>
               </a:ext>
             </a:extLst>
           </p:cNvPr>
@@ -8474,7 +8474,7 @@
           <p:cNvPr id="14" name="">
             <a:extLst xmlns:a="http://schemas.openxmlformats.org/drawingml/2006/main">
               <a:ext uri="{FF2B5EF4-FFF2-40B4-BE49-F238E27FC236}">
-                <a16:creationId xmlns:a16="http://schemas.microsoft.com/office/drawing/2014/main" id="{21E444A1-1ABF-4D4F-8801-3EE297385798}"/>
+                <a16:creationId xmlns:a16="http://schemas.microsoft.com/office/drawing/2014/main" id="{E6ED3806-BF00-4DE9-A236-E03F2A766CBB}"/>
               </a:ext>
             </a:extLst>
           </p:cNvPr>
@@ -8526,7 +8526,7 @@
           <p:cNvPr id="15" name="">
             <a:extLst xmlns:a="http://schemas.openxmlformats.org/drawingml/2006/main">
               <a:ext uri="{FF2B5EF4-FFF2-40B4-BE49-F238E27FC236}">
-                <a16:creationId xmlns:a16="http://schemas.microsoft.com/office/drawing/2014/main" id="{C7C87924-16BD-4EBD-A952-760635F870E8}"/>
+                <a16:creationId xmlns:a16="http://schemas.microsoft.com/office/drawing/2014/main" id="{8B28134E-F342-4A90-8622-22639B0D1E0D}"/>
               </a:ext>
             </a:extLst>
           </p:cNvPr>
@@ -8578,7 +8578,7 @@
           <p:cNvPr id="16" name="">
             <a:extLst xmlns:a="http://schemas.openxmlformats.org/drawingml/2006/main">
               <a:ext uri="{FF2B5EF4-FFF2-40B4-BE49-F238E27FC236}">
-                <a16:creationId xmlns:a16="http://schemas.microsoft.com/office/drawing/2014/main" id="{4AFF6BB6-88C1-4BE8-B8F5-65129F05E051}"/>
+                <a16:creationId xmlns:a16="http://schemas.microsoft.com/office/drawing/2014/main" id="{C6EFA528-7045-42B0-9617-FE6363A6ED31}"/>
               </a:ext>
             </a:extLst>
           </p:cNvPr>
@@ -8630,7 +8630,7 @@
           <p:cNvPr id="17" name="">
             <a:extLst xmlns:a="http://schemas.openxmlformats.org/drawingml/2006/main">
               <a:ext uri="{FF2B5EF4-FFF2-40B4-BE49-F238E27FC236}">
-                <a16:creationId xmlns:a16="http://schemas.microsoft.com/office/drawing/2014/main" id="{DD81EA64-7C00-469D-9112-6657AF9CAE6B}"/>
+                <a16:creationId xmlns:a16="http://schemas.microsoft.com/office/drawing/2014/main" id="{5685319F-C569-4283-A45F-841E6182C7C6}"/>
               </a:ext>
             </a:extLst>
           </p:cNvPr>
@@ -8682,7 +8682,7 @@
           <p:cNvPr id="18" name="">
             <a:extLst xmlns:a="http://schemas.openxmlformats.org/drawingml/2006/main">
               <a:ext uri="{FF2B5EF4-FFF2-40B4-BE49-F238E27FC236}">
-                <a16:creationId xmlns:a16="http://schemas.microsoft.com/office/drawing/2014/main" id="{351E1B9A-A398-44C8-BFCB-2267CF5B8FDF}"/>
+                <a16:creationId xmlns:a16="http://schemas.microsoft.com/office/drawing/2014/main" id="{46A13FBC-0FB1-4F99-9050-5716B9F8FEDD}"/>
               </a:ext>
             </a:extLst>
           </p:cNvPr>
@@ -8713,7 +8713,7 @@
           <p:cNvPr id="19" name="">
             <a:extLst xmlns:a="http://schemas.openxmlformats.org/drawingml/2006/main">
               <a:ext uri="{FF2B5EF4-FFF2-40B4-BE49-F238E27FC236}">
-                <a16:creationId xmlns:a16="http://schemas.microsoft.com/office/drawing/2014/main" id="{C42CA983-8F2F-4703-B75B-8CEA2C77F149}"/>
+                <a16:creationId xmlns:a16="http://schemas.microsoft.com/office/drawing/2014/main" id="{536A8644-93E3-4290-8EB6-B00885D25809}"/>
               </a:ext>
             </a:extLst>
           </p:cNvPr>
@@ -8765,7 +8765,7 @@
           <p:cNvPr id="20" name="">
             <a:extLst xmlns:a="http://schemas.openxmlformats.org/drawingml/2006/main">
               <a:ext uri="{FF2B5EF4-FFF2-40B4-BE49-F238E27FC236}">
-                <a16:creationId xmlns:a16="http://schemas.microsoft.com/office/drawing/2014/main" id="{0DB5F628-0DEC-456D-8E95-EE6A4B3C06B9}"/>
+                <a16:creationId xmlns:a16="http://schemas.microsoft.com/office/drawing/2014/main" id="{3EA6607F-484F-4F0E-9A3A-92DFCAB763DB}"/>
               </a:ext>
             </a:extLst>
           </p:cNvPr>
@@ -8817,7 +8817,7 @@
           <p:cNvPr id="21" name="">
             <a:extLst xmlns:a="http://schemas.openxmlformats.org/drawingml/2006/main">
               <a:ext uri="{FF2B5EF4-FFF2-40B4-BE49-F238E27FC236}">
-                <a16:creationId xmlns:a16="http://schemas.microsoft.com/office/drawing/2014/main" id="{7027F426-A942-4611-ABEF-C8F8A91760CC}"/>
+                <a16:creationId xmlns:a16="http://schemas.microsoft.com/office/drawing/2014/main" id="{BB72731A-EFC0-4B3B-99C4-7D5077E152B0}"/>
               </a:ext>
             </a:extLst>
           </p:cNvPr>
@@ -8869,7 +8869,7 @@
           <p:cNvPr id="22" name="">
             <a:extLst xmlns:a="http://schemas.openxmlformats.org/drawingml/2006/main">
               <a:ext uri="{FF2B5EF4-FFF2-40B4-BE49-F238E27FC236}">
-                <a16:creationId xmlns:a16="http://schemas.microsoft.com/office/drawing/2014/main" id="{7492DD55-85B7-4ADE-86C2-4E22657EB53D}"/>
+                <a16:creationId xmlns:a16="http://schemas.microsoft.com/office/drawing/2014/main" id="{D81C1A48-588F-422B-A1EF-3261F505E117}"/>
               </a:ext>
             </a:extLst>
           </p:cNvPr>
@@ -8921,7 +8921,7 @@
           <p:cNvPr id="23" name="">
             <a:extLst xmlns:a="http://schemas.openxmlformats.org/drawingml/2006/main">
               <a:ext uri="{FF2B5EF4-FFF2-40B4-BE49-F238E27FC236}">
-                <a16:creationId xmlns:a16="http://schemas.microsoft.com/office/drawing/2014/main" id="{87F7DAF2-A35E-4156-B2FE-4D2C6D96634C}"/>
+                <a16:creationId xmlns:a16="http://schemas.microsoft.com/office/drawing/2014/main" id="{1551315D-C209-4BC2-8E20-1567A2F1C986}"/>
               </a:ext>
             </a:extLst>
           </p:cNvPr>
@@ -8973,7 +8973,7 @@
           <p:cNvPr id="24" name="">
             <a:extLst xmlns:a="http://schemas.openxmlformats.org/drawingml/2006/main">
               <a:ext uri="{FF2B5EF4-FFF2-40B4-BE49-F238E27FC236}">
-                <a16:creationId xmlns:a16="http://schemas.microsoft.com/office/drawing/2014/main" id="{A510148C-A05B-4470-8257-E4FFEA3E4E44}"/>
+                <a16:creationId xmlns:a16="http://schemas.microsoft.com/office/drawing/2014/main" id="{364AAFE4-B140-4234-A475-05F12BE7CCD6}"/>
               </a:ext>
             </a:extLst>
           </p:cNvPr>
@@ -9004,7 +9004,7 @@
           <p:cNvPr id="25" name="">
             <a:extLst xmlns:a="http://schemas.openxmlformats.org/drawingml/2006/main">
               <a:ext uri="{FF2B5EF4-FFF2-40B4-BE49-F238E27FC236}">
-                <a16:creationId xmlns:a16="http://schemas.microsoft.com/office/drawing/2014/main" id="{9378BC8C-FB8D-4BE9-A745-670ECACF8DF6}"/>
+                <a16:creationId xmlns:a16="http://schemas.microsoft.com/office/drawing/2014/main" id="{5AFBCB79-570B-44C8-BC74-8237244E342E}"/>
               </a:ext>
             </a:extLst>
           </p:cNvPr>
@@ -9035,7 +9035,7 @@
           <p:cNvPr id="26" name="">
             <a:extLst xmlns:a="http://schemas.openxmlformats.org/drawingml/2006/main">
               <a:ext uri="{FF2B5EF4-FFF2-40B4-BE49-F238E27FC236}">
-                <a16:creationId xmlns:a16="http://schemas.microsoft.com/office/drawing/2014/main" id="{4AE28205-2D89-4E94-97B6-3C8795806283}"/>
+                <a16:creationId xmlns:a16="http://schemas.microsoft.com/office/drawing/2014/main" id="{ED608F9F-2CF6-4438-94DB-E4F9AC43139D}"/>
               </a:ext>
             </a:extLst>
           </p:cNvPr>
@@ -9087,7 +9087,7 @@
           <p:cNvPr id="27" name="">
             <a:extLst xmlns:a="http://schemas.openxmlformats.org/drawingml/2006/main">
               <a:ext uri="{FF2B5EF4-FFF2-40B4-BE49-F238E27FC236}">
-                <a16:creationId xmlns:a16="http://schemas.microsoft.com/office/drawing/2014/main" id="{D147C286-22A3-4ADC-9E33-625F5FF56D10}"/>
+                <a16:creationId xmlns:a16="http://schemas.microsoft.com/office/drawing/2014/main" id="{55DA2B01-B913-420A-BFE8-480984837C44}"/>
               </a:ext>
             </a:extLst>
           </p:cNvPr>
@@ -9139,7 +9139,7 @@
           <p:cNvPr id="28" name="">
             <a:extLst xmlns:a="http://schemas.openxmlformats.org/drawingml/2006/main">
               <a:ext uri="{FF2B5EF4-FFF2-40B4-BE49-F238E27FC236}">
-                <a16:creationId xmlns:a16="http://schemas.microsoft.com/office/drawing/2014/main" id="{72D44433-6429-4CC4-B8D5-640149D51716}"/>
+                <a16:creationId xmlns:a16="http://schemas.microsoft.com/office/drawing/2014/main" id="{5FE13E05-1EA3-4EB6-9FBD-D19098F28836}"/>
               </a:ext>
             </a:extLst>
           </p:cNvPr>
@@ -9191,7 +9191,7 @@
           <p:cNvPr id="29" name="">
             <a:extLst xmlns:a="http://schemas.openxmlformats.org/drawingml/2006/main">
               <a:ext uri="{FF2B5EF4-FFF2-40B4-BE49-F238E27FC236}">
-                <a16:creationId xmlns:a16="http://schemas.microsoft.com/office/drawing/2014/main" id="{4EC59681-D4FF-4237-B956-8BC4D77DB182}"/>
+                <a16:creationId xmlns:a16="http://schemas.microsoft.com/office/drawing/2014/main" id="{81565E3C-AE28-45A9-AF1F-BBF6ACCCEEAA}"/>
               </a:ext>
             </a:extLst>
           </p:cNvPr>
@@ -9243,7 +9243,7 @@
           <p:cNvPr id="30" name="">
             <a:extLst xmlns:a="http://schemas.openxmlformats.org/drawingml/2006/main">
               <a:ext uri="{FF2B5EF4-FFF2-40B4-BE49-F238E27FC236}">
-                <a16:creationId xmlns:a16="http://schemas.microsoft.com/office/drawing/2014/main" id="{356708D0-CB7D-4DEB-BF6A-C7F8B7E622F6}"/>
+                <a16:creationId xmlns:a16="http://schemas.microsoft.com/office/drawing/2014/main" id="{AB914A3B-0330-4A51-BAB1-B06DA13D2862}"/>
               </a:ext>
             </a:extLst>
           </p:cNvPr>
@@ -9295,7 +9295,7 @@
           <p:cNvPr id="31" name="">
             <a:extLst xmlns:a="http://schemas.openxmlformats.org/drawingml/2006/main">
               <a:ext uri="{FF2B5EF4-FFF2-40B4-BE49-F238E27FC236}">
-                <a16:creationId xmlns:a16="http://schemas.microsoft.com/office/drawing/2014/main" id="{8C5AE6EB-4A99-4907-BC23-8975079F4C58}"/>
+                <a16:creationId xmlns:a16="http://schemas.microsoft.com/office/drawing/2014/main" id="{DA9E0B2C-2959-4232-AF90-D370E8C9C805}"/>
               </a:ext>
             </a:extLst>
           </p:cNvPr>
@@ -9326,7 +9326,7 @@
           <p:cNvPr id="32" name="">
             <a:extLst xmlns:a="http://schemas.openxmlformats.org/drawingml/2006/main">
               <a:ext uri="{FF2B5EF4-FFF2-40B4-BE49-F238E27FC236}">
-                <a16:creationId xmlns:a16="http://schemas.microsoft.com/office/drawing/2014/main" id="{88568C70-1148-4DEA-871A-D9F80D86BF12}"/>
+                <a16:creationId xmlns:a16="http://schemas.microsoft.com/office/drawing/2014/main" id="{DD22160E-02EE-4D60-B6CC-63B833023EA7}"/>
               </a:ext>
             </a:extLst>
           </p:cNvPr>
@@ -9378,7 +9378,7 @@
           <p:cNvPr id="33" name="">
             <a:extLst xmlns:a="http://schemas.openxmlformats.org/drawingml/2006/main">
               <a:ext uri="{FF2B5EF4-FFF2-40B4-BE49-F238E27FC236}">
-                <a16:creationId xmlns:a16="http://schemas.microsoft.com/office/drawing/2014/main" id="{8996B374-7505-4A72-889C-45C9F6ED4FDB}"/>
+                <a16:creationId xmlns:a16="http://schemas.microsoft.com/office/drawing/2014/main" id="{76140993-4D3B-49DF-A6CB-06F64F82F300}"/>
               </a:ext>
             </a:extLst>
           </p:cNvPr>
@@ -9430,7 +9430,7 @@
           <p:cNvPr id="34" name="">
             <a:extLst xmlns:a="http://schemas.openxmlformats.org/drawingml/2006/main">
               <a:ext uri="{FF2B5EF4-FFF2-40B4-BE49-F238E27FC236}">
-                <a16:creationId xmlns:a16="http://schemas.microsoft.com/office/drawing/2014/main" id="{1A4F084D-86C5-4AFE-A0BF-61606F5BB7C1}"/>
+                <a16:creationId xmlns:a16="http://schemas.microsoft.com/office/drawing/2014/main" id="{6D1049E2-5D0E-4437-924E-963A00736C06}"/>
               </a:ext>
             </a:extLst>
           </p:cNvPr>
@@ -9482,7 +9482,7 @@
           <p:cNvPr id="35" name="">
             <a:extLst xmlns:a="http://schemas.openxmlformats.org/drawingml/2006/main">
               <a:ext uri="{FF2B5EF4-FFF2-40B4-BE49-F238E27FC236}">
-                <a16:creationId xmlns:a16="http://schemas.microsoft.com/office/drawing/2014/main" id="{150A728D-6D16-4D29-82FF-B31BE85665F3}"/>
+                <a16:creationId xmlns:a16="http://schemas.microsoft.com/office/drawing/2014/main" id="{37E2CC22-B68A-40CB-8DAD-9DC1FEA157CF}"/>
               </a:ext>
             </a:extLst>
           </p:cNvPr>
@@ -9534,7 +9534,7 @@
           <p:cNvPr id="36" name="">
             <a:extLst xmlns:a="http://schemas.openxmlformats.org/drawingml/2006/main">
               <a:ext uri="{FF2B5EF4-FFF2-40B4-BE49-F238E27FC236}">
-                <a16:creationId xmlns:a16="http://schemas.microsoft.com/office/drawing/2014/main" id="{3359AF84-F7ED-4D6D-97E5-4B9008433DDF}"/>
+                <a16:creationId xmlns:a16="http://schemas.microsoft.com/office/drawing/2014/main" id="{02924CA0-AA54-4351-9E35-AEC5A607C21A}"/>
               </a:ext>
             </a:extLst>
           </p:cNvPr>
@@ -9586,7 +9586,7 @@
           <p:cNvPr id="37" name="">
             <a:extLst xmlns:a="http://schemas.openxmlformats.org/drawingml/2006/main">
               <a:ext uri="{FF2B5EF4-FFF2-40B4-BE49-F238E27FC236}">
-                <a16:creationId xmlns:a16="http://schemas.microsoft.com/office/drawing/2014/main" id="{02B34C54-01E9-4F6F-BEB0-302F9AC6381C}"/>
+                <a16:creationId xmlns:a16="http://schemas.microsoft.com/office/drawing/2014/main" id="{6538A469-65DD-4FBC-8B3E-35C25DBE02FB}"/>
               </a:ext>
             </a:extLst>
           </p:cNvPr>
@@ -9617,7 +9617,7 @@
           <p:cNvPr id="38" name="">
             <a:extLst xmlns:a="http://schemas.openxmlformats.org/drawingml/2006/main">
               <a:ext uri="{FF2B5EF4-FFF2-40B4-BE49-F238E27FC236}">
-                <a16:creationId xmlns:a16="http://schemas.microsoft.com/office/drawing/2014/main" id="{B240226E-A599-43CE-82A0-55BD91F2BB9A}"/>
+                <a16:creationId xmlns:a16="http://schemas.microsoft.com/office/drawing/2014/main" id="{8FD47BDC-11E1-4910-971C-6567E7D4465E}"/>
               </a:ext>
             </a:extLst>
           </p:cNvPr>
@@ -9648,7 +9648,7 @@
           <p:cNvPr id="39" name="">
             <a:extLst xmlns:a="http://schemas.openxmlformats.org/drawingml/2006/main">
               <a:ext uri="{FF2B5EF4-FFF2-40B4-BE49-F238E27FC236}">
-                <a16:creationId xmlns:a16="http://schemas.microsoft.com/office/drawing/2014/main" id="{037553CF-C902-4B7A-B285-2162A4AED67B}"/>
+                <a16:creationId xmlns:a16="http://schemas.microsoft.com/office/drawing/2014/main" id="{5463D26E-6345-4F8E-ADEC-8075C193BC14}"/>
               </a:ext>
             </a:extLst>
           </p:cNvPr>
@@ -9700,7 +9700,7 @@
           <p:cNvPr id="40" name="">
             <a:extLst xmlns:a="http://schemas.openxmlformats.org/drawingml/2006/main">
               <a:ext uri="{FF2B5EF4-FFF2-40B4-BE49-F238E27FC236}">
-                <a16:creationId xmlns:a16="http://schemas.microsoft.com/office/drawing/2014/main" id="{47D9C8BF-B0D3-4A26-9CC8-B35D48599AC7}"/>
+                <a16:creationId xmlns:a16="http://schemas.microsoft.com/office/drawing/2014/main" id="{8251C046-842E-4525-8DAA-43178AB9D533}"/>
               </a:ext>
             </a:extLst>
           </p:cNvPr>
@@ -9752,7 +9752,7 @@
           <p:cNvPr id="41" name="">
             <a:extLst xmlns:a="http://schemas.openxmlformats.org/drawingml/2006/main">
               <a:ext uri="{FF2B5EF4-FFF2-40B4-BE49-F238E27FC236}">
-                <a16:creationId xmlns:a16="http://schemas.microsoft.com/office/drawing/2014/main" id="{AC79010B-0B4E-40AF-82CD-13FD51DEB488}"/>
+                <a16:creationId xmlns:a16="http://schemas.microsoft.com/office/drawing/2014/main" id="{7B463E0B-3ED1-4F69-B6D6-1E7F54857966}"/>
               </a:ext>
             </a:extLst>
           </p:cNvPr>
@@ -9804,7 +9804,7 @@
           <p:cNvPr id="42" name="">
             <a:extLst xmlns:a="http://schemas.openxmlformats.org/drawingml/2006/main">
               <a:ext uri="{FF2B5EF4-FFF2-40B4-BE49-F238E27FC236}">
-                <a16:creationId xmlns:a16="http://schemas.microsoft.com/office/drawing/2014/main" id="{3676E29D-1482-42F9-823C-F1F9CD5A19F8}"/>
+                <a16:creationId xmlns:a16="http://schemas.microsoft.com/office/drawing/2014/main" id="{2E4FB11E-CD99-4DB4-8FC5-BACF1A7F0736}"/>
               </a:ext>
             </a:extLst>
           </p:cNvPr>
@@ -9856,7 +9856,7 @@
           <p:cNvPr id="43" name="">
             <a:extLst xmlns:a="http://schemas.openxmlformats.org/drawingml/2006/main">
               <a:ext uri="{FF2B5EF4-FFF2-40B4-BE49-F238E27FC236}">
-                <a16:creationId xmlns:a16="http://schemas.microsoft.com/office/drawing/2014/main" id="{38F8BB19-B231-4D58-8759-2112D1C4BBD8}"/>
+                <a16:creationId xmlns:a16="http://schemas.microsoft.com/office/drawing/2014/main" id="{CFE90D75-AE41-4FB0-BF87-28FF5E9A775A}"/>
               </a:ext>
             </a:extLst>
           </p:cNvPr>
@@ -9908,7 +9908,7 @@
           <p:cNvPr id="44" name="">
             <a:extLst xmlns:a="http://schemas.openxmlformats.org/drawingml/2006/main">
               <a:ext uri="{FF2B5EF4-FFF2-40B4-BE49-F238E27FC236}">
-                <a16:creationId xmlns:a16="http://schemas.microsoft.com/office/drawing/2014/main" id="{16C5A2C4-B22C-4A42-BA49-408617768F34}"/>
+                <a16:creationId xmlns:a16="http://schemas.microsoft.com/office/drawing/2014/main" id="{03B2E316-2E2D-4806-AE35-B24E83E6E2CD}"/>
               </a:ext>
             </a:extLst>
           </p:cNvPr>
@@ -9939,7 +9939,7 @@
           <p:cNvPr id="45" name="">
             <a:extLst xmlns:a="http://schemas.openxmlformats.org/drawingml/2006/main">
               <a:ext uri="{FF2B5EF4-FFF2-40B4-BE49-F238E27FC236}">
-                <a16:creationId xmlns:a16="http://schemas.microsoft.com/office/drawing/2014/main" id="{DE265781-EB39-4CB5-8368-11CDCCD4873B}"/>
+                <a16:creationId xmlns:a16="http://schemas.microsoft.com/office/drawing/2014/main" id="{A1B7BC6F-D333-4681-8C7F-A7754B789457}"/>
               </a:ext>
             </a:extLst>
           </p:cNvPr>
@@ -9991,7 +9991,7 @@
           <p:cNvPr id="46" name="">
             <a:extLst xmlns:a="http://schemas.openxmlformats.org/drawingml/2006/main">
               <a:ext uri="{FF2B5EF4-FFF2-40B4-BE49-F238E27FC236}">
-                <a16:creationId xmlns:a16="http://schemas.microsoft.com/office/drawing/2014/main" id="{6C69C218-3F1F-4F83-BACF-2350A89FBF7B}"/>
+                <a16:creationId xmlns:a16="http://schemas.microsoft.com/office/drawing/2014/main" id="{BAA93A5F-80C7-4A74-B7CE-CFA51912898A}"/>
               </a:ext>
             </a:extLst>
           </p:cNvPr>
@@ -10043,7 +10043,7 @@
           <p:cNvPr id="47" name="">
             <a:extLst xmlns:a="http://schemas.openxmlformats.org/drawingml/2006/main">
               <a:ext uri="{FF2B5EF4-FFF2-40B4-BE49-F238E27FC236}">
-                <a16:creationId xmlns:a16="http://schemas.microsoft.com/office/drawing/2014/main" id="{B43ECD1B-761D-4507-B911-ECEE48C6B0C7}"/>
+                <a16:creationId xmlns:a16="http://schemas.microsoft.com/office/drawing/2014/main" id="{2277C789-E0A8-4A58-AD49-CE0091FC6812}"/>
               </a:ext>
             </a:extLst>
           </p:cNvPr>
@@ -10095,7 +10095,7 @@
           <p:cNvPr id="48" name="">
             <a:extLst xmlns:a="http://schemas.openxmlformats.org/drawingml/2006/main">
               <a:ext uri="{FF2B5EF4-FFF2-40B4-BE49-F238E27FC236}">
-                <a16:creationId xmlns:a16="http://schemas.microsoft.com/office/drawing/2014/main" id="{787F81C7-D02C-445B-8FBF-C595636A38CD}"/>
+                <a16:creationId xmlns:a16="http://schemas.microsoft.com/office/drawing/2014/main" id="{A372C746-2216-4AB3-B140-B73940D0EA75}"/>
               </a:ext>
             </a:extLst>
           </p:cNvPr>
@@ -10147,7 +10147,7 @@
           <p:cNvPr id="49" name="">
             <a:extLst xmlns:a="http://schemas.openxmlformats.org/drawingml/2006/main">
               <a:ext uri="{FF2B5EF4-FFF2-40B4-BE49-F238E27FC236}">
-                <a16:creationId xmlns:a16="http://schemas.microsoft.com/office/drawing/2014/main" id="{3FEFACA4-A2B8-4B24-8765-0FCC842BA9A1}"/>
+                <a16:creationId xmlns:a16="http://schemas.microsoft.com/office/drawing/2014/main" id="{8F3F8E79-BBD5-4677-B27D-569DF7CE9B0F}"/>
               </a:ext>
             </a:extLst>
           </p:cNvPr>
@@ -10199,7 +10199,7 @@
           <p:cNvPr id="50" name="">
             <a:extLst xmlns:a="http://schemas.openxmlformats.org/drawingml/2006/main">
               <a:ext uri="{FF2B5EF4-FFF2-40B4-BE49-F238E27FC236}">
-                <a16:creationId xmlns:a16="http://schemas.microsoft.com/office/drawing/2014/main" id="{F2EE1203-3C25-490D-965B-B7F1D124A79B}"/>
+                <a16:creationId xmlns:a16="http://schemas.microsoft.com/office/drawing/2014/main" id="{7EE6C189-DCA1-433C-9168-F8858385CC63}"/>
               </a:ext>
             </a:extLst>
           </p:cNvPr>
@@ -10251,7 +10251,7 @@
           <p:cNvPr id="51" name="">
             <a:extLst xmlns:a="http://schemas.openxmlformats.org/drawingml/2006/main">
               <a:ext uri="{FF2B5EF4-FFF2-40B4-BE49-F238E27FC236}">
-                <a16:creationId xmlns:a16="http://schemas.microsoft.com/office/drawing/2014/main" id="{2B74621B-6E26-411B-AD76-1BF8128C5B41}"/>
+                <a16:creationId xmlns:a16="http://schemas.microsoft.com/office/drawing/2014/main" id="{228A5EBB-C463-418A-89AE-C8C5B4825EB7}"/>
               </a:ext>
             </a:extLst>
           </p:cNvPr>
@@ -10282,7 +10282,7 @@
           <p:cNvPr id="52" name="">
             <a:extLst xmlns:a="http://schemas.openxmlformats.org/drawingml/2006/main">
               <a:ext uri="{FF2B5EF4-FFF2-40B4-BE49-F238E27FC236}">
-                <a16:creationId xmlns:a16="http://schemas.microsoft.com/office/drawing/2014/main" id="{64F8725B-9C5A-48C0-974D-DC7262FF99AA}"/>
+                <a16:creationId xmlns:a16="http://schemas.microsoft.com/office/drawing/2014/main" id="{92BAB5E9-DA7D-4BA1-9AC6-CF11C52B93AD}"/>
               </a:ext>
             </a:extLst>
           </p:cNvPr>
@@ -10313,7 +10313,7 @@
           <p:cNvPr id="53" name="">
             <a:extLst xmlns:a="http://schemas.openxmlformats.org/drawingml/2006/main">
               <a:ext uri="{FF2B5EF4-FFF2-40B4-BE49-F238E27FC236}">
-                <a16:creationId xmlns:a16="http://schemas.microsoft.com/office/drawing/2014/main" id="{6748BD2C-E5A0-4939-962C-B31AE89A8C9F}"/>
+                <a16:creationId xmlns:a16="http://schemas.microsoft.com/office/drawing/2014/main" id="{6AFE2295-51DB-442C-A8DD-CC4887BDD91E}"/>
               </a:ext>
             </a:extLst>
           </p:cNvPr>
@@ -10344,7 +10344,7 @@
           <p:cNvPr id="54" name="">
             <a:extLst xmlns:a="http://schemas.openxmlformats.org/drawingml/2006/main">
               <a:ext uri="{FF2B5EF4-FFF2-40B4-BE49-F238E27FC236}">
-                <a16:creationId xmlns:a16="http://schemas.microsoft.com/office/drawing/2014/main" id="{D4B0B84C-392D-4D1E-B930-48EDD13CBB85}"/>
+                <a16:creationId xmlns:a16="http://schemas.microsoft.com/office/drawing/2014/main" id="{4BBB2BC8-94BD-4895-BAD1-B175D8AD9409}"/>
               </a:ext>
             </a:extLst>
           </p:cNvPr>
@@ -10396,7 +10396,7 @@
           <p:cNvPr id="55" name="">
             <a:extLst xmlns:a="http://schemas.openxmlformats.org/drawingml/2006/main">
               <a:ext uri="{FF2B5EF4-FFF2-40B4-BE49-F238E27FC236}">
-                <a16:creationId xmlns:a16="http://schemas.microsoft.com/office/drawing/2014/main" id="{343C26CD-62BA-4103-AF9B-262AC719F19C}"/>
+                <a16:creationId xmlns:a16="http://schemas.microsoft.com/office/drawing/2014/main" id="{E6E71372-6204-48DD-8408-57D969803D33}"/>
               </a:ext>
             </a:extLst>
           </p:cNvPr>
@@ -10448,7 +10448,7 @@
           <p:cNvPr id="56" name="">
             <a:extLst xmlns:a="http://schemas.openxmlformats.org/drawingml/2006/main">
               <a:ext uri="{FF2B5EF4-FFF2-40B4-BE49-F238E27FC236}">
-                <a16:creationId xmlns:a16="http://schemas.microsoft.com/office/drawing/2014/main" id="{01F1D856-981D-4F4B-9BA0-574C7A75AC51}"/>
+                <a16:creationId xmlns:a16="http://schemas.microsoft.com/office/drawing/2014/main" id="{8BAB513C-737C-4422-9C05-E1D0C4DAE416}"/>
               </a:ext>
             </a:extLst>
           </p:cNvPr>
@@ -10500,7 +10500,7 @@
           <p:cNvPr id="57" name="">
             <a:extLst xmlns:a="http://schemas.openxmlformats.org/drawingml/2006/main">
               <a:ext uri="{FF2B5EF4-FFF2-40B4-BE49-F238E27FC236}">
-                <a16:creationId xmlns:a16="http://schemas.microsoft.com/office/drawing/2014/main" id="{AAB14FD2-E041-4426-86C5-47CEDC6A4980}"/>
+                <a16:creationId xmlns:a16="http://schemas.microsoft.com/office/drawing/2014/main" id="{836DF441-F1FE-4FB6-8B32-52C0B9CB3959}"/>
               </a:ext>
             </a:extLst>
           </p:cNvPr>
@@ -10552,7 +10552,7 @@
           <p:cNvPr id="58" name="">
             <a:extLst xmlns:a="http://schemas.openxmlformats.org/drawingml/2006/main">
               <a:ext uri="{FF2B5EF4-FFF2-40B4-BE49-F238E27FC236}">
-                <a16:creationId xmlns:a16="http://schemas.microsoft.com/office/drawing/2014/main" id="{0D082493-6A33-4B3B-B3E4-A5A1327EA2A3}"/>
+                <a16:creationId xmlns:a16="http://schemas.microsoft.com/office/drawing/2014/main" id="{5449C887-ED4E-45EE-B8F6-D9E5AC6BBF00}"/>
               </a:ext>
             </a:extLst>
           </p:cNvPr>
@@ -10604,7 +10604,7 @@
           <p:cNvPr id="59" name="">
             <a:extLst xmlns:a="http://schemas.openxmlformats.org/drawingml/2006/main">
               <a:ext uri="{FF2B5EF4-FFF2-40B4-BE49-F238E27FC236}">
-                <a16:creationId xmlns:a16="http://schemas.microsoft.com/office/drawing/2014/main" id="{2DFBDDA6-E839-4641-8346-47FB7DA8A74A}"/>
+                <a16:creationId xmlns:a16="http://schemas.microsoft.com/office/drawing/2014/main" id="{B1F2E26A-9216-42EB-8512-8D2C2FD1D009}"/>
               </a:ext>
             </a:extLst>
           </p:cNvPr>
@@ -10635,7 +10635,7 @@
           <p:cNvPr id="60" name="">
             <a:extLst xmlns:a="http://schemas.openxmlformats.org/drawingml/2006/main">
               <a:ext uri="{FF2B5EF4-FFF2-40B4-BE49-F238E27FC236}">
-                <a16:creationId xmlns:a16="http://schemas.microsoft.com/office/drawing/2014/main" id="{A83A4948-9093-4D21-9DBD-A02A70969D08}"/>
+                <a16:creationId xmlns:a16="http://schemas.microsoft.com/office/drawing/2014/main" id="{B917790E-66BD-435C-9664-D454F401665D}"/>
               </a:ext>
             </a:extLst>
           </p:cNvPr>
@@ -10687,7 +10687,7 @@
           <p:cNvPr id="61" name="">
             <a:extLst xmlns:a="http://schemas.openxmlformats.org/drawingml/2006/main">
               <a:ext uri="{FF2B5EF4-FFF2-40B4-BE49-F238E27FC236}">
-                <a16:creationId xmlns:a16="http://schemas.microsoft.com/office/drawing/2014/main" id="{2DE96F30-E218-4712-8ABD-66E7D5E07385}"/>
+                <a16:creationId xmlns:a16="http://schemas.microsoft.com/office/drawing/2014/main" id="{251B87BE-1AE5-43CB-AB42-51A711E5642A}"/>
               </a:ext>
             </a:extLst>
           </p:cNvPr>
@@ -10739,7 +10739,7 @@
           <p:cNvPr id="62" name="">
             <a:extLst xmlns:a="http://schemas.openxmlformats.org/drawingml/2006/main">
               <a:ext uri="{FF2B5EF4-FFF2-40B4-BE49-F238E27FC236}">
-                <a16:creationId xmlns:a16="http://schemas.microsoft.com/office/drawing/2014/main" id="{08C5430D-57A6-4B61-8274-BFC84A3C9C16}"/>
+                <a16:creationId xmlns:a16="http://schemas.microsoft.com/office/drawing/2014/main" id="{54410114-E7B2-4DC9-93A4-95FE978E749A}"/>
               </a:ext>
             </a:extLst>
           </p:cNvPr>
@@ -10791,7 +10791,7 @@
           <p:cNvPr id="63" name="">
             <a:extLst xmlns:a="http://schemas.openxmlformats.org/drawingml/2006/main">
               <a:ext uri="{FF2B5EF4-FFF2-40B4-BE49-F238E27FC236}">
-                <a16:creationId xmlns:a16="http://schemas.microsoft.com/office/drawing/2014/main" id="{217C9B5B-A5F6-4ED7-BEFE-107C67DE683A}"/>
+                <a16:creationId xmlns:a16="http://schemas.microsoft.com/office/drawing/2014/main" id="{9810B801-0866-4A77-B257-9E7D68D09AB4}"/>
               </a:ext>
             </a:extLst>
           </p:cNvPr>
@@ -10843,7 +10843,7 @@
           <p:cNvPr id="64" name="">
             <a:extLst xmlns:a="http://schemas.openxmlformats.org/drawingml/2006/main">
               <a:ext uri="{FF2B5EF4-FFF2-40B4-BE49-F238E27FC236}">
-                <a16:creationId xmlns:a16="http://schemas.microsoft.com/office/drawing/2014/main" id="{90D62ABD-2820-4578-A54E-145BDD605A8E}"/>
+                <a16:creationId xmlns:a16="http://schemas.microsoft.com/office/drawing/2014/main" id="{B177A186-9CCC-4F13-9529-B7514DA80CBD}"/>
               </a:ext>
             </a:extLst>
           </p:cNvPr>
@@ -10895,7 +10895,7 @@
           <p:cNvPr id="65" name="">
             <a:extLst xmlns:a="http://schemas.openxmlformats.org/drawingml/2006/main">
               <a:ext uri="{FF2B5EF4-FFF2-40B4-BE49-F238E27FC236}">
-                <a16:creationId xmlns:a16="http://schemas.microsoft.com/office/drawing/2014/main" id="{2AD7351F-AD56-4D5D-AD65-3EE2483DF99C}"/>
+                <a16:creationId xmlns:a16="http://schemas.microsoft.com/office/drawing/2014/main" id="{564C452D-E13D-4CCD-8519-0BF0C4206428}"/>
               </a:ext>
             </a:extLst>
           </p:cNvPr>
@@ -10926,7 +10926,7 @@
           <p:cNvPr id="66" name="">
             <a:extLst xmlns:a="http://schemas.openxmlformats.org/drawingml/2006/main">
               <a:ext uri="{FF2B5EF4-FFF2-40B4-BE49-F238E27FC236}">
-                <a16:creationId xmlns:a16="http://schemas.microsoft.com/office/drawing/2014/main" id="{7E7FDC19-BAB9-40F6-8615-F6A5F9C5018C}"/>
+                <a16:creationId xmlns:a16="http://schemas.microsoft.com/office/drawing/2014/main" id="{5735A871-363C-4AD7-BF67-BA012086F6DD}"/>
               </a:ext>
             </a:extLst>
           </p:cNvPr>
@@ -10957,7 +10957,7 @@
           <p:cNvPr id="67" name="">
             <a:extLst xmlns:a="http://schemas.openxmlformats.org/drawingml/2006/main">
               <a:ext uri="{FF2B5EF4-FFF2-40B4-BE49-F238E27FC236}">
-                <a16:creationId xmlns:a16="http://schemas.microsoft.com/office/drawing/2014/main" id="{E4E848A2-1891-45FC-A7C1-751F4949417B}"/>
+                <a16:creationId xmlns:a16="http://schemas.microsoft.com/office/drawing/2014/main" id="{F476D50A-4825-488E-88A2-761CFDA3B48F}"/>
               </a:ext>
             </a:extLst>
           </p:cNvPr>
@@ -11009,7 +11009,7 @@
           <p:cNvPr id="68" name="">
             <a:extLst xmlns:a="http://schemas.openxmlformats.org/drawingml/2006/main">
               <a:ext uri="{FF2B5EF4-FFF2-40B4-BE49-F238E27FC236}">
-                <a16:creationId xmlns:a16="http://schemas.microsoft.com/office/drawing/2014/main" id="{3DEA7EFC-1EDA-4A3D-93E3-5CB92D7D78BE}"/>
+                <a16:creationId xmlns:a16="http://schemas.microsoft.com/office/drawing/2014/main" id="{16CE6A45-B12F-4D17-AE91-B57298CD2B6C}"/>
               </a:ext>
             </a:extLst>
           </p:cNvPr>
@@ -11061,7 +11061,7 @@
           <p:cNvPr id="69" name="">
             <a:extLst xmlns:a="http://schemas.openxmlformats.org/drawingml/2006/main">
               <a:ext uri="{FF2B5EF4-FFF2-40B4-BE49-F238E27FC236}">
-                <a16:creationId xmlns:a16="http://schemas.microsoft.com/office/drawing/2014/main" id="{4EED4DA9-DA22-43C7-AE3D-C74EDB108369}"/>
+                <a16:creationId xmlns:a16="http://schemas.microsoft.com/office/drawing/2014/main" id="{41F6DCA9-4ADD-4BAC-A89B-483FFE737991}"/>
               </a:ext>
             </a:extLst>
           </p:cNvPr>
@@ -11113,7 +11113,7 @@
           <p:cNvPr id="70" name="">
             <a:extLst xmlns:a="http://schemas.openxmlformats.org/drawingml/2006/main">
               <a:ext uri="{FF2B5EF4-FFF2-40B4-BE49-F238E27FC236}">
-                <a16:creationId xmlns:a16="http://schemas.microsoft.com/office/drawing/2014/main" id="{198230CA-CEC7-44F7-AE75-8AE601DAE99B}"/>
+                <a16:creationId xmlns:a16="http://schemas.microsoft.com/office/drawing/2014/main" id="{3DE102F1-D565-44EC-93A3-76FE1B5A8820}"/>
               </a:ext>
             </a:extLst>
           </p:cNvPr>
@@ -11165,7 +11165,7 @@
           <p:cNvPr id="71" name="">
             <a:extLst xmlns:a="http://schemas.openxmlformats.org/drawingml/2006/main">
               <a:ext uri="{FF2B5EF4-FFF2-40B4-BE49-F238E27FC236}">
-                <a16:creationId xmlns:a16="http://schemas.microsoft.com/office/drawing/2014/main" id="{EB500A55-3561-42B2-B3E2-84BA22A38DE0}"/>
+                <a16:creationId xmlns:a16="http://schemas.microsoft.com/office/drawing/2014/main" id="{CD8205DD-468F-4445-A2DE-36598C4E8BFD}"/>
               </a:ext>
             </a:extLst>
           </p:cNvPr>
@@ -11217,7 +11217,7 @@
           <p:cNvPr id="72" name="">
             <a:extLst xmlns:a="http://schemas.openxmlformats.org/drawingml/2006/main">
               <a:ext uri="{FF2B5EF4-FFF2-40B4-BE49-F238E27FC236}">
-                <a16:creationId xmlns:a16="http://schemas.microsoft.com/office/drawing/2014/main" id="{A94A9BB8-8A61-4DA3-ACE1-7A27805314C3}"/>
+                <a16:creationId xmlns:a16="http://schemas.microsoft.com/office/drawing/2014/main" id="{05A9FCEF-80ED-4DC8-AA81-014265049896}"/>
               </a:ext>
             </a:extLst>
           </p:cNvPr>
@@ -11248,7 +11248,7 @@
           <p:cNvPr id="73" name="">
             <a:extLst xmlns:a="http://schemas.openxmlformats.org/drawingml/2006/main">
               <a:ext uri="{FF2B5EF4-FFF2-40B4-BE49-F238E27FC236}">
-                <a16:creationId xmlns:a16="http://schemas.microsoft.com/office/drawing/2014/main" id="{EE090CE9-5B21-4E7F-8B57-774AAC000919}"/>
+                <a16:creationId xmlns:a16="http://schemas.microsoft.com/office/drawing/2014/main" id="{19F62A01-29CD-4ECB-9996-0D9B33372C07}"/>
               </a:ext>
             </a:extLst>
           </p:cNvPr>
@@ -11300,7 +11300,7 @@
           <p:cNvPr id="74" name="">
             <a:extLst xmlns:a="http://schemas.openxmlformats.org/drawingml/2006/main">
               <a:ext uri="{FF2B5EF4-FFF2-40B4-BE49-F238E27FC236}">
-                <a16:creationId xmlns:a16="http://schemas.microsoft.com/office/drawing/2014/main" id="{63F10DA0-7F4C-40D1-856C-1A8C8E9BE93F}"/>
+                <a16:creationId xmlns:a16="http://schemas.microsoft.com/office/drawing/2014/main" id="{D2D2CABC-296D-4616-A5D9-149378DBC0A5}"/>
               </a:ext>
             </a:extLst>
           </p:cNvPr>
@@ -11352,7 +11352,7 @@
           <p:cNvPr id="75" name="">
             <a:extLst xmlns:a="http://schemas.openxmlformats.org/drawingml/2006/main">
               <a:ext uri="{FF2B5EF4-FFF2-40B4-BE49-F238E27FC236}">
-                <a16:creationId xmlns:a16="http://schemas.microsoft.com/office/drawing/2014/main" id="{EA13B0AC-FD2C-45C6-9153-5A6DAF318C7B}"/>
+                <a16:creationId xmlns:a16="http://schemas.microsoft.com/office/drawing/2014/main" id="{E8DFD453-846E-436F-A90D-0ECBAC27098C}"/>
               </a:ext>
             </a:extLst>
           </p:cNvPr>
@@ -11404,7 +11404,7 @@
           <p:cNvPr id="76" name="">
             <a:extLst xmlns:a="http://schemas.openxmlformats.org/drawingml/2006/main">
               <a:ext uri="{FF2B5EF4-FFF2-40B4-BE49-F238E27FC236}">
-                <a16:creationId xmlns:a16="http://schemas.microsoft.com/office/drawing/2014/main" id="{FCFC9FF7-7939-4722-AC9D-0FF1B1E9F891}"/>
+                <a16:creationId xmlns:a16="http://schemas.microsoft.com/office/drawing/2014/main" id="{9C59D67F-1BE7-4077-95DC-9B03C3BA8D9A}"/>
               </a:ext>
             </a:extLst>
           </p:cNvPr>
@@ -11456,7 +11456,7 @@
           <p:cNvPr id="77" name="">
             <a:extLst xmlns:a="http://schemas.openxmlformats.org/drawingml/2006/main">
               <a:ext uri="{FF2B5EF4-FFF2-40B4-BE49-F238E27FC236}">
-                <a16:creationId xmlns:a16="http://schemas.microsoft.com/office/drawing/2014/main" id="{442B6B71-A9C3-4EE2-90A4-99078CB270DE}"/>
+                <a16:creationId xmlns:a16="http://schemas.microsoft.com/office/drawing/2014/main" id="{8FB5BEEF-1C3A-44BC-B76C-3A8C8F3C3E24}"/>
               </a:ext>
             </a:extLst>
           </p:cNvPr>
@@ -11508,7 +11508,7 @@
           <p:cNvPr id="78" name="">
             <a:extLst xmlns:a="http://schemas.openxmlformats.org/drawingml/2006/main">
               <a:ext uri="{FF2B5EF4-FFF2-40B4-BE49-F238E27FC236}">
-                <a16:creationId xmlns:a16="http://schemas.microsoft.com/office/drawing/2014/main" id="{FAEF2579-BA09-4DE0-B5BA-FB1E760F3A1F}"/>
+                <a16:creationId xmlns:a16="http://schemas.microsoft.com/office/drawing/2014/main" id="{C9CF71CF-5B01-4674-A5CE-71110CB967C9}"/>
               </a:ext>
             </a:extLst>
           </p:cNvPr>
@@ -11539,7 +11539,7 @@
           <p:cNvPr id="79" name="">
             <a:extLst xmlns:a="http://schemas.openxmlformats.org/drawingml/2006/main">
               <a:ext uri="{FF2B5EF4-FFF2-40B4-BE49-F238E27FC236}">
-                <a16:creationId xmlns:a16="http://schemas.microsoft.com/office/drawing/2014/main" id="{6B6F1E6B-82A9-4D52-A73B-383CF428EBF7}"/>
+                <a16:creationId xmlns:a16="http://schemas.microsoft.com/office/drawing/2014/main" id="{4293B9FE-D6CC-4577-ABE4-9B033B2C8152}"/>
               </a:ext>
             </a:extLst>
           </p:cNvPr>
@@ -11570,7 +11570,7 @@
           <p:cNvPr id="80" name="">
             <a:extLst xmlns:a="http://schemas.openxmlformats.org/drawingml/2006/main">
               <a:ext uri="{FF2B5EF4-FFF2-40B4-BE49-F238E27FC236}">
-                <a16:creationId xmlns:a16="http://schemas.microsoft.com/office/drawing/2014/main" id="{B184CB11-1839-4739-A2A8-65D8B3BE7F80}"/>
+                <a16:creationId xmlns:a16="http://schemas.microsoft.com/office/drawing/2014/main" id="{5B51CB78-0F23-4023-9A19-D0569E223770}"/>
               </a:ext>
             </a:extLst>
           </p:cNvPr>
@@ -11622,7 +11622,7 @@
           <p:cNvPr id="81" name="">
             <a:extLst xmlns:a="http://schemas.openxmlformats.org/drawingml/2006/main">
               <a:ext uri="{FF2B5EF4-FFF2-40B4-BE49-F238E27FC236}">
-                <a16:creationId xmlns:a16="http://schemas.microsoft.com/office/drawing/2014/main" id="{46FD1611-F8C6-4F30-A404-E13806DBD856}"/>
+                <a16:creationId xmlns:a16="http://schemas.microsoft.com/office/drawing/2014/main" id="{0AAAAF8D-E99C-4109-B5D2-6CD4FE9EC4E7}"/>
               </a:ext>
             </a:extLst>
           </p:cNvPr>
@@ -11674,7 +11674,7 @@
           <p:cNvPr id="82" name="">
             <a:extLst xmlns:a="http://schemas.openxmlformats.org/drawingml/2006/main">
               <a:ext uri="{FF2B5EF4-FFF2-40B4-BE49-F238E27FC236}">
-                <a16:creationId xmlns:a16="http://schemas.microsoft.com/office/drawing/2014/main" id="{C0DC7B3B-7711-4841-AA15-0BD65E05C0F3}"/>
+                <a16:creationId xmlns:a16="http://schemas.microsoft.com/office/drawing/2014/main" id="{970758C7-55C2-407A-8339-A5822D3EB8AB}"/>
               </a:ext>
             </a:extLst>
           </p:cNvPr>
@@ -11726,7 +11726,7 @@
           <p:cNvPr id="83" name="">
             <a:extLst xmlns:a="http://schemas.openxmlformats.org/drawingml/2006/main">
               <a:ext uri="{FF2B5EF4-FFF2-40B4-BE49-F238E27FC236}">
-                <a16:creationId xmlns:a16="http://schemas.microsoft.com/office/drawing/2014/main" id="{6C8AB7CD-5EF3-412C-A533-D727270E5B4D}"/>
+                <a16:creationId xmlns:a16="http://schemas.microsoft.com/office/drawing/2014/main" id="{814DC7E0-94CE-4D01-A4F8-11E92EAE433A}"/>
               </a:ext>
             </a:extLst>
           </p:cNvPr>
@@ -11778,7 +11778,7 @@
           <p:cNvPr id="84" name="">
             <a:extLst xmlns:a="http://schemas.openxmlformats.org/drawingml/2006/main">
               <a:ext uri="{FF2B5EF4-FFF2-40B4-BE49-F238E27FC236}">
-                <a16:creationId xmlns:a16="http://schemas.microsoft.com/office/drawing/2014/main" id="{310F3597-6DF4-4F32-B09C-F25111190B97}"/>
+                <a16:creationId xmlns:a16="http://schemas.microsoft.com/office/drawing/2014/main" id="{57C5358F-76D6-4ADA-98D6-803FC2AA4CF9}"/>
               </a:ext>
             </a:extLst>
           </p:cNvPr>
@@ -11830,7 +11830,7 @@
           <p:cNvPr id="85" name="">
             <a:extLst xmlns:a="http://schemas.openxmlformats.org/drawingml/2006/main">
               <a:ext uri="{FF2B5EF4-FFF2-40B4-BE49-F238E27FC236}">
-                <a16:creationId xmlns:a16="http://schemas.microsoft.com/office/drawing/2014/main" id="{D51EBF57-1D25-4013-B309-CB9D178F6A8A}"/>
+                <a16:creationId xmlns:a16="http://schemas.microsoft.com/office/drawing/2014/main" id="{BF012460-0F32-4A5A-B5A9-1D631ADF21DA}"/>
               </a:ext>
             </a:extLst>
           </p:cNvPr>
@@ -11861,7 +11861,7 @@
           <p:cNvPr id="86" name="">
             <a:extLst xmlns:a="http://schemas.openxmlformats.org/drawingml/2006/main">
               <a:ext uri="{FF2B5EF4-FFF2-40B4-BE49-F238E27FC236}">
-                <a16:creationId xmlns:a16="http://schemas.microsoft.com/office/drawing/2014/main" id="{BE23764E-71B1-42E9-A215-0E448F779FE5}"/>
+                <a16:creationId xmlns:a16="http://schemas.microsoft.com/office/drawing/2014/main" id="{2D194EC2-A366-412B-AF31-AF342D999FFD}"/>
               </a:ext>
             </a:extLst>
           </p:cNvPr>
@@ -11913,7 +11913,7 @@
           <p:cNvPr id="87" name="">
             <a:extLst xmlns:a="http://schemas.openxmlformats.org/drawingml/2006/main">
               <a:ext uri="{FF2B5EF4-FFF2-40B4-BE49-F238E27FC236}">
-                <a16:creationId xmlns:a16="http://schemas.microsoft.com/office/drawing/2014/main" id="{89B146F7-B62A-4C3E-974D-BA9A5977090C}"/>
+                <a16:creationId xmlns:a16="http://schemas.microsoft.com/office/drawing/2014/main" id="{CCAFCF4D-9D52-482A-BE3C-9CD3989D7282}"/>
               </a:ext>
             </a:extLst>
           </p:cNvPr>
@@ -11965,7 +11965,7 @@
           <p:cNvPr id="88" name="">
             <a:extLst xmlns:a="http://schemas.openxmlformats.org/drawingml/2006/main">
               <a:ext uri="{FF2B5EF4-FFF2-40B4-BE49-F238E27FC236}">
-                <a16:creationId xmlns:a16="http://schemas.microsoft.com/office/drawing/2014/main" id="{547FC217-68BB-4C53-A93F-3C7D7FE152B7}"/>
+                <a16:creationId xmlns:a16="http://schemas.microsoft.com/office/drawing/2014/main" id="{897957C1-8E59-4F0B-9D13-5BCA61D495F9}"/>
               </a:ext>
             </a:extLst>
           </p:cNvPr>
@@ -12017,7 +12017,7 @@
           <p:cNvPr id="89" name="">
             <a:extLst xmlns:a="http://schemas.openxmlformats.org/drawingml/2006/main">
               <a:ext uri="{FF2B5EF4-FFF2-40B4-BE49-F238E27FC236}">
-                <a16:creationId xmlns:a16="http://schemas.microsoft.com/office/drawing/2014/main" id="{CB00E0E7-C6D1-4FB3-8EAC-AFB2155328FF}"/>
+                <a16:creationId xmlns:a16="http://schemas.microsoft.com/office/drawing/2014/main" id="{FE004FC5-BC21-4323-A2E5-1E6D3E6FC709}"/>
               </a:ext>
             </a:extLst>
           </p:cNvPr>
@@ -12069,7 +12069,7 @@
           <p:cNvPr id="90" name="">
             <a:extLst xmlns:a="http://schemas.openxmlformats.org/drawingml/2006/main">
               <a:ext uri="{FF2B5EF4-FFF2-40B4-BE49-F238E27FC236}">
-                <a16:creationId xmlns:a16="http://schemas.microsoft.com/office/drawing/2014/main" id="{B4C5407A-284A-4C2A-B4EB-80A25C0EA589}"/>
+                <a16:creationId xmlns:a16="http://schemas.microsoft.com/office/drawing/2014/main" id="{613B8820-214D-409D-8CC3-D2C407A06D43}"/>
               </a:ext>
             </a:extLst>
           </p:cNvPr>
@@ -12121,7 +12121,7 @@
           <p:cNvPr id="91" name="">
             <a:extLst xmlns:a="http://schemas.openxmlformats.org/drawingml/2006/main">
               <a:ext uri="{FF2B5EF4-FFF2-40B4-BE49-F238E27FC236}">
-                <a16:creationId xmlns:a16="http://schemas.microsoft.com/office/drawing/2014/main" id="{B4429115-037A-4541-AFB5-2E345DB5AF6D}"/>
+                <a16:creationId xmlns:a16="http://schemas.microsoft.com/office/drawing/2014/main" id="{C610DDBE-FA89-4453-A682-E4C59DC4E440}"/>
               </a:ext>
             </a:extLst>
           </p:cNvPr>
@@ -12152,7 +12152,7 @@
           <p:cNvPr id="92" name="">
             <a:extLst xmlns:a="http://schemas.openxmlformats.org/drawingml/2006/main">
               <a:ext uri="{FF2B5EF4-FFF2-40B4-BE49-F238E27FC236}">
-                <a16:creationId xmlns:a16="http://schemas.microsoft.com/office/drawing/2014/main" id="{BD9399E1-9F3C-45B3-B31B-10645D344C47}"/>
+                <a16:creationId xmlns:a16="http://schemas.microsoft.com/office/drawing/2014/main" id="{5D3B2535-3474-47CB-BC38-7EDBC86D3C7F}"/>
               </a:ext>
             </a:extLst>
           </p:cNvPr>
@@ -12183,7 +12183,7 @@
           <p:cNvPr id="93" name="">
             <a:extLst xmlns:a="http://schemas.openxmlformats.org/drawingml/2006/main">
               <a:ext uri="{FF2B5EF4-FFF2-40B4-BE49-F238E27FC236}">
-                <a16:creationId xmlns:a16="http://schemas.microsoft.com/office/drawing/2014/main" id="{08535E7C-4D8C-4007-B58B-E38E11758979}"/>
+                <a16:creationId xmlns:a16="http://schemas.microsoft.com/office/drawing/2014/main" id="{E6EAAB2C-0FC7-45DA-B239-483F8308B50B}"/>
               </a:ext>
             </a:extLst>
           </p:cNvPr>
@@ -12235,7 +12235,7 @@
           <p:cNvPr id="94" name="">
             <a:extLst xmlns:a="http://schemas.openxmlformats.org/drawingml/2006/main">
               <a:ext uri="{FF2B5EF4-FFF2-40B4-BE49-F238E27FC236}">
-                <a16:creationId xmlns:a16="http://schemas.microsoft.com/office/drawing/2014/main" id="{915E0E7A-187A-421E-8F36-D84E2824FFC3}"/>
+                <a16:creationId xmlns:a16="http://schemas.microsoft.com/office/drawing/2014/main" id="{D03ACF05-B74D-45DC-AC33-1ED808D2DC79}"/>
               </a:ext>
             </a:extLst>
           </p:cNvPr>
@@ -12287,7 +12287,7 @@
           <p:cNvPr id="95" name="">
             <a:extLst xmlns:a="http://schemas.openxmlformats.org/drawingml/2006/main">
               <a:ext uri="{FF2B5EF4-FFF2-40B4-BE49-F238E27FC236}">
-                <a16:creationId xmlns:a16="http://schemas.microsoft.com/office/drawing/2014/main" id="{1913902C-6654-494F-BC46-9E28440BBBC1}"/>
+                <a16:creationId xmlns:a16="http://schemas.microsoft.com/office/drawing/2014/main" id="{36E2FCBF-6EE1-41E1-919C-1967F44E9D62}"/>
               </a:ext>
             </a:extLst>
           </p:cNvPr>
@@ -12339,7 +12339,7 @@
           <p:cNvPr id="96" name="">
             <a:extLst xmlns:a="http://schemas.openxmlformats.org/drawingml/2006/main">
               <a:ext uri="{FF2B5EF4-FFF2-40B4-BE49-F238E27FC236}">
-                <a16:creationId xmlns:a16="http://schemas.microsoft.com/office/drawing/2014/main" id="{312C2F21-4CAD-418A-B91F-3AA5E250C63F}"/>
+                <a16:creationId xmlns:a16="http://schemas.microsoft.com/office/drawing/2014/main" id="{CAF223D9-5CEA-416F-B0F9-6DD529151EF9}"/>
               </a:ext>
             </a:extLst>
           </p:cNvPr>
@@ -12391,7 +12391,7 @@
           <p:cNvPr id="97" name="">
             <a:extLst xmlns:a="http://schemas.openxmlformats.org/drawingml/2006/main">
               <a:ext uri="{FF2B5EF4-FFF2-40B4-BE49-F238E27FC236}">
-                <a16:creationId xmlns:a16="http://schemas.microsoft.com/office/drawing/2014/main" id="{54452E0D-5CA8-4E93-8666-3534E6517D46}"/>
+                <a16:creationId xmlns:a16="http://schemas.microsoft.com/office/drawing/2014/main" id="{8861FA9F-2712-4A39-8B26-16F248ED9D70}"/>
               </a:ext>
             </a:extLst>
           </p:cNvPr>
@@ -12441,7 +12441,7 @@
     </p:spTree>
     <p:extLst>
       <p:ext uri="{BB962C8B-B14F-4D97-AF65-F5344CB8AC3E}">
-        <p14:creationId xmlns:p14="http://schemas.microsoft.com/office/powerpoint/2010/main" val="841912833"/>
+        <p14:creationId xmlns:p14="http://schemas.microsoft.com/office/powerpoint/2010/main" val="932770222"/>
       </p:ext>
     </p:extLst>
   </p:cSld>
@@ -12472,7 +12472,7 @@
           <p:cNvPr id="102" name="">
             <a:extLst xmlns:a="http://schemas.openxmlformats.org/drawingml/2006/main">
               <a:ext uri="{FF2B5EF4-FFF2-40B4-BE49-F238E27FC236}">
-                <a16:creationId xmlns:a16="http://schemas.microsoft.com/office/drawing/2014/main" id="{60B22266-5BCF-419F-8F39-ECB845E8A8FE}"/>
+                <a16:creationId xmlns:a16="http://schemas.microsoft.com/office/drawing/2014/main" id="{B456960E-523B-4ADF-BD50-F4C3D09AA0E4}"/>
               </a:ext>
             </a:extLst>
           </p:cNvPr>
@@ -12505,7 +12505,7 @@
           <p:cNvPr id="2" name="">
             <a:extLst xmlns:a="http://schemas.openxmlformats.org/drawingml/2006/main">
               <a:ext uri="{FF2B5EF4-FFF2-40B4-BE49-F238E27FC236}">
-                <a16:creationId xmlns:a16="http://schemas.microsoft.com/office/drawing/2014/main" id="{64CA1064-941F-439A-8005-B09B7C2984AB}"/>
+                <a16:creationId xmlns:a16="http://schemas.microsoft.com/office/drawing/2014/main" id="{54417CB8-E134-450E-8F9D-4F0D2D634051}"/>
               </a:ext>
             </a:extLst>
           </p:cNvPr>
@@ -12536,7 +12536,7 @@
           <p:cNvPr id="3" name="">
             <a:extLst xmlns:a="http://schemas.openxmlformats.org/drawingml/2006/main">
               <a:ext uri="{FF2B5EF4-FFF2-40B4-BE49-F238E27FC236}">
-                <a16:creationId xmlns:a16="http://schemas.microsoft.com/office/drawing/2014/main" id="{31483271-0DC9-4440-AE81-ED23BCE8CC15}"/>
+                <a16:creationId xmlns:a16="http://schemas.microsoft.com/office/drawing/2014/main" id="{A3BFFAFC-59BB-412E-99BA-8EF126D4F752}"/>
               </a:ext>
             </a:extLst>
           </p:cNvPr>
@@ -12588,7 +12588,7 @@
           <p:cNvPr id="4" name="">
             <a:extLst xmlns:a="http://schemas.openxmlformats.org/drawingml/2006/main">
               <a:ext uri="{FF2B5EF4-FFF2-40B4-BE49-F238E27FC236}">
-                <a16:creationId xmlns:a16="http://schemas.microsoft.com/office/drawing/2014/main" id="{5D729E28-5759-45FE-A312-F7C3A1C85F9D}"/>
+                <a16:creationId xmlns:a16="http://schemas.microsoft.com/office/drawing/2014/main" id="{9A5985C0-1BDD-4A6A-BA40-2CD6B076C390}"/>
               </a:ext>
             </a:extLst>
           </p:cNvPr>
@@ -12640,7 +12640,7 @@
           <p:cNvPr id="5" name="">
             <a:extLst xmlns:a="http://schemas.openxmlformats.org/drawingml/2006/main">
               <a:ext uri="{FF2B5EF4-FFF2-40B4-BE49-F238E27FC236}">
-                <a16:creationId xmlns:a16="http://schemas.microsoft.com/office/drawing/2014/main" id="{88C5B1AA-4709-46ED-8DAA-6801640FE53A}"/>
+                <a16:creationId xmlns:a16="http://schemas.microsoft.com/office/drawing/2014/main" id="{43C0149C-409A-4068-B6AE-31EDDF975BBE}"/>
               </a:ext>
             </a:extLst>
           </p:cNvPr>
@@ -12675,7 +12675,7 @@
           <p:nvPr/>
         </p:nvPicPr>
         <p:blipFill>
-          <a:blip xmlns:r="http://schemas.openxmlformats.org/officeDocument/2006/relationships" xmlns:a="http://schemas.openxmlformats.org/drawingml/2006/main" r:embed="Rfac763c0db164090"/>
+          <a:blip xmlns:r="http://schemas.openxmlformats.org/officeDocument/2006/relationships" xmlns:a="http://schemas.openxmlformats.org/drawingml/2006/main" r:embed="R4c54b4ec776548f9"/>
           <a:stretch xmlns:a="http://schemas.openxmlformats.org/drawingml/2006/main"/>
         </p:blipFill>
         <p:spPr>
@@ -12693,7 +12693,7 @@
           <p:cNvPr id="7" name="">
             <a:extLst xmlns:a="http://schemas.openxmlformats.org/drawingml/2006/main">
               <a:ext uri="{FF2B5EF4-FFF2-40B4-BE49-F238E27FC236}">
-                <a16:creationId xmlns:a16="http://schemas.microsoft.com/office/drawing/2014/main" id="{109CDFDE-BC92-473E-8179-5D39C0752674}"/>
+                <a16:creationId xmlns:a16="http://schemas.microsoft.com/office/drawing/2014/main" id="{414FED66-13B7-48BF-BD75-AB050A4B71F3}"/>
               </a:ext>
             </a:extLst>
           </p:cNvPr>
@@ -12745,7 +12745,7 @@
           <p:cNvPr id="8" name="">
             <a:extLst xmlns:a="http://schemas.openxmlformats.org/drawingml/2006/main">
               <a:ext uri="{FF2B5EF4-FFF2-40B4-BE49-F238E27FC236}">
-                <a16:creationId xmlns:a16="http://schemas.microsoft.com/office/drawing/2014/main" id="{085C380E-4619-47D5-A50B-8DB21F60365D}"/>
+                <a16:creationId xmlns:a16="http://schemas.microsoft.com/office/drawing/2014/main" id="{A7DA7F24-430F-4C8B-980B-44EBCD42229B}"/>
               </a:ext>
             </a:extLst>
           </p:cNvPr>
@@ -12797,7 +12797,7 @@
           <p:cNvPr id="9" name="">
             <a:extLst xmlns:a="http://schemas.openxmlformats.org/drawingml/2006/main">
               <a:ext uri="{FF2B5EF4-FFF2-40B4-BE49-F238E27FC236}">
-                <a16:creationId xmlns:a16="http://schemas.microsoft.com/office/drawing/2014/main" id="{AEE5241D-33F5-4827-9E60-CED704445F1D}"/>
+                <a16:creationId xmlns:a16="http://schemas.microsoft.com/office/drawing/2014/main" id="{70997E81-039A-4FCD-ACD9-FF904BDE0BD0}"/>
               </a:ext>
             </a:extLst>
           </p:cNvPr>
@@ -12849,7 +12849,7 @@
           <p:cNvPr id="10" name="">
             <a:extLst xmlns:a="http://schemas.openxmlformats.org/drawingml/2006/main">
               <a:ext uri="{FF2B5EF4-FFF2-40B4-BE49-F238E27FC236}">
-                <a16:creationId xmlns:a16="http://schemas.microsoft.com/office/drawing/2014/main" id="{81FB5129-FB78-40BF-B117-8F73930CB627}"/>
+                <a16:creationId xmlns:a16="http://schemas.microsoft.com/office/drawing/2014/main" id="{8367C444-E7D1-4E11-89A2-610510947A1E}"/>
               </a:ext>
             </a:extLst>
           </p:cNvPr>
@@ -12901,7 +12901,7 @@
           <p:cNvPr id="11" name="">
             <a:extLst xmlns:a="http://schemas.openxmlformats.org/drawingml/2006/main">
               <a:ext uri="{FF2B5EF4-FFF2-40B4-BE49-F238E27FC236}">
-                <a16:creationId xmlns:a16="http://schemas.microsoft.com/office/drawing/2014/main" id="{D9C43A1A-123D-4AB3-A7DF-E75FBBA5699B}"/>
+                <a16:creationId xmlns:a16="http://schemas.microsoft.com/office/drawing/2014/main" id="{227B111F-20A4-4A21-BC79-C53E32C41689}"/>
               </a:ext>
             </a:extLst>
           </p:cNvPr>
@@ -12932,7 +12932,7 @@
           <p:cNvPr id="12" name="">
             <a:extLst xmlns:a="http://schemas.openxmlformats.org/drawingml/2006/main">
               <a:ext uri="{FF2B5EF4-FFF2-40B4-BE49-F238E27FC236}">
-                <a16:creationId xmlns:a16="http://schemas.microsoft.com/office/drawing/2014/main" id="{26FF4F2F-AE33-4BBE-B8B2-35AE240B2BE5}"/>
+                <a16:creationId xmlns:a16="http://schemas.microsoft.com/office/drawing/2014/main" id="{703A09E5-8C4A-4920-9B0E-644000349837}"/>
               </a:ext>
             </a:extLst>
           </p:cNvPr>
@@ -12963,7 +12963,7 @@
           <p:cNvPr id="13" name="">
             <a:extLst xmlns:a="http://schemas.openxmlformats.org/drawingml/2006/main">
               <a:ext uri="{FF2B5EF4-FFF2-40B4-BE49-F238E27FC236}">
-                <a16:creationId xmlns:a16="http://schemas.microsoft.com/office/drawing/2014/main" id="{244BFEDC-7AE6-4C1C-9EB4-A75A4FBB3B33}"/>
+                <a16:creationId xmlns:a16="http://schemas.microsoft.com/office/drawing/2014/main" id="{FAE43754-D1BE-4956-B597-39C99850EE2D}"/>
               </a:ext>
             </a:extLst>
           </p:cNvPr>
@@ -13015,7 +13015,7 @@
           <p:cNvPr id="14" name="">
             <a:extLst xmlns:a="http://schemas.openxmlformats.org/drawingml/2006/main">
               <a:ext uri="{FF2B5EF4-FFF2-40B4-BE49-F238E27FC236}">
-                <a16:creationId xmlns:a16="http://schemas.microsoft.com/office/drawing/2014/main" id="{21820AD4-5B8F-426C-934D-15437083EC39}"/>
+                <a16:creationId xmlns:a16="http://schemas.microsoft.com/office/drawing/2014/main" id="{BB5EDA75-036A-43B1-801B-C2DACEF593E5}"/>
               </a:ext>
             </a:extLst>
           </p:cNvPr>
@@ -13067,7 +13067,7 @@
           <p:cNvPr id="15" name="">
             <a:extLst xmlns:a="http://schemas.openxmlformats.org/drawingml/2006/main">
               <a:ext uri="{FF2B5EF4-FFF2-40B4-BE49-F238E27FC236}">
-                <a16:creationId xmlns:a16="http://schemas.microsoft.com/office/drawing/2014/main" id="{135F29F6-9221-43B5-A08A-FF823248B81D}"/>
+                <a16:creationId xmlns:a16="http://schemas.microsoft.com/office/drawing/2014/main" id="{FB96D454-FEA2-4090-A23E-3E534F2253D8}"/>
               </a:ext>
             </a:extLst>
           </p:cNvPr>
@@ -13119,7 +13119,7 @@
           <p:cNvPr id="16" name="">
             <a:extLst xmlns:a="http://schemas.openxmlformats.org/drawingml/2006/main">
               <a:ext uri="{FF2B5EF4-FFF2-40B4-BE49-F238E27FC236}">
-                <a16:creationId xmlns:a16="http://schemas.microsoft.com/office/drawing/2014/main" id="{D0CB4C0F-854C-49EA-96D4-83394AF481E4}"/>
+                <a16:creationId xmlns:a16="http://schemas.microsoft.com/office/drawing/2014/main" id="{0D8A95A0-CE04-44CF-9FB4-6CB48ED47BA4}"/>
               </a:ext>
             </a:extLst>
           </p:cNvPr>
@@ -13171,7 +13171,7 @@
           <p:cNvPr id="17" name="">
             <a:extLst xmlns:a="http://schemas.openxmlformats.org/drawingml/2006/main">
               <a:ext uri="{FF2B5EF4-FFF2-40B4-BE49-F238E27FC236}">
-                <a16:creationId xmlns:a16="http://schemas.microsoft.com/office/drawing/2014/main" id="{6AACB710-13BC-42C6-93BF-12B01E8F07A4}"/>
+                <a16:creationId xmlns:a16="http://schemas.microsoft.com/office/drawing/2014/main" id="{FE7F7E63-CCD8-441F-9AAE-38F67CB78EDD}"/>
               </a:ext>
             </a:extLst>
           </p:cNvPr>
@@ -13223,7 +13223,7 @@
           <p:cNvPr id="18" name="">
             <a:extLst xmlns:a="http://schemas.openxmlformats.org/drawingml/2006/main">
               <a:ext uri="{FF2B5EF4-FFF2-40B4-BE49-F238E27FC236}">
-                <a16:creationId xmlns:a16="http://schemas.microsoft.com/office/drawing/2014/main" id="{6657F499-DAB7-46F4-A9F0-BFA7E0A15B16}"/>
+                <a16:creationId xmlns:a16="http://schemas.microsoft.com/office/drawing/2014/main" id="{DA4CE3AE-45DD-4122-BFD8-C29C491C7AA4}"/>
               </a:ext>
             </a:extLst>
           </p:cNvPr>
@@ -13254,7 +13254,7 @@
           <p:cNvPr id="19" name="">
             <a:extLst xmlns:a="http://schemas.openxmlformats.org/drawingml/2006/main">
               <a:ext uri="{FF2B5EF4-FFF2-40B4-BE49-F238E27FC236}">
-                <a16:creationId xmlns:a16="http://schemas.microsoft.com/office/drawing/2014/main" id="{97E5F53F-8F73-4FDC-803C-3A16E407E525}"/>
+                <a16:creationId xmlns:a16="http://schemas.microsoft.com/office/drawing/2014/main" id="{A6D17192-628C-4938-8D70-2ED25AB4F783}"/>
               </a:ext>
             </a:extLst>
           </p:cNvPr>
@@ -13306,7 +13306,7 @@
           <p:cNvPr id="20" name="">
             <a:extLst xmlns:a="http://schemas.openxmlformats.org/drawingml/2006/main">
               <a:ext uri="{FF2B5EF4-FFF2-40B4-BE49-F238E27FC236}">
-                <a16:creationId xmlns:a16="http://schemas.microsoft.com/office/drawing/2014/main" id="{A4A57E21-F7C7-4994-8D2A-8664B38BBCD8}"/>
+                <a16:creationId xmlns:a16="http://schemas.microsoft.com/office/drawing/2014/main" id="{ABAFDABA-9661-49C0-A46D-DC71277C3323}"/>
               </a:ext>
             </a:extLst>
           </p:cNvPr>
@@ -13358,7 +13358,7 @@
           <p:cNvPr id="21" name="">
             <a:extLst xmlns:a="http://schemas.openxmlformats.org/drawingml/2006/main">
               <a:ext uri="{FF2B5EF4-FFF2-40B4-BE49-F238E27FC236}">
-                <a16:creationId xmlns:a16="http://schemas.microsoft.com/office/drawing/2014/main" id="{F762C414-A2F3-4617-8B85-EEFAA4528DB2}"/>
+                <a16:creationId xmlns:a16="http://schemas.microsoft.com/office/drawing/2014/main" id="{54278E52-2D17-4B68-9040-4B915AACE0FF}"/>
               </a:ext>
             </a:extLst>
           </p:cNvPr>
@@ -13410,7 +13410,7 @@
           <p:cNvPr id="22" name="">
             <a:extLst xmlns:a="http://schemas.openxmlformats.org/drawingml/2006/main">
               <a:ext uri="{FF2B5EF4-FFF2-40B4-BE49-F238E27FC236}">
-                <a16:creationId xmlns:a16="http://schemas.microsoft.com/office/drawing/2014/main" id="{208AE90C-CEDC-4DB4-B0C5-B1DAB0C780C3}"/>
+                <a16:creationId xmlns:a16="http://schemas.microsoft.com/office/drawing/2014/main" id="{09C01E35-E0D7-43A9-86AA-FC687918A70B}"/>
               </a:ext>
             </a:extLst>
           </p:cNvPr>
@@ -13462,7 +13462,7 @@
           <p:cNvPr id="23" name="">
             <a:extLst xmlns:a="http://schemas.openxmlformats.org/drawingml/2006/main">
               <a:ext uri="{FF2B5EF4-FFF2-40B4-BE49-F238E27FC236}">
-                <a16:creationId xmlns:a16="http://schemas.microsoft.com/office/drawing/2014/main" id="{B5867D7D-8362-4FF9-81AC-3D80946C159E}"/>
+                <a16:creationId xmlns:a16="http://schemas.microsoft.com/office/drawing/2014/main" id="{6A15717F-D924-4F71-A861-277315FA445F}"/>
               </a:ext>
             </a:extLst>
           </p:cNvPr>
@@ -13514,7 +13514,7 @@
           <p:cNvPr id="24" name="">
             <a:extLst xmlns:a="http://schemas.openxmlformats.org/drawingml/2006/main">
               <a:ext uri="{FF2B5EF4-FFF2-40B4-BE49-F238E27FC236}">
-                <a16:creationId xmlns:a16="http://schemas.microsoft.com/office/drawing/2014/main" id="{831F9AB7-946E-49AA-B9F3-5E6065D5C130}"/>
+                <a16:creationId xmlns:a16="http://schemas.microsoft.com/office/drawing/2014/main" id="{FD0A344A-EB45-4EE9-B385-867E03A877EA}"/>
               </a:ext>
             </a:extLst>
           </p:cNvPr>
@@ -13545,7 +13545,7 @@
           <p:cNvPr id="25" name="">
             <a:extLst xmlns:a="http://schemas.openxmlformats.org/drawingml/2006/main">
               <a:ext uri="{FF2B5EF4-FFF2-40B4-BE49-F238E27FC236}">
-                <a16:creationId xmlns:a16="http://schemas.microsoft.com/office/drawing/2014/main" id="{72E62FDB-F694-4C70-AA84-BB67EA972BB2}"/>
+                <a16:creationId xmlns:a16="http://schemas.microsoft.com/office/drawing/2014/main" id="{C7A4925E-785B-40FB-B24B-203B33D37A5B}"/>
               </a:ext>
             </a:extLst>
           </p:cNvPr>
@@ -13576,7 +13576,7 @@
           <p:cNvPr id="26" name="">
             <a:extLst xmlns:a="http://schemas.openxmlformats.org/drawingml/2006/main">
               <a:ext uri="{FF2B5EF4-FFF2-40B4-BE49-F238E27FC236}">
-                <a16:creationId xmlns:a16="http://schemas.microsoft.com/office/drawing/2014/main" id="{8EB7989E-FCAF-4AA7-94D2-531D59277F37}"/>
+                <a16:creationId xmlns:a16="http://schemas.microsoft.com/office/drawing/2014/main" id="{B6DED4BA-8331-41F7-A918-DC0787FECC4E}"/>
               </a:ext>
             </a:extLst>
           </p:cNvPr>
@@ -13628,7 +13628,7 @@
           <p:cNvPr id="27" name="">
             <a:extLst xmlns:a="http://schemas.openxmlformats.org/drawingml/2006/main">
               <a:ext uri="{FF2B5EF4-FFF2-40B4-BE49-F238E27FC236}">
-                <a16:creationId xmlns:a16="http://schemas.microsoft.com/office/drawing/2014/main" id="{B6360A45-FB29-48F2-BFD0-89E6C9ED5FAA}"/>
+                <a16:creationId xmlns:a16="http://schemas.microsoft.com/office/drawing/2014/main" id="{ACF144CB-E0F3-487F-ACC1-706C150A42A6}"/>
               </a:ext>
             </a:extLst>
           </p:cNvPr>
@@ -13680,7 +13680,7 @@
           <p:cNvPr id="28" name="">
             <a:extLst xmlns:a="http://schemas.openxmlformats.org/drawingml/2006/main">
               <a:ext uri="{FF2B5EF4-FFF2-40B4-BE49-F238E27FC236}">
-                <a16:creationId xmlns:a16="http://schemas.microsoft.com/office/drawing/2014/main" id="{8B9FEA93-6AFA-4796-BEEE-93BB627AE4B2}"/>
+                <a16:creationId xmlns:a16="http://schemas.microsoft.com/office/drawing/2014/main" id="{CC3F38F7-99B7-4567-8AEE-57CDFD6FA4B9}"/>
               </a:ext>
             </a:extLst>
           </p:cNvPr>
@@ -13732,7 +13732,7 @@
           <p:cNvPr id="29" name="">
             <a:extLst xmlns:a="http://schemas.openxmlformats.org/drawingml/2006/main">
               <a:ext uri="{FF2B5EF4-FFF2-40B4-BE49-F238E27FC236}">
-                <a16:creationId xmlns:a16="http://schemas.microsoft.com/office/drawing/2014/main" id="{A040A85B-7443-44C3-8EA0-B8E98EC13DEC}"/>
+                <a16:creationId xmlns:a16="http://schemas.microsoft.com/office/drawing/2014/main" id="{00E37F78-4C38-408B-80D1-B0C8C9047F94}"/>
               </a:ext>
             </a:extLst>
           </p:cNvPr>
@@ -13784,7 +13784,7 @@
           <p:cNvPr id="30" name="">
             <a:extLst xmlns:a="http://schemas.openxmlformats.org/drawingml/2006/main">
               <a:ext uri="{FF2B5EF4-FFF2-40B4-BE49-F238E27FC236}">
-                <a16:creationId xmlns:a16="http://schemas.microsoft.com/office/drawing/2014/main" id="{F1B666E6-EC60-4375-B0C1-5A377349DFF5}"/>
+                <a16:creationId xmlns:a16="http://schemas.microsoft.com/office/drawing/2014/main" id="{078E0B63-3AA7-406D-BC02-0265E20C76BC}"/>
               </a:ext>
             </a:extLst>
           </p:cNvPr>
@@ -13836,7 +13836,7 @@
           <p:cNvPr id="31" name="">
             <a:extLst xmlns:a="http://schemas.openxmlformats.org/drawingml/2006/main">
               <a:ext uri="{FF2B5EF4-FFF2-40B4-BE49-F238E27FC236}">
-                <a16:creationId xmlns:a16="http://schemas.microsoft.com/office/drawing/2014/main" id="{B7D1AEBF-4E73-4545-AE53-B3C2EF93FFB6}"/>
+                <a16:creationId xmlns:a16="http://schemas.microsoft.com/office/drawing/2014/main" id="{A0436085-534E-45B2-B59E-1DC08F308A19}"/>
               </a:ext>
             </a:extLst>
           </p:cNvPr>
@@ -13867,7 +13867,7 @@
           <p:cNvPr id="32" name="">
             <a:extLst xmlns:a="http://schemas.openxmlformats.org/drawingml/2006/main">
               <a:ext uri="{FF2B5EF4-FFF2-40B4-BE49-F238E27FC236}">
-                <a16:creationId xmlns:a16="http://schemas.microsoft.com/office/drawing/2014/main" id="{BFF355A8-10B0-4E65-9925-1BD1D8CBCAD0}"/>
+                <a16:creationId xmlns:a16="http://schemas.microsoft.com/office/drawing/2014/main" id="{0A3C01A2-AEB7-471F-A981-C12E94AF9A94}"/>
               </a:ext>
             </a:extLst>
           </p:cNvPr>
@@ -13919,7 +13919,7 @@
           <p:cNvPr id="33" name="">
             <a:extLst xmlns:a="http://schemas.openxmlformats.org/drawingml/2006/main">
               <a:ext uri="{FF2B5EF4-FFF2-40B4-BE49-F238E27FC236}">
-                <a16:creationId xmlns:a16="http://schemas.microsoft.com/office/drawing/2014/main" id="{99022611-F1EF-48A2-A974-B1CC0539D384}"/>
+                <a16:creationId xmlns:a16="http://schemas.microsoft.com/office/drawing/2014/main" id="{3F3FA6A0-9D8B-4E20-B85B-4FDB17D144A7}"/>
               </a:ext>
             </a:extLst>
           </p:cNvPr>
@@ -13971,7 +13971,7 @@
           <p:cNvPr id="34" name="">
             <a:extLst xmlns:a="http://schemas.openxmlformats.org/drawingml/2006/main">
               <a:ext uri="{FF2B5EF4-FFF2-40B4-BE49-F238E27FC236}">
-                <a16:creationId xmlns:a16="http://schemas.microsoft.com/office/drawing/2014/main" id="{B28E4AD1-5C64-4024-A9E7-23A82813E4B5}"/>
+                <a16:creationId xmlns:a16="http://schemas.microsoft.com/office/drawing/2014/main" id="{4AE0967B-8BFD-475E-A1BB-4F08FC8A1254}"/>
               </a:ext>
             </a:extLst>
           </p:cNvPr>
@@ -14023,7 +14023,7 @@
           <p:cNvPr id="35" name="">
             <a:extLst xmlns:a="http://schemas.openxmlformats.org/drawingml/2006/main">
               <a:ext uri="{FF2B5EF4-FFF2-40B4-BE49-F238E27FC236}">
-                <a16:creationId xmlns:a16="http://schemas.microsoft.com/office/drawing/2014/main" id="{4F1FE341-23DB-46CD-B0D8-715508077558}"/>
+                <a16:creationId xmlns:a16="http://schemas.microsoft.com/office/drawing/2014/main" id="{7B85AB73-90E5-4F46-871E-9CEDA98984CB}"/>
               </a:ext>
             </a:extLst>
           </p:cNvPr>
@@ -14075,7 +14075,7 @@
           <p:cNvPr id="36" name="">
             <a:extLst xmlns:a="http://schemas.openxmlformats.org/drawingml/2006/main">
               <a:ext uri="{FF2B5EF4-FFF2-40B4-BE49-F238E27FC236}">
-                <a16:creationId xmlns:a16="http://schemas.microsoft.com/office/drawing/2014/main" id="{DD1EC409-2AF6-484A-B69F-AC92E36FBC6E}"/>
+                <a16:creationId xmlns:a16="http://schemas.microsoft.com/office/drawing/2014/main" id="{B3E0BEC6-6E15-4BA2-A239-C4F19B8505B2}"/>
               </a:ext>
             </a:extLst>
           </p:cNvPr>
@@ -14127,7 +14127,7 @@
           <p:cNvPr id="37" name="">
             <a:extLst xmlns:a="http://schemas.openxmlformats.org/drawingml/2006/main">
               <a:ext uri="{FF2B5EF4-FFF2-40B4-BE49-F238E27FC236}">
-                <a16:creationId xmlns:a16="http://schemas.microsoft.com/office/drawing/2014/main" id="{2E2F23A9-B368-444C-8C67-96730CB64BCA}"/>
+                <a16:creationId xmlns:a16="http://schemas.microsoft.com/office/drawing/2014/main" id="{B32EE784-EBF7-4E18-96BA-963376B7E8F7}"/>
               </a:ext>
             </a:extLst>
           </p:cNvPr>
@@ -14158,7 +14158,7 @@
           <p:cNvPr id="38" name="">
             <a:extLst xmlns:a="http://schemas.openxmlformats.org/drawingml/2006/main">
               <a:ext uri="{FF2B5EF4-FFF2-40B4-BE49-F238E27FC236}">
-                <a16:creationId xmlns:a16="http://schemas.microsoft.com/office/drawing/2014/main" id="{AE02B560-6389-4324-9FDC-5ABEB7347A66}"/>
+                <a16:creationId xmlns:a16="http://schemas.microsoft.com/office/drawing/2014/main" id="{5ED88744-4892-4229-8E34-ECAA2A41F040}"/>
               </a:ext>
             </a:extLst>
           </p:cNvPr>
@@ -14189,7 +14189,7 @@
           <p:cNvPr id="39" name="">
             <a:extLst xmlns:a="http://schemas.openxmlformats.org/drawingml/2006/main">
               <a:ext uri="{FF2B5EF4-FFF2-40B4-BE49-F238E27FC236}">
-                <a16:creationId xmlns:a16="http://schemas.microsoft.com/office/drawing/2014/main" id="{20986048-A920-480D-9E41-B466D2D982F0}"/>
+                <a16:creationId xmlns:a16="http://schemas.microsoft.com/office/drawing/2014/main" id="{38879372-0C32-4D74-98EE-DEE8F8B76BD5}"/>
               </a:ext>
             </a:extLst>
           </p:cNvPr>
@@ -14241,7 +14241,7 @@
           <p:cNvPr id="40" name="">
             <a:extLst xmlns:a="http://schemas.openxmlformats.org/drawingml/2006/main">
               <a:ext uri="{FF2B5EF4-FFF2-40B4-BE49-F238E27FC236}">
-                <a16:creationId xmlns:a16="http://schemas.microsoft.com/office/drawing/2014/main" id="{17AC5A46-F572-4530-900B-01E61BFDF012}"/>
+                <a16:creationId xmlns:a16="http://schemas.microsoft.com/office/drawing/2014/main" id="{4C0EF73B-60DE-41C7-AD0C-2FE74C95D775}"/>
               </a:ext>
             </a:extLst>
           </p:cNvPr>
@@ -14293,7 +14293,7 @@
           <p:cNvPr id="41" name="">
             <a:extLst xmlns:a="http://schemas.openxmlformats.org/drawingml/2006/main">
               <a:ext uri="{FF2B5EF4-FFF2-40B4-BE49-F238E27FC236}">
-                <a16:creationId xmlns:a16="http://schemas.microsoft.com/office/drawing/2014/main" id="{9A16D226-73E2-4928-9F07-84F57D4E023E}"/>
+                <a16:creationId xmlns:a16="http://schemas.microsoft.com/office/drawing/2014/main" id="{0CA22F93-25D0-4275-BA54-FA2BF754F506}"/>
               </a:ext>
             </a:extLst>
           </p:cNvPr>
@@ -14345,7 +14345,7 @@
           <p:cNvPr id="42" name="">
             <a:extLst xmlns:a="http://schemas.openxmlformats.org/drawingml/2006/main">
               <a:ext uri="{FF2B5EF4-FFF2-40B4-BE49-F238E27FC236}">
-                <a16:creationId xmlns:a16="http://schemas.microsoft.com/office/drawing/2014/main" id="{8AF5E3EA-513A-4887-9695-2641F32F0E2A}"/>
+                <a16:creationId xmlns:a16="http://schemas.microsoft.com/office/drawing/2014/main" id="{318503B1-D0C8-4AE5-BB3A-F020D2E471BE}"/>
               </a:ext>
             </a:extLst>
           </p:cNvPr>
@@ -14397,7 +14397,7 @@
           <p:cNvPr id="43" name="">
             <a:extLst xmlns:a="http://schemas.openxmlformats.org/drawingml/2006/main">
               <a:ext uri="{FF2B5EF4-FFF2-40B4-BE49-F238E27FC236}">
-                <a16:creationId xmlns:a16="http://schemas.microsoft.com/office/drawing/2014/main" id="{2EC6626E-5B2C-4534-A0A0-BA6A5DBD4F35}"/>
+                <a16:creationId xmlns:a16="http://schemas.microsoft.com/office/drawing/2014/main" id="{683E3E50-AD66-4298-BB2E-AEC64BB90241}"/>
               </a:ext>
             </a:extLst>
           </p:cNvPr>
@@ -14449,7 +14449,7 @@
           <p:cNvPr id="44" name="">
             <a:extLst xmlns:a="http://schemas.openxmlformats.org/drawingml/2006/main">
               <a:ext uri="{FF2B5EF4-FFF2-40B4-BE49-F238E27FC236}">
-                <a16:creationId xmlns:a16="http://schemas.microsoft.com/office/drawing/2014/main" id="{48C99300-26AA-41FC-814E-728AFBE8398D}"/>
+                <a16:creationId xmlns:a16="http://schemas.microsoft.com/office/drawing/2014/main" id="{68DC3BC9-E5A2-4DA9-944F-23553D9C9A29}"/>
               </a:ext>
             </a:extLst>
           </p:cNvPr>
@@ -14480,7 +14480,7 @@
           <p:cNvPr id="45" name="">
             <a:extLst xmlns:a="http://schemas.openxmlformats.org/drawingml/2006/main">
               <a:ext uri="{FF2B5EF4-FFF2-40B4-BE49-F238E27FC236}">
-                <a16:creationId xmlns:a16="http://schemas.microsoft.com/office/drawing/2014/main" id="{8A789D18-2B4A-416C-92F1-D9BC738681E3}"/>
+                <a16:creationId xmlns:a16="http://schemas.microsoft.com/office/drawing/2014/main" id="{F2C01A67-D711-4D36-A9B7-CCFAF1D9CD56}"/>
               </a:ext>
             </a:extLst>
           </p:cNvPr>
@@ -14532,7 +14532,7 @@
           <p:cNvPr id="46" name="">
             <a:extLst xmlns:a="http://schemas.openxmlformats.org/drawingml/2006/main">
               <a:ext uri="{FF2B5EF4-FFF2-40B4-BE49-F238E27FC236}">
-                <a16:creationId xmlns:a16="http://schemas.microsoft.com/office/drawing/2014/main" id="{6C3B9E53-F584-4C38-A339-BEB69463C8A2}"/>
+                <a16:creationId xmlns:a16="http://schemas.microsoft.com/office/drawing/2014/main" id="{1D76960F-056D-4499-9117-34B728D56EB5}"/>
               </a:ext>
             </a:extLst>
           </p:cNvPr>
@@ -14584,7 +14584,7 @@
           <p:cNvPr id="47" name="">
             <a:extLst xmlns:a="http://schemas.openxmlformats.org/drawingml/2006/main">
               <a:ext uri="{FF2B5EF4-FFF2-40B4-BE49-F238E27FC236}">
-                <a16:creationId xmlns:a16="http://schemas.microsoft.com/office/drawing/2014/main" id="{62599D18-28CC-4F36-8683-BC9BE9F4871A}"/>
+                <a16:creationId xmlns:a16="http://schemas.microsoft.com/office/drawing/2014/main" id="{603127D5-4ACA-4E75-97EB-B729F0B90A95}"/>
               </a:ext>
             </a:extLst>
           </p:cNvPr>
@@ -14636,7 +14636,7 @@
           <p:cNvPr id="48" name="">
             <a:extLst xmlns:a="http://schemas.openxmlformats.org/drawingml/2006/main">
               <a:ext uri="{FF2B5EF4-FFF2-40B4-BE49-F238E27FC236}">
-                <a16:creationId xmlns:a16="http://schemas.microsoft.com/office/drawing/2014/main" id="{E063B745-E98F-4AD2-AEF2-A6600A1FEA23}"/>
+                <a16:creationId xmlns:a16="http://schemas.microsoft.com/office/drawing/2014/main" id="{9972E44F-80B5-4A09-AB98-01EAE602EE4F}"/>
               </a:ext>
             </a:extLst>
           </p:cNvPr>
@@ -14688,7 +14688,7 @@
           <p:cNvPr id="49" name="">
             <a:extLst xmlns:a="http://schemas.openxmlformats.org/drawingml/2006/main">
               <a:ext uri="{FF2B5EF4-FFF2-40B4-BE49-F238E27FC236}">
-                <a16:creationId xmlns:a16="http://schemas.microsoft.com/office/drawing/2014/main" id="{646C3997-6F2E-40EC-B6E0-13D1A9B85F14}"/>
+                <a16:creationId xmlns:a16="http://schemas.microsoft.com/office/drawing/2014/main" id="{8A3925BC-7D7C-44A2-88D1-1E685A89F5DB}"/>
               </a:ext>
             </a:extLst>
           </p:cNvPr>
@@ -14740,7 +14740,7 @@
           <p:cNvPr id="50" name="">
             <a:extLst xmlns:a="http://schemas.openxmlformats.org/drawingml/2006/main">
               <a:ext uri="{FF2B5EF4-FFF2-40B4-BE49-F238E27FC236}">
-                <a16:creationId xmlns:a16="http://schemas.microsoft.com/office/drawing/2014/main" id="{A6AF3658-F1B5-4DE5-8CD7-6FA8C26D808F}"/>
+                <a16:creationId xmlns:a16="http://schemas.microsoft.com/office/drawing/2014/main" id="{2A7DE451-17A9-4A8F-A109-4450CB64B1C5}"/>
               </a:ext>
             </a:extLst>
           </p:cNvPr>
@@ -14771,7 +14771,7 @@
           <p:cNvPr id="51" name="">
             <a:extLst xmlns:a="http://schemas.openxmlformats.org/drawingml/2006/main">
               <a:ext uri="{FF2B5EF4-FFF2-40B4-BE49-F238E27FC236}">
-                <a16:creationId xmlns:a16="http://schemas.microsoft.com/office/drawing/2014/main" id="{8EA3F6F5-68CA-462E-BB5F-82DDA41BC584}"/>
+                <a16:creationId xmlns:a16="http://schemas.microsoft.com/office/drawing/2014/main" id="{76187E56-0505-42D1-A399-DA05D6AB709B}"/>
               </a:ext>
             </a:extLst>
           </p:cNvPr>
@@ -14802,7 +14802,7 @@
           <p:cNvPr id="52" name="">
             <a:extLst xmlns:a="http://schemas.openxmlformats.org/drawingml/2006/main">
               <a:ext uri="{FF2B5EF4-FFF2-40B4-BE49-F238E27FC236}">
-                <a16:creationId xmlns:a16="http://schemas.microsoft.com/office/drawing/2014/main" id="{B972899A-29CD-4563-8BDB-43C48CEAC135}"/>
+                <a16:creationId xmlns:a16="http://schemas.microsoft.com/office/drawing/2014/main" id="{64E9CBB3-7AB6-4CF4-8524-B271D2001387}"/>
               </a:ext>
             </a:extLst>
           </p:cNvPr>
@@ -14854,7 +14854,7 @@
           <p:cNvPr id="53" name="">
             <a:extLst xmlns:a="http://schemas.openxmlformats.org/drawingml/2006/main">
               <a:ext uri="{FF2B5EF4-FFF2-40B4-BE49-F238E27FC236}">
-                <a16:creationId xmlns:a16="http://schemas.microsoft.com/office/drawing/2014/main" id="{14DEF1B9-470E-44A8-9C99-21A0C47FCE1D}"/>
+                <a16:creationId xmlns:a16="http://schemas.microsoft.com/office/drawing/2014/main" id="{C0B0F33F-9B22-4BD8-A708-7397749D2C46}"/>
               </a:ext>
             </a:extLst>
           </p:cNvPr>
@@ -14906,7 +14906,7 @@
           <p:cNvPr id="54" name="">
             <a:extLst xmlns:a="http://schemas.openxmlformats.org/drawingml/2006/main">
               <a:ext uri="{FF2B5EF4-FFF2-40B4-BE49-F238E27FC236}">
-                <a16:creationId xmlns:a16="http://schemas.microsoft.com/office/drawing/2014/main" id="{CFD539D7-CA7F-4FD7-8F8F-BD4078A69ECA}"/>
+                <a16:creationId xmlns:a16="http://schemas.microsoft.com/office/drawing/2014/main" id="{6E3DC101-61C2-41BE-BA9B-6DFB3FE99F90}"/>
               </a:ext>
             </a:extLst>
           </p:cNvPr>
@@ -14958,7 +14958,7 @@
           <p:cNvPr id="55" name="">
             <a:extLst xmlns:a="http://schemas.openxmlformats.org/drawingml/2006/main">
               <a:ext uri="{FF2B5EF4-FFF2-40B4-BE49-F238E27FC236}">
-                <a16:creationId xmlns:a16="http://schemas.microsoft.com/office/drawing/2014/main" id="{3E3DFAD0-0CF6-4441-BB83-684EC273612D}"/>
+                <a16:creationId xmlns:a16="http://schemas.microsoft.com/office/drawing/2014/main" id="{5BACC90F-B86F-4F9F-B69F-F04E31BD095D}"/>
               </a:ext>
             </a:extLst>
           </p:cNvPr>
@@ -15010,7 +15010,7 @@
           <p:cNvPr id="56" name="">
             <a:extLst xmlns:a="http://schemas.openxmlformats.org/drawingml/2006/main">
               <a:ext uri="{FF2B5EF4-FFF2-40B4-BE49-F238E27FC236}">
-                <a16:creationId xmlns:a16="http://schemas.microsoft.com/office/drawing/2014/main" id="{D3B12655-9A80-4427-91D0-9208C9D65275}"/>
+                <a16:creationId xmlns:a16="http://schemas.microsoft.com/office/drawing/2014/main" id="{957DDCDC-80BD-46E9-9E74-11EFE7F72725}"/>
               </a:ext>
             </a:extLst>
           </p:cNvPr>
@@ -15062,7 +15062,7 @@
           <p:cNvPr id="57" name="">
             <a:extLst xmlns:a="http://schemas.openxmlformats.org/drawingml/2006/main">
               <a:ext uri="{FF2B5EF4-FFF2-40B4-BE49-F238E27FC236}">
-                <a16:creationId xmlns:a16="http://schemas.microsoft.com/office/drawing/2014/main" id="{04023652-9F42-46C7-A374-C357A7FB6904}"/>
+                <a16:creationId xmlns:a16="http://schemas.microsoft.com/office/drawing/2014/main" id="{027F0929-E236-4908-8BA4-80EBF53EBA74}"/>
               </a:ext>
             </a:extLst>
           </p:cNvPr>
@@ -15093,7 +15093,7 @@
           <p:cNvPr id="58" name="">
             <a:extLst xmlns:a="http://schemas.openxmlformats.org/drawingml/2006/main">
               <a:ext uri="{FF2B5EF4-FFF2-40B4-BE49-F238E27FC236}">
-                <a16:creationId xmlns:a16="http://schemas.microsoft.com/office/drawing/2014/main" id="{896C5794-42AE-4191-8BB6-53CFCD8085A8}"/>
+                <a16:creationId xmlns:a16="http://schemas.microsoft.com/office/drawing/2014/main" id="{CF3B4C04-587E-464F-9E5F-B0969C525574}"/>
               </a:ext>
             </a:extLst>
           </p:cNvPr>
@@ -15145,7 +15145,7 @@
           <p:cNvPr id="59" name="">
             <a:extLst xmlns:a="http://schemas.openxmlformats.org/drawingml/2006/main">
               <a:ext uri="{FF2B5EF4-FFF2-40B4-BE49-F238E27FC236}">
-                <a16:creationId xmlns:a16="http://schemas.microsoft.com/office/drawing/2014/main" id="{58889544-D9B1-4190-A459-2F6F039F48A4}"/>
+                <a16:creationId xmlns:a16="http://schemas.microsoft.com/office/drawing/2014/main" id="{3141A3DF-5D03-47AF-AF32-88218F75220C}"/>
               </a:ext>
             </a:extLst>
           </p:cNvPr>
@@ -15197,7 +15197,7 @@
           <p:cNvPr id="60" name="">
             <a:extLst xmlns:a="http://schemas.openxmlformats.org/drawingml/2006/main">
               <a:ext uri="{FF2B5EF4-FFF2-40B4-BE49-F238E27FC236}">
-                <a16:creationId xmlns:a16="http://schemas.microsoft.com/office/drawing/2014/main" id="{B2DCD55B-7A8D-4AA8-A4A5-60D8D518FFDF}"/>
+                <a16:creationId xmlns:a16="http://schemas.microsoft.com/office/drawing/2014/main" id="{4C8B9FD4-3524-4664-9BB1-8FFE4A01E72B}"/>
               </a:ext>
             </a:extLst>
           </p:cNvPr>
@@ -15249,7 +15249,7 @@
           <p:cNvPr id="61" name="">
             <a:extLst xmlns:a="http://schemas.openxmlformats.org/drawingml/2006/main">
               <a:ext uri="{FF2B5EF4-FFF2-40B4-BE49-F238E27FC236}">
-                <a16:creationId xmlns:a16="http://schemas.microsoft.com/office/drawing/2014/main" id="{6B5E11FD-2D39-4AC4-9C35-A1DE3F6D3564}"/>
+                <a16:creationId xmlns:a16="http://schemas.microsoft.com/office/drawing/2014/main" id="{0E6E5508-AD75-48F3-8E7E-088503613EBB}"/>
               </a:ext>
             </a:extLst>
           </p:cNvPr>
@@ -15301,7 +15301,7 @@
           <p:cNvPr id="62" name="">
             <a:extLst xmlns:a="http://schemas.openxmlformats.org/drawingml/2006/main">
               <a:ext uri="{FF2B5EF4-FFF2-40B4-BE49-F238E27FC236}">
-                <a16:creationId xmlns:a16="http://schemas.microsoft.com/office/drawing/2014/main" id="{ADE3B686-DD57-4EE5-9C30-A3229426827A}"/>
+                <a16:creationId xmlns:a16="http://schemas.microsoft.com/office/drawing/2014/main" id="{25E99A88-7E99-4C3C-B845-1B587B4641E6}"/>
               </a:ext>
             </a:extLst>
           </p:cNvPr>
@@ -15353,7 +15353,7 @@
           <p:cNvPr id="63" name="">
             <a:extLst xmlns:a="http://schemas.openxmlformats.org/drawingml/2006/main">
               <a:ext uri="{FF2B5EF4-FFF2-40B4-BE49-F238E27FC236}">
-                <a16:creationId xmlns:a16="http://schemas.microsoft.com/office/drawing/2014/main" id="{8EB5AB7C-3252-4C23-A24C-A61A0F12C14C}"/>
+                <a16:creationId xmlns:a16="http://schemas.microsoft.com/office/drawing/2014/main" id="{2549074D-3F7D-4A8D-B4BF-56B3147A2743}"/>
               </a:ext>
             </a:extLst>
           </p:cNvPr>
@@ -15384,7 +15384,7 @@
           <p:cNvPr id="64" name="">
             <a:extLst xmlns:a="http://schemas.openxmlformats.org/drawingml/2006/main">
               <a:ext uri="{FF2B5EF4-FFF2-40B4-BE49-F238E27FC236}">
-                <a16:creationId xmlns:a16="http://schemas.microsoft.com/office/drawing/2014/main" id="{D3002CE6-51BA-4DAD-94E5-97DFFBB5C6B9}"/>
+                <a16:creationId xmlns:a16="http://schemas.microsoft.com/office/drawing/2014/main" id="{E7F54D0C-DFD7-4F0F-946F-AF603135E159}"/>
               </a:ext>
             </a:extLst>
           </p:cNvPr>
@@ -15415,7 +15415,7 @@
           <p:cNvPr id="65" name="">
             <a:extLst xmlns:a="http://schemas.openxmlformats.org/drawingml/2006/main">
               <a:ext uri="{FF2B5EF4-FFF2-40B4-BE49-F238E27FC236}">
-                <a16:creationId xmlns:a16="http://schemas.microsoft.com/office/drawing/2014/main" id="{494E020A-4DD7-4876-AF03-D36680549625}"/>
+                <a16:creationId xmlns:a16="http://schemas.microsoft.com/office/drawing/2014/main" id="{1F142270-8055-4E88-BDA8-03C13F923EA3}"/>
               </a:ext>
             </a:extLst>
           </p:cNvPr>
@@ -15467,7 +15467,7 @@
           <p:cNvPr id="66" name="">
             <a:extLst xmlns:a="http://schemas.openxmlformats.org/drawingml/2006/main">
               <a:ext uri="{FF2B5EF4-FFF2-40B4-BE49-F238E27FC236}">
-                <a16:creationId xmlns:a16="http://schemas.microsoft.com/office/drawing/2014/main" id="{DE717CBD-5516-4F29-A096-257BD4D6E166}"/>
+                <a16:creationId xmlns:a16="http://schemas.microsoft.com/office/drawing/2014/main" id="{A4CBBE71-9170-4B8E-B129-E2D83B6699DF}"/>
               </a:ext>
             </a:extLst>
           </p:cNvPr>
@@ -15519,7 +15519,7 @@
           <p:cNvPr id="67" name="">
             <a:extLst xmlns:a="http://schemas.openxmlformats.org/drawingml/2006/main">
               <a:ext uri="{FF2B5EF4-FFF2-40B4-BE49-F238E27FC236}">
-                <a16:creationId xmlns:a16="http://schemas.microsoft.com/office/drawing/2014/main" id="{E04E6413-69AF-4682-AEB3-19344EFC759A}"/>
+                <a16:creationId xmlns:a16="http://schemas.microsoft.com/office/drawing/2014/main" id="{53C12C4E-2B90-414E-8C3C-73AC2B727EDB}"/>
               </a:ext>
             </a:extLst>
           </p:cNvPr>
@@ -15571,7 +15571,7 @@
           <p:cNvPr id="68" name="">
             <a:extLst xmlns:a="http://schemas.openxmlformats.org/drawingml/2006/main">
               <a:ext uri="{FF2B5EF4-FFF2-40B4-BE49-F238E27FC236}">
-                <a16:creationId xmlns:a16="http://schemas.microsoft.com/office/drawing/2014/main" id="{7C715595-1186-47CF-BD63-DE53ADD08529}"/>
+                <a16:creationId xmlns:a16="http://schemas.microsoft.com/office/drawing/2014/main" id="{3AD21564-EC93-41D0-8E8F-11B63E5D3D77}"/>
               </a:ext>
             </a:extLst>
           </p:cNvPr>
@@ -15623,7 +15623,7 @@
           <p:cNvPr id="69" name="">
             <a:extLst xmlns:a="http://schemas.openxmlformats.org/drawingml/2006/main">
               <a:ext uri="{FF2B5EF4-FFF2-40B4-BE49-F238E27FC236}">
-                <a16:creationId xmlns:a16="http://schemas.microsoft.com/office/drawing/2014/main" id="{61812E32-5607-4ED8-984E-3D02DEA1FBF8}"/>
+                <a16:creationId xmlns:a16="http://schemas.microsoft.com/office/drawing/2014/main" id="{889EB583-6F63-4A68-87E5-8974F094B3B4}"/>
               </a:ext>
             </a:extLst>
           </p:cNvPr>
@@ -15675,7 +15675,7 @@
           <p:cNvPr id="70" name="">
             <a:extLst xmlns:a="http://schemas.openxmlformats.org/drawingml/2006/main">
               <a:ext uri="{FF2B5EF4-FFF2-40B4-BE49-F238E27FC236}">
-                <a16:creationId xmlns:a16="http://schemas.microsoft.com/office/drawing/2014/main" id="{5061C9E3-EA22-4093-BC3E-DDB30AD2CEC6}"/>
+                <a16:creationId xmlns:a16="http://schemas.microsoft.com/office/drawing/2014/main" id="{8D86D056-A16A-47DF-9A0F-53C80B1F703F}"/>
               </a:ext>
             </a:extLst>
           </p:cNvPr>
@@ -15706,7 +15706,7 @@
           <p:cNvPr id="71" name="">
             <a:extLst xmlns:a="http://schemas.openxmlformats.org/drawingml/2006/main">
               <a:ext uri="{FF2B5EF4-FFF2-40B4-BE49-F238E27FC236}">
-                <a16:creationId xmlns:a16="http://schemas.microsoft.com/office/drawing/2014/main" id="{591367C4-86CC-4608-AE74-9D5A886CC408}"/>
+                <a16:creationId xmlns:a16="http://schemas.microsoft.com/office/drawing/2014/main" id="{CDDB432D-1ABE-414E-8032-1E175AA22D0F}"/>
               </a:ext>
             </a:extLst>
           </p:cNvPr>
@@ -15758,7 +15758,7 @@
           <p:cNvPr id="72" name="">
             <a:extLst xmlns:a="http://schemas.openxmlformats.org/drawingml/2006/main">
               <a:ext uri="{FF2B5EF4-FFF2-40B4-BE49-F238E27FC236}">
-                <a16:creationId xmlns:a16="http://schemas.microsoft.com/office/drawing/2014/main" id="{D3B3421F-F9A5-4ABD-A39F-2392C5EE6C61}"/>
+                <a16:creationId xmlns:a16="http://schemas.microsoft.com/office/drawing/2014/main" id="{DE3A0C6B-D395-4D18-86B0-5226E528FB6B}"/>
               </a:ext>
             </a:extLst>
           </p:cNvPr>
@@ -15810,7 +15810,7 @@
           <p:cNvPr id="73" name="">
             <a:extLst xmlns:a="http://schemas.openxmlformats.org/drawingml/2006/main">
               <a:ext uri="{FF2B5EF4-FFF2-40B4-BE49-F238E27FC236}">
-                <a16:creationId xmlns:a16="http://schemas.microsoft.com/office/drawing/2014/main" id="{ABABB991-0602-4473-B35B-CB4178C3FE7E}"/>
+                <a16:creationId xmlns:a16="http://schemas.microsoft.com/office/drawing/2014/main" id="{CCAA35B1-B700-47B1-B2FE-6171C12EB9F4}"/>
               </a:ext>
             </a:extLst>
           </p:cNvPr>
@@ -15862,7 +15862,7 @@
           <p:cNvPr id="74" name="">
             <a:extLst xmlns:a="http://schemas.openxmlformats.org/drawingml/2006/main">
               <a:ext uri="{FF2B5EF4-FFF2-40B4-BE49-F238E27FC236}">
-                <a16:creationId xmlns:a16="http://schemas.microsoft.com/office/drawing/2014/main" id="{4DF2B36D-492A-46CA-A84D-32F22C0515B8}"/>
+                <a16:creationId xmlns:a16="http://schemas.microsoft.com/office/drawing/2014/main" id="{B514A7CE-C8F9-464D-BF57-DC9E6F505FF2}"/>
               </a:ext>
             </a:extLst>
           </p:cNvPr>
@@ -15914,7 +15914,7 @@
           <p:cNvPr id="75" name="">
             <a:extLst xmlns:a="http://schemas.openxmlformats.org/drawingml/2006/main">
               <a:ext uri="{FF2B5EF4-FFF2-40B4-BE49-F238E27FC236}">
-                <a16:creationId xmlns:a16="http://schemas.microsoft.com/office/drawing/2014/main" id="{8AEF9497-BCDB-44DE-984C-F95D9EC11CC0}"/>
+                <a16:creationId xmlns:a16="http://schemas.microsoft.com/office/drawing/2014/main" id="{A3A0DEDD-56E1-40E1-98FD-B7C474E88CD0}"/>
               </a:ext>
             </a:extLst>
           </p:cNvPr>
@@ -15966,7 +15966,7 @@
           <p:cNvPr id="76" name="">
             <a:extLst xmlns:a="http://schemas.openxmlformats.org/drawingml/2006/main">
               <a:ext uri="{FF2B5EF4-FFF2-40B4-BE49-F238E27FC236}">
-                <a16:creationId xmlns:a16="http://schemas.microsoft.com/office/drawing/2014/main" id="{9FBE8AAE-60DF-4A6D-96E1-4E5FF81CB83A}"/>
+                <a16:creationId xmlns:a16="http://schemas.microsoft.com/office/drawing/2014/main" id="{2381329A-D941-473A-8CFA-31B3465940E6}"/>
               </a:ext>
             </a:extLst>
           </p:cNvPr>
@@ -15997,7 +15997,7 @@
           <p:cNvPr id="77" name="">
             <a:extLst xmlns:a="http://schemas.openxmlformats.org/drawingml/2006/main">
               <a:ext uri="{FF2B5EF4-FFF2-40B4-BE49-F238E27FC236}">
-                <a16:creationId xmlns:a16="http://schemas.microsoft.com/office/drawing/2014/main" id="{5F9352F2-8194-4F6B-BE80-E11D00F0B981}"/>
+                <a16:creationId xmlns:a16="http://schemas.microsoft.com/office/drawing/2014/main" id="{874105E7-75F0-49CA-A475-1CD492BBCAE3}"/>
               </a:ext>
             </a:extLst>
           </p:cNvPr>
@@ -16028,7 +16028,7 @@
           <p:cNvPr id="78" name="">
             <a:extLst xmlns:a="http://schemas.openxmlformats.org/drawingml/2006/main">
               <a:ext uri="{FF2B5EF4-FFF2-40B4-BE49-F238E27FC236}">
-                <a16:creationId xmlns:a16="http://schemas.microsoft.com/office/drawing/2014/main" id="{07F4F189-41EA-4F58-8D4D-24624FEB9022}"/>
+                <a16:creationId xmlns:a16="http://schemas.microsoft.com/office/drawing/2014/main" id="{6282A09C-2E8E-4FFA-9D7F-2F956A4C2AF8}"/>
               </a:ext>
             </a:extLst>
           </p:cNvPr>
@@ -16080,7 +16080,7 @@
           <p:cNvPr id="79" name="">
             <a:extLst xmlns:a="http://schemas.openxmlformats.org/drawingml/2006/main">
               <a:ext uri="{FF2B5EF4-FFF2-40B4-BE49-F238E27FC236}">
-                <a16:creationId xmlns:a16="http://schemas.microsoft.com/office/drawing/2014/main" id="{8C40FE67-361E-4199-82E3-E93988DA361D}"/>
+                <a16:creationId xmlns:a16="http://schemas.microsoft.com/office/drawing/2014/main" id="{CC411B2C-E967-4117-BDDC-CB29653C7A10}"/>
               </a:ext>
             </a:extLst>
           </p:cNvPr>
@@ -16132,7 +16132,7 @@
           <p:cNvPr id="80" name="">
             <a:extLst xmlns:a="http://schemas.openxmlformats.org/drawingml/2006/main">
               <a:ext uri="{FF2B5EF4-FFF2-40B4-BE49-F238E27FC236}">
-                <a16:creationId xmlns:a16="http://schemas.microsoft.com/office/drawing/2014/main" id="{B9A684F4-BBC3-4038-AB8D-FF72C99B5D72}"/>
+                <a16:creationId xmlns:a16="http://schemas.microsoft.com/office/drawing/2014/main" id="{5D1BD8E7-63C8-4B1F-A0ED-693347E5364B}"/>
               </a:ext>
             </a:extLst>
           </p:cNvPr>
@@ -16184,7 +16184,7 @@
           <p:cNvPr id="81" name="">
             <a:extLst xmlns:a="http://schemas.openxmlformats.org/drawingml/2006/main">
               <a:ext uri="{FF2B5EF4-FFF2-40B4-BE49-F238E27FC236}">
-                <a16:creationId xmlns:a16="http://schemas.microsoft.com/office/drawing/2014/main" id="{5D1F6FDF-FEA1-426E-A8C9-493CA72675E9}"/>
+                <a16:creationId xmlns:a16="http://schemas.microsoft.com/office/drawing/2014/main" id="{E0DB2C1D-2669-4EA7-8ADD-E3ECBD5520A8}"/>
               </a:ext>
             </a:extLst>
           </p:cNvPr>
@@ -16236,7 +16236,7 @@
           <p:cNvPr id="82" name="">
             <a:extLst xmlns:a="http://schemas.openxmlformats.org/drawingml/2006/main">
               <a:ext uri="{FF2B5EF4-FFF2-40B4-BE49-F238E27FC236}">
-                <a16:creationId xmlns:a16="http://schemas.microsoft.com/office/drawing/2014/main" id="{23A0C1E5-039C-46E8-B95D-E592228E30A9}"/>
+                <a16:creationId xmlns:a16="http://schemas.microsoft.com/office/drawing/2014/main" id="{BE9F20C6-7CB3-41C0-8A24-9C218B4CBBDC}"/>
               </a:ext>
             </a:extLst>
           </p:cNvPr>
@@ -16288,7 +16288,7 @@
           <p:cNvPr id="83" name="">
             <a:extLst xmlns:a="http://schemas.openxmlformats.org/drawingml/2006/main">
               <a:ext uri="{FF2B5EF4-FFF2-40B4-BE49-F238E27FC236}">
-                <a16:creationId xmlns:a16="http://schemas.microsoft.com/office/drawing/2014/main" id="{D5F94B78-A91A-4F1C-B5BC-EDFB869FED56}"/>
+                <a16:creationId xmlns:a16="http://schemas.microsoft.com/office/drawing/2014/main" id="{827F75C4-5079-44C9-862E-D3D9D79CBA5A}"/>
               </a:ext>
             </a:extLst>
           </p:cNvPr>
@@ -16319,7 +16319,7 @@
           <p:cNvPr id="84" name="">
             <a:extLst xmlns:a="http://schemas.openxmlformats.org/drawingml/2006/main">
               <a:ext uri="{FF2B5EF4-FFF2-40B4-BE49-F238E27FC236}">
-                <a16:creationId xmlns:a16="http://schemas.microsoft.com/office/drawing/2014/main" id="{CDDC767D-19DA-4E13-8701-4E8993E5A80C}"/>
+                <a16:creationId xmlns:a16="http://schemas.microsoft.com/office/drawing/2014/main" id="{4B4311B5-FF20-4169-9FBB-C3DC5546E1D5}"/>
               </a:ext>
             </a:extLst>
           </p:cNvPr>
@@ -16371,7 +16371,7 @@
           <p:cNvPr id="85" name="">
             <a:extLst xmlns:a="http://schemas.openxmlformats.org/drawingml/2006/main">
               <a:ext uri="{FF2B5EF4-FFF2-40B4-BE49-F238E27FC236}">
-                <a16:creationId xmlns:a16="http://schemas.microsoft.com/office/drawing/2014/main" id="{4F485F76-2FEA-44C0-8BCC-4C3A4B6AE388}"/>
+                <a16:creationId xmlns:a16="http://schemas.microsoft.com/office/drawing/2014/main" id="{28219F82-DBD9-4943-8758-0E35EDB0EA2B}"/>
               </a:ext>
             </a:extLst>
           </p:cNvPr>
@@ -16423,7 +16423,7 @@
           <p:cNvPr id="86" name="">
             <a:extLst xmlns:a="http://schemas.openxmlformats.org/drawingml/2006/main">
               <a:ext uri="{FF2B5EF4-FFF2-40B4-BE49-F238E27FC236}">
-                <a16:creationId xmlns:a16="http://schemas.microsoft.com/office/drawing/2014/main" id="{970336B9-A885-4239-934F-2DDFAA2EAD4D}"/>
+                <a16:creationId xmlns:a16="http://schemas.microsoft.com/office/drawing/2014/main" id="{6151C05C-145E-46C3-A636-1283D851DE0C}"/>
               </a:ext>
             </a:extLst>
           </p:cNvPr>
@@ -16475,7 +16475,7 @@
           <p:cNvPr id="87" name="">
             <a:extLst xmlns:a="http://schemas.openxmlformats.org/drawingml/2006/main">
               <a:ext uri="{FF2B5EF4-FFF2-40B4-BE49-F238E27FC236}">
-                <a16:creationId xmlns:a16="http://schemas.microsoft.com/office/drawing/2014/main" id="{1C7A0ABE-B520-4038-838B-D7E4F0AD1BA1}"/>
+                <a16:creationId xmlns:a16="http://schemas.microsoft.com/office/drawing/2014/main" id="{72CE3916-3FCF-466A-A801-703F5F0F1A60}"/>
               </a:ext>
             </a:extLst>
           </p:cNvPr>
@@ -16527,7 +16527,7 @@
           <p:cNvPr id="88" name="">
             <a:extLst xmlns:a="http://schemas.openxmlformats.org/drawingml/2006/main">
               <a:ext uri="{FF2B5EF4-FFF2-40B4-BE49-F238E27FC236}">
-                <a16:creationId xmlns:a16="http://schemas.microsoft.com/office/drawing/2014/main" id="{1548CC59-606F-47F7-A3C3-FB0EC9DECE46}"/>
+                <a16:creationId xmlns:a16="http://schemas.microsoft.com/office/drawing/2014/main" id="{F575D92E-A6F5-410F-ADDE-C443775050A4}"/>
               </a:ext>
             </a:extLst>
           </p:cNvPr>
@@ -16579,7 +16579,7 @@
           <p:cNvPr id="89" name="">
             <a:extLst xmlns:a="http://schemas.openxmlformats.org/drawingml/2006/main">
               <a:ext uri="{FF2B5EF4-FFF2-40B4-BE49-F238E27FC236}">
-                <a16:creationId xmlns:a16="http://schemas.microsoft.com/office/drawing/2014/main" id="{7B038747-21C7-4317-AD10-DF507F93075B}"/>
+                <a16:creationId xmlns:a16="http://schemas.microsoft.com/office/drawing/2014/main" id="{56EC1363-256D-4176-88F1-D0207F0698C4}"/>
               </a:ext>
             </a:extLst>
           </p:cNvPr>
@@ -16610,7 +16610,7 @@
           <p:cNvPr id="90" name="">
             <a:extLst xmlns:a="http://schemas.openxmlformats.org/drawingml/2006/main">
               <a:ext uri="{FF2B5EF4-FFF2-40B4-BE49-F238E27FC236}">
-                <a16:creationId xmlns:a16="http://schemas.microsoft.com/office/drawing/2014/main" id="{0B4E67D6-477F-41BE-9E52-3764DFD02101}"/>
+                <a16:creationId xmlns:a16="http://schemas.microsoft.com/office/drawing/2014/main" id="{F45F9D4E-5D9D-4297-BE58-D7D3BF22D581}"/>
               </a:ext>
             </a:extLst>
           </p:cNvPr>
@@ -16641,7 +16641,7 @@
           <p:cNvPr id="91" name="">
             <a:extLst xmlns:a="http://schemas.openxmlformats.org/drawingml/2006/main">
               <a:ext uri="{FF2B5EF4-FFF2-40B4-BE49-F238E27FC236}">
-                <a16:creationId xmlns:a16="http://schemas.microsoft.com/office/drawing/2014/main" id="{04504871-3FE6-4053-A881-CB6D2F48D2ED}"/>
+                <a16:creationId xmlns:a16="http://schemas.microsoft.com/office/drawing/2014/main" id="{385187F2-5C37-4422-BB72-8D626C3DC362}"/>
               </a:ext>
             </a:extLst>
           </p:cNvPr>
@@ -16693,7 +16693,7 @@
           <p:cNvPr id="92" name="">
             <a:extLst xmlns:a="http://schemas.openxmlformats.org/drawingml/2006/main">
               <a:ext uri="{FF2B5EF4-FFF2-40B4-BE49-F238E27FC236}">
-                <a16:creationId xmlns:a16="http://schemas.microsoft.com/office/drawing/2014/main" id="{9506F26F-6AD8-4EBF-9518-AD7D988526B3}"/>
+                <a16:creationId xmlns:a16="http://schemas.microsoft.com/office/drawing/2014/main" id="{071FEE59-9733-40C5-9952-16C2AECB2851}"/>
               </a:ext>
             </a:extLst>
           </p:cNvPr>
@@ -16745,7 +16745,7 @@
           <p:cNvPr id="93" name="">
             <a:extLst xmlns:a="http://schemas.openxmlformats.org/drawingml/2006/main">
               <a:ext uri="{FF2B5EF4-FFF2-40B4-BE49-F238E27FC236}">
-                <a16:creationId xmlns:a16="http://schemas.microsoft.com/office/drawing/2014/main" id="{A4029A36-31AD-40C9-B23D-E6907AEF9920}"/>
+                <a16:creationId xmlns:a16="http://schemas.microsoft.com/office/drawing/2014/main" id="{5FC2F0FF-F25B-435C-B258-E6A252ECAFE6}"/>
               </a:ext>
             </a:extLst>
           </p:cNvPr>
@@ -16797,7 +16797,7 @@
           <p:cNvPr id="94" name="">
             <a:extLst xmlns:a="http://schemas.openxmlformats.org/drawingml/2006/main">
               <a:ext uri="{FF2B5EF4-FFF2-40B4-BE49-F238E27FC236}">
-                <a16:creationId xmlns:a16="http://schemas.microsoft.com/office/drawing/2014/main" id="{91E491C4-524A-44A7-B994-911CE6F6DEC3}"/>
+                <a16:creationId xmlns:a16="http://schemas.microsoft.com/office/drawing/2014/main" id="{15A753C4-FA32-4B62-A016-D05B61EEF166}"/>
               </a:ext>
             </a:extLst>
           </p:cNvPr>
@@ -16849,7 +16849,7 @@
           <p:cNvPr id="95" name="">
             <a:extLst xmlns:a="http://schemas.openxmlformats.org/drawingml/2006/main">
               <a:ext uri="{FF2B5EF4-FFF2-40B4-BE49-F238E27FC236}">
-                <a16:creationId xmlns:a16="http://schemas.microsoft.com/office/drawing/2014/main" id="{FB231900-35DF-48E1-ACF9-CCF2B4E39BC8}"/>
+                <a16:creationId xmlns:a16="http://schemas.microsoft.com/office/drawing/2014/main" id="{5FAC4BE0-68E0-400C-899D-7CC868133518}"/>
               </a:ext>
             </a:extLst>
           </p:cNvPr>
@@ -16901,7 +16901,7 @@
           <p:cNvPr id="96" name="">
             <a:extLst xmlns:a="http://schemas.openxmlformats.org/drawingml/2006/main">
               <a:ext uri="{FF2B5EF4-FFF2-40B4-BE49-F238E27FC236}">
-                <a16:creationId xmlns:a16="http://schemas.microsoft.com/office/drawing/2014/main" id="{D7FB6BB3-4437-4E8A-84BD-A761FBD52202}"/>
+                <a16:creationId xmlns:a16="http://schemas.microsoft.com/office/drawing/2014/main" id="{3FB181AF-A6D0-4C09-A80B-3DE6CE06A349}"/>
               </a:ext>
             </a:extLst>
           </p:cNvPr>
@@ -16932,7 +16932,7 @@
           <p:cNvPr id="97" name="">
             <a:extLst xmlns:a="http://schemas.openxmlformats.org/drawingml/2006/main">
               <a:ext uri="{FF2B5EF4-FFF2-40B4-BE49-F238E27FC236}">
-                <a16:creationId xmlns:a16="http://schemas.microsoft.com/office/drawing/2014/main" id="{AF4CFCBC-9256-427C-AB52-BE4E299BBD61}"/>
+                <a16:creationId xmlns:a16="http://schemas.microsoft.com/office/drawing/2014/main" id="{88F83163-4671-4E36-9D8B-1708ECFBCB42}"/>
               </a:ext>
             </a:extLst>
           </p:cNvPr>
@@ -16984,7 +16984,7 @@
           <p:cNvPr id="98" name="">
             <a:extLst xmlns:a="http://schemas.openxmlformats.org/drawingml/2006/main">
               <a:ext uri="{FF2B5EF4-FFF2-40B4-BE49-F238E27FC236}">
-                <a16:creationId xmlns:a16="http://schemas.microsoft.com/office/drawing/2014/main" id="{4FE008F3-243F-4A4D-8B27-489A2C981C0C}"/>
+                <a16:creationId xmlns:a16="http://schemas.microsoft.com/office/drawing/2014/main" id="{E196A430-5D4F-49BC-A01F-C86FDCECE189}"/>
               </a:ext>
             </a:extLst>
           </p:cNvPr>
@@ -17036,7 +17036,7 @@
           <p:cNvPr id="99" name="">
             <a:extLst xmlns:a="http://schemas.openxmlformats.org/drawingml/2006/main">
               <a:ext uri="{FF2B5EF4-FFF2-40B4-BE49-F238E27FC236}">
-                <a16:creationId xmlns:a16="http://schemas.microsoft.com/office/drawing/2014/main" id="{6D390D0F-0AC6-4FEA-B34C-51B9C04B12F0}"/>
+                <a16:creationId xmlns:a16="http://schemas.microsoft.com/office/drawing/2014/main" id="{E63DDE9B-28CF-4C2F-B452-3A2101DF8BF7}"/>
               </a:ext>
             </a:extLst>
           </p:cNvPr>
@@ -17088,7 +17088,7 @@
           <p:cNvPr id="100" name="">
             <a:extLst xmlns:a="http://schemas.openxmlformats.org/drawingml/2006/main">
               <a:ext uri="{FF2B5EF4-FFF2-40B4-BE49-F238E27FC236}">
-                <a16:creationId xmlns:a16="http://schemas.microsoft.com/office/drawing/2014/main" id="{5A03FA14-F7D5-4B96-AFDE-00EFFB244D18}"/>
+                <a16:creationId xmlns:a16="http://schemas.microsoft.com/office/drawing/2014/main" id="{FB9211C8-30F7-4792-AF31-2BD48CFE2801}"/>
               </a:ext>
             </a:extLst>
           </p:cNvPr>
@@ -17140,7 +17140,7 @@
           <p:cNvPr id="101" name="">
             <a:extLst xmlns:a="http://schemas.openxmlformats.org/drawingml/2006/main">
               <a:ext uri="{FF2B5EF4-FFF2-40B4-BE49-F238E27FC236}">
-                <a16:creationId xmlns:a16="http://schemas.microsoft.com/office/drawing/2014/main" id="{991F6C6F-B166-4668-ADF4-00A463E9FBE5}"/>
+                <a16:creationId xmlns:a16="http://schemas.microsoft.com/office/drawing/2014/main" id="{D2895228-938E-464D-BD0F-7D5E47A6D72E}"/>
               </a:ext>
             </a:extLst>
           </p:cNvPr>
@@ -17190,7 +17190,7 @@
     </p:spTree>
     <p:extLst>
       <p:ext uri="{BB962C8B-B14F-4D97-AF65-F5344CB8AC3E}">
-        <p14:creationId xmlns:p14="http://schemas.microsoft.com/office/powerpoint/2010/main" val="111577149"/>
+        <p14:creationId xmlns:p14="http://schemas.microsoft.com/office/powerpoint/2010/main" val="1716648146"/>
       </p:ext>
     </p:extLst>
   </p:cSld>
@@ -17221,7 +17221,7 @@
           <p:cNvPr id="96" name="">
             <a:extLst xmlns:a="http://schemas.openxmlformats.org/drawingml/2006/main">
               <a:ext uri="{FF2B5EF4-FFF2-40B4-BE49-F238E27FC236}">
-                <a16:creationId xmlns:a16="http://schemas.microsoft.com/office/drawing/2014/main" id="{33D0CE2D-96F4-4D57-97B4-9797DE1DFE6A}"/>
+                <a16:creationId xmlns:a16="http://schemas.microsoft.com/office/drawing/2014/main" id="{12E7BAD2-1AB8-4A9C-A318-296D03C29D48}"/>
               </a:ext>
             </a:extLst>
           </p:cNvPr>
@@ -17254,7 +17254,7 @@
           <p:cNvPr id="2" name="">
             <a:extLst xmlns:a="http://schemas.openxmlformats.org/drawingml/2006/main">
               <a:ext uri="{FF2B5EF4-FFF2-40B4-BE49-F238E27FC236}">
-                <a16:creationId xmlns:a16="http://schemas.microsoft.com/office/drawing/2014/main" id="{F057D581-DFEF-4910-82C9-1FE70FD80178}"/>
+                <a16:creationId xmlns:a16="http://schemas.microsoft.com/office/drawing/2014/main" id="{54399CCB-5A4F-4836-B933-1E7472095759}"/>
               </a:ext>
             </a:extLst>
           </p:cNvPr>
@@ -17285,7 +17285,7 @@
           <p:cNvPr id="3" name="">
             <a:extLst xmlns:a="http://schemas.openxmlformats.org/drawingml/2006/main">
               <a:ext uri="{FF2B5EF4-FFF2-40B4-BE49-F238E27FC236}">
-                <a16:creationId xmlns:a16="http://schemas.microsoft.com/office/drawing/2014/main" id="{652BE3D7-8D07-4466-9F5D-56239F49EF9B}"/>
+                <a16:creationId xmlns:a16="http://schemas.microsoft.com/office/drawing/2014/main" id="{B95471DC-B54B-47C6-9D23-CC00853728D8}"/>
               </a:ext>
             </a:extLst>
           </p:cNvPr>
@@ -17337,7 +17337,7 @@
           <p:cNvPr id="4" name="">
             <a:extLst xmlns:a="http://schemas.openxmlformats.org/drawingml/2006/main">
               <a:ext uri="{FF2B5EF4-FFF2-40B4-BE49-F238E27FC236}">
-                <a16:creationId xmlns:a16="http://schemas.microsoft.com/office/drawing/2014/main" id="{47D0B885-A464-4AD6-BABA-DC07F2154AC3}"/>
+                <a16:creationId xmlns:a16="http://schemas.microsoft.com/office/drawing/2014/main" id="{B5EF31B6-0F1B-4AEB-B6AF-82AF3569C8F8}"/>
               </a:ext>
             </a:extLst>
           </p:cNvPr>
@@ -17389,7 +17389,7 @@
           <p:cNvPr id="5" name="">
             <a:extLst xmlns:a="http://schemas.openxmlformats.org/drawingml/2006/main">
               <a:ext uri="{FF2B5EF4-FFF2-40B4-BE49-F238E27FC236}">
-                <a16:creationId xmlns:a16="http://schemas.microsoft.com/office/drawing/2014/main" id="{136AC35F-E0F0-4CF6-8579-594FF3980EB4}"/>
+                <a16:creationId xmlns:a16="http://schemas.microsoft.com/office/drawing/2014/main" id="{D97AEDC2-414C-4111-B3B6-18E5FE5479B1}"/>
               </a:ext>
             </a:extLst>
           </p:cNvPr>
@@ -17424,7 +17424,7 @@
           <p:nvPr/>
         </p:nvPicPr>
         <p:blipFill>
-          <a:blip xmlns:r="http://schemas.openxmlformats.org/officeDocument/2006/relationships" xmlns:a="http://schemas.openxmlformats.org/drawingml/2006/main" r:embed="R7e1cde1767d94946"/>
+          <a:blip xmlns:r="http://schemas.openxmlformats.org/officeDocument/2006/relationships" xmlns:a="http://schemas.openxmlformats.org/drawingml/2006/main" r:embed="R227c5bb227bb4b38"/>
           <a:stretch xmlns:a="http://schemas.openxmlformats.org/drawingml/2006/main"/>
         </p:blipFill>
         <p:spPr>
@@ -17442,7 +17442,7 @@
           <p:cNvPr id="7" name="">
             <a:extLst xmlns:a="http://schemas.openxmlformats.org/drawingml/2006/main">
               <a:ext uri="{FF2B5EF4-FFF2-40B4-BE49-F238E27FC236}">
-                <a16:creationId xmlns:a16="http://schemas.microsoft.com/office/drawing/2014/main" id="{41DB9317-492F-45DF-B969-4DDDD2BD0B01}"/>
+                <a16:creationId xmlns:a16="http://schemas.microsoft.com/office/drawing/2014/main" id="{E4B1E739-93F1-4798-B2E0-E7FBF9C334BF}"/>
               </a:ext>
             </a:extLst>
           </p:cNvPr>
@@ -17494,7 +17494,7 @@
           <p:cNvPr id="8" name="">
             <a:extLst xmlns:a="http://schemas.openxmlformats.org/drawingml/2006/main">
               <a:ext uri="{FF2B5EF4-FFF2-40B4-BE49-F238E27FC236}">
-                <a16:creationId xmlns:a16="http://schemas.microsoft.com/office/drawing/2014/main" id="{DD504C7E-8D8C-4A1C-A89A-90425D186441}"/>
+                <a16:creationId xmlns:a16="http://schemas.microsoft.com/office/drawing/2014/main" id="{628E1ED6-C539-43D6-88F6-344E1AB214C3}"/>
               </a:ext>
             </a:extLst>
           </p:cNvPr>
@@ -17546,7 +17546,7 @@
           <p:cNvPr id="9" name="">
             <a:extLst xmlns:a="http://schemas.openxmlformats.org/drawingml/2006/main">
               <a:ext uri="{FF2B5EF4-FFF2-40B4-BE49-F238E27FC236}">
-                <a16:creationId xmlns:a16="http://schemas.microsoft.com/office/drawing/2014/main" id="{76A7C251-193A-4638-B9A6-5972E96DA1F0}"/>
+                <a16:creationId xmlns:a16="http://schemas.microsoft.com/office/drawing/2014/main" id="{F08AC596-E3F6-455B-A14D-F7F9A3500FD1}"/>
               </a:ext>
             </a:extLst>
           </p:cNvPr>
@@ -17598,7 +17598,7 @@
           <p:cNvPr id="10" name="">
             <a:extLst xmlns:a="http://schemas.openxmlformats.org/drawingml/2006/main">
               <a:ext uri="{FF2B5EF4-FFF2-40B4-BE49-F238E27FC236}">
-                <a16:creationId xmlns:a16="http://schemas.microsoft.com/office/drawing/2014/main" id="{EFAFC55B-A81D-48D6-8D68-CD5BAB609F5A}"/>
+                <a16:creationId xmlns:a16="http://schemas.microsoft.com/office/drawing/2014/main" id="{5C371D51-3755-47BC-AB61-28616C05599F}"/>
               </a:ext>
             </a:extLst>
           </p:cNvPr>
@@ -17650,7 +17650,7 @@
           <p:cNvPr id="11" name="">
             <a:extLst xmlns:a="http://schemas.openxmlformats.org/drawingml/2006/main">
               <a:ext uri="{FF2B5EF4-FFF2-40B4-BE49-F238E27FC236}">
-                <a16:creationId xmlns:a16="http://schemas.microsoft.com/office/drawing/2014/main" id="{06C969D9-C39F-4257-9B9B-95480FFD92EF}"/>
+                <a16:creationId xmlns:a16="http://schemas.microsoft.com/office/drawing/2014/main" id="{EE228167-225A-4E23-BB80-B2E1AA7B9031}"/>
               </a:ext>
             </a:extLst>
           </p:cNvPr>
@@ -17681,7 +17681,7 @@
           <p:cNvPr id="12" name="">
             <a:extLst xmlns:a="http://schemas.openxmlformats.org/drawingml/2006/main">
               <a:ext uri="{FF2B5EF4-FFF2-40B4-BE49-F238E27FC236}">
-                <a16:creationId xmlns:a16="http://schemas.microsoft.com/office/drawing/2014/main" id="{E71D6AD7-CCCF-44DD-929E-718D4285D559}"/>
+                <a16:creationId xmlns:a16="http://schemas.microsoft.com/office/drawing/2014/main" id="{122DD4A0-CB70-45D5-946A-C9B4107A9B89}"/>
               </a:ext>
             </a:extLst>
           </p:cNvPr>
@@ -17712,7 +17712,7 @@
           <p:cNvPr id="13" name="">
             <a:extLst xmlns:a="http://schemas.openxmlformats.org/drawingml/2006/main">
               <a:ext uri="{FF2B5EF4-FFF2-40B4-BE49-F238E27FC236}">
-                <a16:creationId xmlns:a16="http://schemas.microsoft.com/office/drawing/2014/main" id="{FBB5D280-DB65-479C-A7EC-80DBF2632B2B}"/>
+                <a16:creationId xmlns:a16="http://schemas.microsoft.com/office/drawing/2014/main" id="{6E21FBD5-525F-4A22-A014-851DB3583B28}"/>
               </a:ext>
             </a:extLst>
           </p:cNvPr>
@@ -17764,7 +17764,7 @@
           <p:cNvPr id="14" name="">
             <a:extLst xmlns:a="http://schemas.openxmlformats.org/drawingml/2006/main">
               <a:ext uri="{FF2B5EF4-FFF2-40B4-BE49-F238E27FC236}">
-                <a16:creationId xmlns:a16="http://schemas.microsoft.com/office/drawing/2014/main" id="{64C745B5-72B7-4E16-B3B6-6BC827B13631}"/>
+                <a16:creationId xmlns:a16="http://schemas.microsoft.com/office/drawing/2014/main" id="{F16765B8-DFD9-4278-B247-2CF740CE8E54}"/>
               </a:ext>
             </a:extLst>
           </p:cNvPr>
@@ -17816,7 +17816,7 @@
           <p:cNvPr id="15" name="">
             <a:extLst xmlns:a="http://schemas.openxmlformats.org/drawingml/2006/main">
               <a:ext uri="{FF2B5EF4-FFF2-40B4-BE49-F238E27FC236}">
-                <a16:creationId xmlns:a16="http://schemas.microsoft.com/office/drawing/2014/main" id="{DF3F5BAC-1B99-4271-A145-9C2ECB9BC774}"/>
+                <a16:creationId xmlns:a16="http://schemas.microsoft.com/office/drawing/2014/main" id="{3F0A48ED-DEE5-47B7-B9A1-275C6BBA218F}"/>
               </a:ext>
             </a:extLst>
           </p:cNvPr>
@@ -17868,7 +17868,7 @@
           <p:cNvPr id="16" name="">
             <a:extLst xmlns:a="http://schemas.openxmlformats.org/drawingml/2006/main">
               <a:ext uri="{FF2B5EF4-FFF2-40B4-BE49-F238E27FC236}">
-                <a16:creationId xmlns:a16="http://schemas.microsoft.com/office/drawing/2014/main" id="{46054F4E-1B5C-4100-8A4A-FF5AC122C988}"/>
+                <a16:creationId xmlns:a16="http://schemas.microsoft.com/office/drawing/2014/main" id="{AC139694-79B7-4F3B-82C3-962B5D35A54E}"/>
               </a:ext>
             </a:extLst>
           </p:cNvPr>
@@ -17920,7 +17920,7 @@
           <p:cNvPr id="17" name="">
             <a:extLst xmlns:a="http://schemas.openxmlformats.org/drawingml/2006/main">
               <a:ext uri="{FF2B5EF4-FFF2-40B4-BE49-F238E27FC236}">
-                <a16:creationId xmlns:a16="http://schemas.microsoft.com/office/drawing/2014/main" id="{060CE5D3-3A66-4D75-87F6-5FFB9DDA26F2}"/>
+                <a16:creationId xmlns:a16="http://schemas.microsoft.com/office/drawing/2014/main" id="{D162A4D5-48CE-44E8-AC1B-F0FE657F568F}"/>
               </a:ext>
             </a:extLst>
           </p:cNvPr>
@@ -17972,7 +17972,7 @@
           <p:cNvPr id="18" name="">
             <a:extLst xmlns:a="http://schemas.openxmlformats.org/drawingml/2006/main">
               <a:ext uri="{FF2B5EF4-FFF2-40B4-BE49-F238E27FC236}">
-                <a16:creationId xmlns:a16="http://schemas.microsoft.com/office/drawing/2014/main" id="{FBBE6D68-E0BE-48FE-A932-3823F807C9D9}"/>
+                <a16:creationId xmlns:a16="http://schemas.microsoft.com/office/drawing/2014/main" id="{A97737A9-F3C6-4E57-9D80-957FA3CE9C2C}"/>
               </a:ext>
             </a:extLst>
           </p:cNvPr>
@@ -18003,7 +18003,7 @@
           <p:cNvPr id="19" name="">
             <a:extLst xmlns:a="http://schemas.openxmlformats.org/drawingml/2006/main">
               <a:ext uri="{FF2B5EF4-FFF2-40B4-BE49-F238E27FC236}">
-                <a16:creationId xmlns:a16="http://schemas.microsoft.com/office/drawing/2014/main" id="{23910FF9-E666-4BEE-A4DA-948C3A15862E}"/>
+                <a16:creationId xmlns:a16="http://schemas.microsoft.com/office/drawing/2014/main" id="{5C4056AE-57D3-4C67-9BD2-CD2459FF617C}"/>
               </a:ext>
             </a:extLst>
           </p:cNvPr>
@@ -18034,7 +18034,7 @@
           <p:cNvPr id="20" name="">
             <a:extLst xmlns:a="http://schemas.openxmlformats.org/drawingml/2006/main">
               <a:ext uri="{FF2B5EF4-FFF2-40B4-BE49-F238E27FC236}">
-                <a16:creationId xmlns:a16="http://schemas.microsoft.com/office/drawing/2014/main" id="{A64F6CE1-2569-4E94-9910-0BA98A914ACE}"/>
+                <a16:creationId xmlns:a16="http://schemas.microsoft.com/office/drawing/2014/main" id="{F92F95F0-79F6-4634-A6C3-6CD36C5D1AE7}"/>
               </a:ext>
             </a:extLst>
           </p:cNvPr>
@@ -18086,7 +18086,7 @@
           <p:cNvPr id="21" name="">
             <a:extLst xmlns:a="http://schemas.openxmlformats.org/drawingml/2006/main">
               <a:ext uri="{FF2B5EF4-FFF2-40B4-BE49-F238E27FC236}">
-                <a16:creationId xmlns:a16="http://schemas.microsoft.com/office/drawing/2014/main" id="{9B72B325-5A43-47C7-A363-13032BA62DCB}"/>
+                <a16:creationId xmlns:a16="http://schemas.microsoft.com/office/drawing/2014/main" id="{2D15F7A6-9DD0-4B49-8E70-72A279BF51FD}"/>
               </a:ext>
             </a:extLst>
           </p:cNvPr>
@@ -18138,7 +18138,7 @@
           <p:cNvPr id="22" name="">
             <a:extLst xmlns:a="http://schemas.openxmlformats.org/drawingml/2006/main">
               <a:ext uri="{FF2B5EF4-FFF2-40B4-BE49-F238E27FC236}">
-                <a16:creationId xmlns:a16="http://schemas.microsoft.com/office/drawing/2014/main" id="{09D7CA3F-26BF-425B-9CB9-9E680FE27195}"/>
+                <a16:creationId xmlns:a16="http://schemas.microsoft.com/office/drawing/2014/main" id="{9D43A00F-F91A-437B-8388-1A207AE46F59}"/>
               </a:ext>
             </a:extLst>
           </p:cNvPr>
@@ -18190,7 +18190,7 @@
           <p:cNvPr id="23" name="">
             <a:extLst xmlns:a="http://schemas.openxmlformats.org/drawingml/2006/main">
               <a:ext uri="{FF2B5EF4-FFF2-40B4-BE49-F238E27FC236}">
-                <a16:creationId xmlns:a16="http://schemas.microsoft.com/office/drawing/2014/main" id="{8CCC2F3F-E552-4605-B0BA-71410DD78C5A}"/>
+                <a16:creationId xmlns:a16="http://schemas.microsoft.com/office/drawing/2014/main" id="{9FB95C6F-AF8F-4945-B08B-9EAB8F6CD2CA}"/>
               </a:ext>
             </a:extLst>
           </p:cNvPr>
@@ -18242,7 +18242,7 @@
           <p:cNvPr id="24" name="">
             <a:extLst xmlns:a="http://schemas.openxmlformats.org/drawingml/2006/main">
               <a:ext uri="{FF2B5EF4-FFF2-40B4-BE49-F238E27FC236}">
-                <a16:creationId xmlns:a16="http://schemas.microsoft.com/office/drawing/2014/main" id="{88A2710B-8D79-450D-BD14-FE76264F573E}"/>
+                <a16:creationId xmlns:a16="http://schemas.microsoft.com/office/drawing/2014/main" id="{8658C51C-B10A-4426-BE43-1EADEB19348F}"/>
               </a:ext>
             </a:extLst>
           </p:cNvPr>
@@ -18294,7 +18294,7 @@
           <p:cNvPr id="25" name="">
             <a:extLst xmlns:a="http://schemas.openxmlformats.org/drawingml/2006/main">
               <a:ext uri="{FF2B5EF4-FFF2-40B4-BE49-F238E27FC236}">
-                <a16:creationId xmlns:a16="http://schemas.microsoft.com/office/drawing/2014/main" id="{1A877762-9016-4EC3-BB3E-B26DD1D72876}"/>
+                <a16:creationId xmlns:a16="http://schemas.microsoft.com/office/drawing/2014/main" id="{B1C08F97-BE88-44AC-AF1C-32F7FC159B76}"/>
               </a:ext>
             </a:extLst>
           </p:cNvPr>
@@ -18325,7 +18325,7 @@
           <p:cNvPr id="26" name="">
             <a:extLst xmlns:a="http://schemas.openxmlformats.org/drawingml/2006/main">
               <a:ext uri="{FF2B5EF4-FFF2-40B4-BE49-F238E27FC236}">
-                <a16:creationId xmlns:a16="http://schemas.microsoft.com/office/drawing/2014/main" id="{64BA3C76-0DF1-48A8-BAE3-939B0C7C537C}"/>
+                <a16:creationId xmlns:a16="http://schemas.microsoft.com/office/drawing/2014/main" id="{92A0C07D-C89C-4038-AF40-986A0B0493C2}"/>
               </a:ext>
             </a:extLst>
           </p:cNvPr>
@@ -18377,7 +18377,7 @@
           <p:cNvPr id="27" name="">
             <a:extLst xmlns:a="http://schemas.openxmlformats.org/drawingml/2006/main">
               <a:ext uri="{FF2B5EF4-FFF2-40B4-BE49-F238E27FC236}">
-                <a16:creationId xmlns:a16="http://schemas.microsoft.com/office/drawing/2014/main" id="{C3314E4A-9CCC-4BDE-BAFB-3056505C7558}"/>
+                <a16:creationId xmlns:a16="http://schemas.microsoft.com/office/drawing/2014/main" id="{EC382AE0-BE54-4A95-A00B-6CA8287B7D29}"/>
               </a:ext>
             </a:extLst>
           </p:cNvPr>
@@ -18429,7 +18429,7 @@
           <p:cNvPr id="28" name="">
             <a:extLst xmlns:a="http://schemas.openxmlformats.org/drawingml/2006/main">
               <a:ext uri="{FF2B5EF4-FFF2-40B4-BE49-F238E27FC236}">
-                <a16:creationId xmlns:a16="http://schemas.microsoft.com/office/drawing/2014/main" id="{DD8DC50D-EA97-4384-8210-317DF85110A2}"/>
+                <a16:creationId xmlns:a16="http://schemas.microsoft.com/office/drawing/2014/main" id="{C50BC8C4-3644-48F3-984B-0D6C15484CBC}"/>
               </a:ext>
             </a:extLst>
           </p:cNvPr>
@@ -18481,7 +18481,7 @@
           <p:cNvPr id="29" name="">
             <a:extLst xmlns:a="http://schemas.openxmlformats.org/drawingml/2006/main">
               <a:ext uri="{FF2B5EF4-FFF2-40B4-BE49-F238E27FC236}">
-                <a16:creationId xmlns:a16="http://schemas.microsoft.com/office/drawing/2014/main" id="{9803C4FF-24AC-40ED-AC54-BEB7E9B7B468}"/>
+                <a16:creationId xmlns:a16="http://schemas.microsoft.com/office/drawing/2014/main" id="{DECA3E1A-0093-4C08-9C28-608DA473B991}"/>
               </a:ext>
             </a:extLst>
           </p:cNvPr>
@@ -18533,7 +18533,7 @@
           <p:cNvPr id="30" name="">
             <a:extLst xmlns:a="http://schemas.openxmlformats.org/drawingml/2006/main">
               <a:ext uri="{FF2B5EF4-FFF2-40B4-BE49-F238E27FC236}">
-                <a16:creationId xmlns:a16="http://schemas.microsoft.com/office/drawing/2014/main" id="{A315A863-C672-4725-A4F6-6975AB4EC7E6}"/>
+                <a16:creationId xmlns:a16="http://schemas.microsoft.com/office/drawing/2014/main" id="{C33560C3-9094-4D53-8BE5-89AF954FDB4E}"/>
               </a:ext>
             </a:extLst>
           </p:cNvPr>
@@ -18585,7 +18585,7 @@
           <p:cNvPr id="31" name="">
             <a:extLst xmlns:a="http://schemas.openxmlformats.org/drawingml/2006/main">
               <a:ext uri="{FF2B5EF4-FFF2-40B4-BE49-F238E27FC236}">
-                <a16:creationId xmlns:a16="http://schemas.microsoft.com/office/drawing/2014/main" id="{8DBF51E6-A01E-41B1-A15D-1A8068DC8CC9}"/>
+                <a16:creationId xmlns:a16="http://schemas.microsoft.com/office/drawing/2014/main" id="{D79AF50A-C73C-4295-BC65-DB85C37D5540}"/>
               </a:ext>
             </a:extLst>
           </p:cNvPr>
@@ -18616,7 +18616,7 @@
           <p:cNvPr id="32" name="">
             <a:extLst xmlns:a="http://schemas.openxmlformats.org/drawingml/2006/main">
               <a:ext uri="{FF2B5EF4-FFF2-40B4-BE49-F238E27FC236}">
-                <a16:creationId xmlns:a16="http://schemas.microsoft.com/office/drawing/2014/main" id="{42A85616-2002-466B-A847-F7040110CFB2}"/>
+                <a16:creationId xmlns:a16="http://schemas.microsoft.com/office/drawing/2014/main" id="{0CBE9B8C-601F-477A-831A-162D27249CA8}"/>
               </a:ext>
             </a:extLst>
           </p:cNvPr>
@@ -18647,7 +18647,7 @@
           <p:cNvPr id="33" name="">
             <a:extLst xmlns:a="http://schemas.openxmlformats.org/drawingml/2006/main">
               <a:ext uri="{FF2B5EF4-FFF2-40B4-BE49-F238E27FC236}">
-                <a16:creationId xmlns:a16="http://schemas.microsoft.com/office/drawing/2014/main" id="{C32301AE-16ED-4104-8082-F6BC14AE804E}"/>
+                <a16:creationId xmlns:a16="http://schemas.microsoft.com/office/drawing/2014/main" id="{FB92FD73-EB19-434A-AEE9-2023A984C55D}"/>
               </a:ext>
             </a:extLst>
           </p:cNvPr>
@@ -18699,7 +18699,7 @@
           <p:cNvPr id="34" name="">
             <a:extLst xmlns:a="http://schemas.openxmlformats.org/drawingml/2006/main">
               <a:ext uri="{FF2B5EF4-FFF2-40B4-BE49-F238E27FC236}">
-                <a16:creationId xmlns:a16="http://schemas.microsoft.com/office/drawing/2014/main" id="{680F54DE-0BF4-4FF8-BEA4-E47DC999CD01}"/>
+                <a16:creationId xmlns:a16="http://schemas.microsoft.com/office/drawing/2014/main" id="{A1F0477D-2B93-46F3-B262-D1B9B6DDAC32}"/>
               </a:ext>
             </a:extLst>
           </p:cNvPr>
@@ -18751,7 +18751,7 @@
           <p:cNvPr id="35" name="">
             <a:extLst xmlns:a="http://schemas.openxmlformats.org/drawingml/2006/main">
               <a:ext uri="{FF2B5EF4-FFF2-40B4-BE49-F238E27FC236}">
-                <a16:creationId xmlns:a16="http://schemas.microsoft.com/office/drawing/2014/main" id="{0938F94A-7C59-40F4-B1A8-2FD834F97946}"/>
+                <a16:creationId xmlns:a16="http://schemas.microsoft.com/office/drawing/2014/main" id="{9F33B9E7-394A-451F-8250-29C95C1DCE74}"/>
               </a:ext>
             </a:extLst>
           </p:cNvPr>
@@ -18803,7 +18803,7 @@
           <p:cNvPr id="36" name="">
             <a:extLst xmlns:a="http://schemas.openxmlformats.org/drawingml/2006/main">
               <a:ext uri="{FF2B5EF4-FFF2-40B4-BE49-F238E27FC236}">
-                <a16:creationId xmlns:a16="http://schemas.microsoft.com/office/drawing/2014/main" id="{2D7297CB-D7ED-4BDD-811F-6A6A8ADCFD7E}"/>
+                <a16:creationId xmlns:a16="http://schemas.microsoft.com/office/drawing/2014/main" id="{3BE25F63-A178-409E-88A4-3995E5AD9C09}"/>
               </a:ext>
             </a:extLst>
           </p:cNvPr>
@@ -18855,7 +18855,7 @@
           <p:cNvPr id="37" name="">
             <a:extLst xmlns:a="http://schemas.openxmlformats.org/drawingml/2006/main">
               <a:ext uri="{FF2B5EF4-FFF2-40B4-BE49-F238E27FC236}">
-                <a16:creationId xmlns:a16="http://schemas.microsoft.com/office/drawing/2014/main" id="{25D26A57-4F08-46E5-B71C-A7397A15080C}"/>
+                <a16:creationId xmlns:a16="http://schemas.microsoft.com/office/drawing/2014/main" id="{610890C4-5DBC-42C6-B07D-E78EDB7B4289}"/>
               </a:ext>
             </a:extLst>
           </p:cNvPr>
@@ -18907,7 +18907,7 @@
           <p:cNvPr id="38" name="">
             <a:extLst xmlns:a="http://schemas.openxmlformats.org/drawingml/2006/main">
               <a:ext uri="{FF2B5EF4-FFF2-40B4-BE49-F238E27FC236}">
-                <a16:creationId xmlns:a16="http://schemas.microsoft.com/office/drawing/2014/main" id="{8FE3FA83-A3FB-4D3C-A226-0941DA2895B4}"/>
+                <a16:creationId xmlns:a16="http://schemas.microsoft.com/office/drawing/2014/main" id="{CCBE37BD-5FCB-4614-BE53-1C56B9BF7129}"/>
               </a:ext>
             </a:extLst>
           </p:cNvPr>
@@ -18938,7 +18938,7 @@
           <p:cNvPr id="39" name="">
             <a:extLst xmlns:a="http://schemas.openxmlformats.org/drawingml/2006/main">
               <a:ext uri="{FF2B5EF4-FFF2-40B4-BE49-F238E27FC236}">
-                <a16:creationId xmlns:a16="http://schemas.microsoft.com/office/drawing/2014/main" id="{A5619BEA-14AE-45D2-90AE-2AE4CC304AFB}"/>
+                <a16:creationId xmlns:a16="http://schemas.microsoft.com/office/drawing/2014/main" id="{0EB22EB3-33C7-4C3B-9AE0-8318A733077A}"/>
               </a:ext>
             </a:extLst>
           </p:cNvPr>
@@ -18990,7 +18990,7 @@
           <p:cNvPr id="40" name="">
             <a:extLst xmlns:a="http://schemas.openxmlformats.org/drawingml/2006/main">
               <a:ext uri="{FF2B5EF4-FFF2-40B4-BE49-F238E27FC236}">
-                <a16:creationId xmlns:a16="http://schemas.microsoft.com/office/drawing/2014/main" id="{9510134A-9AC0-4311-BF76-1B9A6EC8A829}"/>
+                <a16:creationId xmlns:a16="http://schemas.microsoft.com/office/drawing/2014/main" id="{93784749-6BE6-4C6F-959A-273DD7523A75}"/>
               </a:ext>
             </a:extLst>
           </p:cNvPr>
@@ -19042,7 +19042,7 @@
           <p:cNvPr id="41" name="">
             <a:extLst xmlns:a="http://schemas.openxmlformats.org/drawingml/2006/main">
               <a:ext uri="{FF2B5EF4-FFF2-40B4-BE49-F238E27FC236}">
-                <a16:creationId xmlns:a16="http://schemas.microsoft.com/office/drawing/2014/main" id="{18BE2095-F7A4-4DDD-AE2F-7A644578DE8C}"/>
+                <a16:creationId xmlns:a16="http://schemas.microsoft.com/office/drawing/2014/main" id="{67F0F15E-7AD7-48BB-8028-924F2CCCBE75}"/>
               </a:ext>
             </a:extLst>
           </p:cNvPr>
@@ -19094,7 +19094,7 @@
           <p:cNvPr id="42" name="">
             <a:extLst xmlns:a="http://schemas.openxmlformats.org/drawingml/2006/main">
               <a:ext uri="{FF2B5EF4-FFF2-40B4-BE49-F238E27FC236}">
-                <a16:creationId xmlns:a16="http://schemas.microsoft.com/office/drawing/2014/main" id="{CD80338D-D841-4CF0-8D6F-E2B495F23979}"/>
+                <a16:creationId xmlns:a16="http://schemas.microsoft.com/office/drawing/2014/main" id="{AE716B7E-4F43-49A4-9BE9-13C9EF8321B3}"/>
               </a:ext>
             </a:extLst>
           </p:cNvPr>
@@ -19146,7 +19146,7 @@
           <p:cNvPr id="43" name="">
             <a:extLst xmlns:a="http://schemas.openxmlformats.org/drawingml/2006/main">
               <a:ext uri="{FF2B5EF4-FFF2-40B4-BE49-F238E27FC236}">
-                <a16:creationId xmlns:a16="http://schemas.microsoft.com/office/drawing/2014/main" id="{F2F3544D-229E-4F23-BB2D-A7ABD33BD64F}"/>
+                <a16:creationId xmlns:a16="http://schemas.microsoft.com/office/drawing/2014/main" id="{7F97919A-6398-4B75-8E70-6DC68BDFA5D4}"/>
               </a:ext>
             </a:extLst>
           </p:cNvPr>
@@ -19198,7 +19198,7 @@
           <p:cNvPr id="44" name="">
             <a:extLst xmlns:a="http://schemas.openxmlformats.org/drawingml/2006/main">
               <a:ext uri="{FF2B5EF4-FFF2-40B4-BE49-F238E27FC236}">
-                <a16:creationId xmlns:a16="http://schemas.microsoft.com/office/drawing/2014/main" id="{21F63B01-0204-480F-832E-B066D50B3A9A}"/>
+                <a16:creationId xmlns:a16="http://schemas.microsoft.com/office/drawing/2014/main" id="{18884B22-544D-417B-8DEB-BF668CE09D02}"/>
               </a:ext>
             </a:extLst>
           </p:cNvPr>
@@ -19229,7 +19229,7 @@
           <p:cNvPr id="45" name="">
             <a:extLst xmlns:a="http://schemas.openxmlformats.org/drawingml/2006/main">
               <a:ext uri="{FF2B5EF4-FFF2-40B4-BE49-F238E27FC236}">
-                <a16:creationId xmlns:a16="http://schemas.microsoft.com/office/drawing/2014/main" id="{34A217CA-B5B5-4972-AFE6-06973AB845C2}"/>
+                <a16:creationId xmlns:a16="http://schemas.microsoft.com/office/drawing/2014/main" id="{B7C98667-63C4-4C33-A96C-A6C7BA650C48}"/>
               </a:ext>
             </a:extLst>
           </p:cNvPr>
@@ -19260,7 +19260,7 @@
           <p:cNvPr id="46" name="">
             <a:extLst xmlns:a="http://schemas.openxmlformats.org/drawingml/2006/main">
               <a:ext uri="{FF2B5EF4-FFF2-40B4-BE49-F238E27FC236}">
-                <a16:creationId xmlns:a16="http://schemas.microsoft.com/office/drawing/2014/main" id="{98B5149C-F7A3-4660-AD66-35F5FC226857}"/>
+                <a16:creationId xmlns:a16="http://schemas.microsoft.com/office/drawing/2014/main" id="{2409C702-D79B-4E0A-B525-F3B61959DA89}"/>
               </a:ext>
             </a:extLst>
           </p:cNvPr>
@@ -19312,7 +19312,7 @@
           <p:cNvPr id="47" name="">
             <a:extLst xmlns:a="http://schemas.openxmlformats.org/drawingml/2006/main">
               <a:ext uri="{FF2B5EF4-FFF2-40B4-BE49-F238E27FC236}">
-                <a16:creationId xmlns:a16="http://schemas.microsoft.com/office/drawing/2014/main" id="{3F33246E-E4A8-48A9-8DF8-FA93A9B10C40}"/>
+                <a16:creationId xmlns:a16="http://schemas.microsoft.com/office/drawing/2014/main" id="{EBEF5CE6-4ACA-41B0-8F31-7013142B230D}"/>
               </a:ext>
             </a:extLst>
           </p:cNvPr>
@@ -19364,7 +19364,7 @@
           <p:cNvPr id="48" name="">
             <a:extLst xmlns:a="http://schemas.openxmlformats.org/drawingml/2006/main">
               <a:ext uri="{FF2B5EF4-FFF2-40B4-BE49-F238E27FC236}">
-                <a16:creationId xmlns:a16="http://schemas.microsoft.com/office/drawing/2014/main" id="{F46E3128-A5A6-479A-965E-0FCC4C8B8F59}"/>
+                <a16:creationId xmlns:a16="http://schemas.microsoft.com/office/drawing/2014/main" id="{C470FD6A-95F9-4F95-AD74-CD7BA7280E53}"/>
               </a:ext>
             </a:extLst>
           </p:cNvPr>
@@ -19416,7 +19416,7 @@
           <p:cNvPr id="49" name="">
             <a:extLst xmlns:a="http://schemas.openxmlformats.org/drawingml/2006/main">
               <a:ext uri="{FF2B5EF4-FFF2-40B4-BE49-F238E27FC236}">
-                <a16:creationId xmlns:a16="http://schemas.microsoft.com/office/drawing/2014/main" id="{EC9837E0-CB4F-46DA-B23E-2CC8DA449594}"/>
+                <a16:creationId xmlns:a16="http://schemas.microsoft.com/office/drawing/2014/main" id="{3B212C2D-37E5-416F-A4C4-5DBDC9C6C568}"/>
               </a:ext>
             </a:extLst>
           </p:cNvPr>
@@ -19468,7 +19468,7 @@
           <p:cNvPr id="50" name="">
             <a:extLst xmlns:a="http://schemas.openxmlformats.org/drawingml/2006/main">
               <a:ext uri="{FF2B5EF4-FFF2-40B4-BE49-F238E27FC236}">
-                <a16:creationId xmlns:a16="http://schemas.microsoft.com/office/drawing/2014/main" id="{8AB2ADEB-B974-4DA3-9096-E3AC011EA1F3}"/>
+                <a16:creationId xmlns:a16="http://schemas.microsoft.com/office/drawing/2014/main" id="{0FDA2510-53DD-4020-8EFF-AC39EC334365}"/>
               </a:ext>
             </a:extLst>
           </p:cNvPr>
@@ -19520,7 +19520,7 @@
           <p:cNvPr id="51" name="">
             <a:extLst xmlns:a="http://schemas.openxmlformats.org/drawingml/2006/main">
               <a:ext uri="{FF2B5EF4-FFF2-40B4-BE49-F238E27FC236}">
-                <a16:creationId xmlns:a16="http://schemas.microsoft.com/office/drawing/2014/main" id="{53B78798-EE7A-4446-8B72-E79E97312302}"/>
+                <a16:creationId xmlns:a16="http://schemas.microsoft.com/office/drawing/2014/main" id="{60EBB8D2-CE9D-456C-8A26-FD8DB5BDF469}"/>
               </a:ext>
             </a:extLst>
           </p:cNvPr>
@@ -19551,7 +19551,7 @@
           <p:cNvPr id="52" name="">
             <a:extLst xmlns:a="http://schemas.openxmlformats.org/drawingml/2006/main">
               <a:ext uri="{FF2B5EF4-FFF2-40B4-BE49-F238E27FC236}">
-                <a16:creationId xmlns:a16="http://schemas.microsoft.com/office/drawing/2014/main" id="{78523A81-17CA-45A2-A558-E772B7050CB8}"/>
+                <a16:creationId xmlns:a16="http://schemas.microsoft.com/office/drawing/2014/main" id="{8F16228E-B54A-4AFE-8AC4-9BDAF3B8C42C}"/>
               </a:ext>
             </a:extLst>
           </p:cNvPr>
@@ -19603,7 +19603,7 @@
           <p:cNvPr id="53" name="">
             <a:extLst xmlns:a="http://schemas.openxmlformats.org/drawingml/2006/main">
               <a:ext uri="{FF2B5EF4-FFF2-40B4-BE49-F238E27FC236}">
-                <a16:creationId xmlns:a16="http://schemas.microsoft.com/office/drawing/2014/main" id="{EEFCF57C-D571-4708-B68B-6BC64A03F4A8}"/>
+                <a16:creationId xmlns:a16="http://schemas.microsoft.com/office/drawing/2014/main" id="{A3661502-0798-467E-BF1D-F640E2497734}"/>
               </a:ext>
             </a:extLst>
           </p:cNvPr>
@@ -19655,7 +19655,7 @@
           <p:cNvPr id="54" name="">
             <a:extLst xmlns:a="http://schemas.openxmlformats.org/drawingml/2006/main">
               <a:ext uri="{FF2B5EF4-FFF2-40B4-BE49-F238E27FC236}">
-                <a16:creationId xmlns:a16="http://schemas.microsoft.com/office/drawing/2014/main" id="{D80899B7-8529-428B-AB2F-A77F7AFB2488}"/>
+                <a16:creationId xmlns:a16="http://schemas.microsoft.com/office/drawing/2014/main" id="{F13DA96D-0C60-4DE4-A1FB-0282691DF4F6}"/>
               </a:ext>
             </a:extLst>
           </p:cNvPr>
@@ -19707,7 +19707,7 @@
           <p:cNvPr id="55" name="">
             <a:extLst xmlns:a="http://schemas.openxmlformats.org/drawingml/2006/main">
               <a:ext uri="{FF2B5EF4-FFF2-40B4-BE49-F238E27FC236}">
-                <a16:creationId xmlns:a16="http://schemas.microsoft.com/office/drawing/2014/main" id="{6C72F058-01D6-4CA2-9D54-11732846E86B}"/>
+                <a16:creationId xmlns:a16="http://schemas.microsoft.com/office/drawing/2014/main" id="{83373FEF-2A1D-4E9F-953F-9AA3C1240BBC}"/>
               </a:ext>
             </a:extLst>
           </p:cNvPr>
@@ -19759,7 +19759,7 @@
           <p:cNvPr id="56" name="">
             <a:extLst xmlns:a="http://schemas.openxmlformats.org/drawingml/2006/main">
               <a:ext uri="{FF2B5EF4-FFF2-40B4-BE49-F238E27FC236}">
-                <a16:creationId xmlns:a16="http://schemas.microsoft.com/office/drawing/2014/main" id="{2E61B775-82E8-45E5-83EA-98818649820F}"/>
+                <a16:creationId xmlns:a16="http://schemas.microsoft.com/office/drawing/2014/main" id="{40E89E4B-3F35-445E-A697-78D9B233BDD0}"/>
               </a:ext>
             </a:extLst>
           </p:cNvPr>
@@ -19811,7 +19811,7 @@
           <p:cNvPr id="57" name="">
             <a:extLst xmlns:a="http://schemas.openxmlformats.org/drawingml/2006/main">
               <a:ext uri="{FF2B5EF4-FFF2-40B4-BE49-F238E27FC236}">
-                <a16:creationId xmlns:a16="http://schemas.microsoft.com/office/drawing/2014/main" id="{855F6870-1CD7-4779-BEC6-9881830A37EB}"/>
+                <a16:creationId xmlns:a16="http://schemas.microsoft.com/office/drawing/2014/main" id="{3CDED539-E914-4E38-9EB9-48F3026A2741}"/>
               </a:ext>
             </a:extLst>
           </p:cNvPr>
@@ -19842,7 +19842,7 @@
           <p:cNvPr id="58" name="">
             <a:extLst xmlns:a="http://schemas.openxmlformats.org/drawingml/2006/main">
               <a:ext uri="{FF2B5EF4-FFF2-40B4-BE49-F238E27FC236}">
-                <a16:creationId xmlns:a16="http://schemas.microsoft.com/office/drawing/2014/main" id="{38F237EA-4574-4156-855B-C096314A30FD}"/>
+                <a16:creationId xmlns:a16="http://schemas.microsoft.com/office/drawing/2014/main" id="{AEBC5299-203F-4152-A3AE-8B5068E6F0F9}"/>
               </a:ext>
             </a:extLst>
           </p:cNvPr>
@@ -19873,7 +19873,7 @@
           <p:cNvPr id="59" name="">
             <a:extLst xmlns:a="http://schemas.openxmlformats.org/drawingml/2006/main">
               <a:ext uri="{FF2B5EF4-FFF2-40B4-BE49-F238E27FC236}">
-                <a16:creationId xmlns:a16="http://schemas.microsoft.com/office/drawing/2014/main" id="{E86BB023-0631-4A3D-9C93-E9A3BC6A5247}"/>
+                <a16:creationId xmlns:a16="http://schemas.microsoft.com/office/drawing/2014/main" id="{EA046080-FF9E-4977-97B9-D29C463C88C9}"/>
               </a:ext>
             </a:extLst>
           </p:cNvPr>
@@ -19925,7 +19925,7 @@
           <p:cNvPr id="60" name="">
             <a:extLst xmlns:a="http://schemas.openxmlformats.org/drawingml/2006/main">
               <a:ext uri="{FF2B5EF4-FFF2-40B4-BE49-F238E27FC236}">
-                <a16:creationId xmlns:a16="http://schemas.microsoft.com/office/drawing/2014/main" id="{E10B8361-EB75-4B9C-8F11-60B75DA044C1}"/>
+                <a16:creationId xmlns:a16="http://schemas.microsoft.com/office/drawing/2014/main" id="{FDC665A5-717E-4C9C-AC2A-5541DD2108A8}"/>
               </a:ext>
             </a:extLst>
           </p:cNvPr>
@@ -19977,7 +19977,7 @@
           <p:cNvPr id="61" name="">
             <a:extLst xmlns:a="http://schemas.openxmlformats.org/drawingml/2006/main">
               <a:ext uri="{FF2B5EF4-FFF2-40B4-BE49-F238E27FC236}">
-                <a16:creationId xmlns:a16="http://schemas.microsoft.com/office/drawing/2014/main" id="{167E4E2F-7B8B-49A6-8191-8CFD781F16E0}"/>
+                <a16:creationId xmlns:a16="http://schemas.microsoft.com/office/drawing/2014/main" id="{2146E2FE-7E7F-4358-AD58-94ACD0A5CD72}"/>
               </a:ext>
             </a:extLst>
           </p:cNvPr>
@@ -20029,7 +20029,7 @@
           <p:cNvPr id="62" name="">
             <a:extLst xmlns:a="http://schemas.openxmlformats.org/drawingml/2006/main">
               <a:ext uri="{FF2B5EF4-FFF2-40B4-BE49-F238E27FC236}">
-                <a16:creationId xmlns:a16="http://schemas.microsoft.com/office/drawing/2014/main" id="{FD176380-BEF1-4559-B88D-C9D47407B71C}"/>
+                <a16:creationId xmlns:a16="http://schemas.microsoft.com/office/drawing/2014/main" id="{EB546D3D-B8DA-4C75-9C84-8DAD6686F682}"/>
               </a:ext>
             </a:extLst>
           </p:cNvPr>
@@ -20081,7 +20081,7 @@
           <p:cNvPr id="63" name="">
             <a:extLst xmlns:a="http://schemas.openxmlformats.org/drawingml/2006/main">
               <a:ext uri="{FF2B5EF4-FFF2-40B4-BE49-F238E27FC236}">
-                <a16:creationId xmlns:a16="http://schemas.microsoft.com/office/drawing/2014/main" id="{BA3815EA-BD07-470D-984F-DE109B353493}"/>
+                <a16:creationId xmlns:a16="http://schemas.microsoft.com/office/drawing/2014/main" id="{4A03A2D0-87F5-43A3-BE67-E30641EF33C5}"/>
               </a:ext>
             </a:extLst>
           </p:cNvPr>
@@ -20133,7 +20133,7 @@
           <p:cNvPr id="64" name="">
             <a:extLst xmlns:a="http://schemas.openxmlformats.org/drawingml/2006/main">
               <a:ext uri="{FF2B5EF4-FFF2-40B4-BE49-F238E27FC236}">
-                <a16:creationId xmlns:a16="http://schemas.microsoft.com/office/drawing/2014/main" id="{BD40AE8D-BBCD-4C16-BB82-A3A18EDD903F}"/>
+                <a16:creationId xmlns:a16="http://schemas.microsoft.com/office/drawing/2014/main" id="{2BBEFF6D-5106-49E4-B776-EBBFD76A80F3}"/>
               </a:ext>
             </a:extLst>
           </p:cNvPr>
@@ -20164,7 +20164,7 @@
           <p:cNvPr id="65" name="">
             <a:extLst xmlns:a="http://schemas.openxmlformats.org/drawingml/2006/main">
               <a:ext uri="{FF2B5EF4-FFF2-40B4-BE49-F238E27FC236}">
-                <a16:creationId xmlns:a16="http://schemas.microsoft.com/office/drawing/2014/main" id="{7310E1B7-8BAA-4535-9A8F-8BFC859BE637}"/>
+                <a16:creationId xmlns:a16="http://schemas.microsoft.com/office/drawing/2014/main" id="{207241ED-5F07-4C41-B53A-32979A25A4C0}"/>
               </a:ext>
             </a:extLst>
           </p:cNvPr>
@@ -20216,7 +20216,7 @@
           <p:cNvPr id="66" name="">
             <a:extLst xmlns:a="http://schemas.openxmlformats.org/drawingml/2006/main">
               <a:ext uri="{FF2B5EF4-FFF2-40B4-BE49-F238E27FC236}">
-                <a16:creationId xmlns:a16="http://schemas.microsoft.com/office/drawing/2014/main" id="{4E488444-CA8B-48E0-8853-EDAAF15F18AE}"/>
+                <a16:creationId xmlns:a16="http://schemas.microsoft.com/office/drawing/2014/main" id="{AB88C685-479A-4DA1-A465-DD82B3E07884}"/>
               </a:ext>
             </a:extLst>
           </p:cNvPr>
@@ -20268,7 +20268,7 @@
           <p:cNvPr id="67" name="">
             <a:extLst xmlns:a="http://schemas.openxmlformats.org/drawingml/2006/main">
               <a:ext uri="{FF2B5EF4-FFF2-40B4-BE49-F238E27FC236}">
-                <a16:creationId xmlns:a16="http://schemas.microsoft.com/office/drawing/2014/main" id="{632CCAC6-F325-44CC-81B4-E4F4D9C9C2DB}"/>
+                <a16:creationId xmlns:a16="http://schemas.microsoft.com/office/drawing/2014/main" id="{F397154D-D213-4556-ADFF-83DF52E23E1F}"/>
               </a:ext>
             </a:extLst>
           </p:cNvPr>
@@ -20320,7 +20320,7 @@
           <p:cNvPr id="68" name="">
             <a:extLst xmlns:a="http://schemas.openxmlformats.org/drawingml/2006/main">
               <a:ext uri="{FF2B5EF4-FFF2-40B4-BE49-F238E27FC236}">
-                <a16:creationId xmlns:a16="http://schemas.microsoft.com/office/drawing/2014/main" id="{2D1282A3-0D31-47BE-B422-63139FC93710}"/>
+                <a16:creationId xmlns:a16="http://schemas.microsoft.com/office/drawing/2014/main" id="{B0BE1550-5466-44BD-BABB-6F9D8902A6E6}"/>
               </a:ext>
             </a:extLst>
           </p:cNvPr>
@@ -20372,7 +20372,7 @@
           <p:cNvPr id="69" name="">
             <a:extLst xmlns:a="http://schemas.openxmlformats.org/drawingml/2006/main">
               <a:ext uri="{FF2B5EF4-FFF2-40B4-BE49-F238E27FC236}">
-                <a16:creationId xmlns:a16="http://schemas.microsoft.com/office/drawing/2014/main" id="{07E76C52-806E-4BDE-868D-3033C1D74961}"/>
+                <a16:creationId xmlns:a16="http://schemas.microsoft.com/office/drawing/2014/main" id="{2FB9C920-9F4D-453A-BCE5-A5CC216DF140}"/>
               </a:ext>
             </a:extLst>
           </p:cNvPr>
@@ -20424,7 +20424,7 @@
           <p:cNvPr id="70" name="">
             <a:extLst xmlns:a="http://schemas.openxmlformats.org/drawingml/2006/main">
               <a:ext uri="{FF2B5EF4-FFF2-40B4-BE49-F238E27FC236}">
-                <a16:creationId xmlns:a16="http://schemas.microsoft.com/office/drawing/2014/main" id="{CFD23E65-4849-466C-9786-E97595B64737}"/>
+                <a16:creationId xmlns:a16="http://schemas.microsoft.com/office/drawing/2014/main" id="{C5AAE03E-9DFB-48CB-ACFA-B5FC639601D9}"/>
               </a:ext>
             </a:extLst>
           </p:cNvPr>
@@ -20455,7 +20455,7 @@
           <p:cNvPr id="71" name="">
             <a:extLst xmlns:a="http://schemas.openxmlformats.org/drawingml/2006/main">
               <a:ext uri="{FF2B5EF4-FFF2-40B4-BE49-F238E27FC236}">
-                <a16:creationId xmlns:a16="http://schemas.microsoft.com/office/drawing/2014/main" id="{04283C13-207B-4355-880B-51E497F2CD7E}"/>
+                <a16:creationId xmlns:a16="http://schemas.microsoft.com/office/drawing/2014/main" id="{639E6848-835B-4A72-8BFF-1E4715467031}"/>
               </a:ext>
             </a:extLst>
           </p:cNvPr>
@@ -20486,7 +20486,7 @@
           <p:cNvPr id="72" name="">
             <a:extLst xmlns:a="http://schemas.openxmlformats.org/drawingml/2006/main">
               <a:ext uri="{FF2B5EF4-FFF2-40B4-BE49-F238E27FC236}">
-                <a16:creationId xmlns:a16="http://schemas.microsoft.com/office/drawing/2014/main" id="{1EECBBDD-C72F-47C1-865C-0677D5852888}"/>
+                <a16:creationId xmlns:a16="http://schemas.microsoft.com/office/drawing/2014/main" id="{3C96F39E-AD91-4ABF-963A-844994A72F20}"/>
               </a:ext>
             </a:extLst>
           </p:cNvPr>
@@ -20538,7 +20538,7 @@
           <p:cNvPr id="73" name="">
             <a:extLst xmlns:a="http://schemas.openxmlformats.org/drawingml/2006/main">
               <a:ext uri="{FF2B5EF4-FFF2-40B4-BE49-F238E27FC236}">
-                <a16:creationId xmlns:a16="http://schemas.microsoft.com/office/drawing/2014/main" id="{3953FBBA-F21D-4B2D-A122-CBF660E7C9BC}"/>
+                <a16:creationId xmlns:a16="http://schemas.microsoft.com/office/drawing/2014/main" id="{0E212C5F-1369-4B58-A006-D169DEF32AA6}"/>
               </a:ext>
             </a:extLst>
           </p:cNvPr>
@@ -20590,7 +20590,7 @@
           <p:cNvPr id="74" name="">
             <a:extLst xmlns:a="http://schemas.openxmlformats.org/drawingml/2006/main">
               <a:ext uri="{FF2B5EF4-FFF2-40B4-BE49-F238E27FC236}">
-                <a16:creationId xmlns:a16="http://schemas.microsoft.com/office/drawing/2014/main" id="{7AC1996A-E883-4008-9FA1-C35CD4399333}"/>
+                <a16:creationId xmlns:a16="http://schemas.microsoft.com/office/drawing/2014/main" id="{853B89EE-9EBA-4EC7-9F25-ADB3D8641E53}"/>
               </a:ext>
             </a:extLst>
           </p:cNvPr>
@@ -20642,7 +20642,7 @@
           <p:cNvPr id="75" name="">
             <a:extLst xmlns:a="http://schemas.openxmlformats.org/drawingml/2006/main">
               <a:ext uri="{FF2B5EF4-FFF2-40B4-BE49-F238E27FC236}">
-                <a16:creationId xmlns:a16="http://schemas.microsoft.com/office/drawing/2014/main" id="{31B337BE-B581-498C-9254-D84094ACEC29}"/>
+                <a16:creationId xmlns:a16="http://schemas.microsoft.com/office/drawing/2014/main" id="{7597827F-4F5B-4B3F-9C9A-FEBC46486FDB}"/>
               </a:ext>
             </a:extLst>
           </p:cNvPr>
@@ -20694,7 +20694,7 @@
           <p:cNvPr id="76" name="">
             <a:extLst xmlns:a="http://schemas.openxmlformats.org/drawingml/2006/main">
               <a:ext uri="{FF2B5EF4-FFF2-40B4-BE49-F238E27FC236}">
-                <a16:creationId xmlns:a16="http://schemas.microsoft.com/office/drawing/2014/main" id="{4EB8EF32-0D2C-4B19-B273-E60B9DAB906E}"/>
+                <a16:creationId xmlns:a16="http://schemas.microsoft.com/office/drawing/2014/main" id="{B109C945-6E94-4875-A9D2-1AE4D06D1527}"/>
               </a:ext>
             </a:extLst>
           </p:cNvPr>
@@ -20746,7 +20746,7 @@
           <p:cNvPr id="77" name="">
             <a:extLst xmlns:a="http://schemas.openxmlformats.org/drawingml/2006/main">
               <a:ext uri="{FF2B5EF4-FFF2-40B4-BE49-F238E27FC236}">
-                <a16:creationId xmlns:a16="http://schemas.microsoft.com/office/drawing/2014/main" id="{061EAA9C-FA86-40F9-8CA3-9FC0FBBBEF6D}"/>
+                <a16:creationId xmlns:a16="http://schemas.microsoft.com/office/drawing/2014/main" id="{A3AE396F-0A08-41BB-AEC3-77E6CACC5D02}"/>
               </a:ext>
             </a:extLst>
           </p:cNvPr>
@@ -20777,7 +20777,7 @@
           <p:cNvPr id="78" name="">
             <a:extLst xmlns:a="http://schemas.openxmlformats.org/drawingml/2006/main">
               <a:ext uri="{FF2B5EF4-FFF2-40B4-BE49-F238E27FC236}">
-                <a16:creationId xmlns:a16="http://schemas.microsoft.com/office/drawing/2014/main" id="{49545BC8-E4F0-42B5-94E5-147E5DDD38C9}"/>
+                <a16:creationId xmlns:a16="http://schemas.microsoft.com/office/drawing/2014/main" id="{D202364D-2F94-4B8A-8A55-826E237E9647}"/>
               </a:ext>
             </a:extLst>
           </p:cNvPr>
@@ -20829,7 +20829,7 @@
           <p:cNvPr id="79" name="">
             <a:extLst xmlns:a="http://schemas.openxmlformats.org/drawingml/2006/main">
               <a:ext uri="{FF2B5EF4-FFF2-40B4-BE49-F238E27FC236}">
-                <a16:creationId xmlns:a16="http://schemas.microsoft.com/office/drawing/2014/main" id="{00F4B175-1096-4CF3-B6E1-721F05D2F41A}"/>
+                <a16:creationId xmlns:a16="http://schemas.microsoft.com/office/drawing/2014/main" id="{68185545-0240-4FF5-9BB6-4E790C6EE8A6}"/>
               </a:ext>
             </a:extLst>
           </p:cNvPr>
@@ -20881,7 +20881,7 @@
           <p:cNvPr id="80" name="">
             <a:extLst xmlns:a="http://schemas.openxmlformats.org/drawingml/2006/main">
               <a:ext uri="{FF2B5EF4-FFF2-40B4-BE49-F238E27FC236}">
-                <a16:creationId xmlns:a16="http://schemas.microsoft.com/office/drawing/2014/main" id="{BE006E94-1982-43BF-ADE1-40AB1A16B3CA}"/>
+                <a16:creationId xmlns:a16="http://schemas.microsoft.com/office/drawing/2014/main" id="{3163E5F2-B1F0-4A4B-90B8-C04717662DC0}"/>
               </a:ext>
             </a:extLst>
           </p:cNvPr>
@@ -20933,7 +20933,7 @@
           <p:cNvPr id="81" name="">
             <a:extLst xmlns:a="http://schemas.openxmlformats.org/drawingml/2006/main">
               <a:ext uri="{FF2B5EF4-FFF2-40B4-BE49-F238E27FC236}">
-                <a16:creationId xmlns:a16="http://schemas.microsoft.com/office/drawing/2014/main" id="{35321034-A4AB-4CB8-ACA5-927150D9E3C7}"/>
+                <a16:creationId xmlns:a16="http://schemas.microsoft.com/office/drawing/2014/main" id="{B46153E5-53FF-4D0A-A5F0-177882999510}"/>
               </a:ext>
             </a:extLst>
           </p:cNvPr>
@@ -20985,7 +20985,7 @@
           <p:cNvPr id="82" name="">
             <a:extLst xmlns:a="http://schemas.openxmlformats.org/drawingml/2006/main">
               <a:ext uri="{FF2B5EF4-FFF2-40B4-BE49-F238E27FC236}">
-                <a16:creationId xmlns:a16="http://schemas.microsoft.com/office/drawing/2014/main" id="{9B76F6CE-268A-4AD5-81C8-4A50E0AFB393}"/>
+                <a16:creationId xmlns:a16="http://schemas.microsoft.com/office/drawing/2014/main" id="{E76EA9F1-7156-48D4-B5DD-F6EAA3EE553C}"/>
               </a:ext>
             </a:extLst>
           </p:cNvPr>
@@ -21037,7 +21037,7 @@
           <p:cNvPr id="83" name="">
             <a:extLst xmlns:a="http://schemas.openxmlformats.org/drawingml/2006/main">
               <a:ext uri="{FF2B5EF4-FFF2-40B4-BE49-F238E27FC236}">
-                <a16:creationId xmlns:a16="http://schemas.microsoft.com/office/drawing/2014/main" id="{87A9573D-B3E4-444F-9FAB-058D6D1B427A}"/>
+                <a16:creationId xmlns:a16="http://schemas.microsoft.com/office/drawing/2014/main" id="{A852EB57-D481-4B9D-873A-DE6E4ED0D680}"/>
               </a:ext>
             </a:extLst>
           </p:cNvPr>
@@ -21068,7 +21068,7 @@
           <p:cNvPr id="84" name="">
             <a:extLst xmlns:a="http://schemas.openxmlformats.org/drawingml/2006/main">
               <a:ext uri="{FF2B5EF4-FFF2-40B4-BE49-F238E27FC236}">
-                <a16:creationId xmlns:a16="http://schemas.microsoft.com/office/drawing/2014/main" id="{02B8C08F-568B-414C-B5EA-9FEEB005FCEB}"/>
+                <a16:creationId xmlns:a16="http://schemas.microsoft.com/office/drawing/2014/main" id="{49A2A497-ABC4-47B0-B89B-2C7F96C62201}"/>
               </a:ext>
             </a:extLst>
           </p:cNvPr>
@@ -21120,7 +21120,7 @@
           <p:cNvPr id="85" name="">
             <a:extLst xmlns:a="http://schemas.openxmlformats.org/drawingml/2006/main">
               <a:ext uri="{FF2B5EF4-FFF2-40B4-BE49-F238E27FC236}">
-                <a16:creationId xmlns:a16="http://schemas.microsoft.com/office/drawing/2014/main" id="{CF9043C4-F12E-41AC-A3E1-30FAD0557C9F}"/>
+                <a16:creationId xmlns:a16="http://schemas.microsoft.com/office/drawing/2014/main" id="{9673CDAD-C172-46E8-B4F7-A6F29F5C8F3B}"/>
               </a:ext>
             </a:extLst>
           </p:cNvPr>
@@ -21172,7 +21172,7 @@
           <p:cNvPr id="86" name="">
             <a:extLst xmlns:a="http://schemas.openxmlformats.org/drawingml/2006/main">
               <a:ext uri="{FF2B5EF4-FFF2-40B4-BE49-F238E27FC236}">
-                <a16:creationId xmlns:a16="http://schemas.microsoft.com/office/drawing/2014/main" id="{0934A8B5-D608-4D64-8076-DE361108D971}"/>
+                <a16:creationId xmlns:a16="http://schemas.microsoft.com/office/drawing/2014/main" id="{48078DCF-9280-4EA0-B0B2-90FC4B7DDFD4}"/>
               </a:ext>
             </a:extLst>
           </p:cNvPr>
@@ -21224,7 +21224,7 @@
           <p:cNvPr id="87" name="">
             <a:extLst xmlns:a="http://schemas.openxmlformats.org/drawingml/2006/main">
               <a:ext uri="{FF2B5EF4-FFF2-40B4-BE49-F238E27FC236}">
-                <a16:creationId xmlns:a16="http://schemas.microsoft.com/office/drawing/2014/main" id="{92E7F896-6222-4731-B0D2-C918C2AD036E}"/>
+                <a16:creationId xmlns:a16="http://schemas.microsoft.com/office/drawing/2014/main" id="{43220B64-31FA-4FE7-8724-5DD0A0525DC0}"/>
               </a:ext>
             </a:extLst>
           </p:cNvPr>
@@ -21276,7 +21276,7 @@
           <p:cNvPr id="88" name="">
             <a:extLst xmlns:a="http://schemas.openxmlformats.org/drawingml/2006/main">
               <a:ext uri="{FF2B5EF4-FFF2-40B4-BE49-F238E27FC236}">
-                <a16:creationId xmlns:a16="http://schemas.microsoft.com/office/drawing/2014/main" id="{23180E00-C29D-4ADF-88BE-5E644027AF0F}"/>
+                <a16:creationId xmlns:a16="http://schemas.microsoft.com/office/drawing/2014/main" id="{711A5C81-DB28-4AB5-8C46-EAD5A67FFD4E}"/>
               </a:ext>
             </a:extLst>
           </p:cNvPr>
@@ -21328,7 +21328,7 @@
           <p:cNvPr id="89" name="">
             <a:extLst xmlns:a="http://schemas.openxmlformats.org/drawingml/2006/main">
               <a:ext uri="{FF2B5EF4-FFF2-40B4-BE49-F238E27FC236}">
-                <a16:creationId xmlns:a16="http://schemas.microsoft.com/office/drawing/2014/main" id="{DC428730-7DB5-4DF0-A7F2-C33AEF0D24B3}"/>
+                <a16:creationId xmlns:a16="http://schemas.microsoft.com/office/drawing/2014/main" id="{4A887F19-5F99-487C-91BF-5D6CEA665673}"/>
               </a:ext>
             </a:extLst>
           </p:cNvPr>
@@ -21359,7 +21359,7 @@
           <p:cNvPr id="90" name="">
             <a:extLst xmlns:a="http://schemas.openxmlformats.org/drawingml/2006/main">
               <a:ext uri="{FF2B5EF4-FFF2-40B4-BE49-F238E27FC236}">
-                <a16:creationId xmlns:a16="http://schemas.microsoft.com/office/drawing/2014/main" id="{19F79B28-E576-4503-9B98-0CAC3A07F3CA}"/>
+                <a16:creationId xmlns:a16="http://schemas.microsoft.com/office/drawing/2014/main" id="{465842F6-5008-4C3B-AB08-9D0A151F4259}"/>
               </a:ext>
             </a:extLst>
           </p:cNvPr>
@@ -21390,7 +21390,7 @@
           <p:cNvPr id="91" name="">
             <a:extLst xmlns:a="http://schemas.openxmlformats.org/drawingml/2006/main">
               <a:ext uri="{FF2B5EF4-FFF2-40B4-BE49-F238E27FC236}">
-                <a16:creationId xmlns:a16="http://schemas.microsoft.com/office/drawing/2014/main" id="{00D72045-4B21-49AD-9D65-C444FEFFD6BE}"/>
+                <a16:creationId xmlns:a16="http://schemas.microsoft.com/office/drawing/2014/main" id="{627F52DC-A88F-4AB2-A982-E7225B679CFB}"/>
               </a:ext>
             </a:extLst>
           </p:cNvPr>
@@ -21442,7 +21442,7 @@
           <p:cNvPr id="92" name="">
             <a:extLst xmlns:a="http://schemas.openxmlformats.org/drawingml/2006/main">
               <a:ext uri="{FF2B5EF4-FFF2-40B4-BE49-F238E27FC236}">
-                <a16:creationId xmlns:a16="http://schemas.microsoft.com/office/drawing/2014/main" id="{57459385-D492-4418-B5C5-A56766EAA8EB}"/>
+                <a16:creationId xmlns:a16="http://schemas.microsoft.com/office/drawing/2014/main" id="{CFDFECA5-BB55-4A4A-B968-48BDBA698DF3}"/>
               </a:ext>
             </a:extLst>
           </p:cNvPr>
@@ -21494,7 +21494,7 @@
           <p:cNvPr id="93" name="">
             <a:extLst xmlns:a="http://schemas.openxmlformats.org/drawingml/2006/main">
               <a:ext uri="{FF2B5EF4-FFF2-40B4-BE49-F238E27FC236}">
-                <a16:creationId xmlns:a16="http://schemas.microsoft.com/office/drawing/2014/main" id="{214071F7-66A6-444C-9CEA-AA5D590CC09E}"/>
+                <a16:creationId xmlns:a16="http://schemas.microsoft.com/office/drawing/2014/main" id="{8ACEE591-3A40-438C-90E2-A2B90D13B594}"/>
               </a:ext>
             </a:extLst>
           </p:cNvPr>
@@ -21546,7 +21546,7 @@
           <p:cNvPr id="94" name="">
             <a:extLst xmlns:a="http://schemas.openxmlformats.org/drawingml/2006/main">
               <a:ext uri="{FF2B5EF4-FFF2-40B4-BE49-F238E27FC236}">
-                <a16:creationId xmlns:a16="http://schemas.microsoft.com/office/drawing/2014/main" id="{71491B71-7F10-4C07-87D8-3D9E48579F6C}"/>
+                <a16:creationId xmlns:a16="http://schemas.microsoft.com/office/drawing/2014/main" id="{666E7E41-3572-4745-A6F5-58FA849F1AA0}"/>
               </a:ext>
             </a:extLst>
           </p:cNvPr>
@@ -21598,7 +21598,7 @@
           <p:cNvPr id="95" name="">
             <a:extLst xmlns:a="http://schemas.openxmlformats.org/drawingml/2006/main">
               <a:ext uri="{FF2B5EF4-FFF2-40B4-BE49-F238E27FC236}">
-                <a16:creationId xmlns:a16="http://schemas.microsoft.com/office/drawing/2014/main" id="{5AC62D5B-B2EC-4A91-BB8C-F75ADFB3473F}"/>
+                <a16:creationId xmlns:a16="http://schemas.microsoft.com/office/drawing/2014/main" id="{B0B6BEEF-9AFB-48F5-88CE-9FD241211773}"/>
               </a:ext>
             </a:extLst>
           </p:cNvPr>
@@ -21648,7 +21648,7 @@
     </p:spTree>
     <p:extLst>
       <p:ext uri="{BB962C8B-B14F-4D97-AF65-F5344CB8AC3E}">
-        <p14:creationId xmlns:p14="http://schemas.microsoft.com/office/powerpoint/2010/main" val="2120642708"/>
+        <p14:creationId xmlns:p14="http://schemas.microsoft.com/office/powerpoint/2010/main" val="90812329"/>
       </p:ext>
     </p:extLst>
   </p:cSld>
@@ -21679,7 +21679,7 @@
           <p:cNvPr id="135" name="">
             <a:extLst xmlns:a="http://schemas.openxmlformats.org/drawingml/2006/main">
               <a:ext uri="{FF2B5EF4-FFF2-40B4-BE49-F238E27FC236}">
-                <a16:creationId xmlns:a16="http://schemas.microsoft.com/office/drawing/2014/main" id="{203320C3-1575-4B0C-B804-6C2C245EF964}"/>
+                <a16:creationId xmlns:a16="http://schemas.microsoft.com/office/drawing/2014/main" id="{C3751624-9CCE-4008-9EE6-233D5AC71ABF}"/>
               </a:ext>
             </a:extLst>
           </p:cNvPr>
@@ -21712,7 +21712,7 @@
           <p:cNvPr id="2" name="">
             <a:extLst xmlns:a="http://schemas.openxmlformats.org/drawingml/2006/main">
               <a:ext uri="{FF2B5EF4-FFF2-40B4-BE49-F238E27FC236}">
-                <a16:creationId xmlns:a16="http://schemas.microsoft.com/office/drawing/2014/main" id="{040AF4EE-76D2-49B5-976B-BA8951651EDA}"/>
+                <a16:creationId xmlns:a16="http://schemas.microsoft.com/office/drawing/2014/main" id="{C45053D8-2622-4AA4-9AFE-39503009BC7D}"/>
               </a:ext>
             </a:extLst>
           </p:cNvPr>
@@ -21743,7 +21743,7 @@
           <p:cNvPr id="3" name="">
             <a:extLst xmlns:a="http://schemas.openxmlformats.org/drawingml/2006/main">
               <a:ext uri="{FF2B5EF4-FFF2-40B4-BE49-F238E27FC236}">
-                <a16:creationId xmlns:a16="http://schemas.microsoft.com/office/drawing/2014/main" id="{CB8272C0-95E2-48C6-9DB1-FAAE3D6DE89D}"/>
+                <a16:creationId xmlns:a16="http://schemas.microsoft.com/office/drawing/2014/main" id="{87E8B5F5-75EC-4D8C-9C26-0256C0C926EB}"/>
               </a:ext>
             </a:extLst>
           </p:cNvPr>
@@ -21795,7 +21795,7 @@
           <p:cNvPr id="4" name="">
             <a:extLst xmlns:a="http://schemas.openxmlformats.org/drawingml/2006/main">
               <a:ext uri="{FF2B5EF4-FFF2-40B4-BE49-F238E27FC236}">
-                <a16:creationId xmlns:a16="http://schemas.microsoft.com/office/drawing/2014/main" id="{960A2EA4-DAB4-42BA-898E-BFB81AEA1625}"/>
+                <a16:creationId xmlns:a16="http://schemas.microsoft.com/office/drawing/2014/main" id="{AE1F13EE-830B-445D-9F5E-D7C3C30C85EA}"/>
               </a:ext>
             </a:extLst>
           </p:cNvPr>
@@ -21847,7 +21847,7 @@
           <p:cNvPr id="5" name="">
             <a:extLst xmlns:a="http://schemas.openxmlformats.org/drawingml/2006/main">
               <a:ext uri="{FF2B5EF4-FFF2-40B4-BE49-F238E27FC236}">
-                <a16:creationId xmlns:a16="http://schemas.microsoft.com/office/drawing/2014/main" id="{4EDFF435-8AEA-4FA8-80AF-02C41CEA494A}"/>
+                <a16:creationId xmlns:a16="http://schemas.microsoft.com/office/drawing/2014/main" id="{F18167C3-D998-49BE-812E-E5636983CA17}"/>
               </a:ext>
             </a:extLst>
           </p:cNvPr>
@@ -21882,7 +21882,7 @@
           <p:nvPr/>
         </p:nvPicPr>
         <p:blipFill>
-          <a:blip xmlns:r="http://schemas.openxmlformats.org/officeDocument/2006/relationships" xmlns:a="http://schemas.openxmlformats.org/drawingml/2006/main" r:embed="Rf872e9c9c7de4867"/>
+          <a:blip xmlns:r="http://schemas.openxmlformats.org/officeDocument/2006/relationships" xmlns:a="http://schemas.openxmlformats.org/drawingml/2006/main" r:embed="R23741cd066cf4afa"/>
           <a:stretch xmlns:a="http://schemas.openxmlformats.org/drawingml/2006/main"/>
         </p:blipFill>
         <p:spPr>
@@ -21900,7 +21900,7 @@
           <p:cNvPr id="7" name="">
             <a:extLst xmlns:a="http://schemas.openxmlformats.org/drawingml/2006/main">
               <a:ext uri="{FF2B5EF4-FFF2-40B4-BE49-F238E27FC236}">
-                <a16:creationId xmlns:a16="http://schemas.microsoft.com/office/drawing/2014/main" id="{CB8EC7F2-D3AE-486A-A844-81C55FF972FB}"/>
+                <a16:creationId xmlns:a16="http://schemas.microsoft.com/office/drawing/2014/main" id="{625BCAEA-6738-401B-903E-C4F6751C14D3}"/>
               </a:ext>
             </a:extLst>
           </p:cNvPr>
@@ -21952,7 +21952,7 @@
           <p:cNvPr id="8" name="">
             <a:extLst xmlns:a="http://schemas.openxmlformats.org/drawingml/2006/main">
               <a:ext uri="{FF2B5EF4-FFF2-40B4-BE49-F238E27FC236}">
-                <a16:creationId xmlns:a16="http://schemas.microsoft.com/office/drawing/2014/main" id="{D98E06F8-9B21-4FC3-8872-338C51DF4181}"/>
+                <a16:creationId xmlns:a16="http://schemas.microsoft.com/office/drawing/2014/main" id="{F9F938E6-ACC0-4A38-854D-021124B6AE93}"/>
               </a:ext>
             </a:extLst>
           </p:cNvPr>
@@ -22004,7 +22004,7 @@
           <p:cNvPr id="9" name="">
             <a:extLst xmlns:a="http://schemas.openxmlformats.org/drawingml/2006/main">
               <a:ext uri="{FF2B5EF4-FFF2-40B4-BE49-F238E27FC236}">
-                <a16:creationId xmlns:a16="http://schemas.microsoft.com/office/drawing/2014/main" id="{BB31295F-9A21-49A4-9BB3-09D3C20D1BA5}"/>
+                <a16:creationId xmlns:a16="http://schemas.microsoft.com/office/drawing/2014/main" id="{929D85D5-BB68-4B36-908B-3482FE0A4B20}"/>
               </a:ext>
             </a:extLst>
           </p:cNvPr>
@@ -22056,7 +22056,7 @@
           <p:cNvPr id="10" name="">
             <a:extLst xmlns:a="http://schemas.openxmlformats.org/drawingml/2006/main">
               <a:ext uri="{FF2B5EF4-FFF2-40B4-BE49-F238E27FC236}">
-                <a16:creationId xmlns:a16="http://schemas.microsoft.com/office/drawing/2014/main" id="{A78A71C3-0311-45E7-9281-D100E751EE38}"/>
+                <a16:creationId xmlns:a16="http://schemas.microsoft.com/office/drawing/2014/main" id="{106DA476-D117-4E59-9FB2-78233050A2DC}"/>
               </a:ext>
             </a:extLst>
           </p:cNvPr>
@@ -22108,7 +22108,7 @@
           <p:cNvPr id="11" name="">
             <a:extLst xmlns:a="http://schemas.openxmlformats.org/drawingml/2006/main">
               <a:ext uri="{FF2B5EF4-FFF2-40B4-BE49-F238E27FC236}">
-                <a16:creationId xmlns:a16="http://schemas.microsoft.com/office/drawing/2014/main" id="{1F041C4B-4DFE-4940-A167-5DD9B082E951}"/>
+                <a16:creationId xmlns:a16="http://schemas.microsoft.com/office/drawing/2014/main" id="{F0DCB200-1521-4AFB-82F5-A3F8BCC1FC17}"/>
               </a:ext>
             </a:extLst>
           </p:cNvPr>
@@ -22139,7 +22139,7 @@
           <p:cNvPr id="12" name="">
             <a:extLst xmlns:a="http://schemas.openxmlformats.org/drawingml/2006/main">
               <a:ext uri="{FF2B5EF4-FFF2-40B4-BE49-F238E27FC236}">
-                <a16:creationId xmlns:a16="http://schemas.microsoft.com/office/drawing/2014/main" id="{27B0DB98-2CF8-494B-BCBE-4EBFE60AE3AF}"/>
+                <a16:creationId xmlns:a16="http://schemas.microsoft.com/office/drawing/2014/main" id="{A8C9EECE-4A00-4160-8369-19AE80298F6E}"/>
               </a:ext>
             </a:extLst>
           </p:cNvPr>
@@ -22170,7 +22170,7 @@
           <p:cNvPr id="13" name="">
             <a:extLst xmlns:a="http://schemas.openxmlformats.org/drawingml/2006/main">
               <a:ext uri="{FF2B5EF4-FFF2-40B4-BE49-F238E27FC236}">
-                <a16:creationId xmlns:a16="http://schemas.microsoft.com/office/drawing/2014/main" id="{BE86D6BB-B39C-496A-9D45-073466D78CD2}"/>
+                <a16:creationId xmlns:a16="http://schemas.microsoft.com/office/drawing/2014/main" id="{36198337-4195-4862-B053-436C7319C2C9}"/>
               </a:ext>
             </a:extLst>
           </p:cNvPr>
@@ -22222,7 +22222,7 @@
           <p:cNvPr id="14" name="">
             <a:extLst xmlns:a="http://schemas.openxmlformats.org/drawingml/2006/main">
               <a:ext uri="{FF2B5EF4-FFF2-40B4-BE49-F238E27FC236}">
-                <a16:creationId xmlns:a16="http://schemas.microsoft.com/office/drawing/2014/main" id="{B7479D7C-3FA7-4885-8AD0-6039A8211955}"/>
+                <a16:creationId xmlns:a16="http://schemas.microsoft.com/office/drawing/2014/main" id="{12D7637C-11D1-4E52-A946-C019750EC286}"/>
               </a:ext>
             </a:extLst>
           </p:cNvPr>
@@ -22274,7 +22274,7 @@
           <p:cNvPr id="15" name="">
             <a:extLst xmlns:a="http://schemas.openxmlformats.org/drawingml/2006/main">
               <a:ext uri="{FF2B5EF4-FFF2-40B4-BE49-F238E27FC236}">
-                <a16:creationId xmlns:a16="http://schemas.microsoft.com/office/drawing/2014/main" id="{45230253-F4EA-4AB4-B861-BDEDE8A506B2}"/>
+                <a16:creationId xmlns:a16="http://schemas.microsoft.com/office/drawing/2014/main" id="{FD25046F-7785-4BE4-B83E-7D2775BA9BAE}"/>
               </a:ext>
             </a:extLst>
           </p:cNvPr>
@@ -22326,7 +22326,7 @@
           <p:cNvPr id="16" name="">
             <a:extLst xmlns:a="http://schemas.openxmlformats.org/drawingml/2006/main">
               <a:ext uri="{FF2B5EF4-FFF2-40B4-BE49-F238E27FC236}">
-                <a16:creationId xmlns:a16="http://schemas.microsoft.com/office/drawing/2014/main" id="{6B912FDF-19F0-4D12-BF89-93FDC17A53FC}"/>
+                <a16:creationId xmlns:a16="http://schemas.microsoft.com/office/drawing/2014/main" id="{5327E678-199B-46FC-BF74-DB4A1CAB666C}"/>
               </a:ext>
             </a:extLst>
           </p:cNvPr>
@@ -22378,7 +22378,7 @@
           <p:cNvPr id="17" name="">
             <a:extLst xmlns:a="http://schemas.openxmlformats.org/drawingml/2006/main">
               <a:ext uri="{FF2B5EF4-FFF2-40B4-BE49-F238E27FC236}">
-                <a16:creationId xmlns:a16="http://schemas.microsoft.com/office/drawing/2014/main" id="{9AD3C2EB-C48E-4051-83F9-3B0C576D6C41}"/>
+                <a16:creationId xmlns:a16="http://schemas.microsoft.com/office/drawing/2014/main" id="{A434AA91-1342-47F0-BD86-31E106975A14}"/>
               </a:ext>
             </a:extLst>
           </p:cNvPr>
@@ -22430,7 +22430,7 @@
           <p:cNvPr id="18" name="">
             <a:extLst xmlns:a="http://schemas.openxmlformats.org/drawingml/2006/main">
               <a:ext uri="{FF2B5EF4-FFF2-40B4-BE49-F238E27FC236}">
-                <a16:creationId xmlns:a16="http://schemas.microsoft.com/office/drawing/2014/main" id="{D5E10EC9-A575-45A1-AF4F-E11A555FB22B}"/>
+                <a16:creationId xmlns:a16="http://schemas.microsoft.com/office/drawing/2014/main" id="{BE1BD56E-233C-45A6-A273-C7E84244EF40}"/>
               </a:ext>
             </a:extLst>
           </p:cNvPr>
@@ -22482,7 +22482,7 @@
           <p:cNvPr id="19" name="">
             <a:extLst xmlns:a="http://schemas.openxmlformats.org/drawingml/2006/main">
               <a:ext uri="{FF2B5EF4-FFF2-40B4-BE49-F238E27FC236}">
-                <a16:creationId xmlns:a16="http://schemas.microsoft.com/office/drawing/2014/main" id="{48F33587-1796-4FE8-9E50-F0A682BA3BA6}"/>
+                <a16:creationId xmlns:a16="http://schemas.microsoft.com/office/drawing/2014/main" id="{F2750F4B-20AB-424E-BC0D-EE0897849170}"/>
               </a:ext>
             </a:extLst>
           </p:cNvPr>
@@ -22534,7 +22534,7 @@
           <p:cNvPr id="20" name="">
             <a:extLst xmlns:a="http://schemas.openxmlformats.org/drawingml/2006/main">
               <a:ext uri="{FF2B5EF4-FFF2-40B4-BE49-F238E27FC236}">
-                <a16:creationId xmlns:a16="http://schemas.microsoft.com/office/drawing/2014/main" id="{F1611951-74CF-4BA1-985C-05A1DE3FF4C3}"/>
+                <a16:creationId xmlns:a16="http://schemas.microsoft.com/office/drawing/2014/main" id="{705F6931-4881-428A-A0AD-C2B821101BA9}"/>
               </a:ext>
             </a:extLst>
           </p:cNvPr>
@@ -22586,7 +22586,7 @@
           <p:cNvPr id="21" name="">
             <a:extLst xmlns:a="http://schemas.openxmlformats.org/drawingml/2006/main">
               <a:ext uri="{FF2B5EF4-FFF2-40B4-BE49-F238E27FC236}">
-                <a16:creationId xmlns:a16="http://schemas.microsoft.com/office/drawing/2014/main" id="{24CE1AC4-BE8B-4719-B717-8F7C34FA59A0}"/>
+                <a16:creationId xmlns:a16="http://schemas.microsoft.com/office/drawing/2014/main" id="{D327C560-C2BA-42FB-B935-AB03A8AA1860}"/>
               </a:ext>
             </a:extLst>
           </p:cNvPr>
@@ -22617,7 +22617,7 @@
           <p:cNvPr id="22" name="">
             <a:extLst xmlns:a="http://schemas.openxmlformats.org/drawingml/2006/main">
               <a:ext uri="{FF2B5EF4-FFF2-40B4-BE49-F238E27FC236}">
-                <a16:creationId xmlns:a16="http://schemas.microsoft.com/office/drawing/2014/main" id="{C0601212-B9DA-4D0F-B66E-E72C35043852}"/>
+                <a16:creationId xmlns:a16="http://schemas.microsoft.com/office/drawing/2014/main" id="{DD8F7062-6640-447E-98F4-0D608D8A245C}"/>
               </a:ext>
             </a:extLst>
           </p:cNvPr>
@@ -22669,7 +22669,7 @@
           <p:cNvPr id="23" name="">
             <a:extLst xmlns:a="http://schemas.openxmlformats.org/drawingml/2006/main">
               <a:ext uri="{FF2B5EF4-FFF2-40B4-BE49-F238E27FC236}">
-                <a16:creationId xmlns:a16="http://schemas.microsoft.com/office/drawing/2014/main" id="{6695F818-68C1-42E8-B04A-A6EAE460BA5E}"/>
+                <a16:creationId xmlns:a16="http://schemas.microsoft.com/office/drawing/2014/main" id="{9A98D0A8-36CA-48C6-9396-DFBC008E482B}"/>
               </a:ext>
             </a:extLst>
           </p:cNvPr>
@@ -22721,7 +22721,7 @@
           <p:cNvPr id="24" name="">
             <a:extLst xmlns:a="http://schemas.openxmlformats.org/drawingml/2006/main">
               <a:ext uri="{FF2B5EF4-FFF2-40B4-BE49-F238E27FC236}">
-                <a16:creationId xmlns:a16="http://schemas.microsoft.com/office/drawing/2014/main" id="{1B234934-7D36-452D-9211-F1A7E4C09974}"/>
+                <a16:creationId xmlns:a16="http://schemas.microsoft.com/office/drawing/2014/main" id="{5EEEBB2D-FE80-4A20-A728-FA742CD74144}"/>
               </a:ext>
             </a:extLst>
           </p:cNvPr>
@@ -22773,7 +22773,7 @@
           <p:cNvPr id="25" name="">
             <a:extLst xmlns:a="http://schemas.openxmlformats.org/drawingml/2006/main">
               <a:ext uri="{FF2B5EF4-FFF2-40B4-BE49-F238E27FC236}">
-                <a16:creationId xmlns:a16="http://schemas.microsoft.com/office/drawing/2014/main" id="{399E67F1-B862-4851-AFCB-2541DA45EF46}"/>
+                <a16:creationId xmlns:a16="http://schemas.microsoft.com/office/drawing/2014/main" id="{21E26688-B728-4DDD-81E9-2D410E25370C}"/>
               </a:ext>
             </a:extLst>
           </p:cNvPr>
@@ -22825,7 +22825,7 @@
           <p:cNvPr id="26" name="">
             <a:extLst xmlns:a="http://schemas.openxmlformats.org/drawingml/2006/main">
               <a:ext uri="{FF2B5EF4-FFF2-40B4-BE49-F238E27FC236}">
-                <a16:creationId xmlns:a16="http://schemas.microsoft.com/office/drawing/2014/main" id="{3E327A8B-EAF9-464E-9D2F-D496ECDE6EDD}"/>
+                <a16:creationId xmlns:a16="http://schemas.microsoft.com/office/drawing/2014/main" id="{2B62B8FB-39FA-4567-B4CD-959115ABFF73}"/>
               </a:ext>
             </a:extLst>
           </p:cNvPr>
@@ -22877,7 +22877,7 @@
           <p:cNvPr id="27" name="">
             <a:extLst xmlns:a="http://schemas.openxmlformats.org/drawingml/2006/main">
               <a:ext uri="{FF2B5EF4-FFF2-40B4-BE49-F238E27FC236}">
-                <a16:creationId xmlns:a16="http://schemas.microsoft.com/office/drawing/2014/main" id="{B2BE8F4E-94FE-45FF-939D-B01ABBC414E1}"/>
+                <a16:creationId xmlns:a16="http://schemas.microsoft.com/office/drawing/2014/main" id="{B79355C0-E087-4705-83E9-9C01F9263241}"/>
               </a:ext>
             </a:extLst>
           </p:cNvPr>
@@ -22929,7 +22929,7 @@
           <p:cNvPr id="28" name="">
             <a:extLst xmlns:a="http://schemas.openxmlformats.org/drawingml/2006/main">
               <a:ext uri="{FF2B5EF4-FFF2-40B4-BE49-F238E27FC236}">
-                <a16:creationId xmlns:a16="http://schemas.microsoft.com/office/drawing/2014/main" id="{4908987D-D58C-41AF-96D1-09CAE3586202}"/>
+                <a16:creationId xmlns:a16="http://schemas.microsoft.com/office/drawing/2014/main" id="{1B26BEB8-192D-4935-ACC1-45679C81D102}"/>
               </a:ext>
             </a:extLst>
           </p:cNvPr>
@@ -22981,7 +22981,7 @@
           <p:cNvPr id="29" name="">
             <a:extLst xmlns:a="http://schemas.openxmlformats.org/drawingml/2006/main">
               <a:ext uri="{FF2B5EF4-FFF2-40B4-BE49-F238E27FC236}">
-                <a16:creationId xmlns:a16="http://schemas.microsoft.com/office/drawing/2014/main" id="{286C7753-2BE4-47ED-AC56-76E8C594F021}"/>
+                <a16:creationId xmlns:a16="http://schemas.microsoft.com/office/drawing/2014/main" id="{26920385-D490-469D-87E4-2E5BE7F29428}"/>
               </a:ext>
             </a:extLst>
           </p:cNvPr>
@@ -23033,7 +23033,7 @@
           <p:cNvPr id="30" name="">
             <a:extLst xmlns:a="http://schemas.openxmlformats.org/drawingml/2006/main">
               <a:ext uri="{FF2B5EF4-FFF2-40B4-BE49-F238E27FC236}">
-                <a16:creationId xmlns:a16="http://schemas.microsoft.com/office/drawing/2014/main" id="{86FF62CF-BF5F-4EDC-A23F-BD68E16A8772}"/>
+                <a16:creationId xmlns:a16="http://schemas.microsoft.com/office/drawing/2014/main" id="{2DC3E984-E5D1-4591-8847-C93F0A2B7D7A}"/>
               </a:ext>
             </a:extLst>
           </p:cNvPr>
@@ -23064,7 +23064,7 @@
           <p:cNvPr id="31" name="">
             <a:extLst xmlns:a="http://schemas.openxmlformats.org/drawingml/2006/main">
               <a:ext uri="{FF2B5EF4-FFF2-40B4-BE49-F238E27FC236}">
-                <a16:creationId xmlns:a16="http://schemas.microsoft.com/office/drawing/2014/main" id="{698BE661-B2E5-4E00-B3D0-566E10A9AF51}"/>
+                <a16:creationId xmlns:a16="http://schemas.microsoft.com/office/drawing/2014/main" id="{44CA2084-A9D3-4470-9839-66CC41837496}"/>
               </a:ext>
             </a:extLst>
           </p:cNvPr>
@@ -23095,7 +23095,7 @@
           <p:cNvPr id="32" name="">
             <a:extLst xmlns:a="http://schemas.openxmlformats.org/drawingml/2006/main">
               <a:ext uri="{FF2B5EF4-FFF2-40B4-BE49-F238E27FC236}">
-                <a16:creationId xmlns:a16="http://schemas.microsoft.com/office/drawing/2014/main" id="{1FD119F7-093E-49A8-8DE7-589E88BD2134}"/>
+                <a16:creationId xmlns:a16="http://schemas.microsoft.com/office/drawing/2014/main" id="{4D2849C8-AE1A-4936-B7EF-7B9F8270D90F}"/>
               </a:ext>
             </a:extLst>
           </p:cNvPr>
@@ -23147,7 +23147,7 @@
           <p:cNvPr id="33" name="">
             <a:extLst xmlns:a="http://schemas.openxmlformats.org/drawingml/2006/main">
               <a:ext uri="{FF2B5EF4-FFF2-40B4-BE49-F238E27FC236}">
-                <a16:creationId xmlns:a16="http://schemas.microsoft.com/office/drawing/2014/main" id="{BF190493-C542-498C-957F-9AE713087932}"/>
+                <a16:creationId xmlns:a16="http://schemas.microsoft.com/office/drawing/2014/main" id="{F7621F7C-59D8-49EF-978D-B0961EBA0E35}"/>
               </a:ext>
             </a:extLst>
           </p:cNvPr>
@@ -23199,7 +23199,7 @@
           <p:cNvPr id="34" name="">
             <a:extLst xmlns:a="http://schemas.openxmlformats.org/drawingml/2006/main">
               <a:ext uri="{FF2B5EF4-FFF2-40B4-BE49-F238E27FC236}">
-                <a16:creationId xmlns:a16="http://schemas.microsoft.com/office/drawing/2014/main" id="{4F83DC0D-F7DE-4AF3-96FB-B0F0464F3CDC}"/>
+                <a16:creationId xmlns:a16="http://schemas.microsoft.com/office/drawing/2014/main" id="{A109EE17-06B6-458D-80BC-B2A4FAA27A56}"/>
               </a:ext>
             </a:extLst>
           </p:cNvPr>
@@ -23251,7 +23251,7 @@
           <p:cNvPr id="35" name="">
             <a:extLst xmlns:a="http://schemas.openxmlformats.org/drawingml/2006/main">
               <a:ext uri="{FF2B5EF4-FFF2-40B4-BE49-F238E27FC236}">
-                <a16:creationId xmlns:a16="http://schemas.microsoft.com/office/drawing/2014/main" id="{E93CFCF7-4687-411A-8CA1-E801B83FDA00}"/>
+                <a16:creationId xmlns:a16="http://schemas.microsoft.com/office/drawing/2014/main" id="{D375FCE1-3A87-412E-94E2-4518D92D7D8A}"/>
               </a:ext>
             </a:extLst>
           </p:cNvPr>
@@ -23303,7 +23303,7 @@
           <p:cNvPr id="36" name="">
             <a:extLst xmlns:a="http://schemas.openxmlformats.org/drawingml/2006/main">
               <a:ext uri="{FF2B5EF4-FFF2-40B4-BE49-F238E27FC236}">
-                <a16:creationId xmlns:a16="http://schemas.microsoft.com/office/drawing/2014/main" id="{27030B94-CC83-48C8-A1B6-C78CDD2588BD}"/>
+                <a16:creationId xmlns:a16="http://schemas.microsoft.com/office/drawing/2014/main" id="{80405B87-D046-4921-ABA2-871DD2BD328A}"/>
               </a:ext>
             </a:extLst>
           </p:cNvPr>
@@ -23355,7 +23355,7 @@
           <p:cNvPr id="37" name="">
             <a:extLst xmlns:a="http://schemas.openxmlformats.org/drawingml/2006/main">
               <a:ext uri="{FF2B5EF4-FFF2-40B4-BE49-F238E27FC236}">
-                <a16:creationId xmlns:a16="http://schemas.microsoft.com/office/drawing/2014/main" id="{7222D148-5C3B-4B50-90EA-68A7DD32DC4B}"/>
+                <a16:creationId xmlns:a16="http://schemas.microsoft.com/office/drawing/2014/main" id="{E019AA8A-F9E2-40D5-B32F-19C014DBC930}"/>
               </a:ext>
             </a:extLst>
           </p:cNvPr>
@@ -23407,7 +23407,7 @@
           <p:cNvPr id="38" name="">
             <a:extLst xmlns:a="http://schemas.openxmlformats.org/drawingml/2006/main">
               <a:ext uri="{FF2B5EF4-FFF2-40B4-BE49-F238E27FC236}">
-                <a16:creationId xmlns:a16="http://schemas.microsoft.com/office/drawing/2014/main" id="{9C115D35-E6E5-42B1-9042-AF3BFF8655DA}"/>
+                <a16:creationId xmlns:a16="http://schemas.microsoft.com/office/drawing/2014/main" id="{02814F5E-F1FB-4FE7-A12A-81A75C4AB6B3}"/>
               </a:ext>
             </a:extLst>
           </p:cNvPr>
@@ -23459,7 +23459,7 @@
           <p:cNvPr id="39" name="">
             <a:extLst xmlns:a="http://schemas.openxmlformats.org/drawingml/2006/main">
               <a:ext uri="{FF2B5EF4-FFF2-40B4-BE49-F238E27FC236}">
-                <a16:creationId xmlns:a16="http://schemas.microsoft.com/office/drawing/2014/main" id="{1C518899-D093-4292-BA85-BF29AD97F0B4}"/>
+                <a16:creationId xmlns:a16="http://schemas.microsoft.com/office/drawing/2014/main" id="{5F3CC9EE-E065-40E8-B899-50183E5B1DAB}"/>
               </a:ext>
             </a:extLst>
           </p:cNvPr>
@@ -23511,7 +23511,7 @@
           <p:cNvPr id="40" name="">
             <a:extLst xmlns:a="http://schemas.openxmlformats.org/drawingml/2006/main">
               <a:ext uri="{FF2B5EF4-FFF2-40B4-BE49-F238E27FC236}">
-                <a16:creationId xmlns:a16="http://schemas.microsoft.com/office/drawing/2014/main" id="{0C5180B1-B86D-4103-B0CF-9AE16EB3A545}"/>
+                <a16:creationId xmlns:a16="http://schemas.microsoft.com/office/drawing/2014/main" id="{FD4F70CB-3AD7-4E4A-8BFA-91E4308C92F1}"/>
               </a:ext>
             </a:extLst>
           </p:cNvPr>
@@ -23542,7 +23542,7 @@
           <p:cNvPr id="41" name="">
             <a:extLst xmlns:a="http://schemas.openxmlformats.org/drawingml/2006/main">
               <a:ext uri="{FF2B5EF4-FFF2-40B4-BE49-F238E27FC236}">
-                <a16:creationId xmlns:a16="http://schemas.microsoft.com/office/drawing/2014/main" id="{522B0FDE-2B0E-450B-8336-DA783592BBF1}"/>
+                <a16:creationId xmlns:a16="http://schemas.microsoft.com/office/drawing/2014/main" id="{E3F2886B-FE54-4232-9CF3-43FA7797B144}"/>
               </a:ext>
             </a:extLst>
           </p:cNvPr>
@@ -23594,7 +23594,7 @@
           <p:cNvPr id="42" name="">
             <a:extLst xmlns:a="http://schemas.openxmlformats.org/drawingml/2006/main">
               <a:ext uri="{FF2B5EF4-FFF2-40B4-BE49-F238E27FC236}">
-                <a16:creationId xmlns:a16="http://schemas.microsoft.com/office/drawing/2014/main" id="{F9B8AAA7-2EF4-47DE-A6E1-D6E11987CFFB}"/>
+                <a16:creationId xmlns:a16="http://schemas.microsoft.com/office/drawing/2014/main" id="{89C62232-FD6B-4707-A32F-E32B0ACBF0B8}"/>
               </a:ext>
             </a:extLst>
           </p:cNvPr>
@@ -23646,7 +23646,7 @@
           <p:cNvPr id="43" name="">
             <a:extLst xmlns:a="http://schemas.openxmlformats.org/drawingml/2006/main">
               <a:ext uri="{FF2B5EF4-FFF2-40B4-BE49-F238E27FC236}">
-                <a16:creationId xmlns:a16="http://schemas.microsoft.com/office/drawing/2014/main" id="{93C9ED87-BE40-4E3F-AB80-82520384EA95}"/>
+                <a16:creationId xmlns:a16="http://schemas.microsoft.com/office/drawing/2014/main" id="{1CDD168D-B4A4-4840-806C-99EA3786BA8C}"/>
               </a:ext>
             </a:extLst>
           </p:cNvPr>
@@ -23698,7 +23698,7 @@
           <p:cNvPr id="44" name="">
             <a:extLst xmlns:a="http://schemas.openxmlformats.org/drawingml/2006/main">
               <a:ext uri="{FF2B5EF4-FFF2-40B4-BE49-F238E27FC236}">
-                <a16:creationId xmlns:a16="http://schemas.microsoft.com/office/drawing/2014/main" id="{787303D3-B4C4-4672-BFE9-E4F9376CF846}"/>
+                <a16:creationId xmlns:a16="http://schemas.microsoft.com/office/drawing/2014/main" id="{1600E866-6599-4977-B049-CA306A117170}"/>
               </a:ext>
             </a:extLst>
           </p:cNvPr>
@@ -23750,7 +23750,7 @@
           <p:cNvPr id="45" name="">
             <a:extLst xmlns:a="http://schemas.openxmlformats.org/drawingml/2006/main">
               <a:ext uri="{FF2B5EF4-FFF2-40B4-BE49-F238E27FC236}">
-                <a16:creationId xmlns:a16="http://schemas.microsoft.com/office/drawing/2014/main" id="{AB70A372-C4B4-4195-BF5F-7C9B04B7B1F8}"/>
+                <a16:creationId xmlns:a16="http://schemas.microsoft.com/office/drawing/2014/main" id="{68907835-BD04-407B-BA2A-85A547F5854C}"/>
               </a:ext>
             </a:extLst>
           </p:cNvPr>
@@ -23802,7 +23802,7 @@
           <p:cNvPr id="46" name="">
             <a:extLst xmlns:a="http://schemas.openxmlformats.org/drawingml/2006/main">
               <a:ext uri="{FF2B5EF4-FFF2-40B4-BE49-F238E27FC236}">
-                <a16:creationId xmlns:a16="http://schemas.microsoft.com/office/drawing/2014/main" id="{705F1DCC-B882-40FC-8822-A35D123AA1DA}"/>
+                <a16:creationId xmlns:a16="http://schemas.microsoft.com/office/drawing/2014/main" id="{762F901C-2ECD-4F27-BC98-74976F87E212}"/>
               </a:ext>
             </a:extLst>
           </p:cNvPr>
@@ -23854,7 +23854,7 @@
           <p:cNvPr id="47" name="">
             <a:extLst xmlns:a="http://schemas.openxmlformats.org/drawingml/2006/main">
               <a:ext uri="{FF2B5EF4-FFF2-40B4-BE49-F238E27FC236}">
-                <a16:creationId xmlns:a16="http://schemas.microsoft.com/office/drawing/2014/main" id="{D1A802C9-5C6E-4E50-9A7E-EA094EF044F0}"/>
+                <a16:creationId xmlns:a16="http://schemas.microsoft.com/office/drawing/2014/main" id="{5235CC56-1C88-4773-B33D-610C4D96CDA3}"/>
               </a:ext>
             </a:extLst>
           </p:cNvPr>
@@ -23906,7 +23906,7 @@
           <p:cNvPr id="48" name="">
             <a:extLst xmlns:a="http://schemas.openxmlformats.org/drawingml/2006/main">
               <a:ext uri="{FF2B5EF4-FFF2-40B4-BE49-F238E27FC236}">
-                <a16:creationId xmlns:a16="http://schemas.microsoft.com/office/drawing/2014/main" id="{C066D621-0F4E-41BE-A9D3-55060E60A804}"/>
+                <a16:creationId xmlns:a16="http://schemas.microsoft.com/office/drawing/2014/main" id="{6743AF5C-3531-4563-80C8-64F6AFE24652}"/>
               </a:ext>
             </a:extLst>
           </p:cNvPr>
@@ -23958,7 +23958,7 @@
           <p:cNvPr id="49" name="">
             <a:extLst xmlns:a="http://schemas.openxmlformats.org/drawingml/2006/main">
               <a:ext uri="{FF2B5EF4-FFF2-40B4-BE49-F238E27FC236}">
-                <a16:creationId xmlns:a16="http://schemas.microsoft.com/office/drawing/2014/main" id="{C4AEDAA7-8012-43C1-A767-F56A3DE19047}"/>
+                <a16:creationId xmlns:a16="http://schemas.microsoft.com/office/drawing/2014/main" id="{1AA84F08-6F99-434F-83F2-E13C6C48868D}"/>
               </a:ext>
             </a:extLst>
           </p:cNvPr>
@@ -23989,7 +23989,7 @@
           <p:cNvPr id="50" name="">
             <a:extLst xmlns:a="http://schemas.openxmlformats.org/drawingml/2006/main">
               <a:ext uri="{FF2B5EF4-FFF2-40B4-BE49-F238E27FC236}">
-                <a16:creationId xmlns:a16="http://schemas.microsoft.com/office/drawing/2014/main" id="{AE953996-BEA1-4463-B9F9-D008F19A334C}"/>
+                <a16:creationId xmlns:a16="http://schemas.microsoft.com/office/drawing/2014/main" id="{CF36C570-1DD0-4B7A-9B61-CC20D7D70703}"/>
               </a:ext>
             </a:extLst>
           </p:cNvPr>
@@ -24020,7 +24020,7 @@
           <p:cNvPr id="51" name="">
             <a:extLst xmlns:a="http://schemas.openxmlformats.org/drawingml/2006/main">
               <a:ext uri="{FF2B5EF4-FFF2-40B4-BE49-F238E27FC236}">
-                <a16:creationId xmlns:a16="http://schemas.microsoft.com/office/drawing/2014/main" id="{83D08F32-C410-4EF3-82F2-45437BA0F950}"/>
+                <a16:creationId xmlns:a16="http://schemas.microsoft.com/office/drawing/2014/main" id="{35F90628-6842-4D07-992F-3A66880C9400}"/>
               </a:ext>
             </a:extLst>
           </p:cNvPr>
@@ -24072,7 +24072,7 @@
           <p:cNvPr id="52" name="">
             <a:extLst xmlns:a="http://schemas.openxmlformats.org/drawingml/2006/main">
               <a:ext uri="{FF2B5EF4-FFF2-40B4-BE49-F238E27FC236}">
-                <a16:creationId xmlns:a16="http://schemas.microsoft.com/office/drawing/2014/main" id="{E2DBA98D-649B-4FBC-B48D-4CCF2D52D743}"/>
+                <a16:creationId xmlns:a16="http://schemas.microsoft.com/office/drawing/2014/main" id="{F0E33773-AF27-492A-ACBE-8B6E1F5D7124}"/>
               </a:ext>
             </a:extLst>
           </p:cNvPr>
@@ -24124,7 +24124,7 @@
           <p:cNvPr id="53" name="">
             <a:extLst xmlns:a="http://schemas.openxmlformats.org/drawingml/2006/main">
               <a:ext uri="{FF2B5EF4-FFF2-40B4-BE49-F238E27FC236}">
-                <a16:creationId xmlns:a16="http://schemas.microsoft.com/office/drawing/2014/main" id="{CC5344D5-4A37-409E-99C9-723B779543D1}"/>
+                <a16:creationId xmlns:a16="http://schemas.microsoft.com/office/drawing/2014/main" id="{2C39BA40-8906-4A49-8528-278F150044D5}"/>
               </a:ext>
             </a:extLst>
           </p:cNvPr>
@@ -24176,7 +24176,7 @@
           <p:cNvPr id="54" name="">
             <a:extLst xmlns:a="http://schemas.openxmlformats.org/drawingml/2006/main">
               <a:ext uri="{FF2B5EF4-FFF2-40B4-BE49-F238E27FC236}">
-                <a16:creationId xmlns:a16="http://schemas.microsoft.com/office/drawing/2014/main" id="{D164ECEE-2BE5-4553-B07E-D1DFCF011BBE}"/>
+                <a16:creationId xmlns:a16="http://schemas.microsoft.com/office/drawing/2014/main" id="{36D1CE79-6639-499F-A2E0-56DFE8564552}"/>
               </a:ext>
             </a:extLst>
           </p:cNvPr>
@@ -24228,7 +24228,7 @@
           <p:cNvPr id="55" name="">
             <a:extLst xmlns:a="http://schemas.openxmlformats.org/drawingml/2006/main">
               <a:ext uri="{FF2B5EF4-FFF2-40B4-BE49-F238E27FC236}">
-                <a16:creationId xmlns:a16="http://schemas.microsoft.com/office/drawing/2014/main" id="{A3EA2B93-5E91-4BD8-B175-49A7646FDFA3}"/>
+                <a16:creationId xmlns:a16="http://schemas.microsoft.com/office/drawing/2014/main" id="{7198BE1F-C08D-4253-9FD4-396929209613}"/>
               </a:ext>
             </a:extLst>
           </p:cNvPr>
@@ -24280,7 +24280,7 @@
           <p:cNvPr id="56" name="">
             <a:extLst xmlns:a="http://schemas.openxmlformats.org/drawingml/2006/main">
               <a:ext uri="{FF2B5EF4-FFF2-40B4-BE49-F238E27FC236}">
-                <a16:creationId xmlns:a16="http://schemas.microsoft.com/office/drawing/2014/main" id="{8F788F29-0E8E-4D14-828A-447D2A44565D}"/>
+                <a16:creationId xmlns:a16="http://schemas.microsoft.com/office/drawing/2014/main" id="{003FD61B-17A4-4AE1-A87C-845174C0EA4E}"/>
               </a:ext>
             </a:extLst>
           </p:cNvPr>
@@ -24332,7 +24332,7 @@
           <p:cNvPr id="57" name="">
             <a:extLst xmlns:a="http://schemas.openxmlformats.org/drawingml/2006/main">
               <a:ext uri="{FF2B5EF4-FFF2-40B4-BE49-F238E27FC236}">
-                <a16:creationId xmlns:a16="http://schemas.microsoft.com/office/drawing/2014/main" id="{1BF760D9-76F1-4400-8A30-16ABDFFD1431}"/>
+                <a16:creationId xmlns:a16="http://schemas.microsoft.com/office/drawing/2014/main" id="{0033D7A2-38DD-4649-AAA3-06096D894558}"/>
               </a:ext>
             </a:extLst>
           </p:cNvPr>
@@ -24384,7 +24384,7 @@
           <p:cNvPr id="58" name="">
             <a:extLst xmlns:a="http://schemas.openxmlformats.org/drawingml/2006/main">
               <a:ext uri="{FF2B5EF4-FFF2-40B4-BE49-F238E27FC236}">
-                <a16:creationId xmlns:a16="http://schemas.microsoft.com/office/drawing/2014/main" id="{40A4FE02-050E-47B8-A2FF-2D17FEA9881A}"/>
+                <a16:creationId xmlns:a16="http://schemas.microsoft.com/office/drawing/2014/main" id="{36C5E280-04F9-48A9-92B6-E24200A3D064}"/>
               </a:ext>
             </a:extLst>
           </p:cNvPr>
@@ -24436,7 +24436,7 @@
           <p:cNvPr id="59" name="">
             <a:extLst xmlns:a="http://schemas.openxmlformats.org/drawingml/2006/main">
               <a:ext uri="{FF2B5EF4-FFF2-40B4-BE49-F238E27FC236}">
-                <a16:creationId xmlns:a16="http://schemas.microsoft.com/office/drawing/2014/main" id="{3EE1BD27-375A-41AE-A4F2-77CF7BB065B1}"/>
+                <a16:creationId xmlns:a16="http://schemas.microsoft.com/office/drawing/2014/main" id="{A37E13C9-E5A3-4980-AC5B-0BB6705A1918}"/>
               </a:ext>
             </a:extLst>
           </p:cNvPr>
@@ -24467,7 +24467,7 @@
           <p:cNvPr id="60" name="">
             <a:extLst xmlns:a="http://schemas.openxmlformats.org/drawingml/2006/main">
               <a:ext uri="{FF2B5EF4-FFF2-40B4-BE49-F238E27FC236}">
-                <a16:creationId xmlns:a16="http://schemas.microsoft.com/office/drawing/2014/main" id="{82DACF30-A343-48DE-BCBF-15338C1A9C1D}"/>
+                <a16:creationId xmlns:a16="http://schemas.microsoft.com/office/drawing/2014/main" id="{0833B200-2DEB-4A10-9EC0-FD8B58C9287E}"/>
               </a:ext>
             </a:extLst>
           </p:cNvPr>
@@ -24519,7 +24519,7 @@
           <p:cNvPr id="61" name="">
             <a:extLst xmlns:a="http://schemas.openxmlformats.org/drawingml/2006/main">
               <a:ext uri="{FF2B5EF4-FFF2-40B4-BE49-F238E27FC236}">
-                <a16:creationId xmlns:a16="http://schemas.microsoft.com/office/drawing/2014/main" id="{DBA30208-6CAE-41A9-B315-366F379E5ED8}"/>
+                <a16:creationId xmlns:a16="http://schemas.microsoft.com/office/drawing/2014/main" id="{6D2BFDE6-FB4B-4260-ABC0-D0359E221E31}"/>
               </a:ext>
             </a:extLst>
           </p:cNvPr>
@@ -24571,7 +24571,7 @@
           <p:cNvPr id="62" name="">
             <a:extLst xmlns:a="http://schemas.openxmlformats.org/drawingml/2006/main">
               <a:ext uri="{FF2B5EF4-FFF2-40B4-BE49-F238E27FC236}">
-                <a16:creationId xmlns:a16="http://schemas.microsoft.com/office/drawing/2014/main" id="{32B40E75-BC2B-48F3-95BF-F51B53714F70}"/>
+                <a16:creationId xmlns:a16="http://schemas.microsoft.com/office/drawing/2014/main" id="{88CD6572-4551-467F-ABED-7B5A9C77F994}"/>
               </a:ext>
             </a:extLst>
           </p:cNvPr>
@@ -24623,7 +24623,7 @@
           <p:cNvPr id="63" name="">
             <a:extLst xmlns:a="http://schemas.openxmlformats.org/drawingml/2006/main">
               <a:ext uri="{FF2B5EF4-FFF2-40B4-BE49-F238E27FC236}">
-                <a16:creationId xmlns:a16="http://schemas.microsoft.com/office/drawing/2014/main" id="{485E34B9-3B05-4B3C-BEEA-7B09830A4090}"/>
+                <a16:creationId xmlns:a16="http://schemas.microsoft.com/office/drawing/2014/main" id="{BA96E581-6D2F-41C7-AF71-F0500066F4F4}"/>
               </a:ext>
             </a:extLst>
           </p:cNvPr>
@@ -24675,7 +24675,7 @@
           <p:cNvPr id="64" name="">
             <a:extLst xmlns:a="http://schemas.openxmlformats.org/drawingml/2006/main">
               <a:ext uri="{FF2B5EF4-FFF2-40B4-BE49-F238E27FC236}">
-                <a16:creationId xmlns:a16="http://schemas.microsoft.com/office/drawing/2014/main" id="{E4967B0C-7BCE-4270-A957-99F57DEFC783}"/>
+                <a16:creationId xmlns:a16="http://schemas.microsoft.com/office/drawing/2014/main" id="{F5A7C01C-D765-41D6-BCB8-094EDC3D535F}"/>
               </a:ext>
             </a:extLst>
           </p:cNvPr>
@@ -24727,7 +24727,7 @@
           <p:cNvPr id="65" name="">
             <a:extLst xmlns:a="http://schemas.openxmlformats.org/drawingml/2006/main">
               <a:ext uri="{FF2B5EF4-FFF2-40B4-BE49-F238E27FC236}">
-                <a16:creationId xmlns:a16="http://schemas.microsoft.com/office/drawing/2014/main" id="{BFC9BFA6-4956-4C8E-97AB-55C07DB738FF}"/>
+                <a16:creationId xmlns:a16="http://schemas.microsoft.com/office/drawing/2014/main" id="{4D84D705-9DF2-42CB-A8C8-B5E44953E747}"/>
               </a:ext>
             </a:extLst>
           </p:cNvPr>
@@ -24779,7 +24779,7 @@
           <p:cNvPr id="66" name="">
             <a:extLst xmlns:a="http://schemas.openxmlformats.org/drawingml/2006/main">
               <a:ext uri="{FF2B5EF4-FFF2-40B4-BE49-F238E27FC236}">
-                <a16:creationId xmlns:a16="http://schemas.microsoft.com/office/drawing/2014/main" id="{217E12C8-C935-4D3A-BF3B-EFDDF4B75D97}"/>
+                <a16:creationId xmlns:a16="http://schemas.microsoft.com/office/drawing/2014/main" id="{0D03237D-61EE-4F98-B324-57637CE8B8B6}"/>
               </a:ext>
             </a:extLst>
           </p:cNvPr>
@@ -24831,7 +24831,7 @@
           <p:cNvPr id="67" name="">
             <a:extLst xmlns:a="http://schemas.openxmlformats.org/drawingml/2006/main">
               <a:ext uri="{FF2B5EF4-FFF2-40B4-BE49-F238E27FC236}">
-                <a16:creationId xmlns:a16="http://schemas.microsoft.com/office/drawing/2014/main" id="{152CB3AE-5320-4C55-8156-36559653E6CE}"/>
+                <a16:creationId xmlns:a16="http://schemas.microsoft.com/office/drawing/2014/main" id="{17A5A8A8-E101-440C-8FA3-80ED91F0556A}"/>
               </a:ext>
             </a:extLst>
           </p:cNvPr>
@@ -24883,7 +24883,7 @@
           <p:cNvPr id="68" name="">
             <a:extLst xmlns:a="http://schemas.openxmlformats.org/drawingml/2006/main">
               <a:ext uri="{FF2B5EF4-FFF2-40B4-BE49-F238E27FC236}">
-                <a16:creationId xmlns:a16="http://schemas.microsoft.com/office/drawing/2014/main" id="{172C5609-3BDB-42B0-A89D-36D1A36962A9}"/>
+                <a16:creationId xmlns:a16="http://schemas.microsoft.com/office/drawing/2014/main" id="{F381C091-7A44-456F-A7B1-D780175CFD04}"/>
               </a:ext>
             </a:extLst>
           </p:cNvPr>
@@ -24914,7 +24914,7 @@
           <p:cNvPr id="69" name="">
             <a:extLst xmlns:a="http://schemas.openxmlformats.org/drawingml/2006/main">
               <a:ext uri="{FF2B5EF4-FFF2-40B4-BE49-F238E27FC236}">
-                <a16:creationId xmlns:a16="http://schemas.microsoft.com/office/drawing/2014/main" id="{EFFA8C8B-FD9A-4C07-A8AC-192806DA7110}"/>
+                <a16:creationId xmlns:a16="http://schemas.microsoft.com/office/drawing/2014/main" id="{C41E3EB7-1FFC-4590-9ABF-2A69098969AC}"/>
               </a:ext>
             </a:extLst>
           </p:cNvPr>
@@ -24945,7 +24945,7 @@
           <p:cNvPr id="70" name="">
             <a:extLst xmlns:a="http://schemas.openxmlformats.org/drawingml/2006/main">
               <a:ext uri="{FF2B5EF4-FFF2-40B4-BE49-F238E27FC236}">
-                <a16:creationId xmlns:a16="http://schemas.microsoft.com/office/drawing/2014/main" id="{F0191A0D-C40E-4661-A3D8-54C95DCD8589}"/>
+                <a16:creationId xmlns:a16="http://schemas.microsoft.com/office/drawing/2014/main" id="{AECE3D25-EB40-4CDC-A8E4-6B7F00D7DE8E}"/>
               </a:ext>
             </a:extLst>
           </p:cNvPr>
@@ -24997,7 +24997,7 @@
           <p:cNvPr id="71" name="">
             <a:extLst xmlns:a="http://schemas.openxmlformats.org/drawingml/2006/main">
               <a:ext uri="{FF2B5EF4-FFF2-40B4-BE49-F238E27FC236}">
-                <a16:creationId xmlns:a16="http://schemas.microsoft.com/office/drawing/2014/main" id="{361E9F21-F6F8-4814-83AB-D7DB5A83640C}"/>
+                <a16:creationId xmlns:a16="http://schemas.microsoft.com/office/drawing/2014/main" id="{661FB932-1631-4229-8F2F-88E8ED9BAC25}"/>
               </a:ext>
             </a:extLst>
           </p:cNvPr>
@@ -25049,7 +25049,7 @@
           <p:cNvPr id="72" name="">
             <a:extLst xmlns:a="http://schemas.openxmlformats.org/drawingml/2006/main">
               <a:ext uri="{FF2B5EF4-FFF2-40B4-BE49-F238E27FC236}">
-                <a16:creationId xmlns:a16="http://schemas.microsoft.com/office/drawing/2014/main" id="{FE5E36E8-5CA4-496E-A6AF-5A9730A3A8CC}"/>
+                <a16:creationId xmlns:a16="http://schemas.microsoft.com/office/drawing/2014/main" id="{CF9BD40E-CD3B-4353-A041-7F6F6573704B}"/>
               </a:ext>
             </a:extLst>
           </p:cNvPr>
@@ -25101,7 +25101,7 @@
           <p:cNvPr id="73" name="">
             <a:extLst xmlns:a="http://schemas.openxmlformats.org/drawingml/2006/main">
               <a:ext uri="{FF2B5EF4-FFF2-40B4-BE49-F238E27FC236}">
-                <a16:creationId xmlns:a16="http://schemas.microsoft.com/office/drawing/2014/main" id="{2EEE7A78-F7EB-45D2-A8B9-29B1A0844693}"/>
+                <a16:creationId xmlns:a16="http://schemas.microsoft.com/office/drawing/2014/main" id="{4BA75212-4888-48AB-9036-35C7BAA51821}"/>
               </a:ext>
             </a:extLst>
           </p:cNvPr>
@@ -25153,7 +25153,7 @@
           <p:cNvPr id="74" name="">
             <a:extLst xmlns:a="http://schemas.openxmlformats.org/drawingml/2006/main">
               <a:ext uri="{FF2B5EF4-FFF2-40B4-BE49-F238E27FC236}">
-                <a16:creationId xmlns:a16="http://schemas.microsoft.com/office/drawing/2014/main" id="{E1AA14A9-1FD4-4E5B-BF1A-9AA61E5268D2}"/>
+                <a16:creationId xmlns:a16="http://schemas.microsoft.com/office/drawing/2014/main" id="{D3DD3F47-1FB5-4F76-8DE4-2ACA52C47ACA}"/>
               </a:ext>
             </a:extLst>
           </p:cNvPr>
@@ -25205,7 +25205,7 @@
           <p:cNvPr id="75" name="">
             <a:extLst xmlns:a="http://schemas.openxmlformats.org/drawingml/2006/main">
               <a:ext uri="{FF2B5EF4-FFF2-40B4-BE49-F238E27FC236}">
-                <a16:creationId xmlns:a16="http://schemas.microsoft.com/office/drawing/2014/main" id="{3E179606-C2B5-4C9C-BCBE-4862F22F85E0}"/>
+                <a16:creationId xmlns:a16="http://schemas.microsoft.com/office/drawing/2014/main" id="{7CCE9E62-13C4-489F-981E-C03194CB44A4}"/>
               </a:ext>
             </a:extLst>
           </p:cNvPr>
@@ -25257,7 +25257,7 @@
           <p:cNvPr id="76" name="">
             <a:extLst xmlns:a="http://schemas.openxmlformats.org/drawingml/2006/main">
               <a:ext uri="{FF2B5EF4-FFF2-40B4-BE49-F238E27FC236}">
-                <a16:creationId xmlns:a16="http://schemas.microsoft.com/office/drawing/2014/main" id="{160A82AD-338C-4DD5-AE1E-6336A4F16B25}"/>
+                <a16:creationId xmlns:a16="http://schemas.microsoft.com/office/drawing/2014/main" id="{A4E77B6A-8BC9-432E-82E2-857DB639D797}"/>
               </a:ext>
             </a:extLst>
           </p:cNvPr>
@@ -25309,7 +25309,7 @@
           <p:cNvPr id="77" name="">
             <a:extLst xmlns:a="http://schemas.openxmlformats.org/drawingml/2006/main">
               <a:ext uri="{FF2B5EF4-FFF2-40B4-BE49-F238E27FC236}">
-                <a16:creationId xmlns:a16="http://schemas.microsoft.com/office/drawing/2014/main" id="{ED127583-1B3E-4121-A33F-40E12836472B}"/>
+                <a16:creationId xmlns:a16="http://schemas.microsoft.com/office/drawing/2014/main" id="{A237CB4D-CE0C-405C-9625-2B16ED3FD20B}"/>
               </a:ext>
             </a:extLst>
           </p:cNvPr>
@@ -25361,7 +25361,7 @@
           <p:cNvPr id="78" name="">
             <a:extLst xmlns:a="http://schemas.openxmlformats.org/drawingml/2006/main">
               <a:ext uri="{FF2B5EF4-FFF2-40B4-BE49-F238E27FC236}">
-                <a16:creationId xmlns:a16="http://schemas.microsoft.com/office/drawing/2014/main" id="{814DAF77-0859-4D9A-A398-6060AC8DBDA6}"/>
+                <a16:creationId xmlns:a16="http://schemas.microsoft.com/office/drawing/2014/main" id="{311E7E9A-D7CD-4876-A6CB-EF7F3C002776}"/>
               </a:ext>
             </a:extLst>
           </p:cNvPr>
@@ -25392,7 +25392,7 @@
           <p:cNvPr id="79" name="">
             <a:extLst xmlns:a="http://schemas.openxmlformats.org/drawingml/2006/main">
               <a:ext uri="{FF2B5EF4-FFF2-40B4-BE49-F238E27FC236}">
-                <a16:creationId xmlns:a16="http://schemas.microsoft.com/office/drawing/2014/main" id="{1FBEBA1A-BC02-4AF4-B2EE-FEADE5E4FA0F}"/>
+                <a16:creationId xmlns:a16="http://schemas.microsoft.com/office/drawing/2014/main" id="{33344D8F-D64B-4F20-8843-62CD17FE6EC7}"/>
               </a:ext>
             </a:extLst>
           </p:cNvPr>
@@ -25444,7 +25444,7 @@
           <p:cNvPr id="80" name="">
             <a:extLst xmlns:a="http://schemas.openxmlformats.org/drawingml/2006/main">
               <a:ext uri="{FF2B5EF4-FFF2-40B4-BE49-F238E27FC236}">
-                <a16:creationId xmlns:a16="http://schemas.microsoft.com/office/drawing/2014/main" id="{0E0365A8-DA25-4A56-8BFC-0EF6F2D15A89}"/>
+                <a16:creationId xmlns:a16="http://schemas.microsoft.com/office/drawing/2014/main" id="{3EAB922B-B08F-4941-BCB8-D0D6786EBB78}"/>
               </a:ext>
             </a:extLst>
           </p:cNvPr>
@@ -25496,7 +25496,7 @@
           <p:cNvPr id="81" name="">
             <a:extLst xmlns:a="http://schemas.openxmlformats.org/drawingml/2006/main">
               <a:ext uri="{FF2B5EF4-FFF2-40B4-BE49-F238E27FC236}">
-                <a16:creationId xmlns:a16="http://schemas.microsoft.com/office/drawing/2014/main" id="{BA39A03C-DFB4-4964-821E-6C5D05A5287A}"/>
+                <a16:creationId xmlns:a16="http://schemas.microsoft.com/office/drawing/2014/main" id="{28A675C5-3FFA-425A-8F5C-452743D30F5C}"/>
               </a:ext>
             </a:extLst>
           </p:cNvPr>
@@ -25548,7 +25548,7 @@
           <p:cNvPr id="82" name="">
             <a:extLst xmlns:a="http://schemas.openxmlformats.org/drawingml/2006/main">
               <a:ext uri="{FF2B5EF4-FFF2-40B4-BE49-F238E27FC236}">
-                <a16:creationId xmlns:a16="http://schemas.microsoft.com/office/drawing/2014/main" id="{8BE40EC3-A071-4F6A-A26E-E12FDCC7A0CD}"/>
+                <a16:creationId xmlns:a16="http://schemas.microsoft.com/office/drawing/2014/main" id="{4185F0E1-FEAF-4B76-B4C9-850076838A12}"/>
               </a:ext>
             </a:extLst>
           </p:cNvPr>
@@ -25600,7 +25600,7 @@
           <p:cNvPr id="83" name="">
             <a:extLst xmlns:a="http://schemas.openxmlformats.org/drawingml/2006/main">
               <a:ext uri="{FF2B5EF4-FFF2-40B4-BE49-F238E27FC236}">
-                <a16:creationId xmlns:a16="http://schemas.microsoft.com/office/drawing/2014/main" id="{BC94024B-2104-4362-8D1D-2FA85AABF59A}"/>
+                <a16:creationId xmlns:a16="http://schemas.microsoft.com/office/drawing/2014/main" id="{E11FC360-928D-479E-86C4-8D43DB436ACB}"/>
               </a:ext>
             </a:extLst>
           </p:cNvPr>
@@ -25652,7 +25652,7 @@
           <p:cNvPr id="84" name="">
             <a:extLst xmlns:a="http://schemas.openxmlformats.org/drawingml/2006/main">
               <a:ext uri="{FF2B5EF4-FFF2-40B4-BE49-F238E27FC236}">
-                <a16:creationId xmlns:a16="http://schemas.microsoft.com/office/drawing/2014/main" id="{96E61E05-1E44-4DCA-B72C-3857ABC503A3}"/>
+                <a16:creationId xmlns:a16="http://schemas.microsoft.com/office/drawing/2014/main" id="{D10C5CBA-71E9-48E1-88BA-1BE046CAC8C5}"/>
               </a:ext>
             </a:extLst>
           </p:cNvPr>
@@ -25704,7 +25704,7 @@
           <p:cNvPr id="85" name="">
             <a:extLst xmlns:a="http://schemas.openxmlformats.org/drawingml/2006/main">
               <a:ext uri="{FF2B5EF4-FFF2-40B4-BE49-F238E27FC236}">
-                <a16:creationId xmlns:a16="http://schemas.microsoft.com/office/drawing/2014/main" id="{DF9072C5-A3CE-4089-B0ED-70BA160A8E51}"/>
+                <a16:creationId xmlns:a16="http://schemas.microsoft.com/office/drawing/2014/main" id="{8DA57FEE-FFD9-48FB-BBD3-F38221F0CBCB}"/>
               </a:ext>
             </a:extLst>
           </p:cNvPr>
@@ -25756,7 +25756,7 @@
           <p:cNvPr id="86" name="">
             <a:extLst xmlns:a="http://schemas.openxmlformats.org/drawingml/2006/main">
               <a:ext uri="{FF2B5EF4-FFF2-40B4-BE49-F238E27FC236}">
-                <a16:creationId xmlns:a16="http://schemas.microsoft.com/office/drawing/2014/main" id="{66A10EB2-6BC1-4E08-9385-E16B39D3E516}"/>
+                <a16:creationId xmlns:a16="http://schemas.microsoft.com/office/drawing/2014/main" id="{F6FEC0E2-41B6-44CA-BFCE-46D43CBE1DF8}"/>
               </a:ext>
             </a:extLst>
           </p:cNvPr>
@@ -25808,7 +25808,7 @@
           <p:cNvPr id="87" name="">
             <a:extLst xmlns:a="http://schemas.openxmlformats.org/drawingml/2006/main">
               <a:ext uri="{FF2B5EF4-FFF2-40B4-BE49-F238E27FC236}">
-                <a16:creationId xmlns:a16="http://schemas.microsoft.com/office/drawing/2014/main" id="{F37D5BB6-146B-4BDB-8A34-227A2AEB6007}"/>
+                <a16:creationId xmlns:a16="http://schemas.microsoft.com/office/drawing/2014/main" id="{C9E8E208-CA4F-411E-ADF7-7ED2AB79A814}"/>
               </a:ext>
             </a:extLst>
           </p:cNvPr>
@@ -25839,7 +25839,7 @@
           <p:cNvPr id="88" name="">
             <a:extLst xmlns:a="http://schemas.openxmlformats.org/drawingml/2006/main">
               <a:ext uri="{FF2B5EF4-FFF2-40B4-BE49-F238E27FC236}">
-                <a16:creationId xmlns:a16="http://schemas.microsoft.com/office/drawing/2014/main" id="{CD432A0B-1DD0-4580-B634-60CD556EA8D3}"/>
+                <a16:creationId xmlns:a16="http://schemas.microsoft.com/office/drawing/2014/main" id="{66EB5DF1-4FC2-4608-9587-C9E60F7EC1EA}"/>
               </a:ext>
             </a:extLst>
           </p:cNvPr>
@@ -25870,7 +25870,7 @@
           <p:cNvPr id="89" name="">
             <a:extLst xmlns:a="http://schemas.openxmlformats.org/drawingml/2006/main">
               <a:ext uri="{FF2B5EF4-FFF2-40B4-BE49-F238E27FC236}">
-                <a16:creationId xmlns:a16="http://schemas.microsoft.com/office/drawing/2014/main" id="{7AFAB2F7-DF71-4C71-A609-93C328E1AF96}"/>
+                <a16:creationId xmlns:a16="http://schemas.microsoft.com/office/drawing/2014/main" id="{431245AB-696B-4ADF-9BA3-BC44BF91D0A5}"/>
               </a:ext>
             </a:extLst>
           </p:cNvPr>
@@ -25922,7 +25922,7 @@
           <p:cNvPr id="90" name="">
             <a:extLst xmlns:a="http://schemas.openxmlformats.org/drawingml/2006/main">
               <a:ext uri="{FF2B5EF4-FFF2-40B4-BE49-F238E27FC236}">
-                <a16:creationId xmlns:a16="http://schemas.microsoft.com/office/drawing/2014/main" id="{652A5BAB-6EBF-4EFA-9469-469601B136D6}"/>
+                <a16:creationId xmlns:a16="http://schemas.microsoft.com/office/drawing/2014/main" id="{8B0AA9E4-B5EA-4B79-85EC-255DC7700B96}"/>
               </a:ext>
             </a:extLst>
           </p:cNvPr>
@@ -25974,7 +25974,7 @@
           <p:cNvPr id="91" name="">
             <a:extLst xmlns:a="http://schemas.openxmlformats.org/drawingml/2006/main">
               <a:ext uri="{FF2B5EF4-FFF2-40B4-BE49-F238E27FC236}">
-                <a16:creationId xmlns:a16="http://schemas.microsoft.com/office/drawing/2014/main" id="{297322CC-14D4-42BF-B69E-2089A9AD3F9C}"/>
+                <a16:creationId xmlns:a16="http://schemas.microsoft.com/office/drawing/2014/main" id="{EDF7646C-0091-4861-AEA9-65F3FD589CA5}"/>
               </a:ext>
             </a:extLst>
           </p:cNvPr>
@@ -26026,7 +26026,7 @@
           <p:cNvPr id="92" name="">
             <a:extLst xmlns:a="http://schemas.openxmlformats.org/drawingml/2006/main">
               <a:ext uri="{FF2B5EF4-FFF2-40B4-BE49-F238E27FC236}">
-                <a16:creationId xmlns:a16="http://schemas.microsoft.com/office/drawing/2014/main" id="{D93BA811-19C8-4A01-87A5-C379FE8E9EB7}"/>
+                <a16:creationId xmlns:a16="http://schemas.microsoft.com/office/drawing/2014/main" id="{CDF08134-C397-4FDC-9E42-04ADFC759EA8}"/>
               </a:ext>
             </a:extLst>
           </p:cNvPr>
@@ -26078,7 +26078,7 @@
           <p:cNvPr id="93" name="">
             <a:extLst xmlns:a="http://schemas.openxmlformats.org/drawingml/2006/main">
               <a:ext uri="{FF2B5EF4-FFF2-40B4-BE49-F238E27FC236}">
-                <a16:creationId xmlns:a16="http://schemas.microsoft.com/office/drawing/2014/main" id="{C0A32BDD-447C-4D77-89B7-4AA86C540456}"/>
+                <a16:creationId xmlns:a16="http://schemas.microsoft.com/office/drawing/2014/main" id="{FF9BF83E-3A54-493F-B48E-EA14E0256810}"/>
               </a:ext>
             </a:extLst>
           </p:cNvPr>
@@ -26130,7 +26130,7 @@
           <p:cNvPr id="94" name="">
             <a:extLst xmlns:a="http://schemas.openxmlformats.org/drawingml/2006/main">
               <a:ext uri="{FF2B5EF4-FFF2-40B4-BE49-F238E27FC236}">
-                <a16:creationId xmlns:a16="http://schemas.microsoft.com/office/drawing/2014/main" id="{5CDFD99A-6458-42C1-8AB9-EAEE9ADFBC1A}"/>
+                <a16:creationId xmlns:a16="http://schemas.microsoft.com/office/drawing/2014/main" id="{A8993DB7-8736-4470-A58B-5055B7B8484A}"/>
               </a:ext>
             </a:extLst>
           </p:cNvPr>
@@ -26182,7 +26182,7 @@
           <p:cNvPr id="95" name="">
             <a:extLst xmlns:a="http://schemas.openxmlformats.org/drawingml/2006/main">
               <a:ext uri="{FF2B5EF4-FFF2-40B4-BE49-F238E27FC236}">
-                <a16:creationId xmlns:a16="http://schemas.microsoft.com/office/drawing/2014/main" id="{3540F9C8-41BB-48FC-9DE8-C7D68378F084}"/>
+                <a16:creationId xmlns:a16="http://schemas.microsoft.com/office/drawing/2014/main" id="{F77F1A50-19C9-4F3C-8DA3-5B681D845FEB}"/>
               </a:ext>
             </a:extLst>
           </p:cNvPr>
@@ -26234,7 +26234,7 @@
           <p:cNvPr id="96" name="">
             <a:extLst xmlns:a="http://schemas.openxmlformats.org/drawingml/2006/main">
               <a:ext uri="{FF2B5EF4-FFF2-40B4-BE49-F238E27FC236}">
-                <a16:creationId xmlns:a16="http://schemas.microsoft.com/office/drawing/2014/main" id="{B193DD94-2E9E-49A0-AD63-BD9F60AEC303}"/>
+                <a16:creationId xmlns:a16="http://schemas.microsoft.com/office/drawing/2014/main" id="{65E9D183-C603-4F49-AB9A-AA67DF4082FD}"/>
               </a:ext>
             </a:extLst>
           </p:cNvPr>
@@ -26286,7 +26286,7 @@
           <p:cNvPr id="97" name="">
             <a:extLst xmlns:a="http://schemas.openxmlformats.org/drawingml/2006/main">
               <a:ext uri="{FF2B5EF4-FFF2-40B4-BE49-F238E27FC236}">
-                <a16:creationId xmlns:a16="http://schemas.microsoft.com/office/drawing/2014/main" id="{35D13856-17B6-4BA2-A40A-D17B4ADAEE90}"/>
+                <a16:creationId xmlns:a16="http://schemas.microsoft.com/office/drawing/2014/main" id="{D651E584-0744-48A5-9D31-0B627332E2CA}"/>
               </a:ext>
             </a:extLst>
           </p:cNvPr>
@@ -26317,7 +26317,7 @@
           <p:cNvPr id="98" name="">
             <a:extLst xmlns:a="http://schemas.openxmlformats.org/drawingml/2006/main">
               <a:ext uri="{FF2B5EF4-FFF2-40B4-BE49-F238E27FC236}">
-                <a16:creationId xmlns:a16="http://schemas.microsoft.com/office/drawing/2014/main" id="{C7CB67DE-E758-442E-AFFE-B6134778A048}"/>
+                <a16:creationId xmlns:a16="http://schemas.microsoft.com/office/drawing/2014/main" id="{FE6CDC54-3B4C-4340-B586-64DF6F2B3A45}"/>
               </a:ext>
             </a:extLst>
           </p:cNvPr>
@@ -26369,7 +26369,7 @@
           <p:cNvPr id="99" name="">
             <a:extLst xmlns:a="http://schemas.openxmlformats.org/drawingml/2006/main">
               <a:ext uri="{FF2B5EF4-FFF2-40B4-BE49-F238E27FC236}">
-                <a16:creationId xmlns:a16="http://schemas.microsoft.com/office/drawing/2014/main" id="{0B3F6383-6629-4542-A46A-CA20FC74EBC8}"/>
+                <a16:creationId xmlns:a16="http://schemas.microsoft.com/office/drawing/2014/main" id="{6B29B3E9-F781-4D38-931C-F77FE7CD2EA3}"/>
               </a:ext>
             </a:extLst>
           </p:cNvPr>
@@ -26421,7 +26421,7 @@
           <p:cNvPr id="100" name="">
             <a:extLst xmlns:a="http://schemas.openxmlformats.org/drawingml/2006/main">
               <a:ext uri="{FF2B5EF4-FFF2-40B4-BE49-F238E27FC236}">
-                <a16:creationId xmlns:a16="http://schemas.microsoft.com/office/drawing/2014/main" id="{FEA94BC0-B6DE-4BD5-9BEB-351844042E61}"/>
+                <a16:creationId xmlns:a16="http://schemas.microsoft.com/office/drawing/2014/main" id="{F92486F5-2BC5-4054-B976-47E07A42DAF4}"/>
               </a:ext>
             </a:extLst>
           </p:cNvPr>
@@ -26473,7 +26473,7 @@
           <p:cNvPr id="101" name="">
             <a:extLst xmlns:a="http://schemas.openxmlformats.org/drawingml/2006/main">
               <a:ext uri="{FF2B5EF4-FFF2-40B4-BE49-F238E27FC236}">
-                <a16:creationId xmlns:a16="http://schemas.microsoft.com/office/drawing/2014/main" id="{CA1593BC-05B7-4524-89BD-6DD1A09BC1E3}"/>
+                <a16:creationId xmlns:a16="http://schemas.microsoft.com/office/drawing/2014/main" id="{E5953ECC-CF2E-4490-9DB1-74CFCC303925}"/>
               </a:ext>
             </a:extLst>
           </p:cNvPr>
@@ -26525,7 +26525,7 @@
           <p:cNvPr id="102" name="">
             <a:extLst xmlns:a="http://schemas.openxmlformats.org/drawingml/2006/main">
               <a:ext uri="{FF2B5EF4-FFF2-40B4-BE49-F238E27FC236}">
-                <a16:creationId xmlns:a16="http://schemas.microsoft.com/office/drawing/2014/main" id="{32F96A96-FE90-4DCB-B725-7A3EE75FC1AA}"/>
+                <a16:creationId xmlns:a16="http://schemas.microsoft.com/office/drawing/2014/main" id="{C04053DE-F61E-46C6-8E8B-12155F2B91C0}"/>
               </a:ext>
             </a:extLst>
           </p:cNvPr>
@@ -26577,7 +26577,7 @@
           <p:cNvPr id="103" name="">
             <a:extLst xmlns:a="http://schemas.openxmlformats.org/drawingml/2006/main">
               <a:ext uri="{FF2B5EF4-FFF2-40B4-BE49-F238E27FC236}">
-                <a16:creationId xmlns:a16="http://schemas.microsoft.com/office/drawing/2014/main" id="{9927831F-483D-4F90-9345-77397E997DB1}"/>
+                <a16:creationId xmlns:a16="http://schemas.microsoft.com/office/drawing/2014/main" id="{866B228E-60DA-4176-80FE-7F4ACEBA32C6}"/>
               </a:ext>
             </a:extLst>
           </p:cNvPr>
@@ -26629,7 +26629,7 @@
           <p:cNvPr id="104" name="">
             <a:extLst xmlns:a="http://schemas.openxmlformats.org/drawingml/2006/main">
               <a:ext uri="{FF2B5EF4-FFF2-40B4-BE49-F238E27FC236}">
-                <a16:creationId xmlns:a16="http://schemas.microsoft.com/office/drawing/2014/main" id="{AD073517-3369-484C-B092-A9833245A1B6}"/>
+                <a16:creationId xmlns:a16="http://schemas.microsoft.com/office/drawing/2014/main" id="{3295504D-1CBE-4DB3-8F24-98640DDC096D}"/>
               </a:ext>
             </a:extLst>
           </p:cNvPr>
@@ -26681,7 +26681,7 @@
           <p:cNvPr id="105" name="">
             <a:extLst xmlns:a="http://schemas.openxmlformats.org/drawingml/2006/main">
               <a:ext uri="{FF2B5EF4-FFF2-40B4-BE49-F238E27FC236}">
-                <a16:creationId xmlns:a16="http://schemas.microsoft.com/office/drawing/2014/main" id="{4DB4122E-33E1-4E7C-9AB8-97D2D8E9EC93}"/>
+                <a16:creationId xmlns:a16="http://schemas.microsoft.com/office/drawing/2014/main" id="{9AE26D6A-9FCB-4846-811A-45394EFC9EED}"/>
               </a:ext>
             </a:extLst>
           </p:cNvPr>
@@ -26733,7 +26733,7 @@
           <p:cNvPr id="106" name="">
             <a:extLst xmlns:a="http://schemas.openxmlformats.org/drawingml/2006/main">
               <a:ext uri="{FF2B5EF4-FFF2-40B4-BE49-F238E27FC236}">
-                <a16:creationId xmlns:a16="http://schemas.microsoft.com/office/drawing/2014/main" id="{608001F4-D07A-4EBE-85B3-5BCFA48E0DEC}"/>
+                <a16:creationId xmlns:a16="http://schemas.microsoft.com/office/drawing/2014/main" id="{482498CE-60AF-4FFE-AB8F-9F0AC46AD059}"/>
               </a:ext>
             </a:extLst>
           </p:cNvPr>
@@ -26764,7 +26764,7 @@
           <p:cNvPr id="107" name="">
             <a:extLst xmlns:a="http://schemas.openxmlformats.org/drawingml/2006/main">
               <a:ext uri="{FF2B5EF4-FFF2-40B4-BE49-F238E27FC236}">
-                <a16:creationId xmlns:a16="http://schemas.microsoft.com/office/drawing/2014/main" id="{ADCC20B7-903B-40C7-987D-1D30514677D3}"/>
+                <a16:creationId xmlns:a16="http://schemas.microsoft.com/office/drawing/2014/main" id="{81131074-B90B-45D0-8D87-2E7B375853DE}"/>
               </a:ext>
             </a:extLst>
           </p:cNvPr>
@@ -26795,7 +26795,7 @@
           <p:cNvPr id="108" name="">
             <a:extLst xmlns:a="http://schemas.openxmlformats.org/drawingml/2006/main">
               <a:ext uri="{FF2B5EF4-FFF2-40B4-BE49-F238E27FC236}">
-                <a16:creationId xmlns:a16="http://schemas.microsoft.com/office/drawing/2014/main" id="{0025CCF2-C625-4A51-95E9-161ABF71920C}"/>
+                <a16:creationId xmlns:a16="http://schemas.microsoft.com/office/drawing/2014/main" id="{C0F3AA6C-D549-4C36-A03D-F3C819AD054F}"/>
               </a:ext>
             </a:extLst>
           </p:cNvPr>
@@ -26847,7 +26847,7 @@
           <p:cNvPr id="109" name="">
             <a:extLst xmlns:a="http://schemas.openxmlformats.org/drawingml/2006/main">
               <a:ext uri="{FF2B5EF4-FFF2-40B4-BE49-F238E27FC236}">
-                <a16:creationId xmlns:a16="http://schemas.microsoft.com/office/drawing/2014/main" id="{DAB13F09-3405-44A8-8A8A-C2265232C6D9}"/>
+                <a16:creationId xmlns:a16="http://schemas.microsoft.com/office/drawing/2014/main" id="{9F386347-CA35-4210-9471-8883390DC6EE}"/>
               </a:ext>
             </a:extLst>
           </p:cNvPr>
@@ -26899,7 +26899,7 @@
           <p:cNvPr id="110" name="">
             <a:extLst xmlns:a="http://schemas.openxmlformats.org/drawingml/2006/main">
               <a:ext uri="{FF2B5EF4-FFF2-40B4-BE49-F238E27FC236}">
-                <a16:creationId xmlns:a16="http://schemas.microsoft.com/office/drawing/2014/main" id="{594EB6E5-28D3-4A39-A115-4602D270C33C}"/>
+                <a16:creationId xmlns:a16="http://schemas.microsoft.com/office/drawing/2014/main" id="{0CF72A54-9763-4F11-B1CE-9D1BC6335E2B}"/>
               </a:ext>
             </a:extLst>
           </p:cNvPr>
@@ -26951,7 +26951,7 @@
           <p:cNvPr id="111" name="">
             <a:extLst xmlns:a="http://schemas.openxmlformats.org/drawingml/2006/main">
               <a:ext uri="{FF2B5EF4-FFF2-40B4-BE49-F238E27FC236}">
-                <a16:creationId xmlns:a16="http://schemas.microsoft.com/office/drawing/2014/main" id="{92C64741-4B40-40C2-9BFE-8973E41C2DE9}"/>
+                <a16:creationId xmlns:a16="http://schemas.microsoft.com/office/drawing/2014/main" id="{9CB30601-941F-491C-A1DC-32D817D162CC}"/>
               </a:ext>
             </a:extLst>
           </p:cNvPr>
@@ -27003,7 +27003,7 @@
           <p:cNvPr id="112" name="">
             <a:extLst xmlns:a="http://schemas.openxmlformats.org/drawingml/2006/main">
               <a:ext uri="{FF2B5EF4-FFF2-40B4-BE49-F238E27FC236}">
-                <a16:creationId xmlns:a16="http://schemas.microsoft.com/office/drawing/2014/main" id="{06C10C89-5641-404F-8881-A3C1080AEBEF}"/>
+                <a16:creationId xmlns:a16="http://schemas.microsoft.com/office/drawing/2014/main" id="{1D5D6FFE-6B1F-4D54-88DE-F3B86916B7FE}"/>
               </a:ext>
             </a:extLst>
           </p:cNvPr>
@@ -27055,7 +27055,7 @@
           <p:cNvPr id="113" name="">
             <a:extLst xmlns:a="http://schemas.openxmlformats.org/drawingml/2006/main">
               <a:ext uri="{FF2B5EF4-FFF2-40B4-BE49-F238E27FC236}">
-                <a16:creationId xmlns:a16="http://schemas.microsoft.com/office/drawing/2014/main" id="{381C334B-CA1D-4E45-A5A5-A30E5D749088}"/>
+                <a16:creationId xmlns:a16="http://schemas.microsoft.com/office/drawing/2014/main" id="{F7D6C400-6FC3-4CA9-86A4-AB45757C952E}"/>
               </a:ext>
             </a:extLst>
           </p:cNvPr>
@@ -27107,7 +27107,7 @@
           <p:cNvPr id="114" name="">
             <a:extLst xmlns:a="http://schemas.openxmlformats.org/drawingml/2006/main">
               <a:ext uri="{FF2B5EF4-FFF2-40B4-BE49-F238E27FC236}">
-                <a16:creationId xmlns:a16="http://schemas.microsoft.com/office/drawing/2014/main" id="{47449117-08B7-466F-AF0E-F99855631DE6}"/>
+                <a16:creationId xmlns:a16="http://schemas.microsoft.com/office/drawing/2014/main" id="{2BB83B8D-98EF-4D4D-ACAF-4D3E4CAFDF30}"/>
               </a:ext>
             </a:extLst>
           </p:cNvPr>
@@ -27159,7 +27159,7 @@
           <p:cNvPr id="115" name="">
             <a:extLst xmlns:a="http://schemas.openxmlformats.org/drawingml/2006/main">
               <a:ext uri="{FF2B5EF4-FFF2-40B4-BE49-F238E27FC236}">
-                <a16:creationId xmlns:a16="http://schemas.microsoft.com/office/drawing/2014/main" id="{A4A0BB43-3137-488A-9C1B-3C56FD4DFFE7}"/>
+                <a16:creationId xmlns:a16="http://schemas.microsoft.com/office/drawing/2014/main" id="{EA5D87F5-58F8-4455-BC30-A65EA836FADE}"/>
               </a:ext>
             </a:extLst>
           </p:cNvPr>
@@ -27211,7 +27211,7 @@
           <p:cNvPr id="116" name="">
             <a:extLst xmlns:a="http://schemas.openxmlformats.org/drawingml/2006/main">
               <a:ext uri="{FF2B5EF4-FFF2-40B4-BE49-F238E27FC236}">
-                <a16:creationId xmlns:a16="http://schemas.microsoft.com/office/drawing/2014/main" id="{F82DA760-593F-4326-98BD-4AAC684E0F0C}"/>
+                <a16:creationId xmlns:a16="http://schemas.microsoft.com/office/drawing/2014/main" id="{9A6F7BA5-33A9-4B26-ACEC-E048617E871E}"/>
               </a:ext>
             </a:extLst>
           </p:cNvPr>
@@ -27242,7 +27242,7 @@
           <p:cNvPr id="117" name="">
             <a:extLst xmlns:a="http://schemas.openxmlformats.org/drawingml/2006/main">
               <a:ext uri="{FF2B5EF4-FFF2-40B4-BE49-F238E27FC236}">
-                <a16:creationId xmlns:a16="http://schemas.microsoft.com/office/drawing/2014/main" id="{3E423EB8-83D4-45FE-BD16-6ED66850D0E7}"/>
+                <a16:creationId xmlns:a16="http://schemas.microsoft.com/office/drawing/2014/main" id="{437742F1-6EF3-4B9E-AAB3-2FF28BF80519}"/>
               </a:ext>
             </a:extLst>
           </p:cNvPr>
@@ -27294,7 +27294,7 @@
           <p:cNvPr id="118" name="">
             <a:extLst xmlns:a="http://schemas.openxmlformats.org/drawingml/2006/main">
               <a:ext uri="{FF2B5EF4-FFF2-40B4-BE49-F238E27FC236}">
-                <a16:creationId xmlns:a16="http://schemas.microsoft.com/office/drawing/2014/main" id="{35014524-ECD8-4FE8-B3C4-D80D1BA3075E}"/>
+                <a16:creationId xmlns:a16="http://schemas.microsoft.com/office/drawing/2014/main" id="{C51D7365-24CF-4F2C-844E-4791DFC9E5BE}"/>
               </a:ext>
             </a:extLst>
           </p:cNvPr>
@@ -27346,7 +27346,7 @@
           <p:cNvPr id="119" name="">
             <a:extLst xmlns:a="http://schemas.openxmlformats.org/drawingml/2006/main">
               <a:ext uri="{FF2B5EF4-FFF2-40B4-BE49-F238E27FC236}">
-                <a16:creationId xmlns:a16="http://schemas.microsoft.com/office/drawing/2014/main" id="{9639E6EC-4272-4F15-8F24-B79C24D3A3D4}"/>
+                <a16:creationId xmlns:a16="http://schemas.microsoft.com/office/drawing/2014/main" id="{47DE44FD-00A8-4301-AA34-6517CE4541F8}"/>
               </a:ext>
             </a:extLst>
           </p:cNvPr>
@@ -27398,7 +27398,7 @@
           <p:cNvPr id="120" name="">
             <a:extLst xmlns:a="http://schemas.openxmlformats.org/drawingml/2006/main">
               <a:ext uri="{FF2B5EF4-FFF2-40B4-BE49-F238E27FC236}">
-                <a16:creationId xmlns:a16="http://schemas.microsoft.com/office/drawing/2014/main" id="{2D653406-9DE5-4884-A512-B2B7B81EC6C9}"/>
+                <a16:creationId xmlns:a16="http://schemas.microsoft.com/office/drawing/2014/main" id="{14AB3195-0520-4278-93E7-37CCD882B9AB}"/>
               </a:ext>
             </a:extLst>
           </p:cNvPr>
@@ -27450,7 +27450,7 @@
           <p:cNvPr id="121" name="">
             <a:extLst xmlns:a="http://schemas.openxmlformats.org/drawingml/2006/main">
               <a:ext uri="{FF2B5EF4-FFF2-40B4-BE49-F238E27FC236}">
-                <a16:creationId xmlns:a16="http://schemas.microsoft.com/office/drawing/2014/main" id="{CB437496-6F33-4335-854D-E4CA467C37C6}"/>
+                <a16:creationId xmlns:a16="http://schemas.microsoft.com/office/drawing/2014/main" id="{84443615-9D2D-4FD7-B2B1-E78B66DDC877}"/>
               </a:ext>
             </a:extLst>
           </p:cNvPr>
@@ -27502,7 +27502,7 @@
           <p:cNvPr id="122" name="">
             <a:extLst xmlns:a="http://schemas.openxmlformats.org/drawingml/2006/main">
               <a:ext uri="{FF2B5EF4-FFF2-40B4-BE49-F238E27FC236}">
-                <a16:creationId xmlns:a16="http://schemas.microsoft.com/office/drawing/2014/main" id="{1822F3AA-E7C8-49B6-AFA3-45BA859A604B}"/>
+                <a16:creationId xmlns:a16="http://schemas.microsoft.com/office/drawing/2014/main" id="{21A0B5EC-1DD4-45A3-AB8D-96A22E40981D}"/>
               </a:ext>
             </a:extLst>
           </p:cNvPr>
@@ -27554,7 +27554,7 @@
           <p:cNvPr id="123" name="">
             <a:extLst xmlns:a="http://schemas.openxmlformats.org/drawingml/2006/main">
               <a:ext uri="{FF2B5EF4-FFF2-40B4-BE49-F238E27FC236}">
-                <a16:creationId xmlns:a16="http://schemas.microsoft.com/office/drawing/2014/main" id="{BF28CB3B-6025-4F33-8D02-61FA3FE2ECAC}"/>
+                <a16:creationId xmlns:a16="http://schemas.microsoft.com/office/drawing/2014/main" id="{90D0ACB7-8F3A-4D7D-BBD6-9961077EEEB3}"/>
               </a:ext>
             </a:extLst>
           </p:cNvPr>
@@ -27606,7 +27606,7 @@
           <p:cNvPr id="124" name="">
             <a:extLst xmlns:a="http://schemas.openxmlformats.org/drawingml/2006/main">
               <a:ext uri="{FF2B5EF4-FFF2-40B4-BE49-F238E27FC236}">
-                <a16:creationId xmlns:a16="http://schemas.microsoft.com/office/drawing/2014/main" id="{01A26557-B3E1-4A9E-BF4C-9719D0BD24C4}"/>
+                <a16:creationId xmlns:a16="http://schemas.microsoft.com/office/drawing/2014/main" id="{F1C6C220-1EBD-48B3-82CE-820EAE3ABC84}"/>
               </a:ext>
             </a:extLst>
           </p:cNvPr>
@@ -27658,7 +27658,7 @@
           <p:cNvPr id="125" name="">
             <a:extLst xmlns:a="http://schemas.openxmlformats.org/drawingml/2006/main">
               <a:ext uri="{FF2B5EF4-FFF2-40B4-BE49-F238E27FC236}">
-                <a16:creationId xmlns:a16="http://schemas.microsoft.com/office/drawing/2014/main" id="{33700AFA-7A0A-43DA-B2EF-3A8DF1800238}"/>
+                <a16:creationId xmlns:a16="http://schemas.microsoft.com/office/drawing/2014/main" id="{F221ECC9-4CC5-4401-B85C-678BA5E2C1B1}"/>
               </a:ext>
             </a:extLst>
           </p:cNvPr>
@@ -27689,7 +27689,7 @@
           <p:cNvPr id="126" name="">
             <a:extLst xmlns:a="http://schemas.openxmlformats.org/drawingml/2006/main">
               <a:ext uri="{FF2B5EF4-FFF2-40B4-BE49-F238E27FC236}">
-                <a16:creationId xmlns:a16="http://schemas.microsoft.com/office/drawing/2014/main" id="{EE044A1D-81CD-4197-B1C8-AAE6FB3D80A7}"/>
+                <a16:creationId xmlns:a16="http://schemas.microsoft.com/office/drawing/2014/main" id="{ACD3BD33-10CE-48E2-8E72-6933EF026B5F}"/>
               </a:ext>
             </a:extLst>
           </p:cNvPr>
@@ -27720,7 +27720,7 @@
           <p:cNvPr id="127" name="">
             <a:extLst xmlns:a="http://schemas.openxmlformats.org/drawingml/2006/main">
               <a:ext uri="{FF2B5EF4-FFF2-40B4-BE49-F238E27FC236}">
-                <a16:creationId xmlns:a16="http://schemas.microsoft.com/office/drawing/2014/main" id="{48386D48-0037-4FC8-9DE3-BA2F34BEB47A}"/>
+                <a16:creationId xmlns:a16="http://schemas.microsoft.com/office/drawing/2014/main" id="{8CFA8086-7C27-4824-AFBA-9D5CF0C15350}"/>
               </a:ext>
             </a:extLst>
           </p:cNvPr>
@@ -27772,7 +27772,7 @@
           <p:cNvPr id="128" name="">
             <a:extLst xmlns:a="http://schemas.openxmlformats.org/drawingml/2006/main">
               <a:ext uri="{FF2B5EF4-FFF2-40B4-BE49-F238E27FC236}">
-                <a16:creationId xmlns:a16="http://schemas.microsoft.com/office/drawing/2014/main" id="{925811F2-8928-4F26-9EDF-0D4A328E8CB8}"/>
+                <a16:creationId xmlns:a16="http://schemas.microsoft.com/office/drawing/2014/main" id="{2240B6F8-D8CF-4307-93B4-E59EF8C5CEAB}"/>
               </a:ext>
             </a:extLst>
           </p:cNvPr>
@@ -27824,7 +27824,7 @@
           <p:cNvPr id="129" name="">
             <a:extLst xmlns:a="http://schemas.openxmlformats.org/drawingml/2006/main">
               <a:ext uri="{FF2B5EF4-FFF2-40B4-BE49-F238E27FC236}">
-                <a16:creationId xmlns:a16="http://schemas.microsoft.com/office/drawing/2014/main" id="{DB946E9F-9780-447F-9D71-FC28FD571CA1}"/>
+                <a16:creationId xmlns:a16="http://schemas.microsoft.com/office/drawing/2014/main" id="{89DAE0F4-47A2-4804-A618-AFCD3963E431}"/>
               </a:ext>
             </a:extLst>
           </p:cNvPr>
@@ -27876,7 +27876,7 @@
           <p:cNvPr id="130" name="">
             <a:extLst xmlns:a="http://schemas.openxmlformats.org/drawingml/2006/main">
               <a:ext uri="{FF2B5EF4-FFF2-40B4-BE49-F238E27FC236}">
-                <a16:creationId xmlns:a16="http://schemas.microsoft.com/office/drawing/2014/main" id="{54063156-7AD1-4AA2-9050-9D87DBBF928B}"/>
+                <a16:creationId xmlns:a16="http://schemas.microsoft.com/office/drawing/2014/main" id="{4ECECE31-40B0-448B-B353-6D3A6E7A71B0}"/>
               </a:ext>
             </a:extLst>
           </p:cNvPr>
@@ -27928,7 +27928,7 @@
           <p:cNvPr id="131" name="">
             <a:extLst xmlns:a="http://schemas.openxmlformats.org/drawingml/2006/main">
               <a:ext uri="{FF2B5EF4-FFF2-40B4-BE49-F238E27FC236}">
-                <a16:creationId xmlns:a16="http://schemas.microsoft.com/office/drawing/2014/main" id="{6553D7F6-5D15-432B-8E33-53FCDC2987B3}"/>
+                <a16:creationId xmlns:a16="http://schemas.microsoft.com/office/drawing/2014/main" id="{5D9248D1-BD53-4DFB-AB3D-F7B76E166077}"/>
               </a:ext>
             </a:extLst>
           </p:cNvPr>
@@ -27980,7 +27980,7 @@
           <p:cNvPr id="132" name="">
             <a:extLst xmlns:a="http://schemas.openxmlformats.org/drawingml/2006/main">
               <a:ext uri="{FF2B5EF4-FFF2-40B4-BE49-F238E27FC236}">
-                <a16:creationId xmlns:a16="http://schemas.microsoft.com/office/drawing/2014/main" id="{8BA8F01D-3BDF-4485-BF7A-E0F8C89DCAB8}"/>
+                <a16:creationId xmlns:a16="http://schemas.microsoft.com/office/drawing/2014/main" id="{05BD3839-E505-4A68-BBA6-A1E679E3DCC3}"/>
               </a:ext>
             </a:extLst>
           </p:cNvPr>
@@ -28032,7 +28032,7 @@
           <p:cNvPr id="133" name="">
             <a:extLst xmlns:a="http://schemas.openxmlformats.org/drawingml/2006/main">
               <a:ext uri="{FF2B5EF4-FFF2-40B4-BE49-F238E27FC236}">
-                <a16:creationId xmlns:a16="http://schemas.microsoft.com/office/drawing/2014/main" id="{4A2D4FE0-200C-4C30-BBB6-FD4AD574B3E9}"/>
+                <a16:creationId xmlns:a16="http://schemas.microsoft.com/office/drawing/2014/main" id="{63223B09-4D48-4259-AF33-60614020A360}"/>
               </a:ext>
             </a:extLst>
           </p:cNvPr>
@@ -28084,7 +28084,7 @@
           <p:cNvPr id="134" name="">
             <a:extLst xmlns:a="http://schemas.openxmlformats.org/drawingml/2006/main">
               <a:ext uri="{FF2B5EF4-FFF2-40B4-BE49-F238E27FC236}">
-                <a16:creationId xmlns:a16="http://schemas.microsoft.com/office/drawing/2014/main" id="{D34E3E06-2ED9-4793-9F11-6197AEB5D404}"/>
+                <a16:creationId xmlns:a16="http://schemas.microsoft.com/office/drawing/2014/main" id="{42733537-7E0D-431D-AE38-DC97DBD76F93}"/>
               </a:ext>
             </a:extLst>
           </p:cNvPr>
@@ -28134,7 +28134,7 @@
     </p:spTree>
     <p:extLst>
       <p:ext uri="{BB962C8B-B14F-4D97-AF65-F5344CB8AC3E}">
-        <p14:creationId xmlns:p14="http://schemas.microsoft.com/office/powerpoint/2010/main" val="109949692"/>
+        <p14:creationId xmlns:p14="http://schemas.microsoft.com/office/powerpoint/2010/main" val="733633424"/>
       </p:ext>
     </p:extLst>
   </p:cSld>
@@ -28165,7 +28165,7 @@
           <p:cNvPr id="9" name="">
             <a:extLst xmlns:a="http://schemas.openxmlformats.org/drawingml/2006/main">
               <a:ext uri="{FF2B5EF4-FFF2-40B4-BE49-F238E27FC236}">
-                <a16:creationId xmlns:a16="http://schemas.microsoft.com/office/drawing/2014/main" id="{80EDE801-AA70-4732-A3D7-F39878AD2A36}"/>
+                <a16:creationId xmlns:a16="http://schemas.microsoft.com/office/drawing/2014/main" id="{3EF6A50D-6BE1-408D-A0B1-D6A0F68787E7}"/>
               </a:ext>
             </a:extLst>
           </p:cNvPr>
@@ -28198,7 +28198,7 @@
           <p:cNvPr id="2" name="">
             <a:extLst xmlns:a="http://schemas.openxmlformats.org/drawingml/2006/main">
               <a:ext uri="{FF2B5EF4-FFF2-40B4-BE49-F238E27FC236}">
-                <a16:creationId xmlns:a16="http://schemas.microsoft.com/office/drawing/2014/main" id="{E7BE1953-8486-42C2-9864-3EF8A1CC26DF}"/>
+                <a16:creationId xmlns:a16="http://schemas.microsoft.com/office/drawing/2014/main" id="{A47D7EC8-4016-4443-A6FE-5AE32D440385}"/>
               </a:ext>
             </a:extLst>
           </p:cNvPr>
@@ -28229,7 +28229,7 @@
           <p:cNvPr id="3" name="">
             <a:extLst xmlns:a="http://schemas.openxmlformats.org/drawingml/2006/main">
               <a:ext uri="{FF2B5EF4-FFF2-40B4-BE49-F238E27FC236}">
-                <a16:creationId xmlns:a16="http://schemas.microsoft.com/office/drawing/2014/main" id="{C81BC0FE-5FEF-4CA5-99B0-57DD36A5A6E0}"/>
+                <a16:creationId xmlns:a16="http://schemas.microsoft.com/office/drawing/2014/main" id="{7C582F81-2D93-4D5A-9B70-123145037E96}"/>
               </a:ext>
             </a:extLst>
           </p:cNvPr>
@@ -28281,7 +28281,7 @@
           <p:cNvPr id="4" name="">
             <a:extLst xmlns:a="http://schemas.openxmlformats.org/drawingml/2006/main">
               <a:ext uri="{FF2B5EF4-FFF2-40B4-BE49-F238E27FC236}">
-                <a16:creationId xmlns:a16="http://schemas.microsoft.com/office/drawing/2014/main" id="{0D1654C2-5170-4D77-9BD1-6348260A331D}"/>
+                <a16:creationId xmlns:a16="http://schemas.microsoft.com/office/drawing/2014/main" id="{47026AD1-B23C-4CE5-96CE-45558951982C}"/>
               </a:ext>
             </a:extLst>
           </p:cNvPr>
@@ -28316,7 +28316,7 @@
           <p:nvPr/>
         </p:nvPicPr>
         <p:blipFill>
-          <a:blip xmlns:r="http://schemas.openxmlformats.org/officeDocument/2006/relationships" xmlns:a="http://schemas.openxmlformats.org/drawingml/2006/main" r:embed="Rb291faa71688434f"/>
+          <a:blip xmlns:r="http://schemas.openxmlformats.org/officeDocument/2006/relationships" xmlns:a="http://schemas.openxmlformats.org/drawingml/2006/main" r:embed="Rcbd1aa19f8024e57"/>
           <a:stretch xmlns:a="http://schemas.openxmlformats.org/drawingml/2006/main"/>
         </p:blipFill>
         <p:spPr>
@@ -28334,7 +28334,7 @@
           <p:cNvPr id="6" name="">
             <a:extLst xmlns:a="http://schemas.openxmlformats.org/drawingml/2006/main">
               <a:ext uri="{FF2B5EF4-FFF2-40B4-BE49-F238E27FC236}">
-                <a16:creationId xmlns:a16="http://schemas.microsoft.com/office/drawing/2014/main" id="{5ABA5160-3CDF-4D75-BF57-08101FC16AAF}"/>
+                <a16:creationId xmlns:a16="http://schemas.microsoft.com/office/drawing/2014/main" id="{E05F5A31-4398-4932-BA2C-9312DE489052}"/>
               </a:ext>
             </a:extLst>
           </p:cNvPr>
@@ -28386,7 +28386,7 @@
           <p:cNvPr id="7" name="">
             <a:extLst xmlns:a="http://schemas.openxmlformats.org/drawingml/2006/main">
               <a:ext uri="{FF2B5EF4-FFF2-40B4-BE49-F238E27FC236}">
-                <a16:creationId xmlns:a16="http://schemas.microsoft.com/office/drawing/2014/main" id="{C175E1D9-C5A8-4B3C-B3DA-2755EB33A515}"/>
+                <a16:creationId xmlns:a16="http://schemas.microsoft.com/office/drawing/2014/main" id="{09212870-0BB1-4C5C-960F-292F3B75D992}"/>
               </a:ext>
             </a:extLst>
           </p:cNvPr>
@@ -28442,7 +28442,7 @@
           <p:nvPr/>
         </p:nvPicPr>
         <p:blipFill>
-          <a:blip xmlns:r="http://schemas.openxmlformats.org/officeDocument/2006/relationships" xmlns:a="http://schemas.openxmlformats.org/drawingml/2006/main" r:embed="Re47fff6e54ba49d4"/>
+          <a:blip xmlns:r="http://schemas.openxmlformats.org/officeDocument/2006/relationships" xmlns:a="http://schemas.openxmlformats.org/drawingml/2006/main" r:embed="R863d387d2f5340f1"/>
           <a:stretch xmlns:a="http://schemas.openxmlformats.org/drawingml/2006/main"/>
         </p:blipFill>
         <p:spPr>
@@ -28458,7 +28458,7 @@
     </p:spTree>
     <p:extLst>
       <p:ext uri="{BB962C8B-B14F-4D97-AF65-F5344CB8AC3E}">
-        <p14:creationId xmlns:p14="http://schemas.microsoft.com/office/powerpoint/2010/main" val="424749507"/>
+        <p14:creationId xmlns:p14="http://schemas.microsoft.com/office/powerpoint/2010/main" val="2129792415"/>
       </p:ext>
     </p:extLst>
   </p:cSld>
@@ -28489,7 +28489,7 @@
           <p:cNvPr id="42" name="">
             <a:extLst xmlns:a="http://schemas.openxmlformats.org/drawingml/2006/main">
               <a:ext uri="{FF2B5EF4-FFF2-40B4-BE49-F238E27FC236}">
-                <a16:creationId xmlns:a16="http://schemas.microsoft.com/office/drawing/2014/main" id="{BB724070-E976-45B0-A51F-323A8161787E}"/>
+                <a16:creationId xmlns:a16="http://schemas.microsoft.com/office/drawing/2014/main" id="{87F5BD7B-9146-4726-8B22-557439841AB0}"/>
               </a:ext>
             </a:extLst>
           </p:cNvPr>
@@ -28522,7 +28522,7 @@
           <p:cNvPr id="2" name="">
             <a:extLst xmlns:a="http://schemas.openxmlformats.org/drawingml/2006/main">
               <a:ext uri="{FF2B5EF4-FFF2-40B4-BE49-F238E27FC236}">
-                <a16:creationId xmlns:a16="http://schemas.microsoft.com/office/drawing/2014/main" id="{A844179B-CA35-414D-9A57-8DD7642DAD88}"/>
+                <a16:creationId xmlns:a16="http://schemas.microsoft.com/office/drawing/2014/main" id="{7F94C087-FDC2-4682-9794-3C1A7570A6C9}"/>
               </a:ext>
             </a:extLst>
           </p:cNvPr>
@@ -28553,7 +28553,7 @@
           <p:cNvPr id="3" name="">
             <a:extLst xmlns:a="http://schemas.openxmlformats.org/drawingml/2006/main">
               <a:ext uri="{FF2B5EF4-FFF2-40B4-BE49-F238E27FC236}">
-                <a16:creationId xmlns:a16="http://schemas.microsoft.com/office/drawing/2014/main" id="{0959CB9E-FAE7-4938-A7D0-CAC839A8FEA0}"/>
+                <a16:creationId xmlns:a16="http://schemas.microsoft.com/office/drawing/2014/main" id="{5B15D26C-D66A-4928-B135-3D7F868E0087}"/>
               </a:ext>
             </a:extLst>
           </p:cNvPr>
@@ -28605,7 +28605,7 @@
           <p:cNvPr id="4" name="">
             <a:extLst xmlns:a="http://schemas.openxmlformats.org/drawingml/2006/main">
               <a:ext uri="{FF2B5EF4-FFF2-40B4-BE49-F238E27FC236}">
-                <a16:creationId xmlns:a16="http://schemas.microsoft.com/office/drawing/2014/main" id="{69B509EC-EB26-4CD6-8B73-60FEED265141}"/>
+                <a16:creationId xmlns:a16="http://schemas.microsoft.com/office/drawing/2014/main" id="{F7E8DBE6-0063-4536-965C-EF61BC90BC8F}"/>
               </a:ext>
             </a:extLst>
           </p:cNvPr>
@@ -28657,7 +28657,7 @@
           <p:cNvPr id="5" name="">
             <a:extLst xmlns:a="http://schemas.openxmlformats.org/drawingml/2006/main">
               <a:ext uri="{FF2B5EF4-FFF2-40B4-BE49-F238E27FC236}">
-                <a16:creationId xmlns:a16="http://schemas.microsoft.com/office/drawing/2014/main" id="{C19C17BF-01EA-48F9-A086-DC1D30FA4279}"/>
+                <a16:creationId xmlns:a16="http://schemas.microsoft.com/office/drawing/2014/main" id="{53C4898C-AC74-4517-9F6C-1C396BF91A72}"/>
               </a:ext>
             </a:extLst>
           </p:cNvPr>
@@ -28692,7 +28692,7 @@
           <p:nvPr/>
         </p:nvPicPr>
         <p:blipFill>
-          <a:blip xmlns:r="http://schemas.openxmlformats.org/officeDocument/2006/relationships" xmlns:a="http://schemas.openxmlformats.org/drawingml/2006/main" r:embed="Rf8dce303373a4928"/>
+          <a:blip xmlns:r="http://schemas.openxmlformats.org/officeDocument/2006/relationships" xmlns:a="http://schemas.openxmlformats.org/drawingml/2006/main" r:embed="Rba4d16c32df84dcb"/>
           <a:stretch xmlns:a="http://schemas.openxmlformats.org/drawingml/2006/main"/>
         </p:blipFill>
         <p:spPr>
@@ -28710,7 +28710,7 @@
           <p:cNvPr id="7" name="">
             <a:extLst xmlns:a="http://schemas.openxmlformats.org/drawingml/2006/main">
               <a:ext uri="{FF2B5EF4-FFF2-40B4-BE49-F238E27FC236}">
-                <a16:creationId xmlns:a16="http://schemas.microsoft.com/office/drawing/2014/main" id="{70266DCB-31AA-49A8-86AA-28719C8EA07D}"/>
+                <a16:creationId xmlns:a16="http://schemas.microsoft.com/office/drawing/2014/main" id="{F400E4FD-826A-4ACE-BC5E-982D92791C1E}"/>
               </a:ext>
             </a:extLst>
           </p:cNvPr>
@@ -28762,7 +28762,7 @@
           <p:cNvPr id="8" name="">
             <a:extLst xmlns:a="http://schemas.openxmlformats.org/drawingml/2006/main">
               <a:ext uri="{FF2B5EF4-FFF2-40B4-BE49-F238E27FC236}">
-                <a16:creationId xmlns:a16="http://schemas.microsoft.com/office/drawing/2014/main" id="{44D10365-8058-4246-9112-EEF3CADA1B41}"/>
+                <a16:creationId xmlns:a16="http://schemas.microsoft.com/office/drawing/2014/main" id="{F8890D52-6FDF-4825-ADBE-F7AFBD7C021A}"/>
               </a:ext>
             </a:extLst>
           </p:cNvPr>
@@ -28814,7 +28814,7 @@
           <p:cNvPr id="9" name="">
             <a:extLst xmlns:a="http://schemas.openxmlformats.org/drawingml/2006/main">
               <a:ext uri="{FF2B5EF4-FFF2-40B4-BE49-F238E27FC236}">
-                <a16:creationId xmlns:a16="http://schemas.microsoft.com/office/drawing/2014/main" id="{D0A05EBC-228F-4CC6-AD96-3FBE9C18C0B8}"/>
+                <a16:creationId xmlns:a16="http://schemas.microsoft.com/office/drawing/2014/main" id="{2A759346-DAE5-4FDD-89E5-B5B0570D327F}"/>
               </a:ext>
             </a:extLst>
           </p:cNvPr>
@@ -28866,7 +28866,7 @@
           <p:cNvPr id="10" name="">
             <a:extLst xmlns:a="http://schemas.openxmlformats.org/drawingml/2006/main">
               <a:ext uri="{FF2B5EF4-FFF2-40B4-BE49-F238E27FC236}">
-                <a16:creationId xmlns:a16="http://schemas.microsoft.com/office/drawing/2014/main" id="{E034D19E-4611-4E53-832D-0C3B61A96B5C}"/>
+                <a16:creationId xmlns:a16="http://schemas.microsoft.com/office/drawing/2014/main" id="{FC60182F-1AC5-48F0-AE83-27E9A2F21136}"/>
               </a:ext>
             </a:extLst>
           </p:cNvPr>
@@ -28897,7 +28897,7 @@
           <p:cNvPr id="11" name="">
             <a:extLst xmlns:a="http://schemas.openxmlformats.org/drawingml/2006/main">
               <a:ext uri="{FF2B5EF4-FFF2-40B4-BE49-F238E27FC236}">
-                <a16:creationId xmlns:a16="http://schemas.microsoft.com/office/drawing/2014/main" id="{81A76B19-F97A-4480-8ECD-4FED6728E646}"/>
+                <a16:creationId xmlns:a16="http://schemas.microsoft.com/office/drawing/2014/main" id="{C116725C-7994-4A32-AD88-23A967BA1DAF}"/>
               </a:ext>
             </a:extLst>
           </p:cNvPr>
@@ -28949,7 +28949,7 @@
           <p:cNvPr id="12" name="">
             <a:extLst xmlns:a="http://schemas.openxmlformats.org/drawingml/2006/main">
               <a:ext uri="{FF2B5EF4-FFF2-40B4-BE49-F238E27FC236}">
-                <a16:creationId xmlns:a16="http://schemas.microsoft.com/office/drawing/2014/main" id="{AE10F085-4270-41DD-AEDD-1088C91EFA83}"/>
+                <a16:creationId xmlns:a16="http://schemas.microsoft.com/office/drawing/2014/main" id="{4606D226-49B5-4C8E-AFB6-9015B68B9CD6}"/>
               </a:ext>
             </a:extLst>
           </p:cNvPr>
@@ -29001,7 +29001,7 @@
           <p:cNvPr id="13" name="">
             <a:extLst xmlns:a="http://schemas.openxmlformats.org/drawingml/2006/main">
               <a:ext uri="{FF2B5EF4-FFF2-40B4-BE49-F238E27FC236}">
-                <a16:creationId xmlns:a16="http://schemas.microsoft.com/office/drawing/2014/main" id="{AEFC9326-89C9-466A-9CCE-681386B8902D}"/>
+                <a16:creationId xmlns:a16="http://schemas.microsoft.com/office/drawing/2014/main" id="{81220A34-1549-437F-811E-ADBF9DC6AE85}"/>
               </a:ext>
             </a:extLst>
           </p:cNvPr>
@@ -29053,7 +29053,7 @@
           <p:cNvPr id="14" name="">
             <a:extLst xmlns:a="http://schemas.openxmlformats.org/drawingml/2006/main">
               <a:ext uri="{FF2B5EF4-FFF2-40B4-BE49-F238E27FC236}">
-                <a16:creationId xmlns:a16="http://schemas.microsoft.com/office/drawing/2014/main" id="{56DE0297-DF76-4A84-AF27-50D6E0499435}"/>
+                <a16:creationId xmlns:a16="http://schemas.microsoft.com/office/drawing/2014/main" id="{1C1E0847-4518-4D4A-873F-7785542C9AB6}"/>
               </a:ext>
             </a:extLst>
           </p:cNvPr>
@@ -29084,7 +29084,7 @@
           <p:cNvPr id="15" name="">
             <a:extLst xmlns:a="http://schemas.openxmlformats.org/drawingml/2006/main">
               <a:ext uri="{FF2B5EF4-FFF2-40B4-BE49-F238E27FC236}">
-                <a16:creationId xmlns:a16="http://schemas.microsoft.com/office/drawing/2014/main" id="{6FC98AA4-7DAC-4142-A141-10565A13CDE5}"/>
+                <a16:creationId xmlns:a16="http://schemas.microsoft.com/office/drawing/2014/main" id="{F02DFA25-A46A-47FF-8787-3D0095726837}"/>
               </a:ext>
             </a:extLst>
           </p:cNvPr>
@@ -29136,7 +29136,7 @@
           <p:cNvPr id="16" name="">
             <a:extLst xmlns:a="http://schemas.openxmlformats.org/drawingml/2006/main">
               <a:ext uri="{FF2B5EF4-FFF2-40B4-BE49-F238E27FC236}">
-                <a16:creationId xmlns:a16="http://schemas.microsoft.com/office/drawing/2014/main" id="{894770F9-AC9B-4884-BBC2-9965895423B4}"/>
+                <a16:creationId xmlns:a16="http://schemas.microsoft.com/office/drawing/2014/main" id="{7FAD4E83-D947-4C33-8C9C-6C307A2E67E3}"/>
               </a:ext>
             </a:extLst>
           </p:cNvPr>
@@ -29188,7 +29188,7 @@
           <p:cNvPr id="17" name="">
             <a:extLst xmlns:a="http://schemas.openxmlformats.org/drawingml/2006/main">
               <a:ext uri="{FF2B5EF4-FFF2-40B4-BE49-F238E27FC236}">
-                <a16:creationId xmlns:a16="http://schemas.microsoft.com/office/drawing/2014/main" id="{0602C6FC-6B9C-496A-BEC1-140106041D1F}"/>
+                <a16:creationId xmlns:a16="http://schemas.microsoft.com/office/drawing/2014/main" id="{D200F357-0899-4968-AAA0-56415DF4267A}"/>
               </a:ext>
             </a:extLst>
           </p:cNvPr>
@@ -29240,7 +29240,7 @@
           <p:cNvPr id="18" name="">
             <a:extLst xmlns:a="http://schemas.openxmlformats.org/drawingml/2006/main">
               <a:ext uri="{FF2B5EF4-FFF2-40B4-BE49-F238E27FC236}">
-                <a16:creationId xmlns:a16="http://schemas.microsoft.com/office/drawing/2014/main" id="{DC7408F9-F2DE-41DC-B017-E92356ACBA32}"/>
+                <a16:creationId xmlns:a16="http://schemas.microsoft.com/office/drawing/2014/main" id="{8ED1BB56-4835-4E0A-8F18-8AEE6BFEBEFF}"/>
               </a:ext>
             </a:extLst>
           </p:cNvPr>
@@ -29271,7 +29271,7 @@
           <p:cNvPr id="19" name="">
             <a:extLst xmlns:a="http://schemas.openxmlformats.org/drawingml/2006/main">
               <a:ext uri="{FF2B5EF4-FFF2-40B4-BE49-F238E27FC236}">
-                <a16:creationId xmlns:a16="http://schemas.microsoft.com/office/drawing/2014/main" id="{5B814243-91D0-4E6A-9454-8682D8279107}"/>
+                <a16:creationId xmlns:a16="http://schemas.microsoft.com/office/drawing/2014/main" id="{42881034-5A9B-44B8-8D31-BFF6C12D0706}"/>
               </a:ext>
             </a:extLst>
           </p:cNvPr>
@@ -29323,7 +29323,7 @@
           <p:cNvPr id="20" name="">
             <a:extLst xmlns:a="http://schemas.openxmlformats.org/drawingml/2006/main">
               <a:ext uri="{FF2B5EF4-FFF2-40B4-BE49-F238E27FC236}">
-                <a16:creationId xmlns:a16="http://schemas.microsoft.com/office/drawing/2014/main" id="{E8F2E80B-59E1-4C77-ABC3-A3DEDE9237D3}"/>
+                <a16:creationId xmlns:a16="http://schemas.microsoft.com/office/drawing/2014/main" id="{8F3EA91C-4D3B-437C-A263-345F3B0D0422}"/>
               </a:ext>
             </a:extLst>
           </p:cNvPr>
@@ -29375,7 +29375,7 @@
           <p:cNvPr id="21" name="">
             <a:extLst xmlns:a="http://schemas.openxmlformats.org/drawingml/2006/main">
               <a:ext uri="{FF2B5EF4-FFF2-40B4-BE49-F238E27FC236}">
-                <a16:creationId xmlns:a16="http://schemas.microsoft.com/office/drawing/2014/main" id="{F5C3FD8A-6EF2-427B-B035-813A294D8DEE}"/>
+                <a16:creationId xmlns:a16="http://schemas.microsoft.com/office/drawing/2014/main" id="{26AEE0A6-0630-454B-877B-39FD5DA060BC}"/>
               </a:ext>
             </a:extLst>
           </p:cNvPr>
@@ -29427,7 +29427,7 @@
           <p:cNvPr id="22" name="">
             <a:extLst xmlns:a="http://schemas.openxmlformats.org/drawingml/2006/main">
               <a:ext uri="{FF2B5EF4-FFF2-40B4-BE49-F238E27FC236}">
-                <a16:creationId xmlns:a16="http://schemas.microsoft.com/office/drawing/2014/main" id="{B1A5B16F-C879-48BB-95B0-79ED3F0E0737}"/>
+                <a16:creationId xmlns:a16="http://schemas.microsoft.com/office/drawing/2014/main" id="{E0D599CE-8B18-4D8D-89AE-1024DD104AB7}"/>
               </a:ext>
             </a:extLst>
           </p:cNvPr>
@@ -29458,7 +29458,7 @@
           <p:cNvPr id="23" name="">
             <a:extLst xmlns:a="http://schemas.openxmlformats.org/drawingml/2006/main">
               <a:ext uri="{FF2B5EF4-FFF2-40B4-BE49-F238E27FC236}">
-                <a16:creationId xmlns:a16="http://schemas.microsoft.com/office/drawing/2014/main" id="{3F9A65D9-B6E6-4DE8-9642-F7E5A4327DB9}"/>
+                <a16:creationId xmlns:a16="http://schemas.microsoft.com/office/drawing/2014/main" id="{85F7FEC1-1ECD-4A50-B2B8-2BB3E8AAD1D8}"/>
               </a:ext>
             </a:extLst>
           </p:cNvPr>
@@ -29510,7 +29510,7 @@
           <p:cNvPr id="24" name="">
             <a:extLst xmlns:a="http://schemas.openxmlformats.org/drawingml/2006/main">
               <a:ext uri="{FF2B5EF4-FFF2-40B4-BE49-F238E27FC236}">
-                <a16:creationId xmlns:a16="http://schemas.microsoft.com/office/drawing/2014/main" id="{CDC8F2B9-A9B5-4B09-880F-76A7365839B3}"/>
+                <a16:creationId xmlns:a16="http://schemas.microsoft.com/office/drawing/2014/main" id="{26B6DB8A-078C-465D-805B-BA91CA7CA9F8}"/>
               </a:ext>
             </a:extLst>
           </p:cNvPr>
@@ -29562,7 +29562,7 @@
           <p:cNvPr id="25" name="">
             <a:extLst xmlns:a="http://schemas.openxmlformats.org/drawingml/2006/main">
               <a:ext uri="{FF2B5EF4-FFF2-40B4-BE49-F238E27FC236}">
-                <a16:creationId xmlns:a16="http://schemas.microsoft.com/office/drawing/2014/main" id="{7821101D-3269-47B1-9951-D213D3CDAC5E}"/>
+                <a16:creationId xmlns:a16="http://schemas.microsoft.com/office/drawing/2014/main" id="{F96AD0A2-CE38-4383-9F85-40490BF065D3}"/>
               </a:ext>
             </a:extLst>
           </p:cNvPr>
@@ -29614,7 +29614,7 @@
           <p:cNvPr id="26" name="">
             <a:extLst xmlns:a="http://schemas.openxmlformats.org/drawingml/2006/main">
               <a:ext uri="{FF2B5EF4-FFF2-40B4-BE49-F238E27FC236}">
-                <a16:creationId xmlns:a16="http://schemas.microsoft.com/office/drawing/2014/main" id="{28B79ADA-5B9A-442E-A133-64A3882F3BFF}"/>
+                <a16:creationId xmlns:a16="http://schemas.microsoft.com/office/drawing/2014/main" id="{F4E2318A-A556-40D0-B913-F83509209B49}"/>
               </a:ext>
             </a:extLst>
           </p:cNvPr>
@@ -29645,7 +29645,7 @@
           <p:cNvPr id="27" name="">
             <a:extLst xmlns:a="http://schemas.openxmlformats.org/drawingml/2006/main">
               <a:ext uri="{FF2B5EF4-FFF2-40B4-BE49-F238E27FC236}">
-                <a16:creationId xmlns:a16="http://schemas.microsoft.com/office/drawing/2014/main" id="{0ED990E9-417D-428D-9E4C-D6E9DEB95A96}"/>
+                <a16:creationId xmlns:a16="http://schemas.microsoft.com/office/drawing/2014/main" id="{F978C35E-3B2C-4462-B579-32EF27DA5411}"/>
               </a:ext>
             </a:extLst>
           </p:cNvPr>
@@ -29697,7 +29697,7 @@
           <p:cNvPr id="28" name="">
             <a:extLst xmlns:a="http://schemas.openxmlformats.org/drawingml/2006/main">
               <a:ext uri="{FF2B5EF4-FFF2-40B4-BE49-F238E27FC236}">
-                <a16:creationId xmlns:a16="http://schemas.microsoft.com/office/drawing/2014/main" id="{D0FDC53D-6819-4A96-859E-542B1F4C71FE}"/>
+                <a16:creationId xmlns:a16="http://schemas.microsoft.com/office/drawing/2014/main" id="{D0A65A6A-C569-4694-85CC-7FC0F2E1A30F}"/>
               </a:ext>
             </a:extLst>
           </p:cNvPr>
@@ -29749,7 +29749,7 @@
           <p:cNvPr id="29" name="">
             <a:extLst xmlns:a="http://schemas.openxmlformats.org/drawingml/2006/main">
               <a:ext uri="{FF2B5EF4-FFF2-40B4-BE49-F238E27FC236}">
-                <a16:creationId xmlns:a16="http://schemas.microsoft.com/office/drawing/2014/main" id="{17C5B8D7-37D1-4136-AEDB-D77B467734F1}"/>
+                <a16:creationId xmlns:a16="http://schemas.microsoft.com/office/drawing/2014/main" id="{BCE9C917-9C29-4298-A775-7ADEC0346D20}"/>
               </a:ext>
             </a:extLst>
           </p:cNvPr>
@@ -29801,7 +29801,7 @@
           <p:cNvPr id="30" name="">
             <a:extLst xmlns:a="http://schemas.openxmlformats.org/drawingml/2006/main">
               <a:ext uri="{FF2B5EF4-FFF2-40B4-BE49-F238E27FC236}">
-                <a16:creationId xmlns:a16="http://schemas.microsoft.com/office/drawing/2014/main" id="{466514FA-8603-4517-B7E2-D45CE6D3341F}"/>
+                <a16:creationId xmlns:a16="http://schemas.microsoft.com/office/drawing/2014/main" id="{653A0253-0D9F-408D-8508-B5568DE4988B}"/>
               </a:ext>
             </a:extLst>
           </p:cNvPr>
@@ -29832,7 +29832,7 @@
           <p:cNvPr id="31" name="">
             <a:extLst xmlns:a="http://schemas.openxmlformats.org/drawingml/2006/main">
               <a:ext uri="{FF2B5EF4-FFF2-40B4-BE49-F238E27FC236}">
-                <a16:creationId xmlns:a16="http://schemas.microsoft.com/office/drawing/2014/main" id="{75CDEFF6-455B-4BB6-9FFF-C40A933B00F6}"/>
+                <a16:creationId xmlns:a16="http://schemas.microsoft.com/office/drawing/2014/main" id="{7E3AAFDF-5E2C-4D36-8CAC-77B9F7F25D80}"/>
               </a:ext>
             </a:extLst>
           </p:cNvPr>
@@ -29884,7 +29884,7 @@
           <p:cNvPr id="32" name="">
             <a:extLst xmlns:a="http://schemas.openxmlformats.org/drawingml/2006/main">
               <a:ext uri="{FF2B5EF4-FFF2-40B4-BE49-F238E27FC236}">
-                <a16:creationId xmlns:a16="http://schemas.microsoft.com/office/drawing/2014/main" id="{A31387C2-8B4A-4810-8E74-B41DD5777CD1}"/>
+                <a16:creationId xmlns:a16="http://schemas.microsoft.com/office/drawing/2014/main" id="{17826CA3-89C4-45EE-B9EB-1949D789B71F}"/>
               </a:ext>
             </a:extLst>
           </p:cNvPr>
@@ -29936,7 +29936,7 @@
           <p:cNvPr id="33" name="">
             <a:extLst xmlns:a="http://schemas.openxmlformats.org/drawingml/2006/main">
               <a:ext uri="{FF2B5EF4-FFF2-40B4-BE49-F238E27FC236}">
-                <a16:creationId xmlns:a16="http://schemas.microsoft.com/office/drawing/2014/main" id="{E9ADEC45-A2F7-4F6B-960D-E46239EA12C0}"/>
+                <a16:creationId xmlns:a16="http://schemas.microsoft.com/office/drawing/2014/main" id="{444DFB1F-DCAC-4713-9A38-B07CED1819A9}"/>
               </a:ext>
             </a:extLst>
           </p:cNvPr>
@@ -29988,7 +29988,7 @@
           <p:cNvPr id="34" name="">
             <a:extLst xmlns:a="http://schemas.openxmlformats.org/drawingml/2006/main">
               <a:ext uri="{FF2B5EF4-FFF2-40B4-BE49-F238E27FC236}">
-                <a16:creationId xmlns:a16="http://schemas.microsoft.com/office/drawing/2014/main" id="{832C1B72-A47D-483D-8AD0-8714A7CCC5AF}"/>
+                <a16:creationId xmlns:a16="http://schemas.microsoft.com/office/drawing/2014/main" id="{ECF949B3-796C-4E25-83A8-3AE1677BC651}"/>
               </a:ext>
             </a:extLst>
           </p:cNvPr>
@@ -30019,7 +30019,7 @@
           <p:cNvPr id="35" name="">
             <a:extLst xmlns:a="http://schemas.openxmlformats.org/drawingml/2006/main">
               <a:ext uri="{FF2B5EF4-FFF2-40B4-BE49-F238E27FC236}">
-                <a16:creationId xmlns:a16="http://schemas.microsoft.com/office/drawing/2014/main" id="{341C3E66-498B-40C3-B8E3-6FEA94176E3D}"/>
+                <a16:creationId xmlns:a16="http://schemas.microsoft.com/office/drawing/2014/main" id="{10C573D3-EE11-47B6-BCEC-B6E97C6AC1BE}"/>
               </a:ext>
             </a:extLst>
           </p:cNvPr>
@@ -30071,7 +30071,7 @@
           <p:cNvPr id="36" name="">
             <a:extLst xmlns:a="http://schemas.openxmlformats.org/drawingml/2006/main">
               <a:ext uri="{FF2B5EF4-FFF2-40B4-BE49-F238E27FC236}">
-                <a16:creationId xmlns:a16="http://schemas.microsoft.com/office/drawing/2014/main" id="{6FC71C01-4350-4114-A22E-514DA1909709}"/>
+                <a16:creationId xmlns:a16="http://schemas.microsoft.com/office/drawing/2014/main" id="{F70EC1A3-431F-46A3-92EE-E2C770000A82}"/>
               </a:ext>
             </a:extLst>
           </p:cNvPr>
@@ -30123,7 +30123,7 @@
           <p:cNvPr id="37" name="">
             <a:extLst xmlns:a="http://schemas.openxmlformats.org/drawingml/2006/main">
               <a:ext uri="{FF2B5EF4-FFF2-40B4-BE49-F238E27FC236}">
-                <a16:creationId xmlns:a16="http://schemas.microsoft.com/office/drawing/2014/main" id="{44AE0A7D-56A1-42E6-9153-44472EE851C7}"/>
+                <a16:creationId xmlns:a16="http://schemas.microsoft.com/office/drawing/2014/main" id="{CCA180ED-7B6D-477D-8513-35FE04B8A025}"/>
               </a:ext>
             </a:extLst>
           </p:cNvPr>
@@ -30175,7 +30175,7 @@
           <p:cNvPr id="38" name="">
             <a:extLst xmlns:a="http://schemas.openxmlformats.org/drawingml/2006/main">
               <a:ext uri="{FF2B5EF4-FFF2-40B4-BE49-F238E27FC236}">
-                <a16:creationId xmlns:a16="http://schemas.microsoft.com/office/drawing/2014/main" id="{C9E52CC4-63BC-4D85-AAAB-A3FD2AD3A4B9}"/>
+                <a16:creationId xmlns:a16="http://schemas.microsoft.com/office/drawing/2014/main" id="{6F637B7D-AEFC-4909-A9BD-39FBC126C35A}"/>
               </a:ext>
             </a:extLst>
           </p:cNvPr>
@@ -30206,7 +30206,7 @@
           <p:cNvPr id="39" name="">
             <a:extLst xmlns:a="http://schemas.openxmlformats.org/drawingml/2006/main">
               <a:ext uri="{FF2B5EF4-FFF2-40B4-BE49-F238E27FC236}">
-                <a16:creationId xmlns:a16="http://schemas.microsoft.com/office/drawing/2014/main" id="{C62B81B7-32B7-4D28-89B4-C02D72473E0D}"/>
+                <a16:creationId xmlns:a16="http://schemas.microsoft.com/office/drawing/2014/main" id="{759F0317-19D5-41C8-813E-18A50C504B4B}"/>
               </a:ext>
             </a:extLst>
           </p:cNvPr>
@@ -30258,7 +30258,7 @@
           <p:cNvPr id="40" name="">
             <a:extLst xmlns:a="http://schemas.openxmlformats.org/drawingml/2006/main">
               <a:ext uri="{FF2B5EF4-FFF2-40B4-BE49-F238E27FC236}">
-                <a16:creationId xmlns:a16="http://schemas.microsoft.com/office/drawing/2014/main" id="{B4FEBDA7-7D77-4384-A58C-50389C0F2C5A}"/>
+                <a16:creationId xmlns:a16="http://schemas.microsoft.com/office/drawing/2014/main" id="{DE8A296D-64BA-4DDA-8B46-9760EA2DB994}"/>
               </a:ext>
             </a:extLst>
           </p:cNvPr>
@@ -30310,7 +30310,7 @@
           <p:cNvPr id="41" name="">
             <a:extLst xmlns:a="http://schemas.openxmlformats.org/drawingml/2006/main">
               <a:ext uri="{FF2B5EF4-FFF2-40B4-BE49-F238E27FC236}">
-                <a16:creationId xmlns:a16="http://schemas.microsoft.com/office/drawing/2014/main" id="{A6ADA6B4-E70B-486C-BB8D-666E20276701}"/>
+                <a16:creationId xmlns:a16="http://schemas.microsoft.com/office/drawing/2014/main" id="{ADA05D79-0CE5-44C8-8560-E99E7B7D1721}"/>
               </a:ext>
             </a:extLst>
           </p:cNvPr>
@@ -30360,7 +30360,7 @@
     </p:spTree>
     <p:extLst>
       <p:ext uri="{BB962C8B-B14F-4D97-AF65-F5344CB8AC3E}">
-        <p14:creationId xmlns:p14="http://schemas.microsoft.com/office/powerpoint/2010/main" val="2000480800"/>
+        <p14:creationId xmlns:p14="http://schemas.microsoft.com/office/powerpoint/2010/main" val="1358360946"/>
       </p:ext>
     </p:extLst>
   </p:cSld>
@@ -30391,7 +30391,7 @@
           <p:cNvPr id="76" name="">
             <a:extLst xmlns:a="http://schemas.openxmlformats.org/drawingml/2006/main">
               <a:ext uri="{FF2B5EF4-FFF2-40B4-BE49-F238E27FC236}">
-                <a16:creationId xmlns:a16="http://schemas.microsoft.com/office/drawing/2014/main" id="{20F86264-095E-43D4-8212-2B42A5D4BC8F}"/>
+                <a16:creationId xmlns:a16="http://schemas.microsoft.com/office/drawing/2014/main" id="{B73854C4-D77B-4E75-B10E-EDDC88F219A0}"/>
               </a:ext>
             </a:extLst>
           </p:cNvPr>
@@ -30424,7 +30424,7 @@
           <p:cNvPr id="2" name="">
             <a:extLst xmlns:a="http://schemas.openxmlformats.org/drawingml/2006/main">
               <a:ext uri="{FF2B5EF4-FFF2-40B4-BE49-F238E27FC236}">
-                <a16:creationId xmlns:a16="http://schemas.microsoft.com/office/drawing/2014/main" id="{5F264C3F-46D4-4AB7-AB56-3EA6D17725C1}"/>
+                <a16:creationId xmlns:a16="http://schemas.microsoft.com/office/drawing/2014/main" id="{B74F4ABC-75AE-405A-B8F7-8FD2FC417551}"/>
               </a:ext>
             </a:extLst>
           </p:cNvPr>
@@ -30455,7 +30455,7 @@
           <p:cNvPr id="3" name="">
             <a:extLst xmlns:a="http://schemas.openxmlformats.org/drawingml/2006/main">
               <a:ext uri="{FF2B5EF4-FFF2-40B4-BE49-F238E27FC236}">
-                <a16:creationId xmlns:a16="http://schemas.microsoft.com/office/drawing/2014/main" id="{BB449508-38E3-4E77-983C-B8196092A604}"/>
+                <a16:creationId xmlns:a16="http://schemas.microsoft.com/office/drawing/2014/main" id="{38E7FBE5-CAE6-4FD0-9A94-48AD4D69769E}"/>
               </a:ext>
             </a:extLst>
           </p:cNvPr>
@@ -30507,7 +30507,7 @@
           <p:cNvPr id="4" name="">
             <a:extLst xmlns:a="http://schemas.openxmlformats.org/drawingml/2006/main">
               <a:ext uri="{FF2B5EF4-FFF2-40B4-BE49-F238E27FC236}">
-                <a16:creationId xmlns:a16="http://schemas.microsoft.com/office/drawing/2014/main" id="{57488FE8-7D4B-4EE3-90B5-AAB9D4734BC4}"/>
+                <a16:creationId xmlns:a16="http://schemas.microsoft.com/office/drawing/2014/main" id="{9C05BEBB-A8D9-4E9B-9119-656A2F00F210}"/>
               </a:ext>
             </a:extLst>
           </p:cNvPr>
@@ -30559,7 +30559,7 @@
           <p:cNvPr id="5" name="">
             <a:extLst xmlns:a="http://schemas.openxmlformats.org/drawingml/2006/main">
               <a:ext uri="{FF2B5EF4-FFF2-40B4-BE49-F238E27FC236}">
-                <a16:creationId xmlns:a16="http://schemas.microsoft.com/office/drawing/2014/main" id="{8B38F3B0-2BF3-433B-9B22-24321AE00C40}"/>
+                <a16:creationId xmlns:a16="http://schemas.microsoft.com/office/drawing/2014/main" id="{CE418C34-1F71-4D8D-B26E-30C1595A3631}"/>
               </a:ext>
             </a:extLst>
           </p:cNvPr>
@@ -30594,7 +30594,7 @@
           <p:nvPr/>
         </p:nvPicPr>
         <p:blipFill>
-          <a:blip xmlns:r="http://schemas.openxmlformats.org/officeDocument/2006/relationships" xmlns:a="http://schemas.openxmlformats.org/drawingml/2006/main" r:embed="R1cd9b3008a274b31"/>
+          <a:blip xmlns:r="http://schemas.openxmlformats.org/officeDocument/2006/relationships" xmlns:a="http://schemas.openxmlformats.org/drawingml/2006/main" r:embed="R450614ea84264790"/>
           <a:stretch xmlns:a="http://schemas.openxmlformats.org/drawingml/2006/main"/>
         </p:blipFill>
         <p:spPr>
@@ -30612,7 +30612,7 @@
           <p:cNvPr id="7" name="">
             <a:extLst xmlns:a="http://schemas.openxmlformats.org/drawingml/2006/main">
               <a:ext uri="{FF2B5EF4-FFF2-40B4-BE49-F238E27FC236}">
-                <a16:creationId xmlns:a16="http://schemas.microsoft.com/office/drawing/2014/main" id="{471EB0D5-9525-43AD-ADF2-2A1C452BAD0D}"/>
+                <a16:creationId xmlns:a16="http://schemas.microsoft.com/office/drawing/2014/main" id="{41E60D6C-29CB-4E09-BD12-F827319F752B}"/>
               </a:ext>
             </a:extLst>
           </p:cNvPr>
@@ -30664,7 +30664,7 @@
           <p:cNvPr id="8" name="">
             <a:extLst xmlns:a="http://schemas.openxmlformats.org/drawingml/2006/main">
               <a:ext uri="{FF2B5EF4-FFF2-40B4-BE49-F238E27FC236}">
-                <a16:creationId xmlns:a16="http://schemas.microsoft.com/office/drawing/2014/main" id="{DEC30D71-6093-4283-B407-E5FBCEDAC0AD}"/>
+                <a16:creationId xmlns:a16="http://schemas.microsoft.com/office/drawing/2014/main" id="{28FBC5AD-EB9C-4B8B-B9E6-83BD4A4EAD55}"/>
               </a:ext>
             </a:extLst>
           </p:cNvPr>
@@ -30716,7 +30716,7 @@
           <p:cNvPr id="9" name="">
             <a:extLst xmlns:a="http://schemas.openxmlformats.org/drawingml/2006/main">
               <a:ext uri="{FF2B5EF4-FFF2-40B4-BE49-F238E27FC236}">
-                <a16:creationId xmlns:a16="http://schemas.microsoft.com/office/drawing/2014/main" id="{6D144256-3862-491D-95DF-A4EB31A5AD83}"/>
+                <a16:creationId xmlns:a16="http://schemas.microsoft.com/office/drawing/2014/main" id="{808E72E1-17AC-4074-8BEC-CEFC653DDDEE}"/>
               </a:ext>
             </a:extLst>
           </p:cNvPr>
@@ -30768,7 +30768,7 @@
           <p:cNvPr id="10" name="">
             <a:extLst xmlns:a="http://schemas.openxmlformats.org/drawingml/2006/main">
               <a:ext uri="{FF2B5EF4-FFF2-40B4-BE49-F238E27FC236}">
-                <a16:creationId xmlns:a16="http://schemas.microsoft.com/office/drawing/2014/main" id="{AB616ACC-FA79-4674-BCCF-7E1E92B0A9F9}"/>
+                <a16:creationId xmlns:a16="http://schemas.microsoft.com/office/drawing/2014/main" id="{C372C2B9-C4C9-450F-BA4E-042F71D07636}"/>
               </a:ext>
             </a:extLst>
           </p:cNvPr>
@@ -30820,7 +30820,7 @@
           <p:cNvPr id="11" name="">
             <a:extLst xmlns:a="http://schemas.openxmlformats.org/drawingml/2006/main">
               <a:ext uri="{FF2B5EF4-FFF2-40B4-BE49-F238E27FC236}">
-                <a16:creationId xmlns:a16="http://schemas.microsoft.com/office/drawing/2014/main" id="{D0768EB5-ADDF-4E2F-A78D-70F31A190086}"/>
+                <a16:creationId xmlns:a16="http://schemas.microsoft.com/office/drawing/2014/main" id="{3D406C54-DD0E-4DA9-8C7C-8DB3B94AE990}"/>
               </a:ext>
             </a:extLst>
           </p:cNvPr>
@@ -30863,7 +30863,7 @@
           <p:cNvPr id="12" name="">
             <a:extLst xmlns:a="http://schemas.openxmlformats.org/drawingml/2006/main">
               <a:ext uri="{FF2B5EF4-FFF2-40B4-BE49-F238E27FC236}">
-                <a16:creationId xmlns:a16="http://schemas.microsoft.com/office/drawing/2014/main" id="{5134402F-FCE6-402A-A186-1735868EF131}"/>
+                <a16:creationId xmlns:a16="http://schemas.microsoft.com/office/drawing/2014/main" id="{4E34E897-8C50-4A3D-9A77-04A9DF9F5DCD}"/>
               </a:ext>
             </a:extLst>
           </p:cNvPr>
@@ -30894,7 +30894,7 @@
           <p:cNvPr id="13" name="">
             <a:extLst xmlns:a="http://schemas.openxmlformats.org/drawingml/2006/main">
               <a:ext uri="{FF2B5EF4-FFF2-40B4-BE49-F238E27FC236}">
-                <a16:creationId xmlns:a16="http://schemas.microsoft.com/office/drawing/2014/main" id="{CB8D3E20-4EA4-498C-AC40-11695E5E034F}"/>
+                <a16:creationId xmlns:a16="http://schemas.microsoft.com/office/drawing/2014/main" id="{B4EBC0E4-77A0-4874-A39E-0DD66F1C2C4A}"/>
               </a:ext>
             </a:extLst>
           </p:cNvPr>
@@ -30925,7 +30925,7 @@
           <p:cNvPr id="14" name="">
             <a:extLst xmlns:a="http://schemas.openxmlformats.org/drawingml/2006/main">
               <a:ext uri="{FF2B5EF4-FFF2-40B4-BE49-F238E27FC236}">
-                <a16:creationId xmlns:a16="http://schemas.microsoft.com/office/drawing/2014/main" id="{8C01CE82-8CF8-471E-8998-80E150935F8B}"/>
+                <a16:creationId xmlns:a16="http://schemas.microsoft.com/office/drawing/2014/main" id="{363A2846-9528-42D2-93BA-7A3737B4BE9C}"/>
               </a:ext>
             </a:extLst>
           </p:cNvPr>
@@ -30968,7 +30968,7 @@
           <p:cNvPr id="15" name="">
             <a:extLst xmlns:a="http://schemas.openxmlformats.org/drawingml/2006/main">
               <a:ext uri="{FF2B5EF4-FFF2-40B4-BE49-F238E27FC236}">
-                <a16:creationId xmlns:a16="http://schemas.microsoft.com/office/drawing/2014/main" id="{D967A04F-77CA-402D-B7D4-B0E8BD9E1E59}"/>
+                <a16:creationId xmlns:a16="http://schemas.microsoft.com/office/drawing/2014/main" id="{A77AEA71-24F8-4F3C-A537-E761D36DF85B}"/>
               </a:ext>
             </a:extLst>
           </p:cNvPr>
@@ -30999,7 +30999,7 @@
           <p:cNvPr id="16" name="">
             <a:extLst xmlns:a="http://schemas.openxmlformats.org/drawingml/2006/main">
               <a:ext uri="{FF2B5EF4-FFF2-40B4-BE49-F238E27FC236}">
-                <a16:creationId xmlns:a16="http://schemas.microsoft.com/office/drawing/2014/main" id="{53710730-0D34-498D-879E-07FB6087A9A5}"/>
+                <a16:creationId xmlns:a16="http://schemas.microsoft.com/office/drawing/2014/main" id="{9ACA8945-AD2E-406E-8764-F61B88114F63}"/>
               </a:ext>
             </a:extLst>
           </p:cNvPr>
@@ -31030,7 +31030,7 @@
           <p:cNvPr id="17" name="">
             <a:extLst xmlns:a="http://schemas.openxmlformats.org/drawingml/2006/main">
               <a:ext uri="{FF2B5EF4-FFF2-40B4-BE49-F238E27FC236}">
-                <a16:creationId xmlns:a16="http://schemas.microsoft.com/office/drawing/2014/main" id="{7F4A03CF-C136-4BAA-8A9E-F1B8A6A18FEA}"/>
+                <a16:creationId xmlns:a16="http://schemas.microsoft.com/office/drawing/2014/main" id="{F2CC0CD5-DB20-41B4-A727-6748EBBDF083}"/>
               </a:ext>
             </a:extLst>
           </p:cNvPr>
@@ -31082,7 +31082,7 @@
           <p:cNvPr id="18" name="">
             <a:extLst xmlns:a="http://schemas.openxmlformats.org/drawingml/2006/main">
               <a:ext uri="{FF2B5EF4-FFF2-40B4-BE49-F238E27FC236}">
-                <a16:creationId xmlns:a16="http://schemas.microsoft.com/office/drawing/2014/main" id="{676A9206-DEB3-4BAE-A991-6BF49A5C441E}"/>
+                <a16:creationId xmlns:a16="http://schemas.microsoft.com/office/drawing/2014/main" id="{7F0FACCF-7366-438C-9ECD-DDB6D4C4814D}"/>
               </a:ext>
             </a:extLst>
           </p:cNvPr>
@@ -31134,7 +31134,7 @@
           <p:cNvPr id="19" name="">
             <a:extLst xmlns:a="http://schemas.openxmlformats.org/drawingml/2006/main">
               <a:ext uri="{FF2B5EF4-FFF2-40B4-BE49-F238E27FC236}">
-                <a16:creationId xmlns:a16="http://schemas.microsoft.com/office/drawing/2014/main" id="{1D8EA0B3-878A-47A6-84A1-94D43AF01182}"/>
+                <a16:creationId xmlns:a16="http://schemas.microsoft.com/office/drawing/2014/main" id="{CE1DDD5D-EEBE-4746-A1B3-A00FA1E11ADC}"/>
               </a:ext>
             </a:extLst>
           </p:cNvPr>
@@ -31186,7 +31186,7 @@
           <p:cNvPr id="20" name="">
             <a:extLst xmlns:a="http://schemas.openxmlformats.org/drawingml/2006/main">
               <a:ext uri="{FF2B5EF4-FFF2-40B4-BE49-F238E27FC236}">
-                <a16:creationId xmlns:a16="http://schemas.microsoft.com/office/drawing/2014/main" id="{1DF97330-DDF3-4083-B399-F8A6D6CC40F0}"/>
+                <a16:creationId xmlns:a16="http://schemas.microsoft.com/office/drawing/2014/main" id="{85C0433B-204E-4500-ADB2-E587202B6036}"/>
               </a:ext>
             </a:extLst>
           </p:cNvPr>
@@ -31229,7 +31229,7 @@
           <p:cNvPr id="21" name="">
             <a:extLst xmlns:a="http://schemas.openxmlformats.org/drawingml/2006/main">
               <a:ext uri="{FF2B5EF4-FFF2-40B4-BE49-F238E27FC236}">
-                <a16:creationId xmlns:a16="http://schemas.microsoft.com/office/drawing/2014/main" id="{806C1EF1-CBBC-4676-AB6D-E6127287C13E}"/>
+                <a16:creationId xmlns:a16="http://schemas.microsoft.com/office/drawing/2014/main" id="{C01B4425-544E-4C83-B0D3-24B18BDE7325}"/>
               </a:ext>
             </a:extLst>
           </p:cNvPr>
@@ -31260,7 +31260,7 @@
           <p:cNvPr id="22" name="">
             <a:extLst xmlns:a="http://schemas.openxmlformats.org/drawingml/2006/main">
               <a:ext uri="{FF2B5EF4-FFF2-40B4-BE49-F238E27FC236}">
-                <a16:creationId xmlns:a16="http://schemas.microsoft.com/office/drawing/2014/main" id="{39F82551-712D-4C5C-8175-3658A353FDBB}"/>
+                <a16:creationId xmlns:a16="http://schemas.microsoft.com/office/drawing/2014/main" id="{CE208F0E-D59E-4FF0-9363-1C9006542E1E}"/>
               </a:ext>
             </a:extLst>
           </p:cNvPr>
@@ -31291,7 +31291,7 @@
           <p:cNvPr id="23" name="">
             <a:extLst xmlns:a="http://schemas.openxmlformats.org/drawingml/2006/main">
               <a:ext uri="{FF2B5EF4-FFF2-40B4-BE49-F238E27FC236}">
-                <a16:creationId xmlns:a16="http://schemas.microsoft.com/office/drawing/2014/main" id="{834564C1-D081-4103-87CB-8B1B19714DC4}"/>
+                <a16:creationId xmlns:a16="http://schemas.microsoft.com/office/drawing/2014/main" id="{73F4E30F-7F6B-4668-96DC-A9189B882464}"/>
               </a:ext>
             </a:extLst>
           </p:cNvPr>
@@ -31343,7 +31343,7 @@
           <p:cNvPr id="24" name="">
             <a:extLst xmlns:a="http://schemas.openxmlformats.org/drawingml/2006/main">
               <a:ext uri="{FF2B5EF4-FFF2-40B4-BE49-F238E27FC236}">
-                <a16:creationId xmlns:a16="http://schemas.microsoft.com/office/drawing/2014/main" id="{844DA660-6F04-45D6-A969-634DAFAB0869}"/>
+                <a16:creationId xmlns:a16="http://schemas.microsoft.com/office/drawing/2014/main" id="{1B419E39-8FA2-4D64-8C4E-681BE39B5539}"/>
               </a:ext>
             </a:extLst>
           </p:cNvPr>
@@ -31395,7 +31395,7 @@
           <p:cNvPr id="25" name="">
             <a:extLst xmlns:a="http://schemas.openxmlformats.org/drawingml/2006/main">
               <a:ext uri="{FF2B5EF4-FFF2-40B4-BE49-F238E27FC236}">
-                <a16:creationId xmlns:a16="http://schemas.microsoft.com/office/drawing/2014/main" id="{B7EA11B3-1216-4980-BFB6-E1CB7F4EEC61}"/>
+                <a16:creationId xmlns:a16="http://schemas.microsoft.com/office/drawing/2014/main" id="{2A9F0AB3-2145-4DB0-90ED-94FFE6238A6D}"/>
               </a:ext>
             </a:extLst>
           </p:cNvPr>
@@ -31447,7 +31447,7 @@
           <p:cNvPr id="26" name="">
             <a:extLst xmlns:a="http://schemas.openxmlformats.org/drawingml/2006/main">
               <a:ext uri="{FF2B5EF4-FFF2-40B4-BE49-F238E27FC236}">
-                <a16:creationId xmlns:a16="http://schemas.microsoft.com/office/drawing/2014/main" id="{4BE2748C-6B27-442D-B7DE-F865F9562C59}"/>
+                <a16:creationId xmlns:a16="http://schemas.microsoft.com/office/drawing/2014/main" id="{002F5495-3782-48D9-8466-FCCBA1886146}"/>
               </a:ext>
             </a:extLst>
           </p:cNvPr>
@@ -31490,7 +31490,7 @@
           <p:cNvPr id="27" name="">
             <a:extLst xmlns:a="http://schemas.openxmlformats.org/drawingml/2006/main">
               <a:ext uri="{FF2B5EF4-FFF2-40B4-BE49-F238E27FC236}">
-                <a16:creationId xmlns:a16="http://schemas.microsoft.com/office/drawing/2014/main" id="{5C964384-C43E-4879-A833-E6B0345E026F}"/>
+                <a16:creationId xmlns:a16="http://schemas.microsoft.com/office/drawing/2014/main" id="{9C6D866A-D2B8-402D-9BC9-8F6F980A67B2}"/>
               </a:ext>
             </a:extLst>
           </p:cNvPr>
@@ -31521,7 +31521,7 @@
           <p:cNvPr id="28" name="">
             <a:extLst xmlns:a="http://schemas.openxmlformats.org/drawingml/2006/main">
               <a:ext uri="{FF2B5EF4-FFF2-40B4-BE49-F238E27FC236}">
-                <a16:creationId xmlns:a16="http://schemas.microsoft.com/office/drawing/2014/main" id="{42EC2AF3-F272-47F0-BBC4-2B88FD081220}"/>
+                <a16:creationId xmlns:a16="http://schemas.microsoft.com/office/drawing/2014/main" id="{E22C0D0E-A9C7-4B88-9569-D88DAEED4C40}"/>
               </a:ext>
             </a:extLst>
           </p:cNvPr>
@@ -31552,7 +31552,7 @@
           <p:cNvPr id="29" name="">
             <a:extLst xmlns:a="http://schemas.openxmlformats.org/drawingml/2006/main">
               <a:ext uri="{FF2B5EF4-FFF2-40B4-BE49-F238E27FC236}">
-                <a16:creationId xmlns:a16="http://schemas.microsoft.com/office/drawing/2014/main" id="{398F51B4-C0FC-434D-A1FF-7CF51C24FF3C}"/>
+                <a16:creationId xmlns:a16="http://schemas.microsoft.com/office/drawing/2014/main" id="{1FBFF3AE-0204-41E1-A615-CD5B0F755616}"/>
               </a:ext>
             </a:extLst>
           </p:cNvPr>
@@ -31604,7 +31604,7 @@
           <p:cNvPr id="30" name="">
             <a:extLst xmlns:a="http://schemas.openxmlformats.org/drawingml/2006/main">
               <a:ext uri="{FF2B5EF4-FFF2-40B4-BE49-F238E27FC236}">
-                <a16:creationId xmlns:a16="http://schemas.microsoft.com/office/drawing/2014/main" id="{5CE9BC9E-6A9C-47EC-BC56-7F059DBFA50F}"/>
+                <a16:creationId xmlns:a16="http://schemas.microsoft.com/office/drawing/2014/main" id="{2443DE88-5B99-4D5E-BA8B-9351BED87223}"/>
               </a:ext>
             </a:extLst>
           </p:cNvPr>
@@ -31656,7 +31656,7 @@
           <p:cNvPr id="31" name="">
             <a:extLst xmlns:a="http://schemas.openxmlformats.org/drawingml/2006/main">
               <a:ext uri="{FF2B5EF4-FFF2-40B4-BE49-F238E27FC236}">
-                <a16:creationId xmlns:a16="http://schemas.microsoft.com/office/drawing/2014/main" id="{BA5F9AB0-6707-4BD4-B86F-74CBE8932C1C}"/>
+                <a16:creationId xmlns:a16="http://schemas.microsoft.com/office/drawing/2014/main" id="{FCFDB709-DB44-415F-A705-21D120D4B489}"/>
               </a:ext>
             </a:extLst>
           </p:cNvPr>
@@ -31708,7 +31708,7 @@
           <p:cNvPr id="32" name="">
             <a:extLst xmlns:a="http://schemas.openxmlformats.org/drawingml/2006/main">
               <a:ext uri="{FF2B5EF4-FFF2-40B4-BE49-F238E27FC236}">
-                <a16:creationId xmlns:a16="http://schemas.microsoft.com/office/drawing/2014/main" id="{08713C36-1EBC-479E-84BB-861465A81D0E}"/>
+                <a16:creationId xmlns:a16="http://schemas.microsoft.com/office/drawing/2014/main" id="{68FEE597-26DC-4B0E-BB85-E4546CCD30B1}"/>
               </a:ext>
             </a:extLst>
           </p:cNvPr>
@@ -31751,7 +31751,7 @@
           <p:cNvPr id="33" name="">
             <a:extLst xmlns:a="http://schemas.openxmlformats.org/drawingml/2006/main">
               <a:ext uri="{FF2B5EF4-FFF2-40B4-BE49-F238E27FC236}">
-                <a16:creationId xmlns:a16="http://schemas.microsoft.com/office/drawing/2014/main" id="{3128E042-1F7C-41C4-A549-189768CDECD7}"/>
+                <a16:creationId xmlns:a16="http://schemas.microsoft.com/office/drawing/2014/main" id="{7963C8D4-1C3B-4143-BCED-6833B0A6AF46}"/>
               </a:ext>
             </a:extLst>
           </p:cNvPr>
@@ -31782,7 +31782,7 @@
           <p:cNvPr id="34" name="">
             <a:extLst xmlns:a="http://schemas.openxmlformats.org/drawingml/2006/main">
               <a:ext uri="{FF2B5EF4-FFF2-40B4-BE49-F238E27FC236}">
-                <a16:creationId xmlns:a16="http://schemas.microsoft.com/office/drawing/2014/main" id="{BBB2AA32-75B7-4AA3-9B31-9790477B112B}"/>
+                <a16:creationId xmlns:a16="http://schemas.microsoft.com/office/drawing/2014/main" id="{2AF78317-3DE0-4D6B-BBEF-5A6442341B88}"/>
               </a:ext>
             </a:extLst>
           </p:cNvPr>
@@ -31813,7 +31813,7 @@
           <p:cNvPr id="35" name="">
             <a:extLst xmlns:a="http://schemas.openxmlformats.org/drawingml/2006/main">
               <a:ext uri="{FF2B5EF4-FFF2-40B4-BE49-F238E27FC236}">
-                <a16:creationId xmlns:a16="http://schemas.microsoft.com/office/drawing/2014/main" id="{347BB02C-6E8F-433F-869F-9BC7437B61AE}"/>
+                <a16:creationId xmlns:a16="http://schemas.microsoft.com/office/drawing/2014/main" id="{3A968D3A-17B4-4067-8BD0-9A5951BB1BDA}"/>
               </a:ext>
             </a:extLst>
           </p:cNvPr>
@@ -31865,7 +31865,7 @@
           <p:cNvPr id="36" name="">
             <a:extLst xmlns:a="http://schemas.openxmlformats.org/drawingml/2006/main">
               <a:ext uri="{FF2B5EF4-FFF2-40B4-BE49-F238E27FC236}">
-                <a16:creationId xmlns:a16="http://schemas.microsoft.com/office/drawing/2014/main" id="{EC701282-D4B4-46E6-8342-EA9EEF6907FB}"/>
+                <a16:creationId xmlns:a16="http://schemas.microsoft.com/office/drawing/2014/main" id="{A14C0092-A034-422D-91F9-B8B2B57FCDA1}"/>
               </a:ext>
             </a:extLst>
           </p:cNvPr>
@@ -31917,7 +31917,7 @@
           <p:cNvPr id="37" name="">
             <a:extLst xmlns:a="http://schemas.openxmlformats.org/drawingml/2006/main">
               <a:ext uri="{FF2B5EF4-FFF2-40B4-BE49-F238E27FC236}">
-                <a16:creationId xmlns:a16="http://schemas.microsoft.com/office/drawing/2014/main" id="{8C49EB1C-FCA8-4F97-B88F-B01EC1EAD164}"/>
+                <a16:creationId xmlns:a16="http://schemas.microsoft.com/office/drawing/2014/main" id="{84509489-4961-49FC-ACA0-45EE7B596A7B}"/>
               </a:ext>
             </a:extLst>
           </p:cNvPr>
@@ -31973,10 +31973,10 @@
           <p:nvPr/>
         </p:nvPicPr>
         <p:blipFill>
-          <a:blip xmlns:r="http://schemas.openxmlformats.org/officeDocument/2006/relationships" xmlns:a="http://schemas.openxmlformats.org/drawingml/2006/main" r:embed="R713f82cb8b3a43b9">
+          <a:blip xmlns:r="http://schemas.openxmlformats.org/officeDocument/2006/relationships" xmlns:a="http://schemas.openxmlformats.org/drawingml/2006/main" r:embed="R6b00cd3fc08c4b6e">
             <a:extLst>
               <a:ext uri="{96DAC541-7B7A-43D3-8B79-37D633B846F1}">
-                <asvg:svgBlip xmlns:asvg="http://schemas.microsoft.com/office/drawing/2016/SVG/main" r:embed="Rbfe182a27c0c4416"/>
+                <asvg:svgBlip xmlns:asvg="http://schemas.microsoft.com/office/drawing/2016/SVG/main" r:embed="Rc4e6830bda2f47db"/>
               </a:ext>
             </a:extLst>
           </a:blip>
@@ -31997,7 +31997,7 @@
           <p:cNvPr id="39" name="">
             <a:extLst xmlns:a="http://schemas.openxmlformats.org/drawingml/2006/main">
               <a:ext uri="{FF2B5EF4-FFF2-40B4-BE49-F238E27FC236}">
-                <a16:creationId xmlns:a16="http://schemas.microsoft.com/office/drawing/2014/main" id="{91FF5E1A-C74C-4CA6-916E-D20864144874}"/>
+                <a16:creationId xmlns:a16="http://schemas.microsoft.com/office/drawing/2014/main" id="{6E6AFAF8-D716-419F-9D03-8955FB16FB37}"/>
               </a:ext>
             </a:extLst>
           </p:cNvPr>
@@ -32049,7 +32049,7 @@
           <p:cNvPr id="40" name="">
             <a:extLst xmlns:a="http://schemas.openxmlformats.org/drawingml/2006/main">
               <a:ext uri="{FF2B5EF4-FFF2-40B4-BE49-F238E27FC236}">
-                <a16:creationId xmlns:a16="http://schemas.microsoft.com/office/drawing/2014/main" id="{66503607-B2B9-47C5-B8A7-14917AD5C577}"/>
+                <a16:creationId xmlns:a16="http://schemas.microsoft.com/office/drawing/2014/main" id="{0542EE0F-7CD2-4527-A028-A53A4C36A753}"/>
               </a:ext>
             </a:extLst>
           </p:cNvPr>
@@ -32101,7 +32101,7 @@
           <p:cNvPr id="41" name="">
             <a:extLst xmlns:a="http://schemas.openxmlformats.org/drawingml/2006/main">
               <a:ext uri="{FF2B5EF4-FFF2-40B4-BE49-F238E27FC236}">
-                <a16:creationId xmlns:a16="http://schemas.microsoft.com/office/drawing/2014/main" id="{D650BB3D-765F-48F7-8957-4E43D5A31379}"/>
+                <a16:creationId xmlns:a16="http://schemas.microsoft.com/office/drawing/2014/main" id="{9F8F12B5-461B-42F2-A140-291D233812B9}"/>
               </a:ext>
             </a:extLst>
           </p:cNvPr>
@@ -32144,7 +32144,7 @@
           <p:cNvPr id="42" name="">
             <a:extLst xmlns:a="http://schemas.openxmlformats.org/drawingml/2006/main">
               <a:ext uri="{FF2B5EF4-FFF2-40B4-BE49-F238E27FC236}">
-                <a16:creationId xmlns:a16="http://schemas.microsoft.com/office/drawing/2014/main" id="{A9D6B660-99CE-4296-B82C-50AF6945406F}"/>
+                <a16:creationId xmlns:a16="http://schemas.microsoft.com/office/drawing/2014/main" id="{C1B73FD4-2273-4C20-91F1-93E0F9958482}"/>
               </a:ext>
             </a:extLst>
           </p:cNvPr>
@@ -32175,7 +32175,7 @@
           <p:cNvPr id="43" name="">
             <a:extLst xmlns:a="http://schemas.openxmlformats.org/drawingml/2006/main">
               <a:ext uri="{FF2B5EF4-FFF2-40B4-BE49-F238E27FC236}">
-                <a16:creationId xmlns:a16="http://schemas.microsoft.com/office/drawing/2014/main" id="{82080047-A06F-4A8B-9772-9251FA9C9B3F}"/>
+                <a16:creationId xmlns:a16="http://schemas.microsoft.com/office/drawing/2014/main" id="{BC21E61D-71C0-4542-B8B8-3368AF19D22E}"/>
               </a:ext>
             </a:extLst>
           </p:cNvPr>
@@ -32206,7 +32206,7 @@
           <p:cNvPr id="44" name="">
             <a:extLst xmlns:a="http://schemas.openxmlformats.org/drawingml/2006/main">
               <a:ext uri="{FF2B5EF4-FFF2-40B4-BE49-F238E27FC236}">
-                <a16:creationId xmlns:a16="http://schemas.microsoft.com/office/drawing/2014/main" id="{5E0CA7EB-1F14-47C4-98A4-FD9A9BB8744C}"/>
+                <a16:creationId xmlns:a16="http://schemas.microsoft.com/office/drawing/2014/main" id="{06118E49-F4BA-47F8-A65B-6A8E99E7C42B}"/>
               </a:ext>
             </a:extLst>
           </p:cNvPr>
@@ -32249,7 +32249,7 @@
           <p:cNvPr id="45" name="">
             <a:extLst xmlns:a="http://schemas.openxmlformats.org/drawingml/2006/main">
               <a:ext uri="{FF2B5EF4-FFF2-40B4-BE49-F238E27FC236}">
-                <a16:creationId xmlns:a16="http://schemas.microsoft.com/office/drawing/2014/main" id="{1290A409-38B3-47A6-A57D-EF2E931DA356}"/>
+                <a16:creationId xmlns:a16="http://schemas.microsoft.com/office/drawing/2014/main" id="{0C8F5D56-C83E-479F-B2FF-4BF8DE991DC8}"/>
               </a:ext>
             </a:extLst>
           </p:cNvPr>
@@ -32280,7 +32280,7 @@
           <p:cNvPr id="46" name="">
             <a:extLst xmlns:a="http://schemas.openxmlformats.org/drawingml/2006/main">
               <a:ext uri="{FF2B5EF4-FFF2-40B4-BE49-F238E27FC236}">
-                <a16:creationId xmlns:a16="http://schemas.microsoft.com/office/drawing/2014/main" id="{9D541D9A-8DAB-4B7A-82DA-2222F4B2797E}"/>
+                <a16:creationId xmlns:a16="http://schemas.microsoft.com/office/drawing/2014/main" id="{8BA9B342-FD13-4C6B-B618-961C9F5D44D1}"/>
               </a:ext>
             </a:extLst>
           </p:cNvPr>
@@ -32311,7 +32311,7 @@
           <p:cNvPr id="47" name="">
             <a:extLst xmlns:a="http://schemas.openxmlformats.org/drawingml/2006/main">
               <a:ext uri="{FF2B5EF4-FFF2-40B4-BE49-F238E27FC236}">
-                <a16:creationId xmlns:a16="http://schemas.microsoft.com/office/drawing/2014/main" id="{72B59657-ED43-43B7-B661-2DFC5CF86227}"/>
+                <a16:creationId xmlns:a16="http://schemas.microsoft.com/office/drawing/2014/main" id="{DB10BE7A-75DD-4F11-A6A8-C9011E46E2FA}"/>
               </a:ext>
             </a:extLst>
           </p:cNvPr>
@@ -32363,7 +32363,7 @@
           <p:cNvPr id="48" name="">
             <a:extLst xmlns:a="http://schemas.openxmlformats.org/drawingml/2006/main">
               <a:ext uri="{FF2B5EF4-FFF2-40B4-BE49-F238E27FC236}">
-                <a16:creationId xmlns:a16="http://schemas.microsoft.com/office/drawing/2014/main" id="{E067F3FA-76E5-4F30-BB7E-BAB2FACD411B}"/>
+                <a16:creationId xmlns:a16="http://schemas.microsoft.com/office/drawing/2014/main" id="{CB594B0F-1C25-458B-97E0-B3532FF78861}"/>
               </a:ext>
             </a:extLst>
           </p:cNvPr>
@@ -32396,7 +32396,7 @@
           <p:cNvPr id="49" name="">
             <a:extLst xmlns:a="http://schemas.openxmlformats.org/drawingml/2006/main">
               <a:ext uri="{FF2B5EF4-FFF2-40B4-BE49-F238E27FC236}">
-                <a16:creationId xmlns:a16="http://schemas.microsoft.com/office/drawing/2014/main" id="{3D377F05-71C3-4D3E-B499-01308155981B}"/>
+                <a16:creationId xmlns:a16="http://schemas.microsoft.com/office/drawing/2014/main" id="{2A544325-6E5E-4829-8EBD-5A66C6043DC5}"/>
               </a:ext>
             </a:extLst>
           </p:cNvPr>
@@ -32448,7 +32448,7 @@
           <p:cNvPr id="50" name="">
             <a:extLst xmlns:a="http://schemas.openxmlformats.org/drawingml/2006/main">
               <a:ext uri="{FF2B5EF4-FFF2-40B4-BE49-F238E27FC236}">
-                <a16:creationId xmlns:a16="http://schemas.microsoft.com/office/drawing/2014/main" id="{06D581C4-5E79-493D-BC5C-4618B29C5458}"/>
+                <a16:creationId xmlns:a16="http://schemas.microsoft.com/office/drawing/2014/main" id="{5E05B6CF-97A2-4735-AFE8-21B5605882CC}"/>
               </a:ext>
             </a:extLst>
           </p:cNvPr>
@@ -32500,7 +32500,7 @@
           <p:cNvPr id="51" name="">
             <a:extLst xmlns:a="http://schemas.openxmlformats.org/drawingml/2006/main">
               <a:ext uri="{FF2B5EF4-FFF2-40B4-BE49-F238E27FC236}">
-                <a16:creationId xmlns:a16="http://schemas.microsoft.com/office/drawing/2014/main" id="{7AF8AC36-C647-4437-9893-C0443E3A38E7}"/>
+                <a16:creationId xmlns:a16="http://schemas.microsoft.com/office/drawing/2014/main" id="{FABE1812-B867-42BD-A8FE-ABFF21D16AE9}"/>
               </a:ext>
             </a:extLst>
           </p:cNvPr>
@@ -32552,7 +32552,7 @@
           <p:cNvPr id="52" name="">
             <a:extLst xmlns:a="http://schemas.openxmlformats.org/drawingml/2006/main">
               <a:ext uri="{FF2B5EF4-FFF2-40B4-BE49-F238E27FC236}">
-                <a16:creationId xmlns:a16="http://schemas.microsoft.com/office/drawing/2014/main" id="{0C34E331-1AF7-48C9-A4D3-5A156AAE4E0C}"/>
+                <a16:creationId xmlns:a16="http://schemas.microsoft.com/office/drawing/2014/main" id="{13EB2209-A11B-4952-A701-A5EB18256172}"/>
               </a:ext>
             </a:extLst>
           </p:cNvPr>
@@ -32595,7 +32595,7 @@
           <p:cNvPr id="53" name="">
             <a:extLst xmlns:a="http://schemas.openxmlformats.org/drawingml/2006/main">
               <a:ext uri="{FF2B5EF4-FFF2-40B4-BE49-F238E27FC236}">
-                <a16:creationId xmlns:a16="http://schemas.microsoft.com/office/drawing/2014/main" id="{86D33C78-A25D-4266-A416-D8AA2E4F9555}"/>
+                <a16:creationId xmlns:a16="http://schemas.microsoft.com/office/drawing/2014/main" id="{711617EB-9CCC-48C7-82E6-C9A7AEB68224}"/>
               </a:ext>
             </a:extLst>
           </p:cNvPr>
@@ -32626,7 +32626,7 @@
           <p:cNvPr id="54" name="">
             <a:extLst xmlns:a="http://schemas.openxmlformats.org/drawingml/2006/main">
               <a:ext uri="{FF2B5EF4-FFF2-40B4-BE49-F238E27FC236}">
-                <a16:creationId xmlns:a16="http://schemas.microsoft.com/office/drawing/2014/main" id="{BE910C10-0971-426D-B59C-7009DE5455F0}"/>
+                <a16:creationId xmlns:a16="http://schemas.microsoft.com/office/drawing/2014/main" id="{C0BA0FDB-C940-48D9-802B-5D62A6184BF4}"/>
               </a:ext>
             </a:extLst>
           </p:cNvPr>
@@ -32657,7 +32657,7 @@
           <p:cNvPr id="55" name="">
             <a:extLst xmlns:a="http://schemas.openxmlformats.org/drawingml/2006/main">
               <a:ext uri="{FF2B5EF4-FFF2-40B4-BE49-F238E27FC236}">
-                <a16:creationId xmlns:a16="http://schemas.microsoft.com/office/drawing/2014/main" id="{9894320C-F7B3-4971-8313-F5ED5A77483C}"/>
+                <a16:creationId xmlns:a16="http://schemas.microsoft.com/office/drawing/2014/main" id="{28A20303-6D9C-4036-BAF4-4FA9812AE02C}"/>
               </a:ext>
             </a:extLst>
           </p:cNvPr>
@@ -32709,7 +32709,7 @@
           <p:cNvPr id="56" name="">
             <a:extLst xmlns:a="http://schemas.openxmlformats.org/drawingml/2006/main">
               <a:ext uri="{FF2B5EF4-FFF2-40B4-BE49-F238E27FC236}">
-                <a16:creationId xmlns:a16="http://schemas.microsoft.com/office/drawing/2014/main" id="{BFEB4463-01E2-4F1C-925F-12A07C17E6D0}"/>
+                <a16:creationId xmlns:a16="http://schemas.microsoft.com/office/drawing/2014/main" id="{C228A316-1BE0-4483-B4B0-CB1278626761}"/>
               </a:ext>
             </a:extLst>
           </p:cNvPr>
@@ -32742,7 +32742,7 @@
           <p:cNvPr id="57" name="">
             <a:extLst xmlns:a="http://schemas.openxmlformats.org/drawingml/2006/main">
               <a:ext uri="{FF2B5EF4-FFF2-40B4-BE49-F238E27FC236}">
-                <a16:creationId xmlns:a16="http://schemas.microsoft.com/office/drawing/2014/main" id="{53E17DB4-0760-4D3A-835B-C03B91F9961E}"/>
+                <a16:creationId xmlns:a16="http://schemas.microsoft.com/office/drawing/2014/main" id="{151E1989-1FB0-47A9-ABC9-1ADC262DD3A1}"/>
               </a:ext>
             </a:extLst>
           </p:cNvPr>
@@ -32794,7 +32794,7 @@
           <p:cNvPr id="58" name="">
             <a:extLst xmlns:a="http://schemas.openxmlformats.org/drawingml/2006/main">
               <a:ext uri="{FF2B5EF4-FFF2-40B4-BE49-F238E27FC236}">
-                <a16:creationId xmlns:a16="http://schemas.microsoft.com/office/drawing/2014/main" id="{C671C13A-48F5-4922-A805-E53A867EA84F}"/>
+                <a16:creationId xmlns:a16="http://schemas.microsoft.com/office/drawing/2014/main" id="{F48B9630-49EE-4BED-95C4-A8D48FDE1B3B}"/>
               </a:ext>
             </a:extLst>
           </p:cNvPr>
@@ -32846,7 +32846,7 @@
           <p:cNvPr id="59" name="">
             <a:extLst xmlns:a="http://schemas.openxmlformats.org/drawingml/2006/main">
               <a:ext uri="{FF2B5EF4-FFF2-40B4-BE49-F238E27FC236}">
-                <a16:creationId xmlns:a16="http://schemas.microsoft.com/office/drawing/2014/main" id="{D0FAD623-58D5-4A31-9E3F-5119344A2E67}"/>
+                <a16:creationId xmlns:a16="http://schemas.microsoft.com/office/drawing/2014/main" id="{7C6AE181-3E1C-410C-905E-D561537CF830}"/>
               </a:ext>
             </a:extLst>
           </p:cNvPr>
@@ -32898,7 +32898,7 @@
           <p:cNvPr id="60" name="">
             <a:extLst xmlns:a="http://schemas.openxmlformats.org/drawingml/2006/main">
               <a:ext uri="{FF2B5EF4-FFF2-40B4-BE49-F238E27FC236}">
-                <a16:creationId xmlns:a16="http://schemas.microsoft.com/office/drawing/2014/main" id="{8A73E347-5D6F-456C-B698-C7A0BA5F33C2}"/>
+                <a16:creationId xmlns:a16="http://schemas.microsoft.com/office/drawing/2014/main" id="{83344B37-2F01-4128-A498-D86EB1D7E19A}"/>
               </a:ext>
             </a:extLst>
           </p:cNvPr>
@@ -32941,7 +32941,7 @@
           <p:cNvPr id="61" name="">
             <a:extLst xmlns:a="http://schemas.openxmlformats.org/drawingml/2006/main">
               <a:ext uri="{FF2B5EF4-FFF2-40B4-BE49-F238E27FC236}">
-                <a16:creationId xmlns:a16="http://schemas.microsoft.com/office/drawing/2014/main" id="{825E904E-DF64-4483-804C-8B70202D1A7A}"/>
+                <a16:creationId xmlns:a16="http://schemas.microsoft.com/office/drawing/2014/main" id="{569F0584-FAB6-46A8-BA87-A626CB2710F3}"/>
               </a:ext>
             </a:extLst>
           </p:cNvPr>
@@ -32972,7 +32972,7 @@
           <p:cNvPr id="62" name="">
             <a:extLst xmlns:a="http://schemas.openxmlformats.org/drawingml/2006/main">
               <a:ext uri="{FF2B5EF4-FFF2-40B4-BE49-F238E27FC236}">
-                <a16:creationId xmlns:a16="http://schemas.microsoft.com/office/drawing/2014/main" id="{C6A892BB-D4A3-420E-AF3A-8D90B22256BE}"/>
+                <a16:creationId xmlns:a16="http://schemas.microsoft.com/office/drawing/2014/main" id="{2A819B62-BEC4-45E7-873C-0F5E0990EAED}"/>
               </a:ext>
             </a:extLst>
           </p:cNvPr>
@@ -33003,7 +33003,7 @@
           <p:cNvPr id="63" name="">
             <a:extLst xmlns:a="http://schemas.openxmlformats.org/drawingml/2006/main">
               <a:ext uri="{FF2B5EF4-FFF2-40B4-BE49-F238E27FC236}">
-                <a16:creationId xmlns:a16="http://schemas.microsoft.com/office/drawing/2014/main" id="{5C949579-A800-4502-926E-B1AA2F67CBC0}"/>
+                <a16:creationId xmlns:a16="http://schemas.microsoft.com/office/drawing/2014/main" id="{DB9C9F28-DF79-4A31-A0FA-F7CA6A2599C0}"/>
               </a:ext>
             </a:extLst>
           </p:cNvPr>
@@ -33055,7 +33055,7 @@
           <p:cNvPr id="64" name="">
             <a:extLst xmlns:a="http://schemas.openxmlformats.org/drawingml/2006/main">
               <a:ext uri="{FF2B5EF4-FFF2-40B4-BE49-F238E27FC236}">
-                <a16:creationId xmlns:a16="http://schemas.microsoft.com/office/drawing/2014/main" id="{0C45FFBA-C9B3-4E54-8646-F516FE802651}"/>
+                <a16:creationId xmlns:a16="http://schemas.microsoft.com/office/drawing/2014/main" id="{BE35294E-2301-4FC2-A2D2-202A60BA43E4}"/>
               </a:ext>
             </a:extLst>
           </p:cNvPr>
@@ -33088,7 +33088,7 @@
           <p:cNvPr id="65" name="">
             <a:extLst xmlns:a="http://schemas.openxmlformats.org/drawingml/2006/main">
               <a:ext uri="{FF2B5EF4-FFF2-40B4-BE49-F238E27FC236}">
-                <a16:creationId xmlns:a16="http://schemas.microsoft.com/office/drawing/2014/main" id="{9228B36B-05D6-4EED-80F7-CD0BF9A48C40}"/>
+                <a16:creationId xmlns:a16="http://schemas.microsoft.com/office/drawing/2014/main" id="{9B5E61BD-D108-4E74-9A8E-DE2D98E0B361}"/>
               </a:ext>
             </a:extLst>
           </p:cNvPr>
@@ -33140,7 +33140,7 @@
           <p:cNvPr id="66" name="">
             <a:extLst xmlns:a="http://schemas.openxmlformats.org/drawingml/2006/main">
               <a:ext uri="{FF2B5EF4-FFF2-40B4-BE49-F238E27FC236}">
-                <a16:creationId xmlns:a16="http://schemas.microsoft.com/office/drawing/2014/main" id="{5838F40A-02E5-42DA-9B32-D6ED057FB435}"/>
+                <a16:creationId xmlns:a16="http://schemas.microsoft.com/office/drawing/2014/main" id="{D8B05DC0-AE31-4721-911F-A87646ACB917}"/>
               </a:ext>
             </a:extLst>
           </p:cNvPr>
@@ -33192,7 +33192,7 @@
           <p:cNvPr id="67" name="">
             <a:extLst xmlns:a="http://schemas.openxmlformats.org/drawingml/2006/main">
               <a:ext uri="{FF2B5EF4-FFF2-40B4-BE49-F238E27FC236}">
-                <a16:creationId xmlns:a16="http://schemas.microsoft.com/office/drawing/2014/main" id="{D28052FE-F7B5-42CF-98F0-187693CE6BCB}"/>
+                <a16:creationId xmlns:a16="http://schemas.microsoft.com/office/drawing/2014/main" id="{E3164A76-E9B3-4A63-9778-857D971E9EB6}"/>
               </a:ext>
             </a:extLst>
           </p:cNvPr>
@@ -33244,7 +33244,7 @@
           <p:cNvPr id="68" name="">
             <a:extLst xmlns:a="http://schemas.openxmlformats.org/drawingml/2006/main">
               <a:ext uri="{FF2B5EF4-FFF2-40B4-BE49-F238E27FC236}">
-                <a16:creationId xmlns:a16="http://schemas.microsoft.com/office/drawing/2014/main" id="{C16EB373-19E6-43BC-BA0C-C42D22392571}"/>
+                <a16:creationId xmlns:a16="http://schemas.microsoft.com/office/drawing/2014/main" id="{EABE1D40-E912-468B-9F91-E0F391A6EE2E}"/>
               </a:ext>
             </a:extLst>
           </p:cNvPr>
@@ -33287,7 +33287,7 @@
           <p:cNvPr id="69" name="">
             <a:extLst xmlns:a="http://schemas.openxmlformats.org/drawingml/2006/main">
               <a:ext uri="{FF2B5EF4-FFF2-40B4-BE49-F238E27FC236}">
-                <a16:creationId xmlns:a16="http://schemas.microsoft.com/office/drawing/2014/main" id="{630414ED-76A7-4F49-BD65-A9BCC75206C5}"/>
+                <a16:creationId xmlns:a16="http://schemas.microsoft.com/office/drawing/2014/main" id="{670226D4-E301-403A-914B-B6DDA2A091AB}"/>
               </a:ext>
             </a:extLst>
           </p:cNvPr>
@@ -33318,7 +33318,7 @@
           <p:cNvPr id="70" name="">
             <a:extLst xmlns:a="http://schemas.openxmlformats.org/drawingml/2006/main">
               <a:ext uri="{FF2B5EF4-FFF2-40B4-BE49-F238E27FC236}">
-                <a16:creationId xmlns:a16="http://schemas.microsoft.com/office/drawing/2014/main" id="{03702C94-7420-4CB7-BAB1-397B093FAB4D}"/>
+                <a16:creationId xmlns:a16="http://schemas.microsoft.com/office/drawing/2014/main" id="{2AFB7A2C-3E66-48B1-981F-971A7A1E16D5}"/>
               </a:ext>
             </a:extLst>
           </p:cNvPr>
@@ -33349,7 +33349,7 @@
           <p:cNvPr id="71" name="">
             <a:extLst xmlns:a="http://schemas.openxmlformats.org/drawingml/2006/main">
               <a:ext uri="{FF2B5EF4-FFF2-40B4-BE49-F238E27FC236}">
-                <a16:creationId xmlns:a16="http://schemas.microsoft.com/office/drawing/2014/main" id="{7B2B6640-48F6-48C5-BE05-6ADA8DF63E8F}"/>
+                <a16:creationId xmlns:a16="http://schemas.microsoft.com/office/drawing/2014/main" id="{94971FD1-40CF-4DF4-8164-F0AF7D9DF51B}"/>
               </a:ext>
             </a:extLst>
           </p:cNvPr>
@@ -33401,7 +33401,7 @@
           <p:cNvPr id="72" name="">
             <a:extLst xmlns:a="http://schemas.openxmlformats.org/drawingml/2006/main">
               <a:ext uri="{FF2B5EF4-FFF2-40B4-BE49-F238E27FC236}">
-                <a16:creationId xmlns:a16="http://schemas.microsoft.com/office/drawing/2014/main" id="{FDC17353-EAEC-4F87-95FE-C6186CF6D4D0}"/>
+                <a16:creationId xmlns:a16="http://schemas.microsoft.com/office/drawing/2014/main" id="{B01C077C-EC9E-4CA0-90C1-F62A88106F69}"/>
               </a:ext>
             </a:extLst>
           </p:cNvPr>
@@ -33434,7 +33434,7 @@
           <p:cNvPr id="73" name="">
             <a:extLst xmlns:a="http://schemas.openxmlformats.org/drawingml/2006/main">
               <a:ext uri="{FF2B5EF4-FFF2-40B4-BE49-F238E27FC236}">
-                <a16:creationId xmlns:a16="http://schemas.microsoft.com/office/drawing/2014/main" id="{96310EC5-BD72-459E-A610-4FFCC770C3E4}"/>
+                <a16:creationId xmlns:a16="http://schemas.microsoft.com/office/drawing/2014/main" id="{984A0698-F5A6-4F4D-9CD8-1BDD2D56B628}"/>
               </a:ext>
             </a:extLst>
           </p:cNvPr>
@@ -33486,7 +33486,7 @@
           <p:cNvPr id="74" name="">
             <a:extLst xmlns:a="http://schemas.openxmlformats.org/drawingml/2006/main">
               <a:ext uri="{FF2B5EF4-FFF2-40B4-BE49-F238E27FC236}">
-                <a16:creationId xmlns:a16="http://schemas.microsoft.com/office/drawing/2014/main" id="{B435D935-36A9-410D-9FFC-F2FEE3E0019B}"/>
+                <a16:creationId xmlns:a16="http://schemas.microsoft.com/office/drawing/2014/main" id="{BB770F91-948E-420A-A369-04FB8A37778B}"/>
               </a:ext>
             </a:extLst>
           </p:cNvPr>
@@ -33538,7 +33538,7 @@
           <p:cNvPr id="75" name="">
             <a:extLst xmlns:a="http://schemas.openxmlformats.org/drawingml/2006/main">
               <a:ext uri="{FF2B5EF4-FFF2-40B4-BE49-F238E27FC236}">
-                <a16:creationId xmlns:a16="http://schemas.microsoft.com/office/drawing/2014/main" id="{E4E549D5-071A-4437-8C7D-7A109ACCF168}"/>
+                <a16:creationId xmlns:a16="http://schemas.microsoft.com/office/drawing/2014/main" id="{98CBFB75-A12A-40AB-BF13-5B479FB2AE72}"/>
               </a:ext>
             </a:extLst>
           </p:cNvPr>
@@ -33588,7 +33588,7 @@
     </p:spTree>
     <p:extLst>
       <p:ext uri="{BB962C8B-B14F-4D97-AF65-F5344CB8AC3E}">
-        <p14:creationId xmlns:p14="http://schemas.microsoft.com/office/powerpoint/2010/main" val="2135409277"/>
+        <p14:creationId xmlns:p14="http://schemas.microsoft.com/office/powerpoint/2010/main" val="617968917"/>
       </p:ext>
     </p:extLst>
   </p:cSld>
@@ -33619,7 +33619,7 @@
           <p:cNvPr id="30" name="">
             <a:extLst xmlns:a="http://schemas.openxmlformats.org/drawingml/2006/main">
               <a:ext uri="{FF2B5EF4-FFF2-40B4-BE49-F238E27FC236}">
-                <a16:creationId xmlns:a16="http://schemas.microsoft.com/office/drawing/2014/main" id="{8BA3AB62-0705-4E99-8072-72F2BC2AEACA}"/>
+                <a16:creationId xmlns:a16="http://schemas.microsoft.com/office/drawing/2014/main" id="{3DED039D-69B9-4A6A-8692-80932D228A28}"/>
               </a:ext>
             </a:extLst>
           </p:cNvPr>
@@ -33652,7 +33652,7 @@
           <p:cNvPr id="2" name="">
             <a:extLst xmlns:a="http://schemas.openxmlformats.org/drawingml/2006/main">
               <a:ext uri="{FF2B5EF4-FFF2-40B4-BE49-F238E27FC236}">
-                <a16:creationId xmlns:a16="http://schemas.microsoft.com/office/drawing/2014/main" id="{76D0D742-1AF0-44C6-A8B4-81DBDE7BECD2}"/>
+                <a16:creationId xmlns:a16="http://schemas.microsoft.com/office/drawing/2014/main" id="{DCB0D578-7A54-418E-BD1A-A434FAECD5F7}"/>
               </a:ext>
             </a:extLst>
           </p:cNvPr>
@@ -33683,7 +33683,7 @@
           <p:cNvPr id="3" name="">
             <a:extLst xmlns:a="http://schemas.openxmlformats.org/drawingml/2006/main">
               <a:ext uri="{FF2B5EF4-FFF2-40B4-BE49-F238E27FC236}">
-                <a16:creationId xmlns:a16="http://schemas.microsoft.com/office/drawing/2014/main" id="{110BBC38-3641-4853-8FD2-A9ECA39DB4AE}"/>
+                <a16:creationId xmlns:a16="http://schemas.microsoft.com/office/drawing/2014/main" id="{D99FDFBF-2912-44BA-91C1-F143FFA26125}"/>
               </a:ext>
             </a:extLst>
           </p:cNvPr>
@@ -33735,7 +33735,7 @@
           <p:cNvPr id="4" name="">
             <a:extLst xmlns:a="http://schemas.openxmlformats.org/drawingml/2006/main">
               <a:ext uri="{FF2B5EF4-FFF2-40B4-BE49-F238E27FC236}">
-                <a16:creationId xmlns:a16="http://schemas.microsoft.com/office/drawing/2014/main" id="{129E8061-AF4C-48D5-BFA5-84FAF113E013}"/>
+                <a16:creationId xmlns:a16="http://schemas.microsoft.com/office/drawing/2014/main" id="{C0890A39-6105-490E-9FA8-CCA4921CB069}"/>
               </a:ext>
             </a:extLst>
           </p:cNvPr>
@@ -33787,7 +33787,7 @@
           <p:cNvPr id="5" name="">
             <a:extLst xmlns:a="http://schemas.openxmlformats.org/drawingml/2006/main">
               <a:ext uri="{FF2B5EF4-FFF2-40B4-BE49-F238E27FC236}">
-                <a16:creationId xmlns:a16="http://schemas.microsoft.com/office/drawing/2014/main" id="{9B35CA8A-E8A9-49B1-84CC-F5E55161BA6D}"/>
+                <a16:creationId xmlns:a16="http://schemas.microsoft.com/office/drawing/2014/main" id="{48160C51-DF27-4BB1-9B9E-D6A8968BA082}"/>
               </a:ext>
             </a:extLst>
           </p:cNvPr>
@@ -33822,7 +33822,7 @@
           <p:nvPr/>
         </p:nvPicPr>
         <p:blipFill>
-          <a:blip xmlns:r="http://schemas.openxmlformats.org/officeDocument/2006/relationships" xmlns:a="http://schemas.openxmlformats.org/drawingml/2006/main" r:embed="Rf5f4bc448f254a7f"/>
+          <a:blip xmlns:r="http://schemas.openxmlformats.org/officeDocument/2006/relationships" xmlns:a="http://schemas.openxmlformats.org/drawingml/2006/main" r:embed="Rda511d886a1b465d"/>
           <a:stretch xmlns:a="http://schemas.openxmlformats.org/drawingml/2006/main"/>
         </p:blipFill>
         <p:spPr>
@@ -33840,7 +33840,7 @@
           <p:cNvPr id="7" name="">
             <a:extLst xmlns:a="http://schemas.openxmlformats.org/drawingml/2006/main">
               <a:ext uri="{FF2B5EF4-FFF2-40B4-BE49-F238E27FC236}">
-                <a16:creationId xmlns:a16="http://schemas.microsoft.com/office/drawing/2014/main" id="{FA889DB0-4DFB-46BF-AD87-2FFE82017A05}"/>
+                <a16:creationId xmlns:a16="http://schemas.microsoft.com/office/drawing/2014/main" id="{42797F8C-D58D-41BF-871D-B3ECC2F17CF4}"/>
               </a:ext>
             </a:extLst>
           </p:cNvPr>
@@ -33892,7 +33892,7 @@
           <p:cNvPr id="8" name="">
             <a:extLst xmlns:a="http://schemas.openxmlformats.org/drawingml/2006/main">
               <a:ext uri="{FF2B5EF4-FFF2-40B4-BE49-F238E27FC236}">
-                <a16:creationId xmlns:a16="http://schemas.microsoft.com/office/drawing/2014/main" id="{C7D49C4C-7C7D-4621-9BBD-CEAE7C8474EE}"/>
+                <a16:creationId xmlns:a16="http://schemas.microsoft.com/office/drawing/2014/main" id="{C0E908F7-A404-4F96-A131-30DDA6CB9AC3}"/>
               </a:ext>
             </a:extLst>
           </p:cNvPr>
@@ -33944,7 +33944,7 @@
           <p:cNvPr id="9" name="">
             <a:extLst xmlns:a="http://schemas.openxmlformats.org/drawingml/2006/main">
               <a:ext uri="{FF2B5EF4-FFF2-40B4-BE49-F238E27FC236}">
-                <a16:creationId xmlns:a16="http://schemas.microsoft.com/office/drawing/2014/main" id="{D3A62822-536B-46F9-B60B-63430A5C437C}"/>
+                <a16:creationId xmlns:a16="http://schemas.microsoft.com/office/drawing/2014/main" id="{C287C4C8-23B4-4BA3-9B32-CB5847B73D3E}"/>
               </a:ext>
             </a:extLst>
           </p:cNvPr>
@@ -33996,7 +33996,7 @@
           <p:cNvPr id="10" name="">
             <a:extLst xmlns:a="http://schemas.openxmlformats.org/drawingml/2006/main">
               <a:ext uri="{FF2B5EF4-FFF2-40B4-BE49-F238E27FC236}">
-                <a16:creationId xmlns:a16="http://schemas.microsoft.com/office/drawing/2014/main" id="{621020E9-A1C1-4AAC-88EC-02BD966D6095}"/>
+                <a16:creationId xmlns:a16="http://schemas.microsoft.com/office/drawing/2014/main" id="{AC0C365E-8142-417F-82B8-8C4E2357B77B}"/>
               </a:ext>
             </a:extLst>
           </p:cNvPr>
@@ -34048,7 +34048,7 @@
           <p:cNvPr id="11" name="">
             <a:extLst xmlns:a="http://schemas.openxmlformats.org/drawingml/2006/main">
               <a:ext uri="{FF2B5EF4-FFF2-40B4-BE49-F238E27FC236}">
-                <a16:creationId xmlns:a16="http://schemas.microsoft.com/office/drawing/2014/main" id="{19DC6586-B471-477C-B6C0-AE97712B5243}"/>
+                <a16:creationId xmlns:a16="http://schemas.microsoft.com/office/drawing/2014/main" id="{A19340DB-DDA4-4927-8DEC-2E2ADCF5E261}"/>
               </a:ext>
             </a:extLst>
           </p:cNvPr>
@@ -34095,10 +34095,10 @@
           <p:nvPr/>
         </p:nvPicPr>
         <p:blipFill>
-          <a:blip xmlns:r="http://schemas.openxmlformats.org/officeDocument/2006/relationships" xmlns:a="http://schemas.openxmlformats.org/drawingml/2006/main" r:embed="R992e65de31c74152">
+          <a:blip xmlns:r="http://schemas.openxmlformats.org/officeDocument/2006/relationships" xmlns:a="http://schemas.openxmlformats.org/drawingml/2006/main" r:embed="Ra386ed559128453f">
             <a:extLst>
               <a:ext uri="{96DAC541-7B7A-43D3-8B79-37D633B846F1}">
-                <asvg:svgBlip xmlns:asvg="http://schemas.microsoft.com/office/drawing/2016/SVG/main" r:embed="R73f23882afbe436e"/>
+                <asvg:svgBlip xmlns:asvg="http://schemas.microsoft.com/office/drawing/2016/SVG/main" r:embed="R1470b50602b54a26"/>
               </a:ext>
             </a:extLst>
           </a:blip>
@@ -34119,7 +34119,7 @@
           <p:cNvPr id="13" name="">
             <a:extLst xmlns:a="http://schemas.openxmlformats.org/drawingml/2006/main">
               <a:ext uri="{FF2B5EF4-FFF2-40B4-BE49-F238E27FC236}">
-                <a16:creationId xmlns:a16="http://schemas.microsoft.com/office/drawing/2014/main" id="{8DB743DD-1628-48FF-A476-398F3E4F7225}"/>
+                <a16:creationId xmlns:a16="http://schemas.microsoft.com/office/drawing/2014/main" id="{5C1BDA8E-F152-4B5C-B605-A88FCCF5BE1F}"/>
               </a:ext>
             </a:extLst>
           </p:cNvPr>
@@ -34152,7 +34152,7 @@
           <p:cNvPr id="14" name="">
             <a:extLst xmlns:a="http://schemas.openxmlformats.org/drawingml/2006/main">
               <a:ext uri="{FF2B5EF4-FFF2-40B4-BE49-F238E27FC236}">
-                <a16:creationId xmlns:a16="http://schemas.microsoft.com/office/drawing/2014/main" id="{382C6AAA-A675-4057-A8F5-FE066B992BBF}"/>
+                <a16:creationId xmlns:a16="http://schemas.microsoft.com/office/drawing/2014/main" id="{56D024C8-E70F-4650-81ED-6BBD8044FDF3}"/>
               </a:ext>
             </a:extLst>
           </p:cNvPr>
@@ -34204,7 +34204,7 @@
           <p:cNvPr id="15" name="">
             <a:extLst xmlns:a="http://schemas.openxmlformats.org/drawingml/2006/main">
               <a:ext uri="{FF2B5EF4-FFF2-40B4-BE49-F238E27FC236}">
-                <a16:creationId xmlns:a16="http://schemas.microsoft.com/office/drawing/2014/main" id="{F58D73DE-DB49-4255-BBBD-C5A307A8A8AA}"/>
+                <a16:creationId xmlns:a16="http://schemas.microsoft.com/office/drawing/2014/main" id="{9C8D48E2-FE2D-4B32-BB3D-859F3E71E822}"/>
               </a:ext>
             </a:extLst>
           </p:cNvPr>
@@ -34237,7 +34237,7 @@
           <p:cNvPr id="16" name="">
             <a:extLst xmlns:a="http://schemas.openxmlformats.org/drawingml/2006/main">
               <a:ext uri="{FF2B5EF4-FFF2-40B4-BE49-F238E27FC236}">
-                <a16:creationId xmlns:a16="http://schemas.microsoft.com/office/drawing/2014/main" id="{B148FCAD-B25D-4BA0-983D-6E868DFE829B}"/>
+                <a16:creationId xmlns:a16="http://schemas.microsoft.com/office/drawing/2014/main" id="{3FA83D58-7FAF-4943-834B-DF80E1577BA6}"/>
               </a:ext>
             </a:extLst>
           </p:cNvPr>
@@ -34289,7 +34289,7 @@
           <p:cNvPr id="17" name="">
             <a:extLst xmlns:a="http://schemas.openxmlformats.org/drawingml/2006/main">
               <a:ext uri="{FF2B5EF4-FFF2-40B4-BE49-F238E27FC236}">
-                <a16:creationId xmlns:a16="http://schemas.microsoft.com/office/drawing/2014/main" id="{E02A3495-8E4A-4E63-8A89-A95B8AE13B21}"/>
+                <a16:creationId xmlns:a16="http://schemas.microsoft.com/office/drawing/2014/main" id="{B1B62867-2068-44C6-ADAC-EBE6528311D1}"/>
               </a:ext>
             </a:extLst>
           </p:cNvPr>
@@ -34322,7 +34322,7 @@
           <p:cNvPr id="18" name="">
             <a:extLst xmlns:a="http://schemas.openxmlformats.org/drawingml/2006/main">
               <a:ext uri="{FF2B5EF4-FFF2-40B4-BE49-F238E27FC236}">
-                <a16:creationId xmlns:a16="http://schemas.microsoft.com/office/drawing/2014/main" id="{EBCA8AFB-74B5-4296-8267-1B282CF742F9}"/>
+                <a16:creationId xmlns:a16="http://schemas.microsoft.com/office/drawing/2014/main" id="{6C93FE4A-DE3E-4FB6-9447-4E0DC7767885}"/>
               </a:ext>
             </a:extLst>
           </p:cNvPr>
@@ -34374,7 +34374,7 @@
           <p:cNvPr id="19" name="">
             <a:extLst xmlns:a="http://schemas.openxmlformats.org/drawingml/2006/main">
               <a:ext uri="{FF2B5EF4-FFF2-40B4-BE49-F238E27FC236}">
-                <a16:creationId xmlns:a16="http://schemas.microsoft.com/office/drawing/2014/main" id="{3062F924-0CBC-44F1-B736-5FC42EBC4057}"/>
+                <a16:creationId xmlns:a16="http://schemas.microsoft.com/office/drawing/2014/main" id="{5B6006EC-0D6E-42EA-888F-38F70BDEE27D}"/>
               </a:ext>
             </a:extLst>
           </p:cNvPr>
@@ -34407,7 +34407,7 @@
           <p:cNvPr id="20" name="">
             <a:extLst xmlns:a="http://schemas.openxmlformats.org/drawingml/2006/main">
               <a:ext uri="{FF2B5EF4-FFF2-40B4-BE49-F238E27FC236}">
-                <a16:creationId xmlns:a16="http://schemas.microsoft.com/office/drawing/2014/main" id="{58C17B3B-3169-4D0B-BDA0-BBF7DFEF53F7}"/>
+                <a16:creationId xmlns:a16="http://schemas.microsoft.com/office/drawing/2014/main" id="{016EA7E7-F7D7-40A0-9528-0B0197989DF8}"/>
               </a:ext>
             </a:extLst>
           </p:cNvPr>
@@ -34459,7 +34459,7 @@
           <p:cNvPr id="21" name="">
             <a:extLst xmlns:a="http://schemas.openxmlformats.org/drawingml/2006/main">
               <a:ext uri="{FF2B5EF4-FFF2-40B4-BE49-F238E27FC236}">
-                <a16:creationId xmlns:a16="http://schemas.microsoft.com/office/drawing/2014/main" id="{5749D086-E8DB-4620-A082-AE64949C265F}"/>
+                <a16:creationId xmlns:a16="http://schemas.microsoft.com/office/drawing/2014/main" id="{69F54CBB-4495-45C9-8C7A-1BFE93C026C2}"/>
               </a:ext>
             </a:extLst>
           </p:cNvPr>
@@ -34490,7 +34490,7 @@
           <p:cNvPr id="22" name="">
             <a:extLst xmlns:a="http://schemas.openxmlformats.org/drawingml/2006/main">
               <a:ext uri="{FF2B5EF4-FFF2-40B4-BE49-F238E27FC236}">
-                <a16:creationId xmlns:a16="http://schemas.microsoft.com/office/drawing/2014/main" id="{8A16DE7E-9AFD-4D48-B334-037991E27A36}"/>
+                <a16:creationId xmlns:a16="http://schemas.microsoft.com/office/drawing/2014/main" id="{86F33814-F574-44D4-B7B3-4E5423B97E9A}"/>
               </a:ext>
             </a:extLst>
           </p:cNvPr>
@@ -34542,7 +34542,7 @@
           <p:cNvPr id="23" name="">
             <a:extLst xmlns:a="http://schemas.openxmlformats.org/drawingml/2006/main">
               <a:ext uri="{FF2B5EF4-FFF2-40B4-BE49-F238E27FC236}">
-                <a16:creationId xmlns:a16="http://schemas.microsoft.com/office/drawing/2014/main" id="{237AC74B-D107-4339-9FDF-2F9CC30F66FB}"/>
+                <a16:creationId xmlns:a16="http://schemas.microsoft.com/office/drawing/2014/main" id="{8E0B1359-E0B0-4EAE-AC41-580541213257}"/>
               </a:ext>
             </a:extLst>
           </p:cNvPr>
@@ -34594,7 +34594,7 @@
           <p:cNvPr id="24" name="">
             <a:extLst xmlns:a="http://schemas.openxmlformats.org/drawingml/2006/main">
               <a:ext uri="{FF2B5EF4-FFF2-40B4-BE49-F238E27FC236}">
-                <a16:creationId xmlns:a16="http://schemas.microsoft.com/office/drawing/2014/main" id="{686520D9-2210-46FF-8C04-515C282B6AA7}"/>
+                <a16:creationId xmlns:a16="http://schemas.microsoft.com/office/drawing/2014/main" id="{57681D2D-43A6-4E5D-805C-4B3D60852543}"/>
               </a:ext>
             </a:extLst>
           </p:cNvPr>
@@ -34646,7 +34646,7 @@
           <p:cNvPr id="25" name="">
             <a:extLst xmlns:a="http://schemas.openxmlformats.org/drawingml/2006/main">
               <a:ext uri="{FF2B5EF4-FFF2-40B4-BE49-F238E27FC236}">
-                <a16:creationId xmlns:a16="http://schemas.microsoft.com/office/drawing/2014/main" id="{C03184F6-8766-4890-AA7F-6C05CC8D3EDB}"/>
+                <a16:creationId xmlns:a16="http://schemas.microsoft.com/office/drawing/2014/main" id="{575B7F83-8973-433E-BF87-4F420768C03B}"/>
               </a:ext>
             </a:extLst>
           </p:cNvPr>
@@ -34698,7 +34698,7 @@
           <p:cNvPr id="26" name="">
             <a:extLst xmlns:a="http://schemas.openxmlformats.org/drawingml/2006/main">
               <a:ext uri="{FF2B5EF4-FFF2-40B4-BE49-F238E27FC236}">
-                <a16:creationId xmlns:a16="http://schemas.microsoft.com/office/drawing/2014/main" id="{C87D464A-F0AA-4019-AF73-81444115ED17}"/>
+                <a16:creationId xmlns:a16="http://schemas.microsoft.com/office/drawing/2014/main" id="{7B06507A-F4A6-48A8-8327-B95ACFC58C22}"/>
               </a:ext>
             </a:extLst>
           </p:cNvPr>
@@ -34750,7 +34750,7 @@
           <p:cNvPr id="27" name="">
             <a:extLst xmlns:a="http://schemas.openxmlformats.org/drawingml/2006/main">
               <a:ext uri="{FF2B5EF4-FFF2-40B4-BE49-F238E27FC236}">
-                <a16:creationId xmlns:a16="http://schemas.microsoft.com/office/drawing/2014/main" id="{38A737C0-8361-45FD-9AEE-1DF4EEF617B3}"/>
+                <a16:creationId xmlns:a16="http://schemas.microsoft.com/office/drawing/2014/main" id="{FCA7E8D3-4781-410D-A4DF-D1CA05254D70}"/>
               </a:ext>
             </a:extLst>
           </p:cNvPr>
@@ -34802,7 +34802,7 @@
           <p:cNvPr id="28" name="">
             <a:extLst xmlns:a="http://schemas.openxmlformats.org/drawingml/2006/main">
               <a:ext uri="{FF2B5EF4-FFF2-40B4-BE49-F238E27FC236}">
-                <a16:creationId xmlns:a16="http://schemas.microsoft.com/office/drawing/2014/main" id="{A24DB8CE-D2DD-4EF4-8BD1-FC584221446D}"/>
+                <a16:creationId xmlns:a16="http://schemas.microsoft.com/office/drawing/2014/main" id="{E1B13F97-A3CA-4FE5-9F38-0C5DE6912B27}"/>
               </a:ext>
             </a:extLst>
           </p:cNvPr>
@@ -34854,7 +34854,7 @@
           <p:cNvPr id="29" name="">
             <a:extLst xmlns:a="http://schemas.openxmlformats.org/drawingml/2006/main">
               <a:ext uri="{FF2B5EF4-FFF2-40B4-BE49-F238E27FC236}">
-                <a16:creationId xmlns:a16="http://schemas.microsoft.com/office/drawing/2014/main" id="{A4012032-B73D-4543-ABA9-2F9A28169CB4}"/>
+                <a16:creationId xmlns:a16="http://schemas.microsoft.com/office/drawing/2014/main" id="{240F806F-0786-43D3-ABF7-832A22C06DBE}"/>
               </a:ext>
             </a:extLst>
           </p:cNvPr>
@@ -34904,7 +34904,7 @@
     </p:spTree>
     <p:extLst>
       <p:ext uri="{BB962C8B-B14F-4D97-AF65-F5344CB8AC3E}">
-        <p14:creationId xmlns:p14="http://schemas.microsoft.com/office/powerpoint/2010/main" val="406669088"/>
+        <p14:creationId xmlns:p14="http://schemas.microsoft.com/office/powerpoint/2010/main" val="1522587229"/>
       </p:ext>
     </p:extLst>
   </p:cSld>
@@ -34935,7 +34935,7 @@
           <p:cNvPr id="33" name="">
             <a:extLst xmlns:a="http://schemas.openxmlformats.org/drawingml/2006/main">
               <a:ext uri="{FF2B5EF4-FFF2-40B4-BE49-F238E27FC236}">
-                <a16:creationId xmlns:a16="http://schemas.microsoft.com/office/drawing/2014/main" id="{F3717534-49C1-4026-9349-C377437C8378}"/>
+                <a16:creationId xmlns:a16="http://schemas.microsoft.com/office/drawing/2014/main" id="{EE4FA42F-CFA9-4E5E-B7A4-C25010E9FD26}"/>
               </a:ext>
             </a:extLst>
           </p:cNvPr>
@@ -34968,7 +34968,7 @@
           <p:cNvPr id="2" name="">
             <a:extLst xmlns:a="http://schemas.openxmlformats.org/drawingml/2006/main">
               <a:ext uri="{FF2B5EF4-FFF2-40B4-BE49-F238E27FC236}">
-                <a16:creationId xmlns:a16="http://schemas.microsoft.com/office/drawing/2014/main" id="{5CC977B7-0B59-42C6-B31F-BC801864E479}"/>
+                <a16:creationId xmlns:a16="http://schemas.microsoft.com/office/drawing/2014/main" id="{DE5FD949-8495-4E2C-96D2-C14D399CE3BE}"/>
               </a:ext>
             </a:extLst>
           </p:cNvPr>
@@ -34999,7 +34999,7 @@
           <p:cNvPr id="3" name="">
             <a:extLst xmlns:a="http://schemas.openxmlformats.org/drawingml/2006/main">
               <a:ext uri="{FF2B5EF4-FFF2-40B4-BE49-F238E27FC236}">
-                <a16:creationId xmlns:a16="http://schemas.microsoft.com/office/drawing/2014/main" id="{8026845C-965A-475E-96EB-386E649ABC75}"/>
+                <a16:creationId xmlns:a16="http://schemas.microsoft.com/office/drawing/2014/main" id="{362E8436-E0E2-4141-A07A-48607C044BA8}"/>
               </a:ext>
             </a:extLst>
           </p:cNvPr>
@@ -35051,7 +35051,7 @@
           <p:cNvPr id="4" name="">
             <a:extLst xmlns:a="http://schemas.openxmlformats.org/drawingml/2006/main">
               <a:ext uri="{FF2B5EF4-FFF2-40B4-BE49-F238E27FC236}">
-                <a16:creationId xmlns:a16="http://schemas.microsoft.com/office/drawing/2014/main" id="{B69469F0-24A4-46BF-B9A5-402676EEAE1D}"/>
+                <a16:creationId xmlns:a16="http://schemas.microsoft.com/office/drawing/2014/main" id="{ECCA1126-D123-4EBB-BFD5-4C4085F6C34B}"/>
               </a:ext>
             </a:extLst>
           </p:cNvPr>
@@ -35103,7 +35103,7 @@
           <p:cNvPr id="5" name="">
             <a:extLst xmlns:a="http://schemas.openxmlformats.org/drawingml/2006/main">
               <a:ext uri="{FF2B5EF4-FFF2-40B4-BE49-F238E27FC236}">
-                <a16:creationId xmlns:a16="http://schemas.microsoft.com/office/drawing/2014/main" id="{689C7BA2-C272-4CCF-B826-E036D7DB532D}"/>
+                <a16:creationId xmlns:a16="http://schemas.microsoft.com/office/drawing/2014/main" id="{437BA32E-CB86-4EF3-B531-58C5B922AC20}"/>
               </a:ext>
             </a:extLst>
           </p:cNvPr>
@@ -35138,7 +35138,7 @@
           <p:nvPr/>
         </p:nvPicPr>
         <p:blipFill>
-          <a:blip xmlns:r="http://schemas.openxmlformats.org/officeDocument/2006/relationships" xmlns:a="http://schemas.openxmlformats.org/drawingml/2006/main" r:embed="Rcdddd871ae844271"/>
+          <a:blip xmlns:r="http://schemas.openxmlformats.org/officeDocument/2006/relationships" xmlns:a="http://schemas.openxmlformats.org/drawingml/2006/main" r:embed="Race923ee43914ac1"/>
           <a:stretch xmlns:a="http://schemas.openxmlformats.org/drawingml/2006/main"/>
         </p:blipFill>
         <p:spPr>
@@ -35156,7 +35156,7 @@
           <p:cNvPr id="7" name="">
             <a:extLst xmlns:a="http://schemas.openxmlformats.org/drawingml/2006/main">
               <a:ext uri="{FF2B5EF4-FFF2-40B4-BE49-F238E27FC236}">
-                <a16:creationId xmlns:a16="http://schemas.microsoft.com/office/drawing/2014/main" id="{729EBD1A-2D46-45C6-9A66-95EFC06DB621}"/>
+                <a16:creationId xmlns:a16="http://schemas.microsoft.com/office/drawing/2014/main" id="{1380CC24-D0B9-4B3C-9756-9E29D7EEC673}"/>
               </a:ext>
             </a:extLst>
           </p:cNvPr>
@@ -35208,7 +35208,7 @@
           <p:cNvPr id="8" name="">
             <a:extLst xmlns:a="http://schemas.openxmlformats.org/drawingml/2006/main">
               <a:ext uri="{FF2B5EF4-FFF2-40B4-BE49-F238E27FC236}">
-                <a16:creationId xmlns:a16="http://schemas.microsoft.com/office/drawing/2014/main" id="{6C2D2E9A-523F-4460-98CF-A48084534FF2}"/>
+                <a16:creationId xmlns:a16="http://schemas.microsoft.com/office/drawing/2014/main" id="{16546AB7-6D48-4E2C-B179-FC5B2D7DFB4E}"/>
               </a:ext>
             </a:extLst>
           </p:cNvPr>
@@ -35260,7 +35260,7 @@
           <p:cNvPr id="9" name="">
             <a:extLst xmlns:a="http://schemas.openxmlformats.org/drawingml/2006/main">
               <a:ext uri="{FF2B5EF4-FFF2-40B4-BE49-F238E27FC236}">
-                <a16:creationId xmlns:a16="http://schemas.microsoft.com/office/drawing/2014/main" id="{462BFC49-E6C7-4BCE-9CDC-4F718BAFE6CE}"/>
+                <a16:creationId xmlns:a16="http://schemas.microsoft.com/office/drawing/2014/main" id="{086C83D7-59C8-41BE-88E7-1D4C9ABA3EEB}"/>
               </a:ext>
             </a:extLst>
           </p:cNvPr>
@@ -35312,7 +35312,7 @@
           <p:cNvPr id="10" name="">
             <a:extLst xmlns:a="http://schemas.openxmlformats.org/drawingml/2006/main">
               <a:ext uri="{FF2B5EF4-FFF2-40B4-BE49-F238E27FC236}">
-                <a16:creationId xmlns:a16="http://schemas.microsoft.com/office/drawing/2014/main" id="{F27A7E28-0436-405D-9311-85C0A2550495}"/>
+                <a16:creationId xmlns:a16="http://schemas.microsoft.com/office/drawing/2014/main" id="{05CF4DE0-6AA5-4D55-8BE4-6BAB19EF82F9}"/>
               </a:ext>
             </a:extLst>
           </p:cNvPr>
@@ -35364,7 +35364,7 @@
           <p:cNvPr id="11" name="">
             <a:extLst xmlns:a="http://schemas.openxmlformats.org/drawingml/2006/main">
               <a:ext uri="{FF2B5EF4-FFF2-40B4-BE49-F238E27FC236}">
-                <a16:creationId xmlns:a16="http://schemas.microsoft.com/office/drawing/2014/main" id="{B4EB496F-BC0E-4EFE-B7CC-5D8F4DD23693}"/>
+                <a16:creationId xmlns:a16="http://schemas.microsoft.com/office/drawing/2014/main" id="{66E5E02E-988A-4BCC-8694-80AA10B87136}"/>
               </a:ext>
             </a:extLst>
           </p:cNvPr>
@@ -35411,10 +35411,10 @@
           <p:nvPr/>
         </p:nvPicPr>
         <p:blipFill>
-          <a:blip xmlns:r="http://schemas.openxmlformats.org/officeDocument/2006/relationships" xmlns:a="http://schemas.openxmlformats.org/drawingml/2006/main" r:embed="R692d3ec33c424404">
+          <a:blip xmlns:r="http://schemas.openxmlformats.org/officeDocument/2006/relationships" xmlns:a="http://schemas.openxmlformats.org/drawingml/2006/main" r:embed="R608a09ca9a7a45b1">
             <a:extLst>
               <a:ext uri="{96DAC541-7B7A-43D3-8B79-37D633B846F1}">
-                <asvg:svgBlip xmlns:asvg="http://schemas.microsoft.com/office/drawing/2016/SVG/main" r:embed="R3cb002f4a90b4496"/>
+                <asvg:svgBlip xmlns:asvg="http://schemas.microsoft.com/office/drawing/2016/SVG/main" r:embed="Rc009e7b576354293"/>
               </a:ext>
             </a:extLst>
           </a:blip>
@@ -35435,7 +35435,7 @@
           <p:cNvPr id="13" name="">
             <a:extLst xmlns:a="http://schemas.openxmlformats.org/drawingml/2006/main">
               <a:ext uri="{FF2B5EF4-FFF2-40B4-BE49-F238E27FC236}">
-                <a16:creationId xmlns:a16="http://schemas.microsoft.com/office/drawing/2014/main" id="{5611E461-3F33-4DAC-BF0F-D3022C745E20}"/>
+                <a16:creationId xmlns:a16="http://schemas.microsoft.com/office/drawing/2014/main" id="{B585762E-859D-4E05-AEC3-D1DE159E3C8F}"/>
               </a:ext>
             </a:extLst>
           </p:cNvPr>
@@ -35468,7 +35468,7 @@
           <p:cNvPr id="14" name="">
             <a:extLst xmlns:a="http://schemas.openxmlformats.org/drawingml/2006/main">
               <a:ext uri="{FF2B5EF4-FFF2-40B4-BE49-F238E27FC236}">
-                <a16:creationId xmlns:a16="http://schemas.microsoft.com/office/drawing/2014/main" id="{617E17AD-0E40-4365-9408-3B709DCD9DD7}"/>
+                <a16:creationId xmlns:a16="http://schemas.microsoft.com/office/drawing/2014/main" id="{A999DA3D-CC1E-4269-8752-B38B99819BAB}"/>
               </a:ext>
             </a:extLst>
           </p:cNvPr>
@@ -35520,7 +35520,7 @@
           <p:cNvPr id="15" name="">
             <a:extLst xmlns:a="http://schemas.openxmlformats.org/drawingml/2006/main">
               <a:ext uri="{FF2B5EF4-FFF2-40B4-BE49-F238E27FC236}">
-                <a16:creationId xmlns:a16="http://schemas.microsoft.com/office/drawing/2014/main" id="{ADEE39C5-7A58-4C15-9F58-B238EF10AC38}"/>
+                <a16:creationId xmlns:a16="http://schemas.microsoft.com/office/drawing/2014/main" id="{4308B8D9-76CE-4055-B982-94A4949D6A59}"/>
               </a:ext>
             </a:extLst>
           </p:cNvPr>
@@ -35551,7 +35551,7 @@
           <p:cNvPr id="16" name="">
             <a:extLst xmlns:a="http://schemas.openxmlformats.org/drawingml/2006/main">
               <a:ext uri="{FF2B5EF4-FFF2-40B4-BE49-F238E27FC236}">
-                <a16:creationId xmlns:a16="http://schemas.microsoft.com/office/drawing/2014/main" id="{FC956926-5588-4645-9E1F-EC919E9927A0}"/>
+                <a16:creationId xmlns:a16="http://schemas.microsoft.com/office/drawing/2014/main" id="{50836B9C-A4B8-42D2-A563-BFBE65654189}"/>
               </a:ext>
             </a:extLst>
           </p:cNvPr>
@@ -35582,7 +35582,7 @@
           <p:cNvPr id="17" name="">
             <a:extLst xmlns:a="http://schemas.openxmlformats.org/drawingml/2006/main">
               <a:ext uri="{FF2B5EF4-FFF2-40B4-BE49-F238E27FC236}">
-                <a16:creationId xmlns:a16="http://schemas.microsoft.com/office/drawing/2014/main" id="{5EB402A3-149B-4716-967D-0D58A1BDF687}"/>
+                <a16:creationId xmlns:a16="http://schemas.microsoft.com/office/drawing/2014/main" id="{1CAC3F91-5B4F-499D-A659-85DF2D6019CB}"/>
               </a:ext>
             </a:extLst>
           </p:cNvPr>
@@ -35634,7 +35634,7 @@
           <p:cNvPr id="18" name="">
             <a:extLst xmlns:a="http://schemas.openxmlformats.org/drawingml/2006/main">
               <a:ext uri="{FF2B5EF4-FFF2-40B4-BE49-F238E27FC236}">
-                <a16:creationId xmlns:a16="http://schemas.microsoft.com/office/drawing/2014/main" id="{79223A85-F350-4763-A5BC-BA01ADFED068}"/>
+                <a16:creationId xmlns:a16="http://schemas.microsoft.com/office/drawing/2014/main" id="{AA82E1B0-8291-4224-A12D-BFFBD1033402}"/>
               </a:ext>
             </a:extLst>
           </p:cNvPr>
@@ -35667,7 +35667,7 @@
           <p:cNvPr id="19" name="">
             <a:extLst xmlns:a="http://schemas.openxmlformats.org/drawingml/2006/main">
               <a:ext uri="{FF2B5EF4-FFF2-40B4-BE49-F238E27FC236}">
-                <a16:creationId xmlns:a16="http://schemas.microsoft.com/office/drawing/2014/main" id="{1580CA6F-6B0E-4A72-AB75-D0FC92CEB2FD}"/>
+                <a16:creationId xmlns:a16="http://schemas.microsoft.com/office/drawing/2014/main" id="{D17FF0C8-680E-4589-BC8C-E978B921C8A6}"/>
               </a:ext>
             </a:extLst>
           </p:cNvPr>
@@ -35719,7 +35719,7 @@
           <p:cNvPr id="20" name="">
             <a:extLst xmlns:a="http://schemas.openxmlformats.org/drawingml/2006/main">
               <a:ext uri="{FF2B5EF4-FFF2-40B4-BE49-F238E27FC236}">
-                <a16:creationId xmlns:a16="http://schemas.microsoft.com/office/drawing/2014/main" id="{CF48E860-32EB-473A-AACF-75CA65BA9113}"/>
+                <a16:creationId xmlns:a16="http://schemas.microsoft.com/office/drawing/2014/main" id="{4CCBF7A2-957C-4750-9927-BD4E2925F57E}"/>
               </a:ext>
             </a:extLst>
           </p:cNvPr>
@@ -35750,7 +35750,7 @@
           <p:cNvPr id="21" name="">
             <a:extLst xmlns:a="http://schemas.openxmlformats.org/drawingml/2006/main">
               <a:ext uri="{FF2B5EF4-FFF2-40B4-BE49-F238E27FC236}">
-                <a16:creationId xmlns:a16="http://schemas.microsoft.com/office/drawing/2014/main" id="{D7683F51-89AD-4C91-A5E8-29E9FD448932}"/>
+                <a16:creationId xmlns:a16="http://schemas.microsoft.com/office/drawing/2014/main" id="{1809B4CF-C1BD-4775-8B6A-F5C3B278BD75}"/>
               </a:ext>
             </a:extLst>
           </p:cNvPr>
@@ -35781,7 +35781,7 @@
           <p:cNvPr id="22" name="">
             <a:extLst xmlns:a="http://schemas.openxmlformats.org/drawingml/2006/main">
               <a:ext uri="{FF2B5EF4-FFF2-40B4-BE49-F238E27FC236}">
-                <a16:creationId xmlns:a16="http://schemas.microsoft.com/office/drawing/2014/main" id="{53CD37FB-E888-4C33-AFC8-8E04A70A9A7F}"/>
+                <a16:creationId xmlns:a16="http://schemas.microsoft.com/office/drawing/2014/main" id="{4E84DA51-7B92-44A5-8728-B0D46DAF1338}"/>
               </a:ext>
             </a:extLst>
           </p:cNvPr>
@@ -35833,7 +35833,7 @@
           <p:cNvPr id="23" name="">
             <a:extLst xmlns:a="http://schemas.openxmlformats.org/drawingml/2006/main">
               <a:ext uri="{FF2B5EF4-FFF2-40B4-BE49-F238E27FC236}">
-                <a16:creationId xmlns:a16="http://schemas.microsoft.com/office/drawing/2014/main" id="{2BA5B6FD-D0E3-4BE7-9F95-5BF222729435}"/>
+                <a16:creationId xmlns:a16="http://schemas.microsoft.com/office/drawing/2014/main" id="{14269E0F-7D8E-438B-80E5-3ECB9F708F94}"/>
               </a:ext>
             </a:extLst>
           </p:cNvPr>
@@ -35885,7 +35885,7 @@
           <p:cNvPr id="24" name="">
             <a:extLst xmlns:a="http://schemas.openxmlformats.org/drawingml/2006/main">
               <a:ext uri="{FF2B5EF4-FFF2-40B4-BE49-F238E27FC236}">
-                <a16:creationId xmlns:a16="http://schemas.microsoft.com/office/drawing/2014/main" id="{233995DA-D769-4661-8A00-043DABEDD526}"/>
+                <a16:creationId xmlns:a16="http://schemas.microsoft.com/office/drawing/2014/main" id="{80C71438-BC56-40EC-94EF-8AFA7D3E71AB}"/>
               </a:ext>
             </a:extLst>
           </p:cNvPr>
@@ -35916,7 +35916,7 @@
           <p:cNvPr id="25" name="">
             <a:extLst xmlns:a="http://schemas.openxmlformats.org/drawingml/2006/main">
               <a:ext uri="{FF2B5EF4-FFF2-40B4-BE49-F238E27FC236}">
-                <a16:creationId xmlns:a16="http://schemas.microsoft.com/office/drawing/2014/main" id="{0FC6F661-92D6-4348-BF48-B57DFBD71832}"/>
+                <a16:creationId xmlns:a16="http://schemas.microsoft.com/office/drawing/2014/main" id="{3B0D40A2-8FF9-47E7-8709-7ADE0DBF94EC}"/>
               </a:ext>
             </a:extLst>
           </p:cNvPr>
@@ -35968,7 +35968,7 @@
           <p:cNvPr id="26" name="">
             <a:extLst xmlns:a="http://schemas.openxmlformats.org/drawingml/2006/main">
               <a:ext uri="{FF2B5EF4-FFF2-40B4-BE49-F238E27FC236}">
-                <a16:creationId xmlns:a16="http://schemas.microsoft.com/office/drawing/2014/main" id="{3568C57F-458B-4963-ABA1-095ECA667761}"/>
+                <a16:creationId xmlns:a16="http://schemas.microsoft.com/office/drawing/2014/main" id="{6AD07CBF-E8B0-4F5B-BC21-CE5B225ADDC3}"/>
               </a:ext>
             </a:extLst>
           </p:cNvPr>
@@ -36020,7 +36020,7 @@
           <p:cNvPr id="27" name="">
             <a:extLst xmlns:a="http://schemas.openxmlformats.org/drawingml/2006/main">
               <a:ext uri="{FF2B5EF4-FFF2-40B4-BE49-F238E27FC236}">
-                <a16:creationId xmlns:a16="http://schemas.microsoft.com/office/drawing/2014/main" id="{450B6809-6CAF-4C79-A8EA-235874D1FA21}"/>
+                <a16:creationId xmlns:a16="http://schemas.microsoft.com/office/drawing/2014/main" id="{EA9C2951-7599-40FE-BB13-0C0430F081DF}"/>
               </a:ext>
             </a:extLst>
           </p:cNvPr>
@@ -36072,7 +36072,7 @@
           <p:cNvPr id="28" name="">
             <a:extLst xmlns:a="http://schemas.openxmlformats.org/drawingml/2006/main">
               <a:ext uri="{FF2B5EF4-FFF2-40B4-BE49-F238E27FC236}">
-                <a16:creationId xmlns:a16="http://schemas.microsoft.com/office/drawing/2014/main" id="{1D2E27DC-D6E0-43B5-BCBC-8AA5197F48D6}"/>
+                <a16:creationId xmlns:a16="http://schemas.microsoft.com/office/drawing/2014/main" id="{4EF37E33-D900-4016-A344-90A8BBBD713E}"/>
               </a:ext>
             </a:extLst>
           </p:cNvPr>
@@ -36124,7 +36124,7 @@
           <p:cNvPr id="29" name="">
             <a:extLst xmlns:a="http://schemas.openxmlformats.org/drawingml/2006/main">
               <a:ext uri="{FF2B5EF4-FFF2-40B4-BE49-F238E27FC236}">
-                <a16:creationId xmlns:a16="http://schemas.microsoft.com/office/drawing/2014/main" id="{794BF10F-5438-4780-BD12-C4779395599C}"/>
+                <a16:creationId xmlns:a16="http://schemas.microsoft.com/office/drawing/2014/main" id="{AB31BE9E-4B76-498D-98F4-9C6580AC80DD}"/>
               </a:ext>
             </a:extLst>
           </p:cNvPr>
@@ -36176,7 +36176,7 @@
           <p:cNvPr id="30" name="">
             <a:extLst xmlns:a="http://schemas.openxmlformats.org/drawingml/2006/main">
               <a:ext uri="{FF2B5EF4-FFF2-40B4-BE49-F238E27FC236}">
-                <a16:creationId xmlns:a16="http://schemas.microsoft.com/office/drawing/2014/main" id="{33F6C43C-50D0-463E-901A-E2B9B3B0B15A}"/>
+                <a16:creationId xmlns:a16="http://schemas.microsoft.com/office/drawing/2014/main" id="{CF257F77-28A2-4033-883E-51BFF2FAB27F}"/>
               </a:ext>
             </a:extLst>
           </p:cNvPr>
@@ -36228,7 +36228,7 @@
           <p:cNvPr id="31" name="">
             <a:extLst xmlns:a="http://schemas.openxmlformats.org/drawingml/2006/main">
               <a:ext uri="{FF2B5EF4-FFF2-40B4-BE49-F238E27FC236}">
-                <a16:creationId xmlns:a16="http://schemas.microsoft.com/office/drawing/2014/main" id="{2DB84E8C-F202-4BA2-8C44-756900917B9E}"/>
+                <a16:creationId xmlns:a16="http://schemas.microsoft.com/office/drawing/2014/main" id="{B39E31FD-37A5-4813-B120-DE3EDB0F251D}"/>
               </a:ext>
             </a:extLst>
           </p:cNvPr>
@@ -36280,7 +36280,7 @@
           <p:cNvPr id="32" name="">
             <a:extLst xmlns:a="http://schemas.openxmlformats.org/drawingml/2006/main">
               <a:ext uri="{FF2B5EF4-FFF2-40B4-BE49-F238E27FC236}">
-                <a16:creationId xmlns:a16="http://schemas.microsoft.com/office/drawing/2014/main" id="{20A56A70-E3A0-460A-B399-8FC77F181A3E}"/>
+                <a16:creationId xmlns:a16="http://schemas.microsoft.com/office/drawing/2014/main" id="{79706794-3421-4660-896C-3A1DA5DED2A5}"/>
               </a:ext>
             </a:extLst>
           </p:cNvPr>
@@ -36330,7 +36330,7 @@
     </p:spTree>
     <p:extLst>
       <p:ext uri="{BB962C8B-B14F-4D97-AF65-F5344CB8AC3E}">
-        <p14:creationId xmlns:p14="http://schemas.microsoft.com/office/powerpoint/2010/main" val="1624266254"/>
+        <p14:creationId xmlns:p14="http://schemas.microsoft.com/office/powerpoint/2010/main" val="588355513"/>
       </p:ext>
     </p:extLst>
   </p:cSld>
@@ -36361,7 +36361,7 @@
           <p:cNvPr id="27" name="">
             <a:extLst xmlns:a="http://schemas.openxmlformats.org/drawingml/2006/main">
               <a:ext uri="{FF2B5EF4-FFF2-40B4-BE49-F238E27FC236}">
-                <a16:creationId xmlns:a16="http://schemas.microsoft.com/office/drawing/2014/main" id="{C4977CB9-9AFC-4BF9-8D20-760B5A31F3BF}"/>
+                <a16:creationId xmlns:a16="http://schemas.microsoft.com/office/drawing/2014/main" id="{C25525C1-F393-42C1-A06B-7AD3D7C4018F}"/>
               </a:ext>
             </a:extLst>
           </p:cNvPr>
@@ -36394,7 +36394,7 @@
           <p:cNvPr id="2" name="">
             <a:extLst xmlns:a="http://schemas.openxmlformats.org/drawingml/2006/main">
               <a:ext uri="{FF2B5EF4-FFF2-40B4-BE49-F238E27FC236}">
-                <a16:creationId xmlns:a16="http://schemas.microsoft.com/office/drawing/2014/main" id="{B9DC3EB8-A3E1-4278-B948-3BC8646F7E8B}"/>
+                <a16:creationId xmlns:a16="http://schemas.microsoft.com/office/drawing/2014/main" id="{873AA492-DE07-41B7-95F5-3B90ED263B51}"/>
               </a:ext>
             </a:extLst>
           </p:cNvPr>
@@ -36425,7 +36425,7 @@
           <p:cNvPr id="3" name="">
             <a:extLst xmlns:a="http://schemas.openxmlformats.org/drawingml/2006/main">
               <a:ext uri="{FF2B5EF4-FFF2-40B4-BE49-F238E27FC236}">
-                <a16:creationId xmlns:a16="http://schemas.microsoft.com/office/drawing/2014/main" id="{C4115C8E-E5D9-4043-91A1-BE1CC148E2A3}"/>
+                <a16:creationId xmlns:a16="http://schemas.microsoft.com/office/drawing/2014/main" id="{389BF2A8-C0EB-4458-A5F8-CD942614EDF4}"/>
               </a:ext>
             </a:extLst>
           </p:cNvPr>
@@ -36477,7 +36477,7 @@
           <p:cNvPr id="4" name="">
             <a:extLst xmlns:a="http://schemas.openxmlformats.org/drawingml/2006/main">
               <a:ext uri="{FF2B5EF4-FFF2-40B4-BE49-F238E27FC236}">
-                <a16:creationId xmlns:a16="http://schemas.microsoft.com/office/drawing/2014/main" id="{900B4996-0C08-43E2-B0BD-24CE4F2B9CB1}"/>
+                <a16:creationId xmlns:a16="http://schemas.microsoft.com/office/drawing/2014/main" id="{C09F0204-DFFE-4390-B134-987C0EF49711}"/>
               </a:ext>
             </a:extLst>
           </p:cNvPr>
@@ -36529,7 +36529,7 @@
           <p:cNvPr id="5" name="">
             <a:extLst xmlns:a="http://schemas.openxmlformats.org/drawingml/2006/main">
               <a:ext uri="{FF2B5EF4-FFF2-40B4-BE49-F238E27FC236}">
-                <a16:creationId xmlns:a16="http://schemas.microsoft.com/office/drawing/2014/main" id="{116B15B8-385B-4C29-83FA-B484CF9FE55B}"/>
+                <a16:creationId xmlns:a16="http://schemas.microsoft.com/office/drawing/2014/main" id="{94E6B799-A0E0-443E-A684-2862B6B783B9}"/>
               </a:ext>
             </a:extLst>
           </p:cNvPr>
@@ -36564,7 +36564,7 @@
           <p:nvPr/>
         </p:nvPicPr>
         <p:blipFill>
-          <a:blip xmlns:r="http://schemas.openxmlformats.org/officeDocument/2006/relationships" xmlns:a="http://schemas.openxmlformats.org/drawingml/2006/main" r:embed="R77f7b1c9500f4cef"/>
+          <a:blip xmlns:r="http://schemas.openxmlformats.org/officeDocument/2006/relationships" xmlns:a="http://schemas.openxmlformats.org/drawingml/2006/main" r:embed="Rc54b449939b74ae1"/>
           <a:stretch xmlns:a="http://schemas.openxmlformats.org/drawingml/2006/main"/>
         </p:blipFill>
         <p:spPr>
@@ -36582,7 +36582,7 @@
           <p:cNvPr id="7" name="">
             <a:extLst xmlns:a="http://schemas.openxmlformats.org/drawingml/2006/main">
               <a:ext uri="{FF2B5EF4-FFF2-40B4-BE49-F238E27FC236}">
-                <a16:creationId xmlns:a16="http://schemas.microsoft.com/office/drawing/2014/main" id="{04142FE4-2D1A-4EA9-92D2-290C521EF4FC}"/>
+                <a16:creationId xmlns:a16="http://schemas.microsoft.com/office/drawing/2014/main" id="{D05E4FCD-A2C9-4508-AB69-675200E6084A}"/>
               </a:ext>
             </a:extLst>
           </p:cNvPr>
@@ -36634,7 +36634,7 @@
           <p:cNvPr id="8" name="">
             <a:extLst xmlns:a="http://schemas.openxmlformats.org/drawingml/2006/main">
               <a:ext uri="{FF2B5EF4-FFF2-40B4-BE49-F238E27FC236}">
-                <a16:creationId xmlns:a16="http://schemas.microsoft.com/office/drawing/2014/main" id="{176308C4-D315-46C8-B109-8C8C2765FDBD}"/>
+                <a16:creationId xmlns:a16="http://schemas.microsoft.com/office/drawing/2014/main" id="{EB8F7EA2-E57F-4D00-860F-9A81ACC2890B}"/>
               </a:ext>
             </a:extLst>
           </p:cNvPr>
@@ -36686,7 +36686,7 @@
           <p:cNvPr id="9" name="">
             <a:extLst xmlns:a="http://schemas.openxmlformats.org/drawingml/2006/main">
               <a:ext uri="{FF2B5EF4-FFF2-40B4-BE49-F238E27FC236}">
-                <a16:creationId xmlns:a16="http://schemas.microsoft.com/office/drawing/2014/main" id="{4EF9EF59-C989-4875-97BD-94DBEE0E3944}"/>
+                <a16:creationId xmlns:a16="http://schemas.microsoft.com/office/drawing/2014/main" id="{996FAEE3-2EDD-4CDC-AAA4-1032C468384E}"/>
               </a:ext>
             </a:extLst>
           </p:cNvPr>
@@ -36738,7 +36738,7 @@
           <p:cNvPr id="10" name="">
             <a:extLst xmlns:a="http://schemas.openxmlformats.org/drawingml/2006/main">
               <a:ext uri="{FF2B5EF4-FFF2-40B4-BE49-F238E27FC236}">
-                <a16:creationId xmlns:a16="http://schemas.microsoft.com/office/drawing/2014/main" id="{F0C92F2D-D52C-41D4-93F8-827A663784E3}"/>
+                <a16:creationId xmlns:a16="http://schemas.microsoft.com/office/drawing/2014/main" id="{4B8233E7-6573-4B33-87D1-00D51283AE81}"/>
               </a:ext>
             </a:extLst>
           </p:cNvPr>
@@ -36790,7 +36790,7 @@
           <p:cNvPr id="11" name="">
             <a:extLst xmlns:a="http://schemas.openxmlformats.org/drawingml/2006/main">
               <a:ext uri="{FF2B5EF4-FFF2-40B4-BE49-F238E27FC236}">
-                <a16:creationId xmlns:a16="http://schemas.microsoft.com/office/drawing/2014/main" id="{7FE40CA5-5D58-4CEA-AA8D-D994E0B2DCC1}"/>
+                <a16:creationId xmlns:a16="http://schemas.microsoft.com/office/drawing/2014/main" id="{2CC3D41C-7766-4A65-9804-527C63B72F8E}"/>
               </a:ext>
             </a:extLst>
           </p:cNvPr>
@@ -36837,10 +36837,10 @@
           <p:nvPr/>
         </p:nvPicPr>
         <p:blipFill>
-          <a:blip xmlns:r="http://schemas.openxmlformats.org/officeDocument/2006/relationships" xmlns:a="http://schemas.openxmlformats.org/drawingml/2006/main" r:embed="R8ea07740f51b41d4">
+          <a:blip xmlns:r="http://schemas.openxmlformats.org/officeDocument/2006/relationships" xmlns:a="http://schemas.openxmlformats.org/drawingml/2006/main" r:embed="R143a127ac5424d69">
             <a:extLst>
               <a:ext uri="{96DAC541-7B7A-43D3-8B79-37D633B846F1}">
-                <asvg:svgBlip xmlns:asvg="http://schemas.microsoft.com/office/drawing/2016/SVG/main" r:embed="R16d29c3569894436"/>
+                <asvg:svgBlip xmlns:asvg="http://schemas.microsoft.com/office/drawing/2016/SVG/main" r:embed="Rd92db65bbd51445c"/>
               </a:ext>
             </a:extLst>
           </a:blip>
@@ -36861,7 +36861,7 @@
           <p:cNvPr id="13" name="">
             <a:extLst xmlns:a="http://schemas.openxmlformats.org/drawingml/2006/main">
               <a:ext uri="{FF2B5EF4-FFF2-40B4-BE49-F238E27FC236}">
-                <a16:creationId xmlns:a16="http://schemas.microsoft.com/office/drawing/2014/main" id="{A6838FC6-8DAC-4A1A-A796-4E58AE98A873}"/>
+                <a16:creationId xmlns:a16="http://schemas.microsoft.com/office/drawing/2014/main" id="{2F5A7930-8036-4179-95A5-738F53ADA82C}"/>
               </a:ext>
             </a:extLst>
           </p:cNvPr>
@@ -36894,7 +36894,7 @@
           <p:cNvPr id="14" name="">
             <a:extLst xmlns:a="http://schemas.openxmlformats.org/drawingml/2006/main">
               <a:ext uri="{FF2B5EF4-FFF2-40B4-BE49-F238E27FC236}">
-                <a16:creationId xmlns:a16="http://schemas.microsoft.com/office/drawing/2014/main" id="{9F0D6684-588B-40FE-AFB4-6EA96F213D73}"/>
+                <a16:creationId xmlns:a16="http://schemas.microsoft.com/office/drawing/2014/main" id="{0F16ABBA-9787-496C-83E7-9D8D80218971}"/>
               </a:ext>
             </a:extLst>
           </p:cNvPr>
@@ -36946,7 +36946,7 @@
           <p:cNvPr id="15" name="">
             <a:extLst xmlns:a="http://schemas.openxmlformats.org/drawingml/2006/main">
               <a:ext uri="{FF2B5EF4-FFF2-40B4-BE49-F238E27FC236}">
-                <a16:creationId xmlns:a16="http://schemas.microsoft.com/office/drawing/2014/main" id="{4E7E3402-B230-478E-90F0-02CB3673FC84}"/>
+                <a16:creationId xmlns:a16="http://schemas.microsoft.com/office/drawing/2014/main" id="{50857DDF-9557-4474-BE4C-CDCA16BD1164}"/>
               </a:ext>
             </a:extLst>
           </p:cNvPr>
@@ -36979,7 +36979,7 @@
           <p:cNvPr id="16" name="">
             <a:extLst xmlns:a="http://schemas.openxmlformats.org/drawingml/2006/main">
               <a:ext uri="{FF2B5EF4-FFF2-40B4-BE49-F238E27FC236}">
-                <a16:creationId xmlns:a16="http://schemas.microsoft.com/office/drawing/2014/main" id="{B3686290-22E0-40AA-9F75-9EE427A332E2}"/>
+                <a16:creationId xmlns:a16="http://schemas.microsoft.com/office/drawing/2014/main" id="{C019B21F-D50E-49A1-B672-C12048F0D74D}"/>
               </a:ext>
             </a:extLst>
           </p:cNvPr>
@@ -37031,7 +37031,7 @@
           <p:cNvPr id="17" name="">
             <a:extLst xmlns:a="http://schemas.openxmlformats.org/drawingml/2006/main">
               <a:ext uri="{FF2B5EF4-FFF2-40B4-BE49-F238E27FC236}">
-                <a16:creationId xmlns:a16="http://schemas.microsoft.com/office/drawing/2014/main" id="{43109375-F519-4337-95AE-349433E2CDC8}"/>
+                <a16:creationId xmlns:a16="http://schemas.microsoft.com/office/drawing/2014/main" id="{F6F707A9-FC42-4964-AB4D-2E877E169B08}"/>
               </a:ext>
             </a:extLst>
           </p:cNvPr>
@@ -37062,7 +37062,7 @@
           <p:cNvPr id="18" name="">
             <a:extLst xmlns:a="http://schemas.openxmlformats.org/drawingml/2006/main">
               <a:ext uri="{FF2B5EF4-FFF2-40B4-BE49-F238E27FC236}">
-                <a16:creationId xmlns:a16="http://schemas.microsoft.com/office/drawing/2014/main" id="{7DBCBF9C-883B-4BD0-86EC-9E635EA42E49}"/>
+                <a16:creationId xmlns:a16="http://schemas.microsoft.com/office/drawing/2014/main" id="{41F222E1-58F0-4AFA-875B-E4331D5F2570}"/>
               </a:ext>
             </a:extLst>
           </p:cNvPr>
@@ -37093,7 +37093,7 @@
           <p:cNvPr id="19" name="">
             <a:extLst xmlns:a="http://schemas.openxmlformats.org/drawingml/2006/main">
               <a:ext uri="{FF2B5EF4-FFF2-40B4-BE49-F238E27FC236}">
-                <a16:creationId xmlns:a16="http://schemas.microsoft.com/office/drawing/2014/main" id="{C3CD97C6-29F3-4916-AF3F-59FCDF050DD1}"/>
+                <a16:creationId xmlns:a16="http://schemas.microsoft.com/office/drawing/2014/main" id="{6B4DD254-F089-4E16-84F6-CD59E0B3ABDF}"/>
               </a:ext>
             </a:extLst>
           </p:cNvPr>
@@ -37145,7 +37145,7 @@
           <p:cNvPr id="20" name="">
             <a:extLst xmlns:a="http://schemas.openxmlformats.org/drawingml/2006/main">
               <a:ext uri="{FF2B5EF4-FFF2-40B4-BE49-F238E27FC236}">
-                <a16:creationId xmlns:a16="http://schemas.microsoft.com/office/drawing/2014/main" id="{F5FC657A-D082-4647-962B-993A3A48B687}"/>
+                <a16:creationId xmlns:a16="http://schemas.microsoft.com/office/drawing/2014/main" id="{9ED50640-A4B6-48B9-9FCA-393AC9F42296}"/>
               </a:ext>
             </a:extLst>
           </p:cNvPr>
@@ -37176,7 +37176,7 @@
           <p:cNvPr id="21" name="">
             <a:extLst xmlns:a="http://schemas.openxmlformats.org/drawingml/2006/main">
               <a:ext uri="{FF2B5EF4-FFF2-40B4-BE49-F238E27FC236}">
-                <a16:creationId xmlns:a16="http://schemas.microsoft.com/office/drawing/2014/main" id="{624B2CA6-54B6-4839-85B7-34B07E6D5FF8}"/>
+                <a16:creationId xmlns:a16="http://schemas.microsoft.com/office/drawing/2014/main" id="{12AF7898-9AA1-4E66-9281-073F723ADABA}"/>
               </a:ext>
             </a:extLst>
           </p:cNvPr>
@@ -37228,7 +37228,7 @@
           <p:cNvPr id="22" name="">
             <a:extLst xmlns:a="http://schemas.openxmlformats.org/drawingml/2006/main">
               <a:ext uri="{FF2B5EF4-FFF2-40B4-BE49-F238E27FC236}">
-                <a16:creationId xmlns:a16="http://schemas.microsoft.com/office/drawing/2014/main" id="{28B18E5C-481D-42A0-8285-1F26E78ED603}"/>
+                <a16:creationId xmlns:a16="http://schemas.microsoft.com/office/drawing/2014/main" id="{CA0D144F-BB4A-4B5F-9909-50422AF60C73}"/>
               </a:ext>
             </a:extLst>
           </p:cNvPr>
@@ -37280,7 +37280,7 @@
           <p:cNvPr id="23" name="">
             <a:extLst xmlns:a="http://schemas.openxmlformats.org/drawingml/2006/main">
               <a:ext uri="{FF2B5EF4-FFF2-40B4-BE49-F238E27FC236}">
-                <a16:creationId xmlns:a16="http://schemas.microsoft.com/office/drawing/2014/main" id="{BB619531-5690-42F2-93F4-586EE77E93D6}"/>
+                <a16:creationId xmlns:a16="http://schemas.microsoft.com/office/drawing/2014/main" id="{CC0A7A3D-702C-47E2-9793-BAF75C5B8F35}"/>
               </a:ext>
             </a:extLst>
           </p:cNvPr>
@@ -37332,7 +37332,7 @@
           <p:cNvPr id="24" name="">
             <a:extLst xmlns:a="http://schemas.openxmlformats.org/drawingml/2006/main">
               <a:ext uri="{FF2B5EF4-FFF2-40B4-BE49-F238E27FC236}">
-                <a16:creationId xmlns:a16="http://schemas.microsoft.com/office/drawing/2014/main" id="{21870E97-F4F4-4707-B0D8-280B1CA4E749}"/>
+                <a16:creationId xmlns:a16="http://schemas.microsoft.com/office/drawing/2014/main" id="{13E045CC-580B-4C6A-BE6F-A28CD8B771D1}"/>
               </a:ext>
             </a:extLst>
           </p:cNvPr>
@@ -37384,7 +37384,7 @@
           <p:cNvPr id="25" name="">
             <a:extLst xmlns:a="http://schemas.openxmlformats.org/drawingml/2006/main">
               <a:ext uri="{FF2B5EF4-FFF2-40B4-BE49-F238E27FC236}">
-                <a16:creationId xmlns:a16="http://schemas.microsoft.com/office/drawing/2014/main" id="{9E2DAAE5-B1E1-4BFB-A8EA-4DB01C175EE4}"/>
+                <a16:creationId xmlns:a16="http://schemas.microsoft.com/office/drawing/2014/main" id="{BAF3F3EC-4BBE-405A-BD66-D01A22278B06}"/>
               </a:ext>
             </a:extLst>
           </p:cNvPr>
@@ -37436,7 +37436,7 @@
           <p:cNvPr id="26" name="">
             <a:extLst xmlns:a="http://schemas.openxmlformats.org/drawingml/2006/main">
               <a:ext uri="{FF2B5EF4-FFF2-40B4-BE49-F238E27FC236}">
-                <a16:creationId xmlns:a16="http://schemas.microsoft.com/office/drawing/2014/main" id="{2577979B-C4AF-4DB4-8C4E-F58F448FAE4E}"/>
+                <a16:creationId xmlns:a16="http://schemas.microsoft.com/office/drawing/2014/main" id="{32024F89-5879-44A8-A3D6-808D94457F6E}"/>
               </a:ext>
             </a:extLst>
           </p:cNvPr>
@@ -37486,7 +37486,7 @@
     </p:spTree>
     <p:extLst>
       <p:ext uri="{BB962C8B-B14F-4D97-AF65-F5344CB8AC3E}">
-        <p14:creationId xmlns:p14="http://schemas.microsoft.com/office/powerpoint/2010/main" val="1279507560"/>
+        <p14:creationId xmlns:p14="http://schemas.microsoft.com/office/powerpoint/2010/main" val="301313488"/>
       </p:ext>
     </p:extLst>
   </p:cSld>
@@ -37517,7 +37517,7 @@
           <p:cNvPr id="27" name="">
             <a:extLst xmlns:a="http://schemas.openxmlformats.org/drawingml/2006/main">
               <a:ext uri="{FF2B5EF4-FFF2-40B4-BE49-F238E27FC236}">
-                <a16:creationId xmlns:a16="http://schemas.microsoft.com/office/drawing/2014/main" id="{F89EB339-48F9-4592-B087-30E8467AADFB}"/>
+                <a16:creationId xmlns:a16="http://schemas.microsoft.com/office/drawing/2014/main" id="{7A1EA7A9-D45A-4F38-9E3F-0EC1505D2041}"/>
               </a:ext>
             </a:extLst>
           </p:cNvPr>
@@ -37550,7 +37550,7 @@
           <p:cNvPr id="2" name="">
             <a:extLst xmlns:a="http://schemas.openxmlformats.org/drawingml/2006/main">
               <a:ext uri="{FF2B5EF4-FFF2-40B4-BE49-F238E27FC236}">
-                <a16:creationId xmlns:a16="http://schemas.microsoft.com/office/drawing/2014/main" id="{1D318029-ADE3-430E-9B37-78E3A6304447}"/>
+                <a16:creationId xmlns:a16="http://schemas.microsoft.com/office/drawing/2014/main" id="{6C2D7C0F-AE61-4CA5-9D9D-6ABD29324C49}"/>
               </a:ext>
             </a:extLst>
           </p:cNvPr>
@@ -37581,7 +37581,7 @@
           <p:cNvPr id="3" name="">
             <a:extLst xmlns:a="http://schemas.openxmlformats.org/drawingml/2006/main">
               <a:ext uri="{FF2B5EF4-FFF2-40B4-BE49-F238E27FC236}">
-                <a16:creationId xmlns:a16="http://schemas.microsoft.com/office/drawing/2014/main" id="{E28BF408-EC82-465A-AC27-BD8DDA20B0E2}"/>
+                <a16:creationId xmlns:a16="http://schemas.microsoft.com/office/drawing/2014/main" id="{B147B6AA-DDB6-45A4-873C-8A3C313C3931}"/>
               </a:ext>
             </a:extLst>
           </p:cNvPr>
@@ -37633,7 +37633,7 @@
           <p:cNvPr id="4" name="">
             <a:extLst xmlns:a="http://schemas.openxmlformats.org/drawingml/2006/main">
               <a:ext uri="{FF2B5EF4-FFF2-40B4-BE49-F238E27FC236}">
-                <a16:creationId xmlns:a16="http://schemas.microsoft.com/office/drawing/2014/main" id="{7A8D11F9-A17A-4796-B4DE-658AAB1FBEDB}"/>
+                <a16:creationId xmlns:a16="http://schemas.microsoft.com/office/drawing/2014/main" id="{ED800FF2-9AA3-4BA4-91B6-635987766090}"/>
               </a:ext>
             </a:extLst>
           </p:cNvPr>
@@ -37685,7 +37685,7 @@
           <p:cNvPr id="5" name="">
             <a:extLst xmlns:a="http://schemas.openxmlformats.org/drawingml/2006/main">
               <a:ext uri="{FF2B5EF4-FFF2-40B4-BE49-F238E27FC236}">
-                <a16:creationId xmlns:a16="http://schemas.microsoft.com/office/drawing/2014/main" id="{14BD719E-07D9-4C1D-BAEF-E264047F44BD}"/>
+                <a16:creationId xmlns:a16="http://schemas.microsoft.com/office/drawing/2014/main" id="{2BD8C5A8-2ED8-49F6-B681-8CAF156A6578}"/>
               </a:ext>
             </a:extLst>
           </p:cNvPr>
@@ -37720,7 +37720,7 @@
           <p:nvPr/>
         </p:nvPicPr>
         <p:blipFill>
-          <a:blip xmlns:r="http://schemas.openxmlformats.org/officeDocument/2006/relationships" xmlns:a="http://schemas.openxmlformats.org/drawingml/2006/main" r:embed="R3a1c6f3427a44921"/>
+          <a:blip xmlns:r="http://schemas.openxmlformats.org/officeDocument/2006/relationships" xmlns:a="http://schemas.openxmlformats.org/drawingml/2006/main" r:embed="Rb3540ff06166426c"/>
           <a:stretch xmlns:a="http://schemas.openxmlformats.org/drawingml/2006/main"/>
         </p:blipFill>
         <p:spPr>
@@ -37738,7 +37738,7 @@
           <p:cNvPr id="7" name="">
             <a:extLst xmlns:a="http://schemas.openxmlformats.org/drawingml/2006/main">
               <a:ext uri="{FF2B5EF4-FFF2-40B4-BE49-F238E27FC236}">
-                <a16:creationId xmlns:a16="http://schemas.microsoft.com/office/drawing/2014/main" id="{501343EF-7352-427E-B353-F14D6E3D3E7C}"/>
+                <a16:creationId xmlns:a16="http://schemas.microsoft.com/office/drawing/2014/main" id="{1B87F865-4B16-4A12-944D-2074495F59A6}"/>
               </a:ext>
             </a:extLst>
           </p:cNvPr>
@@ -37790,7 +37790,7 @@
           <p:cNvPr id="8" name="">
             <a:extLst xmlns:a="http://schemas.openxmlformats.org/drawingml/2006/main">
               <a:ext uri="{FF2B5EF4-FFF2-40B4-BE49-F238E27FC236}">
-                <a16:creationId xmlns:a16="http://schemas.microsoft.com/office/drawing/2014/main" id="{D66412BE-C2DE-4172-B41E-DFFF6B7A1A21}"/>
+                <a16:creationId xmlns:a16="http://schemas.microsoft.com/office/drawing/2014/main" id="{FBA8D407-0F9E-44C2-A8E6-B316B42F8B56}"/>
               </a:ext>
             </a:extLst>
           </p:cNvPr>
@@ -37842,7 +37842,7 @@
           <p:cNvPr id="9" name="">
             <a:extLst xmlns:a="http://schemas.openxmlformats.org/drawingml/2006/main">
               <a:ext uri="{FF2B5EF4-FFF2-40B4-BE49-F238E27FC236}">
-                <a16:creationId xmlns:a16="http://schemas.microsoft.com/office/drawing/2014/main" id="{C35F89AA-E900-4727-A623-E5A137094D41}"/>
+                <a16:creationId xmlns:a16="http://schemas.microsoft.com/office/drawing/2014/main" id="{BEB46268-4C46-49E0-B810-3E5857713201}"/>
               </a:ext>
             </a:extLst>
           </p:cNvPr>
@@ -37894,7 +37894,7 @@
           <p:cNvPr id="10" name="">
             <a:extLst xmlns:a="http://schemas.openxmlformats.org/drawingml/2006/main">
               <a:ext uri="{FF2B5EF4-FFF2-40B4-BE49-F238E27FC236}">
-                <a16:creationId xmlns:a16="http://schemas.microsoft.com/office/drawing/2014/main" id="{1BC166A3-F87E-4FFE-AD21-84ED13A22E8E}"/>
+                <a16:creationId xmlns:a16="http://schemas.microsoft.com/office/drawing/2014/main" id="{4DFAB9F3-1E90-4605-8E84-D1A31676103F}"/>
               </a:ext>
             </a:extLst>
           </p:cNvPr>
@@ -37946,7 +37946,7 @@
           <p:cNvPr id="11" name="">
             <a:extLst xmlns:a="http://schemas.openxmlformats.org/drawingml/2006/main">
               <a:ext uri="{FF2B5EF4-FFF2-40B4-BE49-F238E27FC236}">
-                <a16:creationId xmlns:a16="http://schemas.microsoft.com/office/drawing/2014/main" id="{2CCA8BC1-0B92-4FC6-8D93-4C31858A98B9}"/>
+                <a16:creationId xmlns:a16="http://schemas.microsoft.com/office/drawing/2014/main" id="{768E6CFB-600C-4611-ACA5-665604A7B869}"/>
               </a:ext>
             </a:extLst>
           </p:cNvPr>
@@ -37993,10 +37993,10 @@
           <p:nvPr/>
         </p:nvPicPr>
         <p:blipFill>
-          <a:blip xmlns:r="http://schemas.openxmlformats.org/officeDocument/2006/relationships" xmlns:a="http://schemas.openxmlformats.org/drawingml/2006/main" r:embed="Rcf0efb46f90046c4">
+          <a:blip xmlns:r="http://schemas.openxmlformats.org/officeDocument/2006/relationships" xmlns:a="http://schemas.openxmlformats.org/drawingml/2006/main" r:embed="Rf800c5682bae492d">
             <a:extLst>
               <a:ext uri="{96DAC541-7B7A-43D3-8B79-37D633B846F1}">
-                <asvg:svgBlip xmlns:asvg="http://schemas.microsoft.com/office/drawing/2016/SVG/main" r:embed="Ra77e9726d5854e02"/>
+                <asvg:svgBlip xmlns:asvg="http://schemas.microsoft.com/office/drawing/2016/SVG/main" r:embed="R15b0817fa6f14fb9"/>
               </a:ext>
             </a:extLst>
           </a:blip>
@@ -38017,7 +38017,7 @@
           <p:cNvPr id="13" name="">
             <a:extLst xmlns:a="http://schemas.openxmlformats.org/drawingml/2006/main">
               <a:ext uri="{FF2B5EF4-FFF2-40B4-BE49-F238E27FC236}">
-                <a16:creationId xmlns:a16="http://schemas.microsoft.com/office/drawing/2014/main" id="{56FFB9B4-EA01-4862-841F-34B08C9FF741}"/>
+                <a16:creationId xmlns:a16="http://schemas.microsoft.com/office/drawing/2014/main" id="{8EFAC75C-A1ED-4138-82B7-E8BBECD2FD02}"/>
               </a:ext>
             </a:extLst>
           </p:cNvPr>
@@ -38050,7 +38050,7 @@
           <p:cNvPr id="14" name="">
             <a:extLst xmlns:a="http://schemas.openxmlformats.org/drawingml/2006/main">
               <a:ext uri="{FF2B5EF4-FFF2-40B4-BE49-F238E27FC236}">
-                <a16:creationId xmlns:a16="http://schemas.microsoft.com/office/drawing/2014/main" id="{03AF675C-AB0E-47D8-9C21-5995DF6E4564}"/>
+                <a16:creationId xmlns:a16="http://schemas.microsoft.com/office/drawing/2014/main" id="{84991722-E675-4219-9BC9-B0557E449505}"/>
               </a:ext>
             </a:extLst>
           </p:cNvPr>
@@ -38102,7 +38102,7 @@
           <p:cNvPr id="15" name="">
             <a:extLst xmlns:a="http://schemas.openxmlformats.org/drawingml/2006/main">
               <a:ext uri="{FF2B5EF4-FFF2-40B4-BE49-F238E27FC236}">
-                <a16:creationId xmlns:a16="http://schemas.microsoft.com/office/drawing/2014/main" id="{55F88594-966D-4F45-A658-D7A69B7DA3A1}"/>
+                <a16:creationId xmlns:a16="http://schemas.microsoft.com/office/drawing/2014/main" id="{197B7BB3-494F-4157-BCBD-F0F5206A52B3}"/>
               </a:ext>
             </a:extLst>
           </p:cNvPr>
@@ -38135,7 +38135,7 @@
           <p:cNvPr id="16" name="">
             <a:extLst xmlns:a="http://schemas.openxmlformats.org/drawingml/2006/main">
               <a:ext uri="{FF2B5EF4-FFF2-40B4-BE49-F238E27FC236}">
-                <a16:creationId xmlns:a16="http://schemas.microsoft.com/office/drawing/2014/main" id="{403D1784-1A9C-4DDD-9693-F072EBDA5C77}"/>
+                <a16:creationId xmlns:a16="http://schemas.microsoft.com/office/drawing/2014/main" id="{9EED6301-E59A-45B2-9D3B-8BB609B3A884}"/>
               </a:ext>
             </a:extLst>
           </p:cNvPr>
@@ -38187,7 +38187,7 @@
           <p:cNvPr id="17" name="">
             <a:extLst xmlns:a="http://schemas.openxmlformats.org/drawingml/2006/main">
               <a:ext uri="{FF2B5EF4-FFF2-40B4-BE49-F238E27FC236}">
-                <a16:creationId xmlns:a16="http://schemas.microsoft.com/office/drawing/2014/main" id="{1588CD11-9C09-4C31-8A5E-AEBFC548BBE6}"/>
+                <a16:creationId xmlns:a16="http://schemas.microsoft.com/office/drawing/2014/main" id="{F357FC93-D8B9-47AA-81C6-E115541328D0}"/>
               </a:ext>
             </a:extLst>
           </p:cNvPr>
@@ -38220,7 +38220,7 @@
           <p:cNvPr id="18" name="">
             <a:extLst xmlns:a="http://schemas.openxmlformats.org/drawingml/2006/main">
               <a:ext uri="{FF2B5EF4-FFF2-40B4-BE49-F238E27FC236}">
-                <a16:creationId xmlns:a16="http://schemas.microsoft.com/office/drawing/2014/main" id="{D95E7D47-09D8-44F5-A709-C33FEB3CA2ED}"/>
+                <a16:creationId xmlns:a16="http://schemas.microsoft.com/office/drawing/2014/main" id="{3A170E02-65F8-4BA1-87F1-3BEC4350A334}"/>
               </a:ext>
             </a:extLst>
           </p:cNvPr>
@@ -38272,7 +38272,7 @@
           <p:cNvPr id="19" name="">
             <a:extLst xmlns:a="http://schemas.openxmlformats.org/drawingml/2006/main">
               <a:ext uri="{FF2B5EF4-FFF2-40B4-BE49-F238E27FC236}">
-                <a16:creationId xmlns:a16="http://schemas.microsoft.com/office/drawing/2014/main" id="{F1C10F9E-A75E-45C3-A62D-AD4D6714622C}"/>
+                <a16:creationId xmlns:a16="http://schemas.microsoft.com/office/drawing/2014/main" id="{8C945F65-B809-416E-8B22-9975719101DA}"/>
               </a:ext>
             </a:extLst>
           </p:cNvPr>
@@ -38324,7 +38324,7 @@
           <p:cNvPr id="20" name="">
             <a:extLst xmlns:a="http://schemas.openxmlformats.org/drawingml/2006/main">
               <a:ext uri="{FF2B5EF4-FFF2-40B4-BE49-F238E27FC236}">
-                <a16:creationId xmlns:a16="http://schemas.microsoft.com/office/drawing/2014/main" id="{4E136426-838D-4978-A5E7-8DEEA5E8BE8B}"/>
+                <a16:creationId xmlns:a16="http://schemas.microsoft.com/office/drawing/2014/main" id="{183B3F29-8F5A-4228-A249-27C11EF4D332}"/>
               </a:ext>
             </a:extLst>
           </p:cNvPr>
@@ -38355,7 +38355,7 @@
           <p:cNvPr id="21" name="">
             <a:extLst xmlns:a="http://schemas.openxmlformats.org/drawingml/2006/main">
               <a:ext uri="{FF2B5EF4-FFF2-40B4-BE49-F238E27FC236}">
-                <a16:creationId xmlns:a16="http://schemas.microsoft.com/office/drawing/2014/main" id="{9A0FE048-4B24-4C0D-BD13-C5E3CB4C2015}"/>
+                <a16:creationId xmlns:a16="http://schemas.microsoft.com/office/drawing/2014/main" id="{221AEA06-2D50-4406-AECB-22EC87312D68}"/>
               </a:ext>
             </a:extLst>
           </p:cNvPr>
@@ -38407,7 +38407,7 @@
           <p:cNvPr id="22" name="">
             <a:extLst xmlns:a="http://schemas.openxmlformats.org/drawingml/2006/main">
               <a:ext uri="{FF2B5EF4-FFF2-40B4-BE49-F238E27FC236}">
-                <a16:creationId xmlns:a16="http://schemas.microsoft.com/office/drawing/2014/main" id="{BBD60D63-3DAC-4367-A71A-19962410673D}"/>
+                <a16:creationId xmlns:a16="http://schemas.microsoft.com/office/drawing/2014/main" id="{AD6DC558-03AE-49E8-893D-390F57977AD3}"/>
               </a:ext>
             </a:extLst>
           </p:cNvPr>
@@ -38459,7 +38459,7 @@
           <p:cNvPr id="23" name="">
             <a:extLst xmlns:a="http://schemas.openxmlformats.org/drawingml/2006/main">
               <a:ext uri="{FF2B5EF4-FFF2-40B4-BE49-F238E27FC236}">
-                <a16:creationId xmlns:a16="http://schemas.microsoft.com/office/drawing/2014/main" id="{CC823079-1C19-43D2-BC60-934ABD3E7ADB}"/>
+                <a16:creationId xmlns:a16="http://schemas.microsoft.com/office/drawing/2014/main" id="{DBB51103-6E14-4542-BDC7-C5114B8BC444}"/>
               </a:ext>
             </a:extLst>
           </p:cNvPr>
@@ -38511,7 +38511,7 @@
           <p:cNvPr id="24" name="">
             <a:extLst xmlns:a="http://schemas.openxmlformats.org/drawingml/2006/main">
               <a:ext uri="{FF2B5EF4-FFF2-40B4-BE49-F238E27FC236}">
-                <a16:creationId xmlns:a16="http://schemas.microsoft.com/office/drawing/2014/main" id="{C65706C7-BDD7-4DBA-AF1B-80EA6048F5B1}"/>
+                <a16:creationId xmlns:a16="http://schemas.microsoft.com/office/drawing/2014/main" id="{9D5038E9-6D15-46DE-BB21-2C1AC9BF20DF}"/>
               </a:ext>
             </a:extLst>
           </p:cNvPr>
@@ -38563,7 +38563,7 @@
           <p:cNvPr id="25" name="">
             <a:extLst xmlns:a="http://schemas.openxmlformats.org/drawingml/2006/main">
               <a:ext uri="{FF2B5EF4-FFF2-40B4-BE49-F238E27FC236}">
-                <a16:creationId xmlns:a16="http://schemas.microsoft.com/office/drawing/2014/main" id="{8EE5D36D-C497-4009-8C97-17A34CA99FBB}"/>
+                <a16:creationId xmlns:a16="http://schemas.microsoft.com/office/drawing/2014/main" id="{F04C0A82-98BA-4E3F-8779-A8E2D672BC4D}"/>
               </a:ext>
             </a:extLst>
           </p:cNvPr>
@@ -38615,7 +38615,7 @@
           <p:cNvPr id="26" name="">
             <a:extLst xmlns:a="http://schemas.openxmlformats.org/drawingml/2006/main">
               <a:ext uri="{FF2B5EF4-FFF2-40B4-BE49-F238E27FC236}">
-                <a16:creationId xmlns:a16="http://schemas.microsoft.com/office/drawing/2014/main" id="{E3446268-B239-4F94-AE34-D46B5F4F2695}"/>
+                <a16:creationId xmlns:a16="http://schemas.microsoft.com/office/drawing/2014/main" id="{F2340F73-476B-48AF-8B6C-498AD1ABCB67}"/>
               </a:ext>
             </a:extLst>
           </p:cNvPr>
@@ -38665,7 +38665,7 @@
     </p:spTree>
     <p:extLst>
       <p:ext uri="{BB962C8B-B14F-4D97-AF65-F5344CB8AC3E}">
-        <p14:creationId xmlns:p14="http://schemas.microsoft.com/office/powerpoint/2010/main" val="1253601303"/>
+        <p14:creationId xmlns:p14="http://schemas.microsoft.com/office/powerpoint/2010/main" val="1731913002"/>
       </p:ext>
     </p:extLst>
   </p:cSld>
@@ -38696,7 +38696,7 @@
           <p:cNvPr id="35" name="">
             <a:extLst xmlns:a="http://schemas.openxmlformats.org/drawingml/2006/main">
               <a:ext uri="{FF2B5EF4-FFF2-40B4-BE49-F238E27FC236}">
-                <a16:creationId xmlns:a16="http://schemas.microsoft.com/office/drawing/2014/main" id="{51B8EDE2-CDB1-4485-AAF7-EDB0A80557B0}"/>
+                <a16:creationId xmlns:a16="http://schemas.microsoft.com/office/drawing/2014/main" id="{4DD9251F-BF35-4017-89E7-2FC57F2A58BA}"/>
               </a:ext>
             </a:extLst>
           </p:cNvPr>
@@ -38729,7 +38729,7 @@
           <p:cNvPr id="2" name="">
             <a:extLst xmlns:a="http://schemas.openxmlformats.org/drawingml/2006/main">
               <a:ext uri="{FF2B5EF4-FFF2-40B4-BE49-F238E27FC236}">
-                <a16:creationId xmlns:a16="http://schemas.microsoft.com/office/drawing/2014/main" id="{CBE53379-C3AB-4ABC-A914-67DA2856875C}"/>
+                <a16:creationId xmlns:a16="http://schemas.microsoft.com/office/drawing/2014/main" id="{2CB5581B-F414-48C0-BCCB-1EA6601FA3F7}"/>
               </a:ext>
             </a:extLst>
           </p:cNvPr>
@@ -38760,7 +38760,7 @@
           <p:cNvPr id="3" name="">
             <a:extLst xmlns:a="http://schemas.openxmlformats.org/drawingml/2006/main">
               <a:ext uri="{FF2B5EF4-FFF2-40B4-BE49-F238E27FC236}">
-                <a16:creationId xmlns:a16="http://schemas.microsoft.com/office/drawing/2014/main" id="{85DD8FA2-B8E6-448F-B595-D77591780A64}"/>
+                <a16:creationId xmlns:a16="http://schemas.microsoft.com/office/drawing/2014/main" id="{A1912872-B3F8-49FD-901A-A207B7309E94}"/>
               </a:ext>
             </a:extLst>
           </p:cNvPr>
@@ -38812,7 +38812,7 @@
           <p:cNvPr id="4" name="">
             <a:extLst xmlns:a="http://schemas.openxmlformats.org/drawingml/2006/main">
               <a:ext uri="{FF2B5EF4-FFF2-40B4-BE49-F238E27FC236}">
-                <a16:creationId xmlns:a16="http://schemas.microsoft.com/office/drawing/2014/main" id="{BCE581EC-F260-4260-A080-DCB95E1CF614}"/>
+                <a16:creationId xmlns:a16="http://schemas.microsoft.com/office/drawing/2014/main" id="{252E5995-FDAF-425E-A502-411744FF818F}"/>
               </a:ext>
             </a:extLst>
           </p:cNvPr>
@@ -38864,7 +38864,7 @@
           <p:cNvPr id="5" name="">
             <a:extLst xmlns:a="http://schemas.openxmlformats.org/drawingml/2006/main">
               <a:ext uri="{FF2B5EF4-FFF2-40B4-BE49-F238E27FC236}">
-                <a16:creationId xmlns:a16="http://schemas.microsoft.com/office/drawing/2014/main" id="{FE21849B-F484-4AD4-A1AE-88C21FB2ADCA}"/>
+                <a16:creationId xmlns:a16="http://schemas.microsoft.com/office/drawing/2014/main" id="{93402E35-A5D6-42CE-A123-9EFF18EBB8B1}"/>
               </a:ext>
             </a:extLst>
           </p:cNvPr>
@@ -38899,7 +38899,7 @@
           <p:nvPr/>
         </p:nvPicPr>
         <p:blipFill>
-          <a:blip xmlns:r="http://schemas.openxmlformats.org/officeDocument/2006/relationships" xmlns:a="http://schemas.openxmlformats.org/drawingml/2006/main" r:embed="R66926f8350744771"/>
+          <a:blip xmlns:r="http://schemas.openxmlformats.org/officeDocument/2006/relationships" xmlns:a="http://schemas.openxmlformats.org/drawingml/2006/main" r:embed="Ra808e44ec3964e86"/>
           <a:stretch xmlns:a="http://schemas.openxmlformats.org/drawingml/2006/main"/>
         </p:blipFill>
         <p:spPr>
@@ -38917,7 +38917,7 @@
           <p:cNvPr id="7" name="">
             <a:extLst xmlns:a="http://schemas.openxmlformats.org/drawingml/2006/main">
               <a:ext uri="{FF2B5EF4-FFF2-40B4-BE49-F238E27FC236}">
-                <a16:creationId xmlns:a16="http://schemas.microsoft.com/office/drawing/2014/main" id="{D647944F-BAA6-4C20-A282-D6EB020A31D8}"/>
+                <a16:creationId xmlns:a16="http://schemas.microsoft.com/office/drawing/2014/main" id="{B8FEC98E-433B-4073-8E6E-1382CD07DFBA}"/>
               </a:ext>
             </a:extLst>
           </p:cNvPr>
@@ -38969,7 +38969,7 @@
           <p:cNvPr id="8" name="">
             <a:extLst xmlns:a="http://schemas.openxmlformats.org/drawingml/2006/main">
               <a:ext uri="{FF2B5EF4-FFF2-40B4-BE49-F238E27FC236}">
-                <a16:creationId xmlns:a16="http://schemas.microsoft.com/office/drawing/2014/main" id="{48494BF9-72B1-49E9-AFF2-C3EA33E32368}"/>
+                <a16:creationId xmlns:a16="http://schemas.microsoft.com/office/drawing/2014/main" id="{636C7E13-47B9-4157-B3EB-BF36BE6CE859}"/>
               </a:ext>
             </a:extLst>
           </p:cNvPr>
@@ -39021,7 +39021,7 @@
           <p:cNvPr id="9" name="">
             <a:extLst xmlns:a="http://schemas.openxmlformats.org/drawingml/2006/main">
               <a:ext uri="{FF2B5EF4-FFF2-40B4-BE49-F238E27FC236}">
-                <a16:creationId xmlns:a16="http://schemas.microsoft.com/office/drawing/2014/main" id="{925F1B7B-7AB6-4102-AB3D-BA08A34CCB59}"/>
+                <a16:creationId xmlns:a16="http://schemas.microsoft.com/office/drawing/2014/main" id="{B2A6474A-CD8C-42F2-A209-3452FB9FBDE6}"/>
               </a:ext>
             </a:extLst>
           </p:cNvPr>
@@ -39073,7 +39073,7 @@
           <p:cNvPr id="10" name="">
             <a:extLst xmlns:a="http://schemas.openxmlformats.org/drawingml/2006/main">
               <a:ext uri="{FF2B5EF4-FFF2-40B4-BE49-F238E27FC236}">
-                <a16:creationId xmlns:a16="http://schemas.microsoft.com/office/drawing/2014/main" id="{32612E08-D007-409F-B38F-E6B0B6C9D058}"/>
+                <a16:creationId xmlns:a16="http://schemas.microsoft.com/office/drawing/2014/main" id="{252B9AE9-6984-40ED-8A03-59924F1E2DCB}"/>
               </a:ext>
             </a:extLst>
           </p:cNvPr>
@@ -39125,7 +39125,7 @@
           <p:cNvPr id="11" name="">
             <a:extLst xmlns:a="http://schemas.openxmlformats.org/drawingml/2006/main">
               <a:ext uri="{FF2B5EF4-FFF2-40B4-BE49-F238E27FC236}">
-                <a16:creationId xmlns:a16="http://schemas.microsoft.com/office/drawing/2014/main" id="{FC6A659C-DA28-4E02-B63D-48BF579913DA}"/>
+                <a16:creationId xmlns:a16="http://schemas.microsoft.com/office/drawing/2014/main" id="{0A5FB0EF-6980-4111-9213-5FF25C9843B4}"/>
               </a:ext>
             </a:extLst>
           </p:cNvPr>
@@ -39172,10 +39172,10 @@
           <p:nvPr/>
         </p:nvPicPr>
         <p:blipFill>
-          <a:blip xmlns:r="http://schemas.openxmlformats.org/officeDocument/2006/relationships" xmlns:a="http://schemas.openxmlformats.org/drawingml/2006/main" r:embed="R450a9798d14746af">
+          <a:blip xmlns:r="http://schemas.openxmlformats.org/officeDocument/2006/relationships" xmlns:a="http://schemas.openxmlformats.org/drawingml/2006/main" r:embed="R0d7cde7b04554676">
             <a:extLst>
               <a:ext uri="{96DAC541-7B7A-43D3-8B79-37D633B846F1}">
-                <asvg:svgBlip xmlns:asvg="http://schemas.microsoft.com/office/drawing/2016/SVG/main" r:embed="R4c4d9ad011d34710"/>
+                <asvg:svgBlip xmlns:asvg="http://schemas.microsoft.com/office/drawing/2016/SVG/main" r:embed="R2f4e3d9335bf45cc"/>
               </a:ext>
             </a:extLst>
           </a:blip>
@@ -39196,7 +39196,7 @@
           <p:cNvPr id="13" name="">
             <a:extLst xmlns:a="http://schemas.openxmlformats.org/drawingml/2006/main">
               <a:ext uri="{FF2B5EF4-FFF2-40B4-BE49-F238E27FC236}">
-                <a16:creationId xmlns:a16="http://schemas.microsoft.com/office/drawing/2014/main" id="{0A8D6485-C35B-4C3C-85CF-85F64ADCE0B5}"/>
+                <a16:creationId xmlns:a16="http://schemas.microsoft.com/office/drawing/2014/main" id="{B19311CA-1D85-4F47-B51B-9901193C9671}"/>
               </a:ext>
             </a:extLst>
           </p:cNvPr>
@@ -39229,7 +39229,7 @@
           <p:cNvPr id="14" name="">
             <a:extLst xmlns:a="http://schemas.openxmlformats.org/drawingml/2006/main">
               <a:ext uri="{FF2B5EF4-FFF2-40B4-BE49-F238E27FC236}">
-                <a16:creationId xmlns:a16="http://schemas.microsoft.com/office/drawing/2014/main" id="{5A9CA7B9-AE75-44F5-B98E-065E26BCFF24}"/>
+                <a16:creationId xmlns:a16="http://schemas.microsoft.com/office/drawing/2014/main" id="{DE168CC6-5AAF-4F44-87E8-575FBBD25506}"/>
               </a:ext>
             </a:extLst>
           </p:cNvPr>
@@ -39281,7 +39281,7 @@
           <p:cNvPr id="15" name="">
             <a:extLst xmlns:a="http://schemas.openxmlformats.org/drawingml/2006/main">
               <a:ext uri="{FF2B5EF4-FFF2-40B4-BE49-F238E27FC236}">
-                <a16:creationId xmlns:a16="http://schemas.microsoft.com/office/drawing/2014/main" id="{7D19A8D5-57AE-473A-91FE-7DC11EA8BFB5}"/>
+                <a16:creationId xmlns:a16="http://schemas.microsoft.com/office/drawing/2014/main" id="{950EADF3-442A-4086-A4FE-70FE779FFFC0}"/>
               </a:ext>
             </a:extLst>
           </p:cNvPr>
@@ -39314,7 +39314,7 @@
           <p:cNvPr id="16" name="">
             <a:extLst xmlns:a="http://schemas.openxmlformats.org/drawingml/2006/main">
               <a:ext uri="{FF2B5EF4-FFF2-40B4-BE49-F238E27FC236}">
-                <a16:creationId xmlns:a16="http://schemas.microsoft.com/office/drawing/2014/main" id="{4CC7A5B2-E71F-409C-8A63-721CD029F4DF}"/>
+                <a16:creationId xmlns:a16="http://schemas.microsoft.com/office/drawing/2014/main" id="{B9FE3C3F-090B-4014-9F69-1FFE7B0760DA}"/>
               </a:ext>
             </a:extLst>
           </p:cNvPr>
@@ -39366,7 +39366,7 @@
           <p:cNvPr id="17" name="">
             <a:extLst xmlns:a="http://schemas.openxmlformats.org/drawingml/2006/main">
               <a:ext uri="{FF2B5EF4-FFF2-40B4-BE49-F238E27FC236}">
-                <a16:creationId xmlns:a16="http://schemas.microsoft.com/office/drawing/2014/main" id="{48785A5F-7372-47D2-90BC-F4B95BCD0455}"/>
+                <a16:creationId xmlns:a16="http://schemas.microsoft.com/office/drawing/2014/main" id="{9EF0CFE4-225B-4F7F-BADD-3B9F516A07D0}"/>
               </a:ext>
             </a:extLst>
           </p:cNvPr>
@@ -39399,7 +39399,7 @@
           <p:cNvPr id="18" name="">
             <a:extLst xmlns:a="http://schemas.openxmlformats.org/drawingml/2006/main">
               <a:ext uri="{FF2B5EF4-FFF2-40B4-BE49-F238E27FC236}">
-                <a16:creationId xmlns:a16="http://schemas.microsoft.com/office/drawing/2014/main" id="{5FE6CCC7-43DE-495D-8A2C-576D10585A23}"/>
+                <a16:creationId xmlns:a16="http://schemas.microsoft.com/office/drawing/2014/main" id="{F351C31F-1B6B-41D8-88FD-01EA498540FD}"/>
               </a:ext>
             </a:extLst>
           </p:cNvPr>
@@ -39451,7 +39451,7 @@
           <p:cNvPr id="19" name="">
             <a:extLst xmlns:a="http://schemas.openxmlformats.org/drawingml/2006/main">
               <a:ext uri="{FF2B5EF4-FFF2-40B4-BE49-F238E27FC236}">
-                <a16:creationId xmlns:a16="http://schemas.microsoft.com/office/drawing/2014/main" id="{20B7E3EB-2A26-48C7-BC77-87DBB8AAC08F}"/>
+                <a16:creationId xmlns:a16="http://schemas.microsoft.com/office/drawing/2014/main" id="{FF51409F-C326-4BB1-8BC3-BBD57B7B489F}"/>
               </a:ext>
             </a:extLst>
           </p:cNvPr>
@@ -39484,7 +39484,7 @@
           <p:cNvPr id="20" name="">
             <a:extLst xmlns:a="http://schemas.openxmlformats.org/drawingml/2006/main">
               <a:ext uri="{FF2B5EF4-FFF2-40B4-BE49-F238E27FC236}">
-                <a16:creationId xmlns:a16="http://schemas.microsoft.com/office/drawing/2014/main" id="{760E972C-E8B5-4E9C-B2ED-37C20BD1DEDB}"/>
+                <a16:creationId xmlns:a16="http://schemas.microsoft.com/office/drawing/2014/main" id="{BD54AEF3-F836-4506-B99A-14FFC5E48B24}"/>
               </a:ext>
             </a:extLst>
           </p:cNvPr>
@@ -39536,7 +39536,7 @@
           <p:cNvPr id="21" name="">
             <a:extLst xmlns:a="http://schemas.openxmlformats.org/drawingml/2006/main">
               <a:ext uri="{FF2B5EF4-FFF2-40B4-BE49-F238E27FC236}">
-                <a16:creationId xmlns:a16="http://schemas.microsoft.com/office/drawing/2014/main" id="{63BA8FC3-6A11-48ED-8E34-0A8E50F24BFC}"/>
+                <a16:creationId xmlns:a16="http://schemas.microsoft.com/office/drawing/2014/main" id="{CCDA42F2-1678-4266-9D26-E9C115B25ACF}"/>
               </a:ext>
             </a:extLst>
           </p:cNvPr>
@@ -39569,7 +39569,7 @@
           <p:cNvPr id="22" name="">
             <a:extLst xmlns:a="http://schemas.openxmlformats.org/drawingml/2006/main">
               <a:ext uri="{FF2B5EF4-FFF2-40B4-BE49-F238E27FC236}">
-                <a16:creationId xmlns:a16="http://schemas.microsoft.com/office/drawing/2014/main" id="{CFA370F5-BB67-4E01-BC31-A9757A62DCCA}"/>
+                <a16:creationId xmlns:a16="http://schemas.microsoft.com/office/drawing/2014/main" id="{87475EE6-B3BB-4551-AC48-19B10BF2B443}"/>
               </a:ext>
             </a:extLst>
           </p:cNvPr>
@@ -39621,7 +39621,7 @@
           <p:cNvPr id="23" name="">
             <a:extLst xmlns:a="http://schemas.openxmlformats.org/drawingml/2006/main">
               <a:ext uri="{FF2B5EF4-FFF2-40B4-BE49-F238E27FC236}">
-                <a16:creationId xmlns:a16="http://schemas.microsoft.com/office/drawing/2014/main" id="{616B08A6-45F9-4207-9A89-E5D77C8A5D5C}"/>
+                <a16:creationId xmlns:a16="http://schemas.microsoft.com/office/drawing/2014/main" id="{25E1E83B-DDED-40DC-ADA4-6B8A4ABB9955}"/>
               </a:ext>
             </a:extLst>
           </p:cNvPr>
@@ -39654,7 +39654,7 @@
           <p:cNvPr id="24" name="">
             <a:extLst xmlns:a="http://schemas.openxmlformats.org/drawingml/2006/main">
               <a:ext uri="{FF2B5EF4-FFF2-40B4-BE49-F238E27FC236}">
-                <a16:creationId xmlns:a16="http://schemas.microsoft.com/office/drawing/2014/main" id="{1CE3FDF0-F81A-49B8-852B-02327B507D2A}"/>
+                <a16:creationId xmlns:a16="http://schemas.microsoft.com/office/drawing/2014/main" id="{281F57D2-3299-4471-8677-B8FDB03FD03A}"/>
               </a:ext>
             </a:extLst>
           </p:cNvPr>
@@ -39706,7 +39706,7 @@
           <p:cNvPr id="25" name="">
             <a:extLst xmlns:a="http://schemas.openxmlformats.org/drawingml/2006/main">
               <a:ext uri="{FF2B5EF4-FFF2-40B4-BE49-F238E27FC236}">
-                <a16:creationId xmlns:a16="http://schemas.microsoft.com/office/drawing/2014/main" id="{20FD7FA9-9BA8-48F0-9A46-CF2A828AB6B1}"/>
+                <a16:creationId xmlns:a16="http://schemas.microsoft.com/office/drawing/2014/main" id="{E4AEE3C2-4C5D-475E-97DE-ADE93381AF29}"/>
               </a:ext>
             </a:extLst>
           </p:cNvPr>
@@ -39739,7 +39739,7 @@
           <p:cNvPr id="26" name="">
             <a:extLst xmlns:a="http://schemas.openxmlformats.org/drawingml/2006/main">
               <a:ext uri="{FF2B5EF4-FFF2-40B4-BE49-F238E27FC236}">
-                <a16:creationId xmlns:a16="http://schemas.microsoft.com/office/drawing/2014/main" id="{7AEA7BDF-1F0A-4F4A-B88C-BC74051B6D76}"/>
+                <a16:creationId xmlns:a16="http://schemas.microsoft.com/office/drawing/2014/main" id="{FB6194D0-7E91-43B3-90D2-F622C848F1C9}"/>
               </a:ext>
             </a:extLst>
           </p:cNvPr>
@@ -39791,7 +39791,7 @@
           <p:cNvPr id="27" name="">
             <a:extLst xmlns:a="http://schemas.openxmlformats.org/drawingml/2006/main">
               <a:ext uri="{FF2B5EF4-FFF2-40B4-BE49-F238E27FC236}">
-                <a16:creationId xmlns:a16="http://schemas.microsoft.com/office/drawing/2014/main" id="{50C56051-8AC1-4828-98FB-A9584DE4A7CA}"/>
+                <a16:creationId xmlns:a16="http://schemas.microsoft.com/office/drawing/2014/main" id="{228CE824-6639-4E02-AEDF-8B93B3CE21FC}"/>
               </a:ext>
             </a:extLst>
           </p:cNvPr>
@@ -39824,7 +39824,7 @@
           <p:cNvPr id="28" name="">
             <a:extLst xmlns:a="http://schemas.openxmlformats.org/drawingml/2006/main">
               <a:ext uri="{FF2B5EF4-FFF2-40B4-BE49-F238E27FC236}">
-                <a16:creationId xmlns:a16="http://schemas.microsoft.com/office/drawing/2014/main" id="{0AB8A599-BAA3-4046-808D-C065C8646EEF}"/>
+                <a16:creationId xmlns:a16="http://schemas.microsoft.com/office/drawing/2014/main" id="{1438B5CB-ABEB-4C66-A27C-10FEE70AB152}"/>
               </a:ext>
             </a:extLst>
           </p:cNvPr>
@@ -39876,7 +39876,7 @@
           <p:cNvPr id="29" name="">
             <a:extLst xmlns:a="http://schemas.openxmlformats.org/drawingml/2006/main">
               <a:ext uri="{FF2B5EF4-FFF2-40B4-BE49-F238E27FC236}">
-                <a16:creationId xmlns:a16="http://schemas.microsoft.com/office/drawing/2014/main" id="{453BB110-EBC3-44F9-9274-7925DE8EBD5A}"/>
+                <a16:creationId xmlns:a16="http://schemas.microsoft.com/office/drawing/2014/main" id="{24A4CC2F-68E2-458D-917E-E9D923502C63}"/>
               </a:ext>
             </a:extLst>
           </p:cNvPr>
@@ -39909,7 +39909,7 @@
           <p:cNvPr id="30" name="">
             <a:extLst xmlns:a="http://schemas.openxmlformats.org/drawingml/2006/main">
               <a:ext uri="{FF2B5EF4-FFF2-40B4-BE49-F238E27FC236}">
-                <a16:creationId xmlns:a16="http://schemas.microsoft.com/office/drawing/2014/main" id="{110BBF88-1CAC-4D46-A686-E70DB62B67F2}"/>
+                <a16:creationId xmlns:a16="http://schemas.microsoft.com/office/drawing/2014/main" id="{0F800659-DA63-4542-B587-DECA10176949}"/>
               </a:ext>
             </a:extLst>
           </p:cNvPr>
@@ -39961,7 +39961,7 @@
           <p:cNvPr id="31" name="">
             <a:extLst xmlns:a="http://schemas.openxmlformats.org/drawingml/2006/main">
               <a:ext uri="{FF2B5EF4-FFF2-40B4-BE49-F238E27FC236}">
-                <a16:creationId xmlns:a16="http://schemas.microsoft.com/office/drawing/2014/main" id="{04750705-5BA4-478A-A414-DF8C0E865C90}"/>
+                <a16:creationId xmlns:a16="http://schemas.microsoft.com/office/drawing/2014/main" id="{1DCABB37-A094-476F-887E-4BBA1E9A87E2}"/>
               </a:ext>
             </a:extLst>
           </p:cNvPr>
@@ -39994,7 +39994,7 @@
           <p:cNvPr id="32" name="">
             <a:extLst xmlns:a="http://schemas.openxmlformats.org/drawingml/2006/main">
               <a:ext uri="{FF2B5EF4-FFF2-40B4-BE49-F238E27FC236}">
-                <a16:creationId xmlns:a16="http://schemas.microsoft.com/office/drawing/2014/main" id="{6AABA8A8-9BCE-4FE6-BEBA-D9B97338BB39}"/>
+                <a16:creationId xmlns:a16="http://schemas.microsoft.com/office/drawing/2014/main" id="{79EFE364-EF68-477F-B1AE-62CD01E89409}"/>
               </a:ext>
             </a:extLst>
           </p:cNvPr>
@@ -40046,7 +40046,7 @@
           <p:cNvPr id="33" name="">
             <a:extLst xmlns:a="http://schemas.openxmlformats.org/drawingml/2006/main">
               <a:ext uri="{FF2B5EF4-FFF2-40B4-BE49-F238E27FC236}">
-                <a16:creationId xmlns:a16="http://schemas.microsoft.com/office/drawing/2014/main" id="{69954D14-83A6-45AA-8CE1-34B254F38A5F}"/>
+                <a16:creationId xmlns:a16="http://schemas.microsoft.com/office/drawing/2014/main" id="{ED59566C-5C80-4BDF-B09F-E2FE41F254CD}"/>
               </a:ext>
             </a:extLst>
           </p:cNvPr>
@@ -40079,7 +40079,7 @@
           <p:cNvPr id="34" name="">
             <a:extLst xmlns:a="http://schemas.openxmlformats.org/drawingml/2006/main">
               <a:ext uri="{FF2B5EF4-FFF2-40B4-BE49-F238E27FC236}">
-                <a16:creationId xmlns:a16="http://schemas.microsoft.com/office/drawing/2014/main" id="{1520ACBD-444B-4B71-927E-F4981A9DEE58}"/>
+                <a16:creationId xmlns:a16="http://schemas.microsoft.com/office/drawing/2014/main" id="{894DCAAA-8F3F-48D5-83CB-F2A8C84AF828}"/>
               </a:ext>
             </a:extLst>
           </p:cNvPr>
@@ -40129,7 +40129,7 @@
     </p:spTree>
     <p:extLst>
       <p:ext uri="{BB962C8B-B14F-4D97-AF65-F5344CB8AC3E}">
-        <p14:creationId xmlns:p14="http://schemas.microsoft.com/office/powerpoint/2010/main" val="757930925"/>
+        <p14:creationId xmlns:p14="http://schemas.microsoft.com/office/powerpoint/2010/main" val="483643129"/>
       </p:ext>
     </p:extLst>
   </p:cSld>
@@ -40160,7 +40160,7 @@
           <p:cNvPr id="102" name="">
             <a:extLst xmlns:a="http://schemas.openxmlformats.org/drawingml/2006/main">
               <a:ext uri="{FF2B5EF4-FFF2-40B4-BE49-F238E27FC236}">
-                <a16:creationId xmlns:a16="http://schemas.microsoft.com/office/drawing/2014/main" id="{6DE8CAD9-FE66-4138-8AED-2EB39823CA11}"/>
+                <a16:creationId xmlns:a16="http://schemas.microsoft.com/office/drawing/2014/main" id="{EB167F49-70EB-46E1-A739-D164C710D171}"/>
               </a:ext>
             </a:extLst>
           </p:cNvPr>
@@ -40193,7 +40193,7 @@
           <p:cNvPr id="2" name="">
             <a:extLst xmlns:a="http://schemas.openxmlformats.org/drawingml/2006/main">
               <a:ext uri="{FF2B5EF4-FFF2-40B4-BE49-F238E27FC236}">
-                <a16:creationId xmlns:a16="http://schemas.microsoft.com/office/drawing/2014/main" id="{436A8F41-343F-4C88-9533-489F78184D86}"/>
+                <a16:creationId xmlns:a16="http://schemas.microsoft.com/office/drawing/2014/main" id="{AF9AD69C-58B3-4747-BB3D-C1CBB1060859}"/>
               </a:ext>
             </a:extLst>
           </p:cNvPr>
@@ -40224,7 +40224,7 @@
           <p:cNvPr id="3" name="">
             <a:extLst xmlns:a="http://schemas.openxmlformats.org/drawingml/2006/main">
               <a:ext uri="{FF2B5EF4-FFF2-40B4-BE49-F238E27FC236}">
-                <a16:creationId xmlns:a16="http://schemas.microsoft.com/office/drawing/2014/main" id="{2DC3D43C-F0D5-42C0-9A56-FFAF8A944E65}"/>
+                <a16:creationId xmlns:a16="http://schemas.microsoft.com/office/drawing/2014/main" id="{1096E7B4-CAFA-4EBD-9AEF-9DA97FBD8019}"/>
               </a:ext>
             </a:extLst>
           </p:cNvPr>
@@ -40276,7 +40276,7 @@
           <p:cNvPr id="4" name="">
             <a:extLst xmlns:a="http://schemas.openxmlformats.org/drawingml/2006/main">
               <a:ext uri="{FF2B5EF4-FFF2-40B4-BE49-F238E27FC236}">
-                <a16:creationId xmlns:a16="http://schemas.microsoft.com/office/drawing/2014/main" id="{305EEA64-82C4-4266-8335-400642F55063}"/>
+                <a16:creationId xmlns:a16="http://schemas.microsoft.com/office/drawing/2014/main" id="{E724DA51-FE48-4310-965C-436582CB41EC}"/>
               </a:ext>
             </a:extLst>
           </p:cNvPr>
@@ -40328,7 +40328,7 @@
           <p:cNvPr id="5" name="">
             <a:extLst xmlns:a="http://schemas.openxmlformats.org/drawingml/2006/main">
               <a:ext uri="{FF2B5EF4-FFF2-40B4-BE49-F238E27FC236}">
-                <a16:creationId xmlns:a16="http://schemas.microsoft.com/office/drawing/2014/main" id="{E02B4AC6-6B95-4E21-991A-9C05F4AADF75}"/>
+                <a16:creationId xmlns:a16="http://schemas.microsoft.com/office/drawing/2014/main" id="{A670C20A-BD7E-428A-986D-B0963ED8BB9F}"/>
               </a:ext>
             </a:extLst>
           </p:cNvPr>
@@ -40363,7 +40363,7 @@
           <p:nvPr/>
         </p:nvPicPr>
         <p:blipFill>
-          <a:blip xmlns:r="http://schemas.openxmlformats.org/officeDocument/2006/relationships" xmlns:a="http://schemas.openxmlformats.org/drawingml/2006/main" r:embed="Rcdfbf1b53d7b4c0c"/>
+          <a:blip xmlns:r="http://schemas.openxmlformats.org/officeDocument/2006/relationships" xmlns:a="http://schemas.openxmlformats.org/drawingml/2006/main" r:embed="R4f3afcbafcc447da"/>
           <a:stretch xmlns:a="http://schemas.openxmlformats.org/drawingml/2006/main"/>
         </p:blipFill>
         <p:spPr>
@@ -40381,7 +40381,7 @@
           <p:cNvPr id="7" name="">
             <a:extLst xmlns:a="http://schemas.openxmlformats.org/drawingml/2006/main">
               <a:ext uri="{FF2B5EF4-FFF2-40B4-BE49-F238E27FC236}">
-                <a16:creationId xmlns:a16="http://schemas.microsoft.com/office/drawing/2014/main" id="{1AE5D0E5-E98C-42A5-ABE0-DF712E21D813}"/>
+                <a16:creationId xmlns:a16="http://schemas.microsoft.com/office/drawing/2014/main" id="{41414DCE-F731-48B3-804B-F3EB0DACBF36}"/>
               </a:ext>
             </a:extLst>
           </p:cNvPr>
@@ -40433,7 +40433,7 @@
           <p:cNvPr id="8" name="">
             <a:extLst xmlns:a="http://schemas.openxmlformats.org/drawingml/2006/main">
               <a:ext uri="{FF2B5EF4-FFF2-40B4-BE49-F238E27FC236}">
-                <a16:creationId xmlns:a16="http://schemas.microsoft.com/office/drawing/2014/main" id="{8E5F5851-0B2E-4BA5-9BD8-86B3435BA692}"/>
+                <a16:creationId xmlns:a16="http://schemas.microsoft.com/office/drawing/2014/main" id="{DAAC2E80-4D3A-4CBC-8CE4-FC39221BBC1A}"/>
               </a:ext>
             </a:extLst>
           </p:cNvPr>
@@ -40485,7 +40485,7 @@
           <p:cNvPr id="9" name="">
             <a:extLst xmlns:a="http://schemas.openxmlformats.org/drawingml/2006/main">
               <a:ext uri="{FF2B5EF4-FFF2-40B4-BE49-F238E27FC236}">
-                <a16:creationId xmlns:a16="http://schemas.microsoft.com/office/drawing/2014/main" id="{82A201B7-97ED-4422-8C0B-EC35CAEC93FA}"/>
+                <a16:creationId xmlns:a16="http://schemas.microsoft.com/office/drawing/2014/main" id="{E56E2D85-1E6F-4A42-98E8-FD244A99CB69}"/>
               </a:ext>
             </a:extLst>
           </p:cNvPr>
@@ -40537,7 +40537,7 @@
           <p:cNvPr id="10" name="">
             <a:extLst xmlns:a="http://schemas.openxmlformats.org/drawingml/2006/main">
               <a:ext uri="{FF2B5EF4-FFF2-40B4-BE49-F238E27FC236}">
-                <a16:creationId xmlns:a16="http://schemas.microsoft.com/office/drawing/2014/main" id="{415559AE-4B54-4E22-84A7-2D9598B70EE9}"/>
+                <a16:creationId xmlns:a16="http://schemas.microsoft.com/office/drawing/2014/main" id="{D0F848B0-1E33-4E06-A477-06A6A16456D4}"/>
               </a:ext>
             </a:extLst>
           </p:cNvPr>
@@ -40589,7 +40589,7 @@
           <p:cNvPr id="11" name="">
             <a:extLst xmlns:a="http://schemas.openxmlformats.org/drawingml/2006/main">
               <a:ext uri="{FF2B5EF4-FFF2-40B4-BE49-F238E27FC236}">
-                <a16:creationId xmlns:a16="http://schemas.microsoft.com/office/drawing/2014/main" id="{9F9332EC-82CD-4BCC-9B8C-906A7B07D782}"/>
+                <a16:creationId xmlns:a16="http://schemas.microsoft.com/office/drawing/2014/main" id="{46FBC052-E5E5-40F9-9D8C-366123BAB32D}"/>
               </a:ext>
             </a:extLst>
           </p:cNvPr>
@@ -40620,7 +40620,7 @@
           <p:cNvPr id="12" name="">
             <a:extLst xmlns:a="http://schemas.openxmlformats.org/drawingml/2006/main">
               <a:ext uri="{FF2B5EF4-FFF2-40B4-BE49-F238E27FC236}">
-                <a16:creationId xmlns:a16="http://schemas.microsoft.com/office/drawing/2014/main" id="{6AD49CC0-EEAF-4A1E-8EB8-24765A929C54}"/>
+                <a16:creationId xmlns:a16="http://schemas.microsoft.com/office/drawing/2014/main" id="{E3B930FF-9591-4DC8-A1B8-FAE66384DE50}"/>
               </a:ext>
             </a:extLst>
           </p:cNvPr>
@@ -40651,7 +40651,7 @@
           <p:cNvPr id="13" name="">
             <a:extLst xmlns:a="http://schemas.openxmlformats.org/drawingml/2006/main">
               <a:ext uri="{FF2B5EF4-FFF2-40B4-BE49-F238E27FC236}">
-                <a16:creationId xmlns:a16="http://schemas.microsoft.com/office/drawing/2014/main" id="{4F5724D5-2A83-4449-A4DF-90C316DEC42A}"/>
+                <a16:creationId xmlns:a16="http://schemas.microsoft.com/office/drawing/2014/main" id="{25F21889-1C24-478C-A7AE-5DE3075AF50C}"/>
               </a:ext>
             </a:extLst>
           </p:cNvPr>
@@ -40703,7 +40703,7 @@
           <p:cNvPr id="14" name="">
             <a:extLst xmlns:a="http://schemas.openxmlformats.org/drawingml/2006/main">
               <a:ext uri="{FF2B5EF4-FFF2-40B4-BE49-F238E27FC236}">
-                <a16:creationId xmlns:a16="http://schemas.microsoft.com/office/drawing/2014/main" id="{60795CE0-0DD2-472A-923E-289B2EE02C14}"/>
+                <a16:creationId xmlns:a16="http://schemas.microsoft.com/office/drawing/2014/main" id="{D295A286-7178-46FA-A18F-E39B5CA2293D}"/>
               </a:ext>
             </a:extLst>
           </p:cNvPr>
@@ -40755,7 +40755,7 @@
           <p:cNvPr id="15" name="">
             <a:extLst xmlns:a="http://schemas.openxmlformats.org/drawingml/2006/main">
               <a:ext uri="{FF2B5EF4-FFF2-40B4-BE49-F238E27FC236}">
-                <a16:creationId xmlns:a16="http://schemas.microsoft.com/office/drawing/2014/main" id="{6F8A10EC-853F-4091-BD08-D5DF4F90EECF}"/>
+                <a16:creationId xmlns:a16="http://schemas.microsoft.com/office/drawing/2014/main" id="{3AE5914D-CBEF-4518-AC77-6C29073AF1F6}"/>
               </a:ext>
             </a:extLst>
           </p:cNvPr>
@@ -40807,7 +40807,7 @@
           <p:cNvPr id="16" name="">
             <a:extLst xmlns:a="http://schemas.openxmlformats.org/drawingml/2006/main">
               <a:ext uri="{FF2B5EF4-FFF2-40B4-BE49-F238E27FC236}">
-                <a16:creationId xmlns:a16="http://schemas.microsoft.com/office/drawing/2014/main" id="{66AD158D-DFDD-4A5D-90AE-3D98704E1512}"/>
+                <a16:creationId xmlns:a16="http://schemas.microsoft.com/office/drawing/2014/main" id="{2B217AF1-4180-480B-909F-DF2302596BF9}"/>
               </a:ext>
             </a:extLst>
           </p:cNvPr>
@@ -40859,7 +40859,7 @@
           <p:cNvPr id="17" name="">
             <a:extLst xmlns:a="http://schemas.openxmlformats.org/drawingml/2006/main">
               <a:ext uri="{FF2B5EF4-FFF2-40B4-BE49-F238E27FC236}">
-                <a16:creationId xmlns:a16="http://schemas.microsoft.com/office/drawing/2014/main" id="{6CF883AF-D960-4D99-BE82-EE6296F825DB}"/>
+                <a16:creationId xmlns:a16="http://schemas.microsoft.com/office/drawing/2014/main" id="{D4F445D4-244F-446A-BAD9-677BB71E5561}"/>
               </a:ext>
             </a:extLst>
           </p:cNvPr>
@@ -40911,7 +40911,7 @@
           <p:cNvPr id="18" name="">
             <a:extLst xmlns:a="http://schemas.openxmlformats.org/drawingml/2006/main">
               <a:ext uri="{FF2B5EF4-FFF2-40B4-BE49-F238E27FC236}">
-                <a16:creationId xmlns:a16="http://schemas.microsoft.com/office/drawing/2014/main" id="{785EB07B-7320-4F93-AB34-15A733FBDF72}"/>
+                <a16:creationId xmlns:a16="http://schemas.microsoft.com/office/drawing/2014/main" id="{B45C633E-1460-4B5A-821E-23E0D40323F6}"/>
               </a:ext>
             </a:extLst>
           </p:cNvPr>
@@ -40942,7 +40942,7 @@
           <p:cNvPr id="19" name="">
             <a:extLst xmlns:a="http://schemas.openxmlformats.org/drawingml/2006/main">
               <a:ext uri="{FF2B5EF4-FFF2-40B4-BE49-F238E27FC236}">
-                <a16:creationId xmlns:a16="http://schemas.microsoft.com/office/drawing/2014/main" id="{3D4DDEB9-C812-4ECA-A3B9-08582891AD22}"/>
+                <a16:creationId xmlns:a16="http://schemas.microsoft.com/office/drawing/2014/main" id="{E97CFE03-426A-40CF-9CE2-0D6E43F76B3D}"/>
               </a:ext>
             </a:extLst>
           </p:cNvPr>
@@ -40994,7 +40994,7 @@
           <p:cNvPr id="20" name="">
             <a:extLst xmlns:a="http://schemas.openxmlformats.org/drawingml/2006/main">
               <a:ext uri="{FF2B5EF4-FFF2-40B4-BE49-F238E27FC236}">
-                <a16:creationId xmlns:a16="http://schemas.microsoft.com/office/drawing/2014/main" id="{2E5093CA-3D84-46BB-835D-8BF3EE1C1242}"/>
+                <a16:creationId xmlns:a16="http://schemas.microsoft.com/office/drawing/2014/main" id="{674700EA-5662-4605-AD41-5C703781EABB}"/>
               </a:ext>
             </a:extLst>
           </p:cNvPr>
@@ -41046,7 +41046,7 @@
           <p:cNvPr id="21" name="">
             <a:extLst xmlns:a="http://schemas.openxmlformats.org/drawingml/2006/main">
               <a:ext uri="{FF2B5EF4-FFF2-40B4-BE49-F238E27FC236}">
-                <a16:creationId xmlns:a16="http://schemas.microsoft.com/office/drawing/2014/main" id="{D460C404-038F-44DB-9539-96CC04DD66F3}"/>
+                <a16:creationId xmlns:a16="http://schemas.microsoft.com/office/drawing/2014/main" id="{8BB2E91E-E559-405F-B37E-1954612FAB5B}"/>
               </a:ext>
             </a:extLst>
           </p:cNvPr>
@@ -41098,7 +41098,7 @@
           <p:cNvPr id="22" name="">
             <a:extLst xmlns:a="http://schemas.openxmlformats.org/drawingml/2006/main">
               <a:ext uri="{FF2B5EF4-FFF2-40B4-BE49-F238E27FC236}">
-                <a16:creationId xmlns:a16="http://schemas.microsoft.com/office/drawing/2014/main" id="{EEF5020B-D901-49BF-BED0-4CF9B842E2C5}"/>
+                <a16:creationId xmlns:a16="http://schemas.microsoft.com/office/drawing/2014/main" id="{5977CCD4-8130-4EBC-AEE0-6457672A6A13}"/>
               </a:ext>
             </a:extLst>
           </p:cNvPr>
@@ -41150,7 +41150,7 @@
           <p:cNvPr id="23" name="">
             <a:extLst xmlns:a="http://schemas.openxmlformats.org/drawingml/2006/main">
               <a:ext uri="{FF2B5EF4-FFF2-40B4-BE49-F238E27FC236}">
-                <a16:creationId xmlns:a16="http://schemas.microsoft.com/office/drawing/2014/main" id="{47EF74C3-8C0A-46E6-BC1D-9C662A1158F6}"/>
+                <a16:creationId xmlns:a16="http://schemas.microsoft.com/office/drawing/2014/main" id="{B0DAA729-DEE3-4B38-87E5-6DD09816927E}"/>
               </a:ext>
             </a:extLst>
           </p:cNvPr>
@@ -41202,7 +41202,7 @@
           <p:cNvPr id="24" name="">
             <a:extLst xmlns:a="http://schemas.openxmlformats.org/drawingml/2006/main">
               <a:ext uri="{FF2B5EF4-FFF2-40B4-BE49-F238E27FC236}">
-                <a16:creationId xmlns:a16="http://schemas.microsoft.com/office/drawing/2014/main" id="{00486726-EF30-43B0-B865-E7E910F2E6AA}"/>
+                <a16:creationId xmlns:a16="http://schemas.microsoft.com/office/drawing/2014/main" id="{8BFD7E22-6E89-4C28-B8C1-D7D206C81B6A}"/>
               </a:ext>
             </a:extLst>
           </p:cNvPr>
@@ -41233,7 +41233,7 @@
           <p:cNvPr id="25" name="">
             <a:extLst xmlns:a="http://schemas.openxmlformats.org/drawingml/2006/main">
               <a:ext uri="{FF2B5EF4-FFF2-40B4-BE49-F238E27FC236}">
-                <a16:creationId xmlns:a16="http://schemas.microsoft.com/office/drawing/2014/main" id="{8F0CE662-C277-412C-8D8A-4987DA4C349E}"/>
+                <a16:creationId xmlns:a16="http://schemas.microsoft.com/office/drawing/2014/main" id="{AE7DDC09-D28F-4203-A3FE-A709511FE90D}"/>
               </a:ext>
             </a:extLst>
           </p:cNvPr>
@@ -41264,7 +41264,7 @@
           <p:cNvPr id="26" name="">
             <a:extLst xmlns:a="http://schemas.openxmlformats.org/drawingml/2006/main">
               <a:ext uri="{FF2B5EF4-FFF2-40B4-BE49-F238E27FC236}">
-                <a16:creationId xmlns:a16="http://schemas.microsoft.com/office/drawing/2014/main" id="{5E3E6432-E822-475B-8B7C-C4DD0D6D880A}"/>
+                <a16:creationId xmlns:a16="http://schemas.microsoft.com/office/drawing/2014/main" id="{3FFB6679-F40E-472A-974B-8F80071B4D39}"/>
               </a:ext>
             </a:extLst>
           </p:cNvPr>
@@ -41316,7 +41316,7 @@
           <p:cNvPr id="27" name="">
             <a:extLst xmlns:a="http://schemas.openxmlformats.org/drawingml/2006/main">
               <a:ext uri="{FF2B5EF4-FFF2-40B4-BE49-F238E27FC236}">
-                <a16:creationId xmlns:a16="http://schemas.microsoft.com/office/drawing/2014/main" id="{AF237EF1-FC71-47FE-AB96-88C6F081F4F9}"/>
+                <a16:creationId xmlns:a16="http://schemas.microsoft.com/office/drawing/2014/main" id="{A029D77B-155B-4984-AB1A-7E36C6301C9B}"/>
               </a:ext>
             </a:extLst>
           </p:cNvPr>
@@ -41368,7 +41368,7 @@
           <p:cNvPr id="28" name="">
             <a:extLst xmlns:a="http://schemas.openxmlformats.org/drawingml/2006/main">
               <a:ext uri="{FF2B5EF4-FFF2-40B4-BE49-F238E27FC236}">
-                <a16:creationId xmlns:a16="http://schemas.microsoft.com/office/drawing/2014/main" id="{BE40F8F0-5245-4B1B-BCFB-8EDF8F314133}"/>
+                <a16:creationId xmlns:a16="http://schemas.microsoft.com/office/drawing/2014/main" id="{520FD3D2-5A15-48EF-B71C-3FEA48257F47}"/>
               </a:ext>
             </a:extLst>
           </p:cNvPr>
@@ -41420,7 +41420,7 @@
           <p:cNvPr id="29" name="">
             <a:extLst xmlns:a="http://schemas.openxmlformats.org/drawingml/2006/main">
               <a:ext uri="{FF2B5EF4-FFF2-40B4-BE49-F238E27FC236}">
-                <a16:creationId xmlns:a16="http://schemas.microsoft.com/office/drawing/2014/main" id="{B83D912F-4336-403F-BAAD-0F25751EC4CF}"/>
+                <a16:creationId xmlns:a16="http://schemas.microsoft.com/office/drawing/2014/main" id="{1AB087D9-EB7E-4BCD-A988-FBDDCD63C44B}"/>
               </a:ext>
             </a:extLst>
           </p:cNvPr>
@@ -41472,7 +41472,7 @@
           <p:cNvPr id="30" name="">
             <a:extLst xmlns:a="http://schemas.openxmlformats.org/drawingml/2006/main">
               <a:ext uri="{FF2B5EF4-FFF2-40B4-BE49-F238E27FC236}">
-                <a16:creationId xmlns:a16="http://schemas.microsoft.com/office/drawing/2014/main" id="{5DB6B425-FF31-42ED-8BFB-71C53A09BD43}"/>
+                <a16:creationId xmlns:a16="http://schemas.microsoft.com/office/drawing/2014/main" id="{B4CD4697-B673-4552-B991-96B4B0466456}"/>
               </a:ext>
             </a:extLst>
           </p:cNvPr>
@@ -41524,7 +41524,7 @@
           <p:cNvPr id="31" name="">
             <a:extLst xmlns:a="http://schemas.openxmlformats.org/drawingml/2006/main">
               <a:ext uri="{FF2B5EF4-FFF2-40B4-BE49-F238E27FC236}">
-                <a16:creationId xmlns:a16="http://schemas.microsoft.com/office/drawing/2014/main" id="{48AB30E1-1706-4440-8908-36E7028EB6B7}"/>
+                <a16:creationId xmlns:a16="http://schemas.microsoft.com/office/drawing/2014/main" id="{970F85D6-8153-4FBF-BE8B-F72587886A4D}"/>
               </a:ext>
             </a:extLst>
           </p:cNvPr>
@@ -41555,7 +41555,7 @@
           <p:cNvPr id="32" name="">
             <a:extLst xmlns:a="http://schemas.openxmlformats.org/drawingml/2006/main">
               <a:ext uri="{FF2B5EF4-FFF2-40B4-BE49-F238E27FC236}">
-                <a16:creationId xmlns:a16="http://schemas.microsoft.com/office/drawing/2014/main" id="{DE7A81C6-8EFF-4EB5-9C99-020359E23D45}"/>
+                <a16:creationId xmlns:a16="http://schemas.microsoft.com/office/drawing/2014/main" id="{2A9AA7B4-DB7C-425A-9C35-8680A8ECA707}"/>
               </a:ext>
             </a:extLst>
           </p:cNvPr>
@@ -41607,7 +41607,7 @@
           <p:cNvPr id="33" name="">
             <a:extLst xmlns:a="http://schemas.openxmlformats.org/drawingml/2006/main">
               <a:ext uri="{FF2B5EF4-FFF2-40B4-BE49-F238E27FC236}">
-                <a16:creationId xmlns:a16="http://schemas.microsoft.com/office/drawing/2014/main" id="{750CB185-6F8A-4120-B408-E35DBEFF75F1}"/>
+                <a16:creationId xmlns:a16="http://schemas.microsoft.com/office/drawing/2014/main" id="{D6C3E265-AE6B-4FB4-930C-A4054ABA1083}"/>
               </a:ext>
             </a:extLst>
           </p:cNvPr>
@@ -41659,7 +41659,7 @@
           <p:cNvPr id="34" name="">
             <a:extLst xmlns:a="http://schemas.openxmlformats.org/drawingml/2006/main">
               <a:ext uri="{FF2B5EF4-FFF2-40B4-BE49-F238E27FC236}">
-                <a16:creationId xmlns:a16="http://schemas.microsoft.com/office/drawing/2014/main" id="{5F5CCC0D-05D1-4DBC-8095-14F97289B3A7}"/>
+                <a16:creationId xmlns:a16="http://schemas.microsoft.com/office/drawing/2014/main" id="{B07BFC81-94AE-454D-8D61-D64B97661AEF}"/>
               </a:ext>
             </a:extLst>
           </p:cNvPr>
@@ -41711,7 +41711,7 @@
           <p:cNvPr id="35" name="">
             <a:extLst xmlns:a="http://schemas.openxmlformats.org/drawingml/2006/main">
               <a:ext uri="{FF2B5EF4-FFF2-40B4-BE49-F238E27FC236}">
-                <a16:creationId xmlns:a16="http://schemas.microsoft.com/office/drawing/2014/main" id="{9BCB60D4-AA66-46B0-8116-3F531426F14F}"/>
+                <a16:creationId xmlns:a16="http://schemas.microsoft.com/office/drawing/2014/main" id="{9EA2A510-D690-49ED-BD5C-5AB70D84709C}"/>
               </a:ext>
             </a:extLst>
           </p:cNvPr>
@@ -41763,7 +41763,7 @@
           <p:cNvPr id="36" name="">
             <a:extLst xmlns:a="http://schemas.openxmlformats.org/drawingml/2006/main">
               <a:ext uri="{FF2B5EF4-FFF2-40B4-BE49-F238E27FC236}">
-                <a16:creationId xmlns:a16="http://schemas.microsoft.com/office/drawing/2014/main" id="{05613872-4820-4DA2-AD57-6575AF7228C7}"/>
+                <a16:creationId xmlns:a16="http://schemas.microsoft.com/office/drawing/2014/main" id="{E8CE0665-0BC6-4BD5-8D47-6555E318FC37}"/>
               </a:ext>
             </a:extLst>
           </p:cNvPr>
@@ -41815,7 +41815,7 @@
           <p:cNvPr id="37" name="">
             <a:extLst xmlns:a="http://schemas.openxmlformats.org/drawingml/2006/main">
               <a:ext uri="{FF2B5EF4-FFF2-40B4-BE49-F238E27FC236}">
-                <a16:creationId xmlns:a16="http://schemas.microsoft.com/office/drawing/2014/main" id="{6DBA15F5-0294-4AD9-AE9B-2F10E2E8840C}"/>
+                <a16:creationId xmlns:a16="http://schemas.microsoft.com/office/drawing/2014/main" id="{23E181A0-ABA3-4DCA-822A-0B1E3B7EB026}"/>
               </a:ext>
             </a:extLst>
           </p:cNvPr>
@@ -41846,7 +41846,7 @@
           <p:cNvPr id="38" name="">
             <a:extLst xmlns:a="http://schemas.openxmlformats.org/drawingml/2006/main">
               <a:ext uri="{FF2B5EF4-FFF2-40B4-BE49-F238E27FC236}">
-                <a16:creationId xmlns:a16="http://schemas.microsoft.com/office/drawing/2014/main" id="{113DA48B-F291-4728-A181-B344002DFA27}"/>
+                <a16:creationId xmlns:a16="http://schemas.microsoft.com/office/drawing/2014/main" id="{6477D3BF-ADB0-456E-8A6C-865EE3DAA32A}"/>
               </a:ext>
             </a:extLst>
           </p:cNvPr>
@@ -41877,7 +41877,7 @@
           <p:cNvPr id="39" name="">
             <a:extLst xmlns:a="http://schemas.openxmlformats.org/drawingml/2006/main">
               <a:ext uri="{FF2B5EF4-FFF2-40B4-BE49-F238E27FC236}">
-                <a16:creationId xmlns:a16="http://schemas.microsoft.com/office/drawing/2014/main" id="{C7F0B305-291E-41BE-BCE6-23CC521D60D9}"/>
+                <a16:creationId xmlns:a16="http://schemas.microsoft.com/office/drawing/2014/main" id="{160373E4-8547-4C8C-BED3-89A892E26AEC}"/>
               </a:ext>
             </a:extLst>
           </p:cNvPr>
@@ -41929,7 +41929,7 @@
           <p:cNvPr id="40" name="">
             <a:extLst xmlns:a="http://schemas.openxmlformats.org/drawingml/2006/main">
               <a:ext uri="{FF2B5EF4-FFF2-40B4-BE49-F238E27FC236}">
-                <a16:creationId xmlns:a16="http://schemas.microsoft.com/office/drawing/2014/main" id="{AB132B17-7467-4CBE-951C-4FFF47A26C64}"/>
+                <a16:creationId xmlns:a16="http://schemas.microsoft.com/office/drawing/2014/main" id="{C2E899A4-B267-4068-8F3B-AA9A0B569A4A}"/>
               </a:ext>
             </a:extLst>
           </p:cNvPr>
@@ -41981,7 +41981,7 @@
           <p:cNvPr id="41" name="">
             <a:extLst xmlns:a="http://schemas.openxmlformats.org/drawingml/2006/main">
               <a:ext uri="{FF2B5EF4-FFF2-40B4-BE49-F238E27FC236}">
-                <a16:creationId xmlns:a16="http://schemas.microsoft.com/office/drawing/2014/main" id="{A8E1052F-C168-4622-9374-1D6E1CD5515B}"/>
+                <a16:creationId xmlns:a16="http://schemas.microsoft.com/office/drawing/2014/main" id="{13D6B16B-2105-4EB7-B990-F82B0B56B072}"/>
               </a:ext>
             </a:extLst>
           </p:cNvPr>
@@ -42033,7 +42033,7 @@
           <p:cNvPr id="42" name="">
             <a:extLst xmlns:a="http://schemas.openxmlformats.org/drawingml/2006/main">
               <a:ext uri="{FF2B5EF4-FFF2-40B4-BE49-F238E27FC236}">
-                <a16:creationId xmlns:a16="http://schemas.microsoft.com/office/drawing/2014/main" id="{A1AE2F6B-4CB7-4BC0-8268-3B96D1DC0CE6}"/>
+                <a16:creationId xmlns:a16="http://schemas.microsoft.com/office/drawing/2014/main" id="{BE0778D5-3949-41F5-8697-9BA84841808A}"/>
               </a:ext>
             </a:extLst>
           </p:cNvPr>
@@ -42085,7 +42085,7 @@
           <p:cNvPr id="43" name="">
             <a:extLst xmlns:a="http://schemas.openxmlformats.org/drawingml/2006/main">
               <a:ext uri="{FF2B5EF4-FFF2-40B4-BE49-F238E27FC236}">
-                <a16:creationId xmlns:a16="http://schemas.microsoft.com/office/drawing/2014/main" id="{7CF7E7A9-73BF-44D8-A8FD-C3A473CB5F58}"/>
+                <a16:creationId xmlns:a16="http://schemas.microsoft.com/office/drawing/2014/main" id="{60C428E8-94C2-448D-A19A-EA8D22F8AC81}"/>
               </a:ext>
             </a:extLst>
           </p:cNvPr>
@@ -42137,7 +42137,7 @@
           <p:cNvPr id="44" name="">
             <a:extLst xmlns:a="http://schemas.openxmlformats.org/drawingml/2006/main">
               <a:ext uri="{FF2B5EF4-FFF2-40B4-BE49-F238E27FC236}">
-                <a16:creationId xmlns:a16="http://schemas.microsoft.com/office/drawing/2014/main" id="{74DDC264-AA57-4C37-9102-773EBF4318D2}"/>
+                <a16:creationId xmlns:a16="http://schemas.microsoft.com/office/drawing/2014/main" id="{298C2F1C-1301-4F1C-8F05-4ADB55AE9079}"/>
               </a:ext>
             </a:extLst>
           </p:cNvPr>
@@ -42168,7 +42168,7 @@
           <p:cNvPr id="45" name="">
             <a:extLst xmlns:a="http://schemas.openxmlformats.org/drawingml/2006/main">
               <a:ext uri="{FF2B5EF4-FFF2-40B4-BE49-F238E27FC236}">
-                <a16:creationId xmlns:a16="http://schemas.microsoft.com/office/drawing/2014/main" id="{DADA1C5B-4261-4442-B9A1-4952D86CC77A}"/>
+                <a16:creationId xmlns:a16="http://schemas.microsoft.com/office/drawing/2014/main" id="{4DF95A77-22DA-45B5-BFA4-E5A4617343F5}"/>
               </a:ext>
             </a:extLst>
           </p:cNvPr>
@@ -42220,7 +42220,7 @@
           <p:cNvPr id="46" name="">
             <a:extLst xmlns:a="http://schemas.openxmlformats.org/drawingml/2006/main">
               <a:ext uri="{FF2B5EF4-FFF2-40B4-BE49-F238E27FC236}">
-                <a16:creationId xmlns:a16="http://schemas.microsoft.com/office/drawing/2014/main" id="{0AC7DEBC-796C-4038-89E9-A6459E512EB3}"/>
+                <a16:creationId xmlns:a16="http://schemas.microsoft.com/office/drawing/2014/main" id="{95F95B15-589C-4C7E-B105-3F46C16093B8}"/>
               </a:ext>
             </a:extLst>
           </p:cNvPr>
@@ -42272,7 +42272,7 @@
           <p:cNvPr id="47" name="">
             <a:extLst xmlns:a="http://schemas.openxmlformats.org/drawingml/2006/main">
               <a:ext uri="{FF2B5EF4-FFF2-40B4-BE49-F238E27FC236}">
-                <a16:creationId xmlns:a16="http://schemas.microsoft.com/office/drawing/2014/main" id="{DB856791-2D9F-4C59-9D94-E13922ADBDE8}"/>
+                <a16:creationId xmlns:a16="http://schemas.microsoft.com/office/drawing/2014/main" id="{16EA7CE3-055B-40E6-875B-38FD6CD34866}"/>
               </a:ext>
             </a:extLst>
           </p:cNvPr>
@@ -42324,7 +42324,7 @@
           <p:cNvPr id="48" name="">
             <a:extLst xmlns:a="http://schemas.openxmlformats.org/drawingml/2006/main">
               <a:ext uri="{FF2B5EF4-FFF2-40B4-BE49-F238E27FC236}">
-                <a16:creationId xmlns:a16="http://schemas.microsoft.com/office/drawing/2014/main" id="{ECDB2BAF-9D02-474A-97D1-BC08080EF2FA}"/>
+                <a16:creationId xmlns:a16="http://schemas.microsoft.com/office/drawing/2014/main" id="{9FF5A6D3-A511-419B-BC65-FA1E93A62A9D}"/>
               </a:ext>
             </a:extLst>
           </p:cNvPr>
@@ -42376,7 +42376,7 @@
           <p:cNvPr id="49" name="">
             <a:extLst xmlns:a="http://schemas.openxmlformats.org/drawingml/2006/main">
               <a:ext uri="{FF2B5EF4-FFF2-40B4-BE49-F238E27FC236}">
-                <a16:creationId xmlns:a16="http://schemas.microsoft.com/office/drawing/2014/main" id="{0614F830-4210-44B4-9B89-F4283AF8970C}"/>
+                <a16:creationId xmlns:a16="http://schemas.microsoft.com/office/drawing/2014/main" id="{A8EFF23B-A843-434A-A7C9-336D5E3B8F56}"/>
               </a:ext>
             </a:extLst>
           </p:cNvPr>
@@ -42428,7 +42428,7 @@
           <p:cNvPr id="50" name="">
             <a:extLst xmlns:a="http://schemas.openxmlformats.org/drawingml/2006/main">
               <a:ext uri="{FF2B5EF4-FFF2-40B4-BE49-F238E27FC236}">
-                <a16:creationId xmlns:a16="http://schemas.microsoft.com/office/drawing/2014/main" id="{DB5EC246-50B6-4850-9095-02AF0CB8F184}"/>
+                <a16:creationId xmlns:a16="http://schemas.microsoft.com/office/drawing/2014/main" id="{15E96182-27E1-4610-803D-449F0D95653A}"/>
               </a:ext>
             </a:extLst>
           </p:cNvPr>
@@ -42459,7 +42459,7 @@
           <p:cNvPr id="51" name="">
             <a:extLst xmlns:a="http://schemas.openxmlformats.org/drawingml/2006/main">
               <a:ext uri="{FF2B5EF4-FFF2-40B4-BE49-F238E27FC236}">
-                <a16:creationId xmlns:a16="http://schemas.microsoft.com/office/drawing/2014/main" id="{F40BAA9A-582D-42A8-ACA9-07539368D499}"/>
+                <a16:creationId xmlns:a16="http://schemas.microsoft.com/office/drawing/2014/main" id="{1BAC92DB-293E-49E9-B77E-5DF1D6B36DEA}"/>
               </a:ext>
             </a:extLst>
           </p:cNvPr>
@@ -42490,7 +42490,7 @@
           <p:cNvPr id="52" name="">
             <a:extLst xmlns:a="http://schemas.openxmlformats.org/drawingml/2006/main">
               <a:ext uri="{FF2B5EF4-FFF2-40B4-BE49-F238E27FC236}">
-                <a16:creationId xmlns:a16="http://schemas.microsoft.com/office/drawing/2014/main" id="{A2E8BD0F-05C9-4286-991F-33E536CF2089}"/>
+                <a16:creationId xmlns:a16="http://schemas.microsoft.com/office/drawing/2014/main" id="{5DA73589-04E0-4148-B69D-702D29A1CECA}"/>
               </a:ext>
             </a:extLst>
           </p:cNvPr>
@@ -42542,7 +42542,7 @@
           <p:cNvPr id="53" name="">
             <a:extLst xmlns:a="http://schemas.openxmlformats.org/drawingml/2006/main">
               <a:ext uri="{FF2B5EF4-FFF2-40B4-BE49-F238E27FC236}">
-                <a16:creationId xmlns:a16="http://schemas.microsoft.com/office/drawing/2014/main" id="{ECCDDDE2-FE5A-4425-BA94-A75049D1892D}"/>
+                <a16:creationId xmlns:a16="http://schemas.microsoft.com/office/drawing/2014/main" id="{B19634B1-CBC7-469D-A6DC-16E418C427A3}"/>
               </a:ext>
             </a:extLst>
           </p:cNvPr>
@@ -42594,7 +42594,7 @@
           <p:cNvPr id="54" name="">
             <a:extLst xmlns:a="http://schemas.openxmlformats.org/drawingml/2006/main">
               <a:ext uri="{FF2B5EF4-FFF2-40B4-BE49-F238E27FC236}">
-                <a16:creationId xmlns:a16="http://schemas.microsoft.com/office/drawing/2014/main" id="{9EAF01C6-1F3F-47C5-BF68-017D0442920B}"/>
+                <a16:creationId xmlns:a16="http://schemas.microsoft.com/office/drawing/2014/main" id="{F284A20D-C1FF-4F02-AEA9-B0549C80B1A1}"/>
               </a:ext>
             </a:extLst>
           </p:cNvPr>
@@ -42646,7 +42646,7 @@
           <p:cNvPr id="55" name="">
             <a:extLst xmlns:a="http://schemas.openxmlformats.org/drawingml/2006/main">
               <a:ext uri="{FF2B5EF4-FFF2-40B4-BE49-F238E27FC236}">
-                <a16:creationId xmlns:a16="http://schemas.microsoft.com/office/drawing/2014/main" id="{6A31247C-DC28-4FAE-B0A8-747AC0E060A5}"/>
+                <a16:creationId xmlns:a16="http://schemas.microsoft.com/office/drawing/2014/main" id="{5BF85C44-02C6-4113-B808-7E364B4CC285}"/>
               </a:ext>
             </a:extLst>
           </p:cNvPr>
@@ -42698,7 +42698,7 @@
           <p:cNvPr id="56" name="">
             <a:extLst xmlns:a="http://schemas.openxmlformats.org/drawingml/2006/main">
               <a:ext uri="{FF2B5EF4-FFF2-40B4-BE49-F238E27FC236}">
-                <a16:creationId xmlns:a16="http://schemas.microsoft.com/office/drawing/2014/main" id="{8FF8F996-0404-4D94-94AE-444E2E8C9CDB}"/>
+                <a16:creationId xmlns:a16="http://schemas.microsoft.com/office/drawing/2014/main" id="{0204BA4D-4BBE-43AF-97F6-5B6F335D155F}"/>
               </a:ext>
             </a:extLst>
           </p:cNvPr>
@@ -42750,7 +42750,7 @@
           <p:cNvPr id="57" name="">
             <a:extLst xmlns:a="http://schemas.openxmlformats.org/drawingml/2006/main">
               <a:ext uri="{FF2B5EF4-FFF2-40B4-BE49-F238E27FC236}">
-                <a16:creationId xmlns:a16="http://schemas.microsoft.com/office/drawing/2014/main" id="{23273F5E-13DE-4860-9F6F-1EDE3E84FFFC}"/>
+                <a16:creationId xmlns:a16="http://schemas.microsoft.com/office/drawing/2014/main" id="{00AA5EBF-A6F4-4465-BBEC-E66C66D2586A}"/>
               </a:ext>
             </a:extLst>
           </p:cNvPr>
@@ -42781,7 +42781,7 @@
           <p:cNvPr id="58" name="">
             <a:extLst xmlns:a="http://schemas.openxmlformats.org/drawingml/2006/main">
               <a:ext uri="{FF2B5EF4-FFF2-40B4-BE49-F238E27FC236}">
-                <a16:creationId xmlns:a16="http://schemas.microsoft.com/office/drawing/2014/main" id="{CC1D4D9D-48E1-41F7-8FEA-6A518A04C7EA}"/>
+                <a16:creationId xmlns:a16="http://schemas.microsoft.com/office/drawing/2014/main" id="{DBBC700A-9C02-4BA0-A664-4A470CE5B624}"/>
               </a:ext>
             </a:extLst>
           </p:cNvPr>
@@ -42833,7 +42833,7 @@
           <p:cNvPr id="59" name="">
             <a:extLst xmlns:a="http://schemas.openxmlformats.org/drawingml/2006/main">
               <a:ext uri="{FF2B5EF4-FFF2-40B4-BE49-F238E27FC236}">
-                <a16:creationId xmlns:a16="http://schemas.microsoft.com/office/drawing/2014/main" id="{41CE701A-C9CB-4F0F-8535-6AAF77A58531}"/>
+                <a16:creationId xmlns:a16="http://schemas.microsoft.com/office/drawing/2014/main" id="{17ED1E92-E8BC-46C7-8E14-CF945E3F82CE}"/>
               </a:ext>
             </a:extLst>
           </p:cNvPr>
@@ -42885,7 +42885,7 @@
           <p:cNvPr id="60" name="">
             <a:extLst xmlns:a="http://schemas.openxmlformats.org/drawingml/2006/main">
               <a:ext uri="{FF2B5EF4-FFF2-40B4-BE49-F238E27FC236}">
-                <a16:creationId xmlns:a16="http://schemas.microsoft.com/office/drawing/2014/main" id="{80FE3085-EBF8-4D62-BE3C-A585AA15C17A}"/>
+                <a16:creationId xmlns:a16="http://schemas.microsoft.com/office/drawing/2014/main" id="{5E901B2E-2391-4BD4-B5E8-E6A1049C2F86}"/>
               </a:ext>
             </a:extLst>
           </p:cNvPr>
@@ -42937,7 +42937,7 @@
           <p:cNvPr id="61" name="">
             <a:extLst xmlns:a="http://schemas.openxmlformats.org/drawingml/2006/main">
               <a:ext uri="{FF2B5EF4-FFF2-40B4-BE49-F238E27FC236}">
-                <a16:creationId xmlns:a16="http://schemas.microsoft.com/office/drawing/2014/main" id="{FA73D506-CF30-4D6B-9D16-85117D804A69}"/>
+                <a16:creationId xmlns:a16="http://schemas.microsoft.com/office/drawing/2014/main" id="{912593A9-918F-4C31-9751-8F93BE953159}"/>
               </a:ext>
             </a:extLst>
           </p:cNvPr>
@@ -42989,7 +42989,7 @@
           <p:cNvPr id="62" name="">
             <a:extLst xmlns:a="http://schemas.openxmlformats.org/drawingml/2006/main">
               <a:ext uri="{FF2B5EF4-FFF2-40B4-BE49-F238E27FC236}">
-                <a16:creationId xmlns:a16="http://schemas.microsoft.com/office/drawing/2014/main" id="{FB16869E-C48A-4C2C-A392-90DD8D274E24}"/>
+                <a16:creationId xmlns:a16="http://schemas.microsoft.com/office/drawing/2014/main" id="{C944C021-5A64-469B-9842-275E7D51DC81}"/>
               </a:ext>
             </a:extLst>
           </p:cNvPr>
@@ -43041,7 +43041,7 @@
           <p:cNvPr id="63" name="">
             <a:extLst xmlns:a="http://schemas.openxmlformats.org/drawingml/2006/main">
               <a:ext uri="{FF2B5EF4-FFF2-40B4-BE49-F238E27FC236}">
-                <a16:creationId xmlns:a16="http://schemas.microsoft.com/office/drawing/2014/main" id="{5A3D781D-06A5-4559-8D64-2F92F473174F}"/>
+                <a16:creationId xmlns:a16="http://schemas.microsoft.com/office/drawing/2014/main" id="{464E3E99-1ECF-477E-8916-47354A5E26C3}"/>
               </a:ext>
             </a:extLst>
           </p:cNvPr>
@@ -43072,7 +43072,7 @@
           <p:cNvPr id="64" name="">
             <a:extLst xmlns:a="http://schemas.openxmlformats.org/drawingml/2006/main">
               <a:ext uri="{FF2B5EF4-FFF2-40B4-BE49-F238E27FC236}">
-                <a16:creationId xmlns:a16="http://schemas.microsoft.com/office/drawing/2014/main" id="{F2379824-C76F-4C53-98E8-0EC0D705EA24}"/>
+                <a16:creationId xmlns:a16="http://schemas.microsoft.com/office/drawing/2014/main" id="{96C8AA1C-E951-499F-A768-F054C7BCC566}"/>
               </a:ext>
             </a:extLst>
           </p:cNvPr>
@@ -43103,7 +43103,7 @@
           <p:cNvPr id="65" name="">
             <a:extLst xmlns:a="http://schemas.openxmlformats.org/drawingml/2006/main">
               <a:ext uri="{FF2B5EF4-FFF2-40B4-BE49-F238E27FC236}">
-                <a16:creationId xmlns:a16="http://schemas.microsoft.com/office/drawing/2014/main" id="{C0A0C138-516C-4BC5-BCE8-A9A200CBB09F}"/>
+                <a16:creationId xmlns:a16="http://schemas.microsoft.com/office/drawing/2014/main" id="{283E2A0E-CB4B-4117-A8D3-752306C0E69E}"/>
               </a:ext>
             </a:extLst>
           </p:cNvPr>
@@ -43155,7 +43155,7 @@
           <p:cNvPr id="66" name="">
             <a:extLst xmlns:a="http://schemas.openxmlformats.org/drawingml/2006/main">
               <a:ext uri="{FF2B5EF4-FFF2-40B4-BE49-F238E27FC236}">
-                <a16:creationId xmlns:a16="http://schemas.microsoft.com/office/drawing/2014/main" id="{C0B57228-FCDC-4BF2-A062-153693ED1AD0}"/>
+                <a16:creationId xmlns:a16="http://schemas.microsoft.com/office/drawing/2014/main" id="{EE62D7F5-4277-42A6-9D82-FEBB29C2A940}"/>
               </a:ext>
             </a:extLst>
           </p:cNvPr>
@@ -43207,7 +43207,7 @@
           <p:cNvPr id="67" name="">
             <a:extLst xmlns:a="http://schemas.openxmlformats.org/drawingml/2006/main">
               <a:ext uri="{FF2B5EF4-FFF2-40B4-BE49-F238E27FC236}">
-                <a16:creationId xmlns:a16="http://schemas.microsoft.com/office/drawing/2014/main" id="{C5D6AF8B-CDA0-425B-97E5-C5A8447F2824}"/>
+                <a16:creationId xmlns:a16="http://schemas.microsoft.com/office/drawing/2014/main" id="{24B5D644-E444-48CE-9E6F-20AE19AC5919}"/>
               </a:ext>
             </a:extLst>
           </p:cNvPr>
@@ -43259,7 +43259,7 @@
           <p:cNvPr id="68" name="">
             <a:extLst xmlns:a="http://schemas.openxmlformats.org/drawingml/2006/main">
               <a:ext uri="{FF2B5EF4-FFF2-40B4-BE49-F238E27FC236}">
-                <a16:creationId xmlns:a16="http://schemas.microsoft.com/office/drawing/2014/main" id="{D02BAAB2-DD24-4EFD-B56D-1DF734943A98}"/>
+                <a16:creationId xmlns:a16="http://schemas.microsoft.com/office/drawing/2014/main" id="{3D8BF01F-6D57-4E23-BB8C-C6FD1ED7625E}"/>
               </a:ext>
             </a:extLst>
           </p:cNvPr>
@@ -43311,7 +43311,7 @@
           <p:cNvPr id="69" name="">
             <a:extLst xmlns:a="http://schemas.openxmlformats.org/drawingml/2006/main">
               <a:ext uri="{FF2B5EF4-FFF2-40B4-BE49-F238E27FC236}">
-                <a16:creationId xmlns:a16="http://schemas.microsoft.com/office/drawing/2014/main" id="{3002E235-7A9B-4266-9787-1C8FDB665495}"/>
+                <a16:creationId xmlns:a16="http://schemas.microsoft.com/office/drawing/2014/main" id="{41DED71C-EE0C-4D5D-94E2-ED0A94C154F1}"/>
               </a:ext>
             </a:extLst>
           </p:cNvPr>
@@ -43363,7 +43363,7 @@
           <p:cNvPr id="70" name="">
             <a:extLst xmlns:a="http://schemas.openxmlformats.org/drawingml/2006/main">
               <a:ext uri="{FF2B5EF4-FFF2-40B4-BE49-F238E27FC236}">
-                <a16:creationId xmlns:a16="http://schemas.microsoft.com/office/drawing/2014/main" id="{0BEC2D7B-A9BE-4248-84B4-8AE84BC3C1EC}"/>
+                <a16:creationId xmlns:a16="http://schemas.microsoft.com/office/drawing/2014/main" id="{639B214C-6B72-48C6-BEBB-FFA5C09BD854}"/>
               </a:ext>
             </a:extLst>
           </p:cNvPr>
@@ -43394,7 +43394,7 @@
           <p:cNvPr id="71" name="">
             <a:extLst xmlns:a="http://schemas.openxmlformats.org/drawingml/2006/main">
               <a:ext uri="{FF2B5EF4-FFF2-40B4-BE49-F238E27FC236}">
-                <a16:creationId xmlns:a16="http://schemas.microsoft.com/office/drawing/2014/main" id="{4ADEC25C-8ED3-4894-B1E6-DA847DAE9097}"/>
+                <a16:creationId xmlns:a16="http://schemas.microsoft.com/office/drawing/2014/main" id="{015C60F6-767E-4E57-A49A-BC54A483999D}"/>
               </a:ext>
             </a:extLst>
           </p:cNvPr>
@@ -43446,7 +43446,7 @@
           <p:cNvPr id="72" name="">
             <a:extLst xmlns:a="http://schemas.openxmlformats.org/drawingml/2006/main">
               <a:ext uri="{FF2B5EF4-FFF2-40B4-BE49-F238E27FC236}">
-                <a16:creationId xmlns:a16="http://schemas.microsoft.com/office/drawing/2014/main" id="{FFFE8F33-0D06-4A45-85F3-762E37EEE00D}"/>
+                <a16:creationId xmlns:a16="http://schemas.microsoft.com/office/drawing/2014/main" id="{8D619E4E-C60C-4056-B171-6677F7D840A7}"/>
               </a:ext>
             </a:extLst>
           </p:cNvPr>
@@ -43498,7 +43498,7 @@
           <p:cNvPr id="73" name="">
             <a:extLst xmlns:a="http://schemas.openxmlformats.org/drawingml/2006/main">
               <a:ext uri="{FF2B5EF4-FFF2-40B4-BE49-F238E27FC236}">
-                <a16:creationId xmlns:a16="http://schemas.microsoft.com/office/drawing/2014/main" id="{0E80E517-B4F7-4664-87BD-0B93853FE393}"/>
+                <a16:creationId xmlns:a16="http://schemas.microsoft.com/office/drawing/2014/main" id="{715D8FA4-DFCC-4653-ACB0-E0B46BB26AA9}"/>
               </a:ext>
             </a:extLst>
           </p:cNvPr>
@@ -43550,7 +43550,7 @@
           <p:cNvPr id="74" name="">
             <a:extLst xmlns:a="http://schemas.openxmlformats.org/drawingml/2006/main">
               <a:ext uri="{FF2B5EF4-FFF2-40B4-BE49-F238E27FC236}">
-                <a16:creationId xmlns:a16="http://schemas.microsoft.com/office/drawing/2014/main" id="{F767E513-622A-47FA-8698-8EA93A85F854}"/>
+                <a16:creationId xmlns:a16="http://schemas.microsoft.com/office/drawing/2014/main" id="{F886F4F7-7EC3-4D46-8920-7A2519C709CE}"/>
               </a:ext>
             </a:extLst>
           </p:cNvPr>
@@ -43602,7 +43602,7 @@
           <p:cNvPr id="75" name="">
             <a:extLst xmlns:a="http://schemas.openxmlformats.org/drawingml/2006/main">
               <a:ext uri="{FF2B5EF4-FFF2-40B4-BE49-F238E27FC236}">
-                <a16:creationId xmlns:a16="http://schemas.microsoft.com/office/drawing/2014/main" id="{DEC9344F-B385-45BA-A8DF-4694908C379C}"/>
+                <a16:creationId xmlns:a16="http://schemas.microsoft.com/office/drawing/2014/main" id="{8DECDF6A-774C-4927-AC06-4C0FEE87CC16}"/>
               </a:ext>
             </a:extLst>
           </p:cNvPr>
@@ -43654,7 +43654,7 @@
           <p:cNvPr id="76" name="">
             <a:extLst xmlns:a="http://schemas.openxmlformats.org/drawingml/2006/main">
               <a:ext uri="{FF2B5EF4-FFF2-40B4-BE49-F238E27FC236}">
-                <a16:creationId xmlns:a16="http://schemas.microsoft.com/office/drawing/2014/main" id="{E8055865-0308-43EC-8D26-C7306EAB09C4}"/>
+                <a16:creationId xmlns:a16="http://schemas.microsoft.com/office/drawing/2014/main" id="{75BA3E00-3224-4095-B7AC-C9B0A2D8C6A0}"/>
               </a:ext>
             </a:extLst>
           </p:cNvPr>
@@ -43685,7 +43685,7 @@
           <p:cNvPr id="77" name="">
             <a:extLst xmlns:a="http://schemas.openxmlformats.org/drawingml/2006/main">
               <a:ext uri="{FF2B5EF4-FFF2-40B4-BE49-F238E27FC236}">
-                <a16:creationId xmlns:a16="http://schemas.microsoft.com/office/drawing/2014/main" id="{43EB767C-035A-4C47-9665-F5EAEBB4B207}"/>
+                <a16:creationId xmlns:a16="http://schemas.microsoft.com/office/drawing/2014/main" id="{6C7ABF79-2241-4C5F-91F4-35151500E64E}"/>
               </a:ext>
             </a:extLst>
           </p:cNvPr>
@@ -43716,7 +43716,7 @@
           <p:cNvPr id="78" name="">
             <a:extLst xmlns:a="http://schemas.openxmlformats.org/drawingml/2006/main">
               <a:ext uri="{FF2B5EF4-FFF2-40B4-BE49-F238E27FC236}">
-                <a16:creationId xmlns:a16="http://schemas.microsoft.com/office/drawing/2014/main" id="{35D4D649-999E-4345-BC3B-323F07AE937F}"/>
+                <a16:creationId xmlns:a16="http://schemas.microsoft.com/office/drawing/2014/main" id="{303268FD-C4A5-4EED-8524-BDBBD146E471}"/>
               </a:ext>
             </a:extLst>
           </p:cNvPr>
@@ -43768,7 +43768,7 @@
           <p:cNvPr id="79" name="">
             <a:extLst xmlns:a="http://schemas.openxmlformats.org/drawingml/2006/main">
               <a:ext uri="{FF2B5EF4-FFF2-40B4-BE49-F238E27FC236}">
-                <a16:creationId xmlns:a16="http://schemas.microsoft.com/office/drawing/2014/main" id="{095C6385-67D6-4941-BB11-A90506C4AEF4}"/>
+                <a16:creationId xmlns:a16="http://schemas.microsoft.com/office/drawing/2014/main" id="{DC02A6E6-84B3-4D36-8B36-2912DBB0EB64}"/>
               </a:ext>
             </a:extLst>
           </p:cNvPr>
@@ -43820,7 +43820,7 @@
           <p:cNvPr id="80" name="">
             <a:extLst xmlns:a="http://schemas.openxmlformats.org/drawingml/2006/main">
               <a:ext uri="{FF2B5EF4-FFF2-40B4-BE49-F238E27FC236}">
-                <a16:creationId xmlns:a16="http://schemas.microsoft.com/office/drawing/2014/main" id="{2B25DB59-D6BA-43E0-ACB3-714AC07C57E6}"/>
+                <a16:creationId xmlns:a16="http://schemas.microsoft.com/office/drawing/2014/main" id="{E3915E76-629D-43F8-818F-ECA173EC7725}"/>
               </a:ext>
             </a:extLst>
           </p:cNvPr>
@@ -43872,7 +43872,7 @@
           <p:cNvPr id="81" name="">
             <a:extLst xmlns:a="http://schemas.openxmlformats.org/drawingml/2006/main">
               <a:ext uri="{FF2B5EF4-FFF2-40B4-BE49-F238E27FC236}">
-                <a16:creationId xmlns:a16="http://schemas.microsoft.com/office/drawing/2014/main" id="{DF7517D3-0C4A-488E-AF17-EFFB560CC1AA}"/>
+                <a16:creationId xmlns:a16="http://schemas.microsoft.com/office/drawing/2014/main" id="{67514045-2508-42C5-86F2-C9F40E450707}"/>
               </a:ext>
             </a:extLst>
           </p:cNvPr>
@@ -43924,7 +43924,7 @@
           <p:cNvPr id="82" name="">
             <a:extLst xmlns:a="http://schemas.openxmlformats.org/drawingml/2006/main">
               <a:ext uri="{FF2B5EF4-FFF2-40B4-BE49-F238E27FC236}">
-                <a16:creationId xmlns:a16="http://schemas.microsoft.com/office/drawing/2014/main" id="{EE74DDDB-9EE6-44FA-98F4-EB185DBD10D7}"/>
+                <a16:creationId xmlns:a16="http://schemas.microsoft.com/office/drawing/2014/main" id="{D6A17CCD-3F45-406D-9CDA-B9E7FACB2E19}"/>
               </a:ext>
             </a:extLst>
           </p:cNvPr>
@@ -43976,7 +43976,7 @@
           <p:cNvPr id="83" name="">
             <a:extLst xmlns:a="http://schemas.openxmlformats.org/drawingml/2006/main">
               <a:ext uri="{FF2B5EF4-FFF2-40B4-BE49-F238E27FC236}">
-                <a16:creationId xmlns:a16="http://schemas.microsoft.com/office/drawing/2014/main" id="{F99EDEB4-DF03-41F8-88C2-828C4734F1EB}"/>
+                <a16:creationId xmlns:a16="http://schemas.microsoft.com/office/drawing/2014/main" id="{904E50E3-F60B-4422-B0EF-6C3A7A8E79EC}"/>
               </a:ext>
             </a:extLst>
           </p:cNvPr>
@@ -44007,7 +44007,7 @@
           <p:cNvPr id="84" name="">
             <a:extLst xmlns:a="http://schemas.openxmlformats.org/drawingml/2006/main">
               <a:ext uri="{FF2B5EF4-FFF2-40B4-BE49-F238E27FC236}">
-                <a16:creationId xmlns:a16="http://schemas.microsoft.com/office/drawing/2014/main" id="{25D3F898-2A49-4D19-A3F4-2A9CE704A95E}"/>
+                <a16:creationId xmlns:a16="http://schemas.microsoft.com/office/drawing/2014/main" id="{BB32C3E8-AE48-4B6C-8292-CB1F2D4029A2}"/>
               </a:ext>
             </a:extLst>
           </p:cNvPr>
@@ -44059,7 +44059,7 @@
           <p:cNvPr id="85" name="">
             <a:extLst xmlns:a="http://schemas.openxmlformats.org/drawingml/2006/main">
               <a:ext uri="{FF2B5EF4-FFF2-40B4-BE49-F238E27FC236}">
-                <a16:creationId xmlns:a16="http://schemas.microsoft.com/office/drawing/2014/main" id="{39A76A45-A921-443E-BFFF-5061D1FDE119}"/>
+                <a16:creationId xmlns:a16="http://schemas.microsoft.com/office/drawing/2014/main" id="{E2D2F863-0FD9-4C10-B014-D4D5EE834ED0}"/>
               </a:ext>
             </a:extLst>
           </p:cNvPr>
@@ -44111,7 +44111,7 @@
           <p:cNvPr id="86" name="">
             <a:extLst xmlns:a="http://schemas.openxmlformats.org/drawingml/2006/main">
               <a:ext uri="{FF2B5EF4-FFF2-40B4-BE49-F238E27FC236}">
-                <a16:creationId xmlns:a16="http://schemas.microsoft.com/office/drawing/2014/main" id="{5B2ADFDA-3EC6-44BC-98FD-6F040B11294C}"/>
+                <a16:creationId xmlns:a16="http://schemas.microsoft.com/office/drawing/2014/main" id="{AFA6ED65-6898-453D-81B2-7EC2FB2DBC29}"/>
               </a:ext>
             </a:extLst>
           </p:cNvPr>
@@ -44163,7 +44163,7 @@
           <p:cNvPr id="87" name="">
             <a:extLst xmlns:a="http://schemas.openxmlformats.org/drawingml/2006/main">
               <a:ext uri="{FF2B5EF4-FFF2-40B4-BE49-F238E27FC236}">
-                <a16:creationId xmlns:a16="http://schemas.microsoft.com/office/drawing/2014/main" id="{85EEA5CA-0F5A-4968-8D98-1F932A1C8C01}"/>
+                <a16:creationId xmlns:a16="http://schemas.microsoft.com/office/drawing/2014/main" id="{A5C42E6B-777B-4E8A-A05E-2C74D9521E41}"/>
               </a:ext>
             </a:extLst>
           </p:cNvPr>
@@ -44215,7 +44215,7 @@
           <p:cNvPr id="88" name="">
             <a:extLst xmlns:a="http://schemas.openxmlformats.org/drawingml/2006/main">
               <a:ext uri="{FF2B5EF4-FFF2-40B4-BE49-F238E27FC236}">
-                <a16:creationId xmlns:a16="http://schemas.microsoft.com/office/drawing/2014/main" id="{170072A3-908C-499A-A6AC-00D737AFC30F}"/>
+                <a16:creationId xmlns:a16="http://schemas.microsoft.com/office/drawing/2014/main" id="{56A672D8-9DC8-4EED-A86F-16DD230B43BA}"/>
               </a:ext>
             </a:extLst>
           </p:cNvPr>
@@ -44267,7 +44267,7 @@
           <p:cNvPr id="89" name="">
             <a:extLst xmlns:a="http://schemas.openxmlformats.org/drawingml/2006/main">
               <a:ext uri="{FF2B5EF4-FFF2-40B4-BE49-F238E27FC236}">
-                <a16:creationId xmlns:a16="http://schemas.microsoft.com/office/drawing/2014/main" id="{20FA8845-87E7-4B1A-A153-FFD8D0303ED4}"/>
+                <a16:creationId xmlns:a16="http://schemas.microsoft.com/office/drawing/2014/main" id="{55DB6C38-5186-463C-8555-F8FC3DF0B866}"/>
               </a:ext>
             </a:extLst>
           </p:cNvPr>
@@ -44298,7 +44298,7 @@
           <p:cNvPr id="90" name="">
             <a:extLst xmlns:a="http://schemas.openxmlformats.org/drawingml/2006/main">
               <a:ext uri="{FF2B5EF4-FFF2-40B4-BE49-F238E27FC236}">
-                <a16:creationId xmlns:a16="http://schemas.microsoft.com/office/drawing/2014/main" id="{C79C37DB-2B4F-4256-9590-ACA1F172915B}"/>
+                <a16:creationId xmlns:a16="http://schemas.microsoft.com/office/drawing/2014/main" id="{3448A457-6E28-4462-9035-362842D770D5}"/>
               </a:ext>
             </a:extLst>
           </p:cNvPr>
@@ -44329,7 +44329,7 @@
           <p:cNvPr id="91" name="">
             <a:extLst xmlns:a="http://schemas.openxmlformats.org/drawingml/2006/main">
               <a:ext uri="{FF2B5EF4-FFF2-40B4-BE49-F238E27FC236}">
-                <a16:creationId xmlns:a16="http://schemas.microsoft.com/office/drawing/2014/main" id="{98CB3F8F-1CC2-4590-8F2C-2DAD0F20C6EB}"/>
+                <a16:creationId xmlns:a16="http://schemas.microsoft.com/office/drawing/2014/main" id="{22E6900B-FC2D-4D99-AF47-B60BD6C5CD29}"/>
               </a:ext>
             </a:extLst>
           </p:cNvPr>
@@ -44381,7 +44381,7 @@
           <p:cNvPr id="92" name="">
             <a:extLst xmlns:a="http://schemas.openxmlformats.org/drawingml/2006/main">
               <a:ext uri="{FF2B5EF4-FFF2-40B4-BE49-F238E27FC236}">
-                <a16:creationId xmlns:a16="http://schemas.microsoft.com/office/drawing/2014/main" id="{5BB1BA86-EB2A-4720-BE3C-C6060E20BCE8}"/>
+                <a16:creationId xmlns:a16="http://schemas.microsoft.com/office/drawing/2014/main" id="{97622B41-3A99-43AB-AF3A-FA80E2D941DE}"/>
               </a:ext>
             </a:extLst>
           </p:cNvPr>
@@ -44433,7 +44433,7 @@
           <p:cNvPr id="93" name="">
             <a:extLst xmlns:a="http://schemas.openxmlformats.org/drawingml/2006/main">
               <a:ext uri="{FF2B5EF4-FFF2-40B4-BE49-F238E27FC236}">
-                <a16:creationId xmlns:a16="http://schemas.microsoft.com/office/drawing/2014/main" id="{722017A5-925F-448F-9349-8866821ED0E1}"/>
+                <a16:creationId xmlns:a16="http://schemas.microsoft.com/office/drawing/2014/main" id="{7AAF4921-079B-4813-96DD-C7FF236BD930}"/>
               </a:ext>
             </a:extLst>
           </p:cNvPr>
@@ -44485,7 +44485,7 @@
           <p:cNvPr id="94" name="">
             <a:extLst xmlns:a="http://schemas.openxmlformats.org/drawingml/2006/main">
               <a:ext uri="{FF2B5EF4-FFF2-40B4-BE49-F238E27FC236}">
-                <a16:creationId xmlns:a16="http://schemas.microsoft.com/office/drawing/2014/main" id="{FAB1B976-570F-499E-ACFD-05E763BAAF67}"/>
+                <a16:creationId xmlns:a16="http://schemas.microsoft.com/office/drawing/2014/main" id="{7E20BDC3-D345-449C-9EE7-4DEF7130C496}"/>
               </a:ext>
             </a:extLst>
           </p:cNvPr>
@@ -44537,7 +44537,7 @@
           <p:cNvPr id="95" name="">
             <a:extLst xmlns:a="http://schemas.openxmlformats.org/drawingml/2006/main">
               <a:ext uri="{FF2B5EF4-FFF2-40B4-BE49-F238E27FC236}">
-                <a16:creationId xmlns:a16="http://schemas.microsoft.com/office/drawing/2014/main" id="{32503278-6F44-49A1-92A0-CB9D2A8692E4}"/>
+                <a16:creationId xmlns:a16="http://schemas.microsoft.com/office/drawing/2014/main" id="{4EE6DDF3-3F30-438B-B0CB-86773D2433EA}"/>
               </a:ext>
             </a:extLst>
           </p:cNvPr>
@@ -44589,7 +44589,7 @@
           <p:cNvPr id="96" name="">
             <a:extLst xmlns:a="http://schemas.openxmlformats.org/drawingml/2006/main">
               <a:ext uri="{FF2B5EF4-FFF2-40B4-BE49-F238E27FC236}">
-                <a16:creationId xmlns:a16="http://schemas.microsoft.com/office/drawing/2014/main" id="{AD119DAF-D3C7-4B2C-BB13-38A92F8BA435}"/>
+                <a16:creationId xmlns:a16="http://schemas.microsoft.com/office/drawing/2014/main" id="{E8626C1C-4BAB-418E-A012-0F709ED149FA}"/>
               </a:ext>
             </a:extLst>
           </p:cNvPr>
@@ -44620,7 +44620,7 @@
           <p:cNvPr id="97" name="">
             <a:extLst xmlns:a="http://schemas.openxmlformats.org/drawingml/2006/main">
               <a:ext uri="{FF2B5EF4-FFF2-40B4-BE49-F238E27FC236}">
-                <a16:creationId xmlns:a16="http://schemas.microsoft.com/office/drawing/2014/main" id="{B042341D-7E13-4ABA-84F0-4AD8C5AB5CB3}"/>
+                <a16:creationId xmlns:a16="http://schemas.microsoft.com/office/drawing/2014/main" id="{FB4BC3C6-519D-4730-B8A1-924E035CF715}"/>
               </a:ext>
             </a:extLst>
           </p:cNvPr>
@@ -44672,7 +44672,7 @@
           <p:cNvPr id="98" name="">
             <a:extLst xmlns:a="http://schemas.openxmlformats.org/drawingml/2006/main">
               <a:ext uri="{FF2B5EF4-FFF2-40B4-BE49-F238E27FC236}">
-                <a16:creationId xmlns:a16="http://schemas.microsoft.com/office/drawing/2014/main" id="{A71EA09E-56BF-4996-BD31-0970D52D018C}"/>
+                <a16:creationId xmlns:a16="http://schemas.microsoft.com/office/drawing/2014/main" id="{00D00220-A4E2-4181-BB1C-46C3A73B5EBF}"/>
               </a:ext>
             </a:extLst>
           </p:cNvPr>
@@ -44724,7 +44724,7 @@
           <p:cNvPr id="99" name="">
             <a:extLst xmlns:a="http://schemas.openxmlformats.org/drawingml/2006/main">
               <a:ext uri="{FF2B5EF4-FFF2-40B4-BE49-F238E27FC236}">
-                <a16:creationId xmlns:a16="http://schemas.microsoft.com/office/drawing/2014/main" id="{9C9C4E7F-C4CE-4C43-8EED-6581FA88D09F}"/>
+                <a16:creationId xmlns:a16="http://schemas.microsoft.com/office/drawing/2014/main" id="{720CDE13-E4B5-4154-B2B0-115D8190A248}"/>
               </a:ext>
             </a:extLst>
           </p:cNvPr>
@@ -44776,7 +44776,7 @@
           <p:cNvPr id="100" name="">
             <a:extLst xmlns:a="http://schemas.openxmlformats.org/drawingml/2006/main">
               <a:ext uri="{FF2B5EF4-FFF2-40B4-BE49-F238E27FC236}">
-                <a16:creationId xmlns:a16="http://schemas.microsoft.com/office/drawing/2014/main" id="{A72BDECD-5200-4799-A3AA-1763C7802284}"/>
+                <a16:creationId xmlns:a16="http://schemas.microsoft.com/office/drawing/2014/main" id="{ECDDB3DA-444D-4563-AC62-0A186EA79859}"/>
               </a:ext>
             </a:extLst>
           </p:cNvPr>
@@ -44828,7 +44828,7 @@
           <p:cNvPr id="101" name="">
             <a:extLst xmlns:a="http://schemas.openxmlformats.org/drawingml/2006/main">
               <a:ext uri="{FF2B5EF4-FFF2-40B4-BE49-F238E27FC236}">
-                <a16:creationId xmlns:a16="http://schemas.microsoft.com/office/drawing/2014/main" id="{C9AF8B12-6EA1-4E5C-91DA-288E47F981AC}"/>
+                <a16:creationId xmlns:a16="http://schemas.microsoft.com/office/drawing/2014/main" id="{94C26EEB-0B9E-4DCB-8DBE-792FE64447D0}"/>
               </a:ext>
             </a:extLst>
           </p:cNvPr>
@@ -44878,7 +44878,7 @@
     </p:spTree>
     <p:extLst>
       <p:ext uri="{BB962C8B-B14F-4D97-AF65-F5344CB8AC3E}">
-        <p14:creationId xmlns:p14="http://schemas.microsoft.com/office/powerpoint/2010/main" val="412713725"/>
+        <p14:creationId xmlns:p14="http://schemas.microsoft.com/office/powerpoint/2010/main" val="1488436806"/>
       </p:ext>
     </p:extLst>
   </p:cSld>

--- a/.preview/pptx/deck.pptx
+++ b/.preview/pptx/deck.pptx
@@ -2,27 +2,27 @@
 <file path=ppt/presentation.xml><?xml version="1.0" encoding="utf-8"?>
 <p:presentation xmlns:p="http://schemas.openxmlformats.org/presentationml/2006/main">
   <p:sldMasterIdLst>
-    <p:sldMasterId xmlns:r="http://schemas.openxmlformats.org/officeDocument/2006/relationships" id="2147483648" r:id="R8674206611f249d5"/>
+    <p:sldMasterId xmlns:r="http://schemas.openxmlformats.org/officeDocument/2006/relationships" id="2147483648" r:id="Rabcd6a5550bf40f5"/>
   </p:sldMasterIdLst>
   <p:notesMasterIdLst>
-    <p:notesMasterId xmlns:r="http://schemas.openxmlformats.org/officeDocument/2006/relationships" r:id="R4cbba2620cb34ab5"/>
+    <p:notesMasterId xmlns:r="http://schemas.openxmlformats.org/officeDocument/2006/relationships" r:id="R98efa8bcddcf47d8"/>
   </p:notesMasterIdLst>
   <p:sldIdLst>
-    <p:sldId xmlns:r="http://schemas.openxmlformats.org/officeDocument/2006/relationships" id="256" r:id="R910e080833944847"/>
-    <p:sldId xmlns:r="http://schemas.openxmlformats.org/officeDocument/2006/relationships" id="257" r:id="R52b3c91da0674eaf"/>
-    <p:sldId xmlns:r="http://schemas.openxmlformats.org/officeDocument/2006/relationships" id="258" r:id="Rfd9a93c169b64e53"/>
-    <p:sldId xmlns:r="http://schemas.openxmlformats.org/officeDocument/2006/relationships" id="259" r:id="R2ee7640bc54d4575"/>
-    <p:sldId xmlns:r="http://schemas.openxmlformats.org/officeDocument/2006/relationships" id="260" r:id="R35e97d99089f4e1f"/>
-    <p:sldId xmlns:r="http://schemas.openxmlformats.org/officeDocument/2006/relationships" id="261" r:id="R3f0bed849c1a4e7b"/>
-    <p:sldId xmlns:r="http://schemas.openxmlformats.org/officeDocument/2006/relationships" id="262" r:id="R3d77523f28804485"/>
-    <p:sldId xmlns:r="http://schemas.openxmlformats.org/officeDocument/2006/relationships" id="263" r:id="R00e860ada350414f"/>
-    <p:sldId xmlns:r="http://schemas.openxmlformats.org/officeDocument/2006/relationships" id="264" r:id="R6d0c1055629349a5"/>
-    <p:sldId xmlns:r="http://schemas.openxmlformats.org/officeDocument/2006/relationships" id="265" r:id="R7ecd5e168dce42ca"/>
-    <p:sldId xmlns:r="http://schemas.openxmlformats.org/officeDocument/2006/relationships" id="266" r:id="Rf5649180b0cd4181"/>
-    <p:sldId xmlns:r="http://schemas.openxmlformats.org/officeDocument/2006/relationships" id="267" r:id="R6f9eeeced4a24994"/>
-    <p:sldId xmlns:r="http://schemas.openxmlformats.org/officeDocument/2006/relationships" id="268" r:id="R44087a11b55a430c"/>
-    <p:sldId xmlns:r="http://schemas.openxmlformats.org/officeDocument/2006/relationships" id="269" r:id="Rf6572829c9144e76"/>
-    <p:sldId xmlns:r="http://schemas.openxmlformats.org/officeDocument/2006/relationships" id="270" r:id="Rfc27f7a263554a4b"/>
+    <p:sldId xmlns:r="http://schemas.openxmlformats.org/officeDocument/2006/relationships" id="256" r:id="Rfdcc491a879349d7"/>
+    <p:sldId xmlns:r="http://schemas.openxmlformats.org/officeDocument/2006/relationships" id="257" r:id="Rad498e9a92f34cfe"/>
+    <p:sldId xmlns:r="http://schemas.openxmlformats.org/officeDocument/2006/relationships" id="258" r:id="Recf5bf86c76d4e8a"/>
+    <p:sldId xmlns:r="http://schemas.openxmlformats.org/officeDocument/2006/relationships" id="259" r:id="R0b00f9e12e314d41"/>
+    <p:sldId xmlns:r="http://schemas.openxmlformats.org/officeDocument/2006/relationships" id="260" r:id="R64d4afc670cf4098"/>
+    <p:sldId xmlns:r="http://schemas.openxmlformats.org/officeDocument/2006/relationships" id="261" r:id="R1d9456bbe0b04643"/>
+    <p:sldId xmlns:r="http://schemas.openxmlformats.org/officeDocument/2006/relationships" id="262" r:id="R7b946bb9b7d94980"/>
+    <p:sldId xmlns:r="http://schemas.openxmlformats.org/officeDocument/2006/relationships" id="263" r:id="Rf614cfcaed9f41f8"/>
+    <p:sldId xmlns:r="http://schemas.openxmlformats.org/officeDocument/2006/relationships" id="264" r:id="R80358eed691a4562"/>
+    <p:sldId xmlns:r="http://schemas.openxmlformats.org/officeDocument/2006/relationships" id="265" r:id="Rf9bf23cb0a2f46dc"/>
+    <p:sldId xmlns:r="http://schemas.openxmlformats.org/officeDocument/2006/relationships" id="266" r:id="Rfc1c5c1c7b184d13"/>
+    <p:sldId xmlns:r="http://schemas.openxmlformats.org/officeDocument/2006/relationships" id="267" r:id="R265f62e86f694584"/>
+    <p:sldId xmlns:r="http://schemas.openxmlformats.org/officeDocument/2006/relationships" id="268" r:id="R5c7abea1f7534cf4"/>
+    <p:sldId xmlns:r="http://schemas.openxmlformats.org/officeDocument/2006/relationships" id="269" r:id="R17d070c6c783450c"/>
+    <p:sldId xmlns:r="http://schemas.openxmlformats.org/officeDocument/2006/relationships" id="270" r:id="R932debfbb8974e31"/>
   </p:sldIdLst>
   <p:sldSz cx="12192000" cy="6858000"/>
   <p:notesSz cx="6858000" cy="9144000"/>
@@ -1879,7 +1879,7 @@
   </p:cSld>
   <p:clrMap bg1="lt1" tx1="dk1" bg2="lt2" tx2="dk2" accent1="accent1" accent2="accent2" accent3="accent3" accent4="accent4" accent5="accent5" accent6="accent6" hlink="hlink" folHlink="folHlink"/>
   <p:sldLayoutIdLst>
-    <p:sldLayoutId xmlns:r="http://schemas.openxmlformats.org/officeDocument/2006/relationships" id="2147483649" r:id="R8d134c8556894b66"/>
+    <p:sldLayoutId xmlns:r="http://schemas.openxmlformats.org/officeDocument/2006/relationships" id="2147483649" r:id="R37e68e175aac4291"/>
   </p:sldLayoutIdLst>
   <p:txStyles>
     <p:titleStyle>
@@ -2430,7 +2430,7 @@
           <p:cNvPr id="17" name="">
             <a:extLst xmlns:a="http://schemas.openxmlformats.org/drawingml/2006/main">
               <a:ext uri="{FF2B5EF4-FFF2-40B4-BE49-F238E27FC236}">
-                <a16:creationId xmlns:a16="http://schemas.microsoft.com/office/drawing/2014/main" id="{9CDEC2CB-4ABF-413F-B871-5D38F8DDD602}"/>
+                <a16:creationId xmlns:a16="http://schemas.microsoft.com/office/drawing/2014/main" id="{67774519-65D4-4496-A70E-21CE81314EEF}"/>
               </a:ext>
             </a:extLst>
           </p:cNvPr>
@@ -2463,7 +2463,7 @@
           <p:cNvPr id="2" name="">
             <a:extLst xmlns:a="http://schemas.openxmlformats.org/drawingml/2006/main">
               <a:ext uri="{FF2B5EF4-FFF2-40B4-BE49-F238E27FC236}">
-                <a16:creationId xmlns:a16="http://schemas.microsoft.com/office/drawing/2014/main" id="{E6402E0A-CEAA-4C03-8B8F-BBC21E75F76A}"/>
+                <a16:creationId xmlns:a16="http://schemas.microsoft.com/office/drawing/2014/main" id="{23A884F5-F98D-43DB-8795-48D028CBF6B5}"/>
               </a:ext>
             </a:extLst>
           </p:cNvPr>
@@ -2494,7 +2494,7 @@
           <p:cNvPr id="3" name="">
             <a:extLst xmlns:a="http://schemas.openxmlformats.org/drawingml/2006/main">
               <a:ext uri="{FF2B5EF4-FFF2-40B4-BE49-F238E27FC236}">
-                <a16:creationId xmlns:a16="http://schemas.microsoft.com/office/drawing/2014/main" id="{EA5EF1A0-8B6A-4F22-A5AF-184E8241674A}"/>
+                <a16:creationId xmlns:a16="http://schemas.microsoft.com/office/drawing/2014/main" id="{B8098E4C-ED5A-41FC-AF67-0D5050B74143}"/>
               </a:ext>
             </a:extLst>
           </p:cNvPr>
@@ -2529,7 +2529,7 @@
           <p:nvPr/>
         </p:nvPicPr>
         <p:blipFill>
-          <a:blip xmlns:r="http://schemas.openxmlformats.org/officeDocument/2006/relationships" xmlns:a="http://schemas.openxmlformats.org/drawingml/2006/main" r:embed="R054fa175a7dc43f4"/>
+          <a:blip xmlns:r="http://schemas.openxmlformats.org/officeDocument/2006/relationships" xmlns:a="http://schemas.openxmlformats.org/drawingml/2006/main" r:embed="R44d52b8d01ab4268"/>
           <a:stretch xmlns:a="http://schemas.openxmlformats.org/drawingml/2006/main"/>
         </p:blipFill>
         <p:spPr>
@@ -2547,7 +2547,7 @@
           <p:cNvPr id="5" name="">
             <a:extLst xmlns:a="http://schemas.openxmlformats.org/drawingml/2006/main">
               <a:ext uri="{FF2B5EF4-FFF2-40B4-BE49-F238E27FC236}">
-                <a16:creationId xmlns:a16="http://schemas.microsoft.com/office/drawing/2014/main" id="{96101606-2FF6-4B1F-8884-0E69983DDF5B}"/>
+                <a16:creationId xmlns:a16="http://schemas.microsoft.com/office/drawing/2014/main" id="{1A16C7B1-85F5-4A77-A1E9-70FE3B8E2C85}"/>
               </a:ext>
             </a:extLst>
           </p:cNvPr>
@@ -2599,7 +2599,7 @@
           <p:cNvPr id="6" name="">
             <a:extLst xmlns:a="http://schemas.openxmlformats.org/drawingml/2006/main">
               <a:ext uri="{FF2B5EF4-FFF2-40B4-BE49-F238E27FC236}">
-                <a16:creationId xmlns:a16="http://schemas.microsoft.com/office/drawing/2014/main" id="{B93B0E3A-A50F-4826-9215-531EA243E070}"/>
+                <a16:creationId xmlns:a16="http://schemas.microsoft.com/office/drawing/2014/main" id="{29E5CE96-F123-4E0D-8748-89346BC57986}"/>
               </a:ext>
             </a:extLst>
           </p:cNvPr>
@@ -2655,7 +2655,7 @@
           <p:nvPr/>
         </p:nvPicPr>
         <p:blipFill>
-          <a:blip xmlns:r="http://schemas.openxmlformats.org/officeDocument/2006/relationships" xmlns:a="http://schemas.openxmlformats.org/drawingml/2006/main" r:embed="R0af75af2f3eb4b50"/>
+          <a:blip xmlns:r="http://schemas.openxmlformats.org/officeDocument/2006/relationships" xmlns:a="http://schemas.openxmlformats.org/drawingml/2006/main" r:embed="R89b08bf9de1a465f"/>
           <a:stretch xmlns:a="http://schemas.openxmlformats.org/drawingml/2006/main"/>
         </p:blipFill>
         <p:spPr>
@@ -2673,7 +2673,7 @@
           <p:cNvPr id="8" name="">
             <a:extLst xmlns:a="http://schemas.openxmlformats.org/drawingml/2006/main">
               <a:ext uri="{FF2B5EF4-FFF2-40B4-BE49-F238E27FC236}">
-                <a16:creationId xmlns:a16="http://schemas.microsoft.com/office/drawing/2014/main" id="{488DBAA2-A3BA-4D98-946B-675AC21E3A54}"/>
+                <a16:creationId xmlns:a16="http://schemas.microsoft.com/office/drawing/2014/main" id="{85045311-6E8D-4B11-8DE3-EF0225A020D5}"/>
               </a:ext>
             </a:extLst>
           </p:cNvPr>
@@ -2706,7 +2706,7 @@
           <p:cNvPr id="9" name="">
             <a:extLst xmlns:a="http://schemas.openxmlformats.org/drawingml/2006/main">
               <a:ext uri="{FF2B5EF4-FFF2-40B4-BE49-F238E27FC236}">
-                <a16:creationId xmlns:a16="http://schemas.microsoft.com/office/drawing/2014/main" id="{B94F03F5-BB26-4B1A-B011-5AD52E62D913}"/>
+                <a16:creationId xmlns:a16="http://schemas.microsoft.com/office/drawing/2014/main" id="{55E3F0F0-AE44-4051-B856-DE57D35E1405}"/>
               </a:ext>
             </a:extLst>
           </p:cNvPr>
@@ -2758,7 +2758,7 @@
           <p:cNvPr id="10" name="">
             <a:extLst xmlns:a="http://schemas.openxmlformats.org/drawingml/2006/main">
               <a:ext uri="{FF2B5EF4-FFF2-40B4-BE49-F238E27FC236}">
-                <a16:creationId xmlns:a16="http://schemas.microsoft.com/office/drawing/2014/main" id="{36AE42D4-E486-4255-B24D-5254406C087F}"/>
+                <a16:creationId xmlns:a16="http://schemas.microsoft.com/office/drawing/2014/main" id="{BE7BF496-1680-407B-98B7-F7B4DDC5734E}"/>
               </a:ext>
             </a:extLst>
           </p:cNvPr>
@@ -2810,7 +2810,7 @@
           <p:cNvPr id="11" name="">
             <a:extLst xmlns:a="http://schemas.openxmlformats.org/drawingml/2006/main">
               <a:ext uri="{FF2B5EF4-FFF2-40B4-BE49-F238E27FC236}">
-                <a16:creationId xmlns:a16="http://schemas.microsoft.com/office/drawing/2014/main" id="{206FF577-0862-44D7-B8C7-1971207F3332}"/>
+                <a16:creationId xmlns:a16="http://schemas.microsoft.com/office/drawing/2014/main" id="{6ED43E72-9352-4A4A-BC89-FDEBA35AD701}"/>
               </a:ext>
             </a:extLst>
           </p:cNvPr>
@@ -2862,7 +2862,7 @@
           <p:cNvPr id="12" name="">
             <a:extLst xmlns:a="http://schemas.openxmlformats.org/drawingml/2006/main">
               <a:ext uri="{FF2B5EF4-FFF2-40B4-BE49-F238E27FC236}">
-                <a16:creationId xmlns:a16="http://schemas.microsoft.com/office/drawing/2014/main" id="{385CAB01-B903-48DE-A9B2-07A2CF0601C7}"/>
+                <a16:creationId xmlns:a16="http://schemas.microsoft.com/office/drawing/2014/main" id="{1A7D9FE5-2362-46D9-A74F-AC423FDD5DF5}"/>
               </a:ext>
             </a:extLst>
           </p:cNvPr>
@@ -2914,7 +2914,7 @@
           <p:cNvPr id="13" name="">
             <a:extLst xmlns:a="http://schemas.openxmlformats.org/drawingml/2006/main">
               <a:ext uri="{FF2B5EF4-FFF2-40B4-BE49-F238E27FC236}">
-                <a16:creationId xmlns:a16="http://schemas.microsoft.com/office/drawing/2014/main" id="{8201A6C9-22F0-4CFF-8FE0-F95B8942D87D}"/>
+                <a16:creationId xmlns:a16="http://schemas.microsoft.com/office/drawing/2014/main" id="{2AC0031A-1DFF-4BD3-A318-31E86815B232}"/>
               </a:ext>
             </a:extLst>
           </p:cNvPr>
@@ -2966,7 +2966,7 @@
           <p:cNvPr id="14" name="">
             <a:extLst xmlns:a="http://schemas.openxmlformats.org/drawingml/2006/main">
               <a:ext uri="{FF2B5EF4-FFF2-40B4-BE49-F238E27FC236}">
-                <a16:creationId xmlns:a16="http://schemas.microsoft.com/office/drawing/2014/main" id="{521DF297-78A5-40C3-ADCB-80EBF2F35155}"/>
+                <a16:creationId xmlns:a16="http://schemas.microsoft.com/office/drawing/2014/main" id="{CC05E7A2-CB34-43B8-B78A-814F81E73E23}"/>
               </a:ext>
             </a:extLst>
           </p:cNvPr>
@@ -3018,7 +3018,7 @@
           <p:cNvPr id="15" name="">
             <a:extLst xmlns:a="http://schemas.openxmlformats.org/drawingml/2006/main">
               <a:ext uri="{FF2B5EF4-FFF2-40B4-BE49-F238E27FC236}">
-                <a16:creationId xmlns:a16="http://schemas.microsoft.com/office/drawing/2014/main" id="{E8655CFB-27F2-416D-86EC-60F30B06158B}"/>
+                <a16:creationId xmlns:a16="http://schemas.microsoft.com/office/drawing/2014/main" id="{2690C1B3-5742-487B-B7BD-E4472A63C16E}"/>
               </a:ext>
             </a:extLst>
           </p:cNvPr>
@@ -3070,7 +3070,7 @@
           <p:cNvPr id="16" name="">
             <a:extLst xmlns:a="http://schemas.openxmlformats.org/drawingml/2006/main">
               <a:ext uri="{FF2B5EF4-FFF2-40B4-BE49-F238E27FC236}">
-                <a16:creationId xmlns:a16="http://schemas.microsoft.com/office/drawing/2014/main" id="{6079828C-5EC0-4551-B262-A0B45432B8BE}"/>
+                <a16:creationId xmlns:a16="http://schemas.microsoft.com/office/drawing/2014/main" id="{E3387FC7-B974-46E7-86C0-B107EAEAEDAB}"/>
               </a:ext>
             </a:extLst>
           </p:cNvPr>
@@ -3120,7 +3120,7 @@
     </p:spTree>
     <p:extLst>
       <p:ext uri="{BB962C8B-B14F-4D97-AF65-F5344CB8AC3E}">
-        <p14:creationId xmlns:p14="http://schemas.microsoft.com/office/powerpoint/2010/main" val="2131078000"/>
+        <p14:creationId xmlns:p14="http://schemas.microsoft.com/office/powerpoint/2010/main" val="898581278"/>
       </p:ext>
     </p:extLst>
   </p:cSld>
@@ -3151,7 +3151,7 @@
           <p:cNvPr id="103" name="">
             <a:extLst xmlns:a="http://schemas.openxmlformats.org/drawingml/2006/main">
               <a:ext uri="{FF2B5EF4-FFF2-40B4-BE49-F238E27FC236}">
-                <a16:creationId xmlns:a16="http://schemas.microsoft.com/office/drawing/2014/main" id="{5AC1ECFC-664E-42FC-8C4C-7D776166E4B5}"/>
+                <a16:creationId xmlns:a16="http://schemas.microsoft.com/office/drawing/2014/main" id="{634E486E-E77F-4FC1-8F9D-BC82623E789D}"/>
               </a:ext>
             </a:extLst>
           </p:cNvPr>
@@ -3184,7 +3184,7 @@
           <p:cNvPr id="2" name="">
             <a:extLst xmlns:a="http://schemas.openxmlformats.org/drawingml/2006/main">
               <a:ext uri="{FF2B5EF4-FFF2-40B4-BE49-F238E27FC236}">
-                <a16:creationId xmlns:a16="http://schemas.microsoft.com/office/drawing/2014/main" id="{D6258707-EA98-4DEA-96EE-2F253EEF24F4}"/>
+                <a16:creationId xmlns:a16="http://schemas.microsoft.com/office/drawing/2014/main" id="{5A36C3DE-3B51-46C2-AEF0-E3F9408D5A87}"/>
               </a:ext>
             </a:extLst>
           </p:cNvPr>
@@ -3215,7 +3215,7 @@
           <p:cNvPr id="3" name="">
             <a:extLst xmlns:a="http://schemas.openxmlformats.org/drawingml/2006/main">
               <a:ext uri="{FF2B5EF4-FFF2-40B4-BE49-F238E27FC236}">
-                <a16:creationId xmlns:a16="http://schemas.microsoft.com/office/drawing/2014/main" id="{3A502623-9443-4FCE-9465-9AEED96E1836}"/>
+                <a16:creationId xmlns:a16="http://schemas.microsoft.com/office/drawing/2014/main" id="{1E2B1D8C-CCE1-4BA7-A0AE-5F2E9D108724}"/>
               </a:ext>
             </a:extLst>
           </p:cNvPr>
@@ -3267,7 +3267,7 @@
           <p:cNvPr id="4" name="">
             <a:extLst xmlns:a="http://schemas.openxmlformats.org/drawingml/2006/main">
               <a:ext uri="{FF2B5EF4-FFF2-40B4-BE49-F238E27FC236}">
-                <a16:creationId xmlns:a16="http://schemas.microsoft.com/office/drawing/2014/main" id="{CECB7A4C-5AF7-42D2-AF29-9D58589B2E29}"/>
+                <a16:creationId xmlns:a16="http://schemas.microsoft.com/office/drawing/2014/main" id="{4CCFC85D-3BF4-44D6-BA9C-2C337E65AFBF}"/>
               </a:ext>
             </a:extLst>
           </p:cNvPr>
@@ -3319,7 +3319,7 @@
           <p:cNvPr id="5" name="">
             <a:extLst xmlns:a="http://schemas.openxmlformats.org/drawingml/2006/main">
               <a:ext uri="{FF2B5EF4-FFF2-40B4-BE49-F238E27FC236}">
-                <a16:creationId xmlns:a16="http://schemas.microsoft.com/office/drawing/2014/main" id="{AEEAA275-53AE-49EF-B1B8-BD3E655183EF}"/>
+                <a16:creationId xmlns:a16="http://schemas.microsoft.com/office/drawing/2014/main" id="{C93E0840-6AE4-4AB2-A70E-38640975A77C}"/>
               </a:ext>
             </a:extLst>
           </p:cNvPr>
@@ -3354,7 +3354,7 @@
           <p:nvPr/>
         </p:nvPicPr>
         <p:blipFill>
-          <a:blip xmlns:r="http://schemas.openxmlformats.org/officeDocument/2006/relationships" xmlns:a="http://schemas.openxmlformats.org/drawingml/2006/main" r:embed="R3748800fc2a04f81"/>
+          <a:blip xmlns:r="http://schemas.openxmlformats.org/officeDocument/2006/relationships" xmlns:a="http://schemas.openxmlformats.org/drawingml/2006/main" r:embed="R0f9b23a2cabf4f2d"/>
           <a:stretch xmlns:a="http://schemas.openxmlformats.org/drawingml/2006/main"/>
         </p:blipFill>
         <p:spPr>
@@ -3372,7 +3372,7 @@
           <p:cNvPr id="7" name="">
             <a:extLst xmlns:a="http://schemas.openxmlformats.org/drawingml/2006/main">
               <a:ext uri="{FF2B5EF4-FFF2-40B4-BE49-F238E27FC236}">
-                <a16:creationId xmlns:a16="http://schemas.microsoft.com/office/drawing/2014/main" id="{B23EC2AC-B607-4E10-9848-13FCFEE63DFF}"/>
+                <a16:creationId xmlns:a16="http://schemas.microsoft.com/office/drawing/2014/main" id="{C9CD40C7-C3FB-404F-A7F0-537808C3426E}"/>
               </a:ext>
             </a:extLst>
           </p:cNvPr>
@@ -3424,7 +3424,7 @@
           <p:cNvPr id="8" name="">
             <a:extLst xmlns:a="http://schemas.openxmlformats.org/drawingml/2006/main">
               <a:ext uri="{FF2B5EF4-FFF2-40B4-BE49-F238E27FC236}">
-                <a16:creationId xmlns:a16="http://schemas.microsoft.com/office/drawing/2014/main" id="{84C5AE99-AC18-432C-AED1-B826BCCEF28C}"/>
+                <a16:creationId xmlns:a16="http://schemas.microsoft.com/office/drawing/2014/main" id="{F94126E9-8D16-4EE7-BF8C-F410A9C2F657}"/>
               </a:ext>
             </a:extLst>
           </p:cNvPr>
@@ -3476,7 +3476,7 @@
           <p:cNvPr id="9" name="">
             <a:extLst xmlns:a="http://schemas.openxmlformats.org/drawingml/2006/main">
               <a:ext uri="{FF2B5EF4-FFF2-40B4-BE49-F238E27FC236}">
-                <a16:creationId xmlns:a16="http://schemas.microsoft.com/office/drawing/2014/main" id="{54A0A304-3FF7-4869-800B-F1C25C27EC7B}"/>
+                <a16:creationId xmlns:a16="http://schemas.microsoft.com/office/drawing/2014/main" id="{61316352-6A0E-47C9-8BED-23F98F58D81A}"/>
               </a:ext>
             </a:extLst>
           </p:cNvPr>
@@ -3528,7 +3528,7 @@
           <p:cNvPr id="10" name="">
             <a:extLst xmlns:a="http://schemas.openxmlformats.org/drawingml/2006/main">
               <a:ext uri="{FF2B5EF4-FFF2-40B4-BE49-F238E27FC236}">
-                <a16:creationId xmlns:a16="http://schemas.microsoft.com/office/drawing/2014/main" id="{D8EB55AD-B525-42AD-955D-C2D44D0BBC03}"/>
+                <a16:creationId xmlns:a16="http://schemas.microsoft.com/office/drawing/2014/main" id="{109D3401-DBDE-4733-B8A1-59D6BAC16FA1}"/>
               </a:ext>
             </a:extLst>
           </p:cNvPr>
@@ -3580,7 +3580,7 @@
           <p:cNvPr id="11" name="">
             <a:extLst xmlns:a="http://schemas.openxmlformats.org/drawingml/2006/main">
               <a:ext uri="{FF2B5EF4-FFF2-40B4-BE49-F238E27FC236}">
-                <a16:creationId xmlns:a16="http://schemas.microsoft.com/office/drawing/2014/main" id="{F7AC4D90-9971-47FB-B794-0B5D533F943C}"/>
+                <a16:creationId xmlns:a16="http://schemas.microsoft.com/office/drawing/2014/main" id="{0318AB4E-ACB0-413F-AF94-1B44D0EAC91A}"/>
               </a:ext>
             </a:extLst>
           </p:cNvPr>
@@ -3611,7 +3611,7 @@
           <p:cNvPr id="12" name="">
             <a:extLst xmlns:a="http://schemas.openxmlformats.org/drawingml/2006/main">
               <a:ext uri="{FF2B5EF4-FFF2-40B4-BE49-F238E27FC236}">
-                <a16:creationId xmlns:a16="http://schemas.microsoft.com/office/drawing/2014/main" id="{41E7C28A-47A7-49E1-98B6-03A0BB74C5CC}"/>
+                <a16:creationId xmlns:a16="http://schemas.microsoft.com/office/drawing/2014/main" id="{59CDE58C-C6A7-4C4A-97E7-EB94B41DB225}"/>
               </a:ext>
             </a:extLst>
           </p:cNvPr>
@@ -3642,7 +3642,7 @@
           <p:cNvPr id="13" name="">
             <a:extLst xmlns:a="http://schemas.openxmlformats.org/drawingml/2006/main">
               <a:ext uri="{FF2B5EF4-FFF2-40B4-BE49-F238E27FC236}">
-                <a16:creationId xmlns:a16="http://schemas.microsoft.com/office/drawing/2014/main" id="{18AE8584-6D56-414D-B462-6CF25E93CA66}"/>
+                <a16:creationId xmlns:a16="http://schemas.microsoft.com/office/drawing/2014/main" id="{F7F6030E-1E8C-4A9E-9BB0-8E78CF3FC1FC}"/>
               </a:ext>
             </a:extLst>
           </p:cNvPr>
@@ -3694,7 +3694,7 @@
           <p:cNvPr id="14" name="">
             <a:extLst xmlns:a="http://schemas.openxmlformats.org/drawingml/2006/main">
               <a:ext uri="{FF2B5EF4-FFF2-40B4-BE49-F238E27FC236}">
-                <a16:creationId xmlns:a16="http://schemas.microsoft.com/office/drawing/2014/main" id="{08D2CB80-4BE0-4966-B326-83727A5564C6}"/>
+                <a16:creationId xmlns:a16="http://schemas.microsoft.com/office/drawing/2014/main" id="{FB35F5C6-9F0A-479E-B823-D684DC27DF80}"/>
               </a:ext>
             </a:extLst>
           </p:cNvPr>
@@ -3746,7 +3746,7 @@
           <p:cNvPr id="15" name="">
             <a:extLst xmlns:a="http://schemas.openxmlformats.org/drawingml/2006/main">
               <a:ext uri="{FF2B5EF4-FFF2-40B4-BE49-F238E27FC236}">
-                <a16:creationId xmlns:a16="http://schemas.microsoft.com/office/drawing/2014/main" id="{CC6C6AD4-969F-4710-A416-9265C896322A}"/>
+                <a16:creationId xmlns:a16="http://schemas.microsoft.com/office/drawing/2014/main" id="{E1E269CD-E217-4751-87F1-EE0EF97B48C5}"/>
               </a:ext>
             </a:extLst>
           </p:cNvPr>
@@ -3798,7 +3798,7 @@
           <p:cNvPr id="16" name="">
             <a:extLst xmlns:a="http://schemas.openxmlformats.org/drawingml/2006/main">
               <a:ext uri="{FF2B5EF4-FFF2-40B4-BE49-F238E27FC236}">
-                <a16:creationId xmlns:a16="http://schemas.microsoft.com/office/drawing/2014/main" id="{7EABF6F0-7FA5-41EF-8AF3-3E1769674833}"/>
+                <a16:creationId xmlns:a16="http://schemas.microsoft.com/office/drawing/2014/main" id="{EF221058-E27E-4CB8-A5E9-6BC01C30A159}"/>
               </a:ext>
             </a:extLst>
           </p:cNvPr>
@@ -3850,7 +3850,7 @@
           <p:cNvPr id="17" name="">
             <a:extLst xmlns:a="http://schemas.openxmlformats.org/drawingml/2006/main">
               <a:ext uri="{FF2B5EF4-FFF2-40B4-BE49-F238E27FC236}">
-                <a16:creationId xmlns:a16="http://schemas.microsoft.com/office/drawing/2014/main" id="{995C9797-98E1-437C-9CE1-557ED3250545}"/>
+                <a16:creationId xmlns:a16="http://schemas.microsoft.com/office/drawing/2014/main" id="{3FAE5092-6EDF-456B-AE87-39C056B0FF78}"/>
               </a:ext>
             </a:extLst>
           </p:cNvPr>
@@ -3902,7 +3902,7 @@
           <p:cNvPr id="18" name="">
             <a:extLst xmlns:a="http://schemas.openxmlformats.org/drawingml/2006/main">
               <a:ext uri="{FF2B5EF4-FFF2-40B4-BE49-F238E27FC236}">
-                <a16:creationId xmlns:a16="http://schemas.microsoft.com/office/drawing/2014/main" id="{36FD26DF-B476-4CE5-8BCD-FB7C8C9B9221}"/>
+                <a16:creationId xmlns:a16="http://schemas.microsoft.com/office/drawing/2014/main" id="{A9E2DEF9-3750-40AF-A6F0-5CEECF80A664}"/>
               </a:ext>
             </a:extLst>
           </p:cNvPr>
@@ -3933,7 +3933,7 @@
           <p:cNvPr id="19" name="">
             <a:extLst xmlns:a="http://schemas.openxmlformats.org/drawingml/2006/main">
               <a:ext uri="{FF2B5EF4-FFF2-40B4-BE49-F238E27FC236}">
-                <a16:creationId xmlns:a16="http://schemas.microsoft.com/office/drawing/2014/main" id="{BEEED23F-1C5F-4302-908A-D4A7D254589D}"/>
+                <a16:creationId xmlns:a16="http://schemas.microsoft.com/office/drawing/2014/main" id="{005CD1CB-43C4-45C6-B4EA-2C10EBCCC51E}"/>
               </a:ext>
             </a:extLst>
           </p:cNvPr>
@@ -3964,7 +3964,7 @@
           <p:cNvPr id="20" name="">
             <a:extLst xmlns:a="http://schemas.openxmlformats.org/drawingml/2006/main">
               <a:ext uri="{FF2B5EF4-FFF2-40B4-BE49-F238E27FC236}">
-                <a16:creationId xmlns:a16="http://schemas.microsoft.com/office/drawing/2014/main" id="{9CF49FDF-996D-41C1-9141-3A33E16879B8}"/>
+                <a16:creationId xmlns:a16="http://schemas.microsoft.com/office/drawing/2014/main" id="{DD02ECAD-9957-4566-A846-54570767054A}"/>
               </a:ext>
             </a:extLst>
           </p:cNvPr>
@@ -4016,7 +4016,7 @@
           <p:cNvPr id="21" name="">
             <a:extLst xmlns:a="http://schemas.openxmlformats.org/drawingml/2006/main">
               <a:ext uri="{FF2B5EF4-FFF2-40B4-BE49-F238E27FC236}">
-                <a16:creationId xmlns:a16="http://schemas.microsoft.com/office/drawing/2014/main" id="{ED888AEF-03C3-4EA7-989E-65D535861218}"/>
+                <a16:creationId xmlns:a16="http://schemas.microsoft.com/office/drawing/2014/main" id="{ADA5F02B-64EB-492B-A8E8-8DBA5BA5AE32}"/>
               </a:ext>
             </a:extLst>
           </p:cNvPr>
@@ -4068,7 +4068,7 @@
           <p:cNvPr id="22" name="">
             <a:extLst xmlns:a="http://schemas.openxmlformats.org/drawingml/2006/main">
               <a:ext uri="{FF2B5EF4-FFF2-40B4-BE49-F238E27FC236}">
-                <a16:creationId xmlns:a16="http://schemas.microsoft.com/office/drawing/2014/main" id="{930B81E3-1239-4331-ACA3-09E4FA53E739}"/>
+                <a16:creationId xmlns:a16="http://schemas.microsoft.com/office/drawing/2014/main" id="{1898951F-3C7C-4683-A427-4481B6DAFD39}"/>
               </a:ext>
             </a:extLst>
           </p:cNvPr>
@@ -4120,7 +4120,7 @@
           <p:cNvPr id="23" name="">
             <a:extLst xmlns:a="http://schemas.openxmlformats.org/drawingml/2006/main">
               <a:ext uri="{FF2B5EF4-FFF2-40B4-BE49-F238E27FC236}">
-                <a16:creationId xmlns:a16="http://schemas.microsoft.com/office/drawing/2014/main" id="{8F659073-9791-45ED-B5F3-3AD596136D0A}"/>
+                <a16:creationId xmlns:a16="http://schemas.microsoft.com/office/drawing/2014/main" id="{7DBA01F9-7615-4D32-BA43-CAE67BB750FC}"/>
               </a:ext>
             </a:extLst>
           </p:cNvPr>
@@ -4172,7 +4172,7 @@
           <p:cNvPr id="24" name="">
             <a:extLst xmlns:a="http://schemas.openxmlformats.org/drawingml/2006/main">
               <a:ext uri="{FF2B5EF4-FFF2-40B4-BE49-F238E27FC236}">
-                <a16:creationId xmlns:a16="http://schemas.microsoft.com/office/drawing/2014/main" id="{EADE99EC-CC0A-405E-B029-3E91504461AE}"/>
+                <a16:creationId xmlns:a16="http://schemas.microsoft.com/office/drawing/2014/main" id="{4BC9267F-F134-4D26-90C0-C7505903A162}"/>
               </a:ext>
             </a:extLst>
           </p:cNvPr>
@@ -4224,7 +4224,7 @@
           <p:cNvPr id="25" name="">
             <a:extLst xmlns:a="http://schemas.openxmlformats.org/drawingml/2006/main">
               <a:ext uri="{FF2B5EF4-FFF2-40B4-BE49-F238E27FC236}">
-                <a16:creationId xmlns:a16="http://schemas.microsoft.com/office/drawing/2014/main" id="{1D38A388-B575-4A55-ADCF-4562EA81924C}"/>
+                <a16:creationId xmlns:a16="http://schemas.microsoft.com/office/drawing/2014/main" id="{4927A19D-566D-4F15-B94C-84FDFCCD3C26}"/>
               </a:ext>
             </a:extLst>
           </p:cNvPr>
@@ -4255,7 +4255,7 @@
           <p:cNvPr id="26" name="">
             <a:extLst xmlns:a="http://schemas.openxmlformats.org/drawingml/2006/main">
               <a:ext uri="{FF2B5EF4-FFF2-40B4-BE49-F238E27FC236}">
-                <a16:creationId xmlns:a16="http://schemas.microsoft.com/office/drawing/2014/main" id="{2DC6E87A-D330-4012-B6AB-4EBF85412BF4}"/>
+                <a16:creationId xmlns:a16="http://schemas.microsoft.com/office/drawing/2014/main" id="{763C5C1E-3C99-4FBB-9F2C-D19FE64DF377}"/>
               </a:ext>
             </a:extLst>
           </p:cNvPr>
@@ -4307,7 +4307,7 @@
           <p:cNvPr id="27" name="">
             <a:extLst xmlns:a="http://schemas.openxmlformats.org/drawingml/2006/main">
               <a:ext uri="{FF2B5EF4-FFF2-40B4-BE49-F238E27FC236}">
-                <a16:creationId xmlns:a16="http://schemas.microsoft.com/office/drawing/2014/main" id="{3160E7D3-464F-4DEC-B124-9C45AE5F1157}"/>
+                <a16:creationId xmlns:a16="http://schemas.microsoft.com/office/drawing/2014/main" id="{638FBF81-AD2E-4441-9767-03E1F353B7F7}"/>
               </a:ext>
             </a:extLst>
           </p:cNvPr>
@@ -4359,7 +4359,7 @@
           <p:cNvPr id="28" name="">
             <a:extLst xmlns:a="http://schemas.openxmlformats.org/drawingml/2006/main">
               <a:ext uri="{FF2B5EF4-FFF2-40B4-BE49-F238E27FC236}">
-                <a16:creationId xmlns:a16="http://schemas.microsoft.com/office/drawing/2014/main" id="{41CA2C1D-0630-4B3B-9C18-DEC95C15183D}"/>
+                <a16:creationId xmlns:a16="http://schemas.microsoft.com/office/drawing/2014/main" id="{B38F104D-A448-459F-B09F-B29628144667}"/>
               </a:ext>
             </a:extLst>
           </p:cNvPr>
@@ -4411,7 +4411,7 @@
           <p:cNvPr id="29" name="">
             <a:extLst xmlns:a="http://schemas.openxmlformats.org/drawingml/2006/main">
               <a:ext uri="{FF2B5EF4-FFF2-40B4-BE49-F238E27FC236}">
-                <a16:creationId xmlns:a16="http://schemas.microsoft.com/office/drawing/2014/main" id="{DAA4E56F-8651-4D64-86B6-A315581E5650}"/>
+                <a16:creationId xmlns:a16="http://schemas.microsoft.com/office/drawing/2014/main" id="{D7C13D34-27EA-4FEA-AD1C-34B23B59AD89}"/>
               </a:ext>
             </a:extLst>
           </p:cNvPr>
@@ -4463,7 +4463,7 @@
           <p:cNvPr id="30" name="">
             <a:extLst xmlns:a="http://schemas.openxmlformats.org/drawingml/2006/main">
               <a:ext uri="{FF2B5EF4-FFF2-40B4-BE49-F238E27FC236}">
-                <a16:creationId xmlns:a16="http://schemas.microsoft.com/office/drawing/2014/main" id="{624FF42A-7FB0-417E-89F9-942B0EBD4318}"/>
+                <a16:creationId xmlns:a16="http://schemas.microsoft.com/office/drawing/2014/main" id="{C8F7B397-E0B9-4B2B-A9E8-CDACD7003E55}"/>
               </a:ext>
             </a:extLst>
           </p:cNvPr>
@@ -4515,7 +4515,7 @@
           <p:cNvPr id="31" name="">
             <a:extLst xmlns:a="http://schemas.openxmlformats.org/drawingml/2006/main">
               <a:ext uri="{FF2B5EF4-FFF2-40B4-BE49-F238E27FC236}">
-                <a16:creationId xmlns:a16="http://schemas.microsoft.com/office/drawing/2014/main" id="{E3CEFC1A-1D8E-4A4D-A32F-2772A7C0757B}"/>
+                <a16:creationId xmlns:a16="http://schemas.microsoft.com/office/drawing/2014/main" id="{C6D9285C-875C-42A7-B7A8-D5BD897B6BE3}"/>
               </a:ext>
             </a:extLst>
           </p:cNvPr>
@@ -4546,7 +4546,7 @@
           <p:cNvPr id="32" name="">
             <a:extLst xmlns:a="http://schemas.openxmlformats.org/drawingml/2006/main">
               <a:ext uri="{FF2B5EF4-FFF2-40B4-BE49-F238E27FC236}">
-                <a16:creationId xmlns:a16="http://schemas.microsoft.com/office/drawing/2014/main" id="{5284D956-27A0-466A-87AC-0976A2B3A5E0}"/>
+                <a16:creationId xmlns:a16="http://schemas.microsoft.com/office/drawing/2014/main" id="{CE5F684C-27F9-4A5A-8D5F-4C1388EEFFF1}"/>
               </a:ext>
             </a:extLst>
           </p:cNvPr>
@@ -4577,7 +4577,7 @@
           <p:cNvPr id="33" name="">
             <a:extLst xmlns:a="http://schemas.openxmlformats.org/drawingml/2006/main">
               <a:ext uri="{FF2B5EF4-FFF2-40B4-BE49-F238E27FC236}">
-                <a16:creationId xmlns:a16="http://schemas.microsoft.com/office/drawing/2014/main" id="{78E8359E-D171-4DB3-8425-DFB5029CB62C}"/>
+                <a16:creationId xmlns:a16="http://schemas.microsoft.com/office/drawing/2014/main" id="{DFC93227-BD47-4EA6-A73B-83F0983052A2}"/>
               </a:ext>
             </a:extLst>
           </p:cNvPr>
@@ -4629,7 +4629,7 @@
           <p:cNvPr id="34" name="">
             <a:extLst xmlns:a="http://schemas.openxmlformats.org/drawingml/2006/main">
               <a:ext uri="{FF2B5EF4-FFF2-40B4-BE49-F238E27FC236}">
-                <a16:creationId xmlns:a16="http://schemas.microsoft.com/office/drawing/2014/main" id="{8D579562-7595-4692-B4D6-BA3C02AEA5BE}"/>
+                <a16:creationId xmlns:a16="http://schemas.microsoft.com/office/drawing/2014/main" id="{A8CAD7B3-015D-434E-A2E8-227B19EC3F47}"/>
               </a:ext>
             </a:extLst>
           </p:cNvPr>
@@ -4681,7 +4681,7 @@
           <p:cNvPr id="35" name="">
             <a:extLst xmlns:a="http://schemas.openxmlformats.org/drawingml/2006/main">
               <a:ext uri="{FF2B5EF4-FFF2-40B4-BE49-F238E27FC236}">
-                <a16:creationId xmlns:a16="http://schemas.microsoft.com/office/drawing/2014/main" id="{2D996115-BE35-4FA5-A213-6C626DF0A2FC}"/>
+                <a16:creationId xmlns:a16="http://schemas.microsoft.com/office/drawing/2014/main" id="{21317BE5-736F-4F6F-B024-289FF65DCA7B}"/>
               </a:ext>
             </a:extLst>
           </p:cNvPr>
@@ -4733,7 +4733,7 @@
           <p:cNvPr id="36" name="">
             <a:extLst xmlns:a="http://schemas.openxmlformats.org/drawingml/2006/main">
               <a:ext uri="{FF2B5EF4-FFF2-40B4-BE49-F238E27FC236}">
-                <a16:creationId xmlns:a16="http://schemas.microsoft.com/office/drawing/2014/main" id="{0C92F6C5-CEEB-47C3-B509-C947DFE0C3D9}"/>
+                <a16:creationId xmlns:a16="http://schemas.microsoft.com/office/drawing/2014/main" id="{FA97C6E7-A6EC-42ED-98F7-3F2534925D1A}"/>
               </a:ext>
             </a:extLst>
           </p:cNvPr>
@@ -4785,7 +4785,7 @@
           <p:cNvPr id="37" name="">
             <a:extLst xmlns:a="http://schemas.openxmlformats.org/drawingml/2006/main">
               <a:ext uri="{FF2B5EF4-FFF2-40B4-BE49-F238E27FC236}">
-                <a16:creationId xmlns:a16="http://schemas.microsoft.com/office/drawing/2014/main" id="{794B9B01-3600-4E56-B917-F7730141B26C}"/>
+                <a16:creationId xmlns:a16="http://schemas.microsoft.com/office/drawing/2014/main" id="{FA253876-03A0-4DEE-8896-2E8A86C37F0B}"/>
               </a:ext>
             </a:extLst>
           </p:cNvPr>
@@ -4837,7 +4837,7 @@
           <p:cNvPr id="38" name="">
             <a:extLst xmlns:a="http://schemas.openxmlformats.org/drawingml/2006/main">
               <a:ext uri="{FF2B5EF4-FFF2-40B4-BE49-F238E27FC236}">
-                <a16:creationId xmlns:a16="http://schemas.microsoft.com/office/drawing/2014/main" id="{5B83A147-3C84-4F01-9A0D-F3DB1EB6F152}"/>
+                <a16:creationId xmlns:a16="http://schemas.microsoft.com/office/drawing/2014/main" id="{A09649A4-2D61-43E1-A073-D3EAB149D8C2}"/>
               </a:ext>
             </a:extLst>
           </p:cNvPr>
@@ -4868,7 +4868,7 @@
           <p:cNvPr id="39" name="">
             <a:extLst xmlns:a="http://schemas.openxmlformats.org/drawingml/2006/main">
               <a:ext uri="{FF2B5EF4-FFF2-40B4-BE49-F238E27FC236}">
-                <a16:creationId xmlns:a16="http://schemas.microsoft.com/office/drawing/2014/main" id="{A1EFF35E-68F3-4E6A-9934-AB8C828EFACB}"/>
+                <a16:creationId xmlns:a16="http://schemas.microsoft.com/office/drawing/2014/main" id="{18F539A9-4789-4F6E-B7E6-A5156711A5E2}"/>
               </a:ext>
             </a:extLst>
           </p:cNvPr>
@@ -4920,7 +4920,7 @@
           <p:cNvPr id="40" name="">
             <a:extLst xmlns:a="http://schemas.openxmlformats.org/drawingml/2006/main">
               <a:ext uri="{FF2B5EF4-FFF2-40B4-BE49-F238E27FC236}">
-                <a16:creationId xmlns:a16="http://schemas.microsoft.com/office/drawing/2014/main" id="{8616FBA6-2CE5-4B49-A477-E680CE78A413}"/>
+                <a16:creationId xmlns:a16="http://schemas.microsoft.com/office/drawing/2014/main" id="{A6F30A40-8488-4AB7-B753-865593DF45DF}"/>
               </a:ext>
             </a:extLst>
           </p:cNvPr>
@@ -4972,7 +4972,7 @@
           <p:cNvPr id="41" name="">
             <a:extLst xmlns:a="http://schemas.openxmlformats.org/drawingml/2006/main">
               <a:ext uri="{FF2B5EF4-FFF2-40B4-BE49-F238E27FC236}">
-                <a16:creationId xmlns:a16="http://schemas.microsoft.com/office/drawing/2014/main" id="{1C55D93D-76C0-4A58-A3D9-8A99FB0C42D4}"/>
+                <a16:creationId xmlns:a16="http://schemas.microsoft.com/office/drawing/2014/main" id="{1D4C86AC-4F78-4509-9579-946768DCF10B}"/>
               </a:ext>
             </a:extLst>
           </p:cNvPr>
@@ -5024,7 +5024,7 @@
           <p:cNvPr id="42" name="">
             <a:extLst xmlns:a="http://schemas.openxmlformats.org/drawingml/2006/main">
               <a:ext uri="{FF2B5EF4-FFF2-40B4-BE49-F238E27FC236}">
-                <a16:creationId xmlns:a16="http://schemas.microsoft.com/office/drawing/2014/main" id="{B92E74A5-9863-4085-ADC6-8EE152FB6227}"/>
+                <a16:creationId xmlns:a16="http://schemas.microsoft.com/office/drawing/2014/main" id="{19D520C8-94EE-4F1A-AA13-074BB6F84C0F}"/>
               </a:ext>
             </a:extLst>
           </p:cNvPr>
@@ -5076,7 +5076,7 @@
           <p:cNvPr id="43" name="">
             <a:extLst xmlns:a="http://schemas.openxmlformats.org/drawingml/2006/main">
               <a:ext uri="{FF2B5EF4-FFF2-40B4-BE49-F238E27FC236}">
-                <a16:creationId xmlns:a16="http://schemas.microsoft.com/office/drawing/2014/main" id="{992399B7-A00D-45F0-A722-AA47D8EC3640}"/>
+                <a16:creationId xmlns:a16="http://schemas.microsoft.com/office/drawing/2014/main" id="{20A3A295-538F-403E-AF2B-70DD259E9D98}"/>
               </a:ext>
             </a:extLst>
           </p:cNvPr>
@@ -5128,7 +5128,7 @@
           <p:cNvPr id="44" name="">
             <a:extLst xmlns:a="http://schemas.openxmlformats.org/drawingml/2006/main">
               <a:ext uri="{FF2B5EF4-FFF2-40B4-BE49-F238E27FC236}">
-                <a16:creationId xmlns:a16="http://schemas.microsoft.com/office/drawing/2014/main" id="{19D45EAA-43A7-4557-A235-EF9E763434FC}"/>
+                <a16:creationId xmlns:a16="http://schemas.microsoft.com/office/drawing/2014/main" id="{CE99F147-5782-4247-B46F-7F0471A9F346}"/>
               </a:ext>
             </a:extLst>
           </p:cNvPr>
@@ -5159,7 +5159,7 @@
           <p:cNvPr id="45" name="">
             <a:extLst xmlns:a="http://schemas.openxmlformats.org/drawingml/2006/main">
               <a:ext uri="{FF2B5EF4-FFF2-40B4-BE49-F238E27FC236}">
-                <a16:creationId xmlns:a16="http://schemas.microsoft.com/office/drawing/2014/main" id="{AD1A8507-C7CF-4C25-A4FF-C6EA049FC302}"/>
+                <a16:creationId xmlns:a16="http://schemas.microsoft.com/office/drawing/2014/main" id="{270BD84F-2DA2-4F19-AF4E-EBEEDD0D7DF3}"/>
               </a:ext>
             </a:extLst>
           </p:cNvPr>
@@ -5190,7 +5190,7 @@
           <p:cNvPr id="46" name="">
             <a:extLst xmlns:a="http://schemas.openxmlformats.org/drawingml/2006/main">
               <a:ext uri="{FF2B5EF4-FFF2-40B4-BE49-F238E27FC236}">
-                <a16:creationId xmlns:a16="http://schemas.microsoft.com/office/drawing/2014/main" id="{CE6E84C9-BE64-4529-8969-AE77FDEAD794}"/>
+                <a16:creationId xmlns:a16="http://schemas.microsoft.com/office/drawing/2014/main" id="{4D993AF6-9C8B-41B8-8109-D8C7FA53CC22}"/>
               </a:ext>
             </a:extLst>
           </p:cNvPr>
@@ -5242,7 +5242,7 @@
           <p:cNvPr id="47" name="">
             <a:extLst xmlns:a="http://schemas.openxmlformats.org/drawingml/2006/main">
               <a:ext uri="{FF2B5EF4-FFF2-40B4-BE49-F238E27FC236}">
-                <a16:creationId xmlns:a16="http://schemas.microsoft.com/office/drawing/2014/main" id="{0F3A4CFC-B49C-4B00-A507-0C43FA7471CA}"/>
+                <a16:creationId xmlns:a16="http://schemas.microsoft.com/office/drawing/2014/main" id="{B8DDF63B-9CF3-46F2-B4D9-131D88599A57}"/>
               </a:ext>
             </a:extLst>
           </p:cNvPr>
@@ -5294,7 +5294,7 @@
           <p:cNvPr id="48" name="">
             <a:extLst xmlns:a="http://schemas.openxmlformats.org/drawingml/2006/main">
               <a:ext uri="{FF2B5EF4-FFF2-40B4-BE49-F238E27FC236}">
-                <a16:creationId xmlns:a16="http://schemas.microsoft.com/office/drawing/2014/main" id="{3802E020-3792-4D82-BBF0-39FD29146CB6}"/>
+                <a16:creationId xmlns:a16="http://schemas.microsoft.com/office/drawing/2014/main" id="{50A43D41-6930-4697-AD97-84C783DD6A67}"/>
               </a:ext>
             </a:extLst>
           </p:cNvPr>
@@ -5346,7 +5346,7 @@
           <p:cNvPr id="49" name="">
             <a:extLst xmlns:a="http://schemas.openxmlformats.org/drawingml/2006/main">
               <a:ext uri="{FF2B5EF4-FFF2-40B4-BE49-F238E27FC236}">
-                <a16:creationId xmlns:a16="http://schemas.microsoft.com/office/drawing/2014/main" id="{7FFB7B16-2A8D-41D6-9479-CB6F8C5C892F}"/>
+                <a16:creationId xmlns:a16="http://schemas.microsoft.com/office/drawing/2014/main" id="{CC6E0215-1E19-428C-A391-99BA7CB2543F}"/>
               </a:ext>
             </a:extLst>
           </p:cNvPr>
@@ -5398,7 +5398,7 @@
           <p:cNvPr id="50" name="">
             <a:extLst xmlns:a="http://schemas.openxmlformats.org/drawingml/2006/main">
               <a:ext uri="{FF2B5EF4-FFF2-40B4-BE49-F238E27FC236}">
-                <a16:creationId xmlns:a16="http://schemas.microsoft.com/office/drawing/2014/main" id="{B7E6E89D-5C70-464B-9D4F-0BDF30244EAF}"/>
+                <a16:creationId xmlns:a16="http://schemas.microsoft.com/office/drawing/2014/main" id="{E902A315-6E41-4E3E-AE6F-338C4772C95F}"/>
               </a:ext>
             </a:extLst>
           </p:cNvPr>
@@ -5450,7 +5450,7 @@
           <p:cNvPr id="51" name="">
             <a:extLst xmlns:a="http://schemas.openxmlformats.org/drawingml/2006/main">
               <a:ext uri="{FF2B5EF4-FFF2-40B4-BE49-F238E27FC236}">
-                <a16:creationId xmlns:a16="http://schemas.microsoft.com/office/drawing/2014/main" id="{1C416A12-75FD-410E-9624-577DDA16C4F7}"/>
+                <a16:creationId xmlns:a16="http://schemas.microsoft.com/office/drawing/2014/main" id="{BFB6921A-D565-4963-AA9F-8C81FC6A84DC}"/>
               </a:ext>
             </a:extLst>
           </p:cNvPr>
@@ -5481,7 +5481,7 @@
           <p:cNvPr id="52" name="">
             <a:extLst xmlns:a="http://schemas.openxmlformats.org/drawingml/2006/main">
               <a:ext uri="{FF2B5EF4-FFF2-40B4-BE49-F238E27FC236}">
-                <a16:creationId xmlns:a16="http://schemas.microsoft.com/office/drawing/2014/main" id="{AA0B476F-CFA9-4D08-9941-6ECEF67F9934}"/>
+                <a16:creationId xmlns:a16="http://schemas.microsoft.com/office/drawing/2014/main" id="{F13BF9D0-6850-4678-83D8-33D26C320EE3}"/>
               </a:ext>
             </a:extLst>
           </p:cNvPr>
@@ -5533,7 +5533,7 @@
           <p:cNvPr id="53" name="">
             <a:extLst xmlns:a="http://schemas.openxmlformats.org/drawingml/2006/main">
               <a:ext uri="{FF2B5EF4-FFF2-40B4-BE49-F238E27FC236}">
-                <a16:creationId xmlns:a16="http://schemas.microsoft.com/office/drawing/2014/main" id="{17AD8DF6-2F2F-4586-8BD3-9F5D1691548A}"/>
+                <a16:creationId xmlns:a16="http://schemas.microsoft.com/office/drawing/2014/main" id="{870683AE-35AB-4949-A350-2F825745F192}"/>
               </a:ext>
             </a:extLst>
           </p:cNvPr>
@@ -5585,7 +5585,7 @@
           <p:cNvPr id="54" name="">
             <a:extLst xmlns:a="http://schemas.openxmlformats.org/drawingml/2006/main">
               <a:ext uri="{FF2B5EF4-FFF2-40B4-BE49-F238E27FC236}">
-                <a16:creationId xmlns:a16="http://schemas.microsoft.com/office/drawing/2014/main" id="{07FAF4ED-B493-490C-8979-FF097F009478}"/>
+                <a16:creationId xmlns:a16="http://schemas.microsoft.com/office/drawing/2014/main" id="{56AD1B74-1215-4AB9-8D5E-D485E9B97A47}"/>
               </a:ext>
             </a:extLst>
           </p:cNvPr>
@@ -5637,7 +5637,7 @@
           <p:cNvPr id="55" name="">
             <a:extLst xmlns:a="http://schemas.openxmlformats.org/drawingml/2006/main">
               <a:ext uri="{FF2B5EF4-FFF2-40B4-BE49-F238E27FC236}">
-                <a16:creationId xmlns:a16="http://schemas.microsoft.com/office/drawing/2014/main" id="{9DA897B5-36CC-44FE-B4E1-B1D6404F3745}"/>
+                <a16:creationId xmlns:a16="http://schemas.microsoft.com/office/drawing/2014/main" id="{CA8BFAE4-7C61-439B-BF59-A6BF82B5AB18}"/>
               </a:ext>
             </a:extLst>
           </p:cNvPr>
@@ -5689,7 +5689,7 @@
           <p:cNvPr id="56" name="">
             <a:extLst xmlns:a="http://schemas.openxmlformats.org/drawingml/2006/main">
               <a:ext uri="{FF2B5EF4-FFF2-40B4-BE49-F238E27FC236}">
-                <a16:creationId xmlns:a16="http://schemas.microsoft.com/office/drawing/2014/main" id="{60FAE159-AB7F-429A-AB81-7DD118175A79}"/>
+                <a16:creationId xmlns:a16="http://schemas.microsoft.com/office/drawing/2014/main" id="{1814B0BE-8DDB-407C-B5E9-1B0C2D83E0A0}"/>
               </a:ext>
             </a:extLst>
           </p:cNvPr>
@@ -5741,7 +5741,7 @@
           <p:cNvPr id="57" name="">
             <a:extLst xmlns:a="http://schemas.openxmlformats.org/drawingml/2006/main">
               <a:ext uri="{FF2B5EF4-FFF2-40B4-BE49-F238E27FC236}">
-                <a16:creationId xmlns:a16="http://schemas.microsoft.com/office/drawing/2014/main" id="{86A1F1FE-79F1-42C7-9734-F1E51682E3B4}"/>
+                <a16:creationId xmlns:a16="http://schemas.microsoft.com/office/drawing/2014/main" id="{C79D585B-5BF8-4712-8DA4-FA53727DF3EB}"/>
               </a:ext>
             </a:extLst>
           </p:cNvPr>
@@ -5772,7 +5772,7 @@
           <p:cNvPr id="58" name="">
             <a:extLst xmlns:a="http://schemas.openxmlformats.org/drawingml/2006/main">
               <a:ext uri="{FF2B5EF4-FFF2-40B4-BE49-F238E27FC236}">
-                <a16:creationId xmlns:a16="http://schemas.microsoft.com/office/drawing/2014/main" id="{DABCF455-C21B-4162-9FB9-C76380467D2E}"/>
+                <a16:creationId xmlns:a16="http://schemas.microsoft.com/office/drawing/2014/main" id="{C0D0496E-1BAE-4AF6-9F1D-7B670E4E03C5}"/>
               </a:ext>
             </a:extLst>
           </p:cNvPr>
@@ -5803,7 +5803,7 @@
           <p:cNvPr id="59" name="">
             <a:extLst xmlns:a="http://schemas.openxmlformats.org/drawingml/2006/main">
               <a:ext uri="{FF2B5EF4-FFF2-40B4-BE49-F238E27FC236}">
-                <a16:creationId xmlns:a16="http://schemas.microsoft.com/office/drawing/2014/main" id="{B18727AC-5F13-4354-B502-42A111826D9C}"/>
+                <a16:creationId xmlns:a16="http://schemas.microsoft.com/office/drawing/2014/main" id="{38A709E6-B6CB-4BDF-9607-26ADD0D57DCF}"/>
               </a:ext>
             </a:extLst>
           </p:cNvPr>
@@ -5855,7 +5855,7 @@
           <p:cNvPr id="60" name="">
             <a:extLst xmlns:a="http://schemas.openxmlformats.org/drawingml/2006/main">
               <a:ext uri="{FF2B5EF4-FFF2-40B4-BE49-F238E27FC236}">
-                <a16:creationId xmlns:a16="http://schemas.microsoft.com/office/drawing/2014/main" id="{7B75CA3B-5775-488C-802B-8A5576FF3368}"/>
+                <a16:creationId xmlns:a16="http://schemas.microsoft.com/office/drawing/2014/main" id="{CEAE880E-F1C1-453C-AD8C-D50B3914F016}"/>
               </a:ext>
             </a:extLst>
           </p:cNvPr>
@@ -5907,7 +5907,7 @@
           <p:cNvPr id="61" name="">
             <a:extLst xmlns:a="http://schemas.openxmlformats.org/drawingml/2006/main">
               <a:ext uri="{FF2B5EF4-FFF2-40B4-BE49-F238E27FC236}">
-                <a16:creationId xmlns:a16="http://schemas.microsoft.com/office/drawing/2014/main" id="{64CA3CB5-AB31-4001-9027-FF820AEF7B91}"/>
+                <a16:creationId xmlns:a16="http://schemas.microsoft.com/office/drawing/2014/main" id="{985957B1-0126-42FE-9E73-555C94F6F1FE}"/>
               </a:ext>
             </a:extLst>
           </p:cNvPr>
@@ -5959,7 +5959,7 @@
           <p:cNvPr id="62" name="">
             <a:extLst xmlns:a="http://schemas.openxmlformats.org/drawingml/2006/main">
               <a:ext uri="{FF2B5EF4-FFF2-40B4-BE49-F238E27FC236}">
-                <a16:creationId xmlns:a16="http://schemas.microsoft.com/office/drawing/2014/main" id="{36668BA7-380D-4C8E-81E9-587B58E2BE94}"/>
+                <a16:creationId xmlns:a16="http://schemas.microsoft.com/office/drawing/2014/main" id="{C55129FD-85D0-4A6B-8A95-8008FD2FF7C3}"/>
               </a:ext>
             </a:extLst>
           </p:cNvPr>
@@ -6011,7 +6011,7 @@
           <p:cNvPr id="63" name="">
             <a:extLst xmlns:a="http://schemas.openxmlformats.org/drawingml/2006/main">
               <a:ext uri="{FF2B5EF4-FFF2-40B4-BE49-F238E27FC236}">
-                <a16:creationId xmlns:a16="http://schemas.microsoft.com/office/drawing/2014/main" id="{30679160-431F-4DE1-941C-0B23CB998FD4}"/>
+                <a16:creationId xmlns:a16="http://schemas.microsoft.com/office/drawing/2014/main" id="{57A6C03B-D521-42D0-9C36-74C894FE35ED}"/>
               </a:ext>
             </a:extLst>
           </p:cNvPr>
@@ -6063,7 +6063,7 @@
           <p:cNvPr id="64" name="">
             <a:extLst xmlns:a="http://schemas.openxmlformats.org/drawingml/2006/main">
               <a:ext uri="{FF2B5EF4-FFF2-40B4-BE49-F238E27FC236}">
-                <a16:creationId xmlns:a16="http://schemas.microsoft.com/office/drawing/2014/main" id="{DB58BFEC-27A6-45F1-B815-3D0DB2590044}"/>
+                <a16:creationId xmlns:a16="http://schemas.microsoft.com/office/drawing/2014/main" id="{CAE535E7-06E2-4801-AFEE-FFB094C55CBF}"/>
               </a:ext>
             </a:extLst>
           </p:cNvPr>
@@ -6094,7 +6094,7 @@
           <p:cNvPr id="65" name="">
             <a:extLst xmlns:a="http://schemas.openxmlformats.org/drawingml/2006/main">
               <a:ext uri="{FF2B5EF4-FFF2-40B4-BE49-F238E27FC236}">
-                <a16:creationId xmlns:a16="http://schemas.microsoft.com/office/drawing/2014/main" id="{84300BD3-D012-4257-A19A-05708546350E}"/>
+                <a16:creationId xmlns:a16="http://schemas.microsoft.com/office/drawing/2014/main" id="{E021122A-D17F-499A-9733-D7552DEC1311}"/>
               </a:ext>
             </a:extLst>
           </p:cNvPr>
@@ -6146,7 +6146,7 @@
           <p:cNvPr id="66" name="">
             <a:extLst xmlns:a="http://schemas.openxmlformats.org/drawingml/2006/main">
               <a:ext uri="{FF2B5EF4-FFF2-40B4-BE49-F238E27FC236}">
-                <a16:creationId xmlns:a16="http://schemas.microsoft.com/office/drawing/2014/main" id="{56A2DC61-EDAD-449F-A96E-2FF9A4CD8959}"/>
+                <a16:creationId xmlns:a16="http://schemas.microsoft.com/office/drawing/2014/main" id="{5667E3F0-CB0D-49E6-B705-323D66B2CA87}"/>
               </a:ext>
             </a:extLst>
           </p:cNvPr>
@@ -6198,7 +6198,7 @@
           <p:cNvPr id="67" name="">
             <a:extLst xmlns:a="http://schemas.openxmlformats.org/drawingml/2006/main">
               <a:ext uri="{FF2B5EF4-FFF2-40B4-BE49-F238E27FC236}">
-                <a16:creationId xmlns:a16="http://schemas.microsoft.com/office/drawing/2014/main" id="{E7B332CD-DFB8-4B6A-9797-BCF2F42D5CDD}"/>
+                <a16:creationId xmlns:a16="http://schemas.microsoft.com/office/drawing/2014/main" id="{F6D75993-F586-4187-B855-FB6F1FC847AC}"/>
               </a:ext>
             </a:extLst>
           </p:cNvPr>
@@ -6250,7 +6250,7 @@
           <p:cNvPr id="68" name="">
             <a:extLst xmlns:a="http://schemas.openxmlformats.org/drawingml/2006/main">
               <a:ext uri="{FF2B5EF4-FFF2-40B4-BE49-F238E27FC236}">
-                <a16:creationId xmlns:a16="http://schemas.microsoft.com/office/drawing/2014/main" id="{C29B2DD8-5387-42B0-A07C-1803D09B9F1C}"/>
+                <a16:creationId xmlns:a16="http://schemas.microsoft.com/office/drawing/2014/main" id="{7653AE21-AF24-4DE3-A5DA-45C24C654400}"/>
               </a:ext>
             </a:extLst>
           </p:cNvPr>
@@ -6302,7 +6302,7 @@
           <p:cNvPr id="69" name="">
             <a:extLst xmlns:a="http://schemas.openxmlformats.org/drawingml/2006/main">
               <a:ext uri="{FF2B5EF4-FFF2-40B4-BE49-F238E27FC236}">
-                <a16:creationId xmlns:a16="http://schemas.microsoft.com/office/drawing/2014/main" id="{954353ED-930D-4B34-B4A4-8D50B53664EF}"/>
+                <a16:creationId xmlns:a16="http://schemas.microsoft.com/office/drawing/2014/main" id="{2062A5E4-FA8F-4938-B7CA-79E5721B998B}"/>
               </a:ext>
             </a:extLst>
           </p:cNvPr>
@@ -6354,7 +6354,7 @@
           <p:cNvPr id="70" name="">
             <a:extLst xmlns:a="http://schemas.openxmlformats.org/drawingml/2006/main">
               <a:ext uri="{FF2B5EF4-FFF2-40B4-BE49-F238E27FC236}">
-                <a16:creationId xmlns:a16="http://schemas.microsoft.com/office/drawing/2014/main" id="{30325F2C-BD8D-4EA2-9C0B-C0C394FB4B98}"/>
+                <a16:creationId xmlns:a16="http://schemas.microsoft.com/office/drawing/2014/main" id="{A4721A72-8C6B-4369-A86A-1BF72BCA46C4}"/>
               </a:ext>
             </a:extLst>
           </p:cNvPr>
@@ -6385,7 +6385,7 @@
           <p:cNvPr id="71" name="">
             <a:extLst xmlns:a="http://schemas.openxmlformats.org/drawingml/2006/main">
               <a:ext uri="{FF2B5EF4-FFF2-40B4-BE49-F238E27FC236}">
-                <a16:creationId xmlns:a16="http://schemas.microsoft.com/office/drawing/2014/main" id="{7A583DC5-058C-4335-8114-4FCF757855C0}"/>
+                <a16:creationId xmlns:a16="http://schemas.microsoft.com/office/drawing/2014/main" id="{4FB9B60D-EA9D-44E7-8FF0-088F83F76D08}"/>
               </a:ext>
             </a:extLst>
           </p:cNvPr>
@@ -6416,7 +6416,7 @@
           <p:cNvPr id="72" name="">
             <a:extLst xmlns:a="http://schemas.openxmlformats.org/drawingml/2006/main">
               <a:ext uri="{FF2B5EF4-FFF2-40B4-BE49-F238E27FC236}">
-                <a16:creationId xmlns:a16="http://schemas.microsoft.com/office/drawing/2014/main" id="{C8EE7324-E143-428C-AE34-5A57111AE548}"/>
+                <a16:creationId xmlns:a16="http://schemas.microsoft.com/office/drawing/2014/main" id="{2377EFB6-51BD-486B-931F-3ED7B5391855}"/>
               </a:ext>
             </a:extLst>
           </p:cNvPr>
@@ -6468,7 +6468,7 @@
           <p:cNvPr id="73" name="">
             <a:extLst xmlns:a="http://schemas.openxmlformats.org/drawingml/2006/main">
               <a:ext uri="{FF2B5EF4-FFF2-40B4-BE49-F238E27FC236}">
-                <a16:creationId xmlns:a16="http://schemas.microsoft.com/office/drawing/2014/main" id="{73373A83-22BE-4892-915E-864D9666AE6C}"/>
+                <a16:creationId xmlns:a16="http://schemas.microsoft.com/office/drawing/2014/main" id="{968AB5A0-344F-4C04-94B2-104EEB5E4E99}"/>
               </a:ext>
             </a:extLst>
           </p:cNvPr>
@@ -6520,7 +6520,7 @@
           <p:cNvPr id="74" name="">
             <a:extLst xmlns:a="http://schemas.openxmlformats.org/drawingml/2006/main">
               <a:ext uri="{FF2B5EF4-FFF2-40B4-BE49-F238E27FC236}">
-                <a16:creationId xmlns:a16="http://schemas.microsoft.com/office/drawing/2014/main" id="{759ACA5C-3C26-4B98-B9B3-D87A7BB1A690}"/>
+                <a16:creationId xmlns:a16="http://schemas.microsoft.com/office/drawing/2014/main" id="{85A11162-AE6E-4A70-B0F1-67523E38278B}"/>
               </a:ext>
             </a:extLst>
           </p:cNvPr>
@@ -6572,7 +6572,7 @@
           <p:cNvPr id="75" name="">
             <a:extLst xmlns:a="http://schemas.openxmlformats.org/drawingml/2006/main">
               <a:ext uri="{FF2B5EF4-FFF2-40B4-BE49-F238E27FC236}">
-                <a16:creationId xmlns:a16="http://schemas.microsoft.com/office/drawing/2014/main" id="{206793D6-D4D7-449C-9C23-090385799602}"/>
+                <a16:creationId xmlns:a16="http://schemas.microsoft.com/office/drawing/2014/main" id="{429287CC-7D6C-4904-B573-3FDDCAEEE037}"/>
               </a:ext>
             </a:extLst>
           </p:cNvPr>
@@ -6624,7 +6624,7 @@
           <p:cNvPr id="76" name="">
             <a:extLst xmlns:a="http://schemas.openxmlformats.org/drawingml/2006/main">
               <a:ext uri="{FF2B5EF4-FFF2-40B4-BE49-F238E27FC236}">
-                <a16:creationId xmlns:a16="http://schemas.microsoft.com/office/drawing/2014/main" id="{D80320E9-54A0-47EC-AC22-CED207EBF9F3}"/>
+                <a16:creationId xmlns:a16="http://schemas.microsoft.com/office/drawing/2014/main" id="{B28D6810-9DDD-4A47-8E5B-CF7ACA6D0552}"/>
               </a:ext>
             </a:extLst>
           </p:cNvPr>
@@ -6676,7 +6676,7 @@
           <p:cNvPr id="77" name="">
             <a:extLst xmlns:a="http://schemas.openxmlformats.org/drawingml/2006/main">
               <a:ext uri="{FF2B5EF4-FFF2-40B4-BE49-F238E27FC236}">
-                <a16:creationId xmlns:a16="http://schemas.microsoft.com/office/drawing/2014/main" id="{E830A23C-1409-4600-B5B0-C5E846E1D4F0}"/>
+                <a16:creationId xmlns:a16="http://schemas.microsoft.com/office/drawing/2014/main" id="{28FF2C47-58FE-4B7B-9C2E-8EF581DC3AE6}"/>
               </a:ext>
             </a:extLst>
           </p:cNvPr>
@@ -6707,7 +6707,7 @@
           <p:cNvPr id="78" name="">
             <a:extLst xmlns:a="http://schemas.openxmlformats.org/drawingml/2006/main">
               <a:ext uri="{FF2B5EF4-FFF2-40B4-BE49-F238E27FC236}">
-                <a16:creationId xmlns:a16="http://schemas.microsoft.com/office/drawing/2014/main" id="{2A31C829-AE12-4259-B4B4-28766C8CBF46}"/>
+                <a16:creationId xmlns:a16="http://schemas.microsoft.com/office/drawing/2014/main" id="{E7C6D3EA-0487-4851-963E-597CBC7957DB}"/>
               </a:ext>
             </a:extLst>
           </p:cNvPr>
@@ -6759,7 +6759,7 @@
           <p:cNvPr id="79" name="">
             <a:extLst xmlns:a="http://schemas.openxmlformats.org/drawingml/2006/main">
               <a:ext uri="{FF2B5EF4-FFF2-40B4-BE49-F238E27FC236}">
-                <a16:creationId xmlns:a16="http://schemas.microsoft.com/office/drawing/2014/main" id="{2A77A671-7987-4982-A8CF-D2C3DC04DF83}"/>
+                <a16:creationId xmlns:a16="http://schemas.microsoft.com/office/drawing/2014/main" id="{EC4651F2-27BA-48ED-A616-9E850E10ABC9}"/>
               </a:ext>
             </a:extLst>
           </p:cNvPr>
@@ -6811,7 +6811,7 @@
           <p:cNvPr id="80" name="">
             <a:extLst xmlns:a="http://schemas.openxmlformats.org/drawingml/2006/main">
               <a:ext uri="{FF2B5EF4-FFF2-40B4-BE49-F238E27FC236}">
-                <a16:creationId xmlns:a16="http://schemas.microsoft.com/office/drawing/2014/main" id="{DC1AF1E8-14E8-4F52-9B2C-927EA3EC6DFF}"/>
+                <a16:creationId xmlns:a16="http://schemas.microsoft.com/office/drawing/2014/main" id="{2563EBB0-23B7-4630-A418-24DEF4BE9BDA}"/>
               </a:ext>
             </a:extLst>
           </p:cNvPr>
@@ -6863,7 +6863,7 @@
           <p:cNvPr id="81" name="">
             <a:extLst xmlns:a="http://schemas.openxmlformats.org/drawingml/2006/main">
               <a:ext uri="{FF2B5EF4-FFF2-40B4-BE49-F238E27FC236}">
-                <a16:creationId xmlns:a16="http://schemas.microsoft.com/office/drawing/2014/main" id="{97EF1236-2C37-4A96-AEFA-4BD0ADD3AAAB}"/>
+                <a16:creationId xmlns:a16="http://schemas.microsoft.com/office/drawing/2014/main" id="{EF718042-DFB8-4312-9BCD-0AC48BEA39D1}"/>
               </a:ext>
             </a:extLst>
           </p:cNvPr>
@@ -6915,7 +6915,7 @@
           <p:cNvPr id="82" name="">
             <a:extLst xmlns:a="http://schemas.openxmlformats.org/drawingml/2006/main">
               <a:ext uri="{FF2B5EF4-FFF2-40B4-BE49-F238E27FC236}">
-                <a16:creationId xmlns:a16="http://schemas.microsoft.com/office/drawing/2014/main" id="{C8FEAAC3-8857-45ED-B24D-D54C1A17A425}"/>
+                <a16:creationId xmlns:a16="http://schemas.microsoft.com/office/drawing/2014/main" id="{4643DAB6-39F5-4F91-BD98-2CF017E8F6D8}"/>
               </a:ext>
             </a:extLst>
           </p:cNvPr>
@@ -6967,7 +6967,7 @@
           <p:cNvPr id="83" name="">
             <a:extLst xmlns:a="http://schemas.openxmlformats.org/drawingml/2006/main">
               <a:ext uri="{FF2B5EF4-FFF2-40B4-BE49-F238E27FC236}">
-                <a16:creationId xmlns:a16="http://schemas.microsoft.com/office/drawing/2014/main" id="{59B03D58-F059-4CEB-A0F0-9A6E67E7E369}"/>
+                <a16:creationId xmlns:a16="http://schemas.microsoft.com/office/drawing/2014/main" id="{9E3D22C5-54A2-4D6C-AA17-03129AAD0950}"/>
               </a:ext>
             </a:extLst>
           </p:cNvPr>
@@ -6998,7 +6998,7 @@
           <p:cNvPr id="84" name="">
             <a:extLst xmlns:a="http://schemas.openxmlformats.org/drawingml/2006/main">
               <a:ext uri="{FF2B5EF4-FFF2-40B4-BE49-F238E27FC236}">
-                <a16:creationId xmlns:a16="http://schemas.microsoft.com/office/drawing/2014/main" id="{312959DA-5389-4550-A6A3-11E7429D16E6}"/>
+                <a16:creationId xmlns:a16="http://schemas.microsoft.com/office/drawing/2014/main" id="{DA6EFDA3-16B4-4A85-A410-0CB8893723E2}"/>
               </a:ext>
             </a:extLst>
           </p:cNvPr>
@@ -7029,7 +7029,7 @@
           <p:cNvPr id="85" name="">
             <a:extLst xmlns:a="http://schemas.openxmlformats.org/drawingml/2006/main">
               <a:ext uri="{FF2B5EF4-FFF2-40B4-BE49-F238E27FC236}">
-                <a16:creationId xmlns:a16="http://schemas.microsoft.com/office/drawing/2014/main" id="{42CE8AAF-FB69-4A2E-B7BC-FF2ABEF6C306}"/>
+                <a16:creationId xmlns:a16="http://schemas.microsoft.com/office/drawing/2014/main" id="{E5710A57-13C0-4D1E-B8AB-CBD79B6764D5}"/>
               </a:ext>
             </a:extLst>
           </p:cNvPr>
@@ -7081,7 +7081,7 @@
           <p:cNvPr id="86" name="">
             <a:extLst xmlns:a="http://schemas.openxmlformats.org/drawingml/2006/main">
               <a:ext uri="{FF2B5EF4-FFF2-40B4-BE49-F238E27FC236}">
-                <a16:creationId xmlns:a16="http://schemas.microsoft.com/office/drawing/2014/main" id="{D0F3E409-453B-4653-8612-966EFAE89E38}"/>
+                <a16:creationId xmlns:a16="http://schemas.microsoft.com/office/drawing/2014/main" id="{5621F547-B028-46B5-B437-C65B5C763FBA}"/>
               </a:ext>
             </a:extLst>
           </p:cNvPr>
@@ -7133,7 +7133,7 @@
           <p:cNvPr id="87" name="">
             <a:extLst xmlns:a="http://schemas.openxmlformats.org/drawingml/2006/main">
               <a:ext uri="{FF2B5EF4-FFF2-40B4-BE49-F238E27FC236}">
-                <a16:creationId xmlns:a16="http://schemas.microsoft.com/office/drawing/2014/main" id="{65F2BC62-D234-4CC0-8B16-70790DFBF49E}"/>
+                <a16:creationId xmlns:a16="http://schemas.microsoft.com/office/drawing/2014/main" id="{EEAE8429-28F2-4FEF-BF64-5D9D76901653}"/>
               </a:ext>
             </a:extLst>
           </p:cNvPr>
@@ -7185,7 +7185,7 @@
           <p:cNvPr id="88" name="">
             <a:extLst xmlns:a="http://schemas.openxmlformats.org/drawingml/2006/main">
               <a:ext uri="{FF2B5EF4-FFF2-40B4-BE49-F238E27FC236}">
-                <a16:creationId xmlns:a16="http://schemas.microsoft.com/office/drawing/2014/main" id="{B0B09770-098F-4ECB-89CB-5EF79296B1B2}"/>
+                <a16:creationId xmlns:a16="http://schemas.microsoft.com/office/drawing/2014/main" id="{8844545A-AD90-47C3-ACD4-61D8D7CA40D3}"/>
               </a:ext>
             </a:extLst>
           </p:cNvPr>
@@ -7237,7 +7237,7 @@
           <p:cNvPr id="89" name="">
             <a:extLst xmlns:a="http://schemas.openxmlformats.org/drawingml/2006/main">
               <a:ext uri="{FF2B5EF4-FFF2-40B4-BE49-F238E27FC236}">
-                <a16:creationId xmlns:a16="http://schemas.microsoft.com/office/drawing/2014/main" id="{16E1A105-580F-42B0-A120-2AB3E073E6A2}"/>
+                <a16:creationId xmlns:a16="http://schemas.microsoft.com/office/drawing/2014/main" id="{343EB273-F9FA-482B-89A6-DA70556772F4}"/>
               </a:ext>
             </a:extLst>
           </p:cNvPr>
@@ -7289,7 +7289,7 @@
           <p:cNvPr id="90" name="">
             <a:extLst xmlns:a="http://schemas.openxmlformats.org/drawingml/2006/main">
               <a:ext uri="{FF2B5EF4-FFF2-40B4-BE49-F238E27FC236}">
-                <a16:creationId xmlns:a16="http://schemas.microsoft.com/office/drawing/2014/main" id="{652310A2-659A-40DA-B4D0-FA0C2A1235FE}"/>
+                <a16:creationId xmlns:a16="http://schemas.microsoft.com/office/drawing/2014/main" id="{D027E1BE-8275-44AE-91D1-BA0B568A3C2B}"/>
               </a:ext>
             </a:extLst>
           </p:cNvPr>
@@ -7320,7 +7320,7 @@
           <p:cNvPr id="91" name="">
             <a:extLst xmlns:a="http://schemas.openxmlformats.org/drawingml/2006/main">
               <a:ext uri="{FF2B5EF4-FFF2-40B4-BE49-F238E27FC236}">
-                <a16:creationId xmlns:a16="http://schemas.microsoft.com/office/drawing/2014/main" id="{5E6F1216-6950-4D9E-8274-F4F6EF6A486D}"/>
+                <a16:creationId xmlns:a16="http://schemas.microsoft.com/office/drawing/2014/main" id="{9EB334FD-BA3F-43C5-B2F8-2FA2B9C9E5A6}"/>
               </a:ext>
             </a:extLst>
           </p:cNvPr>
@@ -7372,7 +7372,7 @@
           <p:cNvPr id="92" name="">
             <a:extLst xmlns:a="http://schemas.openxmlformats.org/drawingml/2006/main">
               <a:ext uri="{FF2B5EF4-FFF2-40B4-BE49-F238E27FC236}">
-                <a16:creationId xmlns:a16="http://schemas.microsoft.com/office/drawing/2014/main" id="{FE5F8EE2-3449-4377-A8A0-8D2D292EE556}"/>
+                <a16:creationId xmlns:a16="http://schemas.microsoft.com/office/drawing/2014/main" id="{94D21A08-6595-4F8F-9C2F-9EAE7AEDFF47}"/>
               </a:ext>
             </a:extLst>
           </p:cNvPr>
@@ -7424,7 +7424,7 @@
           <p:cNvPr id="93" name="">
             <a:extLst xmlns:a="http://schemas.openxmlformats.org/drawingml/2006/main">
               <a:ext uri="{FF2B5EF4-FFF2-40B4-BE49-F238E27FC236}">
-                <a16:creationId xmlns:a16="http://schemas.microsoft.com/office/drawing/2014/main" id="{D5668B9F-748C-4D72-B049-4DE3DA9E14BD}"/>
+                <a16:creationId xmlns:a16="http://schemas.microsoft.com/office/drawing/2014/main" id="{D4541DE3-C9CC-4CB4-BFC0-D4A9F630F8E3}"/>
               </a:ext>
             </a:extLst>
           </p:cNvPr>
@@ -7476,7 +7476,7 @@
           <p:cNvPr id="94" name="">
             <a:extLst xmlns:a="http://schemas.openxmlformats.org/drawingml/2006/main">
               <a:ext uri="{FF2B5EF4-FFF2-40B4-BE49-F238E27FC236}">
-                <a16:creationId xmlns:a16="http://schemas.microsoft.com/office/drawing/2014/main" id="{C45C5DA4-3F99-4E42-8420-4A2C5CA55165}"/>
+                <a16:creationId xmlns:a16="http://schemas.microsoft.com/office/drawing/2014/main" id="{12A86BC4-4AAE-46C0-86C2-216FB33866A0}"/>
               </a:ext>
             </a:extLst>
           </p:cNvPr>
@@ -7528,7 +7528,7 @@
           <p:cNvPr id="95" name="">
             <a:extLst xmlns:a="http://schemas.openxmlformats.org/drawingml/2006/main">
               <a:ext uri="{FF2B5EF4-FFF2-40B4-BE49-F238E27FC236}">
-                <a16:creationId xmlns:a16="http://schemas.microsoft.com/office/drawing/2014/main" id="{4F4F0BC2-BA2D-4C64-9510-3DF188034B19}"/>
+                <a16:creationId xmlns:a16="http://schemas.microsoft.com/office/drawing/2014/main" id="{1E39F40A-2E0C-4F3D-BFB8-66AA724CEFE4}"/>
               </a:ext>
             </a:extLst>
           </p:cNvPr>
@@ -7580,7 +7580,7 @@
           <p:cNvPr id="96" name="">
             <a:extLst xmlns:a="http://schemas.openxmlformats.org/drawingml/2006/main">
               <a:ext uri="{FF2B5EF4-FFF2-40B4-BE49-F238E27FC236}">
-                <a16:creationId xmlns:a16="http://schemas.microsoft.com/office/drawing/2014/main" id="{C31E8AC2-615A-459F-A811-1FE0A798D9D2}"/>
+                <a16:creationId xmlns:a16="http://schemas.microsoft.com/office/drawing/2014/main" id="{A2208618-37D7-4DEA-BC96-313CFD014365}"/>
               </a:ext>
             </a:extLst>
           </p:cNvPr>
@@ -7611,7 +7611,7 @@
           <p:cNvPr id="97" name="">
             <a:extLst xmlns:a="http://schemas.openxmlformats.org/drawingml/2006/main">
               <a:ext uri="{FF2B5EF4-FFF2-40B4-BE49-F238E27FC236}">
-                <a16:creationId xmlns:a16="http://schemas.microsoft.com/office/drawing/2014/main" id="{C270E71E-734C-47A5-B3E5-F22A1704A138}"/>
+                <a16:creationId xmlns:a16="http://schemas.microsoft.com/office/drawing/2014/main" id="{5059DC87-1B8C-4317-9314-BC46FFC99FE1}"/>
               </a:ext>
             </a:extLst>
           </p:cNvPr>
@@ -7642,7 +7642,7 @@
           <p:cNvPr id="98" name="">
             <a:extLst xmlns:a="http://schemas.openxmlformats.org/drawingml/2006/main">
               <a:ext uri="{FF2B5EF4-FFF2-40B4-BE49-F238E27FC236}">
-                <a16:creationId xmlns:a16="http://schemas.microsoft.com/office/drawing/2014/main" id="{ECB0EE0B-09CA-47B4-8B54-8F80AC1C8500}"/>
+                <a16:creationId xmlns:a16="http://schemas.microsoft.com/office/drawing/2014/main" id="{97B55413-F5C4-48BE-B125-CFB1A76E3447}"/>
               </a:ext>
             </a:extLst>
           </p:cNvPr>
@@ -7694,7 +7694,7 @@
           <p:cNvPr id="99" name="">
             <a:extLst xmlns:a="http://schemas.openxmlformats.org/drawingml/2006/main">
               <a:ext uri="{FF2B5EF4-FFF2-40B4-BE49-F238E27FC236}">
-                <a16:creationId xmlns:a16="http://schemas.microsoft.com/office/drawing/2014/main" id="{502654A9-9662-4E29-8A43-96918BDD6D34}"/>
+                <a16:creationId xmlns:a16="http://schemas.microsoft.com/office/drawing/2014/main" id="{4E21808F-A8E3-4D72-9EDD-DA8B41A9A312}"/>
               </a:ext>
             </a:extLst>
           </p:cNvPr>
@@ -7746,7 +7746,7 @@
           <p:cNvPr id="100" name="">
             <a:extLst xmlns:a="http://schemas.openxmlformats.org/drawingml/2006/main">
               <a:ext uri="{FF2B5EF4-FFF2-40B4-BE49-F238E27FC236}">
-                <a16:creationId xmlns:a16="http://schemas.microsoft.com/office/drawing/2014/main" id="{F9616DAD-3714-4277-9F28-2A1259B3EDDD}"/>
+                <a16:creationId xmlns:a16="http://schemas.microsoft.com/office/drawing/2014/main" id="{4D90849E-C7E6-4FFA-AA10-2D88D8263965}"/>
               </a:ext>
             </a:extLst>
           </p:cNvPr>
@@ -7798,7 +7798,7 @@
           <p:cNvPr id="101" name="">
             <a:extLst xmlns:a="http://schemas.openxmlformats.org/drawingml/2006/main">
               <a:ext uri="{FF2B5EF4-FFF2-40B4-BE49-F238E27FC236}">
-                <a16:creationId xmlns:a16="http://schemas.microsoft.com/office/drawing/2014/main" id="{5117B3BF-AB06-49DF-9010-9B5638DF5352}"/>
+                <a16:creationId xmlns:a16="http://schemas.microsoft.com/office/drawing/2014/main" id="{61D1459E-7167-41FE-A035-44D956937152}"/>
               </a:ext>
             </a:extLst>
           </p:cNvPr>
@@ -7850,7 +7850,7 @@
           <p:cNvPr id="102" name="">
             <a:extLst xmlns:a="http://schemas.openxmlformats.org/drawingml/2006/main">
               <a:ext uri="{FF2B5EF4-FFF2-40B4-BE49-F238E27FC236}">
-                <a16:creationId xmlns:a16="http://schemas.microsoft.com/office/drawing/2014/main" id="{8927A48E-989C-4CA7-8A2C-FBF53AE3F77D}"/>
+                <a16:creationId xmlns:a16="http://schemas.microsoft.com/office/drawing/2014/main" id="{BA499C54-9CFD-433C-85BB-E953810A73F5}"/>
               </a:ext>
             </a:extLst>
           </p:cNvPr>
@@ -7900,7 +7900,7 @@
     </p:spTree>
     <p:extLst>
       <p:ext uri="{BB962C8B-B14F-4D97-AF65-F5344CB8AC3E}">
-        <p14:creationId xmlns:p14="http://schemas.microsoft.com/office/powerpoint/2010/main" val="700807382"/>
+        <p14:creationId xmlns:p14="http://schemas.microsoft.com/office/powerpoint/2010/main" val="108695221"/>
       </p:ext>
     </p:extLst>
   </p:cSld>
@@ -7931,7 +7931,7 @@
           <p:cNvPr id="98" name="">
             <a:extLst xmlns:a="http://schemas.openxmlformats.org/drawingml/2006/main">
               <a:ext uri="{FF2B5EF4-FFF2-40B4-BE49-F238E27FC236}">
-                <a16:creationId xmlns:a16="http://schemas.microsoft.com/office/drawing/2014/main" id="{336265CA-CDBB-4E52-B316-10D312BD49B7}"/>
+                <a16:creationId xmlns:a16="http://schemas.microsoft.com/office/drawing/2014/main" id="{DA865E98-DFC6-4C96-BACD-98FF014044D7}"/>
               </a:ext>
             </a:extLst>
           </p:cNvPr>
@@ -7964,7 +7964,7 @@
           <p:cNvPr id="2" name="">
             <a:extLst xmlns:a="http://schemas.openxmlformats.org/drawingml/2006/main">
               <a:ext uri="{FF2B5EF4-FFF2-40B4-BE49-F238E27FC236}">
-                <a16:creationId xmlns:a16="http://schemas.microsoft.com/office/drawing/2014/main" id="{FC889B66-2714-44C6-B117-1EF70133019C}"/>
+                <a16:creationId xmlns:a16="http://schemas.microsoft.com/office/drawing/2014/main" id="{A22BB0C4-48FE-42FC-9395-7852251B9B1F}"/>
               </a:ext>
             </a:extLst>
           </p:cNvPr>
@@ -7995,7 +7995,7 @@
           <p:cNvPr id="3" name="">
             <a:extLst xmlns:a="http://schemas.openxmlformats.org/drawingml/2006/main">
               <a:ext uri="{FF2B5EF4-FFF2-40B4-BE49-F238E27FC236}">
-                <a16:creationId xmlns:a16="http://schemas.microsoft.com/office/drawing/2014/main" id="{A20EB6B2-4CCA-4C2A-A91C-2136A99FAC79}"/>
+                <a16:creationId xmlns:a16="http://schemas.microsoft.com/office/drawing/2014/main" id="{42A6B8B5-1151-44BC-838E-58ABAE50BFEE}"/>
               </a:ext>
             </a:extLst>
           </p:cNvPr>
@@ -8047,7 +8047,7 @@
           <p:cNvPr id="4" name="">
             <a:extLst xmlns:a="http://schemas.openxmlformats.org/drawingml/2006/main">
               <a:ext uri="{FF2B5EF4-FFF2-40B4-BE49-F238E27FC236}">
-                <a16:creationId xmlns:a16="http://schemas.microsoft.com/office/drawing/2014/main" id="{4885A064-1574-47F5-A923-00BBCEC8EE0D}"/>
+                <a16:creationId xmlns:a16="http://schemas.microsoft.com/office/drawing/2014/main" id="{813B7531-736D-4685-8696-65E0DF708B06}"/>
               </a:ext>
             </a:extLst>
           </p:cNvPr>
@@ -8099,7 +8099,7 @@
           <p:cNvPr id="5" name="">
             <a:extLst xmlns:a="http://schemas.openxmlformats.org/drawingml/2006/main">
               <a:ext uri="{FF2B5EF4-FFF2-40B4-BE49-F238E27FC236}">
-                <a16:creationId xmlns:a16="http://schemas.microsoft.com/office/drawing/2014/main" id="{858C6CC0-4822-4A35-8F2F-BFF2BB54B753}"/>
+                <a16:creationId xmlns:a16="http://schemas.microsoft.com/office/drawing/2014/main" id="{CB5F16B8-EACA-4A2F-8A7E-ADE8864336A7}"/>
               </a:ext>
             </a:extLst>
           </p:cNvPr>
@@ -8134,7 +8134,7 @@
           <p:nvPr/>
         </p:nvPicPr>
         <p:blipFill>
-          <a:blip xmlns:r="http://schemas.openxmlformats.org/officeDocument/2006/relationships" xmlns:a="http://schemas.openxmlformats.org/drawingml/2006/main" r:embed="R0879a2cb66214635"/>
+          <a:blip xmlns:r="http://schemas.openxmlformats.org/officeDocument/2006/relationships" xmlns:a="http://schemas.openxmlformats.org/drawingml/2006/main" r:embed="R88cc28dccbb64631"/>
           <a:stretch xmlns:a="http://schemas.openxmlformats.org/drawingml/2006/main"/>
         </p:blipFill>
         <p:spPr>
@@ -8152,7 +8152,7 @@
           <p:cNvPr id="7" name="">
             <a:extLst xmlns:a="http://schemas.openxmlformats.org/drawingml/2006/main">
               <a:ext uri="{FF2B5EF4-FFF2-40B4-BE49-F238E27FC236}">
-                <a16:creationId xmlns:a16="http://schemas.microsoft.com/office/drawing/2014/main" id="{14868012-ED8D-420A-BD1B-EFCB2FEA00B5}"/>
+                <a16:creationId xmlns:a16="http://schemas.microsoft.com/office/drawing/2014/main" id="{C8D29A4A-8F77-48C5-A1D3-7A808AA9743C}"/>
               </a:ext>
             </a:extLst>
           </p:cNvPr>
@@ -8204,7 +8204,7 @@
           <p:cNvPr id="8" name="">
             <a:extLst xmlns:a="http://schemas.openxmlformats.org/drawingml/2006/main">
               <a:ext uri="{FF2B5EF4-FFF2-40B4-BE49-F238E27FC236}">
-                <a16:creationId xmlns:a16="http://schemas.microsoft.com/office/drawing/2014/main" id="{38CC90F4-3346-4F93-8F2D-1AEAD596F506}"/>
+                <a16:creationId xmlns:a16="http://schemas.microsoft.com/office/drawing/2014/main" id="{B23C4A8E-180B-4C04-81E9-C0B46D32FF00}"/>
               </a:ext>
             </a:extLst>
           </p:cNvPr>
@@ -8256,7 +8256,7 @@
           <p:cNvPr id="9" name="">
             <a:extLst xmlns:a="http://schemas.openxmlformats.org/drawingml/2006/main">
               <a:ext uri="{FF2B5EF4-FFF2-40B4-BE49-F238E27FC236}">
-                <a16:creationId xmlns:a16="http://schemas.microsoft.com/office/drawing/2014/main" id="{3FEE07FD-152D-4D8A-A902-4C09D99530B0}"/>
+                <a16:creationId xmlns:a16="http://schemas.microsoft.com/office/drawing/2014/main" id="{40B26713-B6A3-4DFF-B74B-E391F2E44BB7}"/>
               </a:ext>
             </a:extLst>
           </p:cNvPr>
@@ -8308,7 +8308,7 @@
           <p:cNvPr id="10" name="">
             <a:extLst xmlns:a="http://schemas.openxmlformats.org/drawingml/2006/main">
               <a:ext uri="{FF2B5EF4-FFF2-40B4-BE49-F238E27FC236}">
-                <a16:creationId xmlns:a16="http://schemas.microsoft.com/office/drawing/2014/main" id="{3F5FD8E5-DEFE-43B1-8D4A-1602A527718C}"/>
+                <a16:creationId xmlns:a16="http://schemas.microsoft.com/office/drawing/2014/main" id="{30EEC3E3-0DB5-420F-8046-F51101A95ECD}"/>
               </a:ext>
             </a:extLst>
           </p:cNvPr>
@@ -8360,7 +8360,7 @@
           <p:cNvPr id="11" name="">
             <a:extLst xmlns:a="http://schemas.openxmlformats.org/drawingml/2006/main">
               <a:ext uri="{FF2B5EF4-FFF2-40B4-BE49-F238E27FC236}">
-                <a16:creationId xmlns:a16="http://schemas.microsoft.com/office/drawing/2014/main" id="{AA9944E7-4988-4653-AB0E-B89595644C9A}"/>
+                <a16:creationId xmlns:a16="http://schemas.microsoft.com/office/drawing/2014/main" id="{5C1F692D-516C-4BE5-8CEF-0780294ED550}"/>
               </a:ext>
             </a:extLst>
           </p:cNvPr>
@@ -8391,7 +8391,7 @@
           <p:cNvPr id="12" name="">
             <a:extLst xmlns:a="http://schemas.openxmlformats.org/drawingml/2006/main">
               <a:ext uri="{FF2B5EF4-FFF2-40B4-BE49-F238E27FC236}">
-                <a16:creationId xmlns:a16="http://schemas.microsoft.com/office/drawing/2014/main" id="{13AD0A2B-27B8-4B43-8B4A-5FAD883C8949}"/>
+                <a16:creationId xmlns:a16="http://schemas.microsoft.com/office/drawing/2014/main" id="{2CB7FA59-99E4-4B09-AFAB-6D40B4B65B21}"/>
               </a:ext>
             </a:extLst>
           </p:cNvPr>
@@ -8422,7 +8422,7 @@
           <p:cNvPr id="13" name="">
             <a:extLst xmlns:a="http://schemas.openxmlformats.org/drawingml/2006/main">
               <a:ext uri="{FF2B5EF4-FFF2-40B4-BE49-F238E27FC236}">
-                <a16:creationId xmlns:a16="http://schemas.microsoft.com/office/drawing/2014/main" id="{F2AFE936-0569-4DC3-B9C6-FD7C4ED21568}"/>
+                <a16:creationId xmlns:a16="http://schemas.microsoft.com/office/drawing/2014/main" id="{7494A51D-2998-41D9-B2D8-49E46858A20D}"/>
               </a:ext>
             </a:extLst>
           </p:cNvPr>
@@ -8474,7 +8474,7 @@
           <p:cNvPr id="14" name="">
             <a:extLst xmlns:a="http://schemas.openxmlformats.org/drawingml/2006/main">
               <a:ext uri="{FF2B5EF4-FFF2-40B4-BE49-F238E27FC236}">
-                <a16:creationId xmlns:a16="http://schemas.microsoft.com/office/drawing/2014/main" id="{BDF09840-0EB6-4902-B249-25629BBB2DB8}"/>
+                <a16:creationId xmlns:a16="http://schemas.microsoft.com/office/drawing/2014/main" id="{DAFB1DB4-A18D-4AC8-9555-20BB3B37E4C8}"/>
               </a:ext>
             </a:extLst>
           </p:cNvPr>
@@ -8526,7 +8526,7 @@
           <p:cNvPr id="15" name="">
             <a:extLst xmlns:a="http://schemas.openxmlformats.org/drawingml/2006/main">
               <a:ext uri="{FF2B5EF4-FFF2-40B4-BE49-F238E27FC236}">
-                <a16:creationId xmlns:a16="http://schemas.microsoft.com/office/drawing/2014/main" id="{B85EB6E0-DE77-486D-ACB8-23A2A6E00709}"/>
+                <a16:creationId xmlns:a16="http://schemas.microsoft.com/office/drawing/2014/main" id="{FCA29F3B-2F62-448E-B156-1907EE6CFCA0}"/>
               </a:ext>
             </a:extLst>
           </p:cNvPr>
@@ -8578,7 +8578,7 @@
           <p:cNvPr id="16" name="">
             <a:extLst xmlns:a="http://schemas.openxmlformats.org/drawingml/2006/main">
               <a:ext uri="{FF2B5EF4-FFF2-40B4-BE49-F238E27FC236}">
-                <a16:creationId xmlns:a16="http://schemas.microsoft.com/office/drawing/2014/main" id="{1C44E964-BAFA-4E82-8BF9-9FF846D5E155}"/>
+                <a16:creationId xmlns:a16="http://schemas.microsoft.com/office/drawing/2014/main" id="{3323D762-A157-482D-A0EE-1AC26CE384B3}"/>
               </a:ext>
             </a:extLst>
           </p:cNvPr>
@@ -8630,7 +8630,7 @@
           <p:cNvPr id="17" name="">
             <a:extLst xmlns:a="http://schemas.openxmlformats.org/drawingml/2006/main">
               <a:ext uri="{FF2B5EF4-FFF2-40B4-BE49-F238E27FC236}">
-                <a16:creationId xmlns:a16="http://schemas.microsoft.com/office/drawing/2014/main" id="{74363F33-3772-44F6-A8AF-74DC42E289DC}"/>
+                <a16:creationId xmlns:a16="http://schemas.microsoft.com/office/drawing/2014/main" id="{68E90F75-C104-429C-ABE1-289243FF0ED1}"/>
               </a:ext>
             </a:extLst>
           </p:cNvPr>
@@ -8682,7 +8682,7 @@
           <p:cNvPr id="18" name="">
             <a:extLst xmlns:a="http://schemas.openxmlformats.org/drawingml/2006/main">
               <a:ext uri="{FF2B5EF4-FFF2-40B4-BE49-F238E27FC236}">
-                <a16:creationId xmlns:a16="http://schemas.microsoft.com/office/drawing/2014/main" id="{917217DA-A53E-4F9C-A171-CAFF35AC5B70}"/>
+                <a16:creationId xmlns:a16="http://schemas.microsoft.com/office/drawing/2014/main" id="{EFE7D81C-363D-450E-8B49-365B3C361EAE}"/>
               </a:ext>
             </a:extLst>
           </p:cNvPr>
@@ -8713,7 +8713,7 @@
           <p:cNvPr id="19" name="">
             <a:extLst xmlns:a="http://schemas.openxmlformats.org/drawingml/2006/main">
               <a:ext uri="{FF2B5EF4-FFF2-40B4-BE49-F238E27FC236}">
-                <a16:creationId xmlns:a16="http://schemas.microsoft.com/office/drawing/2014/main" id="{78E148B1-9425-4E77-AEE8-14115562C201}"/>
+                <a16:creationId xmlns:a16="http://schemas.microsoft.com/office/drawing/2014/main" id="{B191B29C-7C5F-4D6D-86BF-2AD40EDAF5E9}"/>
               </a:ext>
             </a:extLst>
           </p:cNvPr>
@@ -8765,7 +8765,7 @@
           <p:cNvPr id="20" name="">
             <a:extLst xmlns:a="http://schemas.openxmlformats.org/drawingml/2006/main">
               <a:ext uri="{FF2B5EF4-FFF2-40B4-BE49-F238E27FC236}">
-                <a16:creationId xmlns:a16="http://schemas.microsoft.com/office/drawing/2014/main" id="{9690FA9E-3525-44B1-89BB-849F59D96C5B}"/>
+                <a16:creationId xmlns:a16="http://schemas.microsoft.com/office/drawing/2014/main" id="{08299B8C-4259-4B30-8962-A7CD7DD4892A}"/>
               </a:ext>
             </a:extLst>
           </p:cNvPr>
@@ -8817,7 +8817,7 @@
           <p:cNvPr id="21" name="">
             <a:extLst xmlns:a="http://schemas.openxmlformats.org/drawingml/2006/main">
               <a:ext uri="{FF2B5EF4-FFF2-40B4-BE49-F238E27FC236}">
-                <a16:creationId xmlns:a16="http://schemas.microsoft.com/office/drawing/2014/main" id="{B7500E0A-A872-42C6-9998-356476813296}"/>
+                <a16:creationId xmlns:a16="http://schemas.microsoft.com/office/drawing/2014/main" id="{DAC3BA5F-6069-4E4B-9AC3-4F008BB330B0}"/>
               </a:ext>
             </a:extLst>
           </p:cNvPr>
@@ -8869,7 +8869,7 @@
           <p:cNvPr id="22" name="">
             <a:extLst xmlns:a="http://schemas.openxmlformats.org/drawingml/2006/main">
               <a:ext uri="{FF2B5EF4-FFF2-40B4-BE49-F238E27FC236}">
-                <a16:creationId xmlns:a16="http://schemas.microsoft.com/office/drawing/2014/main" id="{E3C1F405-5808-42AB-966C-F3104A97FFA8}"/>
+                <a16:creationId xmlns:a16="http://schemas.microsoft.com/office/drawing/2014/main" id="{B199E6C0-96ED-4F34-A3AD-8F28EEA3E127}"/>
               </a:ext>
             </a:extLst>
           </p:cNvPr>
@@ -8921,7 +8921,7 @@
           <p:cNvPr id="23" name="">
             <a:extLst xmlns:a="http://schemas.openxmlformats.org/drawingml/2006/main">
               <a:ext uri="{FF2B5EF4-FFF2-40B4-BE49-F238E27FC236}">
-                <a16:creationId xmlns:a16="http://schemas.microsoft.com/office/drawing/2014/main" id="{1C93B650-5B65-4E19-BC24-9E9788609FF2}"/>
+                <a16:creationId xmlns:a16="http://schemas.microsoft.com/office/drawing/2014/main" id="{084C9959-7785-4821-9D8A-B8D8899C6B8D}"/>
               </a:ext>
             </a:extLst>
           </p:cNvPr>
@@ -8973,7 +8973,7 @@
           <p:cNvPr id="24" name="">
             <a:extLst xmlns:a="http://schemas.openxmlformats.org/drawingml/2006/main">
               <a:ext uri="{FF2B5EF4-FFF2-40B4-BE49-F238E27FC236}">
-                <a16:creationId xmlns:a16="http://schemas.microsoft.com/office/drawing/2014/main" id="{782E3444-538C-45D9-87C7-314E3A747285}"/>
+                <a16:creationId xmlns:a16="http://schemas.microsoft.com/office/drawing/2014/main" id="{CFD1B345-A886-4912-8C38-6D7961735233}"/>
               </a:ext>
             </a:extLst>
           </p:cNvPr>
@@ -9004,7 +9004,7 @@
           <p:cNvPr id="25" name="">
             <a:extLst xmlns:a="http://schemas.openxmlformats.org/drawingml/2006/main">
               <a:ext uri="{FF2B5EF4-FFF2-40B4-BE49-F238E27FC236}">
-                <a16:creationId xmlns:a16="http://schemas.microsoft.com/office/drawing/2014/main" id="{A2CA6BEF-60C8-4A20-9F3F-26B7D04B0EB1}"/>
+                <a16:creationId xmlns:a16="http://schemas.microsoft.com/office/drawing/2014/main" id="{F8F179D3-0DA7-4496-B36C-6AB1B4CCA4D9}"/>
               </a:ext>
             </a:extLst>
           </p:cNvPr>
@@ -9035,7 +9035,7 @@
           <p:cNvPr id="26" name="">
             <a:extLst xmlns:a="http://schemas.openxmlformats.org/drawingml/2006/main">
               <a:ext uri="{FF2B5EF4-FFF2-40B4-BE49-F238E27FC236}">
-                <a16:creationId xmlns:a16="http://schemas.microsoft.com/office/drawing/2014/main" id="{9F4C1091-160D-4F7D-807B-9BE1D9BAA695}"/>
+                <a16:creationId xmlns:a16="http://schemas.microsoft.com/office/drawing/2014/main" id="{FD79C672-A6DA-4E75-A8D6-C77EBA9E1A61}"/>
               </a:ext>
             </a:extLst>
           </p:cNvPr>
@@ -9087,7 +9087,7 @@
           <p:cNvPr id="27" name="">
             <a:extLst xmlns:a="http://schemas.openxmlformats.org/drawingml/2006/main">
               <a:ext uri="{FF2B5EF4-FFF2-40B4-BE49-F238E27FC236}">
-                <a16:creationId xmlns:a16="http://schemas.microsoft.com/office/drawing/2014/main" id="{E5EB4091-DDDC-4AD8-B18C-9552404B0B34}"/>
+                <a16:creationId xmlns:a16="http://schemas.microsoft.com/office/drawing/2014/main" id="{BF3E541F-22FC-40CA-81FA-C64A9501052F}"/>
               </a:ext>
             </a:extLst>
           </p:cNvPr>
@@ -9139,7 +9139,7 @@
           <p:cNvPr id="28" name="">
             <a:extLst xmlns:a="http://schemas.openxmlformats.org/drawingml/2006/main">
               <a:ext uri="{FF2B5EF4-FFF2-40B4-BE49-F238E27FC236}">
-                <a16:creationId xmlns:a16="http://schemas.microsoft.com/office/drawing/2014/main" id="{31A3235E-D8E5-446F-9A7C-9D55EDC564D5}"/>
+                <a16:creationId xmlns:a16="http://schemas.microsoft.com/office/drawing/2014/main" id="{C01E092A-0AEA-4581-BF8C-503AE3661A5A}"/>
               </a:ext>
             </a:extLst>
           </p:cNvPr>
@@ -9191,7 +9191,7 @@
           <p:cNvPr id="29" name="">
             <a:extLst xmlns:a="http://schemas.openxmlformats.org/drawingml/2006/main">
               <a:ext uri="{FF2B5EF4-FFF2-40B4-BE49-F238E27FC236}">
-                <a16:creationId xmlns:a16="http://schemas.microsoft.com/office/drawing/2014/main" id="{750F415D-E755-4D79-B1BE-7D82D9B8F61E}"/>
+                <a16:creationId xmlns:a16="http://schemas.microsoft.com/office/drawing/2014/main" id="{0EB03066-D13C-4534-963A-5F32A48F32B5}"/>
               </a:ext>
             </a:extLst>
           </p:cNvPr>
@@ -9243,7 +9243,7 @@
           <p:cNvPr id="30" name="">
             <a:extLst xmlns:a="http://schemas.openxmlformats.org/drawingml/2006/main">
               <a:ext uri="{FF2B5EF4-FFF2-40B4-BE49-F238E27FC236}">
-                <a16:creationId xmlns:a16="http://schemas.microsoft.com/office/drawing/2014/main" id="{A351B7EE-E074-4F49-B4FA-E848EE80096C}"/>
+                <a16:creationId xmlns:a16="http://schemas.microsoft.com/office/drawing/2014/main" id="{5FAAE9CF-0E4C-4E6C-BC94-E14805E1F7A3}"/>
               </a:ext>
             </a:extLst>
           </p:cNvPr>
@@ -9295,7 +9295,7 @@
           <p:cNvPr id="31" name="">
             <a:extLst xmlns:a="http://schemas.openxmlformats.org/drawingml/2006/main">
               <a:ext uri="{FF2B5EF4-FFF2-40B4-BE49-F238E27FC236}">
-                <a16:creationId xmlns:a16="http://schemas.microsoft.com/office/drawing/2014/main" id="{9A6D5D5E-E72A-4011-BC3C-E9E6241434C2}"/>
+                <a16:creationId xmlns:a16="http://schemas.microsoft.com/office/drawing/2014/main" id="{82CDE77F-CCD0-4033-8311-E4F1D86E525F}"/>
               </a:ext>
             </a:extLst>
           </p:cNvPr>
@@ -9326,7 +9326,7 @@
           <p:cNvPr id="32" name="">
             <a:extLst xmlns:a="http://schemas.openxmlformats.org/drawingml/2006/main">
               <a:ext uri="{FF2B5EF4-FFF2-40B4-BE49-F238E27FC236}">
-                <a16:creationId xmlns:a16="http://schemas.microsoft.com/office/drawing/2014/main" id="{B50BC60C-EE07-40F6-91EB-829410290F51}"/>
+                <a16:creationId xmlns:a16="http://schemas.microsoft.com/office/drawing/2014/main" id="{EA945877-97F1-4261-A8A1-18A17904371B}"/>
               </a:ext>
             </a:extLst>
           </p:cNvPr>
@@ -9378,7 +9378,7 @@
           <p:cNvPr id="33" name="">
             <a:extLst xmlns:a="http://schemas.openxmlformats.org/drawingml/2006/main">
               <a:ext uri="{FF2B5EF4-FFF2-40B4-BE49-F238E27FC236}">
-                <a16:creationId xmlns:a16="http://schemas.microsoft.com/office/drawing/2014/main" id="{F9B5F8D8-6050-4CEA-AECC-9F5E903BEC19}"/>
+                <a16:creationId xmlns:a16="http://schemas.microsoft.com/office/drawing/2014/main" id="{659D4EA3-8C06-40AE-9CBF-E74790F514E8}"/>
               </a:ext>
             </a:extLst>
           </p:cNvPr>
@@ -9430,7 +9430,7 @@
           <p:cNvPr id="34" name="">
             <a:extLst xmlns:a="http://schemas.openxmlformats.org/drawingml/2006/main">
               <a:ext uri="{FF2B5EF4-FFF2-40B4-BE49-F238E27FC236}">
-                <a16:creationId xmlns:a16="http://schemas.microsoft.com/office/drawing/2014/main" id="{0638844E-A1DB-4B9E-AA76-CCB679C3610E}"/>
+                <a16:creationId xmlns:a16="http://schemas.microsoft.com/office/drawing/2014/main" id="{9AF4388D-7DDC-4390-B7AF-7D3F1D42974C}"/>
               </a:ext>
             </a:extLst>
           </p:cNvPr>
@@ -9482,7 +9482,7 @@
           <p:cNvPr id="35" name="">
             <a:extLst xmlns:a="http://schemas.openxmlformats.org/drawingml/2006/main">
               <a:ext uri="{FF2B5EF4-FFF2-40B4-BE49-F238E27FC236}">
-                <a16:creationId xmlns:a16="http://schemas.microsoft.com/office/drawing/2014/main" id="{7E957F0D-9E51-4541-B5D3-D731856E5BFE}"/>
+                <a16:creationId xmlns:a16="http://schemas.microsoft.com/office/drawing/2014/main" id="{2AC947EE-6558-4C31-AF62-F3B04730D5CA}"/>
               </a:ext>
             </a:extLst>
           </p:cNvPr>
@@ -9534,7 +9534,7 @@
           <p:cNvPr id="36" name="">
             <a:extLst xmlns:a="http://schemas.openxmlformats.org/drawingml/2006/main">
               <a:ext uri="{FF2B5EF4-FFF2-40B4-BE49-F238E27FC236}">
-                <a16:creationId xmlns:a16="http://schemas.microsoft.com/office/drawing/2014/main" id="{36AEFB27-D7DB-4AAA-BBAD-ECCE8F474CCC}"/>
+                <a16:creationId xmlns:a16="http://schemas.microsoft.com/office/drawing/2014/main" id="{11221CA2-0D56-4434-B183-9ABF6D643949}"/>
               </a:ext>
             </a:extLst>
           </p:cNvPr>
@@ -9586,7 +9586,7 @@
           <p:cNvPr id="37" name="">
             <a:extLst xmlns:a="http://schemas.openxmlformats.org/drawingml/2006/main">
               <a:ext uri="{FF2B5EF4-FFF2-40B4-BE49-F238E27FC236}">
-                <a16:creationId xmlns:a16="http://schemas.microsoft.com/office/drawing/2014/main" id="{8065BE88-6F43-452E-AF15-E097E7E57F4D}"/>
+                <a16:creationId xmlns:a16="http://schemas.microsoft.com/office/drawing/2014/main" id="{5D023174-C9B9-40BF-AFDD-1F9D2243EDCF}"/>
               </a:ext>
             </a:extLst>
           </p:cNvPr>
@@ -9617,7 +9617,7 @@
           <p:cNvPr id="38" name="">
             <a:extLst xmlns:a="http://schemas.openxmlformats.org/drawingml/2006/main">
               <a:ext uri="{FF2B5EF4-FFF2-40B4-BE49-F238E27FC236}">
-                <a16:creationId xmlns:a16="http://schemas.microsoft.com/office/drawing/2014/main" id="{57A0D8D2-1369-4802-B8EB-FCF52D12C926}"/>
+                <a16:creationId xmlns:a16="http://schemas.microsoft.com/office/drawing/2014/main" id="{10BD4073-08B2-43A5-9182-56F4DCDEF14D}"/>
               </a:ext>
             </a:extLst>
           </p:cNvPr>
@@ -9648,7 +9648,7 @@
           <p:cNvPr id="39" name="">
             <a:extLst xmlns:a="http://schemas.openxmlformats.org/drawingml/2006/main">
               <a:ext uri="{FF2B5EF4-FFF2-40B4-BE49-F238E27FC236}">
-                <a16:creationId xmlns:a16="http://schemas.microsoft.com/office/drawing/2014/main" id="{E2DE9D81-A4C0-4004-B892-C21AA045C43A}"/>
+                <a16:creationId xmlns:a16="http://schemas.microsoft.com/office/drawing/2014/main" id="{05BCCFBC-06CD-47D3-95A9-2751276CB0AC}"/>
               </a:ext>
             </a:extLst>
           </p:cNvPr>
@@ -9700,7 +9700,7 @@
           <p:cNvPr id="40" name="">
             <a:extLst xmlns:a="http://schemas.openxmlformats.org/drawingml/2006/main">
               <a:ext uri="{FF2B5EF4-FFF2-40B4-BE49-F238E27FC236}">
-                <a16:creationId xmlns:a16="http://schemas.microsoft.com/office/drawing/2014/main" id="{98DC4AEF-576D-40D9-A712-1191031D218A}"/>
+                <a16:creationId xmlns:a16="http://schemas.microsoft.com/office/drawing/2014/main" id="{74579BE4-9A58-4D37-87CB-90DE47927890}"/>
               </a:ext>
             </a:extLst>
           </p:cNvPr>
@@ -9752,7 +9752,7 @@
           <p:cNvPr id="41" name="">
             <a:extLst xmlns:a="http://schemas.openxmlformats.org/drawingml/2006/main">
               <a:ext uri="{FF2B5EF4-FFF2-40B4-BE49-F238E27FC236}">
-                <a16:creationId xmlns:a16="http://schemas.microsoft.com/office/drawing/2014/main" id="{8D977072-E775-4D30-9A6F-CA5588C0314D}"/>
+                <a16:creationId xmlns:a16="http://schemas.microsoft.com/office/drawing/2014/main" id="{5E344723-16EC-4089-B12D-2C294824CC56}"/>
               </a:ext>
             </a:extLst>
           </p:cNvPr>
@@ -9804,7 +9804,7 @@
           <p:cNvPr id="42" name="">
             <a:extLst xmlns:a="http://schemas.openxmlformats.org/drawingml/2006/main">
               <a:ext uri="{FF2B5EF4-FFF2-40B4-BE49-F238E27FC236}">
-                <a16:creationId xmlns:a16="http://schemas.microsoft.com/office/drawing/2014/main" id="{E4E5DAAD-286C-40BA-A9F9-0EAD66BDF783}"/>
+                <a16:creationId xmlns:a16="http://schemas.microsoft.com/office/drawing/2014/main" id="{6E6CC6BB-FE62-4FA4-AC7E-96B5EE30FFEE}"/>
               </a:ext>
             </a:extLst>
           </p:cNvPr>
@@ -9856,7 +9856,7 @@
           <p:cNvPr id="43" name="">
             <a:extLst xmlns:a="http://schemas.openxmlformats.org/drawingml/2006/main">
               <a:ext uri="{FF2B5EF4-FFF2-40B4-BE49-F238E27FC236}">
-                <a16:creationId xmlns:a16="http://schemas.microsoft.com/office/drawing/2014/main" id="{78969627-A2B9-429A-A2AE-F221410EFEDA}"/>
+                <a16:creationId xmlns:a16="http://schemas.microsoft.com/office/drawing/2014/main" id="{16DDFA16-3CB6-4703-9ACA-999E7E874D28}"/>
               </a:ext>
             </a:extLst>
           </p:cNvPr>
@@ -9908,7 +9908,7 @@
           <p:cNvPr id="44" name="">
             <a:extLst xmlns:a="http://schemas.openxmlformats.org/drawingml/2006/main">
               <a:ext uri="{FF2B5EF4-FFF2-40B4-BE49-F238E27FC236}">
-                <a16:creationId xmlns:a16="http://schemas.microsoft.com/office/drawing/2014/main" id="{AAF72871-B948-4A24-B351-90D97F090553}"/>
+                <a16:creationId xmlns:a16="http://schemas.microsoft.com/office/drawing/2014/main" id="{6B37BC99-A265-4D37-8820-2E43CE8A8581}"/>
               </a:ext>
             </a:extLst>
           </p:cNvPr>
@@ -9939,7 +9939,7 @@
           <p:cNvPr id="45" name="">
             <a:extLst xmlns:a="http://schemas.openxmlformats.org/drawingml/2006/main">
               <a:ext uri="{FF2B5EF4-FFF2-40B4-BE49-F238E27FC236}">
-                <a16:creationId xmlns:a16="http://schemas.microsoft.com/office/drawing/2014/main" id="{525FB28A-6328-4F6D-BA3E-D6E050C43C4F}"/>
+                <a16:creationId xmlns:a16="http://schemas.microsoft.com/office/drawing/2014/main" id="{A1526905-7139-4DB8-842A-93FCCF53CE31}"/>
               </a:ext>
             </a:extLst>
           </p:cNvPr>
@@ -9991,7 +9991,7 @@
           <p:cNvPr id="46" name="">
             <a:extLst xmlns:a="http://schemas.openxmlformats.org/drawingml/2006/main">
               <a:ext uri="{FF2B5EF4-FFF2-40B4-BE49-F238E27FC236}">
-                <a16:creationId xmlns:a16="http://schemas.microsoft.com/office/drawing/2014/main" id="{809EEC3A-BE81-4788-87E0-FF48E493A4BE}"/>
+                <a16:creationId xmlns:a16="http://schemas.microsoft.com/office/drawing/2014/main" id="{CC194D88-BE93-496F-9007-C360480AE780}"/>
               </a:ext>
             </a:extLst>
           </p:cNvPr>
@@ -10043,7 +10043,7 @@
           <p:cNvPr id="47" name="">
             <a:extLst xmlns:a="http://schemas.openxmlformats.org/drawingml/2006/main">
               <a:ext uri="{FF2B5EF4-FFF2-40B4-BE49-F238E27FC236}">
-                <a16:creationId xmlns:a16="http://schemas.microsoft.com/office/drawing/2014/main" id="{C8070F6C-6C02-4420-985F-2044E0CC13C0}"/>
+                <a16:creationId xmlns:a16="http://schemas.microsoft.com/office/drawing/2014/main" id="{BBAAC5C7-2C6C-472D-A68A-007694AA2B12}"/>
               </a:ext>
             </a:extLst>
           </p:cNvPr>
@@ -10095,7 +10095,7 @@
           <p:cNvPr id="48" name="">
             <a:extLst xmlns:a="http://schemas.openxmlformats.org/drawingml/2006/main">
               <a:ext uri="{FF2B5EF4-FFF2-40B4-BE49-F238E27FC236}">
-                <a16:creationId xmlns:a16="http://schemas.microsoft.com/office/drawing/2014/main" id="{F1209E12-5315-4C61-BE51-0CBBD1E32936}"/>
+                <a16:creationId xmlns:a16="http://schemas.microsoft.com/office/drawing/2014/main" id="{3BBF2048-174F-42A0-B72B-1C2B086543FD}"/>
               </a:ext>
             </a:extLst>
           </p:cNvPr>
@@ -10147,7 +10147,7 @@
           <p:cNvPr id="49" name="">
             <a:extLst xmlns:a="http://schemas.openxmlformats.org/drawingml/2006/main">
               <a:ext uri="{FF2B5EF4-FFF2-40B4-BE49-F238E27FC236}">
-                <a16:creationId xmlns:a16="http://schemas.microsoft.com/office/drawing/2014/main" id="{EC3740A4-4634-449D-9A3C-AE0E3E59F07E}"/>
+                <a16:creationId xmlns:a16="http://schemas.microsoft.com/office/drawing/2014/main" id="{94526D1D-0CC4-495D-8E68-C2FC339D686B}"/>
               </a:ext>
             </a:extLst>
           </p:cNvPr>
@@ -10199,7 +10199,7 @@
           <p:cNvPr id="50" name="">
             <a:extLst xmlns:a="http://schemas.openxmlformats.org/drawingml/2006/main">
               <a:ext uri="{FF2B5EF4-FFF2-40B4-BE49-F238E27FC236}">
-                <a16:creationId xmlns:a16="http://schemas.microsoft.com/office/drawing/2014/main" id="{E465CEBD-0249-442D-A6A9-5BC23AB6764B}"/>
+                <a16:creationId xmlns:a16="http://schemas.microsoft.com/office/drawing/2014/main" id="{485AE4BA-D5C9-4762-B456-D3ACC5FBEB08}"/>
               </a:ext>
             </a:extLst>
           </p:cNvPr>
@@ -10251,7 +10251,7 @@
           <p:cNvPr id="51" name="">
             <a:extLst xmlns:a="http://schemas.openxmlformats.org/drawingml/2006/main">
               <a:ext uri="{FF2B5EF4-FFF2-40B4-BE49-F238E27FC236}">
-                <a16:creationId xmlns:a16="http://schemas.microsoft.com/office/drawing/2014/main" id="{F5D77E80-8360-44BC-817B-0AC91653144B}"/>
+                <a16:creationId xmlns:a16="http://schemas.microsoft.com/office/drawing/2014/main" id="{93CF39B0-1E9A-439B-BCE5-BA18D0175AFD}"/>
               </a:ext>
             </a:extLst>
           </p:cNvPr>
@@ -10282,7 +10282,7 @@
           <p:cNvPr id="52" name="">
             <a:extLst xmlns:a="http://schemas.openxmlformats.org/drawingml/2006/main">
               <a:ext uri="{FF2B5EF4-FFF2-40B4-BE49-F238E27FC236}">
-                <a16:creationId xmlns:a16="http://schemas.microsoft.com/office/drawing/2014/main" id="{A15C0392-BE32-445F-A359-B48D13234360}"/>
+                <a16:creationId xmlns:a16="http://schemas.microsoft.com/office/drawing/2014/main" id="{75FD8280-B938-44D7-8E74-D2BD4D1CCDC4}"/>
               </a:ext>
             </a:extLst>
           </p:cNvPr>
@@ -10313,7 +10313,7 @@
           <p:cNvPr id="53" name="">
             <a:extLst xmlns:a="http://schemas.openxmlformats.org/drawingml/2006/main">
               <a:ext uri="{FF2B5EF4-FFF2-40B4-BE49-F238E27FC236}">
-                <a16:creationId xmlns:a16="http://schemas.microsoft.com/office/drawing/2014/main" id="{5E52C1B3-891B-4030-A7A1-DAEDD5083BEB}"/>
+                <a16:creationId xmlns:a16="http://schemas.microsoft.com/office/drawing/2014/main" id="{BDC8C4E8-3227-4500-8C43-FE1FFC327B9E}"/>
               </a:ext>
             </a:extLst>
           </p:cNvPr>
@@ -10344,7 +10344,7 @@
           <p:cNvPr id="54" name="">
             <a:extLst xmlns:a="http://schemas.openxmlformats.org/drawingml/2006/main">
               <a:ext uri="{FF2B5EF4-FFF2-40B4-BE49-F238E27FC236}">
-                <a16:creationId xmlns:a16="http://schemas.microsoft.com/office/drawing/2014/main" id="{B3D19E14-C7AA-46EB-99B0-DE1152F80312}"/>
+                <a16:creationId xmlns:a16="http://schemas.microsoft.com/office/drawing/2014/main" id="{1BF819A3-72B9-48BF-AB17-8E2C662EF044}"/>
               </a:ext>
             </a:extLst>
           </p:cNvPr>
@@ -10396,7 +10396,7 @@
           <p:cNvPr id="55" name="">
             <a:extLst xmlns:a="http://schemas.openxmlformats.org/drawingml/2006/main">
               <a:ext uri="{FF2B5EF4-FFF2-40B4-BE49-F238E27FC236}">
-                <a16:creationId xmlns:a16="http://schemas.microsoft.com/office/drawing/2014/main" id="{D3E27BD9-8DB5-4081-A62F-E5B6FF8BDB8D}"/>
+                <a16:creationId xmlns:a16="http://schemas.microsoft.com/office/drawing/2014/main" id="{34C0A82C-D9A7-47EF-A612-D9BC1868D9BD}"/>
               </a:ext>
             </a:extLst>
           </p:cNvPr>
@@ -10448,7 +10448,7 @@
           <p:cNvPr id="56" name="">
             <a:extLst xmlns:a="http://schemas.openxmlformats.org/drawingml/2006/main">
               <a:ext uri="{FF2B5EF4-FFF2-40B4-BE49-F238E27FC236}">
-                <a16:creationId xmlns:a16="http://schemas.microsoft.com/office/drawing/2014/main" id="{47B697AE-5187-4924-97A2-4EE0AD15F444}"/>
+                <a16:creationId xmlns:a16="http://schemas.microsoft.com/office/drawing/2014/main" id="{1E7CA886-03A9-443A-958E-7869DCB39A0C}"/>
               </a:ext>
             </a:extLst>
           </p:cNvPr>
@@ -10500,7 +10500,7 @@
           <p:cNvPr id="57" name="">
             <a:extLst xmlns:a="http://schemas.openxmlformats.org/drawingml/2006/main">
               <a:ext uri="{FF2B5EF4-FFF2-40B4-BE49-F238E27FC236}">
-                <a16:creationId xmlns:a16="http://schemas.microsoft.com/office/drawing/2014/main" id="{8309ED1D-E931-4ADA-A604-4FD0EC13399E}"/>
+                <a16:creationId xmlns:a16="http://schemas.microsoft.com/office/drawing/2014/main" id="{CB354290-7101-45AE-ABF4-F3C1CF3426B3}"/>
               </a:ext>
             </a:extLst>
           </p:cNvPr>
@@ -10552,7 +10552,7 @@
           <p:cNvPr id="58" name="">
             <a:extLst xmlns:a="http://schemas.openxmlformats.org/drawingml/2006/main">
               <a:ext uri="{FF2B5EF4-FFF2-40B4-BE49-F238E27FC236}">
-                <a16:creationId xmlns:a16="http://schemas.microsoft.com/office/drawing/2014/main" id="{FD3990AD-F984-4E18-A11F-2B633CD706DB}"/>
+                <a16:creationId xmlns:a16="http://schemas.microsoft.com/office/drawing/2014/main" id="{CD0F315C-2453-4D2F-A701-7BB3B4E6F6DE}"/>
               </a:ext>
             </a:extLst>
           </p:cNvPr>
@@ -10604,7 +10604,7 @@
           <p:cNvPr id="59" name="">
             <a:extLst xmlns:a="http://schemas.openxmlformats.org/drawingml/2006/main">
               <a:ext uri="{FF2B5EF4-FFF2-40B4-BE49-F238E27FC236}">
-                <a16:creationId xmlns:a16="http://schemas.microsoft.com/office/drawing/2014/main" id="{9CB699D3-42E7-4A33-8103-6CC3081B46C1}"/>
+                <a16:creationId xmlns:a16="http://schemas.microsoft.com/office/drawing/2014/main" id="{23282359-C5E6-4FA1-B733-DAC6E349E7E4}"/>
               </a:ext>
             </a:extLst>
           </p:cNvPr>
@@ -10635,7 +10635,7 @@
           <p:cNvPr id="60" name="">
             <a:extLst xmlns:a="http://schemas.openxmlformats.org/drawingml/2006/main">
               <a:ext uri="{FF2B5EF4-FFF2-40B4-BE49-F238E27FC236}">
-                <a16:creationId xmlns:a16="http://schemas.microsoft.com/office/drawing/2014/main" id="{F1499252-9DF5-46E9-8F64-F6F317A021F3}"/>
+                <a16:creationId xmlns:a16="http://schemas.microsoft.com/office/drawing/2014/main" id="{2A9C6D4D-6B6B-40B9-9852-8CAA934FEFF2}"/>
               </a:ext>
             </a:extLst>
           </p:cNvPr>
@@ -10687,7 +10687,7 @@
           <p:cNvPr id="61" name="">
             <a:extLst xmlns:a="http://schemas.openxmlformats.org/drawingml/2006/main">
               <a:ext uri="{FF2B5EF4-FFF2-40B4-BE49-F238E27FC236}">
-                <a16:creationId xmlns:a16="http://schemas.microsoft.com/office/drawing/2014/main" id="{BD88B888-3E05-4061-96C3-87B969270AD6}"/>
+                <a16:creationId xmlns:a16="http://schemas.microsoft.com/office/drawing/2014/main" id="{BABD9149-ED05-42AD-80D5-A2991FA6973E}"/>
               </a:ext>
             </a:extLst>
           </p:cNvPr>
@@ -10739,7 +10739,7 @@
           <p:cNvPr id="62" name="">
             <a:extLst xmlns:a="http://schemas.openxmlformats.org/drawingml/2006/main">
               <a:ext uri="{FF2B5EF4-FFF2-40B4-BE49-F238E27FC236}">
-                <a16:creationId xmlns:a16="http://schemas.microsoft.com/office/drawing/2014/main" id="{316D1741-9006-4F48-ACE8-C7F389C94575}"/>
+                <a16:creationId xmlns:a16="http://schemas.microsoft.com/office/drawing/2014/main" id="{916B9147-0612-4636-BF47-6B13FE181E05}"/>
               </a:ext>
             </a:extLst>
           </p:cNvPr>
@@ -10791,7 +10791,7 @@
           <p:cNvPr id="63" name="">
             <a:extLst xmlns:a="http://schemas.openxmlformats.org/drawingml/2006/main">
               <a:ext uri="{FF2B5EF4-FFF2-40B4-BE49-F238E27FC236}">
-                <a16:creationId xmlns:a16="http://schemas.microsoft.com/office/drawing/2014/main" id="{58F64EB2-59AC-413A-BD09-EBDA150A4FAB}"/>
+                <a16:creationId xmlns:a16="http://schemas.microsoft.com/office/drawing/2014/main" id="{202BE0E6-247D-4F16-8970-025D875E0AB4}"/>
               </a:ext>
             </a:extLst>
           </p:cNvPr>
@@ -10843,7 +10843,7 @@
           <p:cNvPr id="64" name="">
             <a:extLst xmlns:a="http://schemas.openxmlformats.org/drawingml/2006/main">
               <a:ext uri="{FF2B5EF4-FFF2-40B4-BE49-F238E27FC236}">
-                <a16:creationId xmlns:a16="http://schemas.microsoft.com/office/drawing/2014/main" id="{14DB0F6E-5EE7-4A38-B6DE-B67AB351F854}"/>
+                <a16:creationId xmlns:a16="http://schemas.microsoft.com/office/drawing/2014/main" id="{4E059B26-2D04-4A95-A4CF-32D21D219F1C}"/>
               </a:ext>
             </a:extLst>
           </p:cNvPr>
@@ -10895,7 +10895,7 @@
           <p:cNvPr id="65" name="">
             <a:extLst xmlns:a="http://schemas.openxmlformats.org/drawingml/2006/main">
               <a:ext uri="{FF2B5EF4-FFF2-40B4-BE49-F238E27FC236}">
-                <a16:creationId xmlns:a16="http://schemas.microsoft.com/office/drawing/2014/main" id="{3F6714E1-9A11-4035-B382-772EE52E6A05}"/>
+                <a16:creationId xmlns:a16="http://schemas.microsoft.com/office/drawing/2014/main" id="{1A8E1D4F-A5F8-47A9-AA91-BD3BD8E092EA}"/>
               </a:ext>
             </a:extLst>
           </p:cNvPr>
@@ -10926,7 +10926,7 @@
           <p:cNvPr id="66" name="">
             <a:extLst xmlns:a="http://schemas.openxmlformats.org/drawingml/2006/main">
               <a:ext uri="{FF2B5EF4-FFF2-40B4-BE49-F238E27FC236}">
-                <a16:creationId xmlns:a16="http://schemas.microsoft.com/office/drawing/2014/main" id="{DB1912C2-039E-4AFA-A530-927B38B06098}"/>
+                <a16:creationId xmlns:a16="http://schemas.microsoft.com/office/drawing/2014/main" id="{E7AA038A-CC3A-4739-9896-02318631276F}"/>
               </a:ext>
             </a:extLst>
           </p:cNvPr>
@@ -10957,7 +10957,7 @@
           <p:cNvPr id="67" name="">
             <a:extLst xmlns:a="http://schemas.openxmlformats.org/drawingml/2006/main">
               <a:ext uri="{FF2B5EF4-FFF2-40B4-BE49-F238E27FC236}">
-                <a16:creationId xmlns:a16="http://schemas.microsoft.com/office/drawing/2014/main" id="{CFE4871D-55F6-4674-9F76-EEC1AC7688B5}"/>
+                <a16:creationId xmlns:a16="http://schemas.microsoft.com/office/drawing/2014/main" id="{08A81DCE-8D28-4BDE-98FD-AA9B4D13D5BA}"/>
               </a:ext>
             </a:extLst>
           </p:cNvPr>
@@ -11009,7 +11009,7 @@
           <p:cNvPr id="68" name="">
             <a:extLst xmlns:a="http://schemas.openxmlformats.org/drawingml/2006/main">
               <a:ext uri="{FF2B5EF4-FFF2-40B4-BE49-F238E27FC236}">
-                <a16:creationId xmlns:a16="http://schemas.microsoft.com/office/drawing/2014/main" id="{4C6E1A07-FB0B-4096-A9E5-6C93A0009F14}"/>
+                <a16:creationId xmlns:a16="http://schemas.microsoft.com/office/drawing/2014/main" id="{ABA7DFD3-41C7-4C1C-B34B-15C04FD8FDCB}"/>
               </a:ext>
             </a:extLst>
           </p:cNvPr>
@@ -11061,7 +11061,7 @@
           <p:cNvPr id="69" name="">
             <a:extLst xmlns:a="http://schemas.openxmlformats.org/drawingml/2006/main">
               <a:ext uri="{FF2B5EF4-FFF2-40B4-BE49-F238E27FC236}">
-                <a16:creationId xmlns:a16="http://schemas.microsoft.com/office/drawing/2014/main" id="{3775B6BC-C67B-44E3-B60D-EAC0394B3D96}"/>
+                <a16:creationId xmlns:a16="http://schemas.microsoft.com/office/drawing/2014/main" id="{2D68E85C-9A7B-42BE-BB19-2589DA2B056F}"/>
               </a:ext>
             </a:extLst>
           </p:cNvPr>
@@ -11113,7 +11113,7 @@
           <p:cNvPr id="70" name="">
             <a:extLst xmlns:a="http://schemas.openxmlformats.org/drawingml/2006/main">
               <a:ext uri="{FF2B5EF4-FFF2-40B4-BE49-F238E27FC236}">
-                <a16:creationId xmlns:a16="http://schemas.microsoft.com/office/drawing/2014/main" id="{0D9EF36E-DD25-49DE-9727-8D080A593435}"/>
+                <a16:creationId xmlns:a16="http://schemas.microsoft.com/office/drawing/2014/main" id="{4129FD3D-87E2-4C4F-91C0-FF0AC2D91470}"/>
               </a:ext>
             </a:extLst>
           </p:cNvPr>
@@ -11165,7 +11165,7 @@
           <p:cNvPr id="71" name="">
             <a:extLst xmlns:a="http://schemas.openxmlformats.org/drawingml/2006/main">
               <a:ext uri="{FF2B5EF4-FFF2-40B4-BE49-F238E27FC236}">
-                <a16:creationId xmlns:a16="http://schemas.microsoft.com/office/drawing/2014/main" id="{17473BD1-B920-4A73-9EF6-3CF75210DACC}"/>
+                <a16:creationId xmlns:a16="http://schemas.microsoft.com/office/drawing/2014/main" id="{60DB1188-78F6-4E32-AE8D-439AE329ACF8}"/>
               </a:ext>
             </a:extLst>
           </p:cNvPr>
@@ -11217,7 +11217,7 @@
           <p:cNvPr id="72" name="">
             <a:extLst xmlns:a="http://schemas.openxmlformats.org/drawingml/2006/main">
               <a:ext uri="{FF2B5EF4-FFF2-40B4-BE49-F238E27FC236}">
-                <a16:creationId xmlns:a16="http://schemas.microsoft.com/office/drawing/2014/main" id="{55157BEB-B928-4815-BE09-9EE8EE6A511D}"/>
+                <a16:creationId xmlns:a16="http://schemas.microsoft.com/office/drawing/2014/main" id="{92B56170-78BA-4C05-A821-C1259DFF2319}"/>
               </a:ext>
             </a:extLst>
           </p:cNvPr>
@@ -11248,7 +11248,7 @@
           <p:cNvPr id="73" name="">
             <a:extLst xmlns:a="http://schemas.openxmlformats.org/drawingml/2006/main">
               <a:ext uri="{FF2B5EF4-FFF2-40B4-BE49-F238E27FC236}">
-                <a16:creationId xmlns:a16="http://schemas.microsoft.com/office/drawing/2014/main" id="{1C928F5B-C735-4E37-BFC3-4A7AD5F36840}"/>
+                <a16:creationId xmlns:a16="http://schemas.microsoft.com/office/drawing/2014/main" id="{28C7AB71-22F8-4EEE-BFC5-DA97F457F2C6}"/>
               </a:ext>
             </a:extLst>
           </p:cNvPr>
@@ -11300,7 +11300,7 @@
           <p:cNvPr id="74" name="">
             <a:extLst xmlns:a="http://schemas.openxmlformats.org/drawingml/2006/main">
               <a:ext uri="{FF2B5EF4-FFF2-40B4-BE49-F238E27FC236}">
-                <a16:creationId xmlns:a16="http://schemas.microsoft.com/office/drawing/2014/main" id="{507C8C5C-3011-44F1-9759-6FBD9131C0BB}"/>
+                <a16:creationId xmlns:a16="http://schemas.microsoft.com/office/drawing/2014/main" id="{7D254E10-B538-44A6-AB95-536A37741DF3}"/>
               </a:ext>
             </a:extLst>
           </p:cNvPr>
@@ -11352,7 +11352,7 @@
           <p:cNvPr id="75" name="">
             <a:extLst xmlns:a="http://schemas.openxmlformats.org/drawingml/2006/main">
               <a:ext uri="{FF2B5EF4-FFF2-40B4-BE49-F238E27FC236}">
-                <a16:creationId xmlns:a16="http://schemas.microsoft.com/office/drawing/2014/main" id="{B8E91A21-10D0-4FF3-A61A-1D02E4BC5BEC}"/>
+                <a16:creationId xmlns:a16="http://schemas.microsoft.com/office/drawing/2014/main" id="{8EBCA13D-4936-4BFA-A064-147F5C2FDF79}"/>
               </a:ext>
             </a:extLst>
           </p:cNvPr>
@@ -11404,7 +11404,7 @@
           <p:cNvPr id="76" name="">
             <a:extLst xmlns:a="http://schemas.openxmlformats.org/drawingml/2006/main">
               <a:ext uri="{FF2B5EF4-FFF2-40B4-BE49-F238E27FC236}">
-                <a16:creationId xmlns:a16="http://schemas.microsoft.com/office/drawing/2014/main" id="{269EBA9C-F1BB-4BC6-B6C2-82D56356EA9C}"/>
+                <a16:creationId xmlns:a16="http://schemas.microsoft.com/office/drawing/2014/main" id="{57F39E51-6089-490C-A835-FF832E1D4903}"/>
               </a:ext>
             </a:extLst>
           </p:cNvPr>
@@ -11456,7 +11456,7 @@
           <p:cNvPr id="77" name="">
             <a:extLst xmlns:a="http://schemas.openxmlformats.org/drawingml/2006/main">
               <a:ext uri="{FF2B5EF4-FFF2-40B4-BE49-F238E27FC236}">
-                <a16:creationId xmlns:a16="http://schemas.microsoft.com/office/drawing/2014/main" id="{6110B833-EBBF-4D3E-8A6A-E7A04FC58074}"/>
+                <a16:creationId xmlns:a16="http://schemas.microsoft.com/office/drawing/2014/main" id="{5448A564-4367-4880-A5B4-4D9EBAEF93B5}"/>
               </a:ext>
             </a:extLst>
           </p:cNvPr>
@@ -11508,7 +11508,7 @@
           <p:cNvPr id="78" name="">
             <a:extLst xmlns:a="http://schemas.openxmlformats.org/drawingml/2006/main">
               <a:ext uri="{FF2B5EF4-FFF2-40B4-BE49-F238E27FC236}">
-                <a16:creationId xmlns:a16="http://schemas.microsoft.com/office/drawing/2014/main" id="{073D0A09-B351-46BD-AB27-3110FBB2652B}"/>
+                <a16:creationId xmlns:a16="http://schemas.microsoft.com/office/drawing/2014/main" id="{F6814255-C416-4F8A-8532-BAE33CE8DF7B}"/>
               </a:ext>
             </a:extLst>
           </p:cNvPr>
@@ -11539,7 +11539,7 @@
           <p:cNvPr id="79" name="">
             <a:extLst xmlns:a="http://schemas.openxmlformats.org/drawingml/2006/main">
               <a:ext uri="{FF2B5EF4-FFF2-40B4-BE49-F238E27FC236}">
-                <a16:creationId xmlns:a16="http://schemas.microsoft.com/office/drawing/2014/main" id="{B6C46EC3-9FED-43C2-8A90-991EB6C62DA2}"/>
+                <a16:creationId xmlns:a16="http://schemas.microsoft.com/office/drawing/2014/main" id="{07A63BF1-8642-428B-B4F1-24E0A435DD3B}"/>
               </a:ext>
             </a:extLst>
           </p:cNvPr>
@@ -11570,7 +11570,7 @@
           <p:cNvPr id="80" name="">
             <a:extLst xmlns:a="http://schemas.openxmlformats.org/drawingml/2006/main">
               <a:ext uri="{FF2B5EF4-FFF2-40B4-BE49-F238E27FC236}">
-                <a16:creationId xmlns:a16="http://schemas.microsoft.com/office/drawing/2014/main" id="{1E263473-4C2B-49FB-8261-293CE6407CC1}"/>
+                <a16:creationId xmlns:a16="http://schemas.microsoft.com/office/drawing/2014/main" id="{3999F34C-8A10-421F-A8F0-81F32023B689}"/>
               </a:ext>
             </a:extLst>
           </p:cNvPr>
@@ -11622,7 +11622,7 @@
           <p:cNvPr id="81" name="">
             <a:extLst xmlns:a="http://schemas.openxmlformats.org/drawingml/2006/main">
               <a:ext uri="{FF2B5EF4-FFF2-40B4-BE49-F238E27FC236}">
-                <a16:creationId xmlns:a16="http://schemas.microsoft.com/office/drawing/2014/main" id="{181F92A5-63EA-4B4D-A8DE-09A1B4FF6ECE}"/>
+                <a16:creationId xmlns:a16="http://schemas.microsoft.com/office/drawing/2014/main" id="{50B08F7C-86F7-4E29-83A2-EAC172873A03}"/>
               </a:ext>
             </a:extLst>
           </p:cNvPr>
@@ -11674,7 +11674,7 @@
           <p:cNvPr id="82" name="">
             <a:extLst xmlns:a="http://schemas.openxmlformats.org/drawingml/2006/main">
               <a:ext uri="{FF2B5EF4-FFF2-40B4-BE49-F238E27FC236}">
-                <a16:creationId xmlns:a16="http://schemas.microsoft.com/office/drawing/2014/main" id="{461BBC08-007C-432B-B228-31177E981328}"/>
+                <a16:creationId xmlns:a16="http://schemas.microsoft.com/office/drawing/2014/main" id="{A463B736-87CC-42C1-A7A0-9D9B75524EFA}"/>
               </a:ext>
             </a:extLst>
           </p:cNvPr>
@@ -11726,7 +11726,7 @@
           <p:cNvPr id="83" name="">
             <a:extLst xmlns:a="http://schemas.openxmlformats.org/drawingml/2006/main">
               <a:ext uri="{FF2B5EF4-FFF2-40B4-BE49-F238E27FC236}">
-                <a16:creationId xmlns:a16="http://schemas.microsoft.com/office/drawing/2014/main" id="{A651C39C-19CA-4A0A-B8C4-DFF511C2501F}"/>
+                <a16:creationId xmlns:a16="http://schemas.microsoft.com/office/drawing/2014/main" id="{E554D56E-B3A0-437C-B364-641ED99A1710}"/>
               </a:ext>
             </a:extLst>
           </p:cNvPr>
@@ -11778,7 +11778,7 @@
           <p:cNvPr id="84" name="">
             <a:extLst xmlns:a="http://schemas.openxmlformats.org/drawingml/2006/main">
               <a:ext uri="{FF2B5EF4-FFF2-40B4-BE49-F238E27FC236}">
-                <a16:creationId xmlns:a16="http://schemas.microsoft.com/office/drawing/2014/main" id="{6FA9575C-953D-4ED8-BD0E-0638B510C0D1}"/>
+                <a16:creationId xmlns:a16="http://schemas.microsoft.com/office/drawing/2014/main" id="{5B07AC0F-7D8D-4124-9C01-3734A7B1D314}"/>
               </a:ext>
             </a:extLst>
           </p:cNvPr>
@@ -11830,7 +11830,7 @@
           <p:cNvPr id="85" name="">
             <a:extLst xmlns:a="http://schemas.openxmlformats.org/drawingml/2006/main">
               <a:ext uri="{FF2B5EF4-FFF2-40B4-BE49-F238E27FC236}">
-                <a16:creationId xmlns:a16="http://schemas.microsoft.com/office/drawing/2014/main" id="{6223A5AC-365A-42BA-AB10-4496F5CC35E6}"/>
+                <a16:creationId xmlns:a16="http://schemas.microsoft.com/office/drawing/2014/main" id="{30D1E528-5A2C-4B26-B4D7-C61833F704BC}"/>
               </a:ext>
             </a:extLst>
           </p:cNvPr>
@@ -11861,7 +11861,7 @@
           <p:cNvPr id="86" name="">
             <a:extLst xmlns:a="http://schemas.openxmlformats.org/drawingml/2006/main">
               <a:ext uri="{FF2B5EF4-FFF2-40B4-BE49-F238E27FC236}">
-                <a16:creationId xmlns:a16="http://schemas.microsoft.com/office/drawing/2014/main" id="{B664FE9D-77AA-4BE3-A31B-A7823A295914}"/>
+                <a16:creationId xmlns:a16="http://schemas.microsoft.com/office/drawing/2014/main" id="{F8CB5A12-2D68-4546-92E2-0D7D5F0FADDC}"/>
               </a:ext>
             </a:extLst>
           </p:cNvPr>
@@ -11913,7 +11913,7 @@
           <p:cNvPr id="87" name="">
             <a:extLst xmlns:a="http://schemas.openxmlformats.org/drawingml/2006/main">
               <a:ext uri="{FF2B5EF4-FFF2-40B4-BE49-F238E27FC236}">
-                <a16:creationId xmlns:a16="http://schemas.microsoft.com/office/drawing/2014/main" id="{605CEBB5-4963-45E7-A14D-C21CB2A0730A}"/>
+                <a16:creationId xmlns:a16="http://schemas.microsoft.com/office/drawing/2014/main" id="{CA12B5CC-7ED3-4C04-A0F6-04D226A8AB92}"/>
               </a:ext>
             </a:extLst>
           </p:cNvPr>
@@ -11965,7 +11965,7 @@
           <p:cNvPr id="88" name="">
             <a:extLst xmlns:a="http://schemas.openxmlformats.org/drawingml/2006/main">
               <a:ext uri="{FF2B5EF4-FFF2-40B4-BE49-F238E27FC236}">
-                <a16:creationId xmlns:a16="http://schemas.microsoft.com/office/drawing/2014/main" id="{88EFBF9A-97C8-4BCA-B84C-F0E60AA2C549}"/>
+                <a16:creationId xmlns:a16="http://schemas.microsoft.com/office/drawing/2014/main" id="{D006CB80-C121-4C14-9E6F-B20EFD0BABEB}"/>
               </a:ext>
             </a:extLst>
           </p:cNvPr>
@@ -12017,7 +12017,7 @@
           <p:cNvPr id="89" name="">
             <a:extLst xmlns:a="http://schemas.openxmlformats.org/drawingml/2006/main">
               <a:ext uri="{FF2B5EF4-FFF2-40B4-BE49-F238E27FC236}">
-                <a16:creationId xmlns:a16="http://schemas.microsoft.com/office/drawing/2014/main" id="{532A5AE2-1D35-4BF6-B958-60B9B445095F}"/>
+                <a16:creationId xmlns:a16="http://schemas.microsoft.com/office/drawing/2014/main" id="{219B1215-D4D6-464A-9061-1F203E60E2C4}"/>
               </a:ext>
             </a:extLst>
           </p:cNvPr>
@@ -12069,7 +12069,7 @@
           <p:cNvPr id="90" name="">
             <a:extLst xmlns:a="http://schemas.openxmlformats.org/drawingml/2006/main">
               <a:ext uri="{FF2B5EF4-FFF2-40B4-BE49-F238E27FC236}">
-                <a16:creationId xmlns:a16="http://schemas.microsoft.com/office/drawing/2014/main" id="{21CE3A61-4FF6-4C47-96DB-405D1C37672D}"/>
+                <a16:creationId xmlns:a16="http://schemas.microsoft.com/office/drawing/2014/main" id="{06C312E0-5EDD-427E-A77A-1FDBD2CDFA80}"/>
               </a:ext>
             </a:extLst>
           </p:cNvPr>
@@ -12121,7 +12121,7 @@
           <p:cNvPr id="91" name="">
             <a:extLst xmlns:a="http://schemas.openxmlformats.org/drawingml/2006/main">
               <a:ext uri="{FF2B5EF4-FFF2-40B4-BE49-F238E27FC236}">
-                <a16:creationId xmlns:a16="http://schemas.microsoft.com/office/drawing/2014/main" id="{84444825-E18E-477D-B941-0548644C4C82}"/>
+                <a16:creationId xmlns:a16="http://schemas.microsoft.com/office/drawing/2014/main" id="{A0902733-CFC7-49D5-9C96-563CAAEECE39}"/>
               </a:ext>
             </a:extLst>
           </p:cNvPr>
@@ -12152,7 +12152,7 @@
           <p:cNvPr id="92" name="">
             <a:extLst xmlns:a="http://schemas.openxmlformats.org/drawingml/2006/main">
               <a:ext uri="{FF2B5EF4-FFF2-40B4-BE49-F238E27FC236}">
-                <a16:creationId xmlns:a16="http://schemas.microsoft.com/office/drawing/2014/main" id="{C513966B-2D35-47EF-ABEE-D845C5DED0BF}"/>
+                <a16:creationId xmlns:a16="http://schemas.microsoft.com/office/drawing/2014/main" id="{670A789A-F341-4581-999F-0A01CA8F33ED}"/>
               </a:ext>
             </a:extLst>
           </p:cNvPr>
@@ -12183,7 +12183,7 @@
           <p:cNvPr id="93" name="">
             <a:extLst xmlns:a="http://schemas.openxmlformats.org/drawingml/2006/main">
               <a:ext uri="{FF2B5EF4-FFF2-40B4-BE49-F238E27FC236}">
-                <a16:creationId xmlns:a16="http://schemas.microsoft.com/office/drawing/2014/main" id="{9B251936-7FFC-44D3-B128-A9F13C2FB8D3}"/>
+                <a16:creationId xmlns:a16="http://schemas.microsoft.com/office/drawing/2014/main" id="{27AC26A2-5586-4847-88B7-3C741C176D96}"/>
               </a:ext>
             </a:extLst>
           </p:cNvPr>
@@ -12235,7 +12235,7 @@
           <p:cNvPr id="94" name="">
             <a:extLst xmlns:a="http://schemas.openxmlformats.org/drawingml/2006/main">
               <a:ext uri="{FF2B5EF4-FFF2-40B4-BE49-F238E27FC236}">
-                <a16:creationId xmlns:a16="http://schemas.microsoft.com/office/drawing/2014/main" id="{F380DF5B-B2C9-4819-B7B7-1DCA27C3A91C}"/>
+                <a16:creationId xmlns:a16="http://schemas.microsoft.com/office/drawing/2014/main" id="{033D7943-E3C1-4C09-AF14-080B668956C0}"/>
               </a:ext>
             </a:extLst>
           </p:cNvPr>
@@ -12287,7 +12287,7 @@
           <p:cNvPr id="95" name="">
             <a:extLst xmlns:a="http://schemas.openxmlformats.org/drawingml/2006/main">
               <a:ext uri="{FF2B5EF4-FFF2-40B4-BE49-F238E27FC236}">
-                <a16:creationId xmlns:a16="http://schemas.microsoft.com/office/drawing/2014/main" id="{CA63CB64-42A7-435B-B839-C9C59E61D583}"/>
+                <a16:creationId xmlns:a16="http://schemas.microsoft.com/office/drawing/2014/main" id="{61304319-D4FD-4C4C-ABEF-E3292AC7B4A2}"/>
               </a:ext>
             </a:extLst>
           </p:cNvPr>
@@ -12339,7 +12339,7 @@
           <p:cNvPr id="96" name="">
             <a:extLst xmlns:a="http://schemas.openxmlformats.org/drawingml/2006/main">
               <a:ext uri="{FF2B5EF4-FFF2-40B4-BE49-F238E27FC236}">
-                <a16:creationId xmlns:a16="http://schemas.microsoft.com/office/drawing/2014/main" id="{C8D8FEDF-33BA-4F42-841E-0608D3724190}"/>
+                <a16:creationId xmlns:a16="http://schemas.microsoft.com/office/drawing/2014/main" id="{79272958-0BE6-4565-9C9B-6E63616296BE}"/>
               </a:ext>
             </a:extLst>
           </p:cNvPr>
@@ -12391,7 +12391,7 @@
           <p:cNvPr id="97" name="">
             <a:extLst xmlns:a="http://schemas.openxmlformats.org/drawingml/2006/main">
               <a:ext uri="{FF2B5EF4-FFF2-40B4-BE49-F238E27FC236}">
-                <a16:creationId xmlns:a16="http://schemas.microsoft.com/office/drawing/2014/main" id="{6E2E1B5F-01EE-49BC-A2CF-88AE6BE17552}"/>
+                <a16:creationId xmlns:a16="http://schemas.microsoft.com/office/drawing/2014/main" id="{87C3CB0C-D297-4FEB-AF8E-38F87D6C67E5}"/>
               </a:ext>
             </a:extLst>
           </p:cNvPr>
@@ -12441,7 +12441,7 @@
     </p:spTree>
     <p:extLst>
       <p:ext uri="{BB962C8B-B14F-4D97-AF65-F5344CB8AC3E}">
-        <p14:creationId xmlns:p14="http://schemas.microsoft.com/office/powerpoint/2010/main" val="1871676425"/>
+        <p14:creationId xmlns:p14="http://schemas.microsoft.com/office/powerpoint/2010/main" val="766080189"/>
       </p:ext>
     </p:extLst>
   </p:cSld>
@@ -12472,7 +12472,7 @@
           <p:cNvPr id="102" name="">
             <a:extLst xmlns:a="http://schemas.openxmlformats.org/drawingml/2006/main">
               <a:ext uri="{FF2B5EF4-FFF2-40B4-BE49-F238E27FC236}">
-                <a16:creationId xmlns:a16="http://schemas.microsoft.com/office/drawing/2014/main" id="{D79CF39B-6E3F-49E0-90B3-23F3DDE1DB88}"/>
+                <a16:creationId xmlns:a16="http://schemas.microsoft.com/office/drawing/2014/main" id="{92E2C104-30E7-4A1A-8BE0-F93A8291B459}"/>
               </a:ext>
             </a:extLst>
           </p:cNvPr>
@@ -12505,7 +12505,7 @@
           <p:cNvPr id="2" name="">
             <a:extLst xmlns:a="http://schemas.openxmlformats.org/drawingml/2006/main">
               <a:ext uri="{FF2B5EF4-FFF2-40B4-BE49-F238E27FC236}">
-                <a16:creationId xmlns:a16="http://schemas.microsoft.com/office/drawing/2014/main" id="{E9DD43C4-6525-42F7-AFE5-E9CEA9294D93}"/>
+                <a16:creationId xmlns:a16="http://schemas.microsoft.com/office/drawing/2014/main" id="{AC4C9B67-4CC4-45DA-B5C6-AAEF925621D9}"/>
               </a:ext>
             </a:extLst>
           </p:cNvPr>
@@ -12536,7 +12536,7 @@
           <p:cNvPr id="3" name="">
             <a:extLst xmlns:a="http://schemas.openxmlformats.org/drawingml/2006/main">
               <a:ext uri="{FF2B5EF4-FFF2-40B4-BE49-F238E27FC236}">
-                <a16:creationId xmlns:a16="http://schemas.microsoft.com/office/drawing/2014/main" id="{2F1DB5C6-ACA4-4FD1-A0A0-7544B8A0727A}"/>
+                <a16:creationId xmlns:a16="http://schemas.microsoft.com/office/drawing/2014/main" id="{A7DDBC6E-0F24-4031-BE16-8C2074BDD6CA}"/>
               </a:ext>
             </a:extLst>
           </p:cNvPr>
@@ -12588,7 +12588,7 @@
           <p:cNvPr id="4" name="">
             <a:extLst xmlns:a="http://schemas.openxmlformats.org/drawingml/2006/main">
               <a:ext uri="{FF2B5EF4-FFF2-40B4-BE49-F238E27FC236}">
-                <a16:creationId xmlns:a16="http://schemas.microsoft.com/office/drawing/2014/main" id="{86BAE516-C680-40C6-B143-99D394B39D35}"/>
+                <a16:creationId xmlns:a16="http://schemas.microsoft.com/office/drawing/2014/main" id="{7FA6EBE0-D22D-4571-856C-3ED20A94C196}"/>
               </a:ext>
             </a:extLst>
           </p:cNvPr>
@@ -12640,7 +12640,7 @@
           <p:cNvPr id="5" name="">
             <a:extLst xmlns:a="http://schemas.openxmlformats.org/drawingml/2006/main">
               <a:ext uri="{FF2B5EF4-FFF2-40B4-BE49-F238E27FC236}">
-                <a16:creationId xmlns:a16="http://schemas.microsoft.com/office/drawing/2014/main" id="{5A85E3DE-5137-4434-8B9D-FF034DC03EC2}"/>
+                <a16:creationId xmlns:a16="http://schemas.microsoft.com/office/drawing/2014/main" id="{7176CF23-C3C5-4C1F-8A7C-406B48F81B40}"/>
               </a:ext>
             </a:extLst>
           </p:cNvPr>
@@ -12675,7 +12675,7 @@
           <p:nvPr/>
         </p:nvPicPr>
         <p:blipFill>
-          <a:blip xmlns:r="http://schemas.openxmlformats.org/officeDocument/2006/relationships" xmlns:a="http://schemas.openxmlformats.org/drawingml/2006/main" r:embed="Rd00921583acf443b"/>
+          <a:blip xmlns:r="http://schemas.openxmlformats.org/officeDocument/2006/relationships" xmlns:a="http://schemas.openxmlformats.org/drawingml/2006/main" r:embed="R99b7e17d3b014039"/>
           <a:stretch xmlns:a="http://schemas.openxmlformats.org/drawingml/2006/main"/>
         </p:blipFill>
         <p:spPr>
@@ -12693,7 +12693,7 @@
           <p:cNvPr id="7" name="">
             <a:extLst xmlns:a="http://schemas.openxmlformats.org/drawingml/2006/main">
               <a:ext uri="{FF2B5EF4-FFF2-40B4-BE49-F238E27FC236}">
-                <a16:creationId xmlns:a16="http://schemas.microsoft.com/office/drawing/2014/main" id="{98AD918D-56E6-40CF-8B67-C8C19820DC37}"/>
+                <a16:creationId xmlns:a16="http://schemas.microsoft.com/office/drawing/2014/main" id="{7A3146A4-4A6F-4BE1-B9DE-A5B045058F86}"/>
               </a:ext>
             </a:extLst>
           </p:cNvPr>
@@ -12745,7 +12745,7 @@
           <p:cNvPr id="8" name="">
             <a:extLst xmlns:a="http://schemas.openxmlformats.org/drawingml/2006/main">
               <a:ext uri="{FF2B5EF4-FFF2-40B4-BE49-F238E27FC236}">
-                <a16:creationId xmlns:a16="http://schemas.microsoft.com/office/drawing/2014/main" id="{7BF76E4C-B975-4B42-A8B6-5AC37F4DDBF5}"/>
+                <a16:creationId xmlns:a16="http://schemas.microsoft.com/office/drawing/2014/main" id="{89367ECA-2DCF-45E9-85E0-2001915C72FF}"/>
               </a:ext>
             </a:extLst>
           </p:cNvPr>
@@ -12797,7 +12797,7 @@
           <p:cNvPr id="9" name="">
             <a:extLst xmlns:a="http://schemas.openxmlformats.org/drawingml/2006/main">
               <a:ext uri="{FF2B5EF4-FFF2-40B4-BE49-F238E27FC236}">
-                <a16:creationId xmlns:a16="http://schemas.microsoft.com/office/drawing/2014/main" id="{A4F046E9-1E00-4451-9C5D-63ED29520153}"/>
+                <a16:creationId xmlns:a16="http://schemas.microsoft.com/office/drawing/2014/main" id="{17FDDAE0-DEFE-471C-B684-487068142321}"/>
               </a:ext>
             </a:extLst>
           </p:cNvPr>
@@ -12849,7 +12849,7 @@
           <p:cNvPr id="10" name="">
             <a:extLst xmlns:a="http://schemas.openxmlformats.org/drawingml/2006/main">
               <a:ext uri="{FF2B5EF4-FFF2-40B4-BE49-F238E27FC236}">
-                <a16:creationId xmlns:a16="http://schemas.microsoft.com/office/drawing/2014/main" id="{835FE591-92D7-47B9-BA88-75A6E717BE14}"/>
+                <a16:creationId xmlns:a16="http://schemas.microsoft.com/office/drawing/2014/main" id="{6CD13616-920D-4BAB-B0B3-4FD46AAE7E2A}"/>
               </a:ext>
             </a:extLst>
           </p:cNvPr>
@@ -12901,7 +12901,7 @@
           <p:cNvPr id="11" name="">
             <a:extLst xmlns:a="http://schemas.openxmlformats.org/drawingml/2006/main">
               <a:ext uri="{FF2B5EF4-FFF2-40B4-BE49-F238E27FC236}">
-                <a16:creationId xmlns:a16="http://schemas.microsoft.com/office/drawing/2014/main" id="{3B2A6606-2FA7-49BD-855C-F0F85FFA5F66}"/>
+                <a16:creationId xmlns:a16="http://schemas.microsoft.com/office/drawing/2014/main" id="{0AFF2120-12DD-4093-A854-C349D3E32455}"/>
               </a:ext>
             </a:extLst>
           </p:cNvPr>
@@ -12932,7 +12932,7 @@
           <p:cNvPr id="12" name="">
             <a:extLst xmlns:a="http://schemas.openxmlformats.org/drawingml/2006/main">
               <a:ext uri="{FF2B5EF4-FFF2-40B4-BE49-F238E27FC236}">
-                <a16:creationId xmlns:a16="http://schemas.microsoft.com/office/drawing/2014/main" id="{0F9E5F7F-DD55-4863-82A1-0ED2338A9721}"/>
+                <a16:creationId xmlns:a16="http://schemas.microsoft.com/office/drawing/2014/main" id="{C77C152D-D303-43DF-BE29-85D3E234BF36}"/>
               </a:ext>
             </a:extLst>
           </p:cNvPr>
@@ -12963,7 +12963,7 @@
           <p:cNvPr id="13" name="">
             <a:extLst xmlns:a="http://schemas.openxmlformats.org/drawingml/2006/main">
               <a:ext uri="{FF2B5EF4-FFF2-40B4-BE49-F238E27FC236}">
-                <a16:creationId xmlns:a16="http://schemas.microsoft.com/office/drawing/2014/main" id="{BF7DBA0D-2FBA-46D5-8B0F-091B15FDBACE}"/>
+                <a16:creationId xmlns:a16="http://schemas.microsoft.com/office/drawing/2014/main" id="{52500CA3-FD16-4C71-B1A5-00FE09E72B3A}"/>
               </a:ext>
             </a:extLst>
           </p:cNvPr>
@@ -13015,7 +13015,7 @@
           <p:cNvPr id="14" name="">
             <a:extLst xmlns:a="http://schemas.openxmlformats.org/drawingml/2006/main">
               <a:ext uri="{FF2B5EF4-FFF2-40B4-BE49-F238E27FC236}">
-                <a16:creationId xmlns:a16="http://schemas.microsoft.com/office/drawing/2014/main" id="{B426F604-3378-4BC9-B43C-D55EFC4A56B7}"/>
+                <a16:creationId xmlns:a16="http://schemas.microsoft.com/office/drawing/2014/main" id="{0EE5D5C0-F256-4C68-8AA8-F5910AF1BA6D}"/>
               </a:ext>
             </a:extLst>
           </p:cNvPr>
@@ -13067,7 +13067,7 @@
           <p:cNvPr id="15" name="">
             <a:extLst xmlns:a="http://schemas.openxmlformats.org/drawingml/2006/main">
               <a:ext uri="{FF2B5EF4-FFF2-40B4-BE49-F238E27FC236}">
-                <a16:creationId xmlns:a16="http://schemas.microsoft.com/office/drawing/2014/main" id="{17444510-4354-43A6-B30C-96402B670B28}"/>
+                <a16:creationId xmlns:a16="http://schemas.microsoft.com/office/drawing/2014/main" id="{E6E3C39A-B932-4C9C-86CD-CA6383FB8471}"/>
               </a:ext>
             </a:extLst>
           </p:cNvPr>
@@ -13119,7 +13119,7 @@
           <p:cNvPr id="16" name="">
             <a:extLst xmlns:a="http://schemas.openxmlformats.org/drawingml/2006/main">
               <a:ext uri="{FF2B5EF4-FFF2-40B4-BE49-F238E27FC236}">
-                <a16:creationId xmlns:a16="http://schemas.microsoft.com/office/drawing/2014/main" id="{8F00221B-2A3F-41EB-8679-72E0D4AD4A52}"/>
+                <a16:creationId xmlns:a16="http://schemas.microsoft.com/office/drawing/2014/main" id="{F06D5A0D-16B2-47E4-BDAF-6B610F2BDBE2}"/>
               </a:ext>
             </a:extLst>
           </p:cNvPr>
@@ -13171,7 +13171,7 @@
           <p:cNvPr id="17" name="">
             <a:extLst xmlns:a="http://schemas.openxmlformats.org/drawingml/2006/main">
               <a:ext uri="{FF2B5EF4-FFF2-40B4-BE49-F238E27FC236}">
-                <a16:creationId xmlns:a16="http://schemas.microsoft.com/office/drawing/2014/main" id="{509397DA-6272-48E9-9851-BF34CD0D5754}"/>
+                <a16:creationId xmlns:a16="http://schemas.microsoft.com/office/drawing/2014/main" id="{13B09D6B-B200-4F7D-BE52-EDC5759ABEA7}"/>
               </a:ext>
             </a:extLst>
           </p:cNvPr>
@@ -13223,7 +13223,7 @@
           <p:cNvPr id="18" name="">
             <a:extLst xmlns:a="http://schemas.openxmlformats.org/drawingml/2006/main">
               <a:ext uri="{FF2B5EF4-FFF2-40B4-BE49-F238E27FC236}">
-                <a16:creationId xmlns:a16="http://schemas.microsoft.com/office/drawing/2014/main" id="{465C4185-62B8-4536-9F8D-00BBBC17AD80}"/>
+                <a16:creationId xmlns:a16="http://schemas.microsoft.com/office/drawing/2014/main" id="{FA15F2BD-5BC4-4A01-8F1C-CB2B03F54E88}"/>
               </a:ext>
             </a:extLst>
           </p:cNvPr>
@@ -13254,7 +13254,7 @@
           <p:cNvPr id="19" name="">
             <a:extLst xmlns:a="http://schemas.openxmlformats.org/drawingml/2006/main">
               <a:ext uri="{FF2B5EF4-FFF2-40B4-BE49-F238E27FC236}">
-                <a16:creationId xmlns:a16="http://schemas.microsoft.com/office/drawing/2014/main" id="{C8020122-431E-4A9B-84D2-FC1CA120C2C1}"/>
+                <a16:creationId xmlns:a16="http://schemas.microsoft.com/office/drawing/2014/main" id="{41EA3F1D-C342-41FA-894F-632B2A55A689}"/>
               </a:ext>
             </a:extLst>
           </p:cNvPr>
@@ -13306,7 +13306,7 @@
           <p:cNvPr id="20" name="">
             <a:extLst xmlns:a="http://schemas.openxmlformats.org/drawingml/2006/main">
               <a:ext uri="{FF2B5EF4-FFF2-40B4-BE49-F238E27FC236}">
-                <a16:creationId xmlns:a16="http://schemas.microsoft.com/office/drawing/2014/main" id="{19416491-B92E-41F3-9B4B-45624B0DEB3C}"/>
+                <a16:creationId xmlns:a16="http://schemas.microsoft.com/office/drawing/2014/main" id="{16CEB314-8941-41EC-800A-7509C3652FB2}"/>
               </a:ext>
             </a:extLst>
           </p:cNvPr>
@@ -13358,7 +13358,7 @@
           <p:cNvPr id="21" name="">
             <a:extLst xmlns:a="http://schemas.openxmlformats.org/drawingml/2006/main">
               <a:ext uri="{FF2B5EF4-FFF2-40B4-BE49-F238E27FC236}">
-                <a16:creationId xmlns:a16="http://schemas.microsoft.com/office/drawing/2014/main" id="{9486F51F-A299-424E-8B57-4C664FFBC8EF}"/>
+                <a16:creationId xmlns:a16="http://schemas.microsoft.com/office/drawing/2014/main" id="{3EF84523-0DBB-4FC9-B383-BFC9A8462CD4}"/>
               </a:ext>
             </a:extLst>
           </p:cNvPr>
@@ -13410,7 +13410,7 @@
           <p:cNvPr id="22" name="">
             <a:extLst xmlns:a="http://schemas.openxmlformats.org/drawingml/2006/main">
               <a:ext uri="{FF2B5EF4-FFF2-40B4-BE49-F238E27FC236}">
-                <a16:creationId xmlns:a16="http://schemas.microsoft.com/office/drawing/2014/main" id="{9E981F10-EDC7-4637-A1C4-4609B1D4BFC5}"/>
+                <a16:creationId xmlns:a16="http://schemas.microsoft.com/office/drawing/2014/main" id="{ACB90311-40B0-4C75-AC6F-98AC366832AA}"/>
               </a:ext>
             </a:extLst>
           </p:cNvPr>
@@ -13462,7 +13462,7 @@
           <p:cNvPr id="23" name="">
             <a:extLst xmlns:a="http://schemas.openxmlformats.org/drawingml/2006/main">
               <a:ext uri="{FF2B5EF4-FFF2-40B4-BE49-F238E27FC236}">
-                <a16:creationId xmlns:a16="http://schemas.microsoft.com/office/drawing/2014/main" id="{AF490E20-807A-4C6E-93C9-9A34F6B178E6}"/>
+                <a16:creationId xmlns:a16="http://schemas.microsoft.com/office/drawing/2014/main" id="{93EF291B-43BC-48B5-8995-03F7B15A44EA}"/>
               </a:ext>
             </a:extLst>
           </p:cNvPr>
@@ -13514,7 +13514,7 @@
           <p:cNvPr id="24" name="">
             <a:extLst xmlns:a="http://schemas.openxmlformats.org/drawingml/2006/main">
               <a:ext uri="{FF2B5EF4-FFF2-40B4-BE49-F238E27FC236}">
-                <a16:creationId xmlns:a16="http://schemas.microsoft.com/office/drawing/2014/main" id="{BB8E02B5-CE30-491A-8B16-ACC211D90816}"/>
+                <a16:creationId xmlns:a16="http://schemas.microsoft.com/office/drawing/2014/main" id="{ECAD988F-CF0A-4891-8479-72622F0753D7}"/>
               </a:ext>
             </a:extLst>
           </p:cNvPr>
@@ -13545,7 +13545,7 @@
           <p:cNvPr id="25" name="">
             <a:extLst xmlns:a="http://schemas.openxmlformats.org/drawingml/2006/main">
               <a:ext uri="{FF2B5EF4-FFF2-40B4-BE49-F238E27FC236}">
-                <a16:creationId xmlns:a16="http://schemas.microsoft.com/office/drawing/2014/main" id="{1DC33138-B4C3-4D38-9780-94D6A2B31422}"/>
+                <a16:creationId xmlns:a16="http://schemas.microsoft.com/office/drawing/2014/main" id="{EA4B5665-5774-4045-98C8-DE0CCAF36823}"/>
               </a:ext>
             </a:extLst>
           </p:cNvPr>
@@ -13576,7 +13576,7 @@
           <p:cNvPr id="26" name="">
             <a:extLst xmlns:a="http://schemas.openxmlformats.org/drawingml/2006/main">
               <a:ext uri="{FF2B5EF4-FFF2-40B4-BE49-F238E27FC236}">
-                <a16:creationId xmlns:a16="http://schemas.microsoft.com/office/drawing/2014/main" id="{9FB275C2-C66A-4C68-B019-09B4EA8F93B7}"/>
+                <a16:creationId xmlns:a16="http://schemas.microsoft.com/office/drawing/2014/main" id="{8027B8A0-1472-4634-AFCA-78B5B317C07F}"/>
               </a:ext>
             </a:extLst>
           </p:cNvPr>
@@ -13628,7 +13628,7 @@
           <p:cNvPr id="27" name="">
             <a:extLst xmlns:a="http://schemas.openxmlformats.org/drawingml/2006/main">
               <a:ext uri="{FF2B5EF4-FFF2-40B4-BE49-F238E27FC236}">
-                <a16:creationId xmlns:a16="http://schemas.microsoft.com/office/drawing/2014/main" id="{254E497D-D6A0-4FE4-AFAD-F6FDB39260E1}"/>
+                <a16:creationId xmlns:a16="http://schemas.microsoft.com/office/drawing/2014/main" id="{D159745E-3C67-41C3-AB20-684E501B43C1}"/>
               </a:ext>
             </a:extLst>
           </p:cNvPr>
@@ -13680,7 +13680,7 @@
           <p:cNvPr id="28" name="">
             <a:extLst xmlns:a="http://schemas.openxmlformats.org/drawingml/2006/main">
               <a:ext uri="{FF2B5EF4-FFF2-40B4-BE49-F238E27FC236}">
-                <a16:creationId xmlns:a16="http://schemas.microsoft.com/office/drawing/2014/main" id="{2E5AC968-A68C-4D39-8767-D4CFB797BE2A}"/>
+                <a16:creationId xmlns:a16="http://schemas.microsoft.com/office/drawing/2014/main" id="{7EB89C55-ABAE-4D7E-B49E-C35A7A9FEAE7}"/>
               </a:ext>
             </a:extLst>
           </p:cNvPr>
@@ -13732,7 +13732,7 @@
           <p:cNvPr id="29" name="">
             <a:extLst xmlns:a="http://schemas.openxmlformats.org/drawingml/2006/main">
               <a:ext uri="{FF2B5EF4-FFF2-40B4-BE49-F238E27FC236}">
-                <a16:creationId xmlns:a16="http://schemas.microsoft.com/office/drawing/2014/main" id="{68710058-80B6-4FD1-B3CA-C6B9B303EB49}"/>
+                <a16:creationId xmlns:a16="http://schemas.microsoft.com/office/drawing/2014/main" id="{DC5C1022-1FE7-4AED-B581-BB96F64DA1A7}"/>
               </a:ext>
             </a:extLst>
           </p:cNvPr>
@@ -13784,7 +13784,7 @@
           <p:cNvPr id="30" name="">
             <a:extLst xmlns:a="http://schemas.openxmlformats.org/drawingml/2006/main">
               <a:ext uri="{FF2B5EF4-FFF2-40B4-BE49-F238E27FC236}">
-                <a16:creationId xmlns:a16="http://schemas.microsoft.com/office/drawing/2014/main" id="{616C3E76-3596-4AC3-BF5C-CCE06B1E568B}"/>
+                <a16:creationId xmlns:a16="http://schemas.microsoft.com/office/drawing/2014/main" id="{6144444A-82F3-4C5B-AA7E-C2365068166E}"/>
               </a:ext>
             </a:extLst>
           </p:cNvPr>
@@ -13836,7 +13836,7 @@
           <p:cNvPr id="31" name="">
             <a:extLst xmlns:a="http://schemas.openxmlformats.org/drawingml/2006/main">
               <a:ext uri="{FF2B5EF4-FFF2-40B4-BE49-F238E27FC236}">
-                <a16:creationId xmlns:a16="http://schemas.microsoft.com/office/drawing/2014/main" id="{6E9B94F9-8EC5-48E5-825D-1B68FAD29437}"/>
+                <a16:creationId xmlns:a16="http://schemas.microsoft.com/office/drawing/2014/main" id="{B9DEFE53-7E5A-4CE3-9762-01E6423EB82F}"/>
               </a:ext>
             </a:extLst>
           </p:cNvPr>
@@ -13867,7 +13867,7 @@
           <p:cNvPr id="32" name="">
             <a:extLst xmlns:a="http://schemas.openxmlformats.org/drawingml/2006/main">
               <a:ext uri="{FF2B5EF4-FFF2-40B4-BE49-F238E27FC236}">
-                <a16:creationId xmlns:a16="http://schemas.microsoft.com/office/drawing/2014/main" id="{887920A6-8F46-48D3-A9BD-12E9B09FF706}"/>
+                <a16:creationId xmlns:a16="http://schemas.microsoft.com/office/drawing/2014/main" id="{0C09B8B5-2BBB-4E10-80D6-12C92B4C204F}"/>
               </a:ext>
             </a:extLst>
           </p:cNvPr>
@@ -13919,7 +13919,7 @@
           <p:cNvPr id="33" name="">
             <a:extLst xmlns:a="http://schemas.openxmlformats.org/drawingml/2006/main">
               <a:ext uri="{FF2B5EF4-FFF2-40B4-BE49-F238E27FC236}">
-                <a16:creationId xmlns:a16="http://schemas.microsoft.com/office/drawing/2014/main" id="{3A92027A-622D-4182-A3B6-98E8AD1C7408}"/>
+                <a16:creationId xmlns:a16="http://schemas.microsoft.com/office/drawing/2014/main" id="{414001DB-93CA-4895-8823-412EF98FF479}"/>
               </a:ext>
             </a:extLst>
           </p:cNvPr>
@@ -13971,7 +13971,7 @@
           <p:cNvPr id="34" name="">
             <a:extLst xmlns:a="http://schemas.openxmlformats.org/drawingml/2006/main">
               <a:ext uri="{FF2B5EF4-FFF2-40B4-BE49-F238E27FC236}">
-                <a16:creationId xmlns:a16="http://schemas.microsoft.com/office/drawing/2014/main" id="{1494EA95-9BB8-472A-A997-37DD4E6D052D}"/>
+                <a16:creationId xmlns:a16="http://schemas.microsoft.com/office/drawing/2014/main" id="{4CD313E2-7926-44A4-AA41-AA480C51E204}"/>
               </a:ext>
             </a:extLst>
           </p:cNvPr>
@@ -14023,7 +14023,7 @@
           <p:cNvPr id="35" name="">
             <a:extLst xmlns:a="http://schemas.openxmlformats.org/drawingml/2006/main">
               <a:ext uri="{FF2B5EF4-FFF2-40B4-BE49-F238E27FC236}">
-                <a16:creationId xmlns:a16="http://schemas.microsoft.com/office/drawing/2014/main" id="{79B0791B-2A31-4458-87C4-F8EFA3D80958}"/>
+                <a16:creationId xmlns:a16="http://schemas.microsoft.com/office/drawing/2014/main" id="{DEC5FC18-72FF-47F2-82B1-787CBCB01FAD}"/>
               </a:ext>
             </a:extLst>
           </p:cNvPr>
@@ -14075,7 +14075,7 @@
           <p:cNvPr id="36" name="">
             <a:extLst xmlns:a="http://schemas.openxmlformats.org/drawingml/2006/main">
               <a:ext uri="{FF2B5EF4-FFF2-40B4-BE49-F238E27FC236}">
-                <a16:creationId xmlns:a16="http://schemas.microsoft.com/office/drawing/2014/main" id="{ABE7070F-BC81-413F-B87A-B737982CA023}"/>
+                <a16:creationId xmlns:a16="http://schemas.microsoft.com/office/drawing/2014/main" id="{6DFBDEFB-BB3F-4A18-8FE4-63FCC10A8C5C}"/>
               </a:ext>
             </a:extLst>
           </p:cNvPr>
@@ -14127,7 +14127,7 @@
           <p:cNvPr id="37" name="">
             <a:extLst xmlns:a="http://schemas.openxmlformats.org/drawingml/2006/main">
               <a:ext uri="{FF2B5EF4-FFF2-40B4-BE49-F238E27FC236}">
-                <a16:creationId xmlns:a16="http://schemas.microsoft.com/office/drawing/2014/main" id="{EAD11301-9551-43E1-88A3-850AB7F15A14}"/>
+                <a16:creationId xmlns:a16="http://schemas.microsoft.com/office/drawing/2014/main" id="{E7871B49-ABC5-4C71-89FC-6371894E4624}"/>
               </a:ext>
             </a:extLst>
           </p:cNvPr>
@@ -14158,7 +14158,7 @@
           <p:cNvPr id="38" name="">
             <a:extLst xmlns:a="http://schemas.openxmlformats.org/drawingml/2006/main">
               <a:ext uri="{FF2B5EF4-FFF2-40B4-BE49-F238E27FC236}">
-                <a16:creationId xmlns:a16="http://schemas.microsoft.com/office/drawing/2014/main" id="{4FE98297-74D7-4813-A0ED-5ED9CFBD1B12}"/>
+                <a16:creationId xmlns:a16="http://schemas.microsoft.com/office/drawing/2014/main" id="{FE04E0F1-CBE0-4792-B2EC-CD7CBCA1F749}"/>
               </a:ext>
             </a:extLst>
           </p:cNvPr>
@@ -14189,7 +14189,7 @@
           <p:cNvPr id="39" name="">
             <a:extLst xmlns:a="http://schemas.openxmlformats.org/drawingml/2006/main">
               <a:ext uri="{FF2B5EF4-FFF2-40B4-BE49-F238E27FC236}">
-                <a16:creationId xmlns:a16="http://schemas.microsoft.com/office/drawing/2014/main" id="{4E448F87-CE17-4DFA-8825-BE61F3288038}"/>
+                <a16:creationId xmlns:a16="http://schemas.microsoft.com/office/drawing/2014/main" id="{5C6B5C05-4C7F-4DDC-8847-70C69A1EE25E}"/>
               </a:ext>
             </a:extLst>
           </p:cNvPr>
@@ -14241,7 +14241,7 @@
           <p:cNvPr id="40" name="">
             <a:extLst xmlns:a="http://schemas.openxmlformats.org/drawingml/2006/main">
               <a:ext uri="{FF2B5EF4-FFF2-40B4-BE49-F238E27FC236}">
-                <a16:creationId xmlns:a16="http://schemas.microsoft.com/office/drawing/2014/main" id="{334568F6-365C-4361-8615-030D817E99FD}"/>
+                <a16:creationId xmlns:a16="http://schemas.microsoft.com/office/drawing/2014/main" id="{D029F352-D8E1-4A58-82D1-0ED417A4A0C9}"/>
               </a:ext>
             </a:extLst>
           </p:cNvPr>
@@ -14293,7 +14293,7 @@
           <p:cNvPr id="41" name="">
             <a:extLst xmlns:a="http://schemas.openxmlformats.org/drawingml/2006/main">
               <a:ext uri="{FF2B5EF4-FFF2-40B4-BE49-F238E27FC236}">
-                <a16:creationId xmlns:a16="http://schemas.microsoft.com/office/drawing/2014/main" id="{91C490BD-5ADE-4EC9-8AB7-DBE29046D42F}"/>
+                <a16:creationId xmlns:a16="http://schemas.microsoft.com/office/drawing/2014/main" id="{36F8F94E-9CA4-4B21-A854-283C2F2273AA}"/>
               </a:ext>
             </a:extLst>
           </p:cNvPr>
@@ -14345,7 +14345,7 @@
           <p:cNvPr id="42" name="">
             <a:extLst xmlns:a="http://schemas.openxmlformats.org/drawingml/2006/main">
               <a:ext uri="{FF2B5EF4-FFF2-40B4-BE49-F238E27FC236}">
-                <a16:creationId xmlns:a16="http://schemas.microsoft.com/office/drawing/2014/main" id="{C4EC5EC6-6547-4263-A5D3-9693F3E012C9}"/>
+                <a16:creationId xmlns:a16="http://schemas.microsoft.com/office/drawing/2014/main" id="{FFD972F5-A589-4CF4-BCED-64D64221261D}"/>
               </a:ext>
             </a:extLst>
           </p:cNvPr>
@@ -14397,7 +14397,7 @@
           <p:cNvPr id="43" name="">
             <a:extLst xmlns:a="http://schemas.openxmlformats.org/drawingml/2006/main">
               <a:ext uri="{FF2B5EF4-FFF2-40B4-BE49-F238E27FC236}">
-                <a16:creationId xmlns:a16="http://schemas.microsoft.com/office/drawing/2014/main" id="{490DFB44-C183-455D-81A0-4CAEF211B93A}"/>
+                <a16:creationId xmlns:a16="http://schemas.microsoft.com/office/drawing/2014/main" id="{519B7CF5-14A9-4FCB-80BB-ECADB271724A}"/>
               </a:ext>
             </a:extLst>
           </p:cNvPr>
@@ -14449,7 +14449,7 @@
           <p:cNvPr id="44" name="">
             <a:extLst xmlns:a="http://schemas.openxmlformats.org/drawingml/2006/main">
               <a:ext uri="{FF2B5EF4-FFF2-40B4-BE49-F238E27FC236}">
-                <a16:creationId xmlns:a16="http://schemas.microsoft.com/office/drawing/2014/main" id="{EFE324CD-4FAB-46F6-BA5F-AF22E79F8EEF}"/>
+                <a16:creationId xmlns:a16="http://schemas.microsoft.com/office/drawing/2014/main" id="{0D436F5C-B31A-40EF-862F-9FB5E520AA56}"/>
               </a:ext>
             </a:extLst>
           </p:cNvPr>
@@ -14480,7 +14480,7 @@
           <p:cNvPr id="45" name="">
             <a:extLst xmlns:a="http://schemas.openxmlformats.org/drawingml/2006/main">
               <a:ext uri="{FF2B5EF4-FFF2-40B4-BE49-F238E27FC236}">
-                <a16:creationId xmlns:a16="http://schemas.microsoft.com/office/drawing/2014/main" id="{27D35F62-C63E-4057-8ABC-1187A99C338C}"/>
+                <a16:creationId xmlns:a16="http://schemas.microsoft.com/office/drawing/2014/main" id="{D59F60BD-ED3D-40C9-B25D-664F7EC0E961}"/>
               </a:ext>
             </a:extLst>
           </p:cNvPr>
@@ -14532,7 +14532,7 @@
           <p:cNvPr id="46" name="">
             <a:extLst xmlns:a="http://schemas.openxmlformats.org/drawingml/2006/main">
               <a:ext uri="{FF2B5EF4-FFF2-40B4-BE49-F238E27FC236}">
-                <a16:creationId xmlns:a16="http://schemas.microsoft.com/office/drawing/2014/main" id="{0EE9EB3F-BE68-49D5-9FD4-661EE34FD697}"/>
+                <a16:creationId xmlns:a16="http://schemas.microsoft.com/office/drawing/2014/main" id="{77E8BFF3-2371-4D69-8EC2-08F20B6F1D75}"/>
               </a:ext>
             </a:extLst>
           </p:cNvPr>
@@ -14584,7 +14584,7 @@
           <p:cNvPr id="47" name="">
             <a:extLst xmlns:a="http://schemas.openxmlformats.org/drawingml/2006/main">
               <a:ext uri="{FF2B5EF4-FFF2-40B4-BE49-F238E27FC236}">
-                <a16:creationId xmlns:a16="http://schemas.microsoft.com/office/drawing/2014/main" id="{3C3923ED-F626-475D-9DBB-F9ED81AB73FC}"/>
+                <a16:creationId xmlns:a16="http://schemas.microsoft.com/office/drawing/2014/main" id="{C6171EB1-5BCB-4FD5-91AC-A657116F3637}"/>
               </a:ext>
             </a:extLst>
           </p:cNvPr>
@@ -14636,7 +14636,7 @@
           <p:cNvPr id="48" name="">
             <a:extLst xmlns:a="http://schemas.openxmlformats.org/drawingml/2006/main">
               <a:ext uri="{FF2B5EF4-FFF2-40B4-BE49-F238E27FC236}">
-                <a16:creationId xmlns:a16="http://schemas.microsoft.com/office/drawing/2014/main" id="{F42409D0-FE5D-409F-AB7B-E59924ACC22B}"/>
+                <a16:creationId xmlns:a16="http://schemas.microsoft.com/office/drawing/2014/main" id="{0B21A9D1-B52D-4E34-9FB3-E7456004347E}"/>
               </a:ext>
             </a:extLst>
           </p:cNvPr>
@@ -14688,7 +14688,7 @@
           <p:cNvPr id="49" name="">
             <a:extLst xmlns:a="http://schemas.openxmlformats.org/drawingml/2006/main">
               <a:ext uri="{FF2B5EF4-FFF2-40B4-BE49-F238E27FC236}">
-                <a16:creationId xmlns:a16="http://schemas.microsoft.com/office/drawing/2014/main" id="{F647FF11-FB69-4DDA-BBD4-2B89547F4210}"/>
+                <a16:creationId xmlns:a16="http://schemas.microsoft.com/office/drawing/2014/main" id="{36A8D590-AB4D-4646-AFCE-C6045C89BC81}"/>
               </a:ext>
             </a:extLst>
           </p:cNvPr>
@@ -14740,7 +14740,7 @@
           <p:cNvPr id="50" name="">
             <a:extLst xmlns:a="http://schemas.openxmlformats.org/drawingml/2006/main">
               <a:ext uri="{FF2B5EF4-FFF2-40B4-BE49-F238E27FC236}">
-                <a16:creationId xmlns:a16="http://schemas.microsoft.com/office/drawing/2014/main" id="{91B94C6A-193C-47F4-96E3-B99160ED2FCA}"/>
+                <a16:creationId xmlns:a16="http://schemas.microsoft.com/office/drawing/2014/main" id="{71089B8F-C6FF-48EC-ACBA-DC23E3BA7F9B}"/>
               </a:ext>
             </a:extLst>
           </p:cNvPr>
@@ -14771,7 +14771,7 @@
           <p:cNvPr id="51" name="">
             <a:extLst xmlns:a="http://schemas.openxmlformats.org/drawingml/2006/main">
               <a:ext uri="{FF2B5EF4-FFF2-40B4-BE49-F238E27FC236}">
-                <a16:creationId xmlns:a16="http://schemas.microsoft.com/office/drawing/2014/main" id="{2FD30597-00A2-49C3-B259-893CBBD42EC3}"/>
+                <a16:creationId xmlns:a16="http://schemas.microsoft.com/office/drawing/2014/main" id="{86D26E99-B427-4EA8-85AB-89A0880F852B}"/>
               </a:ext>
             </a:extLst>
           </p:cNvPr>
@@ -14802,7 +14802,7 @@
           <p:cNvPr id="52" name="">
             <a:extLst xmlns:a="http://schemas.openxmlformats.org/drawingml/2006/main">
               <a:ext uri="{FF2B5EF4-FFF2-40B4-BE49-F238E27FC236}">
-                <a16:creationId xmlns:a16="http://schemas.microsoft.com/office/drawing/2014/main" id="{53C52BA5-AA43-4786-A843-EB0E44B85022}"/>
+                <a16:creationId xmlns:a16="http://schemas.microsoft.com/office/drawing/2014/main" id="{953286FE-CDE3-4697-B7D1-1F0A732706B5}"/>
               </a:ext>
             </a:extLst>
           </p:cNvPr>
@@ -14854,7 +14854,7 @@
           <p:cNvPr id="53" name="">
             <a:extLst xmlns:a="http://schemas.openxmlformats.org/drawingml/2006/main">
               <a:ext uri="{FF2B5EF4-FFF2-40B4-BE49-F238E27FC236}">
-                <a16:creationId xmlns:a16="http://schemas.microsoft.com/office/drawing/2014/main" id="{EFEFE4CB-C6ED-4629-B747-75E27976434E}"/>
+                <a16:creationId xmlns:a16="http://schemas.microsoft.com/office/drawing/2014/main" id="{2EEE6B75-C3C6-4FDB-82F1-C28DE4221154}"/>
               </a:ext>
             </a:extLst>
           </p:cNvPr>
@@ -14906,7 +14906,7 @@
           <p:cNvPr id="54" name="">
             <a:extLst xmlns:a="http://schemas.openxmlformats.org/drawingml/2006/main">
               <a:ext uri="{FF2B5EF4-FFF2-40B4-BE49-F238E27FC236}">
-                <a16:creationId xmlns:a16="http://schemas.microsoft.com/office/drawing/2014/main" id="{BC0579CF-D475-4132-8282-098E436035D3}"/>
+                <a16:creationId xmlns:a16="http://schemas.microsoft.com/office/drawing/2014/main" id="{15480834-9A22-4390-BBEC-5AF2581150A8}"/>
               </a:ext>
             </a:extLst>
           </p:cNvPr>
@@ -14958,7 +14958,7 @@
           <p:cNvPr id="55" name="">
             <a:extLst xmlns:a="http://schemas.openxmlformats.org/drawingml/2006/main">
               <a:ext uri="{FF2B5EF4-FFF2-40B4-BE49-F238E27FC236}">
-                <a16:creationId xmlns:a16="http://schemas.microsoft.com/office/drawing/2014/main" id="{08336E6E-44FA-4441-A8FB-4FDD855B3C5D}"/>
+                <a16:creationId xmlns:a16="http://schemas.microsoft.com/office/drawing/2014/main" id="{7EAC123F-E0AD-471A-980A-4B736D9C5F4E}"/>
               </a:ext>
             </a:extLst>
           </p:cNvPr>
@@ -15010,7 +15010,7 @@
           <p:cNvPr id="56" name="">
             <a:extLst xmlns:a="http://schemas.openxmlformats.org/drawingml/2006/main">
               <a:ext uri="{FF2B5EF4-FFF2-40B4-BE49-F238E27FC236}">
-                <a16:creationId xmlns:a16="http://schemas.microsoft.com/office/drawing/2014/main" id="{67369220-FA08-4541-A057-17EC80ADE3F4}"/>
+                <a16:creationId xmlns:a16="http://schemas.microsoft.com/office/drawing/2014/main" id="{C54B18D0-40D4-4DA6-BB31-73B42069A0A8}"/>
               </a:ext>
             </a:extLst>
           </p:cNvPr>
@@ -15062,7 +15062,7 @@
           <p:cNvPr id="57" name="">
             <a:extLst xmlns:a="http://schemas.openxmlformats.org/drawingml/2006/main">
               <a:ext uri="{FF2B5EF4-FFF2-40B4-BE49-F238E27FC236}">
-                <a16:creationId xmlns:a16="http://schemas.microsoft.com/office/drawing/2014/main" id="{4836F749-1AAB-43CC-9D2E-00AF886268F6}"/>
+                <a16:creationId xmlns:a16="http://schemas.microsoft.com/office/drawing/2014/main" id="{07CAD69E-31DA-434B-BDEC-65A2EE2F865D}"/>
               </a:ext>
             </a:extLst>
           </p:cNvPr>
@@ -15093,7 +15093,7 @@
           <p:cNvPr id="58" name="">
             <a:extLst xmlns:a="http://schemas.openxmlformats.org/drawingml/2006/main">
               <a:ext uri="{FF2B5EF4-FFF2-40B4-BE49-F238E27FC236}">
-                <a16:creationId xmlns:a16="http://schemas.microsoft.com/office/drawing/2014/main" id="{027DF443-85CA-4935-95C8-2814DE96EA92}"/>
+                <a16:creationId xmlns:a16="http://schemas.microsoft.com/office/drawing/2014/main" id="{3E4C083B-F7B5-4849-913C-743325568D2E}"/>
               </a:ext>
             </a:extLst>
           </p:cNvPr>
@@ -15145,7 +15145,7 @@
           <p:cNvPr id="59" name="">
             <a:extLst xmlns:a="http://schemas.openxmlformats.org/drawingml/2006/main">
               <a:ext uri="{FF2B5EF4-FFF2-40B4-BE49-F238E27FC236}">
-                <a16:creationId xmlns:a16="http://schemas.microsoft.com/office/drawing/2014/main" id="{356FFB8A-1D0A-4CF1-BA46-85514485E390}"/>
+                <a16:creationId xmlns:a16="http://schemas.microsoft.com/office/drawing/2014/main" id="{C9BEF956-4BEE-4850-9DDB-2EA8417D2668}"/>
               </a:ext>
             </a:extLst>
           </p:cNvPr>
@@ -15197,7 +15197,7 @@
           <p:cNvPr id="60" name="">
             <a:extLst xmlns:a="http://schemas.openxmlformats.org/drawingml/2006/main">
               <a:ext uri="{FF2B5EF4-FFF2-40B4-BE49-F238E27FC236}">
-                <a16:creationId xmlns:a16="http://schemas.microsoft.com/office/drawing/2014/main" id="{E766A88B-70D7-4F94-AA26-083A698B4C95}"/>
+                <a16:creationId xmlns:a16="http://schemas.microsoft.com/office/drawing/2014/main" id="{798CCA45-2E4F-4F38-940D-E03FA7F19EDF}"/>
               </a:ext>
             </a:extLst>
           </p:cNvPr>
@@ -15249,7 +15249,7 @@
           <p:cNvPr id="61" name="">
             <a:extLst xmlns:a="http://schemas.openxmlformats.org/drawingml/2006/main">
               <a:ext uri="{FF2B5EF4-FFF2-40B4-BE49-F238E27FC236}">
-                <a16:creationId xmlns:a16="http://schemas.microsoft.com/office/drawing/2014/main" id="{982120D3-45F8-4EA1-B5C2-F4E2822098FE}"/>
+                <a16:creationId xmlns:a16="http://schemas.microsoft.com/office/drawing/2014/main" id="{972DA6BB-8A95-4494-8CBC-B0EB427C1E82}"/>
               </a:ext>
             </a:extLst>
           </p:cNvPr>
@@ -15301,7 +15301,7 @@
           <p:cNvPr id="62" name="">
             <a:extLst xmlns:a="http://schemas.openxmlformats.org/drawingml/2006/main">
               <a:ext uri="{FF2B5EF4-FFF2-40B4-BE49-F238E27FC236}">
-                <a16:creationId xmlns:a16="http://schemas.microsoft.com/office/drawing/2014/main" id="{730F59D8-1D21-4D37-802F-44101AD50159}"/>
+                <a16:creationId xmlns:a16="http://schemas.microsoft.com/office/drawing/2014/main" id="{8D17FED2-868F-40A9-873D-AD938C7556BE}"/>
               </a:ext>
             </a:extLst>
           </p:cNvPr>
@@ -15353,7 +15353,7 @@
           <p:cNvPr id="63" name="">
             <a:extLst xmlns:a="http://schemas.openxmlformats.org/drawingml/2006/main">
               <a:ext uri="{FF2B5EF4-FFF2-40B4-BE49-F238E27FC236}">
-                <a16:creationId xmlns:a16="http://schemas.microsoft.com/office/drawing/2014/main" id="{AF88B583-DB41-4507-8846-275714BAE9CB}"/>
+                <a16:creationId xmlns:a16="http://schemas.microsoft.com/office/drawing/2014/main" id="{403C299D-DE16-4170-919A-7BB0AA0DA063}"/>
               </a:ext>
             </a:extLst>
           </p:cNvPr>
@@ -15384,7 +15384,7 @@
           <p:cNvPr id="64" name="">
             <a:extLst xmlns:a="http://schemas.openxmlformats.org/drawingml/2006/main">
               <a:ext uri="{FF2B5EF4-FFF2-40B4-BE49-F238E27FC236}">
-                <a16:creationId xmlns:a16="http://schemas.microsoft.com/office/drawing/2014/main" id="{FDA10938-D83D-4D0D-9338-08FF80E381FD}"/>
+                <a16:creationId xmlns:a16="http://schemas.microsoft.com/office/drawing/2014/main" id="{F00A850B-D357-452B-A3E2-43EC74C0BDA1}"/>
               </a:ext>
             </a:extLst>
           </p:cNvPr>
@@ -15415,7 +15415,7 @@
           <p:cNvPr id="65" name="">
             <a:extLst xmlns:a="http://schemas.openxmlformats.org/drawingml/2006/main">
               <a:ext uri="{FF2B5EF4-FFF2-40B4-BE49-F238E27FC236}">
-                <a16:creationId xmlns:a16="http://schemas.microsoft.com/office/drawing/2014/main" id="{98D4A25E-9C8D-4219-805D-CACA87658118}"/>
+                <a16:creationId xmlns:a16="http://schemas.microsoft.com/office/drawing/2014/main" id="{5FA28DD4-F4EA-492D-87B4-E560C0BC4F40}"/>
               </a:ext>
             </a:extLst>
           </p:cNvPr>
@@ -15467,7 +15467,7 @@
           <p:cNvPr id="66" name="">
             <a:extLst xmlns:a="http://schemas.openxmlformats.org/drawingml/2006/main">
               <a:ext uri="{FF2B5EF4-FFF2-40B4-BE49-F238E27FC236}">
-                <a16:creationId xmlns:a16="http://schemas.microsoft.com/office/drawing/2014/main" id="{0A3916D5-2E39-4D14-A9D2-3E9F19A31749}"/>
+                <a16:creationId xmlns:a16="http://schemas.microsoft.com/office/drawing/2014/main" id="{5B1C11FC-8418-4991-B0AA-655EDEC88278}"/>
               </a:ext>
             </a:extLst>
           </p:cNvPr>
@@ -15519,7 +15519,7 @@
           <p:cNvPr id="67" name="">
             <a:extLst xmlns:a="http://schemas.openxmlformats.org/drawingml/2006/main">
               <a:ext uri="{FF2B5EF4-FFF2-40B4-BE49-F238E27FC236}">
-                <a16:creationId xmlns:a16="http://schemas.microsoft.com/office/drawing/2014/main" id="{D741E280-3F23-431C-85A4-71362FD15CE5}"/>
+                <a16:creationId xmlns:a16="http://schemas.microsoft.com/office/drawing/2014/main" id="{E1E216DF-5463-4EBA-962E-D7A8E4629C86}"/>
               </a:ext>
             </a:extLst>
           </p:cNvPr>
@@ -15571,7 +15571,7 @@
           <p:cNvPr id="68" name="">
             <a:extLst xmlns:a="http://schemas.openxmlformats.org/drawingml/2006/main">
               <a:ext uri="{FF2B5EF4-FFF2-40B4-BE49-F238E27FC236}">
-                <a16:creationId xmlns:a16="http://schemas.microsoft.com/office/drawing/2014/main" id="{DC30022C-F1BD-418E-B95F-2944D602F2DD}"/>
+                <a16:creationId xmlns:a16="http://schemas.microsoft.com/office/drawing/2014/main" id="{A398C299-8FA3-4D14-8F88-8FF50AA74EA1}"/>
               </a:ext>
             </a:extLst>
           </p:cNvPr>
@@ -15623,7 +15623,7 @@
           <p:cNvPr id="69" name="">
             <a:extLst xmlns:a="http://schemas.openxmlformats.org/drawingml/2006/main">
               <a:ext uri="{FF2B5EF4-FFF2-40B4-BE49-F238E27FC236}">
-                <a16:creationId xmlns:a16="http://schemas.microsoft.com/office/drawing/2014/main" id="{9C31BE85-2710-4732-9132-362465E9218F}"/>
+                <a16:creationId xmlns:a16="http://schemas.microsoft.com/office/drawing/2014/main" id="{3A88FF0C-96C9-47AB-815F-36B32C5EE274}"/>
               </a:ext>
             </a:extLst>
           </p:cNvPr>
@@ -15675,7 +15675,7 @@
           <p:cNvPr id="70" name="">
             <a:extLst xmlns:a="http://schemas.openxmlformats.org/drawingml/2006/main">
               <a:ext uri="{FF2B5EF4-FFF2-40B4-BE49-F238E27FC236}">
-                <a16:creationId xmlns:a16="http://schemas.microsoft.com/office/drawing/2014/main" id="{84785387-0066-4C08-AB1C-F4D3E61047AA}"/>
+                <a16:creationId xmlns:a16="http://schemas.microsoft.com/office/drawing/2014/main" id="{324A9086-7E9E-400A-89D5-75C285CB0F1F}"/>
               </a:ext>
             </a:extLst>
           </p:cNvPr>
@@ -15706,7 +15706,7 @@
           <p:cNvPr id="71" name="">
             <a:extLst xmlns:a="http://schemas.openxmlformats.org/drawingml/2006/main">
               <a:ext uri="{FF2B5EF4-FFF2-40B4-BE49-F238E27FC236}">
-                <a16:creationId xmlns:a16="http://schemas.microsoft.com/office/drawing/2014/main" id="{4637D6B9-83DD-4F1A-83AA-775BD1FB2774}"/>
+                <a16:creationId xmlns:a16="http://schemas.microsoft.com/office/drawing/2014/main" id="{02191F15-D86F-432F-B594-33291D92D5E8}"/>
               </a:ext>
             </a:extLst>
           </p:cNvPr>
@@ -15758,7 +15758,7 @@
           <p:cNvPr id="72" name="">
             <a:extLst xmlns:a="http://schemas.openxmlformats.org/drawingml/2006/main">
               <a:ext uri="{FF2B5EF4-FFF2-40B4-BE49-F238E27FC236}">
-                <a16:creationId xmlns:a16="http://schemas.microsoft.com/office/drawing/2014/main" id="{B9F512D2-CE76-4035-8D9E-7E2D4E553C52}"/>
+                <a16:creationId xmlns:a16="http://schemas.microsoft.com/office/drawing/2014/main" id="{381152DC-2C6F-43E4-A332-14A4A777A063}"/>
               </a:ext>
             </a:extLst>
           </p:cNvPr>
@@ -15810,7 +15810,7 @@
           <p:cNvPr id="73" name="">
             <a:extLst xmlns:a="http://schemas.openxmlformats.org/drawingml/2006/main">
               <a:ext uri="{FF2B5EF4-FFF2-40B4-BE49-F238E27FC236}">
-                <a16:creationId xmlns:a16="http://schemas.microsoft.com/office/drawing/2014/main" id="{A0E95952-AFA0-4D93-8EFB-394344A35C2B}"/>
+                <a16:creationId xmlns:a16="http://schemas.microsoft.com/office/drawing/2014/main" id="{73F96780-1EFD-4A32-9E57-99FF5A3940BA}"/>
               </a:ext>
             </a:extLst>
           </p:cNvPr>
@@ -15862,7 +15862,7 @@
           <p:cNvPr id="74" name="">
             <a:extLst xmlns:a="http://schemas.openxmlformats.org/drawingml/2006/main">
               <a:ext uri="{FF2B5EF4-FFF2-40B4-BE49-F238E27FC236}">
-                <a16:creationId xmlns:a16="http://schemas.microsoft.com/office/drawing/2014/main" id="{DE60C1A5-4A49-4DD2-8B8E-6A105239F2DF}"/>
+                <a16:creationId xmlns:a16="http://schemas.microsoft.com/office/drawing/2014/main" id="{27DB7E54-E279-4141-9B7C-1D9044D1A262}"/>
               </a:ext>
             </a:extLst>
           </p:cNvPr>
@@ -15914,7 +15914,7 @@
           <p:cNvPr id="75" name="">
             <a:extLst xmlns:a="http://schemas.openxmlformats.org/drawingml/2006/main">
               <a:ext uri="{FF2B5EF4-FFF2-40B4-BE49-F238E27FC236}">
-                <a16:creationId xmlns:a16="http://schemas.microsoft.com/office/drawing/2014/main" id="{3AC66C93-69BC-4D54-8934-3C90C8E8EFBF}"/>
+                <a16:creationId xmlns:a16="http://schemas.microsoft.com/office/drawing/2014/main" id="{09A7A77E-02C8-4784-99F8-96D610ED5E9D}"/>
               </a:ext>
             </a:extLst>
           </p:cNvPr>
@@ -15966,7 +15966,7 @@
           <p:cNvPr id="76" name="">
             <a:extLst xmlns:a="http://schemas.openxmlformats.org/drawingml/2006/main">
               <a:ext uri="{FF2B5EF4-FFF2-40B4-BE49-F238E27FC236}">
-                <a16:creationId xmlns:a16="http://schemas.microsoft.com/office/drawing/2014/main" id="{B74E3E3A-1B32-428A-8395-9A671F7E9593}"/>
+                <a16:creationId xmlns:a16="http://schemas.microsoft.com/office/drawing/2014/main" id="{DD2D5460-1E2B-4B39-ABBE-D1DAB273A594}"/>
               </a:ext>
             </a:extLst>
           </p:cNvPr>
@@ -15997,7 +15997,7 @@
           <p:cNvPr id="77" name="">
             <a:extLst xmlns:a="http://schemas.openxmlformats.org/drawingml/2006/main">
               <a:ext uri="{FF2B5EF4-FFF2-40B4-BE49-F238E27FC236}">
-                <a16:creationId xmlns:a16="http://schemas.microsoft.com/office/drawing/2014/main" id="{01F08D44-40AD-467E-845E-858C0028889B}"/>
+                <a16:creationId xmlns:a16="http://schemas.microsoft.com/office/drawing/2014/main" id="{8BAB8FD5-E053-465C-8B6C-072F4ACD0668}"/>
               </a:ext>
             </a:extLst>
           </p:cNvPr>
@@ -16028,7 +16028,7 @@
           <p:cNvPr id="78" name="">
             <a:extLst xmlns:a="http://schemas.openxmlformats.org/drawingml/2006/main">
               <a:ext uri="{FF2B5EF4-FFF2-40B4-BE49-F238E27FC236}">
-                <a16:creationId xmlns:a16="http://schemas.microsoft.com/office/drawing/2014/main" id="{194A3F83-2B7B-44EC-B83D-C7EFE2B1EFF7}"/>
+                <a16:creationId xmlns:a16="http://schemas.microsoft.com/office/drawing/2014/main" id="{BBC7A61D-A95A-4BDC-83B6-7B0A67160972}"/>
               </a:ext>
             </a:extLst>
           </p:cNvPr>
@@ -16080,7 +16080,7 @@
           <p:cNvPr id="79" name="">
             <a:extLst xmlns:a="http://schemas.openxmlformats.org/drawingml/2006/main">
               <a:ext uri="{FF2B5EF4-FFF2-40B4-BE49-F238E27FC236}">
-                <a16:creationId xmlns:a16="http://schemas.microsoft.com/office/drawing/2014/main" id="{64E1BB2A-5B4F-4999-A52C-8379509717CB}"/>
+                <a16:creationId xmlns:a16="http://schemas.microsoft.com/office/drawing/2014/main" id="{43EC2B80-646D-4F7C-B2D7-6C6FDE06A39A}"/>
               </a:ext>
             </a:extLst>
           </p:cNvPr>
@@ -16132,7 +16132,7 @@
           <p:cNvPr id="80" name="">
             <a:extLst xmlns:a="http://schemas.openxmlformats.org/drawingml/2006/main">
               <a:ext uri="{FF2B5EF4-FFF2-40B4-BE49-F238E27FC236}">
-                <a16:creationId xmlns:a16="http://schemas.microsoft.com/office/drawing/2014/main" id="{56540ED1-E963-44B6-8444-E780A56BD6A9}"/>
+                <a16:creationId xmlns:a16="http://schemas.microsoft.com/office/drawing/2014/main" id="{F9799822-96D7-4860-AE94-9A5F59AF1F89}"/>
               </a:ext>
             </a:extLst>
           </p:cNvPr>
@@ -16184,7 +16184,7 @@
           <p:cNvPr id="81" name="">
             <a:extLst xmlns:a="http://schemas.openxmlformats.org/drawingml/2006/main">
               <a:ext uri="{FF2B5EF4-FFF2-40B4-BE49-F238E27FC236}">
-                <a16:creationId xmlns:a16="http://schemas.microsoft.com/office/drawing/2014/main" id="{DD6E8D97-0251-4D9A-8152-812F5E18F11D}"/>
+                <a16:creationId xmlns:a16="http://schemas.microsoft.com/office/drawing/2014/main" id="{7E37B037-4ADA-411F-8109-CA487CBD46CA}"/>
               </a:ext>
             </a:extLst>
           </p:cNvPr>
@@ -16236,7 +16236,7 @@
           <p:cNvPr id="82" name="">
             <a:extLst xmlns:a="http://schemas.openxmlformats.org/drawingml/2006/main">
               <a:ext uri="{FF2B5EF4-FFF2-40B4-BE49-F238E27FC236}">
-                <a16:creationId xmlns:a16="http://schemas.microsoft.com/office/drawing/2014/main" id="{AC5A7A72-657E-4B58-9AF0-61612ADD56F1}"/>
+                <a16:creationId xmlns:a16="http://schemas.microsoft.com/office/drawing/2014/main" id="{60A5F5A3-F771-4FD4-9CD7-8A8C96AD74AE}"/>
               </a:ext>
             </a:extLst>
           </p:cNvPr>
@@ -16288,7 +16288,7 @@
           <p:cNvPr id="83" name="">
             <a:extLst xmlns:a="http://schemas.openxmlformats.org/drawingml/2006/main">
               <a:ext uri="{FF2B5EF4-FFF2-40B4-BE49-F238E27FC236}">
-                <a16:creationId xmlns:a16="http://schemas.microsoft.com/office/drawing/2014/main" id="{4D0FA50D-08BE-40BD-8226-B08AEAEFE54C}"/>
+                <a16:creationId xmlns:a16="http://schemas.microsoft.com/office/drawing/2014/main" id="{9FB69CE0-E1E9-444D-83E4-EA0C073BEAD8}"/>
               </a:ext>
             </a:extLst>
           </p:cNvPr>
@@ -16319,7 +16319,7 @@
           <p:cNvPr id="84" name="">
             <a:extLst xmlns:a="http://schemas.openxmlformats.org/drawingml/2006/main">
               <a:ext uri="{FF2B5EF4-FFF2-40B4-BE49-F238E27FC236}">
-                <a16:creationId xmlns:a16="http://schemas.microsoft.com/office/drawing/2014/main" id="{45E21B5B-5B1A-4180-BE36-6919F882419B}"/>
+                <a16:creationId xmlns:a16="http://schemas.microsoft.com/office/drawing/2014/main" id="{8437DA7A-050F-4DFB-8178-CDE09055F56F}"/>
               </a:ext>
             </a:extLst>
           </p:cNvPr>
@@ -16371,7 +16371,7 @@
           <p:cNvPr id="85" name="">
             <a:extLst xmlns:a="http://schemas.openxmlformats.org/drawingml/2006/main">
               <a:ext uri="{FF2B5EF4-FFF2-40B4-BE49-F238E27FC236}">
-                <a16:creationId xmlns:a16="http://schemas.microsoft.com/office/drawing/2014/main" id="{9166DD39-EC5C-4E9E-8A2B-E19ADC6AF2E0}"/>
+                <a16:creationId xmlns:a16="http://schemas.microsoft.com/office/drawing/2014/main" id="{9D64F89A-4045-4C3F-829D-F3299147E8DB}"/>
               </a:ext>
             </a:extLst>
           </p:cNvPr>
@@ -16423,7 +16423,7 @@
           <p:cNvPr id="86" name="">
             <a:extLst xmlns:a="http://schemas.openxmlformats.org/drawingml/2006/main">
               <a:ext uri="{FF2B5EF4-FFF2-40B4-BE49-F238E27FC236}">
-                <a16:creationId xmlns:a16="http://schemas.microsoft.com/office/drawing/2014/main" id="{A2834D5D-51E4-49EA-BC81-659FDF0331AC}"/>
+                <a16:creationId xmlns:a16="http://schemas.microsoft.com/office/drawing/2014/main" id="{85AF52AF-3278-47C9-8D7C-4B0CCB1E9E8C}"/>
               </a:ext>
             </a:extLst>
           </p:cNvPr>
@@ -16475,7 +16475,7 @@
           <p:cNvPr id="87" name="">
             <a:extLst xmlns:a="http://schemas.openxmlformats.org/drawingml/2006/main">
               <a:ext uri="{FF2B5EF4-FFF2-40B4-BE49-F238E27FC236}">
-                <a16:creationId xmlns:a16="http://schemas.microsoft.com/office/drawing/2014/main" id="{C22B0A54-AD51-480D-B8AF-0542D55F5423}"/>
+                <a16:creationId xmlns:a16="http://schemas.microsoft.com/office/drawing/2014/main" id="{3CFC4A5E-417B-4B2E-8EEC-6A7E739983C7}"/>
               </a:ext>
             </a:extLst>
           </p:cNvPr>
@@ -16527,7 +16527,7 @@
           <p:cNvPr id="88" name="">
             <a:extLst xmlns:a="http://schemas.openxmlformats.org/drawingml/2006/main">
               <a:ext uri="{FF2B5EF4-FFF2-40B4-BE49-F238E27FC236}">
-                <a16:creationId xmlns:a16="http://schemas.microsoft.com/office/drawing/2014/main" id="{AAE84CC7-224D-406B-8EDF-F692E7F2E492}"/>
+                <a16:creationId xmlns:a16="http://schemas.microsoft.com/office/drawing/2014/main" id="{4323B948-219A-40A5-8D62-E048D5DFD4B3}"/>
               </a:ext>
             </a:extLst>
           </p:cNvPr>
@@ -16579,7 +16579,7 @@
           <p:cNvPr id="89" name="">
             <a:extLst xmlns:a="http://schemas.openxmlformats.org/drawingml/2006/main">
               <a:ext uri="{FF2B5EF4-FFF2-40B4-BE49-F238E27FC236}">
-                <a16:creationId xmlns:a16="http://schemas.microsoft.com/office/drawing/2014/main" id="{13185899-EBC4-4C2B-BA23-44E7319772BB}"/>
+                <a16:creationId xmlns:a16="http://schemas.microsoft.com/office/drawing/2014/main" id="{4A7E7FB1-C3C3-47A9-94C2-9F912DBF01FE}"/>
               </a:ext>
             </a:extLst>
           </p:cNvPr>
@@ -16610,7 +16610,7 @@
           <p:cNvPr id="90" name="">
             <a:extLst xmlns:a="http://schemas.openxmlformats.org/drawingml/2006/main">
               <a:ext uri="{FF2B5EF4-FFF2-40B4-BE49-F238E27FC236}">
-                <a16:creationId xmlns:a16="http://schemas.microsoft.com/office/drawing/2014/main" id="{9953ECD7-6583-4855-95B4-D72906D37A26}"/>
+                <a16:creationId xmlns:a16="http://schemas.microsoft.com/office/drawing/2014/main" id="{D2DB8A09-4DAE-4823-A118-ED02838E62E1}"/>
               </a:ext>
             </a:extLst>
           </p:cNvPr>
@@ -16641,7 +16641,7 @@
           <p:cNvPr id="91" name="">
             <a:extLst xmlns:a="http://schemas.openxmlformats.org/drawingml/2006/main">
               <a:ext uri="{FF2B5EF4-FFF2-40B4-BE49-F238E27FC236}">
-                <a16:creationId xmlns:a16="http://schemas.microsoft.com/office/drawing/2014/main" id="{CF3FEEF4-D62F-455A-AB7C-ED534117EFC7}"/>
+                <a16:creationId xmlns:a16="http://schemas.microsoft.com/office/drawing/2014/main" id="{7D37452A-7341-462E-BAB0-479BD8905B58}"/>
               </a:ext>
             </a:extLst>
           </p:cNvPr>
@@ -16693,7 +16693,7 @@
           <p:cNvPr id="92" name="">
             <a:extLst xmlns:a="http://schemas.openxmlformats.org/drawingml/2006/main">
               <a:ext uri="{FF2B5EF4-FFF2-40B4-BE49-F238E27FC236}">
-                <a16:creationId xmlns:a16="http://schemas.microsoft.com/office/drawing/2014/main" id="{5A523162-9759-440E-9C14-9F350D75A80B}"/>
+                <a16:creationId xmlns:a16="http://schemas.microsoft.com/office/drawing/2014/main" id="{59970B98-56A7-412D-9799-8109CE8D6FD7}"/>
               </a:ext>
             </a:extLst>
           </p:cNvPr>
@@ -16745,7 +16745,7 @@
           <p:cNvPr id="93" name="">
             <a:extLst xmlns:a="http://schemas.openxmlformats.org/drawingml/2006/main">
               <a:ext uri="{FF2B5EF4-FFF2-40B4-BE49-F238E27FC236}">
-                <a16:creationId xmlns:a16="http://schemas.microsoft.com/office/drawing/2014/main" id="{9094AB0A-CA97-4E9B-B7D1-1E55966FDDEF}"/>
+                <a16:creationId xmlns:a16="http://schemas.microsoft.com/office/drawing/2014/main" id="{14828F6A-4AB8-41DE-919D-FF531B0AD1CB}"/>
               </a:ext>
             </a:extLst>
           </p:cNvPr>
@@ -16797,7 +16797,7 @@
           <p:cNvPr id="94" name="">
             <a:extLst xmlns:a="http://schemas.openxmlformats.org/drawingml/2006/main">
               <a:ext uri="{FF2B5EF4-FFF2-40B4-BE49-F238E27FC236}">
-                <a16:creationId xmlns:a16="http://schemas.microsoft.com/office/drawing/2014/main" id="{BD4F06F5-9CDB-43BF-AFA6-8ABC013C03D6}"/>
+                <a16:creationId xmlns:a16="http://schemas.microsoft.com/office/drawing/2014/main" id="{3434F1E3-88E4-46F6-9545-B4FD3D97CCC9}"/>
               </a:ext>
             </a:extLst>
           </p:cNvPr>
@@ -16849,7 +16849,7 @@
           <p:cNvPr id="95" name="">
             <a:extLst xmlns:a="http://schemas.openxmlformats.org/drawingml/2006/main">
               <a:ext uri="{FF2B5EF4-FFF2-40B4-BE49-F238E27FC236}">
-                <a16:creationId xmlns:a16="http://schemas.microsoft.com/office/drawing/2014/main" id="{6796B4F0-F3EE-45A5-B1E9-F18E503670BE}"/>
+                <a16:creationId xmlns:a16="http://schemas.microsoft.com/office/drawing/2014/main" id="{ADDF3716-12D8-40A4-80E2-409BAF08C0B1}"/>
               </a:ext>
             </a:extLst>
           </p:cNvPr>
@@ -16901,7 +16901,7 @@
           <p:cNvPr id="96" name="">
             <a:extLst xmlns:a="http://schemas.openxmlformats.org/drawingml/2006/main">
               <a:ext uri="{FF2B5EF4-FFF2-40B4-BE49-F238E27FC236}">
-                <a16:creationId xmlns:a16="http://schemas.microsoft.com/office/drawing/2014/main" id="{FCF12577-109E-43DB-BECE-20B13AFCC1F1}"/>
+                <a16:creationId xmlns:a16="http://schemas.microsoft.com/office/drawing/2014/main" id="{2123E26A-EB98-4A9C-B74C-5C9715C398AF}"/>
               </a:ext>
             </a:extLst>
           </p:cNvPr>
@@ -16932,7 +16932,7 @@
           <p:cNvPr id="97" name="">
             <a:extLst xmlns:a="http://schemas.openxmlformats.org/drawingml/2006/main">
               <a:ext uri="{FF2B5EF4-FFF2-40B4-BE49-F238E27FC236}">
-                <a16:creationId xmlns:a16="http://schemas.microsoft.com/office/drawing/2014/main" id="{82AD4F3F-7DBB-42D4-AB02-3A1F8502F7DA}"/>
+                <a16:creationId xmlns:a16="http://schemas.microsoft.com/office/drawing/2014/main" id="{F7E23D81-E965-47DD-A9C1-895F794C0BF7}"/>
               </a:ext>
             </a:extLst>
           </p:cNvPr>
@@ -16984,7 +16984,7 @@
           <p:cNvPr id="98" name="">
             <a:extLst xmlns:a="http://schemas.openxmlformats.org/drawingml/2006/main">
               <a:ext uri="{FF2B5EF4-FFF2-40B4-BE49-F238E27FC236}">
-                <a16:creationId xmlns:a16="http://schemas.microsoft.com/office/drawing/2014/main" id="{167ED1F9-D301-4183-88A3-2DAD184E9621}"/>
+                <a16:creationId xmlns:a16="http://schemas.microsoft.com/office/drawing/2014/main" id="{51AA6692-98C0-4DE1-A928-233E90FAF31B}"/>
               </a:ext>
             </a:extLst>
           </p:cNvPr>
@@ -17036,7 +17036,7 @@
           <p:cNvPr id="99" name="">
             <a:extLst xmlns:a="http://schemas.openxmlformats.org/drawingml/2006/main">
               <a:ext uri="{FF2B5EF4-FFF2-40B4-BE49-F238E27FC236}">
-                <a16:creationId xmlns:a16="http://schemas.microsoft.com/office/drawing/2014/main" id="{14309EA7-950C-4923-9AD8-0F0E36F2415D}"/>
+                <a16:creationId xmlns:a16="http://schemas.microsoft.com/office/drawing/2014/main" id="{BEB05821-7FCC-44A5-BEAE-92EA1C7E5342}"/>
               </a:ext>
             </a:extLst>
           </p:cNvPr>
@@ -17088,7 +17088,7 @@
           <p:cNvPr id="100" name="">
             <a:extLst xmlns:a="http://schemas.openxmlformats.org/drawingml/2006/main">
               <a:ext uri="{FF2B5EF4-FFF2-40B4-BE49-F238E27FC236}">
-                <a16:creationId xmlns:a16="http://schemas.microsoft.com/office/drawing/2014/main" id="{65928ACC-D33E-4197-8F40-F85F78FA1146}"/>
+                <a16:creationId xmlns:a16="http://schemas.microsoft.com/office/drawing/2014/main" id="{CF53E9FC-7DA0-48DF-893A-2127B0163B0E}"/>
               </a:ext>
             </a:extLst>
           </p:cNvPr>
@@ -17140,7 +17140,7 @@
           <p:cNvPr id="101" name="">
             <a:extLst xmlns:a="http://schemas.openxmlformats.org/drawingml/2006/main">
               <a:ext uri="{FF2B5EF4-FFF2-40B4-BE49-F238E27FC236}">
-                <a16:creationId xmlns:a16="http://schemas.microsoft.com/office/drawing/2014/main" id="{EAF27043-C281-4932-92C7-F416CFEC534E}"/>
+                <a16:creationId xmlns:a16="http://schemas.microsoft.com/office/drawing/2014/main" id="{3A76E9B4-AE6C-4EEE-BF8E-AA8668EAAF69}"/>
               </a:ext>
             </a:extLst>
           </p:cNvPr>
@@ -17190,7 +17190,7 @@
     </p:spTree>
     <p:extLst>
       <p:ext uri="{BB962C8B-B14F-4D97-AF65-F5344CB8AC3E}">
-        <p14:creationId xmlns:p14="http://schemas.microsoft.com/office/powerpoint/2010/main" val="1573162806"/>
+        <p14:creationId xmlns:p14="http://schemas.microsoft.com/office/powerpoint/2010/main" val="987053601"/>
       </p:ext>
     </p:extLst>
   </p:cSld>
@@ -17221,7 +17221,7 @@
           <p:cNvPr id="96" name="">
             <a:extLst xmlns:a="http://schemas.openxmlformats.org/drawingml/2006/main">
               <a:ext uri="{FF2B5EF4-FFF2-40B4-BE49-F238E27FC236}">
-                <a16:creationId xmlns:a16="http://schemas.microsoft.com/office/drawing/2014/main" id="{0E2731DE-0CAD-4DBB-90C2-F1825AAC849E}"/>
+                <a16:creationId xmlns:a16="http://schemas.microsoft.com/office/drawing/2014/main" id="{FBF3F51C-8504-4F3D-A398-B0C8CC7C609A}"/>
               </a:ext>
             </a:extLst>
           </p:cNvPr>
@@ -17254,7 +17254,7 @@
           <p:cNvPr id="2" name="">
             <a:extLst xmlns:a="http://schemas.openxmlformats.org/drawingml/2006/main">
               <a:ext uri="{FF2B5EF4-FFF2-40B4-BE49-F238E27FC236}">
-                <a16:creationId xmlns:a16="http://schemas.microsoft.com/office/drawing/2014/main" id="{FF06B224-E10F-4727-B6EE-94FBC3D73F53}"/>
+                <a16:creationId xmlns:a16="http://schemas.microsoft.com/office/drawing/2014/main" id="{219F23A6-563B-4E2F-B677-19A537BA482E}"/>
               </a:ext>
             </a:extLst>
           </p:cNvPr>
@@ -17285,7 +17285,7 @@
           <p:cNvPr id="3" name="">
             <a:extLst xmlns:a="http://schemas.openxmlformats.org/drawingml/2006/main">
               <a:ext uri="{FF2B5EF4-FFF2-40B4-BE49-F238E27FC236}">
-                <a16:creationId xmlns:a16="http://schemas.microsoft.com/office/drawing/2014/main" id="{03F3D8AA-FD7A-4660-BD2D-72B64A367EE8}"/>
+                <a16:creationId xmlns:a16="http://schemas.microsoft.com/office/drawing/2014/main" id="{BAE9657E-AAB8-43CB-B79B-8EC96976BD51}"/>
               </a:ext>
             </a:extLst>
           </p:cNvPr>
@@ -17337,7 +17337,7 @@
           <p:cNvPr id="4" name="">
             <a:extLst xmlns:a="http://schemas.openxmlformats.org/drawingml/2006/main">
               <a:ext uri="{FF2B5EF4-FFF2-40B4-BE49-F238E27FC236}">
-                <a16:creationId xmlns:a16="http://schemas.microsoft.com/office/drawing/2014/main" id="{0F5299C4-7ED6-4C07-8E85-C443860F710C}"/>
+                <a16:creationId xmlns:a16="http://schemas.microsoft.com/office/drawing/2014/main" id="{43C81515-0E70-4F55-A4C7-A87A6622A968}"/>
               </a:ext>
             </a:extLst>
           </p:cNvPr>
@@ -17389,7 +17389,7 @@
           <p:cNvPr id="5" name="">
             <a:extLst xmlns:a="http://schemas.openxmlformats.org/drawingml/2006/main">
               <a:ext uri="{FF2B5EF4-FFF2-40B4-BE49-F238E27FC236}">
-                <a16:creationId xmlns:a16="http://schemas.microsoft.com/office/drawing/2014/main" id="{B6DCD390-49E7-44BB-BDF4-CDFAE127A6EE}"/>
+                <a16:creationId xmlns:a16="http://schemas.microsoft.com/office/drawing/2014/main" id="{58C02D63-6038-4DD0-9066-018F61B5395B}"/>
               </a:ext>
             </a:extLst>
           </p:cNvPr>
@@ -17424,7 +17424,7 @@
           <p:nvPr/>
         </p:nvPicPr>
         <p:blipFill>
-          <a:blip xmlns:r="http://schemas.openxmlformats.org/officeDocument/2006/relationships" xmlns:a="http://schemas.openxmlformats.org/drawingml/2006/main" r:embed="Rf8f146fdcf004248"/>
+          <a:blip xmlns:r="http://schemas.openxmlformats.org/officeDocument/2006/relationships" xmlns:a="http://schemas.openxmlformats.org/drawingml/2006/main" r:embed="Re3398c963f0049f4"/>
           <a:stretch xmlns:a="http://schemas.openxmlformats.org/drawingml/2006/main"/>
         </p:blipFill>
         <p:spPr>
@@ -17442,7 +17442,7 @@
           <p:cNvPr id="7" name="">
             <a:extLst xmlns:a="http://schemas.openxmlformats.org/drawingml/2006/main">
               <a:ext uri="{FF2B5EF4-FFF2-40B4-BE49-F238E27FC236}">
-                <a16:creationId xmlns:a16="http://schemas.microsoft.com/office/drawing/2014/main" id="{6A40015D-3D95-47AC-93BC-8BA6171A4A13}"/>
+                <a16:creationId xmlns:a16="http://schemas.microsoft.com/office/drawing/2014/main" id="{D0CB766C-9A98-4A90-9FCF-342F78A90618}"/>
               </a:ext>
             </a:extLst>
           </p:cNvPr>
@@ -17494,7 +17494,7 @@
           <p:cNvPr id="8" name="">
             <a:extLst xmlns:a="http://schemas.openxmlformats.org/drawingml/2006/main">
               <a:ext uri="{FF2B5EF4-FFF2-40B4-BE49-F238E27FC236}">
-                <a16:creationId xmlns:a16="http://schemas.microsoft.com/office/drawing/2014/main" id="{20E2D550-4A27-4820-B90A-AB11BA735EF2}"/>
+                <a16:creationId xmlns:a16="http://schemas.microsoft.com/office/drawing/2014/main" id="{9092681F-AD9E-45CA-90A6-E3CA56858B3B}"/>
               </a:ext>
             </a:extLst>
           </p:cNvPr>
@@ -17546,7 +17546,7 @@
           <p:cNvPr id="9" name="">
             <a:extLst xmlns:a="http://schemas.openxmlformats.org/drawingml/2006/main">
               <a:ext uri="{FF2B5EF4-FFF2-40B4-BE49-F238E27FC236}">
-                <a16:creationId xmlns:a16="http://schemas.microsoft.com/office/drawing/2014/main" id="{275B0B56-5798-47D1-A939-7A6AB4E3C8D5}"/>
+                <a16:creationId xmlns:a16="http://schemas.microsoft.com/office/drawing/2014/main" id="{784AB33C-7F81-4120-A824-9310691D1F6A}"/>
               </a:ext>
             </a:extLst>
           </p:cNvPr>
@@ -17598,7 +17598,7 @@
           <p:cNvPr id="10" name="">
             <a:extLst xmlns:a="http://schemas.openxmlformats.org/drawingml/2006/main">
               <a:ext uri="{FF2B5EF4-FFF2-40B4-BE49-F238E27FC236}">
-                <a16:creationId xmlns:a16="http://schemas.microsoft.com/office/drawing/2014/main" id="{D20ABEC8-AC5B-4566-B9FC-D0F444B039DB}"/>
+                <a16:creationId xmlns:a16="http://schemas.microsoft.com/office/drawing/2014/main" id="{7644E7A7-4A43-4B0C-AB6A-E73EF539B415}"/>
               </a:ext>
             </a:extLst>
           </p:cNvPr>
@@ -17650,7 +17650,7 @@
           <p:cNvPr id="11" name="">
             <a:extLst xmlns:a="http://schemas.openxmlformats.org/drawingml/2006/main">
               <a:ext uri="{FF2B5EF4-FFF2-40B4-BE49-F238E27FC236}">
-                <a16:creationId xmlns:a16="http://schemas.microsoft.com/office/drawing/2014/main" id="{405DFD83-A7AD-4118-A406-029500E9C3F1}"/>
+                <a16:creationId xmlns:a16="http://schemas.microsoft.com/office/drawing/2014/main" id="{04D4F2DD-356C-45A8-8B02-C3490223FDEC}"/>
               </a:ext>
             </a:extLst>
           </p:cNvPr>
@@ -17681,7 +17681,7 @@
           <p:cNvPr id="12" name="">
             <a:extLst xmlns:a="http://schemas.openxmlformats.org/drawingml/2006/main">
               <a:ext uri="{FF2B5EF4-FFF2-40B4-BE49-F238E27FC236}">
-                <a16:creationId xmlns:a16="http://schemas.microsoft.com/office/drawing/2014/main" id="{578747F5-E142-46BB-9841-E83595AF68A5}"/>
+                <a16:creationId xmlns:a16="http://schemas.microsoft.com/office/drawing/2014/main" id="{334D8F93-F1AE-480B-B4CB-FD34330AE012}"/>
               </a:ext>
             </a:extLst>
           </p:cNvPr>
@@ -17712,7 +17712,7 @@
           <p:cNvPr id="13" name="">
             <a:extLst xmlns:a="http://schemas.openxmlformats.org/drawingml/2006/main">
               <a:ext uri="{FF2B5EF4-FFF2-40B4-BE49-F238E27FC236}">
-                <a16:creationId xmlns:a16="http://schemas.microsoft.com/office/drawing/2014/main" id="{FF1C28E7-C0C4-41AF-96DB-9DC307C03529}"/>
+                <a16:creationId xmlns:a16="http://schemas.microsoft.com/office/drawing/2014/main" id="{D2869989-DED2-49A5-9AF8-E7100755FFCA}"/>
               </a:ext>
             </a:extLst>
           </p:cNvPr>
@@ -17764,7 +17764,7 @@
           <p:cNvPr id="14" name="">
             <a:extLst xmlns:a="http://schemas.openxmlformats.org/drawingml/2006/main">
               <a:ext uri="{FF2B5EF4-FFF2-40B4-BE49-F238E27FC236}">
-                <a16:creationId xmlns:a16="http://schemas.microsoft.com/office/drawing/2014/main" id="{A1332896-EDEA-4398-9A83-AEEE4E4E39B1}"/>
+                <a16:creationId xmlns:a16="http://schemas.microsoft.com/office/drawing/2014/main" id="{B4652A17-284A-47DE-B568-570F119EED0A}"/>
               </a:ext>
             </a:extLst>
           </p:cNvPr>
@@ -17816,7 +17816,7 @@
           <p:cNvPr id="15" name="">
             <a:extLst xmlns:a="http://schemas.openxmlformats.org/drawingml/2006/main">
               <a:ext uri="{FF2B5EF4-FFF2-40B4-BE49-F238E27FC236}">
-                <a16:creationId xmlns:a16="http://schemas.microsoft.com/office/drawing/2014/main" id="{402858D1-5FD3-4C42-B03A-66737A40AF95}"/>
+                <a16:creationId xmlns:a16="http://schemas.microsoft.com/office/drawing/2014/main" id="{472AE6B6-4B16-4CBD-A90C-73A86AD84D94}"/>
               </a:ext>
             </a:extLst>
           </p:cNvPr>
@@ -17868,7 +17868,7 @@
           <p:cNvPr id="16" name="">
             <a:extLst xmlns:a="http://schemas.openxmlformats.org/drawingml/2006/main">
               <a:ext uri="{FF2B5EF4-FFF2-40B4-BE49-F238E27FC236}">
-                <a16:creationId xmlns:a16="http://schemas.microsoft.com/office/drawing/2014/main" id="{151CCF8E-1C8F-4CF4-BFC2-74652A5BCF06}"/>
+                <a16:creationId xmlns:a16="http://schemas.microsoft.com/office/drawing/2014/main" id="{8BBBF8BB-E7C6-41D8-8740-5B12046F410C}"/>
               </a:ext>
             </a:extLst>
           </p:cNvPr>
@@ -17920,7 +17920,7 @@
           <p:cNvPr id="17" name="">
             <a:extLst xmlns:a="http://schemas.openxmlformats.org/drawingml/2006/main">
               <a:ext uri="{FF2B5EF4-FFF2-40B4-BE49-F238E27FC236}">
-                <a16:creationId xmlns:a16="http://schemas.microsoft.com/office/drawing/2014/main" id="{955E5A17-BCD2-4E6E-A39A-7601FE86F8D1}"/>
+                <a16:creationId xmlns:a16="http://schemas.microsoft.com/office/drawing/2014/main" id="{26E73CF9-03B4-41F9-89D7-C542E8BF9F4F}"/>
               </a:ext>
             </a:extLst>
           </p:cNvPr>
@@ -17972,7 +17972,7 @@
           <p:cNvPr id="18" name="">
             <a:extLst xmlns:a="http://schemas.openxmlformats.org/drawingml/2006/main">
               <a:ext uri="{FF2B5EF4-FFF2-40B4-BE49-F238E27FC236}">
-                <a16:creationId xmlns:a16="http://schemas.microsoft.com/office/drawing/2014/main" id="{336AFE1D-872E-41D0-A5C2-D25EE1A2C6E3}"/>
+                <a16:creationId xmlns:a16="http://schemas.microsoft.com/office/drawing/2014/main" id="{60A9BAE7-9FAC-4FCC-8A10-F34DB5C0994C}"/>
               </a:ext>
             </a:extLst>
           </p:cNvPr>
@@ -18003,7 +18003,7 @@
           <p:cNvPr id="19" name="">
             <a:extLst xmlns:a="http://schemas.openxmlformats.org/drawingml/2006/main">
               <a:ext uri="{FF2B5EF4-FFF2-40B4-BE49-F238E27FC236}">
-                <a16:creationId xmlns:a16="http://schemas.microsoft.com/office/drawing/2014/main" id="{4719F95D-5704-41CA-9D28-249F3E18EBDF}"/>
+                <a16:creationId xmlns:a16="http://schemas.microsoft.com/office/drawing/2014/main" id="{81C87B47-7E85-447E-ADDF-31F7AB5CF4FE}"/>
               </a:ext>
             </a:extLst>
           </p:cNvPr>
@@ -18034,7 +18034,7 @@
           <p:cNvPr id="20" name="">
             <a:extLst xmlns:a="http://schemas.openxmlformats.org/drawingml/2006/main">
               <a:ext uri="{FF2B5EF4-FFF2-40B4-BE49-F238E27FC236}">
-                <a16:creationId xmlns:a16="http://schemas.microsoft.com/office/drawing/2014/main" id="{FCCBF4E6-79AD-4280-918D-5B75F177FBC5}"/>
+                <a16:creationId xmlns:a16="http://schemas.microsoft.com/office/drawing/2014/main" id="{DD158A05-D875-4319-98ED-701A0CD95099}"/>
               </a:ext>
             </a:extLst>
           </p:cNvPr>
@@ -18086,7 +18086,7 @@
           <p:cNvPr id="21" name="">
             <a:extLst xmlns:a="http://schemas.openxmlformats.org/drawingml/2006/main">
               <a:ext uri="{FF2B5EF4-FFF2-40B4-BE49-F238E27FC236}">
-                <a16:creationId xmlns:a16="http://schemas.microsoft.com/office/drawing/2014/main" id="{E93832B9-2BD4-42F1-91AF-2C4F363F78E4}"/>
+                <a16:creationId xmlns:a16="http://schemas.microsoft.com/office/drawing/2014/main" id="{0FF816C6-CA7C-42B2-9A8B-7296C54C937B}"/>
               </a:ext>
             </a:extLst>
           </p:cNvPr>
@@ -18138,7 +18138,7 @@
           <p:cNvPr id="22" name="">
             <a:extLst xmlns:a="http://schemas.openxmlformats.org/drawingml/2006/main">
               <a:ext uri="{FF2B5EF4-FFF2-40B4-BE49-F238E27FC236}">
-                <a16:creationId xmlns:a16="http://schemas.microsoft.com/office/drawing/2014/main" id="{E041B2E1-1808-4CA2-BF4A-CF4A7709417B}"/>
+                <a16:creationId xmlns:a16="http://schemas.microsoft.com/office/drawing/2014/main" id="{DD1DDBF4-0449-4D8F-A108-472C1FF41103}"/>
               </a:ext>
             </a:extLst>
           </p:cNvPr>
@@ -18190,7 +18190,7 @@
           <p:cNvPr id="23" name="">
             <a:extLst xmlns:a="http://schemas.openxmlformats.org/drawingml/2006/main">
               <a:ext uri="{FF2B5EF4-FFF2-40B4-BE49-F238E27FC236}">
-                <a16:creationId xmlns:a16="http://schemas.microsoft.com/office/drawing/2014/main" id="{372548BA-A2BE-4B48-B40C-6414C5BD413C}"/>
+                <a16:creationId xmlns:a16="http://schemas.microsoft.com/office/drawing/2014/main" id="{3DE4AAD5-AA12-4116-8783-958FDA1D0AF2}"/>
               </a:ext>
             </a:extLst>
           </p:cNvPr>
@@ -18242,7 +18242,7 @@
           <p:cNvPr id="24" name="">
             <a:extLst xmlns:a="http://schemas.openxmlformats.org/drawingml/2006/main">
               <a:ext uri="{FF2B5EF4-FFF2-40B4-BE49-F238E27FC236}">
-                <a16:creationId xmlns:a16="http://schemas.microsoft.com/office/drawing/2014/main" id="{D0BF6984-90B1-4E55-A3D6-1C3D9DBA4792}"/>
+                <a16:creationId xmlns:a16="http://schemas.microsoft.com/office/drawing/2014/main" id="{DDC8F3AE-27C4-4D76-9F25-3B662A5482A4}"/>
               </a:ext>
             </a:extLst>
           </p:cNvPr>
@@ -18294,7 +18294,7 @@
           <p:cNvPr id="25" name="">
             <a:extLst xmlns:a="http://schemas.openxmlformats.org/drawingml/2006/main">
               <a:ext uri="{FF2B5EF4-FFF2-40B4-BE49-F238E27FC236}">
-                <a16:creationId xmlns:a16="http://schemas.microsoft.com/office/drawing/2014/main" id="{4BE6810D-E09D-4FBF-85C4-9881939F9C2B}"/>
+                <a16:creationId xmlns:a16="http://schemas.microsoft.com/office/drawing/2014/main" id="{276C4A5E-5C8F-458B-A35A-F9519AAB10E3}"/>
               </a:ext>
             </a:extLst>
           </p:cNvPr>
@@ -18325,7 +18325,7 @@
           <p:cNvPr id="26" name="">
             <a:extLst xmlns:a="http://schemas.openxmlformats.org/drawingml/2006/main">
               <a:ext uri="{FF2B5EF4-FFF2-40B4-BE49-F238E27FC236}">
-                <a16:creationId xmlns:a16="http://schemas.microsoft.com/office/drawing/2014/main" id="{97605010-465D-4822-96F6-CA2D97BE8C8B}"/>
+                <a16:creationId xmlns:a16="http://schemas.microsoft.com/office/drawing/2014/main" id="{1AF04109-FA3C-4039-98B9-CCE9D80135DD}"/>
               </a:ext>
             </a:extLst>
           </p:cNvPr>
@@ -18377,7 +18377,7 @@
           <p:cNvPr id="27" name="">
             <a:extLst xmlns:a="http://schemas.openxmlformats.org/drawingml/2006/main">
               <a:ext uri="{FF2B5EF4-FFF2-40B4-BE49-F238E27FC236}">
-                <a16:creationId xmlns:a16="http://schemas.microsoft.com/office/drawing/2014/main" id="{A5F7AD05-1E5B-49DF-B1F7-E886C16E4CB3}"/>
+                <a16:creationId xmlns:a16="http://schemas.microsoft.com/office/drawing/2014/main" id="{FA5ADAAC-909D-463A-A77E-1833AADABD5F}"/>
               </a:ext>
             </a:extLst>
           </p:cNvPr>
@@ -18429,7 +18429,7 @@
           <p:cNvPr id="28" name="">
             <a:extLst xmlns:a="http://schemas.openxmlformats.org/drawingml/2006/main">
               <a:ext uri="{FF2B5EF4-FFF2-40B4-BE49-F238E27FC236}">
-                <a16:creationId xmlns:a16="http://schemas.microsoft.com/office/drawing/2014/main" id="{045A2805-B6E0-4BB2-94AA-11E6A6B310F5}"/>
+                <a16:creationId xmlns:a16="http://schemas.microsoft.com/office/drawing/2014/main" id="{DA72478D-97F8-490F-9736-0B29B62370E0}"/>
               </a:ext>
             </a:extLst>
           </p:cNvPr>
@@ -18481,7 +18481,7 @@
           <p:cNvPr id="29" name="">
             <a:extLst xmlns:a="http://schemas.openxmlformats.org/drawingml/2006/main">
               <a:ext uri="{FF2B5EF4-FFF2-40B4-BE49-F238E27FC236}">
-                <a16:creationId xmlns:a16="http://schemas.microsoft.com/office/drawing/2014/main" id="{F5FE576D-3272-452E-B85D-07441C43CF13}"/>
+                <a16:creationId xmlns:a16="http://schemas.microsoft.com/office/drawing/2014/main" id="{9CED0913-2543-4B5C-BB90-18244B24DABC}"/>
               </a:ext>
             </a:extLst>
           </p:cNvPr>
@@ -18533,7 +18533,7 @@
           <p:cNvPr id="30" name="">
             <a:extLst xmlns:a="http://schemas.openxmlformats.org/drawingml/2006/main">
               <a:ext uri="{FF2B5EF4-FFF2-40B4-BE49-F238E27FC236}">
-                <a16:creationId xmlns:a16="http://schemas.microsoft.com/office/drawing/2014/main" id="{9F39AD96-B0BE-4864-8F47-DBCD6A79C8B1}"/>
+                <a16:creationId xmlns:a16="http://schemas.microsoft.com/office/drawing/2014/main" id="{443DC647-AE0A-46C0-A4EC-F5C77143B801}"/>
               </a:ext>
             </a:extLst>
           </p:cNvPr>
@@ -18585,7 +18585,7 @@
           <p:cNvPr id="31" name="">
             <a:extLst xmlns:a="http://schemas.openxmlformats.org/drawingml/2006/main">
               <a:ext uri="{FF2B5EF4-FFF2-40B4-BE49-F238E27FC236}">
-                <a16:creationId xmlns:a16="http://schemas.microsoft.com/office/drawing/2014/main" id="{2A54B31A-F94F-4F9D-917F-CAA83DABF8DA}"/>
+                <a16:creationId xmlns:a16="http://schemas.microsoft.com/office/drawing/2014/main" id="{2B89CCDD-88FC-4BF3-BB1D-B2ACCE516B84}"/>
               </a:ext>
             </a:extLst>
           </p:cNvPr>
@@ -18616,7 +18616,7 @@
           <p:cNvPr id="32" name="">
             <a:extLst xmlns:a="http://schemas.openxmlformats.org/drawingml/2006/main">
               <a:ext uri="{FF2B5EF4-FFF2-40B4-BE49-F238E27FC236}">
-                <a16:creationId xmlns:a16="http://schemas.microsoft.com/office/drawing/2014/main" id="{A9B05DB3-AE63-4DA9-BDA7-D6FF17ABEF0D}"/>
+                <a16:creationId xmlns:a16="http://schemas.microsoft.com/office/drawing/2014/main" id="{64A46871-883A-4028-A029-CB04237566EA}"/>
               </a:ext>
             </a:extLst>
           </p:cNvPr>
@@ -18647,7 +18647,7 @@
           <p:cNvPr id="33" name="">
             <a:extLst xmlns:a="http://schemas.openxmlformats.org/drawingml/2006/main">
               <a:ext uri="{FF2B5EF4-FFF2-40B4-BE49-F238E27FC236}">
-                <a16:creationId xmlns:a16="http://schemas.microsoft.com/office/drawing/2014/main" id="{5BB79A42-7C47-4C60-BCEF-D1F7A3D8EF2A}"/>
+                <a16:creationId xmlns:a16="http://schemas.microsoft.com/office/drawing/2014/main" id="{6ACF5F49-F308-47F6-B344-0791BF6FE9B3}"/>
               </a:ext>
             </a:extLst>
           </p:cNvPr>
@@ -18699,7 +18699,7 @@
           <p:cNvPr id="34" name="">
             <a:extLst xmlns:a="http://schemas.openxmlformats.org/drawingml/2006/main">
               <a:ext uri="{FF2B5EF4-FFF2-40B4-BE49-F238E27FC236}">
-                <a16:creationId xmlns:a16="http://schemas.microsoft.com/office/drawing/2014/main" id="{05C431CB-F707-4EB5-A0AE-0DFA5864E289}"/>
+                <a16:creationId xmlns:a16="http://schemas.microsoft.com/office/drawing/2014/main" id="{863FF2E7-26AB-405F-9397-EBFEE1408A7A}"/>
               </a:ext>
             </a:extLst>
           </p:cNvPr>
@@ -18751,7 +18751,7 @@
           <p:cNvPr id="35" name="">
             <a:extLst xmlns:a="http://schemas.openxmlformats.org/drawingml/2006/main">
               <a:ext uri="{FF2B5EF4-FFF2-40B4-BE49-F238E27FC236}">
-                <a16:creationId xmlns:a16="http://schemas.microsoft.com/office/drawing/2014/main" id="{67A7F81D-5BF3-4E8C-AD41-879A92411751}"/>
+                <a16:creationId xmlns:a16="http://schemas.microsoft.com/office/drawing/2014/main" id="{9486EA1F-AB95-46C9-9A25-45F351821C40}"/>
               </a:ext>
             </a:extLst>
           </p:cNvPr>
@@ -18803,7 +18803,7 @@
           <p:cNvPr id="36" name="">
             <a:extLst xmlns:a="http://schemas.openxmlformats.org/drawingml/2006/main">
               <a:ext uri="{FF2B5EF4-FFF2-40B4-BE49-F238E27FC236}">
-                <a16:creationId xmlns:a16="http://schemas.microsoft.com/office/drawing/2014/main" id="{37A64D5F-F011-4973-9117-18E1247E088D}"/>
+                <a16:creationId xmlns:a16="http://schemas.microsoft.com/office/drawing/2014/main" id="{C0A6DAB4-C32D-4B9B-BD5B-6EEB02E01379}"/>
               </a:ext>
             </a:extLst>
           </p:cNvPr>
@@ -18855,7 +18855,7 @@
           <p:cNvPr id="37" name="">
             <a:extLst xmlns:a="http://schemas.openxmlformats.org/drawingml/2006/main">
               <a:ext uri="{FF2B5EF4-FFF2-40B4-BE49-F238E27FC236}">
-                <a16:creationId xmlns:a16="http://schemas.microsoft.com/office/drawing/2014/main" id="{C6CCD63A-6282-4C8F-9191-6E814E224062}"/>
+                <a16:creationId xmlns:a16="http://schemas.microsoft.com/office/drawing/2014/main" id="{D0A5B46B-DADF-45E1-8FD3-4BD5955EB4A6}"/>
               </a:ext>
             </a:extLst>
           </p:cNvPr>
@@ -18907,7 +18907,7 @@
           <p:cNvPr id="38" name="">
             <a:extLst xmlns:a="http://schemas.openxmlformats.org/drawingml/2006/main">
               <a:ext uri="{FF2B5EF4-FFF2-40B4-BE49-F238E27FC236}">
-                <a16:creationId xmlns:a16="http://schemas.microsoft.com/office/drawing/2014/main" id="{CAA3036C-D76A-4589-BE0D-C8230D3C6654}"/>
+                <a16:creationId xmlns:a16="http://schemas.microsoft.com/office/drawing/2014/main" id="{5DFAAB96-0832-4AC7-8261-CD4BCE747947}"/>
               </a:ext>
             </a:extLst>
           </p:cNvPr>
@@ -18938,7 +18938,7 @@
           <p:cNvPr id="39" name="">
             <a:extLst xmlns:a="http://schemas.openxmlformats.org/drawingml/2006/main">
               <a:ext uri="{FF2B5EF4-FFF2-40B4-BE49-F238E27FC236}">
-                <a16:creationId xmlns:a16="http://schemas.microsoft.com/office/drawing/2014/main" id="{608AC97A-BE10-412F-A3AC-1E3E9E810028}"/>
+                <a16:creationId xmlns:a16="http://schemas.microsoft.com/office/drawing/2014/main" id="{34F78F6B-E026-4992-9A87-640336B19086}"/>
               </a:ext>
             </a:extLst>
           </p:cNvPr>
@@ -18990,7 +18990,7 @@
           <p:cNvPr id="40" name="">
             <a:extLst xmlns:a="http://schemas.openxmlformats.org/drawingml/2006/main">
               <a:ext uri="{FF2B5EF4-FFF2-40B4-BE49-F238E27FC236}">
-                <a16:creationId xmlns:a16="http://schemas.microsoft.com/office/drawing/2014/main" id="{C557C473-D125-4D75-BAD1-CEBC996564E3}"/>
+                <a16:creationId xmlns:a16="http://schemas.microsoft.com/office/drawing/2014/main" id="{F4E5556E-65BC-4DF3-AF67-28D92C406B88}"/>
               </a:ext>
             </a:extLst>
           </p:cNvPr>
@@ -19042,7 +19042,7 @@
           <p:cNvPr id="41" name="">
             <a:extLst xmlns:a="http://schemas.openxmlformats.org/drawingml/2006/main">
               <a:ext uri="{FF2B5EF4-FFF2-40B4-BE49-F238E27FC236}">
-                <a16:creationId xmlns:a16="http://schemas.microsoft.com/office/drawing/2014/main" id="{7C9589AE-F15C-407B-B8B8-0F00617505D0}"/>
+                <a16:creationId xmlns:a16="http://schemas.microsoft.com/office/drawing/2014/main" id="{E4D63E89-830B-46B3-8A18-ADF1B50D34FD}"/>
               </a:ext>
             </a:extLst>
           </p:cNvPr>
@@ -19094,7 +19094,7 @@
           <p:cNvPr id="42" name="">
             <a:extLst xmlns:a="http://schemas.openxmlformats.org/drawingml/2006/main">
               <a:ext uri="{FF2B5EF4-FFF2-40B4-BE49-F238E27FC236}">
-                <a16:creationId xmlns:a16="http://schemas.microsoft.com/office/drawing/2014/main" id="{C71BF303-DF57-4692-A406-9C887ED99BD5}"/>
+                <a16:creationId xmlns:a16="http://schemas.microsoft.com/office/drawing/2014/main" id="{B8135518-B905-45F1-9379-AACBEFE69C48}"/>
               </a:ext>
             </a:extLst>
           </p:cNvPr>
@@ -19146,7 +19146,7 @@
           <p:cNvPr id="43" name="">
             <a:extLst xmlns:a="http://schemas.openxmlformats.org/drawingml/2006/main">
               <a:ext uri="{FF2B5EF4-FFF2-40B4-BE49-F238E27FC236}">
-                <a16:creationId xmlns:a16="http://schemas.microsoft.com/office/drawing/2014/main" id="{89F0149A-E2AF-4E28-A73C-EB537BC1B50A}"/>
+                <a16:creationId xmlns:a16="http://schemas.microsoft.com/office/drawing/2014/main" id="{683BEF1F-AE13-4AEF-8268-330FED32AA83}"/>
               </a:ext>
             </a:extLst>
           </p:cNvPr>
@@ -19198,7 +19198,7 @@
           <p:cNvPr id="44" name="">
             <a:extLst xmlns:a="http://schemas.openxmlformats.org/drawingml/2006/main">
               <a:ext uri="{FF2B5EF4-FFF2-40B4-BE49-F238E27FC236}">
-                <a16:creationId xmlns:a16="http://schemas.microsoft.com/office/drawing/2014/main" id="{1C714D96-881B-4394-932B-2901B3B369DE}"/>
+                <a16:creationId xmlns:a16="http://schemas.microsoft.com/office/drawing/2014/main" id="{DACF392B-CB8B-4765-9C73-C5D4EB029D28}"/>
               </a:ext>
             </a:extLst>
           </p:cNvPr>
@@ -19229,7 +19229,7 @@
           <p:cNvPr id="45" name="">
             <a:extLst xmlns:a="http://schemas.openxmlformats.org/drawingml/2006/main">
               <a:ext uri="{FF2B5EF4-FFF2-40B4-BE49-F238E27FC236}">
-                <a16:creationId xmlns:a16="http://schemas.microsoft.com/office/drawing/2014/main" id="{32AC0146-962E-4E30-891D-51EF5DE503EB}"/>
+                <a16:creationId xmlns:a16="http://schemas.microsoft.com/office/drawing/2014/main" id="{13F86D73-8DEC-4016-B682-2EC8FE011513}"/>
               </a:ext>
             </a:extLst>
           </p:cNvPr>
@@ -19260,7 +19260,7 @@
           <p:cNvPr id="46" name="">
             <a:extLst xmlns:a="http://schemas.openxmlformats.org/drawingml/2006/main">
               <a:ext uri="{FF2B5EF4-FFF2-40B4-BE49-F238E27FC236}">
-                <a16:creationId xmlns:a16="http://schemas.microsoft.com/office/drawing/2014/main" id="{D3693FDA-6613-4A3F-BD10-E13047E403C2}"/>
+                <a16:creationId xmlns:a16="http://schemas.microsoft.com/office/drawing/2014/main" id="{9CA4F3EE-F757-4414-8D71-4E6144C239FE}"/>
               </a:ext>
             </a:extLst>
           </p:cNvPr>
@@ -19312,7 +19312,7 @@
           <p:cNvPr id="47" name="">
             <a:extLst xmlns:a="http://schemas.openxmlformats.org/drawingml/2006/main">
               <a:ext uri="{FF2B5EF4-FFF2-40B4-BE49-F238E27FC236}">
-                <a16:creationId xmlns:a16="http://schemas.microsoft.com/office/drawing/2014/main" id="{D5EA8FBD-5E64-4A0B-A301-174F88305994}"/>
+                <a16:creationId xmlns:a16="http://schemas.microsoft.com/office/drawing/2014/main" id="{36B2E340-83F7-4B33-9DB7-D94331DFCD9B}"/>
               </a:ext>
             </a:extLst>
           </p:cNvPr>
@@ -19364,7 +19364,7 @@
           <p:cNvPr id="48" name="">
             <a:extLst xmlns:a="http://schemas.openxmlformats.org/drawingml/2006/main">
               <a:ext uri="{FF2B5EF4-FFF2-40B4-BE49-F238E27FC236}">
-                <a16:creationId xmlns:a16="http://schemas.microsoft.com/office/drawing/2014/main" id="{3D0A6A04-42D5-4637-87C8-2FFD78F481A2}"/>
+                <a16:creationId xmlns:a16="http://schemas.microsoft.com/office/drawing/2014/main" id="{61D21C36-BF7E-4767-8876-FDFAFCF04024}"/>
               </a:ext>
             </a:extLst>
           </p:cNvPr>
@@ -19416,7 +19416,7 @@
           <p:cNvPr id="49" name="">
             <a:extLst xmlns:a="http://schemas.openxmlformats.org/drawingml/2006/main">
               <a:ext uri="{FF2B5EF4-FFF2-40B4-BE49-F238E27FC236}">
-                <a16:creationId xmlns:a16="http://schemas.microsoft.com/office/drawing/2014/main" id="{EF6D79CD-2410-485A-A642-6B154152F433}"/>
+                <a16:creationId xmlns:a16="http://schemas.microsoft.com/office/drawing/2014/main" id="{6AC2EBFA-C9FE-4309-874E-2A383399F27E}"/>
               </a:ext>
             </a:extLst>
           </p:cNvPr>
@@ -19468,7 +19468,7 @@
           <p:cNvPr id="50" name="">
             <a:extLst xmlns:a="http://schemas.openxmlformats.org/drawingml/2006/main">
               <a:ext uri="{FF2B5EF4-FFF2-40B4-BE49-F238E27FC236}">
-                <a16:creationId xmlns:a16="http://schemas.microsoft.com/office/drawing/2014/main" id="{53B05FD5-4760-455F-BA23-B05599B6276D}"/>
+                <a16:creationId xmlns:a16="http://schemas.microsoft.com/office/drawing/2014/main" id="{FDD5F231-7FAE-402A-B79B-35F9202CD428}"/>
               </a:ext>
             </a:extLst>
           </p:cNvPr>
@@ -19520,7 +19520,7 @@
           <p:cNvPr id="51" name="">
             <a:extLst xmlns:a="http://schemas.openxmlformats.org/drawingml/2006/main">
               <a:ext uri="{FF2B5EF4-FFF2-40B4-BE49-F238E27FC236}">
-                <a16:creationId xmlns:a16="http://schemas.microsoft.com/office/drawing/2014/main" id="{E44CB125-945F-48DA-B481-1299B8370626}"/>
+                <a16:creationId xmlns:a16="http://schemas.microsoft.com/office/drawing/2014/main" id="{656F947B-7FBC-4462-90D9-D852D1B9F2A2}"/>
               </a:ext>
             </a:extLst>
           </p:cNvPr>
@@ -19551,7 +19551,7 @@
           <p:cNvPr id="52" name="">
             <a:extLst xmlns:a="http://schemas.openxmlformats.org/drawingml/2006/main">
               <a:ext uri="{FF2B5EF4-FFF2-40B4-BE49-F238E27FC236}">
-                <a16:creationId xmlns:a16="http://schemas.microsoft.com/office/drawing/2014/main" id="{2FF6FBB8-E02E-4975-B38C-84C720497DC8}"/>
+                <a16:creationId xmlns:a16="http://schemas.microsoft.com/office/drawing/2014/main" id="{4C418C81-BA80-4DF8-8EF8-D38DE2B34B77}"/>
               </a:ext>
             </a:extLst>
           </p:cNvPr>
@@ -19603,7 +19603,7 @@
           <p:cNvPr id="53" name="">
             <a:extLst xmlns:a="http://schemas.openxmlformats.org/drawingml/2006/main">
               <a:ext uri="{FF2B5EF4-FFF2-40B4-BE49-F238E27FC236}">
-                <a16:creationId xmlns:a16="http://schemas.microsoft.com/office/drawing/2014/main" id="{FED57C10-E347-4737-9D4C-1E4AD9525FB4}"/>
+                <a16:creationId xmlns:a16="http://schemas.microsoft.com/office/drawing/2014/main" id="{5F2D6C69-6E0B-4F40-BA32-7819E238ADB4}"/>
               </a:ext>
             </a:extLst>
           </p:cNvPr>
@@ -19655,7 +19655,7 @@
           <p:cNvPr id="54" name="">
             <a:extLst xmlns:a="http://schemas.openxmlformats.org/drawingml/2006/main">
               <a:ext uri="{FF2B5EF4-FFF2-40B4-BE49-F238E27FC236}">
-                <a16:creationId xmlns:a16="http://schemas.microsoft.com/office/drawing/2014/main" id="{B1600546-5408-4FD2-A8F7-91F12DA0C32C}"/>
+                <a16:creationId xmlns:a16="http://schemas.microsoft.com/office/drawing/2014/main" id="{C472655D-4620-4CF1-892C-D7126E71EB7C}"/>
               </a:ext>
             </a:extLst>
           </p:cNvPr>
@@ -19707,7 +19707,7 @@
           <p:cNvPr id="55" name="">
             <a:extLst xmlns:a="http://schemas.openxmlformats.org/drawingml/2006/main">
               <a:ext uri="{FF2B5EF4-FFF2-40B4-BE49-F238E27FC236}">
-                <a16:creationId xmlns:a16="http://schemas.microsoft.com/office/drawing/2014/main" id="{488BEF8D-8E50-479A-93BD-4B385C523B5A}"/>
+                <a16:creationId xmlns:a16="http://schemas.microsoft.com/office/drawing/2014/main" id="{C12AA0B1-24A4-4826-A86C-CD47437A14B7}"/>
               </a:ext>
             </a:extLst>
           </p:cNvPr>
@@ -19759,7 +19759,7 @@
           <p:cNvPr id="56" name="">
             <a:extLst xmlns:a="http://schemas.openxmlformats.org/drawingml/2006/main">
               <a:ext uri="{FF2B5EF4-FFF2-40B4-BE49-F238E27FC236}">
-                <a16:creationId xmlns:a16="http://schemas.microsoft.com/office/drawing/2014/main" id="{D39190B4-04F6-4D1A-B58F-2877EDDEE225}"/>
+                <a16:creationId xmlns:a16="http://schemas.microsoft.com/office/drawing/2014/main" id="{ED884FAF-B314-4B79-BC87-B9101F08470A}"/>
               </a:ext>
             </a:extLst>
           </p:cNvPr>
@@ -19811,7 +19811,7 @@
           <p:cNvPr id="57" name="">
             <a:extLst xmlns:a="http://schemas.openxmlformats.org/drawingml/2006/main">
               <a:ext uri="{FF2B5EF4-FFF2-40B4-BE49-F238E27FC236}">
-                <a16:creationId xmlns:a16="http://schemas.microsoft.com/office/drawing/2014/main" id="{1E3D9524-A246-4C7F-954C-43A1202B9F7E}"/>
+                <a16:creationId xmlns:a16="http://schemas.microsoft.com/office/drawing/2014/main" id="{B9451466-C155-4681-838B-8E1613AB549D}"/>
               </a:ext>
             </a:extLst>
           </p:cNvPr>
@@ -19842,7 +19842,7 @@
           <p:cNvPr id="58" name="">
             <a:extLst xmlns:a="http://schemas.openxmlformats.org/drawingml/2006/main">
               <a:ext uri="{FF2B5EF4-FFF2-40B4-BE49-F238E27FC236}">
-                <a16:creationId xmlns:a16="http://schemas.microsoft.com/office/drawing/2014/main" id="{B9F1C062-F512-44D7-A876-2471C10B876B}"/>
+                <a16:creationId xmlns:a16="http://schemas.microsoft.com/office/drawing/2014/main" id="{FF4E135A-2AB0-40A9-B658-6DCB01326605}"/>
               </a:ext>
             </a:extLst>
           </p:cNvPr>
@@ -19873,7 +19873,7 @@
           <p:cNvPr id="59" name="">
             <a:extLst xmlns:a="http://schemas.openxmlformats.org/drawingml/2006/main">
               <a:ext uri="{FF2B5EF4-FFF2-40B4-BE49-F238E27FC236}">
-                <a16:creationId xmlns:a16="http://schemas.microsoft.com/office/drawing/2014/main" id="{52805B6E-E5F8-4DDA-8D17-9D167959E158}"/>
+                <a16:creationId xmlns:a16="http://schemas.microsoft.com/office/drawing/2014/main" id="{2BD06BD6-A40A-4D6C-B198-196E738E75D7}"/>
               </a:ext>
             </a:extLst>
           </p:cNvPr>
@@ -19925,7 +19925,7 @@
           <p:cNvPr id="60" name="">
             <a:extLst xmlns:a="http://schemas.openxmlformats.org/drawingml/2006/main">
               <a:ext uri="{FF2B5EF4-FFF2-40B4-BE49-F238E27FC236}">
-                <a16:creationId xmlns:a16="http://schemas.microsoft.com/office/drawing/2014/main" id="{34B437D4-8B78-48C0-B50D-3D87CE5DFDFE}"/>
+                <a16:creationId xmlns:a16="http://schemas.microsoft.com/office/drawing/2014/main" id="{1F356BD1-A7EC-4795-BB8C-58D880EFC29E}"/>
               </a:ext>
             </a:extLst>
           </p:cNvPr>
@@ -19977,7 +19977,7 @@
           <p:cNvPr id="61" name="">
             <a:extLst xmlns:a="http://schemas.openxmlformats.org/drawingml/2006/main">
               <a:ext uri="{FF2B5EF4-FFF2-40B4-BE49-F238E27FC236}">
-                <a16:creationId xmlns:a16="http://schemas.microsoft.com/office/drawing/2014/main" id="{B409B324-291C-4878-843A-5A49DC3824F2}"/>
+                <a16:creationId xmlns:a16="http://schemas.microsoft.com/office/drawing/2014/main" id="{07CD562D-122A-4AC7-BC83-B123BFC4FFB3}"/>
               </a:ext>
             </a:extLst>
           </p:cNvPr>
@@ -20029,7 +20029,7 @@
           <p:cNvPr id="62" name="">
             <a:extLst xmlns:a="http://schemas.openxmlformats.org/drawingml/2006/main">
               <a:ext uri="{FF2B5EF4-FFF2-40B4-BE49-F238E27FC236}">
-                <a16:creationId xmlns:a16="http://schemas.microsoft.com/office/drawing/2014/main" id="{337DC016-0A42-4DA6-8724-DFCCDFA9DA82}"/>
+                <a16:creationId xmlns:a16="http://schemas.microsoft.com/office/drawing/2014/main" id="{63C40836-2768-433D-8201-9D8673B92ABE}"/>
               </a:ext>
             </a:extLst>
           </p:cNvPr>
@@ -20081,7 +20081,7 @@
           <p:cNvPr id="63" name="">
             <a:extLst xmlns:a="http://schemas.openxmlformats.org/drawingml/2006/main">
               <a:ext uri="{FF2B5EF4-FFF2-40B4-BE49-F238E27FC236}">
-                <a16:creationId xmlns:a16="http://schemas.microsoft.com/office/drawing/2014/main" id="{5879C826-E09C-48D8-B329-4502BD3F3396}"/>
+                <a16:creationId xmlns:a16="http://schemas.microsoft.com/office/drawing/2014/main" id="{C99AF9AB-4E0D-4269-A866-E1464D0893BF}"/>
               </a:ext>
             </a:extLst>
           </p:cNvPr>
@@ -20133,7 +20133,7 @@
           <p:cNvPr id="64" name="">
             <a:extLst xmlns:a="http://schemas.openxmlformats.org/drawingml/2006/main">
               <a:ext uri="{FF2B5EF4-FFF2-40B4-BE49-F238E27FC236}">
-                <a16:creationId xmlns:a16="http://schemas.microsoft.com/office/drawing/2014/main" id="{01CCA417-07FD-44B8-AE62-C90A7C888883}"/>
+                <a16:creationId xmlns:a16="http://schemas.microsoft.com/office/drawing/2014/main" id="{05A8FC67-E671-4D24-B218-A44111429027}"/>
               </a:ext>
             </a:extLst>
           </p:cNvPr>
@@ -20164,7 +20164,7 @@
           <p:cNvPr id="65" name="">
             <a:extLst xmlns:a="http://schemas.openxmlformats.org/drawingml/2006/main">
               <a:ext uri="{FF2B5EF4-FFF2-40B4-BE49-F238E27FC236}">
-                <a16:creationId xmlns:a16="http://schemas.microsoft.com/office/drawing/2014/main" id="{4306DF23-3481-4985-95A0-49C51DA33083}"/>
+                <a16:creationId xmlns:a16="http://schemas.microsoft.com/office/drawing/2014/main" id="{E3721D51-230D-4B8C-BFD2-8819C64B7174}"/>
               </a:ext>
             </a:extLst>
           </p:cNvPr>
@@ -20216,7 +20216,7 @@
           <p:cNvPr id="66" name="">
             <a:extLst xmlns:a="http://schemas.openxmlformats.org/drawingml/2006/main">
               <a:ext uri="{FF2B5EF4-FFF2-40B4-BE49-F238E27FC236}">
-                <a16:creationId xmlns:a16="http://schemas.microsoft.com/office/drawing/2014/main" id="{8A3B7E98-4101-470B-AAF3-EC624976C255}"/>
+                <a16:creationId xmlns:a16="http://schemas.microsoft.com/office/drawing/2014/main" id="{CA7923BB-453A-4A99-8DC0-555267A40583}"/>
               </a:ext>
             </a:extLst>
           </p:cNvPr>
@@ -20268,7 +20268,7 @@
           <p:cNvPr id="67" name="">
             <a:extLst xmlns:a="http://schemas.openxmlformats.org/drawingml/2006/main">
               <a:ext uri="{FF2B5EF4-FFF2-40B4-BE49-F238E27FC236}">
-                <a16:creationId xmlns:a16="http://schemas.microsoft.com/office/drawing/2014/main" id="{029C1A21-9E93-4730-B49C-C3698B888BB2}"/>
+                <a16:creationId xmlns:a16="http://schemas.microsoft.com/office/drawing/2014/main" id="{62866A91-082F-4E1E-B77D-7C7B7EE6D081}"/>
               </a:ext>
             </a:extLst>
           </p:cNvPr>
@@ -20320,7 +20320,7 @@
           <p:cNvPr id="68" name="">
             <a:extLst xmlns:a="http://schemas.openxmlformats.org/drawingml/2006/main">
               <a:ext uri="{FF2B5EF4-FFF2-40B4-BE49-F238E27FC236}">
-                <a16:creationId xmlns:a16="http://schemas.microsoft.com/office/drawing/2014/main" id="{A1F20BAB-4946-4FA7-9E61-FFA3733BB6E3}"/>
+                <a16:creationId xmlns:a16="http://schemas.microsoft.com/office/drawing/2014/main" id="{E156AAFD-F644-4FAF-BF95-1FC2441DAF4D}"/>
               </a:ext>
             </a:extLst>
           </p:cNvPr>
@@ -20372,7 +20372,7 @@
           <p:cNvPr id="69" name="">
             <a:extLst xmlns:a="http://schemas.openxmlformats.org/drawingml/2006/main">
               <a:ext uri="{FF2B5EF4-FFF2-40B4-BE49-F238E27FC236}">
-                <a16:creationId xmlns:a16="http://schemas.microsoft.com/office/drawing/2014/main" id="{07C9B982-7449-444A-ABA0-CA9E49847668}"/>
+                <a16:creationId xmlns:a16="http://schemas.microsoft.com/office/drawing/2014/main" id="{92B303B9-3D46-4507-B15A-E083F4BE7D7B}"/>
               </a:ext>
             </a:extLst>
           </p:cNvPr>
@@ -20424,7 +20424,7 @@
           <p:cNvPr id="70" name="">
             <a:extLst xmlns:a="http://schemas.openxmlformats.org/drawingml/2006/main">
               <a:ext uri="{FF2B5EF4-FFF2-40B4-BE49-F238E27FC236}">
-                <a16:creationId xmlns:a16="http://schemas.microsoft.com/office/drawing/2014/main" id="{6C8CB0EB-E5E0-4C0B-AE97-975DD492D378}"/>
+                <a16:creationId xmlns:a16="http://schemas.microsoft.com/office/drawing/2014/main" id="{D24BF1A0-4AC1-4D92-BDA3-B6164F925369}"/>
               </a:ext>
             </a:extLst>
           </p:cNvPr>
@@ -20455,7 +20455,7 @@
           <p:cNvPr id="71" name="">
             <a:extLst xmlns:a="http://schemas.openxmlformats.org/drawingml/2006/main">
               <a:ext uri="{FF2B5EF4-FFF2-40B4-BE49-F238E27FC236}">
-                <a16:creationId xmlns:a16="http://schemas.microsoft.com/office/drawing/2014/main" id="{9C157F6B-2536-44D3-81BA-C8E59DD7A4A5}"/>
+                <a16:creationId xmlns:a16="http://schemas.microsoft.com/office/drawing/2014/main" id="{65B381A6-EA61-4074-912F-CF3D18E366A8}"/>
               </a:ext>
             </a:extLst>
           </p:cNvPr>
@@ -20486,7 +20486,7 @@
           <p:cNvPr id="72" name="">
             <a:extLst xmlns:a="http://schemas.openxmlformats.org/drawingml/2006/main">
               <a:ext uri="{FF2B5EF4-FFF2-40B4-BE49-F238E27FC236}">
-                <a16:creationId xmlns:a16="http://schemas.microsoft.com/office/drawing/2014/main" id="{2A158866-0507-412D-8C8E-68683966B30A}"/>
+                <a16:creationId xmlns:a16="http://schemas.microsoft.com/office/drawing/2014/main" id="{514B089A-31C0-48DB-AB05-7E04E80BF41B}"/>
               </a:ext>
             </a:extLst>
           </p:cNvPr>
@@ -20538,7 +20538,7 @@
           <p:cNvPr id="73" name="">
             <a:extLst xmlns:a="http://schemas.openxmlformats.org/drawingml/2006/main">
               <a:ext uri="{FF2B5EF4-FFF2-40B4-BE49-F238E27FC236}">
-                <a16:creationId xmlns:a16="http://schemas.microsoft.com/office/drawing/2014/main" id="{3A11D1B9-0ACB-4F82-A7A0-4CE74171C1D7}"/>
+                <a16:creationId xmlns:a16="http://schemas.microsoft.com/office/drawing/2014/main" id="{AD86AF7E-48A2-4AD3-80DB-AF7DE903AC77}"/>
               </a:ext>
             </a:extLst>
           </p:cNvPr>
@@ -20590,7 +20590,7 @@
           <p:cNvPr id="74" name="">
             <a:extLst xmlns:a="http://schemas.openxmlformats.org/drawingml/2006/main">
               <a:ext uri="{FF2B5EF4-FFF2-40B4-BE49-F238E27FC236}">
-                <a16:creationId xmlns:a16="http://schemas.microsoft.com/office/drawing/2014/main" id="{5D3B56FA-1D72-486C-AFE9-7111CCD0AFA5}"/>
+                <a16:creationId xmlns:a16="http://schemas.microsoft.com/office/drawing/2014/main" id="{3F22A2AD-6E9A-45FE-8680-60DD714ED8EB}"/>
               </a:ext>
             </a:extLst>
           </p:cNvPr>
@@ -20642,7 +20642,7 @@
           <p:cNvPr id="75" name="">
             <a:extLst xmlns:a="http://schemas.openxmlformats.org/drawingml/2006/main">
               <a:ext uri="{FF2B5EF4-FFF2-40B4-BE49-F238E27FC236}">
-                <a16:creationId xmlns:a16="http://schemas.microsoft.com/office/drawing/2014/main" id="{B84B2AD7-4461-4034-9B75-6A473F221CA4}"/>
+                <a16:creationId xmlns:a16="http://schemas.microsoft.com/office/drawing/2014/main" id="{DE86EEEF-B1E9-4CE2-B336-551942C9CB6F}"/>
               </a:ext>
             </a:extLst>
           </p:cNvPr>
@@ -20694,7 +20694,7 @@
           <p:cNvPr id="76" name="">
             <a:extLst xmlns:a="http://schemas.openxmlformats.org/drawingml/2006/main">
               <a:ext uri="{FF2B5EF4-FFF2-40B4-BE49-F238E27FC236}">
-                <a16:creationId xmlns:a16="http://schemas.microsoft.com/office/drawing/2014/main" id="{735DB415-24E3-4B64-A278-C15190296E50}"/>
+                <a16:creationId xmlns:a16="http://schemas.microsoft.com/office/drawing/2014/main" id="{7B9B591E-41D3-43D0-BE25-0B84B113FD72}"/>
               </a:ext>
             </a:extLst>
           </p:cNvPr>
@@ -20746,7 +20746,7 @@
           <p:cNvPr id="77" name="">
             <a:extLst xmlns:a="http://schemas.openxmlformats.org/drawingml/2006/main">
               <a:ext uri="{FF2B5EF4-FFF2-40B4-BE49-F238E27FC236}">
-                <a16:creationId xmlns:a16="http://schemas.microsoft.com/office/drawing/2014/main" id="{9CDC08A8-89E3-458A-83CB-A1827F3AC66E}"/>
+                <a16:creationId xmlns:a16="http://schemas.microsoft.com/office/drawing/2014/main" id="{0433FE8A-A033-499C-AF21-37D95AC82E5D}"/>
               </a:ext>
             </a:extLst>
           </p:cNvPr>
@@ -20777,7 +20777,7 @@
           <p:cNvPr id="78" name="">
             <a:extLst xmlns:a="http://schemas.openxmlformats.org/drawingml/2006/main">
               <a:ext uri="{FF2B5EF4-FFF2-40B4-BE49-F238E27FC236}">
-                <a16:creationId xmlns:a16="http://schemas.microsoft.com/office/drawing/2014/main" id="{1A588CDA-46BA-4679-AABE-CD8382A018B3}"/>
+                <a16:creationId xmlns:a16="http://schemas.microsoft.com/office/drawing/2014/main" id="{3961CDCB-70EE-415B-AB15-CFDD4F5A3040}"/>
               </a:ext>
             </a:extLst>
           </p:cNvPr>
@@ -20829,7 +20829,7 @@
           <p:cNvPr id="79" name="">
             <a:extLst xmlns:a="http://schemas.openxmlformats.org/drawingml/2006/main">
               <a:ext uri="{FF2B5EF4-FFF2-40B4-BE49-F238E27FC236}">
-                <a16:creationId xmlns:a16="http://schemas.microsoft.com/office/drawing/2014/main" id="{8C8CF385-B0A8-4962-873A-C2D246616D88}"/>
+                <a16:creationId xmlns:a16="http://schemas.microsoft.com/office/drawing/2014/main" id="{027F7FC0-8EEC-4305-AECC-90A9160B0A4D}"/>
               </a:ext>
             </a:extLst>
           </p:cNvPr>
@@ -20881,7 +20881,7 @@
           <p:cNvPr id="80" name="">
             <a:extLst xmlns:a="http://schemas.openxmlformats.org/drawingml/2006/main">
               <a:ext uri="{FF2B5EF4-FFF2-40B4-BE49-F238E27FC236}">
-                <a16:creationId xmlns:a16="http://schemas.microsoft.com/office/drawing/2014/main" id="{577A275B-CD38-4BE4-83B1-0717031912AA}"/>
+                <a16:creationId xmlns:a16="http://schemas.microsoft.com/office/drawing/2014/main" id="{B956D7E6-DFA8-427F-8A16-BC0D262DB962}"/>
               </a:ext>
             </a:extLst>
           </p:cNvPr>
@@ -20933,7 +20933,7 @@
           <p:cNvPr id="81" name="">
             <a:extLst xmlns:a="http://schemas.openxmlformats.org/drawingml/2006/main">
               <a:ext uri="{FF2B5EF4-FFF2-40B4-BE49-F238E27FC236}">
-                <a16:creationId xmlns:a16="http://schemas.microsoft.com/office/drawing/2014/main" id="{13072255-CAFD-4680-A013-48031A6198B6}"/>
+                <a16:creationId xmlns:a16="http://schemas.microsoft.com/office/drawing/2014/main" id="{343C1471-3A06-4865-B104-0977F0C0B79C}"/>
               </a:ext>
             </a:extLst>
           </p:cNvPr>
@@ -20985,7 +20985,7 @@
           <p:cNvPr id="82" name="">
             <a:extLst xmlns:a="http://schemas.openxmlformats.org/drawingml/2006/main">
               <a:ext uri="{FF2B5EF4-FFF2-40B4-BE49-F238E27FC236}">
-                <a16:creationId xmlns:a16="http://schemas.microsoft.com/office/drawing/2014/main" id="{1DDEFE98-2EE3-4F3B-B024-C116B189A0AC}"/>
+                <a16:creationId xmlns:a16="http://schemas.microsoft.com/office/drawing/2014/main" id="{D8358CEA-7D7C-4DEC-AFE7-4AF281744FE5}"/>
               </a:ext>
             </a:extLst>
           </p:cNvPr>
@@ -21037,7 +21037,7 @@
           <p:cNvPr id="83" name="">
             <a:extLst xmlns:a="http://schemas.openxmlformats.org/drawingml/2006/main">
               <a:ext uri="{FF2B5EF4-FFF2-40B4-BE49-F238E27FC236}">
-                <a16:creationId xmlns:a16="http://schemas.microsoft.com/office/drawing/2014/main" id="{838F9E73-7FA0-41A7-888F-D1ED9B1C9F01}"/>
+                <a16:creationId xmlns:a16="http://schemas.microsoft.com/office/drawing/2014/main" id="{254A6004-6C37-484D-B7EB-902FCFA77957}"/>
               </a:ext>
             </a:extLst>
           </p:cNvPr>
@@ -21068,7 +21068,7 @@
           <p:cNvPr id="84" name="">
             <a:extLst xmlns:a="http://schemas.openxmlformats.org/drawingml/2006/main">
               <a:ext uri="{FF2B5EF4-FFF2-40B4-BE49-F238E27FC236}">
-                <a16:creationId xmlns:a16="http://schemas.microsoft.com/office/drawing/2014/main" id="{BBD55899-5238-427D-A97A-7B3A419E872B}"/>
+                <a16:creationId xmlns:a16="http://schemas.microsoft.com/office/drawing/2014/main" id="{41273BE4-395A-41FD-8D58-637E2BE1F09D}"/>
               </a:ext>
             </a:extLst>
           </p:cNvPr>
@@ -21120,7 +21120,7 @@
           <p:cNvPr id="85" name="">
             <a:extLst xmlns:a="http://schemas.openxmlformats.org/drawingml/2006/main">
               <a:ext uri="{FF2B5EF4-FFF2-40B4-BE49-F238E27FC236}">
-                <a16:creationId xmlns:a16="http://schemas.microsoft.com/office/drawing/2014/main" id="{72E8F0EB-D4DC-4F25-94FB-5E9A5755B675}"/>
+                <a16:creationId xmlns:a16="http://schemas.microsoft.com/office/drawing/2014/main" id="{21E10172-D774-4816-B6F8-7EB7DFC55DF3}"/>
               </a:ext>
             </a:extLst>
           </p:cNvPr>
@@ -21172,7 +21172,7 @@
           <p:cNvPr id="86" name="">
             <a:extLst xmlns:a="http://schemas.openxmlformats.org/drawingml/2006/main">
               <a:ext uri="{FF2B5EF4-FFF2-40B4-BE49-F238E27FC236}">
-                <a16:creationId xmlns:a16="http://schemas.microsoft.com/office/drawing/2014/main" id="{F32FAA7A-DDCE-4BBD-9856-14A9413CDB7F}"/>
+                <a16:creationId xmlns:a16="http://schemas.microsoft.com/office/drawing/2014/main" id="{8027EFCD-DBF3-4DF3-99E9-04B6A105BDA2}"/>
               </a:ext>
             </a:extLst>
           </p:cNvPr>
@@ -21224,7 +21224,7 @@
           <p:cNvPr id="87" name="">
             <a:extLst xmlns:a="http://schemas.openxmlformats.org/drawingml/2006/main">
               <a:ext uri="{FF2B5EF4-FFF2-40B4-BE49-F238E27FC236}">
-                <a16:creationId xmlns:a16="http://schemas.microsoft.com/office/drawing/2014/main" id="{53048787-8CBB-467F-91A7-316EE7E21302}"/>
+                <a16:creationId xmlns:a16="http://schemas.microsoft.com/office/drawing/2014/main" id="{42E01E3E-A774-43FD-ABDE-53A6E0A17F24}"/>
               </a:ext>
             </a:extLst>
           </p:cNvPr>
@@ -21276,7 +21276,7 @@
           <p:cNvPr id="88" name="">
             <a:extLst xmlns:a="http://schemas.openxmlformats.org/drawingml/2006/main">
               <a:ext uri="{FF2B5EF4-FFF2-40B4-BE49-F238E27FC236}">
-                <a16:creationId xmlns:a16="http://schemas.microsoft.com/office/drawing/2014/main" id="{F2CDDA57-8E37-4E07-8085-D43AD7C25BE2}"/>
+                <a16:creationId xmlns:a16="http://schemas.microsoft.com/office/drawing/2014/main" id="{B6186A65-F1B3-46DA-8AF8-B2D3699E69C6}"/>
               </a:ext>
             </a:extLst>
           </p:cNvPr>
@@ -21328,7 +21328,7 @@
           <p:cNvPr id="89" name="">
             <a:extLst xmlns:a="http://schemas.openxmlformats.org/drawingml/2006/main">
               <a:ext uri="{FF2B5EF4-FFF2-40B4-BE49-F238E27FC236}">
-                <a16:creationId xmlns:a16="http://schemas.microsoft.com/office/drawing/2014/main" id="{FD404063-6F52-49DD-9053-01AF3D156BF3}"/>
+                <a16:creationId xmlns:a16="http://schemas.microsoft.com/office/drawing/2014/main" id="{6BCDB63F-B756-4A7C-BE43-BE9A950BFBC0}"/>
               </a:ext>
             </a:extLst>
           </p:cNvPr>
@@ -21359,7 +21359,7 @@
           <p:cNvPr id="90" name="">
             <a:extLst xmlns:a="http://schemas.openxmlformats.org/drawingml/2006/main">
               <a:ext uri="{FF2B5EF4-FFF2-40B4-BE49-F238E27FC236}">
-                <a16:creationId xmlns:a16="http://schemas.microsoft.com/office/drawing/2014/main" id="{7123F0B0-5FAC-4040-9EFF-40B773B50741}"/>
+                <a16:creationId xmlns:a16="http://schemas.microsoft.com/office/drawing/2014/main" id="{F2005698-1E3F-4832-A47E-85301D379EE8}"/>
               </a:ext>
             </a:extLst>
           </p:cNvPr>
@@ -21390,7 +21390,7 @@
           <p:cNvPr id="91" name="">
             <a:extLst xmlns:a="http://schemas.openxmlformats.org/drawingml/2006/main">
               <a:ext uri="{FF2B5EF4-FFF2-40B4-BE49-F238E27FC236}">
-                <a16:creationId xmlns:a16="http://schemas.microsoft.com/office/drawing/2014/main" id="{C27CB5ED-FB13-4610-8C23-B67E97A8455E}"/>
+                <a16:creationId xmlns:a16="http://schemas.microsoft.com/office/drawing/2014/main" id="{A5F7A225-A546-4D0D-B336-5484EFAFED9E}"/>
               </a:ext>
             </a:extLst>
           </p:cNvPr>
@@ -21442,7 +21442,7 @@
           <p:cNvPr id="92" name="">
             <a:extLst xmlns:a="http://schemas.openxmlformats.org/drawingml/2006/main">
               <a:ext uri="{FF2B5EF4-FFF2-40B4-BE49-F238E27FC236}">
-                <a16:creationId xmlns:a16="http://schemas.microsoft.com/office/drawing/2014/main" id="{62FA8A13-A242-4B3D-B70B-12BBF2D561B8}"/>
+                <a16:creationId xmlns:a16="http://schemas.microsoft.com/office/drawing/2014/main" id="{265E6179-7639-43B1-A6A0-390A8ABC6317}"/>
               </a:ext>
             </a:extLst>
           </p:cNvPr>
@@ -21494,7 +21494,7 @@
           <p:cNvPr id="93" name="">
             <a:extLst xmlns:a="http://schemas.openxmlformats.org/drawingml/2006/main">
               <a:ext uri="{FF2B5EF4-FFF2-40B4-BE49-F238E27FC236}">
-                <a16:creationId xmlns:a16="http://schemas.microsoft.com/office/drawing/2014/main" id="{613A611D-ABC3-4DE8-AE93-C31BD170C019}"/>
+                <a16:creationId xmlns:a16="http://schemas.microsoft.com/office/drawing/2014/main" id="{4C3F73E7-A23B-4F2F-94D6-15DDE7B90E44}"/>
               </a:ext>
             </a:extLst>
           </p:cNvPr>
@@ -21546,7 +21546,7 @@
           <p:cNvPr id="94" name="">
             <a:extLst xmlns:a="http://schemas.openxmlformats.org/drawingml/2006/main">
               <a:ext uri="{FF2B5EF4-FFF2-40B4-BE49-F238E27FC236}">
-                <a16:creationId xmlns:a16="http://schemas.microsoft.com/office/drawing/2014/main" id="{7895DEA1-9939-4FE2-8946-A41756974AC6}"/>
+                <a16:creationId xmlns:a16="http://schemas.microsoft.com/office/drawing/2014/main" id="{110BA5AB-6FFA-4CD1-918C-4187EE465982}"/>
               </a:ext>
             </a:extLst>
           </p:cNvPr>
@@ -21598,7 +21598,7 @@
           <p:cNvPr id="95" name="">
             <a:extLst xmlns:a="http://schemas.openxmlformats.org/drawingml/2006/main">
               <a:ext uri="{FF2B5EF4-FFF2-40B4-BE49-F238E27FC236}">
-                <a16:creationId xmlns:a16="http://schemas.microsoft.com/office/drawing/2014/main" id="{B693002E-4B30-4006-B6E6-E2A936A3189A}"/>
+                <a16:creationId xmlns:a16="http://schemas.microsoft.com/office/drawing/2014/main" id="{0C602751-BA6A-4D9B-9895-379D94965D58}"/>
               </a:ext>
             </a:extLst>
           </p:cNvPr>
@@ -21648,7 +21648,7 @@
     </p:spTree>
     <p:extLst>
       <p:ext uri="{BB962C8B-B14F-4D97-AF65-F5344CB8AC3E}">
-        <p14:creationId xmlns:p14="http://schemas.microsoft.com/office/powerpoint/2010/main" val="1413544139"/>
+        <p14:creationId xmlns:p14="http://schemas.microsoft.com/office/powerpoint/2010/main" val="1552213911"/>
       </p:ext>
     </p:extLst>
   </p:cSld>
@@ -21679,7 +21679,7 @@
           <p:cNvPr id="122" name="">
             <a:extLst xmlns:a="http://schemas.openxmlformats.org/drawingml/2006/main">
               <a:ext uri="{FF2B5EF4-FFF2-40B4-BE49-F238E27FC236}">
-                <a16:creationId xmlns:a16="http://schemas.microsoft.com/office/drawing/2014/main" id="{70768F23-CB42-488B-9FB1-5E889D284769}"/>
+                <a16:creationId xmlns:a16="http://schemas.microsoft.com/office/drawing/2014/main" id="{057E91F6-E427-44E5-AFC1-327F619E5B01}"/>
               </a:ext>
             </a:extLst>
           </p:cNvPr>
@@ -21712,7 +21712,7 @@
           <p:cNvPr id="2" name="">
             <a:extLst xmlns:a="http://schemas.openxmlformats.org/drawingml/2006/main">
               <a:ext uri="{FF2B5EF4-FFF2-40B4-BE49-F238E27FC236}">
-                <a16:creationId xmlns:a16="http://schemas.microsoft.com/office/drawing/2014/main" id="{4F42E07F-2948-424E-8A1F-3A3034AC7D97}"/>
+                <a16:creationId xmlns:a16="http://schemas.microsoft.com/office/drawing/2014/main" id="{E3E670DD-EE54-46E9-9ADB-B03D17112688}"/>
               </a:ext>
             </a:extLst>
           </p:cNvPr>
@@ -21743,7 +21743,7 @@
           <p:cNvPr id="3" name="">
             <a:extLst xmlns:a="http://schemas.openxmlformats.org/drawingml/2006/main">
               <a:ext uri="{FF2B5EF4-FFF2-40B4-BE49-F238E27FC236}">
-                <a16:creationId xmlns:a16="http://schemas.microsoft.com/office/drawing/2014/main" id="{F6133208-070B-497F-A7EC-8E6AA5F11602}"/>
+                <a16:creationId xmlns:a16="http://schemas.microsoft.com/office/drawing/2014/main" id="{3D7E8D1B-14E0-4124-B3D1-B4A903FD3754}"/>
               </a:ext>
             </a:extLst>
           </p:cNvPr>
@@ -21795,7 +21795,7 @@
           <p:cNvPr id="4" name="">
             <a:extLst xmlns:a="http://schemas.openxmlformats.org/drawingml/2006/main">
               <a:ext uri="{FF2B5EF4-FFF2-40B4-BE49-F238E27FC236}">
-                <a16:creationId xmlns:a16="http://schemas.microsoft.com/office/drawing/2014/main" id="{8E5FD4A1-A61C-4C02-988B-05BF3FB1710F}"/>
+                <a16:creationId xmlns:a16="http://schemas.microsoft.com/office/drawing/2014/main" id="{5CDE5375-627D-4C19-A4AF-81D9DFEB3D9D}"/>
               </a:ext>
             </a:extLst>
           </p:cNvPr>
@@ -21847,7 +21847,7 @@
           <p:cNvPr id="5" name="">
             <a:extLst xmlns:a="http://schemas.openxmlformats.org/drawingml/2006/main">
               <a:ext uri="{FF2B5EF4-FFF2-40B4-BE49-F238E27FC236}">
-                <a16:creationId xmlns:a16="http://schemas.microsoft.com/office/drawing/2014/main" id="{67E1E408-2A6C-41D7-9D7B-40839821C897}"/>
+                <a16:creationId xmlns:a16="http://schemas.microsoft.com/office/drawing/2014/main" id="{0F771C7D-F2BA-421E-B599-B68A3092B4ED}"/>
               </a:ext>
             </a:extLst>
           </p:cNvPr>
@@ -21882,7 +21882,7 @@
           <p:nvPr/>
         </p:nvPicPr>
         <p:blipFill>
-          <a:blip xmlns:r="http://schemas.openxmlformats.org/officeDocument/2006/relationships" xmlns:a="http://schemas.openxmlformats.org/drawingml/2006/main" r:embed="R949d6f5661ae4a9d"/>
+          <a:blip xmlns:r="http://schemas.openxmlformats.org/officeDocument/2006/relationships" xmlns:a="http://schemas.openxmlformats.org/drawingml/2006/main" r:embed="Rd7d701ef974b4b08"/>
           <a:stretch xmlns:a="http://schemas.openxmlformats.org/drawingml/2006/main"/>
         </p:blipFill>
         <p:spPr>
@@ -21900,7 +21900,7 @@
           <p:cNvPr id="7" name="">
             <a:extLst xmlns:a="http://schemas.openxmlformats.org/drawingml/2006/main">
               <a:ext uri="{FF2B5EF4-FFF2-40B4-BE49-F238E27FC236}">
-                <a16:creationId xmlns:a16="http://schemas.microsoft.com/office/drawing/2014/main" id="{83AAF4C5-A687-40FD-8D22-FAD2B85A82EF}"/>
+                <a16:creationId xmlns:a16="http://schemas.microsoft.com/office/drawing/2014/main" id="{910B84A9-AAB6-4C52-ACB6-CA2506258A36}"/>
               </a:ext>
             </a:extLst>
           </p:cNvPr>
@@ -21952,7 +21952,7 @@
           <p:cNvPr id="8" name="">
             <a:extLst xmlns:a="http://schemas.openxmlformats.org/drawingml/2006/main">
               <a:ext uri="{FF2B5EF4-FFF2-40B4-BE49-F238E27FC236}">
-                <a16:creationId xmlns:a16="http://schemas.microsoft.com/office/drawing/2014/main" id="{16872A0C-E493-4F4F-96C5-FF74CB376176}"/>
+                <a16:creationId xmlns:a16="http://schemas.microsoft.com/office/drawing/2014/main" id="{4B2DB70B-D7C1-4EA3-B5CE-01396588EF88}"/>
               </a:ext>
             </a:extLst>
           </p:cNvPr>
@@ -22004,7 +22004,7 @@
           <p:cNvPr id="9" name="">
             <a:extLst xmlns:a="http://schemas.openxmlformats.org/drawingml/2006/main">
               <a:ext uri="{FF2B5EF4-FFF2-40B4-BE49-F238E27FC236}">
-                <a16:creationId xmlns:a16="http://schemas.microsoft.com/office/drawing/2014/main" id="{65C8E39B-2E0B-46A6-B576-834A644AA8B0}"/>
+                <a16:creationId xmlns:a16="http://schemas.microsoft.com/office/drawing/2014/main" id="{3D20E107-13CA-4EE7-8094-CB01BB5AAC99}"/>
               </a:ext>
             </a:extLst>
           </p:cNvPr>
@@ -22056,7 +22056,7 @@
           <p:cNvPr id="10" name="">
             <a:extLst xmlns:a="http://schemas.openxmlformats.org/drawingml/2006/main">
               <a:ext uri="{FF2B5EF4-FFF2-40B4-BE49-F238E27FC236}">
-                <a16:creationId xmlns:a16="http://schemas.microsoft.com/office/drawing/2014/main" id="{C5EFB2AB-EB58-4C1B-81FE-D4E6ABCF0656}"/>
+                <a16:creationId xmlns:a16="http://schemas.microsoft.com/office/drawing/2014/main" id="{69961E5A-5DFF-4F2F-98DD-153C9B47AC9A}"/>
               </a:ext>
             </a:extLst>
           </p:cNvPr>
@@ -22108,7 +22108,7 @@
           <p:cNvPr id="11" name="">
             <a:extLst xmlns:a="http://schemas.openxmlformats.org/drawingml/2006/main">
               <a:ext uri="{FF2B5EF4-FFF2-40B4-BE49-F238E27FC236}">
-                <a16:creationId xmlns:a16="http://schemas.microsoft.com/office/drawing/2014/main" id="{1984AE59-C9D5-45B3-A13D-4FADB6960BAF}"/>
+                <a16:creationId xmlns:a16="http://schemas.microsoft.com/office/drawing/2014/main" id="{8376F38E-E5F5-403C-A597-8590372C1684}"/>
               </a:ext>
             </a:extLst>
           </p:cNvPr>
@@ -22139,7 +22139,7 @@
           <p:cNvPr id="12" name="">
             <a:extLst xmlns:a="http://schemas.openxmlformats.org/drawingml/2006/main">
               <a:ext uri="{FF2B5EF4-FFF2-40B4-BE49-F238E27FC236}">
-                <a16:creationId xmlns:a16="http://schemas.microsoft.com/office/drawing/2014/main" id="{8E1F79B0-CF50-4E4A-BC28-7BC75EAFAD1F}"/>
+                <a16:creationId xmlns:a16="http://schemas.microsoft.com/office/drawing/2014/main" id="{2ADCB0BD-C363-4F84-9DB4-859B4F605AAA}"/>
               </a:ext>
             </a:extLst>
           </p:cNvPr>
@@ -22170,7 +22170,7 @@
           <p:cNvPr id="13" name="">
             <a:extLst xmlns:a="http://schemas.openxmlformats.org/drawingml/2006/main">
               <a:ext uri="{FF2B5EF4-FFF2-40B4-BE49-F238E27FC236}">
-                <a16:creationId xmlns:a16="http://schemas.microsoft.com/office/drawing/2014/main" id="{0755ABC6-A393-4AF6-94AD-FB727A6AF5CE}"/>
+                <a16:creationId xmlns:a16="http://schemas.microsoft.com/office/drawing/2014/main" id="{5C6570C5-1531-4551-9A4A-E159FF24D152}"/>
               </a:ext>
             </a:extLst>
           </p:cNvPr>
@@ -22222,7 +22222,7 @@
           <p:cNvPr id="14" name="">
             <a:extLst xmlns:a="http://schemas.openxmlformats.org/drawingml/2006/main">
               <a:ext uri="{FF2B5EF4-FFF2-40B4-BE49-F238E27FC236}">
-                <a16:creationId xmlns:a16="http://schemas.microsoft.com/office/drawing/2014/main" id="{6CC37B81-C3CB-4D1B-9269-F723AAF355C3}"/>
+                <a16:creationId xmlns:a16="http://schemas.microsoft.com/office/drawing/2014/main" id="{4792392E-4162-4456-8EDC-C4E000BC1102}"/>
               </a:ext>
             </a:extLst>
           </p:cNvPr>
@@ -22274,7 +22274,7 @@
           <p:cNvPr id="15" name="">
             <a:extLst xmlns:a="http://schemas.openxmlformats.org/drawingml/2006/main">
               <a:ext uri="{FF2B5EF4-FFF2-40B4-BE49-F238E27FC236}">
-                <a16:creationId xmlns:a16="http://schemas.microsoft.com/office/drawing/2014/main" id="{2ECF1D57-54B5-48D2-BE80-6888D0CD58FE}"/>
+                <a16:creationId xmlns:a16="http://schemas.microsoft.com/office/drawing/2014/main" id="{662082AC-A2FF-458B-8020-820692B4614C}"/>
               </a:ext>
             </a:extLst>
           </p:cNvPr>
@@ -22326,7 +22326,7 @@
           <p:cNvPr id="16" name="">
             <a:extLst xmlns:a="http://schemas.openxmlformats.org/drawingml/2006/main">
               <a:ext uri="{FF2B5EF4-FFF2-40B4-BE49-F238E27FC236}">
-                <a16:creationId xmlns:a16="http://schemas.microsoft.com/office/drawing/2014/main" id="{7FD96E88-5596-4017-8CC2-165088ABA492}"/>
+                <a16:creationId xmlns:a16="http://schemas.microsoft.com/office/drawing/2014/main" id="{A78735CA-D651-406C-9765-B7DCF632835D}"/>
               </a:ext>
             </a:extLst>
           </p:cNvPr>
@@ -22378,7 +22378,7 @@
           <p:cNvPr id="17" name="">
             <a:extLst xmlns:a="http://schemas.openxmlformats.org/drawingml/2006/main">
               <a:ext uri="{FF2B5EF4-FFF2-40B4-BE49-F238E27FC236}">
-                <a16:creationId xmlns:a16="http://schemas.microsoft.com/office/drawing/2014/main" id="{FDB8C3DD-210E-4E47-8855-C99E48EF80CB}"/>
+                <a16:creationId xmlns:a16="http://schemas.microsoft.com/office/drawing/2014/main" id="{3722526F-048A-48F1-B01A-22E85D71F9F5}"/>
               </a:ext>
             </a:extLst>
           </p:cNvPr>
@@ -22430,7 +22430,7 @@
           <p:cNvPr id="18" name="">
             <a:extLst xmlns:a="http://schemas.openxmlformats.org/drawingml/2006/main">
               <a:ext uri="{FF2B5EF4-FFF2-40B4-BE49-F238E27FC236}">
-                <a16:creationId xmlns:a16="http://schemas.microsoft.com/office/drawing/2014/main" id="{05C4CDC3-06C7-45B9-927C-26E9AD09B8AB}"/>
+                <a16:creationId xmlns:a16="http://schemas.microsoft.com/office/drawing/2014/main" id="{5B170A33-5070-4DD0-94A7-660DB02E172D}"/>
               </a:ext>
             </a:extLst>
           </p:cNvPr>
@@ -22482,7 +22482,7 @@
           <p:cNvPr id="19" name="">
             <a:extLst xmlns:a="http://schemas.openxmlformats.org/drawingml/2006/main">
               <a:ext uri="{FF2B5EF4-FFF2-40B4-BE49-F238E27FC236}">
-                <a16:creationId xmlns:a16="http://schemas.microsoft.com/office/drawing/2014/main" id="{B1103BF9-5BF8-496F-A1AF-010197EE175F}"/>
+                <a16:creationId xmlns:a16="http://schemas.microsoft.com/office/drawing/2014/main" id="{1360FBD9-9B48-4461-8806-00BF9FADF833}"/>
               </a:ext>
             </a:extLst>
           </p:cNvPr>
@@ -22534,7 +22534,7 @@
           <p:cNvPr id="20" name="">
             <a:extLst xmlns:a="http://schemas.openxmlformats.org/drawingml/2006/main">
               <a:ext uri="{FF2B5EF4-FFF2-40B4-BE49-F238E27FC236}">
-                <a16:creationId xmlns:a16="http://schemas.microsoft.com/office/drawing/2014/main" id="{EDB1B6B4-1B52-40AA-A320-EDB1171E1AC7}"/>
+                <a16:creationId xmlns:a16="http://schemas.microsoft.com/office/drawing/2014/main" id="{233AE6B4-03AE-4C60-9E4A-96E6E755DE43}"/>
               </a:ext>
             </a:extLst>
           </p:cNvPr>
@@ -22565,7 +22565,7 @@
           <p:cNvPr id="21" name="">
             <a:extLst xmlns:a="http://schemas.openxmlformats.org/drawingml/2006/main">
               <a:ext uri="{FF2B5EF4-FFF2-40B4-BE49-F238E27FC236}">
-                <a16:creationId xmlns:a16="http://schemas.microsoft.com/office/drawing/2014/main" id="{D3F1679D-5F13-4805-AE65-C324456F4B88}"/>
+                <a16:creationId xmlns:a16="http://schemas.microsoft.com/office/drawing/2014/main" id="{050AD4E5-0C23-40C6-88FD-1B863574EE7F}"/>
               </a:ext>
             </a:extLst>
           </p:cNvPr>
@@ -22617,7 +22617,7 @@
           <p:cNvPr id="22" name="">
             <a:extLst xmlns:a="http://schemas.openxmlformats.org/drawingml/2006/main">
               <a:ext uri="{FF2B5EF4-FFF2-40B4-BE49-F238E27FC236}">
-                <a16:creationId xmlns:a16="http://schemas.microsoft.com/office/drawing/2014/main" id="{CC4F135A-C329-4185-8006-F9B1F399F5BC}"/>
+                <a16:creationId xmlns:a16="http://schemas.microsoft.com/office/drawing/2014/main" id="{52CBDE92-DF7C-4174-A75F-7EE66C378299}"/>
               </a:ext>
             </a:extLst>
           </p:cNvPr>
@@ -22669,7 +22669,7 @@
           <p:cNvPr id="23" name="">
             <a:extLst xmlns:a="http://schemas.openxmlformats.org/drawingml/2006/main">
               <a:ext uri="{FF2B5EF4-FFF2-40B4-BE49-F238E27FC236}">
-                <a16:creationId xmlns:a16="http://schemas.microsoft.com/office/drawing/2014/main" id="{FE562437-523F-4754-A207-D85B54430B99}"/>
+                <a16:creationId xmlns:a16="http://schemas.microsoft.com/office/drawing/2014/main" id="{A9D7994E-03B7-49E2-83B6-E8DDBDE43660}"/>
               </a:ext>
             </a:extLst>
           </p:cNvPr>
@@ -22721,7 +22721,7 @@
           <p:cNvPr id="24" name="">
             <a:extLst xmlns:a="http://schemas.openxmlformats.org/drawingml/2006/main">
               <a:ext uri="{FF2B5EF4-FFF2-40B4-BE49-F238E27FC236}">
-                <a16:creationId xmlns:a16="http://schemas.microsoft.com/office/drawing/2014/main" id="{4D768E19-07A4-4420-ABC8-1D1E91814CBF}"/>
+                <a16:creationId xmlns:a16="http://schemas.microsoft.com/office/drawing/2014/main" id="{46C7ED18-9D2C-4B2D-AFD8-8DF596CD8737}"/>
               </a:ext>
             </a:extLst>
           </p:cNvPr>
@@ -22773,7 +22773,7 @@
           <p:cNvPr id="25" name="">
             <a:extLst xmlns:a="http://schemas.openxmlformats.org/drawingml/2006/main">
               <a:ext uri="{FF2B5EF4-FFF2-40B4-BE49-F238E27FC236}">
-                <a16:creationId xmlns:a16="http://schemas.microsoft.com/office/drawing/2014/main" id="{CE767565-90DD-4907-819B-EDDD42D2E824}"/>
+                <a16:creationId xmlns:a16="http://schemas.microsoft.com/office/drawing/2014/main" id="{F392F9CD-0151-4202-A791-D101D81216FD}"/>
               </a:ext>
             </a:extLst>
           </p:cNvPr>
@@ -22825,7 +22825,7 @@
           <p:cNvPr id="26" name="">
             <a:extLst xmlns:a="http://schemas.openxmlformats.org/drawingml/2006/main">
               <a:ext uri="{FF2B5EF4-FFF2-40B4-BE49-F238E27FC236}">
-                <a16:creationId xmlns:a16="http://schemas.microsoft.com/office/drawing/2014/main" id="{769A6807-2E73-4546-A4D1-20C3CB6B6405}"/>
+                <a16:creationId xmlns:a16="http://schemas.microsoft.com/office/drawing/2014/main" id="{23CCF41D-59DC-4DC1-B1A5-44220FEDCE15}"/>
               </a:ext>
             </a:extLst>
           </p:cNvPr>
@@ -22877,7 +22877,7 @@
           <p:cNvPr id="27" name="">
             <a:extLst xmlns:a="http://schemas.openxmlformats.org/drawingml/2006/main">
               <a:ext uri="{FF2B5EF4-FFF2-40B4-BE49-F238E27FC236}">
-                <a16:creationId xmlns:a16="http://schemas.microsoft.com/office/drawing/2014/main" id="{34119CBF-E1FA-42EF-9D53-0E0398BAEE02}"/>
+                <a16:creationId xmlns:a16="http://schemas.microsoft.com/office/drawing/2014/main" id="{ECB0F4A6-6F89-48C5-AC88-ED467AFDA205}"/>
               </a:ext>
             </a:extLst>
           </p:cNvPr>
@@ -22929,7 +22929,7 @@
           <p:cNvPr id="28" name="">
             <a:extLst xmlns:a="http://schemas.openxmlformats.org/drawingml/2006/main">
               <a:ext uri="{FF2B5EF4-FFF2-40B4-BE49-F238E27FC236}">
-                <a16:creationId xmlns:a16="http://schemas.microsoft.com/office/drawing/2014/main" id="{85CD6FF3-1E54-41EA-9981-A22FB832461E}"/>
+                <a16:creationId xmlns:a16="http://schemas.microsoft.com/office/drawing/2014/main" id="{1D164A34-A2DB-453A-BA8B-B9143153FAE8}"/>
               </a:ext>
             </a:extLst>
           </p:cNvPr>
@@ -22960,7 +22960,7 @@
           <p:cNvPr id="29" name="">
             <a:extLst xmlns:a="http://schemas.openxmlformats.org/drawingml/2006/main">
               <a:ext uri="{FF2B5EF4-FFF2-40B4-BE49-F238E27FC236}">
-                <a16:creationId xmlns:a16="http://schemas.microsoft.com/office/drawing/2014/main" id="{38206B7F-6960-4448-B59E-5A91A17B5A33}"/>
+                <a16:creationId xmlns:a16="http://schemas.microsoft.com/office/drawing/2014/main" id="{7B258953-F3DF-4B9A-9067-4886A1231300}"/>
               </a:ext>
             </a:extLst>
           </p:cNvPr>
@@ -22991,7 +22991,7 @@
           <p:cNvPr id="30" name="">
             <a:extLst xmlns:a="http://schemas.openxmlformats.org/drawingml/2006/main">
               <a:ext uri="{FF2B5EF4-FFF2-40B4-BE49-F238E27FC236}">
-                <a16:creationId xmlns:a16="http://schemas.microsoft.com/office/drawing/2014/main" id="{3E2DA4BA-95F1-424C-B96D-97B9FB200D4E}"/>
+                <a16:creationId xmlns:a16="http://schemas.microsoft.com/office/drawing/2014/main" id="{4249A170-B5C9-4B4D-BCB6-EC4E8A16868B}"/>
               </a:ext>
             </a:extLst>
           </p:cNvPr>
@@ -23043,7 +23043,7 @@
           <p:cNvPr id="31" name="">
             <a:extLst xmlns:a="http://schemas.openxmlformats.org/drawingml/2006/main">
               <a:ext uri="{FF2B5EF4-FFF2-40B4-BE49-F238E27FC236}">
-                <a16:creationId xmlns:a16="http://schemas.microsoft.com/office/drawing/2014/main" id="{328F1B27-1724-4867-BD16-3000AAEEC9AE}"/>
+                <a16:creationId xmlns:a16="http://schemas.microsoft.com/office/drawing/2014/main" id="{6549F625-7DE9-4207-8774-2D933EFC3432}"/>
               </a:ext>
             </a:extLst>
           </p:cNvPr>
@@ -23095,7 +23095,7 @@
           <p:cNvPr id="32" name="">
             <a:extLst xmlns:a="http://schemas.openxmlformats.org/drawingml/2006/main">
               <a:ext uri="{FF2B5EF4-FFF2-40B4-BE49-F238E27FC236}">
-                <a16:creationId xmlns:a16="http://schemas.microsoft.com/office/drawing/2014/main" id="{EBD48ACD-71BF-4BD4-8C47-23C40A5767FF}"/>
+                <a16:creationId xmlns:a16="http://schemas.microsoft.com/office/drawing/2014/main" id="{17188BE9-BD84-4846-9C28-1BDE5D7584CE}"/>
               </a:ext>
             </a:extLst>
           </p:cNvPr>
@@ -23147,7 +23147,7 @@
           <p:cNvPr id="33" name="">
             <a:extLst xmlns:a="http://schemas.openxmlformats.org/drawingml/2006/main">
               <a:ext uri="{FF2B5EF4-FFF2-40B4-BE49-F238E27FC236}">
-                <a16:creationId xmlns:a16="http://schemas.microsoft.com/office/drawing/2014/main" id="{E5CDE565-519D-4FCC-8CB6-181DD4772A84}"/>
+                <a16:creationId xmlns:a16="http://schemas.microsoft.com/office/drawing/2014/main" id="{F061EC19-9773-45E6-A524-95CCEB9325DD}"/>
               </a:ext>
             </a:extLst>
           </p:cNvPr>
@@ -23199,7 +23199,7 @@
           <p:cNvPr id="34" name="">
             <a:extLst xmlns:a="http://schemas.openxmlformats.org/drawingml/2006/main">
               <a:ext uri="{FF2B5EF4-FFF2-40B4-BE49-F238E27FC236}">
-                <a16:creationId xmlns:a16="http://schemas.microsoft.com/office/drawing/2014/main" id="{95E89728-CEC7-4C56-B149-19D023B8D5E6}"/>
+                <a16:creationId xmlns:a16="http://schemas.microsoft.com/office/drawing/2014/main" id="{EBB95188-2F47-446B-9902-CBE078A39B43}"/>
               </a:ext>
             </a:extLst>
           </p:cNvPr>
@@ -23251,7 +23251,7 @@
           <p:cNvPr id="35" name="">
             <a:extLst xmlns:a="http://schemas.openxmlformats.org/drawingml/2006/main">
               <a:ext uri="{FF2B5EF4-FFF2-40B4-BE49-F238E27FC236}">
-                <a16:creationId xmlns:a16="http://schemas.microsoft.com/office/drawing/2014/main" id="{B5340D91-E7ED-4E1C-BB89-2E04A563116B}"/>
+                <a16:creationId xmlns:a16="http://schemas.microsoft.com/office/drawing/2014/main" id="{8F1E3171-5C67-446C-A26C-4BA3C2B7D849}"/>
               </a:ext>
             </a:extLst>
           </p:cNvPr>
@@ -23303,7 +23303,7 @@
           <p:cNvPr id="36" name="">
             <a:extLst xmlns:a="http://schemas.openxmlformats.org/drawingml/2006/main">
               <a:ext uri="{FF2B5EF4-FFF2-40B4-BE49-F238E27FC236}">
-                <a16:creationId xmlns:a16="http://schemas.microsoft.com/office/drawing/2014/main" id="{4F423FDD-CA8F-4F62-AAA3-42C60B2A8A15}"/>
+                <a16:creationId xmlns:a16="http://schemas.microsoft.com/office/drawing/2014/main" id="{D2F5AF0D-AC5D-4017-AFD2-70C5C1B98BC3}"/>
               </a:ext>
             </a:extLst>
           </p:cNvPr>
@@ -23355,7 +23355,7 @@
           <p:cNvPr id="37" name="">
             <a:extLst xmlns:a="http://schemas.openxmlformats.org/drawingml/2006/main">
               <a:ext uri="{FF2B5EF4-FFF2-40B4-BE49-F238E27FC236}">
-                <a16:creationId xmlns:a16="http://schemas.microsoft.com/office/drawing/2014/main" id="{C94EEF03-6448-4C0F-8EF5-E2FD1D5EC6F8}"/>
+                <a16:creationId xmlns:a16="http://schemas.microsoft.com/office/drawing/2014/main" id="{E5526461-A8D2-451E-B99F-E662DB058FA0}"/>
               </a:ext>
             </a:extLst>
           </p:cNvPr>
@@ -23386,7 +23386,7 @@
           <p:cNvPr id="38" name="">
             <a:extLst xmlns:a="http://schemas.openxmlformats.org/drawingml/2006/main">
               <a:ext uri="{FF2B5EF4-FFF2-40B4-BE49-F238E27FC236}">
-                <a16:creationId xmlns:a16="http://schemas.microsoft.com/office/drawing/2014/main" id="{B15FBCF7-FA63-44CF-86E5-DD8F9B42CE93}"/>
+                <a16:creationId xmlns:a16="http://schemas.microsoft.com/office/drawing/2014/main" id="{786AC9DD-511D-4FDE-BA72-6023DB93A304}"/>
               </a:ext>
             </a:extLst>
           </p:cNvPr>
@@ -23438,7 +23438,7 @@
           <p:cNvPr id="39" name="">
             <a:extLst xmlns:a="http://schemas.openxmlformats.org/drawingml/2006/main">
               <a:ext uri="{FF2B5EF4-FFF2-40B4-BE49-F238E27FC236}">
-                <a16:creationId xmlns:a16="http://schemas.microsoft.com/office/drawing/2014/main" id="{84B521B6-180D-4738-BFC4-F9765783C573}"/>
+                <a16:creationId xmlns:a16="http://schemas.microsoft.com/office/drawing/2014/main" id="{3B893F5A-ED9C-4FA6-81FD-83B50EEDFBAF}"/>
               </a:ext>
             </a:extLst>
           </p:cNvPr>
@@ -23490,7 +23490,7 @@
           <p:cNvPr id="40" name="">
             <a:extLst xmlns:a="http://schemas.openxmlformats.org/drawingml/2006/main">
               <a:ext uri="{FF2B5EF4-FFF2-40B4-BE49-F238E27FC236}">
-                <a16:creationId xmlns:a16="http://schemas.microsoft.com/office/drawing/2014/main" id="{992E48E3-8546-430D-B9C6-AE390CD61D6D}"/>
+                <a16:creationId xmlns:a16="http://schemas.microsoft.com/office/drawing/2014/main" id="{B56D310C-D895-41D9-80AB-60F454F8B7F6}"/>
               </a:ext>
             </a:extLst>
           </p:cNvPr>
@@ -23542,7 +23542,7 @@
           <p:cNvPr id="41" name="">
             <a:extLst xmlns:a="http://schemas.openxmlformats.org/drawingml/2006/main">
               <a:ext uri="{FF2B5EF4-FFF2-40B4-BE49-F238E27FC236}">
-                <a16:creationId xmlns:a16="http://schemas.microsoft.com/office/drawing/2014/main" id="{DB7E9B59-9C57-4B0A-AEC9-B33C05C7CF8C}"/>
+                <a16:creationId xmlns:a16="http://schemas.microsoft.com/office/drawing/2014/main" id="{F7925133-6841-4F93-9D17-C99507D7E3F1}"/>
               </a:ext>
             </a:extLst>
           </p:cNvPr>
@@ -23594,7 +23594,7 @@
           <p:cNvPr id="42" name="">
             <a:extLst xmlns:a="http://schemas.openxmlformats.org/drawingml/2006/main">
               <a:ext uri="{FF2B5EF4-FFF2-40B4-BE49-F238E27FC236}">
-                <a16:creationId xmlns:a16="http://schemas.microsoft.com/office/drawing/2014/main" id="{51510AD1-8DDD-483C-B490-454A5B06C393}"/>
+                <a16:creationId xmlns:a16="http://schemas.microsoft.com/office/drawing/2014/main" id="{CF9C2B42-8FA9-48B6-AB0F-06ABFC058CF3}"/>
               </a:ext>
             </a:extLst>
           </p:cNvPr>
@@ -23646,7 +23646,7 @@
           <p:cNvPr id="43" name="">
             <a:extLst xmlns:a="http://schemas.openxmlformats.org/drawingml/2006/main">
               <a:ext uri="{FF2B5EF4-FFF2-40B4-BE49-F238E27FC236}">
-                <a16:creationId xmlns:a16="http://schemas.microsoft.com/office/drawing/2014/main" id="{C31BC7B1-3F45-4756-A893-4DC627621465}"/>
+                <a16:creationId xmlns:a16="http://schemas.microsoft.com/office/drawing/2014/main" id="{A9CD7995-42CA-4FEC-9CC2-5EE68260D004}"/>
               </a:ext>
             </a:extLst>
           </p:cNvPr>
@@ -23698,7 +23698,7 @@
           <p:cNvPr id="44" name="">
             <a:extLst xmlns:a="http://schemas.openxmlformats.org/drawingml/2006/main">
               <a:ext uri="{FF2B5EF4-FFF2-40B4-BE49-F238E27FC236}">
-                <a16:creationId xmlns:a16="http://schemas.microsoft.com/office/drawing/2014/main" id="{72C66AF3-33AB-480D-A946-AF5949A047F3}"/>
+                <a16:creationId xmlns:a16="http://schemas.microsoft.com/office/drawing/2014/main" id="{A0FC1BB7-E918-4FF3-B3C9-8C967781F7FB}"/>
               </a:ext>
             </a:extLst>
           </p:cNvPr>
@@ -23750,7 +23750,7 @@
           <p:cNvPr id="45" name="">
             <a:extLst xmlns:a="http://schemas.openxmlformats.org/drawingml/2006/main">
               <a:ext uri="{FF2B5EF4-FFF2-40B4-BE49-F238E27FC236}">
-                <a16:creationId xmlns:a16="http://schemas.microsoft.com/office/drawing/2014/main" id="{A0F94F5B-E8D7-4000-BA7C-C1E731FA83E0}"/>
+                <a16:creationId xmlns:a16="http://schemas.microsoft.com/office/drawing/2014/main" id="{BCB240E2-A43F-45B4-835A-96AFE6DDAD0F}"/>
               </a:ext>
             </a:extLst>
           </p:cNvPr>
@@ -23781,7 +23781,7 @@
           <p:cNvPr id="46" name="">
             <a:extLst xmlns:a="http://schemas.openxmlformats.org/drawingml/2006/main">
               <a:ext uri="{FF2B5EF4-FFF2-40B4-BE49-F238E27FC236}">
-                <a16:creationId xmlns:a16="http://schemas.microsoft.com/office/drawing/2014/main" id="{AB7554B2-EA84-4CD3-A384-01DD8BB5DFE4}"/>
+                <a16:creationId xmlns:a16="http://schemas.microsoft.com/office/drawing/2014/main" id="{6C700FFF-8FCF-47C9-83EC-1AE29132A69C}"/>
               </a:ext>
             </a:extLst>
           </p:cNvPr>
@@ -23812,7 +23812,7 @@
           <p:cNvPr id="47" name="">
             <a:extLst xmlns:a="http://schemas.openxmlformats.org/drawingml/2006/main">
               <a:ext uri="{FF2B5EF4-FFF2-40B4-BE49-F238E27FC236}">
-                <a16:creationId xmlns:a16="http://schemas.microsoft.com/office/drawing/2014/main" id="{150E9851-174A-4354-A764-2D05D59D173D}"/>
+                <a16:creationId xmlns:a16="http://schemas.microsoft.com/office/drawing/2014/main" id="{0E044F91-BE51-481D-941E-D53F1568C734}"/>
               </a:ext>
             </a:extLst>
           </p:cNvPr>
@@ -23864,7 +23864,7 @@
           <p:cNvPr id="48" name="">
             <a:extLst xmlns:a="http://schemas.openxmlformats.org/drawingml/2006/main">
               <a:ext uri="{FF2B5EF4-FFF2-40B4-BE49-F238E27FC236}">
-                <a16:creationId xmlns:a16="http://schemas.microsoft.com/office/drawing/2014/main" id="{3F39E3C0-00A8-4EF6-B96F-82964975BA78}"/>
+                <a16:creationId xmlns:a16="http://schemas.microsoft.com/office/drawing/2014/main" id="{75DB4B71-9EAC-4112-97FC-A626DE733F8E}"/>
               </a:ext>
             </a:extLst>
           </p:cNvPr>
@@ -23916,7 +23916,7 @@
           <p:cNvPr id="49" name="">
             <a:extLst xmlns:a="http://schemas.openxmlformats.org/drawingml/2006/main">
               <a:ext uri="{FF2B5EF4-FFF2-40B4-BE49-F238E27FC236}">
-                <a16:creationId xmlns:a16="http://schemas.microsoft.com/office/drawing/2014/main" id="{2E312025-B00D-4CF2-BF7A-DA9162507F7E}"/>
+                <a16:creationId xmlns:a16="http://schemas.microsoft.com/office/drawing/2014/main" id="{11FA3819-5723-4D0B-8D9A-20AF3E18FB09}"/>
               </a:ext>
             </a:extLst>
           </p:cNvPr>
@@ -23968,7 +23968,7 @@
           <p:cNvPr id="50" name="">
             <a:extLst xmlns:a="http://schemas.openxmlformats.org/drawingml/2006/main">
               <a:ext uri="{FF2B5EF4-FFF2-40B4-BE49-F238E27FC236}">
-                <a16:creationId xmlns:a16="http://schemas.microsoft.com/office/drawing/2014/main" id="{9D451BDF-BE8C-43BF-843B-B111578063BE}"/>
+                <a16:creationId xmlns:a16="http://schemas.microsoft.com/office/drawing/2014/main" id="{DB9446A4-717E-467A-AA1C-F61E319DC268}"/>
               </a:ext>
             </a:extLst>
           </p:cNvPr>
@@ -24020,7 +24020,7 @@
           <p:cNvPr id="51" name="">
             <a:extLst xmlns:a="http://schemas.openxmlformats.org/drawingml/2006/main">
               <a:ext uri="{FF2B5EF4-FFF2-40B4-BE49-F238E27FC236}">
-                <a16:creationId xmlns:a16="http://schemas.microsoft.com/office/drawing/2014/main" id="{BA44284C-0A86-45FD-BE6C-E923E9D710C2}"/>
+                <a16:creationId xmlns:a16="http://schemas.microsoft.com/office/drawing/2014/main" id="{ABAEBE5B-7EA7-4EF5-9041-EA4AD930355C}"/>
               </a:ext>
             </a:extLst>
           </p:cNvPr>
@@ -24072,7 +24072,7 @@
           <p:cNvPr id="52" name="">
             <a:extLst xmlns:a="http://schemas.openxmlformats.org/drawingml/2006/main">
               <a:ext uri="{FF2B5EF4-FFF2-40B4-BE49-F238E27FC236}">
-                <a16:creationId xmlns:a16="http://schemas.microsoft.com/office/drawing/2014/main" id="{0C757CF8-D6F5-433D-AC1A-63E77B2F08DA}"/>
+                <a16:creationId xmlns:a16="http://schemas.microsoft.com/office/drawing/2014/main" id="{C37DE771-9F4A-4C7A-9B99-D8F65ABF3B20}"/>
               </a:ext>
             </a:extLst>
           </p:cNvPr>
@@ -24124,7 +24124,7 @@
           <p:cNvPr id="53" name="">
             <a:extLst xmlns:a="http://schemas.openxmlformats.org/drawingml/2006/main">
               <a:ext uri="{FF2B5EF4-FFF2-40B4-BE49-F238E27FC236}">
-                <a16:creationId xmlns:a16="http://schemas.microsoft.com/office/drawing/2014/main" id="{40B96DA4-E546-4A82-9862-FC6772ECAF95}"/>
+                <a16:creationId xmlns:a16="http://schemas.microsoft.com/office/drawing/2014/main" id="{2C8DB314-0271-4390-A543-549828AC55FB}"/>
               </a:ext>
             </a:extLst>
           </p:cNvPr>
@@ -24176,7 +24176,7 @@
           <p:cNvPr id="54" name="">
             <a:extLst xmlns:a="http://schemas.openxmlformats.org/drawingml/2006/main">
               <a:ext uri="{FF2B5EF4-FFF2-40B4-BE49-F238E27FC236}">
-                <a16:creationId xmlns:a16="http://schemas.microsoft.com/office/drawing/2014/main" id="{F796157C-5651-477C-850A-3F56C6257E18}"/>
+                <a16:creationId xmlns:a16="http://schemas.microsoft.com/office/drawing/2014/main" id="{5DF1E8AE-79D4-44BC-A247-3329931EF183}"/>
               </a:ext>
             </a:extLst>
           </p:cNvPr>
@@ -24207,7 +24207,7 @@
           <p:cNvPr id="55" name="">
             <a:extLst xmlns:a="http://schemas.openxmlformats.org/drawingml/2006/main">
               <a:ext uri="{FF2B5EF4-FFF2-40B4-BE49-F238E27FC236}">
-                <a16:creationId xmlns:a16="http://schemas.microsoft.com/office/drawing/2014/main" id="{E1D193D0-DC2F-4E13-8E48-BD8FCD25E448}"/>
+                <a16:creationId xmlns:a16="http://schemas.microsoft.com/office/drawing/2014/main" id="{0635F892-705E-401E-8194-024E8E8FD771}"/>
               </a:ext>
             </a:extLst>
           </p:cNvPr>
@@ -24259,7 +24259,7 @@
           <p:cNvPr id="56" name="">
             <a:extLst xmlns:a="http://schemas.openxmlformats.org/drawingml/2006/main">
               <a:ext uri="{FF2B5EF4-FFF2-40B4-BE49-F238E27FC236}">
-                <a16:creationId xmlns:a16="http://schemas.microsoft.com/office/drawing/2014/main" id="{8019A86E-74EB-4C4B-8577-EEAC11D15638}"/>
+                <a16:creationId xmlns:a16="http://schemas.microsoft.com/office/drawing/2014/main" id="{444AB15B-13AF-4084-AD95-20CED58A567A}"/>
               </a:ext>
             </a:extLst>
           </p:cNvPr>
@@ -24311,7 +24311,7 @@
           <p:cNvPr id="57" name="">
             <a:extLst xmlns:a="http://schemas.openxmlformats.org/drawingml/2006/main">
               <a:ext uri="{FF2B5EF4-FFF2-40B4-BE49-F238E27FC236}">
-                <a16:creationId xmlns:a16="http://schemas.microsoft.com/office/drawing/2014/main" id="{7B98ADDB-7D57-4CD4-8B18-FBE25DEE7940}"/>
+                <a16:creationId xmlns:a16="http://schemas.microsoft.com/office/drawing/2014/main" id="{B76B2873-E82D-43AE-8C2D-9EAB8679E5BB}"/>
               </a:ext>
             </a:extLst>
           </p:cNvPr>
@@ -24363,7 +24363,7 @@
           <p:cNvPr id="58" name="">
             <a:extLst xmlns:a="http://schemas.openxmlformats.org/drawingml/2006/main">
               <a:ext uri="{FF2B5EF4-FFF2-40B4-BE49-F238E27FC236}">
-                <a16:creationId xmlns:a16="http://schemas.microsoft.com/office/drawing/2014/main" id="{17B0B003-3348-45D4-A982-917F68575A5A}"/>
+                <a16:creationId xmlns:a16="http://schemas.microsoft.com/office/drawing/2014/main" id="{F1D31DDB-7CF2-44D8-B8E6-42E3423A59A4}"/>
               </a:ext>
             </a:extLst>
           </p:cNvPr>
@@ -24415,7 +24415,7 @@
           <p:cNvPr id="59" name="">
             <a:extLst xmlns:a="http://schemas.openxmlformats.org/drawingml/2006/main">
               <a:ext uri="{FF2B5EF4-FFF2-40B4-BE49-F238E27FC236}">
-                <a16:creationId xmlns:a16="http://schemas.microsoft.com/office/drawing/2014/main" id="{CD04034F-73EA-43DB-BB84-CA96756B2A22}"/>
+                <a16:creationId xmlns:a16="http://schemas.microsoft.com/office/drawing/2014/main" id="{525A6CB9-42B1-4BA0-AFD0-E9F3DF763963}"/>
               </a:ext>
             </a:extLst>
           </p:cNvPr>
@@ -24467,7 +24467,7 @@
           <p:cNvPr id="60" name="">
             <a:extLst xmlns:a="http://schemas.openxmlformats.org/drawingml/2006/main">
               <a:ext uri="{FF2B5EF4-FFF2-40B4-BE49-F238E27FC236}">
-                <a16:creationId xmlns:a16="http://schemas.microsoft.com/office/drawing/2014/main" id="{51D5BC6B-A191-4790-8B14-D57F1EE0DFA9}"/>
+                <a16:creationId xmlns:a16="http://schemas.microsoft.com/office/drawing/2014/main" id="{A79418B0-B18A-47D3-8B0C-9744505D61BD}"/>
               </a:ext>
             </a:extLst>
           </p:cNvPr>
@@ -24519,7 +24519,7 @@
           <p:cNvPr id="61" name="">
             <a:extLst xmlns:a="http://schemas.openxmlformats.org/drawingml/2006/main">
               <a:ext uri="{FF2B5EF4-FFF2-40B4-BE49-F238E27FC236}">
-                <a16:creationId xmlns:a16="http://schemas.microsoft.com/office/drawing/2014/main" id="{1A05FC16-C4BB-4BBE-A468-922A85BBC5CB}"/>
+                <a16:creationId xmlns:a16="http://schemas.microsoft.com/office/drawing/2014/main" id="{2AADD36B-63A3-47CF-B03C-1B510179C2E6}"/>
               </a:ext>
             </a:extLst>
           </p:cNvPr>
@@ -24571,7 +24571,7 @@
           <p:cNvPr id="62" name="">
             <a:extLst xmlns:a="http://schemas.openxmlformats.org/drawingml/2006/main">
               <a:ext uri="{FF2B5EF4-FFF2-40B4-BE49-F238E27FC236}">
-                <a16:creationId xmlns:a16="http://schemas.microsoft.com/office/drawing/2014/main" id="{6E23DB47-3B35-4D34-9B8F-4F9078CDF505}"/>
+                <a16:creationId xmlns:a16="http://schemas.microsoft.com/office/drawing/2014/main" id="{67F5A2CA-91C7-4863-A92D-4DC8CB45C8E8}"/>
               </a:ext>
             </a:extLst>
           </p:cNvPr>
@@ -24602,7 +24602,7 @@
           <p:cNvPr id="63" name="">
             <a:extLst xmlns:a="http://schemas.openxmlformats.org/drawingml/2006/main">
               <a:ext uri="{FF2B5EF4-FFF2-40B4-BE49-F238E27FC236}">
-                <a16:creationId xmlns:a16="http://schemas.microsoft.com/office/drawing/2014/main" id="{644EA2FE-51B9-4055-BD93-237804AC12DB}"/>
+                <a16:creationId xmlns:a16="http://schemas.microsoft.com/office/drawing/2014/main" id="{99608549-E5AA-43AD-8939-F70E93D15D98}"/>
               </a:ext>
             </a:extLst>
           </p:cNvPr>
@@ -24633,7 +24633,7 @@
           <p:cNvPr id="64" name="">
             <a:extLst xmlns:a="http://schemas.openxmlformats.org/drawingml/2006/main">
               <a:ext uri="{FF2B5EF4-FFF2-40B4-BE49-F238E27FC236}">
-                <a16:creationId xmlns:a16="http://schemas.microsoft.com/office/drawing/2014/main" id="{CA328619-8B8A-449C-BB5C-042B942F379F}"/>
+                <a16:creationId xmlns:a16="http://schemas.microsoft.com/office/drawing/2014/main" id="{57BDAEBC-E60C-461D-9A35-594C33A7C627}"/>
               </a:ext>
             </a:extLst>
           </p:cNvPr>
@@ -24685,7 +24685,7 @@
           <p:cNvPr id="65" name="">
             <a:extLst xmlns:a="http://schemas.openxmlformats.org/drawingml/2006/main">
               <a:ext uri="{FF2B5EF4-FFF2-40B4-BE49-F238E27FC236}">
-                <a16:creationId xmlns:a16="http://schemas.microsoft.com/office/drawing/2014/main" id="{CCB1250C-AEF4-46A5-9927-F97C4E1D661F}"/>
+                <a16:creationId xmlns:a16="http://schemas.microsoft.com/office/drawing/2014/main" id="{11ED6EF2-F5B8-459E-8568-6A1BB4EF365C}"/>
               </a:ext>
             </a:extLst>
           </p:cNvPr>
@@ -24737,7 +24737,7 @@
           <p:cNvPr id="66" name="">
             <a:extLst xmlns:a="http://schemas.openxmlformats.org/drawingml/2006/main">
               <a:ext uri="{FF2B5EF4-FFF2-40B4-BE49-F238E27FC236}">
-                <a16:creationId xmlns:a16="http://schemas.microsoft.com/office/drawing/2014/main" id="{3A000B1A-3C7E-452A-9C1A-FD382F305AD6}"/>
+                <a16:creationId xmlns:a16="http://schemas.microsoft.com/office/drawing/2014/main" id="{1F475C7A-9545-43A0-B793-B3C992815F5B}"/>
               </a:ext>
             </a:extLst>
           </p:cNvPr>
@@ -24789,7 +24789,7 @@
           <p:cNvPr id="67" name="">
             <a:extLst xmlns:a="http://schemas.openxmlformats.org/drawingml/2006/main">
               <a:ext uri="{FF2B5EF4-FFF2-40B4-BE49-F238E27FC236}">
-                <a16:creationId xmlns:a16="http://schemas.microsoft.com/office/drawing/2014/main" id="{7FA27C9C-84BE-42A5-8A32-75B8C548FC9E}"/>
+                <a16:creationId xmlns:a16="http://schemas.microsoft.com/office/drawing/2014/main" id="{E8BF7B8D-A1D8-4B2F-9962-D8BFCBE4234A}"/>
               </a:ext>
             </a:extLst>
           </p:cNvPr>
@@ -24841,7 +24841,7 @@
           <p:cNvPr id="68" name="">
             <a:extLst xmlns:a="http://schemas.openxmlformats.org/drawingml/2006/main">
               <a:ext uri="{FF2B5EF4-FFF2-40B4-BE49-F238E27FC236}">
-                <a16:creationId xmlns:a16="http://schemas.microsoft.com/office/drawing/2014/main" id="{730BFA3B-C657-4BAA-BBC2-606B788D0804}"/>
+                <a16:creationId xmlns:a16="http://schemas.microsoft.com/office/drawing/2014/main" id="{073CD168-D3CD-4F89-A11F-1B9D145D5AD6}"/>
               </a:ext>
             </a:extLst>
           </p:cNvPr>
@@ -24893,7 +24893,7 @@
           <p:cNvPr id="69" name="">
             <a:extLst xmlns:a="http://schemas.openxmlformats.org/drawingml/2006/main">
               <a:ext uri="{FF2B5EF4-FFF2-40B4-BE49-F238E27FC236}">
-                <a16:creationId xmlns:a16="http://schemas.microsoft.com/office/drawing/2014/main" id="{499387A3-9423-46DE-807F-97AD98B4B703}"/>
+                <a16:creationId xmlns:a16="http://schemas.microsoft.com/office/drawing/2014/main" id="{60033AF7-7032-46E3-B194-1F4739F66AAF}"/>
               </a:ext>
             </a:extLst>
           </p:cNvPr>
@@ -24945,7 +24945,7 @@
           <p:cNvPr id="70" name="">
             <a:extLst xmlns:a="http://schemas.openxmlformats.org/drawingml/2006/main">
               <a:ext uri="{FF2B5EF4-FFF2-40B4-BE49-F238E27FC236}">
-                <a16:creationId xmlns:a16="http://schemas.microsoft.com/office/drawing/2014/main" id="{920D7D95-6696-4EA4-A4D6-A1BF7AEDAD1F}"/>
+                <a16:creationId xmlns:a16="http://schemas.microsoft.com/office/drawing/2014/main" id="{831FD640-7A82-432B-B91E-357DB6C9C237}"/>
               </a:ext>
             </a:extLst>
           </p:cNvPr>
@@ -24997,7 +24997,7 @@
           <p:cNvPr id="71" name="">
             <a:extLst xmlns:a="http://schemas.openxmlformats.org/drawingml/2006/main">
               <a:ext uri="{FF2B5EF4-FFF2-40B4-BE49-F238E27FC236}">
-                <a16:creationId xmlns:a16="http://schemas.microsoft.com/office/drawing/2014/main" id="{01E0E51A-5D37-4AE8-BB23-ACA4BB678C88}"/>
+                <a16:creationId xmlns:a16="http://schemas.microsoft.com/office/drawing/2014/main" id="{CB0E7371-B290-4362-8F87-FC19ADAEB04A}"/>
               </a:ext>
             </a:extLst>
           </p:cNvPr>
@@ -25028,7 +25028,7 @@
           <p:cNvPr id="72" name="">
             <a:extLst xmlns:a="http://schemas.openxmlformats.org/drawingml/2006/main">
               <a:ext uri="{FF2B5EF4-FFF2-40B4-BE49-F238E27FC236}">
-                <a16:creationId xmlns:a16="http://schemas.microsoft.com/office/drawing/2014/main" id="{342444F1-E522-463F-B115-D5E9048E0F2E}"/>
+                <a16:creationId xmlns:a16="http://schemas.microsoft.com/office/drawing/2014/main" id="{077CD6D3-30E8-4C56-9745-FF116A2CBD06}"/>
               </a:ext>
             </a:extLst>
           </p:cNvPr>
@@ -25080,7 +25080,7 @@
           <p:cNvPr id="73" name="">
             <a:extLst xmlns:a="http://schemas.openxmlformats.org/drawingml/2006/main">
               <a:ext uri="{FF2B5EF4-FFF2-40B4-BE49-F238E27FC236}">
-                <a16:creationId xmlns:a16="http://schemas.microsoft.com/office/drawing/2014/main" id="{ECA003B4-8794-4A8E-AABC-385FB8A21DBD}"/>
+                <a16:creationId xmlns:a16="http://schemas.microsoft.com/office/drawing/2014/main" id="{F0B345B7-E95D-401E-A2E2-54EE3EEF2D98}"/>
               </a:ext>
             </a:extLst>
           </p:cNvPr>
@@ -25132,7 +25132,7 @@
           <p:cNvPr id="74" name="">
             <a:extLst xmlns:a="http://schemas.openxmlformats.org/drawingml/2006/main">
               <a:ext uri="{FF2B5EF4-FFF2-40B4-BE49-F238E27FC236}">
-                <a16:creationId xmlns:a16="http://schemas.microsoft.com/office/drawing/2014/main" id="{E78B7DDF-6B63-44E3-82CC-C20FDF8DB4D0}"/>
+                <a16:creationId xmlns:a16="http://schemas.microsoft.com/office/drawing/2014/main" id="{72E0234F-CE89-44C7-9A80-B005841DEB82}"/>
               </a:ext>
             </a:extLst>
           </p:cNvPr>
@@ -25184,7 +25184,7 @@
           <p:cNvPr id="75" name="">
             <a:extLst xmlns:a="http://schemas.openxmlformats.org/drawingml/2006/main">
               <a:ext uri="{FF2B5EF4-FFF2-40B4-BE49-F238E27FC236}">
-                <a16:creationId xmlns:a16="http://schemas.microsoft.com/office/drawing/2014/main" id="{E6857ADF-DC23-4DB1-8657-45D23A93020C}"/>
+                <a16:creationId xmlns:a16="http://schemas.microsoft.com/office/drawing/2014/main" id="{607F2921-E105-47FE-928A-C2DD2FBC2FBB}"/>
               </a:ext>
             </a:extLst>
           </p:cNvPr>
@@ -25236,7 +25236,7 @@
           <p:cNvPr id="76" name="">
             <a:extLst xmlns:a="http://schemas.openxmlformats.org/drawingml/2006/main">
               <a:ext uri="{FF2B5EF4-FFF2-40B4-BE49-F238E27FC236}">
-                <a16:creationId xmlns:a16="http://schemas.microsoft.com/office/drawing/2014/main" id="{DC5DC640-1323-43FD-944E-82D862E01551}"/>
+                <a16:creationId xmlns:a16="http://schemas.microsoft.com/office/drawing/2014/main" id="{F82C7C35-A1E1-477E-AB92-EA6062393874}"/>
               </a:ext>
             </a:extLst>
           </p:cNvPr>
@@ -25288,7 +25288,7 @@
           <p:cNvPr id="77" name="">
             <a:extLst xmlns:a="http://schemas.openxmlformats.org/drawingml/2006/main">
               <a:ext uri="{FF2B5EF4-FFF2-40B4-BE49-F238E27FC236}">
-                <a16:creationId xmlns:a16="http://schemas.microsoft.com/office/drawing/2014/main" id="{EDA656D3-5BA9-402A-95A0-83EF11B51678}"/>
+                <a16:creationId xmlns:a16="http://schemas.microsoft.com/office/drawing/2014/main" id="{B4BC733F-F624-4BBA-BC16-59CAC2FE9DA0}"/>
               </a:ext>
             </a:extLst>
           </p:cNvPr>
@@ -25340,7 +25340,7 @@
           <p:cNvPr id="78" name="">
             <a:extLst xmlns:a="http://schemas.openxmlformats.org/drawingml/2006/main">
               <a:ext uri="{FF2B5EF4-FFF2-40B4-BE49-F238E27FC236}">
-                <a16:creationId xmlns:a16="http://schemas.microsoft.com/office/drawing/2014/main" id="{07C091B5-9D14-4F44-9FF8-0C56DD9E58B0}"/>
+                <a16:creationId xmlns:a16="http://schemas.microsoft.com/office/drawing/2014/main" id="{F0EE4D6A-77C7-4720-B63D-9DFA154435E5}"/>
               </a:ext>
             </a:extLst>
           </p:cNvPr>
@@ -25392,7 +25392,7 @@
           <p:cNvPr id="79" name="">
             <a:extLst xmlns:a="http://schemas.openxmlformats.org/drawingml/2006/main">
               <a:ext uri="{FF2B5EF4-FFF2-40B4-BE49-F238E27FC236}">
-                <a16:creationId xmlns:a16="http://schemas.microsoft.com/office/drawing/2014/main" id="{9CA9F81C-CDB8-4245-9FD1-DB3E7C66D452}"/>
+                <a16:creationId xmlns:a16="http://schemas.microsoft.com/office/drawing/2014/main" id="{25E2DFA1-5C17-4EA2-9CE7-32CACB6B2338}"/>
               </a:ext>
             </a:extLst>
           </p:cNvPr>
@@ -25423,7 +25423,7 @@
           <p:cNvPr id="80" name="">
             <a:extLst xmlns:a="http://schemas.openxmlformats.org/drawingml/2006/main">
               <a:ext uri="{FF2B5EF4-FFF2-40B4-BE49-F238E27FC236}">
-                <a16:creationId xmlns:a16="http://schemas.microsoft.com/office/drawing/2014/main" id="{33B9C0EB-FF47-4035-B651-13F9718902A2}"/>
+                <a16:creationId xmlns:a16="http://schemas.microsoft.com/office/drawing/2014/main" id="{97CC8936-F619-4A8D-8CDB-B43B30C9762D}"/>
               </a:ext>
             </a:extLst>
           </p:cNvPr>
@@ -25454,7 +25454,7 @@
           <p:cNvPr id="81" name="">
             <a:extLst xmlns:a="http://schemas.openxmlformats.org/drawingml/2006/main">
               <a:ext uri="{FF2B5EF4-FFF2-40B4-BE49-F238E27FC236}">
-                <a16:creationId xmlns:a16="http://schemas.microsoft.com/office/drawing/2014/main" id="{31CBDEB3-3270-4D34-939E-ED1D207B97BD}"/>
+                <a16:creationId xmlns:a16="http://schemas.microsoft.com/office/drawing/2014/main" id="{6460A8F7-EB62-4A97-99CF-E06AED047609}"/>
               </a:ext>
             </a:extLst>
           </p:cNvPr>
@@ -25506,7 +25506,7 @@
           <p:cNvPr id="82" name="">
             <a:extLst xmlns:a="http://schemas.openxmlformats.org/drawingml/2006/main">
               <a:ext uri="{FF2B5EF4-FFF2-40B4-BE49-F238E27FC236}">
-                <a16:creationId xmlns:a16="http://schemas.microsoft.com/office/drawing/2014/main" id="{1E12DA7D-62F8-4B59-A00E-0994A4CDB0F6}"/>
+                <a16:creationId xmlns:a16="http://schemas.microsoft.com/office/drawing/2014/main" id="{C7F8D26F-766D-4407-B032-429563541EA9}"/>
               </a:ext>
             </a:extLst>
           </p:cNvPr>
@@ -25558,7 +25558,7 @@
           <p:cNvPr id="83" name="">
             <a:extLst xmlns:a="http://schemas.openxmlformats.org/drawingml/2006/main">
               <a:ext uri="{FF2B5EF4-FFF2-40B4-BE49-F238E27FC236}">
-                <a16:creationId xmlns:a16="http://schemas.microsoft.com/office/drawing/2014/main" id="{AF1394A6-19E6-48F2-BF14-B79BFD377A7B}"/>
+                <a16:creationId xmlns:a16="http://schemas.microsoft.com/office/drawing/2014/main" id="{8275C5C2-30DA-484D-901F-944FBACBD66C}"/>
               </a:ext>
             </a:extLst>
           </p:cNvPr>
@@ -25610,7 +25610,7 @@
           <p:cNvPr id="84" name="">
             <a:extLst xmlns:a="http://schemas.openxmlformats.org/drawingml/2006/main">
               <a:ext uri="{FF2B5EF4-FFF2-40B4-BE49-F238E27FC236}">
-                <a16:creationId xmlns:a16="http://schemas.microsoft.com/office/drawing/2014/main" id="{CF356567-939D-4B9D-B651-64D3883A76B1}"/>
+                <a16:creationId xmlns:a16="http://schemas.microsoft.com/office/drawing/2014/main" id="{C712B907-635B-41BF-8C46-94E5CA7FE795}"/>
               </a:ext>
             </a:extLst>
           </p:cNvPr>
@@ -25662,7 +25662,7 @@
           <p:cNvPr id="85" name="">
             <a:extLst xmlns:a="http://schemas.openxmlformats.org/drawingml/2006/main">
               <a:ext uri="{FF2B5EF4-FFF2-40B4-BE49-F238E27FC236}">
-                <a16:creationId xmlns:a16="http://schemas.microsoft.com/office/drawing/2014/main" id="{50ED54C2-A36D-4FA6-9519-30BC59915F53}"/>
+                <a16:creationId xmlns:a16="http://schemas.microsoft.com/office/drawing/2014/main" id="{677646E2-2EAF-4860-BAB8-877AAD5601AC}"/>
               </a:ext>
             </a:extLst>
           </p:cNvPr>
@@ -25714,7 +25714,7 @@
           <p:cNvPr id="86" name="">
             <a:extLst xmlns:a="http://schemas.openxmlformats.org/drawingml/2006/main">
               <a:ext uri="{FF2B5EF4-FFF2-40B4-BE49-F238E27FC236}">
-                <a16:creationId xmlns:a16="http://schemas.microsoft.com/office/drawing/2014/main" id="{BF59DD12-54E9-4EE7-B114-966358FF9065}"/>
+                <a16:creationId xmlns:a16="http://schemas.microsoft.com/office/drawing/2014/main" id="{CFAD9BAB-7A7A-4DCB-834C-4C2EDDE25F85}"/>
               </a:ext>
             </a:extLst>
           </p:cNvPr>
@@ -25766,7 +25766,7 @@
           <p:cNvPr id="87" name="">
             <a:extLst xmlns:a="http://schemas.openxmlformats.org/drawingml/2006/main">
               <a:ext uri="{FF2B5EF4-FFF2-40B4-BE49-F238E27FC236}">
-                <a16:creationId xmlns:a16="http://schemas.microsoft.com/office/drawing/2014/main" id="{F86D17AE-0740-4349-BF2F-BB999C6141B3}"/>
+                <a16:creationId xmlns:a16="http://schemas.microsoft.com/office/drawing/2014/main" id="{4414F966-5EE6-4EE3-AC18-72AC8FCBE80B}"/>
               </a:ext>
             </a:extLst>
           </p:cNvPr>
@@ -25818,7 +25818,7 @@
           <p:cNvPr id="88" name="">
             <a:extLst xmlns:a="http://schemas.openxmlformats.org/drawingml/2006/main">
               <a:ext uri="{FF2B5EF4-FFF2-40B4-BE49-F238E27FC236}">
-                <a16:creationId xmlns:a16="http://schemas.microsoft.com/office/drawing/2014/main" id="{DC6A01B5-5150-408E-B7A3-136AD3BA8C37}"/>
+                <a16:creationId xmlns:a16="http://schemas.microsoft.com/office/drawing/2014/main" id="{A28D0A13-B7C8-4562-9B3A-4AE23AFA4D9E}"/>
               </a:ext>
             </a:extLst>
           </p:cNvPr>
@@ -25849,7 +25849,7 @@
           <p:cNvPr id="89" name="">
             <a:extLst xmlns:a="http://schemas.openxmlformats.org/drawingml/2006/main">
               <a:ext uri="{FF2B5EF4-FFF2-40B4-BE49-F238E27FC236}">
-                <a16:creationId xmlns:a16="http://schemas.microsoft.com/office/drawing/2014/main" id="{AE12A230-B41B-4F99-886B-0644E86ADD66}"/>
+                <a16:creationId xmlns:a16="http://schemas.microsoft.com/office/drawing/2014/main" id="{E7E5C6F8-1AB8-4D50-9005-9BD9FB550B23}"/>
               </a:ext>
             </a:extLst>
           </p:cNvPr>
@@ -25901,7 +25901,7 @@
           <p:cNvPr id="90" name="">
             <a:extLst xmlns:a="http://schemas.openxmlformats.org/drawingml/2006/main">
               <a:ext uri="{FF2B5EF4-FFF2-40B4-BE49-F238E27FC236}">
-                <a16:creationId xmlns:a16="http://schemas.microsoft.com/office/drawing/2014/main" id="{C129F749-4716-40D1-AF28-A090F011EDD6}"/>
+                <a16:creationId xmlns:a16="http://schemas.microsoft.com/office/drawing/2014/main" id="{576DA2CA-C431-4D4C-AEF7-BA18BAF3E82A}"/>
               </a:ext>
             </a:extLst>
           </p:cNvPr>
@@ -25953,7 +25953,7 @@
           <p:cNvPr id="91" name="">
             <a:extLst xmlns:a="http://schemas.openxmlformats.org/drawingml/2006/main">
               <a:ext uri="{FF2B5EF4-FFF2-40B4-BE49-F238E27FC236}">
-                <a16:creationId xmlns:a16="http://schemas.microsoft.com/office/drawing/2014/main" id="{36416ED7-21E2-48C6-A8D0-BF744B4FB57F}"/>
+                <a16:creationId xmlns:a16="http://schemas.microsoft.com/office/drawing/2014/main" id="{D5BCD247-E130-4F83-9325-41D0D1B844EF}"/>
               </a:ext>
             </a:extLst>
           </p:cNvPr>
@@ -26005,7 +26005,7 @@
           <p:cNvPr id="92" name="">
             <a:extLst xmlns:a="http://schemas.openxmlformats.org/drawingml/2006/main">
               <a:ext uri="{FF2B5EF4-FFF2-40B4-BE49-F238E27FC236}">
-                <a16:creationId xmlns:a16="http://schemas.microsoft.com/office/drawing/2014/main" id="{D98BD777-E321-4D33-B04A-0793467EED29}"/>
+                <a16:creationId xmlns:a16="http://schemas.microsoft.com/office/drawing/2014/main" id="{6BAA59D9-78C5-40E2-8D1F-2C414E9FD624}"/>
               </a:ext>
             </a:extLst>
           </p:cNvPr>
@@ -26057,7 +26057,7 @@
           <p:cNvPr id="93" name="">
             <a:extLst xmlns:a="http://schemas.openxmlformats.org/drawingml/2006/main">
               <a:ext uri="{FF2B5EF4-FFF2-40B4-BE49-F238E27FC236}">
-                <a16:creationId xmlns:a16="http://schemas.microsoft.com/office/drawing/2014/main" id="{D3EBF278-BC7E-498F-92B1-D84399B548BE}"/>
+                <a16:creationId xmlns:a16="http://schemas.microsoft.com/office/drawing/2014/main" id="{B0E769E6-0D89-48F3-91FD-E6B055E40E8D}"/>
               </a:ext>
             </a:extLst>
           </p:cNvPr>
@@ -26109,7 +26109,7 @@
           <p:cNvPr id="94" name="">
             <a:extLst xmlns:a="http://schemas.openxmlformats.org/drawingml/2006/main">
               <a:ext uri="{FF2B5EF4-FFF2-40B4-BE49-F238E27FC236}">
-                <a16:creationId xmlns:a16="http://schemas.microsoft.com/office/drawing/2014/main" id="{87B2F69C-C581-41B2-991D-F89A98B0FF46}"/>
+                <a16:creationId xmlns:a16="http://schemas.microsoft.com/office/drawing/2014/main" id="{0F16A2EE-74E5-46F3-BBA9-40EC34E63A67}"/>
               </a:ext>
             </a:extLst>
           </p:cNvPr>
@@ -26161,7 +26161,7 @@
           <p:cNvPr id="95" name="">
             <a:extLst xmlns:a="http://schemas.openxmlformats.org/drawingml/2006/main">
               <a:ext uri="{FF2B5EF4-FFF2-40B4-BE49-F238E27FC236}">
-                <a16:creationId xmlns:a16="http://schemas.microsoft.com/office/drawing/2014/main" id="{ACCAA3E9-55F6-4C6D-97EE-CC7D0ABD1B8F}"/>
+                <a16:creationId xmlns:a16="http://schemas.microsoft.com/office/drawing/2014/main" id="{AFB531CD-BBBE-4EB1-B44A-03AD0F44255D}"/>
               </a:ext>
             </a:extLst>
           </p:cNvPr>
@@ -26213,7 +26213,7 @@
           <p:cNvPr id="96" name="">
             <a:extLst xmlns:a="http://schemas.openxmlformats.org/drawingml/2006/main">
               <a:ext uri="{FF2B5EF4-FFF2-40B4-BE49-F238E27FC236}">
-                <a16:creationId xmlns:a16="http://schemas.microsoft.com/office/drawing/2014/main" id="{1A171135-5476-4A4B-8990-EF7781E2C0B1}"/>
+                <a16:creationId xmlns:a16="http://schemas.microsoft.com/office/drawing/2014/main" id="{DC270740-A0C2-479E-A17B-EB436FEC6AC1}"/>
               </a:ext>
             </a:extLst>
           </p:cNvPr>
@@ -26244,7 +26244,7 @@
           <p:cNvPr id="97" name="">
             <a:extLst xmlns:a="http://schemas.openxmlformats.org/drawingml/2006/main">
               <a:ext uri="{FF2B5EF4-FFF2-40B4-BE49-F238E27FC236}">
-                <a16:creationId xmlns:a16="http://schemas.microsoft.com/office/drawing/2014/main" id="{5A88598A-811A-426F-9DC3-739266186826}"/>
+                <a16:creationId xmlns:a16="http://schemas.microsoft.com/office/drawing/2014/main" id="{9EEFBBAD-287E-429D-8207-B492734C61B5}"/>
               </a:ext>
             </a:extLst>
           </p:cNvPr>
@@ -26275,7 +26275,7 @@
           <p:cNvPr id="98" name="">
             <a:extLst xmlns:a="http://schemas.openxmlformats.org/drawingml/2006/main">
               <a:ext uri="{FF2B5EF4-FFF2-40B4-BE49-F238E27FC236}">
-                <a16:creationId xmlns:a16="http://schemas.microsoft.com/office/drawing/2014/main" id="{C52B2EB6-86D9-42F8-8606-D79F44AE3226}"/>
+                <a16:creationId xmlns:a16="http://schemas.microsoft.com/office/drawing/2014/main" id="{AA8DDD55-DEF7-4839-9CCB-045673336E0D}"/>
               </a:ext>
             </a:extLst>
           </p:cNvPr>
@@ -26327,7 +26327,7 @@
           <p:cNvPr id="99" name="">
             <a:extLst xmlns:a="http://schemas.openxmlformats.org/drawingml/2006/main">
               <a:ext uri="{FF2B5EF4-FFF2-40B4-BE49-F238E27FC236}">
-                <a16:creationId xmlns:a16="http://schemas.microsoft.com/office/drawing/2014/main" id="{812B038F-3A28-4B89-B1A3-75EED8C60C42}"/>
+                <a16:creationId xmlns:a16="http://schemas.microsoft.com/office/drawing/2014/main" id="{02B1CB2F-BB73-471B-BBD2-397F1FC32E06}"/>
               </a:ext>
             </a:extLst>
           </p:cNvPr>
@@ -26379,7 +26379,7 @@
           <p:cNvPr id="100" name="">
             <a:extLst xmlns:a="http://schemas.openxmlformats.org/drawingml/2006/main">
               <a:ext uri="{FF2B5EF4-FFF2-40B4-BE49-F238E27FC236}">
-                <a16:creationId xmlns:a16="http://schemas.microsoft.com/office/drawing/2014/main" id="{8297C64E-1018-4152-964A-BBCFB026B311}"/>
+                <a16:creationId xmlns:a16="http://schemas.microsoft.com/office/drawing/2014/main" id="{74B87557-C869-4C6F-8EB6-EC86D1463D21}"/>
               </a:ext>
             </a:extLst>
           </p:cNvPr>
@@ -26431,7 +26431,7 @@
           <p:cNvPr id="101" name="">
             <a:extLst xmlns:a="http://schemas.openxmlformats.org/drawingml/2006/main">
               <a:ext uri="{FF2B5EF4-FFF2-40B4-BE49-F238E27FC236}">
-                <a16:creationId xmlns:a16="http://schemas.microsoft.com/office/drawing/2014/main" id="{0E324C5E-5C61-4EC0-BDF9-34C32BA4CC41}"/>
+                <a16:creationId xmlns:a16="http://schemas.microsoft.com/office/drawing/2014/main" id="{62DC0FE7-D3B8-4BF2-901B-1CE50235EBB8}"/>
               </a:ext>
             </a:extLst>
           </p:cNvPr>
@@ -26483,7 +26483,7 @@
           <p:cNvPr id="102" name="">
             <a:extLst xmlns:a="http://schemas.openxmlformats.org/drawingml/2006/main">
               <a:ext uri="{FF2B5EF4-FFF2-40B4-BE49-F238E27FC236}">
-                <a16:creationId xmlns:a16="http://schemas.microsoft.com/office/drawing/2014/main" id="{D4BC9ECE-FDCA-492C-B8B3-D3596BF1BA28}"/>
+                <a16:creationId xmlns:a16="http://schemas.microsoft.com/office/drawing/2014/main" id="{D89F3CF4-C3B4-4732-9368-8351A8474DAF}"/>
               </a:ext>
             </a:extLst>
           </p:cNvPr>
@@ -26535,7 +26535,7 @@
           <p:cNvPr id="103" name="">
             <a:extLst xmlns:a="http://schemas.openxmlformats.org/drawingml/2006/main">
               <a:ext uri="{FF2B5EF4-FFF2-40B4-BE49-F238E27FC236}">
-                <a16:creationId xmlns:a16="http://schemas.microsoft.com/office/drawing/2014/main" id="{46B28A61-B1A0-4AEE-A00B-2D6111DF59CD}"/>
+                <a16:creationId xmlns:a16="http://schemas.microsoft.com/office/drawing/2014/main" id="{40D4A40E-C0C9-4DA9-A2E2-B9A0A64986A0}"/>
               </a:ext>
             </a:extLst>
           </p:cNvPr>
@@ -26587,7 +26587,7 @@
           <p:cNvPr id="104" name="">
             <a:extLst xmlns:a="http://schemas.openxmlformats.org/drawingml/2006/main">
               <a:ext uri="{FF2B5EF4-FFF2-40B4-BE49-F238E27FC236}">
-                <a16:creationId xmlns:a16="http://schemas.microsoft.com/office/drawing/2014/main" id="{F702B7F8-0593-4DAC-A003-B44892ABB914}"/>
+                <a16:creationId xmlns:a16="http://schemas.microsoft.com/office/drawing/2014/main" id="{E7B9BE12-FC32-4B0F-AA71-4407CED20945}"/>
               </a:ext>
             </a:extLst>
           </p:cNvPr>
@@ -26639,7 +26639,7 @@
           <p:cNvPr id="105" name="">
             <a:extLst xmlns:a="http://schemas.openxmlformats.org/drawingml/2006/main">
               <a:ext uri="{FF2B5EF4-FFF2-40B4-BE49-F238E27FC236}">
-                <a16:creationId xmlns:a16="http://schemas.microsoft.com/office/drawing/2014/main" id="{7D7A5DDB-1535-4C8F-A28A-250658A72175}"/>
+                <a16:creationId xmlns:a16="http://schemas.microsoft.com/office/drawing/2014/main" id="{14E375A7-A86F-40A3-AE46-AD220AC80F3A}"/>
               </a:ext>
             </a:extLst>
           </p:cNvPr>
@@ -26670,7 +26670,7 @@
           <p:cNvPr id="106" name="">
             <a:extLst xmlns:a="http://schemas.openxmlformats.org/drawingml/2006/main">
               <a:ext uri="{FF2B5EF4-FFF2-40B4-BE49-F238E27FC236}">
-                <a16:creationId xmlns:a16="http://schemas.microsoft.com/office/drawing/2014/main" id="{76B921FB-853C-4292-99C0-3CABF7C77292}"/>
+                <a16:creationId xmlns:a16="http://schemas.microsoft.com/office/drawing/2014/main" id="{F0AB7944-AB6A-4E81-9AC1-D064CFBDF0D5}"/>
               </a:ext>
             </a:extLst>
           </p:cNvPr>
@@ -26722,7 +26722,7 @@
           <p:cNvPr id="107" name="">
             <a:extLst xmlns:a="http://schemas.openxmlformats.org/drawingml/2006/main">
               <a:ext uri="{FF2B5EF4-FFF2-40B4-BE49-F238E27FC236}">
-                <a16:creationId xmlns:a16="http://schemas.microsoft.com/office/drawing/2014/main" id="{4B03A3D7-3A59-496B-B0F5-1634E889B8CA}"/>
+                <a16:creationId xmlns:a16="http://schemas.microsoft.com/office/drawing/2014/main" id="{D2A24BE4-3501-479F-A31C-6C1CA050C1B1}"/>
               </a:ext>
             </a:extLst>
           </p:cNvPr>
@@ -26774,7 +26774,7 @@
           <p:cNvPr id="108" name="">
             <a:extLst xmlns:a="http://schemas.openxmlformats.org/drawingml/2006/main">
               <a:ext uri="{FF2B5EF4-FFF2-40B4-BE49-F238E27FC236}">
-                <a16:creationId xmlns:a16="http://schemas.microsoft.com/office/drawing/2014/main" id="{90AA2F71-6BAD-4AB3-9957-2D8A564FECF3}"/>
+                <a16:creationId xmlns:a16="http://schemas.microsoft.com/office/drawing/2014/main" id="{8CDC2FD8-A058-4734-9810-37E048883B30}"/>
               </a:ext>
             </a:extLst>
           </p:cNvPr>
@@ -26826,7 +26826,7 @@
           <p:cNvPr id="109" name="">
             <a:extLst xmlns:a="http://schemas.openxmlformats.org/drawingml/2006/main">
               <a:ext uri="{FF2B5EF4-FFF2-40B4-BE49-F238E27FC236}">
-                <a16:creationId xmlns:a16="http://schemas.microsoft.com/office/drawing/2014/main" id="{8E710196-40C7-49F7-A351-D85A72B73544}"/>
+                <a16:creationId xmlns:a16="http://schemas.microsoft.com/office/drawing/2014/main" id="{06470DF2-4EE9-4949-BE5B-AA01DCA70DDA}"/>
               </a:ext>
             </a:extLst>
           </p:cNvPr>
@@ -26878,7 +26878,7 @@
           <p:cNvPr id="110" name="">
             <a:extLst xmlns:a="http://schemas.openxmlformats.org/drawingml/2006/main">
               <a:ext uri="{FF2B5EF4-FFF2-40B4-BE49-F238E27FC236}">
-                <a16:creationId xmlns:a16="http://schemas.microsoft.com/office/drawing/2014/main" id="{FF37E46F-B85B-4BCA-B158-FB7B374D57D0}"/>
+                <a16:creationId xmlns:a16="http://schemas.microsoft.com/office/drawing/2014/main" id="{F68824BC-629E-4298-8FCB-045E3D625695}"/>
               </a:ext>
             </a:extLst>
           </p:cNvPr>
@@ -26930,7 +26930,7 @@
           <p:cNvPr id="111" name="">
             <a:extLst xmlns:a="http://schemas.openxmlformats.org/drawingml/2006/main">
               <a:ext uri="{FF2B5EF4-FFF2-40B4-BE49-F238E27FC236}">
-                <a16:creationId xmlns:a16="http://schemas.microsoft.com/office/drawing/2014/main" id="{BD0A42F5-471C-4622-BB20-B6291B475762}"/>
+                <a16:creationId xmlns:a16="http://schemas.microsoft.com/office/drawing/2014/main" id="{A79B3C4E-49A6-4623-BF34-4054332A5C9B}"/>
               </a:ext>
             </a:extLst>
           </p:cNvPr>
@@ -26982,7 +26982,7 @@
           <p:cNvPr id="112" name="">
             <a:extLst xmlns:a="http://schemas.openxmlformats.org/drawingml/2006/main">
               <a:ext uri="{FF2B5EF4-FFF2-40B4-BE49-F238E27FC236}">
-                <a16:creationId xmlns:a16="http://schemas.microsoft.com/office/drawing/2014/main" id="{CA6BF509-1A91-48A7-A0A2-63DD244AA77F}"/>
+                <a16:creationId xmlns:a16="http://schemas.microsoft.com/office/drawing/2014/main" id="{F1C5DBBB-A22F-4FC3-909A-7F2A45E61428}"/>
               </a:ext>
             </a:extLst>
           </p:cNvPr>
@@ -27034,7 +27034,7 @@
           <p:cNvPr id="113" name="">
             <a:extLst xmlns:a="http://schemas.openxmlformats.org/drawingml/2006/main">
               <a:ext uri="{FF2B5EF4-FFF2-40B4-BE49-F238E27FC236}">
-                <a16:creationId xmlns:a16="http://schemas.microsoft.com/office/drawing/2014/main" id="{71FAAC63-C735-414A-BC9D-162923104E34}"/>
+                <a16:creationId xmlns:a16="http://schemas.microsoft.com/office/drawing/2014/main" id="{68CB395F-B384-46F0-98CE-151D358A56F5}"/>
               </a:ext>
             </a:extLst>
           </p:cNvPr>
@@ -27065,7 +27065,7 @@
           <p:cNvPr id="114" name="">
             <a:extLst xmlns:a="http://schemas.openxmlformats.org/drawingml/2006/main">
               <a:ext uri="{FF2B5EF4-FFF2-40B4-BE49-F238E27FC236}">
-                <a16:creationId xmlns:a16="http://schemas.microsoft.com/office/drawing/2014/main" id="{ADE7360D-2072-4BD0-B451-48D68C1342A9}"/>
+                <a16:creationId xmlns:a16="http://schemas.microsoft.com/office/drawing/2014/main" id="{DA04BFCF-8A2B-4681-8C3B-ECFA630A2A7F}"/>
               </a:ext>
             </a:extLst>
           </p:cNvPr>
@@ -27096,7 +27096,7 @@
           <p:cNvPr id="115" name="">
             <a:extLst xmlns:a="http://schemas.openxmlformats.org/drawingml/2006/main">
               <a:ext uri="{FF2B5EF4-FFF2-40B4-BE49-F238E27FC236}">
-                <a16:creationId xmlns:a16="http://schemas.microsoft.com/office/drawing/2014/main" id="{79D9FAF7-93ED-4F66-AD49-33B6CD9097FA}"/>
+                <a16:creationId xmlns:a16="http://schemas.microsoft.com/office/drawing/2014/main" id="{1D5B8C51-69FD-49F1-8751-A36D68915584}"/>
               </a:ext>
             </a:extLst>
           </p:cNvPr>
@@ -27148,7 +27148,7 @@
           <p:cNvPr id="116" name="">
             <a:extLst xmlns:a="http://schemas.openxmlformats.org/drawingml/2006/main">
               <a:ext uri="{FF2B5EF4-FFF2-40B4-BE49-F238E27FC236}">
-                <a16:creationId xmlns:a16="http://schemas.microsoft.com/office/drawing/2014/main" id="{E8FEFDE9-757A-48B3-A4AC-644E19540E87}"/>
+                <a16:creationId xmlns:a16="http://schemas.microsoft.com/office/drawing/2014/main" id="{AC12E344-D38B-4FEF-BD49-D87273B50F2A}"/>
               </a:ext>
             </a:extLst>
           </p:cNvPr>
@@ -27200,7 +27200,7 @@
           <p:cNvPr id="117" name="">
             <a:extLst xmlns:a="http://schemas.openxmlformats.org/drawingml/2006/main">
               <a:ext uri="{FF2B5EF4-FFF2-40B4-BE49-F238E27FC236}">
-                <a16:creationId xmlns:a16="http://schemas.microsoft.com/office/drawing/2014/main" id="{7F6BEA69-DEE4-4F77-8B07-856154BCFEF3}"/>
+                <a16:creationId xmlns:a16="http://schemas.microsoft.com/office/drawing/2014/main" id="{4CB1F0FA-5D77-43B0-8D3E-8ACFA4C94D45}"/>
               </a:ext>
             </a:extLst>
           </p:cNvPr>
@@ -27252,7 +27252,7 @@
           <p:cNvPr id="118" name="">
             <a:extLst xmlns:a="http://schemas.openxmlformats.org/drawingml/2006/main">
               <a:ext uri="{FF2B5EF4-FFF2-40B4-BE49-F238E27FC236}">
-                <a16:creationId xmlns:a16="http://schemas.microsoft.com/office/drawing/2014/main" id="{0A9820E3-9CC5-4214-B3D3-113E10B82C8F}"/>
+                <a16:creationId xmlns:a16="http://schemas.microsoft.com/office/drawing/2014/main" id="{3C423530-EBD3-4ECB-965B-418B3335E04B}"/>
               </a:ext>
             </a:extLst>
           </p:cNvPr>
@@ -27304,7 +27304,7 @@
           <p:cNvPr id="119" name="">
             <a:extLst xmlns:a="http://schemas.openxmlformats.org/drawingml/2006/main">
               <a:ext uri="{FF2B5EF4-FFF2-40B4-BE49-F238E27FC236}">
-                <a16:creationId xmlns:a16="http://schemas.microsoft.com/office/drawing/2014/main" id="{3A70B3CF-831E-4F00-A113-91AF1758628B}"/>
+                <a16:creationId xmlns:a16="http://schemas.microsoft.com/office/drawing/2014/main" id="{10492BED-3AE8-4C04-B1CA-B0F27A93C4DA}"/>
               </a:ext>
             </a:extLst>
           </p:cNvPr>
@@ -27356,7 +27356,7 @@
           <p:cNvPr id="120" name="">
             <a:extLst xmlns:a="http://schemas.openxmlformats.org/drawingml/2006/main">
               <a:ext uri="{FF2B5EF4-FFF2-40B4-BE49-F238E27FC236}">
-                <a16:creationId xmlns:a16="http://schemas.microsoft.com/office/drawing/2014/main" id="{510BC47F-9461-42CE-9F70-664C9AEC1617}"/>
+                <a16:creationId xmlns:a16="http://schemas.microsoft.com/office/drawing/2014/main" id="{883ED95F-2A3B-46D7-B5C0-A5230BC952F7}"/>
               </a:ext>
             </a:extLst>
           </p:cNvPr>
@@ -27408,7 +27408,7 @@
           <p:cNvPr id="121" name="">
             <a:extLst xmlns:a="http://schemas.openxmlformats.org/drawingml/2006/main">
               <a:ext uri="{FF2B5EF4-FFF2-40B4-BE49-F238E27FC236}">
-                <a16:creationId xmlns:a16="http://schemas.microsoft.com/office/drawing/2014/main" id="{8D75693D-A6F1-4923-B4D2-5E390CD625F5}"/>
+                <a16:creationId xmlns:a16="http://schemas.microsoft.com/office/drawing/2014/main" id="{6263461F-5D1E-4942-9D9C-11ADB1282B4D}"/>
               </a:ext>
             </a:extLst>
           </p:cNvPr>
@@ -27458,7 +27458,7 @@
     </p:spTree>
     <p:extLst>
       <p:ext uri="{BB962C8B-B14F-4D97-AF65-F5344CB8AC3E}">
-        <p14:creationId xmlns:p14="http://schemas.microsoft.com/office/powerpoint/2010/main" val="481459498"/>
+        <p14:creationId xmlns:p14="http://schemas.microsoft.com/office/powerpoint/2010/main" val="654427010"/>
       </p:ext>
     </p:extLst>
   </p:cSld>
@@ -27489,7 +27489,7 @@
           <p:cNvPr id="9" name="">
             <a:extLst xmlns:a="http://schemas.openxmlformats.org/drawingml/2006/main">
               <a:ext uri="{FF2B5EF4-FFF2-40B4-BE49-F238E27FC236}">
-                <a16:creationId xmlns:a16="http://schemas.microsoft.com/office/drawing/2014/main" id="{9BC0FD14-EDA5-43CA-B8DE-ADE2BBB3AAAF}"/>
+                <a16:creationId xmlns:a16="http://schemas.microsoft.com/office/drawing/2014/main" id="{D54889C8-DB0B-490B-9990-5AE8C6710723}"/>
               </a:ext>
             </a:extLst>
           </p:cNvPr>
@@ -27522,7 +27522,7 @@
           <p:cNvPr id="2" name="">
             <a:extLst xmlns:a="http://schemas.openxmlformats.org/drawingml/2006/main">
               <a:ext uri="{FF2B5EF4-FFF2-40B4-BE49-F238E27FC236}">
-                <a16:creationId xmlns:a16="http://schemas.microsoft.com/office/drawing/2014/main" id="{0B28D77B-5EA7-4B93-A631-FFF27E606BAE}"/>
+                <a16:creationId xmlns:a16="http://schemas.microsoft.com/office/drawing/2014/main" id="{63129BAE-B75F-4620-8F68-F0963381CDE9}"/>
               </a:ext>
             </a:extLst>
           </p:cNvPr>
@@ -27553,7 +27553,7 @@
           <p:cNvPr id="3" name="">
             <a:extLst xmlns:a="http://schemas.openxmlformats.org/drawingml/2006/main">
               <a:ext uri="{FF2B5EF4-FFF2-40B4-BE49-F238E27FC236}">
-                <a16:creationId xmlns:a16="http://schemas.microsoft.com/office/drawing/2014/main" id="{A6D2E9C5-CE5D-446C-B331-73A1965D5772}"/>
+                <a16:creationId xmlns:a16="http://schemas.microsoft.com/office/drawing/2014/main" id="{385DAA5C-F500-44B8-80A6-1150063454F9}"/>
               </a:ext>
             </a:extLst>
           </p:cNvPr>
@@ -27605,7 +27605,7 @@
           <p:cNvPr id="4" name="">
             <a:extLst xmlns:a="http://schemas.openxmlformats.org/drawingml/2006/main">
               <a:ext uri="{FF2B5EF4-FFF2-40B4-BE49-F238E27FC236}">
-                <a16:creationId xmlns:a16="http://schemas.microsoft.com/office/drawing/2014/main" id="{C0846256-E2CF-4BCF-BA5D-1F5FD5C43095}"/>
+                <a16:creationId xmlns:a16="http://schemas.microsoft.com/office/drawing/2014/main" id="{7E0D4105-2C5A-4B9C-A26E-8460663C38BC}"/>
               </a:ext>
             </a:extLst>
           </p:cNvPr>
@@ -27640,7 +27640,7 @@
           <p:nvPr/>
         </p:nvPicPr>
         <p:blipFill>
-          <a:blip xmlns:r="http://schemas.openxmlformats.org/officeDocument/2006/relationships" xmlns:a="http://schemas.openxmlformats.org/drawingml/2006/main" r:embed="R7923e7adaca64fa6"/>
+          <a:blip xmlns:r="http://schemas.openxmlformats.org/officeDocument/2006/relationships" xmlns:a="http://schemas.openxmlformats.org/drawingml/2006/main" r:embed="R2f2cedf80c4140af"/>
           <a:stretch xmlns:a="http://schemas.openxmlformats.org/drawingml/2006/main"/>
         </p:blipFill>
         <p:spPr>
@@ -27658,7 +27658,7 @@
           <p:cNvPr id="6" name="">
             <a:extLst xmlns:a="http://schemas.openxmlformats.org/drawingml/2006/main">
               <a:ext uri="{FF2B5EF4-FFF2-40B4-BE49-F238E27FC236}">
-                <a16:creationId xmlns:a16="http://schemas.microsoft.com/office/drawing/2014/main" id="{36CDACFB-3C39-460E-A55E-6E0DCBF9E24D}"/>
+                <a16:creationId xmlns:a16="http://schemas.microsoft.com/office/drawing/2014/main" id="{9E625FD3-2383-46D8-A99A-FD873C08366D}"/>
               </a:ext>
             </a:extLst>
           </p:cNvPr>
@@ -27710,7 +27710,7 @@
           <p:cNvPr id="7" name="">
             <a:extLst xmlns:a="http://schemas.openxmlformats.org/drawingml/2006/main">
               <a:ext uri="{FF2B5EF4-FFF2-40B4-BE49-F238E27FC236}">
-                <a16:creationId xmlns:a16="http://schemas.microsoft.com/office/drawing/2014/main" id="{EDDE4720-CD2C-4394-AB29-E7DA033009B5}"/>
+                <a16:creationId xmlns:a16="http://schemas.microsoft.com/office/drawing/2014/main" id="{F53CEDF7-4E40-4734-83EC-8A08E203B4BE}"/>
               </a:ext>
             </a:extLst>
           </p:cNvPr>
@@ -27766,7 +27766,7 @@
           <p:nvPr/>
         </p:nvPicPr>
         <p:blipFill>
-          <a:blip xmlns:r="http://schemas.openxmlformats.org/officeDocument/2006/relationships" xmlns:a="http://schemas.openxmlformats.org/drawingml/2006/main" r:embed="R8942bb28f9834887"/>
+          <a:blip xmlns:r="http://schemas.openxmlformats.org/officeDocument/2006/relationships" xmlns:a="http://schemas.openxmlformats.org/drawingml/2006/main" r:embed="R7f2dcab7d10240ad"/>
           <a:stretch xmlns:a="http://schemas.openxmlformats.org/drawingml/2006/main"/>
         </p:blipFill>
         <p:spPr>
@@ -27782,7 +27782,7 @@
     </p:spTree>
     <p:extLst>
       <p:ext uri="{BB962C8B-B14F-4D97-AF65-F5344CB8AC3E}">
-        <p14:creationId xmlns:p14="http://schemas.microsoft.com/office/powerpoint/2010/main" val="878988536"/>
+        <p14:creationId xmlns:p14="http://schemas.microsoft.com/office/powerpoint/2010/main" val="925260184"/>
       </p:ext>
     </p:extLst>
   </p:cSld>
@@ -27813,7 +27813,7 @@
           <p:cNvPr id="42" name="">
             <a:extLst xmlns:a="http://schemas.openxmlformats.org/drawingml/2006/main">
               <a:ext uri="{FF2B5EF4-FFF2-40B4-BE49-F238E27FC236}">
-                <a16:creationId xmlns:a16="http://schemas.microsoft.com/office/drawing/2014/main" id="{0A023163-C56E-4584-AE78-DBB5BD29B728}"/>
+                <a16:creationId xmlns:a16="http://schemas.microsoft.com/office/drawing/2014/main" id="{77002393-2218-42B7-ACD3-45AC85468FB0}"/>
               </a:ext>
             </a:extLst>
           </p:cNvPr>
@@ -27846,7 +27846,7 @@
           <p:cNvPr id="2" name="">
             <a:extLst xmlns:a="http://schemas.openxmlformats.org/drawingml/2006/main">
               <a:ext uri="{FF2B5EF4-FFF2-40B4-BE49-F238E27FC236}">
-                <a16:creationId xmlns:a16="http://schemas.microsoft.com/office/drawing/2014/main" id="{218D8AE9-02E9-4D34-89FF-D6DEEFDC3715}"/>
+                <a16:creationId xmlns:a16="http://schemas.microsoft.com/office/drawing/2014/main" id="{98432E6B-8F5C-4CC1-A4DF-EE12943F8C7C}"/>
               </a:ext>
             </a:extLst>
           </p:cNvPr>
@@ -27877,7 +27877,7 @@
           <p:cNvPr id="3" name="">
             <a:extLst xmlns:a="http://schemas.openxmlformats.org/drawingml/2006/main">
               <a:ext uri="{FF2B5EF4-FFF2-40B4-BE49-F238E27FC236}">
-                <a16:creationId xmlns:a16="http://schemas.microsoft.com/office/drawing/2014/main" id="{5AF95F26-0FF6-40A1-9BBA-C2F7F3B145DF}"/>
+                <a16:creationId xmlns:a16="http://schemas.microsoft.com/office/drawing/2014/main" id="{637977E4-126D-4617-A3AE-4B5B18254845}"/>
               </a:ext>
             </a:extLst>
           </p:cNvPr>
@@ -27929,7 +27929,7 @@
           <p:cNvPr id="4" name="">
             <a:extLst xmlns:a="http://schemas.openxmlformats.org/drawingml/2006/main">
               <a:ext uri="{FF2B5EF4-FFF2-40B4-BE49-F238E27FC236}">
-                <a16:creationId xmlns:a16="http://schemas.microsoft.com/office/drawing/2014/main" id="{8723EE53-E81D-4B83-A023-5FEC5B893B91}"/>
+                <a16:creationId xmlns:a16="http://schemas.microsoft.com/office/drawing/2014/main" id="{7D2450A6-2C94-4948-9477-7D91C72C3C24}"/>
               </a:ext>
             </a:extLst>
           </p:cNvPr>
@@ -27981,7 +27981,7 @@
           <p:cNvPr id="5" name="">
             <a:extLst xmlns:a="http://schemas.openxmlformats.org/drawingml/2006/main">
               <a:ext uri="{FF2B5EF4-FFF2-40B4-BE49-F238E27FC236}">
-                <a16:creationId xmlns:a16="http://schemas.microsoft.com/office/drawing/2014/main" id="{B1EB9AE8-96E5-4521-9504-7381A421BDD2}"/>
+                <a16:creationId xmlns:a16="http://schemas.microsoft.com/office/drawing/2014/main" id="{83ECDBCD-97EB-424F-8C99-CAF055B1DE99}"/>
               </a:ext>
             </a:extLst>
           </p:cNvPr>
@@ -28016,7 +28016,7 @@
           <p:nvPr/>
         </p:nvPicPr>
         <p:blipFill>
-          <a:blip xmlns:r="http://schemas.openxmlformats.org/officeDocument/2006/relationships" xmlns:a="http://schemas.openxmlformats.org/drawingml/2006/main" r:embed="R31c94b2e67bd4bca"/>
+          <a:blip xmlns:r="http://schemas.openxmlformats.org/officeDocument/2006/relationships" xmlns:a="http://schemas.openxmlformats.org/drawingml/2006/main" r:embed="R535c71f583744157"/>
           <a:stretch xmlns:a="http://schemas.openxmlformats.org/drawingml/2006/main"/>
         </p:blipFill>
         <p:spPr>
@@ -28034,7 +28034,7 @@
           <p:cNvPr id="7" name="">
             <a:extLst xmlns:a="http://schemas.openxmlformats.org/drawingml/2006/main">
               <a:ext uri="{FF2B5EF4-FFF2-40B4-BE49-F238E27FC236}">
-                <a16:creationId xmlns:a16="http://schemas.microsoft.com/office/drawing/2014/main" id="{06E82900-A4CD-44AB-9E04-F221E797EE2D}"/>
+                <a16:creationId xmlns:a16="http://schemas.microsoft.com/office/drawing/2014/main" id="{95564212-8D2D-4925-AFDB-F87230F4550A}"/>
               </a:ext>
             </a:extLst>
           </p:cNvPr>
@@ -28086,7 +28086,7 @@
           <p:cNvPr id="8" name="">
             <a:extLst xmlns:a="http://schemas.openxmlformats.org/drawingml/2006/main">
               <a:ext uri="{FF2B5EF4-FFF2-40B4-BE49-F238E27FC236}">
-                <a16:creationId xmlns:a16="http://schemas.microsoft.com/office/drawing/2014/main" id="{DFC34BF0-9817-47FE-9FF6-4527CE7B0263}"/>
+                <a16:creationId xmlns:a16="http://schemas.microsoft.com/office/drawing/2014/main" id="{4F3A44CC-1B8E-44B1-A7C4-E882ED69F327}"/>
               </a:ext>
             </a:extLst>
           </p:cNvPr>
@@ -28138,7 +28138,7 @@
           <p:cNvPr id="9" name="">
             <a:extLst xmlns:a="http://schemas.openxmlformats.org/drawingml/2006/main">
               <a:ext uri="{FF2B5EF4-FFF2-40B4-BE49-F238E27FC236}">
-                <a16:creationId xmlns:a16="http://schemas.microsoft.com/office/drawing/2014/main" id="{7ED3255D-3C2F-4E89-B0E7-CE387DAE2961}"/>
+                <a16:creationId xmlns:a16="http://schemas.microsoft.com/office/drawing/2014/main" id="{08004BAA-DA2B-41A0-86F5-2CDD18BBAAD3}"/>
               </a:ext>
             </a:extLst>
           </p:cNvPr>
@@ -28190,7 +28190,7 @@
           <p:cNvPr id="10" name="">
             <a:extLst xmlns:a="http://schemas.openxmlformats.org/drawingml/2006/main">
               <a:ext uri="{FF2B5EF4-FFF2-40B4-BE49-F238E27FC236}">
-                <a16:creationId xmlns:a16="http://schemas.microsoft.com/office/drawing/2014/main" id="{B6160BC0-4702-4192-B74E-C13F389506CB}"/>
+                <a16:creationId xmlns:a16="http://schemas.microsoft.com/office/drawing/2014/main" id="{F00DF444-A193-4119-9F17-0A7763F1AF85}"/>
               </a:ext>
             </a:extLst>
           </p:cNvPr>
@@ -28221,7 +28221,7 @@
           <p:cNvPr id="11" name="">
             <a:extLst xmlns:a="http://schemas.openxmlformats.org/drawingml/2006/main">
               <a:ext uri="{FF2B5EF4-FFF2-40B4-BE49-F238E27FC236}">
-                <a16:creationId xmlns:a16="http://schemas.microsoft.com/office/drawing/2014/main" id="{2746B07D-76D7-472D-B7A5-7E24ED3449E9}"/>
+                <a16:creationId xmlns:a16="http://schemas.microsoft.com/office/drawing/2014/main" id="{73D1711A-3505-425A-A42C-808FFE1463C6}"/>
               </a:ext>
             </a:extLst>
           </p:cNvPr>
@@ -28273,7 +28273,7 @@
           <p:cNvPr id="12" name="">
             <a:extLst xmlns:a="http://schemas.openxmlformats.org/drawingml/2006/main">
               <a:ext uri="{FF2B5EF4-FFF2-40B4-BE49-F238E27FC236}">
-                <a16:creationId xmlns:a16="http://schemas.microsoft.com/office/drawing/2014/main" id="{72CEB0D7-72F0-43B1-8CE0-6999AAED9534}"/>
+                <a16:creationId xmlns:a16="http://schemas.microsoft.com/office/drawing/2014/main" id="{6FB88163-3D49-403E-BE07-B719672367AF}"/>
               </a:ext>
             </a:extLst>
           </p:cNvPr>
@@ -28325,7 +28325,7 @@
           <p:cNvPr id="13" name="">
             <a:extLst xmlns:a="http://schemas.openxmlformats.org/drawingml/2006/main">
               <a:ext uri="{FF2B5EF4-FFF2-40B4-BE49-F238E27FC236}">
-                <a16:creationId xmlns:a16="http://schemas.microsoft.com/office/drawing/2014/main" id="{E7CA3712-204E-4076-9BF8-ED17EC1FCF59}"/>
+                <a16:creationId xmlns:a16="http://schemas.microsoft.com/office/drawing/2014/main" id="{2324B5F3-ECB8-42CB-820A-648F25094438}"/>
               </a:ext>
             </a:extLst>
           </p:cNvPr>
@@ -28377,7 +28377,7 @@
           <p:cNvPr id="14" name="">
             <a:extLst xmlns:a="http://schemas.openxmlformats.org/drawingml/2006/main">
               <a:ext uri="{FF2B5EF4-FFF2-40B4-BE49-F238E27FC236}">
-                <a16:creationId xmlns:a16="http://schemas.microsoft.com/office/drawing/2014/main" id="{58A61D83-0A50-4911-BFE5-8DE8F0543D63}"/>
+                <a16:creationId xmlns:a16="http://schemas.microsoft.com/office/drawing/2014/main" id="{38C40768-4CB3-46A8-8D77-584EDAD7A517}"/>
               </a:ext>
             </a:extLst>
           </p:cNvPr>
@@ -28408,7 +28408,7 @@
           <p:cNvPr id="15" name="">
             <a:extLst xmlns:a="http://schemas.openxmlformats.org/drawingml/2006/main">
               <a:ext uri="{FF2B5EF4-FFF2-40B4-BE49-F238E27FC236}">
-                <a16:creationId xmlns:a16="http://schemas.microsoft.com/office/drawing/2014/main" id="{73679E5D-F101-4214-9817-3BD7D88A74E0}"/>
+                <a16:creationId xmlns:a16="http://schemas.microsoft.com/office/drawing/2014/main" id="{A850BE2C-C211-4E09-A8F4-15B8CCFFAE52}"/>
               </a:ext>
             </a:extLst>
           </p:cNvPr>
@@ -28460,7 +28460,7 @@
           <p:cNvPr id="16" name="">
             <a:extLst xmlns:a="http://schemas.openxmlformats.org/drawingml/2006/main">
               <a:ext uri="{FF2B5EF4-FFF2-40B4-BE49-F238E27FC236}">
-                <a16:creationId xmlns:a16="http://schemas.microsoft.com/office/drawing/2014/main" id="{45ABED0E-8B7C-4A30-AB0C-C5448787B331}"/>
+                <a16:creationId xmlns:a16="http://schemas.microsoft.com/office/drawing/2014/main" id="{BA236F2F-427B-48A8-ACAA-6A062B8FB798}"/>
               </a:ext>
             </a:extLst>
           </p:cNvPr>
@@ -28512,7 +28512,7 @@
           <p:cNvPr id="17" name="">
             <a:extLst xmlns:a="http://schemas.openxmlformats.org/drawingml/2006/main">
               <a:ext uri="{FF2B5EF4-FFF2-40B4-BE49-F238E27FC236}">
-                <a16:creationId xmlns:a16="http://schemas.microsoft.com/office/drawing/2014/main" id="{A9E608A3-D304-4DAD-B47D-987CE094D6C6}"/>
+                <a16:creationId xmlns:a16="http://schemas.microsoft.com/office/drawing/2014/main" id="{E4C5A3FD-45C6-4394-98DA-1974197396F1}"/>
               </a:ext>
             </a:extLst>
           </p:cNvPr>
@@ -28564,7 +28564,7 @@
           <p:cNvPr id="18" name="">
             <a:extLst xmlns:a="http://schemas.openxmlformats.org/drawingml/2006/main">
               <a:ext uri="{FF2B5EF4-FFF2-40B4-BE49-F238E27FC236}">
-                <a16:creationId xmlns:a16="http://schemas.microsoft.com/office/drawing/2014/main" id="{5E83AD19-DCAB-4FCA-A44F-3750653AB184}"/>
+                <a16:creationId xmlns:a16="http://schemas.microsoft.com/office/drawing/2014/main" id="{DF551C13-FAC2-4CC5-9585-23482BA3B0E9}"/>
               </a:ext>
             </a:extLst>
           </p:cNvPr>
@@ -28595,7 +28595,7 @@
           <p:cNvPr id="19" name="">
             <a:extLst xmlns:a="http://schemas.openxmlformats.org/drawingml/2006/main">
               <a:ext uri="{FF2B5EF4-FFF2-40B4-BE49-F238E27FC236}">
-                <a16:creationId xmlns:a16="http://schemas.microsoft.com/office/drawing/2014/main" id="{B0EDFAD7-0112-46E5-B4EE-6FA71CA53877}"/>
+                <a16:creationId xmlns:a16="http://schemas.microsoft.com/office/drawing/2014/main" id="{FF9B8324-67B7-46F0-9188-3033B6F394DB}"/>
               </a:ext>
             </a:extLst>
           </p:cNvPr>
@@ -28647,7 +28647,7 @@
           <p:cNvPr id="20" name="">
             <a:extLst xmlns:a="http://schemas.openxmlformats.org/drawingml/2006/main">
               <a:ext uri="{FF2B5EF4-FFF2-40B4-BE49-F238E27FC236}">
-                <a16:creationId xmlns:a16="http://schemas.microsoft.com/office/drawing/2014/main" id="{F559C4D1-309A-4FE3-AA95-008FA4C370C5}"/>
+                <a16:creationId xmlns:a16="http://schemas.microsoft.com/office/drawing/2014/main" id="{F9985726-4C21-48EF-8263-BF786DC73E9D}"/>
               </a:ext>
             </a:extLst>
           </p:cNvPr>
@@ -28699,7 +28699,7 @@
           <p:cNvPr id="21" name="">
             <a:extLst xmlns:a="http://schemas.openxmlformats.org/drawingml/2006/main">
               <a:ext uri="{FF2B5EF4-FFF2-40B4-BE49-F238E27FC236}">
-                <a16:creationId xmlns:a16="http://schemas.microsoft.com/office/drawing/2014/main" id="{80BC4E7F-24C1-40C9-A230-C3FC9AB0101D}"/>
+                <a16:creationId xmlns:a16="http://schemas.microsoft.com/office/drawing/2014/main" id="{61C0D082-3094-487F-9D71-320919BE9A49}"/>
               </a:ext>
             </a:extLst>
           </p:cNvPr>
@@ -28751,7 +28751,7 @@
           <p:cNvPr id="22" name="">
             <a:extLst xmlns:a="http://schemas.openxmlformats.org/drawingml/2006/main">
               <a:ext uri="{FF2B5EF4-FFF2-40B4-BE49-F238E27FC236}">
-                <a16:creationId xmlns:a16="http://schemas.microsoft.com/office/drawing/2014/main" id="{EC925848-36B4-41DC-81F8-4A9FEB0D5D75}"/>
+                <a16:creationId xmlns:a16="http://schemas.microsoft.com/office/drawing/2014/main" id="{31299D3E-69DD-4080-8483-966555973CE1}"/>
               </a:ext>
             </a:extLst>
           </p:cNvPr>
@@ -28782,7 +28782,7 @@
           <p:cNvPr id="23" name="">
             <a:extLst xmlns:a="http://schemas.openxmlformats.org/drawingml/2006/main">
               <a:ext uri="{FF2B5EF4-FFF2-40B4-BE49-F238E27FC236}">
-                <a16:creationId xmlns:a16="http://schemas.microsoft.com/office/drawing/2014/main" id="{4823EAF3-36BD-4EEE-A9E3-36D6A0811F25}"/>
+                <a16:creationId xmlns:a16="http://schemas.microsoft.com/office/drawing/2014/main" id="{1F664367-9ABE-4C42-B414-84D76504D374}"/>
               </a:ext>
             </a:extLst>
           </p:cNvPr>
@@ -28834,7 +28834,7 @@
           <p:cNvPr id="24" name="">
             <a:extLst xmlns:a="http://schemas.openxmlformats.org/drawingml/2006/main">
               <a:ext uri="{FF2B5EF4-FFF2-40B4-BE49-F238E27FC236}">
-                <a16:creationId xmlns:a16="http://schemas.microsoft.com/office/drawing/2014/main" id="{D489F022-AB1B-4C58-9632-FC1F19CE2B90}"/>
+                <a16:creationId xmlns:a16="http://schemas.microsoft.com/office/drawing/2014/main" id="{E494C438-3FF9-4738-9FA3-20A88A7720CB}"/>
               </a:ext>
             </a:extLst>
           </p:cNvPr>
@@ -28886,7 +28886,7 @@
           <p:cNvPr id="25" name="">
             <a:extLst xmlns:a="http://schemas.openxmlformats.org/drawingml/2006/main">
               <a:ext uri="{FF2B5EF4-FFF2-40B4-BE49-F238E27FC236}">
-                <a16:creationId xmlns:a16="http://schemas.microsoft.com/office/drawing/2014/main" id="{C3F8123B-BFED-46EC-9FB9-C904654ABE7E}"/>
+                <a16:creationId xmlns:a16="http://schemas.microsoft.com/office/drawing/2014/main" id="{C358CD75-8020-4364-AF72-CA425B962296}"/>
               </a:ext>
             </a:extLst>
           </p:cNvPr>
@@ -28938,7 +28938,7 @@
           <p:cNvPr id="26" name="">
             <a:extLst xmlns:a="http://schemas.openxmlformats.org/drawingml/2006/main">
               <a:ext uri="{FF2B5EF4-FFF2-40B4-BE49-F238E27FC236}">
-                <a16:creationId xmlns:a16="http://schemas.microsoft.com/office/drawing/2014/main" id="{57E18D65-33A7-4995-9568-62D6E9037052}"/>
+                <a16:creationId xmlns:a16="http://schemas.microsoft.com/office/drawing/2014/main" id="{0248ED2E-A176-4220-ABF5-0094C004BAD8}"/>
               </a:ext>
             </a:extLst>
           </p:cNvPr>
@@ -28969,7 +28969,7 @@
           <p:cNvPr id="27" name="">
             <a:extLst xmlns:a="http://schemas.openxmlformats.org/drawingml/2006/main">
               <a:ext uri="{FF2B5EF4-FFF2-40B4-BE49-F238E27FC236}">
-                <a16:creationId xmlns:a16="http://schemas.microsoft.com/office/drawing/2014/main" id="{CEF48B8A-1CDA-4C86-9A4A-7AE61C52BD0A}"/>
+                <a16:creationId xmlns:a16="http://schemas.microsoft.com/office/drawing/2014/main" id="{410EACE9-3476-4248-AE8D-D171B9C71C86}"/>
               </a:ext>
             </a:extLst>
           </p:cNvPr>
@@ -29021,7 +29021,7 @@
           <p:cNvPr id="28" name="">
             <a:extLst xmlns:a="http://schemas.openxmlformats.org/drawingml/2006/main">
               <a:ext uri="{FF2B5EF4-FFF2-40B4-BE49-F238E27FC236}">
-                <a16:creationId xmlns:a16="http://schemas.microsoft.com/office/drawing/2014/main" id="{6C83944F-532B-4F15-BC03-AC8044907F82}"/>
+                <a16:creationId xmlns:a16="http://schemas.microsoft.com/office/drawing/2014/main" id="{BAD1E155-DA9D-47BB-9B9D-24E025CE1845}"/>
               </a:ext>
             </a:extLst>
           </p:cNvPr>
@@ -29073,7 +29073,7 @@
           <p:cNvPr id="29" name="">
             <a:extLst xmlns:a="http://schemas.openxmlformats.org/drawingml/2006/main">
               <a:ext uri="{FF2B5EF4-FFF2-40B4-BE49-F238E27FC236}">
-                <a16:creationId xmlns:a16="http://schemas.microsoft.com/office/drawing/2014/main" id="{C87D2AD5-FA9B-4D4B-9CD8-CD2BE2F0FBAC}"/>
+                <a16:creationId xmlns:a16="http://schemas.microsoft.com/office/drawing/2014/main" id="{6446DFC5-BA1D-4385-B605-C475B1127DC6}"/>
               </a:ext>
             </a:extLst>
           </p:cNvPr>
@@ -29125,7 +29125,7 @@
           <p:cNvPr id="30" name="">
             <a:extLst xmlns:a="http://schemas.openxmlformats.org/drawingml/2006/main">
               <a:ext uri="{FF2B5EF4-FFF2-40B4-BE49-F238E27FC236}">
-                <a16:creationId xmlns:a16="http://schemas.microsoft.com/office/drawing/2014/main" id="{B0EF56DD-9431-498A-B90A-A0353DF81726}"/>
+                <a16:creationId xmlns:a16="http://schemas.microsoft.com/office/drawing/2014/main" id="{BF1FF73E-91A0-401E-B750-A205D8E64370}"/>
               </a:ext>
             </a:extLst>
           </p:cNvPr>
@@ -29156,7 +29156,7 @@
           <p:cNvPr id="31" name="">
             <a:extLst xmlns:a="http://schemas.openxmlformats.org/drawingml/2006/main">
               <a:ext uri="{FF2B5EF4-FFF2-40B4-BE49-F238E27FC236}">
-                <a16:creationId xmlns:a16="http://schemas.microsoft.com/office/drawing/2014/main" id="{E8EE8F6F-3B33-4D1C-B4D9-5D92E0C270EC}"/>
+                <a16:creationId xmlns:a16="http://schemas.microsoft.com/office/drawing/2014/main" id="{F34D5542-FAB5-4A15-B548-2985AE2E590A}"/>
               </a:ext>
             </a:extLst>
           </p:cNvPr>
@@ -29208,7 +29208,7 @@
           <p:cNvPr id="32" name="">
             <a:extLst xmlns:a="http://schemas.openxmlformats.org/drawingml/2006/main">
               <a:ext uri="{FF2B5EF4-FFF2-40B4-BE49-F238E27FC236}">
-                <a16:creationId xmlns:a16="http://schemas.microsoft.com/office/drawing/2014/main" id="{E25AE286-D54A-499C-A156-99B538F883DE}"/>
+                <a16:creationId xmlns:a16="http://schemas.microsoft.com/office/drawing/2014/main" id="{005C736D-C2D9-4FB0-80AD-1AB154DA84E0}"/>
               </a:ext>
             </a:extLst>
           </p:cNvPr>
@@ -29260,7 +29260,7 @@
           <p:cNvPr id="33" name="">
             <a:extLst xmlns:a="http://schemas.openxmlformats.org/drawingml/2006/main">
               <a:ext uri="{FF2B5EF4-FFF2-40B4-BE49-F238E27FC236}">
-                <a16:creationId xmlns:a16="http://schemas.microsoft.com/office/drawing/2014/main" id="{A55AE7DE-C699-4216-936A-D4B52B692F64}"/>
+                <a16:creationId xmlns:a16="http://schemas.microsoft.com/office/drawing/2014/main" id="{CE0DBD4A-3C85-432D-8A70-FE55BD7B52AB}"/>
               </a:ext>
             </a:extLst>
           </p:cNvPr>
@@ -29312,7 +29312,7 @@
           <p:cNvPr id="34" name="">
             <a:extLst xmlns:a="http://schemas.openxmlformats.org/drawingml/2006/main">
               <a:ext uri="{FF2B5EF4-FFF2-40B4-BE49-F238E27FC236}">
-                <a16:creationId xmlns:a16="http://schemas.microsoft.com/office/drawing/2014/main" id="{43711C3E-2D66-46FA-8EA7-EE131B991C0D}"/>
+                <a16:creationId xmlns:a16="http://schemas.microsoft.com/office/drawing/2014/main" id="{18C2784A-4F33-47C5-9710-51A72E82C574}"/>
               </a:ext>
             </a:extLst>
           </p:cNvPr>
@@ -29343,7 +29343,7 @@
           <p:cNvPr id="35" name="">
             <a:extLst xmlns:a="http://schemas.openxmlformats.org/drawingml/2006/main">
               <a:ext uri="{FF2B5EF4-FFF2-40B4-BE49-F238E27FC236}">
-                <a16:creationId xmlns:a16="http://schemas.microsoft.com/office/drawing/2014/main" id="{7A57FAD0-8968-4607-8FB7-B4A19734958D}"/>
+                <a16:creationId xmlns:a16="http://schemas.microsoft.com/office/drawing/2014/main" id="{A51480D7-8B9A-4C85-BDD7-378A71A73CB7}"/>
               </a:ext>
             </a:extLst>
           </p:cNvPr>
@@ -29395,7 +29395,7 @@
           <p:cNvPr id="36" name="">
             <a:extLst xmlns:a="http://schemas.openxmlformats.org/drawingml/2006/main">
               <a:ext uri="{FF2B5EF4-FFF2-40B4-BE49-F238E27FC236}">
-                <a16:creationId xmlns:a16="http://schemas.microsoft.com/office/drawing/2014/main" id="{6FDF8599-5E2A-40DF-BB5C-E4FB59FE6927}"/>
+                <a16:creationId xmlns:a16="http://schemas.microsoft.com/office/drawing/2014/main" id="{ED5C1CD1-01D5-48A0-B6B5-541D0C7C73BD}"/>
               </a:ext>
             </a:extLst>
           </p:cNvPr>
@@ -29447,7 +29447,7 @@
           <p:cNvPr id="37" name="">
             <a:extLst xmlns:a="http://schemas.openxmlformats.org/drawingml/2006/main">
               <a:ext uri="{FF2B5EF4-FFF2-40B4-BE49-F238E27FC236}">
-                <a16:creationId xmlns:a16="http://schemas.microsoft.com/office/drawing/2014/main" id="{080798C5-2D81-464C-B395-569028BA99DD}"/>
+                <a16:creationId xmlns:a16="http://schemas.microsoft.com/office/drawing/2014/main" id="{4DC3B1FA-BD11-46F8-A50A-92261077B135}"/>
               </a:ext>
             </a:extLst>
           </p:cNvPr>
@@ -29499,7 +29499,7 @@
           <p:cNvPr id="38" name="">
             <a:extLst xmlns:a="http://schemas.openxmlformats.org/drawingml/2006/main">
               <a:ext uri="{FF2B5EF4-FFF2-40B4-BE49-F238E27FC236}">
-                <a16:creationId xmlns:a16="http://schemas.microsoft.com/office/drawing/2014/main" id="{845E4BA2-9D77-4511-A8A2-F9C0CE0F5BFF}"/>
+                <a16:creationId xmlns:a16="http://schemas.microsoft.com/office/drawing/2014/main" id="{81EA6234-44E1-4C50-B67A-5FA2C8ED004A}"/>
               </a:ext>
             </a:extLst>
           </p:cNvPr>
@@ -29530,7 +29530,7 @@
           <p:cNvPr id="39" name="">
             <a:extLst xmlns:a="http://schemas.openxmlformats.org/drawingml/2006/main">
               <a:ext uri="{FF2B5EF4-FFF2-40B4-BE49-F238E27FC236}">
-                <a16:creationId xmlns:a16="http://schemas.microsoft.com/office/drawing/2014/main" id="{254EB463-37A3-4BE3-8F57-696A68BDE2C3}"/>
+                <a16:creationId xmlns:a16="http://schemas.microsoft.com/office/drawing/2014/main" id="{F55554AB-1180-4623-AE96-D8D6A40D89F9}"/>
               </a:ext>
             </a:extLst>
           </p:cNvPr>
@@ -29582,7 +29582,7 @@
           <p:cNvPr id="40" name="">
             <a:extLst xmlns:a="http://schemas.openxmlformats.org/drawingml/2006/main">
               <a:ext uri="{FF2B5EF4-FFF2-40B4-BE49-F238E27FC236}">
-                <a16:creationId xmlns:a16="http://schemas.microsoft.com/office/drawing/2014/main" id="{2DDC85F4-199D-41A2-86C4-0E21D2E5EA70}"/>
+                <a16:creationId xmlns:a16="http://schemas.microsoft.com/office/drawing/2014/main" id="{09978D27-EBA7-444F-AC64-2AFF6CDBB728}"/>
               </a:ext>
             </a:extLst>
           </p:cNvPr>
@@ -29634,7 +29634,7 @@
           <p:cNvPr id="41" name="">
             <a:extLst xmlns:a="http://schemas.openxmlformats.org/drawingml/2006/main">
               <a:ext uri="{FF2B5EF4-FFF2-40B4-BE49-F238E27FC236}">
-                <a16:creationId xmlns:a16="http://schemas.microsoft.com/office/drawing/2014/main" id="{092FF1D0-8A57-4408-BC7F-A64280C746F0}"/>
+                <a16:creationId xmlns:a16="http://schemas.microsoft.com/office/drawing/2014/main" id="{75EDFB50-3072-426B-8084-439F7282B152}"/>
               </a:ext>
             </a:extLst>
           </p:cNvPr>
@@ -29684,7 +29684,7 @@
     </p:spTree>
     <p:extLst>
       <p:ext uri="{BB962C8B-B14F-4D97-AF65-F5344CB8AC3E}">
-        <p14:creationId xmlns:p14="http://schemas.microsoft.com/office/powerpoint/2010/main" val="1851206300"/>
+        <p14:creationId xmlns:p14="http://schemas.microsoft.com/office/powerpoint/2010/main" val="1075110766"/>
       </p:ext>
     </p:extLst>
   </p:cSld>
@@ -29715,7 +29715,7 @@
           <p:cNvPr id="76" name="">
             <a:extLst xmlns:a="http://schemas.openxmlformats.org/drawingml/2006/main">
               <a:ext uri="{FF2B5EF4-FFF2-40B4-BE49-F238E27FC236}">
-                <a16:creationId xmlns:a16="http://schemas.microsoft.com/office/drawing/2014/main" id="{6121F8E2-E714-44E4-89C0-8381A4706D92}"/>
+                <a16:creationId xmlns:a16="http://schemas.microsoft.com/office/drawing/2014/main" id="{F5A662AC-B82D-4B38-8234-64B9A1672BB2}"/>
               </a:ext>
             </a:extLst>
           </p:cNvPr>
@@ -29748,7 +29748,7 @@
           <p:cNvPr id="2" name="">
             <a:extLst xmlns:a="http://schemas.openxmlformats.org/drawingml/2006/main">
               <a:ext uri="{FF2B5EF4-FFF2-40B4-BE49-F238E27FC236}">
-                <a16:creationId xmlns:a16="http://schemas.microsoft.com/office/drawing/2014/main" id="{1AA6D564-7CED-463E-942A-7FFF67E458F9}"/>
+                <a16:creationId xmlns:a16="http://schemas.microsoft.com/office/drawing/2014/main" id="{5831AE54-44B1-40C3-BAB4-654700EF54A8}"/>
               </a:ext>
             </a:extLst>
           </p:cNvPr>
@@ -29779,7 +29779,7 @@
           <p:cNvPr id="3" name="">
             <a:extLst xmlns:a="http://schemas.openxmlformats.org/drawingml/2006/main">
               <a:ext uri="{FF2B5EF4-FFF2-40B4-BE49-F238E27FC236}">
-                <a16:creationId xmlns:a16="http://schemas.microsoft.com/office/drawing/2014/main" id="{B9E9A7AB-FE1C-4B7D-A183-131E6129B56D}"/>
+                <a16:creationId xmlns:a16="http://schemas.microsoft.com/office/drawing/2014/main" id="{79E3B10E-8AE0-4905-881F-F49057A41659}"/>
               </a:ext>
             </a:extLst>
           </p:cNvPr>
@@ -29831,7 +29831,7 @@
           <p:cNvPr id="4" name="">
             <a:extLst xmlns:a="http://schemas.openxmlformats.org/drawingml/2006/main">
               <a:ext uri="{FF2B5EF4-FFF2-40B4-BE49-F238E27FC236}">
-                <a16:creationId xmlns:a16="http://schemas.microsoft.com/office/drawing/2014/main" id="{843B4E64-280C-4AD3-85E7-64627916863E}"/>
+                <a16:creationId xmlns:a16="http://schemas.microsoft.com/office/drawing/2014/main" id="{1F078D03-284D-46D2-9535-66D6C67C5A7B}"/>
               </a:ext>
             </a:extLst>
           </p:cNvPr>
@@ -29883,7 +29883,7 @@
           <p:cNvPr id="5" name="">
             <a:extLst xmlns:a="http://schemas.openxmlformats.org/drawingml/2006/main">
               <a:ext uri="{FF2B5EF4-FFF2-40B4-BE49-F238E27FC236}">
-                <a16:creationId xmlns:a16="http://schemas.microsoft.com/office/drawing/2014/main" id="{0EA9856B-0AE6-4239-A654-F6BE17A3589F}"/>
+                <a16:creationId xmlns:a16="http://schemas.microsoft.com/office/drawing/2014/main" id="{F2814D6D-8CAF-4860-9CCD-1588B481DB7F}"/>
               </a:ext>
             </a:extLst>
           </p:cNvPr>
@@ -29918,7 +29918,7 @@
           <p:nvPr/>
         </p:nvPicPr>
         <p:blipFill>
-          <a:blip xmlns:r="http://schemas.openxmlformats.org/officeDocument/2006/relationships" xmlns:a="http://schemas.openxmlformats.org/drawingml/2006/main" r:embed="Rf192481ad592461f"/>
+          <a:blip xmlns:r="http://schemas.openxmlformats.org/officeDocument/2006/relationships" xmlns:a="http://schemas.openxmlformats.org/drawingml/2006/main" r:embed="R3339656ef40841f4"/>
           <a:stretch xmlns:a="http://schemas.openxmlformats.org/drawingml/2006/main"/>
         </p:blipFill>
         <p:spPr>
@@ -29936,7 +29936,7 @@
           <p:cNvPr id="7" name="">
             <a:extLst xmlns:a="http://schemas.openxmlformats.org/drawingml/2006/main">
               <a:ext uri="{FF2B5EF4-FFF2-40B4-BE49-F238E27FC236}">
-                <a16:creationId xmlns:a16="http://schemas.microsoft.com/office/drawing/2014/main" id="{0A16B03C-B61B-4336-9E65-394FD455BF45}"/>
+                <a16:creationId xmlns:a16="http://schemas.microsoft.com/office/drawing/2014/main" id="{C9D72F27-77D6-468A-9251-1D21C1A19F1E}"/>
               </a:ext>
             </a:extLst>
           </p:cNvPr>
@@ -29988,7 +29988,7 @@
           <p:cNvPr id="8" name="">
             <a:extLst xmlns:a="http://schemas.openxmlformats.org/drawingml/2006/main">
               <a:ext uri="{FF2B5EF4-FFF2-40B4-BE49-F238E27FC236}">
-                <a16:creationId xmlns:a16="http://schemas.microsoft.com/office/drawing/2014/main" id="{9FECB206-8346-42E1-BD46-75303D9192C1}"/>
+                <a16:creationId xmlns:a16="http://schemas.microsoft.com/office/drawing/2014/main" id="{7EDB5194-267E-4EF7-8652-72D9FFEEC488}"/>
               </a:ext>
             </a:extLst>
           </p:cNvPr>
@@ -30040,7 +30040,7 @@
           <p:cNvPr id="9" name="">
             <a:extLst xmlns:a="http://schemas.openxmlformats.org/drawingml/2006/main">
               <a:ext uri="{FF2B5EF4-FFF2-40B4-BE49-F238E27FC236}">
-                <a16:creationId xmlns:a16="http://schemas.microsoft.com/office/drawing/2014/main" id="{F1DCCDEE-2EFB-48FA-8649-9CE2B5575C3B}"/>
+                <a16:creationId xmlns:a16="http://schemas.microsoft.com/office/drawing/2014/main" id="{C2D348F9-D996-4922-A9D2-2FE118B61B26}"/>
               </a:ext>
             </a:extLst>
           </p:cNvPr>
@@ -30092,7 +30092,7 @@
           <p:cNvPr id="10" name="">
             <a:extLst xmlns:a="http://schemas.openxmlformats.org/drawingml/2006/main">
               <a:ext uri="{FF2B5EF4-FFF2-40B4-BE49-F238E27FC236}">
-                <a16:creationId xmlns:a16="http://schemas.microsoft.com/office/drawing/2014/main" id="{8581FD12-B806-41ED-B5B7-DFB3F4254586}"/>
+                <a16:creationId xmlns:a16="http://schemas.microsoft.com/office/drawing/2014/main" id="{EAC1A89D-F93D-44B0-BC32-A2EEEAE48672}"/>
               </a:ext>
             </a:extLst>
           </p:cNvPr>
@@ -30144,7 +30144,7 @@
           <p:cNvPr id="11" name="">
             <a:extLst xmlns:a="http://schemas.openxmlformats.org/drawingml/2006/main">
               <a:ext uri="{FF2B5EF4-FFF2-40B4-BE49-F238E27FC236}">
-                <a16:creationId xmlns:a16="http://schemas.microsoft.com/office/drawing/2014/main" id="{0808D639-0EBA-4F16-BF27-2D856900E09A}"/>
+                <a16:creationId xmlns:a16="http://schemas.microsoft.com/office/drawing/2014/main" id="{0EB5868A-B7E0-4A59-B060-2B313919D67B}"/>
               </a:ext>
             </a:extLst>
           </p:cNvPr>
@@ -30187,7 +30187,7 @@
           <p:cNvPr id="12" name="">
             <a:extLst xmlns:a="http://schemas.openxmlformats.org/drawingml/2006/main">
               <a:ext uri="{FF2B5EF4-FFF2-40B4-BE49-F238E27FC236}">
-                <a16:creationId xmlns:a16="http://schemas.microsoft.com/office/drawing/2014/main" id="{873F6451-7402-48AB-BF05-9B33FBB8A94F}"/>
+                <a16:creationId xmlns:a16="http://schemas.microsoft.com/office/drawing/2014/main" id="{4BDDEF19-3B83-4BB2-8014-5AC41FE86F0A}"/>
               </a:ext>
             </a:extLst>
           </p:cNvPr>
@@ -30218,7 +30218,7 @@
           <p:cNvPr id="13" name="">
             <a:extLst xmlns:a="http://schemas.openxmlformats.org/drawingml/2006/main">
               <a:ext uri="{FF2B5EF4-FFF2-40B4-BE49-F238E27FC236}">
-                <a16:creationId xmlns:a16="http://schemas.microsoft.com/office/drawing/2014/main" id="{061053DF-8C0E-4FFD-92C6-C7A13DEBD2C4}"/>
+                <a16:creationId xmlns:a16="http://schemas.microsoft.com/office/drawing/2014/main" id="{2EA31704-A46F-4B10-AC54-F07DD5F011B9}"/>
               </a:ext>
             </a:extLst>
           </p:cNvPr>
@@ -30249,7 +30249,7 @@
           <p:cNvPr id="14" name="">
             <a:extLst xmlns:a="http://schemas.openxmlformats.org/drawingml/2006/main">
               <a:ext uri="{FF2B5EF4-FFF2-40B4-BE49-F238E27FC236}">
-                <a16:creationId xmlns:a16="http://schemas.microsoft.com/office/drawing/2014/main" id="{29860B1E-979F-4B3E-9ECF-7B1C51F005DC}"/>
+                <a16:creationId xmlns:a16="http://schemas.microsoft.com/office/drawing/2014/main" id="{85181895-3A61-489B-87F0-34AC03C8E90C}"/>
               </a:ext>
             </a:extLst>
           </p:cNvPr>
@@ -30292,7 +30292,7 @@
           <p:cNvPr id="15" name="">
             <a:extLst xmlns:a="http://schemas.openxmlformats.org/drawingml/2006/main">
               <a:ext uri="{FF2B5EF4-FFF2-40B4-BE49-F238E27FC236}">
-                <a16:creationId xmlns:a16="http://schemas.microsoft.com/office/drawing/2014/main" id="{41427104-1B7A-4ED2-957C-087041999C82}"/>
+                <a16:creationId xmlns:a16="http://schemas.microsoft.com/office/drawing/2014/main" id="{0CC6AED1-6B1A-44A1-9004-7330C2F1AAFE}"/>
               </a:ext>
             </a:extLst>
           </p:cNvPr>
@@ -30323,7 +30323,7 @@
           <p:cNvPr id="16" name="">
             <a:extLst xmlns:a="http://schemas.openxmlformats.org/drawingml/2006/main">
               <a:ext uri="{FF2B5EF4-FFF2-40B4-BE49-F238E27FC236}">
-                <a16:creationId xmlns:a16="http://schemas.microsoft.com/office/drawing/2014/main" id="{AF9E9209-2E6D-44C9-B535-1CC9185438EF}"/>
+                <a16:creationId xmlns:a16="http://schemas.microsoft.com/office/drawing/2014/main" id="{72AEE9C1-EF81-4B4B-9D8C-A1F497E7482D}"/>
               </a:ext>
             </a:extLst>
           </p:cNvPr>
@@ -30354,7 +30354,7 @@
           <p:cNvPr id="17" name="">
             <a:extLst xmlns:a="http://schemas.openxmlformats.org/drawingml/2006/main">
               <a:ext uri="{FF2B5EF4-FFF2-40B4-BE49-F238E27FC236}">
-                <a16:creationId xmlns:a16="http://schemas.microsoft.com/office/drawing/2014/main" id="{137B72F1-7AE1-42F3-A5D2-6CE0F57ABFE6}"/>
+                <a16:creationId xmlns:a16="http://schemas.microsoft.com/office/drawing/2014/main" id="{B93210B1-2D99-4E32-9395-3B55B85A1952}"/>
               </a:ext>
             </a:extLst>
           </p:cNvPr>
@@ -30406,7 +30406,7 @@
           <p:cNvPr id="18" name="">
             <a:extLst xmlns:a="http://schemas.openxmlformats.org/drawingml/2006/main">
               <a:ext uri="{FF2B5EF4-FFF2-40B4-BE49-F238E27FC236}">
-                <a16:creationId xmlns:a16="http://schemas.microsoft.com/office/drawing/2014/main" id="{EFE5D264-2147-4970-AE73-350529B57BA2}"/>
+                <a16:creationId xmlns:a16="http://schemas.microsoft.com/office/drawing/2014/main" id="{02CF511D-F4AD-4D1C-B8BB-0714761718E0}"/>
               </a:ext>
             </a:extLst>
           </p:cNvPr>
@@ -30458,7 +30458,7 @@
           <p:cNvPr id="19" name="">
             <a:extLst xmlns:a="http://schemas.openxmlformats.org/drawingml/2006/main">
               <a:ext uri="{FF2B5EF4-FFF2-40B4-BE49-F238E27FC236}">
-                <a16:creationId xmlns:a16="http://schemas.microsoft.com/office/drawing/2014/main" id="{FC84C755-4A47-4C46-AAFB-7B7FD7C74051}"/>
+                <a16:creationId xmlns:a16="http://schemas.microsoft.com/office/drawing/2014/main" id="{4D3B9C2C-614F-4FBA-A64D-AD97651F15A7}"/>
               </a:ext>
             </a:extLst>
           </p:cNvPr>
@@ -30510,7 +30510,7 @@
           <p:cNvPr id="20" name="">
             <a:extLst xmlns:a="http://schemas.openxmlformats.org/drawingml/2006/main">
               <a:ext uri="{FF2B5EF4-FFF2-40B4-BE49-F238E27FC236}">
-                <a16:creationId xmlns:a16="http://schemas.microsoft.com/office/drawing/2014/main" id="{535C4CCD-9ABA-49DE-9941-3DE1D758B683}"/>
+                <a16:creationId xmlns:a16="http://schemas.microsoft.com/office/drawing/2014/main" id="{19A3A532-F319-44B1-A7CF-A2AA91A8005B}"/>
               </a:ext>
             </a:extLst>
           </p:cNvPr>
@@ -30553,7 +30553,7 @@
           <p:cNvPr id="21" name="">
             <a:extLst xmlns:a="http://schemas.openxmlformats.org/drawingml/2006/main">
               <a:ext uri="{FF2B5EF4-FFF2-40B4-BE49-F238E27FC236}">
-                <a16:creationId xmlns:a16="http://schemas.microsoft.com/office/drawing/2014/main" id="{BB74CDD6-555E-4A45-AC19-C13CC5FB55DF}"/>
+                <a16:creationId xmlns:a16="http://schemas.microsoft.com/office/drawing/2014/main" id="{9CBC2AB6-9889-48B5-865A-A75DB3F2C44E}"/>
               </a:ext>
             </a:extLst>
           </p:cNvPr>
@@ -30584,7 +30584,7 @@
           <p:cNvPr id="22" name="">
             <a:extLst xmlns:a="http://schemas.openxmlformats.org/drawingml/2006/main">
               <a:ext uri="{FF2B5EF4-FFF2-40B4-BE49-F238E27FC236}">
-                <a16:creationId xmlns:a16="http://schemas.microsoft.com/office/drawing/2014/main" id="{511D3D53-C379-4D7B-ABCA-E729EF034644}"/>
+                <a16:creationId xmlns:a16="http://schemas.microsoft.com/office/drawing/2014/main" id="{C1C4DB26-CB35-4F72-820C-BDB1F7F1B800}"/>
               </a:ext>
             </a:extLst>
           </p:cNvPr>
@@ -30615,7 +30615,7 @@
           <p:cNvPr id="23" name="">
             <a:extLst xmlns:a="http://schemas.openxmlformats.org/drawingml/2006/main">
               <a:ext uri="{FF2B5EF4-FFF2-40B4-BE49-F238E27FC236}">
-                <a16:creationId xmlns:a16="http://schemas.microsoft.com/office/drawing/2014/main" id="{BDC5912A-6B83-4E3F-BB2D-398C19CE1607}"/>
+                <a16:creationId xmlns:a16="http://schemas.microsoft.com/office/drawing/2014/main" id="{BC434DAC-A8F3-42C0-A48F-FE96F35B256D}"/>
               </a:ext>
             </a:extLst>
           </p:cNvPr>
@@ -30667,7 +30667,7 @@
           <p:cNvPr id="24" name="">
             <a:extLst xmlns:a="http://schemas.openxmlformats.org/drawingml/2006/main">
               <a:ext uri="{FF2B5EF4-FFF2-40B4-BE49-F238E27FC236}">
-                <a16:creationId xmlns:a16="http://schemas.microsoft.com/office/drawing/2014/main" id="{B092B886-C765-40BD-94F9-B324C45727FD}"/>
+                <a16:creationId xmlns:a16="http://schemas.microsoft.com/office/drawing/2014/main" id="{7A28CA3E-E0CB-4633-8F8E-F223355CEF20}"/>
               </a:ext>
             </a:extLst>
           </p:cNvPr>
@@ -30719,7 +30719,7 @@
           <p:cNvPr id="25" name="">
             <a:extLst xmlns:a="http://schemas.openxmlformats.org/drawingml/2006/main">
               <a:ext uri="{FF2B5EF4-FFF2-40B4-BE49-F238E27FC236}">
-                <a16:creationId xmlns:a16="http://schemas.microsoft.com/office/drawing/2014/main" id="{89E80041-D57C-4B75-8959-79ACFD106F94}"/>
+                <a16:creationId xmlns:a16="http://schemas.microsoft.com/office/drawing/2014/main" id="{6DC401A7-2F76-4D41-A9C6-026A80A5873D}"/>
               </a:ext>
             </a:extLst>
           </p:cNvPr>
@@ -30771,7 +30771,7 @@
           <p:cNvPr id="26" name="">
             <a:extLst xmlns:a="http://schemas.openxmlformats.org/drawingml/2006/main">
               <a:ext uri="{FF2B5EF4-FFF2-40B4-BE49-F238E27FC236}">
-                <a16:creationId xmlns:a16="http://schemas.microsoft.com/office/drawing/2014/main" id="{4C7E61E1-ACD2-4321-B99A-C4E6947E2069}"/>
+                <a16:creationId xmlns:a16="http://schemas.microsoft.com/office/drawing/2014/main" id="{2EF85D9C-34AE-4F24-B4B6-E9A1F6237502}"/>
               </a:ext>
             </a:extLst>
           </p:cNvPr>
@@ -30814,7 +30814,7 @@
           <p:cNvPr id="27" name="">
             <a:extLst xmlns:a="http://schemas.openxmlformats.org/drawingml/2006/main">
               <a:ext uri="{FF2B5EF4-FFF2-40B4-BE49-F238E27FC236}">
-                <a16:creationId xmlns:a16="http://schemas.microsoft.com/office/drawing/2014/main" id="{111BA702-5177-49A9-BD0C-C89DDB218B86}"/>
+                <a16:creationId xmlns:a16="http://schemas.microsoft.com/office/drawing/2014/main" id="{9132D7EC-2827-48DB-94F6-EFE5115D6670}"/>
               </a:ext>
             </a:extLst>
           </p:cNvPr>
@@ -30845,7 +30845,7 @@
           <p:cNvPr id="28" name="">
             <a:extLst xmlns:a="http://schemas.openxmlformats.org/drawingml/2006/main">
               <a:ext uri="{FF2B5EF4-FFF2-40B4-BE49-F238E27FC236}">
-                <a16:creationId xmlns:a16="http://schemas.microsoft.com/office/drawing/2014/main" id="{8DE78A01-F878-490D-A26A-EAC16118FFCA}"/>
+                <a16:creationId xmlns:a16="http://schemas.microsoft.com/office/drawing/2014/main" id="{7CBE45F7-C17E-4CB5-919B-9E05E3842798}"/>
               </a:ext>
             </a:extLst>
           </p:cNvPr>
@@ -30876,7 +30876,7 @@
           <p:cNvPr id="29" name="">
             <a:extLst xmlns:a="http://schemas.openxmlformats.org/drawingml/2006/main">
               <a:ext uri="{FF2B5EF4-FFF2-40B4-BE49-F238E27FC236}">
-                <a16:creationId xmlns:a16="http://schemas.microsoft.com/office/drawing/2014/main" id="{6F728E55-678B-4527-B40D-C1A8CEEB206E}"/>
+                <a16:creationId xmlns:a16="http://schemas.microsoft.com/office/drawing/2014/main" id="{0ED3BD78-0DBE-4AEC-AB95-7528083B19AB}"/>
               </a:ext>
             </a:extLst>
           </p:cNvPr>
@@ -30928,7 +30928,7 @@
           <p:cNvPr id="30" name="">
             <a:extLst xmlns:a="http://schemas.openxmlformats.org/drawingml/2006/main">
               <a:ext uri="{FF2B5EF4-FFF2-40B4-BE49-F238E27FC236}">
-                <a16:creationId xmlns:a16="http://schemas.microsoft.com/office/drawing/2014/main" id="{617EE4C6-DC4B-449F-BD12-A4483DA59F24}"/>
+                <a16:creationId xmlns:a16="http://schemas.microsoft.com/office/drawing/2014/main" id="{870D161D-911F-431D-AA82-D3B41FC1E3EB}"/>
               </a:ext>
             </a:extLst>
           </p:cNvPr>
@@ -30980,7 +30980,7 @@
           <p:cNvPr id="31" name="">
             <a:extLst xmlns:a="http://schemas.openxmlformats.org/drawingml/2006/main">
               <a:ext uri="{FF2B5EF4-FFF2-40B4-BE49-F238E27FC236}">
-                <a16:creationId xmlns:a16="http://schemas.microsoft.com/office/drawing/2014/main" id="{15DFD864-BEA4-45B9-9E64-D497CE2C7F6A}"/>
+                <a16:creationId xmlns:a16="http://schemas.microsoft.com/office/drawing/2014/main" id="{6C1B6C85-4F50-4605-BB9C-2DF90E211460}"/>
               </a:ext>
             </a:extLst>
           </p:cNvPr>
@@ -31032,7 +31032,7 @@
           <p:cNvPr id="32" name="">
             <a:extLst xmlns:a="http://schemas.openxmlformats.org/drawingml/2006/main">
               <a:ext uri="{FF2B5EF4-FFF2-40B4-BE49-F238E27FC236}">
-                <a16:creationId xmlns:a16="http://schemas.microsoft.com/office/drawing/2014/main" id="{42C98D8A-EB5C-4915-B1EA-1D0420C000D5}"/>
+                <a16:creationId xmlns:a16="http://schemas.microsoft.com/office/drawing/2014/main" id="{69C855AA-4D80-472D-9AD0-486286ECC3EC}"/>
               </a:ext>
             </a:extLst>
           </p:cNvPr>
@@ -31075,7 +31075,7 @@
           <p:cNvPr id="33" name="">
             <a:extLst xmlns:a="http://schemas.openxmlformats.org/drawingml/2006/main">
               <a:ext uri="{FF2B5EF4-FFF2-40B4-BE49-F238E27FC236}">
-                <a16:creationId xmlns:a16="http://schemas.microsoft.com/office/drawing/2014/main" id="{649A7991-3A6C-44CE-9B00-F61058757636}"/>
+                <a16:creationId xmlns:a16="http://schemas.microsoft.com/office/drawing/2014/main" id="{871B76F6-E17A-403D-AC4A-4A4956D0D3A0}"/>
               </a:ext>
             </a:extLst>
           </p:cNvPr>
@@ -31106,7 +31106,7 @@
           <p:cNvPr id="34" name="">
             <a:extLst xmlns:a="http://schemas.openxmlformats.org/drawingml/2006/main">
               <a:ext uri="{FF2B5EF4-FFF2-40B4-BE49-F238E27FC236}">
-                <a16:creationId xmlns:a16="http://schemas.microsoft.com/office/drawing/2014/main" id="{E9E771D0-CF65-4AEC-BBC4-381BB372D52C}"/>
+                <a16:creationId xmlns:a16="http://schemas.microsoft.com/office/drawing/2014/main" id="{719AF277-9B7E-4DD5-8E7F-9229D621615C}"/>
               </a:ext>
             </a:extLst>
           </p:cNvPr>
@@ -31137,7 +31137,7 @@
           <p:cNvPr id="35" name="">
             <a:extLst xmlns:a="http://schemas.openxmlformats.org/drawingml/2006/main">
               <a:ext uri="{FF2B5EF4-FFF2-40B4-BE49-F238E27FC236}">
-                <a16:creationId xmlns:a16="http://schemas.microsoft.com/office/drawing/2014/main" id="{CE952538-CD98-4340-B5BA-F8E58EF76850}"/>
+                <a16:creationId xmlns:a16="http://schemas.microsoft.com/office/drawing/2014/main" id="{7007C98D-8A43-4BE4-AC51-9D9C2A1CD85E}"/>
               </a:ext>
             </a:extLst>
           </p:cNvPr>
@@ -31189,7 +31189,7 @@
           <p:cNvPr id="36" name="">
             <a:extLst xmlns:a="http://schemas.openxmlformats.org/drawingml/2006/main">
               <a:ext uri="{FF2B5EF4-FFF2-40B4-BE49-F238E27FC236}">
-                <a16:creationId xmlns:a16="http://schemas.microsoft.com/office/drawing/2014/main" id="{25279839-642E-4256-B407-AEBB741F1B72}"/>
+                <a16:creationId xmlns:a16="http://schemas.microsoft.com/office/drawing/2014/main" id="{DFCE5235-BD7E-49BC-A6D7-BC36A8D4BB30}"/>
               </a:ext>
             </a:extLst>
           </p:cNvPr>
@@ -31241,7 +31241,7 @@
           <p:cNvPr id="37" name="">
             <a:extLst xmlns:a="http://schemas.openxmlformats.org/drawingml/2006/main">
               <a:ext uri="{FF2B5EF4-FFF2-40B4-BE49-F238E27FC236}">
-                <a16:creationId xmlns:a16="http://schemas.microsoft.com/office/drawing/2014/main" id="{95E52836-3F57-4F2C-A74C-8B314172CA2C}"/>
+                <a16:creationId xmlns:a16="http://schemas.microsoft.com/office/drawing/2014/main" id="{F8B69C3C-AE8F-4FB9-A94A-770FEAFC77E0}"/>
               </a:ext>
             </a:extLst>
           </p:cNvPr>
@@ -31297,10 +31297,10 @@
           <p:nvPr/>
         </p:nvPicPr>
         <p:blipFill>
-          <a:blip xmlns:r="http://schemas.openxmlformats.org/officeDocument/2006/relationships" xmlns:a="http://schemas.openxmlformats.org/drawingml/2006/main" r:embed="Rf0272dcb5f824702">
+          <a:blip xmlns:r="http://schemas.openxmlformats.org/officeDocument/2006/relationships" xmlns:a="http://schemas.openxmlformats.org/drawingml/2006/main" r:embed="R7fd6462e2fba4995">
             <a:extLst>
               <a:ext uri="{96DAC541-7B7A-43D3-8B79-37D633B846F1}">
-                <asvg:svgBlip xmlns:asvg="http://schemas.microsoft.com/office/drawing/2016/SVG/main" r:embed="R49836521a6bc4e8c"/>
+                <asvg:svgBlip xmlns:asvg="http://schemas.microsoft.com/office/drawing/2016/SVG/main" r:embed="R10ab7650e4664ae0"/>
               </a:ext>
             </a:extLst>
           </a:blip>
@@ -31321,7 +31321,7 @@
           <p:cNvPr id="39" name="">
             <a:extLst xmlns:a="http://schemas.openxmlformats.org/drawingml/2006/main">
               <a:ext uri="{FF2B5EF4-FFF2-40B4-BE49-F238E27FC236}">
-                <a16:creationId xmlns:a16="http://schemas.microsoft.com/office/drawing/2014/main" id="{E4D1A6D4-5D92-4010-9C61-51D2522FA242}"/>
+                <a16:creationId xmlns:a16="http://schemas.microsoft.com/office/drawing/2014/main" id="{A9C07FB9-B10D-4CFE-BF77-3B65065FA1A7}"/>
               </a:ext>
             </a:extLst>
           </p:cNvPr>
@@ -31373,7 +31373,7 @@
           <p:cNvPr id="40" name="">
             <a:extLst xmlns:a="http://schemas.openxmlformats.org/drawingml/2006/main">
               <a:ext uri="{FF2B5EF4-FFF2-40B4-BE49-F238E27FC236}">
-                <a16:creationId xmlns:a16="http://schemas.microsoft.com/office/drawing/2014/main" id="{9D10FEEB-9963-4F36-BCE3-2E7E1DB910D5}"/>
+                <a16:creationId xmlns:a16="http://schemas.microsoft.com/office/drawing/2014/main" id="{596202C0-4CB2-4C05-AF85-965B6B4B30C5}"/>
               </a:ext>
             </a:extLst>
           </p:cNvPr>
@@ -31425,7 +31425,7 @@
           <p:cNvPr id="41" name="">
             <a:extLst xmlns:a="http://schemas.openxmlformats.org/drawingml/2006/main">
               <a:ext uri="{FF2B5EF4-FFF2-40B4-BE49-F238E27FC236}">
-                <a16:creationId xmlns:a16="http://schemas.microsoft.com/office/drawing/2014/main" id="{D5B36607-E7B8-49E9-A9D4-EEDCE654F9D4}"/>
+                <a16:creationId xmlns:a16="http://schemas.microsoft.com/office/drawing/2014/main" id="{5315F384-4454-4075-B6F3-E16E6B1150EA}"/>
               </a:ext>
             </a:extLst>
           </p:cNvPr>
@@ -31468,7 +31468,7 @@
           <p:cNvPr id="42" name="">
             <a:extLst xmlns:a="http://schemas.openxmlformats.org/drawingml/2006/main">
               <a:ext uri="{FF2B5EF4-FFF2-40B4-BE49-F238E27FC236}">
-                <a16:creationId xmlns:a16="http://schemas.microsoft.com/office/drawing/2014/main" id="{043936F7-0749-4455-9F05-866003E9445A}"/>
+                <a16:creationId xmlns:a16="http://schemas.microsoft.com/office/drawing/2014/main" id="{8107DD2C-5527-4FCF-BB30-B8B500C6919E}"/>
               </a:ext>
             </a:extLst>
           </p:cNvPr>
@@ -31499,7 +31499,7 @@
           <p:cNvPr id="43" name="">
             <a:extLst xmlns:a="http://schemas.openxmlformats.org/drawingml/2006/main">
               <a:ext uri="{FF2B5EF4-FFF2-40B4-BE49-F238E27FC236}">
-                <a16:creationId xmlns:a16="http://schemas.microsoft.com/office/drawing/2014/main" id="{933E990C-DCC8-4CA5-B21A-EB4C3BD80770}"/>
+                <a16:creationId xmlns:a16="http://schemas.microsoft.com/office/drawing/2014/main" id="{9A862444-A816-4FA5-97F8-8F0D3AEEB492}"/>
               </a:ext>
             </a:extLst>
           </p:cNvPr>
@@ -31530,7 +31530,7 @@
           <p:cNvPr id="44" name="">
             <a:extLst xmlns:a="http://schemas.openxmlformats.org/drawingml/2006/main">
               <a:ext uri="{FF2B5EF4-FFF2-40B4-BE49-F238E27FC236}">
-                <a16:creationId xmlns:a16="http://schemas.microsoft.com/office/drawing/2014/main" id="{950FFD30-F886-4869-8105-0E1DF0FFA872}"/>
+                <a16:creationId xmlns:a16="http://schemas.microsoft.com/office/drawing/2014/main" id="{87674A12-869E-4232-A823-EAFE37C74F24}"/>
               </a:ext>
             </a:extLst>
           </p:cNvPr>
@@ -31573,7 +31573,7 @@
           <p:cNvPr id="45" name="">
             <a:extLst xmlns:a="http://schemas.openxmlformats.org/drawingml/2006/main">
               <a:ext uri="{FF2B5EF4-FFF2-40B4-BE49-F238E27FC236}">
-                <a16:creationId xmlns:a16="http://schemas.microsoft.com/office/drawing/2014/main" id="{3BBC0D65-471D-489C-9381-A75185415421}"/>
+                <a16:creationId xmlns:a16="http://schemas.microsoft.com/office/drawing/2014/main" id="{AA8E5E7D-F7CC-4404-81C3-70EA32021B41}"/>
               </a:ext>
             </a:extLst>
           </p:cNvPr>
@@ -31604,7 +31604,7 @@
           <p:cNvPr id="46" name="">
             <a:extLst xmlns:a="http://schemas.openxmlformats.org/drawingml/2006/main">
               <a:ext uri="{FF2B5EF4-FFF2-40B4-BE49-F238E27FC236}">
-                <a16:creationId xmlns:a16="http://schemas.microsoft.com/office/drawing/2014/main" id="{7A1999CF-DD99-46E7-81C7-7A6A89518101}"/>
+                <a16:creationId xmlns:a16="http://schemas.microsoft.com/office/drawing/2014/main" id="{6C361F3E-0034-419F-BA38-93B2B3CC9019}"/>
               </a:ext>
             </a:extLst>
           </p:cNvPr>
@@ -31635,7 +31635,7 @@
           <p:cNvPr id="47" name="">
             <a:extLst xmlns:a="http://schemas.openxmlformats.org/drawingml/2006/main">
               <a:ext uri="{FF2B5EF4-FFF2-40B4-BE49-F238E27FC236}">
-                <a16:creationId xmlns:a16="http://schemas.microsoft.com/office/drawing/2014/main" id="{DF81ABE2-28B7-4FE8-865B-07182A234B5B}"/>
+                <a16:creationId xmlns:a16="http://schemas.microsoft.com/office/drawing/2014/main" id="{A833FEBF-1477-4FEF-BC2F-9BD124ABCBF4}"/>
               </a:ext>
             </a:extLst>
           </p:cNvPr>
@@ -31687,7 +31687,7 @@
           <p:cNvPr id="48" name="">
             <a:extLst xmlns:a="http://schemas.openxmlformats.org/drawingml/2006/main">
               <a:ext uri="{FF2B5EF4-FFF2-40B4-BE49-F238E27FC236}">
-                <a16:creationId xmlns:a16="http://schemas.microsoft.com/office/drawing/2014/main" id="{E476D50A-5084-4A64-9FDF-9946D87DA6D3}"/>
+                <a16:creationId xmlns:a16="http://schemas.microsoft.com/office/drawing/2014/main" id="{A8E221BC-01FB-45B2-81A6-38C4D6FEED16}"/>
               </a:ext>
             </a:extLst>
           </p:cNvPr>
@@ -31720,7 +31720,7 @@
           <p:cNvPr id="49" name="">
             <a:extLst xmlns:a="http://schemas.openxmlformats.org/drawingml/2006/main">
               <a:ext uri="{FF2B5EF4-FFF2-40B4-BE49-F238E27FC236}">
-                <a16:creationId xmlns:a16="http://schemas.microsoft.com/office/drawing/2014/main" id="{83C82F08-ADAA-4CE4-A011-99172D17686D}"/>
+                <a16:creationId xmlns:a16="http://schemas.microsoft.com/office/drawing/2014/main" id="{28EF544D-51A3-43F1-9DF4-1C702663273B}"/>
               </a:ext>
             </a:extLst>
           </p:cNvPr>
@@ -31772,7 +31772,7 @@
           <p:cNvPr id="50" name="">
             <a:extLst xmlns:a="http://schemas.openxmlformats.org/drawingml/2006/main">
               <a:ext uri="{FF2B5EF4-FFF2-40B4-BE49-F238E27FC236}">
-                <a16:creationId xmlns:a16="http://schemas.microsoft.com/office/drawing/2014/main" id="{2F129738-04CA-41CD-BC6B-E88989F9FE4E}"/>
+                <a16:creationId xmlns:a16="http://schemas.microsoft.com/office/drawing/2014/main" id="{0AE69110-A7AA-4B2E-8D7A-9A0B3DEFA2E1}"/>
               </a:ext>
             </a:extLst>
           </p:cNvPr>
@@ -31824,7 +31824,7 @@
           <p:cNvPr id="51" name="">
             <a:extLst xmlns:a="http://schemas.openxmlformats.org/drawingml/2006/main">
               <a:ext uri="{FF2B5EF4-FFF2-40B4-BE49-F238E27FC236}">
-                <a16:creationId xmlns:a16="http://schemas.microsoft.com/office/drawing/2014/main" id="{77CB412D-0383-4574-9775-85228C9E2B1B}"/>
+                <a16:creationId xmlns:a16="http://schemas.microsoft.com/office/drawing/2014/main" id="{3BAF5370-7365-495B-B06F-2C5F28F14193}"/>
               </a:ext>
             </a:extLst>
           </p:cNvPr>
@@ -31876,7 +31876,7 @@
           <p:cNvPr id="52" name="">
             <a:extLst xmlns:a="http://schemas.openxmlformats.org/drawingml/2006/main">
               <a:ext uri="{FF2B5EF4-FFF2-40B4-BE49-F238E27FC236}">
-                <a16:creationId xmlns:a16="http://schemas.microsoft.com/office/drawing/2014/main" id="{82813883-C197-4E30-9CD1-D3E7D5ECAEE4}"/>
+                <a16:creationId xmlns:a16="http://schemas.microsoft.com/office/drawing/2014/main" id="{18CADFDD-AF70-4B3C-95A3-4D624BB58F33}"/>
               </a:ext>
             </a:extLst>
           </p:cNvPr>
@@ -31919,7 +31919,7 @@
           <p:cNvPr id="53" name="">
             <a:extLst xmlns:a="http://schemas.openxmlformats.org/drawingml/2006/main">
               <a:ext uri="{FF2B5EF4-FFF2-40B4-BE49-F238E27FC236}">
-                <a16:creationId xmlns:a16="http://schemas.microsoft.com/office/drawing/2014/main" id="{2BEBD22F-D0F1-4CD7-9E4E-9D7E00099205}"/>
+                <a16:creationId xmlns:a16="http://schemas.microsoft.com/office/drawing/2014/main" id="{B2F7AE12-1A1C-4C3B-B88A-65D08AAA1B57}"/>
               </a:ext>
             </a:extLst>
           </p:cNvPr>
@@ -31950,7 +31950,7 @@
           <p:cNvPr id="54" name="">
             <a:extLst xmlns:a="http://schemas.openxmlformats.org/drawingml/2006/main">
               <a:ext uri="{FF2B5EF4-FFF2-40B4-BE49-F238E27FC236}">
-                <a16:creationId xmlns:a16="http://schemas.microsoft.com/office/drawing/2014/main" id="{F549BB72-019B-4BA8-9AEA-F95FC9E0BE14}"/>
+                <a16:creationId xmlns:a16="http://schemas.microsoft.com/office/drawing/2014/main" id="{90B2E81F-CB0D-48AA-8FDA-27A0F98F5BCB}"/>
               </a:ext>
             </a:extLst>
           </p:cNvPr>
@@ -31981,7 +31981,7 @@
           <p:cNvPr id="55" name="">
             <a:extLst xmlns:a="http://schemas.openxmlformats.org/drawingml/2006/main">
               <a:ext uri="{FF2B5EF4-FFF2-40B4-BE49-F238E27FC236}">
-                <a16:creationId xmlns:a16="http://schemas.microsoft.com/office/drawing/2014/main" id="{52BF6C9D-61AB-4F25-A32A-ACCE843AF65A}"/>
+                <a16:creationId xmlns:a16="http://schemas.microsoft.com/office/drawing/2014/main" id="{252BF1C3-E095-4EB6-B7E5-F943D793D117}"/>
               </a:ext>
             </a:extLst>
           </p:cNvPr>
@@ -32033,7 +32033,7 @@
           <p:cNvPr id="56" name="">
             <a:extLst xmlns:a="http://schemas.openxmlformats.org/drawingml/2006/main">
               <a:ext uri="{FF2B5EF4-FFF2-40B4-BE49-F238E27FC236}">
-                <a16:creationId xmlns:a16="http://schemas.microsoft.com/office/drawing/2014/main" id="{FC1564A9-F343-4FD4-89A2-EB5DFDB348B9}"/>
+                <a16:creationId xmlns:a16="http://schemas.microsoft.com/office/drawing/2014/main" id="{6FB24887-F977-42D6-9A0B-DA6B561C8F2C}"/>
               </a:ext>
             </a:extLst>
           </p:cNvPr>
@@ -32066,7 +32066,7 @@
           <p:cNvPr id="57" name="">
             <a:extLst xmlns:a="http://schemas.openxmlformats.org/drawingml/2006/main">
               <a:ext uri="{FF2B5EF4-FFF2-40B4-BE49-F238E27FC236}">
-                <a16:creationId xmlns:a16="http://schemas.microsoft.com/office/drawing/2014/main" id="{72DDECDF-602C-47F9-866C-96FFA1EAE896}"/>
+                <a16:creationId xmlns:a16="http://schemas.microsoft.com/office/drawing/2014/main" id="{F787C0BC-D079-45F6-97D8-60ECAB8219C7}"/>
               </a:ext>
             </a:extLst>
           </p:cNvPr>
@@ -32118,7 +32118,7 @@
           <p:cNvPr id="58" name="">
             <a:extLst xmlns:a="http://schemas.openxmlformats.org/drawingml/2006/main">
               <a:ext uri="{FF2B5EF4-FFF2-40B4-BE49-F238E27FC236}">
-                <a16:creationId xmlns:a16="http://schemas.microsoft.com/office/drawing/2014/main" id="{28BCE0D8-4A87-4991-BD89-773614D841E7}"/>
+                <a16:creationId xmlns:a16="http://schemas.microsoft.com/office/drawing/2014/main" id="{3DB30DE7-AAB2-430C-9430-7B821C3EFB43}"/>
               </a:ext>
             </a:extLst>
           </p:cNvPr>
@@ -32170,7 +32170,7 @@
           <p:cNvPr id="59" name="">
             <a:extLst xmlns:a="http://schemas.openxmlformats.org/drawingml/2006/main">
               <a:ext uri="{FF2B5EF4-FFF2-40B4-BE49-F238E27FC236}">
-                <a16:creationId xmlns:a16="http://schemas.microsoft.com/office/drawing/2014/main" id="{F826D2B3-FEC8-4E8C-8924-FE5C23B77749}"/>
+                <a16:creationId xmlns:a16="http://schemas.microsoft.com/office/drawing/2014/main" id="{D7D36A6B-1BC3-4A37-AF27-8B82A38D8E32}"/>
               </a:ext>
             </a:extLst>
           </p:cNvPr>
@@ -32222,7 +32222,7 @@
           <p:cNvPr id="60" name="">
             <a:extLst xmlns:a="http://schemas.openxmlformats.org/drawingml/2006/main">
               <a:ext uri="{FF2B5EF4-FFF2-40B4-BE49-F238E27FC236}">
-                <a16:creationId xmlns:a16="http://schemas.microsoft.com/office/drawing/2014/main" id="{6B886D8F-56F5-499A-89A8-6816A2637715}"/>
+                <a16:creationId xmlns:a16="http://schemas.microsoft.com/office/drawing/2014/main" id="{C1B773FA-FADA-433C-A915-26494FEF1540}"/>
               </a:ext>
             </a:extLst>
           </p:cNvPr>
@@ -32265,7 +32265,7 @@
           <p:cNvPr id="61" name="">
             <a:extLst xmlns:a="http://schemas.openxmlformats.org/drawingml/2006/main">
               <a:ext uri="{FF2B5EF4-FFF2-40B4-BE49-F238E27FC236}">
-                <a16:creationId xmlns:a16="http://schemas.microsoft.com/office/drawing/2014/main" id="{8C065A96-1EB4-4D6A-B9A9-4122704998EF}"/>
+                <a16:creationId xmlns:a16="http://schemas.microsoft.com/office/drawing/2014/main" id="{01E5B3D1-8110-4721-B164-AF6D28A41AE7}"/>
               </a:ext>
             </a:extLst>
           </p:cNvPr>
@@ -32296,7 +32296,7 @@
           <p:cNvPr id="62" name="">
             <a:extLst xmlns:a="http://schemas.openxmlformats.org/drawingml/2006/main">
               <a:ext uri="{FF2B5EF4-FFF2-40B4-BE49-F238E27FC236}">
-                <a16:creationId xmlns:a16="http://schemas.microsoft.com/office/drawing/2014/main" id="{8C342FD9-873C-4EC8-8674-CC11AC9DFFAD}"/>
+                <a16:creationId xmlns:a16="http://schemas.microsoft.com/office/drawing/2014/main" id="{8A52DFDD-4953-4D0B-835E-8D43FCDCB636}"/>
               </a:ext>
             </a:extLst>
           </p:cNvPr>
@@ -32327,7 +32327,7 @@
           <p:cNvPr id="63" name="">
             <a:extLst xmlns:a="http://schemas.openxmlformats.org/drawingml/2006/main">
               <a:ext uri="{FF2B5EF4-FFF2-40B4-BE49-F238E27FC236}">
-                <a16:creationId xmlns:a16="http://schemas.microsoft.com/office/drawing/2014/main" id="{847A6509-B7BC-40F8-A6EE-01A4C80C43A7}"/>
+                <a16:creationId xmlns:a16="http://schemas.microsoft.com/office/drawing/2014/main" id="{0EC38786-9A0D-4B38-9F00-2D3C76AA381E}"/>
               </a:ext>
             </a:extLst>
           </p:cNvPr>
@@ -32379,7 +32379,7 @@
           <p:cNvPr id="64" name="">
             <a:extLst xmlns:a="http://schemas.openxmlformats.org/drawingml/2006/main">
               <a:ext uri="{FF2B5EF4-FFF2-40B4-BE49-F238E27FC236}">
-                <a16:creationId xmlns:a16="http://schemas.microsoft.com/office/drawing/2014/main" id="{58446BAD-72AE-4140-90A5-2672EA00433B}"/>
+                <a16:creationId xmlns:a16="http://schemas.microsoft.com/office/drawing/2014/main" id="{62FABD4A-D4BC-41C4-9AFE-718067233271}"/>
               </a:ext>
             </a:extLst>
           </p:cNvPr>
@@ -32412,7 +32412,7 @@
           <p:cNvPr id="65" name="">
             <a:extLst xmlns:a="http://schemas.openxmlformats.org/drawingml/2006/main">
               <a:ext uri="{FF2B5EF4-FFF2-40B4-BE49-F238E27FC236}">
-                <a16:creationId xmlns:a16="http://schemas.microsoft.com/office/drawing/2014/main" id="{B5410F91-3E2F-4C83-BDF6-93013017A69F}"/>
+                <a16:creationId xmlns:a16="http://schemas.microsoft.com/office/drawing/2014/main" id="{A0ACC581-5EAD-4BBC-A419-E04C56D026FE}"/>
               </a:ext>
             </a:extLst>
           </p:cNvPr>
@@ -32464,7 +32464,7 @@
           <p:cNvPr id="66" name="">
             <a:extLst xmlns:a="http://schemas.openxmlformats.org/drawingml/2006/main">
               <a:ext uri="{FF2B5EF4-FFF2-40B4-BE49-F238E27FC236}">
-                <a16:creationId xmlns:a16="http://schemas.microsoft.com/office/drawing/2014/main" id="{D7C351DA-017D-4588-AED6-2511ACB282C6}"/>
+                <a16:creationId xmlns:a16="http://schemas.microsoft.com/office/drawing/2014/main" id="{A06E6F4B-E348-4A2D-A90D-875F646AE697}"/>
               </a:ext>
             </a:extLst>
           </p:cNvPr>
@@ -32516,7 +32516,7 @@
           <p:cNvPr id="67" name="">
             <a:extLst xmlns:a="http://schemas.openxmlformats.org/drawingml/2006/main">
               <a:ext uri="{FF2B5EF4-FFF2-40B4-BE49-F238E27FC236}">
-                <a16:creationId xmlns:a16="http://schemas.microsoft.com/office/drawing/2014/main" id="{D1BA2DE5-315F-4787-8FF5-1D50DC710409}"/>
+                <a16:creationId xmlns:a16="http://schemas.microsoft.com/office/drawing/2014/main" id="{BF07A0D1-0A2F-4598-99C4-6E87424A5E29}"/>
               </a:ext>
             </a:extLst>
           </p:cNvPr>
@@ -32568,7 +32568,7 @@
           <p:cNvPr id="68" name="">
             <a:extLst xmlns:a="http://schemas.openxmlformats.org/drawingml/2006/main">
               <a:ext uri="{FF2B5EF4-FFF2-40B4-BE49-F238E27FC236}">
-                <a16:creationId xmlns:a16="http://schemas.microsoft.com/office/drawing/2014/main" id="{ADF9D9F2-86C0-4FEF-8840-294417B39993}"/>
+                <a16:creationId xmlns:a16="http://schemas.microsoft.com/office/drawing/2014/main" id="{FEC3FD61-19F6-4757-A2F4-C5CDF482B627}"/>
               </a:ext>
             </a:extLst>
           </p:cNvPr>
@@ -32611,7 +32611,7 @@
           <p:cNvPr id="69" name="">
             <a:extLst xmlns:a="http://schemas.openxmlformats.org/drawingml/2006/main">
               <a:ext uri="{FF2B5EF4-FFF2-40B4-BE49-F238E27FC236}">
-                <a16:creationId xmlns:a16="http://schemas.microsoft.com/office/drawing/2014/main" id="{02EA3661-99CE-46B2-855F-A49608C6B964}"/>
+                <a16:creationId xmlns:a16="http://schemas.microsoft.com/office/drawing/2014/main" id="{4163C14C-25DA-451C-ABB1-6E15225516A9}"/>
               </a:ext>
             </a:extLst>
           </p:cNvPr>
@@ -32642,7 +32642,7 @@
           <p:cNvPr id="70" name="">
             <a:extLst xmlns:a="http://schemas.openxmlformats.org/drawingml/2006/main">
               <a:ext uri="{FF2B5EF4-FFF2-40B4-BE49-F238E27FC236}">
-                <a16:creationId xmlns:a16="http://schemas.microsoft.com/office/drawing/2014/main" id="{F00AA51D-91B6-425B-B108-D854C76CDDE6}"/>
+                <a16:creationId xmlns:a16="http://schemas.microsoft.com/office/drawing/2014/main" id="{6893B530-BDA8-42FA-BE41-2D5BFC57FEA3}"/>
               </a:ext>
             </a:extLst>
           </p:cNvPr>
@@ -32673,7 +32673,7 @@
           <p:cNvPr id="71" name="">
             <a:extLst xmlns:a="http://schemas.openxmlformats.org/drawingml/2006/main">
               <a:ext uri="{FF2B5EF4-FFF2-40B4-BE49-F238E27FC236}">
-                <a16:creationId xmlns:a16="http://schemas.microsoft.com/office/drawing/2014/main" id="{8375DED6-2F83-4D65-9138-CF4481A902BD}"/>
+                <a16:creationId xmlns:a16="http://schemas.microsoft.com/office/drawing/2014/main" id="{BE42E2A3-161A-40BF-9857-8E1C2BD9D12A}"/>
               </a:ext>
             </a:extLst>
           </p:cNvPr>
@@ -32725,7 +32725,7 @@
           <p:cNvPr id="72" name="">
             <a:extLst xmlns:a="http://schemas.openxmlformats.org/drawingml/2006/main">
               <a:ext uri="{FF2B5EF4-FFF2-40B4-BE49-F238E27FC236}">
-                <a16:creationId xmlns:a16="http://schemas.microsoft.com/office/drawing/2014/main" id="{41EBFF66-1674-446F-8A73-39A85726ED58}"/>
+                <a16:creationId xmlns:a16="http://schemas.microsoft.com/office/drawing/2014/main" id="{4F8090C8-602F-4AE8-9F50-E26B42B3A665}"/>
               </a:ext>
             </a:extLst>
           </p:cNvPr>
@@ -32758,7 +32758,7 @@
           <p:cNvPr id="73" name="">
             <a:extLst xmlns:a="http://schemas.openxmlformats.org/drawingml/2006/main">
               <a:ext uri="{FF2B5EF4-FFF2-40B4-BE49-F238E27FC236}">
-                <a16:creationId xmlns:a16="http://schemas.microsoft.com/office/drawing/2014/main" id="{3DA2B697-34B0-4057-ACE5-E580D5D29233}"/>
+                <a16:creationId xmlns:a16="http://schemas.microsoft.com/office/drawing/2014/main" id="{0D74A4E9-32B4-44C0-89FC-F5564771CCD7}"/>
               </a:ext>
             </a:extLst>
           </p:cNvPr>
@@ -32810,7 +32810,7 @@
           <p:cNvPr id="74" name="">
             <a:extLst xmlns:a="http://schemas.openxmlformats.org/drawingml/2006/main">
               <a:ext uri="{FF2B5EF4-FFF2-40B4-BE49-F238E27FC236}">
-                <a16:creationId xmlns:a16="http://schemas.microsoft.com/office/drawing/2014/main" id="{D75D63B6-D708-450E-82F7-4F57A56FC70C}"/>
+                <a16:creationId xmlns:a16="http://schemas.microsoft.com/office/drawing/2014/main" id="{A386D899-17C3-4AAF-BC73-11550667C1AB}"/>
               </a:ext>
             </a:extLst>
           </p:cNvPr>
@@ -32862,7 +32862,7 @@
           <p:cNvPr id="75" name="">
             <a:extLst xmlns:a="http://schemas.openxmlformats.org/drawingml/2006/main">
               <a:ext uri="{FF2B5EF4-FFF2-40B4-BE49-F238E27FC236}">
-                <a16:creationId xmlns:a16="http://schemas.microsoft.com/office/drawing/2014/main" id="{E4924C2E-0C75-426E-9A4B-FA03AF6B47C3}"/>
+                <a16:creationId xmlns:a16="http://schemas.microsoft.com/office/drawing/2014/main" id="{7950673A-818B-4AAF-9BE3-1CF05E2D7729}"/>
               </a:ext>
             </a:extLst>
           </p:cNvPr>
@@ -32912,7 +32912,7 @@
     </p:spTree>
     <p:extLst>
       <p:ext uri="{BB962C8B-B14F-4D97-AF65-F5344CB8AC3E}">
-        <p14:creationId xmlns:p14="http://schemas.microsoft.com/office/powerpoint/2010/main" val="480554267"/>
+        <p14:creationId xmlns:p14="http://schemas.microsoft.com/office/powerpoint/2010/main" val="2049614878"/>
       </p:ext>
     </p:extLst>
   </p:cSld>
@@ -32943,7 +32943,7 @@
           <p:cNvPr id="30" name="">
             <a:extLst xmlns:a="http://schemas.openxmlformats.org/drawingml/2006/main">
               <a:ext uri="{FF2B5EF4-FFF2-40B4-BE49-F238E27FC236}">
-                <a16:creationId xmlns:a16="http://schemas.microsoft.com/office/drawing/2014/main" id="{F4CC60AB-B49F-4687-88F1-96E433271141}"/>
+                <a16:creationId xmlns:a16="http://schemas.microsoft.com/office/drawing/2014/main" id="{8EFCBCA7-5F43-4567-A951-EDEAC02CCFB1}"/>
               </a:ext>
             </a:extLst>
           </p:cNvPr>
@@ -32976,7 +32976,7 @@
           <p:cNvPr id="2" name="">
             <a:extLst xmlns:a="http://schemas.openxmlformats.org/drawingml/2006/main">
               <a:ext uri="{FF2B5EF4-FFF2-40B4-BE49-F238E27FC236}">
-                <a16:creationId xmlns:a16="http://schemas.microsoft.com/office/drawing/2014/main" id="{D9394C43-EF60-4B32-9CD6-87C83D82905E}"/>
+                <a16:creationId xmlns:a16="http://schemas.microsoft.com/office/drawing/2014/main" id="{E29CD7DD-DCF6-45A0-8D6F-3BB9C7ECDE84}"/>
               </a:ext>
             </a:extLst>
           </p:cNvPr>
@@ -33007,7 +33007,7 @@
           <p:cNvPr id="3" name="">
             <a:extLst xmlns:a="http://schemas.openxmlformats.org/drawingml/2006/main">
               <a:ext uri="{FF2B5EF4-FFF2-40B4-BE49-F238E27FC236}">
-                <a16:creationId xmlns:a16="http://schemas.microsoft.com/office/drawing/2014/main" id="{DEBE695F-1953-4F8C-B85B-A6918028D595}"/>
+                <a16:creationId xmlns:a16="http://schemas.microsoft.com/office/drawing/2014/main" id="{A8C83CC6-A852-4E7E-BE61-98DCD2884CA1}"/>
               </a:ext>
             </a:extLst>
           </p:cNvPr>
@@ -33059,7 +33059,7 @@
           <p:cNvPr id="4" name="">
             <a:extLst xmlns:a="http://schemas.openxmlformats.org/drawingml/2006/main">
               <a:ext uri="{FF2B5EF4-FFF2-40B4-BE49-F238E27FC236}">
-                <a16:creationId xmlns:a16="http://schemas.microsoft.com/office/drawing/2014/main" id="{D18BB3D6-81C5-4EA1-B609-49BFD3C99C74}"/>
+                <a16:creationId xmlns:a16="http://schemas.microsoft.com/office/drawing/2014/main" id="{48E30291-4414-4256-8CAC-8DFCE1BA3508}"/>
               </a:ext>
             </a:extLst>
           </p:cNvPr>
@@ -33111,7 +33111,7 @@
           <p:cNvPr id="5" name="">
             <a:extLst xmlns:a="http://schemas.openxmlformats.org/drawingml/2006/main">
               <a:ext uri="{FF2B5EF4-FFF2-40B4-BE49-F238E27FC236}">
-                <a16:creationId xmlns:a16="http://schemas.microsoft.com/office/drawing/2014/main" id="{651422AA-784F-4462-B160-1486877F6DA8}"/>
+                <a16:creationId xmlns:a16="http://schemas.microsoft.com/office/drawing/2014/main" id="{C65CCBE7-DFDA-449D-A579-369E9F3D6F3E}"/>
               </a:ext>
             </a:extLst>
           </p:cNvPr>
@@ -33146,7 +33146,7 @@
           <p:nvPr/>
         </p:nvPicPr>
         <p:blipFill>
-          <a:blip xmlns:r="http://schemas.openxmlformats.org/officeDocument/2006/relationships" xmlns:a="http://schemas.openxmlformats.org/drawingml/2006/main" r:embed="Rcee7328f748e4ce5"/>
+          <a:blip xmlns:r="http://schemas.openxmlformats.org/officeDocument/2006/relationships" xmlns:a="http://schemas.openxmlformats.org/drawingml/2006/main" r:embed="Rd140ac28d61b4eed"/>
           <a:stretch xmlns:a="http://schemas.openxmlformats.org/drawingml/2006/main"/>
         </p:blipFill>
         <p:spPr>
@@ -33164,7 +33164,7 @@
           <p:cNvPr id="7" name="">
             <a:extLst xmlns:a="http://schemas.openxmlformats.org/drawingml/2006/main">
               <a:ext uri="{FF2B5EF4-FFF2-40B4-BE49-F238E27FC236}">
-                <a16:creationId xmlns:a16="http://schemas.microsoft.com/office/drawing/2014/main" id="{F248C144-8A8E-4809-BF64-4799502F3EEA}"/>
+                <a16:creationId xmlns:a16="http://schemas.microsoft.com/office/drawing/2014/main" id="{1068AC4D-3923-405C-8A6B-F7702DB3DA83}"/>
               </a:ext>
             </a:extLst>
           </p:cNvPr>
@@ -33216,7 +33216,7 @@
           <p:cNvPr id="8" name="">
             <a:extLst xmlns:a="http://schemas.openxmlformats.org/drawingml/2006/main">
               <a:ext uri="{FF2B5EF4-FFF2-40B4-BE49-F238E27FC236}">
-                <a16:creationId xmlns:a16="http://schemas.microsoft.com/office/drawing/2014/main" id="{26378981-DD58-44C6-B0D9-5CEC7B873662}"/>
+                <a16:creationId xmlns:a16="http://schemas.microsoft.com/office/drawing/2014/main" id="{87E956C7-BFF0-46D1-ABF8-EF98EB82516F}"/>
               </a:ext>
             </a:extLst>
           </p:cNvPr>
@@ -33268,7 +33268,7 @@
           <p:cNvPr id="9" name="">
             <a:extLst xmlns:a="http://schemas.openxmlformats.org/drawingml/2006/main">
               <a:ext uri="{FF2B5EF4-FFF2-40B4-BE49-F238E27FC236}">
-                <a16:creationId xmlns:a16="http://schemas.microsoft.com/office/drawing/2014/main" id="{10F96027-BB03-49D5-99CF-6272C3496196}"/>
+                <a16:creationId xmlns:a16="http://schemas.microsoft.com/office/drawing/2014/main" id="{1BEB15AA-12CF-432F-88DD-9AA8D15E7E6F}"/>
               </a:ext>
             </a:extLst>
           </p:cNvPr>
@@ -33320,7 +33320,7 @@
           <p:cNvPr id="10" name="">
             <a:extLst xmlns:a="http://schemas.openxmlformats.org/drawingml/2006/main">
               <a:ext uri="{FF2B5EF4-FFF2-40B4-BE49-F238E27FC236}">
-                <a16:creationId xmlns:a16="http://schemas.microsoft.com/office/drawing/2014/main" id="{119521B3-5935-4ACE-B722-A15E6301E5F8}"/>
+                <a16:creationId xmlns:a16="http://schemas.microsoft.com/office/drawing/2014/main" id="{2E60D90E-FFE4-4EF1-8AAD-97805205BB18}"/>
               </a:ext>
             </a:extLst>
           </p:cNvPr>
@@ -33372,7 +33372,7 @@
           <p:cNvPr id="11" name="">
             <a:extLst xmlns:a="http://schemas.openxmlformats.org/drawingml/2006/main">
               <a:ext uri="{FF2B5EF4-FFF2-40B4-BE49-F238E27FC236}">
-                <a16:creationId xmlns:a16="http://schemas.microsoft.com/office/drawing/2014/main" id="{403F195C-4FA5-4CB5-A445-62BBCEEED8F0}"/>
+                <a16:creationId xmlns:a16="http://schemas.microsoft.com/office/drawing/2014/main" id="{B60D0870-DB08-4F54-AD42-526E21669CF4}"/>
               </a:ext>
             </a:extLst>
           </p:cNvPr>
@@ -33419,10 +33419,10 @@
           <p:nvPr/>
         </p:nvPicPr>
         <p:blipFill>
-          <a:blip xmlns:r="http://schemas.openxmlformats.org/officeDocument/2006/relationships" xmlns:a="http://schemas.openxmlformats.org/drawingml/2006/main" r:embed="R2b85f1245d414d8e">
+          <a:blip xmlns:r="http://schemas.openxmlformats.org/officeDocument/2006/relationships" xmlns:a="http://schemas.openxmlformats.org/drawingml/2006/main" r:embed="R687b88374ca14daf">
             <a:extLst>
               <a:ext uri="{96DAC541-7B7A-43D3-8B79-37D633B846F1}">
-                <asvg:svgBlip xmlns:asvg="http://schemas.microsoft.com/office/drawing/2016/SVG/main" r:embed="R8534b687696d40cf"/>
+                <asvg:svgBlip xmlns:asvg="http://schemas.microsoft.com/office/drawing/2016/SVG/main" r:embed="Rd270c463ad0d40e8"/>
               </a:ext>
             </a:extLst>
           </a:blip>
@@ -33443,7 +33443,7 @@
           <p:cNvPr id="13" name="">
             <a:extLst xmlns:a="http://schemas.openxmlformats.org/drawingml/2006/main">
               <a:ext uri="{FF2B5EF4-FFF2-40B4-BE49-F238E27FC236}">
-                <a16:creationId xmlns:a16="http://schemas.microsoft.com/office/drawing/2014/main" id="{61955592-274A-4134-B703-70D7A79FF606}"/>
+                <a16:creationId xmlns:a16="http://schemas.microsoft.com/office/drawing/2014/main" id="{40C08C27-6047-487C-B71E-731A644B8F3E}"/>
               </a:ext>
             </a:extLst>
           </p:cNvPr>
@@ -33476,7 +33476,7 @@
           <p:cNvPr id="14" name="">
             <a:extLst xmlns:a="http://schemas.openxmlformats.org/drawingml/2006/main">
               <a:ext uri="{FF2B5EF4-FFF2-40B4-BE49-F238E27FC236}">
-                <a16:creationId xmlns:a16="http://schemas.microsoft.com/office/drawing/2014/main" id="{FC8771C5-6EEA-46B3-AD66-CB77222DE5D7}"/>
+                <a16:creationId xmlns:a16="http://schemas.microsoft.com/office/drawing/2014/main" id="{8CAEC59E-5199-4E59-A85F-B7C043AE805B}"/>
               </a:ext>
             </a:extLst>
           </p:cNvPr>
@@ -33528,7 +33528,7 @@
           <p:cNvPr id="15" name="">
             <a:extLst xmlns:a="http://schemas.openxmlformats.org/drawingml/2006/main">
               <a:ext uri="{FF2B5EF4-FFF2-40B4-BE49-F238E27FC236}">
-                <a16:creationId xmlns:a16="http://schemas.microsoft.com/office/drawing/2014/main" id="{BF8B5BEB-DBD4-4B0C-A3C4-E3475AA89979}"/>
+                <a16:creationId xmlns:a16="http://schemas.microsoft.com/office/drawing/2014/main" id="{5E58B6FA-472A-43E6-A1F4-D0096AC10FBB}"/>
               </a:ext>
             </a:extLst>
           </p:cNvPr>
@@ -33561,7 +33561,7 @@
           <p:cNvPr id="16" name="">
             <a:extLst xmlns:a="http://schemas.openxmlformats.org/drawingml/2006/main">
               <a:ext uri="{FF2B5EF4-FFF2-40B4-BE49-F238E27FC236}">
-                <a16:creationId xmlns:a16="http://schemas.microsoft.com/office/drawing/2014/main" id="{A88932AB-EAC5-469D-9631-E7E9BE57C3F3}"/>
+                <a16:creationId xmlns:a16="http://schemas.microsoft.com/office/drawing/2014/main" id="{584094AB-571A-4B64-BB87-D8393754FB93}"/>
               </a:ext>
             </a:extLst>
           </p:cNvPr>
@@ -33613,7 +33613,7 @@
           <p:cNvPr id="17" name="">
             <a:extLst xmlns:a="http://schemas.openxmlformats.org/drawingml/2006/main">
               <a:ext uri="{FF2B5EF4-FFF2-40B4-BE49-F238E27FC236}">
-                <a16:creationId xmlns:a16="http://schemas.microsoft.com/office/drawing/2014/main" id="{75A5500A-D696-4467-B360-9E286FC8E26F}"/>
+                <a16:creationId xmlns:a16="http://schemas.microsoft.com/office/drawing/2014/main" id="{5AD50633-15F5-4217-949E-D6C45AED0CF4}"/>
               </a:ext>
             </a:extLst>
           </p:cNvPr>
@@ -33646,7 +33646,7 @@
           <p:cNvPr id="18" name="">
             <a:extLst xmlns:a="http://schemas.openxmlformats.org/drawingml/2006/main">
               <a:ext uri="{FF2B5EF4-FFF2-40B4-BE49-F238E27FC236}">
-                <a16:creationId xmlns:a16="http://schemas.microsoft.com/office/drawing/2014/main" id="{DE1FE1CA-E2BB-40EB-A34F-EE7211F8A2C7}"/>
+                <a16:creationId xmlns:a16="http://schemas.microsoft.com/office/drawing/2014/main" id="{6C55E018-642D-40EE-B5BD-5E397EFC2586}"/>
               </a:ext>
             </a:extLst>
           </p:cNvPr>
@@ -33698,7 +33698,7 @@
           <p:cNvPr id="19" name="">
             <a:extLst xmlns:a="http://schemas.openxmlformats.org/drawingml/2006/main">
               <a:ext uri="{FF2B5EF4-FFF2-40B4-BE49-F238E27FC236}">
-                <a16:creationId xmlns:a16="http://schemas.microsoft.com/office/drawing/2014/main" id="{9C3085FB-037D-4FD2-BBD7-33238287162E}"/>
+                <a16:creationId xmlns:a16="http://schemas.microsoft.com/office/drawing/2014/main" id="{05098CCD-E7E3-4AAB-AE24-E4FCB3EE69B3}"/>
               </a:ext>
             </a:extLst>
           </p:cNvPr>
@@ -33731,7 +33731,7 @@
           <p:cNvPr id="20" name="">
             <a:extLst xmlns:a="http://schemas.openxmlformats.org/drawingml/2006/main">
               <a:ext uri="{FF2B5EF4-FFF2-40B4-BE49-F238E27FC236}">
-                <a16:creationId xmlns:a16="http://schemas.microsoft.com/office/drawing/2014/main" id="{A90C0264-CA55-4B71-8D1A-DAADC65D2980}"/>
+                <a16:creationId xmlns:a16="http://schemas.microsoft.com/office/drawing/2014/main" id="{A43C5094-8E38-430D-BB48-22E822FD999B}"/>
               </a:ext>
             </a:extLst>
           </p:cNvPr>
@@ -33783,7 +33783,7 @@
           <p:cNvPr id="21" name="">
             <a:extLst xmlns:a="http://schemas.openxmlformats.org/drawingml/2006/main">
               <a:ext uri="{FF2B5EF4-FFF2-40B4-BE49-F238E27FC236}">
-                <a16:creationId xmlns:a16="http://schemas.microsoft.com/office/drawing/2014/main" id="{24B67C47-EADD-47CC-BC70-486755025255}"/>
+                <a16:creationId xmlns:a16="http://schemas.microsoft.com/office/drawing/2014/main" id="{28485DBE-0DD1-4C5D-98DE-828E03E9722D}"/>
               </a:ext>
             </a:extLst>
           </p:cNvPr>
@@ -33814,7 +33814,7 @@
           <p:cNvPr id="22" name="">
             <a:extLst xmlns:a="http://schemas.openxmlformats.org/drawingml/2006/main">
               <a:ext uri="{FF2B5EF4-FFF2-40B4-BE49-F238E27FC236}">
-                <a16:creationId xmlns:a16="http://schemas.microsoft.com/office/drawing/2014/main" id="{32BA7927-CD98-47AC-8190-466538C4AD3B}"/>
+                <a16:creationId xmlns:a16="http://schemas.microsoft.com/office/drawing/2014/main" id="{662972CF-7A81-415B-B197-8E8C5F433297}"/>
               </a:ext>
             </a:extLst>
           </p:cNvPr>
@@ -33866,7 +33866,7 @@
           <p:cNvPr id="23" name="">
             <a:extLst xmlns:a="http://schemas.openxmlformats.org/drawingml/2006/main">
               <a:ext uri="{FF2B5EF4-FFF2-40B4-BE49-F238E27FC236}">
-                <a16:creationId xmlns:a16="http://schemas.microsoft.com/office/drawing/2014/main" id="{8F8AFE9E-2CD9-449B-BB37-87918B9A875B}"/>
+                <a16:creationId xmlns:a16="http://schemas.microsoft.com/office/drawing/2014/main" id="{1BE70184-F755-4C57-A51D-FB7FAFDD8608}"/>
               </a:ext>
             </a:extLst>
           </p:cNvPr>
@@ -33918,7 +33918,7 @@
           <p:cNvPr id="24" name="">
             <a:extLst xmlns:a="http://schemas.openxmlformats.org/drawingml/2006/main">
               <a:ext uri="{FF2B5EF4-FFF2-40B4-BE49-F238E27FC236}">
-                <a16:creationId xmlns:a16="http://schemas.microsoft.com/office/drawing/2014/main" id="{041B6A30-2886-4CEA-BB79-41AA9314778C}"/>
+                <a16:creationId xmlns:a16="http://schemas.microsoft.com/office/drawing/2014/main" id="{AE9BC2BE-6308-4A39-BE48-6A0A958A346C}"/>
               </a:ext>
             </a:extLst>
           </p:cNvPr>
@@ -33970,7 +33970,7 @@
           <p:cNvPr id="25" name="">
             <a:extLst xmlns:a="http://schemas.openxmlformats.org/drawingml/2006/main">
               <a:ext uri="{FF2B5EF4-FFF2-40B4-BE49-F238E27FC236}">
-                <a16:creationId xmlns:a16="http://schemas.microsoft.com/office/drawing/2014/main" id="{7A553DF2-9ED9-4588-B02E-E7D1B3B7D34D}"/>
+                <a16:creationId xmlns:a16="http://schemas.microsoft.com/office/drawing/2014/main" id="{F1DE628B-DF28-499F-8B7F-DA2F6CDCE1FB}"/>
               </a:ext>
             </a:extLst>
           </p:cNvPr>
@@ -34022,7 +34022,7 @@
           <p:cNvPr id="26" name="">
             <a:extLst xmlns:a="http://schemas.openxmlformats.org/drawingml/2006/main">
               <a:ext uri="{FF2B5EF4-FFF2-40B4-BE49-F238E27FC236}">
-                <a16:creationId xmlns:a16="http://schemas.microsoft.com/office/drawing/2014/main" id="{2968795E-EA3D-460B-8F15-89416A4056A2}"/>
+                <a16:creationId xmlns:a16="http://schemas.microsoft.com/office/drawing/2014/main" id="{B95DCC8A-E2BD-4034-90AA-8DF63C6610FA}"/>
               </a:ext>
             </a:extLst>
           </p:cNvPr>
@@ -34074,7 +34074,7 @@
           <p:cNvPr id="27" name="">
             <a:extLst xmlns:a="http://schemas.openxmlformats.org/drawingml/2006/main">
               <a:ext uri="{FF2B5EF4-FFF2-40B4-BE49-F238E27FC236}">
-                <a16:creationId xmlns:a16="http://schemas.microsoft.com/office/drawing/2014/main" id="{40648BA5-E729-4861-80EA-AFF7AB7CC229}"/>
+                <a16:creationId xmlns:a16="http://schemas.microsoft.com/office/drawing/2014/main" id="{31D73F71-D64F-4B59-8131-1D2A5F3974F9}"/>
               </a:ext>
             </a:extLst>
           </p:cNvPr>
@@ -34126,7 +34126,7 @@
           <p:cNvPr id="28" name="">
             <a:extLst xmlns:a="http://schemas.openxmlformats.org/drawingml/2006/main">
               <a:ext uri="{FF2B5EF4-FFF2-40B4-BE49-F238E27FC236}">
-                <a16:creationId xmlns:a16="http://schemas.microsoft.com/office/drawing/2014/main" id="{A999CD12-3DC6-4D21-A63D-6DCCEA77425C}"/>
+                <a16:creationId xmlns:a16="http://schemas.microsoft.com/office/drawing/2014/main" id="{373B542D-AE86-441C-9D05-09A238C0AC04}"/>
               </a:ext>
             </a:extLst>
           </p:cNvPr>
@@ -34178,7 +34178,7 @@
           <p:cNvPr id="29" name="">
             <a:extLst xmlns:a="http://schemas.openxmlformats.org/drawingml/2006/main">
               <a:ext uri="{FF2B5EF4-FFF2-40B4-BE49-F238E27FC236}">
-                <a16:creationId xmlns:a16="http://schemas.microsoft.com/office/drawing/2014/main" id="{7E6F8EC6-6D55-4D61-B641-E738EE1CB9A0}"/>
+                <a16:creationId xmlns:a16="http://schemas.microsoft.com/office/drawing/2014/main" id="{C9655B5D-3487-453C-BDE8-8E302A7B36C4}"/>
               </a:ext>
             </a:extLst>
           </p:cNvPr>
@@ -34228,7 +34228,7 @@
     </p:spTree>
     <p:extLst>
       <p:ext uri="{BB962C8B-B14F-4D97-AF65-F5344CB8AC3E}">
-        <p14:creationId xmlns:p14="http://schemas.microsoft.com/office/powerpoint/2010/main" val="127802602"/>
+        <p14:creationId xmlns:p14="http://schemas.microsoft.com/office/powerpoint/2010/main" val="1750406564"/>
       </p:ext>
     </p:extLst>
   </p:cSld>
@@ -34259,7 +34259,7 @@
           <p:cNvPr id="33" name="">
             <a:extLst xmlns:a="http://schemas.openxmlformats.org/drawingml/2006/main">
               <a:ext uri="{FF2B5EF4-FFF2-40B4-BE49-F238E27FC236}">
-                <a16:creationId xmlns:a16="http://schemas.microsoft.com/office/drawing/2014/main" id="{0E49A20E-9B36-4C55-8BE8-2884450624D1}"/>
+                <a16:creationId xmlns:a16="http://schemas.microsoft.com/office/drawing/2014/main" id="{1AFB4423-446E-4AE5-8E52-E21ED11A5D4C}"/>
               </a:ext>
             </a:extLst>
           </p:cNvPr>
@@ -34292,7 +34292,7 @@
           <p:cNvPr id="2" name="">
             <a:extLst xmlns:a="http://schemas.openxmlformats.org/drawingml/2006/main">
               <a:ext uri="{FF2B5EF4-FFF2-40B4-BE49-F238E27FC236}">
-                <a16:creationId xmlns:a16="http://schemas.microsoft.com/office/drawing/2014/main" id="{F7DE11B2-3828-4D86-A7B0-4080C56289BA}"/>
+                <a16:creationId xmlns:a16="http://schemas.microsoft.com/office/drawing/2014/main" id="{B0D0D878-DF11-46A7-AEF5-D46815239C5C}"/>
               </a:ext>
             </a:extLst>
           </p:cNvPr>
@@ -34323,7 +34323,7 @@
           <p:cNvPr id="3" name="">
             <a:extLst xmlns:a="http://schemas.openxmlformats.org/drawingml/2006/main">
               <a:ext uri="{FF2B5EF4-FFF2-40B4-BE49-F238E27FC236}">
-                <a16:creationId xmlns:a16="http://schemas.microsoft.com/office/drawing/2014/main" id="{DBACF1E4-18CB-42DB-AA12-2969F1C7D06F}"/>
+                <a16:creationId xmlns:a16="http://schemas.microsoft.com/office/drawing/2014/main" id="{E0B3F15B-8357-421E-8D35-25FA6E7D3FE1}"/>
               </a:ext>
             </a:extLst>
           </p:cNvPr>
@@ -34375,7 +34375,7 @@
           <p:cNvPr id="4" name="">
             <a:extLst xmlns:a="http://schemas.openxmlformats.org/drawingml/2006/main">
               <a:ext uri="{FF2B5EF4-FFF2-40B4-BE49-F238E27FC236}">
-                <a16:creationId xmlns:a16="http://schemas.microsoft.com/office/drawing/2014/main" id="{8E12EE31-821B-4C3A-8B6E-909354833093}"/>
+                <a16:creationId xmlns:a16="http://schemas.microsoft.com/office/drawing/2014/main" id="{48F2AD6D-D035-48D1-9C3C-B00C0E7A6B52}"/>
               </a:ext>
             </a:extLst>
           </p:cNvPr>
@@ -34427,7 +34427,7 @@
           <p:cNvPr id="5" name="">
             <a:extLst xmlns:a="http://schemas.openxmlformats.org/drawingml/2006/main">
               <a:ext uri="{FF2B5EF4-FFF2-40B4-BE49-F238E27FC236}">
-                <a16:creationId xmlns:a16="http://schemas.microsoft.com/office/drawing/2014/main" id="{1A8849F5-3B00-481C-89A0-209604028042}"/>
+                <a16:creationId xmlns:a16="http://schemas.microsoft.com/office/drawing/2014/main" id="{B7E30A6D-30CC-4A33-83F1-A0670A4C6663}"/>
               </a:ext>
             </a:extLst>
           </p:cNvPr>
@@ -34462,7 +34462,7 @@
           <p:nvPr/>
         </p:nvPicPr>
         <p:blipFill>
-          <a:blip xmlns:r="http://schemas.openxmlformats.org/officeDocument/2006/relationships" xmlns:a="http://schemas.openxmlformats.org/drawingml/2006/main" r:embed="R204468abb9e44ef0"/>
+          <a:blip xmlns:r="http://schemas.openxmlformats.org/officeDocument/2006/relationships" xmlns:a="http://schemas.openxmlformats.org/drawingml/2006/main" r:embed="R8bdbf61cda384d2d"/>
           <a:stretch xmlns:a="http://schemas.openxmlformats.org/drawingml/2006/main"/>
         </p:blipFill>
         <p:spPr>
@@ -34480,7 +34480,7 @@
           <p:cNvPr id="7" name="">
             <a:extLst xmlns:a="http://schemas.openxmlformats.org/drawingml/2006/main">
               <a:ext uri="{FF2B5EF4-FFF2-40B4-BE49-F238E27FC236}">
-                <a16:creationId xmlns:a16="http://schemas.microsoft.com/office/drawing/2014/main" id="{B5421598-F51A-4FD4-A2CD-8265486320DE}"/>
+                <a16:creationId xmlns:a16="http://schemas.microsoft.com/office/drawing/2014/main" id="{19238167-F93B-40C0-8CAE-827190B32ED1}"/>
               </a:ext>
             </a:extLst>
           </p:cNvPr>
@@ -34532,7 +34532,7 @@
           <p:cNvPr id="8" name="">
             <a:extLst xmlns:a="http://schemas.openxmlformats.org/drawingml/2006/main">
               <a:ext uri="{FF2B5EF4-FFF2-40B4-BE49-F238E27FC236}">
-                <a16:creationId xmlns:a16="http://schemas.microsoft.com/office/drawing/2014/main" id="{E909AAA0-9613-4038-BD84-42D2A21B3B95}"/>
+                <a16:creationId xmlns:a16="http://schemas.microsoft.com/office/drawing/2014/main" id="{F4967801-A617-4D2E-B955-3779B6B0D092}"/>
               </a:ext>
             </a:extLst>
           </p:cNvPr>
@@ -34584,7 +34584,7 @@
           <p:cNvPr id="9" name="">
             <a:extLst xmlns:a="http://schemas.openxmlformats.org/drawingml/2006/main">
               <a:ext uri="{FF2B5EF4-FFF2-40B4-BE49-F238E27FC236}">
-                <a16:creationId xmlns:a16="http://schemas.microsoft.com/office/drawing/2014/main" id="{14A7AE7B-08BB-4B35-89D0-3925973AB001}"/>
+                <a16:creationId xmlns:a16="http://schemas.microsoft.com/office/drawing/2014/main" id="{04DB80A9-8865-42DE-A54A-E1D236470947}"/>
               </a:ext>
             </a:extLst>
           </p:cNvPr>
@@ -34636,7 +34636,7 @@
           <p:cNvPr id="10" name="">
             <a:extLst xmlns:a="http://schemas.openxmlformats.org/drawingml/2006/main">
               <a:ext uri="{FF2B5EF4-FFF2-40B4-BE49-F238E27FC236}">
-                <a16:creationId xmlns:a16="http://schemas.microsoft.com/office/drawing/2014/main" id="{E443407F-68C0-4B77-8D4C-34978DD499E5}"/>
+                <a16:creationId xmlns:a16="http://schemas.microsoft.com/office/drawing/2014/main" id="{F2C8F3C4-0E17-4760-9E71-A60A0949C3F0}"/>
               </a:ext>
             </a:extLst>
           </p:cNvPr>
@@ -34688,7 +34688,7 @@
           <p:cNvPr id="11" name="">
             <a:extLst xmlns:a="http://schemas.openxmlformats.org/drawingml/2006/main">
               <a:ext uri="{FF2B5EF4-FFF2-40B4-BE49-F238E27FC236}">
-                <a16:creationId xmlns:a16="http://schemas.microsoft.com/office/drawing/2014/main" id="{45A636A5-B754-48CF-A94F-4D77C5D4C4B9}"/>
+                <a16:creationId xmlns:a16="http://schemas.microsoft.com/office/drawing/2014/main" id="{9C8D7D53-BBE2-4B05-B4FB-76E2FE0EC2DD}"/>
               </a:ext>
             </a:extLst>
           </p:cNvPr>
@@ -34735,10 +34735,10 @@
           <p:nvPr/>
         </p:nvPicPr>
         <p:blipFill>
-          <a:blip xmlns:r="http://schemas.openxmlformats.org/officeDocument/2006/relationships" xmlns:a="http://schemas.openxmlformats.org/drawingml/2006/main" r:embed="R7df8c903dcc14161">
+          <a:blip xmlns:r="http://schemas.openxmlformats.org/officeDocument/2006/relationships" xmlns:a="http://schemas.openxmlformats.org/drawingml/2006/main" r:embed="R2a9675f9927e4d55">
             <a:extLst>
               <a:ext uri="{96DAC541-7B7A-43D3-8B79-37D633B846F1}">
-                <asvg:svgBlip xmlns:asvg="http://schemas.microsoft.com/office/drawing/2016/SVG/main" r:embed="R740f029f328f45a8"/>
+                <asvg:svgBlip xmlns:asvg="http://schemas.microsoft.com/office/drawing/2016/SVG/main" r:embed="Reaa17685f1dc42e8"/>
               </a:ext>
             </a:extLst>
           </a:blip>
@@ -34759,7 +34759,7 @@
           <p:cNvPr id="13" name="">
             <a:extLst xmlns:a="http://schemas.openxmlformats.org/drawingml/2006/main">
               <a:ext uri="{FF2B5EF4-FFF2-40B4-BE49-F238E27FC236}">
-                <a16:creationId xmlns:a16="http://schemas.microsoft.com/office/drawing/2014/main" id="{C3E83AE0-730F-4159-9048-9F8006AD891D}"/>
+                <a16:creationId xmlns:a16="http://schemas.microsoft.com/office/drawing/2014/main" id="{2CDC079D-B6C1-497A-B0A3-5812E938FB2C}"/>
               </a:ext>
             </a:extLst>
           </p:cNvPr>
@@ -34792,7 +34792,7 @@
           <p:cNvPr id="14" name="">
             <a:extLst xmlns:a="http://schemas.openxmlformats.org/drawingml/2006/main">
               <a:ext uri="{FF2B5EF4-FFF2-40B4-BE49-F238E27FC236}">
-                <a16:creationId xmlns:a16="http://schemas.microsoft.com/office/drawing/2014/main" id="{9E7A0A01-EB0F-4A26-BF49-B6D713C48715}"/>
+                <a16:creationId xmlns:a16="http://schemas.microsoft.com/office/drawing/2014/main" id="{17D78A64-637A-4CCF-9F32-1FBBAC332969}"/>
               </a:ext>
             </a:extLst>
           </p:cNvPr>
@@ -34844,7 +34844,7 @@
           <p:cNvPr id="15" name="">
             <a:extLst xmlns:a="http://schemas.openxmlformats.org/drawingml/2006/main">
               <a:ext uri="{FF2B5EF4-FFF2-40B4-BE49-F238E27FC236}">
-                <a16:creationId xmlns:a16="http://schemas.microsoft.com/office/drawing/2014/main" id="{197FFFC6-73AE-4333-942C-DB44F67ED919}"/>
+                <a16:creationId xmlns:a16="http://schemas.microsoft.com/office/drawing/2014/main" id="{82BE4C70-BA66-4F5E-A442-C193EF9543BD}"/>
               </a:ext>
             </a:extLst>
           </p:cNvPr>
@@ -34875,7 +34875,7 @@
           <p:cNvPr id="16" name="">
             <a:extLst xmlns:a="http://schemas.openxmlformats.org/drawingml/2006/main">
               <a:ext uri="{FF2B5EF4-FFF2-40B4-BE49-F238E27FC236}">
-                <a16:creationId xmlns:a16="http://schemas.microsoft.com/office/drawing/2014/main" id="{6EB9946F-2AEF-4BE1-81DB-71F8EC127E5A}"/>
+                <a16:creationId xmlns:a16="http://schemas.microsoft.com/office/drawing/2014/main" id="{7BF33F3E-1858-4A84-9B09-F7EA64A299A7}"/>
               </a:ext>
             </a:extLst>
           </p:cNvPr>
@@ -34906,7 +34906,7 @@
           <p:cNvPr id="17" name="">
             <a:extLst xmlns:a="http://schemas.openxmlformats.org/drawingml/2006/main">
               <a:ext uri="{FF2B5EF4-FFF2-40B4-BE49-F238E27FC236}">
-                <a16:creationId xmlns:a16="http://schemas.microsoft.com/office/drawing/2014/main" id="{EA66CCD8-247A-4810-93BB-6650D8367CCD}"/>
+                <a16:creationId xmlns:a16="http://schemas.microsoft.com/office/drawing/2014/main" id="{4D7E1DB6-9019-44C1-BD4E-89A5E2E4ACD0}"/>
               </a:ext>
             </a:extLst>
           </p:cNvPr>
@@ -34958,7 +34958,7 @@
           <p:cNvPr id="18" name="">
             <a:extLst xmlns:a="http://schemas.openxmlformats.org/drawingml/2006/main">
               <a:ext uri="{FF2B5EF4-FFF2-40B4-BE49-F238E27FC236}">
-                <a16:creationId xmlns:a16="http://schemas.microsoft.com/office/drawing/2014/main" id="{508E2167-BC9F-40A6-8AAE-2D42FE1ED462}"/>
+                <a16:creationId xmlns:a16="http://schemas.microsoft.com/office/drawing/2014/main" id="{3348F709-EBDC-4DB8-A573-1AEB3ADB66FC}"/>
               </a:ext>
             </a:extLst>
           </p:cNvPr>
@@ -34991,7 +34991,7 @@
           <p:cNvPr id="19" name="">
             <a:extLst xmlns:a="http://schemas.openxmlformats.org/drawingml/2006/main">
               <a:ext uri="{FF2B5EF4-FFF2-40B4-BE49-F238E27FC236}">
-                <a16:creationId xmlns:a16="http://schemas.microsoft.com/office/drawing/2014/main" id="{8ACABCBA-E8AA-41C4-BE87-38156E5C2C9B}"/>
+                <a16:creationId xmlns:a16="http://schemas.microsoft.com/office/drawing/2014/main" id="{FB347890-3D6B-4580-A114-5F160D51461B}"/>
               </a:ext>
             </a:extLst>
           </p:cNvPr>
@@ -35043,7 +35043,7 @@
           <p:cNvPr id="20" name="">
             <a:extLst xmlns:a="http://schemas.openxmlformats.org/drawingml/2006/main">
               <a:ext uri="{FF2B5EF4-FFF2-40B4-BE49-F238E27FC236}">
-                <a16:creationId xmlns:a16="http://schemas.microsoft.com/office/drawing/2014/main" id="{FB919026-C9F3-4115-8D94-7F3C473A3716}"/>
+                <a16:creationId xmlns:a16="http://schemas.microsoft.com/office/drawing/2014/main" id="{74E9450C-F8DB-45D5-83C0-00AD0BC2F316}"/>
               </a:ext>
             </a:extLst>
           </p:cNvPr>
@@ -35074,7 +35074,7 @@
           <p:cNvPr id="21" name="">
             <a:extLst xmlns:a="http://schemas.openxmlformats.org/drawingml/2006/main">
               <a:ext uri="{FF2B5EF4-FFF2-40B4-BE49-F238E27FC236}">
-                <a16:creationId xmlns:a16="http://schemas.microsoft.com/office/drawing/2014/main" id="{AA52BFBA-561F-466F-AD3F-0F6F3A3DCA7A}"/>
+                <a16:creationId xmlns:a16="http://schemas.microsoft.com/office/drawing/2014/main" id="{E5437F3C-17B8-4AA5-9D48-589AB620B738}"/>
               </a:ext>
             </a:extLst>
           </p:cNvPr>
@@ -35105,7 +35105,7 @@
           <p:cNvPr id="22" name="">
             <a:extLst xmlns:a="http://schemas.openxmlformats.org/drawingml/2006/main">
               <a:ext uri="{FF2B5EF4-FFF2-40B4-BE49-F238E27FC236}">
-                <a16:creationId xmlns:a16="http://schemas.microsoft.com/office/drawing/2014/main" id="{37DCFBF3-517D-4D6F-99A2-704A7B86B7B1}"/>
+                <a16:creationId xmlns:a16="http://schemas.microsoft.com/office/drawing/2014/main" id="{A2676B77-F5B7-4BD8-870B-F82540F7F898}"/>
               </a:ext>
             </a:extLst>
           </p:cNvPr>
@@ -35157,7 +35157,7 @@
           <p:cNvPr id="23" name="">
             <a:extLst xmlns:a="http://schemas.openxmlformats.org/drawingml/2006/main">
               <a:ext uri="{FF2B5EF4-FFF2-40B4-BE49-F238E27FC236}">
-                <a16:creationId xmlns:a16="http://schemas.microsoft.com/office/drawing/2014/main" id="{2CE57662-BBCC-404C-870F-A2967F0A5A4C}"/>
+                <a16:creationId xmlns:a16="http://schemas.microsoft.com/office/drawing/2014/main" id="{65B2BE58-9A92-4E5E-B832-2DF1B2C69E16}"/>
               </a:ext>
             </a:extLst>
           </p:cNvPr>
@@ -35209,7 +35209,7 @@
           <p:cNvPr id="24" name="">
             <a:extLst xmlns:a="http://schemas.openxmlformats.org/drawingml/2006/main">
               <a:ext uri="{FF2B5EF4-FFF2-40B4-BE49-F238E27FC236}">
-                <a16:creationId xmlns:a16="http://schemas.microsoft.com/office/drawing/2014/main" id="{1CCABE02-F3E1-4CA8-8B2F-01CC7DA08E4C}"/>
+                <a16:creationId xmlns:a16="http://schemas.microsoft.com/office/drawing/2014/main" id="{1A9FF381-354C-4639-9B0E-966C97AFAF7D}"/>
               </a:ext>
             </a:extLst>
           </p:cNvPr>
@@ -35240,7 +35240,7 @@
           <p:cNvPr id="25" name="">
             <a:extLst xmlns:a="http://schemas.openxmlformats.org/drawingml/2006/main">
               <a:ext uri="{FF2B5EF4-FFF2-40B4-BE49-F238E27FC236}">
-                <a16:creationId xmlns:a16="http://schemas.microsoft.com/office/drawing/2014/main" id="{86E4A19D-9A0D-4DCB-8BE3-4D8EBC895D1D}"/>
+                <a16:creationId xmlns:a16="http://schemas.microsoft.com/office/drawing/2014/main" id="{D85311DF-E3AA-417D-9790-5E6A9F432D4E}"/>
               </a:ext>
             </a:extLst>
           </p:cNvPr>
@@ -35292,7 +35292,7 @@
           <p:cNvPr id="26" name="">
             <a:extLst xmlns:a="http://schemas.openxmlformats.org/drawingml/2006/main">
               <a:ext uri="{FF2B5EF4-FFF2-40B4-BE49-F238E27FC236}">
-                <a16:creationId xmlns:a16="http://schemas.microsoft.com/office/drawing/2014/main" id="{674C258E-8E14-40F0-9B09-CE35592F0944}"/>
+                <a16:creationId xmlns:a16="http://schemas.microsoft.com/office/drawing/2014/main" id="{52242F63-BC5D-4EE8-9AF5-0099B4061DCB}"/>
               </a:ext>
             </a:extLst>
           </p:cNvPr>
@@ -35344,7 +35344,7 @@
           <p:cNvPr id="27" name="">
             <a:extLst xmlns:a="http://schemas.openxmlformats.org/drawingml/2006/main">
               <a:ext uri="{FF2B5EF4-FFF2-40B4-BE49-F238E27FC236}">
-                <a16:creationId xmlns:a16="http://schemas.microsoft.com/office/drawing/2014/main" id="{8ABE58D4-F4A1-4247-8EE9-D92D2FEE5591}"/>
+                <a16:creationId xmlns:a16="http://schemas.microsoft.com/office/drawing/2014/main" id="{5363E327-566F-410C-B770-BF5C648229CB}"/>
               </a:ext>
             </a:extLst>
           </p:cNvPr>
@@ -35396,7 +35396,7 @@
           <p:cNvPr id="28" name="">
             <a:extLst xmlns:a="http://schemas.openxmlformats.org/drawingml/2006/main">
               <a:ext uri="{FF2B5EF4-FFF2-40B4-BE49-F238E27FC236}">
-                <a16:creationId xmlns:a16="http://schemas.microsoft.com/office/drawing/2014/main" id="{CFE0F763-67AE-41FD-BA06-F3C4C139AA11}"/>
+                <a16:creationId xmlns:a16="http://schemas.microsoft.com/office/drawing/2014/main" id="{9977422C-FCDA-4E61-B35F-230AF7140B13}"/>
               </a:ext>
             </a:extLst>
           </p:cNvPr>
@@ -35448,7 +35448,7 @@
           <p:cNvPr id="29" name="">
             <a:extLst xmlns:a="http://schemas.openxmlformats.org/drawingml/2006/main">
               <a:ext uri="{FF2B5EF4-FFF2-40B4-BE49-F238E27FC236}">
-                <a16:creationId xmlns:a16="http://schemas.microsoft.com/office/drawing/2014/main" id="{CD082B16-5598-42E3-A652-D0EEE0E318AB}"/>
+                <a16:creationId xmlns:a16="http://schemas.microsoft.com/office/drawing/2014/main" id="{7D702A1A-D85B-4246-9E93-65412980B3C8}"/>
               </a:ext>
             </a:extLst>
           </p:cNvPr>
@@ -35500,7 +35500,7 @@
           <p:cNvPr id="30" name="">
             <a:extLst xmlns:a="http://schemas.openxmlformats.org/drawingml/2006/main">
               <a:ext uri="{FF2B5EF4-FFF2-40B4-BE49-F238E27FC236}">
-                <a16:creationId xmlns:a16="http://schemas.microsoft.com/office/drawing/2014/main" id="{FFB1277B-118E-4B3C-A9B8-AA7E5ED8A00D}"/>
+                <a16:creationId xmlns:a16="http://schemas.microsoft.com/office/drawing/2014/main" id="{8E051340-5B85-46B8-97A0-4C92193ABC12}"/>
               </a:ext>
             </a:extLst>
           </p:cNvPr>
@@ -35552,7 +35552,7 @@
           <p:cNvPr id="31" name="">
             <a:extLst xmlns:a="http://schemas.openxmlformats.org/drawingml/2006/main">
               <a:ext uri="{FF2B5EF4-FFF2-40B4-BE49-F238E27FC236}">
-                <a16:creationId xmlns:a16="http://schemas.microsoft.com/office/drawing/2014/main" id="{86B9994B-B910-4970-956E-A2699E3B8B85}"/>
+                <a16:creationId xmlns:a16="http://schemas.microsoft.com/office/drawing/2014/main" id="{0B5AAC4E-6BA7-4E5F-8CF0-167F3458178D}"/>
               </a:ext>
             </a:extLst>
           </p:cNvPr>
@@ -35604,7 +35604,7 @@
           <p:cNvPr id="32" name="">
             <a:extLst xmlns:a="http://schemas.openxmlformats.org/drawingml/2006/main">
               <a:ext uri="{FF2B5EF4-FFF2-40B4-BE49-F238E27FC236}">
-                <a16:creationId xmlns:a16="http://schemas.microsoft.com/office/drawing/2014/main" id="{4684E7FA-3BFB-4313-945A-B249992C9B6E}"/>
+                <a16:creationId xmlns:a16="http://schemas.microsoft.com/office/drawing/2014/main" id="{95A9CACA-D854-4AB4-B0F8-AF02DCE07C6F}"/>
               </a:ext>
             </a:extLst>
           </p:cNvPr>
@@ -35654,7 +35654,7 @@
     </p:spTree>
     <p:extLst>
       <p:ext uri="{BB962C8B-B14F-4D97-AF65-F5344CB8AC3E}">
-        <p14:creationId xmlns:p14="http://schemas.microsoft.com/office/powerpoint/2010/main" val="2038047427"/>
+        <p14:creationId xmlns:p14="http://schemas.microsoft.com/office/powerpoint/2010/main" val="2076118226"/>
       </p:ext>
     </p:extLst>
   </p:cSld>
@@ -35685,7 +35685,7 @@
           <p:cNvPr id="27" name="">
             <a:extLst xmlns:a="http://schemas.openxmlformats.org/drawingml/2006/main">
               <a:ext uri="{FF2B5EF4-FFF2-40B4-BE49-F238E27FC236}">
-                <a16:creationId xmlns:a16="http://schemas.microsoft.com/office/drawing/2014/main" id="{46B3A0A1-75EA-46D0-B399-FD02E848EDD7}"/>
+                <a16:creationId xmlns:a16="http://schemas.microsoft.com/office/drawing/2014/main" id="{3C3EE8C6-4A64-440A-8BA9-5DC47E31F60D}"/>
               </a:ext>
             </a:extLst>
           </p:cNvPr>
@@ -35718,7 +35718,7 @@
           <p:cNvPr id="2" name="">
             <a:extLst xmlns:a="http://schemas.openxmlformats.org/drawingml/2006/main">
               <a:ext uri="{FF2B5EF4-FFF2-40B4-BE49-F238E27FC236}">
-                <a16:creationId xmlns:a16="http://schemas.microsoft.com/office/drawing/2014/main" id="{FC3B2C7C-DF7E-4774-B87F-CBB2F1B8424D}"/>
+                <a16:creationId xmlns:a16="http://schemas.microsoft.com/office/drawing/2014/main" id="{015B540F-D434-49BA-A743-613AC165E553}"/>
               </a:ext>
             </a:extLst>
           </p:cNvPr>
@@ -35749,7 +35749,7 @@
           <p:cNvPr id="3" name="">
             <a:extLst xmlns:a="http://schemas.openxmlformats.org/drawingml/2006/main">
               <a:ext uri="{FF2B5EF4-FFF2-40B4-BE49-F238E27FC236}">
-                <a16:creationId xmlns:a16="http://schemas.microsoft.com/office/drawing/2014/main" id="{86FCD461-41C7-4F92-8355-B5AC89F281C6}"/>
+                <a16:creationId xmlns:a16="http://schemas.microsoft.com/office/drawing/2014/main" id="{A28DF54E-AE7C-4782-BB89-BB6492CD5202}"/>
               </a:ext>
             </a:extLst>
           </p:cNvPr>
@@ -35801,7 +35801,7 @@
           <p:cNvPr id="4" name="">
             <a:extLst xmlns:a="http://schemas.openxmlformats.org/drawingml/2006/main">
               <a:ext uri="{FF2B5EF4-FFF2-40B4-BE49-F238E27FC236}">
-                <a16:creationId xmlns:a16="http://schemas.microsoft.com/office/drawing/2014/main" id="{56F47EE4-3F2E-430B-B092-23D2C6926462}"/>
+                <a16:creationId xmlns:a16="http://schemas.microsoft.com/office/drawing/2014/main" id="{0BA9E113-EA0E-4DFE-A970-74DEF02CBBB9}"/>
               </a:ext>
             </a:extLst>
           </p:cNvPr>
@@ -35853,7 +35853,7 @@
           <p:cNvPr id="5" name="">
             <a:extLst xmlns:a="http://schemas.openxmlformats.org/drawingml/2006/main">
               <a:ext uri="{FF2B5EF4-FFF2-40B4-BE49-F238E27FC236}">
-                <a16:creationId xmlns:a16="http://schemas.microsoft.com/office/drawing/2014/main" id="{C4036210-3FD3-4687-BDFF-63754E2A13CD}"/>
+                <a16:creationId xmlns:a16="http://schemas.microsoft.com/office/drawing/2014/main" id="{735DFA4E-2064-48CA-984E-4B50707A0AD7}"/>
               </a:ext>
             </a:extLst>
           </p:cNvPr>
@@ -35888,7 +35888,7 @@
           <p:nvPr/>
         </p:nvPicPr>
         <p:blipFill>
-          <a:blip xmlns:r="http://schemas.openxmlformats.org/officeDocument/2006/relationships" xmlns:a="http://schemas.openxmlformats.org/drawingml/2006/main" r:embed="R5c3c944f99a74348"/>
+          <a:blip xmlns:r="http://schemas.openxmlformats.org/officeDocument/2006/relationships" xmlns:a="http://schemas.openxmlformats.org/drawingml/2006/main" r:embed="Raa380a33e2874b82"/>
           <a:stretch xmlns:a="http://schemas.openxmlformats.org/drawingml/2006/main"/>
         </p:blipFill>
         <p:spPr>
@@ -35906,7 +35906,7 @@
           <p:cNvPr id="7" name="">
             <a:extLst xmlns:a="http://schemas.openxmlformats.org/drawingml/2006/main">
               <a:ext uri="{FF2B5EF4-FFF2-40B4-BE49-F238E27FC236}">
-                <a16:creationId xmlns:a16="http://schemas.microsoft.com/office/drawing/2014/main" id="{96AFF91D-ACA8-4FF6-ABDD-EC2B5F49889C}"/>
+                <a16:creationId xmlns:a16="http://schemas.microsoft.com/office/drawing/2014/main" id="{9A7F1665-2EBB-4B79-AE61-BF7FA96E9683}"/>
               </a:ext>
             </a:extLst>
           </p:cNvPr>
@@ -35958,7 +35958,7 @@
           <p:cNvPr id="8" name="">
             <a:extLst xmlns:a="http://schemas.openxmlformats.org/drawingml/2006/main">
               <a:ext uri="{FF2B5EF4-FFF2-40B4-BE49-F238E27FC236}">
-                <a16:creationId xmlns:a16="http://schemas.microsoft.com/office/drawing/2014/main" id="{F5F8CEC3-C519-4C28-B32D-6125DBFAB0C2}"/>
+                <a16:creationId xmlns:a16="http://schemas.microsoft.com/office/drawing/2014/main" id="{50265662-E9E9-4F5B-A7F6-30F01E930A5E}"/>
               </a:ext>
             </a:extLst>
           </p:cNvPr>
@@ -36010,7 +36010,7 @@
           <p:cNvPr id="9" name="">
             <a:extLst xmlns:a="http://schemas.openxmlformats.org/drawingml/2006/main">
               <a:ext uri="{FF2B5EF4-FFF2-40B4-BE49-F238E27FC236}">
-                <a16:creationId xmlns:a16="http://schemas.microsoft.com/office/drawing/2014/main" id="{CCA037FB-0142-4C4C-9F13-8976663BE351}"/>
+                <a16:creationId xmlns:a16="http://schemas.microsoft.com/office/drawing/2014/main" id="{B05F2A3E-C30C-4E51-AE01-8F26343424DA}"/>
               </a:ext>
             </a:extLst>
           </p:cNvPr>
@@ -36062,7 +36062,7 @@
           <p:cNvPr id="10" name="">
             <a:extLst xmlns:a="http://schemas.openxmlformats.org/drawingml/2006/main">
               <a:ext uri="{FF2B5EF4-FFF2-40B4-BE49-F238E27FC236}">
-                <a16:creationId xmlns:a16="http://schemas.microsoft.com/office/drawing/2014/main" id="{D05A789A-684D-49A7-826C-8C73C92410F0}"/>
+                <a16:creationId xmlns:a16="http://schemas.microsoft.com/office/drawing/2014/main" id="{9CEE9718-76A9-4E51-BD00-E992E52C824D}"/>
               </a:ext>
             </a:extLst>
           </p:cNvPr>
@@ -36114,7 +36114,7 @@
           <p:cNvPr id="11" name="">
             <a:extLst xmlns:a="http://schemas.openxmlformats.org/drawingml/2006/main">
               <a:ext uri="{FF2B5EF4-FFF2-40B4-BE49-F238E27FC236}">
-                <a16:creationId xmlns:a16="http://schemas.microsoft.com/office/drawing/2014/main" id="{CABA577F-BD09-4FEE-9855-EF728A05EF4A}"/>
+                <a16:creationId xmlns:a16="http://schemas.microsoft.com/office/drawing/2014/main" id="{698742D3-2659-4582-8A18-4A88053EF93C}"/>
               </a:ext>
             </a:extLst>
           </p:cNvPr>
@@ -36161,10 +36161,10 @@
           <p:nvPr/>
         </p:nvPicPr>
         <p:blipFill>
-          <a:blip xmlns:r="http://schemas.openxmlformats.org/officeDocument/2006/relationships" xmlns:a="http://schemas.openxmlformats.org/drawingml/2006/main" r:embed="Ra688c33389b34bbc">
+          <a:blip xmlns:r="http://schemas.openxmlformats.org/officeDocument/2006/relationships" xmlns:a="http://schemas.openxmlformats.org/drawingml/2006/main" r:embed="R103facaf65fd4b16">
             <a:extLst>
               <a:ext uri="{96DAC541-7B7A-43D3-8B79-37D633B846F1}">
-                <asvg:svgBlip xmlns:asvg="http://schemas.microsoft.com/office/drawing/2016/SVG/main" r:embed="R22e7b691073a4d36"/>
+                <asvg:svgBlip xmlns:asvg="http://schemas.microsoft.com/office/drawing/2016/SVG/main" r:embed="Rab0a2fd58bcf4cdd"/>
               </a:ext>
             </a:extLst>
           </a:blip>
@@ -36185,7 +36185,7 @@
           <p:cNvPr id="13" name="">
             <a:extLst xmlns:a="http://schemas.openxmlformats.org/drawingml/2006/main">
               <a:ext uri="{FF2B5EF4-FFF2-40B4-BE49-F238E27FC236}">
-                <a16:creationId xmlns:a16="http://schemas.microsoft.com/office/drawing/2014/main" id="{1008227F-E98E-415E-B34C-7A92B5003A3B}"/>
+                <a16:creationId xmlns:a16="http://schemas.microsoft.com/office/drawing/2014/main" id="{F0BF8B8C-8063-4425-AAAF-810CEC55121F}"/>
               </a:ext>
             </a:extLst>
           </p:cNvPr>
@@ -36218,7 +36218,7 @@
           <p:cNvPr id="14" name="">
             <a:extLst xmlns:a="http://schemas.openxmlformats.org/drawingml/2006/main">
               <a:ext uri="{FF2B5EF4-FFF2-40B4-BE49-F238E27FC236}">
-                <a16:creationId xmlns:a16="http://schemas.microsoft.com/office/drawing/2014/main" id="{6EEE251B-8671-4FE1-B317-AB2BC47C7369}"/>
+                <a16:creationId xmlns:a16="http://schemas.microsoft.com/office/drawing/2014/main" id="{89AB47AD-A351-498D-81D4-28BAEFE1A72C}"/>
               </a:ext>
             </a:extLst>
           </p:cNvPr>
@@ -36270,7 +36270,7 @@
           <p:cNvPr id="15" name="">
             <a:extLst xmlns:a="http://schemas.openxmlformats.org/drawingml/2006/main">
               <a:ext uri="{FF2B5EF4-FFF2-40B4-BE49-F238E27FC236}">
-                <a16:creationId xmlns:a16="http://schemas.microsoft.com/office/drawing/2014/main" id="{F39BCD3D-C39F-4ABC-A063-6E1EAB296A00}"/>
+                <a16:creationId xmlns:a16="http://schemas.microsoft.com/office/drawing/2014/main" id="{57B309B2-AFDA-44DB-A8F8-42B8842A3767}"/>
               </a:ext>
             </a:extLst>
           </p:cNvPr>
@@ -36303,7 +36303,7 @@
           <p:cNvPr id="16" name="">
             <a:extLst xmlns:a="http://schemas.openxmlformats.org/drawingml/2006/main">
               <a:ext uri="{FF2B5EF4-FFF2-40B4-BE49-F238E27FC236}">
-                <a16:creationId xmlns:a16="http://schemas.microsoft.com/office/drawing/2014/main" id="{EA0B4D9B-81E4-4BB3-9E1D-15D9084F5290}"/>
+                <a16:creationId xmlns:a16="http://schemas.microsoft.com/office/drawing/2014/main" id="{42F04ABD-9ADA-441A-9C26-DC111EB7447E}"/>
               </a:ext>
             </a:extLst>
           </p:cNvPr>
@@ -36355,7 +36355,7 @@
           <p:cNvPr id="17" name="">
             <a:extLst xmlns:a="http://schemas.openxmlformats.org/drawingml/2006/main">
               <a:ext uri="{FF2B5EF4-FFF2-40B4-BE49-F238E27FC236}">
-                <a16:creationId xmlns:a16="http://schemas.microsoft.com/office/drawing/2014/main" id="{F6A8C1A9-41B5-4148-9B5E-FE9F6278AD6E}"/>
+                <a16:creationId xmlns:a16="http://schemas.microsoft.com/office/drawing/2014/main" id="{F488DBD1-B0D9-45BC-8934-4BC1C273838F}"/>
               </a:ext>
             </a:extLst>
           </p:cNvPr>
@@ -36386,7 +36386,7 @@
           <p:cNvPr id="18" name="">
             <a:extLst xmlns:a="http://schemas.openxmlformats.org/drawingml/2006/main">
               <a:ext uri="{FF2B5EF4-FFF2-40B4-BE49-F238E27FC236}">
-                <a16:creationId xmlns:a16="http://schemas.microsoft.com/office/drawing/2014/main" id="{46FBE26C-AD3C-41DC-BCAF-B75DA7A1834A}"/>
+                <a16:creationId xmlns:a16="http://schemas.microsoft.com/office/drawing/2014/main" id="{FB5FF794-F833-4645-9894-A96D86242D14}"/>
               </a:ext>
             </a:extLst>
           </p:cNvPr>
@@ -36417,7 +36417,7 @@
           <p:cNvPr id="19" name="">
             <a:extLst xmlns:a="http://schemas.openxmlformats.org/drawingml/2006/main">
               <a:ext uri="{FF2B5EF4-FFF2-40B4-BE49-F238E27FC236}">
-                <a16:creationId xmlns:a16="http://schemas.microsoft.com/office/drawing/2014/main" id="{579ECA2F-BCC6-4BB5-A2D2-9C58E2960A84}"/>
+                <a16:creationId xmlns:a16="http://schemas.microsoft.com/office/drawing/2014/main" id="{2621A6D2-B044-4E3D-85F4-2CA77BB43F5A}"/>
               </a:ext>
             </a:extLst>
           </p:cNvPr>
@@ -36469,7 +36469,7 @@
           <p:cNvPr id="20" name="">
             <a:extLst xmlns:a="http://schemas.openxmlformats.org/drawingml/2006/main">
               <a:ext uri="{FF2B5EF4-FFF2-40B4-BE49-F238E27FC236}">
-                <a16:creationId xmlns:a16="http://schemas.microsoft.com/office/drawing/2014/main" id="{1587F1F5-B4A3-40F5-9D69-CD7F114B51CA}"/>
+                <a16:creationId xmlns:a16="http://schemas.microsoft.com/office/drawing/2014/main" id="{465370D7-6201-4851-A4BC-30E4BE9D8E75}"/>
               </a:ext>
             </a:extLst>
           </p:cNvPr>
@@ -36500,7 +36500,7 @@
           <p:cNvPr id="21" name="">
             <a:extLst xmlns:a="http://schemas.openxmlformats.org/drawingml/2006/main">
               <a:ext uri="{FF2B5EF4-FFF2-40B4-BE49-F238E27FC236}">
-                <a16:creationId xmlns:a16="http://schemas.microsoft.com/office/drawing/2014/main" id="{C4327EB0-A79E-4B28-9B46-E4DB86AD4E82}"/>
+                <a16:creationId xmlns:a16="http://schemas.microsoft.com/office/drawing/2014/main" id="{E677DFCA-B9F1-4759-A6B3-924DD357E70A}"/>
               </a:ext>
             </a:extLst>
           </p:cNvPr>
@@ -36552,7 +36552,7 @@
           <p:cNvPr id="22" name="">
             <a:extLst xmlns:a="http://schemas.openxmlformats.org/drawingml/2006/main">
               <a:ext uri="{FF2B5EF4-FFF2-40B4-BE49-F238E27FC236}">
-                <a16:creationId xmlns:a16="http://schemas.microsoft.com/office/drawing/2014/main" id="{6D0C74E5-CC06-464C-8522-F42FB02DE6D4}"/>
+                <a16:creationId xmlns:a16="http://schemas.microsoft.com/office/drawing/2014/main" id="{48F913ED-0216-4DAD-80D1-C1726DF160FE}"/>
               </a:ext>
             </a:extLst>
           </p:cNvPr>
@@ -36604,7 +36604,7 @@
           <p:cNvPr id="23" name="">
             <a:extLst xmlns:a="http://schemas.openxmlformats.org/drawingml/2006/main">
               <a:ext uri="{FF2B5EF4-FFF2-40B4-BE49-F238E27FC236}">
-                <a16:creationId xmlns:a16="http://schemas.microsoft.com/office/drawing/2014/main" id="{F94725FD-90A9-4F6E-8770-0B8B5B126F30}"/>
+                <a16:creationId xmlns:a16="http://schemas.microsoft.com/office/drawing/2014/main" id="{421D6987-8645-44B0-A15D-963C857159BB}"/>
               </a:ext>
             </a:extLst>
           </p:cNvPr>
@@ -36656,7 +36656,7 @@
           <p:cNvPr id="24" name="">
             <a:extLst xmlns:a="http://schemas.openxmlformats.org/drawingml/2006/main">
               <a:ext uri="{FF2B5EF4-FFF2-40B4-BE49-F238E27FC236}">
-                <a16:creationId xmlns:a16="http://schemas.microsoft.com/office/drawing/2014/main" id="{DE8887EC-0568-4283-B001-E31462955813}"/>
+                <a16:creationId xmlns:a16="http://schemas.microsoft.com/office/drawing/2014/main" id="{F025A337-C31B-43B4-85AF-2C870662276F}"/>
               </a:ext>
             </a:extLst>
           </p:cNvPr>
@@ -36708,7 +36708,7 @@
           <p:cNvPr id="25" name="">
             <a:extLst xmlns:a="http://schemas.openxmlformats.org/drawingml/2006/main">
               <a:ext uri="{FF2B5EF4-FFF2-40B4-BE49-F238E27FC236}">
-                <a16:creationId xmlns:a16="http://schemas.microsoft.com/office/drawing/2014/main" id="{19A31498-3964-4E6E-B116-FBEED890B3A3}"/>
+                <a16:creationId xmlns:a16="http://schemas.microsoft.com/office/drawing/2014/main" id="{A9BEE368-4A4A-4273-9673-066B7030B74A}"/>
               </a:ext>
             </a:extLst>
           </p:cNvPr>
@@ -36760,7 +36760,7 @@
           <p:cNvPr id="26" name="">
             <a:extLst xmlns:a="http://schemas.openxmlformats.org/drawingml/2006/main">
               <a:ext uri="{FF2B5EF4-FFF2-40B4-BE49-F238E27FC236}">
-                <a16:creationId xmlns:a16="http://schemas.microsoft.com/office/drawing/2014/main" id="{BFAB886E-CAFC-4120-A195-56AE2BEB5255}"/>
+                <a16:creationId xmlns:a16="http://schemas.microsoft.com/office/drawing/2014/main" id="{DE855414-66DE-4405-9E4D-AA10BCA58EC5}"/>
               </a:ext>
             </a:extLst>
           </p:cNvPr>
@@ -36810,7 +36810,7 @@
     </p:spTree>
     <p:extLst>
       <p:ext uri="{BB962C8B-B14F-4D97-AF65-F5344CB8AC3E}">
-        <p14:creationId xmlns:p14="http://schemas.microsoft.com/office/powerpoint/2010/main" val="1858808095"/>
+        <p14:creationId xmlns:p14="http://schemas.microsoft.com/office/powerpoint/2010/main" val="1257352625"/>
       </p:ext>
     </p:extLst>
   </p:cSld>
@@ -36841,7 +36841,7 @@
           <p:cNvPr id="27" name="">
             <a:extLst xmlns:a="http://schemas.openxmlformats.org/drawingml/2006/main">
               <a:ext uri="{FF2B5EF4-FFF2-40B4-BE49-F238E27FC236}">
-                <a16:creationId xmlns:a16="http://schemas.microsoft.com/office/drawing/2014/main" id="{51F7728A-1DA8-4D86-99DF-699ED07FF1A2}"/>
+                <a16:creationId xmlns:a16="http://schemas.microsoft.com/office/drawing/2014/main" id="{02D8778D-5616-43FB-8720-A58F5843AA8D}"/>
               </a:ext>
             </a:extLst>
           </p:cNvPr>
@@ -36874,7 +36874,7 @@
           <p:cNvPr id="2" name="">
             <a:extLst xmlns:a="http://schemas.openxmlformats.org/drawingml/2006/main">
               <a:ext uri="{FF2B5EF4-FFF2-40B4-BE49-F238E27FC236}">
-                <a16:creationId xmlns:a16="http://schemas.microsoft.com/office/drawing/2014/main" id="{7768BE8E-8FD5-4381-AA20-574A3845BB51}"/>
+                <a16:creationId xmlns:a16="http://schemas.microsoft.com/office/drawing/2014/main" id="{C6553787-2887-48DD-A6D3-1EECBE1A9F3F}"/>
               </a:ext>
             </a:extLst>
           </p:cNvPr>
@@ -36905,7 +36905,7 @@
           <p:cNvPr id="3" name="">
             <a:extLst xmlns:a="http://schemas.openxmlformats.org/drawingml/2006/main">
               <a:ext uri="{FF2B5EF4-FFF2-40B4-BE49-F238E27FC236}">
-                <a16:creationId xmlns:a16="http://schemas.microsoft.com/office/drawing/2014/main" id="{BCCE70A8-720A-4C05-8DF9-6301F85126D3}"/>
+                <a16:creationId xmlns:a16="http://schemas.microsoft.com/office/drawing/2014/main" id="{CF0A6F32-5161-46D9-9F28-64016C5810AC}"/>
               </a:ext>
             </a:extLst>
           </p:cNvPr>
@@ -36957,7 +36957,7 @@
           <p:cNvPr id="4" name="">
             <a:extLst xmlns:a="http://schemas.openxmlformats.org/drawingml/2006/main">
               <a:ext uri="{FF2B5EF4-FFF2-40B4-BE49-F238E27FC236}">
-                <a16:creationId xmlns:a16="http://schemas.microsoft.com/office/drawing/2014/main" id="{960279DF-3B16-4736-8A60-1704400DDE91}"/>
+                <a16:creationId xmlns:a16="http://schemas.microsoft.com/office/drawing/2014/main" id="{7F2CABB3-BA6A-4399-8CB0-66B630DFEE15}"/>
               </a:ext>
             </a:extLst>
           </p:cNvPr>
@@ -37009,7 +37009,7 @@
           <p:cNvPr id="5" name="">
             <a:extLst xmlns:a="http://schemas.openxmlformats.org/drawingml/2006/main">
               <a:ext uri="{FF2B5EF4-FFF2-40B4-BE49-F238E27FC236}">
-                <a16:creationId xmlns:a16="http://schemas.microsoft.com/office/drawing/2014/main" id="{D20A90A2-7011-4585-8CF8-DC7F6AAA9E98}"/>
+                <a16:creationId xmlns:a16="http://schemas.microsoft.com/office/drawing/2014/main" id="{11D627C5-7AD0-48D5-BAF1-E557B78D772F}"/>
               </a:ext>
             </a:extLst>
           </p:cNvPr>
@@ -37044,7 +37044,7 @@
           <p:nvPr/>
         </p:nvPicPr>
         <p:blipFill>
-          <a:blip xmlns:r="http://schemas.openxmlformats.org/officeDocument/2006/relationships" xmlns:a="http://schemas.openxmlformats.org/drawingml/2006/main" r:embed="R9d1f99b09c3a4a6d"/>
+          <a:blip xmlns:r="http://schemas.openxmlformats.org/officeDocument/2006/relationships" xmlns:a="http://schemas.openxmlformats.org/drawingml/2006/main" r:embed="Rf2c695228fae4fd6"/>
           <a:stretch xmlns:a="http://schemas.openxmlformats.org/drawingml/2006/main"/>
         </p:blipFill>
         <p:spPr>
@@ -37062,7 +37062,7 @@
           <p:cNvPr id="7" name="">
             <a:extLst xmlns:a="http://schemas.openxmlformats.org/drawingml/2006/main">
               <a:ext uri="{FF2B5EF4-FFF2-40B4-BE49-F238E27FC236}">
-                <a16:creationId xmlns:a16="http://schemas.microsoft.com/office/drawing/2014/main" id="{6C82B08B-EAE2-4B39-9F97-28A4A38CDBC1}"/>
+                <a16:creationId xmlns:a16="http://schemas.microsoft.com/office/drawing/2014/main" id="{D34B65D1-4B8F-4AC0-AD47-1D420D44DD02}"/>
               </a:ext>
             </a:extLst>
           </p:cNvPr>
@@ -37114,7 +37114,7 @@
           <p:cNvPr id="8" name="">
             <a:extLst xmlns:a="http://schemas.openxmlformats.org/drawingml/2006/main">
               <a:ext uri="{FF2B5EF4-FFF2-40B4-BE49-F238E27FC236}">
-                <a16:creationId xmlns:a16="http://schemas.microsoft.com/office/drawing/2014/main" id="{187B5ADC-584D-47C8-8073-B70DA4F83369}"/>
+                <a16:creationId xmlns:a16="http://schemas.microsoft.com/office/drawing/2014/main" id="{B8AE533B-DB37-4D23-9BD8-A940501EA883}"/>
               </a:ext>
             </a:extLst>
           </p:cNvPr>
@@ -37166,7 +37166,7 @@
           <p:cNvPr id="9" name="">
             <a:extLst xmlns:a="http://schemas.openxmlformats.org/drawingml/2006/main">
               <a:ext uri="{FF2B5EF4-FFF2-40B4-BE49-F238E27FC236}">
-                <a16:creationId xmlns:a16="http://schemas.microsoft.com/office/drawing/2014/main" id="{CF4A60BB-2DCF-430F-8F27-CF1AF1FAD3C7}"/>
+                <a16:creationId xmlns:a16="http://schemas.microsoft.com/office/drawing/2014/main" id="{974F1591-25CF-42C3-9240-259B5E013F5D}"/>
               </a:ext>
             </a:extLst>
           </p:cNvPr>
@@ -37218,7 +37218,7 @@
           <p:cNvPr id="10" name="">
             <a:extLst xmlns:a="http://schemas.openxmlformats.org/drawingml/2006/main">
               <a:ext uri="{FF2B5EF4-FFF2-40B4-BE49-F238E27FC236}">
-                <a16:creationId xmlns:a16="http://schemas.microsoft.com/office/drawing/2014/main" id="{EB9523F0-0385-4D86-A8FB-4FC8E720A83D}"/>
+                <a16:creationId xmlns:a16="http://schemas.microsoft.com/office/drawing/2014/main" id="{0AE613D9-F7CF-4617-B034-18E7CD58DF4D}"/>
               </a:ext>
             </a:extLst>
           </p:cNvPr>
@@ -37270,7 +37270,7 @@
           <p:cNvPr id="11" name="">
             <a:extLst xmlns:a="http://schemas.openxmlformats.org/drawingml/2006/main">
               <a:ext uri="{FF2B5EF4-FFF2-40B4-BE49-F238E27FC236}">
-                <a16:creationId xmlns:a16="http://schemas.microsoft.com/office/drawing/2014/main" id="{C39F41DE-016C-4427-AB79-8237FA1D89A1}"/>
+                <a16:creationId xmlns:a16="http://schemas.microsoft.com/office/drawing/2014/main" id="{A4533944-FAB6-4D99-BEF5-65569BBD859F}"/>
               </a:ext>
             </a:extLst>
           </p:cNvPr>
@@ -37317,10 +37317,10 @@
           <p:nvPr/>
         </p:nvPicPr>
         <p:blipFill>
-          <a:blip xmlns:r="http://schemas.openxmlformats.org/officeDocument/2006/relationships" xmlns:a="http://schemas.openxmlformats.org/drawingml/2006/main" r:embed="R3fecb8b013ec4d50">
+          <a:blip xmlns:r="http://schemas.openxmlformats.org/officeDocument/2006/relationships" xmlns:a="http://schemas.openxmlformats.org/drawingml/2006/main" r:embed="Re89161b7025b4f00">
             <a:extLst>
               <a:ext uri="{96DAC541-7B7A-43D3-8B79-37D633B846F1}">
-                <asvg:svgBlip xmlns:asvg="http://schemas.microsoft.com/office/drawing/2016/SVG/main" r:embed="R529cc96f74f44048"/>
+                <asvg:svgBlip xmlns:asvg="http://schemas.microsoft.com/office/drawing/2016/SVG/main" r:embed="R54290daf94204579"/>
               </a:ext>
             </a:extLst>
           </a:blip>
@@ -37341,7 +37341,7 @@
           <p:cNvPr id="13" name="">
             <a:extLst xmlns:a="http://schemas.openxmlformats.org/drawingml/2006/main">
               <a:ext uri="{FF2B5EF4-FFF2-40B4-BE49-F238E27FC236}">
-                <a16:creationId xmlns:a16="http://schemas.microsoft.com/office/drawing/2014/main" id="{6A43349C-AE55-44B8-9B98-B75FEB5A12E4}"/>
+                <a16:creationId xmlns:a16="http://schemas.microsoft.com/office/drawing/2014/main" id="{D163C149-8056-4084-83A6-81196FDF5AAF}"/>
               </a:ext>
             </a:extLst>
           </p:cNvPr>
@@ -37374,7 +37374,7 @@
           <p:cNvPr id="14" name="">
             <a:extLst xmlns:a="http://schemas.openxmlformats.org/drawingml/2006/main">
               <a:ext uri="{FF2B5EF4-FFF2-40B4-BE49-F238E27FC236}">
-                <a16:creationId xmlns:a16="http://schemas.microsoft.com/office/drawing/2014/main" id="{69653D05-77D4-4E73-B1EC-926C16472F04}"/>
+                <a16:creationId xmlns:a16="http://schemas.microsoft.com/office/drawing/2014/main" id="{0FD6DB84-CD4A-4C57-9BF4-67BC87DB5B07}"/>
               </a:ext>
             </a:extLst>
           </p:cNvPr>
@@ -37426,7 +37426,7 @@
           <p:cNvPr id="15" name="">
             <a:extLst xmlns:a="http://schemas.openxmlformats.org/drawingml/2006/main">
               <a:ext uri="{FF2B5EF4-FFF2-40B4-BE49-F238E27FC236}">
-                <a16:creationId xmlns:a16="http://schemas.microsoft.com/office/drawing/2014/main" id="{663B597F-1A2A-4FD8-B185-2A0C5B45EFBF}"/>
+                <a16:creationId xmlns:a16="http://schemas.microsoft.com/office/drawing/2014/main" id="{456F4998-12D7-4677-A914-5F9E27AB765F}"/>
               </a:ext>
             </a:extLst>
           </p:cNvPr>
@@ -37459,7 +37459,7 @@
           <p:cNvPr id="16" name="">
             <a:extLst xmlns:a="http://schemas.openxmlformats.org/drawingml/2006/main">
               <a:ext uri="{FF2B5EF4-FFF2-40B4-BE49-F238E27FC236}">
-                <a16:creationId xmlns:a16="http://schemas.microsoft.com/office/drawing/2014/main" id="{590D2930-BE1C-4FFD-955B-4B5C153F9470}"/>
+                <a16:creationId xmlns:a16="http://schemas.microsoft.com/office/drawing/2014/main" id="{CE8DD3EF-3A43-484A-8B6E-263BF9E70ACB}"/>
               </a:ext>
             </a:extLst>
           </p:cNvPr>
@@ -37511,7 +37511,7 @@
           <p:cNvPr id="17" name="">
             <a:extLst xmlns:a="http://schemas.openxmlformats.org/drawingml/2006/main">
               <a:ext uri="{FF2B5EF4-FFF2-40B4-BE49-F238E27FC236}">
-                <a16:creationId xmlns:a16="http://schemas.microsoft.com/office/drawing/2014/main" id="{4CBDBEA6-AD26-413B-86D3-D02613012355}"/>
+                <a16:creationId xmlns:a16="http://schemas.microsoft.com/office/drawing/2014/main" id="{B0137E7D-C05A-4A30-8787-32F30C0AB9FA}"/>
               </a:ext>
             </a:extLst>
           </p:cNvPr>
@@ -37544,7 +37544,7 @@
           <p:cNvPr id="18" name="">
             <a:extLst xmlns:a="http://schemas.openxmlformats.org/drawingml/2006/main">
               <a:ext uri="{FF2B5EF4-FFF2-40B4-BE49-F238E27FC236}">
-                <a16:creationId xmlns:a16="http://schemas.microsoft.com/office/drawing/2014/main" id="{BAE46667-F9F8-4F8C-86C1-642861301053}"/>
+                <a16:creationId xmlns:a16="http://schemas.microsoft.com/office/drawing/2014/main" id="{FB510F8C-A908-4E6B-9BF7-3A05C139383C}"/>
               </a:ext>
             </a:extLst>
           </p:cNvPr>
@@ -37596,7 +37596,7 @@
           <p:cNvPr id="19" name="">
             <a:extLst xmlns:a="http://schemas.openxmlformats.org/drawingml/2006/main">
               <a:ext uri="{FF2B5EF4-FFF2-40B4-BE49-F238E27FC236}">
-                <a16:creationId xmlns:a16="http://schemas.microsoft.com/office/drawing/2014/main" id="{07CE1914-D752-4128-9B8F-A5E58253892B}"/>
+                <a16:creationId xmlns:a16="http://schemas.microsoft.com/office/drawing/2014/main" id="{60C2A7E1-E4F1-457A-97E0-52203D6DD60A}"/>
               </a:ext>
             </a:extLst>
           </p:cNvPr>
@@ -37648,7 +37648,7 @@
           <p:cNvPr id="20" name="">
             <a:extLst xmlns:a="http://schemas.openxmlformats.org/drawingml/2006/main">
               <a:ext uri="{FF2B5EF4-FFF2-40B4-BE49-F238E27FC236}">
-                <a16:creationId xmlns:a16="http://schemas.microsoft.com/office/drawing/2014/main" id="{F88541A5-C237-4AFB-A989-64E2F0FCCB77}"/>
+                <a16:creationId xmlns:a16="http://schemas.microsoft.com/office/drawing/2014/main" id="{4FE46C2A-E6E9-4527-A30B-1741A4C35FB1}"/>
               </a:ext>
             </a:extLst>
           </p:cNvPr>
@@ -37679,7 +37679,7 @@
           <p:cNvPr id="21" name="">
             <a:extLst xmlns:a="http://schemas.openxmlformats.org/drawingml/2006/main">
               <a:ext uri="{FF2B5EF4-FFF2-40B4-BE49-F238E27FC236}">
-                <a16:creationId xmlns:a16="http://schemas.microsoft.com/office/drawing/2014/main" id="{0FBB7E84-C622-48C2-8238-394D99B350DC}"/>
+                <a16:creationId xmlns:a16="http://schemas.microsoft.com/office/drawing/2014/main" id="{4FA924E6-962F-42D0-A76D-D66CB8A71178}"/>
               </a:ext>
             </a:extLst>
           </p:cNvPr>
@@ -37731,7 +37731,7 @@
           <p:cNvPr id="22" name="">
             <a:extLst xmlns:a="http://schemas.openxmlformats.org/drawingml/2006/main">
               <a:ext uri="{FF2B5EF4-FFF2-40B4-BE49-F238E27FC236}">
-                <a16:creationId xmlns:a16="http://schemas.microsoft.com/office/drawing/2014/main" id="{A432FC7A-B5E1-4459-BA02-36D23A82FE1A}"/>
+                <a16:creationId xmlns:a16="http://schemas.microsoft.com/office/drawing/2014/main" id="{14053360-3799-4645-BC2B-48290DCEEA02}"/>
               </a:ext>
             </a:extLst>
           </p:cNvPr>
@@ -37783,7 +37783,7 @@
           <p:cNvPr id="23" name="">
             <a:extLst xmlns:a="http://schemas.openxmlformats.org/drawingml/2006/main">
               <a:ext uri="{FF2B5EF4-FFF2-40B4-BE49-F238E27FC236}">
-                <a16:creationId xmlns:a16="http://schemas.microsoft.com/office/drawing/2014/main" id="{76AB4DBB-E7F3-4BA0-8292-A37DE99DF429}"/>
+                <a16:creationId xmlns:a16="http://schemas.microsoft.com/office/drawing/2014/main" id="{FC3AA3F8-7340-4E4E-A092-8BB5FBD4FC7A}"/>
               </a:ext>
             </a:extLst>
           </p:cNvPr>
@@ -37835,7 +37835,7 @@
           <p:cNvPr id="24" name="">
             <a:extLst xmlns:a="http://schemas.openxmlformats.org/drawingml/2006/main">
               <a:ext uri="{FF2B5EF4-FFF2-40B4-BE49-F238E27FC236}">
-                <a16:creationId xmlns:a16="http://schemas.microsoft.com/office/drawing/2014/main" id="{3262B3CD-72F5-4B9D-981C-0E4C04C611D5}"/>
+                <a16:creationId xmlns:a16="http://schemas.microsoft.com/office/drawing/2014/main" id="{B870A188-FEEE-49F9-BBBE-C8D82475C97A}"/>
               </a:ext>
             </a:extLst>
           </p:cNvPr>
@@ -37887,7 +37887,7 @@
           <p:cNvPr id="25" name="">
             <a:extLst xmlns:a="http://schemas.openxmlformats.org/drawingml/2006/main">
               <a:ext uri="{FF2B5EF4-FFF2-40B4-BE49-F238E27FC236}">
-                <a16:creationId xmlns:a16="http://schemas.microsoft.com/office/drawing/2014/main" id="{D6F18D78-9752-49B4-BE58-49BE7693F826}"/>
+                <a16:creationId xmlns:a16="http://schemas.microsoft.com/office/drawing/2014/main" id="{35FE7472-93CB-4E42-B4DC-C7E825CE1BBA}"/>
               </a:ext>
             </a:extLst>
           </p:cNvPr>
@@ -37939,7 +37939,7 @@
           <p:cNvPr id="26" name="">
             <a:extLst xmlns:a="http://schemas.openxmlformats.org/drawingml/2006/main">
               <a:ext uri="{FF2B5EF4-FFF2-40B4-BE49-F238E27FC236}">
-                <a16:creationId xmlns:a16="http://schemas.microsoft.com/office/drawing/2014/main" id="{121D6307-A93F-4299-9BA0-E230CCDA4641}"/>
+                <a16:creationId xmlns:a16="http://schemas.microsoft.com/office/drawing/2014/main" id="{08E4AC45-B76B-4C63-BA3D-2AA420962D5A}"/>
               </a:ext>
             </a:extLst>
           </p:cNvPr>
@@ -37989,7 +37989,7 @@
     </p:spTree>
     <p:extLst>
       <p:ext uri="{BB962C8B-B14F-4D97-AF65-F5344CB8AC3E}">
-        <p14:creationId xmlns:p14="http://schemas.microsoft.com/office/powerpoint/2010/main" val="241072691"/>
+        <p14:creationId xmlns:p14="http://schemas.microsoft.com/office/powerpoint/2010/main" val="992555028"/>
       </p:ext>
     </p:extLst>
   </p:cSld>
@@ -38020,7 +38020,7 @@
           <p:cNvPr id="35" name="">
             <a:extLst xmlns:a="http://schemas.openxmlformats.org/drawingml/2006/main">
               <a:ext uri="{FF2B5EF4-FFF2-40B4-BE49-F238E27FC236}">
-                <a16:creationId xmlns:a16="http://schemas.microsoft.com/office/drawing/2014/main" id="{69A6ED97-9031-4975-829A-139447A7F375}"/>
+                <a16:creationId xmlns:a16="http://schemas.microsoft.com/office/drawing/2014/main" id="{53EEE106-A0E9-4584-B9EE-41520722D688}"/>
               </a:ext>
             </a:extLst>
           </p:cNvPr>
@@ -38053,7 +38053,7 @@
           <p:cNvPr id="2" name="">
             <a:extLst xmlns:a="http://schemas.openxmlformats.org/drawingml/2006/main">
               <a:ext uri="{FF2B5EF4-FFF2-40B4-BE49-F238E27FC236}">
-                <a16:creationId xmlns:a16="http://schemas.microsoft.com/office/drawing/2014/main" id="{7A720927-5944-497A-B131-152DEC23EFA6}"/>
+                <a16:creationId xmlns:a16="http://schemas.microsoft.com/office/drawing/2014/main" id="{7659A7E5-EAE6-454B-82D3-2448323B56F3}"/>
               </a:ext>
             </a:extLst>
           </p:cNvPr>
@@ -38084,7 +38084,7 @@
           <p:cNvPr id="3" name="">
             <a:extLst xmlns:a="http://schemas.openxmlformats.org/drawingml/2006/main">
               <a:ext uri="{FF2B5EF4-FFF2-40B4-BE49-F238E27FC236}">
-                <a16:creationId xmlns:a16="http://schemas.microsoft.com/office/drawing/2014/main" id="{E1D76A27-6E4F-40CD-892C-5C9E8D1E84A9}"/>
+                <a16:creationId xmlns:a16="http://schemas.microsoft.com/office/drawing/2014/main" id="{69E8F9D5-D4BC-4ECC-A2B3-8614E32F9ADC}"/>
               </a:ext>
             </a:extLst>
           </p:cNvPr>
@@ -38136,7 +38136,7 @@
           <p:cNvPr id="4" name="">
             <a:extLst xmlns:a="http://schemas.openxmlformats.org/drawingml/2006/main">
               <a:ext uri="{FF2B5EF4-FFF2-40B4-BE49-F238E27FC236}">
-                <a16:creationId xmlns:a16="http://schemas.microsoft.com/office/drawing/2014/main" id="{312E89F9-F8D4-45AD-9E1D-BF5DDC1CC80C}"/>
+                <a16:creationId xmlns:a16="http://schemas.microsoft.com/office/drawing/2014/main" id="{25F2006D-5159-4AB8-BA66-993F42D6D4BD}"/>
               </a:ext>
             </a:extLst>
           </p:cNvPr>
@@ -38188,7 +38188,7 @@
           <p:cNvPr id="5" name="">
             <a:extLst xmlns:a="http://schemas.openxmlformats.org/drawingml/2006/main">
               <a:ext uri="{FF2B5EF4-FFF2-40B4-BE49-F238E27FC236}">
-                <a16:creationId xmlns:a16="http://schemas.microsoft.com/office/drawing/2014/main" id="{1CAC7F9C-1582-47F8-8B7C-090F448A98F2}"/>
+                <a16:creationId xmlns:a16="http://schemas.microsoft.com/office/drawing/2014/main" id="{D424154C-DB29-4FF1-A493-3639D8484E42}"/>
               </a:ext>
             </a:extLst>
           </p:cNvPr>
@@ -38223,7 +38223,7 @@
           <p:nvPr/>
         </p:nvPicPr>
         <p:blipFill>
-          <a:blip xmlns:r="http://schemas.openxmlformats.org/officeDocument/2006/relationships" xmlns:a="http://schemas.openxmlformats.org/drawingml/2006/main" r:embed="Rce3d679ff0034d2c"/>
+          <a:blip xmlns:r="http://schemas.openxmlformats.org/officeDocument/2006/relationships" xmlns:a="http://schemas.openxmlformats.org/drawingml/2006/main" r:embed="R55b1d94ea9814cce"/>
           <a:stretch xmlns:a="http://schemas.openxmlformats.org/drawingml/2006/main"/>
         </p:blipFill>
         <p:spPr>
@@ -38241,7 +38241,7 @@
           <p:cNvPr id="7" name="">
             <a:extLst xmlns:a="http://schemas.openxmlformats.org/drawingml/2006/main">
               <a:ext uri="{FF2B5EF4-FFF2-40B4-BE49-F238E27FC236}">
-                <a16:creationId xmlns:a16="http://schemas.microsoft.com/office/drawing/2014/main" id="{A3BC14B0-4830-48A9-B0DF-83B82CC55F1E}"/>
+                <a16:creationId xmlns:a16="http://schemas.microsoft.com/office/drawing/2014/main" id="{2B87CA2D-6A44-45D5-8381-55F6C9678B30}"/>
               </a:ext>
             </a:extLst>
           </p:cNvPr>
@@ -38293,7 +38293,7 @@
           <p:cNvPr id="8" name="">
             <a:extLst xmlns:a="http://schemas.openxmlformats.org/drawingml/2006/main">
               <a:ext uri="{FF2B5EF4-FFF2-40B4-BE49-F238E27FC236}">
-                <a16:creationId xmlns:a16="http://schemas.microsoft.com/office/drawing/2014/main" id="{BF5A3CCF-D29A-438C-B911-9CE68D47689E}"/>
+                <a16:creationId xmlns:a16="http://schemas.microsoft.com/office/drawing/2014/main" id="{CCBBD265-7176-42E8-916E-B9FD21FB40CF}"/>
               </a:ext>
             </a:extLst>
           </p:cNvPr>
@@ -38345,7 +38345,7 @@
           <p:cNvPr id="9" name="">
             <a:extLst xmlns:a="http://schemas.openxmlformats.org/drawingml/2006/main">
               <a:ext uri="{FF2B5EF4-FFF2-40B4-BE49-F238E27FC236}">
-                <a16:creationId xmlns:a16="http://schemas.microsoft.com/office/drawing/2014/main" id="{CA0FB1DA-3955-4682-9ABF-0597B87591D4}"/>
+                <a16:creationId xmlns:a16="http://schemas.microsoft.com/office/drawing/2014/main" id="{794A9FF3-D47E-461E-8A63-33156A8D7132}"/>
               </a:ext>
             </a:extLst>
           </p:cNvPr>
@@ -38397,7 +38397,7 @@
           <p:cNvPr id="10" name="">
             <a:extLst xmlns:a="http://schemas.openxmlformats.org/drawingml/2006/main">
               <a:ext uri="{FF2B5EF4-FFF2-40B4-BE49-F238E27FC236}">
-                <a16:creationId xmlns:a16="http://schemas.microsoft.com/office/drawing/2014/main" id="{9BAE960B-5705-498A-A65F-E9FD42F4C4CA}"/>
+                <a16:creationId xmlns:a16="http://schemas.microsoft.com/office/drawing/2014/main" id="{4B65B333-FEF6-45D5-8157-14CEB76B9015}"/>
               </a:ext>
             </a:extLst>
           </p:cNvPr>
@@ -38449,7 +38449,7 @@
           <p:cNvPr id="11" name="">
             <a:extLst xmlns:a="http://schemas.openxmlformats.org/drawingml/2006/main">
               <a:ext uri="{FF2B5EF4-FFF2-40B4-BE49-F238E27FC236}">
-                <a16:creationId xmlns:a16="http://schemas.microsoft.com/office/drawing/2014/main" id="{01AAD7BD-ECDD-4067-BE53-7503054A8CF1}"/>
+                <a16:creationId xmlns:a16="http://schemas.microsoft.com/office/drawing/2014/main" id="{69B17773-2620-415F-BAEF-98F24ED7F1F4}"/>
               </a:ext>
             </a:extLst>
           </p:cNvPr>
@@ -38496,10 +38496,10 @@
           <p:nvPr/>
         </p:nvPicPr>
         <p:blipFill>
-          <a:blip xmlns:r="http://schemas.openxmlformats.org/officeDocument/2006/relationships" xmlns:a="http://schemas.openxmlformats.org/drawingml/2006/main" r:embed="R5a2ac1975c0445dd">
+          <a:blip xmlns:r="http://schemas.openxmlformats.org/officeDocument/2006/relationships" xmlns:a="http://schemas.openxmlformats.org/drawingml/2006/main" r:embed="R57fdf701513c46b0">
             <a:extLst>
               <a:ext uri="{96DAC541-7B7A-43D3-8B79-37D633B846F1}">
-                <asvg:svgBlip xmlns:asvg="http://schemas.microsoft.com/office/drawing/2016/SVG/main" r:embed="Ra2abc38d881f42cc"/>
+                <asvg:svgBlip xmlns:asvg="http://schemas.microsoft.com/office/drawing/2016/SVG/main" r:embed="R48d283d6f5ce4baf"/>
               </a:ext>
             </a:extLst>
           </a:blip>
@@ -38520,7 +38520,7 @@
           <p:cNvPr id="13" name="">
             <a:extLst xmlns:a="http://schemas.openxmlformats.org/drawingml/2006/main">
               <a:ext uri="{FF2B5EF4-FFF2-40B4-BE49-F238E27FC236}">
-                <a16:creationId xmlns:a16="http://schemas.microsoft.com/office/drawing/2014/main" id="{87382EFD-45EA-4A6D-AD15-5F01F56941E9}"/>
+                <a16:creationId xmlns:a16="http://schemas.microsoft.com/office/drawing/2014/main" id="{EFE88803-63D2-45E3-A82E-5C08DCCD1217}"/>
               </a:ext>
             </a:extLst>
           </p:cNvPr>
@@ -38553,7 +38553,7 @@
           <p:cNvPr id="14" name="">
             <a:extLst xmlns:a="http://schemas.openxmlformats.org/drawingml/2006/main">
               <a:ext uri="{FF2B5EF4-FFF2-40B4-BE49-F238E27FC236}">
-                <a16:creationId xmlns:a16="http://schemas.microsoft.com/office/drawing/2014/main" id="{25FCDB2E-DB26-449A-903B-144D3DBAC6D2}"/>
+                <a16:creationId xmlns:a16="http://schemas.microsoft.com/office/drawing/2014/main" id="{EED58AEB-2AC6-466A-98AD-B73EBEC2C225}"/>
               </a:ext>
             </a:extLst>
           </p:cNvPr>
@@ -38605,7 +38605,7 @@
           <p:cNvPr id="15" name="">
             <a:extLst xmlns:a="http://schemas.openxmlformats.org/drawingml/2006/main">
               <a:ext uri="{FF2B5EF4-FFF2-40B4-BE49-F238E27FC236}">
-                <a16:creationId xmlns:a16="http://schemas.microsoft.com/office/drawing/2014/main" id="{45FFD24D-98A1-44D6-AF3F-5B4D8FF5CB58}"/>
+                <a16:creationId xmlns:a16="http://schemas.microsoft.com/office/drawing/2014/main" id="{7260DB5D-040D-46B3-9A95-2E0826DEC800}"/>
               </a:ext>
             </a:extLst>
           </p:cNvPr>
@@ -38638,7 +38638,7 @@
           <p:cNvPr id="16" name="">
             <a:extLst xmlns:a="http://schemas.openxmlformats.org/drawingml/2006/main">
               <a:ext uri="{FF2B5EF4-FFF2-40B4-BE49-F238E27FC236}">
-                <a16:creationId xmlns:a16="http://schemas.microsoft.com/office/drawing/2014/main" id="{10A64B08-AB36-4FAD-9E69-BFC0149F5DC5}"/>
+                <a16:creationId xmlns:a16="http://schemas.microsoft.com/office/drawing/2014/main" id="{F399EF83-2367-4B00-B9F8-A82CDF756660}"/>
               </a:ext>
             </a:extLst>
           </p:cNvPr>
@@ -38690,7 +38690,7 @@
           <p:cNvPr id="17" name="">
             <a:extLst xmlns:a="http://schemas.openxmlformats.org/drawingml/2006/main">
               <a:ext uri="{FF2B5EF4-FFF2-40B4-BE49-F238E27FC236}">
-                <a16:creationId xmlns:a16="http://schemas.microsoft.com/office/drawing/2014/main" id="{5BE3FF25-79AA-4B95-83E3-30B2D63D4266}"/>
+                <a16:creationId xmlns:a16="http://schemas.microsoft.com/office/drawing/2014/main" id="{F6F0DD53-E39D-4E8A-ACBE-4F5EACB0007E}"/>
               </a:ext>
             </a:extLst>
           </p:cNvPr>
@@ -38723,7 +38723,7 @@
           <p:cNvPr id="18" name="">
             <a:extLst xmlns:a="http://schemas.openxmlformats.org/drawingml/2006/main">
               <a:ext uri="{FF2B5EF4-FFF2-40B4-BE49-F238E27FC236}">
-                <a16:creationId xmlns:a16="http://schemas.microsoft.com/office/drawing/2014/main" id="{BDFB3EFA-FB05-4CE5-9628-A972C5E807AC}"/>
+                <a16:creationId xmlns:a16="http://schemas.microsoft.com/office/drawing/2014/main" id="{0891EDC8-8639-4295-A00F-0F253BD0E302}"/>
               </a:ext>
             </a:extLst>
           </p:cNvPr>
@@ -38775,7 +38775,7 @@
           <p:cNvPr id="19" name="">
             <a:extLst xmlns:a="http://schemas.openxmlformats.org/drawingml/2006/main">
               <a:ext uri="{FF2B5EF4-FFF2-40B4-BE49-F238E27FC236}">
-                <a16:creationId xmlns:a16="http://schemas.microsoft.com/office/drawing/2014/main" id="{46BE4120-0F79-46FA-9DCA-F1DE61A5D3D6}"/>
+                <a16:creationId xmlns:a16="http://schemas.microsoft.com/office/drawing/2014/main" id="{4F32BB68-3EF9-4A2D-950D-93AF004638D1}"/>
               </a:ext>
             </a:extLst>
           </p:cNvPr>
@@ -38808,7 +38808,7 @@
           <p:cNvPr id="20" name="">
             <a:extLst xmlns:a="http://schemas.openxmlformats.org/drawingml/2006/main">
               <a:ext uri="{FF2B5EF4-FFF2-40B4-BE49-F238E27FC236}">
-                <a16:creationId xmlns:a16="http://schemas.microsoft.com/office/drawing/2014/main" id="{A90B387A-E7D7-4CCE-919D-93C22E21C53E}"/>
+                <a16:creationId xmlns:a16="http://schemas.microsoft.com/office/drawing/2014/main" id="{470D90D6-6B98-427C-9720-E6D26A1CC4D6}"/>
               </a:ext>
             </a:extLst>
           </p:cNvPr>
@@ -38860,7 +38860,7 @@
           <p:cNvPr id="21" name="">
             <a:extLst xmlns:a="http://schemas.openxmlformats.org/drawingml/2006/main">
               <a:ext uri="{FF2B5EF4-FFF2-40B4-BE49-F238E27FC236}">
-                <a16:creationId xmlns:a16="http://schemas.microsoft.com/office/drawing/2014/main" id="{401D0989-7537-4176-8607-90DAF3FFA4EF}"/>
+                <a16:creationId xmlns:a16="http://schemas.microsoft.com/office/drawing/2014/main" id="{77ACE0E1-7F70-459F-8973-57316AFB1204}"/>
               </a:ext>
             </a:extLst>
           </p:cNvPr>
@@ -38893,7 +38893,7 @@
           <p:cNvPr id="22" name="">
             <a:extLst xmlns:a="http://schemas.openxmlformats.org/drawingml/2006/main">
               <a:ext uri="{FF2B5EF4-FFF2-40B4-BE49-F238E27FC236}">
-                <a16:creationId xmlns:a16="http://schemas.microsoft.com/office/drawing/2014/main" id="{040D17C2-3A50-49BB-962D-2A8DC3DC5D75}"/>
+                <a16:creationId xmlns:a16="http://schemas.microsoft.com/office/drawing/2014/main" id="{ACA5F731-6C2F-4DDC-B8FD-8D3DBC55A2FF}"/>
               </a:ext>
             </a:extLst>
           </p:cNvPr>
@@ -38945,7 +38945,7 @@
           <p:cNvPr id="23" name="">
             <a:extLst xmlns:a="http://schemas.openxmlformats.org/drawingml/2006/main">
               <a:ext uri="{FF2B5EF4-FFF2-40B4-BE49-F238E27FC236}">
-                <a16:creationId xmlns:a16="http://schemas.microsoft.com/office/drawing/2014/main" id="{6915106D-AAED-4E09-AD59-6ECD1A18AB9E}"/>
+                <a16:creationId xmlns:a16="http://schemas.microsoft.com/office/drawing/2014/main" id="{27E5EB81-C98F-4D45-BEC8-8B3F96174AAF}"/>
               </a:ext>
             </a:extLst>
           </p:cNvPr>
@@ -38978,7 +38978,7 @@
           <p:cNvPr id="24" name="">
             <a:extLst xmlns:a="http://schemas.openxmlformats.org/drawingml/2006/main">
               <a:ext uri="{FF2B5EF4-FFF2-40B4-BE49-F238E27FC236}">
-                <a16:creationId xmlns:a16="http://schemas.microsoft.com/office/drawing/2014/main" id="{D6C29B99-B4E4-4EAE-BD53-BECCA98B383A}"/>
+                <a16:creationId xmlns:a16="http://schemas.microsoft.com/office/drawing/2014/main" id="{56A0D89D-AF01-4D91-8331-5F4ABF82F161}"/>
               </a:ext>
             </a:extLst>
           </p:cNvPr>
@@ -39030,7 +39030,7 @@
           <p:cNvPr id="25" name="">
             <a:extLst xmlns:a="http://schemas.openxmlformats.org/drawingml/2006/main">
               <a:ext uri="{FF2B5EF4-FFF2-40B4-BE49-F238E27FC236}">
-                <a16:creationId xmlns:a16="http://schemas.microsoft.com/office/drawing/2014/main" id="{9F85F983-1C5D-4B97-B85F-6A09C28DB31A}"/>
+                <a16:creationId xmlns:a16="http://schemas.microsoft.com/office/drawing/2014/main" id="{66880B1C-368E-4ACD-8B35-EF2E2659340A}"/>
               </a:ext>
             </a:extLst>
           </p:cNvPr>
@@ -39063,7 +39063,7 @@
           <p:cNvPr id="26" name="">
             <a:extLst xmlns:a="http://schemas.openxmlformats.org/drawingml/2006/main">
               <a:ext uri="{FF2B5EF4-FFF2-40B4-BE49-F238E27FC236}">
-                <a16:creationId xmlns:a16="http://schemas.microsoft.com/office/drawing/2014/main" id="{F806B8B2-17A0-44D0-91B3-05BD974B7ED4}"/>
+                <a16:creationId xmlns:a16="http://schemas.microsoft.com/office/drawing/2014/main" id="{28757167-448F-473C-8C0B-5406BE406B81}"/>
               </a:ext>
             </a:extLst>
           </p:cNvPr>
@@ -39115,7 +39115,7 @@
           <p:cNvPr id="27" name="">
             <a:extLst xmlns:a="http://schemas.openxmlformats.org/drawingml/2006/main">
               <a:ext uri="{FF2B5EF4-FFF2-40B4-BE49-F238E27FC236}">
-                <a16:creationId xmlns:a16="http://schemas.microsoft.com/office/drawing/2014/main" id="{57713AEC-C015-40EA-8FE6-8D7D2F649030}"/>
+                <a16:creationId xmlns:a16="http://schemas.microsoft.com/office/drawing/2014/main" id="{E2FD4EA9-2E1D-4374-BAAE-BAD4DEBDADC9}"/>
               </a:ext>
             </a:extLst>
           </p:cNvPr>
@@ -39148,7 +39148,7 @@
           <p:cNvPr id="28" name="">
             <a:extLst xmlns:a="http://schemas.openxmlformats.org/drawingml/2006/main">
               <a:ext uri="{FF2B5EF4-FFF2-40B4-BE49-F238E27FC236}">
-                <a16:creationId xmlns:a16="http://schemas.microsoft.com/office/drawing/2014/main" id="{57427354-D929-4E25-A118-CF72E1425A14}"/>
+                <a16:creationId xmlns:a16="http://schemas.microsoft.com/office/drawing/2014/main" id="{6AF996CC-191E-4A85-A6C3-262A658A7040}"/>
               </a:ext>
             </a:extLst>
           </p:cNvPr>
@@ -39200,7 +39200,7 @@
           <p:cNvPr id="29" name="">
             <a:extLst xmlns:a="http://schemas.openxmlformats.org/drawingml/2006/main">
               <a:ext uri="{FF2B5EF4-FFF2-40B4-BE49-F238E27FC236}">
-                <a16:creationId xmlns:a16="http://schemas.microsoft.com/office/drawing/2014/main" id="{99996555-5640-4B15-96CA-B2C024A8F063}"/>
+                <a16:creationId xmlns:a16="http://schemas.microsoft.com/office/drawing/2014/main" id="{5BB6DC7E-CEF8-4BDE-8EFA-69781A6AF793}"/>
               </a:ext>
             </a:extLst>
           </p:cNvPr>
@@ -39233,7 +39233,7 @@
           <p:cNvPr id="30" name="">
             <a:extLst xmlns:a="http://schemas.openxmlformats.org/drawingml/2006/main">
               <a:ext uri="{FF2B5EF4-FFF2-40B4-BE49-F238E27FC236}">
-                <a16:creationId xmlns:a16="http://schemas.microsoft.com/office/drawing/2014/main" id="{479C4221-2A24-4E03-BC27-9612EFD3FB08}"/>
+                <a16:creationId xmlns:a16="http://schemas.microsoft.com/office/drawing/2014/main" id="{602BD4A7-05D0-4767-9347-E824F720D194}"/>
               </a:ext>
             </a:extLst>
           </p:cNvPr>
@@ -39285,7 +39285,7 @@
           <p:cNvPr id="31" name="">
             <a:extLst xmlns:a="http://schemas.openxmlformats.org/drawingml/2006/main">
               <a:ext uri="{FF2B5EF4-FFF2-40B4-BE49-F238E27FC236}">
-                <a16:creationId xmlns:a16="http://schemas.microsoft.com/office/drawing/2014/main" id="{38382A44-8029-47D1-B8F7-C36107BC98ED}"/>
+                <a16:creationId xmlns:a16="http://schemas.microsoft.com/office/drawing/2014/main" id="{9E351703-EE68-45B4-952C-CA29EAFC61EB}"/>
               </a:ext>
             </a:extLst>
           </p:cNvPr>
@@ -39318,7 +39318,7 @@
           <p:cNvPr id="32" name="">
             <a:extLst xmlns:a="http://schemas.openxmlformats.org/drawingml/2006/main">
               <a:ext uri="{FF2B5EF4-FFF2-40B4-BE49-F238E27FC236}">
-                <a16:creationId xmlns:a16="http://schemas.microsoft.com/office/drawing/2014/main" id="{80851DF3-CA5D-4238-B28E-EF1C51B04CBC}"/>
+                <a16:creationId xmlns:a16="http://schemas.microsoft.com/office/drawing/2014/main" id="{19DCB568-5E58-4A4F-8F33-9DF9861C7B13}"/>
               </a:ext>
             </a:extLst>
           </p:cNvPr>
@@ -39370,7 +39370,7 @@
           <p:cNvPr id="33" name="">
             <a:extLst xmlns:a="http://schemas.openxmlformats.org/drawingml/2006/main">
               <a:ext uri="{FF2B5EF4-FFF2-40B4-BE49-F238E27FC236}">
-                <a16:creationId xmlns:a16="http://schemas.microsoft.com/office/drawing/2014/main" id="{C88D0207-CFE3-4F24-AE76-0868E3AF42A9}"/>
+                <a16:creationId xmlns:a16="http://schemas.microsoft.com/office/drawing/2014/main" id="{C8B94533-F368-473C-BDB4-F5792394B01F}"/>
               </a:ext>
             </a:extLst>
           </p:cNvPr>
@@ -39403,7 +39403,7 @@
           <p:cNvPr id="34" name="">
             <a:extLst xmlns:a="http://schemas.openxmlformats.org/drawingml/2006/main">
               <a:ext uri="{FF2B5EF4-FFF2-40B4-BE49-F238E27FC236}">
-                <a16:creationId xmlns:a16="http://schemas.microsoft.com/office/drawing/2014/main" id="{ACAABE21-2AD8-4A8B-9023-20D96E7B0ED7}"/>
+                <a16:creationId xmlns:a16="http://schemas.microsoft.com/office/drawing/2014/main" id="{9D2764B8-7D3C-4C35-96A0-B720F728D380}"/>
               </a:ext>
             </a:extLst>
           </p:cNvPr>
@@ -39453,7 +39453,7 @@
     </p:spTree>
     <p:extLst>
       <p:ext uri="{BB962C8B-B14F-4D97-AF65-F5344CB8AC3E}">
-        <p14:creationId xmlns:p14="http://schemas.microsoft.com/office/powerpoint/2010/main" val="18712771"/>
+        <p14:creationId xmlns:p14="http://schemas.microsoft.com/office/powerpoint/2010/main" val="700163760"/>
       </p:ext>
     </p:extLst>
   </p:cSld>
@@ -39484,7 +39484,7 @@
           <p:cNvPr id="102" name="">
             <a:extLst xmlns:a="http://schemas.openxmlformats.org/drawingml/2006/main">
               <a:ext uri="{FF2B5EF4-FFF2-40B4-BE49-F238E27FC236}">
-                <a16:creationId xmlns:a16="http://schemas.microsoft.com/office/drawing/2014/main" id="{5053FF23-7EC9-440A-A330-C7203A93D080}"/>
+                <a16:creationId xmlns:a16="http://schemas.microsoft.com/office/drawing/2014/main" id="{579B4FB8-3FE2-43A8-86C4-0E0A47C4916C}"/>
               </a:ext>
             </a:extLst>
           </p:cNvPr>
@@ -39517,7 +39517,7 @@
           <p:cNvPr id="2" name="">
             <a:extLst xmlns:a="http://schemas.openxmlformats.org/drawingml/2006/main">
               <a:ext uri="{FF2B5EF4-FFF2-40B4-BE49-F238E27FC236}">
-                <a16:creationId xmlns:a16="http://schemas.microsoft.com/office/drawing/2014/main" id="{941DC8B0-9769-472D-BDD9-C4A6947DA459}"/>
+                <a16:creationId xmlns:a16="http://schemas.microsoft.com/office/drawing/2014/main" id="{B8499AD7-468A-4AB7-AF2E-0ED23099FE38}"/>
               </a:ext>
             </a:extLst>
           </p:cNvPr>
@@ -39548,7 +39548,7 @@
           <p:cNvPr id="3" name="">
             <a:extLst xmlns:a="http://schemas.openxmlformats.org/drawingml/2006/main">
               <a:ext uri="{FF2B5EF4-FFF2-40B4-BE49-F238E27FC236}">
-                <a16:creationId xmlns:a16="http://schemas.microsoft.com/office/drawing/2014/main" id="{402EAA24-FB46-4782-9232-A10857597FA1}"/>
+                <a16:creationId xmlns:a16="http://schemas.microsoft.com/office/drawing/2014/main" id="{15EC1163-4193-4791-9472-9FCED5589868}"/>
               </a:ext>
             </a:extLst>
           </p:cNvPr>
@@ -39600,7 +39600,7 @@
           <p:cNvPr id="4" name="">
             <a:extLst xmlns:a="http://schemas.openxmlformats.org/drawingml/2006/main">
               <a:ext uri="{FF2B5EF4-FFF2-40B4-BE49-F238E27FC236}">
-                <a16:creationId xmlns:a16="http://schemas.microsoft.com/office/drawing/2014/main" id="{256D0380-423B-46A0-9BE5-D7E64A8321D6}"/>
+                <a16:creationId xmlns:a16="http://schemas.microsoft.com/office/drawing/2014/main" id="{B0CD64C5-AE9F-4C88-A2EB-63E25E5EE41D}"/>
               </a:ext>
             </a:extLst>
           </p:cNvPr>
@@ -39652,7 +39652,7 @@
           <p:cNvPr id="5" name="">
             <a:extLst xmlns:a="http://schemas.openxmlformats.org/drawingml/2006/main">
               <a:ext uri="{FF2B5EF4-FFF2-40B4-BE49-F238E27FC236}">
-                <a16:creationId xmlns:a16="http://schemas.microsoft.com/office/drawing/2014/main" id="{86E9448C-9FAA-40BF-9B7F-B000F4B5CC3F}"/>
+                <a16:creationId xmlns:a16="http://schemas.microsoft.com/office/drawing/2014/main" id="{A2B41523-C6EA-47D9-AF93-55C4CA529BF0}"/>
               </a:ext>
             </a:extLst>
           </p:cNvPr>
@@ -39687,7 +39687,7 @@
           <p:nvPr/>
         </p:nvPicPr>
         <p:blipFill>
-          <a:blip xmlns:r="http://schemas.openxmlformats.org/officeDocument/2006/relationships" xmlns:a="http://schemas.openxmlformats.org/drawingml/2006/main" r:embed="R86a042901e1f4f79"/>
+          <a:blip xmlns:r="http://schemas.openxmlformats.org/officeDocument/2006/relationships" xmlns:a="http://schemas.openxmlformats.org/drawingml/2006/main" r:embed="R565e385854ee43dc"/>
           <a:stretch xmlns:a="http://schemas.openxmlformats.org/drawingml/2006/main"/>
         </p:blipFill>
         <p:spPr>
@@ -39705,7 +39705,7 @@
           <p:cNvPr id="7" name="">
             <a:extLst xmlns:a="http://schemas.openxmlformats.org/drawingml/2006/main">
               <a:ext uri="{FF2B5EF4-FFF2-40B4-BE49-F238E27FC236}">
-                <a16:creationId xmlns:a16="http://schemas.microsoft.com/office/drawing/2014/main" id="{9CE52761-4C62-4E36-A90C-ADCD858C8EF0}"/>
+                <a16:creationId xmlns:a16="http://schemas.microsoft.com/office/drawing/2014/main" id="{EA23B40D-37CF-45CC-9419-6B02C2D48E37}"/>
               </a:ext>
             </a:extLst>
           </p:cNvPr>
@@ -39757,7 +39757,7 @@
           <p:cNvPr id="8" name="">
             <a:extLst xmlns:a="http://schemas.openxmlformats.org/drawingml/2006/main">
               <a:ext uri="{FF2B5EF4-FFF2-40B4-BE49-F238E27FC236}">
-                <a16:creationId xmlns:a16="http://schemas.microsoft.com/office/drawing/2014/main" id="{BE1B8F1C-4349-4918-ABFD-E6676389B039}"/>
+                <a16:creationId xmlns:a16="http://schemas.microsoft.com/office/drawing/2014/main" id="{A3643D39-301F-45EE-9F18-0670B1BD4D65}"/>
               </a:ext>
             </a:extLst>
           </p:cNvPr>
@@ -39809,7 +39809,7 @@
           <p:cNvPr id="9" name="">
             <a:extLst xmlns:a="http://schemas.openxmlformats.org/drawingml/2006/main">
               <a:ext uri="{FF2B5EF4-FFF2-40B4-BE49-F238E27FC236}">
-                <a16:creationId xmlns:a16="http://schemas.microsoft.com/office/drawing/2014/main" id="{26BBEF4E-B0C9-4711-A707-8D708A6C79AC}"/>
+                <a16:creationId xmlns:a16="http://schemas.microsoft.com/office/drawing/2014/main" id="{2D74F810-2CBD-4F51-867E-670A5790FE67}"/>
               </a:ext>
             </a:extLst>
           </p:cNvPr>
@@ -39861,7 +39861,7 @@
           <p:cNvPr id="10" name="">
             <a:extLst xmlns:a="http://schemas.openxmlformats.org/drawingml/2006/main">
               <a:ext uri="{FF2B5EF4-FFF2-40B4-BE49-F238E27FC236}">
-                <a16:creationId xmlns:a16="http://schemas.microsoft.com/office/drawing/2014/main" id="{80AB8938-9FD2-4EB2-8920-1702628C3013}"/>
+                <a16:creationId xmlns:a16="http://schemas.microsoft.com/office/drawing/2014/main" id="{43656F7A-6B1D-43CC-9094-2BCD234C6018}"/>
               </a:ext>
             </a:extLst>
           </p:cNvPr>
@@ -39913,7 +39913,7 @@
           <p:cNvPr id="11" name="">
             <a:extLst xmlns:a="http://schemas.openxmlformats.org/drawingml/2006/main">
               <a:ext uri="{FF2B5EF4-FFF2-40B4-BE49-F238E27FC236}">
-                <a16:creationId xmlns:a16="http://schemas.microsoft.com/office/drawing/2014/main" id="{F7C945B4-EFDD-4A00-A7F1-C0557A3B9FB4}"/>
+                <a16:creationId xmlns:a16="http://schemas.microsoft.com/office/drawing/2014/main" id="{50207783-3381-45DD-AFF3-09A81AA3E282}"/>
               </a:ext>
             </a:extLst>
           </p:cNvPr>
@@ -39944,7 +39944,7 @@
           <p:cNvPr id="12" name="">
             <a:extLst xmlns:a="http://schemas.openxmlformats.org/drawingml/2006/main">
               <a:ext uri="{FF2B5EF4-FFF2-40B4-BE49-F238E27FC236}">
-                <a16:creationId xmlns:a16="http://schemas.microsoft.com/office/drawing/2014/main" id="{B7ABEC50-84C9-474B-B433-D438913845B6}"/>
+                <a16:creationId xmlns:a16="http://schemas.microsoft.com/office/drawing/2014/main" id="{8822A6BD-3461-4472-9063-0D681748A057}"/>
               </a:ext>
             </a:extLst>
           </p:cNvPr>
@@ -39975,7 +39975,7 @@
           <p:cNvPr id="13" name="">
             <a:extLst xmlns:a="http://schemas.openxmlformats.org/drawingml/2006/main">
               <a:ext uri="{FF2B5EF4-FFF2-40B4-BE49-F238E27FC236}">
-                <a16:creationId xmlns:a16="http://schemas.microsoft.com/office/drawing/2014/main" id="{DCCEA2C6-2593-4CE2-95E4-E2585EB2A723}"/>
+                <a16:creationId xmlns:a16="http://schemas.microsoft.com/office/drawing/2014/main" id="{A7FBAFA3-CE14-4C3F-AEA8-3BC076EAE3AC}"/>
               </a:ext>
             </a:extLst>
           </p:cNvPr>
@@ -40027,7 +40027,7 @@
           <p:cNvPr id="14" name="">
             <a:extLst xmlns:a="http://schemas.openxmlformats.org/drawingml/2006/main">
               <a:ext uri="{FF2B5EF4-FFF2-40B4-BE49-F238E27FC236}">
-                <a16:creationId xmlns:a16="http://schemas.microsoft.com/office/drawing/2014/main" id="{EA831239-1D4B-4C69-A215-0F6DD8486A41}"/>
+                <a16:creationId xmlns:a16="http://schemas.microsoft.com/office/drawing/2014/main" id="{4E1E9D03-0249-4AD1-A133-0FDDA1E45438}"/>
               </a:ext>
             </a:extLst>
           </p:cNvPr>
@@ -40079,7 +40079,7 @@
           <p:cNvPr id="15" name="">
             <a:extLst xmlns:a="http://schemas.openxmlformats.org/drawingml/2006/main">
               <a:ext uri="{FF2B5EF4-FFF2-40B4-BE49-F238E27FC236}">
-                <a16:creationId xmlns:a16="http://schemas.microsoft.com/office/drawing/2014/main" id="{8605B03D-DC84-4775-BEB2-6D1E63D45811}"/>
+                <a16:creationId xmlns:a16="http://schemas.microsoft.com/office/drawing/2014/main" id="{7C40F2D5-8505-4742-AEC9-292678B5D1D8}"/>
               </a:ext>
             </a:extLst>
           </p:cNvPr>
@@ -40131,7 +40131,7 @@
           <p:cNvPr id="16" name="">
             <a:extLst xmlns:a="http://schemas.openxmlformats.org/drawingml/2006/main">
               <a:ext uri="{FF2B5EF4-FFF2-40B4-BE49-F238E27FC236}">
-                <a16:creationId xmlns:a16="http://schemas.microsoft.com/office/drawing/2014/main" id="{0B972421-1C29-4DA6-B5E1-C80C87294CA5}"/>
+                <a16:creationId xmlns:a16="http://schemas.microsoft.com/office/drawing/2014/main" id="{AE085852-014C-45F9-B483-072D04E1E05F}"/>
               </a:ext>
             </a:extLst>
           </p:cNvPr>
@@ -40183,7 +40183,7 @@
           <p:cNvPr id="17" name="">
             <a:extLst xmlns:a="http://schemas.openxmlformats.org/drawingml/2006/main">
               <a:ext uri="{FF2B5EF4-FFF2-40B4-BE49-F238E27FC236}">
-                <a16:creationId xmlns:a16="http://schemas.microsoft.com/office/drawing/2014/main" id="{FFA593E5-6BFE-49FA-9463-2F9C131C2219}"/>
+                <a16:creationId xmlns:a16="http://schemas.microsoft.com/office/drawing/2014/main" id="{91FF9F69-32FE-441E-A33E-6BB7AFD74B92}"/>
               </a:ext>
             </a:extLst>
           </p:cNvPr>
@@ -40235,7 +40235,7 @@
           <p:cNvPr id="18" name="">
             <a:extLst xmlns:a="http://schemas.openxmlformats.org/drawingml/2006/main">
               <a:ext uri="{FF2B5EF4-FFF2-40B4-BE49-F238E27FC236}">
-                <a16:creationId xmlns:a16="http://schemas.microsoft.com/office/drawing/2014/main" id="{2B5BC3D4-23F3-4B06-8493-88EBC36EDCA8}"/>
+                <a16:creationId xmlns:a16="http://schemas.microsoft.com/office/drawing/2014/main" id="{9D04B3F6-0FF7-4E73-A03B-43DC6558DA51}"/>
               </a:ext>
             </a:extLst>
           </p:cNvPr>
@@ -40266,7 +40266,7 @@
           <p:cNvPr id="19" name="">
             <a:extLst xmlns:a="http://schemas.openxmlformats.org/drawingml/2006/main">
               <a:ext uri="{FF2B5EF4-FFF2-40B4-BE49-F238E27FC236}">
-                <a16:creationId xmlns:a16="http://schemas.microsoft.com/office/drawing/2014/main" id="{91E8D7A6-5C00-4B54-83FE-53BC50F33516}"/>
+                <a16:creationId xmlns:a16="http://schemas.microsoft.com/office/drawing/2014/main" id="{28A7D59E-16F6-4F0B-86A6-E40A0C58A64B}"/>
               </a:ext>
             </a:extLst>
           </p:cNvPr>
@@ -40318,7 +40318,7 @@
           <p:cNvPr id="20" name="">
             <a:extLst xmlns:a="http://schemas.openxmlformats.org/drawingml/2006/main">
               <a:ext uri="{FF2B5EF4-FFF2-40B4-BE49-F238E27FC236}">
-                <a16:creationId xmlns:a16="http://schemas.microsoft.com/office/drawing/2014/main" id="{2A90FB06-EEC7-42FB-87AF-6F49EA8234F1}"/>
+                <a16:creationId xmlns:a16="http://schemas.microsoft.com/office/drawing/2014/main" id="{C5886E95-1C0E-4C2B-8FBA-2EF2242E5497}"/>
               </a:ext>
             </a:extLst>
           </p:cNvPr>
@@ -40370,7 +40370,7 @@
           <p:cNvPr id="21" name="">
             <a:extLst xmlns:a="http://schemas.openxmlformats.org/drawingml/2006/main">
               <a:ext uri="{FF2B5EF4-FFF2-40B4-BE49-F238E27FC236}">
-                <a16:creationId xmlns:a16="http://schemas.microsoft.com/office/drawing/2014/main" id="{5211D98A-1703-43B5-AA4D-F8D6BC7D01D5}"/>
+                <a16:creationId xmlns:a16="http://schemas.microsoft.com/office/drawing/2014/main" id="{B1F3E57A-F164-4E2F-AFE7-38A2EB74F3CC}"/>
               </a:ext>
             </a:extLst>
           </p:cNvPr>
@@ -40422,7 +40422,7 @@
           <p:cNvPr id="22" name="">
             <a:extLst xmlns:a="http://schemas.openxmlformats.org/drawingml/2006/main">
               <a:ext uri="{FF2B5EF4-FFF2-40B4-BE49-F238E27FC236}">
-                <a16:creationId xmlns:a16="http://schemas.microsoft.com/office/drawing/2014/main" id="{272CEB9D-225E-4383-B558-FC6340DDB1B4}"/>
+                <a16:creationId xmlns:a16="http://schemas.microsoft.com/office/drawing/2014/main" id="{475283BA-FEFB-4A85-AB58-DA13D7C4F3AE}"/>
               </a:ext>
             </a:extLst>
           </p:cNvPr>
@@ -40474,7 +40474,7 @@
           <p:cNvPr id="23" name="">
             <a:extLst xmlns:a="http://schemas.openxmlformats.org/drawingml/2006/main">
               <a:ext uri="{FF2B5EF4-FFF2-40B4-BE49-F238E27FC236}">
-                <a16:creationId xmlns:a16="http://schemas.microsoft.com/office/drawing/2014/main" id="{6FE8DC56-7E11-49FD-8375-E16F1A429BC6}"/>
+                <a16:creationId xmlns:a16="http://schemas.microsoft.com/office/drawing/2014/main" id="{7776E4C8-9128-4794-AE63-04B4522DE21C}"/>
               </a:ext>
             </a:extLst>
           </p:cNvPr>
@@ -40526,7 +40526,7 @@
           <p:cNvPr id="24" name="">
             <a:extLst xmlns:a="http://schemas.openxmlformats.org/drawingml/2006/main">
               <a:ext uri="{FF2B5EF4-FFF2-40B4-BE49-F238E27FC236}">
-                <a16:creationId xmlns:a16="http://schemas.microsoft.com/office/drawing/2014/main" id="{08157DA3-EB14-4AAE-BD74-F67F422F3142}"/>
+                <a16:creationId xmlns:a16="http://schemas.microsoft.com/office/drawing/2014/main" id="{42FC8AB9-41F9-4397-A8E6-8B233840EC74}"/>
               </a:ext>
             </a:extLst>
           </p:cNvPr>
@@ -40557,7 +40557,7 @@
           <p:cNvPr id="25" name="">
             <a:extLst xmlns:a="http://schemas.openxmlformats.org/drawingml/2006/main">
               <a:ext uri="{FF2B5EF4-FFF2-40B4-BE49-F238E27FC236}">
-                <a16:creationId xmlns:a16="http://schemas.microsoft.com/office/drawing/2014/main" id="{6F4B98D3-06AD-4CCA-9840-FFFFBF80D257}"/>
+                <a16:creationId xmlns:a16="http://schemas.microsoft.com/office/drawing/2014/main" id="{83F7E05E-0135-4A1A-80F3-ADCE3A123866}"/>
               </a:ext>
             </a:extLst>
           </p:cNvPr>
@@ -40588,7 +40588,7 @@
           <p:cNvPr id="26" name="">
             <a:extLst xmlns:a="http://schemas.openxmlformats.org/drawingml/2006/main">
               <a:ext uri="{FF2B5EF4-FFF2-40B4-BE49-F238E27FC236}">
-                <a16:creationId xmlns:a16="http://schemas.microsoft.com/office/drawing/2014/main" id="{A8972C64-E092-469A-A41B-786647E585CC}"/>
+                <a16:creationId xmlns:a16="http://schemas.microsoft.com/office/drawing/2014/main" id="{0D79D354-C07C-4DA1-8EC1-309DDA627C60}"/>
               </a:ext>
             </a:extLst>
           </p:cNvPr>
@@ -40640,7 +40640,7 @@
           <p:cNvPr id="27" name="">
             <a:extLst xmlns:a="http://schemas.openxmlformats.org/drawingml/2006/main">
               <a:ext uri="{FF2B5EF4-FFF2-40B4-BE49-F238E27FC236}">
-                <a16:creationId xmlns:a16="http://schemas.microsoft.com/office/drawing/2014/main" id="{6CB07FC8-FE4C-47DF-B2DB-0CF445A838F8}"/>
+                <a16:creationId xmlns:a16="http://schemas.microsoft.com/office/drawing/2014/main" id="{B88832E7-832B-48EE-B891-9FE7410D106F}"/>
               </a:ext>
             </a:extLst>
           </p:cNvPr>
@@ -40692,7 +40692,7 @@
           <p:cNvPr id="28" name="">
             <a:extLst xmlns:a="http://schemas.openxmlformats.org/drawingml/2006/main">
               <a:ext uri="{FF2B5EF4-FFF2-40B4-BE49-F238E27FC236}">
-                <a16:creationId xmlns:a16="http://schemas.microsoft.com/office/drawing/2014/main" id="{2CD1ABAB-22D6-4CCD-AAD2-DF38F95180AE}"/>
+                <a16:creationId xmlns:a16="http://schemas.microsoft.com/office/drawing/2014/main" id="{A56D4E10-DCF5-46E3-85D4-A26DFF27E115}"/>
               </a:ext>
             </a:extLst>
           </p:cNvPr>
@@ -40744,7 +40744,7 @@
           <p:cNvPr id="29" name="">
             <a:extLst xmlns:a="http://schemas.openxmlformats.org/drawingml/2006/main">
               <a:ext uri="{FF2B5EF4-FFF2-40B4-BE49-F238E27FC236}">
-                <a16:creationId xmlns:a16="http://schemas.microsoft.com/office/drawing/2014/main" id="{10422674-40E8-492F-92BC-702755AEE2AD}"/>
+                <a16:creationId xmlns:a16="http://schemas.microsoft.com/office/drawing/2014/main" id="{84C86286-8E45-49E3-8F7D-72215AE5855B}"/>
               </a:ext>
             </a:extLst>
           </p:cNvPr>
@@ -40796,7 +40796,7 @@
           <p:cNvPr id="30" name="">
             <a:extLst xmlns:a="http://schemas.openxmlformats.org/drawingml/2006/main">
               <a:ext uri="{FF2B5EF4-FFF2-40B4-BE49-F238E27FC236}">
-                <a16:creationId xmlns:a16="http://schemas.microsoft.com/office/drawing/2014/main" id="{247DFE05-FC41-4F9C-A703-ED00FCA95419}"/>
+                <a16:creationId xmlns:a16="http://schemas.microsoft.com/office/drawing/2014/main" id="{9B305C90-9ECE-4AD6-82DE-5D46E70852EC}"/>
               </a:ext>
             </a:extLst>
           </p:cNvPr>
@@ -40848,7 +40848,7 @@
           <p:cNvPr id="31" name="">
             <a:extLst xmlns:a="http://schemas.openxmlformats.org/drawingml/2006/main">
               <a:ext uri="{FF2B5EF4-FFF2-40B4-BE49-F238E27FC236}">
-                <a16:creationId xmlns:a16="http://schemas.microsoft.com/office/drawing/2014/main" id="{D922820A-89BF-49E6-9683-476267F3A2F8}"/>
+                <a16:creationId xmlns:a16="http://schemas.microsoft.com/office/drawing/2014/main" id="{C3E566D6-529D-44B8-9232-67A1B3E2F348}"/>
               </a:ext>
             </a:extLst>
           </p:cNvPr>
@@ -40879,7 +40879,7 @@
           <p:cNvPr id="32" name="">
             <a:extLst xmlns:a="http://schemas.openxmlformats.org/drawingml/2006/main">
               <a:ext uri="{FF2B5EF4-FFF2-40B4-BE49-F238E27FC236}">
-                <a16:creationId xmlns:a16="http://schemas.microsoft.com/office/drawing/2014/main" id="{10D84E14-42CD-45CF-AF0C-7C73BE5E6492}"/>
+                <a16:creationId xmlns:a16="http://schemas.microsoft.com/office/drawing/2014/main" id="{2D705A05-682D-4359-9F77-B8BDBC59016A}"/>
               </a:ext>
             </a:extLst>
           </p:cNvPr>
@@ -40931,7 +40931,7 @@
           <p:cNvPr id="33" name="">
             <a:extLst xmlns:a="http://schemas.openxmlformats.org/drawingml/2006/main">
               <a:ext uri="{FF2B5EF4-FFF2-40B4-BE49-F238E27FC236}">
-                <a16:creationId xmlns:a16="http://schemas.microsoft.com/office/drawing/2014/main" id="{FE61A1F4-EAB7-4758-9A33-BCD135C94C69}"/>
+                <a16:creationId xmlns:a16="http://schemas.microsoft.com/office/drawing/2014/main" id="{FD0C61D6-DB3B-4F29-8A88-BBC59C42B0CF}"/>
               </a:ext>
             </a:extLst>
           </p:cNvPr>
@@ -40983,7 +40983,7 @@
           <p:cNvPr id="34" name="">
             <a:extLst xmlns:a="http://schemas.openxmlformats.org/drawingml/2006/main">
               <a:ext uri="{FF2B5EF4-FFF2-40B4-BE49-F238E27FC236}">
-                <a16:creationId xmlns:a16="http://schemas.microsoft.com/office/drawing/2014/main" id="{4190D9A3-DE4B-4F57-A5C5-F581355DF3EE}"/>
+                <a16:creationId xmlns:a16="http://schemas.microsoft.com/office/drawing/2014/main" id="{7C89A408-6840-41F0-8533-EC73215E5423}"/>
               </a:ext>
             </a:extLst>
           </p:cNvPr>
@@ -41035,7 +41035,7 @@
           <p:cNvPr id="35" name="">
             <a:extLst xmlns:a="http://schemas.openxmlformats.org/drawingml/2006/main">
               <a:ext uri="{FF2B5EF4-FFF2-40B4-BE49-F238E27FC236}">
-                <a16:creationId xmlns:a16="http://schemas.microsoft.com/office/drawing/2014/main" id="{775EB88F-2FAB-401A-8EA1-D37683B77B93}"/>
+                <a16:creationId xmlns:a16="http://schemas.microsoft.com/office/drawing/2014/main" id="{C0E10203-323B-4087-AC7C-61C1BB8BB547}"/>
               </a:ext>
             </a:extLst>
           </p:cNvPr>
@@ -41087,7 +41087,7 @@
           <p:cNvPr id="36" name="">
             <a:extLst xmlns:a="http://schemas.openxmlformats.org/drawingml/2006/main">
               <a:ext uri="{FF2B5EF4-FFF2-40B4-BE49-F238E27FC236}">
-                <a16:creationId xmlns:a16="http://schemas.microsoft.com/office/drawing/2014/main" id="{8396158B-069D-43C6-9E02-2912C9330ADF}"/>
+                <a16:creationId xmlns:a16="http://schemas.microsoft.com/office/drawing/2014/main" id="{7DAE6D1F-7141-4D88-A6BD-5CB3A3891953}"/>
               </a:ext>
             </a:extLst>
           </p:cNvPr>
@@ -41139,7 +41139,7 @@
           <p:cNvPr id="37" name="">
             <a:extLst xmlns:a="http://schemas.openxmlformats.org/drawingml/2006/main">
               <a:ext uri="{FF2B5EF4-FFF2-40B4-BE49-F238E27FC236}">
-                <a16:creationId xmlns:a16="http://schemas.microsoft.com/office/drawing/2014/main" id="{599F23FA-DBB3-4631-B891-7D6175F191BC}"/>
+                <a16:creationId xmlns:a16="http://schemas.microsoft.com/office/drawing/2014/main" id="{F70CC23F-16D4-4949-9CD5-7FB3BE11BC61}"/>
               </a:ext>
             </a:extLst>
           </p:cNvPr>
@@ -41170,7 +41170,7 @@
           <p:cNvPr id="38" name="">
             <a:extLst xmlns:a="http://schemas.openxmlformats.org/drawingml/2006/main">
               <a:ext uri="{FF2B5EF4-FFF2-40B4-BE49-F238E27FC236}">
-                <a16:creationId xmlns:a16="http://schemas.microsoft.com/office/drawing/2014/main" id="{F395B5FC-F699-4CAB-94EA-59AA068B910D}"/>
+                <a16:creationId xmlns:a16="http://schemas.microsoft.com/office/drawing/2014/main" id="{28EF5D8E-489E-4F92-AAEE-1168F0947FBC}"/>
               </a:ext>
             </a:extLst>
           </p:cNvPr>
@@ -41201,7 +41201,7 @@
           <p:cNvPr id="39" name="">
             <a:extLst xmlns:a="http://schemas.openxmlformats.org/drawingml/2006/main">
               <a:ext uri="{FF2B5EF4-FFF2-40B4-BE49-F238E27FC236}">
-                <a16:creationId xmlns:a16="http://schemas.microsoft.com/office/drawing/2014/main" id="{69AA703B-E93B-4285-AEB5-C3AF4786FB55}"/>
+                <a16:creationId xmlns:a16="http://schemas.microsoft.com/office/drawing/2014/main" id="{0AB4901B-FB33-4980-9BFC-1C133DA2A7E7}"/>
               </a:ext>
             </a:extLst>
           </p:cNvPr>
@@ -41253,7 +41253,7 @@
           <p:cNvPr id="40" name="">
             <a:extLst xmlns:a="http://schemas.openxmlformats.org/drawingml/2006/main">
               <a:ext uri="{FF2B5EF4-FFF2-40B4-BE49-F238E27FC236}">
-                <a16:creationId xmlns:a16="http://schemas.microsoft.com/office/drawing/2014/main" id="{07C5C81E-FB9E-428B-A469-E471C251D532}"/>
+                <a16:creationId xmlns:a16="http://schemas.microsoft.com/office/drawing/2014/main" id="{D76FACD7-58ED-4322-A795-3D1060066C25}"/>
               </a:ext>
             </a:extLst>
           </p:cNvPr>
@@ -41305,7 +41305,7 @@
           <p:cNvPr id="41" name="">
             <a:extLst xmlns:a="http://schemas.openxmlformats.org/drawingml/2006/main">
               <a:ext uri="{FF2B5EF4-FFF2-40B4-BE49-F238E27FC236}">
-                <a16:creationId xmlns:a16="http://schemas.microsoft.com/office/drawing/2014/main" id="{5AC6E879-24B9-484A-B637-3732C94B64F0}"/>
+                <a16:creationId xmlns:a16="http://schemas.microsoft.com/office/drawing/2014/main" id="{E0F94EA8-68B7-4C2D-8299-57A129A3E926}"/>
               </a:ext>
             </a:extLst>
           </p:cNvPr>
@@ -41357,7 +41357,7 @@
           <p:cNvPr id="42" name="">
             <a:extLst xmlns:a="http://schemas.openxmlformats.org/drawingml/2006/main">
               <a:ext uri="{FF2B5EF4-FFF2-40B4-BE49-F238E27FC236}">
-                <a16:creationId xmlns:a16="http://schemas.microsoft.com/office/drawing/2014/main" id="{E3CF31F6-CDA9-47FC-9E74-C7CFBBB139EE}"/>
+                <a16:creationId xmlns:a16="http://schemas.microsoft.com/office/drawing/2014/main" id="{C0D3BAB7-9516-449D-9430-71D909FCD357}"/>
               </a:ext>
             </a:extLst>
           </p:cNvPr>
@@ -41409,7 +41409,7 @@
           <p:cNvPr id="43" name="">
             <a:extLst xmlns:a="http://schemas.openxmlformats.org/drawingml/2006/main">
               <a:ext uri="{FF2B5EF4-FFF2-40B4-BE49-F238E27FC236}">
-                <a16:creationId xmlns:a16="http://schemas.microsoft.com/office/drawing/2014/main" id="{011E4EE2-F19A-477E-B492-66E0867022E8}"/>
+                <a16:creationId xmlns:a16="http://schemas.microsoft.com/office/drawing/2014/main" id="{4123E457-284A-4B10-84D4-813A25460A10}"/>
               </a:ext>
             </a:extLst>
           </p:cNvPr>
@@ -41461,7 +41461,7 @@
           <p:cNvPr id="44" name="">
             <a:extLst xmlns:a="http://schemas.openxmlformats.org/drawingml/2006/main">
               <a:ext uri="{FF2B5EF4-FFF2-40B4-BE49-F238E27FC236}">
-                <a16:creationId xmlns:a16="http://schemas.microsoft.com/office/drawing/2014/main" id="{ADB2513F-1365-4695-8AC1-E3EFD88CB430}"/>
+                <a16:creationId xmlns:a16="http://schemas.microsoft.com/office/drawing/2014/main" id="{2C80E7B5-491E-4D52-90D7-B0DF1715DF36}"/>
               </a:ext>
             </a:extLst>
           </p:cNvPr>
@@ -41492,7 +41492,7 @@
           <p:cNvPr id="45" name="">
             <a:extLst xmlns:a="http://schemas.openxmlformats.org/drawingml/2006/main">
               <a:ext uri="{FF2B5EF4-FFF2-40B4-BE49-F238E27FC236}">
-                <a16:creationId xmlns:a16="http://schemas.microsoft.com/office/drawing/2014/main" id="{C7686C95-926B-4562-A077-131F40E0FB54}"/>
+                <a16:creationId xmlns:a16="http://schemas.microsoft.com/office/drawing/2014/main" id="{82094122-C6A1-4A8B-B669-1347CA3DC599}"/>
               </a:ext>
             </a:extLst>
           </p:cNvPr>
@@ -41544,7 +41544,7 @@
           <p:cNvPr id="46" name="">
             <a:extLst xmlns:a="http://schemas.openxmlformats.org/drawingml/2006/main">
               <a:ext uri="{FF2B5EF4-FFF2-40B4-BE49-F238E27FC236}">
-                <a16:creationId xmlns:a16="http://schemas.microsoft.com/office/drawing/2014/main" id="{7586A17F-89E0-4067-9E5C-C6C6CF70EC58}"/>
+                <a16:creationId xmlns:a16="http://schemas.microsoft.com/office/drawing/2014/main" id="{F19DA44E-16BE-4398-B873-F16EB5D755CE}"/>
               </a:ext>
             </a:extLst>
           </p:cNvPr>
@@ -41596,7 +41596,7 @@
           <p:cNvPr id="47" name="">
             <a:extLst xmlns:a="http://schemas.openxmlformats.org/drawingml/2006/main">
               <a:ext uri="{FF2B5EF4-FFF2-40B4-BE49-F238E27FC236}">
-                <a16:creationId xmlns:a16="http://schemas.microsoft.com/office/drawing/2014/main" id="{369CCBA0-E018-4A00-AC05-FE085A6003A7}"/>
+                <a16:creationId xmlns:a16="http://schemas.microsoft.com/office/drawing/2014/main" id="{4DEEEB71-C532-4A09-BB1A-7BA2FDE6771F}"/>
               </a:ext>
             </a:extLst>
           </p:cNvPr>
@@ -41648,7 +41648,7 @@
           <p:cNvPr id="48" name="">
             <a:extLst xmlns:a="http://schemas.openxmlformats.org/drawingml/2006/main">
               <a:ext uri="{FF2B5EF4-FFF2-40B4-BE49-F238E27FC236}">
-                <a16:creationId xmlns:a16="http://schemas.microsoft.com/office/drawing/2014/main" id="{CDDDB2AC-7A3F-471B-BDBE-B5FB8465CD91}"/>
+                <a16:creationId xmlns:a16="http://schemas.microsoft.com/office/drawing/2014/main" id="{A75F3672-73AF-40AB-AFB2-A2484831A0F4}"/>
               </a:ext>
             </a:extLst>
           </p:cNvPr>
@@ -41700,7 +41700,7 @@
           <p:cNvPr id="49" name="">
             <a:extLst xmlns:a="http://schemas.openxmlformats.org/drawingml/2006/main">
               <a:ext uri="{FF2B5EF4-FFF2-40B4-BE49-F238E27FC236}">
-                <a16:creationId xmlns:a16="http://schemas.microsoft.com/office/drawing/2014/main" id="{7A8065DF-C9C5-47B9-9FD5-D7255BD85CDA}"/>
+                <a16:creationId xmlns:a16="http://schemas.microsoft.com/office/drawing/2014/main" id="{319ECC7C-3F53-4C2F-82EC-A3EF131691C4}"/>
               </a:ext>
             </a:extLst>
           </p:cNvPr>
@@ -41752,7 +41752,7 @@
           <p:cNvPr id="50" name="">
             <a:extLst xmlns:a="http://schemas.openxmlformats.org/drawingml/2006/main">
               <a:ext uri="{FF2B5EF4-FFF2-40B4-BE49-F238E27FC236}">
-                <a16:creationId xmlns:a16="http://schemas.microsoft.com/office/drawing/2014/main" id="{BC637266-6AAD-42B0-99CC-DFC523819F95}"/>
+                <a16:creationId xmlns:a16="http://schemas.microsoft.com/office/drawing/2014/main" id="{1145DC09-726E-42FB-A8FA-5328188A1D55}"/>
               </a:ext>
             </a:extLst>
           </p:cNvPr>
@@ -41783,7 +41783,7 @@
           <p:cNvPr id="51" name="">
             <a:extLst xmlns:a="http://schemas.openxmlformats.org/drawingml/2006/main">
               <a:ext uri="{FF2B5EF4-FFF2-40B4-BE49-F238E27FC236}">
-                <a16:creationId xmlns:a16="http://schemas.microsoft.com/office/drawing/2014/main" id="{FCE014D3-3D01-4FE2-B60E-397239931D05}"/>
+                <a16:creationId xmlns:a16="http://schemas.microsoft.com/office/drawing/2014/main" id="{1CB673C1-78D0-40AE-B198-7E7C55A08A4C}"/>
               </a:ext>
             </a:extLst>
           </p:cNvPr>
@@ -41814,7 +41814,7 @@
           <p:cNvPr id="52" name="">
             <a:extLst xmlns:a="http://schemas.openxmlformats.org/drawingml/2006/main">
               <a:ext uri="{FF2B5EF4-FFF2-40B4-BE49-F238E27FC236}">
-                <a16:creationId xmlns:a16="http://schemas.microsoft.com/office/drawing/2014/main" id="{28EE4EB2-50CC-40CD-B11C-6A1E7BABAE42}"/>
+                <a16:creationId xmlns:a16="http://schemas.microsoft.com/office/drawing/2014/main" id="{DFFBB605-2BC9-4674-A03F-975020D8CA47}"/>
               </a:ext>
             </a:extLst>
           </p:cNvPr>
@@ -41866,7 +41866,7 @@
           <p:cNvPr id="53" name="">
             <a:extLst xmlns:a="http://schemas.openxmlformats.org/drawingml/2006/main">
               <a:ext uri="{FF2B5EF4-FFF2-40B4-BE49-F238E27FC236}">
-                <a16:creationId xmlns:a16="http://schemas.microsoft.com/office/drawing/2014/main" id="{9878380E-61C5-4C54-8161-A7596530CBA6}"/>
+                <a16:creationId xmlns:a16="http://schemas.microsoft.com/office/drawing/2014/main" id="{E6CFEFDB-30A6-47BF-A0D0-805AABBB8716}"/>
               </a:ext>
             </a:extLst>
           </p:cNvPr>
@@ -41918,7 +41918,7 @@
           <p:cNvPr id="54" name="">
             <a:extLst xmlns:a="http://schemas.openxmlformats.org/drawingml/2006/main">
               <a:ext uri="{FF2B5EF4-FFF2-40B4-BE49-F238E27FC236}">
-                <a16:creationId xmlns:a16="http://schemas.microsoft.com/office/drawing/2014/main" id="{8E36B742-A95D-48CF-99EC-3788ABE5B7F1}"/>
+                <a16:creationId xmlns:a16="http://schemas.microsoft.com/office/drawing/2014/main" id="{BEE2D3B6-960A-494E-811C-8044E8FCC6A2}"/>
               </a:ext>
             </a:extLst>
           </p:cNvPr>
@@ -41970,7 +41970,7 @@
           <p:cNvPr id="55" name="">
             <a:extLst xmlns:a="http://schemas.openxmlformats.org/drawingml/2006/main">
               <a:ext uri="{FF2B5EF4-FFF2-40B4-BE49-F238E27FC236}">
-                <a16:creationId xmlns:a16="http://schemas.microsoft.com/office/drawing/2014/main" id="{2A26BDF4-1DDF-4754-B604-A57CF2D8FEC5}"/>
+                <a16:creationId xmlns:a16="http://schemas.microsoft.com/office/drawing/2014/main" id="{2B041FD8-AC00-4256-8452-F7E301486E14}"/>
               </a:ext>
             </a:extLst>
           </p:cNvPr>
@@ -42022,7 +42022,7 @@
           <p:cNvPr id="56" name="">
             <a:extLst xmlns:a="http://schemas.openxmlformats.org/drawingml/2006/main">
               <a:ext uri="{FF2B5EF4-FFF2-40B4-BE49-F238E27FC236}">
-                <a16:creationId xmlns:a16="http://schemas.microsoft.com/office/drawing/2014/main" id="{FCFDA2A8-EEB7-46D5-BC71-56A623B67ADE}"/>
+                <a16:creationId xmlns:a16="http://schemas.microsoft.com/office/drawing/2014/main" id="{9DAA6D2D-3FE2-4BDC-B5D0-5D3113F850FF}"/>
               </a:ext>
             </a:extLst>
           </p:cNvPr>
@@ -42074,7 +42074,7 @@
           <p:cNvPr id="57" name="">
             <a:extLst xmlns:a="http://schemas.openxmlformats.org/drawingml/2006/main">
               <a:ext uri="{FF2B5EF4-FFF2-40B4-BE49-F238E27FC236}">
-                <a16:creationId xmlns:a16="http://schemas.microsoft.com/office/drawing/2014/main" id="{C243D671-3EB5-4FE4-B58B-E097C266465F}"/>
+                <a16:creationId xmlns:a16="http://schemas.microsoft.com/office/drawing/2014/main" id="{679A8919-0FDF-4246-841D-A187BFC22698}"/>
               </a:ext>
             </a:extLst>
           </p:cNvPr>
@@ -42105,7 +42105,7 @@
           <p:cNvPr id="58" name="">
             <a:extLst xmlns:a="http://schemas.openxmlformats.org/drawingml/2006/main">
               <a:ext uri="{FF2B5EF4-FFF2-40B4-BE49-F238E27FC236}">
-                <a16:creationId xmlns:a16="http://schemas.microsoft.com/office/drawing/2014/main" id="{E37C0CC8-DF6B-469D-B14F-EC46B794C8A9}"/>
+                <a16:creationId xmlns:a16="http://schemas.microsoft.com/office/drawing/2014/main" id="{FA314144-ECA6-4A9A-9FC3-DA4B8A8F7088}"/>
               </a:ext>
             </a:extLst>
           </p:cNvPr>
@@ -42157,7 +42157,7 @@
           <p:cNvPr id="59" name="">
             <a:extLst xmlns:a="http://schemas.openxmlformats.org/drawingml/2006/main">
               <a:ext uri="{FF2B5EF4-FFF2-40B4-BE49-F238E27FC236}">
-                <a16:creationId xmlns:a16="http://schemas.microsoft.com/office/drawing/2014/main" id="{A546B35C-629F-4596-AF9B-8436DD0CECAD}"/>
+                <a16:creationId xmlns:a16="http://schemas.microsoft.com/office/drawing/2014/main" id="{0BE59875-8CEB-4F63-9290-67E040F44E30}"/>
               </a:ext>
             </a:extLst>
           </p:cNvPr>
@@ -42209,7 +42209,7 @@
           <p:cNvPr id="60" name="">
             <a:extLst xmlns:a="http://schemas.openxmlformats.org/drawingml/2006/main">
               <a:ext uri="{FF2B5EF4-FFF2-40B4-BE49-F238E27FC236}">
-                <a16:creationId xmlns:a16="http://schemas.microsoft.com/office/drawing/2014/main" id="{F4683763-10C6-4208-B923-8367B246B7A9}"/>
+                <a16:creationId xmlns:a16="http://schemas.microsoft.com/office/drawing/2014/main" id="{C993DA3D-9832-48D3-9171-51FD9DD595C7}"/>
               </a:ext>
             </a:extLst>
           </p:cNvPr>
@@ -42261,7 +42261,7 @@
           <p:cNvPr id="61" name="">
             <a:extLst xmlns:a="http://schemas.openxmlformats.org/drawingml/2006/main">
               <a:ext uri="{FF2B5EF4-FFF2-40B4-BE49-F238E27FC236}">
-                <a16:creationId xmlns:a16="http://schemas.microsoft.com/office/drawing/2014/main" id="{B53487F9-6CE1-4CAB-960E-669B6BB82968}"/>
+                <a16:creationId xmlns:a16="http://schemas.microsoft.com/office/drawing/2014/main" id="{D0317CCA-8CA4-49EF-A7CB-631B8655C3F7}"/>
               </a:ext>
             </a:extLst>
           </p:cNvPr>
@@ -42313,7 +42313,7 @@
           <p:cNvPr id="62" name="">
             <a:extLst xmlns:a="http://schemas.openxmlformats.org/drawingml/2006/main">
               <a:ext uri="{FF2B5EF4-FFF2-40B4-BE49-F238E27FC236}">
-                <a16:creationId xmlns:a16="http://schemas.microsoft.com/office/drawing/2014/main" id="{3802D27E-CA14-436B-B283-B424A189C905}"/>
+                <a16:creationId xmlns:a16="http://schemas.microsoft.com/office/drawing/2014/main" id="{544D546E-92BA-4641-A923-90CCA62EFE7A}"/>
               </a:ext>
             </a:extLst>
           </p:cNvPr>
@@ -42365,7 +42365,7 @@
           <p:cNvPr id="63" name="">
             <a:extLst xmlns:a="http://schemas.openxmlformats.org/drawingml/2006/main">
               <a:ext uri="{FF2B5EF4-FFF2-40B4-BE49-F238E27FC236}">
-                <a16:creationId xmlns:a16="http://schemas.microsoft.com/office/drawing/2014/main" id="{0E8E0F79-3034-4399-86B3-987F5D1CF938}"/>
+                <a16:creationId xmlns:a16="http://schemas.microsoft.com/office/drawing/2014/main" id="{35BD4A52-1618-4FA9-AB49-C9DFB15F8D35}"/>
               </a:ext>
             </a:extLst>
           </p:cNvPr>
@@ -42396,7 +42396,7 @@
           <p:cNvPr id="64" name="">
             <a:extLst xmlns:a="http://schemas.openxmlformats.org/drawingml/2006/main">
               <a:ext uri="{FF2B5EF4-FFF2-40B4-BE49-F238E27FC236}">
-                <a16:creationId xmlns:a16="http://schemas.microsoft.com/office/drawing/2014/main" id="{5A03D73A-E852-4F96-A7F3-10F3312F8F27}"/>
+                <a16:creationId xmlns:a16="http://schemas.microsoft.com/office/drawing/2014/main" id="{3FA3E431-EA23-4194-BBC0-9AC1730E680C}"/>
               </a:ext>
             </a:extLst>
           </p:cNvPr>
@@ -42427,7 +42427,7 @@
           <p:cNvPr id="65" name="">
             <a:extLst xmlns:a="http://schemas.openxmlformats.org/drawingml/2006/main">
               <a:ext uri="{FF2B5EF4-FFF2-40B4-BE49-F238E27FC236}">
-                <a16:creationId xmlns:a16="http://schemas.microsoft.com/office/drawing/2014/main" id="{0475F27F-B678-4120-9E8D-FB36285D028F}"/>
+                <a16:creationId xmlns:a16="http://schemas.microsoft.com/office/drawing/2014/main" id="{CBF4C730-00D1-48DB-B296-8BA2544D31E1}"/>
               </a:ext>
             </a:extLst>
           </p:cNvPr>
@@ -42479,7 +42479,7 @@
           <p:cNvPr id="66" name="">
             <a:extLst xmlns:a="http://schemas.openxmlformats.org/drawingml/2006/main">
               <a:ext uri="{FF2B5EF4-FFF2-40B4-BE49-F238E27FC236}">
-                <a16:creationId xmlns:a16="http://schemas.microsoft.com/office/drawing/2014/main" id="{8DCCCB96-322F-49E0-91F9-521000735316}"/>
+                <a16:creationId xmlns:a16="http://schemas.microsoft.com/office/drawing/2014/main" id="{80E0DA7F-FD8C-4EC4-9F4C-9E1C4CEBE2C9}"/>
               </a:ext>
             </a:extLst>
           </p:cNvPr>
@@ -42531,7 +42531,7 @@
           <p:cNvPr id="67" name="">
             <a:extLst xmlns:a="http://schemas.openxmlformats.org/drawingml/2006/main">
               <a:ext uri="{FF2B5EF4-FFF2-40B4-BE49-F238E27FC236}">
-                <a16:creationId xmlns:a16="http://schemas.microsoft.com/office/drawing/2014/main" id="{DDF729C0-C7B8-4229-8224-D835DE1DEA1D}"/>
+                <a16:creationId xmlns:a16="http://schemas.microsoft.com/office/drawing/2014/main" id="{6C935FE5-DDBF-4CA4-923A-391AB54C6DE2}"/>
               </a:ext>
             </a:extLst>
           </p:cNvPr>
@@ -42583,7 +42583,7 @@
           <p:cNvPr id="68" name="">
             <a:extLst xmlns:a="http://schemas.openxmlformats.org/drawingml/2006/main">
               <a:ext uri="{FF2B5EF4-FFF2-40B4-BE49-F238E27FC236}">
-                <a16:creationId xmlns:a16="http://schemas.microsoft.com/office/drawing/2014/main" id="{883D80DB-09E6-4A8D-93EC-399466E4EDF6}"/>
+                <a16:creationId xmlns:a16="http://schemas.microsoft.com/office/drawing/2014/main" id="{470C9CE9-6FD2-45B3-93E7-E11266D6B012}"/>
               </a:ext>
             </a:extLst>
           </p:cNvPr>
@@ -42635,7 +42635,7 @@
           <p:cNvPr id="69" name="">
             <a:extLst xmlns:a="http://schemas.openxmlformats.org/drawingml/2006/main">
               <a:ext uri="{FF2B5EF4-FFF2-40B4-BE49-F238E27FC236}">
-                <a16:creationId xmlns:a16="http://schemas.microsoft.com/office/drawing/2014/main" id="{D39C9858-DF27-44F0-9F87-690ECBDE52A9}"/>
+                <a16:creationId xmlns:a16="http://schemas.microsoft.com/office/drawing/2014/main" id="{17AE15AB-CAF1-408E-9684-221D2FD0457D}"/>
               </a:ext>
             </a:extLst>
           </p:cNvPr>
@@ -42687,7 +42687,7 @@
           <p:cNvPr id="70" name="">
             <a:extLst xmlns:a="http://schemas.openxmlformats.org/drawingml/2006/main">
               <a:ext uri="{FF2B5EF4-FFF2-40B4-BE49-F238E27FC236}">
-                <a16:creationId xmlns:a16="http://schemas.microsoft.com/office/drawing/2014/main" id="{76E03577-B2B1-45EC-8BA2-3B85BC184CAD}"/>
+                <a16:creationId xmlns:a16="http://schemas.microsoft.com/office/drawing/2014/main" id="{B91CA060-A9BB-44AA-A4E9-5C756C6F9080}"/>
               </a:ext>
             </a:extLst>
           </p:cNvPr>
@@ -42718,7 +42718,7 @@
           <p:cNvPr id="71" name="">
             <a:extLst xmlns:a="http://schemas.openxmlformats.org/drawingml/2006/main">
               <a:ext uri="{FF2B5EF4-FFF2-40B4-BE49-F238E27FC236}">
-                <a16:creationId xmlns:a16="http://schemas.microsoft.com/office/drawing/2014/main" id="{B5700D89-0957-4629-B021-DE7F7E954777}"/>
+                <a16:creationId xmlns:a16="http://schemas.microsoft.com/office/drawing/2014/main" id="{FC136091-8676-404D-95DF-070149206554}"/>
               </a:ext>
             </a:extLst>
           </p:cNvPr>
@@ -42770,7 +42770,7 @@
           <p:cNvPr id="72" name="">
             <a:extLst xmlns:a="http://schemas.openxmlformats.org/drawingml/2006/main">
               <a:ext uri="{FF2B5EF4-FFF2-40B4-BE49-F238E27FC236}">
-                <a16:creationId xmlns:a16="http://schemas.microsoft.com/office/drawing/2014/main" id="{5D6F20ED-01D0-445B-9189-1344B7762E14}"/>
+                <a16:creationId xmlns:a16="http://schemas.microsoft.com/office/drawing/2014/main" id="{BE20001C-CCE8-42C5-B1E8-935E173461D0}"/>
               </a:ext>
             </a:extLst>
           </p:cNvPr>
@@ -42822,7 +42822,7 @@
           <p:cNvPr id="73" name="">
             <a:extLst xmlns:a="http://schemas.openxmlformats.org/drawingml/2006/main">
               <a:ext uri="{FF2B5EF4-FFF2-40B4-BE49-F238E27FC236}">
-                <a16:creationId xmlns:a16="http://schemas.microsoft.com/office/drawing/2014/main" id="{69691A9C-A6C4-4E5B-A13F-22F03B456CF0}"/>
+                <a16:creationId xmlns:a16="http://schemas.microsoft.com/office/drawing/2014/main" id="{54835BF4-FED8-48B5-903C-DBC4E4746465}"/>
               </a:ext>
             </a:extLst>
           </p:cNvPr>
@@ -42874,7 +42874,7 @@
           <p:cNvPr id="74" name="">
             <a:extLst xmlns:a="http://schemas.openxmlformats.org/drawingml/2006/main">
               <a:ext uri="{FF2B5EF4-FFF2-40B4-BE49-F238E27FC236}">
-                <a16:creationId xmlns:a16="http://schemas.microsoft.com/office/drawing/2014/main" id="{73FEC64C-0D4A-4051-A232-07F5892F73D7}"/>
+                <a16:creationId xmlns:a16="http://schemas.microsoft.com/office/drawing/2014/main" id="{EEFF220D-F19F-4F46-AD8B-F227D9ED72F3}"/>
               </a:ext>
             </a:extLst>
           </p:cNvPr>
@@ -42926,7 +42926,7 @@
           <p:cNvPr id="75" name="">
             <a:extLst xmlns:a="http://schemas.openxmlformats.org/drawingml/2006/main">
               <a:ext uri="{FF2B5EF4-FFF2-40B4-BE49-F238E27FC236}">
-                <a16:creationId xmlns:a16="http://schemas.microsoft.com/office/drawing/2014/main" id="{53D34267-64BA-4BEF-8CDB-1B982FB3E95C}"/>
+                <a16:creationId xmlns:a16="http://schemas.microsoft.com/office/drawing/2014/main" id="{F6E9B3BB-EC1F-4625-9363-77C80DBC1D07}"/>
               </a:ext>
             </a:extLst>
           </p:cNvPr>
@@ -42978,7 +42978,7 @@
           <p:cNvPr id="76" name="">
             <a:extLst xmlns:a="http://schemas.openxmlformats.org/drawingml/2006/main">
               <a:ext uri="{FF2B5EF4-FFF2-40B4-BE49-F238E27FC236}">
-                <a16:creationId xmlns:a16="http://schemas.microsoft.com/office/drawing/2014/main" id="{A0135C3B-080C-4E51-95A0-F7A82C8F8394}"/>
+                <a16:creationId xmlns:a16="http://schemas.microsoft.com/office/drawing/2014/main" id="{ECFDABB4-3D6C-4994-A47C-F095896E3CD7}"/>
               </a:ext>
             </a:extLst>
           </p:cNvPr>
@@ -43009,7 +43009,7 @@
           <p:cNvPr id="77" name="">
             <a:extLst xmlns:a="http://schemas.openxmlformats.org/drawingml/2006/main">
               <a:ext uri="{FF2B5EF4-FFF2-40B4-BE49-F238E27FC236}">
-                <a16:creationId xmlns:a16="http://schemas.microsoft.com/office/drawing/2014/main" id="{B29B05F3-A3C7-491F-AC05-26AE9908F7B0}"/>
+                <a16:creationId xmlns:a16="http://schemas.microsoft.com/office/drawing/2014/main" id="{DFF0713F-16B3-4C4C-A480-D0CD90A964B9}"/>
               </a:ext>
             </a:extLst>
           </p:cNvPr>
@@ -43040,7 +43040,7 @@
           <p:cNvPr id="78" name="">
             <a:extLst xmlns:a="http://schemas.openxmlformats.org/drawingml/2006/main">
               <a:ext uri="{FF2B5EF4-FFF2-40B4-BE49-F238E27FC236}">
-                <a16:creationId xmlns:a16="http://schemas.microsoft.com/office/drawing/2014/main" id="{F27BA489-F58C-4F74-9235-2E535D61BC2D}"/>
+                <a16:creationId xmlns:a16="http://schemas.microsoft.com/office/drawing/2014/main" id="{EBA1C909-9586-4CAF-B025-CBE2281F2F8A}"/>
               </a:ext>
             </a:extLst>
           </p:cNvPr>
@@ -43092,7 +43092,7 @@
           <p:cNvPr id="79" name="">
             <a:extLst xmlns:a="http://schemas.openxmlformats.org/drawingml/2006/main">
               <a:ext uri="{FF2B5EF4-FFF2-40B4-BE49-F238E27FC236}">
-                <a16:creationId xmlns:a16="http://schemas.microsoft.com/office/drawing/2014/main" id="{5292EF16-BDDD-47B1-B72F-F9DD6DD4D8B0}"/>
+                <a16:creationId xmlns:a16="http://schemas.microsoft.com/office/drawing/2014/main" id="{F64EA770-C789-4730-96F1-497126429CE6}"/>
               </a:ext>
             </a:extLst>
           </p:cNvPr>
@@ -43144,7 +43144,7 @@
           <p:cNvPr id="80" name="">
             <a:extLst xmlns:a="http://schemas.openxmlformats.org/drawingml/2006/main">
               <a:ext uri="{FF2B5EF4-FFF2-40B4-BE49-F238E27FC236}">
-                <a16:creationId xmlns:a16="http://schemas.microsoft.com/office/drawing/2014/main" id="{27932E59-3D61-478F-A321-384F4E31DB58}"/>
+                <a16:creationId xmlns:a16="http://schemas.microsoft.com/office/drawing/2014/main" id="{D5692F4F-A281-40B8-9E54-4EC058E4B4E6}"/>
               </a:ext>
             </a:extLst>
           </p:cNvPr>
@@ -43196,7 +43196,7 @@
           <p:cNvPr id="81" name="">
             <a:extLst xmlns:a="http://schemas.openxmlformats.org/drawingml/2006/main">
               <a:ext uri="{FF2B5EF4-FFF2-40B4-BE49-F238E27FC236}">
-                <a16:creationId xmlns:a16="http://schemas.microsoft.com/office/drawing/2014/main" id="{66FD7A2F-4BD3-4070-A89D-91D3816E102A}"/>
+                <a16:creationId xmlns:a16="http://schemas.microsoft.com/office/drawing/2014/main" id="{BF52535E-629F-472C-97B8-20A71BF4209F}"/>
               </a:ext>
             </a:extLst>
           </p:cNvPr>
@@ -43248,7 +43248,7 @@
           <p:cNvPr id="82" name="">
             <a:extLst xmlns:a="http://schemas.openxmlformats.org/drawingml/2006/main">
               <a:ext uri="{FF2B5EF4-FFF2-40B4-BE49-F238E27FC236}">
-                <a16:creationId xmlns:a16="http://schemas.microsoft.com/office/drawing/2014/main" id="{F477A87D-1461-4EFC-AD23-3F86C9BEC77B}"/>
+                <a16:creationId xmlns:a16="http://schemas.microsoft.com/office/drawing/2014/main" id="{B8E92331-87B8-4DBD-BC55-7801924AF26A}"/>
               </a:ext>
             </a:extLst>
           </p:cNvPr>
@@ -43300,7 +43300,7 @@
           <p:cNvPr id="83" name="">
             <a:extLst xmlns:a="http://schemas.openxmlformats.org/drawingml/2006/main">
               <a:ext uri="{FF2B5EF4-FFF2-40B4-BE49-F238E27FC236}">
-                <a16:creationId xmlns:a16="http://schemas.microsoft.com/office/drawing/2014/main" id="{03E7F74E-A4AC-4DEE-A966-B433F53D22B9}"/>
+                <a16:creationId xmlns:a16="http://schemas.microsoft.com/office/drawing/2014/main" id="{5936414C-9FF2-48DE-8A71-1A86793C268E}"/>
               </a:ext>
             </a:extLst>
           </p:cNvPr>
@@ -43331,7 +43331,7 @@
           <p:cNvPr id="84" name="">
             <a:extLst xmlns:a="http://schemas.openxmlformats.org/drawingml/2006/main">
               <a:ext uri="{FF2B5EF4-FFF2-40B4-BE49-F238E27FC236}">
-                <a16:creationId xmlns:a16="http://schemas.microsoft.com/office/drawing/2014/main" id="{755D613E-2141-4F10-80F1-D23666EC4464}"/>
+                <a16:creationId xmlns:a16="http://schemas.microsoft.com/office/drawing/2014/main" id="{BCE35984-999E-46D2-8CFC-DD895C875081}"/>
               </a:ext>
             </a:extLst>
           </p:cNvPr>
@@ -43383,7 +43383,7 @@
           <p:cNvPr id="85" name="">
             <a:extLst xmlns:a="http://schemas.openxmlformats.org/drawingml/2006/main">
               <a:ext uri="{FF2B5EF4-FFF2-40B4-BE49-F238E27FC236}">
-                <a16:creationId xmlns:a16="http://schemas.microsoft.com/office/drawing/2014/main" id="{7EA0E94A-1777-4640-A385-913664DA32F3}"/>
+                <a16:creationId xmlns:a16="http://schemas.microsoft.com/office/drawing/2014/main" id="{59ECC8B7-77DE-4AE8-924C-807D6C272367}"/>
               </a:ext>
             </a:extLst>
           </p:cNvPr>
@@ -43435,7 +43435,7 @@
           <p:cNvPr id="86" name="">
             <a:extLst xmlns:a="http://schemas.openxmlformats.org/drawingml/2006/main">
               <a:ext uri="{FF2B5EF4-FFF2-40B4-BE49-F238E27FC236}">
-                <a16:creationId xmlns:a16="http://schemas.microsoft.com/office/drawing/2014/main" id="{DB612E52-A0DB-4352-B9CC-C5C3B852EFE4}"/>
+                <a16:creationId xmlns:a16="http://schemas.microsoft.com/office/drawing/2014/main" id="{98586A17-015E-4D1E-94B2-A4699B473A22}"/>
               </a:ext>
             </a:extLst>
           </p:cNvPr>
@@ -43487,7 +43487,7 @@
           <p:cNvPr id="87" name="">
             <a:extLst xmlns:a="http://schemas.openxmlformats.org/drawingml/2006/main">
               <a:ext uri="{FF2B5EF4-FFF2-40B4-BE49-F238E27FC236}">
-                <a16:creationId xmlns:a16="http://schemas.microsoft.com/office/drawing/2014/main" id="{EB6B68BC-B92E-42B4-ADA9-D4119FF4DC5C}"/>
+                <a16:creationId xmlns:a16="http://schemas.microsoft.com/office/drawing/2014/main" id="{F930F36E-E72F-41C8-97D8-63365D925005}"/>
               </a:ext>
             </a:extLst>
           </p:cNvPr>
@@ -43539,7 +43539,7 @@
           <p:cNvPr id="88" name="">
             <a:extLst xmlns:a="http://schemas.openxmlformats.org/drawingml/2006/main">
               <a:ext uri="{FF2B5EF4-FFF2-40B4-BE49-F238E27FC236}">
-                <a16:creationId xmlns:a16="http://schemas.microsoft.com/office/drawing/2014/main" id="{0A62EBFA-6B81-43DB-9FE2-8422469FF1C0}"/>
+                <a16:creationId xmlns:a16="http://schemas.microsoft.com/office/drawing/2014/main" id="{9B055A79-608E-4CF5-9B33-500077968A93}"/>
               </a:ext>
             </a:extLst>
           </p:cNvPr>
@@ -43591,7 +43591,7 @@
           <p:cNvPr id="89" name="">
             <a:extLst xmlns:a="http://schemas.openxmlformats.org/drawingml/2006/main">
               <a:ext uri="{FF2B5EF4-FFF2-40B4-BE49-F238E27FC236}">
-                <a16:creationId xmlns:a16="http://schemas.microsoft.com/office/drawing/2014/main" id="{D3013EF7-932B-4999-BF93-3A385201855E}"/>
+                <a16:creationId xmlns:a16="http://schemas.microsoft.com/office/drawing/2014/main" id="{78DBD698-DB36-4F24-ACEB-E761F8B0A466}"/>
               </a:ext>
             </a:extLst>
           </p:cNvPr>
@@ -43622,7 +43622,7 @@
           <p:cNvPr id="90" name="">
             <a:extLst xmlns:a="http://schemas.openxmlformats.org/drawingml/2006/main">
               <a:ext uri="{FF2B5EF4-FFF2-40B4-BE49-F238E27FC236}">
-                <a16:creationId xmlns:a16="http://schemas.microsoft.com/office/drawing/2014/main" id="{B3D8E917-9467-45B8-92B7-6C728A7F852C}"/>
+                <a16:creationId xmlns:a16="http://schemas.microsoft.com/office/drawing/2014/main" id="{544F50DC-52EE-4641-B2CE-F2D072F8C28F}"/>
               </a:ext>
             </a:extLst>
           </p:cNvPr>
@@ -43653,7 +43653,7 @@
           <p:cNvPr id="91" name="">
             <a:extLst xmlns:a="http://schemas.openxmlformats.org/drawingml/2006/main">
               <a:ext uri="{FF2B5EF4-FFF2-40B4-BE49-F238E27FC236}">
-                <a16:creationId xmlns:a16="http://schemas.microsoft.com/office/drawing/2014/main" id="{AA7763D9-6457-4582-9055-6EA64E04771A}"/>
+                <a16:creationId xmlns:a16="http://schemas.microsoft.com/office/drawing/2014/main" id="{3A0EFE20-6909-4747-855C-1068704D867B}"/>
               </a:ext>
             </a:extLst>
           </p:cNvPr>
@@ -43705,7 +43705,7 @@
           <p:cNvPr id="92" name="">
             <a:extLst xmlns:a="http://schemas.openxmlformats.org/drawingml/2006/main">
               <a:ext uri="{FF2B5EF4-FFF2-40B4-BE49-F238E27FC236}">
-                <a16:creationId xmlns:a16="http://schemas.microsoft.com/office/drawing/2014/main" id="{EFDE92DB-CA50-42EC-873E-BCA526D90957}"/>
+                <a16:creationId xmlns:a16="http://schemas.microsoft.com/office/drawing/2014/main" id="{B78684A5-0F5F-4E42-884C-A0993EFDA181}"/>
               </a:ext>
             </a:extLst>
           </p:cNvPr>
@@ -43757,7 +43757,7 @@
           <p:cNvPr id="93" name="">
             <a:extLst xmlns:a="http://schemas.openxmlformats.org/drawingml/2006/main">
               <a:ext uri="{FF2B5EF4-FFF2-40B4-BE49-F238E27FC236}">
-                <a16:creationId xmlns:a16="http://schemas.microsoft.com/office/drawing/2014/main" id="{0C3602B1-BAAD-487C-B1A3-38C37535BA1D}"/>
+                <a16:creationId xmlns:a16="http://schemas.microsoft.com/office/drawing/2014/main" id="{9F7D1194-28A8-460B-A557-CB3E83C331DE}"/>
               </a:ext>
             </a:extLst>
           </p:cNvPr>
@@ -43809,7 +43809,7 @@
           <p:cNvPr id="94" name="">
             <a:extLst xmlns:a="http://schemas.openxmlformats.org/drawingml/2006/main">
               <a:ext uri="{FF2B5EF4-FFF2-40B4-BE49-F238E27FC236}">
-                <a16:creationId xmlns:a16="http://schemas.microsoft.com/office/drawing/2014/main" id="{234CEF81-DFE0-4D53-A95B-80ACB3CDEF25}"/>
+                <a16:creationId xmlns:a16="http://schemas.microsoft.com/office/drawing/2014/main" id="{28A9FDC1-9CF3-4A03-84C7-E39CC86C1795}"/>
               </a:ext>
             </a:extLst>
           </p:cNvPr>
@@ -43861,7 +43861,7 @@
           <p:cNvPr id="95" name="">
             <a:extLst xmlns:a="http://schemas.openxmlformats.org/drawingml/2006/main">
               <a:ext uri="{FF2B5EF4-FFF2-40B4-BE49-F238E27FC236}">
-                <a16:creationId xmlns:a16="http://schemas.microsoft.com/office/drawing/2014/main" id="{0F4C25ED-DB8C-4584-8720-9401AD66F6A5}"/>
+                <a16:creationId xmlns:a16="http://schemas.microsoft.com/office/drawing/2014/main" id="{3FF9803E-7A6A-4EFA-A599-940C494AE925}"/>
               </a:ext>
             </a:extLst>
           </p:cNvPr>
@@ -43913,7 +43913,7 @@
           <p:cNvPr id="96" name="">
             <a:extLst xmlns:a="http://schemas.openxmlformats.org/drawingml/2006/main">
               <a:ext uri="{FF2B5EF4-FFF2-40B4-BE49-F238E27FC236}">
-                <a16:creationId xmlns:a16="http://schemas.microsoft.com/office/drawing/2014/main" id="{D45FB5D1-BCDA-4127-BC50-8D42F00C7421}"/>
+                <a16:creationId xmlns:a16="http://schemas.microsoft.com/office/drawing/2014/main" id="{76DDB5DB-0793-4931-B608-D64091618298}"/>
               </a:ext>
             </a:extLst>
           </p:cNvPr>
@@ -43944,7 +43944,7 @@
           <p:cNvPr id="97" name="">
             <a:extLst xmlns:a="http://schemas.openxmlformats.org/drawingml/2006/main">
               <a:ext uri="{FF2B5EF4-FFF2-40B4-BE49-F238E27FC236}">
-                <a16:creationId xmlns:a16="http://schemas.microsoft.com/office/drawing/2014/main" id="{CEC695DD-533E-42BC-B782-5CDA47EB8EEF}"/>
+                <a16:creationId xmlns:a16="http://schemas.microsoft.com/office/drawing/2014/main" id="{030F16DE-D441-4558-A641-2A395D6F9E22}"/>
               </a:ext>
             </a:extLst>
           </p:cNvPr>
@@ -43996,7 +43996,7 @@
           <p:cNvPr id="98" name="">
             <a:extLst xmlns:a="http://schemas.openxmlformats.org/drawingml/2006/main">
               <a:ext uri="{FF2B5EF4-FFF2-40B4-BE49-F238E27FC236}">
-                <a16:creationId xmlns:a16="http://schemas.microsoft.com/office/drawing/2014/main" id="{11AADE95-5D9C-4344-9BE2-B6682BB31E5C}"/>
+                <a16:creationId xmlns:a16="http://schemas.microsoft.com/office/drawing/2014/main" id="{B754832E-8F2F-4FDA-9DEF-86CC6D8ABF42}"/>
               </a:ext>
             </a:extLst>
           </p:cNvPr>
@@ -44048,7 +44048,7 @@
           <p:cNvPr id="99" name="">
             <a:extLst xmlns:a="http://schemas.openxmlformats.org/drawingml/2006/main">
               <a:ext uri="{FF2B5EF4-FFF2-40B4-BE49-F238E27FC236}">
-                <a16:creationId xmlns:a16="http://schemas.microsoft.com/office/drawing/2014/main" id="{3DCCFC56-6ED6-4591-9678-2F4A13279BF9}"/>
+                <a16:creationId xmlns:a16="http://schemas.microsoft.com/office/drawing/2014/main" id="{9D8EC4D6-A293-48D8-91AF-6E97EBF37682}"/>
               </a:ext>
             </a:extLst>
           </p:cNvPr>
@@ -44100,7 +44100,7 @@
           <p:cNvPr id="100" name="">
             <a:extLst xmlns:a="http://schemas.openxmlformats.org/drawingml/2006/main">
               <a:ext uri="{FF2B5EF4-FFF2-40B4-BE49-F238E27FC236}">
-                <a16:creationId xmlns:a16="http://schemas.microsoft.com/office/drawing/2014/main" id="{9F872851-F1F2-4B87-84BD-45ADCE94E746}"/>
+                <a16:creationId xmlns:a16="http://schemas.microsoft.com/office/drawing/2014/main" id="{CC36D0B6-8D78-40A4-B8FA-99716BE10B8B}"/>
               </a:ext>
             </a:extLst>
           </p:cNvPr>
@@ -44152,7 +44152,7 @@
           <p:cNvPr id="101" name="">
             <a:extLst xmlns:a="http://schemas.openxmlformats.org/drawingml/2006/main">
               <a:ext uri="{FF2B5EF4-FFF2-40B4-BE49-F238E27FC236}">
-                <a16:creationId xmlns:a16="http://schemas.microsoft.com/office/drawing/2014/main" id="{EA4C6814-09AE-4137-85DE-47F8109E37BA}"/>
+                <a16:creationId xmlns:a16="http://schemas.microsoft.com/office/drawing/2014/main" id="{D0E6650D-23EB-46A1-BC6C-DC844DA9B34F}"/>
               </a:ext>
             </a:extLst>
           </p:cNvPr>
@@ -44202,7 +44202,7 @@
     </p:spTree>
     <p:extLst>
       <p:ext uri="{BB962C8B-B14F-4D97-AF65-F5344CB8AC3E}">
-        <p14:creationId xmlns:p14="http://schemas.microsoft.com/office/powerpoint/2010/main" val="1129619863"/>
+        <p14:creationId xmlns:p14="http://schemas.microsoft.com/office/powerpoint/2010/main" val="1964292302"/>
       </p:ext>
     </p:extLst>
   </p:cSld>

--- a/.preview/pptx/deck.pptx
+++ b/.preview/pptx/deck.pptx
@@ -2,27 +2,27 @@
 <file path=ppt/presentation.xml><?xml version="1.0" encoding="utf-8"?>
 <p:presentation xmlns:p="http://schemas.openxmlformats.org/presentationml/2006/main">
   <p:sldMasterIdLst>
-    <p:sldMasterId xmlns:r="http://schemas.openxmlformats.org/officeDocument/2006/relationships" id="2147483648" r:id="Rabcd6a5550bf40f5"/>
+    <p:sldMasterId xmlns:r="http://schemas.openxmlformats.org/officeDocument/2006/relationships" id="2147483648" r:id="Rcf0d3283e6224fc8"/>
   </p:sldMasterIdLst>
   <p:notesMasterIdLst>
-    <p:notesMasterId xmlns:r="http://schemas.openxmlformats.org/officeDocument/2006/relationships" r:id="R98efa8bcddcf47d8"/>
+    <p:notesMasterId xmlns:r="http://schemas.openxmlformats.org/officeDocument/2006/relationships" r:id="Rb1a52eae991441aa"/>
   </p:notesMasterIdLst>
   <p:sldIdLst>
-    <p:sldId xmlns:r="http://schemas.openxmlformats.org/officeDocument/2006/relationships" id="256" r:id="Rfdcc491a879349d7"/>
-    <p:sldId xmlns:r="http://schemas.openxmlformats.org/officeDocument/2006/relationships" id="257" r:id="Rad498e9a92f34cfe"/>
-    <p:sldId xmlns:r="http://schemas.openxmlformats.org/officeDocument/2006/relationships" id="258" r:id="Recf5bf86c76d4e8a"/>
-    <p:sldId xmlns:r="http://schemas.openxmlformats.org/officeDocument/2006/relationships" id="259" r:id="R0b00f9e12e314d41"/>
-    <p:sldId xmlns:r="http://schemas.openxmlformats.org/officeDocument/2006/relationships" id="260" r:id="R64d4afc670cf4098"/>
-    <p:sldId xmlns:r="http://schemas.openxmlformats.org/officeDocument/2006/relationships" id="261" r:id="R1d9456bbe0b04643"/>
-    <p:sldId xmlns:r="http://schemas.openxmlformats.org/officeDocument/2006/relationships" id="262" r:id="R7b946bb9b7d94980"/>
-    <p:sldId xmlns:r="http://schemas.openxmlformats.org/officeDocument/2006/relationships" id="263" r:id="Rf614cfcaed9f41f8"/>
-    <p:sldId xmlns:r="http://schemas.openxmlformats.org/officeDocument/2006/relationships" id="264" r:id="R80358eed691a4562"/>
-    <p:sldId xmlns:r="http://schemas.openxmlformats.org/officeDocument/2006/relationships" id="265" r:id="Rf9bf23cb0a2f46dc"/>
-    <p:sldId xmlns:r="http://schemas.openxmlformats.org/officeDocument/2006/relationships" id="266" r:id="Rfc1c5c1c7b184d13"/>
-    <p:sldId xmlns:r="http://schemas.openxmlformats.org/officeDocument/2006/relationships" id="267" r:id="R265f62e86f694584"/>
-    <p:sldId xmlns:r="http://schemas.openxmlformats.org/officeDocument/2006/relationships" id="268" r:id="R5c7abea1f7534cf4"/>
-    <p:sldId xmlns:r="http://schemas.openxmlformats.org/officeDocument/2006/relationships" id="269" r:id="R17d070c6c783450c"/>
-    <p:sldId xmlns:r="http://schemas.openxmlformats.org/officeDocument/2006/relationships" id="270" r:id="R932debfbb8974e31"/>
+    <p:sldId xmlns:r="http://schemas.openxmlformats.org/officeDocument/2006/relationships" id="256" r:id="Rb74596be90d84c8a"/>
+    <p:sldId xmlns:r="http://schemas.openxmlformats.org/officeDocument/2006/relationships" id="257" r:id="R3b28bfa0efc64345"/>
+    <p:sldId xmlns:r="http://schemas.openxmlformats.org/officeDocument/2006/relationships" id="258" r:id="Rb9015361c32142e2"/>
+    <p:sldId xmlns:r="http://schemas.openxmlformats.org/officeDocument/2006/relationships" id="259" r:id="R0fbe62f58a9b4f7c"/>
+    <p:sldId xmlns:r="http://schemas.openxmlformats.org/officeDocument/2006/relationships" id="260" r:id="Rd03fd60ab9564ce6"/>
+    <p:sldId xmlns:r="http://schemas.openxmlformats.org/officeDocument/2006/relationships" id="261" r:id="R6004bd4a0f8f40a2"/>
+    <p:sldId xmlns:r="http://schemas.openxmlformats.org/officeDocument/2006/relationships" id="262" r:id="Re6296be937244531"/>
+    <p:sldId xmlns:r="http://schemas.openxmlformats.org/officeDocument/2006/relationships" id="263" r:id="R23536571c31e4579"/>
+    <p:sldId xmlns:r="http://schemas.openxmlformats.org/officeDocument/2006/relationships" id="264" r:id="R8c9a54492bd644cf"/>
+    <p:sldId xmlns:r="http://schemas.openxmlformats.org/officeDocument/2006/relationships" id="265" r:id="Re6815a7ef571433b"/>
+    <p:sldId xmlns:r="http://schemas.openxmlformats.org/officeDocument/2006/relationships" id="266" r:id="R8959f1a93eda46d4"/>
+    <p:sldId xmlns:r="http://schemas.openxmlformats.org/officeDocument/2006/relationships" id="267" r:id="R1511e5a30f434795"/>
+    <p:sldId xmlns:r="http://schemas.openxmlformats.org/officeDocument/2006/relationships" id="268" r:id="Rfcca35d60a3c47d2"/>
+    <p:sldId xmlns:r="http://schemas.openxmlformats.org/officeDocument/2006/relationships" id="269" r:id="R1089328ba0f94b54"/>
+    <p:sldId xmlns:r="http://schemas.openxmlformats.org/officeDocument/2006/relationships" id="270" r:id="Rc1c058bef5444a3c"/>
   </p:sldIdLst>
   <p:sldSz cx="12192000" cy="6858000"/>
   <p:notesSz cx="6858000" cy="9144000"/>
@@ -1879,7 +1879,7 @@
   </p:cSld>
   <p:clrMap bg1="lt1" tx1="dk1" bg2="lt2" tx2="dk2" accent1="accent1" accent2="accent2" accent3="accent3" accent4="accent4" accent5="accent5" accent6="accent6" hlink="hlink" folHlink="folHlink"/>
   <p:sldLayoutIdLst>
-    <p:sldLayoutId xmlns:r="http://schemas.openxmlformats.org/officeDocument/2006/relationships" id="2147483649" r:id="R37e68e175aac4291"/>
+    <p:sldLayoutId xmlns:r="http://schemas.openxmlformats.org/officeDocument/2006/relationships" id="2147483649" r:id="R8f65a41f8bc8427a"/>
   </p:sldLayoutIdLst>
   <p:txStyles>
     <p:titleStyle>
@@ -2430,7 +2430,7 @@
           <p:cNvPr id="17" name="">
             <a:extLst xmlns:a="http://schemas.openxmlformats.org/drawingml/2006/main">
               <a:ext uri="{FF2B5EF4-FFF2-40B4-BE49-F238E27FC236}">
-                <a16:creationId xmlns:a16="http://schemas.microsoft.com/office/drawing/2014/main" id="{67774519-65D4-4496-A70E-21CE81314EEF}"/>
+                <a16:creationId xmlns:a16="http://schemas.microsoft.com/office/drawing/2014/main" id="{0EECDA17-46EC-4CAE-BBBE-AB6DCB77D07A}"/>
               </a:ext>
             </a:extLst>
           </p:cNvPr>
@@ -2463,7 +2463,7 @@
           <p:cNvPr id="2" name="">
             <a:extLst xmlns:a="http://schemas.openxmlformats.org/drawingml/2006/main">
               <a:ext uri="{FF2B5EF4-FFF2-40B4-BE49-F238E27FC236}">
-                <a16:creationId xmlns:a16="http://schemas.microsoft.com/office/drawing/2014/main" id="{23A884F5-F98D-43DB-8795-48D028CBF6B5}"/>
+                <a16:creationId xmlns:a16="http://schemas.microsoft.com/office/drawing/2014/main" id="{81810820-F150-4C7D-9B14-3055E7449328}"/>
               </a:ext>
             </a:extLst>
           </p:cNvPr>
@@ -2494,7 +2494,7 @@
           <p:cNvPr id="3" name="">
             <a:extLst xmlns:a="http://schemas.openxmlformats.org/drawingml/2006/main">
               <a:ext uri="{FF2B5EF4-FFF2-40B4-BE49-F238E27FC236}">
-                <a16:creationId xmlns:a16="http://schemas.microsoft.com/office/drawing/2014/main" id="{B8098E4C-ED5A-41FC-AF67-0D5050B74143}"/>
+                <a16:creationId xmlns:a16="http://schemas.microsoft.com/office/drawing/2014/main" id="{CC74526A-322E-46F5-9F1F-34E872AB19C9}"/>
               </a:ext>
             </a:extLst>
           </p:cNvPr>
@@ -2529,7 +2529,7 @@
           <p:nvPr/>
         </p:nvPicPr>
         <p:blipFill>
-          <a:blip xmlns:r="http://schemas.openxmlformats.org/officeDocument/2006/relationships" xmlns:a="http://schemas.openxmlformats.org/drawingml/2006/main" r:embed="R44d52b8d01ab4268"/>
+          <a:blip xmlns:r="http://schemas.openxmlformats.org/officeDocument/2006/relationships" xmlns:a="http://schemas.openxmlformats.org/drawingml/2006/main" r:embed="Rb279f1a802d14703"/>
           <a:stretch xmlns:a="http://schemas.openxmlformats.org/drawingml/2006/main"/>
         </p:blipFill>
         <p:spPr>
@@ -2547,7 +2547,7 @@
           <p:cNvPr id="5" name="">
             <a:extLst xmlns:a="http://schemas.openxmlformats.org/drawingml/2006/main">
               <a:ext uri="{FF2B5EF4-FFF2-40B4-BE49-F238E27FC236}">
-                <a16:creationId xmlns:a16="http://schemas.microsoft.com/office/drawing/2014/main" id="{1A16C7B1-85F5-4A77-A1E9-70FE3B8E2C85}"/>
+                <a16:creationId xmlns:a16="http://schemas.microsoft.com/office/drawing/2014/main" id="{37A0F4A2-2C7B-45A5-9313-EB90775D7BB8}"/>
               </a:ext>
             </a:extLst>
           </p:cNvPr>
@@ -2599,7 +2599,7 @@
           <p:cNvPr id="6" name="">
             <a:extLst xmlns:a="http://schemas.openxmlformats.org/drawingml/2006/main">
               <a:ext uri="{FF2B5EF4-FFF2-40B4-BE49-F238E27FC236}">
-                <a16:creationId xmlns:a16="http://schemas.microsoft.com/office/drawing/2014/main" id="{29E5CE96-F123-4E0D-8748-89346BC57986}"/>
+                <a16:creationId xmlns:a16="http://schemas.microsoft.com/office/drawing/2014/main" id="{CFC38491-0E70-4B17-9381-DA9706E72870}"/>
               </a:ext>
             </a:extLst>
           </p:cNvPr>
@@ -2655,7 +2655,7 @@
           <p:nvPr/>
         </p:nvPicPr>
         <p:blipFill>
-          <a:blip xmlns:r="http://schemas.openxmlformats.org/officeDocument/2006/relationships" xmlns:a="http://schemas.openxmlformats.org/drawingml/2006/main" r:embed="R89b08bf9de1a465f"/>
+          <a:blip xmlns:r="http://schemas.openxmlformats.org/officeDocument/2006/relationships" xmlns:a="http://schemas.openxmlformats.org/drawingml/2006/main" r:embed="R6839fc47865641d7"/>
           <a:stretch xmlns:a="http://schemas.openxmlformats.org/drawingml/2006/main"/>
         </p:blipFill>
         <p:spPr>
@@ -2673,7 +2673,7 @@
           <p:cNvPr id="8" name="">
             <a:extLst xmlns:a="http://schemas.openxmlformats.org/drawingml/2006/main">
               <a:ext uri="{FF2B5EF4-FFF2-40B4-BE49-F238E27FC236}">
-                <a16:creationId xmlns:a16="http://schemas.microsoft.com/office/drawing/2014/main" id="{85045311-6E8D-4B11-8DE3-EF0225A020D5}"/>
+                <a16:creationId xmlns:a16="http://schemas.microsoft.com/office/drawing/2014/main" id="{210D38B8-3FF0-48CE-ADB8-61157B2C0FF6}"/>
               </a:ext>
             </a:extLst>
           </p:cNvPr>
@@ -2706,7 +2706,7 @@
           <p:cNvPr id="9" name="">
             <a:extLst xmlns:a="http://schemas.openxmlformats.org/drawingml/2006/main">
               <a:ext uri="{FF2B5EF4-FFF2-40B4-BE49-F238E27FC236}">
-                <a16:creationId xmlns:a16="http://schemas.microsoft.com/office/drawing/2014/main" id="{55E3F0F0-AE44-4051-B856-DE57D35E1405}"/>
+                <a16:creationId xmlns:a16="http://schemas.microsoft.com/office/drawing/2014/main" id="{B9BDACAD-A1A0-494E-AD8A-CFA42D39329F}"/>
               </a:ext>
             </a:extLst>
           </p:cNvPr>
@@ -2758,7 +2758,7 @@
           <p:cNvPr id="10" name="">
             <a:extLst xmlns:a="http://schemas.openxmlformats.org/drawingml/2006/main">
               <a:ext uri="{FF2B5EF4-FFF2-40B4-BE49-F238E27FC236}">
-                <a16:creationId xmlns:a16="http://schemas.microsoft.com/office/drawing/2014/main" id="{BE7BF496-1680-407B-98B7-F7B4DDC5734E}"/>
+                <a16:creationId xmlns:a16="http://schemas.microsoft.com/office/drawing/2014/main" id="{3F4E748B-5D97-4A12-8FA7-A86745BC4C17}"/>
               </a:ext>
             </a:extLst>
           </p:cNvPr>
@@ -2810,7 +2810,7 @@
           <p:cNvPr id="11" name="">
             <a:extLst xmlns:a="http://schemas.openxmlformats.org/drawingml/2006/main">
               <a:ext uri="{FF2B5EF4-FFF2-40B4-BE49-F238E27FC236}">
-                <a16:creationId xmlns:a16="http://schemas.microsoft.com/office/drawing/2014/main" id="{6ED43E72-9352-4A4A-BC89-FDEBA35AD701}"/>
+                <a16:creationId xmlns:a16="http://schemas.microsoft.com/office/drawing/2014/main" id="{F802AD89-63BF-4526-8DA7-2CBA19E8EE14}"/>
               </a:ext>
             </a:extLst>
           </p:cNvPr>
@@ -2862,7 +2862,7 @@
           <p:cNvPr id="12" name="">
             <a:extLst xmlns:a="http://schemas.openxmlformats.org/drawingml/2006/main">
               <a:ext uri="{FF2B5EF4-FFF2-40B4-BE49-F238E27FC236}">
-                <a16:creationId xmlns:a16="http://schemas.microsoft.com/office/drawing/2014/main" id="{1A7D9FE5-2362-46D9-A74F-AC423FDD5DF5}"/>
+                <a16:creationId xmlns:a16="http://schemas.microsoft.com/office/drawing/2014/main" id="{574784CB-C1E4-4449-B4CB-459FE76C5B38}"/>
               </a:ext>
             </a:extLst>
           </p:cNvPr>
@@ -2914,7 +2914,7 @@
           <p:cNvPr id="13" name="">
             <a:extLst xmlns:a="http://schemas.openxmlformats.org/drawingml/2006/main">
               <a:ext uri="{FF2B5EF4-FFF2-40B4-BE49-F238E27FC236}">
-                <a16:creationId xmlns:a16="http://schemas.microsoft.com/office/drawing/2014/main" id="{2AC0031A-1DFF-4BD3-A318-31E86815B232}"/>
+                <a16:creationId xmlns:a16="http://schemas.microsoft.com/office/drawing/2014/main" id="{4EF7CEEE-B99D-4B67-8878-755CA616CFF7}"/>
               </a:ext>
             </a:extLst>
           </p:cNvPr>
@@ -2966,7 +2966,7 @@
           <p:cNvPr id="14" name="">
             <a:extLst xmlns:a="http://schemas.openxmlformats.org/drawingml/2006/main">
               <a:ext uri="{FF2B5EF4-FFF2-40B4-BE49-F238E27FC236}">
-                <a16:creationId xmlns:a16="http://schemas.microsoft.com/office/drawing/2014/main" id="{CC05E7A2-CB34-43B8-B78A-814F81E73E23}"/>
+                <a16:creationId xmlns:a16="http://schemas.microsoft.com/office/drawing/2014/main" id="{204EDCC6-50B6-4F21-B304-2470B4DB88A0}"/>
               </a:ext>
             </a:extLst>
           </p:cNvPr>
@@ -3018,7 +3018,7 @@
           <p:cNvPr id="15" name="">
             <a:extLst xmlns:a="http://schemas.openxmlformats.org/drawingml/2006/main">
               <a:ext uri="{FF2B5EF4-FFF2-40B4-BE49-F238E27FC236}">
-                <a16:creationId xmlns:a16="http://schemas.microsoft.com/office/drawing/2014/main" id="{2690C1B3-5742-487B-B7BD-E4472A63C16E}"/>
+                <a16:creationId xmlns:a16="http://schemas.microsoft.com/office/drawing/2014/main" id="{685AD9BB-B232-4E7E-8076-83EA0949EAC1}"/>
               </a:ext>
             </a:extLst>
           </p:cNvPr>
@@ -3070,7 +3070,7 @@
           <p:cNvPr id="16" name="">
             <a:extLst xmlns:a="http://schemas.openxmlformats.org/drawingml/2006/main">
               <a:ext uri="{FF2B5EF4-FFF2-40B4-BE49-F238E27FC236}">
-                <a16:creationId xmlns:a16="http://schemas.microsoft.com/office/drawing/2014/main" id="{E3387FC7-B974-46E7-86C0-B107EAEAEDAB}"/>
+                <a16:creationId xmlns:a16="http://schemas.microsoft.com/office/drawing/2014/main" id="{97BAEDEB-A328-4FC6-B53F-EF2B2DF94CA6}"/>
               </a:ext>
             </a:extLst>
           </p:cNvPr>
@@ -3120,7 +3120,7 @@
     </p:spTree>
     <p:extLst>
       <p:ext uri="{BB962C8B-B14F-4D97-AF65-F5344CB8AC3E}">
-        <p14:creationId xmlns:p14="http://schemas.microsoft.com/office/powerpoint/2010/main" val="898581278"/>
+        <p14:creationId xmlns:p14="http://schemas.microsoft.com/office/powerpoint/2010/main" val="983445465"/>
       </p:ext>
     </p:extLst>
   </p:cSld>
@@ -3151,7 +3151,7 @@
           <p:cNvPr id="103" name="">
             <a:extLst xmlns:a="http://schemas.openxmlformats.org/drawingml/2006/main">
               <a:ext uri="{FF2B5EF4-FFF2-40B4-BE49-F238E27FC236}">
-                <a16:creationId xmlns:a16="http://schemas.microsoft.com/office/drawing/2014/main" id="{634E486E-E77F-4FC1-8F9D-BC82623E789D}"/>
+                <a16:creationId xmlns:a16="http://schemas.microsoft.com/office/drawing/2014/main" id="{1C3DC966-7F3E-4340-BF01-F53B8651A051}"/>
               </a:ext>
             </a:extLst>
           </p:cNvPr>
@@ -3184,7 +3184,7 @@
           <p:cNvPr id="2" name="">
             <a:extLst xmlns:a="http://schemas.openxmlformats.org/drawingml/2006/main">
               <a:ext uri="{FF2B5EF4-FFF2-40B4-BE49-F238E27FC236}">
-                <a16:creationId xmlns:a16="http://schemas.microsoft.com/office/drawing/2014/main" id="{5A36C3DE-3B51-46C2-AEF0-E3F9408D5A87}"/>
+                <a16:creationId xmlns:a16="http://schemas.microsoft.com/office/drawing/2014/main" id="{680BB5DA-0685-4573-90C8-64D876C26679}"/>
               </a:ext>
             </a:extLst>
           </p:cNvPr>
@@ -3215,7 +3215,7 @@
           <p:cNvPr id="3" name="">
             <a:extLst xmlns:a="http://schemas.openxmlformats.org/drawingml/2006/main">
               <a:ext uri="{FF2B5EF4-FFF2-40B4-BE49-F238E27FC236}">
-                <a16:creationId xmlns:a16="http://schemas.microsoft.com/office/drawing/2014/main" id="{1E2B1D8C-CCE1-4BA7-A0AE-5F2E9D108724}"/>
+                <a16:creationId xmlns:a16="http://schemas.microsoft.com/office/drawing/2014/main" id="{529C8215-F406-4938-B829-3580A817575C}"/>
               </a:ext>
             </a:extLst>
           </p:cNvPr>
@@ -3267,7 +3267,7 @@
           <p:cNvPr id="4" name="">
             <a:extLst xmlns:a="http://schemas.openxmlformats.org/drawingml/2006/main">
               <a:ext uri="{FF2B5EF4-FFF2-40B4-BE49-F238E27FC236}">
-                <a16:creationId xmlns:a16="http://schemas.microsoft.com/office/drawing/2014/main" id="{4CCFC85D-3BF4-44D6-BA9C-2C337E65AFBF}"/>
+                <a16:creationId xmlns:a16="http://schemas.microsoft.com/office/drawing/2014/main" id="{CA006A43-03D0-498E-9CBD-FFBC2A8A630A}"/>
               </a:ext>
             </a:extLst>
           </p:cNvPr>
@@ -3319,7 +3319,7 @@
           <p:cNvPr id="5" name="">
             <a:extLst xmlns:a="http://schemas.openxmlformats.org/drawingml/2006/main">
               <a:ext uri="{FF2B5EF4-FFF2-40B4-BE49-F238E27FC236}">
-                <a16:creationId xmlns:a16="http://schemas.microsoft.com/office/drawing/2014/main" id="{C93E0840-6AE4-4AB2-A70E-38640975A77C}"/>
+                <a16:creationId xmlns:a16="http://schemas.microsoft.com/office/drawing/2014/main" id="{8C7E3282-F5D3-438F-A800-E062642ED697}"/>
               </a:ext>
             </a:extLst>
           </p:cNvPr>
@@ -3354,7 +3354,7 @@
           <p:nvPr/>
         </p:nvPicPr>
         <p:blipFill>
-          <a:blip xmlns:r="http://schemas.openxmlformats.org/officeDocument/2006/relationships" xmlns:a="http://schemas.openxmlformats.org/drawingml/2006/main" r:embed="R0f9b23a2cabf4f2d"/>
+          <a:blip xmlns:r="http://schemas.openxmlformats.org/officeDocument/2006/relationships" xmlns:a="http://schemas.openxmlformats.org/drawingml/2006/main" r:embed="R6d117b8124de4744"/>
           <a:stretch xmlns:a="http://schemas.openxmlformats.org/drawingml/2006/main"/>
         </p:blipFill>
         <p:spPr>
@@ -3372,7 +3372,7 @@
           <p:cNvPr id="7" name="">
             <a:extLst xmlns:a="http://schemas.openxmlformats.org/drawingml/2006/main">
               <a:ext uri="{FF2B5EF4-FFF2-40B4-BE49-F238E27FC236}">
-                <a16:creationId xmlns:a16="http://schemas.microsoft.com/office/drawing/2014/main" id="{C9CD40C7-C3FB-404F-A7F0-537808C3426E}"/>
+                <a16:creationId xmlns:a16="http://schemas.microsoft.com/office/drawing/2014/main" id="{C6E9530E-A96B-4E80-9EC4-D1186A27D05F}"/>
               </a:ext>
             </a:extLst>
           </p:cNvPr>
@@ -3424,7 +3424,7 @@
           <p:cNvPr id="8" name="">
             <a:extLst xmlns:a="http://schemas.openxmlformats.org/drawingml/2006/main">
               <a:ext uri="{FF2B5EF4-FFF2-40B4-BE49-F238E27FC236}">
-                <a16:creationId xmlns:a16="http://schemas.microsoft.com/office/drawing/2014/main" id="{F94126E9-8D16-4EE7-BF8C-F410A9C2F657}"/>
+                <a16:creationId xmlns:a16="http://schemas.microsoft.com/office/drawing/2014/main" id="{C7F06392-9E83-4507-92FE-FEF56C68C20E}"/>
               </a:ext>
             </a:extLst>
           </p:cNvPr>
@@ -3476,7 +3476,7 @@
           <p:cNvPr id="9" name="">
             <a:extLst xmlns:a="http://schemas.openxmlformats.org/drawingml/2006/main">
               <a:ext uri="{FF2B5EF4-FFF2-40B4-BE49-F238E27FC236}">
-                <a16:creationId xmlns:a16="http://schemas.microsoft.com/office/drawing/2014/main" id="{61316352-6A0E-47C9-8BED-23F98F58D81A}"/>
+                <a16:creationId xmlns:a16="http://schemas.microsoft.com/office/drawing/2014/main" id="{B19B6BC6-B7FA-45F2-9866-D7FB694AA4DC}"/>
               </a:ext>
             </a:extLst>
           </p:cNvPr>
@@ -3528,7 +3528,7 @@
           <p:cNvPr id="10" name="">
             <a:extLst xmlns:a="http://schemas.openxmlformats.org/drawingml/2006/main">
               <a:ext uri="{FF2B5EF4-FFF2-40B4-BE49-F238E27FC236}">
-                <a16:creationId xmlns:a16="http://schemas.microsoft.com/office/drawing/2014/main" id="{109D3401-DBDE-4733-B8A1-59D6BAC16FA1}"/>
+                <a16:creationId xmlns:a16="http://schemas.microsoft.com/office/drawing/2014/main" id="{C8A2A521-41F8-4F18-BC2E-EC10648938BC}"/>
               </a:ext>
             </a:extLst>
           </p:cNvPr>
@@ -3580,7 +3580,7 @@
           <p:cNvPr id="11" name="">
             <a:extLst xmlns:a="http://schemas.openxmlformats.org/drawingml/2006/main">
               <a:ext uri="{FF2B5EF4-FFF2-40B4-BE49-F238E27FC236}">
-                <a16:creationId xmlns:a16="http://schemas.microsoft.com/office/drawing/2014/main" id="{0318AB4E-ACB0-413F-AF94-1B44D0EAC91A}"/>
+                <a16:creationId xmlns:a16="http://schemas.microsoft.com/office/drawing/2014/main" id="{2C7728FC-E640-4B39-A561-6F00F813FD2E}"/>
               </a:ext>
             </a:extLst>
           </p:cNvPr>
@@ -3611,7 +3611,7 @@
           <p:cNvPr id="12" name="">
             <a:extLst xmlns:a="http://schemas.openxmlformats.org/drawingml/2006/main">
               <a:ext uri="{FF2B5EF4-FFF2-40B4-BE49-F238E27FC236}">
-                <a16:creationId xmlns:a16="http://schemas.microsoft.com/office/drawing/2014/main" id="{59CDE58C-C6A7-4C4A-97E7-EB94B41DB225}"/>
+                <a16:creationId xmlns:a16="http://schemas.microsoft.com/office/drawing/2014/main" id="{E975797D-0945-4970-939C-D330A9449682}"/>
               </a:ext>
             </a:extLst>
           </p:cNvPr>
@@ -3642,7 +3642,7 @@
           <p:cNvPr id="13" name="">
             <a:extLst xmlns:a="http://schemas.openxmlformats.org/drawingml/2006/main">
               <a:ext uri="{FF2B5EF4-FFF2-40B4-BE49-F238E27FC236}">
-                <a16:creationId xmlns:a16="http://schemas.microsoft.com/office/drawing/2014/main" id="{F7F6030E-1E8C-4A9E-9BB0-8E78CF3FC1FC}"/>
+                <a16:creationId xmlns:a16="http://schemas.microsoft.com/office/drawing/2014/main" id="{1172239D-C95F-4388-B0B1-FEB9138BA5AD}"/>
               </a:ext>
             </a:extLst>
           </p:cNvPr>
@@ -3694,7 +3694,7 @@
           <p:cNvPr id="14" name="">
             <a:extLst xmlns:a="http://schemas.openxmlformats.org/drawingml/2006/main">
               <a:ext uri="{FF2B5EF4-FFF2-40B4-BE49-F238E27FC236}">
-                <a16:creationId xmlns:a16="http://schemas.microsoft.com/office/drawing/2014/main" id="{FB35F5C6-9F0A-479E-B823-D684DC27DF80}"/>
+                <a16:creationId xmlns:a16="http://schemas.microsoft.com/office/drawing/2014/main" id="{FDFE50CE-AA86-47B6-9AC3-283E25E169F6}"/>
               </a:ext>
             </a:extLst>
           </p:cNvPr>
@@ -3746,7 +3746,7 @@
           <p:cNvPr id="15" name="">
             <a:extLst xmlns:a="http://schemas.openxmlformats.org/drawingml/2006/main">
               <a:ext uri="{FF2B5EF4-FFF2-40B4-BE49-F238E27FC236}">
-                <a16:creationId xmlns:a16="http://schemas.microsoft.com/office/drawing/2014/main" id="{E1E269CD-E217-4751-87F1-EE0EF97B48C5}"/>
+                <a16:creationId xmlns:a16="http://schemas.microsoft.com/office/drawing/2014/main" id="{275A5537-A4F3-4812-B64A-AD7E9FF86187}"/>
               </a:ext>
             </a:extLst>
           </p:cNvPr>
@@ -3798,7 +3798,7 @@
           <p:cNvPr id="16" name="">
             <a:extLst xmlns:a="http://schemas.openxmlformats.org/drawingml/2006/main">
               <a:ext uri="{FF2B5EF4-FFF2-40B4-BE49-F238E27FC236}">
-                <a16:creationId xmlns:a16="http://schemas.microsoft.com/office/drawing/2014/main" id="{EF221058-E27E-4CB8-A5E9-6BC01C30A159}"/>
+                <a16:creationId xmlns:a16="http://schemas.microsoft.com/office/drawing/2014/main" id="{AB24DA30-B78E-4150-B75E-340E72072028}"/>
               </a:ext>
             </a:extLst>
           </p:cNvPr>
@@ -3850,7 +3850,7 @@
           <p:cNvPr id="17" name="">
             <a:extLst xmlns:a="http://schemas.openxmlformats.org/drawingml/2006/main">
               <a:ext uri="{FF2B5EF4-FFF2-40B4-BE49-F238E27FC236}">
-                <a16:creationId xmlns:a16="http://schemas.microsoft.com/office/drawing/2014/main" id="{3FAE5092-6EDF-456B-AE87-39C056B0FF78}"/>
+                <a16:creationId xmlns:a16="http://schemas.microsoft.com/office/drawing/2014/main" id="{A27319F9-FCF0-4C18-B660-7AC592F51DC2}"/>
               </a:ext>
             </a:extLst>
           </p:cNvPr>
@@ -3902,7 +3902,7 @@
           <p:cNvPr id="18" name="">
             <a:extLst xmlns:a="http://schemas.openxmlformats.org/drawingml/2006/main">
               <a:ext uri="{FF2B5EF4-FFF2-40B4-BE49-F238E27FC236}">
-                <a16:creationId xmlns:a16="http://schemas.microsoft.com/office/drawing/2014/main" id="{A9E2DEF9-3750-40AF-A6F0-5CEECF80A664}"/>
+                <a16:creationId xmlns:a16="http://schemas.microsoft.com/office/drawing/2014/main" id="{E7F190B0-E9BB-4AEF-8BA4-EF22328963F8}"/>
               </a:ext>
             </a:extLst>
           </p:cNvPr>
@@ -3933,7 +3933,7 @@
           <p:cNvPr id="19" name="">
             <a:extLst xmlns:a="http://schemas.openxmlformats.org/drawingml/2006/main">
               <a:ext uri="{FF2B5EF4-FFF2-40B4-BE49-F238E27FC236}">
-                <a16:creationId xmlns:a16="http://schemas.microsoft.com/office/drawing/2014/main" id="{005CD1CB-43C4-45C6-B4EA-2C10EBCCC51E}"/>
+                <a16:creationId xmlns:a16="http://schemas.microsoft.com/office/drawing/2014/main" id="{048741B7-4FA9-4E75-AD7B-D2E2B44088C4}"/>
               </a:ext>
             </a:extLst>
           </p:cNvPr>
@@ -3964,7 +3964,7 @@
           <p:cNvPr id="20" name="">
             <a:extLst xmlns:a="http://schemas.openxmlformats.org/drawingml/2006/main">
               <a:ext uri="{FF2B5EF4-FFF2-40B4-BE49-F238E27FC236}">
-                <a16:creationId xmlns:a16="http://schemas.microsoft.com/office/drawing/2014/main" id="{DD02ECAD-9957-4566-A846-54570767054A}"/>
+                <a16:creationId xmlns:a16="http://schemas.microsoft.com/office/drawing/2014/main" id="{B1563D0C-06E5-4CF7-90BB-A44618315DA5}"/>
               </a:ext>
             </a:extLst>
           </p:cNvPr>
@@ -4016,7 +4016,7 @@
           <p:cNvPr id="21" name="">
             <a:extLst xmlns:a="http://schemas.openxmlformats.org/drawingml/2006/main">
               <a:ext uri="{FF2B5EF4-FFF2-40B4-BE49-F238E27FC236}">
-                <a16:creationId xmlns:a16="http://schemas.microsoft.com/office/drawing/2014/main" id="{ADA5F02B-64EB-492B-A8E8-8DBA5BA5AE32}"/>
+                <a16:creationId xmlns:a16="http://schemas.microsoft.com/office/drawing/2014/main" id="{6F83A901-B413-424C-8EEE-184EF15B827E}"/>
               </a:ext>
             </a:extLst>
           </p:cNvPr>
@@ -4068,7 +4068,7 @@
           <p:cNvPr id="22" name="">
             <a:extLst xmlns:a="http://schemas.openxmlformats.org/drawingml/2006/main">
               <a:ext uri="{FF2B5EF4-FFF2-40B4-BE49-F238E27FC236}">
-                <a16:creationId xmlns:a16="http://schemas.microsoft.com/office/drawing/2014/main" id="{1898951F-3C7C-4683-A427-4481B6DAFD39}"/>
+                <a16:creationId xmlns:a16="http://schemas.microsoft.com/office/drawing/2014/main" id="{435BAFB4-B453-426F-9328-394B077FD969}"/>
               </a:ext>
             </a:extLst>
           </p:cNvPr>
@@ -4120,7 +4120,7 @@
           <p:cNvPr id="23" name="">
             <a:extLst xmlns:a="http://schemas.openxmlformats.org/drawingml/2006/main">
               <a:ext uri="{FF2B5EF4-FFF2-40B4-BE49-F238E27FC236}">
-                <a16:creationId xmlns:a16="http://schemas.microsoft.com/office/drawing/2014/main" id="{7DBA01F9-7615-4D32-BA43-CAE67BB750FC}"/>
+                <a16:creationId xmlns:a16="http://schemas.microsoft.com/office/drawing/2014/main" id="{9459242C-57FF-4BBD-8975-AE5EA3E845D8}"/>
               </a:ext>
             </a:extLst>
           </p:cNvPr>
@@ -4172,7 +4172,7 @@
           <p:cNvPr id="24" name="">
             <a:extLst xmlns:a="http://schemas.openxmlformats.org/drawingml/2006/main">
               <a:ext uri="{FF2B5EF4-FFF2-40B4-BE49-F238E27FC236}">
-                <a16:creationId xmlns:a16="http://schemas.microsoft.com/office/drawing/2014/main" id="{4BC9267F-F134-4D26-90C0-C7505903A162}"/>
+                <a16:creationId xmlns:a16="http://schemas.microsoft.com/office/drawing/2014/main" id="{A0AE1D24-CBBD-466D-9F4D-74FB1E79C28E}"/>
               </a:ext>
             </a:extLst>
           </p:cNvPr>
@@ -4224,7 +4224,7 @@
           <p:cNvPr id="25" name="">
             <a:extLst xmlns:a="http://schemas.openxmlformats.org/drawingml/2006/main">
               <a:ext uri="{FF2B5EF4-FFF2-40B4-BE49-F238E27FC236}">
-                <a16:creationId xmlns:a16="http://schemas.microsoft.com/office/drawing/2014/main" id="{4927A19D-566D-4F15-B94C-84FDFCCD3C26}"/>
+                <a16:creationId xmlns:a16="http://schemas.microsoft.com/office/drawing/2014/main" id="{2ACFE6A5-A3B3-4611-BFCE-8E6AFC494A4D}"/>
               </a:ext>
             </a:extLst>
           </p:cNvPr>
@@ -4255,7 +4255,7 @@
           <p:cNvPr id="26" name="">
             <a:extLst xmlns:a="http://schemas.openxmlformats.org/drawingml/2006/main">
               <a:ext uri="{FF2B5EF4-FFF2-40B4-BE49-F238E27FC236}">
-                <a16:creationId xmlns:a16="http://schemas.microsoft.com/office/drawing/2014/main" id="{763C5C1E-3C99-4FBB-9F2C-D19FE64DF377}"/>
+                <a16:creationId xmlns:a16="http://schemas.microsoft.com/office/drawing/2014/main" id="{3654D4D3-CD58-461E-8C98-51C0C9BBC8AB}"/>
               </a:ext>
             </a:extLst>
           </p:cNvPr>
@@ -4307,7 +4307,7 @@
           <p:cNvPr id="27" name="">
             <a:extLst xmlns:a="http://schemas.openxmlformats.org/drawingml/2006/main">
               <a:ext uri="{FF2B5EF4-FFF2-40B4-BE49-F238E27FC236}">
-                <a16:creationId xmlns:a16="http://schemas.microsoft.com/office/drawing/2014/main" id="{638FBF81-AD2E-4441-9767-03E1F353B7F7}"/>
+                <a16:creationId xmlns:a16="http://schemas.microsoft.com/office/drawing/2014/main" id="{FCEA9294-0A48-4345-8EFF-0DE5BABAFBCC}"/>
               </a:ext>
             </a:extLst>
           </p:cNvPr>
@@ -4359,7 +4359,7 @@
           <p:cNvPr id="28" name="">
             <a:extLst xmlns:a="http://schemas.openxmlformats.org/drawingml/2006/main">
               <a:ext uri="{FF2B5EF4-FFF2-40B4-BE49-F238E27FC236}">
-                <a16:creationId xmlns:a16="http://schemas.microsoft.com/office/drawing/2014/main" id="{B38F104D-A448-459F-B09F-B29628144667}"/>
+                <a16:creationId xmlns:a16="http://schemas.microsoft.com/office/drawing/2014/main" id="{C57563F7-0BD4-4A76-A23D-BB5C1A7CE3D8}"/>
               </a:ext>
             </a:extLst>
           </p:cNvPr>
@@ -4411,7 +4411,7 @@
           <p:cNvPr id="29" name="">
             <a:extLst xmlns:a="http://schemas.openxmlformats.org/drawingml/2006/main">
               <a:ext uri="{FF2B5EF4-FFF2-40B4-BE49-F238E27FC236}">
-                <a16:creationId xmlns:a16="http://schemas.microsoft.com/office/drawing/2014/main" id="{D7C13D34-27EA-4FEA-AD1C-34B23B59AD89}"/>
+                <a16:creationId xmlns:a16="http://schemas.microsoft.com/office/drawing/2014/main" id="{2A497727-63A5-4D76-BE66-6CD57DDB1DC8}"/>
               </a:ext>
             </a:extLst>
           </p:cNvPr>
@@ -4463,7 +4463,7 @@
           <p:cNvPr id="30" name="">
             <a:extLst xmlns:a="http://schemas.openxmlformats.org/drawingml/2006/main">
               <a:ext uri="{FF2B5EF4-FFF2-40B4-BE49-F238E27FC236}">
-                <a16:creationId xmlns:a16="http://schemas.microsoft.com/office/drawing/2014/main" id="{C8F7B397-E0B9-4B2B-A9E8-CDACD7003E55}"/>
+                <a16:creationId xmlns:a16="http://schemas.microsoft.com/office/drawing/2014/main" id="{C08F8EFE-21A9-4CE7-94A3-BB86AF697FD6}"/>
               </a:ext>
             </a:extLst>
           </p:cNvPr>
@@ -4515,7 +4515,7 @@
           <p:cNvPr id="31" name="">
             <a:extLst xmlns:a="http://schemas.openxmlformats.org/drawingml/2006/main">
               <a:ext uri="{FF2B5EF4-FFF2-40B4-BE49-F238E27FC236}">
-                <a16:creationId xmlns:a16="http://schemas.microsoft.com/office/drawing/2014/main" id="{C6D9285C-875C-42A7-B7A8-D5BD897B6BE3}"/>
+                <a16:creationId xmlns:a16="http://schemas.microsoft.com/office/drawing/2014/main" id="{34918457-6C56-400D-A572-3E75F61222E4}"/>
               </a:ext>
             </a:extLst>
           </p:cNvPr>
@@ -4546,7 +4546,7 @@
           <p:cNvPr id="32" name="">
             <a:extLst xmlns:a="http://schemas.openxmlformats.org/drawingml/2006/main">
               <a:ext uri="{FF2B5EF4-FFF2-40B4-BE49-F238E27FC236}">
-                <a16:creationId xmlns:a16="http://schemas.microsoft.com/office/drawing/2014/main" id="{CE5F684C-27F9-4A5A-8D5F-4C1388EEFFF1}"/>
+                <a16:creationId xmlns:a16="http://schemas.microsoft.com/office/drawing/2014/main" id="{BBE5137F-75E9-4D72-A357-28B3C7BA0C59}"/>
               </a:ext>
             </a:extLst>
           </p:cNvPr>
@@ -4577,7 +4577,7 @@
           <p:cNvPr id="33" name="">
             <a:extLst xmlns:a="http://schemas.openxmlformats.org/drawingml/2006/main">
               <a:ext uri="{FF2B5EF4-FFF2-40B4-BE49-F238E27FC236}">
-                <a16:creationId xmlns:a16="http://schemas.microsoft.com/office/drawing/2014/main" id="{DFC93227-BD47-4EA6-A73B-83F0983052A2}"/>
+                <a16:creationId xmlns:a16="http://schemas.microsoft.com/office/drawing/2014/main" id="{ABA2A704-A7FB-4F5C-A7AC-E21B40540BD3}"/>
               </a:ext>
             </a:extLst>
           </p:cNvPr>
@@ -4629,7 +4629,7 @@
           <p:cNvPr id="34" name="">
             <a:extLst xmlns:a="http://schemas.openxmlformats.org/drawingml/2006/main">
               <a:ext uri="{FF2B5EF4-FFF2-40B4-BE49-F238E27FC236}">
-                <a16:creationId xmlns:a16="http://schemas.microsoft.com/office/drawing/2014/main" id="{A8CAD7B3-015D-434E-A2E8-227B19EC3F47}"/>
+                <a16:creationId xmlns:a16="http://schemas.microsoft.com/office/drawing/2014/main" id="{4C0E3E27-0F2A-4858-A6AA-6D60650D9799}"/>
               </a:ext>
             </a:extLst>
           </p:cNvPr>
@@ -4681,7 +4681,7 @@
           <p:cNvPr id="35" name="">
             <a:extLst xmlns:a="http://schemas.openxmlformats.org/drawingml/2006/main">
               <a:ext uri="{FF2B5EF4-FFF2-40B4-BE49-F238E27FC236}">
-                <a16:creationId xmlns:a16="http://schemas.microsoft.com/office/drawing/2014/main" id="{21317BE5-736F-4F6F-B024-289FF65DCA7B}"/>
+                <a16:creationId xmlns:a16="http://schemas.microsoft.com/office/drawing/2014/main" id="{D1936314-DF9D-46BE-93E5-95B4E1517EC6}"/>
               </a:ext>
             </a:extLst>
           </p:cNvPr>
@@ -4733,7 +4733,7 @@
           <p:cNvPr id="36" name="">
             <a:extLst xmlns:a="http://schemas.openxmlformats.org/drawingml/2006/main">
               <a:ext uri="{FF2B5EF4-FFF2-40B4-BE49-F238E27FC236}">
-                <a16:creationId xmlns:a16="http://schemas.microsoft.com/office/drawing/2014/main" id="{FA97C6E7-A6EC-42ED-98F7-3F2534925D1A}"/>
+                <a16:creationId xmlns:a16="http://schemas.microsoft.com/office/drawing/2014/main" id="{EB1F66DC-143F-4449-B40B-8AC942AF3BB7}"/>
               </a:ext>
             </a:extLst>
           </p:cNvPr>
@@ -4785,7 +4785,7 @@
           <p:cNvPr id="37" name="">
             <a:extLst xmlns:a="http://schemas.openxmlformats.org/drawingml/2006/main">
               <a:ext uri="{FF2B5EF4-FFF2-40B4-BE49-F238E27FC236}">
-                <a16:creationId xmlns:a16="http://schemas.microsoft.com/office/drawing/2014/main" id="{FA253876-03A0-4DEE-8896-2E8A86C37F0B}"/>
+                <a16:creationId xmlns:a16="http://schemas.microsoft.com/office/drawing/2014/main" id="{E164AC11-E123-4F6C-B536-22C4907794BA}"/>
               </a:ext>
             </a:extLst>
           </p:cNvPr>
@@ -4837,7 +4837,7 @@
           <p:cNvPr id="38" name="">
             <a:extLst xmlns:a="http://schemas.openxmlformats.org/drawingml/2006/main">
               <a:ext uri="{FF2B5EF4-FFF2-40B4-BE49-F238E27FC236}">
-                <a16:creationId xmlns:a16="http://schemas.microsoft.com/office/drawing/2014/main" id="{A09649A4-2D61-43E1-A073-D3EAB149D8C2}"/>
+                <a16:creationId xmlns:a16="http://schemas.microsoft.com/office/drawing/2014/main" id="{97D255B9-B69A-4698-B6FC-BAC2A102D045}"/>
               </a:ext>
             </a:extLst>
           </p:cNvPr>
@@ -4868,7 +4868,7 @@
           <p:cNvPr id="39" name="">
             <a:extLst xmlns:a="http://schemas.openxmlformats.org/drawingml/2006/main">
               <a:ext uri="{FF2B5EF4-FFF2-40B4-BE49-F238E27FC236}">
-                <a16:creationId xmlns:a16="http://schemas.microsoft.com/office/drawing/2014/main" id="{18F539A9-4789-4F6E-B7E6-A5156711A5E2}"/>
+                <a16:creationId xmlns:a16="http://schemas.microsoft.com/office/drawing/2014/main" id="{660F8501-7EE9-4496-9225-8CB41378D939}"/>
               </a:ext>
             </a:extLst>
           </p:cNvPr>
@@ -4920,7 +4920,7 @@
           <p:cNvPr id="40" name="">
             <a:extLst xmlns:a="http://schemas.openxmlformats.org/drawingml/2006/main">
               <a:ext uri="{FF2B5EF4-FFF2-40B4-BE49-F238E27FC236}">
-                <a16:creationId xmlns:a16="http://schemas.microsoft.com/office/drawing/2014/main" id="{A6F30A40-8488-4AB7-B753-865593DF45DF}"/>
+                <a16:creationId xmlns:a16="http://schemas.microsoft.com/office/drawing/2014/main" id="{A274EF71-67BD-4E8C-844C-032789A38EF7}"/>
               </a:ext>
             </a:extLst>
           </p:cNvPr>
@@ -4972,7 +4972,7 @@
           <p:cNvPr id="41" name="">
             <a:extLst xmlns:a="http://schemas.openxmlformats.org/drawingml/2006/main">
               <a:ext uri="{FF2B5EF4-FFF2-40B4-BE49-F238E27FC236}">
-                <a16:creationId xmlns:a16="http://schemas.microsoft.com/office/drawing/2014/main" id="{1D4C86AC-4F78-4509-9579-946768DCF10B}"/>
+                <a16:creationId xmlns:a16="http://schemas.microsoft.com/office/drawing/2014/main" id="{60567388-A624-4294-A83A-DEB3AD346675}"/>
               </a:ext>
             </a:extLst>
           </p:cNvPr>
@@ -5024,7 +5024,7 @@
           <p:cNvPr id="42" name="">
             <a:extLst xmlns:a="http://schemas.openxmlformats.org/drawingml/2006/main">
               <a:ext uri="{FF2B5EF4-FFF2-40B4-BE49-F238E27FC236}">
-                <a16:creationId xmlns:a16="http://schemas.microsoft.com/office/drawing/2014/main" id="{19D520C8-94EE-4F1A-AA13-074BB6F84C0F}"/>
+                <a16:creationId xmlns:a16="http://schemas.microsoft.com/office/drawing/2014/main" id="{FCEBBEC3-20E3-4C36-8691-190BDC254E72}"/>
               </a:ext>
             </a:extLst>
           </p:cNvPr>
@@ -5076,7 +5076,7 @@
           <p:cNvPr id="43" name="">
             <a:extLst xmlns:a="http://schemas.openxmlformats.org/drawingml/2006/main">
               <a:ext uri="{FF2B5EF4-FFF2-40B4-BE49-F238E27FC236}">
-                <a16:creationId xmlns:a16="http://schemas.microsoft.com/office/drawing/2014/main" id="{20A3A295-538F-403E-AF2B-70DD259E9D98}"/>
+                <a16:creationId xmlns:a16="http://schemas.microsoft.com/office/drawing/2014/main" id="{49801333-4A7E-4AB6-9547-F81F14E58529}"/>
               </a:ext>
             </a:extLst>
           </p:cNvPr>
@@ -5128,7 +5128,7 @@
           <p:cNvPr id="44" name="">
             <a:extLst xmlns:a="http://schemas.openxmlformats.org/drawingml/2006/main">
               <a:ext uri="{FF2B5EF4-FFF2-40B4-BE49-F238E27FC236}">
-                <a16:creationId xmlns:a16="http://schemas.microsoft.com/office/drawing/2014/main" id="{CE99F147-5782-4247-B46F-7F0471A9F346}"/>
+                <a16:creationId xmlns:a16="http://schemas.microsoft.com/office/drawing/2014/main" id="{AFD0C45D-30C1-4E54-A6BA-8820350EB794}"/>
               </a:ext>
             </a:extLst>
           </p:cNvPr>
@@ -5159,7 +5159,7 @@
           <p:cNvPr id="45" name="">
             <a:extLst xmlns:a="http://schemas.openxmlformats.org/drawingml/2006/main">
               <a:ext uri="{FF2B5EF4-FFF2-40B4-BE49-F238E27FC236}">
-                <a16:creationId xmlns:a16="http://schemas.microsoft.com/office/drawing/2014/main" id="{270BD84F-2DA2-4F19-AF4E-EBEEDD0D7DF3}"/>
+                <a16:creationId xmlns:a16="http://schemas.microsoft.com/office/drawing/2014/main" id="{0D898878-D5A8-4D40-BA2B-A36596B55636}"/>
               </a:ext>
             </a:extLst>
           </p:cNvPr>
@@ -5190,7 +5190,7 @@
           <p:cNvPr id="46" name="">
             <a:extLst xmlns:a="http://schemas.openxmlformats.org/drawingml/2006/main">
               <a:ext uri="{FF2B5EF4-FFF2-40B4-BE49-F238E27FC236}">
-                <a16:creationId xmlns:a16="http://schemas.microsoft.com/office/drawing/2014/main" id="{4D993AF6-9C8B-41B8-8109-D8C7FA53CC22}"/>
+                <a16:creationId xmlns:a16="http://schemas.microsoft.com/office/drawing/2014/main" id="{7395BCC4-AA65-4AD0-B068-BB66233EC570}"/>
               </a:ext>
             </a:extLst>
           </p:cNvPr>
@@ -5242,7 +5242,7 @@
           <p:cNvPr id="47" name="">
             <a:extLst xmlns:a="http://schemas.openxmlformats.org/drawingml/2006/main">
               <a:ext uri="{FF2B5EF4-FFF2-40B4-BE49-F238E27FC236}">
-                <a16:creationId xmlns:a16="http://schemas.microsoft.com/office/drawing/2014/main" id="{B8DDF63B-9CF3-46F2-B4D9-131D88599A57}"/>
+                <a16:creationId xmlns:a16="http://schemas.microsoft.com/office/drawing/2014/main" id="{411CDE02-E82C-4B62-87D6-C5C86318D225}"/>
               </a:ext>
             </a:extLst>
           </p:cNvPr>
@@ -5294,7 +5294,7 @@
           <p:cNvPr id="48" name="">
             <a:extLst xmlns:a="http://schemas.openxmlformats.org/drawingml/2006/main">
               <a:ext uri="{FF2B5EF4-FFF2-40B4-BE49-F238E27FC236}">
-                <a16:creationId xmlns:a16="http://schemas.microsoft.com/office/drawing/2014/main" id="{50A43D41-6930-4697-AD97-84C783DD6A67}"/>
+                <a16:creationId xmlns:a16="http://schemas.microsoft.com/office/drawing/2014/main" id="{70064958-A141-4B5A-A9EB-216C33183124}"/>
               </a:ext>
             </a:extLst>
           </p:cNvPr>
@@ -5346,7 +5346,7 @@
           <p:cNvPr id="49" name="">
             <a:extLst xmlns:a="http://schemas.openxmlformats.org/drawingml/2006/main">
               <a:ext uri="{FF2B5EF4-FFF2-40B4-BE49-F238E27FC236}">
-                <a16:creationId xmlns:a16="http://schemas.microsoft.com/office/drawing/2014/main" id="{CC6E0215-1E19-428C-A391-99BA7CB2543F}"/>
+                <a16:creationId xmlns:a16="http://schemas.microsoft.com/office/drawing/2014/main" id="{862D2DD1-8B76-4756-9B40-7CF08D1B910F}"/>
               </a:ext>
             </a:extLst>
           </p:cNvPr>
@@ -5398,7 +5398,7 @@
           <p:cNvPr id="50" name="">
             <a:extLst xmlns:a="http://schemas.openxmlformats.org/drawingml/2006/main">
               <a:ext uri="{FF2B5EF4-FFF2-40B4-BE49-F238E27FC236}">
-                <a16:creationId xmlns:a16="http://schemas.microsoft.com/office/drawing/2014/main" id="{E902A315-6E41-4E3E-AE6F-338C4772C95F}"/>
+                <a16:creationId xmlns:a16="http://schemas.microsoft.com/office/drawing/2014/main" id="{E9341AD3-AB70-4B32-B818-AC4FB57E2BDF}"/>
               </a:ext>
             </a:extLst>
           </p:cNvPr>
@@ -5450,7 +5450,7 @@
           <p:cNvPr id="51" name="">
             <a:extLst xmlns:a="http://schemas.openxmlformats.org/drawingml/2006/main">
               <a:ext uri="{FF2B5EF4-FFF2-40B4-BE49-F238E27FC236}">
-                <a16:creationId xmlns:a16="http://schemas.microsoft.com/office/drawing/2014/main" id="{BFB6921A-D565-4963-AA9F-8C81FC6A84DC}"/>
+                <a16:creationId xmlns:a16="http://schemas.microsoft.com/office/drawing/2014/main" id="{1B4A9839-FE74-458D-8FF2-923FE678419E}"/>
               </a:ext>
             </a:extLst>
           </p:cNvPr>
@@ -5481,7 +5481,7 @@
           <p:cNvPr id="52" name="">
             <a:extLst xmlns:a="http://schemas.openxmlformats.org/drawingml/2006/main">
               <a:ext uri="{FF2B5EF4-FFF2-40B4-BE49-F238E27FC236}">
-                <a16:creationId xmlns:a16="http://schemas.microsoft.com/office/drawing/2014/main" id="{F13BF9D0-6850-4678-83D8-33D26C320EE3}"/>
+                <a16:creationId xmlns:a16="http://schemas.microsoft.com/office/drawing/2014/main" id="{B1C63EBF-D5CE-4B31-8249-C3E2CBD47EBE}"/>
               </a:ext>
             </a:extLst>
           </p:cNvPr>
@@ -5533,7 +5533,7 @@
           <p:cNvPr id="53" name="">
             <a:extLst xmlns:a="http://schemas.openxmlformats.org/drawingml/2006/main">
               <a:ext uri="{FF2B5EF4-FFF2-40B4-BE49-F238E27FC236}">
-                <a16:creationId xmlns:a16="http://schemas.microsoft.com/office/drawing/2014/main" id="{870683AE-35AB-4949-A350-2F825745F192}"/>
+                <a16:creationId xmlns:a16="http://schemas.microsoft.com/office/drawing/2014/main" id="{1CC94250-14FB-4660-91CB-3EBF13991849}"/>
               </a:ext>
             </a:extLst>
           </p:cNvPr>
@@ -5585,7 +5585,7 @@
           <p:cNvPr id="54" name="">
             <a:extLst xmlns:a="http://schemas.openxmlformats.org/drawingml/2006/main">
               <a:ext uri="{FF2B5EF4-FFF2-40B4-BE49-F238E27FC236}">
-                <a16:creationId xmlns:a16="http://schemas.microsoft.com/office/drawing/2014/main" id="{56AD1B74-1215-4AB9-8D5E-D485E9B97A47}"/>
+                <a16:creationId xmlns:a16="http://schemas.microsoft.com/office/drawing/2014/main" id="{58B72DBE-BD0B-449B-9480-BB6B879940C1}"/>
               </a:ext>
             </a:extLst>
           </p:cNvPr>
@@ -5637,7 +5637,7 @@
           <p:cNvPr id="55" name="">
             <a:extLst xmlns:a="http://schemas.openxmlformats.org/drawingml/2006/main">
               <a:ext uri="{FF2B5EF4-FFF2-40B4-BE49-F238E27FC236}">
-                <a16:creationId xmlns:a16="http://schemas.microsoft.com/office/drawing/2014/main" id="{CA8BFAE4-7C61-439B-BF59-A6BF82B5AB18}"/>
+                <a16:creationId xmlns:a16="http://schemas.microsoft.com/office/drawing/2014/main" id="{E19FF363-3098-4336-A3A6-F046776AB393}"/>
               </a:ext>
             </a:extLst>
           </p:cNvPr>
@@ -5689,7 +5689,7 @@
           <p:cNvPr id="56" name="">
             <a:extLst xmlns:a="http://schemas.openxmlformats.org/drawingml/2006/main">
               <a:ext uri="{FF2B5EF4-FFF2-40B4-BE49-F238E27FC236}">
-                <a16:creationId xmlns:a16="http://schemas.microsoft.com/office/drawing/2014/main" id="{1814B0BE-8DDB-407C-B5E9-1B0C2D83E0A0}"/>
+                <a16:creationId xmlns:a16="http://schemas.microsoft.com/office/drawing/2014/main" id="{7AE345DD-B7D8-43E9-8B17-D68B8B5C97BC}"/>
               </a:ext>
             </a:extLst>
           </p:cNvPr>
@@ -5741,7 +5741,7 @@
           <p:cNvPr id="57" name="">
             <a:extLst xmlns:a="http://schemas.openxmlformats.org/drawingml/2006/main">
               <a:ext uri="{FF2B5EF4-FFF2-40B4-BE49-F238E27FC236}">
-                <a16:creationId xmlns:a16="http://schemas.microsoft.com/office/drawing/2014/main" id="{C79D585B-5BF8-4712-8DA4-FA53727DF3EB}"/>
+                <a16:creationId xmlns:a16="http://schemas.microsoft.com/office/drawing/2014/main" id="{76E3AC1B-BA93-4568-A7C5-AA8993BBBCD4}"/>
               </a:ext>
             </a:extLst>
           </p:cNvPr>
@@ -5772,7 +5772,7 @@
           <p:cNvPr id="58" name="">
             <a:extLst xmlns:a="http://schemas.openxmlformats.org/drawingml/2006/main">
               <a:ext uri="{FF2B5EF4-FFF2-40B4-BE49-F238E27FC236}">
-                <a16:creationId xmlns:a16="http://schemas.microsoft.com/office/drawing/2014/main" id="{C0D0496E-1BAE-4AF6-9F1D-7B670E4E03C5}"/>
+                <a16:creationId xmlns:a16="http://schemas.microsoft.com/office/drawing/2014/main" id="{D36A8546-0E6D-406C-AD66-53C28CD0E980}"/>
               </a:ext>
             </a:extLst>
           </p:cNvPr>
@@ -5803,7 +5803,7 @@
           <p:cNvPr id="59" name="">
             <a:extLst xmlns:a="http://schemas.openxmlformats.org/drawingml/2006/main">
               <a:ext uri="{FF2B5EF4-FFF2-40B4-BE49-F238E27FC236}">
-                <a16:creationId xmlns:a16="http://schemas.microsoft.com/office/drawing/2014/main" id="{38A709E6-B6CB-4BDF-9607-26ADD0D57DCF}"/>
+                <a16:creationId xmlns:a16="http://schemas.microsoft.com/office/drawing/2014/main" id="{4B56EDA5-DE2D-4062-B181-31ED17F99A80}"/>
               </a:ext>
             </a:extLst>
           </p:cNvPr>
@@ -5855,7 +5855,7 @@
           <p:cNvPr id="60" name="">
             <a:extLst xmlns:a="http://schemas.openxmlformats.org/drawingml/2006/main">
               <a:ext uri="{FF2B5EF4-FFF2-40B4-BE49-F238E27FC236}">
-                <a16:creationId xmlns:a16="http://schemas.microsoft.com/office/drawing/2014/main" id="{CEAE880E-F1C1-453C-AD8C-D50B3914F016}"/>
+                <a16:creationId xmlns:a16="http://schemas.microsoft.com/office/drawing/2014/main" id="{8FEC51CC-623A-4824-9A01-B8713163BE26}"/>
               </a:ext>
             </a:extLst>
           </p:cNvPr>
@@ -5907,7 +5907,7 @@
           <p:cNvPr id="61" name="">
             <a:extLst xmlns:a="http://schemas.openxmlformats.org/drawingml/2006/main">
               <a:ext uri="{FF2B5EF4-FFF2-40B4-BE49-F238E27FC236}">
-                <a16:creationId xmlns:a16="http://schemas.microsoft.com/office/drawing/2014/main" id="{985957B1-0126-42FE-9E73-555C94F6F1FE}"/>
+                <a16:creationId xmlns:a16="http://schemas.microsoft.com/office/drawing/2014/main" id="{9CD34F2A-DA3A-465F-B31F-197E943B61D1}"/>
               </a:ext>
             </a:extLst>
           </p:cNvPr>
@@ -5959,7 +5959,7 @@
           <p:cNvPr id="62" name="">
             <a:extLst xmlns:a="http://schemas.openxmlformats.org/drawingml/2006/main">
               <a:ext uri="{FF2B5EF4-FFF2-40B4-BE49-F238E27FC236}">
-                <a16:creationId xmlns:a16="http://schemas.microsoft.com/office/drawing/2014/main" id="{C55129FD-85D0-4A6B-8A95-8008FD2FF7C3}"/>
+                <a16:creationId xmlns:a16="http://schemas.microsoft.com/office/drawing/2014/main" id="{F56B6BFF-A85E-4CB0-9F36-CE0B6121FBA5}"/>
               </a:ext>
             </a:extLst>
           </p:cNvPr>
@@ -6011,7 +6011,7 @@
           <p:cNvPr id="63" name="">
             <a:extLst xmlns:a="http://schemas.openxmlformats.org/drawingml/2006/main">
               <a:ext uri="{FF2B5EF4-FFF2-40B4-BE49-F238E27FC236}">
-                <a16:creationId xmlns:a16="http://schemas.microsoft.com/office/drawing/2014/main" id="{57A6C03B-D521-42D0-9C36-74C894FE35ED}"/>
+                <a16:creationId xmlns:a16="http://schemas.microsoft.com/office/drawing/2014/main" id="{5248FFE8-86E2-4D51-93B6-58D93D689346}"/>
               </a:ext>
             </a:extLst>
           </p:cNvPr>
@@ -6063,7 +6063,7 @@
           <p:cNvPr id="64" name="">
             <a:extLst xmlns:a="http://schemas.openxmlformats.org/drawingml/2006/main">
               <a:ext uri="{FF2B5EF4-FFF2-40B4-BE49-F238E27FC236}">
-                <a16:creationId xmlns:a16="http://schemas.microsoft.com/office/drawing/2014/main" id="{CAE535E7-06E2-4801-AFEE-FFB094C55CBF}"/>
+                <a16:creationId xmlns:a16="http://schemas.microsoft.com/office/drawing/2014/main" id="{35803460-6D01-40AF-972D-BBDD94A4AC33}"/>
               </a:ext>
             </a:extLst>
           </p:cNvPr>
@@ -6094,7 +6094,7 @@
           <p:cNvPr id="65" name="">
             <a:extLst xmlns:a="http://schemas.openxmlformats.org/drawingml/2006/main">
               <a:ext uri="{FF2B5EF4-FFF2-40B4-BE49-F238E27FC236}">
-                <a16:creationId xmlns:a16="http://schemas.microsoft.com/office/drawing/2014/main" id="{E021122A-D17F-499A-9733-D7552DEC1311}"/>
+                <a16:creationId xmlns:a16="http://schemas.microsoft.com/office/drawing/2014/main" id="{7440E5A5-26E4-47CE-B01B-D598A97058CF}"/>
               </a:ext>
             </a:extLst>
           </p:cNvPr>
@@ -6146,7 +6146,7 @@
           <p:cNvPr id="66" name="">
             <a:extLst xmlns:a="http://schemas.openxmlformats.org/drawingml/2006/main">
               <a:ext uri="{FF2B5EF4-FFF2-40B4-BE49-F238E27FC236}">
-                <a16:creationId xmlns:a16="http://schemas.microsoft.com/office/drawing/2014/main" id="{5667E3F0-CB0D-49E6-B705-323D66B2CA87}"/>
+                <a16:creationId xmlns:a16="http://schemas.microsoft.com/office/drawing/2014/main" id="{8F9E106A-04E9-4683-90C9-6F02E951BC6C}"/>
               </a:ext>
             </a:extLst>
           </p:cNvPr>
@@ -6198,7 +6198,7 @@
           <p:cNvPr id="67" name="">
             <a:extLst xmlns:a="http://schemas.openxmlformats.org/drawingml/2006/main">
               <a:ext uri="{FF2B5EF4-FFF2-40B4-BE49-F238E27FC236}">
-                <a16:creationId xmlns:a16="http://schemas.microsoft.com/office/drawing/2014/main" id="{F6D75993-F586-4187-B855-FB6F1FC847AC}"/>
+                <a16:creationId xmlns:a16="http://schemas.microsoft.com/office/drawing/2014/main" id="{3020C042-CA57-4B60-B1DC-B94DA2AF9115}"/>
               </a:ext>
             </a:extLst>
           </p:cNvPr>
@@ -6250,7 +6250,7 @@
           <p:cNvPr id="68" name="">
             <a:extLst xmlns:a="http://schemas.openxmlformats.org/drawingml/2006/main">
               <a:ext uri="{FF2B5EF4-FFF2-40B4-BE49-F238E27FC236}">
-                <a16:creationId xmlns:a16="http://schemas.microsoft.com/office/drawing/2014/main" id="{7653AE21-AF24-4DE3-A5DA-45C24C654400}"/>
+                <a16:creationId xmlns:a16="http://schemas.microsoft.com/office/drawing/2014/main" id="{E4CAA46E-0512-4EA2-A4D2-CCE7916D5AC9}"/>
               </a:ext>
             </a:extLst>
           </p:cNvPr>
@@ -6302,7 +6302,7 @@
           <p:cNvPr id="69" name="">
             <a:extLst xmlns:a="http://schemas.openxmlformats.org/drawingml/2006/main">
               <a:ext uri="{FF2B5EF4-FFF2-40B4-BE49-F238E27FC236}">
-                <a16:creationId xmlns:a16="http://schemas.microsoft.com/office/drawing/2014/main" id="{2062A5E4-FA8F-4938-B7CA-79E5721B998B}"/>
+                <a16:creationId xmlns:a16="http://schemas.microsoft.com/office/drawing/2014/main" id="{54877D70-C784-4078-9696-EE53343B3D3C}"/>
               </a:ext>
             </a:extLst>
           </p:cNvPr>
@@ -6354,7 +6354,7 @@
           <p:cNvPr id="70" name="">
             <a:extLst xmlns:a="http://schemas.openxmlformats.org/drawingml/2006/main">
               <a:ext uri="{FF2B5EF4-FFF2-40B4-BE49-F238E27FC236}">
-                <a16:creationId xmlns:a16="http://schemas.microsoft.com/office/drawing/2014/main" id="{A4721A72-8C6B-4369-A86A-1BF72BCA46C4}"/>
+                <a16:creationId xmlns:a16="http://schemas.microsoft.com/office/drawing/2014/main" id="{F17A06AA-9180-4AA6-9F74-0BE06A17AB34}"/>
               </a:ext>
             </a:extLst>
           </p:cNvPr>
@@ -6385,7 +6385,7 @@
           <p:cNvPr id="71" name="">
             <a:extLst xmlns:a="http://schemas.openxmlformats.org/drawingml/2006/main">
               <a:ext uri="{FF2B5EF4-FFF2-40B4-BE49-F238E27FC236}">
-                <a16:creationId xmlns:a16="http://schemas.microsoft.com/office/drawing/2014/main" id="{4FB9B60D-EA9D-44E7-8FF0-088F83F76D08}"/>
+                <a16:creationId xmlns:a16="http://schemas.microsoft.com/office/drawing/2014/main" id="{2F62A61F-0980-4E18-8409-626FD2F4A8B9}"/>
               </a:ext>
             </a:extLst>
           </p:cNvPr>
@@ -6416,7 +6416,7 @@
           <p:cNvPr id="72" name="">
             <a:extLst xmlns:a="http://schemas.openxmlformats.org/drawingml/2006/main">
               <a:ext uri="{FF2B5EF4-FFF2-40B4-BE49-F238E27FC236}">
-                <a16:creationId xmlns:a16="http://schemas.microsoft.com/office/drawing/2014/main" id="{2377EFB6-51BD-486B-931F-3ED7B5391855}"/>
+                <a16:creationId xmlns:a16="http://schemas.microsoft.com/office/drawing/2014/main" id="{1E860814-9872-4FC0-8C58-580D8A864B24}"/>
               </a:ext>
             </a:extLst>
           </p:cNvPr>
@@ -6468,7 +6468,7 @@
           <p:cNvPr id="73" name="">
             <a:extLst xmlns:a="http://schemas.openxmlformats.org/drawingml/2006/main">
               <a:ext uri="{FF2B5EF4-FFF2-40B4-BE49-F238E27FC236}">
-                <a16:creationId xmlns:a16="http://schemas.microsoft.com/office/drawing/2014/main" id="{968AB5A0-344F-4C04-94B2-104EEB5E4E99}"/>
+                <a16:creationId xmlns:a16="http://schemas.microsoft.com/office/drawing/2014/main" id="{290AB193-DAB3-4ED5-B998-2F701444B1F2}"/>
               </a:ext>
             </a:extLst>
           </p:cNvPr>
@@ -6520,7 +6520,7 @@
           <p:cNvPr id="74" name="">
             <a:extLst xmlns:a="http://schemas.openxmlformats.org/drawingml/2006/main">
               <a:ext uri="{FF2B5EF4-FFF2-40B4-BE49-F238E27FC236}">
-                <a16:creationId xmlns:a16="http://schemas.microsoft.com/office/drawing/2014/main" id="{85A11162-AE6E-4A70-B0F1-67523E38278B}"/>
+                <a16:creationId xmlns:a16="http://schemas.microsoft.com/office/drawing/2014/main" id="{4F7F2A2C-760C-48CE-9E2E-96F87872E987}"/>
               </a:ext>
             </a:extLst>
           </p:cNvPr>
@@ -6572,7 +6572,7 @@
           <p:cNvPr id="75" name="">
             <a:extLst xmlns:a="http://schemas.openxmlformats.org/drawingml/2006/main">
               <a:ext uri="{FF2B5EF4-FFF2-40B4-BE49-F238E27FC236}">
-                <a16:creationId xmlns:a16="http://schemas.microsoft.com/office/drawing/2014/main" id="{429287CC-7D6C-4904-B573-3FDDCAEEE037}"/>
+                <a16:creationId xmlns:a16="http://schemas.microsoft.com/office/drawing/2014/main" id="{794FD9BE-E149-41AD-93AB-444916D14F68}"/>
               </a:ext>
             </a:extLst>
           </p:cNvPr>
@@ -6624,7 +6624,7 @@
           <p:cNvPr id="76" name="">
             <a:extLst xmlns:a="http://schemas.openxmlformats.org/drawingml/2006/main">
               <a:ext uri="{FF2B5EF4-FFF2-40B4-BE49-F238E27FC236}">
-                <a16:creationId xmlns:a16="http://schemas.microsoft.com/office/drawing/2014/main" id="{B28D6810-9DDD-4A47-8E5B-CF7ACA6D0552}"/>
+                <a16:creationId xmlns:a16="http://schemas.microsoft.com/office/drawing/2014/main" id="{3ACBBBAF-0840-4CD7-A2FB-3BB387EFC026}"/>
               </a:ext>
             </a:extLst>
           </p:cNvPr>
@@ -6676,7 +6676,7 @@
           <p:cNvPr id="77" name="">
             <a:extLst xmlns:a="http://schemas.openxmlformats.org/drawingml/2006/main">
               <a:ext uri="{FF2B5EF4-FFF2-40B4-BE49-F238E27FC236}">
-                <a16:creationId xmlns:a16="http://schemas.microsoft.com/office/drawing/2014/main" id="{28FF2C47-58FE-4B7B-9C2E-8EF581DC3AE6}"/>
+                <a16:creationId xmlns:a16="http://schemas.microsoft.com/office/drawing/2014/main" id="{39C7600A-58FF-4746-93F3-6CE992B3ACA8}"/>
               </a:ext>
             </a:extLst>
           </p:cNvPr>
@@ -6707,7 +6707,7 @@
           <p:cNvPr id="78" name="">
             <a:extLst xmlns:a="http://schemas.openxmlformats.org/drawingml/2006/main">
               <a:ext uri="{FF2B5EF4-FFF2-40B4-BE49-F238E27FC236}">
-                <a16:creationId xmlns:a16="http://schemas.microsoft.com/office/drawing/2014/main" id="{E7C6D3EA-0487-4851-963E-597CBC7957DB}"/>
+                <a16:creationId xmlns:a16="http://schemas.microsoft.com/office/drawing/2014/main" id="{64737E2D-1E2D-43AB-8EB2-11FCB7DB3942}"/>
               </a:ext>
             </a:extLst>
           </p:cNvPr>
@@ -6759,7 +6759,7 @@
           <p:cNvPr id="79" name="">
             <a:extLst xmlns:a="http://schemas.openxmlformats.org/drawingml/2006/main">
               <a:ext uri="{FF2B5EF4-FFF2-40B4-BE49-F238E27FC236}">
-                <a16:creationId xmlns:a16="http://schemas.microsoft.com/office/drawing/2014/main" id="{EC4651F2-27BA-48ED-A616-9E850E10ABC9}"/>
+                <a16:creationId xmlns:a16="http://schemas.microsoft.com/office/drawing/2014/main" id="{096C155D-90AD-468C-8BC2-CFA989CE99A4}"/>
               </a:ext>
             </a:extLst>
           </p:cNvPr>
@@ -6811,7 +6811,7 @@
           <p:cNvPr id="80" name="">
             <a:extLst xmlns:a="http://schemas.openxmlformats.org/drawingml/2006/main">
               <a:ext uri="{FF2B5EF4-FFF2-40B4-BE49-F238E27FC236}">
-                <a16:creationId xmlns:a16="http://schemas.microsoft.com/office/drawing/2014/main" id="{2563EBB0-23B7-4630-A418-24DEF4BE9BDA}"/>
+                <a16:creationId xmlns:a16="http://schemas.microsoft.com/office/drawing/2014/main" id="{1047C9D2-789A-48F6-8579-A2C4BF9C07A7}"/>
               </a:ext>
             </a:extLst>
           </p:cNvPr>
@@ -6863,7 +6863,7 @@
           <p:cNvPr id="81" name="">
             <a:extLst xmlns:a="http://schemas.openxmlformats.org/drawingml/2006/main">
               <a:ext uri="{FF2B5EF4-FFF2-40B4-BE49-F238E27FC236}">
-                <a16:creationId xmlns:a16="http://schemas.microsoft.com/office/drawing/2014/main" id="{EF718042-DFB8-4312-9BCD-0AC48BEA39D1}"/>
+                <a16:creationId xmlns:a16="http://schemas.microsoft.com/office/drawing/2014/main" id="{D9524D59-C563-4962-A5AE-458E2DF8A98B}"/>
               </a:ext>
             </a:extLst>
           </p:cNvPr>
@@ -6915,7 +6915,7 @@
           <p:cNvPr id="82" name="">
             <a:extLst xmlns:a="http://schemas.openxmlformats.org/drawingml/2006/main">
               <a:ext uri="{FF2B5EF4-FFF2-40B4-BE49-F238E27FC236}">
-                <a16:creationId xmlns:a16="http://schemas.microsoft.com/office/drawing/2014/main" id="{4643DAB6-39F5-4F91-BD98-2CF017E8F6D8}"/>
+                <a16:creationId xmlns:a16="http://schemas.microsoft.com/office/drawing/2014/main" id="{EC78B769-66DC-4408-A19D-2CC722AFEB27}"/>
               </a:ext>
             </a:extLst>
           </p:cNvPr>
@@ -6967,7 +6967,7 @@
           <p:cNvPr id="83" name="">
             <a:extLst xmlns:a="http://schemas.openxmlformats.org/drawingml/2006/main">
               <a:ext uri="{FF2B5EF4-FFF2-40B4-BE49-F238E27FC236}">
-                <a16:creationId xmlns:a16="http://schemas.microsoft.com/office/drawing/2014/main" id="{9E3D22C5-54A2-4D6C-AA17-03129AAD0950}"/>
+                <a16:creationId xmlns:a16="http://schemas.microsoft.com/office/drawing/2014/main" id="{5772DAF8-22E9-41AB-B378-B8AC3240C3AD}"/>
               </a:ext>
             </a:extLst>
           </p:cNvPr>
@@ -6998,7 +6998,7 @@
           <p:cNvPr id="84" name="">
             <a:extLst xmlns:a="http://schemas.openxmlformats.org/drawingml/2006/main">
               <a:ext uri="{FF2B5EF4-FFF2-40B4-BE49-F238E27FC236}">
-                <a16:creationId xmlns:a16="http://schemas.microsoft.com/office/drawing/2014/main" id="{DA6EFDA3-16B4-4A85-A410-0CB8893723E2}"/>
+                <a16:creationId xmlns:a16="http://schemas.microsoft.com/office/drawing/2014/main" id="{80518E83-B283-42FF-97F2-B04F070D4F92}"/>
               </a:ext>
             </a:extLst>
           </p:cNvPr>
@@ -7029,7 +7029,7 @@
           <p:cNvPr id="85" name="">
             <a:extLst xmlns:a="http://schemas.openxmlformats.org/drawingml/2006/main">
               <a:ext uri="{FF2B5EF4-FFF2-40B4-BE49-F238E27FC236}">
-                <a16:creationId xmlns:a16="http://schemas.microsoft.com/office/drawing/2014/main" id="{E5710A57-13C0-4D1E-B8AB-CBD79B6764D5}"/>
+                <a16:creationId xmlns:a16="http://schemas.microsoft.com/office/drawing/2014/main" id="{6E504028-42F6-42A6-ACEF-132A1A17471C}"/>
               </a:ext>
             </a:extLst>
           </p:cNvPr>
@@ -7081,7 +7081,7 @@
           <p:cNvPr id="86" name="">
             <a:extLst xmlns:a="http://schemas.openxmlformats.org/drawingml/2006/main">
               <a:ext uri="{FF2B5EF4-FFF2-40B4-BE49-F238E27FC236}">
-                <a16:creationId xmlns:a16="http://schemas.microsoft.com/office/drawing/2014/main" id="{5621F547-B028-46B5-B437-C65B5C763FBA}"/>
+                <a16:creationId xmlns:a16="http://schemas.microsoft.com/office/drawing/2014/main" id="{74482DDE-0968-456C-BF2A-167BFC563656}"/>
               </a:ext>
             </a:extLst>
           </p:cNvPr>
@@ -7133,7 +7133,7 @@
           <p:cNvPr id="87" name="">
             <a:extLst xmlns:a="http://schemas.openxmlformats.org/drawingml/2006/main">
               <a:ext uri="{FF2B5EF4-FFF2-40B4-BE49-F238E27FC236}">
-                <a16:creationId xmlns:a16="http://schemas.microsoft.com/office/drawing/2014/main" id="{EEAE8429-28F2-4FEF-BF64-5D9D76901653}"/>
+                <a16:creationId xmlns:a16="http://schemas.microsoft.com/office/drawing/2014/main" id="{1DC7FB9B-98A6-4CB9-827A-69F38B4CDEB3}"/>
               </a:ext>
             </a:extLst>
           </p:cNvPr>
@@ -7185,7 +7185,7 @@
           <p:cNvPr id="88" name="">
             <a:extLst xmlns:a="http://schemas.openxmlformats.org/drawingml/2006/main">
               <a:ext uri="{FF2B5EF4-FFF2-40B4-BE49-F238E27FC236}">
-                <a16:creationId xmlns:a16="http://schemas.microsoft.com/office/drawing/2014/main" id="{8844545A-AD90-47C3-ACD4-61D8D7CA40D3}"/>
+                <a16:creationId xmlns:a16="http://schemas.microsoft.com/office/drawing/2014/main" id="{D3A63797-FF68-4D6E-83DA-24AFDB923048}"/>
               </a:ext>
             </a:extLst>
           </p:cNvPr>
@@ -7237,7 +7237,7 @@
           <p:cNvPr id="89" name="">
             <a:extLst xmlns:a="http://schemas.openxmlformats.org/drawingml/2006/main">
               <a:ext uri="{FF2B5EF4-FFF2-40B4-BE49-F238E27FC236}">
-                <a16:creationId xmlns:a16="http://schemas.microsoft.com/office/drawing/2014/main" id="{343EB273-F9FA-482B-89A6-DA70556772F4}"/>
+                <a16:creationId xmlns:a16="http://schemas.microsoft.com/office/drawing/2014/main" id="{3D9CE346-C4E5-4E66-97D7-C7D4DAC642DD}"/>
               </a:ext>
             </a:extLst>
           </p:cNvPr>
@@ -7289,7 +7289,7 @@
           <p:cNvPr id="90" name="">
             <a:extLst xmlns:a="http://schemas.openxmlformats.org/drawingml/2006/main">
               <a:ext uri="{FF2B5EF4-FFF2-40B4-BE49-F238E27FC236}">
-                <a16:creationId xmlns:a16="http://schemas.microsoft.com/office/drawing/2014/main" id="{D027E1BE-8275-44AE-91D1-BA0B568A3C2B}"/>
+                <a16:creationId xmlns:a16="http://schemas.microsoft.com/office/drawing/2014/main" id="{DCDBCD0C-0308-40F1-9A46-F5DC265978C4}"/>
               </a:ext>
             </a:extLst>
           </p:cNvPr>
@@ -7320,7 +7320,7 @@
           <p:cNvPr id="91" name="">
             <a:extLst xmlns:a="http://schemas.openxmlformats.org/drawingml/2006/main">
               <a:ext uri="{FF2B5EF4-FFF2-40B4-BE49-F238E27FC236}">
-                <a16:creationId xmlns:a16="http://schemas.microsoft.com/office/drawing/2014/main" id="{9EB334FD-BA3F-43C5-B2F8-2FA2B9C9E5A6}"/>
+                <a16:creationId xmlns:a16="http://schemas.microsoft.com/office/drawing/2014/main" id="{E3929249-2DF8-4D7E-93BA-A1135FABCFE7}"/>
               </a:ext>
             </a:extLst>
           </p:cNvPr>
@@ -7372,7 +7372,7 @@
           <p:cNvPr id="92" name="">
             <a:extLst xmlns:a="http://schemas.openxmlformats.org/drawingml/2006/main">
               <a:ext uri="{FF2B5EF4-FFF2-40B4-BE49-F238E27FC236}">
-                <a16:creationId xmlns:a16="http://schemas.microsoft.com/office/drawing/2014/main" id="{94D21A08-6595-4F8F-9C2F-9EAE7AEDFF47}"/>
+                <a16:creationId xmlns:a16="http://schemas.microsoft.com/office/drawing/2014/main" id="{B8CD81E1-DE76-433B-925B-B2AF1EEFB9E9}"/>
               </a:ext>
             </a:extLst>
           </p:cNvPr>
@@ -7424,7 +7424,7 @@
           <p:cNvPr id="93" name="">
             <a:extLst xmlns:a="http://schemas.openxmlformats.org/drawingml/2006/main">
               <a:ext uri="{FF2B5EF4-FFF2-40B4-BE49-F238E27FC236}">
-                <a16:creationId xmlns:a16="http://schemas.microsoft.com/office/drawing/2014/main" id="{D4541DE3-C9CC-4CB4-BFC0-D4A9F630F8E3}"/>
+                <a16:creationId xmlns:a16="http://schemas.microsoft.com/office/drawing/2014/main" id="{90136983-0180-466C-8FCF-E0D71592C44B}"/>
               </a:ext>
             </a:extLst>
           </p:cNvPr>
@@ -7476,7 +7476,7 @@
           <p:cNvPr id="94" name="">
             <a:extLst xmlns:a="http://schemas.openxmlformats.org/drawingml/2006/main">
               <a:ext uri="{FF2B5EF4-FFF2-40B4-BE49-F238E27FC236}">
-                <a16:creationId xmlns:a16="http://schemas.microsoft.com/office/drawing/2014/main" id="{12A86BC4-4AAE-46C0-86C2-216FB33866A0}"/>
+                <a16:creationId xmlns:a16="http://schemas.microsoft.com/office/drawing/2014/main" id="{D694F6FA-6505-44C0-9DFB-A730543D89EF}"/>
               </a:ext>
             </a:extLst>
           </p:cNvPr>
@@ -7528,7 +7528,7 @@
           <p:cNvPr id="95" name="">
             <a:extLst xmlns:a="http://schemas.openxmlformats.org/drawingml/2006/main">
               <a:ext uri="{FF2B5EF4-FFF2-40B4-BE49-F238E27FC236}">
-                <a16:creationId xmlns:a16="http://schemas.microsoft.com/office/drawing/2014/main" id="{1E39F40A-2E0C-4F3D-BFB8-66AA724CEFE4}"/>
+                <a16:creationId xmlns:a16="http://schemas.microsoft.com/office/drawing/2014/main" id="{897A4DD7-09A7-430E-AD9B-671C6DB9077A}"/>
               </a:ext>
             </a:extLst>
           </p:cNvPr>
@@ -7580,7 +7580,7 @@
           <p:cNvPr id="96" name="">
             <a:extLst xmlns:a="http://schemas.openxmlformats.org/drawingml/2006/main">
               <a:ext uri="{FF2B5EF4-FFF2-40B4-BE49-F238E27FC236}">
-                <a16:creationId xmlns:a16="http://schemas.microsoft.com/office/drawing/2014/main" id="{A2208618-37D7-4DEA-BC96-313CFD014365}"/>
+                <a16:creationId xmlns:a16="http://schemas.microsoft.com/office/drawing/2014/main" id="{57639BBD-1EED-4A61-84B6-6B78A5055FC8}"/>
               </a:ext>
             </a:extLst>
           </p:cNvPr>
@@ -7611,7 +7611,7 @@
           <p:cNvPr id="97" name="">
             <a:extLst xmlns:a="http://schemas.openxmlformats.org/drawingml/2006/main">
               <a:ext uri="{FF2B5EF4-FFF2-40B4-BE49-F238E27FC236}">
-                <a16:creationId xmlns:a16="http://schemas.microsoft.com/office/drawing/2014/main" id="{5059DC87-1B8C-4317-9314-BC46FFC99FE1}"/>
+                <a16:creationId xmlns:a16="http://schemas.microsoft.com/office/drawing/2014/main" id="{995389ED-237A-4EEA-AFA7-9624FC38296C}"/>
               </a:ext>
             </a:extLst>
           </p:cNvPr>
@@ -7642,7 +7642,7 @@
           <p:cNvPr id="98" name="">
             <a:extLst xmlns:a="http://schemas.openxmlformats.org/drawingml/2006/main">
               <a:ext uri="{FF2B5EF4-FFF2-40B4-BE49-F238E27FC236}">
-                <a16:creationId xmlns:a16="http://schemas.microsoft.com/office/drawing/2014/main" id="{97B55413-F5C4-48BE-B125-CFB1A76E3447}"/>
+                <a16:creationId xmlns:a16="http://schemas.microsoft.com/office/drawing/2014/main" id="{6B2B2BA5-D4A1-45D3-B5C3-3C56B1BCF5E8}"/>
               </a:ext>
             </a:extLst>
           </p:cNvPr>
@@ -7694,7 +7694,7 @@
           <p:cNvPr id="99" name="">
             <a:extLst xmlns:a="http://schemas.openxmlformats.org/drawingml/2006/main">
               <a:ext uri="{FF2B5EF4-FFF2-40B4-BE49-F238E27FC236}">
-                <a16:creationId xmlns:a16="http://schemas.microsoft.com/office/drawing/2014/main" id="{4E21808F-A8E3-4D72-9EDD-DA8B41A9A312}"/>
+                <a16:creationId xmlns:a16="http://schemas.microsoft.com/office/drawing/2014/main" id="{63ECF941-7BF1-4333-A973-693824C4EEF3}"/>
               </a:ext>
             </a:extLst>
           </p:cNvPr>
@@ -7746,7 +7746,7 @@
           <p:cNvPr id="100" name="">
             <a:extLst xmlns:a="http://schemas.openxmlformats.org/drawingml/2006/main">
               <a:ext uri="{FF2B5EF4-FFF2-40B4-BE49-F238E27FC236}">
-                <a16:creationId xmlns:a16="http://schemas.microsoft.com/office/drawing/2014/main" id="{4D90849E-C7E6-4FFA-AA10-2D88D8263965}"/>
+                <a16:creationId xmlns:a16="http://schemas.microsoft.com/office/drawing/2014/main" id="{41861444-5F5E-4467-80AD-8520D1BCA6A2}"/>
               </a:ext>
             </a:extLst>
           </p:cNvPr>
@@ -7798,7 +7798,7 @@
           <p:cNvPr id="101" name="">
             <a:extLst xmlns:a="http://schemas.openxmlformats.org/drawingml/2006/main">
               <a:ext uri="{FF2B5EF4-FFF2-40B4-BE49-F238E27FC236}">
-                <a16:creationId xmlns:a16="http://schemas.microsoft.com/office/drawing/2014/main" id="{61D1459E-7167-41FE-A035-44D956937152}"/>
+                <a16:creationId xmlns:a16="http://schemas.microsoft.com/office/drawing/2014/main" id="{44018CDC-C7F8-41C8-8FD5-6240E0F81A12}"/>
               </a:ext>
             </a:extLst>
           </p:cNvPr>
@@ -7850,7 +7850,7 @@
           <p:cNvPr id="102" name="">
             <a:extLst xmlns:a="http://schemas.openxmlformats.org/drawingml/2006/main">
               <a:ext uri="{FF2B5EF4-FFF2-40B4-BE49-F238E27FC236}">
-                <a16:creationId xmlns:a16="http://schemas.microsoft.com/office/drawing/2014/main" id="{BA499C54-9CFD-433C-85BB-E953810A73F5}"/>
+                <a16:creationId xmlns:a16="http://schemas.microsoft.com/office/drawing/2014/main" id="{20265BA2-FA30-4489-8361-5707938CB598}"/>
               </a:ext>
             </a:extLst>
           </p:cNvPr>
@@ -7900,7 +7900,7 @@
     </p:spTree>
     <p:extLst>
       <p:ext uri="{BB962C8B-B14F-4D97-AF65-F5344CB8AC3E}">
-        <p14:creationId xmlns:p14="http://schemas.microsoft.com/office/powerpoint/2010/main" val="108695221"/>
+        <p14:creationId xmlns:p14="http://schemas.microsoft.com/office/powerpoint/2010/main" val="2100285164"/>
       </p:ext>
     </p:extLst>
   </p:cSld>
@@ -7931,7 +7931,7 @@
           <p:cNvPr id="98" name="">
             <a:extLst xmlns:a="http://schemas.openxmlformats.org/drawingml/2006/main">
               <a:ext uri="{FF2B5EF4-FFF2-40B4-BE49-F238E27FC236}">
-                <a16:creationId xmlns:a16="http://schemas.microsoft.com/office/drawing/2014/main" id="{DA865E98-DFC6-4C96-BACD-98FF014044D7}"/>
+                <a16:creationId xmlns:a16="http://schemas.microsoft.com/office/drawing/2014/main" id="{B403000B-1837-4F4D-BEE3-EFC7B70DF93A}"/>
               </a:ext>
             </a:extLst>
           </p:cNvPr>
@@ -7964,7 +7964,7 @@
           <p:cNvPr id="2" name="">
             <a:extLst xmlns:a="http://schemas.openxmlformats.org/drawingml/2006/main">
               <a:ext uri="{FF2B5EF4-FFF2-40B4-BE49-F238E27FC236}">
-                <a16:creationId xmlns:a16="http://schemas.microsoft.com/office/drawing/2014/main" id="{A22BB0C4-48FE-42FC-9395-7852251B9B1F}"/>
+                <a16:creationId xmlns:a16="http://schemas.microsoft.com/office/drawing/2014/main" id="{8CF081E1-9710-4F8E-B2DE-0ED14B729453}"/>
               </a:ext>
             </a:extLst>
           </p:cNvPr>
@@ -7995,7 +7995,7 @@
           <p:cNvPr id="3" name="">
             <a:extLst xmlns:a="http://schemas.openxmlformats.org/drawingml/2006/main">
               <a:ext uri="{FF2B5EF4-FFF2-40B4-BE49-F238E27FC236}">
-                <a16:creationId xmlns:a16="http://schemas.microsoft.com/office/drawing/2014/main" id="{42A6B8B5-1151-44BC-838E-58ABAE50BFEE}"/>
+                <a16:creationId xmlns:a16="http://schemas.microsoft.com/office/drawing/2014/main" id="{2C4F80F5-B2F5-4C50-9754-C5DF1FC149DC}"/>
               </a:ext>
             </a:extLst>
           </p:cNvPr>
@@ -8047,7 +8047,7 @@
           <p:cNvPr id="4" name="">
             <a:extLst xmlns:a="http://schemas.openxmlformats.org/drawingml/2006/main">
               <a:ext uri="{FF2B5EF4-FFF2-40B4-BE49-F238E27FC236}">
-                <a16:creationId xmlns:a16="http://schemas.microsoft.com/office/drawing/2014/main" id="{813B7531-736D-4685-8696-65E0DF708B06}"/>
+                <a16:creationId xmlns:a16="http://schemas.microsoft.com/office/drawing/2014/main" id="{BA3B5035-B24F-4F2C-88AB-72628F34600D}"/>
               </a:ext>
             </a:extLst>
           </p:cNvPr>
@@ -8099,7 +8099,7 @@
           <p:cNvPr id="5" name="">
             <a:extLst xmlns:a="http://schemas.openxmlformats.org/drawingml/2006/main">
               <a:ext uri="{FF2B5EF4-FFF2-40B4-BE49-F238E27FC236}">
-                <a16:creationId xmlns:a16="http://schemas.microsoft.com/office/drawing/2014/main" id="{CB5F16B8-EACA-4A2F-8A7E-ADE8864336A7}"/>
+                <a16:creationId xmlns:a16="http://schemas.microsoft.com/office/drawing/2014/main" id="{C5330025-BE1D-4F97-AB6F-D0317B493131}"/>
               </a:ext>
             </a:extLst>
           </p:cNvPr>
@@ -8134,7 +8134,7 @@
           <p:nvPr/>
         </p:nvPicPr>
         <p:blipFill>
-          <a:blip xmlns:r="http://schemas.openxmlformats.org/officeDocument/2006/relationships" xmlns:a="http://schemas.openxmlformats.org/drawingml/2006/main" r:embed="R88cc28dccbb64631"/>
+          <a:blip xmlns:r="http://schemas.openxmlformats.org/officeDocument/2006/relationships" xmlns:a="http://schemas.openxmlformats.org/drawingml/2006/main" r:embed="Rd807937b21ab4ce4"/>
           <a:stretch xmlns:a="http://schemas.openxmlformats.org/drawingml/2006/main"/>
         </p:blipFill>
         <p:spPr>
@@ -8152,7 +8152,7 @@
           <p:cNvPr id="7" name="">
             <a:extLst xmlns:a="http://schemas.openxmlformats.org/drawingml/2006/main">
               <a:ext uri="{FF2B5EF4-FFF2-40B4-BE49-F238E27FC236}">
-                <a16:creationId xmlns:a16="http://schemas.microsoft.com/office/drawing/2014/main" id="{C8D29A4A-8F77-48C5-A1D3-7A808AA9743C}"/>
+                <a16:creationId xmlns:a16="http://schemas.microsoft.com/office/drawing/2014/main" id="{BC02FCD9-2EDC-4B59-9477-2C26FD33FD34}"/>
               </a:ext>
             </a:extLst>
           </p:cNvPr>
@@ -8204,7 +8204,7 @@
           <p:cNvPr id="8" name="">
             <a:extLst xmlns:a="http://schemas.openxmlformats.org/drawingml/2006/main">
               <a:ext uri="{FF2B5EF4-FFF2-40B4-BE49-F238E27FC236}">
-                <a16:creationId xmlns:a16="http://schemas.microsoft.com/office/drawing/2014/main" id="{B23C4A8E-180B-4C04-81E9-C0B46D32FF00}"/>
+                <a16:creationId xmlns:a16="http://schemas.microsoft.com/office/drawing/2014/main" id="{6128F32A-1264-4DB6-A6CC-5EF6EF767E11}"/>
               </a:ext>
             </a:extLst>
           </p:cNvPr>
@@ -8256,7 +8256,7 @@
           <p:cNvPr id="9" name="">
             <a:extLst xmlns:a="http://schemas.openxmlformats.org/drawingml/2006/main">
               <a:ext uri="{FF2B5EF4-FFF2-40B4-BE49-F238E27FC236}">
-                <a16:creationId xmlns:a16="http://schemas.microsoft.com/office/drawing/2014/main" id="{40B26713-B6A3-4DFF-B74B-E391F2E44BB7}"/>
+                <a16:creationId xmlns:a16="http://schemas.microsoft.com/office/drawing/2014/main" id="{1082F5B8-E710-42E2-BEDF-857F60210E1D}"/>
               </a:ext>
             </a:extLst>
           </p:cNvPr>
@@ -8308,7 +8308,7 @@
           <p:cNvPr id="10" name="">
             <a:extLst xmlns:a="http://schemas.openxmlformats.org/drawingml/2006/main">
               <a:ext uri="{FF2B5EF4-FFF2-40B4-BE49-F238E27FC236}">
-                <a16:creationId xmlns:a16="http://schemas.microsoft.com/office/drawing/2014/main" id="{30EEC3E3-0DB5-420F-8046-F51101A95ECD}"/>
+                <a16:creationId xmlns:a16="http://schemas.microsoft.com/office/drawing/2014/main" id="{6CC57B4D-F205-47CC-AAAA-823E00C41169}"/>
               </a:ext>
             </a:extLst>
           </p:cNvPr>
@@ -8360,7 +8360,7 @@
           <p:cNvPr id="11" name="">
             <a:extLst xmlns:a="http://schemas.openxmlformats.org/drawingml/2006/main">
               <a:ext uri="{FF2B5EF4-FFF2-40B4-BE49-F238E27FC236}">
-                <a16:creationId xmlns:a16="http://schemas.microsoft.com/office/drawing/2014/main" id="{5C1F692D-516C-4BE5-8CEF-0780294ED550}"/>
+                <a16:creationId xmlns:a16="http://schemas.microsoft.com/office/drawing/2014/main" id="{B2D38C96-223D-400A-A3D4-B3AAFB241F5F}"/>
               </a:ext>
             </a:extLst>
           </p:cNvPr>
@@ -8391,7 +8391,7 @@
           <p:cNvPr id="12" name="">
             <a:extLst xmlns:a="http://schemas.openxmlformats.org/drawingml/2006/main">
               <a:ext uri="{FF2B5EF4-FFF2-40B4-BE49-F238E27FC236}">
-                <a16:creationId xmlns:a16="http://schemas.microsoft.com/office/drawing/2014/main" id="{2CB7FA59-99E4-4B09-AFAB-6D40B4B65B21}"/>
+                <a16:creationId xmlns:a16="http://schemas.microsoft.com/office/drawing/2014/main" id="{BBD194E8-1801-435E-9245-596E6BC68334}"/>
               </a:ext>
             </a:extLst>
           </p:cNvPr>
@@ -8422,7 +8422,7 @@
           <p:cNvPr id="13" name="">
             <a:extLst xmlns:a="http://schemas.openxmlformats.org/drawingml/2006/main">
               <a:ext uri="{FF2B5EF4-FFF2-40B4-BE49-F238E27FC236}">
-                <a16:creationId xmlns:a16="http://schemas.microsoft.com/office/drawing/2014/main" id="{7494A51D-2998-41D9-B2D8-49E46858A20D}"/>
+                <a16:creationId xmlns:a16="http://schemas.microsoft.com/office/drawing/2014/main" id="{3800616A-4019-4D23-AEFC-AB18CC9120FE}"/>
               </a:ext>
             </a:extLst>
           </p:cNvPr>
@@ -8474,7 +8474,7 @@
           <p:cNvPr id="14" name="">
             <a:extLst xmlns:a="http://schemas.openxmlformats.org/drawingml/2006/main">
               <a:ext uri="{FF2B5EF4-FFF2-40B4-BE49-F238E27FC236}">
-                <a16:creationId xmlns:a16="http://schemas.microsoft.com/office/drawing/2014/main" id="{DAFB1DB4-A18D-4AC8-9555-20BB3B37E4C8}"/>
+                <a16:creationId xmlns:a16="http://schemas.microsoft.com/office/drawing/2014/main" id="{20478AAC-D21D-48BA-A60C-D39B10980A18}"/>
               </a:ext>
             </a:extLst>
           </p:cNvPr>
@@ -8526,7 +8526,7 @@
           <p:cNvPr id="15" name="">
             <a:extLst xmlns:a="http://schemas.openxmlformats.org/drawingml/2006/main">
               <a:ext uri="{FF2B5EF4-FFF2-40B4-BE49-F238E27FC236}">
-                <a16:creationId xmlns:a16="http://schemas.microsoft.com/office/drawing/2014/main" id="{FCA29F3B-2F62-448E-B156-1907EE6CFCA0}"/>
+                <a16:creationId xmlns:a16="http://schemas.microsoft.com/office/drawing/2014/main" id="{848396DF-199D-4F2E-9A14-D69E735DA801}"/>
               </a:ext>
             </a:extLst>
           </p:cNvPr>
@@ -8578,7 +8578,7 @@
           <p:cNvPr id="16" name="">
             <a:extLst xmlns:a="http://schemas.openxmlformats.org/drawingml/2006/main">
               <a:ext uri="{FF2B5EF4-FFF2-40B4-BE49-F238E27FC236}">
-                <a16:creationId xmlns:a16="http://schemas.microsoft.com/office/drawing/2014/main" id="{3323D762-A157-482D-A0EE-1AC26CE384B3}"/>
+                <a16:creationId xmlns:a16="http://schemas.microsoft.com/office/drawing/2014/main" id="{F0A4759C-F538-42EB-ABDC-89EAB69D666C}"/>
               </a:ext>
             </a:extLst>
           </p:cNvPr>
@@ -8630,7 +8630,7 @@
           <p:cNvPr id="17" name="">
             <a:extLst xmlns:a="http://schemas.openxmlformats.org/drawingml/2006/main">
               <a:ext uri="{FF2B5EF4-FFF2-40B4-BE49-F238E27FC236}">
-                <a16:creationId xmlns:a16="http://schemas.microsoft.com/office/drawing/2014/main" id="{68E90F75-C104-429C-ABE1-289243FF0ED1}"/>
+                <a16:creationId xmlns:a16="http://schemas.microsoft.com/office/drawing/2014/main" id="{8E488BCB-4D57-49FB-A6E0-C83F0CFD6B9D}"/>
               </a:ext>
             </a:extLst>
           </p:cNvPr>
@@ -8682,7 +8682,7 @@
           <p:cNvPr id="18" name="">
             <a:extLst xmlns:a="http://schemas.openxmlformats.org/drawingml/2006/main">
               <a:ext uri="{FF2B5EF4-FFF2-40B4-BE49-F238E27FC236}">
-                <a16:creationId xmlns:a16="http://schemas.microsoft.com/office/drawing/2014/main" id="{EFE7D81C-363D-450E-8B49-365B3C361EAE}"/>
+                <a16:creationId xmlns:a16="http://schemas.microsoft.com/office/drawing/2014/main" id="{2D376A52-1D09-43AC-B90C-8FB80E4A22B2}"/>
               </a:ext>
             </a:extLst>
           </p:cNvPr>
@@ -8713,7 +8713,7 @@
           <p:cNvPr id="19" name="">
             <a:extLst xmlns:a="http://schemas.openxmlformats.org/drawingml/2006/main">
               <a:ext uri="{FF2B5EF4-FFF2-40B4-BE49-F238E27FC236}">
-                <a16:creationId xmlns:a16="http://schemas.microsoft.com/office/drawing/2014/main" id="{B191B29C-7C5F-4D6D-86BF-2AD40EDAF5E9}"/>
+                <a16:creationId xmlns:a16="http://schemas.microsoft.com/office/drawing/2014/main" id="{991936C1-4FBE-4D43-9D70-F4C847AFE5EB}"/>
               </a:ext>
             </a:extLst>
           </p:cNvPr>
@@ -8765,7 +8765,7 @@
           <p:cNvPr id="20" name="">
             <a:extLst xmlns:a="http://schemas.openxmlformats.org/drawingml/2006/main">
               <a:ext uri="{FF2B5EF4-FFF2-40B4-BE49-F238E27FC236}">
-                <a16:creationId xmlns:a16="http://schemas.microsoft.com/office/drawing/2014/main" id="{08299B8C-4259-4B30-8962-A7CD7DD4892A}"/>
+                <a16:creationId xmlns:a16="http://schemas.microsoft.com/office/drawing/2014/main" id="{903107A1-8DBE-4741-A52E-6D971D2BF5D6}"/>
               </a:ext>
             </a:extLst>
           </p:cNvPr>
@@ -8817,7 +8817,7 @@
           <p:cNvPr id="21" name="">
             <a:extLst xmlns:a="http://schemas.openxmlformats.org/drawingml/2006/main">
               <a:ext uri="{FF2B5EF4-FFF2-40B4-BE49-F238E27FC236}">
-                <a16:creationId xmlns:a16="http://schemas.microsoft.com/office/drawing/2014/main" id="{DAC3BA5F-6069-4E4B-9AC3-4F008BB330B0}"/>
+                <a16:creationId xmlns:a16="http://schemas.microsoft.com/office/drawing/2014/main" id="{18D761E0-2A48-4D05-A66D-4668AC7BA9E0}"/>
               </a:ext>
             </a:extLst>
           </p:cNvPr>
@@ -8869,7 +8869,7 @@
           <p:cNvPr id="22" name="">
             <a:extLst xmlns:a="http://schemas.openxmlformats.org/drawingml/2006/main">
               <a:ext uri="{FF2B5EF4-FFF2-40B4-BE49-F238E27FC236}">
-                <a16:creationId xmlns:a16="http://schemas.microsoft.com/office/drawing/2014/main" id="{B199E6C0-96ED-4F34-A3AD-8F28EEA3E127}"/>
+                <a16:creationId xmlns:a16="http://schemas.microsoft.com/office/drawing/2014/main" id="{C132EC21-6318-482E-9D76-AC8499CFDEE1}"/>
               </a:ext>
             </a:extLst>
           </p:cNvPr>
@@ -8921,7 +8921,7 @@
           <p:cNvPr id="23" name="">
             <a:extLst xmlns:a="http://schemas.openxmlformats.org/drawingml/2006/main">
               <a:ext uri="{FF2B5EF4-FFF2-40B4-BE49-F238E27FC236}">
-                <a16:creationId xmlns:a16="http://schemas.microsoft.com/office/drawing/2014/main" id="{084C9959-7785-4821-9D8A-B8D8899C6B8D}"/>
+                <a16:creationId xmlns:a16="http://schemas.microsoft.com/office/drawing/2014/main" id="{B1B282C4-CB03-480E-9CF2-19ECC3802C30}"/>
               </a:ext>
             </a:extLst>
           </p:cNvPr>
@@ -8973,7 +8973,7 @@
           <p:cNvPr id="24" name="">
             <a:extLst xmlns:a="http://schemas.openxmlformats.org/drawingml/2006/main">
               <a:ext uri="{FF2B5EF4-FFF2-40B4-BE49-F238E27FC236}">
-                <a16:creationId xmlns:a16="http://schemas.microsoft.com/office/drawing/2014/main" id="{CFD1B345-A886-4912-8C38-6D7961735233}"/>
+                <a16:creationId xmlns:a16="http://schemas.microsoft.com/office/drawing/2014/main" id="{60C9E67C-4D93-4AD9-8FA6-4A6D3B049543}"/>
               </a:ext>
             </a:extLst>
           </p:cNvPr>
@@ -9004,7 +9004,7 @@
           <p:cNvPr id="25" name="">
             <a:extLst xmlns:a="http://schemas.openxmlformats.org/drawingml/2006/main">
               <a:ext uri="{FF2B5EF4-FFF2-40B4-BE49-F238E27FC236}">
-                <a16:creationId xmlns:a16="http://schemas.microsoft.com/office/drawing/2014/main" id="{F8F179D3-0DA7-4496-B36C-6AB1B4CCA4D9}"/>
+                <a16:creationId xmlns:a16="http://schemas.microsoft.com/office/drawing/2014/main" id="{8B22ED4B-9F2C-430A-B4BE-795AF66F35D5}"/>
               </a:ext>
             </a:extLst>
           </p:cNvPr>
@@ -9035,7 +9035,7 @@
           <p:cNvPr id="26" name="">
             <a:extLst xmlns:a="http://schemas.openxmlformats.org/drawingml/2006/main">
               <a:ext uri="{FF2B5EF4-FFF2-40B4-BE49-F238E27FC236}">
-                <a16:creationId xmlns:a16="http://schemas.microsoft.com/office/drawing/2014/main" id="{FD79C672-A6DA-4E75-A8D6-C77EBA9E1A61}"/>
+                <a16:creationId xmlns:a16="http://schemas.microsoft.com/office/drawing/2014/main" id="{4FB42567-A7F7-4FE5-B34D-6C6FC053DE30}"/>
               </a:ext>
             </a:extLst>
           </p:cNvPr>
@@ -9087,7 +9087,7 @@
           <p:cNvPr id="27" name="">
             <a:extLst xmlns:a="http://schemas.openxmlformats.org/drawingml/2006/main">
               <a:ext uri="{FF2B5EF4-FFF2-40B4-BE49-F238E27FC236}">
-                <a16:creationId xmlns:a16="http://schemas.microsoft.com/office/drawing/2014/main" id="{BF3E541F-22FC-40CA-81FA-C64A9501052F}"/>
+                <a16:creationId xmlns:a16="http://schemas.microsoft.com/office/drawing/2014/main" id="{A6151D6C-551E-4F71-A978-495876632B45}"/>
               </a:ext>
             </a:extLst>
           </p:cNvPr>
@@ -9139,7 +9139,7 @@
           <p:cNvPr id="28" name="">
             <a:extLst xmlns:a="http://schemas.openxmlformats.org/drawingml/2006/main">
               <a:ext uri="{FF2B5EF4-FFF2-40B4-BE49-F238E27FC236}">
-                <a16:creationId xmlns:a16="http://schemas.microsoft.com/office/drawing/2014/main" id="{C01E092A-0AEA-4581-BF8C-503AE3661A5A}"/>
+                <a16:creationId xmlns:a16="http://schemas.microsoft.com/office/drawing/2014/main" id="{02CCA0E0-6E58-4B6A-BFFC-54F8370DAC38}"/>
               </a:ext>
             </a:extLst>
           </p:cNvPr>
@@ -9191,7 +9191,7 @@
           <p:cNvPr id="29" name="">
             <a:extLst xmlns:a="http://schemas.openxmlformats.org/drawingml/2006/main">
               <a:ext uri="{FF2B5EF4-FFF2-40B4-BE49-F238E27FC236}">
-                <a16:creationId xmlns:a16="http://schemas.microsoft.com/office/drawing/2014/main" id="{0EB03066-D13C-4534-963A-5F32A48F32B5}"/>
+                <a16:creationId xmlns:a16="http://schemas.microsoft.com/office/drawing/2014/main" id="{973E5994-4B32-4627-9883-641F58BB364B}"/>
               </a:ext>
             </a:extLst>
           </p:cNvPr>
@@ -9243,7 +9243,7 @@
           <p:cNvPr id="30" name="">
             <a:extLst xmlns:a="http://schemas.openxmlformats.org/drawingml/2006/main">
               <a:ext uri="{FF2B5EF4-FFF2-40B4-BE49-F238E27FC236}">
-                <a16:creationId xmlns:a16="http://schemas.microsoft.com/office/drawing/2014/main" id="{5FAAE9CF-0E4C-4E6C-BC94-E14805E1F7A3}"/>
+                <a16:creationId xmlns:a16="http://schemas.microsoft.com/office/drawing/2014/main" id="{D30AC29B-9D78-452E-8F22-B26AC20D0A10}"/>
               </a:ext>
             </a:extLst>
           </p:cNvPr>
@@ -9295,7 +9295,7 @@
           <p:cNvPr id="31" name="">
             <a:extLst xmlns:a="http://schemas.openxmlformats.org/drawingml/2006/main">
               <a:ext uri="{FF2B5EF4-FFF2-40B4-BE49-F238E27FC236}">
-                <a16:creationId xmlns:a16="http://schemas.microsoft.com/office/drawing/2014/main" id="{82CDE77F-CCD0-4033-8311-E4F1D86E525F}"/>
+                <a16:creationId xmlns:a16="http://schemas.microsoft.com/office/drawing/2014/main" id="{FB14B9C5-12E8-4594-B729-E1AEF454BB08}"/>
               </a:ext>
             </a:extLst>
           </p:cNvPr>
@@ -9326,7 +9326,7 @@
           <p:cNvPr id="32" name="">
             <a:extLst xmlns:a="http://schemas.openxmlformats.org/drawingml/2006/main">
               <a:ext uri="{FF2B5EF4-FFF2-40B4-BE49-F238E27FC236}">
-                <a16:creationId xmlns:a16="http://schemas.microsoft.com/office/drawing/2014/main" id="{EA945877-97F1-4261-A8A1-18A17904371B}"/>
+                <a16:creationId xmlns:a16="http://schemas.microsoft.com/office/drawing/2014/main" id="{4872F396-9616-4DBC-A1C9-A351B22D684A}"/>
               </a:ext>
             </a:extLst>
           </p:cNvPr>
@@ -9378,7 +9378,7 @@
           <p:cNvPr id="33" name="">
             <a:extLst xmlns:a="http://schemas.openxmlformats.org/drawingml/2006/main">
               <a:ext uri="{FF2B5EF4-FFF2-40B4-BE49-F238E27FC236}">
-                <a16:creationId xmlns:a16="http://schemas.microsoft.com/office/drawing/2014/main" id="{659D4EA3-8C06-40AE-9CBF-E74790F514E8}"/>
+                <a16:creationId xmlns:a16="http://schemas.microsoft.com/office/drawing/2014/main" id="{A56FB934-3608-402A-9B04-674FA9C42187}"/>
               </a:ext>
             </a:extLst>
           </p:cNvPr>
@@ -9430,7 +9430,7 @@
           <p:cNvPr id="34" name="">
             <a:extLst xmlns:a="http://schemas.openxmlformats.org/drawingml/2006/main">
               <a:ext uri="{FF2B5EF4-FFF2-40B4-BE49-F238E27FC236}">
-                <a16:creationId xmlns:a16="http://schemas.microsoft.com/office/drawing/2014/main" id="{9AF4388D-7DDC-4390-B7AF-7D3F1D42974C}"/>
+                <a16:creationId xmlns:a16="http://schemas.microsoft.com/office/drawing/2014/main" id="{CF7043BF-E4B5-409C-A03E-5DAD7DEBAF8A}"/>
               </a:ext>
             </a:extLst>
           </p:cNvPr>
@@ -9482,7 +9482,7 @@
           <p:cNvPr id="35" name="">
             <a:extLst xmlns:a="http://schemas.openxmlformats.org/drawingml/2006/main">
               <a:ext uri="{FF2B5EF4-FFF2-40B4-BE49-F238E27FC236}">
-                <a16:creationId xmlns:a16="http://schemas.microsoft.com/office/drawing/2014/main" id="{2AC947EE-6558-4C31-AF62-F3B04730D5CA}"/>
+                <a16:creationId xmlns:a16="http://schemas.microsoft.com/office/drawing/2014/main" id="{1F1DEF9F-7937-48C1-AD9E-D98CBDE5CAB0}"/>
               </a:ext>
             </a:extLst>
           </p:cNvPr>
@@ -9534,7 +9534,7 @@
           <p:cNvPr id="36" name="">
             <a:extLst xmlns:a="http://schemas.openxmlformats.org/drawingml/2006/main">
               <a:ext uri="{FF2B5EF4-FFF2-40B4-BE49-F238E27FC236}">
-                <a16:creationId xmlns:a16="http://schemas.microsoft.com/office/drawing/2014/main" id="{11221CA2-0D56-4434-B183-9ABF6D643949}"/>
+                <a16:creationId xmlns:a16="http://schemas.microsoft.com/office/drawing/2014/main" id="{CD882E9C-A846-4058-BA51-CFBB6E51EBFB}"/>
               </a:ext>
             </a:extLst>
           </p:cNvPr>
@@ -9586,7 +9586,7 @@
           <p:cNvPr id="37" name="">
             <a:extLst xmlns:a="http://schemas.openxmlformats.org/drawingml/2006/main">
               <a:ext uri="{FF2B5EF4-FFF2-40B4-BE49-F238E27FC236}">
-                <a16:creationId xmlns:a16="http://schemas.microsoft.com/office/drawing/2014/main" id="{5D023174-C9B9-40BF-AFDD-1F9D2243EDCF}"/>
+                <a16:creationId xmlns:a16="http://schemas.microsoft.com/office/drawing/2014/main" id="{AC87EFD8-32A2-4538-A631-E92FF2B180A4}"/>
               </a:ext>
             </a:extLst>
           </p:cNvPr>
@@ -9617,7 +9617,7 @@
           <p:cNvPr id="38" name="">
             <a:extLst xmlns:a="http://schemas.openxmlformats.org/drawingml/2006/main">
               <a:ext uri="{FF2B5EF4-FFF2-40B4-BE49-F238E27FC236}">
-                <a16:creationId xmlns:a16="http://schemas.microsoft.com/office/drawing/2014/main" id="{10BD4073-08B2-43A5-9182-56F4DCDEF14D}"/>
+                <a16:creationId xmlns:a16="http://schemas.microsoft.com/office/drawing/2014/main" id="{9758A1B2-CF35-44A4-A1A6-AFC3FA84FF9F}"/>
               </a:ext>
             </a:extLst>
           </p:cNvPr>
@@ -9648,7 +9648,7 @@
           <p:cNvPr id="39" name="">
             <a:extLst xmlns:a="http://schemas.openxmlformats.org/drawingml/2006/main">
               <a:ext uri="{FF2B5EF4-FFF2-40B4-BE49-F238E27FC236}">
-                <a16:creationId xmlns:a16="http://schemas.microsoft.com/office/drawing/2014/main" id="{05BCCFBC-06CD-47D3-95A9-2751276CB0AC}"/>
+                <a16:creationId xmlns:a16="http://schemas.microsoft.com/office/drawing/2014/main" id="{435FB96F-2CB3-4B78-8229-62CDB658F40C}"/>
               </a:ext>
             </a:extLst>
           </p:cNvPr>
@@ -9700,7 +9700,7 @@
           <p:cNvPr id="40" name="">
             <a:extLst xmlns:a="http://schemas.openxmlformats.org/drawingml/2006/main">
               <a:ext uri="{FF2B5EF4-FFF2-40B4-BE49-F238E27FC236}">
-                <a16:creationId xmlns:a16="http://schemas.microsoft.com/office/drawing/2014/main" id="{74579BE4-9A58-4D37-87CB-90DE47927890}"/>
+                <a16:creationId xmlns:a16="http://schemas.microsoft.com/office/drawing/2014/main" id="{17406075-E7AC-42C0-A94C-418A3371C426}"/>
               </a:ext>
             </a:extLst>
           </p:cNvPr>
@@ -9752,7 +9752,7 @@
           <p:cNvPr id="41" name="">
             <a:extLst xmlns:a="http://schemas.openxmlformats.org/drawingml/2006/main">
               <a:ext uri="{FF2B5EF4-FFF2-40B4-BE49-F238E27FC236}">
-                <a16:creationId xmlns:a16="http://schemas.microsoft.com/office/drawing/2014/main" id="{5E344723-16EC-4089-B12D-2C294824CC56}"/>
+                <a16:creationId xmlns:a16="http://schemas.microsoft.com/office/drawing/2014/main" id="{88B0D990-A2DE-42BE-8713-C85822C96FFE}"/>
               </a:ext>
             </a:extLst>
           </p:cNvPr>
@@ -9804,7 +9804,7 @@
           <p:cNvPr id="42" name="">
             <a:extLst xmlns:a="http://schemas.openxmlformats.org/drawingml/2006/main">
               <a:ext uri="{FF2B5EF4-FFF2-40B4-BE49-F238E27FC236}">
-                <a16:creationId xmlns:a16="http://schemas.microsoft.com/office/drawing/2014/main" id="{6E6CC6BB-FE62-4FA4-AC7E-96B5EE30FFEE}"/>
+                <a16:creationId xmlns:a16="http://schemas.microsoft.com/office/drawing/2014/main" id="{FD8DEA1C-8118-498A-9DB0-92BE356034AF}"/>
               </a:ext>
             </a:extLst>
           </p:cNvPr>
@@ -9856,7 +9856,7 @@
           <p:cNvPr id="43" name="">
             <a:extLst xmlns:a="http://schemas.openxmlformats.org/drawingml/2006/main">
               <a:ext uri="{FF2B5EF4-FFF2-40B4-BE49-F238E27FC236}">
-                <a16:creationId xmlns:a16="http://schemas.microsoft.com/office/drawing/2014/main" id="{16DDFA16-3CB6-4703-9ACA-999E7E874D28}"/>
+                <a16:creationId xmlns:a16="http://schemas.microsoft.com/office/drawing/2014/main" id="{5F88A7E6-784E-4BEA-892C-137FDC75BA61}"/>
               </a:ext>
             </a:extLst>
           </p:cNvPr>
@@ -9908,7 +9908,7 @@
           <p:cNvPr id="44" name="">
             <a:extLst xmlns:a="http://schemas.openxmlformats.org/drawingml/2006/main">
               <a:ext uri="{FF2B5EF4-FFF2-40B4-BE49-F238E27FC236}">
-                <a16:creationId xmlns:a16="http://schemas.microsoft.com/office/drawing/2014/main" id="{6B37BC99-A265-4D37-8820-2E43CE8A8581}"/>
+                <a16:creationId xmlns:a16="http://schemas.microsoft.com/office/drawing/2014/main" id="{4F2B0871-4B49-4AAA-AB37-1B2DF447BE90}"/>
               </a:ext>
             </a:extLst>
           </p:cNvPr>
@@ -9939,7 +9939,7 @@
           <p:cNvPr id="45" name="">
             <a:extLst xmlns:a="http://schemas.openxmlformats.org/drawingml/2006/main">
               <a:ext uri="{FF2B5EF4-FFF2-40B4-BE49-F238E27FC236}">
-                <a16:creationId xmlns:a16="http://schemas.microsoft.com/office/drawing/2014/main" id="{A1526905-7139-4DB8-842A-93FCCF53CE31}"/>
+                <a16:creationId xmlns:a16="http://schemas.microsoft.com/office/drawing/2014/main" id="{7B28E925-6924-427C-89E0-30E21D9F9618}"/>
               </a:ext>
             </a:extLst>
           </p:cNvPr>
@@ -9991,7 +9991,7 @@
           <p:cNvPr id="46" name="">
             <a:extLst xmlns:a="http://schemas.openxmlformats.org/drawingml/2006/main">
               <a:ext uri="{FF2B5EF4-FFF2-40B4-BE49-F238E27FC236}">
-                <a16:creationId xmlns:a16="http://schemas.microsoft.com/office/drawing/2014/main" id="{CC194D88-BE93-496F-9007-C360480AE780}"/>
+                <a16:creationId xmlns:a16="http://schemas.microsoft.com/office/drawing/2014/main" id="{41DF3F3C-93E7-4933-A2E8-480F6F24E94C}"/>
               </a:ext>
             </a:extLst>
           </p:cNvPr>
@@ -10043,7 +10043,7 @@
           <p:cNvPr id="47" name="">
             <a:extLst xmlns:a="http://schemas.openxmlformats.org/drawingml/2006/main">
               <a:ext uri="{FF2B5EF4-FFF2-40B4-BE49-F238E27FC236}">
-                <a16:creationId xmlns:a16="http://schemas.microsoft.com/office/drawing/2014/main" id="{BBAAC5C7-2C6C-472D-A68A-007694AA2B12}"/>
+                <a16:creationId xmlns:a16="http://schemas.microsoft.com/office/drawing/2014/main" id="{2E46D78B-0C43-4FF7-BBB8-9A907D102EA5}"/>
               </a:ext>
             </a:extLst>
           </p:cNvPr>
@@ -10095,7 +10095,7 @@
           <p:cNvPr id="48" name="">
             <a:extLst xmlns:a="http://schemas.openxmlformats.org/drawingml/2006/main">
               <a:ext uri="{FF2B5EF4-FFF2-40B4-BE49-F238E27FC236}">
-                <a16:creationId xmlns:a16="http://schemas.microsoft.com/office/drawing/2014/main" id="{3BBF2048-174F-42A0-B72B-1C2B086543FD}"/>
+                <a16:creationId xmlns:a16="http://schemas.microsoft.com/office/drawing/2014/main" id="{DFC244EB-E674-4C04-822E-0D8B94C45C50}"/>
               </a:ext>
             </a:extLst>
           </p:cNvPr>
@@ -10147,7 +10147,7 @@
           <p:cNvPr id="49" name="">
             <a:extLst xmlns:a="http://schemas.openxmlformats.org/drawingml/2006/main">
               <a:ext uri="{FF2B5EF4-FFF2-40B4-BE49-F238E27FC236}">
-                <a16:creationId xmlns:a16="http://schemas.microsoft.com/office/drawing/2014/main" id="{94526D1D-0CC4-495D-8E68-C2FC339D686B}"/>
+                <a16:creationId xmlns:a16="http://schemas.microsoft.com/office/drawing/2014/main" id="{AE8AEBD7-AC5D-42B0-BF2A-BDACE6DA50DF}"/>
               </a:ext>
             </a:extLst>
           </p:cNvPr>
@@ -10199,7 +10199,7 @@
           <p:cNvPr id="50" name="">
             <a:extLst xmlns:a="http://schemas.openxmlformats.org/drawingml/2006/main">
               <a:ext uri="{FF2B5EF4-FFF2-40B4-BE49-F238E27FC236}">
-                <a16:creationId xmlns:a16="http://schemas.microsoft.com/office/drawing/2014/main" id="{485AE4BA-D5C9-4762-B456-D3ACC5FBEB08}"/>
+                <a16:creationId xmlns:a16="http://schemas.microsoft.com/office/drawing/2014/main" id="{6740EC59-4399-4D5C-91F0-8DD0FE19F035}"/>
               </a:ext>
             </a:extLst>
           </p:cNvPr>
@@ -10251,7 +10251,7 @@
           <p:cNvPr id="51" name="">
             <a:extLst xmlns:a="http://schemas.openxmlformats.org/drawingml/2006/main">
               <a:ext uri="{FF2B5EF4-FFF2-40B4-BE49-F238E27FC236}">
-                <a16:creationId xmlns:a16="http://schemas.microsoft.com/office/drawing/2014/main" id="{93CF39B0-1E9A-439B-BCE5-BA18D0175AFD}"/>
+                <a16:creationId xmlns:a16="http://schemas.microsoft.com/office/drawing/2014/main" id="{30A4CE86-26C4-4594-9A47-025C87A352FC}"/>
               </a:ext>
             </a:extLst>
           </p:cNvPr>
@@ -10282,7 +10282,7 @@
           <p:cNvPr id="52" name="">
             <a:extLst xmlns:a="http://schemas.openxmlformats.org/drawingml/2006/main">
               <a:ext uri="{FF2B5EF4-FFF2-40B4-BE49-F238E27FC236}">
-                <a16:creationId xmlns:a16="http://schemas.microsoft.com/office/drawing/2014/main" id="{75FD8280-B938-44D7-8E74-D2BD4D1CCDC4}"/>
+                <a16:creationId xmlns:a16="http://schemas.microsoft.com/office/drawing/2014/main" id="{BEFC9409-DD83-470B-854A-882A279C4AE9}"/>
               </a:ext>
             </a:extLst>
           </p:cNvPr>
@@ -10313,7 +10313,7 @@
           <p:cNvPr id="53" name="">
             <a:extLst xmlns:a="http://schemas.openxmlformats.org/drawingml/2006/main">
               <a:ext uri="{FF2B5EF4-FFF2-40B4-BE49-F238E27FC236}">
-                <a16:creationId xmlns:a16="http://schemas.microsoft.com/office/drawing/2014/main" id="{BDC8C4E8-3227-4500-8C43-FE1FFC327B9E}"/>
+                <a16:creationId xmlns:a16="http://schemas.microsoft.com/office/drawing/2014/main" id="{6C871B8D-4974-40D7-802E-EEA7B8B68BA3}"/>
               </a:ext>
             </a:extLst>
           </p:cNvPr>
@@ -10344,7 +10344,7 @@
           <p:cNvPr id="54" name="">
             <a:extLst xmlns:a="http://schemas.openxmlformats.org/drawingml/2006/main">
               <a:ext uri="{FF2B5EF4-FFF2-40B4-BE49-F238E27FC236}">
-                <a16:creationId xmlns:a16="http://schemas.microsoft.com/office/drawing/2014/main" id="{1BF819A3-72B9-48BF-AB17-8E2C662EF044}"/>
+                <a16:creationId xmlns:a16="http://schemas.microsoft.com/office/drawing/2014/main" id="{F35042D9-7EA4-4DF9-99E2-34E15CA8160B}"/>
               </a:ext>
             </a:extLst>
           </p:cNvPr>
@@ -10396,7 +10396,7 @@
           <p:cNvPr id="55" name="">
             <a:extLst xmlns:a="http://schemas.openxmlformats.org/drawingml/2006/main">
               <a:ext uri="{FF2B5EF4-FFF2-40B4-BE49-F238E27FC236}">
-                <a16:creationId xmlns:a16="http://schemas.microsoft.com/office/drawing/2014/main" id="{34C0A82C-D9A7-47EF-A612-D9BC1868D9BD}"/>
+                <a16:creationId xmlns:a16="http://schemas.microsoft.com/office/drawing/2014/main" id="{76852557-0FCC-4EC0-8FAE-95DAE9EA71E9}"/>
               </a:ext>
             </a:extLst>
           </p:cNvPr>
@@ -10448,7 +10448,7 @@
           <p:cNvPr id="56" name="">
             <a:extLst xmlns:a="http://schemas.openxmlformats.org/drawingml/2006/main">
               <a:ext uri="{FF2B5EF4-FFF2-40B4-BE49-F238E27FC236}">
-                <a16:creationId xmlns:a16="http://schemas.microsoft.com/office/drawing/2014/main" id="{1E7CA886-03A9-443A-958E-7869DCB39A0C}"/>
+                <a16:creationId xmlns:a16="http://schemas.microsoft.com/office/drawing/2014/main" id="{4F844535-83CE-4F09-842B-196EB0399318}"/>
               </a:ext>
             </a:extLst>
           </p:cNvPr>
@@ -10500,7 +10500,7 @@
           <p:cNvPr id="57" name="">
             <a:extLst xmlns:a="http://schemas.openxmlformats.org/drawingml/2006/main">
               <a:ext uri="{FF2B5EF4-FFF2-40B4-BE49-F238E27FC236}">
-                <a16:creationId xmlns:a16="http://schemas.microsoft.com/office/drawing/2014/main" id="{CB354290-7101-45AE-ABF4-F3C1CF3426B3}"/>
+                <a16:creationId xmlns:a16="http://schemas.microsoft.com/office/drawing/2014/main" id="{497B8BF3-0793-4FC1-A83C-F0040226B970}"/>
               </a:ext>
             </a:extLst>
           </p:cNvPr>
@@ -10552,7 +10552,7 @@
           <p:cNvPr id="58" name="">
             <a:extLst xmlns:a="http://schemas.openxmlformats.org/drawingml/2006/main">
               <a:ext uri="{FF2B5EF4-FFF2-40B4-BE49-F238E27FC236}">
-                <a16:creationId xmlns:a16="http://schemas.microsoft.com/office/drawing/2014/main" id="{CD0F315C-2453-4D2F-A701-7BB3B4E6F6DE}"/>
+                <a16:creationId xmlns:a16="http://schemas.microsoft.com/office/drawing/2014/main" id="{08069B57-2172-497E-AC22-3837197E9C8A}"/>
               </a:ext>
             </a:extLst>
           </p:cNvPr>
@@ -10604,7 +10604,7 @@
           <p:cNvPr id="59" name="">
             <a:extLst xmlns:a="http://schemas.openxmlformats.org/drawingml/2006/main">
               <a:ext uri="{FF2B5EF4-FFF2-40B4-BE49-F238E27FC236}">
-                <a16:creationId xmlns:a16="http://schemas.microsoft.com/office/drawing/2014/main" id="{23282359-C5E6-4FA1-B733-DAC6E349E7E4}"/>
+                <a16:creationId xmlns:a16="http://schemas.microsoft.com/office/drawing/2014/main" id="{24660511-9F31-4C71-9559-1324FF29521A}"/>
               </a:ext>
             </a:extLst>
           </p:cNvPr>
@@ -10635,7 +10635,7 @@
           <p:cNvPr id="60" name="">
             <a:extLst xmlns:a="http://schemas.openxmlformats.org/drawingml/2006/main">
               <a:ext uri="{FF2B5EF4-FFF2-40B4-BE49-F238E27FC236}">
-                <a16:creationId xmlns:a16="http://schemas.microsoft.com/office/drawing/2014/main" id="{2A9C6D4D-6B6B-40B9-9852-8CAA934FEFF2}"/>
+                <a16:creationId xmlns:a16="http://schemas.microsoft.com/office/drawing/2014/main" id="{1BD273D8-0F52-44D9-818E-A34146FFF1BD}"/>
               </a:ext>
             </a:extLst>
           </p:cNvPr>
@@ -10687,7 +10687,7 @@
           <p:cNvPr id="61" name="">
             <a:extLst xmlns:a="http://schemas.openxmlformats.org/drawingml/2006/main">
               <a:ext uri="{FF2B5EF4-FFF2-40B4-BE49-F238E27FC236}">
-                <a16:creationId xmlns:a16="http://schemas.microsoft.com/office/drawing/2014/main" id="{BABD9149-ED05-42AD-80D5-A2991FA6973E}"/>
+                <a16:creationId xmlns:a16="http://schemas.microsoft.com/office/drawing/2014/main" id="{8422781A-0C9C-43A7-AEC2-DA96C4BEA897}"/>
               </a:ext>
             </a:extLst>
           </p:cNvPr>
@@ -10739,7 +10739,7 @@
           <p:cNvPr id="62" name="">
             <a:extLst xmlns:a="http://schemas.openxmlformats.org/drawingml/2006/main">
               <a:ext uri="{FF2B5EF4-FFF2-40B4-BE49-F238E27FC236}">
-                <a16:creationId xmlns:a16="http://schemas.microsoft.com/office/drawing/2014/main" id="{916B9147-0612-4636-BF47-6B13FE181E05}"/>
+                <a16:creationId xmlns:a16="http://schemas.microsoft.com/office/drawing/2014/main" id="{AA299D8A-FABF-4AEC-8CFD-B85B62ADE381}"/>
               </a:ext>
             </a:extLst>
           </p:cNvPr>
@@ -10791,7 +10791,7 @@
           <p:cNvPr id="63" name="">
             <a:extLst xmlns:a="http://schemas.openxmlformats.org/drawingml/2006/main">
               <a:ext uri="{FF2B5EF4-FFF2-40B4-BE49-F238E27FC236}">
-                <a16:creationId xmlns:a16="http://schemas.microsoft.com/office/drawing/2014/main" id="{202BE0E6-247D-4F16-8970-025D875E0AB4}"/>
+                <a16:creationId xmlns:a16="http://schemas.microsoft.com/office/drawing/2014/main" id="{187BABAE-63D0-41C3-9873-E5023B761F24}"/>
               </a:ext>
             </a:extLst>
           </p:cNvPr>
@@ -10843,7 +10843,7 @@
           <p:cNvPr id="64" name="">
             <a:extLst xmlns:a="http://schemas.openxmlformats.org/drawingml/2006/main">
               <a:ext uri="{FF2B5EF4-FFF2-40B4-BE49-F238E27FC236}">
-                <a16:creationId xmlns:a16="http://schemas.microsoft.com/office/drawing/2014/main" id="{4E059B26-2D04-4A95-A4CF-32D21D219F1C}"/>
+                <a16:creationId xmlns:a16="http://schemas.microsoft.com/office/drawing/2014/main" id="{9222CE33-28BF-462B-9822-2CB616F28619}"/>
               </a:ext>
             </a:extLst>
           </p:cNvPr>
@@ -10895,7 +10895,7 @@
           <p:cNvPr id="65" name="">
             <a:extLst xmlns:a="http://schemas.openxmlformats.org/drawingml/2006/main">
               <a:ext uri="{FF2B5EF4-FFF2-40B4-BE49-F238E27FC236}">
-                <a16:creationId xmlns:a16="http://schemas.microsoft.com/office/drawing/2014/main" id="{1A8E1D4F-A5F8-47A9-AA91-BD3BD8E092EA}"/>
+                <a16:creationId xmlns:a16="http://schemas.microsoft.com/office/drawing/2014/main" id="{CB0A33C6-D111-403C-AD28-4F4509DCC5A6}"/>
               </a:ext>
             </a:extLst>
           </p:cNvPr>
@@ -10926,7 +10926,7 @@
           <p:cNvPr id="66" name="">
             <a:extLst xmlns:a="http://schemas.openxmlformats.org/drawingml/2006/main">
               <a:ext uri="{FF2B5EF4-FFF2-40B4-BE49-F238E27FC236}">
-                <a16:creationId xmlns:a16="http://schemas.microsoft.com/office/drawing/2014/main" id="{E7AA038A-CC3A-4739-9896-02318631276F}"/>
+                <a16:creationId xmlns:a16="http://schemas.microsoft.com/office/drawing/2014/main" id="{E60776A1-7509-452B-96F0-C705B89AED7E}"/>
               </a:ext>
             </a:extLst>
           </p:cNvPr>
@@ -10957,7 +10957,7 @@
           <p:cNvPr id="67" name="">
             <a:extLst xmlns:a="http://schemas.openxmlformats.org/drawingml/2006/main">
               <a:ext uri="{FF2B5EF4-FFF2-40B4-BE49-F238E27FC236}">
-                <a16:creationId xmlns:a16="http://schemas.microsoft.com/office/drawing/2014/main" id="{08A81DCE-8D28-4BDE-98FD-AA9B4D13D5BA}"/>
+                <a16:creationId xmlns:a16="http://schemas.microsoft.com/office/drawing/2014/main" id="{5CBCF8FB-E7DB-4B05-A6C2-25F172719806}"/>
               </a:ext>
             </a:extLst>
           </p:cNvPr>
@@ -11009,7 +11009,7 @@
           <p:cNvPr id="68" name="">
             <a:extLst xmlns:a="http://schemas.openxmlformats.org/drawingml/2006/main">
               <a:ext uri="{FF2B5EF4-FFF2-40B4-BE49-F238E27FC236}">
-                <a16:creationId xmlns:a16="http://schemas.microsoft.com/office/drawing/2014/main" id="{ABA7DFD3-41C7-4C1C-B34B-15C04FD8FDCB}"/>
+                <a16:creationId xmlns:a16="http://schemas.microsoft.com/office/drawing/2014/main" id="{C92B663A-1762-460E-8ACE-EA9A05C953EA}"/>
               </a:ext>
             </a:extLst>
           </p:cNvPr>
@@ -11061,7 +11061,7 @@
           <p:cNvPr id="69" name="">
             <a:extLst xmlns:a="http://schemas.openxmlformats.org/drawingml/2006/main">
               <a:ext uri="{FF2B5EF4-FFF2-40B4-BE49-F238E27FC236}">
-                <a16:creationId xmlns:a16="http://schemas.microsoft.com/office/drawing/2014/main" id="{2D68E85C-9A7B-42BE-BB19-2589DA2B056F}"/>
+                <a16:creationId xmlns:a16="http://schemas.microsoft.com/office/drawing/2014/main" id="{EAAA64A0-F7FD-4ED7-8C2E-8191E70ACFB6}"/>
               </a:ext>
             </a:extLst>
           </p:cNvPr>
@@ -11113,7 +11113,7 @@
           <p:cNvPr id="70" name="">
             <a:extLst xmlns:a="http://schemas.openxmlformats.org/drawingml/2006/main">
               <a:ext uri="{FF2B5EF4-FFF2-40B4-BE49-F238E27FC236}">
-                <a16:creationId xmlns:a16="http://schemas.microsoft.com/office/drawing/2014/main" id="{4129FD3D-87E2-4C4F-91C0-FF0AC2D91470}"/>
+                <a16:creationId xmlns:a16="http://schemas.microsoft.com/office/drawing/2014/main" id="{3AA2A9B0-EA82-42B8-B1B2-BE28877BFA0D}"/>
               </a:ext>
             </a:extLst>
           </p:cNvPr>
@@ -11165,7 +11165,7 @@
           <p:cNvPr id="71" name="">
             <a:extLst xmlns:a="http://schemas.openxmlformats.org/drawingml/2006/main">
               <a:ext uri="{FF2B5EF4-FFF2-40B4-BE49-F238E27FC236}">
-                <a16:creationId xmlns:a16="http://schemas.microsoft.com/office/drawing/2014/main" id="{60DB1188-78F6-4E32-AE8D-439AE329ACF8}"/>
+                <a16:creationId xmlns:a16="http://schemas.microsoft.com/office/drawing/2014/main" id="{25055A97-828C-47A5-B785-156E1FF42F47}"/>
               </a:ext>
             </a:extLst>
           </p:cNvPr>
@@ -11217,7 +11217,7 @@
           <p:cNvPr id="72" name="">
             <a:extLst xmlns:a="http://schemas.openxmlformats.org/drawingml/2006/main">
               <a:ext uri="{FF2B5EF4-FFF2-40B4-BE49-F238E27FC236}">
-                <a16:creationId xmlns:a16="http://schemas.microsoft.com/office/drawing/2014/main" id="{92B56170-78BA-4C05-A821-C1259DFF2319}"/>
+                <a16:creationId xmlns:a16="http://schemas.microsoft.com/office/drawing/2014/main" id="{6EABEC3B-9A37-4341-B468-65B586297955}"/>
               </a:ext>
             </a:extLst>
           </p:cNvPr>
@@ -11248,7 +11248,7 @@
           <p:cNvPr id="73" name="">
             <a:extLst xmlns:a="http://schemas.openxmlformats.org/drawingml/2006/main">
               <a:ext uri="{FF2B5EF4-FFF2-40B4-BE49-F238E27FC236}">
-                <a16:creationId xmlns:a16="http://schemas.microsoft.com/office/drawing/2014/main" id="{28C7AB71-22F8-4EEE-BFC5-DA97F457F2C6}"/>
+                <a16:creationId xmlns:a16="http://schemas.microsoft.com/office/drawing/2014/main" id="{86F0E1C0-7013-49E3-BC48-4E15AC747CF5}"/>
               </a:ext>
             </a:extLst>
           </p:cNvPr>
@@ -11300,7 +11300,7 @@
           <p:cNvPr id="74" name="">
             <a:extLst xmlns:a="http://schemas.openxmlformats.org/drawingml/2006/main">
               <a:ext uri="{FF2B5EF4-FFF2-40B4-BE49-F238E27FC236}">
-                <a16:creationId xmlns:a16="http://schemas.microsoft.com/office/drawing/2014/main" id="{7D254E10-B538-44A6-AB95-536A37741DF3}"/>
+                <a16:creationId xmlns:a16="http://schemas.microsoft.com/office/drawing/2014/main" id="{7C8174E6-8505-4B37-AD91-745A57A69CA6}"/>
               </a:ext>
             </a:extLst>
           </p:cNvPr>
@@ -11352,7 +11352,7 @@
           <p:cNvPr id="75" name="">
             <a:extLst xmlns:a="http://schemas.openxmlformats.org/drawingml/2006/main">
               <a:ext uri="{FF2B5EF4-FFF2-40B4-BE49-F238E27FC236}">
-                <a16:creationId xmlns:a16="http://schemas.microsoft.com/office/drawing/2014/main" id="{8EBCA13D-4936-4BFA-A064-147F5C2FDF79}"/>
+                <a16:creationId xmlns:a16="http://schemas.microsoft.com/office/drawing/2014/main" id="{CDC2BD55-FA6F-40D2-A3C7-4135058194A4}"/>
               </a:ext>
             </a:extLst>
           </p:cNvPr>
@@ -11404,7 +11404,7 @@
           <p:cNvPr id="76" name="">
             <a:extLst xmlns:a="http://schemas.openxmlformats.org/drawingml/2006/main">
               <a:ext uri="{FF2B5EF4-FFF2-40B4-BE49-F238E27FC236}">
-                <a16:creationId xmlns:a16="http://schemas.microsoft.com/office/drawing/2014/main" id="{57F39E51-6089-490C-A835-FF832E1D4903}"/>
+                <a16:creationId xmlns:a16="http://schemas.microsoft.com/office/drawing/2014/main" id="{99D7F18E-2835-4C2B-957C-324103BDE811}"/>
               </a:ext>
             </a:extLst>
           </p:cNvPr>
@@ -11456,7 +11456,7 @@
           <p:cNvPr id="77" name="">
             <a:extLst xmlns:a="http://schemas.openxmlformats.org/drawingml/2006/main">
               <a:ext uri="{FF2B5EF4-FFF2-40B4-BE49-F238E27FC236}">
-                <a16:creationId xmlns:a16="http://schemas.microsoft.com/office/drawing/2014/main" id="{5448A564-4367-4880-A5B4-4D9EBAEF93B5}"/>
+                <a16:creationId xmlns:a16="http://schemas.microsoft.com/office/drawing/2014/main" id="{17473C46-68D5-4BB8-BAD8-91845E83368E}"/>
               </a:ext>
             </a:extLst>
           </p:cNvPr>
@@ -11508,7 +11508,7 @@
           <p:cNvPr id="78" name="">
             <a:extLst xmlns:a="http://schemas.openxmlformats.org/drawingml/2006/main">
               <a:ext uri="{FF2B5EF4-FFF2-40B4-BE49-F238E27FC236}">
-                <a16:creationId xmlns:a16="http://schemas.microsoft.com/office/drawing/2014/main" id="{F6814255-C416-4F8A-8532-BAE33CE8DF7B}"/>
+                <a16:creationId xmlns:a16="http://schemas.microsoft.com/office/drawing/2014/main" id="{31352731-23FB-40C0-B577-E98AAC7BB820}"/>
               </a:ext>
             </a:extLst>
           </p:cNvPr>
@@ -11539,7 +11539,7 @@
           <p:cNvPr id="79" name="">
             <a:extLst xmlns:a="http://schemas.openxmlformats.org/drawingml/2006/main">
               <a:ext uri="{FF2B5EF4-FFF2-40B4-BE49-F238E27FC236}">
-                <a16:creationId xmlns:a16="http://schemas.microsoft.com/office/drawing/2014/main" id="{07A63BF1-8642-428B-B4F1-24E0A435DD3B}"/>
+                <a16:creationId xmlns:a16="http://schemas.microsoft.com/office/drawing/2014/main" id="{8FD2E53C-1C74-4E42-BCE8-836897AE5F7D}"/>
               </a:ext>
             </a:extLst>
           </p:cNvPr>
@@ -11570,7 +11570,7 @@
           <p:cNvPr id="80" name="">
             <a:extLst xmlns:a="http://schemas.openxmlformats.org/drawingml/2006/main">
               <a:ext uri="{FF2B5EF4-FFF2-40B4-BE49-F238E27FC236}">
-                <a16:creationId xmlns:a16="http://schemas.microsoft.com/office/drawing/2014/main" id="{3999F34C-8A10-421F-A8F0-81F32023B689}"/>
+                <a16:creationId xmlns:a16="http://schemas.microsoft.com/office/drawing/2014/main" id="{A4C586AE-FFE8-4D51-9056-076AC64314F1}"/>
               </a:ext>
             </a:extLst>
           </p:cNvPr>
@@ -11622,7 +11622,7 @@
           <p:cNvPr id="81" name="">
             <a:extLst xmlns:a="http://schemas.openxmlformats.org/drawingml/2006/main">
               <a:ext uri="{FF2B5EF4-FFF2-40B4-BE49-F238E27FC236}">
-                <a16:creationId xmlns:a16="http://schemas.microsoft.com/office/drawing/2014/main" id="{50B08F7C-86F7-4E29-83A2-EAC172873A03}"/>
+                <a16:creationId xmlns:a16="http://schemas.microsoft.com/office/drawing/2014/main" id="{C6145819-57BA-4CC4-92EB-75458B0A00CC}"/>
               </a:ext>
             </a:extLst>
           </p:cNvPr>
@@ -11674,7 +11674,7 @@
           <p:cNvPr id="82" name="">
             <a:extLst xmlns:a="http://schemas.openxmlformats.org/drawingml/2006/main">
               <a:ext uri="{FF2B5EF4-FFF2-40B4-BE49-F238E27FC236}">
-                <a16:creationId xmlns:a16="http://schemas.microsoft.com/office/drawing/2014/main" id="{A463B736-87CC-42C1-A7A0-9D9B75524EFA}"/>
+                <a16:creationId xmlns:a16="http://schemas.microsoft.com/office/drawing/2014/main" id="{C9603AED-C1A8-431F-B2ED-416390528242}"/>
               </a:ext>
             </a:extLst>
           </p:cNvPr>
@@ -11726,7 +11726,7 @@
           <p:cNvPr id="83" name="">
             <a:extLst xmlns:a="http://schemas.openxmlformats.org/drawingml/2006/main">
               <a:ext uri="{FF2B5EF4-FFF2-40B4-BE49-F238E27FC236}">
-                <a16:creationId xmlns:a16="http://schemas.microsoft.com/office/drawing/2014/main" id="{E554D56E-B3A0-437C-B364-641ED99A1710}"/>
+                <a16:creationId xmlns:a16="http://schemas.microsoft.com/office/drawing/2014/main" id="{6B93EC49-607F-461F-9DF4-E178F78A160B}"/>
               </a:ext>
             </a:extLst>
           </p:cNvPr>
@@ -11778,7 +11778,7 @@
           <p:cNvPr id="84" name="">
             <a:extLst xmlns:a="http://schemas.openxmlformats.org/drawingml/2006/main">
               <a:ext uri="{FF2B5EF4-FFF2-40B4-BE49-F238E27FC236}">
-                <a16:creationId xmlns:a16="http://schemas.microsoft.com/office/drawing/2014/main" id="{5B07AC0F-7D8D-4124-9C01-3734A7B1D314}"/>
+                <a16:creationId xmlns:a16="http://schemas.microsoft.com/office/drawing/2014/main" id="{9167869A-E0DF-4824-BB58-A12D5811D564}"/>
               </a:ext>
             </a:extLst>
           </p:cNvPr>
@@ -11830,7 +11830,7 @@
           <p:cNvPr id="85" name="">
             <a:extLst xmlns:a="http://schemas.openxmlformats.org/drawingml/2006/main">
               <a:ext uri="{FF2B5EF4-FFF2-40B4-BE49-F238E27FC236}">
-                <a16:creationId xmlns:a16="http://schemas.microsoft.com/office/drawing/2014/main" id="{30D1E528-5A2C-4B26-B4D7-C61833F704BC}"/>
+                <a16:creationId xmlns:a16="http://schemas.microsoft.com/office/drawing/2014/main" id="{2DA5BD5E-4513-4612-B117-99CAF0AEC1F4}"/>
               </a:ext>
             </a:extLst>
           </p:cNvPr>
@@ -11861,7 +11861,7 @@
           <p:cNvPr id="86" name="">
             <a:extLst xmlns:a="http://schemas.openxmlformats.org/drawingml/2006/main">
               <a:ext uri="{FF2B5EF4-FFF2-40B4-BE49-F238E27FC236}">
-                <a16:creationId xmlns:a16="http://schemas.microsoft.com/office/drawing/2014/main" id="{F8CB5A12-2D68-4546-92E2-0D7D5F0FADDC}"/>
+                <a16:creationId xmlns:a16="http://schemas.microsoft.com/office/drawing/2014/main" id="{36D0B955-DBB5-46DD-A0B0-2ACBE9F5352D}"/>
               </a:ext>
             </a:extLst>
           </p:cNvPr>
@@ -11913,7 +11913,7 @@
           <p:cNvPr id="87" name="">
             <a:extLst xmlns:a="http://schemas.openxmlformats.org/drawingml/2006/main">
               <a:ext uri="{FF2B5EF4-FFF2-40B4-BE49-F238E27FC236}">
-                <a16:creationId xmlns:a16="http://schemas.microsoft.com/office/drawing/2014/main" id="{CA12B5CC-7ED3-4C04-A0F6-04D226A8AB92}"/>
+                <a16:creationId xmlns:a16="http://schemas.microsoft.com/office/drawing/2014/main" id="{51392ED8-C8DC-46B5-950B-34092FBA88BF}"/>
               </a:ext>
             </a:extLst>
           </p:cNvPr>
@@ -11965,7 +11965,7 @@
           <p:cNvPr id="88" name="">
             <a:extLst xmlns:a="http://schemas.openxmlformats.org/drawingml/2006/main">
               <a:ext uri="{FF2B5EF4-FFF2-40B4-BE49-F238E27FC236}">
-                <a16:creationId xmlns:a16="http://schemas.microsoft.com/office/drawing/2014/main" id="{D006CB80-C121-4C14-9E6F-B20EFD0BABEB}"/>
+                <a16:creationId xmlns:a16="http://schemas.microsoft.com/office/drawing/2014/main" id="{ED258931-FC6D-449D-9693-9A60A4D3BB1B}"/>
               </a:ext>
             </a:extLst>
           </p:cNvPr>
@@ -12017,7 +12017,7 @@
           <p:cNvPr id="89" name="">
             <a:extLst xmlns:a="http://schemas.openxmlformats.org/drawingml/2006/main">
               <a:ext uri="{FF2B5EF4-FFF2-40B4-BE49-F238E27FC236}">
-                <a16:creationId xmlns:a16="http://schemas.microsoft.com/office/drawing/2014/main" id="{219B1215-D4D6-464A-9061-1F203E60E2C4}"/>
+                <a16:creationId xmlns:a16="http://schemas.microsoft.com/office/drawing/2014/main" id="{AA0A72EC-D3AC-4F49-A700-4DD82522BA03}"/>
               </a:ext>
             </a:extLst>
           </p:cNvPr>
@@ -12069,7 +12069,7 @@
           <p:cNvPr id="90" name="">
             <a:extLst xmlns:a="http://schemas.openxmlformats.org/drawingml/2006/main">
               <a:ext uri="{FF2B5EF4-FFF2-40B4-BE49-F238E27FC236}">
-                <a16:creationId xmlns:a16="http://schemas.microsoft.com/office/drawing/2014/main" id="{06C312E0-5EDD-427E-A77A-1FDBD2CDFA80}"/>
+                <a16:creationId xmlns:a16="http://schemas.microsoft.com/office/drawing/2014/main" id="{72659279-B731-47A4-8741-9EE0DE98CC1A}"/>
               </a:ext>
             </a:extLst>
           </p:cNvPr>
@@ -12121,7 +12121,7 @@
           <p:cNvPr id="91" name="">
             <a:extLst xmlns:a="http://schemas.openxmlformats.org/drawingml/2006/main">
               <a:ext uri="{FF2B5EF4-FFF2-40B4-BE49-F238E27FC236}">
-                <a16:creationId xmlns:a16="http://schemas.microsoft.com/office/drawing/2014/main" id="{A0902733-CFC7-49D5-9C96-563CAAEECE39}"/>
+                <a16:creationId xmlns:a16="http://schemas.microsoft.com/office/drawing/2014/main" id="{322025D9-4476-4E2C-96F9-2CF14C1BB469}"/>
               </a:ext>
             </a:extLst>
           </p:cNvPr>
@@ -12152,7 +12152,7 @@
           <p:cNvPr id="92" name="">
             <a:extLst xmlns:a="http://schemas.openxmlformats.org/drawingml/2006/main">
               <a:ext uri="{FF2B5EF4-FFF2-40B4-BE49-F238E27FC236}">
-                <a16:creationId xmlns:a16="http://schemas.microsoft.com/office/drawing/2014/main" id="{670A789A-F341-4581-999F-0A01CA8F33ED}"/>
+                <a16:creationId xmlns:a16="http://schemas.microsoft.com/office/drawing/2014/main" id="{96312578-4292-444B-8CD1-7B989FA31549}"/>
               </a:ext>
             </a:extLst>
           </p:cNvPr>
@@ -12183,7 +12183,7 @@
           <p:cNvPr id="93" name="">
             <a:extLst xmlns:a="http://schemas.openxmlformats.org/drawingml/2006/main">
               <a:ext uri="{FF2B5EF4-FFF2-40B4-BE49-F238E27FC236}">
-                <a16:creationId xmlns:a16="http://schemas.microsoft.com/office/drawing/2014/main" id="{27AC26A2-5586-4847-88B7-3C741C176D96}"/>
+                <a16:creationId xmlns:a16="http://schemas.microsoft.com/office/drawing/2014/main" id="{CC71FD02-2563-455A-A047-8C7740CA895A}"/>
               </a:ext>
             </a:extLst>
           </p:cNvPr>
@@ -12235,7 +12235,7 @@
           <p:cNvPr id="94" name="">
             <a:extLst xmlns:a="http://schemas.openxmlformats.org/drawingml/2006/main">
               <a:ext uri="{FF2B5EF4-FFF2-40B4-BE49-F238E27FC236}">
-                <a16:creationId xmlns:a16="http://schemas.microsoft.com/office/drawing/2014/main" id="{033D7943-E3C1-4C09-AF14-080B668956C0}"/>
+                <a16:creationId xmlns:a16="http://schemas.microsoft.com/office/drawing/2014/main" id="{07ADA980-EF34-45AA-97C2-2B0D6CDF7428}"/>
               </a:ext>
             </a:extLst>
           </p:cNvPr>
@@ -12287,7 +12287,7 @@
           <p:cNvPr id="95" name="">
             <a:extLst xmlns:a="http://schemas.openxmlformats.org/drawingml/2006/main">
               <a:ext uri="{FF2B5EF4-FFF2-40B4-BE49-F238E27FC236}">
-                <a16:creationId xmlns:a16="http://schemas.microsoft.com/office/drawing/2014/main" id="{61304319-D4FD-4C4C-ABEF-E3292AC7B4A2}"/>
+                <a16:creationId xmlns:a16="http://schemas.microsoft.com/office/drawing/2014/main" id="{9BF5E333-56BB-4C44-9FD7-A5A2B3F56F6B}"/>
               </a:ext>
             </a:extLst>
           </p:cNvPr>
@@ -12339,7 +12339,7 @@
           <p:cNvPr id="96" name="">
             <a:extLst xmlns:a="http://schemas.openxmlformats.org/drawingml/2006/main">
               <a:ext uri="{FF2B5EF4-FFF2-40B4-BE49-F238E27FC236}">
-                <a16:creationId xmlns:a16="http://schemas.microsoft.com/office/drawing/2014/main" id="{79272958-0BE6-4565-9C9B-6E63616296BE}"/>
+                <a16:creationId xmlns:a16="http://schemas.microsoft.com/office/drawing/2014/main" id="{0542C915-B49E-486A-897C-3AC103CA0445}"/>
               </a:ext>
             </a:extLst>
           </p:cNvPr>
@@ -12391,7 +12391,7 @@
           <p:cNvPr id="97" name="">
             <a:extLst xmlns:a="http://schemas.openxmlformats.org/drawingml/2006/main">
               <a:ext uri="{FF2B5EF4-FFF2-40B4-BE49-F238E27FC236}">
-                <a16:creationId xmlns:a16="http://schemas.microsoft.com/office/drawing/2014/main" id="{87C3CB0C-D297-4FEB-AF8E-38F87D6C67E5}"/>
+                <a16:creationId xmlns:a16="http://schemas.microsoft.com/office/drawing/2014/main" id="{5413B966-4FDA-4DBB-B4F8-240A0C5EA0C9}"/>
               </a:ext>
             </a:extLst>
           </p:cNvPr>
@@ -12441,7 +12441,7 @@
     </p:spTree>
     <p:extLst>
       <p:ext uri="{BB962C8B-B14F-4D97-AF65-F5344CB8AC3E}">
-        <p14:creationId xmlns:p14="http://schemas.microsoft.com/office/powerpoint/2010/main" val="766080189"/>
+        <p14:creationId xmlns:p14="http://schemas.microsoft.com/office/powerpoint/2010/main" val="94917291"/>
       </p:ext>
     </p:extLst>
   </p:cSld>
@@ -12472,7 +12472,7 @@
           <p:cNvPr id="102" name="">
             <a:extLst xmlns:a="http://schemas.openxmlformats.org/drawingml/2006/main">
               <a:ext uri="{FF2B5EF4-FFF2-40B4-BE49-F238E27FC236}">
-                <a16:creationId xmlns:a16="http://schemas.microsoft.com/office/drawing/2014/main" id="{92E2C104-30E7-4A1A-8BE0-F93A8291B459}"/>
+                <a16:creationId xmlns:a16="http://schemas.microsoft.com/office/drawing/2014/main" id="{CCAD26E2-BA68-4F76-B996-072986DAABAB}"/>
               </a:ext>
             </a:extLst>
           </p:cNvPr>
@@ -12505,7 +12505,7 @@
           <p:cNvPr id="2" name="">
             <a:extLst xmlns:a="http://schemas.openxmlformats.org/drawingml/2006/main">
               <a:ext uri="{FF2B5EF4-FFF2-40B4-BE49-F238E27FC236}">
-                <a16:creationId xmlns:a16="http://schemas.microsoft.com/office/drawing/2014/main" id="{AC4C9B67-4CC4-45DA-B5C6-AAEF925621D9}"/>
+                <a16:creationId xmlns:a16="http://schemas.microsoft.com/office/drawing/2014/main" id="{F79FA583-E168-44E7-87F2-4FF9296D3511}"/>
               </a:ext>
             </a:extLst>
           </p:cNvPr>
@@ -12536,7 +12536,7 @@
           <p:cNvPr id="3" name="">
             <a:extLst xmlns:a="http://schemas.openxmlformats.org/drawingml/2006/main">
               <a:ext uri="{FF2B5EF4-FFF2-40B4-BE49-F238E27FC236}">
-                <a16:creationId xmlns:a16="http://schemas.microsoft.com/office/drawing/2014/main" id="{A7DDBC6E-0F24-4031-BE16-8C2074BDD6CA}"/>
+                <a16:creationId xmlns:a16="http://schemas.microsoft.com/office/drawing/2014/main" id="{9F3347E4-95AE-4954-AE44-4570C626E18A}"/>
               </a:ext>
             </a:extLst>
           </p:cNvPr>
@@ -12588,7 +12588,7 @@
           <p:cNvPr id="4" name="">
             <a:extLst xmlns:a="http://schemas.openxmlformats.org/drawingml/2006/main">
               <a:ext uri="{FF2B5EF4-FFF2-40B4-BE49-F238E27FC236}">
-                <a16:creationId xmlns:a16="http://schemas.microsoft.com/office/drawing/2014/main" id="{7FA6EBE0-D22D-4571-856C-3ED20A94C196}"/>
+                <a16:creationId xmlns:a16="http://schemas.microsoft.com/office/drawing/2014/main" id="{E3AC8F04-FF97-4FD8-AE86-74E0BD0B7CAA}"/>
               </a:ext>
             </a:extLst>
           </p:cNvPr>
@@ -12640,7 +12640,7 @@
           <p:cNvPr id="5" name="">
             <a:extLst xmlns:a="http://schemas.openxmlformats.org/drawingml/2006/main">
               <a:ext uri="{FF2B5EF4-FFF2-40B4-BE49-F238E27FC236}">
-                <a16:creationId xmlns:a16="http://schemas.microsoft.com/office/drawing/2014/main" id="{7176CF23-C3C5-4C1F-8A7C-406B48F81B40}"/>
+                <a16:creationId xmlns:a16="http://schemas.microsoft.com/office/drawing/2014/main" id="{2B313454-2AF4-492D-A0AC-B4410CCD9CC7}"/>
               </a:ext>
             </a:extLst>
           </p:cNvPr>
@@ -12675,7 +12675,7 @@
           <p:nvPr/>
         </p:nvPicPr>
         <p:blipFill>
-          <a:blip xmlns:r="http://schemas.openxmlformats.org/officeDocument/2006/relationships" xmlns:a="http://schemas.openxmlformats.org/drawingml/2006/main" r:embed="R99b7e17d3b014039"/>
+          <a:blip xmlns:r="http://schemas.openxmlformats.org/officeDocument/2006/relationships" xmlns:a="http://schemas.openxmlformats.org/drawingml/2006/main" r:embed="R2e5cdc003c6d403f"/>
           <a:stretch xmlns:a="http://schemas.openxmlformats.org/drawingml/2006/main"/>
         </p:blipFill>
         <p:spPr>
@@ -12693,7 +12693,7 @@
           <p:cNvPr id="7" name="">
             <a:extLst xmlns:a="http://schemas.openxmlformats.org/drawingml/2006/main">
               <a:ext uri="{FF2B5EF4-FFF2-40B4-BE49-F238E27FC236}">
-                <a16:creationId xmlns:a16="http://schemas.microsoft.com/office/drawing/2014/main" id="{7A3146A4-4A6F-4BE1-B9DE-A5B045058F86}"/>
+                <a16:creationId xmlns:a16="http://schemas.microsoft.com/office/drawing/2014/main" id="{A465983F-65F3-4D41-8DB7-2A60E9F29FF2}"/>
               </a:ext>
             </a:extLst>
           </p:cNvPr>
@@ -12745,7 +12745,7 @@
           <p:cNvPr id="8" name="">
             <a:extLst xmlns:a="http://schemas.openxmlformats.org/drawingml/2006/main">
               <a:ext uri="{FF2B5EF4-FFF2-40B4-BE49-F238E27FC236}">
-                <a16:creationId xmlns:a16="http://schemas.microsoft.com/office/drawing/2014/main" id="{89367ECA-2DCF-45E9-85E0-2001915C72FF}"/>
+                <a16:creationId xmlns:a16="http://schemas.microsoft.com/office/drawing/2014/main" id="{6E32001A-1065-4F08-95D5-99767AC25C7A}"/>
               </a:ext>
             </a:extLst>
           </p:cNvPr>
@@ -12797,7 +12797,7 @@
           <p:cNvPr id="9" name="">
             <a:extLst xmlns:a="http://schemas.openxmlformats.org/drawingml/2006/main">
               <a:ext uri="{FF2B5EF4-FFF2-40B4-BE49-F238E27FC236}">
-                <a16:creationId xmlns:a16="http://schemas.microsoft.com/office/drawing/2014/main" id="{17FDDAE0-DEFE-471C-B684-487068142321}"/>
+                <a16:creationId xmlns:a16="http://schemas.microsoft.com/office/drawing/2014/main" id="{42516893-62DF-493D-947B-36E278608769}"/>
               </a:ext>
             </a:extLst>
           </p:cNvPr>
@@ -12849,7 +12849,7 @@
           <p:cNvPr id="10" name="">
             <a:extLst xmlns:a="http://schemas.openxmlformats.org/drawingml/2006/main">
               <a:ext uri="{FF2B5EF4-FFF2-40B4-BE49-F238E27FC236}">
-                <a16:creationId xmlns:a16="http://schemas.microsoft.com/office/drawing/2014/main" id="{6CD13616-920D-4BAB-B0B3-4FD46AAE7E2A}"/>
+                <a16:creationId xmlns:a16="http://schemas.microsoft.com/office/drawing/2014/main" id="{2998B228-03B9-452A-A8B6-861C78302F7C}"/>
               </a:ext>
             </a:extLst>
           </p:cNvPr>
@@ -12901,7 +12901,7 @@
           <p:cNvPr id="11" name="">
             <a:extLst xmlns:a="http://schemas.openxmlformats.org/drawingml/2006/main">
               <a:ext uri="{FF2B5EF4-FFF2-40B4-BE49-F238E27FC236}">
-                <a16:creationId xmlns:a16="http://schemas.microsoft.com/office/drawing/2014/main" id="{0AFF2120-12DD-4093-A854-C349D3E32455}"/>
+                <a16:creationId xmlns:a16="http://schemas.microsoft.com/office/drawing/2014/main" id="{78E4409C-2459-4528-AABE-6855A311199C}"/>
               </a:ext>
             </a:extLst>
           </p:cNvPr>
@@ -12932,7 +12932,7 @@
           <p:cNvPr id="12" name="">
             <a:extLst xmlns:a="http://schemas.openxmlformats.org/drawingml/2006/main">
               <a:ext uri="{FF2B5EF4-FFF2-40B4-BE49-F238E27FC236}">
-                <a16:creationId xmlns:a16="http://schemas.microsoft.com/office/drawing/2014/main" id="{C77C152D-D303-43DF-BE29-85D3E234BF36}"/>
+                <a16:creationId xmlns:a16="http://schemas.microsoft.com/office/drawing/2014/main" id="{A8644630-9219-43C7-9FF0-79DB2A0DCD56}"/>
               </a:ext>
             </a:extLst>
           </p:cNvPr>
@@ -12963,7 +12963,7 @@
           <p:cNvPr id="13" name="">
             <a:extLst xmlns:a="http://schemas.openxmlformats.org/drawingml/2006/main">
               <a:ext uri="{FF2B5EF4-FFF2-40B4-BE49-F238E27FC236}">
-                <a16:creationId xmlns:a16="http://schemas.microsoft.com/office/drawing/2014/main" id="{52500CA3-FD16-4C71-B1A5-00FE09E72B3A}"/>
+                <a16:creationId xmlns:a16="http://schemas.microsoft.com/office/drawing/2014/main" id="{F154A428-7E76-44E5-A045-313FF96E7C8E}"/>
               </a:ext>
             </a:extLst>
           </p:cNvPr>
@@ -13015,7 +13015,7 @@
           <p:cNvPr id="14" name="">
             <a:extLst xmlns:a="http://schemas.openxmlformats.org/drawingml/2006/main">
               <a:ext uri="{FF2B5EF4-FFF2-40B4-BE49-F238E27FC236}">
-                <a16:creationId xmlns:a16="http://schemas.microsoft.com/office/drawing/2014/main" id="{0EE5D5C0-F256-4C68-8AA8-F5910AF1BA6D}"/>
+                <a16:creationId xmlns:a16="http://schemas.microsoft.com/office/drawing/2014/main" id="{40279272-6AE8-4A5A-B660-8AA3A6B5CE38}"/>
               </a:ext>
             </a:extLst>
           </p:cNvPr>
@@ -13067,7 +13067,7 @@
           <p:cNvPr id="15" name="">
             <a:extLst xmlns:a="http://schemas.openxmlformats.org/drawingml/2006/main">
               <a:ext uri="{FF2B5EF4-FFF2-40B4-BE49-F238E27FC236}">
-                <a16:creationId xmlns:a16="http://schemas.microsoft.com/office/drawing/2014/main" id="{E6E3C39A-B932-4C9C-86CD-CA6383FB8471}"/>
+                <a16:creationId xmlns:a16="http://schemas.microsoft.com/office/drawing/2014/main" id="{6CA02A95-0DEC-416D-AE37-67C42D5254DA}"/>
               </a:ext>
             </a:extLst>
           </p:cNvPr>
@@ -13119,7 +13119,7 @@
           <p:cNvPr id="16" name="">
             <a:extLst xmlns:a="http://schemas.openxmlformats.org/drawingml/2006/main">
               <a:ext uri="{FF2B5EF4-FFF2-40B4-BE49-F238E27FC236}">
-                <a16:creationId xmlns:a16="http://schemas.microsoft.com/office/drawing/2014/main" id="{F06D5A0D-16B2-47E4-BDAF-6B610F2BDBE2}"/>
+                <a16:creationId xmlns:a16="http://schemas.microsoft.com/office/drawing/2014/main" id="{F1A0F62C-8BFA-4BFB-BFA0-BE7CE0DE1A48}"/>
               </a:ext>
             </a:extLst>
           </p:cNvPr>
@@ -13171,7 +13171,7 @@
           <p:cNvPr id="17" name="">
             <a:extLst xmlns:a="http://schemas.openxmlformats.org/drawingml/2006/main">
               <a:ext uri="{FF2B5EF4-FFF2-40B4-BE49-F238E27FC236}">
-                <a16:creationId xmlns:a16="http://schemas.microsoft.com/office/drawing/2014/main" id="{13B09D6B-B200-4F7D-BE52-EDC5759ABEA7}"/>
+                <a16:creationId xmlns:a16="http://schemas.microsoft.com/office/drawing/2014/main" id="{F1513E58-653A-4CE8-B408-5B6BA2BB80C7}"/>
               </a:ext>
             </a:extLst>
           </p:cNvPr>
@@ -13223,7 +13223,7 @@
           <p:cNvPr id="18" name="">
             <a:extLst xmlns:a="http://schemas.openxmlformats.org/drawingml/2006/main">
               <a:ext uri="{FF2B5EF4-FFF2-40B4-BE49-F238E27FC236}">
-                <a16:creationId xmlns:a16="http://schemas.microsoft.com/office/drawing/2014/main" id="{FA15F2BD-5BC4-4A01-8F1C-CB2B03F54E88}"/>
+                <a16:creationId xmlns:a16="http://schemas.microsoft.com/office/drawing/2014/main" id="{4F3FEC9B-E347-4DD6-A573-6FB5934D312E}"/>
               </a:ext>
             </a:extLst>
           </p:cNvPr>
@@ -13254,7 +13254,7 @@
           <p:cNvPr id="19" name="">
             <a:extLst xmlns:a="http://schemas.openxmlformats.org/drawingml/2006/main">
               <a:ext uri="{FF2B5EF4-FFF2-40B4-BE49-F238E27FC236}">
-                <a16:creationId xmlns:a16="http://schemas.microsoft.com/office/drawing/2014/main" id="{41EA3F1D-C342-41FA-894F-632B2A55A689}"/>
+                <a16:creationId xmlns:a16="http://schemas.microsoft.com/office/drawing/2014/main" id="{DA534D1A-0E20-4C53-9786-448E33405F95}"/>
               </a:ext>
             </a:extLst>
           </p:cNvPr>
@@ -13306,7 +13306,7 @@
           <p:cNvPr id="20" name="">
             <a:extLst xmlns:a="http://schemas.openxmlformats.org/drawingml/2006/main">
               <a:ext uri="{FF2B5EF4-FFF2-40B4-BE49-F238E27FC236}">
-                <a16:creationId xmlns:a16="http://schemas.microsoft.com/office/drawing/2014/main" id="{16CEB314-8941-41EC-800A-7509C3652FB2}"/>
+                <a16:creationId xmlns:a16="http://schemas.microsoft.com/office/drawing/2014/main" id="{7ED2CD2A-58BE-469E-B42A-491E6A96B7EF}"/>
               </a:ext>
             </a:extLst>
           </p:cNvPr>
@@ -13358,7 +13358,7 @@
           <p:cNvPr id="21" name="">
             <a:extLst xmlns:a="http://schemas.openxmlformats.org/drawingml/2006/main">
               <a:ext uri="{FF2B5EF4-FFF2-40B4-BE49-F238E27FC236}">
-                <a16:creationId xmlns:a16="http://schemas.microsoft.com/office/drawing/2014/main" id="{3EF84523-0DBB-4FC9-B383-BFC9A8462CD4}"/>
+                <a16:creationId xmlns:a16="http://schemas.microsoft.com/office/drawing/2014/main" id="{ED5D98BB-0E22-4594-9FB1-19D117D6936D}"/>
               </a:ext>
             </a:extLst>
           </p:cNvPr>
@@ -13410,7 +13410,7 @@
           <p:cNvPr id="22" name="">
             <a:extLst xmlns:a="http://schemas.openxmlformats.org/drawingml/2006/main">
               <a:ext uri="{FF2B5EF4-FFF2-40B4-BE49-F238E27FC236}">
-                <a16:creationId xmlns:a16="http://schemas.microsoft.com/office/drawing/2014/main" id="{ACB90311-40B0-4C75-AC6F-98AC366832AA}"/>
+                <a16:creationId xmlns:a16="http://schemas.microsoft.com/office/drawing/2014/main" id="{7FC66B0C-036C-43E0-A6AB-C843071C4987}"/>
               </a:ext>
             </a:extLst>
           </p:cNvPr>
@@ -13462,7 +13462,7 @@
           <p:cNvPr id="23" name="">
             <a:extLst xmlns:a="http://schemas.openxmlformats.org/drawingml/2006/main">
               <a:ext uri="{FF2B5EF4-FFF2-40B4-BE49-F238E27FC236}">
-                <a16:creationId xmlns:a16="http://schemas.microsoft.com/office/drawing/2014/main" id="{93EF291B-43BC-48B5-8995-03F7B15A44EA}"/>
+                <a16:creationId xmlns:a16="http://schemas.microsoft.com/office/drawing/2014/main" id="{DB5BE148-033B-43E5-9F71-199911500387}"/>
               </a:ext>
             </a:extLst>
           </p:cNvPr>
@@ -13514,7 +13514,7 @@
           <p:cNvPr id="24" name="">
             <a:extLst xmlns:a="http://schemas.openxmlformats.org/drawingml/2006/main">
               <a:ext uri="{FF2B5EF4-FFF2-40B4-BE49-F238E27FC236}">
-                <a16:creationId xmlns:a16="http://schemas.microsoft.com/office/drawing/2014/main" id="{ECAD988F-CF0A-4891-8479-72622F0753D7}"/>
+                <a16:creationId xmlns:a16="http://schemas.microsoft.com/office/drawing/2014/main" id="{C395ABF3-C073-4878-AE9A-DEDF211AE96C}"/>
               </a:ext>
             </a:extLst>
           </p:cNvPr>
@@ -13545,7 +13545,7 @@
           <p:cNvPr id="25" name="">
             <a:extLst xmlns:a="http://schemas.openxmlformats.org/drawingml/2006/main">
               <a:ext uri="{FF2B5EF4-FFF2-40B4-BE49-F238E27FC236}">
-                <a16:creationId xmlns:a16="http://schemas.microsoft.com/office/drawing/2014/main" id="{EA4B5665-5774-4045-98C8-DE0CCAF36823}"/>
+                <a16:creationId xmlns:a16="http://schemas.microsoft.com/office/drawing/2014/main" id="{45EB4652-B887-4471-8D14-C18CB2CDC9CB}"/>
               </a:ext>
             </a:extLst>
           </p:cNvPr>
@@ -13576,7 +13576,7 @@
           <p:cNvPr id="26" name="">
             <a:extLst xmlns:a="http://schemas.openxmlformats.org/drawingml/2006/main">
               <a:ext uri="{FF2B5EF4-FFF2-40B4-BE49-F238E27FC236}">
-                <a16:creationId xmlns:a16="http://schemas.microsoft.com/office/drawing/2014/main" id="{8027B8A0-1472-4634-AFCA-78B5B317C07F}"/>
+                <a16:creationId xmlns:a16="http://schemas.microsoft.com/office/drawing/2014/main" id="{DD0A0845-69F5-41FF-9A6B-2E2A7929DB1B}"/>
               </a:ext>
             </a:extLst>
           </p:cNvPr>
@@ -13628,7 +13628,7 @@
           <p:cNvPr id="27" name="">
             <a:extLst xmlns:a="http://schemas.openxmlformats.org/drawingml/2006/main">
               <a:ext uri="{FF2B5EF4-FFF2-40B4-BE49-F238E27FC236}">
-                <a16:creationId xmlns:a16="http://schemas.microsoft.com/office/drawing/2014/main" id="{D159745E-3C67-41C3-AB20-684E501B43C1}"/>
+                <a16:creationId xmlns:a16="http://schemas.microsoft.com/office/drawing/2014/main" id="{87EF7944-E6DB-4982-83E0-37BEA1BFC369}"/>
               </a:ext>
             </a:extLst>
           </p:cNvPr>
@@ -13680,7 +13680,7 @@
           <p:cNvPr id="28" name="">
             <a:extLst xmlns:a="http://schemas.openxmlformats.org/drawingml/2006/main">
               <a:ext uri="{FF2B5EF4-FFF2-40B4-BE49-F238E27FC236}">
-                <a16:creationId xmlns:a16="http://schemas.microsoft.com/office/drawing/2014/main" id="{7EB89C55-ABAE-4D7E-B49E-C35A7A9FEAE7}"/>
+                <a16:creationId xmlns:a16="http://schemas.microsoft.com/office/drawing/2014/main" id="{29029FE9-8C19-4037-8106-38BBB9A79E5E}"/>
               </a:ext>
             </a:extLst>
           </p:cNvPr>
@@ -13732,7 +13732,7 @@
           <p:cNvPr id="29" name="">
             <a:extLst xmlns:a="http://schemas.openxmlformats.org/drawingml/2006/main">
               <a:ext uri="{FF2B5EF4-FFF2-40B4-BE49-F238E27FC236}">
-                <a16:creationId xmlns:a16="http://schemas.microsoft.com/office/drawing/2014/main" id="{DC5C1022-1FE7-4AED-B581-BB96F64DA1A7}"/>
+                <a16:creationId xmlns:a16="http://schemas.microsoft.com/office/drawing/2014/main" id="{81E42212-D49F-468C-9E03-7552D10FAD3E}"/>
               </a:ext>
             </a:extLst>
           </p:cNvPr>
@@ -13784,7 +13784,7 @@
           <p:cNvPr id="30" name="">
             <a:extLst xmlns:a="http://schemas.openxmlformats.org/drawingml/2006/main">
               <a:ext uri="{FF2B5EF4-FFF2-40B4-BE49-F238E27FC236}">
-                <a16:creationId xmlns:a16="http://schemas.microsoft.com/office/drawing/2014/main" id="{6144444A-82F3-4C5B-AA7E-C2365068166E}"/>
+                <a16:creationId xmlns:a16="http://schemas.microsoft.com/office/drawing/2014/main" id="{49104446-3CA2-4F3E-9472-2E3F6D90F8A5}"/>
               </a:ext>
             </a:extLst>
           </p:cNvPr>
@@ -13836,7 +13836,7 @@
           <p:cNvPr id="31" name="">
             <a:extLst xmlns:a="http://schemas.openxmlformats.org/drawingml/2006/main">
               <a:ext uri="{FF2B5EF4-FFF2-40B4-BE49-F238E27FC236}">
-                <a16:creationId xmlns:a16="http://schemas.microsoft.com/office/drawing/2014/main" id="{B9DEFE53-7E5A-4CE3-9762-01E6423EB82F}"/>
+                <a16:creationId xmlns:a16="http://schemas.microsoft.com/office/drawing/2014/main" id="{206BB14E-483E-4AB1-8A47-DDC19102A113}"/>
               </a:ext>
             </a:extLst>
           </p:cNvPr>
@@ -13867,7 +13867,7 @@
           <p:cNvPr id="32" name="">
             <a:extLst xmlns:a="http://schemas.openxmlformats.org/drawingml/2006/main">
               <a:ext uri="{FF2B5EF4-FFF2-40B4-BE49-F238E27FC236}">
-                <a16:creationId xmlns:a16="http://schemas.microsoft.com/office/drawing/2014/main" id="{0C09B8B5-2BBB-4E10-80D6-12C92B4C204F}"/>
+                <a16:creationId xmlns:a16="http://schemas.microsoft.com/office/drawing/2014/main" id="{C5075B16-7F1A-4E16-8F18-E48103C804D1}"/>
               </a:ext>
             </a:extLst>
           </p:cNvPr>
@@ -13919,7 +13919,7 @@
           <p:cNvPr id="33" name="">
             <a:extLst xmlns:a="http://schemas.openxmlformats.org/drawingml/2006/main">
               <a:ext uri="{FF2B5EF4-FFF2-40B4-BE49-F238E27FC236}">
-                <a16:creationId xmlns:a16="http://schemas.microsoft.com/office/drawing/2014/main" id="{414001DB-93CA-4895-8823-412EF98FF479}"/>
+                <a16:creationId xmlns:a16="http://schemas.microsoft.com/office/drawing/2014/main" id="{A5BF752B-AD59-4D85-BFFC-1B802272E4C5}"/>
               </a:ext>
             </a:extLst>
           </p:cNvPr>
@@ -13971,7 +13971,7 @@
           <p:cNvPr id="34" name="">
             <a:extLst xmlns:a="http://schemas.openxmlformats.org/drawingml/2006/main">
               <a:ext uri="{FF2B5EF4-FFF2-40B4-BE49-F238E27FC236}">
-                <a16:creationId xmlns:a16="http://schemas.microsoft.com/office/drawing/2014/main" id="{4CD313E2-7926-44A4-AA41-AA480C51E204}"/>
+                <a16:creationId xmlns:a16="http://schemas.microsoft.com/office/drawing/2014/main" id="{719BF7CA-6746-488C-A119-ED4B368CBDAB}"/>
               </a:ext>
             </a:extLst>
           </p:cNvPr>
@@ -14023,7 +14023,7 @@
           <p:cNvPr id="35" name="">
             <a:extLst xmlns:a="http://schemas.openxmlformats.org/drawingml/2006/main">
               <a:ext uri="{FF2B5EF4-FFF2-40B4-BE49-F238E27FC236}">
-                <a16:creationId xmlns:a16="http://schemas.microsoft.com/office/drawing/2014/main" id="{DEC5FC18-72FF-47F2-82B1-787CBCB01FAD}"/>
+                <a16:creationId xmlns:a16="http://schemas.microsoft.com/office/drawing/2014/main" id="{FE4EF6B7-BE61-4250-9041-ACB39868C91E}"/>
               </a:ext>
             </a:extLst>
           </p:cNvPr>
@@ -14075,7 +14075,7 @@
           <p:cNvPr id="36" name="">
             <a:extLst xmlns:a="http://schemas.openxmlformats.org/drawingml/2006/main">
               <a:ext uri="{FF2B5EF4-FFF2-40B4-BE49-F238E27FC236}">
-                <a16:creationId xmlns:a16="http://schemas.microsoft.com/office/drawing/2014/main" id="{6DFBDEFB-BB3F-4A18-8FE4-63FCC10A8C5C}"/>
+                <a16:creationId xmlns:a16="http://schemas.microsoft.com/office/drawing/2014/main" id="{CBA25D67-AB75-4448-9D64-C37BC6B5E8E5}"/>
               </a:ext>
             </a:extLst>
           </p:cNvPr>
@@ -14127,7 +14127,7 @@
           <p:cNvPr id="37" name="">
             <a:extLst xmlns:a="http://schemas.openxmlformats.org/drawingml/2006/main">
               <a:ext uri="{FF2B5EF4-FFF2-40B4-BE49-F238E27FC236}">
-                <a16:creationId xmlns:a16="http://schemas.microsoft.com/office/drawing/2014/main" id="{E7871B49-ABC5-4C71-89FC-6371894E4624}"/>
+                <a16:creationId xmlns:a16="http://schemas.microsoft.com/office/drawing/2014/main" id="{3E773378-A08D-4603-AB67-7BDF18028930}"/>
               </a:ext>
             </a:extLst>
           </p:cNvPr>
@@ -14158,7 +14158,7 @@
           <p:cNvPr id="38" name="">
             <a:extLst xmlns:a="http://schemas.openxmlformats.org/drawingml/2006/main">
               <a:ext uri="{FF2B5EF4-FFF2-40B4-BE49-F238E27FC236}">
-                <a16:creationId xmlns:a16="http://schemas.microsoft.com/office/drawing/2014/main" id="{FE04E0F1-CBE0-4792-B2EC-CD7CBCA1F749}"/>
+                <a16:creationId xmlns:a16="http://schemas.microsoft.com/office/drawing/2014/main" id="{8DBBD249-CACE-4CF8-BF0B-2B4CFC09EE4A}"/>
               </a:ext>
             </a:extLst>
           </p:cNvPr>
@@ -14189,7 +14189,7 @@
           <p:cNvPr id="39" name="">
             <a:extLst xmlns:a="http://schemas.openxmlformats.org/drawingml/2006/main">
               <a:ext uri="{FF2B5EF4-FFF2-40B4-BE49-F238E27FC236}">
-                <a16:creationId xmlns:a16="http://schemas.microsoft.com/office/drawing/2014/main" id="{5C6B5C05-4C7F-4DDC-8847-70C69A1EE25E}"/>
+                <a16:creationId xmlns:a16="http://schemas.microsoft.com/office/drawing/2014/main" id="{EDD17280-1201-4531-87BE-3A44EAE95FA7}"/>
               </a:ext>
             </a:extLst>
           </p:cNvPr>
@@ -14241,7 +14241,7 @@
           <p:cNvPr id="40" name="">
             <a:extLst xmlns:a="http://schemas.openxmlformats.org/drawingml/2006/main">
               <a:ext uri="{FF2B5EF4-FFF2-40B4-BE49-F238E27FC236}">
-                <a16:creationId xmlns:a16="http://schemas.microsoft.com/office/drawing/2014/main" id="{D029F352-D8E1-4A58-82D1-0ED417A4A0C9}"/>
+                <a16:creationId xmlns:a16="http://schemas.microsoft.com/office/drawing/2014/main" id="{76F6DE18-6F21-41FA-A78F-C29971FA169D}"/>
               </a:ext>
             </a:extLst>
           </p:cNvPr>
@@ -14293,7 +14293,7 @@
           <p:cNvPr id="41" name="">
             <a:extLst xmlns:a="http://schemas.openxmlformats.org/drawingml/2006/main">
               <a:ext uri="{FF2B5EF4-FFF2-40B4-BE49-F238E27FC236}">
-                <a16:creationId xmlns:a16="http://schemas.microsoft.com/office/drawing/2014/main" id="{36F8F94E-9CA4-4B21-A854-283C2F2273AA}"/>
+                <a16:creationId xmlns:a16="http://schemas.microsoft.com/office/drawing/2014/main" id="{EA5F48DB-B2CF-43BB-8275-5B0B30035D90}"/>
               </a:ext>
             </a:extLst>
           </p:cNvPr>
@@ -14345,7 +14345,7 @@
           <p:cNvPr id="42" name="">
             <a:extLst xmlns:a="http://schemas.openxmlformats.org/drawingml/2006/main">
               <a:ext uri="{FF2B5EF4-FFF2-40B4-BE49-F238E27FC236}">
-                <a16:creationId xmlns:a16="http://schemas.microsoft.com/office/drawing/2014/main" id="{FFD972F5-A589-4CF4-BCED-64D64221261D}"/>
+                <a16:creationId xmlns:a16="http://schemas.microsoft.com/office/drawing/2014/main" id="{E56297BC-7E4C-4144-94FC-91D8605FD225}"/>
               </a:ext>
             </a:extLst>
           </p:cNvPr>
@@ -14397,7 +14397,7 @@
           <p:cNvPr id="43" name="">
             <a:extLst xmlns:a="http://schemas.openxmlformats.org/drawingml/2006/main">
               <a:ext uri="{FF2B5EF4-FFF2-40B4-BE49-F238E27FC236}">
-                <a16:creationId xmlns:a16="http://schemas.microsoft.com/office/drawing/2014/main" id="{519B7CF5-14A9-4FCB-80BB-ECADB271724A}"/>
+                <a16:creationId xmlns:a16="http://schemas.microsoft.com/office/drawing/2014/main" id="{D1927ACC-19F7-44EE-B997-3E0F2F05D145}"/>
               </a:ext>
             </a:extLst>
           </p:cNvPr>
@@ -14449,7 +14449,7 @@
           <p:cNvPr id="44" name="">
             <a:extLst xmlns:a="http://schemas.openxmlformats.org/drawingml/2006/main">
               <a:ext uri="{FF2B5EF4-FFF2-40B4-BE49-F238E27FC236}">
-                <a16:creationId xmlns:a16="http://schemas.microsoft.com/office/drawing/2014/main" id="{0D436F5C-B31A-40EF-862F-9FB5E520AA56}"/>
+                <a16:creationId xmlns:a16="http://schemas.microsoft.com/office/drawing/2014/main" id="{65630BE8-3B1B-49EE-92DD-C00D47C652AD}"/>
               </a:ext>
             </a:extLst>
           </p:cNvPr>
@@ -14480,7 +14480,7 @@
           <p:cNvPr id="45" name="">
             <a:extLst xmlns:a="http://schemas.openxmlformats.org/drawingml/2006/main">
               <a:ext uri="{FF2B5EF4-FFF2-40B4-BE49-F238E27FC236}">
-                <a16:creationId xmlns:a16="http://schemas.microsoft.com/office/drawing/2014/main" id="{D59F60BD-ED3D-40C9-B25D-664F7EC0E961}"/>
+                <a16:creationId xmlns:a16="http://schemas.microsoft.com/office/drawing/2014/main" id="{43564440-C93E-47DF-A02F-042684756E38}"/>
               </a:ext>
             </a:extLst>
           </p:cNvPr>
@@ -14532,7 +14532,7 @@
           <p:cNvPr id="46" name="">
             <a:extLst xmlns:a="http://schemas.openxmlformats.org/drawingml/2006/main">
               <a:ext uri="{FF2B5EF4-FFF2-40B4-BE49-F238E27FC236}">
-                <a16:creationId xmlns:a16="http://schemas.microsoft.com/office/drawing/2014/main" id="{77E8BFF3-2371-4D69-8EC2-08F20B6F1D75}"/>
+                <a16:creationId xmlns:a16="http://schemas.microsoft.com/office/drawing/2014/main" id="{B69413E6-1827-4506-828F-4857321EBF66}"/>
               </a:ext>
             </a:extLst>
           </p:cNvPr>
@@ -14584,7 +14584,7 @@
           <p:cNvPr id="47" name="">
             <a:extLst xmlns:a="http://schemas.openxmlformats.org/drawingml/2006/main">
               <a:ext uri="{FF2B5EF4-FFF2-40B4-BE49-F238E27FC236}">
-                <a16:creationId xmlns:a16="http://schemas.microsoft.com/office/drawing/2014/main" id="{C6171EB1-5BCB-4FD5-91AC-A657116F3637}"/>
+                <a16:creationId xmlns:a16="http://schemas.microsoft.com/office/drawing/2014/main" id="{CAB4B5EA-82AE-477F-B1CA-C146C824D9AC}"/>
               </a:ext>
             </a:extLst>
           </p:cNvPr>
@@ -14636,7 +14636,7 @@
           <p:cNvPr id="48" name="">
             <a:extLst xmlns:a="http://schemas.openxmlformats.org/drawingml/2006/main">
               <a:ext uri="{FF2B5EF4-FFF2-40B4-BE49-F238E27FC236}">
-                <a16:creationId xmlns:a16="http://schemas.microsoft.com/office/drawing/2014/main" id="{0B21A9D1-B52D-4E34-9FB3-E7456004347E}"/>
+                <a16:creationId xmlns:a16="http://schemas.microsoft.com/office/drawing/2014/main" id="{C7E9E18E-AEF6-499D-B0B3-F68DBEDFBFFC}"/>
               </a:ext>
             </a:extLst>
           </p:cNvPr>
@@ -14688,7 +14688,7 @@
           <p:cNvPr id="49" name="">
             <a:extLst xmlns:a="http://schemas.openxmlformats.org/drawingml/2006/main">
               <a:ext uri="{FF2B5EF4-FFF2-40B4-BE49-F238E27FC236}">
-                <a16:creationId xmlns:a16="http://schemas.microsoft.com/office/drawing/2014/main" id="{36A8D590-AB4D-4646-AFCE-C6045C89BC81}"/>
+                <a16:creationId xmlns:a16="http://schemas.microsoft.com/office/drawing/2014/main" id="{3BD2BD31-1609-4D2D-A60A-BFA2AB85AECF}"/>
               </a:ext>
             </a:extLst>
           </p:cNvPr>
@@ -14740,7 +14740,7 @@
           <p:cNvPr id="50" name="">
             <a:extLst xmlns:a="http://schemas.openxmlformats.org/drawingml/2006/main">
               <a:ext uri="{FF2B5EF4-FFF2-40B4-BE49-F238E27FC236}">
-                <a16:creationId xmlns:a16="http://schemas.microsoft.com/office/drawing/2014/main" id="{71089B8F-C6FF-48EC-ACBA-DC23E3BA7F9B}"/>
+                <a16:creationId xmlns:a16="http://schemas.microsoft.com/office/drawing/2014/main" id="{3EE97E89-CFB9-48F4-924F-4E4F5052A454}"/>
               </a:ext>
             </a:extLst>
           </p:cNvPr>
@@ -14771,7 +14771,7 @@
           <p:cNvPr id="51" name="">
             <a:extLst xmlns:a="http://schemas.openxmlformats.org/drawingml/2006/main">
               <a:ext uri="{FF2B5EF4-FFF2-40B4-BE49-F238E27FC236}">
-                <a16:creationId xmlns:a16="http://schemas.microsoft.com/office/drawing/2014/main" id="{86D26E99-B427-4EA8-85AB-89A0880F852B}"/>
+                <a16:creationId xmlns:a16="http://schemas.microsoft.com/office/drawing/2014/main" id="{ED20E3B9-4969-4E24-BBA3-FCBA62F77CB9}"/>
               </a:ext>
             </a:extLst>
           </p:cNvPr>
@@ -14802,7 +14802,7 @@
           <p:cNvPr id="52" name="">
             <a:extLst xmlns:a="http://schemas.openxmlformats.org/drawingml/2006/main">
               <a:ext uri="{FF2B5EF4-FFF2-40B4-BE49-F238E27FC236}">
-                <a16:creationId xmlns:a16="http://schemas.microsoft.com/office/drawing/2014/main" id="{953286FE-CDE3-4697-B7D1-1F0A732706B5}"/>
+                <a16:creationId xmlns:a16="http://schemas.microsoft.com/office/drawing/2014/main" id="{407B825C-2DA5-4895-98E6-F2C4355038DA}"/>
               </a:ext>
             </a:extLst>
           </p:cNvPr>
@@ -14854,7 +14854,7 @@
           <p:cNvPr id="53" name="">
             <a:extLst xmlns:a="http://schemas.openxmlformats.org/drawingml/2006/main">
               <a:ext uri="{FF2B5EF4-FFF2-40B4-BE49-F238E27FC236}">
-                <a16:creationId xmlns:a16="http://schemas.microsoft.com/office/drawing/2014/main" id="{2EEE6B75-C3C6-4FDB-82F1-C28DE4221154}"/>
+                <a16:creationId xmlns:a16="http://schemas.microsoft.com/office/drawing/2014/main" id="{1B0DD3AF-503A-4712-911D-FF680161545D}"/>
               </a:ext>
             </a:extLst>
           </p:cNvPr>
@@ -14906,7 +14906,7 @@
           <p:cNvPr id="54" name="">
             <a:extLst xmlns:a="http://schemas.openxmlformats.org/drawingml/2006/main">
               <a:ext uri="{FF2B5EF4-FFF2-40B4-BE49-F238E27FC236}">
-                <a16:creationId xmlns:a16="http://schemas.microsoft.com/office/drawing/2014/main" id="{15480834-9A22-4390-BBEC-5AF2581150A8}"/>
+                <a16:creationId xmlns:a16="http://schemas.microsoft.com/office/drawing/2014/main" id="{4DEDEE70-BACF-468A-B761-E18298C60D6D}"/>
               </a:ext>
             </a:extLst>
           </p:cNvPr>
@@ -14958,7 +14958,7 @@
           <p:cNvPr id="55" name="">
             <a:extLst xmlns:a="http://schemas.openxmlformats.org/drawingml/2006/main">
               <a:ext uri="{FF2B5EF4-FFF2-40B4-BE49-F238E27FC236}">
-                <a16:creationId xmlns:a16="http://schemas.microsoft.com/office/drawing/2014/main" id="{7EAC123F-E0AD-471A-980A-4B736D9C5F4E}"/>
+                <a16:creationId xmlns:a16="http://schemas.microsoft.com/office/drawing/2014/main" id="{C3FAE01A-8893-4A9A-910C-2BE4D39FCCCE}"/>
               </a:ext>
             </a:extLst>
           </p:cNvPr>
@@ -15010,7 +15010,7 @@
           <p:cNvPr id="56" name="">
             <a:extLst xmlns:a="http://schemas.openxmlformats.org/drawingml/2006/main">
               <a:ext uri="{FF2B5EF4-FFF2-40B4-BE49-F238E27FC236}">
-                <a16:creationId xmlns:a16="http://schemas.microsoft.com/office/drawing/2014/main" id="{C54B18D0-40D4-4DA6-BB31-73B42069A0A8}"/>
+                <a16:creationId xmlns:a16="http://schemas.microsoft.com/office/drawing/2014/main" id="{BC156286-414B-490D-8683-4286DF4EC5F3}"/>
               </a:ext>
             </a:extLst>
           </p:cNvPr>
@@ -15062,7 +15062,7 @@
           <p:cNvPr id="57" name="">
             <a:extLst xmlns:a="http://schemas.openxmlformats.org/drawingml/2006/main">
               <a:ext uri="{FF2B5EF4-FFF2-40B4-BE49-F238E27FC236}">
-                <a16:creationId xmlns:a16="http://schemas.microsoft.com/office/drawing/2014/main" id="{07CAD69E-31DA-434B-BDEC-65A2EE2F865D}"/>
+                <a16:creationId xmlns:a16="http://schemas.microsoft.com/office/drawing/2014/main" id="{2B41DD9E-1B51-4915-A781-182C582DD42D}"/>
               </a:ext>
             </a:extLst>
           </p:cNvPr>
@@ -15093,7 +15093,7 @@
           <p:cNvPr id="58" name="">
             <a:extLst xmlns:a="http://schemas.openxmlformats.org/drawingml/2006/main">
               <a:ext uri="{FF2B5EF4-FFF2-40B4-BE49-F238E27FC236}">
-                <a16:creationId xmlns:a16="http://schemas.microsoft.com/office/drawing/2014/main" id="{3E4C083B-F7B5-4849-913C-743325568D2E}"/>
+                <a16:creationId xmlns:a16="http://schemas.microsoft.com/office/drawing/2014/main" id="{42BDE5F4-8CA2-431C-8442-B4D37D495CE7}"/>
               </a:ext>
             </a:extLst>
           </p:cNvPr>
@@ -15145,7 +15145,7 @@
           <p:cNvPr id="59" name="">
             <a:extLst xmlns:a="http://schemas.openxmlformats.org/drawingml/2006/main">
               <a:ext uri="{FF2B5EF4-FFF2-40B4-BE49-F238E27FC236}">
-                <a16:creationId xmlns:a16="http://schemas.microsoft.com/office/drawing/2014/main" id="{C9BEF956-4BEE-4850-9DDB-2EA8417D2668}"/>
+                <a16:creationId xmlns:a16="http://schemas.microsoft.com/office/drawing/2014/main" id="{F09B92AF-4291-4B65-B416-11EFE1DBE0FB}"/>
               </a:ext>
             </a:extLst>
           </p:cNvPr>
@@ -15197,7 +15197,7 @@
           <p:cNvPr id="60" name="">
             <a:extLst xmlns:a="http://schemas.openxmlformats.org/drawingml/2006/main">
               <a:ext uri="{FF2B5EF4-FFF2-40B4-BE49-F238E27FC236}">
-                <a16:creationId xmlns:a16="http://schemas.microsoft.com/office/drawing/2014/main" id="{798CCA45-2E4F-4F38-940D-E03FA7F19EDF}"/>
+                <a16:creationId xmlns:a16="http://schemas.microsoft.com/office/drawing/2014/main" id="{0C1D8CD6-E1BC-40FF-A5F3-B68EA7C9BCEF}"/>
               </a:ext>
             </a:extLst>
           </p:cNvPr>
@@ -15249,7 +15249,7 @@
           <p:cNvPr id="61" name="">
             <a:extLst xmlns:a="http://schemas.openxmlformats.org/drawingml/2006/main">
               <a:ext uri="{FF2B5EF4-FFF2-40B4-BE49-F238E27FC236}">
-                <a16:creationId xmlns:a16="http://schemas.microsoft.com/office/drawing/2014/main" id="{972DA6BB-8A95-4494-8CBC-B0EB427C1E82}"/>
+                <a16:creationId xmlns:a16="http://schemas.microsoft.com/office/drawing/2014/main" id="{F7AA6792-1F03-4FE8-B8A3-AFBE7A389811}"/>
               </a:ext>
             </a:extLst>
           </p:cNvPr>
@@ -15301,7 +15301,7 @@
           <p:cNvPr id="62" name="">
             <a:extLst xmlns:a="http://schemas.openxmlformats.org/drawingml/2006/main">
               <a:ext uri="{FF2B5EF4-FFF2-40B4-BE49-F238E27FC236}">
-                <a16:creationId xmlns:a16="http://schemas.microsoft.com/office/drawing/2014/main" id="{8D17FED2-868F-40A9-873D-AD938C7556BE}"/>
+                <a16:creationId xmlns:a16="http://schemas.microsoft.com/office/drawing/2014/main" id="{A315E5EC-970D-4F21-951E-DDB90D21B1B6}"/>
               </a:ext>
             </a:extLst>
           </p:cNvPr>
@@ -15353,7 +15353,7 @@
           <p:cNvPr id="63" name="">
             <a:extLst xmlns:a="http://schemas.openxmlformats.org/drawingml/2006/main">
               <a:ext uri="{FF2B5EF4-FFF2-40B4-BE49-F238E27FC236}">
-                <a16:creationId xmlns:a16="http://schemas.microsoft.com/office/drawing/2014/main" id="{403C299D-DE16-4170-919A-7BB0AA0DA063}"/>
+                <a16:creationId xmlns:a16="http://schemas.microsoft.com/office/drawing/2014/main" id="{72790346-8798-4B11-87FB-576C1DB30183}"/>
               </a:ext>
             </a:extLst>
           </p:cNvPr>
@@ -15384,7 +15384,7 @@
           <p:cNvPr id="64" name="">
             <a:extLst xmlns:a="http://schemas.openxmlformats.org/drawingml/2006/main">
               <a:ext uri="{FF2B5EF4-FFF2-40B4-BE49-F238E27FC236}">
-                <a16:creationId xmlns:a16="http://schemas.microsoft.com/office/drawing/2014/main" id="{F00A850B-D357-452B-A3E2-43EC74C0BDA1}"/>
+                <a16:creationId xmlns:a16="http://schemas.microsoft.com/office/drawing/2014/main" id="{2872781D-C67C-42ED-B696-FDD661EA121F}"/>
               </a:ext>
             </a:extLst>
           </p:cNvPr>
@@ -15415,7 +15415,7 @@
           <p:cNvPr id="65" name="">
             <a:extLst xmlns:a="http://schemas.openxmlformats.org/drawingml/2006/main">
               <a:ext uri="{FF2B5EF4-FFF2-40B4-BE49-F238E27FC236}">
-                <a16:creationId xmlns:a16="http://schemas.microsoft.com/office/drawing/2014/main" id="{5FA28DD4-F4EA-492D-87B4-E560C0BC4F40}"/>
+                <a16:creationId xmlns:a16="http://schemas.microsoft.com/office/drawing/2014/main" id="{48A0D430-703E-43A0-9DC0-C1059FC64F2E}"/>
               </a:ext>
             </a:extLst>
           </p:cNvPr>
@@ -15467,7 +15467,7 @@
           <p:cNvPr id="66" name="">
             <a:extLst xmlns:a="http://schemas.openxmlformats.org/drawingml/2006/main">
               <a:ext uri="{FF2B5EF4-FFF2-40B4-BE49-F238E27FC236}">
-                <a16:creationId xmlns:a16="http://schemas.microsoft.com/office/drawing/2014/main" id="{5B1C11FC-8418-4991-B0AA-655EDEC88278}"/>
+                <a16:creationId xmlns:a16="http://schemas.microsoft.com/office/drawing/2014/main" id="{E99B23AC-4F93-412B-9244-F95487D2D991}"/>
               </a:ext>
             </a:extLst>
           </p:cNvPr>
@@ -15519,7 +15519,7 @@
           <p:cNvPr id="67" name="">
             <a:extLst xmlns:a="http://schemas.openxmlformats.org/drawingml/2006/main">
               <a:ext uri="{FF2B5EF4-FFF2-40B4-BE49-F238E27FC236}">
-                <a16:creationId xmlns:a16="http://schemas.microsoft.com/office/drawing/2014/main" id="{E1E216DF-5463-4EBA-962E-D7A8E4629C86}"/>
+                <a16:creationId xmlns:a16="http://schemas.microsoft.com/office/drawing/2014/main" id="{A9732D12-075C-45F6-ACA2-962E04CFE311}"/>
               </a:ext>
             </a:extLst>
           </p:cNvPr>
@@ -15571,7 +15571,7 @@
           <p:cNvPr id="68" name="">
             <a:extLst xmlns:a="http://schemas.openxmlformats.org/drawingml/2006/main">
               <a:ext uri="{FF2B5EF4-FFF2-40B4-BE49-F238E27FC236}">
-                <a16:creationId xmlns:a16="http://schemas.microsoft.com/office/drawing/2014/main" id="{A398C299-8FA3-4D14-8F88-8FF50AA74EA1}"/>
+                <a16:creationId xmlns:a16="http://schemas.microsoft.com/office/drawing/2014/main" id="{11254B85-39E1-4E4C-B45F-3660308A96A1}"/>
               </a:ext>
             </a:extLst>
           </p:cNvPr>
@@ -15623,7 +15623,7 @@
           <p:cNvPr id="69" name="">
             <a:extLst xmlns:a="http://schemas.openxmlformats.org/drawingml/2006/main">
               <a:ext uri="{FF2B5EF4-FFF2-40B4-BE49-F238E27FC236}">
-                <a16:creationId xmlns:a16="http://schemas.microsoft.com/office/drawing/2014/main" id="{3A88FF0C-96C9-47AB-815F-36B32C5EE274}"/>
+                <a16:creationId xmlns:a16="http://schemas.microsoft.com/office/drawing/2014/main" id="{5AE8EB66-4F64-4D6F-B415-810D72F086D1}"/>
               </a:ext>
             </a:extLst>
           </p:cNvPr>
@@ -15675,7 +15675,7 @@
           <p:cNvPr id="70" name="">
             <a:extLst xmlns:a="http://schemas.openxmlformats.org/drawingml/2006/main">
               <a:ext uri="{FF2B5EF4-FFF2-40B4-BE49-F238E27FC236}">
-                <a16:creationId xmlns:a16="http://schemas.microsoft.com/office/drawing/2014/main" id="{324A9086-7E9E-400A-89D5-75C285CB0F1F}"/>
+                <a16:creationId xmlns:a16="http://schemas.microsoft.com/office/drawing/2014/main" id="{5F9D5967-7BF6-43DE-8C23-AF49FA004920}"/>
               </a:ext>
             </a:extLst>
           </p:cNvPr>
@@ -15706,7 +15706,7 @@
           <p:cNvPr id="71" name="">
             <a:extLst xmlns:a="http://schemas.openxmlformats.org/drawingml/2006/main">
               <a:ext uri="{FF2B5EF4-FFF2-40B4-BE49-F238E27FC236}">
-                <a16:creationId xmlns:a16="http://schemas.microsoft.com/office/drawing/2014/main" id="{02191F15-D86F-432F-B594-33291D92D5E8}"/>
+                <a16:creationId xmlns:a16="http://schemas.microsoft.com/office/drawing/2014/main" id="{4767D999-3B87-4036-9342-C8F21E5B6676}"/>
               </a:ext>
             </a:extLst>
           </p:cNvPr>
@@ -15758,7 +15758,7 @@
           <p:cNvPr id="72" name="">
             <a:extLst xmlns:a="http://schemas.openxmlformats.org/drawingml/2006/main">
               <a:ext uri="{FF2B5EF4-FFF2-40B4-BE49-F238E27FC236}">
-                <a16:creationId xmlns:a16="http://schemas.microsoft.com/office/drawing/2014/main" id="{381152DC-2C6F-43E4-A332-14A4A777A063}"/>
+                <a16:creationId xmlns:a16="http://schemas.microsoft.com/office/drawing/2014/main" id="{234D6472-A2D6-49E7-A78C-C78143ACC782}"/>
               </a:ext>
             </a:extLst>
           </p:cNvPr>
@@ -15810,7 +15810,7 @@
           <p:cNvPr id="73" name="">
             <a:extLst xmlns:a="http://schemas.openxmlformats.org/drawingml/2006/main">
               <a:ext uri="{FF2B5EF4-FFF2-40B4-BE49-F238E27FC236}">
-                <a16:creationId xmlns:a16="http://schemas.microsoft.com/office/drawing/2014/main" id="{73F96780-1EFD-4A32-9E57-99FF5A3940BA}"/>
+                <a16:creationId xmlns:a16="http://schemas.microsoft.com/office/drawing/2014/main" id="{D3C98274-E07A-45BF-B8A8-585B671BC558}"/>
               </a:ext>
             </a:extLst>
           </p:cNvPr>
@@ -15862,7 +15862,7 @@
           <p:cNvPr id="74" name="">
             <a:extLst xmlns:a="http://schemas.openxmlformats.org/drawingml/2006/main">
               <a:ext uri="{FF2B5EF4-FFF2-40B4-BE49-F238E27FC236}">
-                <a16:creationId xmlns:a16="http://schemas.microsoft.com/office/drawing/2014/main" id="{27DB7E54-E279-4141-9B7C-1D9044D1A262}"/>
+                <a16:creationId xmlns:a16="http://schemas.microsoft.com/office/drawing/2014/main" id="{BABF71C0-48C1-48E7-BEB9-A222FB00A442}"/>
               </a:ext>
             </a:extLst>
           </p:cNvPr>
@@ -15914,7 +15914,7 @@
           <p:cNvPr id="75" name="">
             <a:extLst xmlns:a="http://schemas.openxmlformats.org/drawingml/2006/main">
               <a:ext uri="{FF2B5EF4-FFF2-40B4-BE49-F238E27FC236}">
-                <a16:creationId xmlns:a16="http://schemas.microsoft.com/office/drawing/2014/main" id="{09A7A77E-02C8-4784-99F8-96D610ED5E9D}"/>
+                <a16:creationId xmlns:a16="http://schemas.microsoft.com/office/drawing/2014/main" id="{E58E1592-4C93-4C3E-9090-7EDF953158D7}"/>
               </a:ext>
             </a:extLst>
           </p:cNvPr>
@@ -15966,7 +15966,7 @@
           <p:cNvPr id="76" name="">
             <a:extLst xmlns:a="http://schemas.openxmlformats.org/drawingml/2006/main">
               <a:ext uri="{FF2B5EF4-FFF2-40B4-BE49-F238E27FC236}">
-                <a16:creationId xmlns:a16="http://schemas.microsoft.com/office/drawing/2014/main" id="{DD2D5460-1E2B-4B39-ABBE-D1DAB273A594}"/>
+                <a16:creationId xmlns:a16="http://schemas.microsoft.com/office/drawing/2014/main" id="{9BE5CBA0-DC3F-4D02-83AC-A19EB84CF417}"/>
               </a:ext>
             </a:extLst>
           </p:cNvPr>
@@ -15997,7 +15997,7 @@
           <p:cNvPr id="77" name="">
             <a:extLst xmlns:a="http://schemas.openxmlformats.org/drawingml/2006/main">
               <a:ext uri="{FF2B5EF4-FFF2-40B4-BE49-F238E27FC236}">
-                <a16:creationId xmlns:a16="http://schemas.microsoft.com/office/drawing/2014/main" id="{8BAB8FD5-E053-465C-8B6C-072F4ACD0668}"/>
+                <a16:creationId xmlns:a16="http://schemas.microsoft.com/office/drawing/2014/main" id="{C31A6AEB-2E5B-4F9F-B0CB-376090D3A7E8}"/>
               </a:ext>
             </a:extLst>
           </p:cNvPr>
@@ -16028,7 +16028,7 @@
           <p:cNvPr id="78" name="">
             <a:extLst xmlns:a="http://schemas.openxmlformats.org/drawingml/2006/main">
               <a:ext uri="{FF2B5EF4-FFF2-40B4-BE49-F238E27FC236}">
-                <a16:creationId xmlns:a16="http://schemas.microsoft.com/office/drawing/2014/main" id="{BBC7A61D-A95A-4BDC-83B6-7B0A67160972}"/>
+                <a16:creationId xmlns:a16="http://schemas.microsoft.com/office/drawing/2014/main" id="{B0C1F4A1-788A-4560-B2E5-9A3ED966F2EC}"/>
               </a:ext>
             </a:extLst>
           </p:cNvPr>
@@ -16080,7 +16080,7 @@
           <p:cNvPr id="79" name="">
             <a:extLst xmlns:a="http://schemas.openxmlformats.org/drawingml/2006/main">
               <a:ext uri="{FF2B5EF4-FFF2-40B4-BE49-F238E27FC236}">
-                <a16:creationId xmlns:a16="http://schemas.microsoft.com/office/drawing/2014/main" id="{43EC2B80-646D-4F7C-B2D7-6C6FDE06A39A}"/>
+                <a16:creationId xmlns:a16="http://schemas.microsoft.com/office/drawing/2014/main" id="{0895F5D4-F375-42D9-A0C7-6FD200FBE677}"/>
               </a:ext>
             </a:extLst>
           </p:cNvPr>
@@ -16132,7 +16132,7 @@
           <p:cNvPr id="80" name="">
             <a:extLst xmlns:a="http://schemas.openxmlformats.org/drawingml/2006/main">
               <a:ext uri="{FF2B5EF4-FFF2-40B4-BE49-F238E27FC236}">
-                <a16:creationId xmlns:a16="http://schemas.microsoft.com/office/drawing/2014/main" id="{F9799822-96D7-4860-AE94-9A5F59AF1F89}"/>
+                <a16:creationId xmlns:a16="http://schemas.microsoft.com/office/drawing/2014/main" id="{1723FACF-635E-4643-9641-44259A375EBA}"/>
               </a:ext>
             </a:extLst>
           </p:cNvPr>
@@ -16184,7 +16184,7 @@
           <p:cNvPr id="81" name="">
             <a:extLst xmlns:a="http://schemas.openxmlformats.org/drawingml/2006/main">
               <a:ext uri="{FF2B5EF4-FFF2-40B4-BE49-F238E27FC236}">
-                <a16:creationId xmlns:a16="http://schemas.microsoft.com/office/drawing/2014/main" id="{7E37B037-4ADA-411F-8109-CA487CBD46CA}"/>
+                <a16:creationId xmlns:a16="http://schemas.microsoft.com/office/drawing/2014/main" id="{EA769560-92E9-4FB5-BBAC-E0CA9A5275FD}"/>
               </a:ext>
             </a:extLst>
           </p:cNvPr>
@@ -16236,7 +16236,7 @@
           <p:cNvPr id="82" name="">
             <a:extLst xmlns:a="http://schemas.openxmlformats.org/drawingml/2006/main">
               <a:ext uri="{FF2B5EF4-FFF2-40B4-BE49-F238E27FC236}">
-                <a16:creationId xmlns:a16="http://schemas.microsoft.com/office/drawing/2014/main" id="{60A5F5A3-F771-4FD4-9CD7-8A8C96AD74AE}"/>
+                <a16:creationId xmlns:a16="http://schemas.microsoft.com/office/drawing/2014/main" id="{75D2839B-8252-45AF-84A2-04F9650999B2}"/>
               </a:ext>
             </a:extLst>
           </p:cNvPr>
@@ -16288,7 +16288,7 @@
           <p:cNvPr id="83" name="">
             <a:extLst xmlns:a="http://schemas.openxmlformats.org/drawingml/2006/main">
               <a:ext uri="{FF2B5EF4-FFF2-40B4-BE49-F238E27FC236}">
-                <a16:creationId xmlns:a16="http://schemas.microsoft.com/office/drawing/2014/main" id="{9FB69CE0-E1E9-444D-83E4-EA0C073BEAD8}"/>
+                <a16:creationId xmlns:a16="http://schemas.microsoft.com/office/drawing/2014/main" id="{5737E8D0-CED1-417D-AAB6-0DD5A4B2C31F}"/>
               </a:ext>
             </a:extLst>
           </p:cNvPr>
@@ -16319,7 +16319,7 @@
           <p:cNvPr id="84" name="">
             <a:extLst xmlns:a="http://schemas.openxmlformats.org/drawingml/2006/main">
               <a:ext uri="{FF2B5EF4-FFF2-40B4-BE49-F238E27FC236}">
-                <a16:creationId xmlns:a16="http://schemas.microsoft.com/office/drawing/2014/main" id="{8437DA7A-050F-4DFB-8178-CDE09055F56F}"/>
+                <a16:creationId xmlns:a16="http://schemas.microsoft.com/office/drawing/2014/main" id="{DFB72CC5-E52C-45A3-B2DF-0F5E2E6A473E}"/>
               </a:ext>
             </a:extLst>
           </p:cNvPr>
@@ -16371,7 +16371,7 @@
           <p:cNvPr id="85" name="">
             <a:extLst xmlns:a="http://schemas.openxmlformats.org/drawingml/2006/main">
               <a:ext uri="{FF2B5EF4-FFF2-40B4-BE49-F238E27FC236}">
-                <a16:creationId xmlns:a16="http://schemas.microsoft.com/office/drawing/2014/main" id="{9D64F89A-4045-4C3F-829D-F3299147E8DB}"/>
+                <a16:creationId xmlns:a16="http://schemas.microsoft.com/office/drawing/2014/main" id="{5327CAE8-AED6-4229-935F-625F8CF2D2A8}"/>
               </a:ext>
             </a:extLst>
           </p:cNvPr>
@@ -16423,7 +16423,7 @@
           <p:cNvPr id="86" name="">
             <a:extLst xmlns:a="http://schemas.openxmlformats.org/drawingml/2006/main">
               <a:ext uri="{FF2B5EF4-FFF2-40B4-BE49-F238E27FC236}">
-                <a16:creationId xmlns:a16="http://schemas.microsoft.com/office/drawing/2014/main" id="{85AF52AF-3278-47C9-8D7C-4B0CCB1E9E8C}"/>
+                <a16:creationId xmlns:a16="http://schemas.microsoft.com/office/drawing/2014/main" id="{46A0F21B-6CB6-4816-9525-97CBA7580050}"/>
               </a:ext>
             </a:extLst>
           </p:cNvPr>
@@ -16475,7 +16475,7 @@
           <p:cNvPr id="87" name="">
             <a:extLst xmlns:a="http://schemas.openxmlformats.org/drawingml/2006/main">
               <a:ext uri="{FF2B5EF4-FFF2-40B4-BE49-F238E27FC236}">
-                <a16:creationId xmlns:a16="http://schemas.microsoft.com/office/drawing/2014/main" id="{3CFC4A5E-417B-4B2E-8EEC-6A7E739983C7}"/>
+                <a16:creationId xmlns:a16="http://schemas.microsoft.com/office/drawing/2014/main" id="{5175395D-C731-474C-AEB7-DEFC4231B4F7}"/>
               </a:ext>
             </a:extLst>
           </p:cNvPr>
@@ -16527,7 +16527,7 @@
           <p:cNvPr id="88" name="">
             <a:extLst xmlns:a="http://schemas.openxmlformats.org/drawingml/2006/main">
               <a:ext uri="{FF2B5EF4-FFF2-40B4-BE49-F238E27FC236}">
-                <a16:creationId xmlns:a16="http://schemas.microsoft.com/office/drawing/2014/main" id="{4323B948-219A-40A5-8D62-E048D5DFD4B3}"/>
+                <a16:creationId xmlns:a16="http://schemas.microsoft.com/office/drawing/2014/main" id="{6F362073-635E-4723-90B3-6FDDA587BF1A}"/>
               </a:ext>
             </a:extLst>
           </p:cNvPr>
@@ -16579,7 +16579,7 @@
           <p:cNvPr id="89" name="">
             <a:extLst xmlns:a="http://schemas.openxmlformats.org/drawingml/2006/main">
               <a:ext uri="{FF2B5EF4-FFF2-40B4-BE49-F238E27FC236}">
-                <a16:creationId xmlns:a16="http://schemas.microsoft.com/office/drawing/2014/main" id="{4A7E7FB1-C3C3-47A9-94C2-9F912DBF01FE}"/>
+                <a16:creationId xmlns:a16="http://schemas.microsoft.com/office/drawing/2014/main" id="{06A1F13E-88A2-46CE-9BE0-767DCFFF9A1A}"/>
               </a:ext>
             </a:extLst>
           </p:cNvPr>
@@ -16610,7 +16610,7 @@
           <p:cNvPr id="90" name="">
             <a:extLst xmlns:a="http://schemas.openxmlformats.org/drawingml/2006/main">
               <a:ext uri="{FF2B5EF4-FFF2-40B4-BE49-F238E27FC236}">
-                <a16:creationId xmlns:a16="http://schemas.microsoft.com/office/drawing/2014/main" id="{D2DB8A09-4DAE-4823-A118-ED02838E62E1}"/>
+                <a16:creationId xmlns:a16="http://schemas.microsoft.com/office/drawing/2014/main" id="{5E65255E-9F4B-4AC1-974C-091FEDCB451D}"/>
               </a:ext>
             </a:extLst>
           </p:cNvPr>
@@ -16641,7 +16641,7 @@
           <p:cNvPr id="91" name="">
             <a:extLst xmlns:a="http://schemas.openxmlformats.org/drawingml/2006/main">
               <a:ext uri="{FF2B5EF4-FFF2-40B4-BE49-F238E27FC236}">
-                <a16:creationId xmlns:a16="http://schemas.microsoft.com/office/drawing/2014/main" id="{7D37452A-7341-462E-BAB0-479BD8905B58}"/>
+                <a16:creationId xmlns:a16="http://schemas.microsoft.com/office/drawing/2014/main" id="{FBA1CC1E-85FD-4F31-BFCC-B89860115252}"/>
               </a:ext>
             </a:extLst>
           </p:cNvPr>
@@ -16693,7 +16693,7 @@
           <p:cNvPr id="92" name="">
             <a:extLst xmlns:a="http://schemas.openxmlformats.org/drawingml/2006/main">
               <a:ext uri="{FF2B5EF4-FFF2-40B4-BE49-F238E27FC236}">
-                <a16:creationId xmlns:a16="http://schemas.microsoft.com/office/drawing/2014/main" id="{59970B98-56A7-412D-9799-8109CE8D6FD7}"/>
+                <a16:creationId xmlns:a16="http://schemas.microsoft.com/office/drawing/2014/main" id="{8CD028A6-8F82-4AEB-AB09-7C2517C9610D}"/>
               </a:ext>
             </a:extLst>
           </p:cNvPr>
@@ -16745,7 +16745,7 @@
           <p:cNvPr id="93" name="">
             <a:extLst xmlns:a="http://schemas.openxmlformats.org/drawingml/2006/main">
               <a:ext uri="{FF2B5EF4-FFF2-40B4-BE49-F238E27FC236}">
-                <a16:creationId xmlns:a16="http://schemas.microsoft.com/office/drawing/2014/main" id="{14828F6A-4AB8-41DE-919D-FF531B0AD1CB}"/>
+                <a16:creationId xmlns:a16="http://schemas.microsoft.com/office/drawing/2014/main" id="{15DCA6FE-9CDB-40C5-B7D0-11172D2FAA1A}"/>
               </a:ext>
             </a:extLst>
           </p:cNvPr>
@@ -16797,7 +16797,7 @@
           <p:cNvPr id="94" name="">
             <a:extLst xmlns:a="http://schemas.openxmlformats.org/drawingml/2006/main">
               <a:ext uri="{FF2B5EF4-FFF2-40B4-BE49-F238E27FC236}">
-                <a16:creationId xmlns:a16="http://schemas.microsoft.com/office/drawing/2014/main" id="{3434F1E3-88E4-46F6-9545-B4FD3D97CCC9}"/>
+                <a16:creationId xmlns:a16="http://schemas.microsoft.com/office/drawing/2014/main" id="{B15FAA33-0039-4518-A1AA-4B122BA06A45}"/>
               </a:ext>
             </a:extLst>
           </p:cNvPr>
@@ -16849,7 +16849,7 @@
           <p:cNvPr id="95" name="">
             <a:extLst xmlns:a="http://schemas.openxmlformats.org/drawingml/2006/main">
               <a:ext uri="{FF2B5EF4-FFF2-40B4-BE49-F238E27FC236}">
-                <a16:creationId xmlns:a16="http://schemas.microsoft.com/office/drawing/2014/main" id="{ADDF3716-12D8-40A4-80E2-409BAF08C0B1}"/>
+                <a16:creationId xmlns:a16="http://schemas.microsoft.com/office/drawing/2014/main" id="{64FC96F2-C8E1-42A8-B0A9-E5DFC4493121}"/>
               </a:ext>
             </a:extLst>
           </p:cNvPr>
@@ -16901,7 +16901,7 @@
           <p:cNvPr id="96" name="">
             <a:extLst xmlns:a="http://schemas.openxmlformats.org/drawingml/2006/main">
               <a:ext uri="{FF2B5EF4-FFF2-40B4-BE49-F238E27FC236}">
-                <a16:creationId xmlns:a16="http://schemas.microsoft.com/office/drawing/2014/main" id="{2123E26A-EB98-4A9C-B74C-5C9715C398AF}"/>
+                <a16:creationId xmlns:a16="http://schemas.microsoft.com/office/drawing/2014/main" id="{BD3D6FB6-45BF-4B03-B7CF-6D1542958DDD}"/>
               </a:ext>
             </a:extLst>
           </p:cNvPr>
@@ -16932,7 +16932,7 @@
           <p:cNvPr id="97" name="">
             <a:extLst xmlns:a="http://schemas.openxmlformats.org/drawingml/2006/main">
               <a:ext uri="{FF2B5EF4-FFF2-40B4-BE49-F238E27FC236}">
-                <a16:creationId xmlns:a16="http://schemas.microsoft.com/office/drawing/2014/main" id="{F7E23D81-E965-47DD-A9C1-895F794C0BF7}"/>
+                <a16:creationId xmlns:a16="http://schemas.microsoft.com/office/drawing/2014/main" id="{6A6B866B-9740-4645-856D-9476B4C0B938}"/>
               </a:ext>
             </a:extLst>
           </p:cNvPr>
@@ -16984,7 +16984,7 @@
           <p:cNvPr id="98" name="">
             <a:extLst xmlns:a="http://schemas.openxmlformats.org/drawingml/2006/main">
               <a:ext uri="{FF2B5EF4-FFF2-40B4-BE49-F238E27FC236}">
-                <a16:creationId xmlns:a16="http://schemas.microsoft.com/office/drawing/2014/main" id="{51AA6692-98C0-4DE1-A928-233E90FAF31B}"/>
+                <a16:creationId xmlns:a16="http://schemas.microsoft.com/office/drawing/2014/main" id="{3AE11981-87D9-4E35-A2DD-D17B342EFE63}"/>
               </a:ext>
             </a:extLst>
           </p:cNvPr>
@@ -17036,7 +17036,7 @@
           <p:cNvPr id="99" name="">
             <a:extLst xmlns:a="http://schemas.openxmlformats.org/drawingml/2006/main">
               <a:ext uri="{FF2B5EF4-FFF2-40B4-BE49-F238E27FC236}">
-                <a16:creationId xmlns:a16="http://schemas.microsoft.com/office/drawing/2014/main" id="{BEB05821-7FCC-44A5-BEAE-92EA1C7E5342}"/>
+                <a16:creationId xmlns:a16="http://schemas.microsoft.com/office/drawing/2014/main" id="{E2BB96C4-9133-41C8-9B68-C4943E7CA0F3}"/>
               </a:ext>
             </a:extLst>
           </p:cNvPr>
@@ -17088,7 +17088,7 @@
           <p:cNvPr id="100" name="">
             <a:extLst xmlns:a="http://schemas.openxmlformats.org/drawingml/2006/main">
               <a:ext uri="{FF2B5EF4-FFF2-40B4-BE49-F238E27FC236}">
-                <a16:creationId xmlns:a16="http://schemas.microsoft.com/office/drawing/2014/main" id="{CF53E9FC-7DA0-48DF-893A-2127B0163B0E}"/>
+                <a16:creationId xmlns:a16="http://schemas.microsoft.com/office/drawing/2014/main" id="{E5F0484A-5F8C-458B-960A-28A5F1BB759F}"/>
               </a:ext>
             </a:extLst>
           </p:cNvPr>
@@ -17140,7 +17140,7 @@
           <p:cNvPr id="101" name="">
             <a:extLst xmlns:a="http://schemas.openxmlformats.org/drawingml/2006/main">
               <a:ext uri="{FF2B5EF4-FFF2-40B4-BE49-F238E27FC236}">
-                <a16:creationId xmlns:a16="http://schemas.microsoft.com/office/drawing/2014/main" id="{3A76E9B4-AE6C-4EEE-BF8E-AA8668EAAF69}"/>
+                <a16:creationId xmlns:a16="http://schemas.microsoft.com/office/drawing/2014/main" id="{75F4925C-1A86-44A4-BE99-0633E009520B}"/>
               </a:ext>
             </a:extLst>
           </p:cNvPr>
@@ -17190,7 +17190,7 @@
     </p:spTree>
     <p:extLst>
       <p:ext uri="{BB962C8B-B14F-4D97-AF65-F5344CB8AC3E}">
-        <p14:creationId xmlns:p14="http://schemas.microsoft.com/office/powerpoint/2010/main" val="987053601"/>
+        <p14:creationId xmlns:p14="http://schemas.microsoft.com/office/powerpoint/2010/main" val="1696256314"/>
       </p:ext>
     </p:extLst>
   </p:cSld>
@@ -17221,7 +17221,7 @@
           <p:cNvPr id="96" name="">
             <a:extLst xmlns:a="http://schemas.openxmlformats.org/drawingml/2006/main">
               <a:ext uri="{FF2B5EF4-FFF2-40B4-BE49-F238E27FC236}">
-                <a16:creationId xmlns:a16="http://schemas.microsoft.com/office/drawing/2014/main" id="{FBF3F51C-8504-4F3D-A398-B0C8CC7C609A}"/>
+                <a16:creationId xmlns:a16="http://schemas.microsoft.com/office/drawing/2014/main" id="{5446B7D8-7E8C-4698-87B2-9C9CC5C9F1DD}"/>
               </a:ext>
             </a:extLst>
           </p:cNvPr>
@@ -17254,7 +17254,7 @@
           <p:cNvPr id="2" name="">
             <a:extLst xmlns:a="http://schemas.openxmlformats.org/drawingml/2006/main">
               <a:ext uri="{FF2B5EF4-FFF2-40B4-BE49-F238E27FC236}">
-                <a16:creationId xmlns:a16="http://schemas.microsoft.com/office/drawing/2014/main" id="{219F23A6-563B-4E2F-B677-19A537BA482E}"/>
+                <a16:creationId xmlns:a16="http://schemas.microsoft.com/office/drawing/2014/main" id="{D87FF096-D6BA-4D9B-B716-B13EFEAE890D}"/>
               </a:ext>
             </a:extLst>
           </p:cNvPr>
@@ -17285,7 +17285,7 @@
           <p:cNvPr id="3" name="">
             <a:extLst xmlns:a="http://schemas.openxmlformats.org/drawingml/2006/main">
               <a:ext uri="{FF2B5EF4-FFF2-40B4-BE49-F238E27FC236}">
-                <a16:creationId xmlns:a16="http://schemas.microsoft.com/office/drawing/2014/main" id="{BAE9657E-AAB8-43CB-B79B-8EC96976BD51}"/>
+                <a16:creationId xmlns:a16="http://schemas.microsoft.com/office/drawing/2014/main" id="{082B3D51-EC7A-4B06-9F51-DAC65E5FDF5D}"/>
               </a:ext>
             </a:extLst>
           </p:cNvPr>
@@ -17337,7 +17337,7 @@
           <p:cNvPr id="4" name="">
             <a:extLst xmlns:a="http://schemas.openxmlformats.org/drawingml/2006/main">
               <a:ext uri="{FF2B5EF4-FFF2-40B4-BE49-F238E27FC236}">
-                <a16:creationId xmlns:a16="http://schemas.microsoft.com/office/drawing/2014/main" id="{43C81515-0E70-4F55-A4C7-A87A6622A968}"/>
+                <a16:creationId xmlns:a16="http://schemas.microsoft.com/office/drawing/2014/main" id="{78D844A8-E189-47F3-8B67-A41A7EF6715C}"/>
               </a:ext>
             </a:extLst>
           </p:cNvPr>
@@ -17389,7 +17389,7 @@
           <p:cNvPr id="5" name="">
             <a:extLst xmlns:a="http://schemas.openxmlformats.org/drawingml/2006/main">
               <a:ext uri="{FF2B5EF4-FFF2-40B4-BE49-F238E27FC236}">
-                <a16:creationId xmlns:a16="http://schemas.microsoft.com/office/drawing/2014/main" id="{58C02D63-6038-4DD0-9066-018F61B5395B}"/>
+                <a16:creationId xmlns:a16="http://schemas.microsoft.com/office/drawing/2014/main" id="{15B0AA28-7E99-44A2-844F-E95D2FF94F55}"/>
               </a:ext>
             </a:extLst>
           </p:cNvPr>
@@ -17424,7 +17424,7 @@
           <p:nvPr/>
         </p:nvPicPr>
         <p:blipFill>
-          <a:blip xmlns:r="http://schemas.openxmlformats.org/officeDocument/2006/relationships" xmlns:a="http://schemas.openxmlformats.org/drawingml/2006/main" r:embed="Re3398c963f0049f4"/>
+          <a:blip xmlns:r="http://schemas.openxmlformats.org/officeDocument/2006/relationships" xmlns:a="http://schemas.openxmlformats.org/drawingml/2006/main" r:embed="R6697556606954fa0"/>
           <a:stretch xmlns:a="http://schemas.openxmlformats.org/drawingml/2006/main"/>
         </p:blipFill>
         <p:spPr>
@@ -17442,7 +17442,7 @@
           <p:cNvPr id="7" name="">
             <a:extLst xmlns:a="http://schemas.openxmlformats.org/drawingml/2006/main">
               <a:ext uri="{FF2B5EF4-FFF2-40B4-BE49-F238E27FC236}">
-                <a16:creationId xmlns:a16="http://schemas.microsoft.com/office/drawing/2014/main" id="{D0CB766C-9A98-4A90-9FCF-342F78A90618}"/>
+                <a16:creationId xmlns:a16="http://schemas.microsoft.com/office/drawing/2014/main" id="{8B3B178B-56DF-4FF9-931D-F0AD3859048F}"/>
               </a:ext>
             </a:extLst>
           </p:cNvPr>
@@ -17494,7 +17494,7 @@
           <p:cNvPr id="8" name="">
             <a:extLst xmlns:a="http://schemas.openxmlformats.org/drawingml/2006/main">
               <a:ext uri="{FF2B5EF4-FFF2-40B4-BE49-F238E27FC236}">
-                <a16:creationId xmlns:a16="http://schemas.microsoft.com/office/drawing/2014/main" id="{9092681F-AD9E-45CA-90A6-E3CA56858B3B}"/>
+                <a16:creationId xmlns:a16="http://schemas.microsoft.com/office/drawing/2014/main" id="{10F10293-07C1-4A44-B0D5-312465A539AB}"/>
               </a:ext>
             </a:extLst>
           </p:cNvPr>
@@ -17546,7 +17546,7 @@
           <p:cNvPr id="9" name="">
             <a:extLst xmlns:a="http://schemas.openxmlformats.org/drawingml/2006/main">
               <a:ext uri="{FF2B5EF4-FFF2-40B4-BE49-F238E27FC236}">
-                <a16:creationId xmlns:a16="http://schemas.microsoft.com/office/drawing/2014/main" id="{784AB33C-7F81-4120-A824-9310691D1F6A}"/>
+                <a16:creationId xmlns:a16="http://schemas.microsoft.com/office/drawing/2014/main" id="{14B15488-7536-432B-9E17-C1067C5BC860}"/>
               </a:ext>
             </a:extLst>
           </p:cNvPr>
@@ -17598,7 +17598,7 @@
           <p:cNvPr id="10" name="">
             <a:extLst xmlns:a="http://schemas.openxmlformats.org/drawingml/2006/main">
               <a:ext uri="{FF2B5EF4-FFF2-40B4-BE49-F238E27FC236}">
-                <a16:creationId xmlns:a16="http://schemas.microsoft.com/office/drawing/2014/main" id="{7644E7A7-4A43-4B0C-AB6A-E73EF539B415}"/>
+                <a16:creationId xmlns:a16="http://schemas.microsoft.com/office/drawing/2014/main" id="{53BCB3F0-870C-4DF8-88A7-E6FAC85A142B}"/>
               </a:ext>
             </a:extLst>
           </p:cNvPr>
@@ -17650,7 +17650,7 @@
           <p:cNvPr id="11" name="">
             <a:extLst xmlns:a="http://schemas.openxmlformats.org/drawingml/2006/main">
               <a:ext uri="{FF2B5EF4-FFF2-40B4-BE49-F238E27FC236}">
-                <a16:creationId xmlns:a16="http://schemas.microsoft.com/office/drawing/2014/main" id="{04D4F2DD-356C-45A8-8B02-C3490223FDEC}"/>
+                <a16:creationId xmlns:a16="http://schemas.microsoft.com/office/drawing/2014/main" id="{168C8D28-FCAA-40C3-A959-796C20FC3CAE}"/>
               </a:ext>
             </a:extLst>
           </p:cNvPr>
@@ -17681,7 +17681,7 @@
           <p:cNvPr id="12" name="">
             <a:extLst xmlns:a="http://schemas.openxmlformats.org/drawingml/2006/main">
               <a:ext uri="{FF2B5EF4-FFF2-40B4-BE49-F238E27FC236}">
-                <a16:creationId xmlns:a16="http://schemas.microsoft.com/office/drawing/2014/main" id="{334D8F93-F1AE-480B-B4CB-FD34330AE012}"/>
+                <a16:creationId xmlns:a16="http://schemas.microsoft.com/office/drawing/2014/main" id="{71BC14DC-90BA-4B7B-B7B1-F06A1D5C4119}"/>
               </a:ext>
             </a:extLst>
           </p:cNvPr>
@@ -17712,7 +17712,7 @@
           <p:cNvPr id="13" name="">
             <a:extLst xmlns:a="http://schemas.openxmlformats.org/drawingml/2006/main">
               <a:ext uri="{FF2B5EF4-FFF2-40B4-BE49-F238E27FC236}">
-                <a16:creationId xmlns:a16="http://schemas.microsoft.com/office/drawing/2014/main" id="{D2869989-DED2-49A5-9AF8-E7100755FFCA}"/>
+                <a16:creationId xmlns:a16="http://schemas.microsoft.com/office/drawing/2014/main" id="{61AD5D6D-A76C-4B45-A855-C2AD5E22621A}"/>
               </a:ext>
             </a:extLst>
           </p:cNvPr>
@@ -17764,7 +17764,7 @@
           <p:cNvPr id="14" name="">
             <a:extLst xmlns:a="http://schemas.openxmlformats.org/drawingml/2006/main">
               <a:ext uri="{FF2B5EF4-FFF2-40B4-BE49-F238E27FC236}">
-                <a16:creationId xmlns:a16="http://schemas.microsoft.com/office/drawing/2014/main" id="{B4652A17-284A-47DE-B568-570F119EED0A}"/>
+                <a16:creationId xmlns:a16="http://schemas.microsoft.com/office/drawing/2014/main" id="{2F5ABA65-BE9F-4C20-B215-BF9B9751B163}"/>
               </a:ext>
             </a:extLst>
           </p:cNvPr>
@@ -17816,7 +17816,7 @@
           <p:cNvPr id="15" name="">
             <a:extLst xmlns:a="http://schemas.openxmlformats.org/drawingml/2006/main">
               <a:ext uri="{FF2B5EF4-FFF2-40B4-BE49-F238E27FC236}">
-                <a16:creationId xmlns:a16="http://schemas.microsoft.com/office/drawing/2014/main" id="{472AE6B6-4B16-4CBD-A90C-73A86AD84D94}"/>
+                <a16:creationId xmlns:a16="http://schemas.microsoft.com/office/drawing/2014/main" id="{0A39A15D-B920-4FD6-9A09-1AF3AE917565}"/>
               </a:ext>
             </a:extLst>
           </p:cNvPr>
@@ -17868,7 +17868,7 @@
           <p:cNvPr id="16" name="">
             <a:extLst xmlns:a="http://schemas.openxmlformats.org/drawingml/2006/main">
               <a:ext uri="{FF2B5EF4-FFF2-40B4-BE49-F238E27FC236}">
-                <a16:creationId xmlns:a16="http://schemas.microsoft.com/office/drawing/2014/main" id="{8BBBF8BB-E7C6-41D8-8740-5B12046F410C}"/>
+                <a16:creationId xmlns:a16="http://schemas.microsoft.com/office/drawing/2014/main" id="{3BA20911-1F8E-47F0-921F-E7D38C9A2EBF}"/>
               </a:ext>
             </a:extLst>
           </p:cNvPr>
@@ -17920,7 +17920,7 @@
           <p:cNvPr id="17" name="">
             <a:extLst xmlns:a="http://schemas.openxmlformats.org/drawingml/2006/main">
               <a:ext uri="{FF2B5EF4-FFF2-40B4-BE49-F238E27FC236}">
-                <a16:creationId xmlns:a16="http://schemas.microsoft.com/office/drawing/2014/main" id="{26E73CF9-03B4-41F9-89D7-C542E8BF9F4F}"/>
+                <a16:creationId xmlns:a16="http://schemas.microsoft.com/office/drawing/2014/main" id="{7E642900-F8DA-46AC-9962-3E7EC21F73A9}"/>
               </a:ext>
             </a:extLst>
           </p:cNvPr>
@@ -17972,7 +17972,7 @@
           <p:cNvPr id="18" name="">
             <a:extLst xmlns:a="http://schemas.openxmlformats.org/drawingml/2006/main">
               <a:ext uri="{FF2B5EF4-FFF2-40B4-BE49-F238E27FC236}">
-                <a16:creationId xmlns:a16="http://schemas.microsoft.com/office/drawing/2014/main" id="{60A9BAE7-9FAC-4FCC-8A10-F34DB5C0994C}"/>
+                <a16:creationId xmlns:a16="http://schemas.microsoft.com/office/drawing/2014/main" id="{B7DD40A0-CCDE-4E07-AAF2-F672EF9E0999}"/>
               </a:ext>
             </a:extLst>
           </p:cNvPr>
@@ -18003,7 +18003,7 @@
           <p:cNvPr id="19" name="">
             <a:extLst xmlns:a="http://schemas.openxmlformats.org/drawingml/2006/main">
               <a:ext uri="{FF2B5EF4-FFF2-40B4-BE49-F238E27FC236}">
-                <a16:creationId xmlns:a16="http://schemas.microsoft.com/office/drawing/2014/main" id="{81C87B47-7E85-447E-ADDF-31F7AB5CF4FE}"/>
+                <a16:creationId xmlns:a16="http://schemas.microsoft.com/office/drawing/2014/main" id="{42C51ECF-8A2C-460A-A1DB-E7AEE8BAFD97}"/>
               </a:ext>
             </a:extLst>
           </p:cNvPr>
@@ -18034,7 +18034,7 @@
           <p:cNvPr id="20" name="">
             <a:extLst xmlns:a="http://schemas.openxmlformats.org/drawingml/2006/main">
               <a:ext uri="{FF2B5EF4-FFF2-40B4-BE49-F238E27FC236}">
-                <a16:creationId xmlns:a16="http://schemas.microsoft.com/office/drawing/2014/main" id="{DD158A05-D875-4319-98ED-701A0CD95099}"/>
+                <a16:creationId xmlns:a16="http://schemas.microsoft.com/office/drawing/2014/main" id="{AA2B3A96-857F-4C15-8263-3049C5DFD522}"/>
               </a:ext>
             </a:extLst>
           </p:cNvPr>
@@ -18086,7 +18086,7 @@
           <p:cNvPr id="21" name="">
             <a:extLst xmlns:a="http://schemas.openxmlformats.org/drawingml/2006/main">
               <a:ext uri="{FF2B5EF4-FFF2-40B4-BE49-F238E27FC236}">
-                <a16:creationId xmlns:a16="http://schemas.microsoft.com/office/drawing/2014/main" id="{0FF816C6-CA7C-42B2-9A8B-7296C54C937B}"/>
+                <a16:creationId xmlns:a16="http://schemas.microsoft.com/office/drawing/2014/main" id="{68F067D9-BD21-4D04-9C50-8F7C66F4A117}"/>
               </a:ext>
             </a:extLst>
           </p:cNvPr>
@@ -18138,7 +18138,7 @@
           <p:cNvPr id="22" name="">
             <a:extLst xmlns:a="http://schemas.openxmlformats.org/drawingml/2006/main">
               <a:ext uri="{FF2B5EF4-FFF2-40B4-BE49-F238E27FC236}">
-                <a16:creationId xmlns:a16="http://schemas.microsoft.com/office/drawing/2014/main" id="{DD1DDBF4-0449-4D8F-A108-472C1FF41103}"/>
+                <a16:creationId xmlns:a16="http://schemas.microsoft.com/office/drawing/2014/main" id="{26AC8CD6-C16D-43DF-A561-5B609AF90838}"/>
               </a:ext>
             </a:extLst>
           </p:cNvPr>
@@ -18190,7 +18190,7 @@
           <p:cNvPr id="23" name="">
             <a:extLst xmlns:a="http://schemas.openxmlformats.org/drawingml/2006/main">
               <a:ext uri="{FF2B5EF4-FFF2-40B4-BE49-F238E27FC236}">
-                <a16:creationId xmlns:a16="http://schemas.microsoft.com/office/drawing/2014/main" id="{3DE4AAD5-AA12-4116-8783-958FDA1D0AF2}"/>
+                <a16:creationId xmlns:a16="http://schemas.microsoft.com/office/drawing/2014/main" id="{67E3D1BC-794A-451F-8A62-34B2BCCF76AE}"/>
               </a:ext>
             </a:extLst>
           </p:cNvPr>
@@ -18242,7 +18242,7 @@
           <p:cNvPr id="24" name="">
             <a:extLst xmlns:a="http://schemas.openxmlformats.org/drawingml/2006/main">
               <a:ext uri="{FF2B5EF4-FFF2-40B4-BE49-F238E27FC236}">
-                <a16:creationId xmlns:a16="http://schemas.microsoft.com/office/drawing/2014/main" id="{DDC8F3AE-27C4-4D76-9F25-3B662A5482A4}"/>
+                <a16:creationId xmlns:a16="http://schemas.microsoft.com/office/drawing/2014/main" id="{D7319E7A-049F-44D6-BD98-A384631450C6}"/>
               </a:ext>
             </a:extLst>
           </p:cNvPr>
@@ -18294,7 +18294,7 @@
           <p:cNvPr id="25" name="">
             <a:extLst xmlns:a="http://schemas.openxmlformats.org/drawingml/2006/main">
               <a:ext uri="{FF2B5EF4-FFF2-40B4-BE49-F238E27FC236}">
-                <a16:creationId xmlns:a16="http://schemas.microsoft.com/office/drawing/2014/main" id="{276C4A5E-5C8F-458B-A35A-F9519AAB10E3}"/>
+                <a16:creationId xmlns:a16="http://schemas.microsoft.com/office/drawing/2014/main" id="{B9040383-C86A-44C2-9BCB-152BD99008B2}"/>
               </a:ext>
             </a:extLst>
           </p:cNvPr>
@@ -18325,7 +18325,7 @@
           <p:cNvPr id="26" name="">
             <a:extLst xmlns:a="http://schemas.openxmlformats.org/drawingml/2006/main">
               <a:ext uri="{FF2B5EF4-FFF2-40B4-BE49-F238E27FC236}">
-                <a16:creationId xmlns:a16="http://schemas.microsoft.com/office/drawing/2014/main" id="{1AF04109-FA3C-4039-98B9-CCE9D80135DD}"/>
+                <a16:creationId xmlns:a16="http://schemas.microsoft.com/office/drawing/2014/main" id="{BB405B01-913F-42A8-8755-CE9905D53E60}"/>
               </a:ext>
             </a:extLst>
           </p:cNvPr>
@@ -18377,7 +18377,7 @@
           <p:cNvPr id="27" name="">
             <a:extLst xmlns:a="http://schemas.openxmlformats.org/drawingml/2006/main">
               <a:ext uri="{FF2B5EF4-FFF2-40B4-BE49-F238E27FC236}">
-                <a16:creationId xmlns:a16="http://schemas.microsoft.com/office/drawing/2014/main" id="{FA5ADAAC-909D-463A-A77E-1833AADABD5F}"/>
+                <a16:creationId xmlns:a16="http://schemas.microsoft.com/office/drawing/2014/main" id="{F456E6A6-BD1E-44B0-BF12-53A192C55AD0}"/>
               </a:ext>
             </a:extLst>
           </p:cNvPr>
@@ -18429,7 +18429,7 @@
           <p:cNvPr id="28" name="">
             <a:extLst xmlns:a="http://schemas.openxmlformats.org/drawingml/2006/main">
               <a:ext uri="{FF2B5EF4-FFF2-40B4-BE49-F238E27FC236}">
-                <a16:creationId xmlns:a16="http://schemas.microsoft.com/office/drawing/2014/main" id="{DA72478D-97F8-490F-9736-0B29B62370E0}"/>
+                <a16:creationId xmlns:a16="http://schemas.microsoft.com/office/drawing/2014/main" id="{6442F3BA-D904-4096-9E4C-3DAF9DE93E28}"/>
               </a:ext>
             </a:extLst>
           </p:cNvPr>
@@ -18481,7 +18481,7 @@
           <p:cNvPr id="29" name="">
             <a:extLst xmlns:a="http://schemas.openxmlformats.org/drawingml/2006/main">
               <a:ext uri="{FF2B5EF4-FFF2-40B4-BE49-F238E27FC236}">
-                <a16:creationId xmlns:a16="http://schemas.microsoft.com/office/drawing/2014/main" id="{9CED0913-2543-4B5C-BB90-18244B24DABC}"/>
+                <a16:creationId xmlns:a16="http://schemas.microsoft.com/office/drawing/2014/main" id="{38B14B82-7751-4185-A8F7-B0990E9D8DA3}"/>
               </a:ext>
             </a:extLst>
           </p:cNvPr>
@@ -18533,7 +18533,7 @@
           <p:cNvPr id="30" name="">
             <a:extLst xmlns:a="http://schemas.openxmlformats.org/drawingml/2006/main">
               <a:ext uri="{FF2B5EF4-FFF2-40B4-BE49-F238E27FC236}">
-                <a16:creationId xmlns:a16="http://schemas.microsoft.com/office/drawing/2014/main" id="{443DC647-AE0A-46C0-A4EC-F5C77143B801}"/>
+                <a16:creationId xmlns:a16="http://schemas.microsoft.com/office/drawing/2014/main" id="{BF94A8ED-8228-4BC4-BD90-432E880238DD}"/>
               </a:ext>
             </a:extLst>
           </p:cNvPr>
@@ -18585,7 +18585,7 @@
           <p:cNvPr id="31" name="">
             <a:extLst xmlns:a="http://schemas.openxmlformats.org/drawingml/2006/main">
               <a:ext uri="{FF2B5EF4-FFF2-40B4-BE49-F238E27FC236}">
-                <a16:creationId xmlns:a16="http://schemas.microsoft.com/office/drawing/2014/main" id="{2B89CCDD-88FC-4BF3-BB1D-B2ACCE516B84}"/>
+                <a16:creationId xmlns:a16="http://schemas.microsoft.com/office/drawing/2014/main" id="{E898BEC5-2CD5-4138-B586-45FCF4944197}"/>
               </a:ext>
             </a:extLst>
           </p:cNvPr>
@@ -18616,7 +18616,7 @@
           <p:cNvPr id="32" name="">
             <a:extLst xmlns:a="http://schemas.openxmlformats.org/drawingml/2006/main">
               <a:ext uri="{FF2B5EF4-FFF2-40B4-BE49-F238E27FC236}">
-                <a16:creationId xmlns:a16="http://schemas.microsoft.com/office/drawing/2014/main" id="{64A46871-883A-4028-A029-CB04237566EA}"/>
+                <a16:creationId xmlns:a16="http://schemas.microsoft.com/office/drawing/2014/main" id="{338913C4-2536-4F0F-864E-563EF866CB56}"/>
               </a:ext>
             </a:extLst>
           </p:cNvPr>
@@ -18647,7 +18647,7 @@
           <p:cNvPr id="33" name="">
             <a:extLst xmlns:a="http://schemas.openxmlformats.org/drawingml/2006/main">
               <a:ext uri="{FF2B5EF4-FFF2-40B4-BE49-F238E27FC236}">
-                <a16:creationId xmlns:a16="http://schemas.microsoft.com/office/drawing/2014/main" id="{6ACF5F49-F308-47F6-B344-0791BF6FE9B3}"/>
+                <a16:creationId xmlns:a16="http://schemas.microsoft.com/office/drawing/2014/main" id="{E448EF42-97BE-47CA-92DF-EA499D2B36E6}"/>
               </a:ext>
             </a:extLst>
           </p:cNvPr>
@@ -18699,7 +18699,7 @@
           <p:cNvPr id="34" name="">
             <a:extLst xmlns:a="http://schemas.openxmlformats.org/drawingml/2006/main">
               <a:ext uri="{FF2B5EF4-FFF2-40B4-BE49-F238E27FC236}">
-                <a16:creationId xmlns:a16="http://schemas.microsoft.com/office/drawing/2014/main" id="{863FF2E7-26AB-405F-9397-EBFEE1408A7A}"/>
+                <a16:creationId xmlns:a16="http://schemas.microsoft.com/office/drawing/2014/main" id="{42F73784-EA2C-4A34-BA03-B85481700C12}"/>
               </a:ext>
             </a:extLst>
           </p:cNvPr>
@@ -18751,7 +18751,7 @@
           <p:cNvPr id="35" name="">
             <a:extLst xmlns:a="http://schemas.openxmlformats.org/drawingml/2006/main">
               <a:ext uri="{FF2B5EF4-FFF2-40B4-BE49-F238E27FC236}">
-                <a16:creationId xmlns:a16="http://schemas.microsoft.com/office/drawing/2014/main" id="{9486EA1F-AB95-46C9-9A25-45F351821C40}"/>
+                <a16:creationId xmlns:a16="http://schemas.microsoft.com/office/drawing/2014/main" id="{E4C0049C-6B70-4DC1-B79F-AD384B059548}"/>
               </a:ext>
             </a:extLst>
           </p:cNvPr>
@@ -18803,7 +18803,7 @@
           <p:cNvPr id="36" name="">
             <a:extLst xmlns:a="http://schemas.openxmlformats.org/drawingml/2006/main">
               <a:ext uri="{FF2B5EF4-FFF2-40B4-BE49-F238E27FC236}">
-                <a16:creationId xmlns:a16="http://schemas.microsoft.com/office/drawing/2014/main" id="{C0A6DAB4-C32D-4B9B-BD5B-6EEB02E01379}"/>
+                <a16:creationId xmlns:a16="http://schemas.microsoft.com/office/drawing/2014/main" id="{029F4D83-6623-4AD5-A83B-0FFF0966D300}"/>
               </a:ext>
             </a:extLst>
           </p:cNvPr>
@@ -18855,7 +18855,7 @@
           <p:cNvPr id="37" name="">
             <a:extLst xmlns:a="http://schemas.openxmlformats.org/drawingml/2006/main">
               <a:ext uri="{FF2B5EF4-FFF2-40B4-BE49-F238E27FC236}">
-                <a16:creationId xmlns:a16="http://schemas.microsoft.com/office/drawing/2014/main" id="{D0A5B46B-DADF-45E1-8FD3-4BD5955EB4A6}"/>
+                <a16:creationId xmlns:a16="http://schemas.microsoft.com/office/drawing/2014/main" id="{EFEF5741-ED7C-47D8-89D2-2FC4983DDABD}"/>
               </a:ext>
             </a:extLst>
           </p:cNvPr>
@@ -18907,7 +18907,7 @@
           <p:cNvPr id="38" name="">
             <a:extLst xmlns:a="http://schemas.openxmlformats.org/drawingml/2006/main">
               <a:ext uri="{FF2B5EF4-FFF2-40B4-BE49-F238E27FC236}">
-                <a16:creationId xmlns:a16="http://schemas.microsoft.com/office/drawing/2014/main" id="{5DFAAB96-0832-4AC7-8261-CD4BCE747947}"/>
+                <a16:creationId xmlns:a16="http://schemas.microsoft.com/office/drawing/2014/main" id="{9C842E54-FFB9-4FB6-BFE7-A035E1C7894A}"/>
               </a:ext>
             </a:extLst>
           </p:cNvPr>
@@ -18938,7 +18938,7 @@
           <p:cNvPr id="39" name="">
             <a:extLst xmlns:a="http://schemas.openxmlformats.org/drawingml/2006/main">
               <a:ext uri="{FF2B5EF4-FFF2-40B4-BE49-F238E27FC236}">
-                <a16:creationId xmlns:a16="http://schemas.microsoft.com/office/drawing/2014/main" id="{34F78F6B-E026-4992-9A87-640336B19086}"/>
+                <a16:creationId xmlns:a16="http://schemas.microsoft.com/office/drawing/2014/main" id="{0BB3C530-8F87-4855-9EA3-C00361384514}"/>
               </a:ext>
             </a:extLst>
           </p:cNvPr>
@@ -18990,7 +18990,7 @@
           <p:cNvPr id="40" name="">
             <a:extLst xmlns:a="http://schemas.openxmlformats.org/drawingml/2006/main">
               <a:ext uri="{FF2B5EF4-FFF2-40B4-BE49-F238E27FC236}">
-                <a16:creationId xmlns:a16="http://schemas.microsoft.com/office/drawing/2014/main" id="{F4E5556E-65BC-4DF3-AF67-28D92C406B88}"/>
+                <a16:creationId xmlns:a16="http://schemas.microsoft.com/office/drawing/2014/main" id="{2A337D85-8766-45F3-A064-989825956D61}"/>
               </a:ext>
             </a:extLst>
           </p:cNvPr>
@@ -19042,7 +19042,7 @@
           <p:cNvPr id="41" name="">
             <a:extLst xmlns:a="http://schemas.openxmlformats.org/drawingml/2006/main">
               <a:ext uri="{FF2B5EF4-FFF2-40B4-BE49-F238E27FC236}">
-                <a16:creationId xmlns:a16="http://schemas.microsoft.com/office/drawing/2014/main" id="{E4D63E89-830B-46B3-8A18-ADF1B50D34FD}"/>
+                <a16:creationId xmlns:a16="http://schemas.microsoft.com/office/drawing/2014/main" id="{7C1E0C1A-E563-40A5-9563-F65AF572ABD4}"/>
               </a:ext>
             </a:extLst>
           </p:cNvPr>
@@ -19094,7 +19094,7 @@
           <p:cNvPr id="42" name="">
             <a:extLst xmlns:a="http://schemas.openxmlformats.org/drawingml/2006/main">
               <a:ext uri="{FF2B5EF4-FFF2-40B4-BE49-F238E27FC236}">
-                <a16:creationId xmlns:a16="http://schemas.microsoft.com/office/drawing/2014/main" id="{B8135518-B905-45F1-9379-AACBEFE69C48}"/>
+                <a16:creationId xmlns:a16="http://schemas.microsoft.com/office/drawing/2014/main" id="{C407A250-71E2-4002-BCC7-BAD30517C4D8}"/>
               </a:ext>
             </a:extLst>
           </p:cNvPr>
@@ -19146,7 +19146,7 @@
           <p:cNvPr id="43" name="">
             <a:extLst xmlns:a="http://schemas.openxmlformats.org/drawingml/2006/main">
               <a:ext uri="{FF2B5EF4-FFF2-40B4-BE49-F238E27FC236}">
-                <a16:creationId xmlns:a16="http://schemas.microsoft.com/office/drawing/2014/main" id="{683BEF1F-AE13-4AEF-8268-330FED32AA83}"/>
+                <a16:creationId xmlns:a16="http://schemas.microsoft.com/office/drawing/2014/main" id="{1EABE1A5-4718-4398-BD00-91F2507C7765}"/>
               </a:ext>
             </a:extLst>
           </p:cNvPr>
@@ -19198,7 +19198,7 @@
           <p:cNvPr id="44" name="">
             <a:extLst xmlns:a="http://schemas.openxmlformats.org/drawingml/2006/main">
               <a:ext uri="{FF2B5EF4-FFF2-40B4-BE49-F238E27FC236}">
-                <a16:creationId xmlns:a16="http://schemas.microsoft.com/office/drawing/2014/main" id="{DACF392B-CB8B-4765-9C73-C5D4EB029D28}"/>
+                <a16:creationId xmlns:a16="http://schemas.microsoft.com/office/drawing/2014/main" id="{B312590C-7B9F-4878-B936-187833FDCA65}"/>
               </a:ext>
             </a:extLst>
           </p:cNvPr>
@@ -19229,7 +19229,7 @@
           <p:cNvPr id="45" name="">
             <a:extLst xmlns:a="http://schemas.openxmlformats.org/drawingml/2006/main">
               <a:ext uri="{FF2B5EF4-FFF2-40B4-BE49-F238E27FC236}">
-                <a16:creationId xmlns:a16="http://schemas.microsoft.com/office/drawing/2014/main" id="{13F86D73-8DEC-4016-B682-2EC8FE011513}"/>
+                <a16:creationId xmlns:a16="http://schemas.microsoft.com/office/drawing/2014/main" id="{F178164B-91EF-4E13-9ADA-C41AD7EAA9C6}"/>
               </a:ext>
             </a:extLst>
           </p:cNvPr>
@@ -19260,7 +19260,7 @@
           <p:cNvPr id="46" name="">
             <a:extLst xmlns:a="http://schemas.openxmlformats.org/drawingml/2006/main">
               <a:ext uri="{FF2B5EF4-FFF2-40B4-BE49-F238E27FC236}">
-                <a16:creationId xmlns:a16="http://schemas.microsoft.com/office/drawing/2014/main" id="{9CA4F3EE-F757-4414-8D71-4E6144C239FE}"/>
+                <a16:creationId xmlns:a16="http://schemas.microsoft.com/office/drawing/2014/main" id="{5DF80666-FCC9-47FE-9D61-E88C44BEC38E}"/>
               </a:ext>
             </a:extLst>
           </p:cNvPr>
@@ -19312,7 +19312,7 @@
           <p:cNvPr id="47" name="">
             <a:extLst xmlns:a="http://schemas.openxmlformats.org/drawingml/2006/main">
               <a:ext uri="{FF2B5EF4-FFF2-40B4-BE49-F238E27FC236}">
-                <a16:creationId xmlns:a16="http://schemas.microsoft.com/office/drawing/2014/main" id="{36B2E340-83F7-4B33-9DB7-D94331DFCD9B}"/>
+                <a16:creationId xmlns:a16="http://schemas.microsoft.com/office/drawing/2014/main" id="{9B31BCEC-A540-4CD2-B7EA-9CBA5C850E57}"/>
               </a:ext>
             </a:extLst>
           </p:cNvPr>
@@ -19364,7 +19364,7 @@
           <p:cNvPr id="48" name="">
             <a:extLst xmlns:a="http://schemas.openxmlformats.org/drawingml/2006/main">
               <a:ext uri="{FF2B5EF4-FFF2-40B4-BE49-F238E27FC236}">
-                <a16:creationId xmlns:a16="http://schemas.microsoft.com/office/drawing/2014/main" id="{61D21C36-BF7E-4767-8876-FDFAFCF04024}"/>
+                <a16:creationId xmlns:a16="http://schemas.microsoft.com/office/drawing/2014/main" id="{8DB00CA3-77E5-4C4B-A594-DF751D024097}"/>
               </a:ext>
             </a:extLst>
           </p:cNvPr>
@@ -19416,7 +19416,7 @@
           <p:cNvPr id="49" name="">
             <a:extLst xmlns:a="http://schemas.openxmlformats.org/drawingml/2006/main">
               <a:ext uri="{FF2B5EF4-FFF2-40B4-BE49-F238E27FC236}">
-                <a16:creationId xmlns:a16="http://schemas.microsoft.com/office/drawing/2014/main" id="{6AC2EBFA-C9FE-4309-874E-2A383399F27E}"/>
+                <a16:creationId xmlns:a16="http://schemas.microsoft.com/office/drawing/2014/main" id="{37B59903-AE3B-4382-99BF-CC1150EA646D}"/>
               </a:ext>
             </a:extLst>
           </p:cNvPr>
@@ -19468,7 +19468,7 @@
           <p:cNvPr id="50" name="">
             <a:extLst xmlns:a="http://schemas.openxmlformats.org/drawingml/2006/main">
               <a:ext uri="{FF2B5EF4-FFF2-40B4-BE49-F238E27FC236}">
-                <a16:creationId xmlns:a16="http://schemas.microsoft.com/office/drawing/2014/main" id="{FDD5F231-7FAE-402A-B79B-35F9202CD428}"/>
+                <a16:creationId xmlns:a16="http://schemas.microsoft.com/office/drawing/2014/main" id="{A9DFC6C6-62D2-40CC-A47A-0930D50AB66B}"/>
               </a:ext>
             </a:extLst>
           </p:cNvPr>
@@ -19520,7 +19520,7 @@
           <p:cNvPr id="51" name="">
             <a:extLst xmlns:a="http://schemas.openxmlformats.org/drawingml/2006/main">
               <a:ext uri="{FF2B5EF4-FFF2-40B4-BE49-F238E27FC236}">
-                <a16:creationId xmlns:a16="http://schemas.microsoft.com/office/drawing/2014/main" id="{656F947B-7FBC-4462-90D9-D852D1B9F2A2}"/>
+                <a16:creationId xmlns:a16="http://schemas.microsoft.com/office/drawing/2014/main" id="{DEA72DB6-A7ED-4529-A970-04D76464DE29}"/>
               </a:ext>
             </a:extLst>
           </p:cNvPr>
@@ -19551,7 +19551,7 @@
           <p:cNvPr id="52" name="">
             <a:extLst xmlns:a="http://schemas.openxmlformats.org/drawingml/2006/main">
               <a:ext uri="{FF2B5EF4-FFF2-40B4-BE49-F238E27FC236}">
-                <a16:creationId xmlns:a16="http://schemas.microsoft.com/office/drawing/2014/main" id="{4C418C81-BA80-4DF8-8EF8-D38DE2B34B77}"/>
+                <a16:creationId xmlns:a16="http://schemas.microsoft.com/office/drawing/2014/main" id="{FFAA40E0-2BCE-4888-A2D0-4B6DA10E8B58}"/>
               </a:ext>
             </a:extLst>
           </p:cNvPr>
@@ -19603,7 +19603,7 @@
           <p:cNvPr id="53" name="">
             <a:extLst xmlns:a="http://schemas.openxmlformats.org/drawingml/2006/main">
               <a:ext uri="{FF2B5EF4-FFF2-40B4-BE49-F238E27FC236}">
-                <a16:creationId xmlns:a16="http://schemas.microsoft.com/office/drawing/2014/main" id="{5F2D6C69-6E0B-4F40-BA32-7819E238ADB4}"/>
+                <a16:creationId xmlns:a16="http://schemas.microsoft.com/office/drawing/2014/main" id="{F0601830-B56F-444F-AC1D-6AB73E852308}"/>
               </a:ext>
             </a:extLst>
           </p:cNvPr>
@@ -19655,7 +19655,7 @@
           <p:cNvPr id="54" name="">
             <a:extLst xmlns:a="http://schemas.openxmlformats.org/drawingml/2006/main">
               <a:ext uri="{FF2B5EF4-FFF2-40B4-BE49-F238E27FC236}">
-                <a16:creationId xmlns:a16="http://schemas.microsoft.com/office/drawing/2014/main" id="{C472655D-4620-4CF1-892C-D7126E71EB7C}"/>
+                <a16:creationId xmlns:a16="http://schemas.microsoft.com/office/drawing/2014/main" id="{D692DD57-BB6A-48DD-8ED1-E8BA57631B09}"/>
               </a:ext>
             </a:extLst>
           </p:cNvPr>
@@ -19707,7 +19707,7 @@
           <p:cNvPr id="55" name="">
             <a:extLst xmlns:a="http://schemas.openxmlformats.org/drawingml/2006/main">
               <a:ext uri="{FF2B5EF4-FFF2-40B4-BE49-F238E27FC236}">
-                <a16:creationId xmlns:a16="http://schemas.microsoft.com/office/drawing/2014/main" id="{C12AA0B1-24A4-4826-A86C-CD47437A14B7}"/>
+                <a16:creationId xmlns:a16="http://schemas.microsoft.com/office/drawing/2014/main" id="{A057C13D-133C-43D6-AB3F-6DEAB4F9A826}"/>
               </a:ext>
             </a:extLst>
           </p:cNvPr>
@@ -19759,7 +19759,7 @@
           <p:cNvPr id="56" name="">
             <a:extLst xmlns:a="http://schemas.openxmlformats.org/drawingml/2006/main">
               <a:ext uri="{FF2B5EF4-FFF2-40B4-BE49-F238E27FC236}">
-                <a16:creationId xmlns:a16="http://schemas.microsoft.com/office/drawing/2014/main" id="{ED884FAF-B314-4B79-BC87-B9101F08470A}"/>
+                <a16:creationId xmlns:a16="http://schemas.microsoft.com/office/drawing/2014/main" id="{A9F7A045-32C3-48D2-A1BA-A9907953861D}"/>
               </a:ext>
             </a:extLst>
           </p:cNvPr>
@@ -19811,7 +19811,7 @@
           <p:cNvPr id="57" name="">
             <a:extLst xmlns:a="http://schemas.openxmlformats.org/drawingml/2006/main">
               <a:ext uri="{FF2B5EF4-FFF2-40B4-BE49-F238E27FC236}">
-                <a16:creationId xmlns:a16="http://schemas.microsoft.com/office/drawing/2014/main" id="{B9451466-C155-4681-838B-8E1613AB549D}"/>
+                <a16:creationId xmlns:a16="http://schemas.microsoft.com/office/drawing/2014/main" id="{0BFC92D6-08C1-43C8-9EE6-9F5531975731}"/>
               </a:ext>
             </a:extLst>
           </p:cNvPr>
@@ -19842,7 +19842,7 @@
           <p:cNvPr id="58" name="">
             <a:extLst xmlns:a="http://schemas.openxmlformats.org/drawingml/2006/main">
               <a:ext uri="{FF2B5EF4-FFF2-40B4-BE49-F238E27FC236}">
-                <a16:creationId xmlns:a16="http://schemas.microsoft.com/office/drawing/2014/main" id="{FF4E135A-2AB0-40A9-B658-6DCB01326605}"/>
+                <a16:creationId xmlns:a16="http://schemas.microsoft.com/office/drawing/2014/main" id="{A11C20F2-1F39-4E65-8A7E-CE7A63BD32F2}"/>
               </a:ext>
             </a:extLst>
           </p:cNvPr>
@@ -19873,7 +19873,7 @@
           <p:cNvPr id="59" name="">
             <a:extLst xmlns:a="http://schemas.openxmlformats.org/drawingml/2006/main">
               <a:ext uri="{FF2B5EF4-FFF2-40B4-BE49-F238E27FC236}">
-                <a16:creationId xmlns:a16="http://schemas.microsoft.com/office/drawing/2014/main" id="{2BD06BD6-A40A-4D6C-B198-196E738E75D7}"/>
+                <a16:creationId xmlns:a16="http://schemas.microsoft.com/office/drawing/2014/main" id="{B21F0DD3-234A-4A5B-8E8F-22B7BD62DB40}"/>
               </a:ext>
             </a:extLst>
           </p:cNvPr>
@@ -19925,7 +19925,7 @@
           <p:cNvPr id="60" name="">
             <a:extLst xmlns:a="http://schemas.openxmlformats.org/drawingml/2006/main">
               <a:ext uri="{FF2B5EF4-FFF2-40B4-BE49-F238E27FC236}">
-                <a16:creationId xmlns:a16="http://schemas.microsoft.com/office/drawing/2014/main" id="{1F356BD1-A7EC-4795-BB8C-58D880EFC29E}"/>
+                <a16:creationId xmlns:a16="http://schemas.microsoft.com/office/drawing/2014/main" id="{BC1A1C84-47E4-4AD1-B8E5-8C86F3D4DACE}"/>
               </a:ext>
             </a:extLst>
           </p:cNvPr>
@@ -19977,7 +19977,7 @@
           <p:cNvPr id="61" name="">
             <a:extLst xmlns:a="http://schemas.openxmlformats.org/drawingml/2006/main">
               <a:ext uri="{FF2B5EF4-FFF2-40B4-BE49-F238E27FC236}">
-                <a16:creationId xmlns:a16="http://schemas.microsoft.com/office/drawing/2014/main" id="{07CD562D-122A-4AC7-BC83-B123BFC4FFB3}"/>
+                <a16:creationId xmlns:a16="http://schemas.microsoft.com/office/drawing/2014/main" id="{3F5DC856-AF0B-46CB-B318-6CD291E1D7D9}"/>
               </a:ext>
             </a:extLst>
           </p:cNvPr>
@@ -20029,7 +20029,7 @@
           <p:cNvPr id="62" name="">
             <a:extLst xmlns:a="http://schemas.openxmlformats.org/drawingml/2006/main">
               <a:ext uri="{FF2B5EF4-FFF2-40B4-BE49-F238E27FC236}">
-                <a16:creationId xmlns:a16="http://schemas.microsoft.com/office/drawing/2014/main" id="{63C40836-2768-433D-8201-9D8673B92ABE}"/>
+                <a16:creationId xmlns:a16="http://schemas.microsoft.com/office/drawing/2014/main" id="{A9B5EC02-D648-477B-9E21-10A91BDD1746}"/>
               </a:ext>
             </a:extLst>
           </p:cNvPr>
@@ -20081,7 +20081,7 @@
           <p:cNvPr id="63" name="">
             <a:extLst xmlns:a="http://schemas.openxmlformats.org/drawingml/2006/main">
               <a:ext uri="{FF2B5EF4-FFF2-40B4-BE49-F238E27FC236}">
-                <a16:creationId xmlns:a16="http://schemas.microsoft.com/office/drawing/2014/main" id="{C99AF9AB-4E0D-4269-A866-E1464D0893BF}"/>
+                <a16:creationId xmlns:a16="http://schemas.microsoft.com/office/drawing/2014/main" id="{7ECA35D6-3EC2-4EF7-9FE6-41077609B5D1}"/>
               </a:ext>
             </a:extLst>
           </p:cNvPr>
@@ -20133,7 +20133,7 @@
           <p:cNvPr id="64" name="">
             <a:extLst xmlns:a="http://schemas.openxmlformats.org/drawingml/2006/main">
               <a:ext uri="{FF2B5EF4-FFF2-40B4-BE49-F238E27FC236}">
-                <a16:creationId xmlns:a16="http://schemas.microsoft.com/office/drawing/2014/main" id="{05A8FC67-E671-4D24-B218-A44111429027}"/>
+                <a16:creationId xmlns:a16="http://schemas.microsoft.com/office/drawing/2014/main" id="{EAF7F67C-DA68-468B-A248-32B988296B5B}"/>
               </a:ext>
             </a:extLst>
           </p:cNvPr>
@@ -20164,7 +20164,7 @@
           <p:cNvPr id="65" name="">
             <a:extLst xmlns:a="http://schemas.openxmlformats.org/drawingml/2006/main">
               <a:ext uri="{FF2B5EF4-FFF2-40B4-BE49-F238E27FC236}">
-                <a16:creationId xmlns:a16="http://schemas.microsoft.com/office/drawing/2014/main" id="{E3721D51-230D-4B8C-BFD2-8819C64B7174}"/>
+                <a16:creationId xmlns:a16="http://schemas.microsoft.com/office/drawing/2014/main" id="{1BD6B1F1-DE66-4D1A-B91B-D0061B23268D}"/>
               </a:ext>
             </a:extLst>
           </p:cNvPr>
@@ -20216,7 +20216,7 @@
           <p:cNvPr id="66" name="">
             <a:extLst xmlns:a="http://schemas.openxmlformats.org/drawingml/2006/main">
               <a:ext uri="{FF2B5EF4-FFF2-40B4-BE49-F238E27FC236}">
-                <a16:creationId xmlns:a16="http://schemas.microsoft.com/office/drawing/2014/main" id="{CA7923BB-453A-4A99-8DC0-555267A40583}"/>
+                <a16:creationId xmlns:a16="http://schemas.microsoft.com/office/drawing/2014/main" id="{F0845F20-A903-4E08-A016-6F63AE9F56E4}"/>
               </a:ext>
             </a:extLst>
           </p:cNvPr>
@@ -20268,7 +20268,7 @@
           <p:cNvPr id="67" name="">
             <a:extLst xmlns:a="http://schemas.openxmlformats.org/drawingml/2006/main">
               <a:ext uri="{FF2B5EF4-FFF2-40B4-BE49-F238E27FC236}">
-                <a16:creationId xmlns:a16="http://schemas.microsoft.com/office/drawing/2014/main" id="{62866A91-082F-4E1E-B77D-7C7B7EE6D081}"/>
+                <a16:creationId xmlns:a16="http://schemas.microsoft.com/office/drawing/2014/main" id="{4ACC9EFF-61E7-4AB5-83BF-174CD0BFC813}"/>
               </a:ext>
             </a:extLst>
           </p:cNvPr>
@@ -20320,7 +20320,7 @@
           <p:cNvPr id="68" name="">
             <a:extLst xmlns:a="http://schemas.openxmlformats.org/drawingml/2006/main">
               <a:ext uri="{FF2B5EF4-FFF2-40B4-BE49-F238E27FC236}">
-                <a16:creationId xmlns:a16="http://schemas.microsoft.com/office/drawing/2014/main" id="{E156AAFD-F644-4FAF-BF95-1FC2441DAF4D}"/>
+                <a16:creationId xmlns:a16="http://schemas.microsoft.com/office/drawing/2014/main" id="{894F4E5B-CA42-4B33-A752-51373CD6132D}"/>
               </a:ext>
             </a:extLst>
           </p:cNvPr>
@@ -20372,7 +20372,7 @@
           <p:cNvPr id="69" name="">
             <a:extLst xmlns:a="http://schemas.openxmlformats.org/drawingml/2006/main">
               <a:ext uri="{FF2B5EF4-FFF2-40B4-BE49-F238E27FC236}">
-                <a16:creationId xmlns:a16="http://schemas.microsoft.com/office/drawing/2014/main" id="{92B303B9-3D46-4507-B15A-E083F4BE7D7B}"/>
+                <a16:creationId xmlns:a16="http://schemas.microsoft.com/office/drawing/2014/main" id="{E25CF123-E3A7-4F63-9D33-82FD4DA02325}"/>
               </a:ext>
             </a:extLst>
           </p:cNvPr>
@@ -20424,7 +20424,7 @@
           <p:cNvPr id="70" name="">
             <a:extLst xmlns:a="http://schemas.openxmlformats.org/drawingml/2006/main">
               <a:ext uri="{FF2B5EF4-FFF2-40B4-BE49-F238E27FC236}">
-                <a16:creationId xmlns:a16="http://schemas.microsoft.com/office/drawing/2014/main" id="{D24BF1A0-4AC1-4D92-BDA3-B6164F925369}"/>
+                <a16:creationId xmlns:a16="http://schemas.microsoft.com/office/drawing/2014/main" id="{E4991CB5-D85F-4069-9886-FC291D0CB7E5}"/>
               </a:ext>
             </a:extLst>
           </p:cNvPr>
@@ -20455,7 +20455,7 @@
           <p:cNvPr id="71" name="">
             <a:extLst xmlns:a="http://schemas.openxmlformats.org/drawingml/2006/main">
               <a:ext uri="{FF2B5EF4-FFF2-40B4-BE49-F238E27FC236}">
-                <a16:creationId xmlns:a16="http://schemas.microsoft.com/office/drawing/2014/main" id="{65B381A6-EA61-4074-912F-CF3D18E366A8}"/>
+                <a16:creationId xmlns:a16="http://schemas.microsoft.com/office/drawing/2014/main" id="{001A7F83-FA9E-4293-A2DE-4E4DDEFC4091}"/>
               </a:ext>
             </a:extLst>
           </p:cNvPr>
@@ -20486,7 +20486,7 @@
           <p:cNvPr id="72" name="">
             <a:extLst xmlns:a="http://schemas.openxmlformats.org/drawingml/2006/main">
               <a:ext uri="{FF2B5EF4-FFF2-40B4-BE49-F238E27FC236}">
-                <a16:creationId xmlns:a16="http://schemas.microsoft.com/office/drawing/2014/main" id="{514B089A-31C0-48DB-AB05-7E04E80BF41B}"/>
+                <a16:creationId xmlns:a16="http://schemas.microsoft.com/office/drawing/2014/main" id="{0D005F6A-E853-4FAE-9157-821FB3336F5C}"/>
               </a:ext>
             </a:extLst>
           </p:cNvPr>
@@ -20538,7 +20538,7 @@
           <p:cNvPr id="73" name="">
             <a:extLst xmlns:a="http://schemas.openxmlformats.org/drawingml/2006/main">
               <a:ext uri="{FF2B5EF4-FFF2-40B4-BE49-F238E27FC236}">
-                <a16:creationId xmlns:a16="http://schemas.microsoft.com/office/drawing/2014/main" id="{AD86AF7E-48A2-4AD3-80DB-AF7DE903AC77}"/>
+                <a16:creationId xmlns:a16="http://schemas.microsoft.com/office/drawing/2014/main" id="{1987246B-9CE1-498D-9104-28B300D12604}"/>
               </a:ext>
             </a:extLst>
           </p:cNvPr>
@@ -20590,7 +20590,7 @@
           <p:cNvPr id="74" name="">
             <a:extLst xmlns:a="http://schemas.openxmlformats.org/drawingml/2006/main">
               <a:ext uri="{FF2B5EF4-FFF2-40B4-BE49-F238E27FC236}">
-                <a16:creationId xmlns:a16="http://schemas.microsoft.com/office/drawing/2014/main" id="{3F22A2AD-6E9A-45FE-8680-60DD714ED8EB}"/>
+                <a16:creationId xmlns:a16="http://schemas.microsoft.com/office/drawing/2014/main" id="{3FA33210-E6D4-4DC4-92FB-4B8B939F8FA0}"/>
               </a:ext>
             </a:extLst>
           </p:cNvPr>
@@ -20642,7 +20642,7 @@
           <p:cNvPr id="75" name="">
             <a:extLst xmlns:a="http://schemas.openxmlformats.org/drawingml/2006/main">
               <a:ext uri="{FF2B5EF4-FFF2-40B4-BE49-F238E27FC236}">
-                <a16:creationId xmlns:a16="http://schemas.microsoft.com/office/drawing/2014/main" id="{DE86EEEF-B1E9-4CE2-B336-551942C9CB6F}"/>
+                <a16:creationId xmlns:a16="http://schemas.microsoft.com/office/drawing/2014/main" id="{B2216390-1826-4CC8-9FA2-9A4F2A13BADD}"/>
               </a:ext>
             </a:extLst>
           </p:cNvPr>
@@ -20694,7 +20694,7 @@
           <p:cNvPr id="76" name="">
             <a:extLst xmlns:a="http://schemas.openxmlformats.org/drawingml/2006/main">
               <a:ext uri="{FF2B5EF4-FFF2-40B4-BE49-F238E27FC236}">
-                <a16:creationId xmlns:a16="http://schemas.microsoft.com/office/drawing/2014/main" id="{7B9B591E-41D3-43D0-BE25-0B84B113FD72}"/>
+                <a16:creationId xmlns:a16="http://schemas.microsoft.com/office/drawing/2014/main" id="{CE3F6BA8-FCD4-4FDF-BD7F-8DB45E689B92}"/>
               </a:ext>
             </a:extLst>
           </p:cNvPr>
@@ -20746,7 +20746,7 @@
           <p:cNvPr id="77" name="">
             <a:extLst xmlns:a="http://schemas.openxmlformats.org/drawingml/2006/main">
               <a:ext uri="{FF2B5EF4-FFF2-40B4-BE49-F238E27FC236}">
-                <a16:creationId xmlns:a16="http://schemas.microsoft.com/office/drawing/2014/main" id="{0433FE8A-A033-499C-AF21-37D95AC82E5D}"/>
+                <a16:creationId xmlns:a16="http://schemas.microsoft.com/office/drawing/2014/main" id="{B2321045-82D7-44BD-A863-416F1B6852AB}"/>
               </a:ext>
             </a:extLst>
           </p:cNvPr>
@@ -20777,7 +20777,7 @@
           <p:cNvPr id="78" name="">
             <a:extLst xmlns:a="http://schemas.openxmlformats.org/drawingml/2006/main">
               <a:ext uri="{FF2B5EF4-FFF2-40B4-BE49-F238E27FC236}">
-                <a16:creationId xmlns:a16="http://schemas.microsoft.com/office/drawing/2014/main" id="{3961CDCB-70EE-415B-AB15-CFDD4F5A3040}"/>
+                <a16:creationId xmlns:a16="http://schemas.microsoft.com/office/drawing/2014/main" id="{4A17489B-04BE-4190-9CC9-34FAAC04AF74}"/>
               </a:ext>
             </a:extLst>
           </p:cNvPr>
@@ -20829,7 +20829,7 @@
           <p:cNvPr id="79" name="">
             <a:extLst xmlns:a="http://schemas.openxmlformats.org/drawingml/2006/main">
               <a:ext uri="{FF2B5EF4-FFF2-40B4-BE49-F238E27FC236}">
-                <a16:creationId xmlns:a16="http://schemas.microsoft.com/office/drawing/2014/main" id="{027F7FC0-8EEC-4305-AECC-90A9160B0A4D}"/>
+                <a16:creationId xmlns:a16="http://schemas.microsoft.com/office/drawing/2014/main" id="{3979D519-BA5C-4F80-8EE1-5DD77EDC665F}"/>
               </a:ext>
             </a:extLst>
           </p:cNvPr>
@@ -20881,7 +20881,7 @@
           <p:cNvPr id="80" name="">
             <a:extLst xmlns:a="http://schemas.openxmlformats.org/drawingml/2006/main">
               <a:ext uri="{FF2B5EF4-FFF2-40B4-BE49-F238E27FC236}">
-                <a16:creationId xmlns:a16="http://schemas.microsoft.com/office/drawing/2014/main" id="{B956D7E6-DFA8-427F-8A16-BC0D262DB962}"/>
+                <a16:creationId xmlns:a16="http://schemas.microsoft.com/office/drawing/2014/main" id="{EA6A9C53-61BC-48B4-AA3A-5F3F5E08C86B}"/>
               </a:ext>
             </a:extLst>
           </p:cNvPr>
@@ -20933,7 +20933,7 @@
           <p:cNvPr id="81" name="">
             <a:extLst xmlns:a="http://schemas.openxmlformats.org/drawingml/2006/main">
               <a:ext uri="{FF2B5EF4-FFF2-40B4-BE49-F238E27FC236}">
-                <a16:creationId xmlns:a16="http://schemas.microsoft.com/office/drawing/2014/main" id="{343C1471-3A06-4865-B104-0977F0C0B79C}"/>
+                <a16:creationId xmlns:a16="http://schemas.microsoft.com/office/drawing/2014/main" id="{57C41E18-F976-4168-9645-06B4FEDB16EB}"/>
               </a:ext>
             </a:extLst>
           </p:cNvPr>
@@ -20985,7 +20985,7 @@
           <p:cNvPr id="82" name="">
             <a:extLst xmlns:a="http://schemas.openxmlformats.org/drawingml/2006/main">
               <a:ext uri="{FF2B5EF4-FFF2-40B4-BE49-F238E27FC236}">
-                <a16:creationId xmlns:a16="http://schemas.microsoft.com/office/drawing/2014/main" id="{D8358CEA-7D7C-4DEC-AFE7-4AF281744FE5}"/>
+                <a16:creationId xmlns:a16="http://schemas.microsoft.com/office/drawing/2014/main" id="{831EE77F-865C-4C02-AD7A-21DB52224935}"/>
               </a:ext>
             </a:extLst>
           </p:cNvPr>
@@ -21037,7 +21037,7 @@
           <p:cNvPr id="83" name="">
             <a:extLst xmlns:a="http://schemas.openxmlformats.org/drawingml/2006/main">
               <a:ext uri="{FF2B5EF4-FFF2-40B4-BE49-F238E27FC236}">
-                <a16:creationId xmlns:a16="http://schemas.microsoft.com/office/drawing/2014/main" id="{254A6004-6C37-484D-B7EB-902FCFA77957}"/>
+                <a16:creationId xmlns:a16="http://schemas.microsoft.com/office/drawing/2014/main" id="{D7F5B763-F746-4949-826A-B0660F27DA3F}"/>
               </a:ext>
             </a:extLst>
           </p:cNvPr>
@@ -21068,7 +21068,7 @@
           <p:cNvPr id="84" name="">
             <a:extLst xmlns:a="http://schemas.openxmlformats.org/drawingml/2006/main">
               <a:ext uri="{FF2B5EF4-FFF2-40B4-BE49-F238E27FC236}">
-                <a16:creationId xmlns:a16="http://schemas.microsoft.com/office/drawing/2014/main" id="{41273BE4-395A-41FD-8D58-637E2BE1F09D}"/>
+                <a16:creationId xmlns:a16="http://schemas.microsoft.com/office/drawing/2014/main" id="{0D8E72DA-A21F-4185-BE23-AEAE8DFFCA18}"/>
               </a:ext>
             </a:extLst>
           </p:cNvPr>
@@ -21120,7 +21120,7 @@
           <p:cNvPr id="85" name="">
             <a:extLst xmlns:a="http://schemas.openxmlformats.org/drawingml/2006/main">
               <a:ext uri="{FF2B5EF4-FFF2-40B4-BE49-F238E27FC236}">
-                <a16:creationId xmlns:a16="http://schemas.microsoft.com/office/drawing/2014/main" id="{21E10172-D774-4816-B6F8-7EB7DFC55DF3}"/>
+                <a16:creationId xmlns:a16="http://schemas.microsoft.com/office/drawing/2014/main" id="{407A75AC-5CFB-40A8-8357-266B1C206926}"/>
               </a:ext>
             </a:extLst>
           </p:cNvPr>
@@ -21172,7 +21172,7 @@
           <p:cNvPr id="86" name="">
             <a:extLst xmlns:a="http://schemas.openxmlformats.org/drawingml/2006/main">
               <a:ext uri="{FF2B5EF4-FFF2-40B4-BE49-F238E27FC236}">
-                <a16:creationId xmlns:a16="http://schemas.microsoft.com/office/drawing/2014/main" id="{8027EFCD-DBF3-4DF3-99E9-04B6A105BDA2}"/>
+                <a16:creationId xmlns:a16="http://schemas.microsoft.com/office/drawing/2014/main" id="{A6A7ED6F-39F9-4125-9D10-E045C97732AA}"/>
               </a:ext>
             </a:extLst>
           </p:cNvPr>
@@ -21224,7 +21224,7 @@
           <p:cNvPr id="87" name="">
             <a:extLst xmlns:a="http://schemas.openxmlformats.org/drawingml/2006/main">
               <a:ext uri="{FF2B5EF4-FFF2-40B4-BE49-F238E27FC236}">
-                <a16:creationId xmlns:a16="http://schemas.microsoft.com/office/drawing/2014/main" id="{42E01E3E-A774-43FD-ABDE-53A6E0A17F24}"/>
+                <a16:creationId xmlns:a16="http://schemas.microsoft.com/office/drawing/2014/main" id="{9ABA6796-6FEE-4A68-AAAA-A25F6024A657}"/>
               </a:ext>
             </a:extLst>
           </p:cNvPr>
@@ -21276,7 +21276,7 @@
           <p:cNvPr id="88" name="">
             <a:extLst xmlns:a="http://schemas.openxmlformats.org/drawingml/2006/main">
               <a:ext uri="{FF2B5EF4-FFF2-40B4-BE49-F238E27FC236}">
-                <a16:creationId xmlns:a16="http://schemas.microsoft.com/office/drawing/2014/main" id="{B6186A65-F1B3-46DA-8AF8-B2D3699E69C6}"/>
+                <a16:creationId xmlns:a16="http://schemas.microsoft.com/office/drawing/2014/main" id="{B4BFE437-F4DF-4671-8BFD-7974B193D72D}"/>
               </a:ext>
             </a:extLst>
           </p:cNvPr>
@@ -21328,7 +21328,7 @@
           <p:cNvPr id="89" name="">
             <a:extLst xmlns:a="http://schemas.openxmlformats.org/drawingml/2006/main">
               <a:ext uri="{FF2B5EF4-FFF2-40B4-BE49-F238E27FC236}">
-                <a16:creationId xmlns:a16="http://schemas.microsoft.com/office/drawing/2014/main" id="{6BCDB63F-B756-4A7C-BE43-BE9A950BFBC0}"/>
+                <a16:creationId xmlns:a16="http://schemas.microsoft.com/office/drawing/2014/main" id="{CE686D32-CBEC-4188-AB61-EC2072517516}"/>
               </a:ext>
             </a:extLst>
           </p:cNvPr>
@@ -21359,7 +21359,7 @@
           <p:cNvPr id="90" name="">
             <a:extLst xmlns:a="http://schemas.openxmlformats.org/drawingml/2006/main">
               <a:ext uri="{FF2B5EF4-FFF2-40B4-BE49-F238E27FC236}">
-                <a16:creationId xmlns:a16="http://schemas.microsoft.com/office/drawing/2014/main" id="{F2005698-1E3F-4832-A47E-85301D379EE8}"/>
+                <a16:creationId xmlns:a16="http://schemas.microsoft.com/office/drawing/2014/main" id="{98872324-57EA-4EDD-BAA7-CFAAB3E0053B}"/>
               </a:ext>
             </a:extLst>
           </p:cNvPr>
@@ -21390,7 +21390,7 @@
           <p:cNvPr id="91" name="">
             <a:extLst xmlns:a="http://schemas.openxmlformats.org/drawingml/2006/main">
               <a:ext uri="{FF2B5EF4-FFF2-40B4-BE49-F238E27FC236}">
-                <a16:creationId xmlns:a16="http://schemas.microsoft.com/office/drawing/2014/main" id="{A5F7A225-A546-4D0D-B336-5484EFAFED9E}"/>
+                <a16:creationId xmlns:a16="http://schemas.microsoft.com/office/drawing/2014/main" id="{D5D0F250-1414-4364-AB2A-EE70E5FEAF3E}"/>
               </a:ext>
             </a:extLst>
           </p:cNvPr>
@@ -21442,7 +21442,7 @@
           <p:cNvPr id="92" name="">
             <a:extLst xmlns:a="http://schemas.openxmlformats.org/drawingml/2006/main">
               <a:ext uri="{FF2B5EF4-FFF2-40B4-BE49-F238E27FC236}">
-                <a16:creationId xmlns:a16="http://schemas.microsoft.com/office/drawing/2014/main" id="{265E6179-7639-43B1-A6A0-390A8ABC6317}"/>
+                <a16:creationId xmlns:a16="http://schemas.microsoft.com/office/drawing/2014/main" id="{4D9D1E14-F3DA-44CE-9B51-842072EDE826}"/>
               </a:ext>
             </a:extLst>
           </p:cNvPr>
@@ -21494,7 +21494,7 @@
           <p:cNvPr id="93" name="">
             <a:extLst xmlns:a="http://schemas.openxmlformats.org/drawingml/2006/main">
               <a:ext uri="{FF2B5EF4-FFF2-40B4-BE49-F238E27FC236}">
-                <a16:creationId xmlns:a16="http://schemas.microsoft.com/office/drawing/2014/main" id="{4C3F73E7-A23B-4F2F-94D6-15DDE7B90E44}"/>
+                <a16:creationId xmlns:a16="http://schemas.microsoft.com/office/drawing/2014/main" id="{A1513774-268F-41EB-B9CA-1CA6589563F6}"/>
               </a:ext>
             </a:extLst>
           </p:cNvPr>
@@ -21546,7 +21546,7 @@
           <p:cNvPr id="94" name="">
             <a:extLst xmlns:a="http://schemas.openxmlformats.org/drawingml/2006/main">
               <a:ext uri="{FF2B5EF4-FFF2-40B4-BE49-F238E27FC236}">
-                <a16:creationId xmlns:a16="http://schemas.microsoft.com/office/drawing/2014/main" id="{110BA5AB-6FFA-4CD1-918C-4187EE465982}"/>
+                <a16:creationId xmlns:a16="http://schemas.microsoft.com/office/drawing/2014/main" id="{FDFB859D-067B-41D5-90AF-B055EC13C171}"/>
               </a:ext>
             </a:extLst>
           </p:cNvPr>
@@ -21598,7 +21598,7 @@
           <p:cNvPr id="95" name="">
             <a:extLst xmlns:a="http://schemas.openxmlformats.org/drawingml/2006/main">
               <a:ext uri="{FF2B5EF4-FFF2-40B4-BE49-F238E27FC236}">
-                <a16:creationId xmlns:a16="http://schemas.microsoft.com/office/drawing/2014/main" id="{0C602751-BA6A-4D9B-9895-379D94965D58}"/>
+                <a16:creationId xmlns:a16="http://schemas.microsoft.com/office/drawing/2014/main" id="{5DE414ED-7241-433D-AB5E-F477A2BD3225}"/>
               </a:ext>
             </a:extLst>
           </p:cNvPr>
@@ -21648,7 +21648,7 @@
     </p:spTree>
     <p:extLst>
       <p:ext uri="{BB962C8B-B14F-4D97-AF65-F5344CB8AC3E}">
-        <p14:creationId xmlns:p14="http://schemas.microsoft.com/office/powerpoint/2010/main" val="1552213911"/>
+        <p14:creationId xmlns:p14="http://schemas.microsoft.com/office/powerpoint/2010/main" val="467518454"/>
       </p:ext>
     </p:extLst>
   </p:cSld>
@@ -21679,7 +21679,7 @@
           <p:cNvPr id="122" name="">
             <a:extLst xmlns:a="http://schemas.openxmlformats.org/drawingml/2006/main">
               <a:ext uri="{FF2B5EF4-FFF2-40B4-BE49-F238E27FC236}">
-                <a16:creationId xmlns:a16="http://schemas.microsoft.com/office/drawing/2014/main" id="{057E91F6-E427-44E5-AFC1-327F619E5B01}"/>
+                <a16:creationId xmlns:a16="http://schemas.microsoft.com/office/drawing/2014/main" id="{BE753160-8EE5-41B4-B70A-B3EDC661DF20}"/>
               </a:ext>
             </a:extLst>
           </p:cNvPr>
@@ -21712,7 +21712,7 @@
           <p:cNvPr id="2" name="">
             <a:extLst xmlns:a="http://schemas.openxmlformats.org/drawingml/2006/main">
               <a:ext uri="{FF2B5EF4-FFF2-40B4-BE49-F238E27FC236}">
-                <a16:creationId xmlns:a16="http://schemas.microsoft.com/office/drawing/2014/main" id="{E3E670DD-EE54-46E9-9ADB-B03D17112688}"/>
+                <a16:creationId xmlns:a16="http://schemas.microsoft.com/office/drawing/2014/main" id="{4589CE5C-1ACF-424B-AC0F-0D6C30DC20D9}"/>
               </a:ext>
             </a:extLst>
           </p:cNvPr>
@@ -21743,7 +21743,7 @@
           <p:cNvPr id="3" name="">
             <a:extLst xmlns:a="http://schemas.openxmlformats.org/drawingml/2006/main">
               <a:ext uri="{FF2B5EF4-FFF2-40B4-BE49-F238E27FC236}">
-                <a16:creationId xmlns:a16="http://schemas.microsoft.com/office/drawing/2014/main" id="{3D7E8D1B-14E0-4124-B3D1-B4A903FD3754}"/>
+                <a16:creationId xmlns:a16="http://schemas.microsoft.com/office/drawing/2014/main" id="{36087A67-58AA-4D86-9681-5F36DE970CE2}"/>
               </a:ext>
             </a:extLst>
           </p:cNvPr>
@@ -21795,7 +21795,7 @@
           <p:cNvPr id="4" name="">
             <a:extLst xmlns:a="http://schemas.openxmlformats.org/drawingml/2006/main">
               <a:ext uri="{FF2B5EF4-FFF2-40B4-BE49-F238E27FC236}">
-                <a16:creationId xmlns:a16="http://schemas.microsoft.com/office/drawing/2014/main" id="{5CDE5375-627D-4C19-A4AF-81D9DFEB3D9D}"/>
+                <a16:creationId xmlns:a16="http://schemas.microsoft.com/office/drawing/2014/main" id="{C007D6DF-18B3-452F-BDA3-AAC71891C16F}"/>
               </a:ext>
             </a:extLst>
           </p:cNvPr>
@@ -21847,7 +21847,7 @@
           <p:cNvPr id="5" name="">
             <a:extLst xmlns:a="http://schemas.openxmlformats.org/drawingml/2006/main">
               <a:ext uri="{FF2B5EF4-FFF2-40B4-BE49-F238E27FC236}">
-                <a16:creationId xmlns:a16="http://schemas.microsoft.com/office/drawing/2014/main" id="{0F771C7D-F2BA-421E-B599-B68A3092B4ED}"/>
+                <a16:creationId xmlns:a16="http://schemas.microsoft.com/office/drawing/2014/main" id="{9F13BD37-8E06-4BCC-B870-5D7DA382143B}"/>
               </a:ext>
             </a:extLst>
           </p:cNvPr>
@@ -21882,7 +21882,7 @@
           <p:nvPr/>
         </p:nvPicPr>
         <p:blipFill>
-          <a:blip xmlns:r="http://schemas.openxmlformats.org/officeDocument/2006/relationships" xmlns:a="http://schemas.openxmlformats.org/drawingml/2006/main" r:embed="Rd7d701ef974b4b08"/>
+          <a:blip xmlns:r="http://schemas.openxmlformats.org/officeDocument/2006/relationships" xmlns:a="http://schemas.openxmlformats.org/drawingml/2006/main" r:embed="R60bc3f85a4c34f43"/>
           <a:stretch xmlns:a="http://schemas.openxmlformats.org/drawingml/2006/main"/>
         </p:blipFill>
         <p:spPr>
@@ -21900,7 +21900,7 @@
           <p:cNvPr id="7" name="">
             <a:extLst xmlns:a="http://schemas.openxmlformats.org/drawingml/2006/main">
               <a:ext uri="{FF2B5EF4-FFF2-40B4-BE49-F238E27FC236}">
-                <a16:creationId xmlns:a16="http://schemas.microsoft.com/office/drawing/2014/main" id="{910B84A9-AAB6-4C52-ACB6-CA2506258A36}"/>
+                <a16:creationId xmlns:a16="http://schemas.microsoft.com/office/drawing/2014/main" id="{EBA85391-D9F3-4520-A2F3-84BA9DB682BB}"/>
               </a:ext>
             </a:extLst>
           </p:cNvPr>
@@ -21952,7 +21952,7 @@
           <p:cNvPr id="8" name="">
             <a:extLst xmlns:a="http://schemas.openxmlformats.org/drawingml/2006/main">
               <a:ext uri="{FF2B5EF4-FFF2-40B4-BE49-F238E27FC236}">
-                <a16:creationId xmlns:a16="http://schemas.microsoft.com/office/drawing/2014/main" id="{4B2DB70B-D7C1-4EA3-B5CE-01396588EF88}"/>
+                <a16:creationId xmlns:a16="http://schemas.microsoft.com/office/drawing/2014/main" id="{BD660ABE-E670-4E31-85A3-7AC00D9E8D4B}"/>
               </a:ext>
             </a:extLst>
           </p:cNvPr>
@@ -22004,7 +22004,7 @@
           <p:cNvPr id="9" name="">
             <a:extLst xmlns:a="http://schemas.openxmlformats.org/drawingml/2006/main">
               <a:ext uri="{FF2B5EF4-FFF2-40B4-BE49-F238E27FC236}">
-                <a16:creationId xmlns:a16="http://schemas.microsoft.com/office/drawing/2014/main" id="{3D20E107-13CA-4EE7-8094-CB01BB5AAC99}"/>
+                <a16:creationId xmlns:a16="http://schemas.microsoft.com/office/drawing/2014/main" id="{F3AD448B-B5D9-4788-A6AA-A04C9A883468}"/>
               </a:ext>
             </a:extLst>
           </p:cNvPr>
@@ -22056,7 +22056,7 @@
           <p:cNvPr id="10" name="">
             <a:extLst xmlns:a="http://schemas.openxmlformats.org/drawingml/2006/main">
               <a:ext uri="{FF2B5EF4-FFF2-40B4-BE49-F238E27FC236}">
-                <a16:creationId xmlns:a16="http://schemas.microsoft.com/office/drawing/2014/main" id="{69961E5A-5DFF-4F2F-98DD-153C9B47AC9A}"/>
+                <a16:creationId xmlns:a16="http://schemas.microsoft.com/office/drawing/2014/main" id="{B7FD9350-8D5F-42C4-8C01-1EC126098A7F}"/>
               </a:ext>
             </a:extLst>
           </p:cNvPr>
@@ -22108,7 +22108,7 @@
           <p:cNvPr id="11" name="">
             <a:extLst xmlns:a="http://schemas.openxmlformats.org/drawingml/2006/main">
               <a:ext uri="{FF2B5EF4-FFF2-40B4-BE49-F238E27FC236}">
-                <a16:creationId xmlns:a16="http://schemas.microsoft.com/office/drawing/2014/main" id="{8376F38E-E5F5-403C-A597-8590372C1684}"/>
+                <a16:creationId xmlns:a16="http://schemas.microsoft.com/office/drawing/2014/main" id="{53A0C538-03EA-4B92-AF9C-0062A775D223}"/>
               </a:ext>
             </a:extLst>
           </p:cNvPr>
@@ -22139,7 +22139,7 @@
           <p:cNvPr id="12" name="">
             <a:extLst xmlns:a="http://schemas.openxmlformats.org/drawingml/2006/main">
               <a:ext uri="{FF2B5EF4-FFF2-40B4-BE49-F238E27FC236}">
-                <a16:creationId xmlns:a16="http://schemas.microsoft.com/office/drawing/2014/main" id="{2ADCB0BD-C363-4F84-9DB4-859B4F605AAA}"/>
+                <a16:creationId xmlns:a16="http://schemas.microsoft.com/office/drawing/2014/main" id="{E1ADCC29-CFFE-499A-9886-3DA678675CBD}"/>
               </a:ext>
             </a:extLst>
           </p:cNvPr>
@@ -22170,7 +22170,7 @@
           <p:cNvPr id="13" name="">
             <a:extLst xmlns:a="http://schemas.openxmlformats.org/drawingml/2006/main">
               <a:ext uri="{FF2B5EF4-FFF2-40B4-BE49-F238E27FC236}">
-                <a16:creationId xmlns:a16="http://schemas.microsoft.com/office/drawing/2014/main" id="{5C6570C5-1531-4551-9A4A-E159FF24D152}"/>
+                <a16:creationId xmlns:a16="http://schemas.microsoft.com/office/drawing/2014/main" id="{32770088-A99F-4F32-8984-C1DF39EDA343}"/>
               </a:ext>
             </a:extLst>
           </p:cNvPr>
@@ -22222,7 +22222,7 @@
           <p:cNvPr id="14" name="">
             <a:extLst xmlns:a="http://schemas.openxmlformats.org/drawingml/2006/main">
               <a:ext uri="{FF2B5EF4-FFF2-40B4-BE49-F238E27FC236}">
-                <a16:creationId xmlns:a16="http://schemas.microsoft.com/office/drawing/2014/main" id="{4792392E-4162-4456-8EDC-C4E000BC1102}"/>
+                <a16:creationId xmlns:a16="http://schemas.microsoft.com/office/drawing/2014/main" id="{A746BA01-5A6C-46E4-862D-C2ECF63B32CB}"/>
               </a:ext>
             </a:extLst>
           </p:cNvPr>
@@ -22274,7 +22274,7 @@
           <p:cNvPr id="15" name="">
             <a:extLst xmlns:a="http://schemas.openxmlformats.org/drawingml/2006/main">
               <a:ext uri="{FF2B5EF4-FFF2-40B4-BE49-F238E27FC236}">
-                <a16:creationId xmlns:a16="http://schemas.microsoft.com/office/drawing/2014/main" id="{662082AC-A2FF-458B-8020-820692B4614C}"/>
+                <a16:creationId xmlns:a16="http://schemas.microsoft.com/office/drawing/2014/main" id="{CCE3E588-C427-46FC-A7FC-2425CDED915B}"/>
               </a:ext>
             </a:extLst>
           </p:cNvPr>
@@ -22326,7 +22326,7 @@
           <p:cNvPr id="16" name="">
             <a:extLst xmlns:a="http://schemas.openxmlformats.org/drawingml/2006/main">
               <a:ext uri="{FF2B5EF4-FFF2-40B4-BE49-F238E27FC236}">
-                <a16:creationId xmlns:a16="http://schemas.microsoft.com/office/drawing/2014/main" id="{A78735CA-D651-406C-9765-B7DCF632835D}"/>
+                <a16:creationId xmlns:a16="http://schemas.microsoft.com/office/drawing/2014/main" id="{00DFD669-AAD5-4785-8F6A-317F790EA4F0}"/>
               </a:ext>
             </a:extLst>
           </p:cNvPr>
@@ -22378,7 +22378,7 @@
           <p:cNvPr id="17" name="">
             <a:extLst xmlns:a="http://schemas.openxmlformats.org/drawingml/2006/main">
               <a:ext uri="{FF2B5EF4-FFF2-40B4-BE49-F238E27FC236}">
-                <a16:creationId xmlns:a16="http://schemas.microsoft.com/office/drawing/2014/main" id="{3722526F-048A-48F1-B01A-22E85D71F9F5}"/>
+                <a16:creationId xmlns:a16="http://schemas.microsoft.com/office/drawing/2014/main" id="{7B7E05F1-4F03-474F-B398-EF0403FD8ECD}"/>
               </a:ext>
             </a:extLst>
           </p:cNvPr>
@@ -22430,7 +22430,7 @@
           <p:cNvPr id="18" name="">
             <a:extLst xmlns:a="http://schemas.openxmlformats.org/drawingml/2006/main">
               <a:ext uri="{FF2B5EF4-FFF2-40B4-BE49-F238E27FC236}">
-                <a16:creationId xmlns:a16="http://schemas.microsoft.com/office/drawing/2014/main" id="{5B170A33-5070-4DD0-94A7-660DB02E172D}"/>
+                <a16:creationId xmlns:a16="http://schemas.microsoft.com/office/drawing/2014/main" id="{6CF2E2F0-670C-4933-AFF7-BCC29C5925AB}"/>
               </a:ext>
             </a:extLst>
           </p:cNvPr>
@@ -22482,7 +22482,7 @@
           <p:cNvPr id="19" name="">
             <a:extLst xmlns:a="http://schemas.openxmlformats.org/drawingml/2006/main">
               <a:ext uri="{FF2B5EF4-FFF2-40B4-BE49-F238E27FC236}">
-                <a16:creationId xmlns:a16="http://schemas.microsoft.com/office/drawing/2014/main" id="{1360FBD9-9B48-4461-8806-00BF9FADF833}"/>
+                <a16:creationId xmlns:a16="http://schemas.microsoft.com/office/drawing/2014/main" id="{A07A4F94-243E-4F73-9A9E-0C6E21000C27}"/>
               </a:ext>
             </a:extLst>
           </p:cNvPr>
@@ -22534,7 +22534,7 @@
           <p:cNvPr id="20" name="">
             <a:extLst xmlns:a="http://schemas.openxmlformats.org/drawingml/2006/main">
               <a:ext uri="{FF2B5EF4-FFF2-40B4-BE49-F238E27FC236}">
-                <a16:creationId xmlns:a16="http://schemas.microsoft.com/office/drawing/2014/main" id="{233AE6B4-03AE-4C60-9E4A-96E6E755DE43}"/>
+                <a16:creationId xmlns:a16="http://schemas.microsoft.com/office/drawing/2014/main" id="{1877F5C7-423B-414D-8AC7-93787C10A37D}"/>
               </a:ext>
             </a:extLst>
           </p:cNvPr>
@@ -22565,7 +22565,7 @@
           <p:cNvPr id="21" name="">
             <a:extLst xmlns:a="http://schemas.openxmlformats.org/drawingml/2006/main">
               <a:ext uri="{FF2B5EF4-FFF2-40B4-BE49-F238E27FC236}">
-                <a16:creationId xmlns:a16="http://schemas.microsoft.com/office/drawing/2014/main" id="{050AD4E5-0C23-40C6-88FD-1B863574EE7F}"/>
+                <a16:creationId xmlns:a16="http://schemas.microsoft.com/office/drawing/2014/main" id="{ADAC244F-BB4D-41E1-913C-816A98508A1A}"/>
               </a:ext>
             </a:extLst>
           </p:cNvPr>
@@ -22617,7 +22617,7 @@
           <p:cNvPr id="22" name="">
             <a:extLst xmlns:a="http://schemas.openxmlformats.org/drawingml/2006/main">
               <a:ext uri="{FF2B5EF4-FFF2-40B4-BE49-F238E27FC236}">
-                <a16:creationId xmlns:a16="http://schemas.microsoft.com/office/drawing/2014/main" id="{52CBDE92-DF7C-4174-A75F-7EE66C378299}"/>
+                <a16:creationId xmlns:a16="http://schemas.microsoft.com/office/drawing/2014/main" id="{70CF9693-B4AD-4DEC-B93E-41265A218C90}"/>
               </a:ext>
             </a:extLst>
           </p:cNvPr>
@@ -22669,7 +22669,7 @@
           <p:cNvPr id="23" name="">
             <a:extLst xmlns:a="http://schemas.openxmlformats.org/drawingml/2006/main">
               <a:ext uri="{FF2B5EF4-FFF2-40B4-BE49-F238E27FC236}">
-                <a16:creationId xmlns:a16="http://schemas.microsoft.com/office/drawing/2014/main" id="{A9D7994E-03B7-49E2-83B6-E8DDBDE43660}"/>
+                <a16:creationId xmlns:a16="http://schemas.microsoft.com/office/drawing/2014/main" id="{BEB5BA9A-7489-469B-81A5-B89A1F2D8CB7}"/>
               </a:ext>
             </a:extLst>
           </p:cNvPr>
@@ -22721,7 +22721,7 @@
           <p:cNvPr id="24" name="">
             <a:extLst xmlns:a="http://schemas.openxmlformats.org/drawingml/2006/main">
               <a:ext uri="{FF2B5EF4-FFF2-40B4-BE49-F238E27FC236}">
-                <a16:creationId xmlns:a16="http://schemas.microsoft.com/office/drawing/2014/main" id="{46C7ED18-9D2C-4B2D-AFD8-8DF596CD8737}"/>
+                <a16:creationId xmlns:a16="http://schemas.microsoft.com/office/drawing/2014/main" id="{86430A6F-49DC-4CA3-AE28-9B5C91DE3B31}"/>
               </a:ext>
             </a:extLst>
           </p:cNvPr>
@@ -22773,7 +22773,7 @@
           <p:cNvPr id="25" name="">
             <a:extLst xmlns:a="http://schemas.openxmlformats.org/drawingml/2006/main">
               <a:ext uri="{FF2B5EF4-FFF2-40B4-BE49-F238E27FC236}">
-                <a16:creationId xmlns:a16="http://schemas.microsoft.com/office/drawing/2014/main" id="{F392F9CD-0151-4202-A791-D101D81216FD}"/>
+                <a16:creationId xmlns:a16="http://schemas.microsoft.com/office/drawing/2014/main" id="{2C918262-8089-4F9C-B8AC-3A71CDB93E85}"/>
               </a:ext>
             </a:extLst>
           </p:cNvPr>
@@ -22825,7 +22825,7 @@
           <p:cNvPr id="26" name="">
             <a:extLst xmlns:a="http://schemas.openxmlformats.org/drawingml/2006/main">
               <a:ext uri="{FF2B5EF4-FFF2-40B4-BE49-F238E27FC236}">
-                <a16:creationId xmlns:a16="http://schemas.microsoft.com/office/drawing/2014/main" id="{23CCF41D-59DC-4DC1-B1A5-44220FEDCE15}"/>
+                <a16:creationId xmlns:a16="http://schemas.microsoft.com/office/drawing/2014/main" id="{1DD34A31-EB16-47DE-8738-B74AA9AB9297}"/>
               </a:ext>
             </a:extLst>
           </p:cNvPr>
@@ -22877,7 +22877,7 @@
           <p:cNvPr id="27" name="">
             <a:extLst xmlns:a="http://schemas.openxmlformats.org/drawingml/2006/main">
               <a:ext uri="{FF2B5EF4-FFF2-40B4-BE49-F238E27FC236}">
-                <a16:creationId xmlns:a16="http://schemas.microsoft.com/office/drawing/2014/main" id="{ECB0F4A6-6F89-48C5-AC88-ED467AFDA205}"/>
+                <a16:creationId xmlns:a16="http://schemas.microsoft.com/office/drawing/2014/main" id="{212BB84B-B7EE-43E0-8526-D13C232A2BDA}"/>
               </a:ext>
             </a:extLst>
           </p:cNvPr>
@@ -22929,7 +22929,7 @@
           <p:cNvPr id="28" name="">
             <a:extLst xmlns:a="http://schemas.openxmlformats.org/drawingml/2006/main">
               <a:ext uri="{FF2B5EF4-FFF2-40B4-BE49-F238E27FC236}">
-                <a16:creationId xmlns:a16="http://schemas.microsoft.com/office/drawing/2014/main" id="{1D164A34-A2DB-453A-BA8B-B9143153FAE8}"/>
+                <a16:creationId xmlns:a16="http://schemas.microsoft.com/office/drawing/2014/main" id="{B738D1E4-669F-4EE4-BBA5-9149F9061660}"/>
               </a:ext>
             </a:extLst>
           </p:cNvPr>
@@ -22960,7 +22960,7 @@
           <p:cNvPr id="29" name="">
             <a:extLst xmlns:a="http://schemas.openxmlformats.org/drawingml/2006/main">
               <a:ext uri="{FF2B5EF4-FFF2-40B4-BE49-F238E27FC236}">
-                <a16:creationId xmlns:a16="http://schemas.microsoft.com/office/drawing/2014/main" id="{7B258953-F3DF-4B9A-9067-4886A1231300}"/>
+                <a16:creationId xmlns:a16="http://schemas.microsoft.com/office/drawing/2014/main" id="{816E4213-7D1B-4A1D-BC3E-7BC55C0933A2}"/>
               </a:ext>
             </a:extLst>
           </p:cNvPr>
@@ -22991,7 +22991,7 @@
           <p:cNvPr id="30" name="">
             <a:extLst xmlns:a="http://schemas.openxmlformats.org/drawingml/2006/main">
               <a:ext uri="{FF2B5EF4-FFF2-40B4-BE49-F238E27FC236}">
-                <a16:creationId xmlns:a16="http://schemas.microsoft.com/office/drawing/2014/main" id="{4249A170-B5C9-4B4D-BCB6-EC4E8A16868B}"/>
+                <a16:creationId xmlns:a16="http://schemas.microsoft.com/office/drawing/2014/main" id="{CA5E5EE0-AB39-4F85-BD8E-E13C6BE77771}"/>
               </a:ext>
             </a:extLst>
           </p:cNvPr>
@@ -23043,7 +23043,7 @@
           <p:cNvPr id="31" name="">
             <a:extLst xmlns:a="http://schemas.openxmlformats.org/drawingml/2006/main">
               <a:ext uri="{FF2B5EF4-FFF2-40B4-BE49-F238E27FC236}">
-                <a16:creationId xmlns:a16="http://schemas.microsoft.com/office/drawing/2014/main" id="{6549F625-7DE9-4207-8774-2D933EFC3432}"/>
+                <a16:creationId xmlns:a16="http://schemas.microsoft.com/office/drawing/2014/main" id="{43FC5A14-108D-4DB7-81A2-EDCB946F5D26}"/>
               </a:ext>
             </a:extLst>
           </p:cNvPr>
@@ -23095,7 +23095,7 @@
           <p:cNvPr id="32" name="">
             <a:extLst xmlns:a="http://schemas.openxmlformats.org/drawingml/2006/main">
               <a:ext uri="{FF2B5EF4-FFF2-40B4-BE49-F238E27FC236}">
-                <a16:creationId xmlns:a16="http://schemas.microsoft.com/office/drawing/2014/main" id="{17188BE9-BD84-4846-9C28-1BDE5D7584CE}"/>
+                <a16:creationId xmlns:a16="http://schemas.microsoft.com/office/drawing/2014/main" id="{BFB5E18F-0263-4079-8F2C-2188A8FFF000}"/>
               </a:ext>
             </a:extLst>
           </p:cNvPr>
@@ -23147,7 +23147,7 @@
           <p:cNvPr id="33" name="">
             <a:extLst xmlns:a="http://schemas.openxmlformats.org/drawingml/2006/main">
               <a:ext uri="{FF2B5EF4-FFF2-40B4-BE49-F238E27FC236}">
-                <a16:creationId xmlns:a16="http://schemas.microsoft.com/office/drawing/2014/main" id="{F061EC19-9773-45E6-A524-95CCEB9325DD}"/>
+                <a16:creationId xmlns:a16="http://schemas.microsoft.com/office/drawing/2014/main" id="{B09939C1-897B-4D03-B159-73D3A557642A}"/>
               </a:ext>
             </a:extLst>
           </p:cNvPr>
@@ -23199,7 +23199,7 @@
           <p:cNvPr id="34" name="">
             <a:extLst xmlns:a="http://schemas.openxmlformats.org/drawingml/2006/main">
               <a:ext uri="{FF2B5EF4-FFF2-40B4-BE49-F238E27FC236}">
-                <a16:creationId xmlns:a16="http://schemas.microsoft.com/office/drawing/2014/main" id="{EBB95188-2F47-446B-9902-CBE078A39B43}"/>
+                <a16:creationId xmlns:a16="http://schemas.microsoft.com/office/drawing/2014/main" id="{4C40BD20-878F-4360-BD39-AB8EBB10DD2F}"/>
               </a:ext>
             </a:extLst>
           </p:cNvPr>
@@ -23251,7 +23251,7 @@
           <p:cNvPr id="35" name="">
             <a:extLst xmlns:a="http://schemas.openxmlformats.org/drawingml/2006/main">
               <a:ext uri="{FF2B5EF4-FFF2-40B4-BE49-F238E27FC236}">
-                <a16:creationId xmlns:a16="http://schemas.microsoft.com/office/drawing/2014/main" id="{8F1E3171-5C67-446C-A26C-4BA3C2B7D849}"/>
+                <a16:creationId xmlns:a16="http://schemas.microsoft.com/office/drawing/2014/main" id="{99DE7100-7CEF-4BF6-B913-0B1F62EAC885}"/>
               </a:ext>
             </a:extLst>
           </p:cNvPr>
@@ -23303,7 +23303,7 @@
           <p:cNvPr id="36" name="">
             <a:extLst xmlns:a="http://schemas.openxmlformats.org/drawingml/2006/main">
               <a:ext uri="{FF2B5EF4-FFF2-40B4-BE49-F238E27FC236}">
-                <a16:creationId xmlns:a16="http://schemas.microsoft.com/office/drawing/2014/main" id="{D2F5AF0D-AC5D-4017-AFD2-70C5C1B98BC3}"/>
+                <a16:creationId xmlns:a16="http://schemas.microsoft.com/office/drawing/2014/main" id="{14B8B9B2-A97E-4EA6-A5F9-61BF1D2BBA64}"/>
               </a:ext>
             </a:extLst>
           </p:cNvPr>
@@ -23355,7 +23355,7 @@
           <p:cNvPr id="37" name="">
             <a:extLst xmlns:a="http://schemas.openxmlformats.org/drawingml/2006/main">
               <a:ext uri="{FF2B5EF4-FFF2-40B4-BE49-F238E27FC236}">
-                <a16:creationId xmlns:a16="http://schemas.microsoft.com/office/drawing/2014/main" id="{E5526461-A8D2-451E-B99F-E662DB058FA0}"/>
+                <a16:creationId xmlns:a16="http://schemas.microsoft.com/office/drawing/2014/main" id="{B6FC6714-BF34-465A-95CB-35B794D8FFB9}"/>
               </a:ext>
             </a:extLst>
           </p:cNvPr>
@@ -23386,7 +23386,7 @@
           <p:cNvPr id="38" name="">
             <a:extLst xmlns:a="http://schemas.openxmlformats.org/drawingml/2006/main">
               <a:ext uri="{FF2B5EF4-FFF2-40B4-BE49-F238E27FC236}">
-                <a16:creationId xmlns:a16="http://schemas.microsoft.com/office/drawing/2014/main" id="{786AC9DD-511D-4FDE-BA72-6023DB93A304}"/>
+                <a16:creationId xmlns:a16="http://schemas.microsoft.com/office/drawing/2014/main" id="{2A1D4DCF-E096-47C2-9F12-62B3A93E70A0}"/>
               </a:ext>
             </a:extLst>
           </p:cNvPr>
@@ -23438,7 +23438,7 @@
           <p:cNvPr id="39" name="">
             <a:extLst xmlns:a="http://schemas.openxmlformats.org/drawingml/2006/main">
               <a:ext uri="{FF2B5EF4-FFF2-40B4-BE49-F238E27FC236}">
-                <a16:creationId xmlns:a16="http://schemas.microsoft.com/office/drawing/2014/main" id="{3B893F5A-ED9C-4FA6-81FD-83B50EEDFBAF}"/>
+                <a16:creationId xmlns:a16="http://schemas.microsoft.com/office/drawing/2014/main" id="{4DC6AE74-F8AA-4F89-837A-668484955374}"/>
               </a:ext>
             </a:extLst>
           </p:cNvPr>
@@ -23490,7 +23490,7 @@
           <p:cNvPr id="40" name="">
             <a:extLst xmlns:a="http://schemas.openxmlformats.org/drawingml/2006/main">
               <a:ext uri="{FF2B5EF4-FFF2-40B4-BE49-F238E27FC236}">
-                <a16:creationId xmlns:a16="http://schemas.microsoft.com/office/drawing/2014/main" id="{B56D310C-D895-41D9-80AB-60F454F8B7F6}"/>
+                <a16:creationId xmlns:a16="http://schemas.microsoft.com/office/drawing/2014/main" id="{1D1017E4-E37A-48F9-933E-5AED64DE6DB4}"/>
               </a:ext>
             </a:extLst>
           </p:cNvPr>
@@ -23542,7 +23542,7 @@
           <p:cNvPr id="41" name="">
             <a:extLst xmlns:a="http://schemas.openxmlformats.org/drawingml/2006/main">
               <a:ext uri="{FF2B5EF4-FFF2-40B4-BE49-F238E27FC236}">
-                <a16:creationId xmlns:a16="http://schemas.microsoft.com/office/drawing/2014/main" id="{F7925133-6841-4F93-9D17-C99507D7E3F1}"/>
+                <a16:creationId xmlns:a16="http://schemas.microsoft.com/office/drawing/2014/main" id="{EFEFD3BB-D9DD-43BA-8FEE-436CD0195584}"/>
               </a:ext>
             </a:extLst>
           </p:cNvPr>
@@ -23594,7 +23594,7 @@
           <p:cNvPr id="42" name="">
             <a:extLst xmlns:a="http://schemas.openxmlformats.org/drawingml/2006/main">
               <a:ext uri="{FF2B5EF4-FFF2-40B4-BE49-F238E27FC236}">
-                <a16:creationId xmlns:a16="http://schemas.microsoft.com/office/drawing/2014/main" id="{CF9C2B42-8FA9-48B6-AB0F-06ABFC058CF3}"/>
+                <a16:creationId xmlns:a16="http://schemas.microsoft.com/office/drawing/2014/main" id="{5A3ED756-0EC3-4EE0-A4F1-FF3459C5CC84}"/>
               </a:ext>
             </a:extLst>
           </p:cNvPr>
@@ -23646,7 +23646,7 @@
           <p:cNvPr id="43" name="">
             <a:extLst xmlns:a="http://schemas.openxmlformats.org/drawingml/2006/main">
               <a:ext uri="{FF2B5EF4-FFF2-40B4-BE49-F238E27FC236}">
-                <a16:creationId xmlns:a16="http://schemas.microsoft.com/office/drawing/2014/main" id="{A9CD7995-42CA-4FEC-9CC2-5EE68260D004}"/>
+                <a16:creationId xmlns:a16="http://schemas.microsoft.com/office/drawing/2014/main" id="{7A78EAFD-E008-4E7F-81B0-0C69E2DE1DEF}"/>
               </a:ext>
             </a:extLst>
           </p:cNvPr>
@@ -23698,7 +23698,7 @@
           <p:cNvPr id="44" name="">
             <a:extLst xmlns:a="http://schemas.openxmlformats.org/drawingml/2006/main">
               <a:ext uri="{FF2B5EF4-FFF2-40B4-BE49-F238E27FC236}">
-                <a16:creationId xmlns:a16="http://schemas.microsoft.com/office/drawing/2014/main" id="{A0FC1BB7-E918-4FF3-B3C9-8C967781F7FB}"/>
+                <a16:creationId xmlns:a16="http://schemas.microsoft.com/office/drawing/2014/main" id="{BE8E1F70-7476-4058-9740-2835F5E23798}"/>
               </a:ext>
             </a:extLst>
           </p:cNvPr>
@@ -23750,7 +23750,7 @@
           <p:cNvPr id="45" name="">
             <a:extLst xmlns:a="http://schemas.openxmlformats.org/drawingml/2006/main">
               <a:ext uri="{FF2B5EF4-FFF2-40B4-BE49-F238E27FC236}">
-                <a16:creationId xmlns:a16="http://schemas.microsoft.com/office/drawing/2014/main" id="{BCB240E2-A43F-45B4-835A-96AFE6DDAD0F}"/>
+                <a16:creationId xmlns:a16="http://schemas.microsoft.com/office/drawing/2014/main" id="{C667EA1B-FC81-455E-80F6-0C2E9E682575}"/>
               </a:ext>
             </a:extLst>
           </p:cNvPr>
@@ -23781,7 +23781,7 @@
           <p:cNvPr id="46" name="">
             <a:extLst xmlns:a="http://schemas.openxmlformats.org/drawingml/2006/main">
               <a:ext uri="{FF2B5EF4-FFF2-40B4-BE49-F238E27FC236}">
-                <a16:creationId xmlns:a16="http://schemas.microsoft.com/office/drawing/2014/main" id="{6C700FFF-8FCF-47C9-83EC-1AE29132A69C}"/>
+                <a16:creationId xmlns:a16="http://schemas.microsoft.com/office/drawing/2014/main" id="{BDFE09FF-B342-4420-A96C-51EA20720BFB}"/>
               </a:ext>
             </a:extLst>
           </p:cNvPr>
@@ -23812,7 +23812,7 @@
           <p:cNvPr id="47" name="">
             <a:extLst xmlns:a="http://schemas.openxmlformats.org/drawingml/2006/main">
               <a:ext uri="{FF2B5EF4-FFF2-40B4-BE49-F238E27FC236}">
-                <a16:creationId xmlns:a16="http://schemas.microsoft.com/office/drawing/2014/main" id="{0E044F91-BE51-481D-941E-D53F1568C734}"/>
+                <a16:creationId xmlns:a16="http://schemas.microsoft.com/office/drawing/2014/main" id="{930709E5-6580-4476-BBE2-A2B7A0C21881}"/>
               </a:ext>
             </a:extLst>
           </p:cNvPr>
@@ -23864,7 +23864,7 @@
           <p:cNvPr id="48" name="">
             <a:extLst xmlns:a="http://schemas.openxmlformats.org/drawingml/2006/main">
               <a:ext uri="{FF2B5EF4-FFF2-40B4-BE49-F238E27FC236}">
-                <a16:creationId xmlns:a16="http://schemas.microsoft.com/office/drawing/2014/main" id="{75DB4B71-9EAC-4112-97FC-A626DE733F8E}"/>
+                <a16:creationId xmlns:a16="http://schemas.microsoft.com/office/drawing/2014/main" id="{A6D72A94-0FAA-49B1-8291-63010D5C722E}"/>
               </a:ext>
             </a:extLst>
           </p:cNvPr>
@@ -23916,7 +23916,7 @@
           <p:cNvPr id="49" name="">
             <a:extLst xmlns:a="http://schemas.openxmlformats.org/drawingml/2006/main">
               <a:ext uri="{FF2B5EF4-FFF2-40B4-BE49-F238E27FC236}">
-                <a16:creationId xmlns:a16="http://schemas.microsoft.com/office/drawing/2014/main" id="{11FA3819-5723-4D0B-8D9A-20AF3E18FB09}"/>
+                <a16:creationId xmlns:a16="http://schemas.microsoft.com/office/drawing/2014/main" id="{09E20191-5789-4813-86EB-20E5FFEECF94}"/>
               </a:ext>
             </a:extLst>
           </p:cNvPr>
@@ -23968,7 +23968,7 @@
           <p:cNvPr id="50" name="">
             <a:extLst xmlns:a="http://schemas.openxmlformats.org/drawingml/2006/main">
               <a:ext uri="{FF2B5EF4-FFF2-40B4-BE49-F238E27FC236}">
-                <a16:creationId xmlns:a16="http://schemas.microsoft.com/office/drawing/2014/main" id="{DB9446A4-717E-467A-AA1C-F61E319DC268}"/>
+                <a16:creationId xmlns:a16="http://schemas.microsoft.com/office/drawing/2014/main" id="{1E5ED63B-9752-45E1-8831-3BD04833F551}"/>
               </a:ext>
             </a:extLst>
           </p:cNvPr>
@@ -24020,7 +24020,7 @@
           <p:cNvPr id="51" name="">
             <a:extLst xmlns:a="http://schemas.openxmlformats.org/drawingml/2006/main">
               <a:ext uri="{FF2B5EF4-FFF2-40B4-BE49-F238E27FC236}">
-                <a16:creationId xmlns:a16="http://schemas.microsoft.com/office/drawing/2014/main" id="{ABAEBE5B-7EA7-4EF5-9041-EA4AD930355C}"/>
+                <a16:creationId xmlns:a16="http://schemas.microsoft.com/office/drawing/2014/main" id="{09FA00FD-D7BE-4BED-83C6-060EBF0DBF73}"/>
               </a:ext>
             </a:extLst>
           </p:cNvPr>
@@ -24072,7 +24072,7 @@
           <p:cNvPr id="52" name="">
             <a:extLst xmlns:a="http://schemas.openxmlformats.org/drawingml/2006/main">
               <a:ext uri="{FF2B5EF4-FFF2-40B4-BE49-F238E27FC236}">
-                <a16:creationId xmlns:a16="http://schemas.microsoft.com/office/drawing/2014/main" id="{C37DE771-9F4A-4C7A-9B99-D8F65ABF3B20}"/>
+                <a16:creationId xmlns:a16="http://schemas.microsoft.com/office/drawing/2014/main" id="{E581FF38-3C1B-45D6-9273-8A3206750035}"/>
               </a:ext>
             </a:extLst>
           </p:cNvPr>
@@ -24124,7 +24124,7 @@
           <p:cNvPr id="53" name="">
             <a:extLst xmlns:a="http://schemas.openxmlformats.org/drawingml/2006/main">
               <a:ext uri="{FF2B5EF4-FFF2-40B4-BE49-F238E27FC236}">
-                <a16:creationId xmlns:a16="http://schemas.microsoft.com/office/drawing/2014/main" id="{2C8DB314-0271-4390-A543-549828AC55FB}"/>
+                <a16:creationId xmlns:a16="http://schemas.microsoft.com/office/drawing/2014/main" id="{DA757F83-3742-464C-AC3A-CDA3406B3874}"/>
               </a:ext>
             </a:extLst>
           </p:cNvPr>
@@ -24176,7 +24176,7 @@
           <p:cNvPr id="54" name="">
             <a:extLst xmlns:a="http://schemas.openxmlformats.org/drawingml/2006/main">
               <a:ext uri="{FF2B5EF4-FFF2-40B4-BE49-F238E27FC236}">
-                <a16:creationId xmlns:a16="http://schemas.microsoft.com/office/drawing/2014/main" id="{5DF1E8AE-79D4-44BC-A247-3329931EF183}"/>
+                <a16:creationId xmlns:a16="http://schemas.microsoft.com/office/drawing/2014/main" id="{C1FE33A4-4B15-48A5-9152-7A3A52516CAE}"/>
               </a:ext>
             </a:extLst>
           </p:cNvPr>
@@ -24207,7 +24207,7 @@
           <p:cNvPr id="55" name="">
             <a:extLst xmlns:a="http://schemas.openxmlformats.org/drawingml/2006/main">
               <a:ext uri="{FF2B5EF4-FFF2-40B4-BE49-F238E27FC236}">
-                <a16:creationId xmlns:a16="http://schemas.microsoft.com/office/drawing/2014/main" id="{0635F892-705E-401E-8194-024E8E8FD771}"/>
+                <a16:creationId xmlns:a16="http://schemas.microsoft.com/office/drawing/2014/main" id="{76631FAB-8308-4FAA-A581-32451F1E6665}"/>
               </a:ext>
             </a:extLst>
           </p:cNvPr>
@@ -24259,7 +24259,7 @@
           <p:cNvPr id="56" name="">
             <a:extLst xmlns:a="http://schemas.openxmlformats.org/drawingml/2006/main">
               <a:ext uri="{FF2B5EF4-FFF2-40B4-BE49-F238E27FC236}">
-                <a16:creationId xmlns:a16="http://schemas.microsoft.com/office/drawing/2014/main" id="{444AB15B-13AF-4084-AD95-20CED58A567A}"/>
+                <a16:creationId xmlns:a16="http://schemas.microsoft.com/office/drawing/2014/main" id="{AE0DF750-C965-4625-BAC5-FF6B20774897}"/>
               </a:ext>
             </a:extLst>
           </p:cNvPr>
@@ -24311,7 +24311,7 @@
           <p:cNvPr id="57" name="">
             <a:extLst xmlns:a="http://schemas.openxmlformats.org/drawingml/2006/main">
               <a:ext uri="{FF2B5EF4-FFF2-40B4-BE49-F238E27FC236}">
-                <a16:creationId xmlns:a16="http://schemas.microsoft.com/office/drawing/2014/main" id="{B76B2873-E82D-43AE-8C2D-9EAB8679E5BB}"/>
+                <a16:creationId xmlns:a16="http://schemas.microsoft.com/office/drawing/2014/main" id="{EB4ABE1A-DC15-4FB6-86AD-16E4D3145B24}"/>
               </a:ext>
             </a:extLst>
           </p:cNvPr>
@@ -24363,7 +24363,7 @@
           <p:cNvPr id="58" name="">
             <a:extLst xmlns:a="http://schemas.openxmlformats.org/drawingml/2006/main">
               <a:ext uri="{FF2B5EF4-FFF2-40B4-BE49-F238E27FC236}">
-                <a16:creationId xmlns:a16="http://schemas.microsoft.com/office/drawing/2014/main" id="{F1D31DDB-7CF2-44D8-B8E6-42E3423A59A4}"/>
+                <a16:creationId xmlns:a16="http://schemas.microsoft.com/office/drawing/2014/main" id="{DF585545-AC0F-4DF4-9BE4-26B23A22CB79}"/>
               </a:ext>
             </a:extLst>
           </p:cNvPr>
@@ -24415,7 +24415,7 @@
           <p:cNvPr id="59" name="">
             <a:extLst xmlns:a="http://schemas.openxmlformats.org/drawingml/2006/main">
               <a:ext uri="{FF2B5EF4-FFF2-40B4-BE49-F238E27FC236}">
-                <a16:creationId xmlns:a16="http://schemas.microsoft.com/office/drawing/2014/main" id="{525A6CB9-42B1-4BA0-AFD0-E9F3DF763963}"/>
+                <a16:creationId xmlns:a16="http://schemas.microsoft.com/office/drawing/2014/main" id="{A22277DE-535D-4677-A87A-3C298B5CBB90}"/>
               </a:ext>
             </a:extLst>
           </p:cNvPr>
@@ -24467,7 +24467,7 @@
           <p:cNvPr id="60" name="">
             <a:extLst xmlns:a="http://schemas.openxmlformats.org/drawingml/2006/main">
               <a:ext uri="{FF2B5EF4-FFF2-40B4-BE49-F238E27FC236}">
-                <a16:creationId xmlns:a16="http://schemas.microsoft.com/office/drawing/2014/main" id="{A79418B0-B18A-47D3-8B0C-9744505D61BD}"/>
+                <a16:creationId xmlns:a16="http://schemas.microsoft.com/office/drawing/2014/main" id="{DA5C0BFF-E628-4B4E-9FA1-E58E0C921751}"/>
               </a:ext>
             </a:extLst>
           </p:cNvPr>
@@ -24519,7 +24519,7 @@
           <p:cNvPr id="61" name="">
             <a:extLst xmlns:a="http://schemas.openxmlformats.org/drawingml/2006/main">
               <a:ext uri="{FF2B5EF4-FFF2-40B4-BE49-F238E27FC236}">
-                <a16:creationId xmlns:a16="http://schemas.microsoft.com/office/drawing/2014/main" id="{2AADD36B-63A3-47CF-B03C-1B510179C2E6}"/>
+                <a16:creationId xmlns:a16="http://schemas.microsoft.com/office/drawing/2014/main" id="{A9CBB37F-3B50-48BD-9A75-45EA4CB69C7E}"/>
               </a:ext>
             </a:extLst>
           </p:cNvPr>
@@ -24571,7 +24571,7 @@
           <p:cNvPr id="62" name="">
             <a:extLst xmlns:a="http://schemas.openxmlformats.org/drawingml/2006/main">
               <a:ext uri="{FF2B5EF4-FFF2-40B4-BE49-F238E27FC236}">
-                <a16:creationId xmlns:a16="http://schemas.microsoft.com/office/drawing/2014/main" id="{67F5A2CA-91C7-4863-A92D-4DC8CB45C8E8}"/>
+                <a16:creationId xmlns:a16="http://schemas.microsoft.com/office/drawing/2014/main" id="{22B87F5D-F7D5-4677-B10B-22F6402906D4}"/>
               </a:ext>
             </a:extLst>
           </p:cNvPr>
@@ -24602,7 +24602,7 @@
           <p:cNvPr id="63" name="">
             <a:extLst xmlns:a="http://schemas.openxmlformats.org/drawingml/2006/main">
               <a:ext uri="{FF2B5EF4-FFF2-40B4-BE49-F238E27FC236}">
-                <a16:creationId xmlns:a16="http://schemas.microsoft.com/office/drawing/2014/main" id="{99608549-E5AA-43AD-8939-F70E93D15D98}"/>
+                <a16:creationId xmlns:a16="http://schemas.microsoft.com/office/drawing/2014/main" id="{3969C0FC-F5E9-4A7C-9AA1-9C19B4A1AAEA}"/>
               </a:ext>
             </a:extLst>
           </p:cNvPr>
@@ -24633,7 +24633,7 @@
           <p:cNvPr id="64" name="">
             <a:extLst xmlns:a="http://schemas.openxmlformats.org/drawingml/2006/main">
               <a:ext uri="{FF2B5EF4-FFF2-40B4-BE49-F238E27FC236}">
-                <a16:creationId xmlns:a16="http://schemas.microsoft.com/office/drawing/2014/main" id="{57BDAEBC-E60C-461D-9A35-594C33A7C627}"/>
+                <a16:creationId xmlns:a16="http://schemas.microsoft.com/office/drawing/2014/main" id="{D3454BC0-BB96-469C-BBAD-62A5FBDE77CE}"/>
               </a:ext>
             </a:extLst>
           </p:cNvPr>
@@ -24685,7 +24685,7 @@
           <p:cNvPr id="65" name="">
             <a:extLst xmlns:a="http://schemas.openxmlformats.org/drawingml/2006/main">
               <a:ext uri="{FF2B5EF4-FFF2-40B4-BE49-F238E27FC236}">
-                <a16:creationId xmlns:a16="http://schemas.microsoft.com/office/drawing/2014/main" id="{11ED6EF2-F5B8-459E-8568-6A1BB4EF365C}"/>
+                <a16:creationId xmlns:a16="http://schemas.microsoft.com/office/drawing/2014/main" id="{C200A68C-7071-43F1-ABAF-BDB6CE8945F1}"/>
               </a:ext>
             </a:extLst>
           </p:cNvPr>
@@ -24737,7 +24737,7 @@
           <p:cNvPr id="66" name="">
             <a:extLst xmlns:a="http://schemas.openxmlformats.org/drawingml/2006/main">
               <a:ext uri="{FF2B5EF4-FFF2-40B4-BE49-F238E27FC236}">
-                <a16:creationId xmlns:a16="http://schemas.microsoft.com/office/drawing/2014/main" id="{1F475C7A-9545-43A0-B793-B3C992815F5B}"/>
+                <a16:creationId xmlns:a16="http://schemas.microsoft.com/office/drawing/2014/main" id="{A3FCF35D-5EE4-4BFB-8A6C-1CA9A6508153}"/>
               </a:ext>
             </a:extLst>
           </p:cNvPr>
@@ -24789,7 +24789,7 @@
           <p:cNvPr id="67" name="">
             <a:extLst xmlns:a="http://schemas.openxmlformats.org/drawingml/2006/main">
               <a:ext uri="{FF2B5EF4-FFF2-40B4-BE49-F238E27FC236}">
-                <a16:creationId xmlns:a16="http://schemas.microsoft.com/office/drawing/2014/main" id="{E8BF7B8D-A1D8-4B2F-9962-D8BFCBE4234A}"/>
+                <a16:creationId xmlns:a16="http://schemas.microsoft.com/office/drawing/2014/main" id="{6D5D23F5-1656-47E5-A3D1-2DB83D2C2380}"/>
               </a:ext>
             </a:extLst>
           </p:cNvPr>
@@ -24841,7 +24841,7 @@
           <p:cNvPr id="68" name="">
             <a:extLst xmlns:a="http://schemas.openxmlformats.org/drawingml/2006/main">
               <a:ext uri="{FF2B5EF4-FFF2-40B4-BE49-F238E27FC236}">
-                <a16:creationId xmlns:a16="http://schemas.microsoft.com/office/drawing/2014/main" id="{073CD168-D3CD-4F89-A11F-1B9D145D5AD6}"/>
+                <a16:creationId xmlns:a16="http://schemas.microsoft.com/office/drawing/2014/main" id="{9B743B8D-DFAE-48FB-A6E7-5DDC93F419F7}"/>
               </a:ext>
             </a:extLst>
           </p:cNvPr>
@@ -24893,7 +24893,7 @@
           <p:cNvPr id="69" name="">
             <a:extLst xmlns:a="http://schemas.openxmlformats.org/drawingml/2006/main">
               <a:ext uri="{FF2B5EF4-FFF2-40B4-BE49-F238E27FC236}">
-                <a16:creationId xmlns:a16="http://schemas.microsoft.com/office/drawing/2014/main" id="{60033AF7-7032-46E3-B194-1F4739F66AAF}"/>
+                <a16:creationId xmlns:a16="http://schemas.microsoft.com/office/drawing/2014/main" id="{4C109972-0C0F-48D0-ACB5-CE8B285C1728}"/>
               </a:ext>
             </a:extLst>
           </p:cNvPr>
@@ -24945,7 +24945,7 @@
           <p:cNvPr id="70" name="">
             <a:extLst xmlns:a="http://schemas.openxmlformats.org/drawingml/2006/main">
               <a:ext uri="{FF2B5EF4-FFF2-40B4-BE49-F238E27FC236}">
-                <a16:creationId xmlns:a16="http://schemas.microsoft.com/office/drawing/2014/main" id="{831FD640-7A82-432B-B91E-357DB6C9C237}"/>
+                <a16:creationId xmlns:a16="http://schemas.microsoft.com/office/drawing/2014/main" id="{53DF229B-EA1E-4FAB-AA4D-04BC32270B09}"/>
               </a:ext>
             </a:extLst>
           </p:cNvPr>
@@ -24997,7 +24997,7 @@
           <p:cNvPr id="71" name="">
             <a:extLst xmlns:a="http://schemas.openxmlformats.org/drawingml/2006/main">
               <a:ext uri="{FF2B5EF4-FFF2-40B4-BE49-F238E27FC236}">
-                <a16:creationId xmlns:a16="http://schemas.microsoft.com/office/drawing/2014/main" id="{CB0E7371-B290-4362-8F87-FC19ADAEB04A}"/>
+                <a16:creationId xmlns:a16="http://schemas.microsoft.com/office/drawing/2014/main" id="{3CB2455D-822E-4FF2-B7B3-8FEBF3966D41}"/>
               </a:ext>
             </a:extLst>
           </p:cNvPr>
@@ -25028,7 +25028,7 @@
           <p:cNvPr id="72" name="">
             <a:extLst xmlns:a="http://schemas.openxmlformats.org/drawingml/2006/main">
               <a:ext uri="{FF2B5EF4-FFF2-40B4-BE49-F238E27FC236}">
-                <a16:creationId xmlns:a16="http://schemas.microsoft.com/office/drawing/2014/main" id="{077CD6D3-30E8-4C56-9745-FF116A2CBD06}"/>
+                <a16:creationId xmlns:a16="http://schemas.microsoft.com/office/drawing/2014/main" id="{C133441F-32EA-4CD8-B5D8-F6F9F5CE97F5}"/>
               </a:ext>
             </a:extLst>
           </p:cNvPr>
@@ -25080,7 +25080,7 @@
           <p:cNvPr id="73" name="">
             <a:extLst xmlns:a="http://schemas.openxmlformats.org/drawingml/2006/main">
               <a:ext uri="{FF2B5EF4-FFF2-40B4-BE49-F238E27FC236}">
-                <a16:creationId xmlns:a16="http://schemas.microsoft.com/office/drawing/2014/main" id="{F0B345B7-E95D-401E-A2E2-54EE3EEF2D98}"/>
+                <a16:creationId xmlns:a16="http://schemas.microsoft.com/office/drawing/2014/main" id="{2675D4E5-165C-4F32-BD37-F2A74D8416E6}"/>
               </a:ext>
             </a:extLst>
           </p:cNvPr>
@@ -25132,7 +25132,7 @@
           <p:cNvPr id="74" name="">
             <a:extLst xmlns:a="http://schemas.openxmlformats.org/drawingml/2006/main">
               <a:ext uri="{FF2B5EF4-FFF2-40B4-BE49-F238E27FC236}">
-                <a16:creationId xmlns:a16="http://schemas.microsoft.com/office/drawing/2014/main" id="{72E0234F-CE89-44C7-9A80-B005841DEB82}"/>
+                <a16:creationId xmlns:a16="http://schemas.microsoft.com/office/drawing/2014/main" id="{BA21A749-BDA8-4E8F-9D46-783D63F53EEE}"/>
               </a:ext>
             </a:extLst>
           </p:cNvPr>
@@ -25184,7 +25184,7 @@
           <p:cNvPr id="75" name="">
             <a:extLst xmlns:a="http://schemas.openxmlformats.org/drawingml/2006/main">
               <a:ext uri="{FF2B5EF4-FFF2-40B4-BE49-F238E27FC236}">
-                <a16:creationId xmlns:a16="http://schemas.microsoft.com/office/drawing/2014/main" id="{607F2921-E105-47FE-928A-C2DD2FBC2FBB}"/>
+                <a16:creationId xmlns:a16="http://schemas.microsoft.com/office/drawing/2014/main" id="{3CF72B68-3AD9-47DB-A1EE-1AECC13028C6}"/>
               </a:ext>
             </a:extLst>
           </p:cNvPr>
@@ -25236,7 +25236,7 @@
           <p:cNvPr id="76" name="">
             <a:extLst xmlns:a="http://schemas.openxmlformats.org/drawingml/2006/main">
               <a:ext uri="{FF2B5EF4-FFF2-40B4-BE49-F238E27FC236}">
-                <a16:creationId xmlns:a16="http://schemas.microsoft.com/office/drawing/2014/main" id="{F82C7C35-A1E1-477E-AB92-EA6062393874}"/>
+                <a16:creationId xmlns:a16="http://schemas.microsoft.com/office/drawing/2014/main" id="{ED54A43E-C239-4096-8FC5-528CA2862D7A}"/>
               </a:ext>
             </a:extLst>
           </p:cNvPr>
@@ -25288,7 +25288,7 @@
           <p:cNvPr id="77" name="">
             <a:extLst xmlns:a="http://schemas.openxmlformats.org/drawingml/2006/main">
               <a:ext uri="{FF2B5EF4-FFF2-40B4-BE49-F238E27FC236}">
-                <a16:creationId xmlns:a16="http://schemas.microsoft.com/office/drawing/2014/main" id="{B4BC733F-F624-4BBA-BC16-59CAC2FE9DA0}"/>
+                <a16:creationId xmlns:a16="http://schemas.microsoft.com/office/drawing/2014/main" id="{35E75461-1B4D-4DD3-8D21-A842408BC10C}"/>
               </a:ext>
             </a:extLst>
           </p:cNvPr>
@@ -25340,7 +25340,7 @@
           <p:cNvPr id="78" name="">
             <a:extLst xmlns:a="http://schemas.openxmlformats.org/drawingml/2006/main">
               <a:ext uri="{FF2B5EF4-FFF2-40B4-BE49-F238E27FC236}">
-                <a16:creationId xmlns:a16="http://schemas.microsoft.com/office/drawing/2014/main" id="{F0EE4D6A-77C7-4720-B63D-9DFA154435E5}"/>
+                <a16:creationId xmlns:a16="http://schemas.microsoft.com/office/drawing/2014/main" id="{4C86022E-E765-43F9-A97C-9717FCA16310}"/>
               </a:ext>
             </a:extLst>
           </p:cNvPr>
@@ -25392,7 +25392,7 @@
           <p:cNvPr id="79" name="">
             <a:extLst xmlns:a="http://schemas.openxmlformats.org/drawingml/2006/main">
               <a:ext uri="{FF2B5EF4-FFF2-40B4-BE49-F238E27FC236}">
-                <a16:creationId xmlns:a16="http://schemas.microsoft.com/office/drawing/2014/main" id="{25E2DFA1-5C17-4EA2-9CE7-32CACB6B2338}"/>
+                <a16:creationId xmlns:a16="http://schemas.microsoft.com/office/drawing/2014/main" id="{FD32CD5C-98A1-43C2-909F-300B62704934}"/>
               </a:ext>
             </a:extLst>
           </p:cNvPr>
@@ -25423,7 +25423,7 @@
           <p:cNvPr id="80" name="">
             <a:extLst xmlns:a="http://schemas.openxmlformats.org/drawingml/2006/main">
               <a:ext uri="{FF2B5EF4-FFF2-40B4-BE49-F238E27FC236}">
-                <a16:creationId xmlns:a16="http://schemas.microsoft.com/office/drawing/2014/main" id="{97CC8936-F619-4A8D-8CDB-B43B30C9762D}"/>
+                <a16:creationId xmlns:a16="http://schemas.microsoft.com/office/drawing/2014/main" id="{59F56BD8-CC3B-4FAB-997B-051909414361}"/>
               </a:ext>
             </a:extLst>
           </p:cNvPr>
@@ -25454,7 +25454,7 @@
           <p:cNvPr id="81" name="">
             <a:extLst xmlns:a="http://schemas.openxmlformats.org/drawingml/2006/main">
               <a:ext uri="{FF2B5EF4-FFF2-40B4-BE49-F238E27FC236}">
-                <a16:creationId xmlns:a16="http://schemas.microsoft.com/office/drawing/2014/main" id="{6460A8F7-EB62-4A97-99CF-E06AED047609}"/>
+                <a16:creationId xmlns:a16="http://schemas.microsoft.com/office/drawing/2014/main" id="{ACFFDABD-2CCC-47EB-A192-215C4C1DF096}"/>
               </a:ext>
             </a:extLst>
           </p:cNvPr>
@@ -25506,7 +25506,7 @@
           <p:cNvPr id="82" name="">
             <a:extLst xmlns:a="http://schemas.openxmlformats.org/drawingml/2006/main">
               <a:ext uri="{FF2B5EF4-FFF2-40B4-BE49-F238E27FC236}">
-                <a16:creationId xmlns:a16="http://schemas.microsoft.com/office/drawing/2014/main" id="{C7F8D26F-766D-4407-B032-429563541EA9}"/>
+                <a16:creationId xmlns:a16="http://schemas.microsoft.com/office/drawing/2014/main" id="{D644D56E-5DDE-4E16-B331-BE3827FD3E63}"/>
               </a:ext>
             </a:extLst>
           </p:cNvPr>
@@ -25558,7 +25558,7 @@
           <p:cNvPr id="83" name="">
             <a:extLst xmlns:a="http://schemas.openxmlformats.org/drawingml/2006/main">
               <a:ext uri="{FF2B5EF4-FFF2-40B4-BE49-F238E27FC236}">
-                <a16:creationId xmlns:a16="http://schemas.microsoft.com/office/drawing/2014/main" id="{8275C5C2-30DA-484D-901F-944FBACBD66C}"/>
+                <a16:creationId xmlns:a16="http://schemas.microsoft.com/office/drawing/2014/main" id="{0ED4EF3F-FA5D-4249-9451-AF6D96A1DC07}"/>
               </a:ext>
             </a:extLst>
           </p:cNvPr>
@@ -25610,7 +25610,7 @@
           <p:cNvPr id="84" name="">
             <a:extLst xmlns:a="http://schemas.openxmlformats.org/drawingml/2006/main">
               <a:ext uri="{FF2B5EF4-FFF2-40B4-BE49-F238E27FC236}">
-                <a16:creationId xmlns:a16="http://schemas.microsoft.com/office/drawing/2014/main" id="{C712B907-635B-41BF-8C46-94E5CA7FE795}"/>
+                <a16:creationId xmlns:a16="http://schemas.microsoft.com/office/drawing/2014/main" id="{85F04C97-B57B-4E5D-81A2-E7864F00B428}"/>
               </a:ext>
             </a:extLst>
           </p:cNvPr>
@@ -25662,7 +25662,7 @@
           <p:cNvPr id="85" name="">
             <a:extLst xmlns:a="http://schemas.openxmlformats.org/drawingml/2006/main">
               <a:ext uri="{FF2B5EF4-FFF2-40B4-BE49-F238E27FC236}">
-                <a16:creationId xmlns:a16="http://schemas.microsoft.com/office/drawing/2014/main" id="{677646E2-2EAF-4860-BAB8-877AAD5601AC}"/>
+                <a16:creationId xmlns:a16="http://schemas.microsoft.com/office/drawing/2014/main" id="{EEC6C6A1-E87A-4820-83EA-FF0767C05A3D}"/>
               </a:ext>
             </a:extLst>
           </p:cNvPr>
@@ -25714,7 +25714,7 @@
           <p:cNvPr id="86" name="">
             <a:extLst xmlns:a="http://schemas.openxmlformats.org/drawingml/2006/main">
               <a:ext uri="{FF2B5EF4-FFF2-40B4-BE49-F238E27FC236}">
-                <a16:creationId xmlns:a16="http://schemas.microsoft.com/office/drawing/2014/main" id="{CFAD9BAB-7A7A-4DCB-834C-4C2EDDE25F85}"/>
+                <a16:creationId xmlns:a16="http://schemas.microsoft.com/office/drawing/2014/main" id="{1670DE36-FE7B-4B7C-9032-B82DBAA19C41}"/>
               </a:ext>
             </a:extLst>
           </p:cNvPr>
@@ -25766,7 +25766,7 @@
           <p:cNvPr id="87" name="">
             <a:extLst xmlns:a="http://schemas.openxmlformats.org/drawingml/2006/main">
               <a:ext uri="{FF2B5EF4-FFF2-40B4-BE49-F238E27FC236}">
-                <a16:creationId xmlns:a16="http://schemas.microsoft.com/office/drawing/2014/main" id="{4414F966-5EE6-4EE3-AC18-72AC8FCBE80B}"/>
+                <a16:creationId xmlns:a16="http://schemas.microsoft.com/office/drawing/2014/main" id="{5C24F6D4-E1EA-4C79-AEB5-7559DE5353F3}"/>
               </a:ext>
             </a:extLst>
           </p:cNvPr>
@@ -25818,7 +25818,7 @@
           <p:cNvPr id="88" name="">
             <a:extLst xmlns:a="http://schemas.openxmlformats.org/drawingml/2006/main">
               <a:ext uri="{FF2B5EF4-FFF2-40B4-BE49-F238E27FC236}">
-                <a16:creationId xmlns:a16="http://schemas.microsoft.com/office/drawing/2014/main" id="{A28D0A13-B7C8-4562-9B3A-4AE23AFA4D9E}"/>
+                <a16:creationId xmlns:a16="http://schemas.microsoft.com/office/drawing/2014/main" id="{B859A92D-5A9F-4966-843A-9814550CD221}"/>
               </a:ext>
             </a:extLst>
           </p:cNvPr>
@@ -25849,7 +25849,7 @@
           <p:cNvPr id="89" name="">
             <a:extLst xmlns:a="http://schemas.openxmlformats.org/drawingml/2006/main">
               <a:ext uri="{FF2B5EF4-FFF2-40B4-BE49-F238E27FC236}">
-                <a16:creationId xmlns:a16="http://schemas.microsoft.com/office/drawing/2014/main" id="{E7E5C6F8-1AB8-4D50-9005-9BD9FB550B23}"/>
+                <a16:creationId xmlns:a16="http://schemas.microsoft.com/office/drawing/2014/main" id="{F63D03D6-4BF6-4C61-91CE-37A7DFE4EE2E}"/>
               </a:ext>
             </a:extLst>
           </p:cNvPr>
@@ -25901,7 +25901,7 @@
           <p:cNvPr id="90" name="">
             <a:extLst xmlns:a="http://schemas.openxmlformats.org/drawingml/2006/main">
               <a:ext uri="{FF2B5EF4-FFF2-40B4-BE49-F238E27FC236}">
-                <a16:creationId xmlns:a16="http://schemas.microsoft.com/office/drawing/2014/main" id="{576DA2CA-C431-4D4C-AEF7-BA18BAF3E82A}"/>
+                <a16:creationId xmlns:a16="http://schemas.microsoft.com/office/drawing/2014/main" id="{27731D56-A9D9-428F-A6BC-8A144422B2A9}"/>
               </a:ext>
             </a:extLst>
           </p:cNvPr>
@@ -25953,7 +25953,7 @@
           <p:cNvPr id="91" name="">
             <a:extLst xmlns:a="http://schemas.openxmlformats.org/drawingml/2006/main">
               <a:ext uri="{FF2B5EF4-FFF2-40B4-BE49-F238E27FC236}">
-                <a16:creationId xmlns:a16="http://schemas.microsoft.com/office/drawing/2014/main" id="{D5BCD247-E130-4F83-9325-41D0D1B844EF}"/>
+                <a16:creationId xmlns:a16="http://schemas.microsoft.com/office/drawing/2014/main" id="{A6552D0B-037C-48D9-88D2-B4E942577A17}"/>
               </a:ext>
             </a:extLst>
           </p:cNvPr>
@@ -26005,7 +26005,7 @@
           <p:cNvPr id="92" name="">
             <a:extLst xmlns:a="http://schemas.openxmlformats.org/drawingml/2006/main">
               <a:ext uri="{FF2B5EF4-FFF2-40B4-BE49-F238E27FC236}">
-                <a16:creationId xmlns:a16="http://schemas.microsoft.com/office/drawing/2014/main" id="{6BAA59D9-78C5-40E2-8D1F-2C414E9FD624}"/>
+                <a16:creationId xmlns:a16="http://schemas.microsoft.com/office/drawing/2014/main" id="{284FB9A7-D8D8-4536-B2C1-99C975A95097}"/>
               </a:ext>
             </a:extLst>
           </p:cNvPr>
@@ -26057,7 +26057,7 @@
           <p:cNvPr id="93" name="">
             <a:extLst xmlns:a="http://schemas.openxmlformats.org/drawingml/2006/main">
               <a:ext uri="{FF2B5EF4-FFF2-40B4-BE49-F238E27FC236}">
-                <a16:creationId xmlns:a16="http://schemas.microsoft.com/office/drawing/2014/main" id="{B0E769E6-0D89-48F3-91FD-E6B055E40E8D}"/>
+                <a16:creationId xmlns:a16="http://schemas.microsoft.com/office/drawing/2014/main" id="{AC0E0C29-8257-447A-9D67-525E8BE9FC4C}"/>
               </a:ext>
             </a:extLst>
           </p:cNvPr>
@@ -26109,7 +26109,7 @@
           <p:cNvPr id="94" name="">
             <a:extLst xmlns:a="http://schemas.openxmlformats.org/drawingml/2006/main">
               <a:ext uri="{FF2B5EF4-FFF2-40B4-BE49-F238E27FC236}">
-                <a16:creationId xmlns:a16="http://schemas.microsoft.com/office/drawing/2014/main" id="{0F16A2EE-74E5-46F3-BBA9-40EC34E63A67}"/>
+                <a16:creationId xmlns:a16="http://schemas.microsoft.com/office/drawing/2014/main" id="{EEE3B7B2-FF73-42BA-B505-93B879C8A825}"/>
               </a:ext>
             </a:extLst>
           </p:cNvPr>
@@ -26161,7 +26161,7 @@
           <p:cNvPr id="95" name="">
             <a:extLst xmlns:a="http://schemas.openxmlformats.org/drawingml/2006/main">
               <a:ext uri="{FF2B5EF4-FFF2-40B4-BE49-F238E27FC236}">
-                <a16:creationId xmlns:a16="http://schemas.microsoft.com/office/drawing/2014/main" id="{AFB531CD-BBBE-4EB1-B44A-03AD0F44255D}"/>
+                <a16:creationId xmlns:a16="http://schemas.microsoft.com/office/drawing/2014/main" id="{140FA60D-8F78-4D97-8ED8-6DD2C52798DB}"/>
               </a:ext>
             </a:extLst>
           </p:cNvPr>
@@ -26213,7 +26213,7 @@
           <p:cNvPr id="96" name="">
             <a:extLst xmlns:a="http://schemas.openxmlformats.org/drawingml/2006/main">
               <a:ext uri="{FF2B5EF4-FFF2-40B4-BE49-F238E27FC236}">
-                <a16:creationId xmlns:a16="http://schemas.microsoft.com/office/drawing/2014/main" id="{DC270740-A0C2-479E-A17B-EB436FEC6AC1}"/>
+                <a16:creationId xmlns:a16="http://schemas.microsoft.com/office/drawing/2014/main" id="{6A322FBC-2A0D-4DF8-8D21-E6531ACBD700}"/>
               </a:ext>
             </a:extLst>
           </p:cNvPr>
@@ -26244,7 +26244,7 @@
           <p:cNvPr id="97" name="">
             <a:extLst xmlns:a="http://schemas.openxmlformats.org/drawingml/2006/main">
               <a:ext uri="{FF2B5EF4-FFF2-40B4-BE49-F238E27FC236}">
-                <a16:creationId xmlns:a16="http://schemas.microsoft.com/office/drawing/2014/main" id="{9EEFBBAD-287E-429D-8207-B492734C61B5}"/>
+                <a16:creationId xmlns:a16="http://schemas.microsoft.com/office/drawing/2014/main" id="{C8DCD00E-6BA7-41D9-B998-B39B7B767837}"/>
               </a:ext>
             </a:extLst>
           </p:cNvPr>
@@ -26275,7 +26275,7 @@
           <p:cNvPr id="98" name="">
             <a:extLst xmlns:a="http://schemas.openxmlformats.org/drawingml/2006/main">
               <a:ext uri="{FF2B5EF4-FFF2-40B4-BE49-F238E27FC236}">
-                <a16:creationId xmlns:a16="http://schemas.microsoft.com/office/drawing/2014/main" id="{AA8DDD55-DEF7-4839-9CCB-045673336E0D}"/>
+                <a16:creationId xmlns:a16="http://schemas.microsoft.com/office/drawing/2014/main" id="{3110C32D-0565-4E2B-A02E-5BFAF258EC8C}"/>
               </a:ext>
             </a:extLst>
           </p:cNvPr>
@@ -26327,7 +26327,7 @@
           <p:cNvPr id="99" name="">
             <a:extLst xmlns:a="http://schemas.openxmlformats.org/drawingml/2006/main">
               <a:ext uri="{FF2B5EF4-FFF2-40B4-BE49-F238E27FC236}">
-                <a16:creationId xmlns:a16="http://schemas.microsoft.com/office/drawing/2014/main" id="{02B1CB2F-BB73-471B-BBD2-397F1FC32E06}"/>
+                <a16:creationId xmlns:a16="http://schemas.microsoft.com/office/drawing/2014/main" id="{AB048CB7-F41A-4506-80A0-58693E35421C}"/>
               </a:ext>
             </a:extLst>
           </p:cNvPr>
@@ -26379,7 +26379,7 @@
           <p:cNvPr id="100" name="">
             <a:extLst xmlns:a="http://schemas.openxmlformats.org/drawingml/2006/main">
               <a:ext uri="{FF2B5EF4-FFF2-40B4-BE49-F238E27FC236}">
-                <a16:creationId xmlns:a16="http://schemas.microsoft.com/office/drawing/2014/main" id="{74B87557-C869-4C6F-8EB6-EC86D1463D21}"/>
+                <a16:creationId xmlns:a16="http://schemas.microsoft.com/office/drawing/2014/main" id="{A7D112A2-303C-467A-BACD-9D41A4A7F6F1}"/>
               </a:ext>
             </a:extLst>
           </p:cNvPr>
@@ -26431,7 +26431,7 @@
           <p:cNvPr id="101" name="">
             <a:extLst xmlns:a="http://schemas.openxmlformats.org/drawingml/2006/main">
               <a:ext uri="{FF2B5EF4-FFF2-40B4-BE49-F238E27FC236}">
-                <a16:creationId xmlns:a16="http://schemas.microsoft.com/office/drawing/2014/main" id="{62DC0FE7-D3B8-4BF2-901B-1CE50235EBB8}"/>
+                <a16:creationId xmlns:a16="http://schemas.microsoft.com/office/drawing/2014/main" id="{67094F17-4A9C-4F79-8561-D33BC8077293}"/>
               </a:ext>
             </a:extLst>
           </p:cNvPr>
@@ -26483,7 +26483,7 @@
           <p:cNvPr id="102" name="">
             <a:extLst xmlns:a="http://schemas.openxmlformats.org/drawingml/2006/main">
               <a:ext uri="{FF2B5EF4-FFF2-40B4-BE49-F238E27FC236}">
-                <a16:creationId xmlns:a16="http://schemas.microsoft.com/office/drawing/2014/main" id="{D89F3CF4-C3B4-4732-9368-8351A8474DAF}"/>
+                <a16:creationId xmlns:a16="http://schemas.microsoft.com/office/drawing/2014/main" id="{BD85AC49-E6D0-4D0B-9CFD-25D8EC6E3404}"/>
               </a:ext>
             </a:extLst>
           </p:cNvPr>
@@ -26535,7 +26535,7 @@
           <p:cNvPr id="103" name="">
             <a:extLst xmlns:a="http://schemas.openxmlformats.org/drawingml/2006/main">
               <a:ext uri="{FF2B5EF4-FFF2-40B4-BE49-F238E27FC236}">
-                <a16:creationId xmlns:a16="http://schemas.microsoft.com/office/drawing/2014/main" id="{40D4A40E-C0C9-4DA9-A2E2-B9A0A64986A0}"/>
+                <a16:creationId xmlns:a16="http://schemas.microsoft.com/office/drawing/2014/main" id="{8F243E1D-8A96-4F11-B7B9-38F2F1FF7A23}"/>
               </a:ext>
             </a:extLst>
           </p:cNvPr>
@@ -26587,7 +26587,7 @@
           <p:cNvPr id="104" name="">
             <a:extLst xmlns:a="http://schemas.openxmlformats.org/drawingml/2006/main">
               <a:ext uri="{FF2B5EF4-FFF2-40B4-BE49-F238E27FC236}">
-                <a16:creationId xmlns:a16="http://schemas.microsoft.com/office/drawing/2014/main" id="{E7B9BE12-FC32-4B0F-AA71-4407CED20945}"/>
+                <a16:creationId xmlns:a16="http://schemas.microsoft.com/office/drawing/2014/main" id="{E23FEF1E-23FF-4BC2-BA50-C9438E67D12F}"/>
               </a:ext>
             </a:extLst>
           </p:cNvPr>
@@ -26639,7 +26639,7 @@
           <p:cNvPr id="105" name="">
             <a:extLst xmlns:a="http://schemas.openxmlformats.org/drawingml/2006/main">
               <a:ext uri="{FF2B5EF4-FFF2-40B4-BE49-F238E27FC236}">
-                <a16:creationId xmlns:a16="http://schemas.microsoft.com/office/drawing/2014/main" id="{14E375A7-A86F-40A3-AE46-AD220AC80F3A}"/>
+                <a16:creationId xmlns:a16="http://schemas.microsoft.com/office/drawing/2014/main" id="{0E2C3B18-D2ED-4C1E-AA7A-DF3A32712A0C}"/>
               </a:ext>
             </a:extLst>
           </p:cNvPr>
@@ -26670,7 +26670,7 @@
           <p:cNvPr id="106" name="">
             <a:extLst xmlns:a="http://schemas.openxmlformats.org/drawingml/2006/main">
               <a:ext uri="{FF2B5EF4-FFF2-40B4-BE49-F238E27FC236}">
-                <a16:creationId xmlns:a16="http://schemas.microsoft.com/office/drawing/2014/main" id="{F0AB7944-AB6A-4E81-9AC1-D064CFBDF0D5}"/>
+                <a16:creationId xmlns:a16="http://schemas.microsoft.com/office/drawing/2014/main" id="{FE428BB6-1E2D-423C-9ECC-BC60DB52D2D1}"/>
               </a:ext>
             </a:extLst>
           </p:cNvPr>
@@ -26722,7 +26722,7 @@
           <p:cNvPr id="107" name="">
             <a:extLst xmlns:a="http://schemas.openxmlformats.org/drawingml/2006/main">
               <a:ext uri="{FF2B5EF4-FFF2-40B4-BE49-F238E27FC236}">
-                <a16:creationId xmlns:a16="http://schemas.microsoft.com/office/drawing/2014/main" id="{D2A24BE4-3501-479F-A31C-6C1CA050C1B1}"/>
+                <a16:creationId xmlns:a16="http://schemas.microsoft.com/office/drawing/2014/main" id="{521D3DC4-23CD-4D5D-8242-5D15B3D3D9FF}"/>
               </a:ext>
             </a:extLst>
           </p:cNvPr>
@@ -26774,7 +26774,7 @@
           <p:cNvPr id="108" name="">
             <a:extLst xmlns:a="http://schemas.openxmlformats.org/drawingml/2006/main">
               <a:ext uri="{FF2B5EF4-FFF2-40B4-BE49-F238E27FC236}">
-                <a16:creationId xmlns:a16="http://schemas.microsoft.com/office/drawing/2014/main" id="{8CDC2FD8-A058-4734-9810-37E048883B30}"/>
+                <a16:creationId xmlns:a16="http://schemas.microsoft.com/office/drawing/2014/main" id="{E050518E-460B-4750-8B37-55BE9507E793}"/>
               </a:ext>
             </a:extLst>
           </p:cNvPr>
@@ -26826,7 +26826,7 @@
           <p:cNvPr id="109" name="">
             <a:extLst xmlns:a="http://schemas.openxmlformats.org/drawingml/2006/main">
               <a:ext uri="{FF2B5EF4-FFF2-40B4-BE49-F238E27FC236}">
-                <a16:creationId xmlns:a16="http://schemas.microsoft.com/office/drawing/2014/main" id="{06470DF2-4EE9-4949-BE5B-AA01DCA70DDA}"/>
+                <a16:creationId xmlns:a16="http://schemas.microsoft.com/office/drawing/2014/main" id="{D6D631C3-8F98-43E3-92D4-118FAC52C977}"/>
               </a:ext>
             </a:extLst>
           </p:cNvPr>
@@ -26878,7 +26878,7 @@
           <p:cNvPr id="110" name="">
             <a:extLst xmlns:a="http://schemas.openxmlformats.org/drawingml/2006/main">
               <a:ext uri="{FF2B5EF4-FFF2-40B4-BE49-F238E27FC236}">
-                <a16:creationId xmlns:a16="http://schemas.microsoft.com/office/drawing/2014/main" id="{F68824BC-629E-4298-8FCB-045E3D625695}"/>
+                <a16:creationId xmlns:a16="http://schemas.microsoft.com/office/drawing/2014/main" id="{0AA2A1C2-07F0-4785-9668-8293F7270DFE}"/>
               </a:ext>
             </a:extLst>
           </p:cNvPr>
@@ -26930,7 +26930,7 @@
           <p:cNvPr id="111" name="">
             <a:extLst xmlns:a="http://schemas.openxmlformats.org/drawingml/2006/main">
               <a:ext uri="{FF2B5EF4-FFF2-40B4-BE49-F238E27FC236}">
-                <a16:creationId xmlns:a16="http://schemas.microsoft.com/office/drawing/2014/main" id="{A79B3C4E-49A6-4623-BF34-4054332A5C9B}"/>
+                <a16:creationId xmlns:a16="http://schemas.microsoft.com/office/drawing/2014/main" id="{8D69CB97-D183-43B9-86F8-04B508FAA513}"/>
               </a:ext>
             </a:extLst>
           </p:cNvPr>
@@ -26982,7 +26982,7 @@
           <p:cNvPr id="112" name="">
             <a:extLst xmlns:a="http://schemas.openxmlformats.org/drawingml/2006/main">
               <a:ext uri="{FF2B5EF4-FFF2-40B4-BE49-F238E27FC236}">
-                <a16:creationId xmlns:a16="http://schemas.microsoft.com/office/drawing/2014/main" id="{F1C5DBBB-A22F-4FC3-909A-7F2A45E61428}"/>
+                <a16:creationId xmlns:a16="http://schemas.microsoft.com/office/drawing/2014/main" id="{A4865216-18D1-4EB3-A9B9-2EF37AFAC673}"/>
               </a:ext>
             </a:extLst>
           </p:cNvPr>
@@ -27034,7 +27034,7 @@
           <p:cNvPr id="113" name="">
             <a:extLst xmlns:a="http://schemas.openxmlformats.org/drawingml/2006/main">
               <a:ext uri="{FF2B5EF4-FFF2-40B4-BE49-F238E27FC236}">
-                <a16:creationId xmlns:a16="http://schemas.microsoft.com/office/drawing/2014/main" id="{68CB395F-B384-46F0-98CE-151D358A56F5}"/>
+                <a16:creationId xmlns:a16="http://schemas.microsoft.com/office/drawing/2014/main" id="{6D98CAD6-D972-498B-8CB6-135EF454AE2C}"/>
               </a:ext>
             </a:extLst>
           </p:cNvPr>
@@ -27065,7 +27065,7 @@
           <p:cNvPr id="114" name="">
             <a:extLst xmlns:a="http://schemas.openxmlformats.org/drawingml/2006/main">
               <a:ext uri="{FF2B5EF4-FFF2-40B4-BE49-F238E27FC236}">
-                <a16:creationId xmlns:a16="http://schemas.microsoft.com/office/drawing/2014/main" id="{DA04BFCF-8A2B-4681-8C3B-ECFA630A2A7F}"/>
+                <a16:creationId xmlns:a16="http://schemas.microsoft.com/office/drawing/2014/main" id="{B4B0406A-8ABB-4BFE-B20C-0D1AF6928788}"/>
               </a:ext>
             </a:extLst>
           </p:cNvPr>
@@ -27096,7 +27096,7 @@
           <p:cNvPr id="115" name="">
             <a:extLst xmlns:a="http://schemas.openxmlformats.org/drawingml/2006/main">
               <a:ext uri="{FF2B5EF4-FFF2-40B4-BE49-F238E27FC236}">
-                <a16:creationId xmlns:a16="http://schemas.microsoft.com/office/drawing/2014/main" id="{1D5B8C51-69FD-49F1-8751-A36D68915584}"/>
+                <a16:creationId xmlns:a16="http://schemas.microsoft.com/office/drawing/2014/main" id="{5A3CE0EF-7C79-4FF4-8AD9-5073852227AA}"/>
               </a:ext>
             </a:extLst>
           </p:cNvPr>
@@ -27148,7 +27148,7 @@
           <p:cNvPr id="116" name="">
             <a:extLst xmlns:a="http://schemas.openxmlformats.org/drawingml/2006/main">
               <a:ext uri="{FF2B5EF4-FFF2-40B4-BE49-F238E27FC236}">
-                <a16:creationId xmlns:a16="http://schemas.microsoft.com/office/drawing/2014/main" id="{AC12E344-D38B-4FEF-BD49-D87273B50F2A}"/>
+                <a16:creationId xmlns:a16="http://schemas.microsoft.com/office/drawing/2014/main" id="{1836F138-D1BA-49B2-ACEB-D72795386911}"/>
               </a:ext>
             </a:extLst>
           </p:cNvPr>
@@ -27200,7 +27200,7 @@
           <p:cNvPr id="117" name="">
             <a:extLst xmlns:a="http://schemas.openxmlformats.org/drawingml/2006/main">
               <a:ext uri="{FF2B5EF4-FFF2-40B4-BE49-F238E27FC236}">
-                <a16:creationId xmlns:a16="http://schemas.microsoft.com/office/drawing/2014/main" id="{4CB1F0FA-5D77-43B0-8D3E-8ACFA4C94D45}"/>
+                <a16:creationId xmlns:a16="http://schemas.microsoft.com/office/drawing/2014/main" id="{0C96B99E-C14F-43B4-89C8-86FA4F151693}"/>
               </a:ext>
             </a:extLst>
           </p:cNvPr>
@@ -27252,7 +27252,7 @@
           <p:cNvPr id="118" name="">
             <a:extLst xmlns:a="http://schemas.openxmlformats.org/drawingml/2006/main">
               <a:ext uri="{FF2B5EF4-FFF2-40B4-BE49-F238E27FC236}">
-                <a16:creationId xmlns:a16="http://schemas.microsoft.com/office/drawing/2014/main" id="{3C423530-EBD3-4ECB-965B-418B3335E04B}"/>
+                <a16:creationId xmlns:a16="http://schemas.microsoft.com/office/drawing/2014/main" id="{0C0AEB24-D104-4943-A953-653384F7E35E}"/>
               </a:ext>
             </a:extLst>
           </p:cNvPr>
@@ -27304,7 +27304,7 @@
           <p:cNvPr id="119" name="">
             <a:extLst xmlns:a="http://schemas.openxmlformats.org/drawingml/2006/main">
               <a:ext uri="{FF2B5EF4-FFF2-40B4-BE49-F238E27FC236}">
-                <a16:creationId xmlns:a16="http://schemas.microsoft.com/office/drawing/2014/main" id="{10492BED-3AE8-4C04-B1CA-B0F27A93C4DA}"/>
+                <a16:creationId xmlns:a16="http://schemas.microsoft.com/office/drawing/2014/main" id="{FD0CA4BC-7272-4A16-BE89-830847736C74}"/>
               </a:ext>
             </a:extLst>
           </p:cNvPr>
@@ -27356,7 +27356,7 @@
           <p:cNvPr id="120" name="">
             <a:extLst xmlns:a="http://schemas.openxmlformats.org/drawingml/2006/main">
               <a:ext uri="{FF2B5EF4-FFF2-40B4-BE49-F238E27FC236}">
-                <a16:creationId xmlns:a16="http://schemas.microsoft.com/office/drawing/2014/main" id="{883ED95F-2A3B-46D7-B5C0-A5230BC952F7}"/>
+                <a16:creationId xmlns:a16="http://schemas.microsoft.com/office/drawing/2014/main" id="{3DB130E3-5E09-4AD3-B72E-70616CB22E3A}"/>
               </a:ext>
             </a:extLst>
           </p:cNvPr>
@@ -27408,7 +27408,7 @@
           <p:cNvPr id="121" name="">
             <a:extLst xmlns:a="http://schemas.openxmlformats.org/drawingml/2006/main">
               <a:ext uri="{FF2B5EF4-FFF2-40B4-BE49-F238E27FC236}">
-                <a16:creationId xmlns:a16="http://schemas.microsoft.com/office/drawing/2014/main" id="{6263461F-5D1E-4942-9D9C-11ADB1282B4D}"/>
+                <a16:creationId xmlns:a16="http://schemas.microsoft.com/office/drawing/2014/main" id="{6E138FE4-E065-4B5B-8730-F8CD5448ABDC}"/>
               </a:ext>
             </a:extLst>
           </p:cNvPr>
@@ -27458,7 +27458,7 @@
     </p:spTree>
     <p:extLst>
       <p:ext uri="{BB962C8B-B14F-4D97-AF65-F5344CB8AC3E}">
-        <p14:creationId xmlns:p14="http://schemas.microsoft.com/office/powerpoint/2010/main" val="654427010"/>
+        <p14:creationId xmlns:p14="http://schemas.microsoft.com/office/powerpoint/2010/main" val="159645422"/>
       </p:ext>
     </p:extLst>
   </p:cSld>
@@ -27489,7 +27489,7 @@
           <p:cNvPr id="9" name="">
             <a:extLst xmlns:a="http://schemas.openxmlformats.org/drawingml/2006/main">
               <a:ext uri="{FF2B5EF4-FFF2-40B4-BE49-F238E27FC236}">
-                <a16:creationId xmlns:a16="http://schemas.microsoft.com/office/drawing/2014/main" id="{D54889C8-DB0B-490B-9990-5AE8C6710723}"/>
+                <a16:creationId xmlns:a16="http://schemas.microsoft.com/office/drawing/2014/main" id="{076F5128-DE9A-433D-ADB2-BD848C804D29}"/>
               </a:ext>
             </a:extLst>
           </p:cNvPr>
@@ -27522,7 +27522,7 @@
           <p:cNvPr id="2" name="">
             <a:extLst xmlns:a="http://schemas.openxmlformats.org/drawingml/2006/main">
               <a:ext uri="{FF2B5EF4-FFF2-40B4-BE49-F238E27FC236}">
-                <a16:creationId xmlns:a16="http://schemas.microsoft.com/office/drawing/2014/main" id="{63129BAE-B75F-4620-8F68-F0963381CDE9}"/>
+                <a16:creationId xmlns:a16="http://schemas.microsoft.com/office/drawing/2014/main" id="{DB62B703-A072-4255-9F29-06EA25CE2694}"/>
               </a:ext>
             </a:extLst>
           </p:cNvPr>
@@ -27553,7 +27553,7 @@
           <p:cNvPr id="3" name="">
             <a:extLst xmlns:a="http://schemas.openxmlformats.org/drawingml/2006/main">
               <a:ext uri="{FF2B5EF4-FFF2-40B4-BE49-F238E27FC236}">
-                <a16:creationId xmlns:a16="http://schemas.microsoft.com/office/drawing/2014/main" id="{385DAA5C-F500-44B8-80A6-1150063454F9}"/>
+                <a16:creationId xmlns:a16="http://schemas.microsoft.com/office/drawing/2014/main" id="{1E0FB31F-70C7-46A3-BC9D-33EEB66C56AB}"/>
               </a:ext>
             </a:extLst>
           </p:cNvPr>
@@ -27605,7 +27605,7 @@
           <p:cNvPr id="4" name="">
             <a:extLst xmlns:a="http://schemas.openxmlformats.org/drawingml/2006/main">
               <a:ext uri="{FF2B5EF4-FFF2-40B4-BE49-F238E27FC236}">
-                <a16:creationId xmlns:a16="http://schemas.microsoft.com/office/drawing/2014/main" id="{7E0D4105-2C5A-4B9C-A26E-8460663C38BC}"/>
+                <a16:creationId xmlns:a16="http://schemas.microsoft.com/office/drawing/2014/main" id="{AECB6A4F-9C30-42A2-9D8F-C2342F31208A}"/>
               </a:ext>
             </a:extLst>
           </p:cNvPr>
@@ -27640,7 +27640,7 @@
           <p:nvPr/>
         </p:nvPicPr>
         <p:blipFill>
-          <a:blip xmlns:r="http://schemas.openxmlformats.org/officeDocument/2006/relationships" xmlns:a="http://schemas.openxmlformats.org/drawingml/2006/main" r:embed="R2f2cedf80c4140af"/>
+          <a:blip xmlns:r="http://schemas.openxmlformats.org/officeDocument/2006/relationships" xmlns:a="http://schemas.openxmlformats.org/drawingml/2006/main" r:embed="R9a64c161442443a9"/>
           <a:stretch xmlns:a="http://schemas.openxmlformats.org/drawingml/2006/main"/>
         </p:blipFill>
         <p:spPr>
@@ -27658,7 +27658,7 @@
           <p:cNvPr id="6" name="">
             <a:extLst xmlns:a="http://schemas.openxmlformats.org/drawingml/2006/main">
               <a:ext uri="{FF2B5EF4-FFF2-40B4-BE49-F238E27FC236}">
-                <a16:creationId xmlns:a16="http://schemas.microsoft.com/office/drawing/2014/main" id="{9E625FD3-2383-46D8-A99A-FD873C08366D}"/>
+                <a16:creationId xmlns:a16="http://schemas.microsoft.com/office/drawing/2014/main" id="{B2DE6E6B-A27E-4671-8462-03C69C6468A3}"/>
               </a:ext>
             </a:extLst>
           </p:cNvPr>
@@ -27710,7 +27710,7 @@
           <p:cNvPr id="7" name="">
             <a:extLst xmlns:a="http://schemas.openxmlformats.org/drawingml/2006/main">
               <a:ext uri="{FF2B5EF4-FFF2-40B4-BE49-F238E27FC236}">
-                <a16:creationId xmlns:a16="http://schemas.microsoft.com/office/drawing/2014/main" id="{F53CEDF7-4E40-4734-83EC-8A08E203B4BE}"/>
+                <a16:creationId xmlns:a16="http://schemas.microsoft.com/office/drawing/2014/main" id="{FFBDDE51-B6CC-42B1-AE60-C9A84ECE6650}"/>
               </a:ext>
             </a:extLst>
           </p:cNvPr>
@@ -27766,7 +27766,7 @@
           <p:nvPr/>
         </p:nvPicPr>
         <p:blipFill>
-          <a:blip xmlns:r="http://schemas.openxmlformats.org/officeDocument/2006/relationships" xmlns:a="http://schemas.openxmlformats.org/drawingml/2006/main" r:embed="R7f2dcab7d10240ad"/>
+          <a:blip xmlns:r="http://schemas.openxmlformats.org/officeDocument/2006/relationships" xmlns:a="http://schemas.openxmlformats.org/drawingml/2006/main" r:embed="R3d0591811fe8405a"/>
           <a:stretch xmlns:a="http://schemas.openxmlformats.org/drawingml/2006/main"/>
         </p:blipFill>
         <p:spPr>
@@ -27782,7 +27782,7 @@
     </p:spTree>
     <p:extLst>
       <p:ext uri="{BB962C8B-B14F-4D97-AF65-F5344CB8AC3E}">
-        <p14:creationId xmlns:p14="http://schemas.microsoft.com/office/powerpoint/2010/main" val="925260184"/>
+        <p14:creationId xmlns:p14="http://schemas.microsoft.com/office/powerpoint/2010/main" val="1937786306"/>
       </p:ext>
     </p:extLst>
   </p:cSld>
@@ -27813,7 +27813,7 @@
           <p:cNvPr id="42" name="">
             <a:extLst xmlns:a="http://schemas.openxmlformats.org/drawingml/2006/main">
               <a:ext uri="{FF2B5EF4-FFF2-40B4-BE49-F238E27FC236}">
-                <a16:creationId xmlns:a16="http://schemas.microsoft.com/office/drawing/2014/main" id="{77002393-2218-42B7-ACD3-45AC85468FB0}"/>
+                <a16:creationId xmlns:a16="http://schemas.microsoft.com/office/drawing/2014/main" id="{0DB130A1-55A0-4A73-9E2C-A70764D0D8A0}"/>
               </a:ext>
             </a:extLst>
           </p:cNvPr>
@@ -27846,7 +27846,7 @@
           <p:cNvPr id="2" name="">
             <a:extLst xmlns:a="http://schemas.openxmlformats.org/drawingml/2006/main">
               <a:ext uri="{FF2B5EF4-FFF2-40B4-BE49-F238E27FC236}">
-                <a16:creationId xmlns:a16="http://schemas.microsoft.com/office/drawing/2014/main" id="{98432E6B-8F5C-4CC1-A4DF-EE12943F8C7C}"/>
+                <a16:creationId xmlns:a16="http://schemas.microsoft.com/office/drawing/2014/main" id="{6B42EB89-4909-480D-B1B4-940C322FFE4F}"/>
               </a:ext>
             </a:extLst>
           </p:cNvPr>
@@ -27877,7 +27877,7 @@
           <p:cNvPr id="3" name="">
             <a:extLst xmlns:a="http://schemas.openxmlformats.org/drawingml/2006/main">
               <a:ext uri="{FF2B5EF4-FFF2-40B4-BE49-F238E27FC236}">
-                <a16:creationId xmlns:a16="http://schemas.microsoft.com/office/drawing/2014/main" id="{637977E4-126D-4617-A3AE-4B5B18254845}"/>
+                <a16:creationId xmlns:a16="http://schemas.microsoft.com/office/drawing/2014/main" id="{93865AA4-6EAB-4517-9E6D-19B4EFE1702F}"/>
               </a:ext>
             </a:extLst>
           </p:cNvPr>
@@ -27929,7 +27929,7 @@
           <p:cNvPr id="4" name="">
             <a:extLst xmlns:a="http://schemas.openxmlformats.org/drawingml/2006/main">
               <a:ext uri="{FF2B5EF4-FFF2-40B4-BE49-F238E27FC236}">
-                <a16:creationId xmlns:a16="http://schemas.microsoft.com/office/drawing/2014/main" id="{7D2450A6-2C94-4948-9477-7D91C72C3C24}"/>
+                <a16:creationId xmlns:a16="http://schemas.microsoft.com/office/drawing/2014/main" id="{F5C89EF9-9D3C-463C-9BF2-D29E5483DF8A}"/>
               </a:ext>
             </a:extLst>
           </p:cNvPr>
@@ -27981,7 +27981,7 @@
           <p:cNvPr id="5" name="">
             <a:extLst xmlns:a="http://schemas.openxmlformats.org/drawingml/2006/main">
               <a:ext uri="{FF2B5EF4-FFF2-40B4-BE49-F238E27FC236}">
-                <a16:creationId xmlns:a16="http://schemas.microsoft.com/office/drawing/2014/main" id="{83ECDBCD-97EB-424F-8C99-CAF055B1DE99}"/>
+                <a16:creationId xmlns:a16="http://schemas.microsoft.com/office/drawing/2014/main" id="{B10CEB7B-6359-4B91-B285-62D939F1CFDF}"/>
               </a:ext>
             </a:extLst>
           </p:cNvPr>
@@ -28016,7 +28016,7 @@
           <p:nvPr/>
         </p:nvPicPr>
         <p:blipFill>
-          <a:blip xmlns:r="http://schemas.openxmlformats.org/officeDocument/2006/relationships" xmlns:a="http://schemas.openxmlformats.org/drawingml/2006/main" r:embed="R535c71f583744157"/>
+          <a:blip xmlns:r="http://schemas.openxmlformats.org/officeDocument/2006/relationships" xmlns:a="http://schemas.openxmlformats.org/drawingml/2006/main" r:embed="R01bc10f6ed3847b4"/>
           <a:stretch xmlns:a="http://schemas.openxmlformats.org/drawingml/2006/main"/>
         </p:blipFill>
         <p:spPr>
@@ -28034,7 +28034,7 @@
           <p:cNvPr id="7" name="">
             <a:extLst xmlns:a="http://schemas.openxmlformats.org/drawingml/2006/main">
               <a:ext uri="{FF2B5EF4-FFF2-40B4-BE49-F238E27FC236}">
-                <a16:creationId xmlns:a16="http://schemas.microsoft.com/office/drawing/2014/main" id="{95564212-8D2D-4925-AFDB-F87230F4550A}"/>
+                <a16:creationId xmlns:a16="http://schemas.microsoft.com/office/drawing/2014/main" id="{EBFEF479-271B-4EFF-A9D2-FC4E33DC42B9}"/>
               </a:ext>
             </a:extLst>
           </p:cNvPr>
@@ -28086,7 +28086,7 @@
           <p:cNvPr id="8" name="">
             <a:extLst xmlns:a="http://schemas.openxmlformats.org/drawingml/2006/main">
               <a:ext uri="{FF2B5EF4-FFF2-40B4-BE49-F238E27FC236}">
-                <a16:creationId xmlns:a16="http://schemas.microsoft.com/office/drawing/2014/main" id="{4F3A44CC-1B8E-44B1-A7C4-E882ED69F327}"/>
+                <a16:creationId xmlns:a16="http://schemas.microsoft.com/office/drawing/2014/main" id="{96D9BD70-B880-4F30-BEDB-675A47DE1BF5}"/>
               </a:ext>
             </a:extLst>
           </p:cNvPr>
@@ -28138,7 +28138,7 @@
           <p:cNvPr id="9" name="">
             <a:extLst xmlns:a="http://schemas.openxmlformats.org/drawingml/2006/main">
               <a:ext uri="{FF2B5EF4-FFF2-40B4-BE49-F238E27FC236}">
-                <a16:creationId xmlns:a16="http://schemas.microsoft.com/office/drawing/2014/main" id="{08004BAA-DA2B-41A0-86F5-2CDD18BBAAD3}"/>
+                <a16:creationId xmlns:a16="http://schemas.microsoft.com/office/drawing/2014/main" id="{439B2B8D-E0CC-46CB-8ACD-874D38161B2B}"/>
               </a:ext>
             </a:extLst>
           </p:cNvPr>
@@ -28190,7 +28190,7 @@
           <p:cNvPr id="10" name="">
             <a:extLst xmlns:a="http://schemas.openxmlformats.org/drawingml/2006/main">
               <a:ext uri="{FF2B5EF4-FFF2-40B4-BE49-F238E27FC236}">
-                <a16:creationId xmlns:a16="http://schemas.microsoft.com/office/drawing/2014/main" id="{F00DF444-A193-4119-9F17-0A7763F1AF85}"/>
+                <a16:creationId xmlns:a16="http://schemas.microsoft.com/office/drawing/2014/main" id="{64367E34-8CD8-414D-9EC5-E309523344C4}"/>
               </a:ext>
             </a:extLst>
           </p:cNvPr>
@@ -28221,7 +28221,7 @@
           <p:cNvPr id="11" name="">
             <a:extLst xmlns:a="http://schemas.openxmlformats.org/drawingml/2006/main">
               <a:ext uri="{FF2B5EF4-FFF2-40B4-BE49-F238E27FC236}">
-                <a16:creationId xmlns:a16="http://schemas.microsoft.com/office/drawing/2014/main" id="{73D1711A-3505-425A-A42C-808FFE1463C6}"/>
+                <a16:creationId xmlns:a16="http://schemas.microsoft.com/office/drawing/2014/main" id="{DB47EFA0-2529-494A-AADC-66FD53304CB7}"/>
               </a:ext>
             </a:extLst>
           </p:cNvPr>
@@ -28273,7 +28273,7 @@
           <p:cNvPr id="12" name="">
             <a:extLst xmlns:a="http://schemas.openxmlformats.org/drawingml/2006/main">
               <a:ext uri="{FF2B5EF4-FFF2-40B4-BE49-F238E27FC236}">
-                <a16:creationId xmlns:a16="http://schemas.microsoft.com/office/drawing/2014/main" id="{6FB88163-3D49-403E-BE07-B719672367AF}"/>
+                <a16:creationId xmlns:a16="http://schemas.microsoft.com/office/drawing/2014/main" id="{64F3BEBF-7526-4019-8F3B-68212FD99FC0}"/>
               </a:ext>
             </a:extLst>
           </p:cNvPr>
@@ -28325,7 +28325,7 @@
           <p:cNvPr id="13" name="">
             <a:extLst xmlns:a="http://schemas.openxmlformats.org/drawingml/2006/main">
               <a:ext uri="{FF2B5EF4-FFF2-40B4-BE49-F238E27FC236}">
-                <a16:creationId xmlns:a16="http://schemas.microsoft.com/office/drawing/2014/main" id="{2324B5F3-ECB8-42CB-820A-648F25094438}"/>
+                <a16:creationId xmlns:a16="http://schemas.microsoft.com/office/drawing/2014/main" id="{9CC9423C-E1C3-4BE2-B70D-9F364E884BFA}"/>
               </a:ext>
             </a:extLst>
           </p:cNvPr>
@@ -28377,7 +28377,7 @@
           <p:cNvPr id="14" name="">
             <a:extLst xmlns:a="http://schemas.openxmlformats.org/drawingml/2006/main">
               <a:ext uri="{FF2B5EF4-FFF2-40B4-BE49-F238E27FC236}">
-                <a16:creationId xmlns:a16="http://schemas.microsoft.com/office/drawing/2014/main" id="{38C40768-4CB3-46A8-8D77-584EDAD7A517}"/>
+                <a16:creationId xmlns:a16="http://schemas.microsoft.com/office/drawing/2014/main" id="{778EF323-94BD-49C4-9EEF-097604CFE148}"/>
               </a:ext>
             </a:extLst>
           </p:cNvPr>
@@ -28408,7 +28408,7 @@
           <p:cNvPr id="15" name="">
             <a:extLst xmlns:a="http://schemas.openxmlformats.org/drawingml/2006/main">
               <a:ext uri="{FF2B5EF4-FFF2-40B4-BE49-F238E27FC236}">
-                <a16:creationId xmlns:a16="http://schemas.microsoft.com/office/drawing/2014/main" id="{A850BE2C-C211-4E09-A8F4-15B8CCFFAE52}"/>
+                <a16:creationId xmlns:a16="http://schemas.microsoft.com/office/drawing/2014/main" id="{603EBCB5-FE96-4EA4-9798-88BB89CF8C65}"/>
               </a:ext>
             </a:extLst>
           </p:cNvPr>
@@ -28460,7 +28460,7 @@
           <p:cNvPr id="16" name="">
             <a:extLst xmlns:a="http://schemas.openxmlformats.org/drawingml/2006/main">
               <a:ext uri="{FF2B5EF4-FFF2-40B4-BE49-F238E27FC236}">
-                <a16:creationId xmlns:a16="http://schemas.microsoft.com/office/drawing/2014/main" id="{BA236F2F-427B-48A8-ACAA-6A062B8FB798}"/>
+                <a16:creationId xmlns:a16="http://schemas.microsoft.com/office/drawing/2014/main" id="{91107148-3153-4827-A7C1-44D6E744B178}"/>
               </a:ext>
             </a:extLst>
           </p:cNvPr>
@@ -28512,7 +28512,7 @@
           <p:cNvPr id="17" name="">
             <a:extLst xmlns:a="http://schemas.openxmlformats.org/drawingml/2006/main">
               <a:ext uri="{FF2B5EF4-FFF2-40B4-BE49-F238E27FC236}">
-                <a16:creationId xmlns:a16="http://schemas.microsoft.com/office/drawing/2014/main" id="{E4C5A3FD-45C6-4394-98DA-1974197396F1}"/>
+                <a16:creationId xmlns:a16="http://schemas.microsoft.com/office/drawing/2014/main" id="{DBFDFBB3-75FF-4920-B4BD-2CDDBA178B74}"/>
               </a:ext>
             </a:extLst>
           </p:cNvPr>
@@ -28564,7 +28564,7 @@
           <p:cNvPr id="18" name="">
             <a:extLst xmlns:a="http://schemas.openxmlformats.org/drawingml/2006/main">
               <a:ext uri="{FF2B5EF4-FFF2-40B4-BE49-F238E27FC236}">
-                <a16:creationId xmlns:a16="http://schemas.microsoft.com/office/drawing/2014/main" id="{DF551C13-FAC2-4CC5-9585-23482BA3B0E9}"/>
+                <a16:creationId xmlns:a16="http://schemas.microsoft.com/office/drawing/2014/main" id="{639FC776-54E4-4C4F-9632-89486C5A38B9}"/>
               </a:ext>
             </a:extLst>
           </p:cNvPr>
@@ -28595,7 +28595,7 @@
           <p:cNvPr id="19" name="">
             <a:extLst xmlns:a="http://schemas.openxmlformats.org/drawingml/2006/main">
               <a:ext uri="{FF2B5EF4-FFF2-40B4-BE49-F238E27FC236}">
-                <a16:creationId xmlns:a16="http://schemas.microsoft.com/office/drawing/2014/main" id="{FF9B8324-67B7-46F0-9188-3033B6F394DB}"/>
+                <a16:creationId xmlns:a16="http://schemas.microsoft.com/office/drawing/2014/main" id="{98309A3C-FADC-4523-8478-87B95DFFAA42}"/>
               </a:ext>
             </a:extLst>
           </p:cNvPr>
@@ -28647,7 +28647,7 @@
           <p:cNvPr id="20" name="">
             <a:extLst xmlns:a="http://schemas.openxmlformats.org/drawingml/2006/main">
               <a:ext uri="{FF2B5EF4-FFF2-40B4-BE49-F238E27FC236}">
-                <a16:creationId xmlns:a16="http://schemas.microsoft.com/office/drawing/2014/main" id="{F9985726-4C21-48EF-8263-BF786DC73E9D}"/>
+                <a16:creationId xmlns:a16="http://schemas.microsoft.com/office/drawing/2014/main" id="{A2065B4A-2BBE-4431-A2D8-B934EDBB8C7A}"/>
               </a:ext>
             </a:extLst>
           </p:cNvPr>
@@ -28699,7 +28699,7 @@
           <p:cNvPr id="21" name="">
             <a:extLst xmlns:a="http://schemas.openxmlformats.org/drawingml/2006/main">
               <a:ext uri="{FF2B5EF4-FFF2-40B4-BE49-F238E27FC236}">
-                <a16:creationId xmlns:a16="http://schemas.microsoft.com/office/drawing/2014/main" id="{61C0D082-3094-487F-9D71-320919BE9A49}"/>
+                <a16:creationId xmlns:a16="http://schemas.microsoft.com/office/drawing/2014/main" id="{6735872C-AE52-4B63-9A76-37C13F6D5582}"/>
               </a:ext>
             </a:extLst>
           </p:cNvPr>
@@ -28751,7 +28751,7 @@
           <p:cNvPr id="22" name="">
             <a:extLst xmlns:a="http://schemas.openxmlformats.org/drawingml/2006/main">
               <a:ext uri="{FF2B5EF4-FFF2-40B4-BE49-F238E27FC236}">
-                <a16:creationId xmlns:a16="http://schemas.microsoft.com/office/drawing/2014/main" id="{31299D3E-69DD-4080-8483-966555973CE1}"/>
+                <a16:creationId xmlns:a16="http://schemas.microsoft.com/office/drawing/2014/main" id="{8BDFDA8A-E730-4D8F-9C26-7554EDEDCED9}"/>
               </a:ext>
             </a:extLst>
           </p:cNvPr>
@@ -28782,7 +28782,7 @@
           <p:cNvPr id="23" name="">
             <a:extLst xmlns:a="http://schemas.openxmlformats.org/drawingml/2006/main">
               <a:ext uri="{FF2B5EF4-FFF2-40B4-BE49-F238E27FC236}">
-                <a16:creationId xmlns:a16="http://schemas.microsoft.com/office/drawing/2014/main" id="{1F664367-9ABE-4C42-B414-84D76504D374}"/>
+                <a16:creationId xmlns:a16="http://schemas.microsoft.com/office/drawing/2014/main" id="{02A09AAE-3837-4736-94A5-6D8D08C4E6A7}"/>
               </a:ext>
             </a:extLst>
           </p:cNvPr>
@@ -28834,7 +28834,7 @@
           <p:cNvPr id="24" name="">
             <a:extLst xmlns:a="http://schemas.openxmlformats.org/drawingml/2006/main">
               <a:ext uri="{FF2B5EF4-FFF2-40B4-BE49-F238E27FC236}">
-                <a16:creationId xmlns:a16="http://schemas.microsoft.com/office/drawing/2014/main" id="{E494C438-3FF9-4738-9FA3-20A88A7720CB}"/>
+                <a16:creationId xmlns:a16="http://schemas.microsoft.com/office/drawing/2014/main" id="{9CD179E8-8850-4DE4-83DA-B14FF1557C1C}"/>
               </a:ext>
             </a:extLst>
           </p:cNvPr>
@@ -28886,7 +28886,7 @@
           <p:cNvPr id="25" name="">
             <a:extLst xmlns:a="http://schemas.openxmlformats.org/drawingml/2006/main">
               <a:ext uri="{FF2B5EF4-FFF2-40B4-BE49-F238E27FC236}">
-                <a16:creationId xmlns:a16="http://schemas.microsoft.com/office/drawing/2014/main" id="{C358CD75-8020-4364-AF72-CA425B962296}"/>
+                <a16:creationId xmlns:a16="http://schemas.microsoft.com/office/drawing/2014/main" id="{8474BCD9-2F83-4EF3-9473-35CD28F927C4}"/>
               </a:ext>
             </a:extLst>
           </p:cNvPr>
@@ -28938,7 +28938,7 @@
           <p:cNvPr id="26" name="">
             <a:extLst xmlns:a="http://schemas.openxmlformats.org/drawingml/2006/main">
               <a:ext uri="{FF2B5EF4-FFF2-40B4-BE49-F238E27FC236}">
-                <a16:creationId xmlns:a16="http://schemas.microsoft.com/office/drawing/2014/main" id="{0248ED2E-A176-4220-ABF5-0094C004BAD8}"/>
+                <a16:creationId xmlns:a16="http://schemas.microsoft.com/office/drawing/2014/main" id="{FEABED4F-824C-4324-9CDA-CE7A0F483726}"/>
               </a:ext>
             </a:extLst>
           </p:cNvPr>
@@ -28969,7 +28969,7 @@
           <p:cNvPr id="27" name="">
             <a:extLst xmlns:a="http://schemas.openxmlformats.org/drawingml/2006/main">
               <a:ext uri="{FF2B5EF4-FFF2-40B4-BE49-F238E27FC236}">
-                <a16:creationId xmlns:a16="http://schemas.microsoft.com/office/drawing/2014/main" id="{410EACE9-3476-4248-AE8D-D171B9C71C86}"/>
+                <a16:creationId xmlns:a16="http://schemas.microsoft.com/office/drawing/2014/main" id="{9B1D4A0F-6056-4314-AFBA-1CB54358494B}"/>
               </a:ext>
             </a:extLst>
           </p:cNvPr>
@@ -29021,7 +29021,7 @@
           <p:cNvPr id="28" name="">
             <a:extLst xmlns:a="http://schemas.openxmlformats.org/drawingml/2006/main">
               <a:ext uri="{FF2B5EF4-FFF2-40B4-BE49-F238E27FC236}">
-                <a16:creationId xmlns:a16="http://schemas.microsoft.com/office/drawing/2014/main" id="{BAD1E155-DA9D-47BB-9B9D-24E025CE1845}"/>
+                <a16:creationId xmlns:a16="http://schemas.microsoft.com/office/drawing/2014/main" id="{69C89644-690F-4A2E-A284-8BCC202FE5A5}"/>
               </a:ext>
             </a:extLst>
           </p:cNvPr>
@@ -29073,7 +29073,7 @@
           <p:cNvPr id="29" name="">
             <a:extLst xmlns:a="http://schemas.openxmlformats.org/drawingml/2006/main">
               <a:ext uri="{FF2B5EF4-FFF2-40B4-BE49-F238E27FC236}">
-                <a16:creationId xmlns:a16="http://schemas.microsoft.com/office/drawing/2014/main" id="{6446DFC5-BA1D-4385-B605-C475B1127DC6}"/>
+                <a16:creationId xmlns:a16="http://schemas.microsoft.com/office/drawing/2014/main" id="{6350EB9C-8DF5-4004-85BE-5AA43D916AA4}"/>
               </a:ext>
             </a:extLst>
           </p:cNvPr>
@@ -29125,7 +29125,7 @@
           <p:cNvPr id="30" name="">
             <a:extLst xmlns:a="http://schemas.openxmlformats.org/drawingml/2006/main">
               <a:ext uri="{FF2B5EF4-FFF2-40B4-BE49-F238E27FC236}">
-                <a16:creationId xmlns:a16="http://schemas.microsoft.com/office/drawing/2014/main" id="{BF1FF73E-91A0-401E-B750-A205D8E64370}"/>
+                <a16:creationId xmlns:a16="http://schemas.microsoft.com/office/drawing/2014/main" id="{4ECFF258-BE8C-45C4-9D75-730DE9B001F3}"/>
               </a:ext>
             </a:extLst>
           </p:cNvPr>
@@ -29156,7 +29156,7 @@
           <p:cNvPr id="31" name="">
             <a:extLst xmlns:a="http://schemas.openxmlformats.org/drawingml/2006/main">
               <a:ext uri="{FF2B5EF4-FFF2-40B4-BE49-F238E27FC236}">
-                <a16:creationId xmlns:a16="http://schemas.microsoft.com/office/drawing/2014/main" id="{F34D5542-FAB5-4A15-B548-2985AE2E590A}"/>
+                <a16:creationId xmlns:a16="http://schemas.microsoft.com/office/drawing/2014/main" id="{BC77CF24-DCB4-4993-86BB-EABD3CBA6F55}"/>
               </a:ext>
             </a:extLst>
           </p:cNvPr>
@@ -29208,7 +29208,7 @@
           <p:cNvPr id="32" name="">
             <a:extLst xmlns:a="http://schemas.openxmlformats.org/drawingml/2006/main">
               <a:ext uri="{FF2B5EF4-FFF2-40B4-BE49-F238E27FC236}">
-                <a16:creationId xmlns:a16="http://schemas.microsoft.com/office/drawing/2014/main" id="{005C736D-C2D9-4FB0-80AD-1AB154DA84E0}"/>
+                <a16:creationId xmlns:a16="http://schemas.microsoft.com/office/drawing/2014/main" id="{A59F4D1A-9365-444C-B7ED-D5A60A191437}"/>
               </a:ext>
             </a:extLst>
           </p:cNvPr>
@@ -29260,7 +29260,7 @@
           <p:cNvPr id="33" name="">
             <a:extLst xmlns:a="http://schemas.openxmlformats.org/drawingml/2006/main">
               <a:ext uri="{FF2B5EF4-FFF2-40B4-BE49-F238E27FC236}">
-                <a16:creationId xmlns:a16="http://schemas.microsoft.com/office/drawing/2014/main" id="{CE0DBD4A-3C85-432D-8A70-FE55BD7B52AB}"/>
+                <a16:creationId xmlns:a16="http://schemas.microsoft.com/office/drawing/2014/main" id="{A083C8F9-FDF2-41E2-9A29-7A062D36181B}"/>
               </a:ext>
             </a:extLst>
           </p:cNvPr>
@@ -29312,7 +29312,7 @@
           <p:cNvPr id="34" name="">
             <a:extLst xmlns:a="http://schemas.openxmlformats.org/drawingml/2006/main">
               <a:ext uri="{FF2B5EF4-FFF2-40B4-BE49-F238E27FC236}">
-                <a16:creationId xmlns:a16="http://schemas.microsoft.com/office/drawing/2014/main" id="{18C2784A-4F33-47C5-9710-51A72E82C574}"/>
+                <a16:creationId xmlns:a16="http://schemas.microsoft.com/office/drawing/2014/main" id="{80763B14-3C30-4CF5-ADE5-C689E9CC80B8}"/>
               </a:ext>
             </a:extLst>
           </p:cNvPr>
@@ -29343,7 +29343,7 @@
           <p:cNvPr id="35" name="">
             <a:extLst xmlns:a="http://schemas.openxmlformats.org/drawingml/2006/main">
               <a:ext uri="{FF2B5EF4-FFF2-40B4-BE49-F238E27FC236}">
-                <a16:creationId xmlns:a16="http://schemas.microsoft.com/office/drawing/2014/main" id="{A51480D7-8B9A-4C85-BDD7-378A71A73CB7}"/>
+                <a16:creationId xmlns:a16="http://schemas.microsoft.com/office/drawing/2014/main" id="{2AF9C398-A688-4CBF-8963-B3CC9363E4DE}"/>
               </a:ext>
             </a:extLst>
           </p:cNvPr>
@@ -29395,7 +29395,7 @@
           <p:cNvPr id="36" name="">
             <a:extLst xmlns:a="http://schemas.openxmlformats.org/drawingml/2006/main">
               <a:ext uri="{FF2B5EF4-FFF2-40B4-BE49-F238E27FC236}">
-                <a16:creationId xmlns:a16="http://schemas.microsoft.com/office/drawing/2014/main" id="{ED5C1CD1-01D5-48A0-B6B5-541D0C7C73BD}"/>
+                <a16:creationId xmlns:a16="http://schemas.microsoft.com/office/drawing/2014/main" id="{799EB5F6-AF9E-4428-9050-C0D52AB3E29E}"/>
               </a:ext>
             </a:extLst>
           </p:cNvPr>
@@ -29447,7 +29447,7 @@
           <p:cNvPr id="37" name="">
             <a:extLst xmlns:a="http://schemas.openxmlformats.org/drawingml/2006/main">
               <a:ext uri="{FF2B5EF4-FFF2-40B4-BE49-F238E27FC236}">
-                <a16:creationId xmlns:a16="http://schemas.microsoft.com/office/drawing/2014/main" id="{4DC3B1FA-BD11-46F8-A50A-92261077B135}"/>
+                <a16:creationId xmlns:a16="http://schemas.microsoft.com/office/drawing/2014/main" id="{F898EA6B-7B34-4F68-AB23-25EF33ECB6EC}"/>
               </a:ext>
             </a:extLst>
           </p:cNvPr>
@@ -29499,7 +29499,7 @@
           <p:cNvPr id="38" name="">
             <a:extLst xmlns:a="http://schemas.openxmlformats.org/drawingml/2006/main">
               <a:ext uri="{FF2B5EF4-FFF2-40B4-BE49-F238E27FC236}">
-                <a16:creationId xmlns:a16="http://schemas.microsoft.com/office/drawing/2014/main" id="{81EA6234-44E1-4C50-B67A-5FA2C8ED004A}"/>
+                <a16:creationId xmlns:a16="http://schemas.microsoft.com/office/drawing/2014/main" id="{FC5E8834-AC9D-4BBE-8403-1C071049EE3F}"/>
               </a:ext>
             </a:extLst>
           </p:cNvPr>
@@ -29530,7 +29530,7 @@
           <p:cNvPr id="39" name="">
             <a:extLst xmlns:a="http://schemas.openxmlformats.org/drawingml/2006/main">
               <a:ext uri="{FF2B5EF4-FFF2-40B4-BE49-F238E27FC236}">
-                <a16:creationId xmlns:a16="http://schemas.microsoft.com/office/drawing/2014/main" id="{F55554AB-1180-4623-AE96-D8D6A40D89F9}"/>
+                <a16:creationId xmlns:a16="http://schemas.microsoft.com/office/drawing/2014/main" id="{F287F46C-7D83-495D-A89D-29D2E0805CC1}"/>
               </a:ext>
             </a:extLst>
           </p:cNvPr>
@@ -29582,7 +29582,7 @@
           <p:cNvPr id="40" name="">
             <a:extLst xmlns:a="http://schemas.openxmlformats.org/drawingml/2006/main">
               <a:ext uri="{FF2B5EF4-FFF2-40B4-BE49-F238E27FC236}">
-                <a16:creationId xmlns:a16="http://schemas.microsoft.com/office/drawing/2014/main" id="{09978D27-EBA7-444F-AC64-2AFF6CDBB728}"/>
+                <a16:creationId xmlns:a16="http://schemas.microsoft.com/office/drawing/2014/main" id="{7FBE3719-079C-47F2-AE5A-26D6D6117077}"/>
               </a:ext>
             </a:extLst>
           </p:cNvPr>
@@ -29634,7 +29634,7 @@
           <p:cNvPr id="41" name="">
             <a:extLst xmlns:a="http://schemas.openxmlformats.org/drawingml/2006/main">
               <a:ext uri="{FF2B5EF4-FFF2-40B4-BE49-F238E27FC236}">
-                <a16:creationId xmlns:a16="http://schemas.microsoft.com/office/drawing/2014/main" id="{75EDFB50-3072-426B-8084-439F7282B152}"/>
+                <a16:creationId xmlns:a16="http://schemas.microsoft.com/office/drawing/2014/main" id="{83D35601-593B-47FF-AA81-A1D1C8E1E986}"/>
               </a:ext>
             </a:extLst>
           </p:cNvPr>
@@ -29684,7 +29684,7 @@
     </p:spTree>
     <p:extLst>
       <p:ext uri="{BB962C8B-B14F-4D97-AF65-F5344CB8AC3E}">
-        <p14:creationId xmlns:p14="http://schemas.microsoft.com/office/powerpoint/2010/main" val="1075110766"/>
+        <p14:creationId xmlns:p14="http://schemas.microsoft.com/office/powerpoint/2010/main" val="1596936863"/>
       </p:ext>
     </p:extLst>
   </p:cSld>
@@ -29715,7 +29715,7 @@
           <p:cNvPr id="76" name="">
             <a:extLst xmlns:a="http://schemas.openxmlformats.org/drawingml/2006/main">
               <a:ext uri="{FF2B5EF4-FFF2-40B4-BE49-F238E27FC236}">
-                <a16:creationId xmlns:a16="http://schemas.microsoft.com/office/drawing/2014/main" id="{F5A662AC-B82D-4B38-8234-64B9A1672BB2}"/>
+                <a16:creationId xmlns:a16="http://schemas.microsoft.com/office/drawing/2014/main" id="{891DD64D-F46D-4B6A-8ECC-6551382AC9AD}"/>
               </a:ext>
             </a:extLst>
           </p:cNvPr>
@@ -29748,7 +29748,7 @@
           <p:cNvPr id="2" name="">
             <a:extLst xmlns:a="http://schemas.openxmlformats.org/drawingml/2006/main">
               <a:ext uri="{FF2B5EF4-FFF2-40B4-BE49-F238E27FC236}">
-                <a16:creationId xmlns:a16="http://schemas.microsoft.com/office/drawing/2014/main" id="{5831AE54-44B1-40C3-BAB4-654700EF54A8}"/>
+                <a16:creationId xmlns:a16="http://schemas.microsoft.com/office/drawing/2014/main" id="{21ADD064-3384-43B0-A2C3-6E5E83D52441}"/>
               </a:ext>
             </a:extLst>
           </p:cNvPr>
@@ -29779,7 +29779,7 @@
           <p:cNvPr id="3" name="">
             <a:extLst xmlns:a="http://schemas.openxmlformats.org/drawingml/2006/main">
               <a:ext uri="{FF2B5EF4-FFF2-40B4-BE49-F238E27FC236}">
-                <a16:creationId xmlns:a16="http://schemas.microsoft.com/office/drawing/2014/main" id="{79E3B10E-8AE0-4905-881F-F49057A41659}"/>
+                <a16:creationId xmlns:a16="http://schemas.microsoft.com/office/drawing/2014/main" id="{1E1B2103-B086-42A4-87D4-A370ACDB209D}"/>
               </a:ext>
             </a:extLst>
           </p:cNvPr>
@@ -29831,7 +29831,7 @@
           <p:cNvPr id="4" name="">
             <a:extLst xmlns:a="http://schemas.openxmlformats.org/drawingml/2006/main">
               <a:ext uri="{FF2B5EF4-FFF2-40B4-BE49-F238E27FC236}">
-                <a16:creationId xmlns:a16="http://schemas.microsoft.com/office/drawing/2014/main" id="{1F078D03-284D-46D2-9535-66D6C67C5A7B}"/>
+                <a16:creationId xmlns:a16="http://schemas.microsoft.com/office/drawing/2014/main" id="{3F5DF970-12FB-441E-A246-1B3122529603}"/>
               </a:ext>
             </a:extLst>
           </p:cNvPr>
@@ -29883,7 +29883,7 @@
           <p:cNvPr id="5" name="">
             <a:extLst xmlns:a="http://schemas.openxmlformats.org/drawingml/2006/main">
               <a:ext uri="{FF2B5EF4-FFF2-40B4-BE49-F238E27FC236}">
-                <a16:creationId xmlns:a16="http://schemas.microsoft.com/office/drawing/2014/main" id="{F2814D6D-8CAF-4860-9CCD-1588B481DB7F}"/>
+                <a16:creationId xmlns:a16="http://schemas.microsoft.com/office/drawing/2014/main" id="{0E51AAAB-D7E7-4C5B-AEF7-5361AA1CE420}"/>
               </a:ext>
             </a:extLst>
           </p:cNvPr>
@@ -29918,7 +29918,7 @@
           <p:nvPr/>
         </p:nvPicPr>
         <p:blipFill>
-          <a:blip xmlns:r="http://schemas.openxmlformats.org/officeDocument/2006/relationships" xmlns:a="http://schemas.openxmlformats.org/drawingml/2006/main" r:embed="R3339656ef40841f4"/>
+          <a:blip xmlns:r="http://schemas.openxmlformats.org/officeDocument/2006/relationships" xmlns:a="http://schemas.openxmlformats.org/drawingml/2006/main" r:embed="R710ba44bc6e64b34"/>
           <a:stretch xmlns:a="http://schemas.openxmlformats.org/drawingml/2006/main"/>
         </p:blipFill>
         <p:spPr>
@@ -29936,7 +29936,7 @@
           <p:cNvPr id="7" name="">
             <a:extLst xmlns:a="http://schemas.openxmlformats.org/drawingml/2006/main">
               <a:ext uri="{FF2B5EF4-FFF2-40B4-BE49-F238E27FC236}">
-                <a16:creationId xmlns:a16="http://schemas.microsoft.com/office/drawing/2014/main" id="{C9D72F27-77D6-468A-9251-1D21C1A19F1E}"/>
+                <a16:creationId xmlns:a16="http://schemas.microsoft.com/office/drawing/2014/main" id="{5D8E6080-280A-4DB1-B839-B30479FBE539}"/>
               </a:ext>
             </a:extLst>
           </p:cNvPr>
@@ -29988,7 +29988,7 @@
           <p:cNvPr id="8" name="">
             <a:extLst xmlns:a="http://schemas.openxmlformats.org/drawingml/2006/main">
               <a:ext uri="{FF2B5EF4-FFF2-40B4-BE49-F238E27FC236}">
-                <a16:creationId xmlns:a16="http://schemas.microsoft.com/office/drawing/2014/main" id="{7EDB5194-267E-4EF7-8652-72D9FFEEC488}"/>
+                <a16:creationId xmlns:a16="http://schemas.microsoft.com/office/drawing/2014/main" id="{ED87B3F2-2BE6-4715-A322-2F091F543461}"/>
               </a:ext>
             </a:extLst>
           </p:cNvPr>
@@ -30040,7 +30040,7 @@
           <p:cNvPr id="9" name="">
             <a:extLst xmlns:a="http://schemas.openxmlformats.org/drawingml/2006/main">
               <a:ext uri="{FF2B5EF4-FFF2-40B4-BE49-F238E27FC236}">
-                <a16:creationId xmlns:a16="http://schemas.microsoft.com/office/drawing/2014/main" id="{C2D348F9-D996-4922-A9D2-2FE118B61B26}"/>
+                <a16:creationId xmlns:a16="http://schemas.microsoft.com/office/drawing/2014/main" id="{2E6074C4-575B-40A7-BFB5-2A88F9AFC183}"/>
               </a:ext>
             </a:extLst>
           </p:cNvPr>
@@ -30092,7 +30092,7 @@
           <p:cNvPr id="10" name="">
             <a:extLst xmlns:a="http://schemas.openxmlformats.org/drawingml/2006/main">
               <a:ext uri="{FF2B5EF4-FFF2-40B4-BE49-F238E27FC236}">
-                <a16:creationId xmlns:a16="http://schemas.microsoft.com/office/drawing/2014/main" id="{EAC1A89D-F93D-44B0-BC32-A2EEEAE48672}"/>
+                <a16:creationId xmlns:a16="http://schemas.microsoft.com/office/drawing/2014/main" id="{761FBC0E-F144-44BB-8D87-1B8AE26CACB9}"/>
               </a:ext>
             </a:extLst>
           </p:cNvPr>
@@ -30144,7 +30144,7 @@
           <p:cNvPr id="11" name="">
             <a:extLst xmlns:a="http://schemas.openxmlformats.org/drawingml/2006/main">
               <a:ext uri="{FF2B5EF4-FFF2-40B4-BE49-F238E27FC236}">
-                <a16:creationId xmlns:a16="http://schemas.microsoft.com/office/drawing/2014/main" id="{0EB5868A-B7E0-4A59-B060-2B313919D67B}"/>
+                <a16:creationId xmlns:a16="http://schemas.microsoft.com/office/drawing/2014/main" id="{9644FCE5-7C12-45F1-9AE9-42B7D9D261CA}"/>
               </a:ext>
             </a:extLst>
           </p:cNvPr>
@@ -30187,7 +30187,7 @@
           <p:cNvPr id="12" name="">
             <a:extLst xmlns:a="http://schemas.openxmlformats.org/drawingml/2006/main">
               <a:ext uri="{FF2B5EF4-FFF2-40B4-BE49-F238E27FC236}">
-                <a16:creationId xmlns:a16="http://schemas.microsoft.com/office/drawing/2014/main" id="{4BDDEF19-3B83-4BB2-8014-5AC41FE86F0A}"/>
+                <a16:creationId xmlns:a16="http://schemas.microsoft.com/office/drawing/2014/main" id="{529FD1B1-46F9-4147-B9DC-4F8836594B7F}"/>
               </a:ext>
             </a:extLst>
           </p:cNvPr>
@@ -30218,7 +30218,7 @@
           <p:cNvPr id="13" name="">
             <a:extLst xmlns:a="http://schemas.openxmlformats.org/drawingml/2006/main">
               <a:ext uri="{FF2B5EF4-FFF2-40B4-BE49-F238E27FC236}">
-                <a16:creationId xmlns:a16="http://schemas.microsoft.com/office/drawing/2014/main" id="{2EA31704-A46F-4B10-AC54-F07DD5F011B9}"/>
+                <a16:creationId xmlns:a16="http://schemas.microsoft.com/office/drawing/2014/main" id="{D30092C0-8C5D-4053-84DD-6E75B4ACD115}"/>
               </a:ext>
             </a:extLst>
           </p:cNvPr>
@@ -30249,7 +30249,7 @@
           <p:cNvPr id="14" name="">
             <a:extLst xmlns:a="http://schemas.openxmlformats.org/drawingml/2006/main">
               <a:ext uri="{FF2B5EF4-FFF2-40B4-BE49-F238E27FC236}">
-                <a16:creationId xmlns:a16="http://schemas.microsoft.com/office/drawing/2014/main" id="{85181895-3A61-489B-87F0-34AC03C8E90C}"/>
+                <a16:creationId xmlns:a16="http://schemas.microsoft.com/office/drawing/2014/main" id="{4BA30988-B375-4059-A723-88CC9F207430}"/>
               </a:ext>
             </a:extLst>
           </p:cNvPr>
@@ -30292,7 +30292,7 @@
           <p:cNvPr id="15" name="">
             <a:extLst xmlns:a="http://schemas.openxmlformats.org/drawingml/2006/main">
               <a:ext uri="{FF2B5EF4-FFF2-40B4-BE49-F238E27FC236}">
-                <a16:creationId xmlns:a16="http://schemas.microsoft.com/office/drawing/2014/main" id="{0CC6AED1-6B1A-44A1-9004-7330C2F1AAFE}"/>
+                <a16:creationId xmlns:a16="http://schemas.microsoft.com/office/drawing/2014/main" id="{ABD04D0E-8B2B-4477-9BFC-FAD276D37847}"/>
               </a:ext>
             </a:extLst>
           </p:cNvPr>
@@ -30323,7 +30323,7 @@
           <p:cNvPr id="16" name="">
             <a:extLst xmlns:a="http://schemas.openxmlformats.org/drawingml/2006/main">
               <a:ext uri="{FF2B5EF4-FFF2-40B4-BE49-F238E27FC236}">
-                <a16:creationId xmlns:a16="http://schemas.microsoft.com/office/drawing/2014/main" id="{72AEE9C1-EF81-4B4B-9D8C-A1F497E7482D}"/>
+                <a16:creationId xmlns:a16="http://schemas.microsoft.com/office/drawing/2014/main" id="{0520E8A7-36D0-4B28-886B-32B997B4FFB1}"/>
               </a:ext>
             </a:extLst>
           </p:cNvPr>
@@ -30354,7 +30354,7 @@
           <p:cNvPr id="17" name="">
             <a:extLst xmlns:a="http://schemas.openxmlformats.org/drawingml/2006/main">
               <a:ext uri="{FF2B5EF4-FFF2-40B4-BE49-F238E27FC236}">
-                <a16:creationId xmlns:a16="http://schemas.microsoft.com/office/drawing/2014/main" id="{B93210B1-2D99-4E32-9395-3B55B85A1952}"/>
+                <a16:creationId xmlns:a16="http://schemas.microsoft.com/office/drawing/2014/main" id="{A72EC4C1-DD2F-488F-B571-39C41FFF722A}"/>
               </a:ext>
             </a:extLst>
           </p:cNvPr>
@@ -30406,7 +30406,7 @@
           <p:cNvPr id="18" name="">
             <a:extLst xmlns:a="http://schemas.openxmlformats.org/drawingml/2006/main">
               <a:ext uri="{FF2B5EF4-FFF2-40B4-BE49-F238E27FC236}">
-                <a16:creationId xmlns:a16="http://schemas.microsoft.com/office/drawing/2014/main" id="{02CF511D-F4AD-4D1C-B8BB-0714761718E0}"/>
+                <a16:creationId xmlns:a16="http://schemas.microsoft.com/office/drawing/2014/main" id="{90B94F66-6DC6-4CA4-B7CD-A90F157E3AD7}"/>
               </a:ext>
             </a:extLst>
           </p:cNvPr>
@@ -30458,7 +30458,7 @@
           <p:cNvPr id="19" name="">
             <a:extLst xmlns:a="http://schemas.openxmlformats.org/drawingml/2006/main">
               <a:ext uri="{FF2B5EF4-FFF2-40B4-BE49-F238E27FC236}">
-                <a16:creationId xmlns:a16="http://schemas.microsoft.com/office/drawing/2014/main" id="{4D3B9C2C-614F-4FBA-A64D-AD97651F15A7}"/>
+                <a16:creationId xmlns:a16="http://schemas.microsoft.com/office/drawing/2014/main" id="{674CD22D-75E7-4117-B659-8E58A4CD8F6E}"/>
               </a:ext>
             </a:extLst>
           </p:cNvPr>
@@ -30510,7 +30510,7 @@
           <p:cNvPr id="20" name="">
             <a:extLst xmlns:a="http://schemas.openxmlformats.org/drawingml/2006/main">
               <a:ext uri="{FF2B5EF4-FFF2-40B4-BE49-F238E27FC236}">
-                <a16:creationId xmlns:a16="http://schemas.microsoft.com/office/drawing/2014/main" id="{19A3A532-F319-44B1-A7CF-A2AA91A8005B}"/>
+                <a16:creationId xmlns:a16="http://schemas.microsoft.com/office/drawing/2014/main" id="{8812C02F-0AB5-4148-AD33-4AEF9A0234CD}"/>
               </a:ext>
             </a:extLst>
           </p:cNvPr>
@@ -30553,7 +30553,7 @@
           <p:cNvPr id="21" name="">
             <a:extLst xmlns:a="http://schemas.openxmlformats.org/drawingml/2006/main">
               <a:ext uri="{FF2B5EF4-FFF2-40B4-BE49-F238E27FC236}">
-                <a16:creationId xmlns:a16="http://schemas.microsoft.com/office/drawing/2014/main" id="{9CBC2AB6-9889-48B5-865A-A75DB3F2C44E}"/>
+                <a16:creationId xmlns:a16="http://schemas.microsoft.com/office/drawing/2014/main" id="{5E136AB4-4F0E-49F7-B1DD-691B0F247DF4}"/>
               </a:ext>
             </a:extLst>
           </p:cNvPr>
@@ -30584,7 +30584,7 @@
           <p:cNvPr id="22" name="">
             <a:extLst xmlns:a="http://schemas.openxmlformats.org/drawingml/2006/main">
               <a:ext uri="{FF2B5EF4-FFF2-40B4-BE49-F238E27FC236}">
-                <a16:creationId xmlns:a16="http://schemas.microsoft.com/office/drawing/2014/main" id="{C1C4DB26-CB35-4F72-820C-BDB1F7F1B800}"/>
+                <a16:creationId xmlns:a16="http://schemas.microsoft.com/office/drawing/2014/main" id="{EF78E227-8E98-4090-BE92-DFEFBE720F17}"/>
               </a:ext>
             </a:extLst>
           </p:cNvPr>
@@ -30615,7 +30615,7 @@
           <p:cNvPr id="23" name="">
             <a:extLst xmlns:a="http://schemas.openxmlformats.org/drawingml/2006/main">
               <a:ext uri="{FF2B5EF4-FFF2-40B4-BE49-F238E27FC236}">
-                <a16:creationId xmlns:a16="http://schemas.microsoft.com/office/drawing/2014/main" id="{BC434DAC-A8F3-42C0-A48F-FE96F35B256D}"/>
+                <a16:creationId xmlns:a16="http://schemas.microsoft.com/office/drawing/2014/main" id="{0826C740-02EA-4EBD-90C7-4B8C3B068D65}"/>
               </a:ext>
             </a:extLst>
           </p:cNvPr>
@@ -30667,7 +30667,7 @@
           <p:cNvPr id="24" name="">
             <a:extLst xmlns:a="http://schemas.openxmlformats.org/drawingml/2006/main">
               <a:ext uri="{FF2B5EF4-FFF2-40B4-BE49-F238E27FC236}">
-                <a16:creationId xmlns:a16="http://schemas.microsoft.com/office/drawing/2014/main" id="{7A28CA3E-E0CB-4633-8F8E-F223355CEF20}"/>
+                <a16:creationId xmlns:a16="http://schemas.microsoft.com/office/drawing/2014/main" id="{A961AE0D-33FD-403D-BE90-6FBC5A92A169}"/>
               </a:ext>
             </a:extLst>
           </p:cNvPr>
@@ -30719,7 +30719,7 @@
           <p:cNvPr id="25" name="">
             <a:extLst xmlns:a="http://schemas.openxmlformats.org/drawingml/2006/main">
               <a:ext uri="{FF2B5EF4-FFF2-40B4-BE49-F238E27FC236}">
-                <a16:creationId xmlns:a16="http://schemas.microsoft.com/office/drawing/2014/main" id="{6DC401A7-2F76-4D41-A9C6-026A80A5873D}"/>
+                <a16:creationId xmlns:a16="http://schemas.microsoft.com/office/drawing/2014/main" id="{AA8C920F-7A27-496F-9600-F14C48DA4A9D}"/>
               </a:ext>
             </a:extLst>
           </p:cNvPr>
@@ -30771,7 +30771,7 @@
           <p:cNvPr id="26" name="">
             <a:extLst xmlns:a="http://schemas.openxmlformats.org/drawingml/2006/main">
               <a:ext uri="{FF2B5EF4-FFF2-40B4-BE49-F238E27FC236}">
-                <a16:creationId xmlns:a16="http://schemas.microsoft.com/office/drawing/2014/main" id="{2EF85D9C-34AE-4F24-B4B6-E9A1F6237502}"/>
+                <a16:creationId xmlns:a16="http://schemas.microsoft.com/office/drawing/2014/main" id="{71A89CE4-A237-4C07-87FD-4D1F2ADD3F66}"/>
               </a:ext>
             </a:extLst>
           </p:cNvPr>
@@ -30814,7 +30814,7 @@
           <p:cNvPr id="27" name="">
             <a:extLst xmlns:a="http://schemas.openxmlformats.org/drawingml/2006/main">
               <a:ext uri="{FF2B5EF4-FFF2-40B4-BE49-F238E27FC236}">
-                <a16:creationId xmlns:a16="http://schemas.microsoft.com/office/drawing/2014/main" id="{9132D7EC-2827-48DB-94F6-EFE5115D6670}"/>
+                <a16:creationId xmlns:a16="http://schemas.microsoft.com/office/drawing/2014/main" id="{6C227B6C-4207-4BC9-B0B6-B5DCE94EF33E}"/>
               </a:ext>
             </a:extLst>
           </p:cNvPr>
@@ -30845,7 +30845,7 @@
           <p:cNvPr id="28" name="">
             <a:extLst xmlns:a="http://schemas.openxmlformats.org/drawingml/2006/main">
               <a:ext uri="{FF2B5EF4-FFF2-40B4-BE49-F238E27FC236}">
-                <a16:creationId xmlns:a16="http://schemas.microsoft.com/office/drawing/2014/main" id="{7CBE45F7-C17E-4CB5-919B-9E05E3842798}"/>
+                <a16:creationId xmlns:a16="http://schemas.microsoft.com/office/drawing/2014/main" id="{083E2264-7E91-44E0-A3B6-D3913A324265}"/>
               </a:ext>
             </a:extLst>
           </p:cNvPr>
@@ -30876,7 +30876,7 @@
           <p:cNvPr id="29" name="">
             <a:extLst xmlns:a="http://schemas.openxmlformats.org/drawingml/2006/main">
               <a:ext uri="{FF2B5EF4-FFF2-40B4-BE49-F238E27FC236}">
-                <a16:creationId xmlns:a16="http://schemas.microsoft.com/office/drawing/2014/main" id="{0ED3BD78-0DBE-4AEC-AB95-7528083B19AB}"/>
+                <a16:creationId xmlns:a16="http://schemas.microsoft.com/office/drawing/2014/main" id="{992B25BD-E9BC-417E-97C3-EEBE8BECA78F}"/>
               </a:ext>
             </a:extLst>
           </p:cNvPr>
@@ -30928,7 +30928,7 @@
           <p:cNvPr id="30" name="">
             <a:extLst xmlns:a="http://schemas.openxmlformats.org/drawingml/2006/main">
               <a:ext uri="{FF2B5EF4-FFF2-40B4-BE49-F238E27FC236}">
-                <a16:creationId xmlns:a16="http://schemas.microsoft.com/office/drawing/2014/main" id="{870D161D-911F-431D-AA82-D3B41FC1E3EB}"/>
+                <a16:creationId xmlns:a16="http://schemas.microsoft.com/office/drawing/2014/main" id="{64F13353-FB8B-415F-8980-0CA974A32369}"/>
               </a:ext>
             </a:extLst>
           </p:cNvPr>
@@ -30980,7 +30980,7 @@
           <p:cNvPr id="31" name="">
             <a:extLst xmlns:a="http://schemas.openxmlformats.org/drawingml/2006/main">
               <a:ext uri="{FF2B5EF4-FFF2-40B4-BE49-F238E27FC236}">
-                <a16:creationId xmlns:a16="http://schemas.microsoft.com/office/drawing/2014/main" id="{6C1B6C85-4F50-4605-BB9C-2DF90E211460}"/>
+                <a16:creationId xmlns:a16="http://schemas.microsoft.com/office/drawing/2014/main" id="{A705C3F4-6F23-407F-A07A-D2FB721D401A}"/>
               </a:ext>
             </a:extLst>
           </p:cNvPr>
@@ -31032,7 +31032,7 @@
           <p:cNvPr id="32" name="">
             <a:extLst xmlns:a="http://schemas.openxmlformats.org/drawingml/2006/main">
               <a:ext uri="{FF2B5EF4-FFF2-40B4-BE49-F238E27FC236}">
-                <a16:creationId xmlns:a16="http://schemas.microsoft.com/office/drawing/2014/main" id="{69C855AA-4D80-472D-9AD0-486286ECC3EC}"/>
+                <a16:creationId xmlns:a16="http://schemas.microsoft.com/office/drawing/2014/main" id="{3FC1B6D6-52CB-4BDD-84F7-A01237D2C8F7}"/>
               </a:ext>
             </a:extLst>
           </p:cNvPr>
@@ -31075,7 +31075,7 @@
           <p:cNvPr id="33" name="">
             <a:extLst xmlns:a="http://schemas.openxmlformats.org/drawingml/2006/main">
               <a:ext uri="{FF2B5EF4-FFF2-40B4-BE49-F238E27FC236}">
-                <a16:creationId xmlns:a16="http://schemas.microsoft.com/office/drawing/2014/main" id="{871B76F6-E17A-403D-AC4A-4A4956D0D3A0}"/>
+                <a16:creationId xmlns:a16="http://schemas.microsoft.com/office/drawing/2014/main" id="{8A090F54-263F-4F6E-B61E-1FA60D5A8D3D}"/>
               </a:ext>
             </a:extLst>
           </p:cNvPr>
@@ -31106,7 +31106,7 @@
           <p:cNvPr id="34" name="">
             <a:extLst xmlns:a="http://schemas.openxmlformats.org/drawingml/2006/main">
               <a:ext uri="{FF2B5EF4-FFF2-40B4-BE49-F238E27FC236}">
-                <a16:creationId xmlns:a16="http://schemas.microsoft.com/office/drawing/2014/main" id="{719AF277-9B7E-4DD5-8E7F-9229D621615C}"/>
+                <a16:creationId xmlns:a16="http://schemas.microsoft.com/office/drawing/2014/main" id="{9F7CE0E4-5768-4554-9188-43DFBB246F9A}"/>
               </a:ext>
             </a:extLst>
           </p:cNvPr>
@@ -31137,7 +31137,7 @@
           <p:cNvPr id="35" name="">
             <a:extLst xmlns:a="http://schemas.openxmlformats.org/drawingml/2006/main">
               <a:ext uri="{FF2B5EF4-FFF2-40B4-BE49-F238E27FC236}">
-                <a16:creationId xmlns:a16="http://schemas.microsoft.com/office/drawing/2014/main" id="{7007C98D-8A43-4BE4-AC51-9D9C2A1CD85E}"/>
+                <a16:creationId xmlns:a16="http://schemas.microsoft.com/office/drawing/2014/main" id="{E5325532-46B5-4327-8FA8-67E417494E95}"/>
               </a:ext>
             </a:extLst>
           </p:cNvPr>
@@ -31189,7 +31189,7 @@
           <p:cNvPr id="36" name="">
             <a:extLst xmlns:a="http://schemas.openxmlformats.org/drawingml/2006/main">
               <a:ext uri="{FF2B5EF4-FFF2-40B4-BE49-F238E27FC236}">
-                <a16:creationId xmlns:a16="http://schemas.microsoft.com/office/drawing/2014/main" id="{DFCE5235-BD7E-49BC-A6D7-BC36A8D4BB30}"/>
+                <a16:creationId xmlns:a16="http://schemas.microsoft.com/office/drawing/2014/main" id="{92F08980-D9A3-4C19-85C4-81A4CA901CBD}"/>
               </a:ext>
             </a:extLst>
           </p:cNvPr>
@@ -31241,7 +31241,7 @@
           <p:cNvPr id="37" name="">
             <a:extLst xmlns:a="http://schemas.openxmlformats.org/drawingml/2006/main">
               <a:ext uri="{FF2B5EF4-FFF2-40B4-BE49-F238E27FC236}">
-                <a16:creationId xmlns:a16="http://schemas.microsoft.com/office/drawing/2014/main" id="{F8B69C3C-AE8F-4FB9-A94A-770FEAFC77E0}"/>
+                <a16:creationId xmlns:a16="http://schemas.microsoft.com/office/drawing/2014/main" id="{8E87AEEB-4669-4CA4-8889-F2F91F6E0034}"/>
               </a:ext>
             </a:extLst>
           </p:cNvPr>
@@ -31297,10 +31297,10 @@
           <p:nvPr/>
         </p:nvPicPr>
         <p:blipFill>
-          <a:blip xmlns:r="http://schemas.openxmlformats.org/officeDocument/2006/relationships" xmlns:a="http://schemas.openxmlformats.org/drawingml/2006/main" r:embed="R7fd6462e2fba4995">
+          <a:blip xmlns:r="http://schemas.openxmlformats.org/officeDocument/2006/relationships" xmlns:a="http://schemas.openxmlformats.org/drawingml/2006/main" r:embed="R174d70c600f94a50">
             <a:extLst>
               <a:ext uri="{96DAC541-7B7A-43D3-8B79-37D633B846F1}">
-                <asvg:svgBlip xmlns:asvg="http://schemas.microsoft.com/office/drawing/2016/SVG/main" r:embed="R10ab7650e4664ae0"/>
+                <asvg:svgBlip xmlns:asvg="http://schemas.microsoft.com/office/drawing/2016/SVG/main" r:embed="Rec4729cb58aa4d76"/>
               </a:ext>
             </a:extLst>
           </a:blip>
@@ -31321,7 +31321,7 @@
           <p:cNvPr id="39" name="">
             <a:extLst xmlns:a="http://schemas.openxmlformats.org/drawingml/2006/main">
               <a:ext uri="{FF2B5EF4-FFF2-40B4-BE49-F238E27FC236}">
-                <a16:creationId xmlns:a16="http://schemas.microsoft.com/office/drawing/2014/main" id="{A9C07FB9-B10D-4CFE-BF77-3B65065FA1A7}"/>
+                <a16:creationId xmlns:a16="http://schemas.microsoft.com/office/drawing/2014/main" id="{A997BE34-6485-4C35-A75E-318EEA952FA5}"/>
               </a:ext>
             </a:extLst>
           </p:cNvPr>
@@ -31373,7 +31373,7 @@
           <p:cNvPr id="40" name="">
             <a:extLst xmlns:a="http://schemas.openxmlformats.org/drawingml/2006/main">
               <a:ext uri="{FF2B5EF4-FFF2-40B4-BE49-F238E27FC236}">
-                <a16:creationId xmlns:a16="http://schemas.microsoft.com/office/drawing/2014/main" id="{596202C0-4CB2-4C05-AF85-965B6B4B30C5}"/>
+                <a16:creationId xmlns:a16="http://schemas.microsoft.com/office/drawing/2014/main" id="{1B0E64FD-840E-4ABA-B577-D9F104FC14A0}"/>
               </a:ext>
             </a:extLst>
           </p:cNvPr>
@@ -31425,7 +31425,7 @@
           <p:cNvPr id="41" name="">
             <a:extLst xmlns:a="http://schemas.openxmlformats.org/drawingml/2006/main">
               <a:ext uri="{FF2B5EF4-FFF2-40B4-BE49-F238E27FC236}">
-                <a16:creationId xmlns:a16="http://schemas.microsoft.com/office/drawing/2014/main" id="{5315F384-4454-4075-B6F3-E16E6B1150EA}"/>
+                <a16:creationId xmlns:a16="http://schemas.microsoft.com/office/drawing/2014/main" id="{037F9183-C3F5-4EB2-8E9A-D4F3569BE582}"/>
               </a:ext>
             </a:extLst>
           </p:cNvPr>
@@ -31468,7 +31468,7 @@
           <p:cNvPr id="42" name="">
             <a:extLst xmlns:a="http://schemas.openxmlformats.org/drawingml/2006/main">
               <a:ext uri="{FF2B5EF4-FFF2-40B4-BE49-F238E27FC236}">
-                <a16:creationId xmlns:a16="http://schemas.microsoft.com/office/drawing/2014/main" id="{8107DD2C-5527-4FCF-BB30-B8B500C6919E}"/>
+                <a16:creationId xmlns:a16="http://schemas.microsoft.com/office/drawing/2014/main" id="{95DB6292-9CFD-472C-A778-1110C1EE2AA8}"/>
               </a:ext>
             </a:extLst>
           </p:cNvPr>
@@ -31499,7 +31499,7 @@
           <p:cNvPr id="43" name="">
             <a:extLst xmlns:a="http://schemas.openxmlformats.org/drawingml/2006/main">
               <a:ext uri="{FF2B5EF4-FFF2-40B4-BE49-F238E27FC236}">
-                <a16:creationId xmlns:a16="http://schemas.microsoft.com/office/drawing/2014/main" id="{9A862444-A816-4FA5-97F8-8F0D3AEEB492}"/>
+                <a16:creationId xmlns:a16="http://schemas.microsoft.com/office/drawing/2014/main" id="{D4F31BBE-D735-4664-B683-978302F50969}"/>
               </a:ext>
             </a:extLst>
           </p:cNvPr>
@@ -31530,7 +31530,7 @@
           <p:cNvPr id="44" name="">
             <a:extLst xmlns:a="http://schemas.openxmlformats.org/drawingml/2006/main">
               <a:ext uri="{FF2B5EF4-FFF2-40B4-BE49-F238E27FC236}">
-                <a16:creationId xmlns:a16="http://schemas.microsoft.com/office/drawing/2014/main" id="{87674A12-869E-4232-A823-EAFE37C74F24}"/>
+                <a16:creationId xmlns:a16="http://schemas.microsoft.com/office/drawing/2014/main" id="{9F997B99-9472-453D-8236-0127F1570BB0}"/>
               </a:ext>
             </a:extLst>
           </p:cNvPr>
@@ -31573,7 +31573,7 @@
           <p:cNvPr id="45" name="">
             <a:extLst xmlns:a="http://schemas.openxmlformats.org/drawingml/2006/main">
               <a:ext uri="{FF2B5EF4-FFF2-40B4-BE49-F238E27FC236}">
-                <a16:creationId xmlns:a16="http://schemas.microsoft.com/office/drawing/2014/main" id="{AA8E5E7D-F7CC-4404-81C3-70EA32021B41}"/>
+                <a16:creationId xmlns:a16="http://schemas.microsoft.com/office/drawing/2014/main" id="{EAD9644D-4F57-44CA-A729-5E96CD57B05C}"/>
               </a:ext>
             </a:extLst>
           </p:cNvPr>
@@ -31604,7 +31604,7 @@
           <p:cNvPr id="46" name="">
             <a:extLst xmlns:a="http://schemas.openxmlformats.org/drawingml/2006/main">
               <a:ext uri="{FF2B5EF4-FFF2-40B4-BE49-F238E27FC236}">
-                <a16:creationId xmlns:a16="http://schemas.microsoft.com/office/drawing/2014/main" id="{6C361F3E-0034-419F-BA38-93B2B3CC9019}"/>
+                <a16:creationId xmlns:a16="http://schemas.microsoft.com/office/drawing/2014/main" id="{C336CDF2-5A0A-49D6-ABC4-189824F96F7C}"/>
               </a:ext>
             </a:extLst>
           </p:cNvPr>
@@ -31635,7 +31635,7 @@
           <p:cNvPr id="47" name="">
             <a:extLst xmlns:a="http://schemas.openxmlformats.org/drawingml/2006/main">
               <a:ext uri="{FF2B5EF4-FFF2-40B4-BE49-F238E27FC236}">
-                <a16:creationId xmlns:a16="http://schemas.microsoft.com/office/drawing/2014/main" id="{A833FEBF-1477-4FEF-BC2F-9BD124ABCBF4}"/>
+                <a16:creationId xmlns:a16="http://schemas.microsoft.com/office/drawing/2014/main" id="{40F94E93-5B67-4784-A461-63ACB779AEFC}"/>
               </a:ext>
             </a:extLst>
           </p:cNvPr>
@@ -31687,7 +31687,7 @@
           <p:cNvPr id="48" name="">
             <a:extLst xmlns:a="http://schemas.openxmlformats.org/drawingml/2006/main">
               <a:ext uri="{FF2B5EF4-FFF2-40B4-BE49-F238E27FC236}">
-                <a16:creationId xmlns:a16="http://schemas.microsoft.com/office/drawing/2014/main" id="{A8E221BC-01FB-45B2-81A6-38C4D6FEED16}"/>
+                <a16:creationId xmlns:a16="http://schemas.microsoft.com/office/drawing/2014/main" id="{B3AC0F84-419E-4EC3-8E51-0E86C1899990}"/>
               </a:ext>
             </a:extLst>
           </p:cNvPr>
@@ -31720,7 +31720,7 @@
           <p:cNvPr id="49" name="">
             <a:extLst xmlns:a="http://schemas.openxmlformats.org/drawingml/2006/main">
               <a:ext uri="{FF2B5EF4-FFF2-40B4-BE49-F238E27FC236}">
-                <a16:creationId xmlns:a16="http://schemas.microsoft.com/office/drawing/2014/main" id="{28EF544D-51A3-43F1-9DF4-1C702663273B}"/>
+                <a16:creationId xmlns:a16="http://schemas.microsoft.com/office/drawing/2014/main" id="{C24D47FA-DB4A-4A20-A1A7-7EA6C787AB24}"/>
               </a:ext>
             </a:extLst>
           </p:cNvPr>
@@ -31772,7 +31772,7 @@
           <p:cNvPr id="50" name="">
             <a:extLst xmlns:a="http://schemas.openxmlformats.org/drawingml/2006/main">
               <a:ext uri="{FF2B5EF4-FFF2-40B4-BE49-F238E27FC236}">
-                <a16:creationId xmlns:a16="http://schemas.microsoft.com/office/drawing/2014/main" id="{0AE69110-A7AA-4B2E-8D7A-9A0B3DEFA2E1}"/>
+                <a16:creationId xmlns:a16="http://schemas.microsoft.com/office/drawing/2014/main" id="{C09E39E4-0E1D-4677-9FA3-E3FA2693E546}"/>
               </a:ext>
             </a:extLst>
           </p:cNvPr>
@@ -31824,7 +31824,7 @@
           <p:cNvPr id="51" name="">
             <a:extLst xmlns:a="http://schemas.openxmlformats.org/drawingml/2006/main">
               <a:ext uri="{FF2B5EF4-FFF2-40B4-BE49-F238E27FC236}">
-                <a16:creationId xmlns:a16="http://schemas.microsoft.com/office/drawing/2014/main" id="{3BAF5370-7365-495B-B06F-2C5F28F14193}"/>
+                <a16:creationId xmlns:a16="http://schemas.microsoft.com/office/drawing/2014/main" id="{84AF2AB2-F08A-467B-9B60-293DB6BE6C3A}"/>
               </a:ext>
             </a:extLst>
           </p:cNvPr>
@@ -31876,7 +31876,7 @@
           <p:cNvPr id="52" name="">
             <a:extLst xmlns:a="http://schemas.openxmlformats.org/drawingml/2006/main">
               <a:ext uri="{FF2B5EF4-FFF2-40B4-BE49-F238E27FC236}">
-                <a16:creationId xmlns:a16="http://schemas.microsoft.com/office/drawing/2014/main" id="{18CADFDD-AF70-4B3C-95A3-4D624BB58F33}"/>
+                <a16:creationId xmlns:a16="http://schemas.microsoft.com/office/drawing/2014/main" id="{042D552B-9F61-43EE-AD3F-93A27DAF7E5B}"/>
               </a:ext>
             </a:extLst>
           </p:cNvPr>
@@ -31919,7 +31919,7 @@
           <p:cNvPr id="53" name="">
             <a:extLst xmlns:a="http://schemas.openxmlformats.org/drawingml/2006/main">
               <a:ext uri="{FF2B5EF4-FFF2-40B4-BE49-F238E27FC236}">
-                <a16:creationId xmlns:a16="http://schemas.microsoft.com/office/drawing/2014/main" id="{B2F7AE12-1A1C-4C3B-B88A-65D08AAA1B57}"/>
+                <a16:creationId xmlns:a16="http://schemas.microsoft.com/office/drawing/2014/main" id="{DF622290-54ED-4D02-9C2C-122B58520634}"/>
               </a:ext>
             </a:extLst>
           </p:cNvPr>
@@ -31950,7 +31950,7 @@
           <p:cNvPr id="54" name="">
             <a:extLst xmlns:a="http://schemas.openxmlformats.org/drawingml/2006/main">
               <a:ext uri="{FF2B5EF4-FFF2-40B4-BE49-F238E27FC236}">
-                <a16:creationId xmlns:a16="http://schemas.microsoft.com/office/drawing/2014/main" id="{90B2E81F-CB0D-48AA-8FDA-27A0F98F5BCB}"/>
+                <a16:creationId xmlns:a16="http://schemas.microsoft.com/office/drawing/2014/main" id="{7BF300DA-21A7-40F1-9DA5-D0814AF0AECA}"/>
               </a:ext>
             </a:extLst>
           </p:cNvPr>
@@ -31981,7 +31981,7 @@
           <p:cNvPr id="55" name="">
             <a:extLst xmlns:a="http://schemas.openxmlformats.org/drawingml/2006/main">
               <a:ext uri="{FF2B5EF4-FFF2-40B4-BE49-F238E27FC236}">
-                <a16:creationId xmlns:a16="http://schemas.microsoft.com/office/drawing/2014/main" id="{252BF1C3-E095-4EB6-B7E5-F943D793D117}"/>
+                <a16:creationId xmlns:a16="http://schemas.microsoft.com/office/drawing/2014/main" id="{CEBBD94D-CF83-43A5-9D46-D513609574F4}"/>
               </a:ext>
             </a:extLst>
           </p:cNvPr>
@@ -32033,7 +32033,7 @@
           <p:cNvPr id="56" name="">
             <a:extLst xmlns:a="http://schemas.openxmlformats.org/drawingml/2006/main">
               <a:ext uri="{FF2B5EF4-FFF2-40B4-BE49-F238E27FC236}">
-                <a16:creationId xmlns:a16="http://schemas.microsoft.com/office/drawing/2014/main" id="{6FB24887-F977-42D6-9A0B-DA6B561C8F2C}"/>
+                <a16:creationId xmlns:a16="http://schemas.microsoft.com/office/drawing/2014/main" id="{DD77A5DC-6F93-4FF3-9248-A98CA0394196}"/>
               </a:ext>
             </a:extLst>
           </p:cNvPr>
@@ -32066,7 +32066,7 @@
           <p:cNvPr id="57" name="">
             <a:extLst xmlns:a="http://schemas.openxmlformats.org/drawingml/2006/main">
               <a:ext uri="{FF2B5EF4-FFF2-40B4-BE49-F238E27FC236}">
-                <a16:creationId xmlns:a16="http://schemas.microsoft.com/office/drawing/2014/main" id="{F787C0BC-D079-45F6-97D8-60ECAB8219C7}"/>
+                <a16:creationId xmlns:a16="http://schemas.microsoft.com/office/drawing/2014/main" id="{ABB53B22-2BD9-46A0-8E7B-5289AA41047C}"/>
               </a:ext>
             </a:extLst>
           </p:cNvPr>
@@ -32118,7 +32118,7 @@
           <p:cNvPr id="58" name="">
             <a:extLst xmlns:a="http://schemas.openxmlformats.org/drawingml/2006/main">
               <a:ext uri="{FF2B5EF4-FFF2-40B4-BE49-F238E27FC236}">
-                <a16:creationId xmlns:a16="http://schemas.microsoft.com/office/drawing/2014/main" id="{3DB30DE7-AAB2-430C-9430-7B821C3EFB43}"/>
+                <a16:creationId xmlns:a16="http://schemas.microsoft.com/office/drawing/2014/main" id="{D93CD1CD-6FB9-435C-A6D4-1405361270A7}"/>
               </a:ext>
             </a:extLst>
           </p:cNvPr>
@@ -32170,7 +32170,7 @@
           <p:cNvPr id="59" name="">
             <a:extLst xmlns:a="http://schemas.openxmlformats.org/drawingml/2006/main">
               <a:ext uri="{FF2B5EF4-FFF2-40B4-BE49-F238E27FC236}">
-                <a16:creationId xmlns:a16="http://schemas.microsoft.com/office/drawing/2014/main" id="{D7D36A6B-1BC3-4A37-AF27-8B82A38D8E32}"/>
+                <a16:creationId xmlns:a16="http://schemas.microsoft.com/office/drawing/2014/main" id="{685B9177-D600-4108-BABC-28B20E9DB760}"/>
               </a:ext>
             </a:extLst>
           </p:cNvPr>
@@ -32222,7 +32222,7 @@
           <p:cNvPr id="60" name="">
             <a:extLst xmlns:a="http://schemas.openxmlformats.org/drawingml/2006/main">
               <a:ext uri="{FF2B5EF4-FFF2-40B4-BE49-F238E27FC236}">
-                <a16:creationId xmlns:a16="http://schemas.microsoft.com/office/drawing/2014/main" id="{C1B773FA-FADA-433C-A915-26494FEF1540}"/>
+                <a16:creationId xmlns:a16="http://schemas.microsoft.com/office/drawing/2014/main" id="{971FC622-4030-4ABF-8E06-51CE9FFE3687}"/>
               </a:ext>
             </a:extLst>
           </p:cNvPr>
@@ -32265,7 +32265,7 @@
           <p:cNvPr id="61" name="">
             <a:extLst xmlns:a="http://schemas.openxmlformats.org/drawingml/2006/main">
               <a:ext uri="{FF2B5EF4-FFF2-40B4-BE49-F238E27FC236}">
-                <a16:creationId xmlns:a16="http://schemas.microsoft.com/office/drawing/2014/main" id="{01E5B3D1-8110-4721-B164-AF6D28A41AE7}"/>
+                <a16:creationId xmlns:a16="http://schemas.microsoft.com/office/drawing/2014/main" id="{663CC04C-5112-4CB3-AD71-8B9E0553074E}"/>
               </a:ext>
             </a:extLst>
           </p:cNvPr>
@@ -32296,7 +32296,7 @@
           <p:cNvPr id="62" name="">
             <a:extLst xmlns:a="http://schemas.openxmlformats.org/drawingml/2006/main">
               <a:ext uri="{FF2B5EF4-FFF2-40B4-BE49-F238E27FC236}">
-                <a16:creationId xmlns:a16="http://schemas.microsoft.com/office/drawing/2014/main" id="{8A52DFDD-4953-4D0B-835E-8D43FCDCB636}"/>
+                <a16:creationId xmlns:a16="http://schemas.microsoft.com/office/drawing/2014/main" id="{CD024BAC-1C91-4CE3-BD4B-8072F30A63F4}"/>
               </a:ext>
             </a:extLst>
           </p:cNvPr>
@@ -32327,7 +32327,7 @@
           <p:cNvPr id="63" name="">
             <a:extLst xmlns:a="http://schemas.openxmlformats.org/drawingml/2006/main">
               <a:ext uri="{FF2B5EF4-FFF2-40B4-BE49-F238E27FC236}">
-                <a16:creationId xmlns:a16="http://schemas.microsoft.com/office/drawing/2014/main" id="{0EC38786-9A0D-4B38-9F00-2D3C76AA381E}"/>
+                <a16:creationId xmlns:a16="http://schemas.microsoft.com/office/drawing/2014/main" id="{971E0E0B-017B-4148-9BE2-D4F9C0E6A47D}"/>
               </a:ext>
             </a:extLst>
           </p:cNvPr>
@@ -32379,7 +32379,7 @@
           <p:cNvPr id="64" name="">
             <a:extLst xmlns:a="http://schemas.openxmlformats.org/drawingml/2006/main">
               <a:ext uri="{FF2B5EF4-FFF2-40B4-BE49-F238E27FC236}">
-                <a16:creationId xmlns:a16="http://schemas.microsoft.com/office/drawing/2014/main" id="{62FABD4A-D4BC-41C4-9AFE-718067233271}"/>
+                <a16:creationId xmlns:a16="http://schemas.microsoft.com/office/drawing/2014/main" id="{F8752C55-A2AA-4C18-8786-82DB489E967D}"/>
               </a:ext>
             </a:extLst>
           </p:cNvPr>
@@ -32412,7 +32412,7 @@
           <p:cNvPr id="65" name="">
             <a:extLst xmlns:a="http://schemas.openxmlformats.org/drawingml/2006/main">
               <a:ext uri="{FF2B5EF4-FFF2-40B4-BE49-F238E27FC236}">
-                <a16:creationId xmlns:a16="http://schemas.microsoft.com/office/drawing/2014/main" id="{A0ACC581-5EAD-4BBC-A419-E04C56D026FE}"/>
+                <a16:creationId xmlns:a16="http://schemas.microsoft.com/office/drawing/2014/main" id="{EAEBD205-EFF1-42F1-90D8-C6170F99E366}"/>
               </a:ext>
             </a:extLst>
           </p:cNvPr>
@@ -32464,7 +32464,7 @@
           <p:cNvPr id="66" name="">
             <a:extLst xmlns:a="http://schemas.openxmlformats.org/drawingml/2006/main">
               <a:ext uri="{FF2B5EF4-FFF2-40B4-BE49-F238E27FC236}">
-                <a16:creationId xmlns:a16="http://schemas.microsoft.com/office/drawing/2014/main" id="{A06E6F4B-E348-4A2D-A90D-875F646AE697}"/>
+                <a16:creationId xmlns:a16="http://schemas.microsoft.com/office/drawing/2014/main" id="{7E7D4C0A-B9D7-43AF-80DD-B2A8F4CF405E}"/>
               </a:ext>
             </a:extLst>
           </p:cNvPr>
@@ -32516,7 +32516,7 @@
           <p:cNvPr id="67" name="">
             <a:extLst xmlns:a="http://schemas.openxmlformats.org/drawingml/2006/main">
               <a:ext uri="{FF2B5EF4-FFF2-40B4-BE49-F238E27FC236}">
-                <a16:creationId xmlns:a16="http://schemas.microsoft.com/office/drawing/2014/main" id="{BF07A0D1-0A2F-4598-99C4-6E87424A5E29}"/>
+                <a16:creationId xmlns:a16="http://schemas.microsoft.com/office/drawing/2014/main" id="{C7F854C1-5069-43F0-8926-5CE0B1C1D5E0}"/>
               </a:ext>
             </a:extLst>
           </p:cNvPr>
@@ -32568,7 +32568,7 @@
           <p:cNvPr id="68" name="">
             <a:extLst xmlns:a="http://schemas.openxmlformats.org/drawingml/2006/main">
               <a:ext uri="{FF2B5EF4-FFF2-40B4-BE49-F238E27FC236}">
-                <a16:creationId xmlns:a16="http://schemas.microsoft.com/office/drawing/2014/main" id="{FEC3FD61-19F6-4757-A2F4-C5CDF482B627}"/>
+                <a16:creationId xmlns:a16="http://schemas.microsoft.com/office/drawing/2014/main" id="{1BD6F82C-1876-45D6-BD1E-2F24282AB449}"/>
               </a:ext>
             </a:extLst>
           </p:cNvPr>
@@ -32611,7 +32611,7 @@
           <p:cNvPr id="69" name="">
             <a:extLst xmlns:a="http://schemas.openxmlformats.org/drawingml/2006/main">
               <a:ext uri="{FF2B5EF4-FFF2-40B4-BE49-F238E27FC236}">
-                <a16:creationId xmlns:a16="http://schemas.microsoft.com/office/drawing/2014/main" id="{4163C14C-25DA-451C-ABB1-6E15225516A9}"/>
+                <a16:creationId xmlns:a16="http://schemas.microsoft.com/office/drawing/2014/main" id="{B45C8DE7-8C15-4BF9-BD12-B95A8EC34494}"/>
               </a:ext>
             </a:extLst>
           </p:cNvPr>
@@ -32642,7 +32642,7 @@
           <p:cNvPr id="70" name="">
             <a:extLst xmlns:a="http://schemas.openxmlformats.org/drawingml/2006/main">
               <a:ext uri="{FF2B5EF4-FFF2-40B4-BE49-F238E27FC236}">
-                <a16:creationId xmlns:a16="http://schemas.microsoft.com/office/drawing/2014/main" id="{6893B530-BDA8-42FA-BE41-2D5BFC57FEA3}"/>
+                <a16:creationId xmlns:a16="http://schemas.microsoft.com/office/drawing/2014/main" id="{B9DD852E-A4A6-4BCF-8C54-32A2920712FA}"/>
               </a:ext>
             </a:extLst>
           </p:cNvPr>
@@ -32673,7 +32673,7 @@
           <p:cNvPr id="71" name="">
             <a:extLst xmlns:a="http://schemas.openxmlformats.org/drawingml/2006/main">
               <a:ext uri="{FF2B5EF4-FFF2-40B4-BE49-F238E27FC236}">
-                <a16:creationId xmlns:a16="http://schemas.microsoft.com/office/drawing/2014/main" id="{BE42E2A3-161A-40BF-9857-8E1C2BD9D12A}"/>
+                <a16:creationId xmlns:a16="http://schemas.microsoft.com/office/drawing/2014/main" id="{BDFC6920-F55F-4691-B302-456FF7797CAF}"/>
               </a:ext>
             </a:extLst>
           </p:cNvPr>
@@ -32725,7 +32725,7 @@
           <p:cNvPr id="72" name="">
             <a:extLst xmlns:a="http://schemas.openxmlformats.org/drawingml/2006/main">
               <a:ext uri="{FF2B5EF4-FFF2-40B4-BE49-F238E27FC236}">
-                <a16:creationId xmlns:a16="http://schemas.microsoft.com/office/drawing/2014/main" id="{4F8090C8-602F-4AE8-9F50-E26B42B3A665}"/>
+                <a16:creationId xmlns:a16="http://schemas.microsoft.com/office/drawing/2014/main" id="{04608193-8140-4EC0-9E3F-AF330B67760C}"/>
               </a:ext>
             </a:extLst>
           </p:cNvPr>
@@ -32758,7 +32758,7 @@
           <p:cNvPr id="73" name="">
             <a:extLst xmlns:a="http://schemas.openxmlformats.org/drawingml/2006/main">
               <a:ext uri="{FF2B5EF4-FFF2-40B4-BE49-F238E27FC236}">
-                <a16:creationId xmlns:a16="http://schemas.microsoft.com/office/drawing/2014/main" id="{0D74A4E9-32B4-44C0-89FC-F5564771CCD7}"/>
+                <a16:creationId xmlns:a16="http://schemas.microsoft.com/office/drawing/2014/main" id="{87E0812A-5BD0-4BC9-B1B3-8D8F0CB7B91A}"/>
               </a:ext>
             </a:extLst>
           </p:cNvPr>
@@ -32810,7 +32810,7 @@
           <p:cNvPr id="74" name="">
             <a:extLst xmlns:a="http://schemas.openxmlformats.org/drawingml/2006/main">
               <a:ext uri="{FF2B5EF4-FFF2-40B4-BE49-F238E27FC236}">
-                <a16:creationId xmlns:a16="http://schemas.microsoft.com/office/drawing/2014/main" id="{A386D899-17C3-4AAF-BC73-11550667C1AB}"/>
+                <a16:creationId xmlns:a16="http://schemas.microsoft.com/office/drawing/2014/main" id="{B3C55DAF-884B-4244-B008-FFB334822DB4}"/>
               </a:ext>
             </a:extLst>
           </p:cNvPr>
@@ -32862,7 +32862,7 @@
           <p:cNvPr id="75" name="">
             <a:extLst xmlns:a="http://schemas.openxmlformats.org/drawingml/2006/main">
               <a:ext uri="{FF2B5EF4-FFF2-40B4-BE49-F238E27FC236}">
-                <a16:creationId xmlns:a16="http://schemas.microsoft.com/office/drawing/2014/main" id="{7950673A-818B-4AAF-9BE3-1CF05E2D7729}"/>
+                <a16:creationId xmlns:a16="http://schemas.microsoft.com/office/drawing/2014/main" id="{32A91792-29FC-4BDA-B3BA-1E57AB3B2BC5}"/>
               </a:ext>
             </a:extLst>
           </p:cNvPr>
@@ -32912,7 +32912,7 @@
     </p:spTree>
     <p:extLst>
       <p:ext uri="{BB962C8B-B14F-4D97-AF65-F5344CB8AC3E}">
-        <p14:creationId xmlns:p14="http://schemas.microsoft.com/office/powerpoint/2010/main" val="2049614878"/>
+        <p14:creationId xmlns:p14="http://schemas.microsoft.com/office/powerpoint/2010/main" val="1499260537"/>
       </p:ext>
     </p:extLst>
   </p:cSld>
@@ -32943,7 +32943,7 @@
           <p:cNvPr id="30" name="">
             <a:extLst xmlns:a="http://schemas.openxmlformats.org/drawingml/2006/main">
               <a:ext uri="{FF2B5EF4-FFF2-40B4-BE49-F238E27FC236}">
-                <a16:creationId xmlns:a16="http://schemas.microsoft.com/office/drawing/2014/main" id="{8EFCBCA7-5F43-4567-A951-EDEAC02CCFB1}"/>
+                <a16:creationId xmlns:a16="http://schemas.microsoft.com/office/drawing/2014/main" id="{828CB68E-A40A-453D-BABA-282386F5E234}"/>
               </a:ext>
             </a:extLst>
           </p:cNvPr>
@@ -32976,7 +32976,7 @@
           <p:cNvPr id="2" name="">
             <a:extLst xmlns:a="http://schemas.openxmlformats.org/drawingml/2006/main">
               <a:ext uri="{FF2B5EF4-FFF2-40B4-BE49-F238E27FC236}">
-                <a16:creationId xmlns:a16="http://schemas.microsoft.com/office/drawing/2014/main" id="{E29CD7DD-DCF6-45A0-8D6F-3BB9C7ECDE84}"/>
+                <a16:creationId xmlns:a16="http://schemas.microsoft.com/office/drawing/2014/main" id="{69AC50D6-445C-40A7-B8E5-EF007F66AA7C}"/>
               </a:ext>
             </a:extLst>
           </p:cNvPr>
@@ -33007,7 +33007,7 @@
           <p:cNvPr id="3" name="">
             <a:extLst xmlns:a="http://schemas.openxmlformats.org/drawingml/2006/main">
               <a:ext uri="{FF2B5EF4-FFF2-40B4-BE49-F238E27FC236}">
-                <a16:creationId xmlns:a16="http://schemas.microsoft.com/office/drawing/2014/main" id="{A8C83CC6-A852-4E7E-BE61-98DCD2884CA1}"/>
+                <a16:creationId xmlns:a16="http://schemas.microsoft.com/office/drawing/2014/main" id="{C4049D67-63C8-493D-9131-BFB2B42615BD}"/>
               </a:ext>
             </a:extLst>
           </p:cNvPr>
@@ -33059,7 +33059,7 @@
           <p:cNvPr id="4" name="">
             <a:extLst xmlns:a="http://schemas.openxmlformats.org/drawingml/2006/main">
               <a:ext uri="{FF2B5EF4-FFF2-40B4-BE49-F238E27FC236}">
-                <a16:creationId xmlns:a16="http://schemas.microsoft.com/office/drawing/2014/main" id="{48E30291-4414-4256-8CAC-8DFCE1BA3508}"/>
+                <a16:creationId xmlns:a16="http://schemas.microsoft.com/office/drawing/2014/main" id="{54F45513-7F61-40D3-BF46-37BA501735FD}"/>
               </a:ext>
             </a:extLst>
           </p:cNvPr>
@@ -33111,7 +33111,7 @@
           <p:cNvPr id="5" name="">
             <a:extLst xmlns:a="http://schemas.openxmlformats.org/drawingml/2006/main">
               <a:ext uri="{FF2B5EF4-FFF2-40B4-BE49-F238E27FC236}">
-                <a16:creationId xmlns:a16="http://schemas.microsoft.com/office/drawing/2014/main" id="{C65CCBE7-DFDA-449D-A579-369E9F3D6F3E}"/>
+                <a16:creationId xmlns:a16="http://schemas.microsoft.com/office/drawing/2014/main" id="{0225008F-60FA-4F31-B10B-802F2E176BA6}"/>
               </a:ext>
             </a:extLst>
           </p:cNvPr>
@@ -33146,7 +33146,7 @@
           <p:nvPr/>
         </p:nvPicPr>
         <p:blipFill>
-          <a:blip xmlns:r="http://schemas.openxmlformats.org/officeDocument/2006/relationships" xmlns:a="http://schemas.openxmlformats.org/drawingml/2006/main" r:embed="Rd140ac28d61b4eed"/>
+          <a:blip xmlns:r="http://schemas.openxmlformats.org/officeDocument/2006/relationships" xmlns:a="http://schemas.openxmlformats.org/drawingml/2006/main" r:embed="Rbcb594dc21ca4a55"/>
           <a:stretch xmlns:a="http://schemas.openxmlformats.org/drawingml/2006/main"/>
         </p:blipFill>
         <p:spPr>
@@ -33164,7 +33164,7 @@
           <p:cNvPr id="7" name="">
             <a:extLst xmlns:a="http://schemas.openxmlformats.org/drawingml/2006/main">
               <a:ext uri="{FF2B5EF4-FFF2-40B4-BE49-F238E27FC236}">
-                <a16:creationId xmlns:a16="http://schemas.microsoft.com/office/drawing/2014/main" id="{1068AC4D-3923-405C-8A6B-F7702DB3DA83}"/>
+                <a16:creationId xmlns:a16="http://schemas.microsoft.com/office/drawing/2014/main" id="{7821DD0F-270C-435F-89AB-9059CE857F0D}"/>
               </a:ext>
             </a:extLst>
           </p:cNvPr>
@@ -33216,7 +33216,7 @@
           <p:cNvPr id="8" name="">
             <a:extLst xmlns:a="http://schemas.openxmlformats.org/drawingml/2006/main">
               <a:ext uri="{FF2B5EF4-FFF2-40B4-BE49-F238E27FC236}">
-                <a16:creationId xmlns:a16="http://schemas.microsoft.com/office/drawing/2014/main" id="{87E956C7-BFF0-46D1-ABF8-EF98EB82516F}"/>
+                <a16:creationId xmlns:a16="http://schemas.microsoft.com/office/drawing/2014/main" id="{36BD1E4D-EA9F-4668-92F3-7FDE7B9446FA}"/>
               </a:ext>
             </a:extLst>
           </p:cNvPr>
@@ -33268,7 +33268,7 @@
           <p:cNvPr id="9" name="">
             <a:extLst xmlns:a="http://schemas.openxmlformats.org/drawingml/2006/main">
               <a:ext uri="{FF2B5EF4-FFF2-40B4-BE49-F238E27FC236}">
-                <a16:creationId xmlns:a16="http://schemas.microsoft.com/office/drawing/2014/main" id="{1BEB15AA-12CF-432F-88DD-9AA8D15E7E6F}"/>
+                <a16:creationId xmlns:a16="http://schemas.microsoft.com/office/drawing/2014/main" id="{0C4F1C5C-85EB-4E80-BA3E-629E5461C21F}"/>
               </a:ext>
             </a:extLst>
           </p:cNvPr>
@@ -33320,7 +33320,7 @@
           <p:cNvPr id="10" name="">
             <a:extLst xmlns:a="http://schemas.openxmlformats.org/drawingml/2006/main">
               <a:ext uri="{FF2B5EF4-FFF2-40B4-BE49-F238E27FC236}">
-                <a16:creationId xmlns:a16="http://schemas.microsoft.com/office/drawing/2014/main" id="{2E60D90E-FFE4-4EF1-8AAD-97805205BB18}"/>
+                <a16:creationId xmlns:a16="http://schemas.microsoft.com/office/drawing/2014/main" id="{9D11FA72-BB09-4ED4-B37E-6F5BEC095EAE}"/>
               </a:ext>
             </a:extLst>
           </p:cNvPr>
@@ -33372,7 +33372,7 @@
           <p:cNvPr id="11" name="">
             <a:extLst xmlns:a="http://schemas.openxmlformats.org/drawingml/2006/main">
               <a:ext uri="{FF2B5EF4-FFF2-40B4-BE49-F238E27FC236}">
-                <a16:creationId xmlns:a16="http://schemas.microsoft.com/office/drawing/2014/main" id="{B60D0870-DB08-4F54-AD42-526E21669CF4}"/>
+                <a16:creationId xmlns:a16="http://schemas.microsoft.com/office/drawing/2014/main" id="{293DA97D-67F4-4446-B050-7E18FDED4653}"/>
               </a:ext>
             </a:extLst>
           </p:cNvPr>
@@ -33419,10 +33419,10 @@
           <p:nvPr/>
         </p:nvPicPr>
         <p:blipFill>
-          <a:blip xmlns:r="http://schemas.openxmlformats.org/officeDocument/2006/relationships" xmlns:a="http://schemas.openxmlformats.org/drawingml/2006/main" r:embed="R687b88374ca14daf">
+          <a:blip xmlns:r="http://schemas.openxmlformats.org/officeDocument/2006/relationships" xmlns:a="http://schemas.openxmlformats.org/drawingml/2006/main" r:embed="R1bedf752862440f9">
             <a:extLst>
               <a:ext uri="{96DAC541-7B7A-43D3-8B79-37D633B846F1}">
-                <asvg:svgBlip xmlns:asvg="http://schemas.microsoft.com/office/drawing/2016/SVG/main" r:embed="Rd270c463ad0d40e8"/>
+                <asvg:svgBlip xmlns:asvg="http://schemas.microsoft.com/office/drawing/2016/SVG/main" r:embed="Rd513bb89f574468f"/>
               </a:ext>
             </a:extLst>
           </a:blip>
@@ -33443,7 +33443,7 @@
           <p:cNvPr id="13" name="">
             <a:extLst xmlns:a="http://schemas.openxmlformats.org/drawingml/2006/main">
               <a:ext uri="{FF2B5EF4-FFF2-40B4-BE49-F238E27FC236}">
-                <a16:creationId xmlns:a16="http://schemas.microsoft.com/office/drawing/2014/main" id="{40C08C27-6047-487C-B71E-731A644B8F3E}"/>
+                <a16:creationId xmlns:a16="http://schemas.microsoft.com/office/drawing/2014/main" id="{411F96D3-F098-44FF-B46E-54B00D66578B}"/>
               </a:ext>
             </a:extLst>
           </p:cNvPr>
@@ -33476,7 +33476,7 @@
           <p:cNvPr id="14" name="">
             <a:extLst xmlns:a="http://schemas.openxmlformats.org/drawingml/2006/main">
               <a:ext uri="{FF2B5EF4-FFF2-40B4-BE49-F238E27FC236}">
-                <a16:creationId xmlns:a16="http://schemas.microsoft.com/office/drawing/2014/main" id="{8CAEC59E-5199-4E59-A85F-B7C043AE805B}"/>
+                <a16:creationId xmlns:a16="http://schemas.microsoft.com/office/drawing/2014/main" id="{45D76151-67F3-4E8B-93CF-4524D3CA6F92}"/>
               </a:ext>
             </a:extLst>
           </p:cNvPr>
@@ -33528,7 +33528,7 @@
           <p:cNvPr id="15" name="">
             <a:extLst xmlns:a="http://schemas.openxmlformats.org/drawingml/2006/main">
               <a:ext uri="{FF2B5EF4-FFF2-40B4-BE49-F238E27FC236}">
-                <a16:creationId xmlns:a16="http://schemas.microsoft.com/office/drawing/2014/main" id="{5E58B6FA-472A-43E6-A1F4-D0096AC10FBB}"/>
+                <a16:creationId xmlns:a16="http://schemas.microsoft.com/office/drawing/2014/main" id="{FEAE9526-1092-4B20-B32D-633FBBE37B2A}"/>
               </a:ext>
             </a:extLst>
           </p:cNvPr>
@@ -33561,7 +33561,7 @@
           <p:cNvPr id="16" name="">
             <a:extLst xmlns:a="http://schemas.openxmlformats.org/drawingml/2006/main">
               <a:ext uri="{FF2B5EF4-FFF2-40B4-BE49-F238E27FC236}">
-                <a16:creationId xmlns:a16="http://schemas.microsoft.com/office/drawing/2014/main" id="{584094AB-571A-4B64-BB87-D8393754FB93}"/>
+                <a16:creationId xmlns:a16="http://schemas.microsoft.com/office/drawing/2014/main" id="{987ECF7E-A813-41B7-B8F3-7E613E1F3C2F}"/>
               </a:ext>
             </a:extLst>
           </p:cNvPr>
@@ -33613,7 +33613,7 @@
           <p:cNvPr id="17" name="">
             <a:extLst xmlns:a="http://schemas.openxmlformats.org/drawingml/2006/main">
               <a:ext uri="{FF2B5EF4-FFF2-40B4-BE49-F238E27FC236}">
-                <a16:creationId xmlns:a16="http://schemas.microsoft.com/office/drawing/2014/main" id="{5AD50633-15F5-4217-949E-D6C45AED0CF4}"/>
+                <a16:creationId xmlns:a16="http://schemas.microsoft.com/office/drawing/2014/main" id="{9CFD619F-0323-4078-A982-5416289293F1}"/>
               </a:ext>
             </a:extLst>
           </p:cNvPr>
@@ -33646,7 +33646,7 @@
           <p:cNvPr id="18" name="">
             <a:extLst xmlns:a="http://schemas.openxmlformats.org/drawingml/2006/main">
               <a:ext uri="{FF2B5EF4-FFF2-40B4-BE49-F238E27FC236}">
-                <a16:creationId xmlns:a16="http://schemas.microsoft.com/office/drawing/2014/main" id="{6C55E018-642D-40EE-B5BD-5E397EFC2586}"/>
+                <a16:creationId xmlns:a16="http://schemas.microsoft.com/office/drawing/2014/main" id="{EE98F9B1-8322-415F-8FE8-3C456F444A5C}"/>
               </a:ext>
             </a:extLst>
           </p:cNvPr>
@@ -33698,7 +33698,7 @@
           <p:cNvPr id="19" name="">
             <a:extLst xmlns:a="http://schemas.openxmlformats.org/drawingml/2006/main">
               <a:ext uri="{FF2B5EF4-FFF2-40B4-BE49-F238E27FC236}">
-                <a16:creationId xmlns:a16="http://schemas.microsoft.com/office/drawing/2014/main" id="{05098CCD-E7E3-4AAB-AE24-E4FCB3EE69B3}"/>
+                <a16:creationId xmlns:a16="http://schemas.microsoft.com/office/drawing/2014/main" id="{94CF8B08-71F0-49E1-80CD-0D3B8A187D4C}"/>
               </a:ext>
             </a:extLst>
           </p:cNvPr>
@@ -33731,7 +33731,7 @@
           <p:cNvPr id="20" name="">
             <a:extLst xmlns:a="http://schemas.openxmlformats.org/drawingml/2006/main">
               <a:ext uri="{FF2B5EF4-FFF2-40B4-BE49-F238E27FC236}">
-                <a16:creationId xmlns:a16="http://schemas.microsoft.com/office/drawing/2014/main" id="{A43C5094-8E38-430D-BB48-22E822FD999B}"/>
+                <a16:creationId xmlns:a16="http://schemas.microsoft.com/office/drawing/2014/main" id="{5535863D-2898-4DEA-BE19-0C3B64ACA962}"/>
               </a:ext>
             </a:extLst>
           </p:cNvPr>
@@ -33783,7 +33783,7 @@
           <p:cNvPr id="21" name="">
             <a:extLst xmlns:a="http://schemas.openxmlformats.org/drawingml/2006/main">
               <a:ext uri="{FF2B5EF4-FFF2-40B4-BE49-F238E27FC236}">
-                <a16:creationId xmlns:a16="http://schemas.microsoft.com/office/drawing/2014/main" id="{28485DBE-0DD1-4C5D-98DE-828E03E9722D}"/>
+                <a16:creationId xmlns:a16="http://schemas.microsoft.com/office/drawing/2014/main" id="{BC764743-8218-4366-B883-322893CC6AFE}"/>
               </a:ext>
             </a:extLst>
           </p:cNvPr>
@@ -33814,7 +33814,7 @@
           <p:cNvPr id="22" name="">
             <a:extLst xmlns:a="http://schemas.openxmlformats.org/drawingml/2006/main">
               <a:ext uri="{FF2B5EF4-FFF2-40B4-BE49-F238E27FC236}">
-                <a16:creationId xmlns:a16="http://schemas.microsoft.com/office/drawing/2014/main" id="{662972CF-7A81-415B-B197-8E8C5F433297}"/>
+                <a16:creationId xmlns:a16="http://schemas.microsoft.com/office/drawing/2014/main" id="{258A60F0-F4B3-4D0B-AB4D-1AB75EBE26C0}"/>
               </a:ext>
             </a:extLst>
           </p:cNvPr>
@@ -33866,7 +33866,7 @@
           <p:cNvPr id="23" name="">
             <a:extLst xmlns:a="http://schemas.openxmlformats.org/drawingml/2006/main">
               <a:ext uri="{FF2B5EF4-FFF2-40B4-BE49-F238E27FC236}">
-                <a16:creationId xmlns:a16="http://schemas.microsoft.com/office/drawing/2014/main" id="{1BE70184-F755-4C57-A51D-FB7FAFDD8608}"/>
+                <a16:creationId xmlns:a16="http://schemas.microsoft.com/office/drawing/2014/main" id="{268244A4-D380-4ED4-A002-7B8EF0BE526D}"/>
               </a:ext>
             </a:extLst>
           </p:cNvPr>
@@ -33918,7 +33918,7 @@
           <p:cNvPr id="24" name="">
             <a:extLst xmlns:a="http://schemas.openxmlformats.org/drawingml/2006/main">
               <a:ext uri="{FF2B5EF4-FFF2-40B4-BE49-F238E27FC236}">
-                <a16:creationId xmlns:a16="http://schemas.microsoft.com/office/drawing/2014/main" id="{AE9BC2BE-6308-4A39-BE48-6A0A958A346C}"/>
+                <a16:creationId xmlns:a16="http://schemas.microsoft.com/office/drawing/2014/main" id="{FF93E325-E6BA-47F8-8339-8903A7FE79B3}"/>
               </a:ext>
             </a:extLst>
           </p:cNvPr>
@@ -33970,7 +33970,7 @@
           <p:cNvPr id="25" name="">
             <a:extLst xmlns:a="http://schemas.openxmlformats.org/drawingml/2006/main">
               <a:ext uri="{FF2B5EF4-FFF2-40B4-BE49-F238E27FC236}">
-                <a16:creationId xmlns:a16="http://schemas.microsoft.com/office/drawing/2014/main" id="{F1DE628B-DF28-499F-8B7F-DA2F6CDCE1FB}"/>
+                <a16:creationId xmlns:a16="http://schemas.microsoft.com/office/drawing/2014/main" id="{88F9CB31-E555-46ED-9D33-E29A12E63E5F}"/>
               </a:ext>
             </a:extLst>
           </p:cNvPr>
@@ -34022,7 +34022,7 @@
           <p:cNvPr id="26" name="">
             <a:extLst xmlns:a="http://schemas.openxmlformats.org/drawingml/2006/main">
               <a:ext uri="{FF2B5EF4-FFF2-40B4-BE49-F238E27FC236}">
-                <a16:creationId xmlns:a16="http://schemas.microsoft.com/office/drawing/2014/main" id="{B95DCC8A-E2BD-4034-90AA-8DF63C6610FA}"/>
+                <a16:creationId xmlns:a16="http://schemas.microsoft.com/office/drawing/2014/main" id="{CC009241-1A33-4F4B-9208-89208D7E019F}"/>
               </a:ext>
             </a:extLst>
           </p:cNvPr>
@@ -34074,7 +34074,7 @@
           <p:cNvPr id="27" name="">
             <a:extLst xmlns:a="http://schemas.openxmlformats.org/drawingml/2006/main">
               <a:ext uri="{FF2B5EF4-FFF2-40B4-BE49-F238E27FC236}">
-                <a16:creationId xmlns:a16="http://schemas.microsoft.com/office/drawing/2014/main" id="{31D73F71-D64F-4B59-8131-1D2A5F3974F9}"/>
+                <a16:creationId xmlns:a16="http://schemas.microsoft.com/office/drawing/2014/main" id="{77368A04-B9A3-4EB2-8414-39345DCE9357}"/>
               </a:ext>
             </a:extLst>
           </p:cNvPr>
@@ -34126,7 +34126,7 @@
           <p:cNvPr id="28" name="">
             <a:extLst xmlns:a="http://schemas.openxmlformats.org/drawingml/2006/main">
               <a:ext uri="{FF2B5EF4-FFF2-40B4-BE49-F238E27FC236}">
-                <a16:creationId xmlns:a16="http://schemas.microsoft.com/office/drawing/2014/main" id="{373B542D-AE86-441C-9D05-09A238C0AC04}"/>
+                <a16:creationId xmlns:a16="http://schemas.microsoft.com/office/drawing/2014/main" id="{F9FB7024-716F-47C3-90A0-E45102CB6A29}"/>
               </a:ext>
             </a:extLst>
           </p:cNvPr>
@@ -34178,7 +34178,7 @@
           <p:cNvPr id="29" name="">
             <a:extLst xmlns:a="http://schemas.openxmlformats.org/drawingml/2006/main">
               <a:ext uri="{FF2B5EF4-FFF2-40B4-BE49-F238E27FC236}">
-                <a16:creationId xmlns:a16="http://schemas.microsoft.com/office/drawing/2014/main" id="{C9655B5D-3487-453C-BDE8-8E302A7B36C4}"/>
+                <a16:creationId xmlns:a16="http://schemas.microsoft.com/office/drawing/2014/main" id="{114535ED-D120-481C-946C-6FD4A07B1519}"/>
               </a:ext>
             </a:extLst>
           </p:cNvPr>
@@ -34228,7 +34228,7 @@
     </p:spTree>
     <p:extLst>
       <p:ext uri="{BB962C8B-B14F-4D97-AF65-F5344CB8AC3E}">
-        <p14:creationId xmlns:p14="http://schemas.microsoft.com/office/powerpoint/2010/main" val="1750406564"/>
+        <p14:creationId xmlns:p14="http://schemas.microsoft.com/office/powerpoint/2010/main" val="1319487633"/>
       </p:ext>
     </p:extLst>
   </p:cSld>
@@ -34259,7 +34259,7 @@
           <p:cNvPr id="33" name="">
             <a:extLst xmlns:a="http://schemas.openxmlformats.org/drawingml/2006/main">
               <a:ext uri="{FF2B5EF4-FFF2-40B4-BE49-F238E27FC236}">
-                <a16:creationId xmlns:a16="http://schemas.microsoft.com/office/drawing/2014/main" id="{1AFB4423-446E-4AE5-8E52-E21ED11A5D4C}"/>
+                <a16:creationId xmlns:a16="http://schemas.microsoft.com/office/drawing/2014/main" id="{14138667-DF1C-46F8-B33D-4ADEAE6E7EDC}"/>
               </a:ext>
             </a:extLst>
           </p:cNvPr>
@@ -34292,7 +34292,7 @@
           <p:cNvPr id="2" name="">
             <a:extLst xmlns:a="http://schemas.openxmlformats.org/drawingml/2006/main">
               <a:ext uri="{FF2B5EF4-FFF2-40B4-BE49-F238E27FC236}">
-                <a16:creationId xmlns:a16="http://schemas.microsoft.com/office/drawing/2014/main" id="{B0D0D878-DF11-46A7-AEF5-D46815239C5C}"/>
+                <a16:creationId xmlns:a16="http://schemas.microsoft.com/office/drawing/2014/main" id="{25BB5E13-7A9B-4CEA-9265-F3A6B45B8182}"/>
               </a:ext>
             </a:extLst>
           </p:cNvPr>
@@ -34323,7 +34323,7 @@
           <p:cNvPr id="3" name="">
             <a:extLst xmlns:a="http://schemas.openxmlformats.org/drawingml/2006/main">
               <a:ext uri="{FF2B5EF4-FFF2-40B4-BE49-F238E27FC236}">
-                <a16:creationId xmlns:a16="http://schemas.microsoft.com/office/drawing/2014/main" id="{E0B3F15B-8357-421E-8D35-25FA6E7D3FE1}"/>
+                <a16:creationId xmlns:a16="http://schemas.microsoft.com/office/drawing/2014/main" id="{4408F22D-C32D-4640-A853-51CB2D954888}"/>
               </a:ext>
             </a:extLst>
           </p:cNvPr>
@@ -34375,7 +34375,7 @@
           <p:cNvPr id="4" name="">
             <a:extLst xmlns:a="http://schemas.openxmlformats.org/drawingml/2006/main">
               <a:ext uri="{FF2B5EF4-FFF2-40B4-BE49-F238E27FC236}">
-                <a16:creationId xmlns:a16="http://schemas.microsoft.com/office/drawing/2014/main" id="{48F2AD6D-D035-48D1-9C3C-B00C0E7A6B52}"/>
+                <a16:creationId xmlns:a16="http://schemas.microsoft.com/office/drawing/2014/main" id="{D8A47CCE-9F54-46B8-89E8-CA5337330AD1}"/>
               </a:ext>
             </a:extLst>
           </p:cNvPr>
@@ -34427,7 +34427,7 @@
           <p:cNvPr id="5" name="">
             <a:extLst xmlns:a="http://schemas.openxmlformats.org/drawingml/2006/main">
               <a:ext uri="{FF2B5EF4-FFF2-40B4-BE49-F238E27FC236}">
-                <a16:creationId xmlns:a16="http://schemas.microsoft.com/office/drawing/2014/main" id="{B7E30A6D-30CC-4A33-83F1-A0670A4C6663}"/>
+                <a16:creationId xmlns:a16="http://schemas.microsoft.com/office/drawing/2014/main" id="{8AD92201-8CF0-4457-88ED-B88E701393D6}"/>
               </a:ext>
             </a:extLst>
           </p:cNvPr>
@@ -34462,7 +34462,7 @@
           <p:nvPr/>
         </p:nvPicPr>
         <p:blipFill>
-          <a:blip xmlns:r="http://schemas.openxmlformats.org/officeDocument/2006/relationships" xmlns:a="http://schemas.openxmlformats.org/drawingml/2006/main" r:embed="R8bdbf61cda384d2d"/>
+          <a:blip xmlns:r="http://schemas.openxmlformats.org/officeDocument/2006/relationships" xmlns:a="http://schemas.openxmlformats.org/drawingml/2006/main" r:embed="Rf5e5aac5ae994737"/>
           <a:stretch xmlns:a="http://schemas.openxmlformats.org/drawingml/2006/main"/>
         </p:blipFill>
         <p:spPr>
@@ -34480,7 +34480,7 @@
           <p:cNvPr id="7" name="">
             <a:extLst xmlns:a="http://schemas.openxmlformats.org/drawingml/2006/main">
               <a:ext uri="{FF2B5EF4-FFF2-40B4-BE49-F238E27FC236}">
-                <a16:creationId xmlns:a16="http://schemas.microsoft.com/office/drawing/2014/main" id="{19238167-F93B-40C0-8CAE-827190B32ED1}"/>
+                <a16:creationId xmlns:a16="http://schemas.microsoft.com/office/drawing/2014/main" id="{4D8D13C7-9EF6-4984-82AE-8A8730CE250E}"/>
               </a:ext>
             </a:extLst>
           </p:cNvPr>
@@ -34532,7 +34532,7 @@
           <p:cNvPr id="8" name="">
             <a:extLst xmlns:a="http://schemas.openxmlformats.org/drawingml/2006/main">
               <a:ext uri="{FF2B5EF4-FFF2-40B4-BE49-F238E27FC236}">
-                <a16:creationId xmlns:a16="http://schemas.microsoft.com/office/drawing/2014/main" id="{F4967801-A617-4D2E-B955-3779B6B0D092}"/>
+                <a16:creationId xmlns:a16="http://schemas.microsoft.com/office/drawing/2014/main" id="{2041A350-1B37-49E1-82BC-40ABAA1DF2EA}"/>
               </a:ext>
             </a:extLst>
           </p:cNvPr>
@@ -34584,7 +34584,7 @@
           <p:cNvPr id="9" name="">
             <a:extLst xmlns:a="http://schemas.openxmlformats.org/drawingml/2006/main">
               <a:ext uri="{FF2B5EF4-FFF2-40B4-BE49-F238E27FC236}">
-                <a16:creationId xmlns:a16="http://schemas.microsoft.com/office/drawing/2014/main" id="{04DB80A9-8865-42DE-A54A-E1D236470947}"/>
+                <a16:creationId xmlns:a16="http://schemas.microsoft.com/office/drawing/2014/main" id="{91AEB60F-9636-49C6-9420-B9BBFC54A5F9}"/>
               </a:ext>
             </a:extLst>
           </p:cNvPr>
@@ -34636,7 +34636,7 @@
           <p:cNvPr id="10" name="">
             <a:extLst xmlns:a="http://schemas.openxmlformats.org/drawingml/2006/main">
               <a:ext uri="{FF2B5EF4-FFF2-40B4-BE49-F238E27FC236}">
-                <a16:creationId xmlns:a16="http://schemas.microsoft.com/office/drawing/2014/main" id="{F2C8F3C4-0E17-4760-9E71-A60A0949C3F0}"/>
+                <a16:creationId xmlns:a16="http://schemas.microsoft.com/office/drawing/2014/main" id="{BB1D8B45-3903-4FAE-923D-E8FB338A1F3D}"/>
               </a:ext>
             </a:extLst>
           </p:cNvPr>
@@ -34688,7 +34688,7 @@
           <p:cNvPr id="11" name="">
             <a:extLst xmlns:a="http://schemas.openxmlformats.org/drawingml/2006/main">
               <a:ext uri="{FF2B5EF4-FFF2-40B4-BE49-F238E27FC236}">
-                <a16:creationId xmlns:a16="http://schemas.microsoft.com/office/drawing/2014/main" id="{9C8D7D53-BBE2-4B05-B4FB-76E2FE0EC2DD}"/>
+                <a16:creationId xmlns:a16="http://schemas.microsoft.com/office/drawing/2014/main" id="{0111B798-5986-43C6-8A50-FF0F51557A3F}"/>
               </a:ext>
             </a:extLst>
           </p:cNvPr>
@@ -34735,10 +34735,10 @@
           <p:nvPr/>
         </p:nvPicPr>
         <p:blipFill>
-          <a:blip xmlns:r="http://schemas.openxmlformats.org/officeDocument/2006/relationships" xmlns:a="http://schemas.openxmlformats.org/drawingml/2006/main" r:embed="R2a9675f9927e4d55">
+          <a:blip xmlns:r="http://schemas.openxmlformats.org/officeDocument/2006/relationships" xmlns:a="http://schemas.openxmlformats.org/drawingml/2006/main" r:embed="R5f96b8e99b384e97">
             <a:extLst>
               <a:ext uri="{96DAC541-7B7A-43D3-8B79-37D633B846F1}">
-                <asvg:svgBlip xmlns:asvg="http://schemas.microsoft.com/office/drawing/2016/SVG/main" r:embed="Reaa17685f1dc42e8"/>
+                <asvg:svgBlip xmlns:asvg="http://schemas.microsoft.com/office/drawing/2016/SVG/main" r:embed="R1a05470e87c24582"/>
               </a:ext>
             </a:extLst>
           </a:blip>
@@ -34759,7 +34759,7 @@
           <p:cNvPr id="13" name="">
             <a:extLst xmlns:a="http://schemas.openxmlformats.org/drawingml/2006/main">
               <a:ext uri="{FF2B5EF4-FFF2-40B4-BE49-F238E27FC236}">
-                <a16:creationId xmlns:a16="http://schemas.microsoft.com/office/drawing/2014/main" id="{2CDC079D-B6C1-497A-B0A3-5812E938FB2C}"/>
+                <a16:creationId xmlns:a16="http://schemas.microsoft.com/office/drawing/2014/main" id="{AFBF8B1B-7EF4-4904-A4A7-5FE8DC2ABE9A}"/>
               </a:ext>
             </a:extLst>
           </p:cNvPr>
@@ -34792,7 +34792,7 @@
           <p:cNvPr id="14" name="">
             <a:extLst xmlns:a="http://schemas.openxmlformats.org/drawingml/2006/main">
               <a:ext uri="{FF2B5EF4-FFF2-40B4-BE49-F238E27FC236}">
-                <a16:creationId xmlns:a16="http://schemas.microsoft.com/office/drawing/2014/main" id="{17D78A64-637A-4CCF-9F32-1FBBAC332969}"/>
+                <a16:creationId xmlns:a16="http://schemas.microsoft.com/office/drawing/2014/main" id="{AE25376D-ED67-49CC-9B50-FB3602B3CC39}"/>
               </a:ext>
             </a:extLst>
           </p:cNvPr>
@@ -34844,7 +34844,7 @@
           <p:cNvPr id="15" name="">
             <a:extLst xmlns:a="http://schemas.openxmlformats.org/drawingml/2006/main">
               <a:ext uri="{FF2B5EF4-FFF2-40B4-BE49-F238E27FC236}">
-                <a16:creationId xmlns:a16="http://schemas.microsoft.com/office/drawing/2014/main" id="{82BE4C70-BA66-4F5E-A442-C193EF9543BD}"/>
+                <a16:creationId xmlns:a16="http://schemas.microsoft.com/office/drawing/2014/main" id="{050305A9-4723-4685-A76D-F03FA3454EFB}"/>
               </a:ext>
             </a:extLst>
           </p:cNvPr>
@@ -34875,7 +34875,7 @@
           <p:cNvPr id="16" name="">
             <a:extLst xmlns:a="http://schemas.openxmlformats.org/drawingml/2006/main">
               <a:ext uri="{FF2B5EF4-FFF2-40B4-BE49-F238E27FC236}">
-                <a16:creationId xmlns:a16="http://schemas.microsoft.com/office/drawing/2014/main" id="{7BF33F3E-1858-4A84-9B09-F7EA64A299A7}"/>
+                <a16:creationId xmlns:a16="http://schemas.microsoft.com/office/drawing/2014/main" id="{CE458759-78BB-41D5-B97C-E56CCCDF089A}"/>
               </a:ext>
             </a:extLst>
           </p:cNvPr>
@@ -34906,7 +34906,7 @@
           <p:cNvPr id="17" name="">
             <a:extLst xmlns:a="http://schemas.openxmlformats.org/drawingml/2006/main">
               <a:ext uri="{FF2B5EF4-FFF2-40B4-BE49-F238E27FC236}">
-                <a16:creationId xmlns:a16="http://schemas.microsoft.com/office/drawing/2014/main" id="{4D7E1DB6-9019-44C1-BD4E-89A5E2E4ACD0}"/>
+                <a16:creationId xmlns:a16="http://schemas.microsoft.com/office/drawing/2014/main" id="{B8867CBE-8E54-4D3E-978F-E5CB5BDA9062}"/>
               </a:ext>
             </a:extLst>
           </p:cNvPr>
@@ -34958,7 +34958,7 @@
           <p:cNvPr id="18" name="">
             <a:extLst xmlns:a="http://schemas.openxmlformats.org/drawingml/2006/main">
               <a:ext uri="{FF2B5EF4-FFF2-40B4-BE49-F238E27FC236}">
-                <a16:creationId xmlns:a16="http://schemas.microsoft.com/office/drawing/2014/main" id="{3348F709-EBDC-4DB8-A573-1AEB3ADB66FC}"/>
+                <a16:creationId xmlns:a16="http://schemas.microsoft.com/office/drawing/2014/main" id="{D9CAEF76-2703-449D-9D0B-4F15D424B38B}"/>
               </a:ext>
             </a:extLst>
           </p:cNvPr>
@@ -34991,7 +34991,7 @@
           <p:cNvPr id="19" name="">
             <a:extLst xmlns:a="http://schemas.openxmlformats.org/drawingml/2006/main">
               <a:ext uri="{FF2B5EF4-FFF2-40B4-BE49-F238E27FC236}">
-                <a16:creationId xmlns:a16="http://schemas.microsoft.com/office/drawing/2014/main" id="{FB347890-3D6B-4580-A114-5F160D51461B}"/>
+                <a16:creationId xmlns:a16="http://schemas.microsoft.com/office/drawing/2014/main" id="{CABB7461-972B-478E-BCB1-CAFED4056612}"/>
               </a:ext>
             </a:extLst>
           </p:cNvPr>
@@ -35043,7 +35043,7 @@
           <p:cNvPr id="20" name="">
             <a:extLst xmlns:a="http://schemas.openxmlformats.org/drawingml/2006/main">
               <a:ext uri="{FF2B5EF4-FFF2-40B4-BE49-F238E27FC236}">
-                <a16:creationId xmlns:a16="http://schemas.microsoft.com/office/drawing/2014/main" id="{74E9450C-F8DB-45D5-83C0-00AD0BC2F316}"/>
+                <a16:creationId xmlns:a16="http://schemas.microsoft.com/office/drawing/2014/main" id="{1237E767-EC5E-4AB4-B26F-CC3E918B002E}"/>
               </a:ext>
             </a:extLst>
           </p:cNvPr>
@@ -35074,7 +35074,7 @@
           <p:cNvPr id="21" name="">
             <a:extLst xmlns:a="http://schemas.openxmlformats.org/drawingml/2006/main">
               <a:ext uri="{FF2B5EF4-FFF2-40B4-BE49-F238E27FC236}">
-                <a16:creationId xmlns:a16="http://schemas.microsoft.com/office/drawing/2014/main" id="{E5437F3C-17B8-4AA5-9D48-589AB620B738}"/>
+                <a16:creationId xmlns:a16="http://schemas.microsoft.com/office/drawing/2014/main" id="{BB999F79-1967-426D-86F0-BE5B8785E108}"/>
               </a:ext>
             </a:extLst>
           </p:cNvPr>
@@ -35105,7 +35105,7 @@
           <p:cNvPr id="22" name="">
             <a:extLst xmlns:a="http://schemas.openxmlformats.org/drawingml/2006/main">
               <a:ext uri="{FF2B5EF4-FFF2-40B4-BE49-F238E27FC236}">
-                <a16:creationId xmlns:a16="http://schemas.microsoft.com/office/drawing/2014/main" id="{A2676B77-F5B7-4BD8-870B-F82540F7F898}"/>
+                <a16:creationId xmlns:a16="http://schemas.microsoft.com/office/drawing/2014/main" id="{38FEC475-1C6C-4B77-BCCE-941B612F0DD6}"/>
               </a:ext>
             </a:extLst>
           </p:cNvPr>
@@ -35157,7 +35157,7 @@
           <p:cNvPr id="23" name="">
             <a:extLst xmlns:a="http://schemas.openxmlformats.org/drawingml/2006/main">
               <a:ext uri="{FF2B5EF4-FFF2-40B4-BE49-F238E27FC236}">
-                <a16:creationId xmlns:a16="http://schemas.microsoft.com/office/drawing/2014/main" id="{65B2BE58-9A92-4E5E-B832-2DF1B2C69E16}"/>
+                <a16:creationId xmlns:a16="http://schemas.microsoft.com/office/drawing/2014/main" id="{8D3D9F79-86C2-4AF3-92CF-B800AEEACAC8}"/>
               </a:ext>
             </a:extLst>
           </p:cNvPr>
@@ -35209,7 +35209,7 @@
           <p:cNvPr id="24" name="">
             <a:extLst xmlns:a="http://schemas.openxmlformats.org/drawingml/2006/main">
               <a:ext uri="{FF2B5EF4-FFF2-40B4-BE49-F238E27FC236}">
-                <a16:creationId xmlns:a16="http://schemas.microsoft.com/office/drawing/2014/main" id="{1A9FF381-354C-4639-9B0E-966C97AFAF7D}"/>
+                <a16:creationId xmlns:a16="http://schemas.microsoft.com/office/drawing/2014/main" id="{24BFFEF0-27EC-4EF1-AAD8-998BA43A41AD}"/>
               </a:ext>
             </a:extLst>
           </p:cNvPr>
@@ -35240,7 +35240,7 @@
           <p:cNvPr id="25" name="">
             <a:extLst xmlns:a="http://schemas.openxmlformats.org/drawingml/2006/main">
               <a:ext uri="{FF2B5EF4-FFF2-40B4-BE49-F238E27FC236}">
-                <a16:creationId xmlns:a16="http://schemas.microsoft.com/office/drawing/2014/main" id="{D85311DF-E3AA-417D-9790-5E6A9F432D4E}"/>
+                <a16:creationId xmlns:a16="http://schemas.microsoft.com/office/drawing/2014/main" id="{1C94C9DC-AD12-454F-8B0D-E13FC67F348C}"/>
               </a:ext>
             </a:extLst>
           </p:cNvPr>
@@ -35292,7 +35292,7 @@
           <p:cNvPr id="26" name="">
             <a:extLst xmlns:a="http://schemas.openxmlformats.org/drawingml/2006/main">
               <a:ext uri="{FF2B5EF4-FFF2-40B4-BE49-F238E27FC236}">
-                <a16:creationId xmlns:a16="http://schemas.microsoft.com/office/drawing/2014/main" id="{52242F63-BC5D-4EE8-9AF5-0099B4061DCB}"/>
+                <a16:creationId xmlns:a16="http://schemas.microsoft.com/office/drawing/2014/main" id="{05847D89-4D85-4CCD-86FF-BB7EFD0BAA30}"/>
               </a:ext>
             </a:extLst>
           </p:cNvPr>
@@ -35344,7 +35344,7 @@
           <p:cNvPr id="27" name="">
             <a:extLst xmlns:a="http://schemas.openxmlformats.org/drawingml/2006/main">
               <a:ext uri="{FF2B5EF4-FFF2-40B4-BE49-F238E27FC236}">
-                <a16:creationId xmlns:a16="http://schemas.microsoft.com/office/drawing/2014/main" id="{5363E327-566F-410C-B770-BF5C648229CB}"/>
+                <a16:creationId xmlns:a16="http://schemas.microsoft.com/office/drawing/2014/main" id="{E766F7BB-6C39-49B6-8817-4BED9FA34FC4}"/>
               </a:ext>
             </a:extLst>
           </p:cNvPr>
@@ -35396,7 +35396,7 @@
           <p:cNvPr id="28" name="">
             <a:extLst xmlns:a="http://schemas.openxmlformats.org/drawingml/2006/main">
               <a:ext uri="{FF2B5EF4-FFF2-40B4-BE49-F238E27FC236}">
-                <a16:creationId xmlns:a16="http://schemas.microsoft.com/office/drawing/2014/main" id="{9977422C-FCDA-4E61-B35F-230AF7140B13}"/>
+                <a16:creationId xmlns:a16="http://schemas.microsoft.com/office/drawing/2014/main" id="{B2CC2807-3649-4BD0-8A16-1FEC58241362}"/>
               </a:ext>
             </a:extLst>
           </p:cNvPr>
@@ -35448,7 +35448,7 @@
           <p:cNvPr id="29" name="">
             <a:extLst xmlns:a="http://schemas.openxmlformats.org/drawingml/2006/main">
               <a:ext uri="{FF2B5EF4-FFF2-40B4-BE49-F238E27FC236}">
-                <a16:creationId xmlns:a16="http://schemas.microsoft.com/office/drawing/2014/main" id="{7D702A1A-D85B-4246-9E93-65412980B3C8}"/>
+                <a16:creationId xmlns:a16="http://schemas.microsoft.com/office/drawing/2014/main" id="{1A403111-7D14-49AA-8CE1-2021F111157F}"/>
               </a:ext>
             </a:extLst>
           </p:cNvPr>
@@ -35500,7 +35500,7 @@
           <p:cNvPr id="30" name="">
             <a:extLst xmlns:a="http://schemas.openxmlformats.org/drawingml/2006/main">
               <a:ext uri="{FF2B5EF4-FFF2-40B4-BE49-F238E27FC236}">
-                <a16:creationId xmlns:a16="http://schemas.microsoft.com/office/drawing/2014/main" id="{8E051340-5B85-46B8-97A0-4C92193ABC12}"/>
+                <a16:creationId xmlns:a16="http://schemas.microsoft.com/office/drawing/2014/main" id="{FCA53BD0-D5AA-4119-AB7F-102FE4492D14}"/>
               </a:ext>
             </a:extLst>
           </p:cNvPr>
@@ -35552,7 +35552,7 @@
           <p:cNvPr id="31" name="">
             <a:extLst xmlns:a="http://schemas.openxmlformats.org/drawingml/2006/main">
               <a:ext uri="{FF2B5EF4-FFF2-40B4-BE49-F238E27FC236}">
-                <a16:creationId xmlns:a16="http://schemas.microsoft.com/office/drawing/2014/main" id="{0B5AAC4E-6BA7-4E5F-8CF0-167F3458178D}"/>
+                <a16:creationId xmlns:a16="http://schemas.microsoft.com/office/drawing/2014/main" id="{2C16A066-6205-4F6E-9419-B6268007D3D0}"/>
               </a:ext>
             </a:extLst>
           </p:cNvPr>
@@ -35604,7 +35604,7 @@
           <p:cNvPr id="32" name="">
             <a:extLst xmlns:a="http://schemas.openxmlformats.org/drawingml/2006/main">
               <a:ext uri="{FF2B5EF4-FFF2-40B4-BE49-F238E27FC236}">
-                <a16:creationId xmlns:a16="http://schemas.microsoft.com/office/drawing/2014/main" id="{95A9CACA-D854-4AB4-B0F8-AF02DCE07C6F}"/>
+                <a16:creationId xmlns:a16="http://schemas.microsoft.com/office/drawing/2014/main" id="{BAC94459-705E-43D6-A4D1-585BB227CDAB}"/>
               </a:ext>
             </a:extLst>
           </p:cNvPr>
@@ -35654,7 +35654,7 @@
     </p:spTree>
     <p:extLst>
       <p:ext uri="{BB962C8B-B14F-4D97-AF65-F5344CB8AC3E}">
-        <p14:creationId xmlns:p14="http://schemas.microsoft.com/office/powerpoint/2010/main" val="2076118226"/>
+        <p14:creationId xmlns:p14="http://schemas.microsoft.com/office/powerpoint/2010/main" val="548473710"/>
       </p:ext>
     </p:extLst>
   </p:cSld>
@@ -35685,7 +35685,7 @@
           <p:cNvPr id="27" name="">
             <a:extLst xmlns:a="http://schemas.openxmlformats.org/drawingml/2006/main">
               <a:ext uri="{FF2B5EF4-FFF2-40B4-BE49-F238E27FC236}">
-                <a16:creationId xmlns:a16="http://schemas.microsoft.com/office/drawing/2014/main" id="{3C3EE8C6-4A64-440A-8BA9-5DC47E31F60D}"/>
+                <a16:creationId xmlns:a16="http://schemas.microsoft.com/office/drawing/2014/main" id="{23FF7F05-070C-4E30-A650-6E4F27A4FEA8}"/>
               </a:ext>
             </a:extLst>
           </p:cNvPr>
@@ -35718,7 +35718,7 @@
           <p:cNvPr id="2" name="">
             <a:extLst xmlns:a="http://schemas.openxmlformats.org/drawingml/2006/main">
               <a:ext uri="{FF2B5EF4-FFF2-40B4-BE49-F238E27FC236}">
-                <a16:creationId xmlns:a16="http://schemas.microsoft.com/office/drawing/2014/main" id="{015B540F-D434-49BA-A743-613AC165E553}"/>
+                <a16:creationId xmlns:a16="http://schemas.microsoft.com/office/drawing/2014/main" id="{059291EF-3952-4C8B-979E-60C4D0ADFF0C}"/>
               </a:ext>
             </a:extLst>
           </p:cNvPr>
@@ -35749,7 +35749,7 @@
           <p:cNvPr id="3" name="">
             <a:extLst xmlns:a="http://schemas.openxmlformats.org/drawingml/2006/main">
               <a:ext uri="{FF2B5EF4-FFF2-40B4-BE49-F238E27FC236}">
-                <a16:creationId xmlns:a16="http://schemas.microsoft.com/office/drawing/2014/main" id="{A28DF54E-AE7C-4782-BB89-BB6492CD5202}"/>
+                <a16:creationId xmlns:a16="http://schemas.microsoft.com/office/drawing/2014/main" id="{C9D8F3BE-3724-4BA0-8D31-1161AC4B7A92}"/>
               </a:ext>
             </a:extLst>
           </p:cNvPr>
@@ -35801,7 +35801,7 @@
           <p:cNvPr id="4" name="">
             <a:extLst xmlns:a="http://schemas.openxmlformats.org/drawingml/2006/main">
               <a:ext uri="{FF2B5EF4-FFF2-40B4-BE49-F238E27FC236}">
-                <a16:creationId xmlns:a16="http://schemas.microsoft.com/office/drawing/2014/main" id="{0BA9E113-EA0E-4DFE-A970-74DEF02CBBB9}"/>
+                <a16:creationId xmlns:a16="http://schemas.microsoft.com/office/drawing/2014/main" id="{72427E99-0170-45AD-A7A0-CE427012FDC2}"/>
               </a:ext>
             </a:extLst>
           </p:cNvPr>
@@ -35853,7 +35853,7 @@
           <p:cNvPr id="5" name="">
             <a:extLst xmlns:a="http://schemas.openxmlformats.org/drawingml/2006/main">
               <a:ext uri="{FF2B5EF4-FFF2-40B4-BE49-F238E27FC236}">
-                <a16:creationId xmlns:a16="http://schemas.microsoft.com/office/drawing/2014/main" id="{735DFA4E-2064-48CA-984E-4B50707A0AD7}"/>
+                <a16:creationId xmlns:a16="http://schemas.microsoft.com/office/drawing/2014/main" id="{B2C68534-72E7-47C3-ADAB-255FB32B4140}"/>
               </a:ext>
             </a:extLst>
           </p:cNvPr>
@@ -35888,7 +35888,7 @@
           <p:nvPr/>
         </p:nvPicPr>
         <p:blipFill>
-          <a:blip xmlns:r="http://schemas.openxmlformats.org/officeDocument/2006/relationships" xmlns:a="http://schemas.openxmlformats.org/drawingml/2006/main" r:embed="Raa380a33e2874b82"/>
+          <a:blip xmlns:r="http://schemas.openxmlformats.org/officeDocument/2006/relationships" xmlns:a="http://schemas.openxmlformats.org/drawingml/2006/main" r:embed="Rd4816aceee0b4a9c"/>
           <a:stretch xmlns:a="http://schemas.openxmlformats.org/drawingml/2006/main"/>
         </p:blipFill>
         <p:spPr>
@@ -35906,7 +35906,7 @@
           <p:cNvPr id="7" name="">
             <a:extLst xmlns:a="http://schemas.openxmlformats.org/drawingml/2006/main">
               <a:ext uri="{FF2B5EF4-FFF2-40B4-BE49-F238E27FC236}">
-                <a16:creationId xmlns:a16="http://schemas.microsoft.com/office/drawing/2014/main" id="{9A7F1665-2EBB-4B79-AE61-BF7FA96E9683}"/>
+                <a16:creationId xmlns:a16="http://schemas.microsoft.com/office/drawing/2014/main" id="{2D78A5BA-ED3A-401F-9130-C2A84D371FE0}"/>
               </a:ext>
             </a:extLst>
           </p:cNvPr>
@@ -35958,7 +35958,7 @@
           <p:cNvPr id="8" name="">
             <a:extLst xmlns:a="http://schemas.openxmlformats.org/drawingml/2006/main">
               <a:ext uri="{FF2B5EF4-FFF2-40B4-BE49-F238E27FC236}">
-                <a16:creationId xmlns:a16="http://schemas.microsoft.com/office/drawing/2014/main" id="{50265662-E9E9-4F5B-A7F6-30F01E930A5E}"/>
+                <a16:creationId xmlns:a16="http://schemas.microsoft.com/office/drawing/2014/main" id="{385EF264-CA04-4033-9661-FF483E75DCCA}"/>
               </a:ext>
             </a:extLst>
           </p:cNvPr>
@@ -36010,7 +36010,7 @@
           <p:cNvPr id="9" name="">
             <a:extLst xmlns:a="http://schemas.openxmlformats.org/drawingml/2006/main">
               <a:ext uri="{FF2B5EF4-FFF2-40B4-BE49-F238E27FC236}">
-                <a16:creationId xmlns:a16="http://schemas.microsoft.com/office/drawing/2014/main" id="{B05F2A3E-C30C-4E51-AE01-8F26343424DA}"/>
+                <a16:creationId xmlns:a16="http://schemas.microsoft.com/office/drawing/2014/main" id="{DC26B194-7B44-46D2-B83B-85A250148ADD}"/>
               </a:ext>
             </a:extLst>
           </p:cNvPr>
@@ -36062,7 +36062,7 @@
           <p:cNvPr id="10" name="">
             <a:extLst xmlns:a="http://schemas.openxmlformats.org/drawingml/2006/main">
               <a:ext uri="{FF2B5EF4-FFF2-40B4-BE49-F238E27FC236}">
-                <a16:creationId xmlns:a16="http://schemas.microsoft.com/office/drawing/2014/main" id="{9CEE9718-76A9-4E51-BD00-E992E52C824D}"/>
+                <a16:creationId xmlns:a16="http://schemas.microsoft.com/office/drawing/2014/main" id="{3E029418-FE05-4569-AC7E-52B9110DAD97}"/>
               </a:ext>
             </a:extLst>
           </p:cNvPr>
@@ -36114,7 +36114,7 @@
           <p:cNvPr id="11" name="">
             <a:extLst xmlns:a="http://schemas.openxmlformats.org/drawingml/2006/main">
               <a:ext uri="{FF2B5EF4-FFF2-40B4-BE49-F238E27FC236}">
-                <a16:creationId xmlns:a16="http://schemas.microsoft.com/office/drawing/2014/main" id="{698742D3-2659-4582-8A18-4A88053EF93C}"/>
+                <a16:creationId xmlns:a16="http://schemas.microsoft.com/office/drawing/2014/main" id="{E0EABC23-4994-4D05-980B-A15665C8DC4E}"/>
               </a:ext>
             </a:extLst>
           </p:cNvPr>
@@ -36161,10 +36161,10 @@
           <p:nvPr/>
         </p:nvPicPr>
         <p:blipFill>
-          <a:blip xmlns:r="http://schemas.openxmlformats.org/officeDocument/2006/relationships" xmlns:a="http://schemas.openxmlformats.org/drawingml/2006/main" r:embed="R103facaf65fd4b16">
+          <a:blip xmlns:r="http://schemas.openxmlformats.org/officeDocument/2006/relationships" xmlns:a="http://schemas.openxmlformats.org/drawingml/2006/main" r:embed="Rfc8db0c72f9e4141">
             <a:extLst>
               <a:ext uri="{96DAC541-7B7A-43D3-8B79-37D633B846F1}">
-                <asvg:svgBlip xmlns:asvg="http://schemas.microsoft.com/office/drawing/2016/SVG/main" r:embed="Rab0a2fd58bcf4cdd"/>
+                <asvg:svgBlip xmlns:asvg="http://schemas.microsoft.com/office/drawing/2016/SVG/main" r:embed="R8c1cc6e123f24f5d"/>
               </a:ext>
             </a:extLst>
           </a:blip>
@@ -36185,7 +36185,7 @@
           <p:cNvPr id="13" name="">
             <a:extLst xmlns:a="http://schemas.openxmlformats.org/drawingml/2006/main">
               <a:ext uri="{FF2B5EF4-FFF2-40B4-BE49-F238E27FC236}">
-                <a16:creationId xmlns:a16="http://schemas.microsoft.com/office/drawing/2014/main" id="{F0BF8B8C-8063-4425-AAAF-810CEC55121F}"/>
+                <a16:creationId xmlns:a16="http://schemas.microsoft.com/office/drawing/2014/main" id="{350F4E32-9DB1-4608-9CD8-9DB8F5E7E3EB}"/>
               </a:ext>
             </a:extLst>
           </p:cNvPr>
@@ -36218,7 +36218,7 @@
           <p:cNvPr id="14" name="">
             <a:extLst xmlns:a="http://schemas.openxmlformats.org/drawingml/2006/main">
               <a:ext uri="{FF2B5EF4-FFF2-40B4-BE49-F238E27FC236}">
-                <a16:creationId xmlns:a16="http://schemas.microsoft.com/office/drawing/2014/main" id="{89AB47AD-A351-498D-81D4-28BAEFE1A72C}"/>
+                <a16:creationId xmlns:a16="http://schemas.microsoft.com/office/drawing/2014/main" id="{729C76E5-5747-49C3-B08E-69EF32312BBB}"/>
               </a:ext>
             </a:extLst>
           </p:cNvPr>
@@ -36270,7 +36270,7 @@
           <p:cNvPr id="15" name="">
             <a:extLst xmlns:a="http://schemas.openxmlformats.org/drawingml/2006/main">
               <a:ext uri="{FF2B5EF4-FFF2-40B4-BE49-F238E27FC236}">
-                <a16:creationId xmlns:a16="http://schemas.microsoft.com/office/drawing/2014/main" id="{57B309B2-AFDA-44DB-A8F8-42B8842A3767}"/>
+                <a16:creationId xmlns:a16="http://schemas.microsoft.com/office/drawing/2014/main" id="{D8A1B14F-96F1-4775-B545-DFFF234B8753}"/>
               </a:ext>
             </a:extLst>
           </p:cNvPr>
@@ -36303,7 +36303,7 @@
           <p:cNvPr id="16" name="">
             <a:extLst xmlns:a="http://schemas.openxmlformats.org/drawingml/2006/main">
               <a:ext uri="{FF2B5EF4-FFF2-40B4-BE49-F238E27FC236}">
-                <a16:creationId xmlns:a16="http://schemas.microsoft.com/office/drawing/2014/main" id="{42F04ABD-9ADA-441A-9C26-DC111EB7447E}"/>
+                <a16:creationId xmlns:a16="http://schemas.microsoft.com/office/drawing/2014/main" id="{15F8F2C6-F3DF-4F72-8F21-07F3DD6F7B31}"/>
               </a:ext>
             </a:extLst>
           </p:cNvPr>
@@ -36355,7 +36355,7 @@
           <p:cNvPr id="17" name="">
             <a:extLst xmlns:a="http://schemas.openxmlformats.org/drawingml/2006/main">
               <a:ext uri="{FF2B5EF4-FFF2-40B4-BE49-F238E27FC236}">
-                <a16:creationId xmlns:a16="http://schemas.microsoft.com/office/drawing/2014/main" id="{F488DBD1-B0D9-45BC-8934-4BC1C273838F}"/>
+                <a16:creationId xmlns:a16="http://schemas.microsoft.com/office/drawing/2014/main" id="{EF3568A8-9400-4DAB-9002-608A36B02C10}"/>
               </a:ext>
             </a:extLst>
           </p:cNvPr>
@@ -36386,7 +36386,7 @@
           <p:cNvPr id="18" name="">
             <a:extLst xmlns:a="http://schemas.openxmlformats.org/drawingml/2006/main">
               <a:ext uri="{FF2B5EF4-FFF2-40B4-BE49-F238E27FC236}">
-                <a16:creationId xmlns:a16="http://schemas.microsoft.com/office/drawing/2014/main" id="{FB5FF794-F833-4645-9894-A96D86242D14}"/>
+                <a16:creationId xmlns:a16="http://schemas.microsoft.com/office/drawing/2014/main" id="{36940CCC-8B1B-48F8-ABE6-3427464119F3}"/>
               </a:ext>
             </a:extLst>
           </p:cNvPr>
@@ -36417,7 +36417,7 @@
           <p:cNvPr id="19" name="">
             <a:extLst xmlns:a="http://schemas.openxmlformats.org/drawingml/2006/main">
               <a:ext uri="{FF2B5EF4-FFF2-40B4-BE49-F238E27FC236}">
-                <a16:creationId xmlns:a16="http://schemas.microsoft.com/office/drawing/2014/main" id="{2621A6D2-B044-4E3D-85F4-2CA77BB43F5A}"/>
+                <a16:creationId xmlns:a16="http://schemas.microsoft.com/office/drawing/2014/main" id="{2CA8D196-9ABE-49AD-B5CD-9918699A2544}"/>
               </a:ext>
             </a:extLst>
           </p:cNvPr>
@@ -36469,7 +36469,7 @@
           <p:cNvPr id="20" name="">
             <a:extLst xmlns:a="http://schemas.openxmlformats.org/drawingml/2006/main">
               <a:ext uri="{FF2B5EF4-FFF2-40B4-BE49-F238E27FC236}">
-                <a16:creationId xmlns:a16="http://schemas.microsoft.com/office/drawing/2014/main" id="{465370D7-6201-4851-A4BC-30E4BE9D8E75}"/>
+                <a16:creationId xmlns:a16="http://schemas.microsoft.com/office/drawing/2014/main" id="{B76AA5B3-C9DE-4BF3-ABC5-C3A78881EB01}"/>
               </a:ext>
             </a:extLst>
           </p:cNvPr>
@@ -36500,7 +36500,7 @@
           <p:cNvPr id="21" name="">
             <a:extLst xmlns:a="http://schemas.openxmlformats.org/drawingml/2006/main">
               <a:ext uri="{FF2B5EF4-FFF2-40B4-BE49-F238E27FC236}">
-                <a16:creationId xmlns:a16="http://schemas.microsoft.com/office/drawing/2014/main" id="{E677DFCA-B9F1-4759-A6B3-924DD357E70A}"/>
+                <a16:creationId xmlns:a16="http://schemas.microsoft.com/office/drawing/2014/main" id="{99422CFB-7655-4867-8761-176A80F518F0}"/>
               </a:ext>
             </a:extLst>
           </p:cNvPr>
@@ -36552,7 +36552,7 @@
           <p:cNvPr id="22" name="">
             <a:extLst xmlns:a="http://schemas.openxmlformats.org/drawingml/2006/main">
               <a:ext uri="{FF2B5EF4-FFF2-40B4-BE49-F238E27FC236}">
-                <a16:creationId xmlns:a16="http://schemas.microsoft.com/office/drawing/2014/main" id="{48F913ED-0216-4DAD-80D1-C1726DF160FE}"/>
+                <a16:creationId xmlns:a16="http://schemas.microsoft.com/office/drawing/2014/main" id="{906A19D0-A0AF-47F2-80B3-3D8169B2D699}"/>
               </a:ext>
             </a:extLst>
           </p:cNvPr>
@@ -36604,7 +36604,7 @@
           <p:cNvPr id="23" name="">
             <a:extLst xmlns:a="http://schemas.openxmlformats.org/drawingml/2006/main">
               <a:ext uri="{FF2B5EF4-FFF2-40B4-BE49-F238E27FC236}">
-                <a16:creationId xmlns:a16="http://schemas.microsoft.com/office/drawing/2014/main" id="{421D6987-8645-44B0-A15D-963C857159BB}"/>
+                <a16:creationId xmlns:a16="http://schemas.microsoft.com/office/drawing/2014/main" id="{42460F00-3DA2-4FAA-A70C-A2D3F9DAD581}"/>
               </a:ext>
             </a:extLst>
           </p:cNvPr>
@@ -36656,7 +36656,7 @@
           <p:cNvPr id="24" name="">
             <a:extLst xmlns:a="http://schemas.openxmlformats.org/drawingml/2006/main">
               <a:ext uri="{FF2B5EF4-FFF2-40B4-BE49-F238E27FC236}">
-                <a16:creationId xmlns:a16="http://schemas.microsoft.com/office/drawing/2014/main" id="{F025A337-C31B-43B4-85AF-2C870662276F}"/>
+                <a16:creationId xmlns:a16="http://schemas.microsoft.com/office/drawing/2014/main" id="{59271A13-B8A0-41FB-8C45-4EF0D6E42F04}"/>
               </a:ext>
             </a:extLst>
           </p:cNvPr>
@@ -36708,7 +36708,7 @@
           <p:cNvPr id="25" name="">
             <a:extLst xmlns:a="http://schemas.openxmlformats.org/drawingml/2006/main">
               <a:ext uri="{FF2B5EF4-FFF2-40B4-BE49-F238E27FC236}">
-                <a16:creationId xmlns:a16="http://schemas.microsoft.com/office/drawing/2014/main" id="{A9BEE368-4A4A-4273-9673-066B7030B74A}"/>
+                <a16:creationId xmlns:a16="http://schemas.microsoft.com/office/drawing/2014/main" id="{7F834733-AF18-4E7B-8AD8-E3F73EE78762}"/>
               </a:ext>
             </a:extLst>
           </p:cNvPr>
@@ -36760,7 +36760,7 @@
           <p:cNvPr id="26" name="">
             <a:extLst xmlns:a="http://schemas.openxmlformats.org/drawingml/2006/main">
               <a:ext uri="{FF2B5EF4-FFF2-40B4-BE49-F238E27FC236}">
-                <a16:creationId xmlns:a16="http://schemas.microsoft.com/office/drawing/2014/main" id="{DE855414-66DE-4405-9E4D-AA10BCA58EC5}"/>
+                <a16:creationId xmlns:a16="http://schemas.microsoft.com/office/drawing/2014/main" id="{30745A89-3D2D-4FC5-A0D1-37DC155F31D7}"/>
               </a:ext>
             </a:extLst>
           </p:cNvPr>
@@ -36810,7 +36810,7 @@
     </p:spTree>
     <p:extLst>
       <p:ext uri="{BB962C8B-B14F-4D97-AF65-F5344CB8AC3E}">
-        <p14:creationId xmlns:p14="http://schemas.microsoft.com/office/powerpoint/2010/main" val="1257352625"/>
+        <p14:creationId xmlns:p14="http://schemas.microsoft.com/office/powerpoint/2010/main" val="205331396"/>
       </p:ext>
     </p:extLst>
   </p:cSld>
@@ -36841,7 +36841,7 @@
           <p:cNvPr id="27" name="">
             <a:extLst xmlns:a="http://schemas.openxmlformats.org/drawingml/2006/main">
               <a:ext uri="{FF2B5EF4-FFF2-40B4-BE49-F238E27FC236}">
-                <a16:creationId xmlns:a16="http://schemas.microsoft.com/office/drawing/2014/main" id="{02D8778D-5616-43FB-8720-A58F5843AA8D}"/>
+                <a16:creationId xmlns:a16="http://schemas.microsoft.com/office/drawing/2014/main" id="{CBE55417-8F5B-4B6C-8A01-476425CAD0F9}"/>
               </a:ext>
             </a:extLst>
           </p:cNvPr>
@@ -36874,7 +36874,7 @@
           <p:cNvPr id="2" name="">
             <a:extLst xmlns:a="http://schemas.openxmlformats.org/drawingml/2006/main">
               <a:ext uri="{FF2B5EF4-FFF2-40B4-BE49-F238E27FC236}">
-                <a16:creationId xmlns:a16="http://schemas.microsoft.com/office/drawing/2014/main" id="{C6553787-2887-48DD-A6D3-1EECBE1A9F3F}"/>
+                <a16:creationId xmlns:a16="http://schemas.microsoft.com/office/drawing/2014/main" id="{A2433116-689B-46C2-93F9-67A757FAF0CF}"/>
               </a:ext>
             </a:extLst>
           </p:cNvPr>
@@ -36905,7 +36905,7 @@
           <p:cNvPr id="3" name="">
             <a:extLst xmlns:a="http://schemas.openxmlformats.org/drawingml/2006/main">
               <a:ext uri="{FF2B5EF4-FFF2-40B4-BE49-F238E27FC236}">
-                <a16:creationId xmlns:a16="http://schemas.microsoft.com/office/drawing/2014/main" id="{CF0A6F32-5161-46D9-9F28-64016C5810AC}"/>
+                <a16:creationId xmlns:a16="http://schemas.microsoft.com/office/drawing/2014/main" id="{922E61C7-AB25-4129-B171-EB603DA5788B}"/>
               </a:ext>
             </a:extLst>
           </p:cNvPr>
@@ -36957,7 +36957,7 @@
           <p:cNvPr id="4" name="">
             <a:extLst xmlns:a="http://schemas.openxmlformats.org/drawingml/2006/main">
               <a:ext uri="{FF2B5EF4-FFF2-40B4-BE49-F238E27FC236}">
-                <a16:creationId xmlns:a16="http://schemas.microsoft.com/office/drawing/2014/main" id="{7F2CABB3-BA6A-4399-8CB0-66B630DFEE15}"/>
+                <a16:creationId xmlns:a16="http://schemas.microsoft.com/office/drawing/2014/main" id="{0048D561-DCA5-4645-B615-67A5BCBD266E}"/>
               </a:ext>
             </a:extLst>
           </p:cNvPr>
@@ -37009,7 +37009,7 @@
           <p:cNvPr id="5" name="">
             <a:extLst xmlns:a="http://schemas.openxmlformats.org/drawingml/2006/main">
               <a:ext uri="{FF2B5EF4-FFF2-40B4-BE49-F238E27FC236}">
-                <a16:creationId xmlns:a16="http://schemas.microsoft.com/office/drawing/2014/main" id="{11D627C5-7AD0-48D5-BAF1-E557B78D772F}"/>
+                <a16:creationId xmlns:a16="http://schemas.microsoft.com/office/drawing/2014/main" id="{2D0549C2-EC13-42E0-A97D-5E384164A8A3}"/>
               </a:ext>
             </a:extLst>
           </p:cNvPr>
@@ -37044,7 +37044,7 @@
           <p:nvPr/>
         </p:nvPicPr>
         <p:blipFill>
-          <a:blip xmlns:r="http://schemas.openxmlformats.org/officeDocument/2006/relationships" xmlns:a="http://schemas.openxmlformats.org/drawingml/2006/main" r:embed="Rf2c695228fae4fd6"/>
+          <a:blip xmlns:r="http://schemas.openxmlformats.org/officeDocument/2006/relationships" xmlns:a="http://schemas.openxmlformats.org/drawingml/2006/main" r:embed="Re7cf2b899bc4452e"/>
           <a:stretch xmlns:a="http://schemas.openxmlformats.org/drawingml/2006/main"/>
         </p:blipFill>
         <p:spPr>
@@ -37062,7 +37062,7 @@
           <p:cNvPr id="7" name="">
             <a:extLst xmlns:a="http://schemas.openxmlformats.org/drawingml/2006/main">
               <a:ext uri="{FF2B5EF4-FFF2-40B4-BE49-F238E27FC236}">
-                <a16:creationId xmlns:a16="http://schemas.microsoft.com/office/drawing/2014/main" id="{D34B65D1-4B8F-4AC0-AD47-1D420D44DD02}"/>
+                <a16:creationId xmlns:a16="http://schemas.microsoft.com/office/drawing/2014/main" id="{6210A3A8-A007-476D-928D-A6DC7111E193}"/>
               </a:ext>
             </a:extLst>
           </p:cNvPr>
@@ -37114,7 +37114,7 @@
           <p:cNvPr id="8" name="">
             <a:extLst xmlns:a="http://schemas.openxmlformats.org/drawingml/2006/main">
               <a:ext uri="{FF2B5EF4-FFF2-40B4-BE49-F238E27FC236}">
-                <a16:creationId xmlns:a16="http://schemas.microsoft.com/office/drawing/2014/main" id="{B8AE533B-DB37-4D23-9BD8-A940501EA883}"/>
+                <a16:creationId xmlns:a16="http://schemas.microsoft.com/office/drawing/2014/main" id="{BA32EEDB-5BCE-449A-A32F-8202FF4D52A4}"/>
               </a:ext>
             </a:extLst>
           </p:cNvPr>
@@ -37166,7 +37166,7 @@
           <p:cNvPr id="9" name="">
             <a:extLst xmlns:a="http://schemas.openxmlformats.org/drawingml/2006/main">
               <a:ext uri="{FF2B5EF4-FFF2-40B4-BE49-F238E27FC236}">
-                <a16:creationId xmlns:a16="http://schemas.microsoft.com/office/drawing/2014/main" id="{974F1591-25CF-42C3-9240-259B5E013F5D}"/>
+                <a16:creationId xmlns:a16="http://schemas.microsoft.com/office/drawing/2014/main" id="{218898FB-401D-45E6-90B7-CF24587984B2}"/>
               </a:ext>
             </a:extLst>
           </p:cNvPr>
@@ -37218,7 +37218,7 @@
           <p:cNvPr id="10" name="">
             <a:extLst xmlns:a="http://schemas.openxmlformats.org/drawingml/2006/main">
               <a:ext uri="{FF2B5EF4-FFF2-40B4-BE49-F238E27FC236}">
-                <a16:creationId xmlns:a16="http://schemas.microsoft.com/office/drawing/2014/main" id="{0AE613D9-F7CF-4617-B034-18E7CD58DF4D}"/>
+                <a16:creationId xmlns:a16="http://schemas.microsoft.com/office/drawing/2014/main" id="{5C01C8BE-36D4-4D7B-B6C5-8739966FB5BA}"/>
               </a:ext>
             </a:extLst>
           </p:cNvPr>
@@ -37270,7 +37270,7 @@
           <p:cNvPr id="11" name="">
             <a:extLst xmlns:a="http://schemas.openxmlformats.org/drawingml/2006/main">
               <a:ext uri="{FF2B5EF4-FFF2-40B4-BE49-F238E27FC236}">
-                <a16:creationId xmlns:a16="http://schemas.microsoft.com/office/drawing/2014/main" id="{A4533944-FAB6-4D99-BEF5-65569BBD859F}"/>
+                <a16:creationId xmlns:a16="http://schemas.microsoft.com/office/drawing/2014/main" id="{6D597962-49DD-496D-8408-30B4C01BF3E2}"/>
               </a:ext>
             </a:extLst>
           </p:cNvPr>
@@ -37317,10 +37317,10 @@
           <p:nvPr/>
         </p:nvPicPr>
         <p:blipFill>
-          <a:blip xmlns:r="http://schemas.openxmlformats.org/officeDocument/2006/relationships" xmlns:a="http://schemas.openxmlformats.org/drawingml/2006/main" r:embed="Re89161b7025b4f00">
+          <a:blip xmlns:r="http://schemas.openxmlformats.org/officeDocument/2006/relationships" xmlns:a="http://schemas.openxmlformats.org/drawingml/2006/main" r:embed="Rb5813baf22554ede">
             <a:extLst>
               <a:ext uri="{96DAC541-7B7A-43D3-8B79-37D633B846F1}">
-                <asvg:svgBlip xmlns:asvg="http://schemas.microsoft.com/office/drawing/2016/SVG/main" r:embed="R54290daf94204579"/>
+                <asvg:svgBlip xmlns:asvg="http://schemas.microsoft.com/office/drawing/2016/SVG/main" r:embed="R14a9f03c9b624f7d"/>
               </a:ext>
             </a:extLst>
           </a:blip>
@@ -37341,7 +37341,7 @@
           <p:cNvPr id="13" name="">
             <a:extLst xmlns:a="http://schemas.openxmlformats.org/drawingml/2006/main">
               <a:ext uri="{FF2B5EF4-FFF2-40B4-BE49-F238E27FC236}">
-                <a16:creationId xmlns:a16="http://schemas.microsoft.com/office/drawing/2014/main" id="{D163C149-8056-4084-83A6-81196FDF5AAF}"/>
+                <a16:creationId xmlns:a16="http://schemas.microsoft.com/office/drawing/2014/main" id="{2ECEF3FD-9175-4BB4-9EE9-61993A49386C}"/>
               </a:ext>
             </a:extLst>
           </p:cNvPr>
@@ -37374,7 +37374,7 @@
           <p:cNvPr id="14" name="">
             <a:extLst xmlns:a="http://schemas.openxmlformats.org/drawingml/2006/main">
               <a:ext uri="{FF2B5EF4-FFF2-40B4-BE49-F238E27FC236}">
-                <a16:creationId xmlns:a16="http://schemas.microsoft.com/office/drawing/2014/main" id="{0FD6DB84-CD4A-4C57-9BF4-67BC87DB5B07}"/>
+                <a16:creationId xmlns:a16="http://schemas.microsoft.com/office/drawing/2014/main" id="{0555D5E6-E251-4DFD-B6E5-9CF2F1BE7D77}"/>
               </a:ext>
             </a:extLst>
           </p:cNvPr>
@@ -37426,7 +37426,7 @@
           <p:cNvPr id="15" name="">
             <a:extLst xmlns:a="http://schemas.openxmlformats.org/drawingml/2006/main">
               <a:ext uri="{FF2B5EF4-FFF2-40B4-BE49-F238E27FC236}">
-                <a16:creationId xmlns:a16="http://schemas.microsoft.com/office/drawing/2014/main" id="{456F4998-12D7-4677-A914-5F9E27AB765F}"/>
+                <a16:creationId xmlns:a16="http://schemas.microsoft.com/office/drawing/2014/main" id="{A6019129-4CCB-430C-905F-4E4C43078E42}"/>
               </a:ext>
             </a:extLst>
           </p:cNvPr>
@@ -37459,7 +37459,7 @@
           <p:cNvPr id="16" name="">
             <a:extLst xmlns:a="http://schemas.openxmlformats.org/drawingml/2006/main">
               <a:ext uri="{FF2B5EF4-FFF2-40B4-BE49-F238E27FC236}">
-                <a16:creationId xmlns:a16="http://schemas.microsoft.com/office/drawing/2014/main" id="{CE8DD3EF-3A43-484A-8B6E-263BF9E70ACB}"/>
+                <a16:creationId xmlns:a16="http://schemas.microsoft.com/office/drawing/2014/main" id="{7C8018D3-563B-4880-A95C-88F5D7FB6415}"/>
               </a:ext>
             </a:extLst>
           </p:cNvPr>
@@ -37511,7 +37511,7 @@
           <p:cNvPr id="17" name="">
             <a:extLst xmlns:a="http://schemas.openxmlformats.org/drawingml/2006/main">
               <a:ext uri="{FF2B5EF4-FFF2-40B4-BE49-F238E27FC236}">
-                <a16:creationId xmlns:a16="http://schemas.microsoft.com/office/drawing/2014/main" id="{B0137E7D-C05A-4A30-8787-32F30C0AB9FA}"/>
+                <a16:creationId xmlns:a16="http://schemas.microsoft.com/office/drawing/2014/main" id="{A1785271-DE88-449D-B4BD-C72B144E0CAF}"/>
               </a:ext>
             </a:extLst>
           </p:cNvPr>
@@ -37544,7 +37544,7 @@
           <p:cNvPr id="18" name="">
             <a:extLst xmlns:a="http://schemas.openxmlformats.org/drawingml/2006/main">
               <a:ext uri="{FF2B5EF4-FFF2-40B4-BE49-F238E27FC236}">
-                <a16:creationId xmlns:a16="http://schemas.microsoft.com/office/drawing/2014/main" id="{FB510F8C-A908-4E6B-9BF7-3A05C139383C}"/>
+                <a16:creationId xmlns:a16="http://schemas.microsoft.com/office/drawing/2014/main" id="{85223FE2-DC7D-4926-BCD9-0A64D46BFF4C}"/>
               </a:ext>
             </a:extLst>
           </p:cNvPr>
@@ -37596,7 +37596,7 @@
           <p:cNvPr id="19" name="">
             <a:extLst xmlns:a="http://schemas.openxmlformats.org/drawingml/2006/main">
               <a:ext uri="{FF2B5EF4-FFF2-40B4-BE49-F238E27FC236}">
-                <a16:creationId xmlns:a16="http://schemas.microsoft.com/office/drawing/2014/main" id="{60C2A7E1-E4F1-457A-97E0-52203D6DD60A}"/>
+                <a16:creationId xmlns:a16="http://schemas.microsoft.com/office/drawing/2014/main" id="{51CCCA1E-7AE5-4582-A023-111376A69838}"/>
               </a:ext>
             </a:extLst>
           </p:cNvPr>
@@ -37648,7 +37648,7 @@
           <p:cNvPr id="20" name="">
             <a:extLst xmlns:a="http://schemas.openxmlformats.org/drawingml/2006/main">
               <a:ext uri="{FF2B5EF4-FFF2-40B4-BE49-F238E27FC236}">
-                <a16:creationId xmlns:a16="http://schemas.microsoft.com/office/drawing/2014/main" id="{4FE46C2A-E6E9-4527-A30B-1741A4C35FB1}"/>
+                <a16:creationId xmlns:a16="http://schemas.microsoft.com/office/drawing/2014/main" id="{FFF36AB9-D44D-48F5-8A42-F94C7727FAA6}"/>
               </a:ext>
             </a:extLst>
           </p:cNvPr>
@@ -37679,7 +37679,7 @@
           <p:cNvPr id="21" name="">
             <a:extLst xmlns:a="http://schemas.openxmlformats.org/drawingml/2006/main">
               <a:ext uri="{FF2B5EF4-FFF2-40B4-BE49-F238E27FC236}">
-                <a16:creationId xmlns:a16="http://schemas.microsoft.com/office/drawing/2014/main" id="{4FA924E6-962F-42D0-A76D-D66CB8A71178}"/>
+                <a16:creationId xmlns:a16="http://schemas.microsoft.com/office/drawing/2014/main" id="{42AEDE09-CA12-4ABE-92DB-71D6BCC3B668}"/>
               </a:ext>
             </a:extLst>
           </p:cNvPr>
@@ -37731,7 +37731,7 @@
           <p:cNvPr id="22" name="">
             <a:extLst xmlns:a="http://schemas.openxmlformats.org/drawingml/2006/main">
               <a:ext uri="{FF2B5EF4-FFF2-40B4-BE49-F238E27FC236}">
-                <a16:creationId xmlns:a16="http://schemas.microsoft.com/office/drawing/2014/main" id="{14053360-3799-4645-BC2B-48290DCEEA02}"/>
+                <a16:creationId xmlns:a16="http://schemas.microsoft.com/office/drawing/2014/main" id="{97A75502-9CDC-4D84-8028-9EE3AF51A530}"/>
               </a:ext>
             </a:extLst>
           </p:cNvPr>
@@ -37783,7 +37783,7 @@
           <p:cNvPr id="23" name="">
             <a:extLst xmlns:a="http://schemas.openxmlformats.org/drawingml/2006/main">
               <a:ext uri="{FF2B5EF4-FFF2-40B4-BE49-F238E27FC236}">
-                <a16:creationId xmlns:a16="http://schemas.microsoft.com/office/drawing/2014/main" id="{FC3AA3F8-7340-4E4E-A092-8BB5FBD4FC7A}"/>
+                <a16:creationId xmlns:a16="http://schemas.microsoft.com/office/drawing/2014/main" id="{C6B3FCE3-B675-4DE6-9F22-4EC5C398D6DA}"/>
               </a:ext>
             </a:extLst>
           </p:cNvPr>
@@ -37835,7 +37835,7 @@
           <p:cNvPr id="24" name="">
             <a:extLst xmlns:a="http://schemas.openxmlformats.org/drawingml/2006/main">
               <a:ext uri="{FF2B5EF4-FFF2-40B4-BE49-F238E27FC236}">
-                <a16:creationId xmlns:a16="http://schemas.microsoft.com/office/drawing/2014/main" id="{B870A188-FEEE-49F9-BBBE-C8D82475C97A}"/>
+                <a16:creationId xmlns:a16="http://schemas.microsoft.com/office/drawing/2014/main" id="{1EB028E8-18B4-49A0-B41D-D609E823A80A}"/>
               </a:ext>
             </a:extLst>
           </p:cNvPr>
@@ -37887,7 +37887,7 @@
           <p:cNvPr id="25" name="">
             <a:extLst xmlns:a="http://schemas.openxmlformats.org/drawingml/2006/main">
               <a:ext uri="{FF2B5EF4-FFF2-40B4-BE49-F238E27FC236}">
-                <a16:creationId xmlns:a16="http://schemas.microsoft.com/office/drawing/2014/main" id="{35FE7472-93CB-4E42-B4DC-C7E825CE1BBA}"/>
+                <a16:creationId xmlns:a16="http://schemas.microsoft.com/office/drawing/2014/main" id="{A75FB548-6E1F-476A-A812-208762BDFD52}"/>
               </a:ext>
             </a:extLst>
           </p:cNvPr>
@@ -37939,7 +37939,7 @@
           <p:cNvPr id="26" name="">
             <a:extLst xmlns:a="http://schemas.openxmlformats.org/drawingml/2006/main">
               <a:ext uri="{FF2B5EF4-FFF2-40B4-BE49-F238E27FC236}">
-                <a16:creationId xmlns:a16="http://schemas.microsoft.com/office/drawing/2014/main" id="{08E4AC45-B76B-4C63-BA3D-2AA420962D5A}"/>
+                <a16:creationId xmlns:a16="http://schemas.microsoft.com/office/drawing/2014/main" id="{4EFB28DF-DFC9-457A-9A41-9225D0A82FE0}"/>
               </a:ext>
             </a:extLst>
           </p:cNvPr>
@@ -37989,7 +37989,7 @@
     </p:spTree>
     <p:extLst>
       <p:ext uri="{BB962C8B-B14F-4D97-AF65-F5344CB8AC3E}">
-        <p14:creationId xmlns:p14="http://schemas.microsoft.com/office/powerpoint/2010/main" val="992555028"/>
+        <p14:creationId xmlns:p14="http://schemas.microsoft.com/office/powerpoint/2010/main" val="917126963"/>
       </p:ext>
     </p:extLst>
   </p:cSld>
@@ -38020,7 +38020,7 @@
           <p:cNvPr id="35" name="">
             <a:extLst xmlns:a="http://schemas.openxmlformats.org/drawingml/2006/main">
               <a:ext uri="{FF2B5EF4-FFF2-40B4-BE49-F238E27FC236}">
-                <a16:creationId xmlns:a16="http://schemas.microsoft.com/office/drawing/2014/main" id="{53EEE106-A0E9-4584-B9EE-41520722D688}"/>
+                <a16:creationId xmlns:a16="http://schemas.microsoft.com/office/drawing/2014/main" id="{F01565D4-1DE3-483C-AFD4-121B5FC6DDED}"/>
               </a:ext>
             </a:extLst>
           </p:cNvPr>
@@ -38053,7 +38053,7 @@
           <p:cNvPr id="2" name="">
             <a:extLst xmlns:a="http://schemas.openxmlformats.org/drawingml/2006/main">
               <a:ext uri="{FF2B5EF4-FFF2-40B4-BE49-F238E27FC236}">
-                <a16:creationId xmlns:a16="http://schemas.microsoft.com/office/drawing/2014/main" id="{7659A7E5-EAE6-454B-82D3-2448323B56F3}"/>
+                <a16:creationId xmlns:a16="http://schemas.microsoft.com/office/drawing/2014/main" id="{4EFC541E-D2CF-42AC-81DA-4964AD2DB262}"/>
               </a:ext>
             </a:extLst>
           </p:cNvPr>
@@ -38084,7 +38084,7 @@
           <p:cNvPr id="3" name="">
             <a:extLst xmlns:a="http://schemas.openxmlformats.org/drawingml/2006/main">
               <a:ext uri="{FF2B5EF4-FFF2-40B4-BE49-F238E27FC236}">
-                <a16:creationId xmlns:a16="http://schemas.microsoft.com/office/drawing/2014/main" id="{69E8F9D5-D4BC-4ECC-A2B3-8614E32F9ADC}"/>
+                <a16:creationId xmlns:a16="http://schemas.microsoft.com/office/drawing/2014/main" id="{FFB2B80D-A067-40E6-B5F7-436F0022B1A9}"/>
               </a:ext>
             </a:extLst>
           </p:cNvPr>
@@ -38136,7 +38136,7 @@
           <p:cNvPr id="4" name="">
             <a:extLst xmlns:a="http://schemas.openxmlformats.org/drawingml/2006/main">
               <a:ext uri="{FF2B5EF4-FFF2-40B4-BE49-F238E27FC236}">
-                <a16:creationId xmlns:a16="http://schemas.microsoft.com/office/drawing/2014/main" id="{25F2006D-5159-4AB8-BA66-993F42D6D4BD}"/>
+                <a16:creationId xmlns:a16="http://schemas.microsoft.com/office/drawing/2014/main" id="{9479D461-EF2C-4468-9F80-FC03DF4BA036}"/>
               </a:ext>
             </a:extLst>
           </p:cNvPr>
@@ -38188,7 +38188,7 @@
           <p:cNvPr id="5" name="">
             <a:extLst xmlns:a="http://schemas.openxmlformats.org/drawingml/2006/main">
               <a:ext uri="{FF2B5EF4-FFF2-40B4-BE49-F238E27FC236}">
-                <a16:creationId xmlns:a16="http://schemas.microsoft.com/office/drawing/2014/main" id="{D424154C-DB29-4FF1-A493-3639D8484E42}"/>
+                <a16:creationId xmlns:a16="http://schemas.microsoft.com/office/drawing/2014/main" id="{FC03D2B5-015A-4E9B-8535-50F442544341}"/>
               </a:ext>
             </a:extLst>
           </p:cNvPr>
@@ -38223,7 +38223,7 @@
           <p:nvPr/>
         </p:nvPicPr>
         <p:blipFill>
-          <a:blip xmlns:r="http://schemas.openxmlformats.org/officeDocument/2006/relationships" xmlns:a="http://schemas.openxmlformats.org/drawingml/2006/main" r:embed="R55b1d94ea9814cce"/>
+          <a:blip xmlns:r="http://schemas.openxmlformats.org/officeDocument/2006/relationships" xmlns:a="http://schemas.openxmlformats.org/drawingml/2006/main" r:embed="Rf204567fb3e44cd1"/>
           <a:stretch xmlns:a="http://schemas.openxmlformats.org/drawingml/2006/main"/>
         </p:blipFill>
         <p:spPr>
@@ -38241,7 +38241,7 @@
           <p:cNvPr id="7" name="">
             <a:extLst xmlns:a="http://schemas.openxmlformats.org/drawingml/2006/main">
               <a:ext uri="{FF2B5EF4-FFF2-40B4-BE49-F238E27FC236}">
-                <a16:creationId xmlns:a16="http://schemas.microsoft.com/office/drawing/2014/main" id="{2B87CA2D-6A44-45D5-8381-55F6C9678B30}"/>
+                <a16:creationId xmlns:a16="http://schemas.microsoft.com/office/drawing/2014/main" id="{FB4400C8-7749-4A31-B3F3-100A81926C43}"/>
               </a:ext>
             </a:extLst>
           </p:cNvPr>
@@ -38293,7 +38293,7 @@
           <p:cNvPr id="8" name="">
             <a:extLst xmlns:a="http://schemas.openxmlformats.org/drawingml/2006/main">
               <a:ext uri="{FF2B5EF4-FFF2-40B4-BE49-F238E27FC236}">
-                <a16:creationId xmlns:a16="http://schemas.microsoft.com/office/drawing/2014/main" id="{CCBBD265-7176-42E8-916E-B9FD21FB40CF}"/>
+                <a16:creationId xmlns:a16="http://schemas.microsoft.com/office/drawing/2014/main" id="{5D3CEEC4-6C7E-4F2B-A94D-A3675593A8FF}"/>
               </a:ext>
             </a:extLst>
           </p:cNvPr>
@@ -38345,7 +38345,7 @@
           <p:cNvPr id="9" name="">
             <a:extLst xmlns:a="http://schemas.openxmlformats.org/drawingml/2006/main">
               <a:ext uri="{FF2B5EF4-FFF2-40B4-BE49-F238E27FC236}">
-                <a16:creationId xmlns:a16="http://schemas.microsoft.com/office/drawing/2014/main" id="{794A9FF3-D47E-461E-8A63-33156A8D7132}"/>
+                <a16:creationId xmlns:a16="http://schemas.microsoft.com/office/drawing/2014/main" id="{91866D18-820F-4EF6-8BB5-7054CF992BB3}"/>
               </a:ext>
             </a:extLst>
           </p:cNvPr>
@@ -38397,7 +38397,7 @@
           <p:cNvPr id="10" name="">
             <a:extLst xmlns:a="http://schemas.openxmlformats.org/drawingml/2006/main">
               <a:ext uri="{FF2B5EF4-FFF2-40B4-BE49-F238E27FC236}">
-                <a16:creationId xmlns:a16="http://schemas.microsoft.com/office/drawing/2014/main" id="{4B65B333-FEF6-45D5-8157-14CEB76B9015}"/>
+                <a16:creationId xmlns:a16="http://schemas.microsoft.com/office/drawing/2014/main" id="{2D6C1E2A-26D7-4DCE-9289-937A935A292D}"/>
               </a:ext>
             </a:extLst>
           </p:cNvPr>
@@ -38449,7 +38449,7 @@
           <p:cNvPr id="11" name="">
             <a:extLst xmlns:a="http://schemas.openxmlformats.org/drawingml/2006/main">
               <a:ext uri="{FF2B5EF4-FFF2-40B4-BE49-F238E27FC236}">
-                <a16:creationId xmlns:a16="http://schemas.microsoft.com/office/drawing/2014/main" id="{69B17773-2620-415F-BAEF-98F24ED7F1F4}"/>
+                <a16:creationId xmlns:a16="http://schemas.microsoft.com/office/drawing/2014/main" id="{419D60E2-DB98-42DE-A232-9E09BAABC638}"/>
               </a:ext>
             </a:extLst>
           </p:cNvPr>
@@ -38496,10 +38496,10 @@
           <p:nvPr/>
         </p:nvPicPr>
         <p:blipFill>
-          <a:blip xmlns:r="http://schemas.openxmlformats.org/officeDocument/2006/relationships" xmlns:a="http://schemas.openxmlformats.org/drawingml/2006/main" r:embed="R57fdf701513c46b0">
+          <a:blip xmlns:r="http://schemas.openxmlformats.org/officeDocument/2006/relationships" xmlns:a="http://schemas.openxmlformats.org/drawingml/2006/main" r:embed="R1e6c9795c6f44a73">
             <a:extLst>
               <a:ext uri="{96DAC541-7B7A-43D3-8B79-37D633B846F1}">
-                <asvg:svgBlip xmlns:asvg="http://schemas.microsoft.com/office/drawing/2016/SVG/main" r:embed="R48d283d6f5ce4baf"/>
+                <asvg:svgBlip xmlns:asvg="http://schemas.microsoft.com/office/drawing/2016/SVG/main" r:embed="R92543e1b52d746c9"/>
               </a:ext>
             </a:extLst>
           </a:blip>
@@ -38520,7 +38520,7 @@
           <p:cNvPr id="13" name="">
             <a:extLst xmlns:a="http://schemas.openxmlformats.org/drawingml/2006/main">
               <a:ext uri="{FF2B5EF4-FFF2-40B4-BE49-F238E27FC236}">
-                <a16:creationId xmlns:a16="http://schemas.microsoft.com/office/drawing/2014/main" id="{EFE88803-63D2-45E3-A82E-5C08DCCD1217}"/>
+                <a16:creationId xmlns:a16="http://schemas.microsoft.com/office/drawing/2014/main" id="{3FE0AB4C-81B1-4116-BCFB-28DAD7DB2786}"/>
               </a:ext>
             </a:extLst>
           </p:cNvPr>
@@ -38553,7 +38553,7 @@
           <p:cNvPr id="14" name="">
             <a:extLst xmlns:a="http://schemas.openxmlformats.org/drawingml/2006/main">
               <a:ext uri="{FF2B5EF4-FFF2-40B4-BE49-F238E27FC236}">
-                <a16:creationId xmlns:a16="http://schemas.microsoft.com/office/drawing/2014/main" id="{EED58AEB-2AC6-466A-98AD-B73EBEC2C225}"/>
+                <a16:creationId xmlns:a16="http://schemas.microsoft.com/office/drawing/2014/main" id="{DE6D6318-9DFF-437B-B728-4DB99AA0040E}"/>
               </a:ext>
             </a:extLst>
           </p:cNvPr>
@@ -38605,7 +38605,7 @@
           <p:cNvPr id="15" name="">
             <a:extLst xmlns:a="http://schemas.openxmlformats.org/drawingml/2006/main">
               <a:ext uri="{FF2B5EF4-FFF2-40B4-BE49-F238E27FC236}">
-                <a16:creationId xmlns:a16="http://schemas.microsoft.com/office/drawing/2014/main" id="{7260DB5D-040D-46B3-9A95-2E0826DEC800}"/>
+                <a16:creationId xmlns:a16="http://schemas.microsoft.com/office/drawing/2014/main" id="{5CF91833-E834-442D-BB5B-CCB4FCB7EB19}"/>
               </a:ext>
             </a:extLst>
           </p:cNvPr>
@@ -38638,7 +38638,7 @@
           <p:cNvPr id="16" name="">
             <a:extLst xmlns:a="http://schemas.openxmlformats.org/drawingml/2006/main">
               <a:ext uri="{FF2B5EF4-FFF2-40B4-BE49-F238E27FC236}">
-                <a16:creationId xmlns:a16="http://schemas.microsoft.com/office/drawing/2014/main" id="{F399EF83-2367-4B00-B9F8-A82CDF756660}"/>
+                <a16:creationId xmlns:a16="http://schemas.microsoft.com/office/drawing/2014/main" id="{F146157F-4BAA-4F6A-AD5C-60AAB81A1E74}"/>
               </a:ext>
             </a:extLst>
           </p:cNvPr>
@@ -38690,7 +38690,7 @@
           <p:cNvPr id="17" name="">
             <a:extLst xmlns:a="http://schemas.openxmlformats.org/drawingml/2006/main">
               <a:ext uri="{FF2B5EF4-FFF2-40B4-BE49-F238E27FC236}">
-                <a16:creationId xmlns:a16="http://schemas.microsoft.com/office/drawing/2014/main" id="{F6F0DD53-E39D-4E8A-ACBE-4F5EACB0007E}"/>
+                <a16:creationId xmlns:a16="http://schemas.microsoft.com/office/drawing/2014/main" id="{88BDC6BA-0ED0-4584-8F8A-5C51EAB545A7}"/>
               </a:ext>
             </a:extLst>
           </p:cNvPr>
@@ -38723,7 +38723,7 @@
           <p:cNvPr id="18" name="">
             <a:extLst xmlns:a="http://schemas.openxmlformats.org/drawingml/2006/main">
               <a:ext uri="{FF2B5EF4-FFF2-40B4-BE49-F238E27FC236}">
-                <a16:creationId xmlns:a16="http://schemas.microsoft.com/office/drawing/2014/main" id="{0891EDC8-8639-4295-A00F-0F253BD0E302}"/>
+                <a16:creationId xmlns:a16="http://schemas.microsoft.com/office/drawing/2014/main" id="{CEE0C300-02C7-414F-B9B8-21DDD043A529}"/>
               </a:ext>
             </a:extLst>
           </p:cNvPr>
@@ -38775,7 +38775,7 @@
           <p:cNvPr id="19" name="">
             <a:extLst xmlns:a="http://schemas.openxmlformats.org/drawingml/2006/main">
               <a:ext uri="{FF2B5EF4-FFF2-40B4-BE49-F238E27FC236}">
-                <a16:creationId xmlns:a16="http://schemas.microsoft.com/office/drawing/2014/main" id="{4F32BB68-3EF9-4A2D-950D-93AF004638D1}"/>
+                <a16:creationId xmlns:a16="http://schemas.microsoft.com/office/drawing/2014/main" id="{05F735AB-0CE2-4908-ACC3-5EE5DF91BB52}"/>
               </a:ext>
             </a:extLst>
           </p:cNvPr>
@@ -38808,7 +38808,7 @@
           <p:cNvPr id="20" name="">
             <a:extLst xmlns:a="http://schemas.openxmlformats.org/drawingml/2006/main">
               <a:ext uri="{FF2B5EF4-FFF2-40B4-BE49-F238E27FC236}">
-                <a16:creationId xmlns:a16="http://schemas.microsoft.com/office/drawing/2014/main" id="{470D90D6-6B98-427C-9720-E6D26A1CC4D6}"/>
+                <a16:creationId xmlns:a16="http://schemas.microsoft.com/office/drawing/2014/main" id="{9A9D479D-FC5B-4A15-A9C5-BD1C52CD2613}"/>
               </a:ext>
             </a:extLst>
           </p:cNvPr>
@@ -38860,7 +38860,7 @@
           <p:cNvPr id="21" name="">
             <a:extLst xmlns:a="http://schemas.openxmlformats.org/drawingml/2006/main">
               <a:ext uri="{FF2B5EF4-FFF2-40B4-BE49-F238E27FC236}">
-                <a16:creationId xmlns:a16="http://schemas.microsoft.com/office/drawing/2014/main" id="{77ACE0E1-7F70-459F-8973-57316AFB1204}"/>
+                <a16:creationId xmlns:a16="http://schemas.microsoft.com/office/drawing/2014/main" id="{4ACDF2FC-BC9B-4228-B9D0-ACC203FBC0C9}"/>
               </a:ext>
             </a:extLst>
           </p:cNvPr>
@@ -38893,7 +38893,7 @@
           <p:cNvPr id="22" name="">
             <a:extLst xmlns:a="http://schemas.openxmlformats.org/drawingml/2006/main">
               <a:ext uri="{FF2B5EF4-FFF2-40B4-BE49-F238E27FC236}">
-                <a16:creationId xmlns:a16="http://schemas.microsoft.com/office/drawing/2014/main" id="{ACA5F731-6C2F-4DDC-B8FD-8D3DBC55A2FF}"/>
+                <a16:creationId xmlns:a16="http://schemas.microsoft.com/office/drawing/2014/main" id="{DE95F435-03C8-49F1-98A9-F8C9952B2591}"/>
               </a:ext>
             </a:extLst>
           </p:cNvPr>
@@ -38945,7 +38945,7 @@
           <p:cNvPr id="23" name="">
             <a:extLst xmlns:a="http://schemas.openxmlformats.org/drawingml/2006/main">
               <a:ext uri="{FF2B5EF4-FFF2-40B4-BE49-F238E27FC236}">
-                <a16:creationId xmlns:a16="http://schemas.microsoft.com/office/drawing/2014/main" id="{27E5EB81-C98F-4D45-BEC8-8B3F96174AAF}"/>
+                <a16:creationId xmlns:a16="http://schemas.microsoft.com/office/drawing/2014/main" id="{EE735C2E-1F50-4E8B-A1E9-D8F0D5BF2061}"/>
               </a:ext>
             </a:extLst>
           </p:cNvPr>
@@ -38978,7 +38978,7 @@
           <p:cNvPr id="24" name="">
             <a:extLst xmlns:a="http://schemas.openxmlformats.org/drawingml/2006/main">
               <a:ext uri="{FF2B5EF4-FFF2-40B4-BE49-F238E27FC236}">
-                <a16:creationId xmlns:a16="http://schemas.microsoft.com/office/drawing/2014/main" id="{56A0D89D-AF01-4D91-8331-5F4ABF82F161}"/>
+                <a16:creationId xmlns:a16="http://schemas.microsoft.com/office/drawing/2014/main" id="{079A2015-D262-4B6F-8984-DB01DA4D7EDB}"/>
               </a:ext>
             </a:extLst>
           </p:cNvPr>
@@ -39030,7 +39030,7 @@
           <p:cNvPr id="25" name="">
             <a:extLst xmlns:a="http://schemas.openxmlformats.org/drawingml/2006/main">
               <a:ext uri="{FF2B5EF4-FFF2-40B4-BE49-F238E27FC236}">
-                <a16:creationId xmlns:a16="http://schemas.microsoft.com/office/drawing/2014/main" id="{66880B1C-368E-4ACD-8B35-EF2E2659340A}"/>
+                <a16:creationId xmlns:a16="http://schemas.microsoft.com/office/drawing/2014/main" id="{0925C21B-5C64-4255-BCC8-E3E32BAE96DB}"/>
               </a:ext>
             </a:extLst>
           </p:cNvPr>
@@ -39063,7 +39063,7 @@
           <p:cNvPr id="26" name="">
             <a:extLst xmlns:a="http://schemas.openxmlformats.org/drawingml/2006/main">
               <a:ext uri="{FF2B5EF4-FFF2-40B4-BE49-F238E27FC236}">
-                <a16:creationId xmlns:a16="http://schemas.microsoft.com/office/drawing/2014/main" id="{28757167-448F-473C-8C0B-5406BE406B81}"/>
+                <a16:creationId xmlns:a16="http://schemas.microsoft.com/office/drawing/2014/main" id="{8A9E2ABA-2B24-4226-A056-D17AED77B795}"/>
               </a:ext>
             </a:extLst>
           </p:cNvPr>
@@ -39115,7 +39115,7 @@
           <p:cNvPr id="27" name="">
             <a:extLst xmlns:a="http://schemas.openxmlformats.org/drawingml/2006/main">
               <a:ext uri="{FF2B5EF4-FFF2-40B4-BE49-F238E27FC236}">
-                <a16:creationId xmlns:a16="http://schemas.microsoft.com/office/drawing/2014/main" id="{E2FD4EA9-2E1D-4374-BAAE-BAD4DEBDADC9}"/>
+                <a16:creationId xmlns:a16="http://schemas.microsoft.com/office/drawing/2014/main" id="{37CB17C5-53F5-45CA-B1E1-49924C6FFC4C}"/>
               </a:ext>
             </a:extLst>
           </p:cNvPr>
@@ -39148,7 +39148,7 @@
           <p:cNvPr id="28" name="">
             <a:extLst xmlns:a="http://schemas.openxmlformats.org/drawingml/2006/main">
               <a:ext uri="{FF2B5EF4-FFF2-40B4-BE49-F238E27FC236}">
-                <a16:creationId xmlns:a16="http://schemas.microsoft.com/office/drawing/2014/main" id="{6AF996CC-191E-4A85-A6C3-262A658A7040}"/>
+                <a16:creationId xmlns:a16="http://schemas.microsoft.com/office/drawing/2014/main" id="{4C3EF2E5-0344-4B0A-BA6F-C3F8141898E3}"/>
               </a:ext>
             </a:extLst>
           </p:cNvPr>
@@ -39200,7 +39200,7 @@
           <p:cNvPr id="29" name="">
             <a:extLst xmlns:a="http://schemas.openxmlformats.org/drawingml/2006/main">
               <a:ext uri="{FF2B5EF4-FFF2-40B4-BE49-F238E27FC236}">
-                <a16:creationId xmlns:a16="http://schemas.microsoft.com/office/drawing/2014/main" id="{5BB6DC7E-CEF8-4BDE-8EFA-69781A6AF793}"/>
+                <a16:creationId xmlns:a16="http://schemas.microsoft.com/office/drawing/2014/main" id="{8FCCD538-352A-4804-997A-EB1CCD389429}"/>
               </a:ext>
             </a:extLst>
           </p:cNvPr>
@@ -39233,7 +39233,7 @@
           <p:cNvPr id="30" name="">
             <a:extLst xmlns:a="http://schemas.openxmlformats.org/drawingml/2006/main">
               <a:ext uri="{FF2B5EF4-FFF2-40B4-BE49-F238E27FC236}">
-                <a16:creationId xmlns:a16="http://schemas.microsoft.com/office/drawing/2014/main" id="{602BD4A7-05D0-4767-9347-E824F720D194}"/>
+                <a16:creationId xmlns:a16="http://schemas.microsoft.com/office/drawing/2014/main" id="{7D4E32D7-8468-442C-A3A3-545AFFAA473C}"/>
               </a:ext>
             </a:extLst>
           </p:cNvPr>
@@ -39285,7 +39285,7 @@
           <p:cNvPr id="31" name="">
             <a:extLst xmlns:a="http://schemas.openxmlformats.org/drawingml/2006/main">
               <a:ext uri="{FF2B5EF4-FFF2-40B4-BE49-F238E27FC236}">
-                <a16:creationId xmlns:a16="http://schemas.microsoft.com/office/drawing/2014/main" id="{9E351703-EE68-45B4-952C-CA29EAFC61EB}"/>
+                <a16:creationId xmlns:a16="http://schemas.microsoft.com/office/drawing/2014/main" id="{9AD9CC79-5E07-4A7A-9A82-8DB8433E8FCD}"/>
               </a:ext>
             </a:extLst>
           </p:cNvPr>
@@ -39318,7 +39318,7 @@
           <p:cNvPr id="32" name="">
             <a:extLst xmlns:a="http://schemas.openxmlformats.org/drawingml/2006/main">
               <a:ext uri="{FF2B5EF4-FFF2-40B4-BE49-F238E27FC236}">
-                <a16:creationId xmlns:a16="http://schemas.microsoft.com/office/drawing/2014/main" id="{19DCB568-5E58-4A4F-8F33-9DF9861C7B13}"/>
+                <a16:creationId xmlns:a16="http://schemas.microsoft.com/office/drawing/2014/main" id="{23E86F26-4DC1-4B90-B6F0-2EC837DC7C86}"/>
               </a:ext>
             </a:extLst>
           </p:cNvPr>
@@ -39370,7 +39370,7 @@
           <p:cNvPr id="33" name="">
             <a:extLst xmlns:a="http://schemas.openxmlformats.org/drawingml/2006/main">
               <a:ext uri="{FF2B5EF4-FFF2-40B4-BE49-F238E27FC236}">
-                <a16:creationId xmlns:a16="http://schemas.microsoft.com/office/drawing/2014/main" id="{C8B94533-F368-473C-BDB4-F5792394B01F}"/>
+                <a16:creationId xmlns:a16="http://schemas.microsoft.com/office/drawing/2014/main" id="{138FD065-DC19-4DB5-988E-4C91430DE97E}"/>
               </a:ext>
             </a:extLst>
           </p:cNvPr>
@@ -39403,7 +39403,7 @@
           <p:cNvPr id="34" name="">
             <a:extLst xmlns:a="http://schemas.openxmlformats.org/drawingml/2006/main">
               <a:ext uri="{FF2B5EF4-FFF2-40B4-BE49-F238E27FC236}">
-                <a16:creationId xmlns:a16="http://schemas.microsoft.com/office/drawing/2014/main" id="{9D2764B8-7D3C-4C35-96A0-B720F728D380}"/>
+                <a16:creationId xmlns:a16="http://schemas.microsoft.com/office/drawing/2014/main" id="{FD2D4F3A-EBBE-4B14-9F06-5C63BCE7560B}"/>
               </a:ext>
             </a:extLst>
           </p:cNvPr>
@@ -39453,7 +39453,7 @@
     </p:spTree>
     <p:extLst>
       <p:ext uri="{BB962C8B-B14F-4D97-AF65-F5344CB8AC3E}">
-        <p14:creationId xmlns:p14="http://schemas.microsoft.com/office/powerpoint/2010/main" val="700163760"/>
+        <p14:creationId xmlns:p14="http://schemas.microsoft.com/office/powerpoint/2010/main" val="648373560"/>
       </p:ext>
     </p:extLst>
   </p:cSld>
@@ -39484,7 +39484,7 @@
           <p:cNvPr id="102" name="">
             <a:extLst xmlns:a="http://schemas.openxmlformats.org/drawingml/2006/main">
               <a:ext uri="{FF2B5EF4-FFF2-40B4-BE49-F238E27FC236}">
-                <a16:creationId xmlns:a16="http://schemas.microsoft.com/office/drawing/2014/main" id="{579B4FB8-3FE2-43A8-86C4-0E0A47C4916C}"/>
+                <a16:creationId xmlns:a16="http://schemas.microsoft.com/office/drawing/2014/main" id="{A5B8F7D1-5E24-4BFD-A244-3AAB09AB59D4}"/>
               </a:ext>
             </a:extLst>
           </p:cNvPr>
@@ -39517,7 +39517,7 @@
           <p:cNvPr id="2" name="">
             <a:extLst xmlns:a="http://schemas.openxmlformats.org/drawingml/2006/main">
               <a:ext uri="{FF2B5EF4-FFF2-40B4-BE49-F238E27FC236}">
-                <a16:creationId xmlns:a16="http://schemas.microsoft.com/office/drawing/2014/main" id="{B8499AD7-468A-4AB7-AF2E-0ED23099FE38}"/>
+                <a16:creationId xmlns:a16="http://schemas.microsoft.com/office/drawing/2014/main" id="{10F94BB2-4403-46A2-9B83-CCF605769BCB}"/>
               </a:ext>
             </a:extLst>
           </p:cNvPr>
@@ -39548,7 +39548,7 @@
           <p:cNvPr id="3" name="">
             <a:extLst xmlns:a="http://schemas.openxmlformats.org/drawingml/2006/main">
               <a:ext uri="{FF2B5EF4-FFF2-40B4-BE49-F238E27FC236}">
-                <a16:creationId xmlns:a16="http://schemas.microsoft.com/office/drawing/2014/main" id="{15EC1163-4193-4791-9472-9FCED5589868}"/>
+                <a16:creationId xmlns:a16="http://schemas.microsoft.com/office/drawing/2014/main" id="{8AFE1F32-BD22-4EEC-ABDC-83693D1C3906}"/>
               </a:ext>
             </a:extLst>
           </p:cNvPr>
@@ -39600,7 +39600,7 @@
           <p:cNvPr id="4" name="">
             <a:extLst xmlns:a="http://schemas.openxmlformats.org/drawingml/2006/main">
               <a:ext uri="{FF2B5EF4-FFF2-40B4-BE49-F238E27FC236}">
-                <a16:creationId xmlns:a16="http://schemas.microsoft.com/office/drawing/2014/main" id="{B0CD64C5-AE9F-4C88-A2EB-63E25E5EE41D}"/>
+                <a16:creationId xmlns:a16="http://schemas.microsoft.com/office/drawing/2014/main" id="{44121100-D7E7-4078-B01F-FFD9740D0FBA}"/>
               </a:ext>
             </a:extLst>
           </p:cNvPr>
@@ -39652,7 +39652,7 @@
           <p:cNvPr id="5" name="">
             <a:extLst xmlns:a="http://schemas.openxmlformats.org/drawingml/2006/main">
               <a:ext uri="{FF2B5EF4-FFF2-40B4-BE49-F238E27FC236}">
-                <a16:creationId xmlns:a16="http://schemas.microsoft.com/office/drawing/2014/main" id="{A2B41523-C6EA-47D9-AF93-55C4CA529BF0}"/>
+                <a16:creationId xmlns:a16="http://schemas.microsoft.com/office/drawing/2014/main" id="{5356CC15-A4A7-4761-9295-01EE732F2FE8}"/>
               </a:ext>
             </a:extLst>
           </p:cNvPr>
@@ -39687,7 +39687,7 @@
           <p:nvPr/>
         </p:nvPicPr>
         <p:blipFill>
-          <a:blip xmlns:r="http://schemas.openxmlformats.org/officeDocument/2006/relationships" xmlns:a="http://schemas.openxmlformats.org/drawingml/2006/main" r:embed="R565e385854ee43dc"/>
+          <a:blip xmlns:r="http://schemas.openxmlformats.org/officeDocument/2006/relationships" xmlns:a="http://schemas.openxmlformats.org/drawingml/2006/main" r:embed="Rad7d0a9be17d406f"/>
           <a:stretch xmlns:a="http://schemas.openxmlformats.org/drawingml/2006/main"/>
         </p:blipFill>
         <p:spPr>
@@ -39705,7 +39705,7 @@
           <p:cNvPr id="7" name="">
             <a:extLst xmlns:a="http://schemas.openxmlformats.org/drawingml/2006/main">
               <a:ext uri="{FF2B5EF4-FFF2-40B4-BE49-F238E27FC236}">
-                <a16:creationId xmlns:a16="http://schemas.microsoft.com/office/drawing/2014/main" id="{EA23B40D-37CF-45CC-9419-6B02C2D48E37}"/>
+                <a16:creationId xmlns:a16="http://schemas.microsoft.com/office/drawing/2014/main" id="{1F442A2C-438C-4DC4-A15B-93847FD0C582}"/>
               </a:ext>
             </a:extLst>
           </p:cNvPr>
@@ -39757,7 +39757,7 @@
           <p:cNvPr id="8" name="">
             <a:extLst xmlns:a="http://schemas.openxmlformats.org/drawingml/2006/main">
               <a:ext uri="{FF2B5EF4-FFF2-40B4-BE49-F238E27FC236}">
-                <a16:creationId xmlns:a16="http://schemas.microsoft.com/office/drawing/2014/main" id="{A3643D39-301F-45EE-9F18-0670B1BD4D65}"/>
+                <a16:creationId xmlns:a16="http://schemas.microsoft.com/office/drawing/2014/main" id="{904B7789-31D7-4F5C-930E-AAA019DB3B77}"/>
               </a:ext>
             </a:extLst>
           </p:cNvPr>
@@ -39809,7 +39809,7 @@
           <p:cNvPr id="9" name="">
             <a:extLst xmlns:a="http://schemas.openxmlformats.org/drawingml/2006/main">
               <a:ext uri="{FF2B5EF4-FFF2-40B4-BE49-F238E27FC236}">
-                <a16:creationId xmlns:a16="http://schemas.microsoft.com/office/drawing/2014/main" id="{2D74F810-2CBD-4F51-867E-670A5790FE67}"/>
+                <a16:creationId xmlns:a16="http://schemas.microsoft.com/office/drawing/2014/main" id="{9A6DFC14-59B7-4D19-B047-88E880E609BF}"/>
               </a:ext>
             </a:extLst>
           </p:cNvPr>
@@ -39861,7 +39861,7 @@
           <p:cNvPr id="10" name="">
             <a:extLst xmlns:a="http://schemas.openxmlformats.org/drawingml/2006/main">
               <a:ext uri="{FF2B5EF4-FFF2-40B4-BE49-F238E27FC236}">
-                <a16:creationId xmlns:a16="http://schemas.microsoft.com/office/drawing/2014/main" id="{43656F7A-6B1D-43CC-9094-2BCD234C6018}"/>
+                <a16:creationId xmlns:a16="http://schemas.microsoft.com/office/drawing/2014/main" id="{D9056E53-D763-4E0D-895A-83CDE14416DD}"/>
               </a:ext>
             </a:extLst>
           </p:cNvPr>
@@ -39913,7 +39913,7 @@
           <p:cNvPr id="11" name="">
             <a:extLst xmlns:a="http://schemas.openxmlformats.org/drawingml/2006/main">
               <a:ext uri="{FF2B5EF4-FFF2-40B4-BE49-F238E27FC236}">
-                <a16:creationId xmlns:a16="http://schemas.microsoft.com/office/drawing/2014/main" id="{50207783-3381-45DD-AFF3-09A81AA3E282}"/>
+                <a16:creationId xmlns:a16="http://schemas.microsoft.com/office/drawing/2014/main" id="{55842DB1-24E2-45C1-AD43-2A43CE9A06F8}"/>
               </a:ext>
             </a:extLst>
           </p:cNvPr>
@@ -39944,7 +39944,7 @@
           <p:cNvPr id="12" name="">
             <a:extLst xmlns:a="http://schemas.openxmlformats.org/drawingml/2006/main">
               <a:ext uri="{FF2B5EF4-FFF2-40B4-BE49-F238E27FC236}">
-                <a16:creationId xmlns:a16="http://schemas.microsoft.com/office/drawing/2014/main" id="{8822A6BD-3461-4472-9063-0D681748A057}"/>
+                <a16:creationId xmlns:a16="http://schemas.microsoft.com/office/drawing/2014/main" id="{F31C04A2-3532-4BCC-84EA-6AB41B414B54}"/>
               </a:ext>
             </a:extLst>
           </p:cNvPr>
@@ -39975,7 +39975,7 @@
           <p:cNvPr id="13" name="">
             <a:extLst xmlns:a="http://schemas.openxmlformats.org/drawingml/2006/main">
               <a:ext uri="{FF2B5EF4-FFF2-40B4-BE49-F238E27FC236}">
-                <a16:creationId xmlns:a16="http://schemas.microsoft.com/office/drawing/2014/main" id="{A7FBAFA3-CE14-4C3F-AEA8-3BC076EAE3AC}"/>
+                <a16:creationId xmlns:a16="http://schemas.microsoft.com/office/drawing/2014/main" id="{1EB6AC9C-BAC4-40D4-ACF0-88800D29D602}"/>
               </a:ext>
             </a:extLst>
           </p:cNvPr>
@@ -40027,7 +40027,7 @@
           <p:cNvPr id="14" name="">
             <a:extLst xmlns:a="http://schemas.openxmlformats.org/drawingml/2006/main">
               <a:ext uri="{FF2B5EF4-FFF2-40B4-BE49-F238E27FC236}">
-                <a16:creationId xmlns:a16="http://schemas.microsoft.com/office/drawing/2014/main" id="{4E1E9D03-0249-4AD1-A133-0FDDA1E45438}"/>
+                <a16:creationId xmlns:a16="http://schemas.microsoft.com/office/drawing/2014/main" id="{E54BCF71-0D55-4C02-B977-B40F853275C3}"/>
               </a:ext>
             </a:extLst>
           </p:cNvPr>
@@ -40079,7 +40079,7 @@
           <p:cNvPr id="15" name="">
             <a:extLst xmlns:a="http://schemas.openxmlformats.org/drawingml/2006/main">
               <a:ext uri="{FF2B5EF4-FFF2-40B4-BE49-F238E27FC236}">
-                <a16:creationId xmlns:a16="http://schemas.microsoft.com/office/drawing/2014/main" id="{7C40F2D5-8505-4742-AEC9-292678B5D1D8}"/>
+                <a16:creationId xmlns:a16="http://schemas.microsoft.com/office/drawing/2014/main" id="{CEC5C1F7-B423-4E9C-9734-44D42FBBFEC3}"/>
               </a:ext>
             </a:extLst>
           </p:cNvPr>
@@ -40131,7 +40131,7 @@
           <p:cNvPr id="16" name="">
             <a:extLst xmlns:a="http://schemas.openxmlformats.org/drawingml/2006/main">
               <a:ext uri="{FF2B5EF4-FFF2-40B4-BE49-F238E27FC236}">
-                <a16:creationId xmlns:a16="http://schemas.microsoft.com/office/drawing/2014/main" id="{AE085852-014C-45F9-B483-072D04E1E05F}"/>
+                <a16:creationId xmlns:a16="http://schemas.microsoft.com/office/drawing/2014/main" id="{614DB44D-AF9E-49F6-8AA2-866602E747CB}"/>
               </a:ext>
             </a:extLst>
           </p:cNvPr>
@@ -40183,7 +40183,7 @@
           <p:cNvPr id="17" name="">
             <a:extLst xmlns:a="http://schemas.openxmlformats.org/drawingml/2006/main">
               <a:ext uri="{FF2B5EF4-FFF2-40B4-BE49-F238E27FC236}">
-                <a16:creationId xmlns:a16="http://schemas.microsoft.com/office/drawing/2014/main" id="{91FF9F69-32FE-441E-A33E-6BB7AFD74B92}"/>
+                <a16:creationId xmlns:a16="http://schemas.microsoft.com/office/drawing/2014/main" id="{27D3C5E2-B19A-41B7-AD0C-3B63E6970911}"/>
               </a:ext>
             </a:extLst>
           </p:cNvPr>
@@ -40235,7 +40235,7 @@
           <p:cNvPr id="18" name="">
             <a:extLst xmlns:a="http://schemas.openxmlformats.org/drawingml/2006/main">
               <a:ext uri="{FF2B5EF4-FFF2-40B4-BE49-F238E27FC236}">
-                <a16:creationId xmlns:a16="http://schemas.microsoft.com/office/drawing/2014/main" id="{9D04B3F6-0FF7-4E73-A03B-43DC6558DA51}"/>
+                <a16:creationId xmlns:a16="http://schemas.microsoft.com/office/drawing/2014/main" id="{6EA6C1E1-2F56-4E28-9ED5-83828A041EC2}"/>
               </a:ext>
             </a:extLst>
           </p:cNvPr>
@@ -40266,7 +40266,7 @@
           <p:cNvPr id="19" name="">
             <a:extLst xmlns:a="http://schemas.openxmlformats.org/drawingml/2006/main">
               <a:ext uri="{FF2B5EF4-FFF2-40B4-BE49-F238E27FC236}">
-                <a16:creationId xmlns:a16="http://schemas.microsoft.com/office/drawing/2014/main" id="{28A7D59E-16F6-4F0B-86A6-E40A0C58A64B}"/>
+                <a16:creationId xmlns:a16="http://schemas.microsoft.com/office/drawing/2014/main" id="{7283F6D0-01F5-4A3A-93B4-063FDF3D64CA}"/>
               </a:ext>
             </a:extLst>
           </p:cNvPr>
@@ -40318,7 +40318,7 @@
           <p:cNvPr id="20" name="">
             <a:extLst xmlns:a="http://schemas.openxmlformats.org/drawingml/2006/main">
               <a:ext uri="{FF2B5EF4-FFF2-40B4-BE49-F238E27FC236}">
-                <a16:creationId xmlns:a16="http://schemas.microsoft.com/office/drawing/2014/main" id="{C5886E95-1C0E-4C2B-8FBA-2EF2242E5497}"/>
+                <a16:creationId xmlns:a16="http://schemas.microsoft.com/office/drawing/2014/main" id="{AE5398C1-23CB-40C7-A588-B27E99C97F1C}"/>
               </a:ext>
             </a:extLst>
           </p:cNvPr>
@@ -40370,7 +40370,7 @@
           <p:cNvPr id="21" name="">
             <a:extLst xmlns:a="http://schemas.openxmlformats.org/drawingml/2006/main">
               <a:ext uri="{FF2B5EF4-FFF2-40B4-BE49-F238E27FC236}">
-                <a16:creationId xmlns:a16="http://schemas.microsoft.com/office/drawing/2014/main" id="{B1F3E57A-F164-4E2F-AFE7-38A2EB74F3CC}"/>
+                <a16:creationId xmlns:a16="http://schemas.microsoft.com/office/drawing/2014/main" id="{B4641BB8-8214-484E-B075-463C0A35EC93}"/>
               </a:ext>
             </a:extLst>
           </p:cNvPr>
@@ -40422,7 +40422,7 @@
           <p:cNvPr id="22" name="">
             <a:extLst xmlns:a="http://schemas.openxmlformats.org/drawingml/2006/main">
               <a:ext uri="{FF2B5EF4-FFF2-40B4-BE49-F238E27FC236}">
-                <a16:creationId xmlns:a16="http://schemas.microsoft.com/office/drawing/2014/main" id="{475283BA-FEFB-4A85-AB58-DA13D7C4F3AE}"/>
+                <a16:creationId xmlns:a16="http://schemas.microsoft.com/office/drawing/2014/main" id="{88F47D05-5F5F-4C3B-830D-48211753D7F8}"/>
               </a:ext>
             </a:extLst>
           </p:cNvPr>
@@ -40474,7 +40474,7 @@
           <p:cNvPr id="23" name="">
             <a:extLst xmlns:a="http://schemas.openxmlformats.org/drawingml/2006/main">
               <a:ext uri="{FF2B5EF4-FFF2-40B4-BE49-F238E27FC236}">
-                <a16:creationId xmlns:a16="http://schemas.microsoft.com/office/drawing/2014/main" id="{7776E4C8-9128-4794-AE63-04B4522DE21C}"/>
+                <a16:creationId xmlns:a16="http://schemas.microsoft.com/office/drawing/2014/main" id="{E606F507-D32A-4BDE-9569-B53BCE8DA742}"/>
               </a:ext>
             </a:extLst>
           </p:cNvPr>
@@ -40526,7 +40526,7 @@
           <p:cNvPr id="24" name="">
             <a:extLst xmlns:a="http://schemas.openxmlformats.org/drawingml/2006/main">
               <a:ext uri="{FF2B5EF4-FFF2-40B4-BE49-F238E27FC236}">
-                <a16:creationId xmlns:a16="http://schemas.microsoft.com/office/drawing/2014/main" id="{42FC8AB9-41F9-4397-A8E6-8B233840EC74}"/>
+                <a16:creationId xmlns:a16="http://schemas.microsoft.com/office/drawing/2014/main" id="{E1F91B65-92BE-4521-911F-C51CA2C405C2}"/>
               </a:ext>
             </a:extLst>
           </p:cNvPr>
@@ -40557,7 +40557,7 @@
           <p:cNvPr id="25" name="">
             <a:extLst xmlns:a="http://schemas.openxmlformats.org/drawingml/2006/main">
               <a:ext uri="{FF2B5EF4-FFF2-40B4-BE49-F238E27FC236}">
-                <a16:creationId xmlns:a16="http://schemas.microsoft.com/office/drawing/2014/main" id="{83F7E05E-0135-4A1A-80F3-ADCE3A123866}"/>
+                <a16:creationId xmlns:a16="http://schemas.microsoft.com/office/drawing/2014/main" id="{19AB5781-F4FD-408F-9B08-F230F2E2DE28}"/>
               </a:ext>
             </a:extLst>
           </p:cNvPr>
@@ -40588,7 +40588,7 @@
           <p:cNvPr id="26" name="">
             <a:extLst xmlns:a="http://schemas.openxmlformats.org/drawingml/2006/main">
               <a:ext uri="{FF2B5EF4-FFF2-40B4-BE49-F238E27FC236}">
-                <a16:creationId xmlns:a16="http://schemas.microsoft.com/office/drawing/2014/main" id="{0D79D354-C07C-4DA1-8EC1-309DDA627C60}"/>
+                <a16:creationId xmlns:a16="http://schemas.microsoft.com/office/drawing/2014/main" id="{4F92CA7D-6479-4924-BC39-01E74DEADE3E}"/>
               </a:ext>
             </a:extLst>
           </p:cNvPr>
@@ -40640,7 +40640,7 @@
           <p:cNvPr id="27" name="">
             <a:extLst xmlns:a="http://schemas.openxmlformats.org/drawingml/2006/main">
               <a:ext uri="{FF2B5EF4-FFF2-40B4-BE49-F238E27FC236}">
-                <a16:creationId xmlns:a16="http://schemas.microsoft.com/office/drawing/2014/main" id="{B88832E7-832B-48EE-B891-9FE7410D106F}"/>
+                <a16:creationId xmlns:a16="http://schemas.microsoft.com/office/drawing/2014/main" id="{8B74BCEB-0461-45EF-AB1A-8AE5309FC9E1}"/>
               </a:ext>
             </a:extLst>
           </p:cNvPr>
@@ -40692,7 +40692,7 @@
           <p:cNvPr id="28" name="">
             <a:extLst xmlns:a="http://schemas.openxmlformats.org/drawingml/2006/main">
               <a:ext uri="{FF2B5EF4-FFF2-40B4-BE49-F238E27FC236}">
-                <a16:creationId xmlns:a16="http://schemas.microsoft.com/office/drawing/2014/main" id="{A56D4E10-DCF5-46E3-85D4-A26DFF27E115}"/>
+                <a16:creationId xmlns:a16="http://schemas.microsoft.com/office/drawing/2014/main" id="{634D9598-E854-4310-906A-0A4D6E5CCF97}"/>
               </a:ext>
             </a:extLst>
           </p:cNvPr>
@@ -40744,7 +40744,7 @@
           <p:cNvPr id="29" name="">
             <a:extLst xmlns:a="http://schemas.openxmlformats.org/drawingml/2006/main">
               <a:ext uri="{FF2B5EF4-FFF2-40B4-BE49-F238E27FC236}">
-                <a16:creationId xmlns:a16="http://schemas.microsoft.com/office/drawing/2014/main" id="{84C86286-8E45-49E3-8F7D-72215AE5855B}"/>
+                <a16:creationId xmlns:a16="http://schemas.microsoft.com/office/drawing/2014/main" id="{4AB228D9-A874-4DEE-9D4E-EDD3D3B0E4EF}"/>
               </a:ext>
             </a:extLst>
           </p:cNvPr>
@@ -40796,7 +40796,7 @@
           <p:cNvPr id="30" name="">
             <a:extLst xmlns:a="http://schemas.openxmlformats.org/drawingml/2006/main">
               <a:ext uri="{FF2B5EF4-FFF2-40B4-BE49-F238E27FC236}">
-                <a16:creationId xmlns:a16="http://schemas.microsoft.com/office/drawing/2014/main" id="{9B305C90-9ECE-4AD6-82DE-5D46E70852EC}"/>
+                <a16:creationId xmlns:a16="http://schemas.microsoft.com/office/drawing/2014/main" id="{C85C7096-31CE-4D2B-AD71-28324ABDB422}"/>
               </a:ext>
             </a:extLst>
           </p:cNvPr>
@@ -40848,7 +40848,7 @@
           <p:cNvPr id="31" name="">
             <a:extLst xmlns:a="http://schemas.openxmlformats.org/drawingml/2006/main">
               <a:ext uri="{FF2B5EF4-FFF2-40B4-BE49-F238E27FC236}">
-                <a16:creationId xmlns:a16="http://schemas.microsoft.com/office/drawing/2014/main" id="{C3E566D6-529D-44B8-9232-67A1B3E2F348}"/>
+                <a16:creationId xmlns:a16="http://schemas.microsoft.com/office/drawing/2014/main" id="{547617AB-3FFD-4F18-9C0B-E73455395EC2}"/>
               </a:ext>
             </a:extLst>
           </p:cNvPr>
@@ -40879,7 +40879,7 @@
           <p:cNvPr id="32" name="">
             <a:extLst xmlns:a="http://schemas.openxmlformats.org/drawingml/2006/main">
               <a:ext uri="{FF2B5EF4-FFF2-40B4-BE49-F238E27FC236}">
-                <a16:creationId xmlns:a16="http://schemas.microsoft.com/office/drawing/2014/main" id="{2D705A05-682D-4359-9F77-B8BDBC59016A}"/>
+                <a16:creationId xmlns:a16="http://schemas.microsoft.com/office/drawing/2014/main" id="{FF523AF7-6C48-48F4-906B-35CF07E867F4}"/>
               </a:ext>
             </a:extLst>
           </p:cNvPr>
@@ -40931,7 +40931,7 @@
           <p:cNvPr id="33" name="">
             <a:extLst xmlns:a="http://schemas.openxmlformats.org/drawingml/2006/main">
               <a:ext uri="{FF2B5EF4-FFF2-40B4-BE49-F238E27FC236}">
-                <a16:creationId xmlns:a16="http://schemas.microsoft.com/office/drawing/2014/main" id="{FD0C61D6-DB3B-4F29-8A88-BBC59C42B0CF}"/>
+                <a16:creationId xmlns:a16="http://schemas.microsoft.com/office/drawing/2014/main" id="{EC3D1C4D-9A85-43EA-98DC-7BC4614F5F42}"/>
               </a:ext>
             </a:extLst>
           </p:cNvPr>
@@ -40983,7 +40983,7 @@
           <p:cNvPr id="34" name="">
             <a:extLst xmlns:a="http://schemas.openxmlformats.org/drawingml/2006/main">
               <a:ext uri="{FF2B5EF4-FFF2-40B4-BE49-F238E27FC236}">
-                <a16:creationId xmlns:a16="http://schemas.microsoft.com/office/drawing/2014/main" id="{7C89A408-6840-41F0-8533-EC73215E5423}"/>
+                <a16:creationId xmlns:a16="http://schemas.microsoft.com/office/drawing/2014/main" id="{33957150-62F3-4361-9904-2E10A1A69151}"/>
               </a:ext>
             </a:extLst>
           </p:cNvPr>
@@ -41035,7 +41035,7 @@
           <p:cNvPr id="35" name="">
             <a:extLst xmlns:a="http://schemas.openxmlformats.org/drawingml/2006/main">
               <a:ext uri="{FF2B5EF4-FFF2-40B4-BE49-F238E27FC236}">
-                <a16:creationId xmlns:a16="http://schemas.microsoft.com/office/drawing/2014/main" id="{C0E10203-323B-4087-AC7C-61C1BB8BB547}"/>
+                <a16:creationId xmlns:a16="http://schemas.microsoft.com/office/drawing/2014/main" id="{0734C9CA-BA2E-4FCE-923C-E6A3DEFF639D}"/>
               </a:ext>
             </a:extLst>
           </p:cNvPr>
@@ -41087,7 +41087,7 @@
           <p:cNvPr id="36" name="">
             <a:extLst xmlns:a="http://schemas.openxmlformats.org/drawingml/2006/main">
               <a:ext uri="{FF2B5EF4-FFF2-40B4-BE49-F238E27FC236}">
-                <a16:creationId xmlns:a16="http://schemas.microsoft.com/office/drawing/2014/main" id="{7DAE6D1F-7141-4D88-A6BD-5CB3A3891953}"/>
+                <a16:creationId xmlns:a16="http://schemas.microsoft.com/office/drawing/2014/main" id="{CF5F2E76-2186-4D8C-85FD-C46E1203C636}"/>
               </a:ext>
             </a:extLst>
           </p:cNvPr>
@@ -41139,7 +41139,7 @@
           <p:cNvPr id="37" name="">
             <a:extLst xmlns:a="http://schemas.openxmlformats.org/drawingml/2006/main">
               <a:ext uri="{FF2B5EF4-FFF2-40B4-BE49-F238E27FC236}">
-                <a16:creationId xmlns:a16="http://schemas.microsoft.com/office/drawing/2014/main" id="{F70CC23F-16D4-4949-9CD5-7FB3BE11BC61}"/>
+                <a16:creationId xmlns:a16="http://schemas.microsoft.com/office/drawing/2014/main" id="{D02A10BB-C909-483B-8BD5-32D3E8192349}"/>
               </a:ext>
             </a:extLst>
           </p:cNvPr>
@@ -41170,7 +41170,7 @@
           <p:cNvPr id="38" name="">
             <a:extLst xmlns:a="http://schemas.openxmlformats.org/drawingml/2006/main">
               <a:ext uri="{FF2B5EF4-FFF2-40B4-BE49-F238E27FC236}">
-                <a16:creationId xmlns:a16="http://schemas.microsoft.com/office/drawing/2014/main" id="{28EF5D8E-489E-4F92-AAEE-1168F0947FBC}"/>
+                <a16:creationId xmlns:a16="http://schemas.microsoft.com/office/drawing/2014/main" id="{130A6981-A98D-4EE2-ACE9-678FAB0DE442}"/>
               </a:ext>
             </a:extLst>
           </p:cNvPr>
@@ -41201,7 +41201,7 @@
           <p:cNvPr id="39" name="">
             <a:extLst xmlns:a="http://schemas.openxmlformats.org/drawingml/2006/main">
               <a:ext uri="{FF2B5EF4-FFF2-40B4-BE49-F238E27FC236}">
-                <a16:creationId xmlns:a16="http://schemas.microsoft.com/office/drawing/2014/main" id="{0AB4901B-FB33-4980-9BFC-1C133DA2A7E7}"/>
+                <a16:creationId xmlns:a16="http://schemas.microsoft.com/office/drawing/2014/main" id="{375126FC-FB63-4491-AF82-AB54071F0F63}"/>
               </a:ext>
             </a:extLst>
           </p:cNvPr>
@@ -41253,7 +41253,7 @@
           <p:cNvPr id="40" name="">
             <a:extLst xmlns:a="http://schemas.openxmlformats.org/drawingml/2006/main">
               <a:ext uri="{FF2B5EF4-FFF2-40B4-BE49-F238E27FC236}">
-                <a16:creationId xmlns:a16="http://schemas.microsoft.com/office/drawing/2014/main" id="{D76FACD7-58ED-4322-A795-3D1060066C25}"/>
+                <a16:creationId xmlns:a16="http://schemas.microsoft.com/office/drawing/2014/main" id="{53EB6F27-929C-47A6-AC64-9D034E6A4AB4}"/>
               </a:ext>
             </a:extLst>
           </p:cNvPr>
@@ -41305,7 +41305,7 @@
           <p:cNvPr id="41" name="">
             <a:extLst xmlns:a="http://schemas.openxmlformats.org/drawingml/2006/main">
               <a:ext uri="{FF2B5EF4-FFF2-40B4-BE49-F238E27FC236}">
-                <a16:creationId xmlns:a16="http://schemas.microsoft.com/office/drawing/2014/main" id="{E0F94EA8-68B7-4C2D-8299-57A129A3E926}"/>
+                <a16:creationId xmlns:a16="http://schemas.microsoft.com/office/drawing/2014/main" id="{409FA637-F797-452F-A352-DEE31825AC39}"/>
               </a:ext>
             </a:extLst>
           </p:cNvPr>
@@ -41357,7 +41357,7 @@
           <p:cNvPr id="42" name="">
             <a:extLst xmlns:a="http://schemas.openxmlformats.org/drawingml/2006/main">
               <a:ext uri="{FF2B5EF4-FFF2-40B4-BE49-F238E27FC236}">
-                <a16:creationId xmlns:a16="http://schemas.microsoft.com/office/drawing/2014/main" id="{C0D3BAB7-9516-449D-9430-71D909FCD357}"/>
+                <a16:creationId xmlns:a16="http://schemas.microsoft.com/office/drawing/2014/main" id="{88799ECA-EE0A-448A-A84D-F4C78A36D1B1}"/>
               </a:ext>
             </a:extLst>
           </p:cNvPr>
@@ -41409,7 +41409,7 @@
           <p:cNvPr id="43" name="">
             <a:extLst xmlns:a="http://schemas.openxmlformats.org/drawingml/2006/main">
               <a:ext uri="{FF2B5EF4-FFF2-40B4-BE49-F238E27FC236}">
-                <a16:creationId xmlns:a16="http://schemas.microsoft.com/office/drawing/2014/main" id="{4123E457-284A-4B10-84D4-813A25460A10}"/>
+                <a16:creationId xmlns:a16="http://schemas.microsoft.com/office/drawing/2014/main" id="{F7DD77A5-797E-4BD9-B805-DACD7CF9B96B}"/>
               </a:ext>
             </a:extLst>
           </p:cNvPr>
@@ -41461,7 +41461,7 @@
           <p:cNvPr id="44" name="">
             <a:extLst xmlns:a="http://schemas.openxmlformats.org/drawingml/2006/main">
               <a:ext uri="{FF2B5EF4-FFF2-40B4-BE49-F238E27FC236}">
-                <a16:creationId xmlns:a16="http://schemas.microsoft.com/office/drawing/2014/main" id="{2C80E7B5-491E-4D52-90D7-B0DF1715DF36}"/>
+                <a16:creationId xmlns:a16="http://schemas.microsoft.com/office/drawing/2014/main" id="{1951C929-CC21-432C-8397-432694F2E70E}"/>
               </a:ext>
             </a:extLst>
           </p:cNvPr>
@@ -41492,7 +41492,7 @@
           <p:cNvPr id="45" name="">
             <a:extLst xmlns:a="http://schemas.openxmlformats.org/drawingml/2006/main">
               <a:ext uri="{FF2B5EF4-FFF2-40B4-BE49-F238E27FC236}">
-                <a16:creationId xmlns:a16="http://schemas.microsoft.com/office/drawing/2014/main" id="{82094122-C6A1-4A8B-B669-1347CA3DC599}"/>
+                <a16:creationId xmlns:a16="http://schemas.microsoft.com/office/drawing/2014/main" id="{06710457-CF75-4B99-ACEC-AE0D92437450}"/>
               </a:ext>
             </a:extLst>
           </p:cNvPr>
@@ -41544,7 +41544,7 @@
           <p:cNvPr id="46" name="">
             <a:extLst xmlns:a="http://schemas.openxmlformats.org/drawingml/2006/main">
               <a:ext uri="{FF2B5EF4-FFF2-40B4-BE49-F238E27FC236}">
-                <a16:creationId xmlns:a16="http://schemas.microsoft.com/office/drawing/2014/main" id="{F19DA44E-16BE-4398-B873-F16EB5D755CE}"/>
+                <a16:creationId xmlns:a16="http://schemas.microsoft.com/office/drawing/2014/main" id="{A861740B-F6A5-4C0B-B579-473BE4C43672}"/>
               </a:ext>
             </a:extLst>
           </p:cNvPr>
@@ -41596,7 +41596,7 @@
           <p:cNvPr id="47" name="">
             <a:extLst xmlns:a="http://schemas.openxmlformats.org/drawingml/2006/main">
               <a:ext uri="{FF2B5EF4-FFF2-40B4-BE49-F238E27FC236}">
-                <a16:creationId xmlns:a16="http://schemas.microsoft.com/office/drawing/2014/main" id="{4DEEEB71-C532-4A09-BB1A-7BA2FDE6771F}"/>
+                <a16:creationId xmlns:a16="http://schemas.microsoft.com/office/drawing/2014/main" id="{B7ADAEEB-BD1D-4AD5-9D0F-B75793F9EA56}"/>
               </a:ext>
             </a:extLst>
           </p:cNvPr>
@@ -41648,7 +41648,7 @@
           <p:cNvPr id="48" name="">
             <a:extLst xmlns:a="http://schemas.openxmlformats.org/drawingml/2006/main">
               <a:ext uri="{FF2B5EF4-FFF2-40B4-BE49-F238E27FC236}">
-                <a16:creationId xmlns:a16="http://schemas.microsoft.com/office/drawing/2014/main" id="{A75F3672-73AF-40AB-AFB2-A2484831A0F4}"/>
+                <a16:creationId xmlns:a16="http://schemas.microsoft.com/office/drawing/2014/main" id="{1821667D-B476-439A-8747-2AE4B3243C68}"/>
               </a:ext>
             </a:extLst>
           </p:cNvPr>
@@ -41700,7 +41700,7 @@
           <p:cNvPr id="49" name="">
             <a:extLst xmlns:a="http://schemas.openxmlformats.org/drawingml/2006/main">
               <a:ext uri="{FF2B5EF4-FFF2-40B4-BE49-F238E27FC236}">
-                <a16:creationId xmlns:a16="http://schemas.microsoft.com/office/drawing/2014/main" id="{319ECC7C-3F53-4C2F-82EC-A3EF131691C4}"/>
+                <a16:creationId xmlns:a16="http://schemas.microsoft.com/office/drawing/2014/main" id="{2C0D0EEE-71DF-4E7C-862F-2F55FE725B33}"/>
               </a:ext>
             </a:extLst>
           </p:cNvPr>
@@ -41752,7 +41752,7 @@
           <p:cNvPr id="50" name="">
             <a:extLst xmlns:a="http://schemas.openxmlformats.org/drawingml/2006/main">
               <a:ext uri="{FF2B5EF4-FFF2-40B4-BE49-F238E27FC236}">
-                <a16:creationId xmlns:a16="http://schemas.microsoft.com/office/drawing/2014/main" id="{1145DC09-726E-42FB-A8FA-5328188A1D55}"/>
+                <a16:creationId xmlns:a16="http://schemas.microsoft.com/office/drawing/2014/main" id="{06690BDE-B881-4EFE-93B9-787E891E19B7}"/>
               </a:ext>
             </a:extLst>
           </p:cNvPr>
@@ -41783,7 +41783,7 @@
           <p:cNvPr id="51" name="">
             <a:extLst xmlns:a="http://schemas.openxmlformats.org/drawingml/2006/main">
               <a:ext uri="{FF2B5EF4-FFF2-40B4-BE49-F238E27FC236}">
-                <a16:creationId xmlns:a16="http://schemas.microsoft.com/office/drawing/2014/main" id="{1CB673C1-78D0-40AE-B198-7E7C55A08A4C}"/>
+                <a16:creationId xmlns:a16="http://schemas.microsoft.com/office/drawing/2014/main" id="{B5EEF174-82BF-4543-B26C-5AC1122D0152}"/>
               </a:ext>
             </a:extLst>
           </p:cNvPr>
@@ -41814,7 +41814,7 @@
           <p:cNvPr id="52" name="">
             <a:extLst xmlns:a="http://schemas.openxmlformats.org/drawingml/2006/main">
               <a:ext uri="{FF2B5EF4-FFF2-40B4-BE49-F238E27FC236}">
-                <a16:creationId xmlns:a16="http://schemas.microsoft.com/office/drawing/2014/main" id="{DFFBB605-2BC9-4674-A03F-975020D8CA47}"/>
+                <a16:creationId xmlns:a16="http://schemas.microsoft.com/office/drawing/2014/main" id="{F69BB14F-3073-4176-BCB5-96CB844EC3FE}"/>
               </a:ext>
             </a:extLst>
           </p:cNvPr>
@@ -41866,7 +41866,7 @@
           <p:cNvPr id="53" name="">
             <a:extLst xmlns:a="http://schemas.openxmlformats.org/drawingml/2006/main">
               <a:ext uri="{FF2B5EF4-FFF2-40B4-BE49-F238E27FC236}">
-                <a16:creationId xmlns:a16="http://schemas.microsoft.com/office/drawing/2014/main" id="{E6CFEFDB-30A6-47BF-A0D0-805AABBB8716}"/>
+                <a16:creationId xmlns:a16="http://schemas.microsoft.com/office/drawing/2014/main" id="{111523A0-3718-4A12-9A3A-5840410C1BBD}"/>
               </a:ext>
             </a:extLst>
           </p:cNvPr>
@@ -41918,7 +41918,7 @@
           <p:cNvPr id="54" name="">
             <a:extLst xmlns:a="http://schemas.openxmlformats.org/drawingml/2006/main">
               <a:ext uri="{FF2B5EF4-FFF2-40B4-BE49-F238E27FC236}">
-                <a16:creationId xmlns:a16="http://schemas.microsoft.com/office/drawing/2014/main" id="{BEE2D3B6-960A-494E-811C-8044E8FCC6A2}"/>
+                <a16:creationId xmlns:a16="http://schemas.microsoft.com/office/drawing/2014/main" id="{3E181DFF-C938-43FD-82AC-CF90CC2A9CE2}"/>
               </a:ext>
             </a:extLst>
           </p:cNvPr>
@@ -41970,7 +41970,7 @@
           <p:cNvPr id="55" name="">
             <a:extLst xmlns:a="http://schemas.openxmlformats.org/drawingml/2006/main">
               <a:ext uri="{FF2B5EF4-FFF2-40B4-BE49-F238E27FC236}">
-                <a16:creationId xmlns:a16="http://schemas.microsoft.com/office/drawing/2014/main" id="{2B041FD8-AC00-4256-8452-F7E301486E14}"/>
+                <a16:creationId xmlns:a16="http://schemas.microsoft.com/office/drawing/2014/main" id="{626FBC6E-23F9-453B-9A06-D8C520115870}"/>
               </a:ext>
             </a:extLst>
           </p:cNvPr>
@@ -42022,7 +42022,7 @@
           <p:cNvPr id="56" name="">
             <a:extLst xmlns:a="http://schemas.openxmlformats.org/drawingml/2006/main">
               <a:ext uri="{FF2B5EF4-FFF2-40B4-BE49-F238E27FC236}">
-                <a16:creationId xmlns:a16="http://schemas.microsoft.com/office/drawing/2014/main" id="{9DAA6D2D-3FE2-4BDC-B5D0-5D3113F850FF}"/>
+                <a16:creationId xmlns:a16="http://schemas.microsoft.com/office/drawing/2014/main" id="{5A8AAC19-0478-44A8-B179-56E7598CF77C}"/>
               </a:ext>
             </a:extLst>
           </p:cNvPr>
@@ -42074,7 +42074,7 @@
           <p:cNvPr id="57" name="">
             <a:extLst xmlns:a="http://schemas.openxmlformats.org/drawingml/2006/main">
               <a:ext uri="{FF2B5EF4-FFF2-40B4-BE49-F238E27FC236}">
-                <a16:creationId xmlns:a16="http://schemas.microsoft.com/office/drawing/2014/main" id="{679A8919-0FDF-4246-841D-A187BFC22698}"/>
+                <a16:creationId xmlns:a16="http://schemas.microsoft.com/office/drawing/2014/main" id="{3B9EC655-18E7-4F5A-A336-E6749A8C0FD1}"/>
               </a:ext>
             </a:extLst>
           </p:cNvPr>
@@ -42105,7 +42105,7 @@
           <p:cNvPr id="58" name="">
             <a:extLst xmlns:a="http://schemas.openxmlformats.org/drawingml/2006/main">
               <a:ext uri="{FF2B5EF4-FFF2-40B4-BE49-F238E27FC236}">
-                <a16:creationId xmlns:a16="http://schemas.microsoft.com/office/drawing/2014/main" id="{FA314144-ECA6-4A9A-9FC3-DA4B8A8F7088}"/>
+                <a16:creationId xmlns:a16="http://schemas.microsoft.com/office/drawing/2014/main" id="{33FD8AAC-3E4D-4B86-A666-2018A8A84A40}"/>
               </a:ext>
             </a:extLst>
           </p:cNvPr>
@@ -42157,7 +42157,7 @@
           <p:cNvPr id="59" name="">
             <a:extLst xmlns:a="http://schemas.openxmlformats.org/drawingml/2006/main">
               <a:ext uri="{FF2B5EF4-FFF2-40B4-BE49-F238E27FC236}">
-                <a16:creationId xmlns:a16="http://schemas.microsoft.com/office/drawing/2014/main" id="{0BE59875-8CEB-4F63-9290-67E040F44E30}"/>
+                <a16:creationId xmlns:a16="http://schemas.microsoft.com/office/drawing/2014/main" id="{FBD990EF-DDC5-4051-AE11-77DFEE234AB8}"/>
               </a:ext>
             </a:extLst>
           </p:cNvPr>
@@ -42209,7 +42209,7 @@
           <p:cNvPr id="60" name="">
             <a:extLst xmlns:a="http://schemas.openxmlformats.org/drawingml/2006/main">
               <a:ext uri="{FF2B5EF4-FFF2-40B4-BE49-F238E27FC236}">
-                <a16:creationId xmlns:a16="http://schemas.microsoft.com/office/drawing/2014/main" id="{C993DA3D-9832-48D3-9171-51FD9DD595C7}"/>
+                <a16:creationId xmlns:a16="http://schemas.microsoft.com/office/drawing/2014/main" id="{2A2586FD-4785-4B0E-8961-2F39573D4555}"/>
               </a:ext>
             </a:extLst>
           </p:cNvPr>
@@ -42261,7 +42261,7 @@
           <p:cNvPr id="61" name="">
             <a:extLst xmlns:a="http://schemas.openxmlformats.org/drawingml/2006/main">
               <a:ext uri="{FF2B5EF4-FFF2-40B4-BE49-F238E27FC236}">
-                <a16:creationId xmlns:a16="http://schemas.microsoft.com/office/drawing/2014/main" id="{D0317CCA-8CA4-49EF-A7CB-631B8655C3F7}"/>
+                <a16:creationId xmlns:a16="http://schemas.microsoft.com/office/drawing/2014/main" id="{EF3017C6-17B3-4341-AC37-CF391764A6D8}"/>
               </a:ext>
             </a:extLst>
           </p:cNvPr>
@@ -42313,7 +42313,7 @@
           <p:cNvPr id="62" name="">
             <a:extLst xmlns:a="http://schemas.openxmlformats.org/drawingml/2006/main">
               <a:ext uri="{FF2B5EF4-FFF2-40B4-BE49-F238E27FC236}">
-                <a16:creationId xmlns:a16="http://schemas.microsoft.com/office/drawing/2014/main" id="{544D546E-92BA-4641-A923-90CCA62EFE7A}"/>
+                <a16:creationId xmlns:a16="http://schemas.microsoft.com/office/drawing/2014/main" id="{C6DD67BA-3AD5-45D0-8EAA-351E68C82B64}"/>
               </a:ext>
             </a:extLst>
           </p:cNvPr>
@@ -42365,7 +42365,7 @@
           <p:cNvPr id="63" name="">
             <a:extLst xmlns:a="http://schemas.openxmlformats.org/drawingml/2006/main">
               <a:ext uri="{FF2B5EF4-FFF2-40B4-BE49-F238E27FC236}">
-                <a16:creationId xmlns:a16="http://schemas.microsoft.com/office/drawing/2014/main" id="{35BD4A52-1618-4FA9-AB49-C9DFB15F8D35}"/>
+                <a16:creationId xmlns:a16="http://schemas.microsoft.com/office/drawing/2014/main" id="{18C68EE2-8A94-487C-9DDF-2877622C94EF}"/>
               </a:ext>
             </a:extLst>
           </p:cNvPr>
@@ -42396,7 +42396,7 @@
           <p:cNvPr id="64" name="">
             <a:extLst xmlns:a="http://schemas.openxmlformats.org/drawingml/2006/main">
               <a:ext uri="{FF2B5EF4-FFF2-40B4-BE49-F238E27FC236}">
-                <a16:creationId xmlns:a16="http://schemas.microsoft.com/office/drawing/2014/main" id="{3FA3E431-EA23-4194-BBC0-9AC1730E680C}"/>
+                <a16:creationId xmlns:a16="http://schemas.microsoft.com/office/drawing/2014/main" id="{5B441D8E-48C3-47B6-B8BB-517C5554668A}"/>
               </a:ext>
             </a:extLst>
           </p:cNvPr>
@@ -42427,7 +42427,7 @@
           <p:cNvPr id="65" name="">
             <a:extLst xmlns:a="http://schemas.openxmlformats.org/drawingml/2006/main">
               <a:ext uri="{FF2B5EF4-FFF2-40B4-BE49-F238E27FC236}">
-                <a16:creationId xmlns:a16="http://schemas.microsoft.com/office/drawing/2014/main" id="{CBF4C730-00D1-48DB-B296-8BA2544D31E1}"/>
+                <a16:creationId xmlns:a16="http://schemas.microsoft.com/office/drawing/2014/main" id="{005DDFD4-C3B9-400A-9C68-3AA81A6EA001}"/>
               </a:ext>
             </a:extLst>
           </p:cNvPr>
@@ -42479,7 +42479,7 @@
           <p:cNvPr id="66" name="">
             <a:extLst xmlns:a="http://schemas.openxmlformats.org/drawingml/2006/main">
               <a:ext uri="{FF2B5EF4-FFF2-40B4-BE49-F238E27FC236}">
-                <a16:creationId xmlns:a16="http://schemas.microsoft.com/office/drawing/2014/main" id="{80E0DA7F-FD8C-4EC4-9F4C-9E1C4CEBE2C9}"/>
+                <a16:creationId xmlns:a16="http://schemas.microsoft.com/office/drawing/2014/main" id="{EB6D76E7-59D2-4CCE-B1B7-E07F22B8FF83}"/>
               </a:ext>
             </a:extLst>
           </p:cNvPr>
@@ -42531,7 +42531,7 @@
           <p:cNvPr id="67" name="">
             <a:extLst xmlns:a="http://schemas.openxmlformats.org/drawingml/2006/main">
               <a:ext uri="{FF2B5EF4-FFF2-40B4-BE49-F238E27FC236}">
-                <a16:creationId xmlns:a16="http://schemas.microsoft.com/office/drawing/2014/main" id="{6C935FE5-DDBF-4CA4-923A-391AB54C6DE2}"/>
+                <a16:creationId xmlns:a16="http://schemas.microsoft.com/office/drawing/2014/main" id="{E33FA9C5-F93C-45C0-A18B-8C22B4457B19}"/>
               </a:ext>
             </a:extLst>
           </p:cNvPr>
@@ -42583,7 +42583,7 @@
           <p:cNvPr id="68" name="">
             <a:extLst xmlns:a="http://schemas.openxmlformats.org/drawingml/2006/main">
               <a:ext uri="{FF2B5EF4-FFF2-40B4-BE49-F238E27FC236}">
-                <a16:creationId xmlns:a16="http://schemas.microsoft.com/office/drawing/2014/main" id="{470C9CE9-6FD2-45B3-93E7-E11266D6B012}"/>
+                <a16:creationId xmlns:a16="http://schemas.microsoft.com/office/drawing/2014/main" id="{9586821A-3820-4B99-A25F-D60FF9EA65FA}"/>
               </a:ext>
             </a:extLst>
           </p:cNvPr>
@@ -42635,7 +42635,7 @@
           <p:cNvPr id="69" name="">
             <a:extLst xmlns:a="http://schemas.openxmlformats.org/drawingml/2006/main">
               <a:ext uri="{FF2B5EF4-FFF2-40B4-BE49-F238E27FC236}">
-                <a16:creationId xmlns:a16="http://schemas.microsoft.com/office/drawing/2014/main" id="{17AE15AB-CAF1-408E-9684-221D2FD0457D}"/>
+                <a16:creationId xmlns:a16="http://schemas.microsoft.com/office/drawing/2014/main" id="{C2906A98-177A-43FD-BEDE-1206E5AA3211}"/>
               </a:ext>
             </a:extLst>
           </p:cNvPr>
@@ -42687,7 +42687,7 @@
           <p:cNvPr id="70" name="">
             <a:extLst xmlns:a="http://schemas.openxmlformats.org/drawingml/2006/main">
               <a:ext uri="{FF2B5EF4-FFF2-40B4-BE49-F238E27FC236}">
-                <a16:creationId xmlns:a16="http://schemas.microsoft.com/office/drawing/2014/main" id="{B91CA060-A9BB-44AA-A4E9-5C756C6F9080}"/>
+                <a16:creationId xmlns:a16="http://schemas.microsoft.com/office/drawing/2014/main" id="{EA1C0F8E-116D-4769-8ED8-70BB545A1954}"/>
               </a:ext>
             </a:extLst>
           </p:cNvPr>
@@ -42718,7 +42718,7 @@
           <p:cNvPr id="71" name="">
             <a:extLst xmlns:a="http://schemas.openxmlformats.org/drawingml/2006/main">
               <a:ext uri="{FF2B5EF4-FFF2-40B4-BE49-F238E27FC236}">
-                <a16:creationId xmlns:a16="http://schemas.microsoft.com/office/drawing/2014/main" id="{FC136091-8676-404D-95DF-070149206554}"/>
+                <a16:creationId xmlns:a16="http://schemas.microsoft.com/office/drawing/2014/main" id="{5B23DDA7-843C-40D3-AA1B-5C1A36BA0747}"/>
               </a:ext>
             </a:extLst>
           </p:cNvPr>
@@ -42770,7 +42770,7 @@
           <p:cNvPr id="72" name="">
             <a:extLst xmlns:a="http://schemas.openxmlformats.org/drawingml/2006/main">
               <a:ext uri="{FF2B5EF4-FFF2-40B4-BE49-F238E27FC236}">
-                <a16:creationId xmlns:a16="http://schemas.microsoft.com/office/drawing/2014/main" id="{BE20001C-CCE8-42C5-B1E8-935E173461D0}"/>
+                <a16:creationId xmlns:a16="http://schemas.microsoft.com/office/drawing/2014/main" id="{BB090D84-AC25-4630-86EB-F199B4B197AF}"/>
               </a:ext>
             </a:extLst>
           </p:cNvPr>
@@ -42822,7 +42822,7 @@
           <p:cNvPr id="73" name="">
             <a:extLst xmlns:a="http://schemas.openxmlformats.org/drawingml/2006/main">
               <a:ext uri="{FF2B5EF4-FFF2-40B4-BE49-F238E27FC236}">
-                <a16:creationId xmlns:a16="http://schemas.microsoft.com/office/drawing/2014/main" id="{54835BF4-FED8-48B5-903C-DBC4E4746465}"/>
+                <a16:creationId xmlns:a16="http://schemas.microsoft.com/office/drawing/2014/main" id="{09C1DCF9-1999-4E23-944F-EA3BD50D4379}"/>
               </a:ext>
             </a:extLst>
           </p:cNvPr>
@@ -42874,7 +42874,7 @@
           <p:cNvPr id="74" name="">
             <a:extLst xmlns:a="http://schemas.openxmlformats.org/drawingml/2006/main">
               <a:ext uri="{FF2B5EF4-FFF2-40B4-BE49-F238E27FC236}">
-                <a16:creationId xmlns:a16="http://schemas.microsoft.com/office/drawing/2014/main" id="{EEFF220D-F19F-4F46-AD8B-F227D9ED72F3}"/>
+                <a16:creationId xmlns:a16="http://schemas.microsoft.com/office/drawing/2014/main" id="{AB14D226-B62B-4DBD-9698-0DD523B65189}"/>
               </a:ext>
             </a:extLst>
           </p:cNvPr>
@@ -42926,7 +42926,7 @@
           <p:cNvPr id="75" name="">
             <a:extLst xmlns:a="http://schemas.openxmlformats.org/drawingml/2006/main">
               <a:ext uri="{FF2B5EF4-FFF2-40B4-BE49-F238E27FC236}">
-                <a16:creationId xmlns:a16="http://schemas.microsoft.com/office/drawing/2014/main" id="{F6E9B3BB-EC1F-4625-9363-77C80DBC1D07}"/>
+                <a16:creationId xmlns:a16="http://schemas.microsoft.com/office/drawing/2014/main" id="{359D8E48-C89A-4D73-9D8B-8CCE1FCA87B8}"/>
               </a:ext>
             </a:extLst>
           </p:cNvPr>
@@ -42978,7 +42978,7 @@
           <p:cNvPr id="76" name="">
             <a:extLst xmlns:a="http://schemas.openxmlformats.org/drawingml/2006/main">
               <a:ext uri="{FF2B5EF4-FFF2-40B4-BE49-F238E27FC236}">
-                <a16:creationId xmlns:a16="http://schemas.microsoft.com/office/drawing/2014/main" id="{ECFDABB4-3D6C-4994-A47C-F095896E3CD7}"/>
+                <a16:creationId xmlns:a16="http://schemas.microsoft.com/office/drawing/2014/main" id="{0FF33C18-12FB-4255-B0BF-14AC65681F49}"/>
               </a:ext>
             </a:extLst>
           </p:cNvPr>
@@ -43009,7 +43009,7 @@
           <p:cNvPr id="77" name="">
             <a:extLst xmlns:a="http://schemas.openxmlformats.org/drawingml/2006/main">
               <a:ext uri="{FF2B5EF4-FFF2-40B4-BE49-F238E27FC236}">
-                <a16:creationId xmlns:a16="http://schemas.microsoft.com/office/drawing/2014/main" id="{DFF0713F-16B3-4C4C-A480-D0CD90A964B9}"/>
+                <a16:creationId xmlns:a16="http://schemas.microsoft.com/office/drawing/2014/main" id="{0BBB391F-724E-4E3F-9631-8495032BC23B}"/>
               </a:ext>
             </a:extLst>
           </p:cNvPr>
@@ -43040,7 +43040,7 @@
           <p:cNvPr id="78" name="">
             <a:extLst xmlns:a="http://schemas.openxmlformats.org/drawingml/2006/main">
               <a:ext uri="{FF2B5EF4-FFF2-40B4-BE49-F238E27FC236}">
-                <a16:creationId xmlns:a16="http://schemas.microsoft.com/office/drawing/2014/main" id="{EBA1C909-9586-4CAF-B025-CBE2281F2F8A}"/>
+                <a16:creationId xmlns:a16="http://schemas.microsoft.com/office/drawing/2014/main" id="{DE8E0003-1959-415C-9CFC-AF98B460731F}"/>
               </a:ext>
             </a:extLst>
           </p:cNvPr>
@@ -43092,7 +43092,7 @@
           <p:cNvPr id="79" name="">
             <a:extLst xmlns:a="http://schemas.openxmlformats.org/drawingml/2006/main">
               <a:ext uri="{FF2B5EF4-FFF2-40B4-BE49-F238E27FC236}">
-                <a16:creationId xmlns:a16="http://schemas.microsoft.com/office/drawing/2014/main" id="{F64EA770-C789-4730-96F1-497126429CE6}"/>
+                <a16:creationId xmlns:a16="http://schemas.microsoft.com/office/drawing/2014/main" id="{43C02137-4833-413F-9FB6-CBA348EA88C8}"/>
               </a:ext>
             </a:extLst>
           </p:cNvPr>
@@ -43144,7 +43144,7 @@
           <p:cNvPr id="80" name="">
             <a:extLst xmlns:a="http://schemas.openxmlformats.org/drawingml/2006/main">
               <a:ext uri="{FF2B5EF4-FFF2-40B4-BE49-F238E27FC236}">
-                <a16:creationId xmlns:a16="http://schemas.microsoft.com/office/drawing/2014/main" id="{D5692F4F-A281-40B8-9E54-4EC058E4B4E6}"/>
+                <a16:creationId xmlns:a16="http://schemas.microsoft.com/office/drawing/2014/main" id="{A833264E-9A28-4A9F-B294-26BFD0CA4433}"/>
               </a:ext>
             </a:extLst>
           </p:cNvPr>
@@ -43196,7 +43196,7 @@
           <p:cNvPr id="81" name="">
             <a:extLst xmlns:a="http://schemas.openxmlformats.org/drawingml/2006/main">
               <a:ext uri="{FF2B5EF4-FFF2-40B4-BE49-F238E27FC236}">
-                <a16:creationId xmlns:a16="http://schemas.microsoft.com/office/drawing/2014/main" id="{BF52535E-629F-472C-97B8-20A71BF4209F}"/>
+                <a16:creationId xmlns:a16="http://schemas.microsoft.com/office/drawing/2014/main" id="{26854EFA-6DD9-462B-9116-0BC05B91AD0B}"/>
               </a:ext>
             </a:extLst>
           </p:cNvPr>
@@ -43248,7 +43248,7 @@
           <p:cNvPr id="82" name="">
             <a:extLst xmlns:a="http://schemas.openxmlformats.org/drawingml/2006/main">
               <a:ext uri="{FF2B5EF4-FFF2-40B4-BE49-F238E27FC236}">
-                <a16:creationId xmlns:a16="http://schemas.microsoft.com/office/drawing/2014/main" id="{B8E92331-87B8-4DBD-BC55-7801924AF26A}"/>
+                <a16:creationId xmlns:a16="http://schemas.microsoft.com/office/drawing/2014/main" id="{72E3D96D-229E-4538-A6B0-FA17FE116F09}"/>
               </a:ext>
             </a:extLst>
           </p:cNvPr>
@@ -43300,7 +43300,7 @@
           <p:cNvPr id="83" name="">
             <a:extLst xmlns:a="http://schemas.openxmlformats.org/drawingml/2006/main">
               <a:ext uri="{FF2B5EF4-FFF2-40B4-BE49-F238E27FC236}">
-                <a16:creationId xmlns:a16="http://schemas.microsoft.com/office/drawing/2014/main" id="{5936414C-9FF2-48DE-8A71-1A86793C268E}"/>
+                <a16:creationId xmlns:a16="http://schemas.microsoft.com/office/drawing/2014/main" id="{985B0FEF-CFA5-44AD-9BE7-2A23D0DDAC56}"/>
               </a:ext>
             </a:extLst>
           </p:cNvPr>
@@ -43331,7 +43331,7 @@
           <p:cNvPr id="84" name="">
             <a:extLst xmlns:a="http://schemas.openxmlformats.org/drawingml/2006/main">
               <a:ext uri="{FF2B5EF4-FFF2-40B4-BE49-F238E27FC236}">
-                <a16:creationId xmlns:a16="http://schemas.microsoft.com/office/drawing/2014/main" id="{BCE35984-999E-46D2-8CFC-DD895C875081}"/>
+                <a16:creationId xmlns:a16="http://schemas.microsoft.com/office/drawing/2014/main" id="{463FAFF9-499C-4DCA-AB99-6D87B3EDD1C8}"/>
               </a:ext>
             </a:extLst>
           </p:cNvPr>
@@ -43383,7 +43383,7 @@
           <p:cNvPr id="85" name="">
             <a:extLst xmlns:a="http://schemas.openxmlformats.org/drawingml/2006/main">
               <a:ext uri="{FF2B5EF4-FFF2-40B4-BE49-F238E27FC236}">
-                <a16:creationId xmlns:a16="http://schemas.microsoft.com/office/drawing/2014/main" id="{59ECC8B7-77DE-4AE8-924C-807D6C272367}"/>
+                <a16:creationId xmlns:a16="http://schemas.microsoft.com/office/drawing/2014/main" id="{4CCC3F99-399E-4BC6-82D9-97D81E9D03E8}"/>
               </a:ext>
             </a:extLst>
           </p:cNvPr>
@@ -43435,7 +43435,7 @@
           <p:cNvPr id="86" name="">
             <a:extLst xmlns:a="http://schemas.openxmlformats.org/drawingml/2006/main">
               <a:ext uri="{FF2B5EF4-FFF2-40B4-BE49-F238E27FC236}">
-                <a16:creationId xmlns:a16="http://schemas.microsoft.com/office/drawing/2014/main" id="{98586A17-015E-4D1E-94B2-A4699B473A22}"/>
+                <a16:creationId xmlns:a16="http://schemas.microsoft.com/office/drawing/2014/main" id="{8B999EFC-A6D3-43C7-B82F-8AEBCE62C1E7}"/>
               </a:ext>
             </a:extLst>
           </p:cNvPr>
@@ -43487,7 +43487,7 @@
           <p:cNvPr id="87" name="">
             <a:extLst xmlns:a="http://schemas.openxmlformats.org/drawingml/2006/main">
               <a:ext uri="{FF2B5EF4-FFF2-40B4-BE49-F238E27FC236}">
-                <a16:creationId xmlns:a16="http://schemas.microsoft.com/office/drawing/2014/main" id="{F930F36E-E72F-41C8-97D8-63365D925005}"/>
+                <a16:creationId xmlns:a16="http://schemas.microsoft.com/office/drawing/2014/main" id="{B410CA1D-6A79-4ADF-BDD6-AE3862336AC1}"/>
               </a:ext>
             </a:extLst>
           </p:cNvPr>
@@ -43539,7 +43539,7 @@
           <p:cNvPr id="88" name="">
             <a:extLst xmlns:a="http://schemas.openxmlformats.org/drawingml/2006/main">
               <a:ext uri="{FF2B5EF4-FFF2-40B4-BE49-F238E27FC236}">
-                <a16:creationId xmlns:a16="http://schemas.microsoft.com/office/drawing/2014/main" id="{9B055A79-608E-4CF5-9B33-500077968A93}"/>
+                <a16:creationId xmlns:a16="http://schemas.microsoft.com/office/drawing/2014/main" id="{D5332D7C-A72D-411E-9E8C-D1BA9660943D}"/>
               </a:ext>
             </a:extLst>
           </p:cNvPr>
@@ -43591,7 +43591,7 @@
           <p:cNvPr id="89" name="">
             <a:extLst xmlns:a="http://schemas.openxmlformats.org/drawingml/2006/main">
               <a:ext uri="{FF2B5EF4-FFF2-40B4-BE49-F238E27FC236}">
-                <a16:creationId xmlns:a16="http://schemas.microsoft.com/office/drawing/2014/main" id="{78DBD698-DB36-4F24-ACEB-E761F8B0A466}"/>
+                <a16:creationId xmlns:a16="http://schemas.microsoft.com/office/drawing/2014/main" id="{0C3082FB-7891-497D-B09A-6863114ABCB7}"/>
               </a:ext>
             </a:extLst>
           </p:cNvPr>
@@ -43622,7 +43622,7 @@
           <p:cNvPr id="90" name="">
             <a:extLst xmlns:a="http://schemas.openxmlformats.org/drawingml/2006/main">
               <a:ext uri="{FF2B5EF4-FFF2-40B4-BE49-F238E27FC236}">
-                <a16:creationId xmlns:a16="http://schemas.microsoft.com/office/drawing/2014/main" id="{544F50DC-52EE-4641-B2CE-F2D072F8C28F}"/>
+                <a16:creationId xmlns:a16="http://schemas.microsoft.com/office/drawing/2014/main" id="{12224DB1-934C-4F59-B554-A27464A17C4F}"/>
               </a:ext>
             </a:extLst>
           </p:cNvPr>
@@ -43653,7 +43653,7 @@
           <p:cNvPr id="91" name="">
             <a:extLst xmlns:a="http://schemas.openxmlformats.org/drawingml/2006/main">
               <a:ext uri="{FF2B5EF4-FFF2-40B4-BE49-F238E27FC236}">
-                <a16:creationId xmlns:a16="http://schemas.microsoft.com/office/drawing/2014/main" id="{3A0EFE20-6909-4747-855C-1068704D867B}"/>
+                <a16:creationId xmlns:a16="http://schemas.microsoft.com/office/drawing/2014/main" id="{80FFB763-4346-46B0-90EE-56070A921C62}"/>
               </a:ext>
             </a:extLst>
           </p:cNvPr>
@@ -43705,7 +43705,7 @@
           <p:cNvPr id="92" name="">
             <a:extLst xmlns:a="http://schemas.openxmlformats.org/drawingml/2006/main">
               <a:ext uri="{FF2B5EF4-FFF2-40B4-BE49-F238E27FC236}">
-                <a16:creationId xmlns:a16="http://schemas.microsoft.com/office/drawing/2014/main" id="{B78684A5-0F5F-4E42-884C-A0993EFDA181}"/>
+                <a16:creationId xmlns:a16="http://schemas.microsoft.com/office/drawing/2014/main" id="{56FBB832-D88D-4B2E-8741-5CEE7B99B634}"/>
               </a:ext>
             </a:extLst>
           </p:cNvPr>
@@ -43757,7 +43757,7 @@
           <p:cNvPr id="93" name="">
             <a:extLst xmlns:a="http://schemas.openxmlformats.org/drawingml/2006/main">
               <a:ext uri="{FF2B5EF4-FFF2-40B4-BE49-F238E27FC236}">
-                <a16:creationId xmlns:a16="http://schemas.microsoft.com/office/drawing/2014/main" id="{9F7D1194-28A8-460B-A557-CB3E83C331DE}"/>
+                <a16:creationId xmlns:a16="http://schemas.microsoft.com/office/drawing/2014/main" id="{647839E2-F3F8-4E54-AB56-B345C98CD3E8}"/>
               </a:ext>
             </a:extLst>
           </p:cNvPr>
@@ -43809,7 +43809,7 @@
           <p:cNvPr id="94" name="">
             <a:extLst xmlns:a="http://schemas.openxmlformats.org/drawingml/2006/main">
               <a:ext uri="{FF2B5EF4-FFF2-40B4-BE49-F238E27FC236}">
-                <a16:creationId xmlns:a16="http://schemas.microsoft.com/office/drawing/2014/main" id="{28A9FDC1-9CF3-4A03-84C7-E39CC86C1795}"/>
+                <a16:creationId xmlns:a16="http://schemas.microsoft.com/office/drawing/2014/main" id="{1EF66BF3-3234-4CB6-8BB2-EB362A2C7357}"/>
               </a:ext>
             </a:extLst>
           </p:cNvPr>
@@ -43861,7 +43861,7 @@
           <p:cNvPr id="95" name="">
             <a:extLst xmlns:a="http://schemas.openxmlformats.org/drawingml/2006/main">
               <a:ext uri="{FF2B5EF4-FFF2-40B4-BE49-F238E27FC236}">
-                <a16:creationId xmlns:a16="http://schemas.microsoft.com/office/drawing/2014/main" id="{3FF9803E-7A6A-4EFA-A599-940C494AE925}"/>
+                <a16:creationId xmlns:a16="http://schemas.microsoft.com/office/drawing/2014/main" id="{DB8F9440-C96C-44ED-AC53-F78C966B37C9}"/>
               </a:ext>
             </a:extLst>
           </p:cNvPr>
@@ -43913,7 +43913,7 @@
           <p:cNvPr id="96" name="">
             <a:extLst xmlns:a="http://schemas.openxmlformats.org/drawingml/2006/main">
               <a:ext uri="{FF2B5EF4-FFF2-40B4-BE49-F238E27FC236}">
-                <a16:creationId xmlns:a16="http://schemas.microsoft.com/office/drawing/2014/main" id="{76DDB5DB-0793-4931-B608-D64091618298}"/>
+                <a16:creationId xmlns:a16="http://schemas.microsoft.com/office/drawing/2014/main" id="{9470EBA4-D8D1-4B61-848E-442E35AA1566}"/>
               </a:ext>
             </a:extLst>
           </p:cNvPr>
@@ -43944,7 +43944,7 @@
           <p:cNvPr id="97" name="">
             <a:extLst xmlns:a="http://schemas.openxmlformats.org/drawingml/2006/main">
               <a:ext uri="{FF2B5EF4-FFF2-40B4-BE49-F238E27FC236}">
-                <a16:creationId xmlns:a16="http://schemas.microsoft.com/office/drawing/2014/main" id="{030F16DE-D441-4558-A641-2A395D6F9E22}"/>
+                <a16:creationId xmlns:a16="http://schemas.microsoft.com/office/drawing/2014/main" id="{6F54959D-F04B-447A-95A8-96F6EE66E26B}"/>
               </a:ext>
             </a:extLst>
           </p:cNvPr>
@@ -43996,7 +43996,7 @@
           <p:cNvPr id="98" name="">
             <a:extLst xmlns:a="http://schemas.openxmlformats.org/drawingml/2006/main">
               <a:ext uri="{FF2B5EF4-FFF2-40B4-BE49-F238E27FC236}">
-                <a16:creationId xmlns:a16="http://schemas.microsoft.com/office/drawing/2014/main" id="{B754832E-8F2F-4FDA-9DEF-86CC6D8ABF42}"/>
+                <a16:creationId xmlns:a16="http://schemas.microsoft.com/office/drawing/2014/main" id="{AF8B4E23-B264-433F-81CB-584AFBBD187D}"/>
               </a:ext>
             </a:extLst>
           </p:cNvPr>
@@ -44048,7 +44048,7 @@
           <p:cNvPr id="99" name="">
             <a:extLst xmlns:a="http://schemas.openxmlformats.org/drawingml/2006/main">
               <a:ext uri="{FF2B5EF4-FFF2-40B4-BE49-F238E27FC236}">
-                <a16:creationId xmlns:a16="http://schemas.microsoft.com/office/drawing/2014/main" id="{9D8EC4D6-A293-48D8-91AF-6E97EBF37682}"/>
+                <a16:creationId xmlns:a16="http://schemas.microsoft.com/office/drawing/2014/main" id="{1F313CD6-FC6C-4C5A-848D-508512CB4F64}"/>
               </a:ext>
             </a:extLst>
           </p:cNvPr>
@@ -44100,7 +44100,7 @@
           <p:cNvPr id="100" name="">
             <a:extLst xmlns:a="http://schemas.openxmlformats.org/drawingml/2006/main">
               <a:ext uri="{FF2B5EF4-FFF2-40B4-BE49-F238E27FC236}">
-                <a16:creationId xmlns:a16="http://schemas.microsoft.com/office/drawing/2014/main" id="{CC36D0B6-8D78-40A4-B8FA-99716BE10B8B}"/>
+                <a16:creationId xmlns:a16="http://schemas.microsoft.com/office/drawing/2014/main" id="{B1189F2C-D591-400C-BFC1-C8EF239900AA}"/>
               </a:ext>
             </a:extLst>
           </p:cNvPr>
@@ -44152,7 +44152,7 @@
           <p:cNvPr id="101" name="">
             <a:extLst xmlns:a="http://schemas.openxmlformats.org/drawingml/2006/main">
               <a:ext uri="{FF2B5EF4-FFF2-40B4-BE49-F238E27FC236}">
-                <a16:creationId xmlns:a16="http://schemas.microsoft.com/office/drawing/2014/main" id="{D0E6650D-23EB-46A1-BC6C-DC844DA9B34F}"/>
+                <a16:creationId xmlns:a16="http://schemas.microsoft.com/office/drawing/2014/main" id="{846D2732-1D6B-43D8-8F80-BE725AC4CC5C}"/>
               </a:ext>
             </a:extLst>
           </p:cNvPr>
@@ -44202,7 +44202,7 @@
     </p:spTree>
     <p:extLst>
       <p:ext uri="{BB962C8B-B14F-4D97-AF65-F5344CB8AC3E}">
-        <p14:creationId xmlns:p14="http://schemas.microsoft.com/office/powerpoint/2010/main" val="1964292302"/>
+        <p14:creationId xmlns:p14="http://schemas.microsoft.com/office/powerpoint/2010/main" val="761813882"/>
       </p:ext>
     </p:extLst>
   </p:cSld>

--- a/.preview/pptx/deck.pptx
+++ b/.preview/pptx/deck.pptx
@@ -2,27 +2,27 @@
 <file path=ppt/presentation.xml><?xml version="1.0" encoding="utf-8"?>
 <p:presentation xmlns:p="http://schemas.openxmlformats.org/presentationml/2006/main">
   <p:sldMasterIdLst>
-    <p:sldMasterId xmlns:r="http://schemas.openxmlformats.org/officeDocument/2006/relationships" id="2147483648" r:id="Rcf0d3283e6224fc8"/>
+    <p:sldMasterId xmlns:r="http://schemas.openxmlformats.org/officeDocument/2006/relationships" id="2147483648" r:id="R542498d5ceb042df"/>
   </p:sldMasterIdLst>
   <p:notesMasterIdLst>
-    <p:notesMasterId xmlns:r="http://schemas.openxmlformats.org/officeDocument/2006/relationships" r:id="Rb1a52eae991441aa"/>
+    <p:notesMasterId xmlns:r="http://schemas.openxmlformats.org/officeDocument/2006/relationships" r:id="R6eb0dff2df1b4f26"/>
   </p:notesMasterIdLst>
   <p:sldIdLst>
-    <p:sldId xmlns:r="http://schemas.openxmlformats.org/officeDocument/2006/relationships" id="256" r:id="Rb74596be90d84c8a"/>
-    <p:sldId xmlns:r="http://schemas.openxmlformats.org/officeDocument/2006/relationships" id="257" r:id="R3b28bfa0efc64345"/>
-    <p:sldId xmlns:r="http://schemas.openxmlformats.org/officeDocument/2006/relationships" id="258" r:id="Rb9015361c32142e2"/>
-    <p:sldId xmlns:r="http://schemas.openxmlformats.org/officeDocument/2006/relationships" id="259" r:id="R0fbe62f58a9b4f7c"/>
-    <p:sldId xmlns:r="http://schemas.openxmlformats.org/officeDocument/2006/relationships" id="260" r:id="Rd03fd60ab9564ce6"/>
-    <p:sldId xmlns:r="http://schemas.openxmlformats.org/officeDocument/2006/relationships" id="261" r:id="R6004bd4a0f8f40a2"/>
-    <p:sldId xmlns:r="http://schemas.openxmlformats.org/officeDocument/2006/relationships" id="262" r:id="Re6296be937244531"/>
-    <p:sldId xmlns:r="http://schemas.openxmlformats.org/officeDocument/2006/relationships" id="263" r:id="R23536571c31e4579"/>
-    <p:sldId xmlns:r="http://schemas.openxmlformats.org/officeDocument/2006/relationships" id="264" r:id="R8c9a54492bd644cf"/>
-    <p:sldId xmlns:r="http://schemas.openxmlformats.org/officeDocument/2006/relationships" id="265" r:id="Re6815a7ef571433b"/>
-    <p:sldId xmlns:r="http://schemas.openxmlformats.org/officeDocument/2006/relationships" id="266" r:id="R8959f1a93eda46d4"/>
-    <p:sldId xmlns:r="http://schemas.openxmlformats.org/officeDocument/2006/relationships" id="267" r:id="R1511e5a30f434795"/>
-    <p:sldId xmlns:r="http://schemas.openxmlformats.org/officeDocument/2006/relationships" id="268" r:id="Rfcca35d60a3c47d2"/>
-    <p:sldId xmlns:r="http://schemas.openxmlformats.org/officeDocument/2006/relationships" id="269" r:id="R1089328ba0f94b54"/>
-    <p:sldId xmlns:r="http://schemas.openxmlformats.org/officeDocument/2006/relationships" id="270" r:id="Rc1c058bef5444a3c"/>
+    <p:sldId xmlns:r="http://schemas.openxmlformats.org/officeDocument/2006/relationships" id="256" r:id="R7f78e4092ce24da4"/>
+    <p:sldId xmlns:r="http://schemas.openxmlformats.org/officeDocument/2006/relationships" id="257" r:id="R3c1b896edd5e44f8"/>
+    <p:sldId xmlns:r="http://schemas.openxmlformats.org/officeDocument/2006/relationships" id="258" r:id="Re830c0149fc3416a"/>
+    <p:sldId xmlns:r="http://schemas.openxmlformats.org/officeDocument/2006/relationships" id="259" r:id="Rf5ba52b6b0174616"/>
+    <p:sldId xmlns:r="http://schemas.openxmlformats.org/officeDocument/2006/relationships" id="260" r:id="R5533211f84d34083"/>
+    <p:sldId xmlns:r="http://schemas.openxmlformats.org/officeDocument/2006/relationships" id="261" r:id="Rcdb59937459845eb"/>
+    <p:sldId xmlns:r="http://schemas.openxmlformats.org/officeDocument/2006/relationships" id="262" r:id="R32a4705ee38c48b3"/>
+    <p:sldId xmlns:r="http://schemas.openxmlformats.org/officeDocument/2006/relationships" id="263" r:id="Rad0721f11e0d4624"/>
+    <p:sldId xmlns:r="http://schemas.openxmlformats.org/officeDocument/2006/relationships" id="264" r:id="R74b5f1cc00ed4d3e"/>
+    <p:sldId xmlns:r="http://schemas.openxmlformats.org/officeDocument/2006/relationships" id="265" r:id="R74a3541abc0a4eea"/>
+    <p:sldId xmlns:r="http://schemas.openxmlformats.org/officeDocument/2006/relationships" id="266" r:id="Ra7a30ef2cbf843b0"/>
+    <p:sldId xmlns:r="http://schemas.openxmlformats.org/officeDocument/2006/relationships" id="267" r:id="R049f66e00f494c15"/>
+    <p:sldId xmlns:r="http://schemas.openxmlformats.org/officeDocument/2006/relationships" id="268" r:id="Rce8f8ddf30414286"/>
+    <p:sldId xmlns:r="http://schemas.openxmlformats.org/officeDocument/2006/relationships" id="269" r:id="Rfc2af6014f934312"/>
+    <p:sldId xmlns:r="http://schemas.openxmlformats.org/officeDocument/2006/relationships" id="270" r:id="Re213907487d8432b"/>
   </p:sldIdLst>
   <p:sldSz cx="12192000" cy="6858000"/>
   <p:notesSz cx="6858000" cy="9144000"/>
@@ -1879,7 +1879,7 @@
   </p:cSld>
   <p:clrMap bg1="lt1" tx1="dk1" bg2="lt2" tx2="dk2" accent1="accent1" accent2="accent2" accent3="accent3" accent4="accent4" accent5="accent5" accent6="accent6" hlink="hlink" folHlink="folHlink"/>
   <p:sldLayoutIdLst>
-    <p:sldLayoutId xmlns:r="http://schemas.openxmlformats.org/officeDocument/2006/relationships" id="2147483649" r:id="R8f65a41f8bc8427a"/>
+    <p:sldLayoutId xmlns:r="http://schemas.openxmlformats.org/officeDocument/2006/relationships" id="2147483649" r:id="R0216e0d2b4544b9c"/>
   </p:sldLayoutIdLst>
   <p:txStyles>
     <p:titleStyle>
@@ -2430,7 +2430,7 @@
           <p:cNvPr id="17" name="">
             <a:extLst xmlns:a="http://schemas.openxmlformats.org/drawingml/2006/main">
               <a:ext uri="{FF2B5EF4-FFF2-40B4-BE49-F238E27FC236}">
-                <a16:creationId xmlns:a16="http://schemas.microsoft.com/office/drawing/2014/main" id="{0EECDA17-46EC-4CAE-BBBE-AB6DCB77D07A}"/>
+                <a16:creationId xmlns:a16="http://schemas.microsoft.com/office/drawing/2014/main" id="{88FA65FE-F152-4F91-A78B-F649196523AB}"/>
               </a:ext>
             </a:extLst>
           </p:cNvPr>
@@ -2463,7 +2463,7 @@
           <p:cNvPr id="2" name="">
             <a:extLst xmlns:a="http://schemas.openxmlformats.org/drawingml/2006/main">
               <a:ext uri="{FF2B5EF4-FFF2-40B4-BE49-F238E27FC236}">
-                <a16:creationId xmlns:a16="http://schemas.microsoft.com/office/drawing/2014/main" id="{81810820-F150-4C7D-9B14-3055E7449328}"/>
+                <a16:creationId xmlns:a16="http://schemas.microsoft.com/office/drawing/2014/main" id="{1382E3D3-7377-4440-861D-02937D511CBB}"/>
               </a:ext>
             </a:extLst>
           </p:cNvPr>
@@ -2494,7 +2494,7 @@
           <p:cNvPr id="3" name="">
             <a:extLst xmlns:a="http://schemas.openxmlformats.org/drawingml/2006/main">
               <a:ext uri="{FF2B5EF4-FFF2-40B4-BE49-F238E27FC236}">
-                <a16:creationId xmlns:a16="http://schemas.microsoft.com/office/drawing/2014/main" id="{CC74526A-322E-46F5-9F1F-34E872AB19C9}"/>
+                <a16:creationId xmlns:a16="http://schemas.microsoft.com/office/drawing/2014/main" id="{596CA39E-4AF5-4296-93F8-9D8F777D7084}"/>
               </a:ext>
             </a:extLst>
           </p:cNvPr>
@@ -2529,7 +2529,7 @@
           <p:nvPr/>
         </p:nvPicPr>
         <p:blipFill>
-          <a:blip xmlns:r="http://schemas.openxmlformats.org/officeDocument/2006/relationships" xmlns:a="http://schemas.openxmlformats.org/drawingml/2006/main" r:embed="Rb279f1a802d14703"/>
+          <a:blip xmlns:r="http://schemas.openxmlformats.org/officeDocument/2006/relationships" xmlns:a="http://schemas.openxmlformats.org/drawingml/2006/main" r:embed="R280e827277104b23"/>
           <a:stretch xmlns:a="http://schemas.openxmlformats.org/drawingml/2006/main"/>
         </p:blipFill>
         <p:spPr>
@@ -2547,7 +2547,7 @@
           <p:cNvPr id="5" name="">
             <a:extLst xmlns:a="http://schemas.openxmlformats.org/drawingml/2006/main">
               <a:ext uri="{FF2B5EF4-FFF2-40B4-BE49-F238E27FC236}">
-                <a16:creationId xmlns:a16="http://schemas.microsoft.com/office/drawing/2014/main" id="{37A0F4A2-2C7B-45A5-9313-EB90775D7BB8}"/>
+                <a16:creationId xmlns:a16="http://schemas.microsoft.com/office/drawing/2014/main" id="{362C2759-D1D1-4F5F-9E4C-38065BD9127F}"/>
               </a:ext>
             </a:extLst>
           </p:cNvPr>
@@ -2599,7 +2599,7 @@
           <p:cNvPr id="6" name="">
             <a:extLst xmlns:a="http://schemas.openxmlformats.org/drawingml/2006/main">
               <a:ext uri="{FF2B5EF4-FFF2-40B4-BE49-F238E27FC236}">
-                <a16:creationId xmlns:a16="http://schemas.microsoft.com/office/drawing/2014/main" id="{CFC38491-0E70-4B17-9381-DA9706E72870}"/>
+                <a16:creationId xmlns:a16="http://schemas.microsoft.com/office/drawing/2014/main" id="{7CA1697E-0B99-4482-AD74-8D388038959A}"/>
               </a:ext>
             </a:extLst>
           </p:cNvPr>
@@ -2655,7 +2655,7 @@
           <p:nvPr/>
         </p:nvPicPr>
         <p:blipFill>
-          <a:blip xmlns:r="http://schemas.openxmlformats.org/officeDocument/2006/relationships" xmlns:a="http://schemas.openxmlformats.org/drawingml/2006/main" r:embed="R6839fc47865641d7"/>
+          <a:blip xmlns:r="http://schemas.openxmlformats.org/officeDocument/2006/relationships" xmlns:a="http://schemas.openxmlformats.org/drawingml/2006/main" r:embed="Rbd706493f4bb410e"/>
           <a:stretch xmlns:a="http://schemas.openxmlformats.org/drawingml/2006/main"/>
         </p:blipFill>
         <p:spPr>
@@ -2673,7 +2673,7 @@
           <p:cNvPr id="8" name="">
             <a:extLst xmlns:a="http://schemas.openxmlformats.org/drawingml/2006/main">
               <a:ext uri="{FF2B5EF4-FFF2-40B4-BE49-F238E27FC236}">
-                <a16:creationId xmlns:a16="http://schemas.microsoft.com/office/drawing/2014/main" id="{210D38B8-3FF0-48CE-ADB8-61157B2C0FF6}"/>
+                <a16:creationId xmlns:a16="http://schemas.microsoft.com/office/drawing/2014/main" id="{94FF00CD-142B-46D6-A9D0-FE4AE72D1DBC}"/>
               </a:ext>
             </a:extLst>
           </p:cNvPr>
@@ -2706,7 +2706,7 @@
           <p:cNvPr id="9" name="">
             <a:extLst xmlns:a="http://schemas.openxmlformats.org/drawingml/2006/main">
               <a:ext uri="{FF2B5EF4-FFF2-40B4-BE49-F238E27FC236}">
-                <a16:creationId xmlns:a16="http://schemas.microsoft.com/office/drawing/2014/main" id="{B9BDACAD-A1A0-494E-AD8A-CFA42D39329F}"/>
+                <a16:creationId xmlns:a16="http://schemas.microsoft.com/office/drawing/2014/main" id="{FA81C148-3ED5-44F4-89F3-64AAB6D752F0}"/>
               </a:ext>
             </a:extLst>
           </p:cNvPr>
@@ -2758,7 +2758,7 @@
           <p:cNvPr id="10" name="">
             <a:extLst xmlns:a="http://schemas.openxmlformats.org/drawingml/2006/main">
               <a:ext uri="{FF2B5EF4-FFF2-40B4-BE49-F238E27FC236}">
-                <a16:creationId xmlns:a16="http://schemas.microsoft.com/office/drawing/2014/main" id="{3F4E748B-5D97-4A12-8FA7-A86745BC4C17}"/>
+                <a16:creationId xmlns:a16="http://schemas.microsoft.com/office/drawing/2014/main" id="{7EE275C0-9A9A-424B-A3EB-86BBF0664B01}"/>
               </a:ext>
             </a:extLst>
           </p:cNvPr>
@@ -2810,7 +2810,7 @@
           <p:cNvPr id="11" name="">
             <a:extLst xmlns:a="http://schemas.openxmlformats.org/drawingml/2006/main">
               <a:ext uri="{FF2B5EF4-FFF2-40B4-BE49-F238E27FC236}">
-                <a16:creationId xmlns:a16="http://schemas.microsoft.com/office/drawing/2014/main" id="{F802AD89-63BF-4526-8DA7-2CBA19E8EE14}"/>
+                <a16:creationId xmlns:a16="http://schemas.microsoft.com/office/drawing/2014/main" id="{1C704687-1415-466B-8F32-C55AC487ECCA}"/>
               </a:ext>
             </a:extLst>
           </p:cNvPr>
@@ -2862,7 +2862,7 @@
           <p:cNvPr id="12" name="">
             <a:extLst xmlns:a="http://schemas.openxmlformats.org/drawingml/2006/main">
               <a:ext uri="{FF2B5EF4-FFF2-40B4-BE49-F238E27FC236}">
-                <a16:creationId xmlns:a16="http://schemas.microsoft.com/office/drawing/2014/main" id="{574784CB-C1E4-4449-B4CB-459FE76C5B38}"/>
+                <a16:creationId xmlns:a16="http://schemas.microsoft.com/office/drawing/2014/main" id="{BA55D6D3-537F-48C2-9F10-238DC55AB63B}"/>
               </a:ext>
             </a:extLst>
           </p:cNvPr>
@@ -2914,7 +2914,7 @@
           <p:cNvPr id="13" name="">
             <a:extLst xmlns:a="http://schemas.openxmlformats.org/drawingml/2006/main">
               <a:ext uri="{FF2B5EF4-FFF2-40B4-BE49-F238E27FC236}">
-                <a16:creationId xmlns:a16="http://schemas.microsoft.com/office/drawing/2014/main" id="{4EF7CEEE-B99D-4B67-8878-755CA616CFF7}"/>
+                <a16:creationId xmlns:a16="http://schemas.microsoft.com/office/drawing/2014/main" id="{0A9B0FD5-9ACD-4C53-80F8-775E6829E248}"/>
               </a:ext>
             </a:extLst>
           </p:cNvPr>
@@ -2966,7 +2966,7 @@
           <p:cNvPr id="14" name="">
             <a:extLst xmlns:a="http://schemas.openxmlformats.org/drawingml/2006/main">
               <a:ext uri="{FF2B5EF4-FFF2-40B4-BE49-F238E27FC236}">
-                <a16:creationId xmlns:a16="http://schemas.microsoft.com/office/drawing/2014/main" id="{204EDCC6-50B6-4F21-B304-2470B4DB88A0}"/>
+                <a16:creationId xmlns:a16="http://schemas.microsoft.com/office/drawing/2014/main" id="{48658A2A-D636-4289-8063-678A673F109A}"/>
               </a:ext>
             </a:extLst>
           </p:cNvPr>
@@ -3018,7 +3018,7 @@
           <p:cNvPr id="15" name="">
             <a:extLst xmlns:a="http://schemas.openxmlformats.org/drawingml/2006/main">
               <a:ext uri="{FF2B5EF4-FFF2-40B4-BE49-F238E27FC236}">
-                <a16:creationId xmlns:a16="http://schemas.microsoft.com/office/drawing/2014/main" id="{685AD9BB-B232-4E7E-8076-83EA0949EAC1}"/>
+                <a16:creationId xmlns:a16="http://schemas.microsoft.com/office/drawing/2014/main" id="{9F1CFDDD-EB9F-4F87-A649-0CF53F0AA152}"/>
               </a:ext>
             </a:extLst>
           </p:cNvPr>
@@ -3070,7 +3070,7 @@
           <p:cNvPr id="16" name="">
             <a:extLst xmlns:a="http://schemas.openxmlformats.org/drawingml/2006/main">
               <a:ext uri="{FF2B5EF4-FFF2-40B4-BE49-F238E27FC236}">
-                <a16:creationId xmlns:a16="http://schemas.microsoft.com/office/drawing/2014/main" id="{97BAEDEB-A328-4FC6-B53F-EF2B2DF94CA6}"/>
+                <a16:creationId xmlns:a16="http://schemas.microsoft.com/office/drawing/2014/main" id="{FF83065E-2255-4FA2-9F93-D8BE39DB467C}"/>
               </a:ext>
             </a:extLst>
           </p:cNvPr>
@@ -3120,7 +3120,7 @@
     </p:spTree>
     <p:extLst>
       <p:ext uri="{BB962C8B-B14F-4D97-AF65-F5344CB8AC3E}">
-        <p14:creationId xmlns:p14="http://schemas.microsoft.com/office/powerpoint/2010/main" val="983445465"/>
+        <p14:creationId xmlns:p14="http://schemas.microsoft.com/office/powerpoint/2010/main" val="1392104981"/>
       </p:ext>
     </p:extLst>
   </p:cSld>
@@ -3151,7 +3151,7 @@
           <p:cNvPr id="103" name="">
             <a:extLst xmlns:a="http://schemas.openxmlformats.org/drawingml/2006/main">
               <a:ext uri="{FF2B5EF4-FFF2-40B4-BE49-F238E27FC236}">
-                <a16:creationId xmlns:a16="http://schemas.microsoft.com/office/drawing/2014/main" id="{1C3DC966-7F3E-4340-BF01-F53B8651A051}"/>
+                <a16:creationId xmlns:a16="http://schemas.microsoft.com/office/drawing/2014/main" id="{C1D69FD2-9D58-492D-A85E-3FE457091F1B}"/>
               </a:ext>
             </a:extLst>
           </p:cNvPr>
@@ -3184,7 +3184,7 @@
           <p:cNvPr id="2" name="">
             <a:extLst xmlns:a="http://schemas.openxmlformats.org/drawingml/2006/main">
               <a:ext uri="{FF2B5EF4-FFF2-40B4-BE49-F238E27FC236}">
-                <a16:creationId xmlns:a16="http://schemas.microsoft.com/office/drawing/2014/main" id="{680BB5DA-0685-4573-90C8-64D876C26679}"/>
+                <a16:creationId xmlns:a16="http://schemas.microsoft.com/office/drawing/2014/main" id="{F8FCE411-BC28-4025-B196-B7CA584EF0AD}"/>
               </a:ext>
             </a:extLst>
           </p:cNvPr>
@@ -3215,7 +3215,7 @@
           <p:cNvPr id="3" name="">
             <a:extLst xmlns:a="http://schemas.openxmlformats.org/drawingml/2006/main">
               <a:ext uri="{FF2B5EF4-FFF2-40B4-BE49-F238E27FC236}">
-                <a16:creationId xmlns:a16="http://schemas.microsoft.com/office/drawing/2014/main" id="{529C8215-F406-4938-B829-3580A817575C}"/>
+                <a16:creationId xmlns:a16="http://schemas.microsoft.com/office/drawing/2014/main" id="{5845A600-1E26-478E-9277-B702FB3B6AEB}"/>
               </a:ext>
             </a:extLst>
           </p:cNvPr>
@@ -3267,7 +3267,7 @@
           <p:cNvPr id="4" name="">
             <a:extLst xmlns:a="http://schemas.openxmlformats.org/drawingml/2006/main">
               <a:ext uri="{FF2B5EF4-FFF2-40B4-BE49-F238E27FC236}">
-                <a16:creationId xmlns:a16="http://schemas.microsoft.com/office/drawing/2014/main" id="{CA006A43-03D0-498E-9CBD-FFBC2A8A630A}"/>
+                <a16:creationId xmlns:a16="http://schemas.microsoft.com/office/drawing/2014/main" id="{070A08B0-46F8-42FF-A5AA-3AB9FB2F4C1E}"/>
               </a:ext>
             </a:extLst>
           </p:cNvPr>
@@ -3319,7 +3319,7 @@
           <p:cNvPr id="5" name="">
             <a:extLst xmlns:a="http://schemas.openxmlformats.org/drawingml/2006/main">
               <a:ext uri="{FF2B5EF4-FFF2-40B4-BE49-F238E27FC236}">
-                <a16:creationId xmlns:a16="http://schemas.microsoft.com/office/drawing/2014/main" id="{8C7E3282-F5D3-438F-A800-E062642ED697}"/>
+                <a16:creationId xmlns:a16="http://schemas.microsoft.com/office/drawing/2014/main" id="{D3044B53-231B-40EB-B7CA-37E7D48C078B}"/>
               </a:ext>
             </a:extLst>
           </p:cNvPr>
@@ -3354,7 +3354,7 @@
           <p:nvPr/>
         </p:nvPicPr>
         <p:blipFill>
-          <a:blip xmlns:r="http://schemas.openxmlformats.org/officeDocument/2006/relationships" xmlns:a="http://schemas.openxmlformats.org/drawingml/2006/main" r:embed="R6d117b8124de4744"/>
+          <a:blip xmlns:r="http://schemas.openxmlformats.org/officeDocument/2006/relationships" xmlns:a="http://schemas.openxmlformats.org/drawingml/2006/main" r:embed="Rc8a421493c114c78"/>
           <a:stretch xmlns:a="http://schemas.openxmlformats.org/drawingml/2006/main"/>
         </p:blipFill>
         <p:spPr>
@@ -3372,7 +3372,7 @@
           <p:cNvPr id="7" name="">
             <a:extLst xmlns:a="http://schemas.openxmlformats.org/drawingml/2006/main">
               <a:ext uri="{FF2B5EF4-FFF2-40B4-BE49-F238E27FC236}">
-                <a16:creationId xmlns:a16="http://schemas.microsoft.com/office/drawing/2014/main" id="{C6E9530E-A96B-4E80-9EC4-D1186A27D05F}"/>
+                <a16:creationId xmlns:a16="http://schemas.microsoft.com/office/drawing/2014/main" id="{308B9D1E-ACFA-410A-8FAA-2905AE0B13B3}"/>
               </a:ext>
             </a:extLst>
           </p:cNvPr>
@@ -3424,7 +3424,7 @@
           <p:cNvPr id="8" name="">
             <a:extLst xmlns:a="http://schemas.openxmlformats.org/drawingml/2006/main">
               <a:ext uri="{FF2B5EF4-FFF2-40B4-BE49-F238E27FC236}">
-                <a16:creationId xmlns:a16="http://schemas.microsoft.com/office/drawing/2014/main" id="{C7F06392-9E83-4507-92FE-FEF56C68C20E}"/>
+                <a16:creationId xmlns:a16="http://schemas.microsoft.com/office/drawing/2014/main" id="{452703C5-F38A-4CCB-BBFF-8C4F1A6F9C64}"/>
               </a:ext>
             </a:extLst>
           </p:cNvPr>
@@ -3476,7 +3476,7 @@
           <p:cNvPr id="9" name="">
             <a:extLst xmlns:a="http://schemas.openxmlformats.org/drawingml/2006/main">
               <a:ext uri="{FF2B5EF4-FFF2-40B4-BE49-F238E27FC236}">
-                <a16:creationId xmlns:a16="http://schemas.microsoft.com/office/drawing/2014/main" id="{B19B6BC6-B7FA-45F2-9866-D7FB694AA4DC}"/>
+                <a16:creationId xmlns:a16="http://schemas.microsoft.com/office/drawing/2014/main" id="{74AA5D1F-55D2-4CAB-909C-FB959C1157E4}"/>
               </a:ext>
             </a:extLst>
           </p:cNvPr>
@@ -3528,7 +3528,7 @@
           <p:cNvPr id="10" name="">
             <a:extLst xmlns:a="http://schemas.openxmlformats.org/drawingml/2006/main">
               <a:ext uri="{FF2B5EF4-FFF2-40B4-BE49-F238E27FC236}">
-                <a16:creationId xmlns:a16="http://schemas.microsoft.com/office/drawing/2014/main" id="{C8A2A521-41F8-4F18-BC2E-EC10648938BC}"/>
+                <a16:creationId xmlns:a16="http://schemas.microsoft.com/office/drawing/2014/main" id="{D26E8811-3196-4A67-ADE5-191B8270EEFE}"/>
               </a:ext>
             </a:extLst>
           </p:cNvPr>
@@ -3580,7 +3580,7 @@
           <p:cNvPr id="11" name="">
             <a:extLst xmlns:a="http://schemas.openxmlformats.org/drawingml/2006/main">
               <a:ext uri="{FF2B5EF4-FFF2-40B4-BE49-F238E27FC236}">
-                <a16:creationId xmlns:a16="http://schemas.microsoft.com/office/drawing/2014/main" id="{2C7728FC-E640-4B39-A561-6F00F813FD2E}"/>
+                <a16:creationId xmlns:a16="http://schemas.microsoft.com/office/drawing/2014/main" id="{F137E1A2-4887-4AE3-982C-7DFF3257C3AA}"/>
               </a:ext>
             </a:extLst>
           </p:cNvPr>
@@ -3611,7 +3611,7 @@
           <p:cNvPr id="12" name="">
             <a:extLst xmlns:a="http://schemas.openxmlformats.org/drawingml/2006/main">
               <a:ext uri="{FF2B5EF4-FFF2-40B4-BE49-F238E27FC236}">
-                <a16:creationId xmlns:a16="http://schemas.microsoft.com/office/drawing/2014/main" id="{E975797D-0945-4970-939C-D330A9449682}"/>
+                <a16:creationId xmlns:a16="http://schemas.microsoft.com/office/drawing/2014/main" id="{91285768-841A-4D49-B12C-E7164A02BFDF}"/>
               </a:ext>
             </a:extLst>
           </p:cNvPr>
@@ -3642,7 +3642,7 @@
           <p:cNvPr id="13" name="">
             <a:extLst xmlns:a="http://schemas.openxmlformats.org/drawingml/2006/main">
               <a:ext uri="{FF2B5EF4-FFF2-40B4-BE49-F238E27FC236}">
-                <a16:creationId xmlns:a16="http://schemas.microsoft.com/office/drawing/2014/main" id="{1172239D-C95F-4388-B0B1-FEB9138BA5AD}"/>
+                <a16:creationId xmlns:a16="http://schemas.microsoft.com/office/drawing/2014/main" id="{3C405BD9-D55F-4C47-955E-0216FE8FEF18}"/>
               </a:ext>
             </a:extLst>
           </p:cNvPr>
@@ -3694,7 +3694,7 @@
           <p:cNvPr id="14" name="">
             <a:extLst xmlns:a="http://schemas.openxmlformats.org/drawingml/2006/main">
               <a:ext uri="{FF2B5EF4-FFF2-40B4-BE49-F238E27FC236}">
-                <a16:creationId xmlns:a16="http://schemas.microsoft.com/office/drawing/2014/main" id="{FDFE50CE-AA86-47B6-9AC3-283E25E169F6}"/>
+                <a16:creationId xmlns:a16="http://schemas.microsoft.com/office/drawing/2014/main" id="{D7F61351-71FC-4F98-AAC5-386A0A17EB87}"/>
               </a:ext>
             </a:extLst>
           </p:cNvPr>
@@ -3746,7 +3746,7 @@
           <p:cNvPr id="15" name="">
             <a:extLst xmlns:a="http://schemas.openxmlformats.org/drawingml/2006/main">
               <a:ext uri="{FF2B5EF4-FFF2-40B4-BE49-F238E27FC236}">
-                <a16:creationId xmlns:a16="http://schemas.microsoft.com/office/drawing/2014/main" id="{275A5537-A4F3-4812-B64A-AD7E9FF86187}"/>
+                <a16:creationId xmlns:a16="http://schemas.microsoft.com/office/drawing/2014/main" id="{B6847A34-5ECA-49E7-A248-C880F917AA9F}"/>
               </a:ext>
             </a:extLst>
           </p:cNvPr>
@@ -3798,7 +3798,7 @@
           <p:cNvPr id="16" name="">
             <a:extLst xmlns:a="http://schemas.openxmlformats.org/drawingml/2006/main">
               <a:ext uri="{FF2B5EF4-FFF2-40B4-BE49-F238E27FC236}">
-                <a16:creationId xmlns:a16="http://schemas.microsoft.com/office/drawing/2014/main" id="{AB24DA30-B78E-4150-B75E-340E72072028}"/>
+                <a16:creationId xmlns:a16="http://schemas.microsoft.com/office/drawing/2014/main" id="{99FBF7B7-15A9-4288-B290-2F640D10EECA}"/>
               </a:ext>
             </a:extLst>
           </p:cNvPr>
@@ -3850,7 +3850,7 @@
           <p:cNvPr id="17" name="">
             <a:extLst xmlns:a="http://schemas.openxmlformats.org/drawingml/2006/main">
               <a:ext uri="{FF2B5EF4-FFF2-40B4-BE49-F238E27FC236}">
-                <a16:creationId xmlns:a16="http://schemas.microsoft.com/office/drawing/2014/main" id="{A27319F9-FCF0-4C18-B660-7AC592F51DC2}"/>
+                <a16:creationId xmlns:a16="http://schemas.microsoft.com/office/drawing/2014/main" id="{D1C8E81B-0AB2-4C5D-8C38-6756AAB678D3}"/>
               </a:ext>
             </a:extLst>
           </p:cNvPr>
@@ -3902,7 +3902,7 @@
           <p:cNvPr id="18" name="">
             <a:extLst xmlns:a="http://schemas.openxmlformats.org/drawingml/2006/main">
               <a:ext uri="{FF2B5EF4-FFF2-40B4-BE49-F238E27FC236}">
-                <a16:creationId xmlns:a16="http://schemas.microsoft.com/office/drawing/2014/main" id="{E7F190B0-E9BB-4AEF-8BA4-EF22328963F8}"/>
+                <a16:creationId xmlns:a16="http://schemas.microsoft.com/office/drawing/2014/main" id="{0D971A3A-82D3-4D73-8016-3CA70E8DF341}"/>
               </a:ext>
             </a:extLst>
           </p:cNvPr>
@@ -3933,7 +3933,7 @@
           <p:cNvPr id="19" name="">
             <a:extLst xmlns:a="http://schemas.openxmlformats.org/drawingml/2006/main">
               <a:ext uri="{FF2B5EF4-FFF2-40B4-BE49-F238E27FC236}">
-                <a16:creationId xmlns:a16="http://schemas.microsoft.com/office/drawing/2014/main" id="{048741B7-4FA9-4E75-AD7B-D2E2B44088C4}"/>
+                <a16:creationId xmlns:a16="http://schemas.microsoft.com/office/drawing/2014/main" id="{FC4BF820-8B72-4284-9150-F21B910B22C9}"/>
               </a:ext>
             </a:extLst>
           </p:cNvPr>
@@ -3964,7 +3964,7 @@
           <p:cNvPr id="20" name="">
             <a:extLst xmlns:a="http://schemas.openxmlformats.org/drawingml/2006/main">
               <a:ext uri="{FF2B5EF4-FFF2-40B4-BE49-F238E27FC236}">
-                <a16:creationId xmlns:a16="http://schemas.microsoft.com/office/drawing/2014/main" id="{B1563D0C-06E5-4CF7-90BB-A44618315DA5}"/>
+                <a16:creationId xmlns:a16="http://schemas.microsoft.com/office/drawing/2014/main" id="{697A3232-D638-4E24-A7C5-098068ACD6EA}"/>
               </a:ext>
             </a:extLst>
           </p:cNvPr>
@@ -4016,7 +4016,7 @@
           <p:cNvPr id="21" name="">
             <a:extLst xmlns:a="http://schemas.openxmlformats.org/drawingml/2006/main">
               <a:ext uri="{FF2B5EF4-FFF2-40B4-BE49-F238E27FC236}">
-                <a16:creationId xmlns:a16="http://schemas.microsoft.com/office/drawing/2014/main" id="{6F83A901-B413-424C-8EEE-184EF15B827E}"/>
+                <a16:creationId xmlns:a16="http://schemas.microsoft.com/office/drawing/2014/main" id="{368FC4A4-C99A-42E9-8F3E-E0F1D1BCF96D}"/>
               </a:ext>
             </a:extLst>
           </p:cNvPr>
@@ -4068,7 +4068,7 @@
           <p:cNvPr id="22" name="">
             <a:extLst xmlns:a="http://schemas.openxmlformats.org/drawingml/2006/main">
               <a:ext uri="{FF2B5EF4-FFF2-40B4-BE49-F238E27FC236}">
-                <a16:creationId xmlns:a16="http://schemas.microsoft.com/office/drawing/2014/main" id="{435BAFB4-B453-426F-9328-394B077FD969}"/>
+                <a16:creationId xmlns:a16="http://schemas.microsoft.com/office/drawing/2014/main" id="{183D36AC-9EE0-4FB2-A68F-60D58718D545}"/>
               </a:ext>
             </a:extLst>
           </p:cNvPr>
@@ -4120,7 +4120,7 @@
           <p:cNvPr id="23" name="">
             <a:extLst xmlns:a="http://schemas.openxmlformats.org/drawingml/2006/main">
               <a:ext uri="{FF2B5EF4-FFF2-40B4-BE49-F238E27FC236}">
-                <a16:creationId xmlns:a16="http://schemas.microsoft.com/office/drawing/2014/main" id="{9459242C-57FF-4BBD-8975-AE5EA3E845D8}"/>
+                <a16:creationId xmlns:a16="http://schemas.microsoft.com/office/drawing/2014/main" id="{A6B1C725-49F5-4650-8AD7-1405BA9B9C3E}"/>
               </a:ext>
             </a:extLst>
           </p:cNvPr>
@@ -4172,7 +4172,7 @@
           <p:cNvPr id="24" name="">
             <a:extLst xmlns:a="http://schemas.openxmlformats.org/drawingml/2006/main">
               <a:ext uri="{FF2B5EF4-FFF2-40B4-BE49-F238E27FC236}">
-                <a16:creationId xmlns:a16="http://schemas.microsoft.com/office/drawing/2014/main" id="{A0AE1D24-CBBD-466D-9F4D-74FB1E79C28E}"/>
+                <a16:creationId xmlns:a16="http://schemas.microsoft.com/office/drawing/2014/main" id="{0B98D605-2F2C-4AA4-BB63-69B0AC939082}"/>
               </a:ext>
             </a:extLst>
           </p:cNvPr>
@@ -4224,7 +4224,7 @@
           <p:cNvPr id="25" name="">
             <a:extLst xmlns:a="http://schemas.openxmlformats.org/drawingml/2006/main">
               <a:ext uri="{FF2B5EF4-FFF2-40B4-BE49-F238E27FC236}">
-                <a16:creationId xmlns:a16="http://schemas.microsoft.com/office/drawing/2014/main" id="{2ACFE6A5-A3B3-4611-BFCE-8E6AFC494A4D}"/>
+                <a16:creationId xmlns:a16="http://schemas.microsoft.com/office/drawing/2014/main" id="{1AA7FF62-D665-41CA-A6E1-94DFC5935C6E}"/>
               </a:ext>
             </a:extLst>
           </p:cNvPr>
@@ -4255,7 +4255,7 @@
           <p:cNvPr id="26" name="">
             <a:extLst xmlns:a="http://schemas.openxmlformats.org/drawingml/2006/main">
               <a:ext uri="{FF2B5EF4-FFF2-40B4-BE49-F238E27FC236}">
-                <a16:creationId xmlns:a16="http://schemas.microsoft.com/office/drawing/2014/main" id="{3654D4D3-CD58-461E-8C98-51C0C9BBC8AB}"/>
+                <a16:creationId xmlns:a16="http://schemas.microsoft.com/office/drawing/2014/main" id="{FA82FFA1-DC6E-4504-BAD0-8F3F7F959EEE}"/>
               </a:ext>
             </a:extLst>
           </p:cNvPr>
@@ -4307,7 +4307,7 @@
           <p:cNvPr id="27" name="">
             <a:extLst xmlns:a="http://schemas.openxmlformats.org/drawingml/2006/main">
               <a:ext uri="{FF2B5EF4-FFF2-40B4-BE49-F238E27FC236}">
-                <a16:creationId xmlns:a16="http://schemas.microsoft.com/office/drawing/2014/main" id="{FCEA9294-0A48-4345-8EFF-0DE5BABAFBCC}"/>
+                <a16:creationId xmlns:a16="http://schemas.microsoft.com/office/drawing/2014/main" id="{49DABAC9-E7C5-40F3-A488-3BDC1EE8F524}"/>
               </a:ext>
             </a:extLst>
           </p:cNvPr>
@@ -4359,7 +4359,7 @@
           <p:cNvPr id="28" name="">
             <a:extLst xmlns:a="http://schemas.openxmlformats.org/drawingml/2006/main">
               <a:ext uri="{FF2B5EF4-FFF2-40B4-BE49-F238E27FC236}">
-                <a16:creationId xmlns:a16="http://schemas.microsoft.com/office/drawing/2014/main" id="{C57563F7-0BD4-4A76-A23D-BB5C1A7CE3D8}"/>
+                <a16:creationId xmlns:a16="http://schemas.microsoft.com/office/drawing/2014/main" id="{3BA7FB18-3A4A-4A34-9264-0F1CB35EB387}"/>
               </a:ext>
             </a:extLst>
           </p:cNvPr>
@@ -4411,7 +4411,7 @@
           <p:cNvPr id="29" name="">
             <a:extLst xmlns:a="http://schemas.openxmlformats.org/drawingml/2006/main">
               <a:ext uri="{FF2B5EF4-FFF2-40B4-BE49-F238E27FC236}">
-                <a16:creationId xmlns:a16="http://schemas.microsoft.com/office/drawing/2014/main" id="{2A497727-63A5-4D76-BE66-6CD57DDB1DC8}"/>
+                <a16:creationId xmlns:a16="http://schemas.microsoft.com/office/drawing/2014/main" id="{304EAAE8-E30C-493D-9C11-02307768CB28}"/>
               </a:ext>
             </a:extLst>
           </p:cNvPr>
@@ -4463,7 +4463,7 @@
           <p:cNvPr id="30" name="">
             <a:extLst xmlns:a="http://schemas.openxmlformats.org/drawingml/2006/main">
               <a:ext uri="{FF2B5EF4-FFF2-40B4-BE49-F238E27FC236}">
-                <a16:creationId xmlns:a16="http://schemas.microsoft.com/office/drawing/2014/main" id="{C08F8EFE-21A9-4CE7-94A3-BB86AF697FD6}"/>
+                <a16:creationId xmlns:a16="http://schemas.microsoft.com/office/drawing/2014/main" id="{4DC7AD4D-4812-417B-9659-0AD75AAA1B65}"/>
               </a:ext>
             </a:extLst>
           </p:cNvPr>
@@ -4515,7 +4515,7 @@
           <p:cNvPr id="31" name="">
             <a:extLst xmlns:a="http://schemas.openxmlformats.org/drawingml/2006/main">
               <a:ext uri="{FF2B5EF4-FFF2-40B4-BE49-F238E27FC236}">
-                <a16:creationId xmlns:a16="http://schemas.microsoft.com/office/drawing/2014/main" id="{34918457-6C56-400D-A572-3E75F61222E4}"/>
+                <a16:creationId xmlns:a16="http://schemas.microsoft.com/office/drawing/2014/main" id="{243A60D3-2C34-4942-8646-9FDDF562B1EB}"/>
               </a:ext>
             </a:extLst>
           </p:cNvPr>
@@ -4546,7 +4546,7 @@
           <p:cNvPr id="32" name="">
             <a:extLst xmlns:a="http://schemas.openxmlformats.org/drawingml/2006/main">
               <a:ext uri="{FF2B5EF4-FFF2-40B4-BE49-F238E27FC236}">
-                <a16:creationId xmlns:a16="http://schemas.microsoft.com/office/drawing/2014/main" id="{BBE5137F-75E9-4D72-A357-28B3C7BA0C59}"/>
+                <a16:creationId xmlns:a16="http://schemas.microsoft.com/office/drawing/2014/main" id="{65D46E39-AB81-4DD2-8B5D-EF391FDA036B}"/>
               </a:ext>
             </a:extLst>
           </p:cNvPr>
@@ -4577,7 +4577,7 @@
           <p:cNvPr id="33" name="">
             <a:extLst xmlns:a="http://schemas.openxmlformats.org/drawingml/2006/main">
               <a:ext uri="{FF2B5EF4-FFF2-40B4-BE49-F238E27FC236}">
-                <a16:creationId xmlns:a16="http://schemas.microsoft.com/office/drawing/2014/main" id="{ABA2A704-A7FB-4F5C-A7AC-E21B40540BD3}"/>
+                <a16:creationId xmlns:a16="http://schemas.microsoft.com/office/drawing/2014/main" id="{F3BEFF83-BFF2-409D-922F-180FCC5F78C8}"/>
               </a:ext>
             </a:extLst>
           </p:cNvPr>
@@ -4629,7 +4629,7 @@
           <p:cNvPr id="34" name="">
             <a:extLst xmlns:a="http://schemas.openxmlformats.org/drawingml/2006/main">
               <a:ext uri="{FF2B5EF4-FFF2-40B4-BE49-F238E27FC236}">
-                <a16:creationId xmlns:a16="http://schemas.microsoft.com/office/drawing/2014/main" id="{4C0E3E27-0F2A-4858-A6AA-6D60650D9799}"/>
+                <a16:creationId xmlns:a16="http://schemas.microsoft.com/office/drawing/2014/main" id="{62802F4F-65A7-475C-AF59-1BEC3457404E}"/>
               </a:ext>
             </a:extLst>
           </p:cNvPr>
@@ -4681,7 +4681,7 @@
           <p:cNvPr id="35" name="">
             <a:extLst xmlns:a="http://schemas.openxmlformats.org/drawingml/2006/main">
               <a:ext uri="{FF2B5EF4-FFF2-40B4-BE49-F238E27FC236}">
-                <a16:creationId xmlns:a16="http://schemas.microsoft.com/office/drawing/2014/main" id="{D1936314-DF9D-46BE-93E5-95B4E1517EC6}"/>
+                <a16:creationId xmlns:a16="http://schemas.microsoft.com/office/drawing/2014/main" id="{C6237932-0F7D-42A6-8613-FA7FD5D4806C}"/>
               </a:ext>
             </a:extLst>
           </p:cNvPr>
@@ -4733,7 +4733,7 @@
           <p:cNvPr id="36" name="">
             <a:extLst xmlns:a="http://schemas.openxmlformats.org/drawingml/2006/main">
               <a:ext uri="{FF2B5EF4-FFF2-40B4-BE49-F238E27FC236}">
-                <a16:creationId xmlns:a16="http://schemas.microsoft.com/office/drawing/2014/main" id="{EB1F66DC-143F-4449-B40B-8AC942AF3BB7}"/>
+                <a16:creationId xmlns:a16="http://schemas.microsoft.com/office/drawing/2014/main" id="{DAF77C77-E019-4048-967B-8F2CDB97FB2E}"/>
               </a:ext>
             </a:extLst>
           </p:cNvPr>
@@ -4785,7 +4785,7 @@
           <p:cNvPr id="37" name="">
             <a:extLst xmlns:a="http://schemas.openxmlformats.org/drawingml/2006/main">
               <a:ext uri="{FF2B5EF4-FFF2-40B4-BE49-F238E27FC236}">
-                <a16:creationId xmlns:a16="http://schemas.microsoft.com/office/drawing/2014/main" id="{E164AC11-E123-4F6C-B536-22C4907794BA}"/>
+                <a16:creationId xmlns:a16="http://schemas.microsoft.com/office/drawing/2014/main" id="{CC252EF9-E250-4EA3-A422-B408BE1A6713}"/>
               </a:ext>
             </a:extLst>
           </p:cNvPr>
@@ -4837,7 +4837,7 @@
           <p:cNvPr id="38" name="">
             <a:extLst xmlns:a="http://schemas.openxmlformats.org/drawingml/2006/main">
               <a:ext uri="{FF2B5EF4-FFF2-40B4-BE49-F238E27FC236}">
-                <a16:creationId xmlns:a16="http://schemas.microsoft.com/office/drawing/2014/main" id="{97D255B9-B69A-4698-B6FC-BAC2A102D045}"/>
+                <a16:creationId xmlns:a16="http://schemas.microsoft.com/office/drawing/2014/main" id="{6863B41D-A27D-4546-8DFF-34BE8B110B83}"/>
               </a:ext>
             </a:extLst>
           </p:cNvPr>
@@ -4868,7 +4868,7 @@
           <p:cNvPr id="39" name="">
             <a:extLst xmlns:a="http://schemas.openxmlformats.org/drawingml/2006/main">
               <a:ext uri="{FF2B5EF4-FFF2-40B4-BE49-F238E27FC236}">
-                <a16:creationId xmlns:a16="http://schemas.microsoft.com/office/drawing/2014/main" id="{660F8501-7EE9-4496-9225-8CB41378D939}"/>
+                <a16:creationId xmlns:a16="http://schemas.microsoft.com/office/drawing/2014/main" id="{87300F35-5D69-4839-B2DC-5B1D74FFFCBA}"/>
               </a:ext>
             </a:extLst>
           </p:cNvPr>
@@ -4920,7 +4920,7 @@
           <p:cNvPr id="40" name="">
             <a:extLst xmlns:a="http://schemas.openxmlformats.org/drawingml/2006/main">
               <a:ext uri="{FF2B5EF4-FFF2-40B4-BE49-F238E27FC236}">
-                <a16:creationId xmlns:a16="http://schemas.microsoft.com/office/drawing/2014/main" id="{A274EF71-67BD-4E8C-844C-032789A38EF7}"/>
+                <a16:creationId xmlns:a16="http://schemas.microsoft.com/office/drawing/2014/main" id="{18DFBFBB-E2FC-4EB4-900D-9AFBD9D2C27D}"/>
               </a:ext>
             </a:extLst>
           </p:cNvPr>
@@ -4972,7 +4972,7 @@
           <p:cNvPr id="41" name="">
             <a:extLst xmlns:a="http://schemas.openxmlformats.org/drawingml/2006/main">
               <a:ext uri="{FF2B5EF4-FFF2-40B4-BE49-F238E27FC236}">
-                <a16:creationId xmlns:a16="http://schemas.microsoft.com/office/drawing/2014/main" id="{60567388-A624-4294-A83A-DEB3AD346675}"/>
+                <a16:creationId xmlns:a16="http://schemas.microsoft.com/office/drawing/2014/main" id="{1AAB06A3-5222-4ADA-8B38-553EAE275597}"/>
               </a:ext>
             </a:extLst>
           </p:cNvPr>
@@ -5024,7 +5024,7 @@
           <p:cNvPr id="42" name="">
             <a:extLst xmlns:a="http://schemas.openxmlformats.org/drawingml/2006/main">
               <a:ext uri="{FF2B5EF4-FFF2-40B4-BE49-F238E27FC236}">
-                <a16:creationId xmlns:a16="http://schemas.microsoft.com/office/drawing/2014/main" id="{FCEBBEC3-20E3-4C36-8691-190BDC254E72}"/>
+                <a16:creationId xmlns:a16="http://schemas.microsoft.com/office/drawing/2014/main" id="{8369BA77-150F-41EA-9540-304423EC1E5D}"/>
               </a:ext>
             </a:extLst>
           </p:cNvPr>
@@ -5076,7 +5076,7 @@
           <p:cNvPr id="43" name="">
             <a:extLst xmlns:a="http://schemas.openxmlformats.org/drawingml/2006/main">
               <a:ext uri="{FF2B5EF4-FFF2-40B4-BE49-F238E27FC236}">
-                <a16:creationId xmlns:a16="http://schemas.microsoft.com/office/drawing/2014/main" id="{49801333-4A7E-4AB6-9547-F81F14E58529}"/>
+                <a16:creationId xmlns:a16="http://schemas.microsoft.com/office/drawing/2014/main" id="{9E92DE14-8296-47D0-BE26-B862C54CDBBB}"/>
               </a:ext>
             </a:extLst>
           </p:cNvPr>
@@ -5128,7 +5128,7 @@
           <p:cNvPr id="44" name="">
             <a:extLst xmlns:a="http://schemas.openxmlformats.org/drawingml/2006/main">
               <a:ext uri="{FF2B5EF4-FFF2-40B4-BE49-F238E27FC236}">
-                <a16:creationId xmlns:a16="http://schemas.microsoft.com/office/drawing/2014/main" id="{AFD0C45D-30C1-4E54-A6BA-8820350EB794}"/>
+                <a16:creationId xmlns:a16="http://schemas.microsoft.com/office/drawing/2014/main" id="{0EB3482E-5FE6-4992-BCFA-609F772393E1}"/>
               </a:ext>
             </a:extLst>
           </p:cNvPr>
@@ -5159,7 +5159,7 @@
           <p:cNvPr id="45" name="">
             <a:extLst xmlns:a="http://schemas.openxmlformats.org/drawingml/2006/main">
               <a:ext uri="{FF2B5EF4-FFF2-40B4-BE49-F238E27FC236}">
-                <a16:creationId xmlns:a16="http://schemas.microsoft.com/office/drawing/2014/main" id="{0D898878-D5A8-4D40-BA2B-A36596B55636}"/>
+                <a16:creationId xmlns:a16="http://schemas.microsoft.com/office/drawing/2014/main" id="{88D81616-1DB0-427F-81EE-5EE405F4055A}"/>
               </a:ext>
             </a:extLst>
           </p:cNvPr>
@@ -5190,7 +5190,7 @@
           <p:cNvPr id="46" name="">
             <a:extLst xmlns:a="http://schemas.openxmlformats.org/drawingml/2006/main">
               <a:ext uri="{FF2B5EF4-FFF2-40B4-BE49-F238E27FC236}">
-                <a16:creationId xmlns:a16="http://schemas.microsoft.com/office/drawing/2014/main" id="{7395BCC4-AA65-4AD0-B068-BB66233EC570}"/>
+                <a16:creationId xmlns:a16="http://schemas.microsoft.com/office/drawing/2014/main" id="{F22E7E4A-7F85-44BF-81E5-044FE93E4CEC}"/>
               </a:ext>
             </a:extLst>
           </p:cNvPr>
@@ -5242,7 +5242,7 @@
           <p:cNvPr id="47" name="">
             <a:extLst xmlns:a="http://schemas.openxmlformats.org/drawingml/2006/main">
               <a:ext uri="{FF2B5EF4-FFF2-40B4-BE49-F238E27FC236}">
-                <a16:creationId xmlns:a16="http://schemas.microsoft.com/office/drawing/2014/main" id="{411CDE02-E82C-4B62-87D6-C5C86318D225}"/>
+                <a16:creationId xmlns:a16="http://schemas.microsoft.com/office/drawing/2014/main" id="{036573B5-97FB-4A19-9C1F-06239DECDF0A}"/>
               </a:ext>
             </a:extLst>
           </p:cNvPr>
@@ -5294,7 +5294,7 @@
           <p:cNvPr id="48" name="">
             <a:extLst xmlns:a="http://schemas.openxmlformats.org/drawingml/2006/main">
               <a:ext uri="{FF2B5EF4-FFF2-40B4-BE49-F238E27FC236}">
-                <a16:creationId xmlns:a16="http://schemas.microsoft.com/office/drawing/2014/main" id="{70064958-A141-4B5A-A9EB-216C33183124}"/>
+                <a16:creationId xmlns:a16="http://schemas.microsoft.com/office/drawing/2014/main" id="{B9E938F5-FE3C-4FD9-AE35-35E0A77AE51D}"/>
               </a:ext>
             </a:extLst>
           </p:cNvPr>
@@ -5346,7 +5346,7 @@
           <p:cNvPr id="49" name="">
             <a:extLst xmlns:a="http://schemas.openxmlformats.org/drawingml/2006/main">
               <a:ext uri="{FF2B5EF4-FFF2-40B4-BE49-F238E27FC236}">
-                <a16:creationId xmlns:a16="http://schemas.microsoft.com/office/drawing/2014/main" id="{862D2DD1-8B76-4756-9B40-7CF08D1B910F}"/>
+                <a16:creationId xmlns:a16="http://schemas.microsoft.com/office/drawing/2014/main" id="{B87DBF1D-90EB-4FCA-A6D9-F49831D6CED1}"/>
               </a:ext>
             </a:extLst>
           </p:cNvPr>
@@ -5398,7 +5398,7 @@
           <p:cNvPr id="50" name="">
             <a:extLst xmlns:a="http://schemas.openxmlformats.org/drawingml/2006/main">
               <a:ext uri="{FF2B5EF4-FFF2-40B4-BE49-F238E27FC236}">
-                <a16:creationId xmlns:a16="http://schemas.microsoft.com/office/drawing/2014/main" id="{E9341AD3-AB70-4B32-B818-AC4FB57E2BDF}"/>
+                <a16:creationId xmlns:a16="http://schemas.microsoft.com/office/drawing/2014/main" id="{36F64647-DE93-49E8-8B53-CCD7CD99ABA1}"/>
               </a:ext>
             </a:extLst>
           </p:cNvPr>
@@ -5450,7 +5450,7 @@
           <p:cNvPr id="51" name="">
             <a:extLst xmlns:a="http://schemas.openxmlformats.org/drawingml/2006/main">
               <a:ext uri="{FF2B5EF4-FFF2-40B4-BE49-F238E27FC236}">
-                <a16:creationId xmlns:a16="http://schemas.microsoft.com/office/drawing/2014/main" id="{1B4A9839-FE74-458D-8FF2-923FE678419E}"/>
+                <a16:creationId xmlns:a16="http://schemas.microsoft.com/office/drawing/2014/main" id="{61B5048F-DCCB-4EEF-863A-031C1E0CECBC}"/>
               </a:ext>
             </a:extLst>
           </p:cNvPr>
@@ -5481,7 +5481,7 @@
           <p:cNvPr id="52" name="">
             <a:extLst xmlns:a="http://schemas.openxmlformats.org/drawingml/2006/main">
               <a:ext uri="{FF2B5EF4-FFF2-40B4-BE49-F238E27FC236}">
-                <a16:creationId xmlns:a16="http://schemas.microsoft.com/office/drawing/2014/main" id="{B1C63EBF-D5CE-4B31-8249-C3E2CBD47EBE}"/>
+                <a16:creationId xmlns:a16="http://schemas.microsoft.com/office/drawing/2014/main" id="{EA56C7A0-5A24-4A25-87C7-308DD149D925}"/>
               </a:ext>
             </a:extLst>
           </p:cNvPr>
@@ -5533,7 +5533,7 @@
           <p:cNvPr id="53" name="">
             <a:extLst xmlns:a="http://schemas.openxmlformats.org/drawingml/2006/main">
               <a:ext uri="{FF2B5EF4-FFF2-40B4-BE49-F238E27FC236}">
-                <a16:creationId xmlns:a16="http://schemas.microsoft.com/office/drawing/2014/main" id="{1CC94250-14FB-4660-91CB-3EBF13991849}"/>
+                <a16:creationId xmlns:a16="http://schemas.microsoft.com/office/drawing/2014/main" id="{8AD0598D-4F94-4215-9827-391D454D64A0}"/>
               </a:ext>
             </a:extLst>
           </p:cNvPr>
@@ -5585,7 +5585,7 @@
           <p:cNvPr id="54" name="">
             <a:extLst xmlns:a="http://schemas.openxmlformats.org/drawingml/2006/main">
               <a:ext uri="{FF2B5EF4-FFF2-40B4-BE49-F238E27FC236}">
-                <a16:creationId xmlns:a16="http://schemas.microsoft.com/office/drawing/2014/main" id="{58B72DBE-BD0B-449B-9480-BB6B879940C1}"/>
+                <a16:creationId xmlns:a16="http://schemas.microsoft.com/office/drawing/2014/main" id="{BA83F463-C132-467B-963E-7B2434474143}"/>
               </a:ext>
             </a:extLst>
           </p:cNvPr>
@@ -5637,7 +5637,7 @@
           <p:cNvPr id="55" name="">
             <a:extLst xmlns:a="http://schemas.openxmlformats.org/drawingml/2006/main">
               <a:ext uri="{FF2B5EF4-FFF2-40B4-BE49-F238E27FC236}">
-                <a16:creationId xmlns:a16="http://schemas.microsoft.com/office/drawing/2014/main" id="{E19FF363-3098-4336-A3A6-F046776AB393}"/>
+                <a16:creationId xmlns:a16="http://schemas.microsoft.com/office/drawing/2014/main" id="{E6BE0CFF-96D7-45BC-9649-49A1730A9853}"/>
               </a:ext>
             </a:extLst>
           </p:cNvPr>
@@ -5689,7 +5689,7 @@
           <p:cNvPr id="56" name="">
             <a:extLst xmlns:a="http://schemas.openxmlformats.org/drawingml/2006/main">
               <a:ext uri="{FF2B5EF4-FFF2-40B4-BE49-F238E27FC236}">
-                <a16:creationId xmlns:a16="http://schemas.microsoft.com/office/drawing/2014/main" id="{7AE345DD-B7D8-43E9-8B17-D68B8B5C97BC}"/>
+                <a16:creationId xmlns:a16="http://schemas.microsoft.com/office/drawing/2014/main" id="{27615573-630F-41F1-B3DF-AA49BD908AE2}"/>
               </a:ext>
             </a:extLst>
           </p:cNvPr>
@@ -5741,7 +5741,7 @@
           <p:cNvPr id="57" name="">
             <a:extLst xmlns:a="http://schemas.openxmlformats.org/drawingml/2006/main">
               <a:ext uri="{FF2B5EF4-FFF2-40B4-BE49-F238E27FC236}">
-                <a16:creationId xmlns:a16="http://schemas.microsoft.com/office/drawing/2014/main" id="{76E3AC1B-BA93-4568-A7C5-AA8993BBBCD4}"/>
+                <a16:creationId xmlns:a16="http://schemas.microsoft.com/office/drawing/2014/main" id="{F3D903B6-3CE4-4AF7-897B-266953F0A559}"/>
               </a:ext>
             </a:extLst>
           </p:cNvPr>
@@ -5772,7 +5772,7 @@
           <p:cNvPr id="58" name="">
             <a:extLst xmlns:a="http://schemas.openxmlformats.org/drawingml/2006/main">
               <a:ext uri="{FF2B5EF4-FFF2-40B4-BE49-F238E27FC236}">
-                <a16:creationId xmlns:a16="http://schemas.microsoft.com/office/drawing/2014/main" id="{D36A8546-0E6D-406C-AD66-53C28CD0E980}"/>
+                <a16:creationId xmlns:a16="http://schemas.microsoft.com/office/drawing/2014/main" id="{AD51431A-ABAF-44AA-A72F-3961F13AD0E1}"/>
               </a:ext>
             </a:extLst>
           </p:cNvPr>
@@ -5803,7 +5803,7 @@
           <p:cNvPr id="59" name="">
             <a:extLst xmlns:a="http://schemas.openxmlformats.org/drawingml/2006/main">
               <a:ext uri="{FF2B5EF4-FFF2-40B4-BE49-F238E27FC236}">
-                <a16:creationId xmlns:a16="http://schemas.microsoft.com/office/drawing/2014/main" id="{4B56EDA5-DE2D-4062-B181-31ED17F99A80}"/>
+                <a16:creationId xmlns:a16="http://schemas.microsoft.com/office/drawing/2014/main" id="{38A04683-B044-4410-A778-B09055D243A7}"/>
               </a:ext>
             </a:extLst>
           </p:cNvPr>
@@ -5855,7 +5855,7 @@
           <p:cNvPr id="60" name="">
             <a:extLst xmlns:a="http://schemas.openxmlformats.org/drawingml/2006/main">
               <a:ext uri="{FF2B5EF4-FFF2-40B4-BE49-F238E27FC236}">
-                <a16:creationId xmlns:a16="http://schemas.microsoft.com/office/drawing/2014/main" id="{8FEC51CC-623A-4824-9A01-B8713163BE26}"/>
+                <a16:creationId xmlns:a16="http://schemas.microsoft.com/office/drawing/2014/main" id="{B231E7B9-A08D-4063-A356-BAA51574803B}"/>
               </a:ext>
             </a:extLst>
           </p:cNvPr>
@@ -5907,7 +5907,7 @@
           <p:cNvPr id="61" name="">
             <a:extLst xmlns:a="http://schemas.openxmlformats.org/drawingml/2006/main">
               <a:ext uri="{FF2B5EF4-FFF2-40B4-BE49-F238E27FC236}">
-                <a16:creationId xmlns:a16="http://schemas.microsoft.com/office/drawing/2014/main" id="{9CD34F2A-DA3A-465F-B31F-197E943B61D1}"/>
+                <a16:creationId xmlns:a16="http://schemas.microsoft.com/office/drawing/2014/main" id="{E8A52B26-A66B-482C-ACDA-2A8E4EC22C8A}"/>
               </a:ext>
             </a:extLst>
           </p:cNvPr>
@@ -5959,7 +5959,7 @@
           <p:cNvPr id="62" name="">
             <a:extLst xmlns:a="http://schemas.openxmlformats.org/drawingml/2006/main">
               <a:ext uri="{FF2B5EF4-FFF2-40B4-BE49-F238E27FC236}">
-                <a16:creationId xmlns:a16="http://schemas.microsoft.com/office/drawing/2014/main" id="{F56B6BFF-A85E-4CB0-9F36-CE0B6121FBA5}"/>
+                <a16:creationId xmlns:a16="http://schemas.microsoft.com/office/drawing/2014/main" id="{003E0735-8DBE-46CF-BA40-91EA32E1AEEF}"/>
               </a:ext>
             </a:extLst>
           </p:cNvPr>
@@ -6011,7 +6011,7 @@
           <p:cNvPr id="63" name="">
             <a:extLst xmlns:a="http://schemas.openxmlformats.org/drawingml/2006/main">
               <a:ext uri="{FF2B5EF4-FFF2-40B4-BE49-F238E27FC236}">
-                <a16:creationId xmlns:a16="http://schemas.microsoft.com/office/drawing/2014/main" id="{5248FFE8-86E2-4D51-93B6-58D93D689346}"/>
+                <a16:creationId xmlns:a16="http://schemas.microsoft.com/office/drawing/2014/main" id="{784EB9C4-4E8A-4571-9474-59434B87A861}"/>
               </a:ext>
             </a:extLst>
           </p:cNvPr>
@@ -6063,7 +6063,7 @@
           <p:cNvPr id="64" name="">
             <a:extLst xmlns:a="http://schemas.openxmlformats.org/drawingml/2006/main">
               <a:ext uri="{FF2B5EF4-FFF2-40B4-BE49-F238E27FC236}">
-                <a16:creationId xmlns:a16="http://schemas.microsoft.com/office/drawing/2014/main" id="{35803460-6D01-40AF-972D-BBDD94A4AC33}"/>
+                <a16:creationId xmlns:a16="http://schemas.microsoft.com/office/drawing/2014/main" id="{37A4D8F3-3334-45F3-AE50-F2D8B2C1D0C7}"/>
               </a:ext>
             </a:extLst>
           </p:cNvPr>
@@ -6094,7 +6094,7 @@
           <p:cNvPr id="65" name="">
             <a:extLst xmlns:a="http://schemas.openxmlformats.org/drawingml/2006/main">
               <a:ext uri="{FF2B5EF4-FFF2-40B4-BE49-F238E27FC236}">
-                <a16:creationId xmlns:a16="http://schemas.microsoft.com/office/drawing/2014/main" id="{7440E5A5-26E4-47CE-B01B-D598A97058CF}"/>
+                <a16:creationId xmlns:a16="http://schemas.microsoft.com/office/drawing/2014/main" id="{C7F8B6DC-D0DF-432E-94B7-DE4D9E0AFEB3}"/>
               </a:ext>
             </a:extLst>
           </p:cNvPr>
@@ -6146,7 +6146,7 @@
           <p:cNvPr id="66" name="">
             <a:extLst xmlns:a="http://schemas.openxmlformats.org/drawingml/2006/main">
               <a:ext uri="{FF2B5EF4-FFF2-40B4-BE49-F238E27FC236}">
-                <a16:creationId xmlns:a16="http://schemas.microsoft.com/office/drawing/2014/main" id="{8F9E106A-04E9-4683-90C9-6F02E951BC6C}"/>
+                <a16:creationId xmlns:a16="http://schemas.microsoft.com/office/drawing/2014/main" id="{0B02E814-55BA-48AB-AEEC-E6A89932A61F}"/>
               </a:ext>
             </a:extLst>
           </p:cNvPr>
@@ -6198,7 +6198,7 @@
           <p:cNvPr id="67" name="">
             <a:extLst xmlns:a="http://schemas.openxmlformats.org/drawingml/2006/main">
               <a:ext uri="{FF2B5EF4-FFF2-40B4-BE49-F238E27FC236}">
-                <a16:creationId xmlns:a16="http://schemas.microsoft.com/office/drawing/2014/main" id="{3020C042-CA57-4B60-B1DC-B94DA2AF9115}"/>
+                <a16:creationId xmlns:a16="http://schemas.microsoft.com/office/drawing/2014/main" id="{DCD33C64-4C86-4DD6-B208-5F81405F71EC}"/>
               </a:ext>
             </a:extLst>
           </p:cNvPr>
@@ -6250,7 +6250,7 @@
           <p:cNvPr id="68" name="">
             <a:extLst xmlns:a="http://schemas.openxmlformats.org/drawingml/2006/main">
               <a:ext uri="{FF2B5EF4-FFF2-40B4-BE49-F238E27FC236}">
-                <a16:creationId xmlns:a16="http://schemas.microsoft.com/office/drawing/2014/main" id="{E4CAA46E-0512-4EA2-A4D2-CCE7916D5AC9}"/>
+                <a16:creationId xmlns:a16="http://schemas.microsoft.com/office/drawing/2014/main" id="{0AB79AA3-68AD-49D5-AC44-112FA53FE68F}"/>
               </a:ext>
             </a:extLst>
           </p:cNvPr>
@@ -6302,7 +6302,7 @@
           <p:cNvPr id="69" name="">
             <a:extLst xmlns:a="http://schemas.openxmlformats.org/drawingml/2006/main">
               <a:ext uri="{FF2B5EF4-FFF2-40B4-BE49-F238E27FC236}">
-                <a16:creationId xmlns:a16="http://schemas.microsoft.com/office/drawing/2014/main" id="{54877D70-C784-4078-9696-EE53343B3D3C}"/>
+                <a16:creationId xmlns:a16="http://schemas.microsoft.com/office/drawing/2014/main" id="{4E0B6995-F227-46C3-89E7-E018EC2848D5}"/>
               </a:ext>
             </a:extLst>
           </p:cNvPr>
@@ -6354,7 +6354,7 @@
           <p:cNvPr id="70" name="">
             <a:extLst xmlns:a="http://schemas.openxmlformats.org/drawingml/2006/main">
               <a:ext uri="{FF2B5EF4-FFF2-40B4-BE49-F238E27FC236}">
-                <a16:creationId xmlns:a16="http://schemas.microsoft.com/office/drawing/2014/main" id="{F17A06AA-9180-4AA6-9F74-0BE06A17AB34}"/>
+                <a16:creationId xmlns:a16="http://schemas.microsoft.com/office/drawing/2014/main" id="{52E78A4B-2A43-4FBA-936D-B98FC6DA46A1}"/>
               </a:ext>
             </a:extLst>
           </p:cNvPr>
@@ -6385,7 +6385,7 @@
           <p:cNvPr id="71" name="">
             <a:extLst xmlns:a="http://schemas.openxmlformats.org/drawingml/2006/main">
               <a:ext uri="{FF2B5EF4-FFF2-40B4-BE49-F238E27FC236}">
-                <a16:creationId xmlns:a16="http://schemas.microsoft.com/office/drawing/2014/main" id="{2F62A61F-0980-4E18-8409-626FD2F4A8B9}"/>
+                <a16:creationId xmlns:a16="http://schemas.microsoft.com/office/drawing/2014/main" id="{02D40EB0-E961-4662-93E1-01BAACF8C68B}"/>
               </a:ext>
             </a:extLst>
           </p:cNvPr>
@@ -6416,7 +6416,7 @@
           <p:cNvPr id="72" name="">
             <a:extLst xmlns:a="http://schemas.openxmlformats.org/drawingml/2006/main">
               <a:ext uri="{FF2B5EF4-FFF2-40B4-BE49-F238E27FC236}">
-                <a16:creationId xmlns:a16="http://schemas.microsoft.com/office/drawing/2014/main" id="{1E860814-9872-4FC0-8C58-580D8A864B24}"/>
+                <a16:creationId xmlns:a16="http://schemas.microsoft.com/office/drawing/2014/main" id="{CFC7CDE6-D063-4DFF-AC8E-7EEB25B81FA5}"/>
               </a:ext>
             </a:extLst>
           </p:cNvPr>
@@ -6468,7 +6468,7 @@
           <p:cNvPr id="73" name="">
             <a:extLst xmlns:a="http://schemas.openxmlformats.org/drawingml/2006/main">
               <a:ext uri="{FF2B5EF4-FFF2-40B4-BE49-F238E27FC236}">
-                <a16:creationId xmlns:a16="http://schemas.microsoft.com/office/drawing/2014/main" id="{290AB193-DAB3-4ED5-B998-2F701444B1F2}"/>
+                <a16:creationId xmlns:a16="http://schemas.microsoft.com/office/drawing/2014/main" id="{1299FD89-6800-4D26-9F60-92B250D88D83}"/>
               </a:ext>
             </a:extLst>
           </p:cNvPr>
@@ -6520,7 +6520,7 @@
           <p:cNvPr id="74" name="">
             <a:extLst xmlns:a="http://schemas.openxmlformats.org/drawingml/2006/main">
               <a:ext uri="{FF2B5EF4-FFF2-40B4-BE49-F238E27FC236}">
-                <a16:creationId xmlns:a16="http://schemas.microsoft.com/office/drawing/2014/main" id="{4F7F2A2C-760C-48CE-9E2E-96F87872E987}"/>
+                <a16:creationId xmlns:a16="http://schemas.microsoft.com/office/drawing/2014/main" id="{DFCBC7B3-2824-41C4-9EDD-58ADAB6B6E4F}"/>
               </a:ext>
             </a:extLst>
           </p:cNvPr>
@@ -6572,7 +6572,7 @@
           <p:cNvPr id="75" name="">
             <a:extLst xmlns:a="http://schemas.openxmlformats.org/drawingml/2006/main">
               <a:ext uri="{FF2B5EF4-FFF2-40B4-BE49-F238E27FC236}">
-                <a16:creationId xmlns:a16="http://schemas.microsoft.com/office/drawing/2014/main" id="{794FD9BE-E149-41AD-93AB-444916D14F68}"/>
+                <a16:creationId xmlns:a16="http://schemas.microsoft.com/office/drawing/2014/main" id="{DB9785EA-3BD0-46C8-B101-9A6B5C192939}"/>
               </a:ext>
             </a:extLst>
           </p:cNvPr>
@@ -6624,7 +6624,7 @@
           <p:cNvPr id="76" name="">
             <a:extLst xmlns:a="http://schemas.openxmlformats.org/drawingml/2006/main">
               <a:ext uri="{FF2B5EF4-FFF2-40B4-BE49-F238E27FC236}">
-                <a16:creationId xmlns:a16="http://schemas.microsoft.com/office/drawing/2014/main" id="{3ACBBBAF-0840-4CD7-A2FB-3BB387EFC026}"/>
+                <a16:creationId xmlns:a16="http://schemas.microsoft.com/office/drawing/2014/main" id="{28CEB741-07FF-41B4-AF9C-912258E0FB1C}"/>
               </a:ext>
             </a:extLst>
           </p:cNvPr>
@@ -6676,7 +6676,7 @@
           <p:cNvPr id="77" name="">
             <a:extLst xmlns:a="http://schemas.openxmlformats.org/drawingml/2006/main">
               <a:ext uri="{FF2B5EF4-FFF2-40B4-BE49-F238E27FC236}">
-                <a16:creationId xmlns:a16="http://schemas.microsoft.com/office/drawing/2014/main" id="{39C7600A-58FF-4746-93F3-6CE992B3ACA8}"/>
+                <a16:creationId xmlns:a16="http://schemas.microsoft.com/office/drawing/2014/main" id="{2F61631C-CE6D-4051-A82B-EB6E7D832969}"/>
               </a:ext>
             </a:extLst>
           </p:cNvPr>
@@ -6707,7 +6707,7 @@
           <p:cNvPr id="78" name="">
             <a:extLst xmlns:a="http://schemas.openxmlformats.org/drawingml/2006/main">
               <a:ext uri="{FF2B5EF4-FFF2-40B4-BE49-F238E27FC236}">
-                <a16:creationId xmlns:a16="http://schemas.microsoft.com/office/drawing/2014/main" id="{64737E2D-1E2D-43AB-8EB2-11FCB7DB3942}"/>
+                <a16:creationId xmlns:a16="http://schemas.microsoft.com/office/drawing/2014/main" id="{FCF4822A-BE1A-44B6-A456-CDA64DD2993D}"/>
               </a:ext>
             </a:extLst>
           </p:cNvPr>
@@ -6759,7 +6759,7 @@
           <p:cNvPr id="79" name="">
             <a:extLst xmlns:a="http://schemas.openxmlformats.org/drawingml/2006/main">
               <a:ext uri="{FF2B5EF4-FFF2-40B4-BE49-F238E27FC236}">
-                <a16:creationId xmlns:a16="http://schemas.microsoft.com/office/drawing/2014/main" id="{096C155D-90AD-468C-8BC2-CFA989CE99A4}"/>
+                <a16:creationId xmlns:a16="http://schemas.microsoft.com/office/drawing/2014/main" id="{78E6CB0E-E993-4811-8961-A4658BE40882}"/>
               </a:ext>
             </a:extLst>
           </p:cNvPr>
@@ -6811,7 +6811,7 @@
           <p:cNvPr id="80" name="">
             <a:extLst xmlns:a="http://schemas.openxmlformats.org/drawingml/2006/main">
               <a:ext uri="{FF2B5EF4-FFF2-40B4-BE49-F238E27FC236}">
-                <a16:creationId xmlns:a16="http://schemas.microsoft.com/office/drawing/2014/main" id="{1047C9D2-789A-48F6-8579-A2C4BF9C07A7}"/>
+                <a16:creationId xmlns:a16="http://schemas.microsoft.com/office/drawing/2014/main" id="{243C6B96-C4C7-4673-97C2-A511938AFC2E}"/>
               </a:ext>
             </a:extLst>
           </p:cNvPr>
@@ -6863,7 +6863,7 @@
           <p:cNvPr id="81" name="">
             <a:extLst xmlns:a="http://schemas.openxmlformats.org/drawingml/2006/main">
               <a:ext uri="{FF2B5EF4-FFF2-40B4-BE49-F238E27FC236}">
-                <a16:creationId xmlns:a16="http://schemas.microsoft.com/office/drawing/2014/main" id="{D9524D59-C563-4962-A5AE-458E2DF8A98B}"/>
+                <a16:creationId xmlns:a16="http://schemas.microsoft.com/office/drawing/2014/main" id="{C9FF363A-59FA-4741-852D-C89392E16AF2}"/>
               </a:ext>
             </a:extLst>
           </p:cNvPr>
@@ -6915,7 +6915,7 @@
           <p:cNvPr id="82" name="">
             <a:extLst xmlns:a="http://schemas.openxmlformats.org/drawingml/2006/main">
               <a:ext uri="{FF2B5EF4-FFF2-40B4-BE49-F238E27FC236}">
-                <a16:creationId xmlns:a16="http://schemas.microsoft.com/office/drawing/2014/main" id="{EC78B769-66DC-4408-A19D-2CC722AFEB27}"/>
+                <a16:creationId xmlns:a16="http://schemas.microsoft.com/office/drawing/2014/main" id="{C8D79B17-3F16-40D0-BD47-3D0F3C2832AF}"/>
               </a:ext>
             </a:extLst>
           </p:cNvPr>
@@ -6967,7 +6967,7 @@
           <p:cNvPr id="83" name="">
             <a:extLst xmlns:a="http://schemas.openxmlformats.org/drawingml/2006/main">
               <a:ext uri="{FF2B5EF4-FFF2-40B4-BE49-F238E27FC236}">
-                <a16:creationId xmlns:a16="http://schemas.microsoft.com/office/drawing/2014/main" id="{5772DAF8-22E9-41AB-B378-B8AC3240C3AD}"/>
+                <a16:creationId xmlns:a16="http://schemas.microsoft.com/office/drawing/2014/main" id="{C73062C0-2BAB-4CEB-BFBB-0E477985609E}"/>
               </a:ext>
             </a:extLst>
           </p:cNvPr>
@@ -6998,7 +6998,7 @@
           <p:cNvPr id="84" name="">
             <a:extLst xmlns:a="http://schemas.openxmlformats.org/drawingml/2006/main">
               <a:ext uri="{FF2B5EF4-FFF2-40B4-BE49-F238E27FC236}">
-                <a16:creationId xmlns:a16="http://schemas.microsoft.com/office/drawing/2014/main" id="{80518E83-B283-42FF-97F2-B04F070D4F92}"/>
+                <a16:creationId xmlns:a16="http://schemas.microsoft.com/office/drawing/2014/main" id="{CE212F61-CC12-4E55-8839-F86477761679}"/>
               </a:ext>
             </a:extLst>
           </p:cNvPr>
@@ -7029,7 +7029,7 @@
           <p:cNvPr id="85" name="">
             <a:extLst xmlns:a="http://schemas.openxmlformats.org/drawingml/2006/main">
               <a:ext uri="{FF2B5EF4-FFF2-40B4-BE49-F238E27FC236}">
-                <a16:creationId xmlns:a16="http://schemas.microsoft.com/office/drawing/2014/main" id="{6E504028-42F6-42A6-ACEF-132A1A17471C}"/>
+                <a16:creationId xmlns:a16="http://schemas.microsoft.com/office/drawing/2014/main" id="{884054D3-A96B-4722-A723-B655A4752323}"/>
               </a:ext>
             </a:extLst>
           </p:cNvPr>
@@ -7081,7 +7081,7 @@
           <p:cNvPr id="86" name="">
             <a:extLst xmlns:a="http://schemas.openxmlformats.org/drawingml/2006/main">
               <a:ext uri="{FF2B5EF4-FFF2-40B4-BE49-F238E27FC236}">
-                <a16:creationId xmlns:a16="http://schemas.microsoft.com/office/drawing/2014/main" id="{74482DDE-0968-456C-BF2A-167BFC563656}"/>
+                <a16:creationId xmlns:a16="http://schemas.microsoft.com/office/drawing/2014/main" id="{979EABA2-72E5-4880-8131-1B95B9FC8D2C}"/>
               </a:ext>
             </a:extLst>
           </p:cNvPr>
@@ -7133,7 +7133,7 @@
           <p:cNvPr id="87" name="">
             <a:extLst xmlns:a="http://schemas.openxmlformats.org/drawingml/2006/main">
               <a:ext uri="{FF2B5EF4-FFF2-40B4-BE49-F238E27FC236}">
-                <a16:creationId xmlns:a16="http://schemas.microsoft.com/office/drawing/2014/main" id="{1DC7FB9B-98A6-4CB9-827A-69F38B4CDEB3}"/>
+                <a16:creationId xmlns:a16="http://schemas.microsoft.com/office/drawing/2014/main" id="{B0DEB35F-C9D0-419A-A75F-037EEFC7CE1D}"/>
               </a:ext>
             </a:extLst>
           </p:cNvPr>
@@ -7185,7 +7185,7 @@
           <p:cNvPr id="88" name="">
             <a:extLst xmlns:a="http://schemas.openxmlformats.org/drawingml/2006/main">
               <a:ext uri="{FF2B5EF4-FFF2-40B4-BE49-F238E27FC236}">
-                <a16:creationId xmlns:a16="http://schemas.microsoft.com/office/drawing/2014/main" id="{D3A63797-FF68-4D6E-83DA-24AFDB923048}"/>
+                <a16:creationId xmlns:a16="http://schemas.microsoft.com/office/drawing/2014/main" id="{AD68D042-D76A-4CE8-BB1B-5BEE5CC0AD62}"/>
               </a:ext>
             </a:extLst>
           </p:cNvPr>
@@ -7237,7 +7237,7 @@
           <p:cNvPr id="89" name="">
             <a:extLst xmlns:a="http://schemas.openxmlformats.org/drawingml/2006/main">
               <a:ext uri="{FF2B5EF4-FFF2-40B4-BE49-F238E27FC236}">
-                <a16:creationId xmlns:a16="http://schemas.microsoft.com/office/drawing/2014/main" id="{3D9CE346-C4E5-4E66-97D7-C7D4DAC642DD}"/>
+                <a16:creationId xmlns:a16="http://schemas.microsoft.com/office/drawing/2014/main" id="{E0C3C1F9-0292-4556-AFE8-6170A3D3D76E}"/>
               </a:ext>
             </a:extLst>
           </p:cNvPr>
@@ -7289,7 +7289,7 @@
           <p:cNvPr id="90" name="">
             <a:extLst xmlns:a="http://schemas.openxmlformats.org/drawingml/2006/main">
               <a:ext uri="{FF2B5EF4-FFF2-40B4-BE49-F238E27FC236}">
-                <a16:creationId xmlns:a16="http://schemas.microsoft.com/office/drawing/2014/main" id="{DCDBCD0C-0308-40F1-9A46-F5DC265978C4}"/>
+                <a16:creationId xmlns:a16="http://schemas.microsoft.com/office/drawing/2014/main" id="{A0E5BB79-74DC-49CF-85EA-5568E0CD4078}"/>
               </a:ext>
             </a:extLst>
           </p:cNvPr>
@@ -7320,7 +7320,7 @@
           <p:cNvPr id="91" name="">
             <a:extLst xmlns:a="http://schemas.openxmlformats.org/drawingml/2006/main">
               <a:ext uri="{FF2B5EF4-FFF2-40B4-BE49-F238E27FC236}">
-                <a16:creationId xmlns:a16="http://schemas.microsoft.com/office/drawing/2014/main" id="{E3929249-2DF8-4D7E-93BA-A1135FABCFE7}"/>
+                <a16:creationId xmlns:a16="http://schemas.microsoft.com/office/drawing/2014/main" id="{F1FE2BEE-348C-467C-ADFD-984CAB371F9B}"/>
               </a:ext>
             </a:extLst>
           </p:cNvPr>
@@ -7372,7 +7372,7 @@
           <p:cNvPr id="92" name="">
             <a:extLst xmlns:a="http://schemas.openxmlformats.org/drawingml/2006/main">
               <a:ext uri="{FF2B5EF4-FFF2-40B4-BE49-F238E27FC236}">
-                <a16:creationId xmlns:a16="http://schemas.microsoft.com/office/drawing/2014/main" id="{B8CD81E1-DE76-433B-925B-B2AF1EEFB9E9}"/>
+                <a16:creationId xmlns:a16="http://schemas.microsoft.com/office/drawing/2014/main" id="{F8B9BD4D-8761-4ABE-95F8-948DE2B34B3C}"/>
               </a:ext>
             </a:extLst>
           </p:cNvPr>
@@ -7424,7 +7424,7 @@
           <p:cNvPr id="93" name="">
             <a:extLst xmlns:a="http://schemas.openxmlformats.org/drawingml/2006/main">
               <a:ext uri="{FF2B5EF4-FFF2-40B4-BE49-F238E27FC236}">
-                <a16:creationId xmlns:a16="http://schemas.microsoft.com/office/drawing/2014/main" id="{90136983-0180-466C-8FCF-E0D71592C44B}"/>
+                <a16:creationId xmlns:a16="http://schemas.microsoft.com/office/drawing/2014/main" id="{FD1B53CD-A4D4-4BA0-ADD0-D91194CE8431}"/>
               </a:ext>
             </a:extLst>
           </p:cNvPr>
@@ -7476,7 +7476,7 @@
           <p:cNvPr id="94" name="">
             <a:extLst xmlns:a="http://schemas.openxmlformats.org/drawingml/2006/main">
               <a:ext uri="{FF2B5EF4-FFF2-40B4-BE49-F238E27FC236}">
-                <a16:creationId xmlns:a16="http://schemas.microsoft.com/office/drawing/2014/main" id="{D694F6FA-6505-44C0-9DFB-A730543D89EF}"/>
+                <a16:creationId xmlns:a16="http://schemas.microsoft.com/office/drawing/2014/main" id="{1FB6BBEA-054F-4714-A75E-F2893D222AB1}"/>
               </a:ext>
             </a:extLst>
           </p:cNvPr>
@@ -7528,7 +7528,7 @@
           <p:cNvPr id="95" name="">
             <a:extLst xmlns:a="http://schemas.openxmlformats.org/drawingml/2006/main">
               <a:ext uri="{FF2B5EF4-FFF2-40B4-BE49-F238E27FC236}">
-                <a16:creationId xmlns:a16="http://schemas.microsoft.com/office/drawing/2014/main" id="{897A4DD7-09A7-430E-AD9B-671C6DB9077A}"/>
+                <a16:creationId xmlns:a16="http://schemas.microsoft.com/office/drawing/2014/main" id="{32C897DE-57F0-4E08-8E6E-CEE5C4FFAF72}"/>
               </a:ext>
             </a:extLst>
           </p:cNvPr>
@@ -7580,7 +7580,7 @@
           <p:cNvPr id="96" name="">
             <a:extLst xmlns:a="http://schemas.openxmlformats.org/drawingml/2006/main">
               <a:ext uri="{FF2B5EF4-FFF2-40B4-BE49-F238E27FC236}">
-                <a16:creationId xmlns:a16="http://schemas.microsoft.com/office/drawing/2014/main" id="{57639BBD-1EED-4A61-84B6-6B78A5055FC8}"/>
+                <a16:creationId xmlns:a16="http://schemas.microsoft.com/office/drawing/2014/main" id="{72E79045-CE49-4D84-B5C8-0BCF6BF47ADE}"/>
               </a:ext>
             </a:extLst>
           </p:cNvPr>
@@ -7611,7 +7611,7 @@
           <p:cNvPr id="97" name="">
             <a:extLst xmlns:a="http://schemas.openxmlformats.org/drawingml/2006/main">
               <a:ext uri="{FF2B5EF4-FFF2-40B4-BE49-F238E27FC236}">
-                <a16:creationId xmlns:a16="http://schemas.microsoft.com/office/drawing/2014/main" id="{995389ED-237A-4EEA-AFA7-9624FC38296C}"/>
+                <a16:creationId xmlns:a16="http://schemas.microsoft.com/office/drawing/2014/main" id="{C36A3049-0B8B-467F-96DF-FA90EBAD37C6}"/>
               </a:ext>
             </a:extLst>
           </p:cNvPr>
@@ -7642,7 +7642,7 @@
           <p:cNvPr id="98" name="">
             <a:extLst xmlns:a="http://schemas.openxmlformats.org/drawingml/2006/main">
               <a:ext uri="{FF2B5EF4-FFF2-40B4-BE49-F238E27FC236}">
-                <a16:creationId xmlns:a16="http://schemas.microsoft.com/office/drawing/2014/main" id="{6B2B2BA5-D4A1-45D3-B5C3-3C56B1BCF5E8}"/>
+                <a16:creationId xmlns:a16="http://schemas.microsoft.com/office/drawing/2014/main" id="{FC177E59-3595-46DE-872D-33A54BC0D3ED}"/>
               </a:ext>
             </a:extLst>
           </p:cNvPr>
@@ -7694,7 +7694,7 @@
           <p:cNvPr id="99" name="">
             <a:extLst xmlns:a="http://schemas.openxmlformats.org/drawingml/2006/main">
               <a:ext uri="{FF2B5EF4-FFF2-40B4-BE49-F238E27FC236}">
-                <a16:creationId xmlns:a16="http://schemas.microsoft.com/office/drawing/2014/main" id="{63ECF941-7BF1-4333-A973-693824C4EEF3}"/>
+                <a16:creationId xmlns:a16="http://schemas.microsoft.com/office/drawing/2014/main" id="{7D0F0E61-AC22-46DE-811D-FC1143536619}"/>
               </a:ext>
             </a:extLst>
           </p:cNvPr>
@@ -7746,7 +7746,7 @@
           <p:cNvPr id="100" name="">
             <a:extLst xmlns:a="http://schemas.openxmlformats.org/drawingml/2006/main">
               <a:ext uri="{FF2B5EF4-FFF2-40B4-BE49-F238E27FC236}">
-                <a16:creationId xmlns:a16="http://schemas.microsoft.com/office/drawing/2014/main" id="{41861444-5F5E-4467-80AD-8520D1BCA6A2}"/>
+                <a16:creationId xmlns:a16="http://schemas.microsoft.com/office/drawing/2014/main" id="{908CBBFB-AAB1-4863-9EE6-8A514C29C336}"/>
               </a:ext>
             </a:extLst>
           </p:cNvPr>
@@ -7798,7 +7798,7 @@
           <p:cNvPr id="101" name="">
             <a:extLst xmlns:a="http://schemas.openxmlformats.org/drawingml/2006/main">
               <a:ext uri="{FF2B5EF4-FFF2-40B4-BE49-F238E27FC236}">
-                <a16:creationId xmlns:a16="http://schemas.microsoft.com/office/drawing/2014/main" id="{44018CDC-C7F8-41C8-8FD5-6240E0F81A12}"/>
+                <a16:creationId xmlns:a16="http://schemas.microsoft.com/office/drawing/2014/main" id="{AB41C6C1-5E66-4FCA-9CD5-965B628C7F74}"/>
               </a:ext>
             </a:extLst>
           </p:cNvPr>
@@ -7850,7 +7850,7 @@
           <p:cNvPr id="102" name="">
             <a:extLst xmlns:a="http://schemas.openxmlformats.org/drawingml/2006/main">
               <a:ext uri="{FF2B5EF4-FFF2-40B4-BE49-F238E27FC236}">
-                <a16:creationId xmlns:a16="http://schemas.microsoft.com/office/drawing/2014/main" id="{20265BA2-FA30-4489-8361-5707938CB598}"/>
+                <a16:creationId xmlns:a16="http://schemas.microsoft.com/office/drawing/2014/main" id="{8735DEA0-7B28-4EC3-A955-F729EA0279EC}"/>
               </a:ext>
             </a:extLst>
           </p:cNvPr>
@@ -7900,7 +7900,7 @@
     </p:spTree>
     <p:extLst>
       <p:ext uri="{BB962C8B-B14F-4D97-AF65-F5344CB8AC3E}">
-        <p14:creationId xmlns:p14="http://schemas.microsoft.com/office/powerpoint/2010/main" val="2100285164"/>
+        <p14:creationId xmlns:p14="http://schemas.microsoft.com/office/powerpoint/2010/main" val="856229505"/>
       </p:ext>
     </p:extLst>
   </p:cSld>
@@ -7931,7 +7931,7 @@
           <p:cNvPr id="98" name="">
             <a:extLst xmlns:a="http://schemas.openxmlformats.org/drawingml/2006/main">
               <a:ext uri="{FF2B5EF4-FFF2-40B4-BE49-F238E27FC236}">
-                <a16:creationId xmlns:a16="http://schemas.microsoft.com/office/drawing/2014/main" id="{B403000B-1837-4F4D-BEE3-EFC7B70DF93A}"/>
+                <a16:creationId xmlns:a16="http://schemas.microsoft.com/office/drawing/2014/main" id="{602B43C1-F6DF-49CB-9B93-D321C3857490}"/>
               </a:ext>
             </a:extLst>
           </p:cNvPr>
@@ -7964,7 +7964,7 @@
           <p:cNvPr id="2" name="">
             <a:extLst xmlns:a="http://schemas.openxmlformats.org/drawingml/2006/main">
               <a:ext uri="{FF2B5EF4-FFF2-40B4-BE49-F238E27FC236}">
-                <a16:creationId xmlns:a16="http://schemas.microsoft.com/office/drawing/2014/main" id="{8CF081E1-9710-4F8E-B2DE-0ED14B729453}"/>
+                <a16:creationId xmlns:a16="http://schemas.microsoft.com/office/drawing/2014/main" id="{80B82238-0A76-45E8-8F72-2DC660309786}"/>
               </a:ext>
             </a:extLst>
           </p:cNvPr>
@@ -7995,7 +7995,7 @@
           <p:cNvPr id="3" name="">
             <a:extLst xmlns:a="http://schemas.openxmlformats.org/drawingml/2006/main">
               <a:ext uri="{FF2B5EF4-FFF2-40B4-BE49-F238E27FC236}">
-                <a16:creationId xmlns:a16="http://schemas.microsoft.com/office/drawing/2014/main" id="{2C4F80F5-B2F5-4C50-9754-C5DF1FC149DC}"/>
+                <a16:creationId xmlns:a16="http://schemas.microsoft.com/office/drawing/2014/main" id="{74221E52-8657-4853-B999-ADD679418920}"/>
               </a:ext>
             </a:extLst>
           </p:cNvPr>
@@ -8047,7 +8047,7 @@
           <p:cNvPr id="4" name="">
             <a:extLst xmlns:a="http://schemas.openxmlformats.org/drawingml/2006/main">
               <a:ext uri="{FF2B5EF4-FFF2-40B4-BE49-F238E27FC236}">
-                <a16:creationId xmlns:a16="http://schemas.microsoft.com/office/drawing/2014/main" id="{BA3B5035-B24F-4F2C-88AB-72628F34600D}"/>
+                <a16:creationId xmlns:a16="http://schemas.microsoft.com/office/drawing/2014/main" id="{2504557D-AFBD-4F1D-B8E5-806403907C6A}"/>
               </a:ext>
             </a:extLst>
           </p:cNvPr>
@@ -8099,7 +8099,7 @@
           <p:cNvPr id="5" name="">
             <a:extLst xmlns:a="http://schemas.openxmlformats.org/drawingml/2006/main">
               <a:ext uri="{FF2B5EF4-FFF2-40B4-BE49-F238E27FC236}">
-                <a16:creationId xmlns:a16="http://schemas.microsoft.com/office/drawing/2014/main" id="{C5330025-BE1D-4F97-AB6F-D0317B493131}"/>
+                <a16:creationId xmlns:a16="http://schemas.microsoft.com/office/drawing/2014/main" id="{42412DE7-8018-4864-A037-D6E95688F893}"/>
               </a:ext>
             </a:extLst>
           </p:cNvPr>
@@ -8134,7 +8134,7 @@
           <p:nvPr/>
         </p:nvPicPr>
         <p:blipFill>
-          <a:blip xmlns:r="http://schemas.openxmlformats.org/officeDocument/2006/relationships" xmlns:a="http://schemas.openxmlformats.org/drawingml/2006/main" r:embed="Rd807937b21ab4ce4"/>
+          <a:blip xmlns:r="http://schemas.openxmlformats.org/officeDocument/2006/relationships" xmlns:a="http://schemas.openxmlformats.org/drawingml/2006/main" r:embed="Rb50983b3b3f64ba1"/>
           <a:stretch xmlns:a="http://schemas.openxmlformats.org/drawingml/2006/main"/>
         </p:blipFill>
         <p:spPr>
@@ -8152,7 +8152,7 @@
           <p:cNvPr id="7" name="">
             <a:extLst xmlns:a="http://schemas.openxmlformats.org/drawingml/2006/main">
               <a:ext uri="{FF2B5EF4-FFF2-40B4-BE49-F238E27FC236}">
-                <a16:creationId xmlns:a16="http://schemas.microsoft.com/office/drawing/2014/main" id="{BC02FCD9-2EDC-4B59-9477-2C26FD33FD34}"/>
+                <a16:creationId xmlns:a16="http://schemas.microsoft.com/office/drawing/2014/main" id="{77409AD4-1695-4E91-B5D0-27F1D7AA504B}"/>
               </a:ext>
             </a:extLst>
           </p:cNvPr>
@@ -8204,7 +8204,7 @@
           <p:cNvPr id="8" name="">
             <a:extLst xmlns:a="http://schemas.openxmlformats.org/drawingml/2006/main">
               <a:ext uri="{FF2B5EF4-FFF2-40B4-BE49-F238E27FC236}">
-                <a16:creationId xmlns:a16="http://schemas.microsoft.com/office/drawing/2014/main" id="{6128F32A-1264-4DB6-A6CC-5EF6EF767E11}"/>
+                <a16:creationId xmlns:a16="http://schemas.microsoft.com/office/drawing/2014/main" id="{BDCFD356-A3E8-4DA8-964B-9E79C961982A}"/>
               </a:ext>
             </a:extLst>
           </p:cNvPr>
@@ -8256,7 +8256,7 @@
           <p:cNvPr id="9" name="">
             <a:extLst xmlns:a="http://schemas.openxmlformats.org/drawingml/2006/main">
               <a:ext uri="{FF2B5EF4-FFF2-40B4-BE49-F238E27FC236}">
-                <a16:creationId xmlns:a16="http://schemas.microsoft.com/office/drawing/2014/main" id="{1082F5B8-E710-42E2-BEDF-857F60210E1D}"/>
+                <a16:creationId xmlns:a16="http://schemas.microsoft.com/office/drawing/2014/main" id="{AA7D74D2-5AF4-4202-8001-C6F3667D5C1D}"/>
               </a:ext>
             </a:extLst>
           </p:cNvPr>
@@ -8308,7 +8308,7 @@
           <p:cNvPr id="10" name="">
             <a:extLst xmlns:a="http://schemas.openxmlformats.org/drawingml/2006/main">
               <a:ext uri="{FF2B5EF4-FFF2-40B4-BE49-F238E27FC236}">
-                <a16:creationId xmlns:a16="http://schemas.microsoft.com/office/drawing/2014/main" id="{6CC57B4D-F205-47CC-AAAA-823E00C41169}"/>
+                <a16:creationId xmlns:a16="http://schemas.microsoft.com/office/drawing/2014/main" id="{91CE3332-8DA9-440F-AE36-10D4C6DE34F9}"/>
               </a:ext>
             </a:extLst>
           </p:cNvPr>
@@ -8360,7 +8360,7 @@
           <p:cNvPr id="11" name="">
             <a:extLst xmlns:a="http://schemas.openxmlformats.org/drawingml/2006/main">
               <a:ext uri="{FF2B5EF4-FFF2-40B4-BE49-F238E27FC236}">
-                <a16:creationId xmlns:a16="http://schemas.microsoft.com/office/drawing/2014/main" id="{B2D38C96-223D-400A-A3D4-B3AAFB241F5F}"/>
+                <a16:creationId xmlns:a16="http://schemas.microsoft.com/office/drawing/2014/main" id="{A9111EC5-3192-4D98-AAF6-A95C237BDA65}"/>
               </a:ext>
             </a:extLst>
           </p:cNvPr>
@@ -8391,7 +8391,7 @@
           <p:cNvPr id="12" name="">
             <a:extLst xmlns:a="http://schemas.openxmlformats.org/drawingml/2006/main">
               <a:ext uri="{FF2B5EF4-FFF2-40B4-BE49-F238E27FC236}">
-                <a16:creationId xmlns:a16="http://schemas.microsoft.com/office/drawing/2014/main" id="{BBD194E8-1801-435E-9245-596E6BC68334}"/>
+                <a16:creationId xmlns:a16="http://schemas.microsoft.com/office/drawing/2014/main" id="{BD0D013B-0ABF-4E67-AB92-8875BBB6E54F}"/>
               </a:ext>
             </a:extLst>
           </p:cNvPr>
@@ -8422,7 +8422,7 @@
           <p:cNvPr id="13" name="">
             <a:extLst xmlns:a="http://schemas.openxmlformats.org/drawingml/2006/main">
               <a:ext uri="{FF2B5EF4-FFF2-40B4-BE49-F238E27FC236}">
-                <a16:creationId xmlns:a16="http://schemas.microsoft.com/office/drawing/2014/main" id="{3800616A-4019-4D23-AEFC-AB18CC9120FE}"/>
+                <a16:creationId xmlns:a16="http://schemas.microsoft.com/office/drawing/2014/main" id="{2368266D-4B32-43AB-B3EC-9B8DBA6378E7}"/>
               </a:ext>
             </a:extLst>
           </p:cNvPr>
@@ -8474,7 +8474,7 @@
           <p:cNvPr id="14" name="">
             <a:extLst xmlns:a="http://schemas.openxmlformats.org/drawingml/2006/main">
               <a:ext uri="{FF2B5EF4-FFF2-40B4-BE49-F238E27FC236}">
-                <a16:creationId xmlns:a16="http://schemas.microsoft.com/office/drawing/2014/main" id="{20478AAC-D21D-48BA-A60C-D39B10980A18}"/>
+                <a16:creationId xmlns:a16="http://schemas.microsoft.com/office/drawing/2014/main" id="{93B7E35A-43E6-47D7-BBAF-CBC2AE8FC40C}"/>
               </a:ext>
             </a:extLst>
           </p:cNvPr>
@@ -8526,7 +8526,7 @@
           <p:cNvPr id="15" name="">
             <a:extLst xmlns:a="http://schemas.openxmlformats.org/drawingml/2006/main">
               <a:ext uri="{FF2B5EF4-FFF2-40B4-BE49-F238E27FC236}">
-                <a16:creationId xmlns:a16="http://schemas.microsoft.com/office/drawing/2014/main" id="{848396DF-199D-4F2E-9A14-D69E735DA801}"/>
+                <a16:creationId xmlns:a16="http://schemas.microsoft.com/office/drawing/2014/main" id="{2A7F0C26-D7F1-455B-9CDF-0B3B2AF7476F}"/>
               </a:ext>
             </a:extLst>
           </p:cNvPr>
@@ -8578,7 +8578,7 @@
           <p:cNvPr id="16" name="">
             <a:extLst xmlns:a="http://schemas.openxmlformats.org/drawingml/2006/main">
               <a:ext uri="{FF2B5EF4-FFF2-40B4-BE49-F238E27FC236}">
-                <a16:creationId xmlns:a16="http://schemas.microsoft.com/office/drawing/2014/main" id="{F0A4759C-F538-42EB-ABDC-89EAB69D666C}"/>
+                <a16:creationId xmlns:a16="http://schemas.microsoft.com/office/drawing/2014/main" id="{D458F457-DCB4-45C2-A90D-567C375925C8}"/>
               </a:ext>
             </a:extLst>
           </p:cNvPr>
@@ -8630,7 +8630,7 @@
           <p:cNvPr id="17" name="">
             <a:extLst xmlns:a="http://schemas.openxmlformats.org/drawingml/2006/main">
               <a:ext uri="{FF2B5EF4-FFF2-40B4-BE49-F238E27FC236}">
-                <a16:creationId xmlns:a16="http://schemas.microsoft.com/office/drawing/2014/main" id="{8E488BCB-4D57-49FB-A6E0-C83F0CFD6B9D}"/>
+                <a16:creationId xmlns:a16="http://schemas.microsoft.com/office/drawing/2014/main" id="{EFC7DAFB-31E8-4371-95D5-52184F7434CE}"/>
               </a:ext>
             </a:extLst>
           </p:cNvPr>
@@ -8682,7 +8682,7 @@
           <p:cNvPr id="18" name="">
             <a:extLst xmlns:a="http://schemas.openxmlformats.org/drawingml/2006/main">
               <a:ext uri="{FF2B5EF4-FFF2-40B4-BE49-F238E27FC236}">
-                <a16:creationId xmlns:a16="http://schemas.microsoft.com/office/drawing/2014/main" id="{2D376A52-1D09-43AC-B90C-8FB80E4A22B2}"/>
+                <a16:creationId xmlns:a16="http://schemas.microsoft.com/office/drawing/2014/main" id="{EE8C623D-9238-4A42-BA97-813E0BC52164}"/>
               </a:ext>
             </a:extLst>
           </p:cNvPr>
@@ -8713,7 +8713,7 @@
           <p:cNvPr id="19" name="">
             <a:extLst xmlns:a="http://schemas.openxmlformats.org/drawingml/2006/main">
               <a:ext uri="{FF2B5EF4-FFF2-40B4-BE49-F238E27FC236}">
-                <a16:creationId xmlns:a16="http://schemas.microsoft.com/office/drawing/2014/main" id="{991936C1-4FBE-4D43-9D70-F4C847AFE5EB}"/>
+                <a16:creationId xmlns:a16="http://schemas.microsoft.com/office/drawing/2014/main" id="{A4086C21-C64B-4F7B-A220-EEE1A11FDD14}"/>
               </a:ext>
             </a:extLst>
           </p:cNvPr>
@@ -8765,7 +8765,7 @@
           <p:cNvPr id="20" name="">
             <a:extLst xmlns:a="http://schemas.openxmlformats.org/drawingml/2006/main">
               <a:ext uri="{FF2B5EF4-FFF2-40B4-BE49-F238E27FC236}">
-                <a16:creationId xmlns:a16="http://schemas.microsoft.com/office/drawing/2014/main" id="{903107A1-8DBE-4741-A52E-6D971D2BF5D6}"/>
+                <a16:creationId xmlns:a16="http://schemas.microsoft.com/office/drawing/2014/main" id="{62C47153-35AD-4F36-A8FB-C98CC5A750A4}"/>
               </a:ext>
             </a:extLst>
           </p:cNvPr>
@@ -8817,7 +8817,7 @@
           <p:cNvPr id="21" name="">
             <a:extLst xmlns:a="http://schemas.openxmlformats.org/drawingml/2006/main">
               <a:ext uri="{FF2B5EF4-FFF2-40B4-BE49-F238E27FC236}">
-                <a16:creationId xmlns:a16="http://schemas.microsoft.com/office/drawing/2014/main" id="{18D761E0-2A48-4D05-A66D-4668AC7BA9E0}"/>
+                <a16:creationId xmlns:a16="http://schemas.microsoft.com/office/drawing/2014/main" id="{0D01050A-93E1-4457-BD72-2DFD52742850}"/>
               </a:ext>
             </a:extLst>
           </p:cNvPr>
@@ -8869,7 +8869,7 @@
           <p:cNvPr id="22" name="">
             <a:extLst xmlns:a="http://schemas.openxmlformats.org/drawingml/2006/main">
               <a:ext uri="{FF2B5EF4-FFF2-40B4-BE49-F238E27FC236}">
-                <a16:creationId xmlns:a16="http://schemas.microsoft.com/office/drawing/2014/main" id="{C132EC21-6318-482E-9D76-AC8499CFDEE1}"/>
+                <a16:creationId xmlns:a16="http://schemas.microsoft.com/office/drawing/2014/main" id="{6EB66969-5870-43F6-9F0E-E9BF9D2EC3AC}"/>
               </a:ext>
             </a:extLst>
           </p:cNvPr>
@@ -8921,7 +8921,7 @@
           <p:cNvPr id="23" name="">
             <a:extLst xmlns:a="http://schemas.openxmlformats.org/drawingml/2006/main">
               <a:ext uri="{FF2B5EF4-FFF2-40B4-BE49-F238E27FC236}">
-                <a16:creationId xmlns:a16="http://schemas.microsoft.com/office/drawing/2014/main" id="{B1B282C4-CB03-480E-9CF2-19ECC3802C30}"/>
+                <a16:creationId xmlns:a16="http://schemas.microsoft.com/office/drawing/2014/main" id="{9E827DD7-3BD7-4A53-AA88-66E3A4B1EE03}"/>
               </a:ext>
             </a:extLst>
           </p:cNvPr>
@@ -8973,7 +8973,7 @@
           <p:cNvPr id="24" name="">
             <a:extLst xmlns:a="http://schemas.openxmlformats.org/drawingml/2006/main">
               <a:ext uri="{FF2B5EF4-FFF2-40B4-BE49-F238E27FC236}">
-                <a16:creationId xmlns:a16="http://schemas.microsoft.com/office/drawing/2014/main" id="{60C9E67C-4D93-4AD9-8FA6-4A6D3B049543}"/>
+                <a16:creationId xmlns:a16="http://schemas.microsoft.com/office/drawing/2014/main" id="{E2092017-780F-40F9-8C97-3091DBCD8C34}"/>
               </a:ext>
             </a:extLst>
           </p:cNvPr>
@@ -9004,7 +9004,7 @@
           <p:cNvPr id="25" name="">
             <a:extLst xmlns:a="http://schemas.openxmlformats.org/drawingml/2006/main">
               <a:ext uri="{FF2B5EF4-FFF2-40B4-BE49-F238E27FC236}">
-                <a16:creationId xmlns:a16="http://schemas.microsoft.com/office/drawing/2014/main" id="{8B22ED4B-9F2C-430A-B4BE-795AF66F35D5}"/>
+                <a16:creationId xmlns:a16="http://schemas.microsoft.com/office/drawing/2014/main" id="{2AD81FCB-B5B0-4D3E-AC99-4878A9BC5D50}"/>
               </a:ext>
             </a:extLst>
           </p:cNvPr>
@@ -9035,7 +9035,7 @@
           <p:cNvPr id="26" name="">
             <a:extLst xmlns:a="http://schemas.openxmlformats.org/drawingml/2006/main">
               <a:ext uri="{FF2B5EF4-FFF2-40B4-BE49-F238E27FC236}">
-                <a16:creationId xmlns:a16="http://schemas.microsoft.com/office/drawing/2014/main" id="{4FB42567-A7F7-4FE5-B34D-6C6FC053DE30}"/>
+                <a16:creationId xmlns:a16="http://schemas.microsoft.com/office/drawing/2014/main" id="{A696BB29-850F-478D-93DE-798854E2DB6A}"/>
               </a:ext>
             </a:extLst>
           </p:cNvPr>
@@ -9087,7 +9087,7 @@
           <p:cNvPr id="27" name="">
             <a:extLst xmlns:a="http://schemas.openxmlformats.org/drawingml/2006/main">
               <a:ext uri="{FF2B5EF4-FFF2-40B4-BE49-F238E27FC236}">
-                <a16:creationId xmlns:a16="http://schemas.microsoft.com/office/drawing/2014/main" id="{A6151D6C-551E-4F71-A978-495876632B45}"/>
+                <a16:creationId xmlns:a16="http://schemas.microsoft.com/office/drawing/2014/main" id="{3443C8F7-6C55-44B8-BFB6-F0197C5D9A41}"/>
               </a:ext>
             </a:extLst>
           </p:cNvPr>
@@ -9139,7 +9139,7 @@
           <p:cNvPr id="28" name="">
             <a:extLst xmlns:a="http://schemas.openxmlformats.org/drawingml/2006/main">
               <a:ext uri="{FF2B5EF4-FFF2-40B4-BE49-F238E27FC236}">
-                <a16:creationId xmlns:a16="http://schemas.microsoft.com/office/drawing/2014/main" id="{02CCA0E0-6E58-4B6A-BFFC-54F8370DAC38}"/>
+                <a16:creationId xmlns:a16="http://schemas.microsoft.com/office/drawing/2014/main" id="{A0E12C6B-06A5-4E4E-B1A0-BA3D5C8E83F7}"/>
               </a:ext>
             </a:extLst>
           </p:cNvPr>
@@ -9191,7 +9191,7 @@
           <p:cNvPr id="29" name="">
             <a:extLst xmlns:a="http://schemas.openxmlformats.org/drawingml/2006/main">
               <a:ext uri="{FF2B5EF4-FFF2-40B4-BE49-F238E27FC236}">
-                <a16:creationId xmlns:a16="http://schemas.microsoft.com/office/drawing/2014/main" id="{973E5994-4B32-4627-9883-641F58BB364B}"/>
+                <a16:creationId xmlns:a16="http://schemas.microsoft.com/office/drawing/2014/main" id="{C98B07D7-90E0-438F-88AD-210697DE9E7B}"/>
               </a:ext>
             </a:extLst>
           </p:cNvPr>
@@ -9243,7 +9243,7 @@
           <p:cNvPr id="30" name="">
             <a:extLst xmlns:a="http://schemas.openxmlformats.org/drawingml/2006/main">
               <a:ext uri="{FF2B5EF4-FFF2-40B4-BE49-F238E27FC236}">
-                <a16:creationId xmlns:a16="http://schemas.microsoft.com/office/drawing/2014/main" id="{D30AC29B-9D78-452E-8F22-B26AC20D0A10}"/>
+                <a16:creationId xmlns:a16="http://schemas.microsoft.com/office/drawing/2014/main" id="{F335035C-F03E-4D60-B8E0-5AFABFEA6683}"/>
               </a:ext>
             </a:extLst>
           </p:cNvPr>
@@ -9295,7 +9295,7 @@
           <p:cNvPr id="31" name="">
             <a:extLst xmlns:a="http://schemas.openxmlformats.org/drawingml/2006/main">
               <a:ext uri="{FF2B5EF4-FFF2-40B4-BE49-F238E27FC236}">
-                <a16:creationId xmlns:a16="http://schemas.microsoft.com/office/drawing/2014/main" id="{FB14B9C5-12E8-4594-B729-E1AEF454BB08}"/>
+                <a16:creationId xmlns:a16="http://schemas.microsoft.com/office/drawing/2014/main" id="{21D3BDE6-625C-4D25-8A70-DA26D7E5F81B}"/>
               </a:ext>
             </a:extLst>
           </p:cNvPr>
@@ -9326,7 +9326,7 @@
           <p:cNvPr id="32" name="">
             <a:extLst xmlns:a="http://schemas.openxmlformats.org/drawingml/2006/main">
               <a:ext uri="{FF2B5EF4-FFF2-40B4-BE49-F238E27FC236}">
-                <a16:creationId xmlns:a16="http://schemas.microsoft.com/office/drawing/2014/main" id="{4872F396-9616-4DBC-A1C9-A351B22D684A}"/>
+                <a16:creationId xmlns:a16="http://schemas.microsoft.com/office/drawing/2014/main" id="{4FAB022B-4968-4517-81E8-7D8D5E4ED81D}"/>
               </a:ext>
             </a:extLst>
           </p:cNvPr>
@@ -9378,7 +9378,7 @@
           <p:cNvPr id="33" name="">
             <a:extLst xmlns:a="http://schemas.openxmlformats.org/drawingml/2006/main">
               <a:ext uri="{FF2B5EF4-FFF2-40B4-BE49-F238E27FC236}">
-                <a16:creationId xmlns:a16="http://schemas.microsoft.com/office/drawing/2014/main" id="{A56FB934-3608-402A-9B04-674FA9C42187}"/>
+                <a16:creationId xmlns:a16="http://schemas.microsoft.com/office/drawing/2014/main" id="{2AA23D92-00AA-496D-B914-931D46153501}"/>
               </a:ext>
             </a:extLst>
           </p:cNvPr>
@@ -9430,7 +9430,7 @@
           <p:cNvPr id="34" name="">
             <a:extLst xmlns:a="http://schemas.openxmlformats.org/drawingml/2006/main">
               <a:ext uri="{FF2B5EF4-FFF2-40B4-BE49-F238E27FC236}">
-                <a16:creationId xmlns:a16="http://schemas.microsoft.com/office/drawing/2014/main" id="{CF7043BF-E4B5-409C-A03E-5DAD7DEBAF8A}"/>
+                <a16:creationId xmlns:a16="http://schemas.microsoft.com/office/drawing/2014/main" id="{2A753FAB-ED00-4893-8CE3-5BF3DD67D62D}"/>
               </a:ext>
             </a:extLst>
           </p:cNvPr>
@@ -9482,7 +9482,7 @@
           <p:cNvPr id="35" name="">
             <a:extLst xmlns:a="http://schemas.openxmlformats.org/drawingml/2006/main">
               <a:ext uri="{FF2B5EF4-FFF2-40B4-BE49-F238E27FC236}">
-                <a16:creationId xmlns:a16="http://schemas.microsoft.com/office/drawing/2014/main" id="{1F1DEF9F-7937-48C1-AD9E-D98CBDE5CAB0}"/>
+                <a16:creationId xmlns:a16="http://schemas.microsoft.com/office/drawing/2014/main" id="{2BCF676A-FBCF-4B79-A83F-96A255B59DF1}"/>
               </a:ext>
             </a:extLst>
           </p:cNvPr>
@@ -9534,7 +9534,7 @@
           <p:cNvPr id="36" name="">
             <a:extLst xmlns:a="http://schemas.openxmlformats.org/drawingml/2006/main">
               <a:ext uri="{FF2B5EF4-FFF2-40B4-BE49-F238E27FC236}">
-                <a16:creationId xmlns:a16="http://schemas.microsoft.com/office/drawing/2014/main" id="{CD882E9C-A846-4058-BA51-CFBB6E51EBFB}"/>
+                <a16:creationId xmlns:a16="http://schemas.microsoft.com/office/drawing/2014/main" id="{33F624DD-EF1E-44E3-B573-68C44B7EB169}"/>
               </a:ext>
             </a:extLst>
           </p:cNvPr>
@@ -9586,7 +9586,7 @@
           <p:cNvPr id="37" name="">
             <a:extLst xmlns:a="http://schemas.openxmlformats.org/drawingml/2006/main">
               <a:ext uri="{FF2B5EF4-FFF2-40B4-BE49-F238E27FC236}">
-                <a16:creationId xmlns:a16="http://schemas.microsoft.com/office/drawing/2014/main" id="{AC87EFD8-32A2-4538-A631-E92FF2B180A4}"/>
+                <a16:creationId xmlns:a16="http://schemas.microsoft.com/office/drawing/2014/main" id="{2A19034C-4BDA-451A-87E8-98548362F331}"/>
               </a:ext>
             </a:extLst>
           </p:cNvPr>
@@ -9617,7 +9617,7 @@
           <p:cNvPr id="38" name="">
             <a:extLst xmlns:a="http://schemas.openxmlformats.org/drawingml/2006/main">
               <a:ext uri="{FF2B5EF4-FFF2-40B4-BE49-F238E27FC236}">
-                <a16:creationId xmlns:a16="http://schemas.microsoft.com/office/drawing/2014/main" id="{9758A1B2-CF35-44A4-A1A6-AFC3FA84FF9F}"/>
+                <a16:creationId xmlns:a16="http://schemas.microsoft.com/office/drawing/2014/main" id="{DA8D06F8-A366-4642-9811-AF1A38A2ED5D}"/>
               </a:ext>
             </a:extLst>
           </p:cNvPr>
@@ -9648,7 +9648,7 @@
           <p:cNvPr id="39" name="">
             <a:extLst xmlns:a="http://schemas.openxmlformats.org/drawingml/2006/main">
               <a:ext uri="{FF2B5EF4-FFF2-40B4-BE49-F238E27FC236}">
-                <a16:creationId xmlns:a16="http://schemas.microsoft.com/office/drawing/2014/main" id="{435FB96F-2CB3-4B78-8229-62CDB658F40C}"/>
+                <a16:creationId xmlns:a16="http://schemas.microsoft.com/office/drawing/2014/main" id="{A3BDD279-112A-4212-88AF-CF244CFF3B8E}"/>
               </a:ext>
             </a:extLst>
           </p:cNvPr>
@@ -9700,7 +9700,7 @@
           <p:cNvPr id="40" name="">
             <a:extLst xmlns:a="http://schemas.openxmlformats.org/drawingml/2006/main">
               <a:ext uri="{FF2B5EF4-FFF2-40B4-BE49-F238E27FC236}">
-                <a16:creationId xmlns:a16="http://schemas.microsoft.com/office/drawing/2014/main" id="{17406075-E7AC-42C0-A94C-418A3371C426}"/>
+                <a16:creationId xmlns:a16="http://schemas.microsoft.com/office/drawing/2014/main" id="{B182D3CB-D4F7-4B50-A5A5-6F454C84C82C}"/>
               </a:ext>
             </a:extLst>
           </p:cNvPr>
@@ -9752,7 +9752,7 @@
           <p:cNvPr id="41" name="">
             <a:extLst xmlns:a="http://schemas.openxmlformats.org/drawingml/2006/main">
               <a:ext uri="{FF2B5EF4-FFF2-40B4-BE49-F238E27FC236}">
-                <a16:creationId xmlns:a16="http://schemas.microsoft.com/office/drawing/2014/main" id="{88B0D990-A2DE-42BE-8713-C85822C96FFE}"/>
+                <a16:creationId xmlns:a16="http://schemas.microsoft.com/office/drawing/2014/main" id="{DB9DB0C0-3ED5-4631-AF17-89235B8EEE83}"/>
               </a:ext>
             </a:extLst>
           </p:cNvPr>
@@ -9804,7 +9804,7 @@
           <p:cNvPr id="42" name="">
             <a:extLst xmlns:a="http://schemas.openxmlformats.org/drawingml/2006/main">
               <a:ext uri="{FF2B5EF4-FFF2-40B4-BE49-F238E27FC236}">
-                <a16:creationId xmlns:a16="http://schemas.microsoft.com/office/drawing/2014/main" id="{FD8DEA1C-8118-498A-9DB0-92BE356034AF}"/>
+                <a16:creationId xmlns:a16="http://schemas.microsoft.com/office/drawing/2014/main" id="{0E1DB032-7463-4EE8-A6C0-633CE7132B91}"/>
               </a:ext>
             </a:extLst>
           </p:cNvPr>
@@ -9856,7 +9856,7 @@
           <p:cNvPr id="43" name="">
             <a:extLst xmlns:a="http://schemas.openxmlformats.org/drawingml/2006/main">
               <a:ext uri="{FF2B5EF4-FFF2-40B4-BE49-F238E27FC236}">
-                <a16:creationId xmlns:a16="http://schemas.microsoft.com/office/drawing/2014/main" id="{5F88A7E6-784E-4BEA-892C-137FDC75BA61}"/>
+                <a16:creationId xmlns:a16="http://schemas.microsoft.com/office/drawing/2014/main" id="{7439E1FE-A1C2-4F32-97F2-B59518464DFC}"/>
               </a:ext>
             </a:extLst>
           </p:cNvPr>
@@ -9908,7 +9908,7 @@
           <p:cNvPr id="44" name="">
             <a:extLst xmlns:a="http://schemas.openxmlformats.org/drawingml/2006/main">
               <a:ext uri="{FF2B5EF4-FFF2-40B4-BE49-F238E27FC236}">
-                <a16:creationId xmlns:a16="http://schemas.microsoft.com/office/drawing/2014/main" id="{4F2B0871-4B49-4AAA-AB37-1B2DF447BE90}"/>
+                <a16:creationId xmlns:a16="http://schemas.microsoft.com/office/drawing/2014/main" id="{D346F53F-86C7-4827-9835-46606C79A7AE}"/>
               </a:ext>
             </a:extLst>
           </p:cNvPr>
@@ -9939,7 +9939,7 @@
           <p:cNvPr id="45" name="">
             <a:extLst xmlns:a="http://schemas.openxmlformats.org/drawingml/2006/main">
               <a:ext uri="{FF2B5EF4-FFF2-40B4-BE49-F238E27FC236}">
-                <a16:creationId xmlns:a16="http://schemas.microsoft.com/office/drawing/2014/main" id="{7B28E925-6924-427C-89E0-30E21D9F9618}"/>
+                <a16:creationId xmlns:a16="http://schemas.microsoft.com/office/drawing/2014/main" id="{AC50C63F-C39F-4A52-A717-C37DB0C6608F}"/>
               </a:ext>
             </a:extLst>
           </p:cNvPr>
@@ -9991,7 +9991,7 @@
           <p:cNvPr id="46" name="">
             <a:extLst xmlns:a="http://schemas.openxmlformats.org/drawingml/2006/main">
               <a:ext uri="{FF2B5EF4-FFF2-40B4-BE49-F238E27FC236}">
-                <a16:creationId xmlns:a16="http://schemas.microsoft.com/office/drawing/2014/main" id="{41DF3F3C-93E7-4933-A2E8-480F6F24E94C}"/>
+                <a16:creationId xmlns:a16="http://schemas.microsoft.com/office/drawing/2014/main" id="{563FC1E1-0C77-4733-B096-B5C8882537C1}"/>
               </a:ext>
             </a:extLst>
           </p:cNvPr>
@@ -10043,7 +10043,7 @@
           <p:cNvPr id="47" name="">
             <a:extLst xmlns:a="http://schemas.openxmlformats.org/drawingml/2006/main">
               <a:ext uri="{FF2B5EF4-FFF2-40B4-BE49-F238E27FC236}">
-                <a16:creationId xmlns:a16="http://schemas.microsoft.com/office/drawing/2014/main" id="{2E46D78B-0C43-4FF7-BBB8-9A907D102EA5}"/>
+                <a16:creationId xmlns:a16="http://schemas.microsoft.com/office/drawing/2014/main" id="{F827931B-6140-4B0A-8E24-22D102D874EE}"/>
               </a:ext>
             </a:extLst>
           </p:cNvPr>
@@ -10095,7 +10095,7 @@
           <p:cNvPr id="48" name="">
             <a:extLst xmlns:a="http://schemas.openxmlformats.org/drawingml/2006/main">
               <a:ext uri="{FF2B5EF4-FFF2-40B4-BE49-F238E27FC236}">
-                <a16:creationId xmlns:a16="http://schemas.microsoft.com/office/drawing/2014/main" id="{DFC244EB-E674-4C04-822E-0D8B94C45C50}"/>
+                <a16:creationId xmlns:a16="http://schemas.microsoft.com/office/drawing/2014/main" id="{B7814822-5359-4C04-B1EF-B95D9FBE61D6}"/>
               </a:ext>
             </a:extLst>
           </p:cNvPr>
@@ -10147,7 +10147,7 @@
           <p:cNvPr id="49" name="">
             <a:extLst xmlns:a="http://schemas.openxmlformats.org/drawingml/2006/main">
               <a:ext uri="{FF2B5EF4-FFF2-40B4-BE49-F238E27FC236}">
-                <a16:creationId xmlns:a16="http://schemas.microsoft.com/office/drawing/2014/main" id="{AE8AEBD7-AC5D-42B0-BF2A-BDACE6DA50DF}"/>
+                <a16:creationId xmlns:a16="http://schemas.microsoft.com/office/drawing/2014/main" id="{ED4F87FA-4721-48FA-BB97-EEDE2AAF58D5}"/>
               </a:ext>
             </a:extLst>
           </p:cNvPr>
@@ -10199,7 +10199,7 @@
           <p:cNvPr id="50" name="">
             <a:extLst xmlns:a="http://schemas.openxmlformats.org/drawingml/2006/main">
               <a:ext uri="{FF2B5EF4-FFF2-40B4-BE49-F238E27FC236}">
-                <a16:creationId xmlns:a16="http://schemas.microsoft.com/office/drawing/2014/main" id="{6740EC59-4399-4D5C-91F0-8DD0FE19F035}"/>
+                <a16:creationId xmlns:a16="http://schemas.microsoft.com/office/drawing/2014/main" id="{D39EC853-EB95-4955-A3CC-893BAAB24934}"/>
               </a:ext>
             </a:extLst>
           </p:cNvPr>
@@ -10251,7 +10251,7 @@
           <p:cNvPr id="51" name="">
             <a:extLst xmlns:a="http://schemas.openxmlformats.org/drawingml/2006/main">
               <a:ext uri="{FF2B5EF4-FFF2-40B4-BE49-F238E27FC236}">
-                <a16:creationId xmlns:a16="http://schemas.microsoft.com/office/drawing/2014/main" id="{30A4CE86-26C4-4594-9A47-025C87A352FC}"/>
+                <a16:creationId xmlns:a16="http://schemas.microsoft.com/office/drawing/2014/main" id="{42B37977-8983-44D3-80ED-B3C3427B52D8}"/>
               </a:ext>
             </a:extLst>
           </p:cNvPr>
@@ -10282,7 +10282,7 @@
           <p:cNvPr id="52" name="">
             <a:extLst xmlns:a="http://schemas.openxmlformats.org/drawingml/2006/main">
               <a:ext uri="{FF2B5EF4-FFF2-40B4-BE49-F238E27FC236}">
-                <a16:creationId xmlns:a16="http://schemas.microsoft.com/office/drawing/2014/main" id="{BEFC9409-DD83-470B-854A-882A279C4AE9}"/>
+                <a16:creationId xmlns:a16="http://schemas.microsoft.com/office/drawing/2014/main" id="{14C619BC-96CC-45DE-A866-3727E58FEBE1}"/>
               </a:ext>
             </a:extLst>
           </p:cNvPr>
@@ -10313,7 +10313,7 @@
           <p:cNvPr id="53" name="">
             <a:extLst xmlns:a="http://schemas.openxmlformats.org/drawingml/2006/main">
               <a:ext uri="{FF2B5EF4-FFF2-40B4-BE49-F238E27FC236}">
-                <a16:creationId xmlns:a16="http://schemas.microsoft.com/office/drawing/2014/main" id="{6C871B8D-4974-40D7-802E-EEA7B8B68BA3}"/>
+                <a16:creationId xmlns:a16="http://schemas.microsoft.com/office/drawing/2014/main" id="{9704D537-4E30-4D8A-9B75-D28D48B79D8C}"/>
               </a:ext>
             </a:extLst>
           </p:cNvPr>
@@ -10344,7 +10344,7 @@
           <p:cNvPr id="54" name="">
             <a:extLst xmlns:a="http://schemas.openxmlformats.org/drawingml/2006/main">
               <a:ext uri="{FF2B5EF4-FFF2-40B4-BE49-F238E27FC236}">
-                <a16:creationId xmlns:a16="http://schemas.microsoft.com/office/drawing/2014/main" id="{F35042D9-7EA4-4DF9-99E2-34E15CA8160B}"/>
+                <a16:creationId xmlns:a16="http://schemas.microsoft.com/office/drawing/2014/main" id="{2CDB0AB6-82B3-4EDB-ABF8-5C136F0F5B9F}"/>
               </a:ext>
             </a:extLst>
           </p:cNvPr>
@@ -10396,7 +10396,7 @@
           <p:cNvPr id="55" name="">
             <a:extLst xmlns:a="http://schemas.openxmlformats.org/drawingml/2006/main">
               <a:ext uri="{FF2B5EF4-FFF2-40B4-BE49-F238E27FC236}">
-                <a16:creationId xmlns:a16="http://schemas.microsoft.com/office/drawing/2014/main" id="{76852557-0FCC-4EC0-8FAE-95DAE9EA71E9}"/>
+                <a16:creationId xmlns:a16="http://schemas.microsoft.com/office/drawing/2014/main" id="{131CA301-49BE-4CC1-BD0D-A70750695F8A}"/>
               </a:ext>
             </a:extLst>
           </p:cNvPr>
@@ -10448,7 +10448,7 @@
           <p:cNvPr id="56" name="">
             <a:extLst xmlns:a="http://schemas.openxmlformats.org/drawingml/2006/main">
               <a:ext uri="{FF2B5EF4-FFF2-40B4-BE49-F238E27FC236}">
-                <a16:creationId xmlns:a16="http://schemas.microsoft.com/office/drawing/2014/main" id="{4F844535-83CE-4F09-842B-196EB0399318}"/>
+                <a16:creationId xmlns:a16="http://schemas.microsoft.com/office/drawing/2014/main" id="{798F9C71-0C15-4F31-AA5A-5588F5D22322}"/>
               </a:ext>
             </a:extLst>
           </p:cNvPr>
@@ -10500,7 +10500,7 @@
           <p:cNvPr id="57" name="">
             <a:extLst xmlns:a="http://schemas.openxmlformats.org/drawingml/2006/main">
               <a:ext uri="{FF2B5EF4-FFF2-40B4-BE49-F238E27FC236}">
-                <a16:creationId xmlns:a16="http://schemas.microsoft.com/office/drawing/2014/main" id="{497B8BF3-0793-4FC1-A83C-F0040226B970}"/>
+                <a16:creationId xmlns:a16="http://schemas.microsoft.com/office/drawing/2014/main" id="{26ED44E0-823B-43FD-9CA5-C2A9BC4DCCAD}"/>
               </a:ext>
             </a:extLst>
           </p:cNvPr>
@@ -10552,7 +10552,7 @@
           <p:cNvPr id="58" name="">
             <a:extLst xmlns:a="http://schemas.openxmlformats.org/drawingml/2006/main">
               <a:ext uri="{FF2B5EF4-FFF2-40B4-BE49-F238E27FC236}">
-                <a16:creationId xmlns:a16="http://schemas.microsoft.com/office/drawing/2014/main" id="{08069B57-2172-497E-AC22-3837197E9C8A}"/>
+                <a16:creationId xmlns:a16="http://schemas.microsoft.com/office/drawing/2014/main" id="{D19A0F95-401F-4778-8E39-C828EF110161}"/>
               </a:ext>
             </a:extLst>
           </p:cNvPr>
@@ -10604,7 +10604,7 @@
           <p:cNvPr id="59" name="">
             <a:extLst xmlns:a="http://schemas.openxmlformats.org/drawingml/2006/main">
               <a:ext uri="{FF2B5EF4-FFF2-40B4-BE49-F238E27FC236}">
-                <a16:creationId xmlns:a16="http://schemas.microsoft.com/office/drawing/2014/main" id="{24660511-9F31-4C71-9559-1324FF29521A}"/>
+                <a16:creationId xmlns:a16="http://schemas.microsoft.com/office/drawing/2014/main" id="{97E30ECD-0386-4C03-BA00-8F3DA6C71FED}"/>
               </a:ext>
             </a:extLst>
           </p:cNvPr>
@@ -10635,7 +10635,7 @@
           <p:cNvPr id="60" name="">
             <a:extLst xmlns:a="http://schemas.openxmlformats.org/drawingml/2006/main">
               <a:ext uri="{FF2B5EF4-FFF2-40B4-BE49-F238E27FC236}">
-                <a16:creationId xmlns:a16="http://schemas.microsoft.com/office/drawing/2014/main" id="{1BD273D8-0F52-44D9-818E-A34146FFF1BD}"/>
+                <a16:creationId xmlns:a16="http://schemas.microsoft.com/office/drawing/2014/main" id="{2AFA873E-A096-4CE5-AF99-6ADB799564ED}"/>
               </a:ext>
             </a:extLst>
           </p:cNvPr>
@@ -10687,7 +10687,7 @@
           <p:cNvPr id="61" name="">
             <a:extLst xmlns:a="http://schemas.openxmlformats.org/drawingml/2006/main">
               <a:ext uri="{FF2B5EF4-FFF2-40B4-BE49-F238E27FC236}">
-                <a16:creationId xmlns:a16="http://schemas.microsoft.com/office/drawing/2014/main" id="{8422781A-0C9C-43A7-AEC2-DA96C4BEA897}"/>
+                <a16:creationId xmlns:a16="http://schemas.microsoft.com/office/drawing/2014/main" id="{43839062-237B-4AB2-95D1-F2C3897B3A7A}"/>
               </a:ext>
             </a:extLst>
           </p:cNvPr>
@@ -10739,7 +10739,7 @@
           <p:cNvPr id="62" name="">
             <a:extLst xmlns:a="http://schemas.openxmlformats.org/drawingml/2006/main">
               <a:ext uri="{FF2B5EF4-FFF2-40B4-BE49-F238E27FC236}">
-                <a16:creationId xmlns:a16="http://schemas.microsoft.com/office/drawing/2014/main" id="{AA299D8A-FABF-4AEC-8CFD-B85B62ADE381}"/>
+                <a16:creationId xmlns:a16="http://schemas.microsoft.com/office/drawing/2014/main" id="{B9F14F37-698A-40D6-9687-B822B4661280}"/>
               </a:ext>
             </a:extLst>
           </p:cNvPr>
@@ -10791,7 +10791,7 @@
           <p:cNvPr id="63" name="">
             <a:extLst xmlns:a="http://schemas.openxmlformats.org/drawingml/2006/main">
               <a:ext uri="{FF2B5EF4-FFF2-40B4-BE49-F238E27FC236}">
-                <a16:creationId xmlns:a16="http://schemas.microsoft.com/office/drawing/2014/main" id="{187BABAE-63D0-41C3-9873-E5023B761F24}"/>
+                <a16:creationId xmlns:a16="http://schemas.microsoft.com/office/drawing/2014/main" id="{DC1F7C83-A835-4CE0-9248-522324E206DC}"/>
               </a:ext>
             </a:extLst>
           </p:cNvPr>
@@ -10843,7 +10843,7 @@
           <p:cNvPr id="64" name="">
             <a:extLst xmlns:a="http://schemas.openxmlformats.org/drawingml/2006/main">
               <a:ext uri="{FF2B5EF4-FFF2-40B4-BE49-F238E27FC236}">
-                <a16:creationId xmlns:a16="http://schemas.microsoft.com/office/drawing/2014/main" id="{9222CE33-28BF-462B-9822-2CB616F28619}"/>
+                <a16:creationId xmlns:a16="http://schemas.microsoft.com/office/drawing/2014/main" id="{36ED9FAD-07F1-4269-9390-157AAB4840D0}"/>
               </a:ext>
             </a:extLst>
           </p:cNvPr>
@@ -10895,7 +10895,7 @@
           <p:cNvPr id="65" name="">
             <a:extLst xmlns:a="http://schemas.openxmlformats.org/drawingml/2006/main">
               <a:ext uri="{FF2B5EF4-FFF2-40B4-BE49-F238E27FC236}">
-                <a16:creationId xmlns:a16="http://schemas.microsoft.com/office/drawing/2014/main" id="{CB0A33C6-D111-403C-AD28-4F4509DCC5A6}"/>
+                <a16:creationId xmlns:a16="http://schemas.microsoft.com/office/drawing/2014/main" id="{FC0086EC-12A3-4861-A10E-FA184402CCB2}"/>
               </a:ext>
             </a:extLst>
           </p:cNvPr>
@@ -10926,7 +10926,7 @@
           <p:cNvPr id="66" name="">
             <a:extLst xmlns:a="http://schemas.openxmlformats.org/drawingml/2006/main">
               <a:ext uri="{FF2B5EF4-FFF2-40B4-BE49-F238E27FC236}">
-                <a16:creationId xmlns:a16="http://schemas.microsoft.com/office/drawing/2014/main" id="{E60776A1-7509-452B-96F0-C705B89AED7E}"/>
+                <a16:creationId xmlns:a16="http://schemas.microsoft.com/office/drawing/2014/main" id="{0530D59F-8535-4616-ACAF-BFEDE3266BAF}"/>
               </a:ext>
             </a:extLst>
           </p:cNvPr>
@@ -10957,7 +10957,7 @@
           <p:cNvPr id="67" name="">
             <a:extLst xmlns:a="http://schemas.openxmlformats.org/drawingml/2006/main">
               <a:ext uri="{FF2B5EF4-FFF2-40B4-BE49-F238E27FC236}">
-                <a16:creationId xmlns:a16="http://schemas.microsoft.com/office/drawing/2014/main" id="{5CBCF8FB-E7DB-4B05-A6C2-25F172719806}"/>
+                <a16:creationId xmlns:a16="http://schemas.microsoft.com/office/drawing/2014/main" id="{985C88C7-9474-48D4-A016-CC166717E868}"/>
               </a:ext>
             </a:extLst>
           </p:cNvPr>
@@ -11009,7 +11009,7 @@
           <p:cNvPr id="68" name="">
             <a:extLst xmlns:a="http://schemas.openxmlformats.org/drawingml/2006/main">
               <a:ext uri="{FF2B5EF4-FFF2-40B4-BE49-F238E27FC236}">
-                <a16:creationId xmlns:a16="http://schemas.microsoft.com/office/drawing/2014/main" id="{C92B663A-1762-460E-8ACE-EA9A05C953EA}"/>
+                <a16:creationId xmlns:a16="http://schemas.microsoft.com/office/drawing/2014/main" id="{130E0948-991B-4533-9D29-4906A6594129}"/>
               </a:ext>
             </a:extLst>
           </p:cNvPr>
@@ -11061,7 +11061,7 @@
           <p:cNvPr id="69" name="">
             <a:extLst xmlns:a="http://schemas.openxmlformats.org/drawingml/2006/main">
               <a:ext uri="{FF2B5EF4-FFF2-40B4-BE49-F238E27FC236}">
-                <a16:creationId xmlns:a16="http://schemas.microsoft.com/office/drawing/2014/main" id="{EAAA64A0-F7FD-4ED7-8C2E-8191E70ACFB6}"/>
+                <a16:creationId xmlns:a16="http://schemas.microsoft.com/office/drawing/2014/main" id="{848B3CB5-AFAB-48DB-AE4A-330CB4B308D0}"/>
               </a:ext>
             </a:extLst>
           </p:cNvPr>
@@ -11113,7 +11113,7 @@
           <p:cNvPr id="70" name="">
             <a:extLst xmlns:a="http://schemas.openxmlformats.org/drawingml/2006/main">
               <a:ext uri="{FF2B5EF4-FFF2-40B4-BE49-F238E27FC236}">
-                <a16:creationId xmlns:a16="http://schemas.microsoft.com/office/drawing/2014/main" id="{3AA2A9B0-EA82-42B8-B1B2-BE28877BFA0D}"/>
+                <a16:creationId xmlns:a16="http://schemas.microsoft.com/office/drawing/2014/main" id="{1FA0DA43-47B2-4E9E-A15D-336DB4DD3481}"/>
               </a:ext>
             </a:extLst>
           </p:cNvPr>
@@ -11165,7 +11165,7 @@
           <p:cNvPr id="71" name="">
             <a:extLst xmlns:a="http://schemas.openxmlformats.org/drawingml/2006/main">
               <a:ext uri="{FF2B5EF4-FFF2-40B4-BE49-F238E27FC236}">
-                <a16:creationId xmlns:a16="http://schemas.microsoft.com/office/drawing/2014/main" id="{25055A97-828C-47A5-B785-156E1FF42F47}"/>
+                <a16:creationId xmlns:a16="http://schemas.microsoft.com/office/drawing/2014/main" id="{704D88E4-B42A-48C8-89F4-1F1DBE78F248}"/>
               </a:ext>
             </a:extLst>
           </p:cNvPr>
@@ -11217,7 +11217,7 @@
           <p:cNvPr id="72" name="">
             <a:extLst xmlns:a="http://schemas.openxmlformats.org/drawingml/2006/main">
               <a:ext uri="{FF2B5EF4-FFF2-40B4-BE49-F238E27FC236}">
-                <a16:creationId xmlns:a16="http://schemas.microsoft.com/office/drawing/2014/main" id="{6EABEC3B-9A37-4341-B468-65B586297955}"/>
+                <a16:creationId xmlns:a16="http://schemas.microsoft.com/office/drawing/2014/main" id="{7F7F23E1-4B5C-4AC6-B8DB-C3C309455037}"/>
               </a:ext>
             </a:extLst>
           </p:cNvPr>
@@ -11248,7 +11248,7 @@
           <p:cNvPr id="73" name="">
             <a:extLst xmlns:a="http://schemas.openxmlformats.org/drawingml/2006/main">
               <a:ext uri="{FF2B5EF4-FFF2-40B4-BE49-F238E27FC236}">
-                <a16:creationId xmlns:a16="http://schemas.microsoft.com/office/drawing/2014/main" id="{86F0E1C0-7013-49E3-BC48-4E15AC747CF5}"/>
+                <a16:creationId xmlns:a16="http://schemas.microsoft.com/office/drawing/2014/main" id="{8670A9C2-061F-44E9-B929-09D365E72386}"/>
               </a:ext>
             </a:extLst>
           </p:cNvPr>
@@ -11300,7 +11300,7 @@
           <p:cNvPr id="74" name="">
             <a:extLst xmlns:a="http://schemas.openxmlformats.org/drawingml/2006/main">
               <a:ext uri="{FF2B5EF4-FFF2-40B4-BE49-F238E27FC236}">
-                <a16:creationId xmlns:a16="http://schemas.microsoft.com/office/drawing/2014/main" id="{7C8174E6-8505-4B37-AD91-745A57A69CA6}"/>
+                <a16:creationId xmlns:a16="http://schemas.microsoft.com/office/drawing/2014/main" id="{4C5FACF3-9ECB-470D-ADDF-2E721954488A}"/>
               </a:ext>
             </a:extLst>
           </p:cNvPr>
@@ -11352,7 +11352,7 @@
           <p:cNvPr id="75" name="">
             <a:extLst xmlns:a="http://schemas.openxmlformats.org/drawingml/2006/main">
               <a:ext uri="{FF2B5EF4-FFF2-40B4-BE49-F238E27FC236}">
-                <a16:creationId xmlns:a16="http://schemas.microsoft.com/office/drawing/2014/main" id="{CDC2BD55-FA6F-40D2-A3C7-4135058194A4}"/>
+                <a16:creationId xmlns:a16="http://schemas.microsoft.com/office/drawing/2014/main" id="{72AEEF46-E8A4-43BA-A0E6-954D19FDE332}"/>
               </a:ext>
             </a:extLst>
           </p:cNvPr>
@@ -11404,7 +11404,7 @@
           <p:cNvPr id="76" name="">
             <a:extLst xmlns:a="http://schemas.openxmlformats.org/drawingml/2006/main">
               <a:ext uri="{FF2B5EF4-FFF2-40B4-BE49-F238E27FC236}">
-                <a16:creationId xmlns:a16="http://schemas.microsoft.com/office/drawing/2014/main" id="{99D7F18E-2835-4C2B-957C-324103BDE811}"/>
+                <a16:creationId xmlns:a16="http://schemas.microsoft.com/office/drawing/2014/main" id="{728BDA9C-8699-4BC4-B94C-A6C96A3F9A95}"/>
               </a:ext>
             </a:extLst>
           </p:cNvPr>
@@ -11456,7 +11456,7 @@
           <p:cNvPr id="77" name="">
             <a:extLst xmlns:a="http://schemas.openxmlformats.org/drawingml/2006/main">
               <a:ext uri="{FF2B5EF4-FFF2-40B4-BE49-F238E27FC236}">
-                <a16:creationId xmlns:a16="http://schemas.microsoft.com/office/drawing/2014/main" id="{17473C46-68D5-4BB8-BAD8-91845E83368E}"/>
+                <a16:creationId xmlns:a16="http://schemas.microsoft.com/office/drawing/2014/main" id="{2FDCFF6D-D0C9-4152-B8B5-6C15FC58BFDF}"/>
               </a:ext>
             </a:extLst>
           </p:cNvPr>
@@ -11508,7 +11508,7 @@
           <p:cNvPr id="78" name="">
             <a:extLst xmlns:a="http://schemas.openxmlformats.org/drawingml/2006/main">
               <a:ext uri="{FF2B5EF4-FFF2-40B4-BE49-F238E27FC236}">
-                <a16:creationId xmlns:a16="http://schemas.microsoft.com/office/drawing/2014/main" id="{31352731-23FB-40C0-B577-E98AAC7BB820}"/>
+                <a16:creationId xmlns:a16="http://schemas.microsoft.com/office/drawing/2014/main" id="{43BE209F-E281-4B28-A90D-3DC8C53E2B36}"/>
               </a:ext>
             </a:extLst>
           </p:cNvPr>
@@ -11539,7 +11539,7 @@
           <p:cNvPr id="79" name="">
             <a:extLst xmlns:a="http://schemas.openxmlformats.org/drawingml/2006/main">
               <a:ext uri="{FF2B5EF4-FFF2-40B4-BE49-F238E27FC236}">
-                <a16:creationId xmlns:a16="http://schemas.microsoft.com/office/drawing/2014/main" id="{8FD2E53C-1C74-4E42-BCE8-836897AE5F7D}"/>
+                <a16:creationId xmlns:a16="http://schemas.microsoft.com/office/drawing/2014/main" id="{3190984C-DB2F-4157-9743-A8A647C2687F}"/>
               </a:ext>
             </a:extLst>
           </p:cNvPr>
@@ -11570,7 +11570,7 @@
           <p:cNvPr id="80" name="">
             <a:extLst xmlns:a="http://schemas.openxmlformats.org/drawingml/2006/main">
               <a:ext uri="{FF2B5EF4-FFF2-40B4-BE49-F238E27FC236}">
-                <a16:creationId xmlns:a16="http://schemas.microsoft.com/office/drawing/2014/main" id="{A4C586AE-FFE8-4D51-9056-076AC64314F1}"/>
+                <a16:creationId xmlns:a16="http://schemas.microsoft.com/office/drawing/2014/main" id="{5744BE0A-8AD4-4834-B332-1365DD7AE395}"/>
               </a:ext>
             </a:extLst>
           </p:cNvPr>
@@ -11622,7 +11622,7 @@
           <p:cNvPr id="81" name="">
             <a:extLst xmlns:a="http://schemas.openxmlformats.org/drawingml/2006/main">
               <a:ext uri="{FF2B5EF4-FFF2-40B4-BE49-F238E27FC236}">
-                <a16:creationId xmlns:a16="http://schemas.microsoft.com/office/drawing/2014/main" id="{C6145819-57BA-4CC4-92EB-75458B0A00CC}"/>
+                <a16:creationId xmlns:a16="http://schemas.microsoft.com/office/drawing/2014/main" id="{34F0CC6A-4BC2-4477-B4ED-5165FDB3B464}"/>
               </a:ext>
             </a:extLst>
           </p:cNvPr>
@@ -11674,7 +11674,7 @@
           <p:cNvPr id="82" name="">
             <a:extLst xmlns:a="http://schemas.openxmlformats.org/drawingml/2006/main">
               <a:ext uri="{FF2B5EF4-FFF2-40B4-BE49-F238E27FC236}">
-                <a16:creationId xmlns:a16="http://schemas.microsoft.com/office/drawing/2014/main" id="{C9603AED-C1A8-431F-B2ED-416390528242}"/>
+                <a16:creationId xmlns:a16="http://schemas.microsoft.com/office/drawing/2014/main" id="{E7E41F55-DEC9-41E5-9BCE-46F6474025E3}"/>
               </a:ext>
             </a:extLst>
           </p:cNvPr>
@@ -11726,7 +11726,7 @@
           <p:cNvPr id="83" name="">
             <a:extLst xmlns:a="http://schemas.openxmlformats.org/drawingml/2006/main">
               <a:ext uri="{FF2B5EF4-FFF2-40B4-BE49-F238E27FC236}">
-                <a16:creationId xmlns:a16="http://schemas.microsoft.com/office/drawing/2014/main" id="{6B93EC49-607F-461F-9DF4-E178F78A160B}"/>
+                <a16:creationId xmlns:a16="http://schemas.microsoft.com/office/drawing/2014/main" id="{7571E083-455A-4370-A16E-3A2FECA9FE4F}"/>
               </a:ext>
             </a:extLst>
           </p:cNvPr>
@@ -11778,7 +11778,7 @@
           <p:cNvPr id="84" name="">
             <a:extLst xmlns:a="http://schemas.openxmlformats.org/drawingml/2006/main">
               <a:ext uri="{FF2B5EF4-FFF2-40B4-BE49-F238E27FC236}">
-                <a16:creationId xmlns:a16="http://schemas.microsoft.com/office/drawing/2014/main" id="{9167869A-E0DF-4824-BB58-A12D5811D564}"/>
+                <a16:creationId xmlns:a16="http://schemas.microsoft.com/office/drawing/2014/main" id="{48714DA5-56B6-4FBF-8EA3-4674C163C1A2}"/>
               </a:ext>
             </a:extLst>
           </p:cNvPr>
@@ -11830,7 +11830,7 @@
           <p:cNvPr id="85" name="">
             <a:extLst xmlns:a="http://schemas.openxmlformats.org/drawingml/2006/main">
               <a:ext uri="{FF2B5EF4-FFF2-40B4-BE49-F238E27FC236}">
-                <a16:creationId xmlns:a16="http://schemas.microsoft.com/office/drawing/2014/main" id="{2DA5BD5E-4513-4612-B117-99CAF0AEC1F4}"/>
+                <a16:creationId xmlns:a16="http://schemas.microsoft.com/office/drawing/2014/main" id="{B64BD48C-94AC-4B7C-ABCE-9ED4C7DF62E9}"/>
               </a:ext>
             </a:extLst>
           </p:cNvPr>
@@ -11861,7 +11861,7 @@
           <p:cNvPr id="86" name="">
             <a:extLst xmlns:a="http://schemas.openxmlformats.org/drawingml/2006/main">
               <a:ext uri="{FF2B5EF4-FFF2-40B4-BE49-F238E27FC236}">
-                <a16:creationId xmlns:a16="http://schemas.microsoft.com/office/drawing/2014/main" id="{36D0B955-DBB5-46DD-A0B0-2ACBE9F5352D}"/>
+                <a16:creationId xmlns:a16="http://schemas.microsoft.com/office/drawing/2014/main" id="{2863A72D-9274-4FC1-8E26-8C4D821E14F3}"/>
               </a:ext>
             </a:extLst>
           </p:cNvPr>
@@ -11913,7 +11913,7 @@
           <p:cNvPr id="87" name="">
             <a:extLst xmlns:a="http://schemas.openxmlformats.org/drawingml/2006/main">
               <a:ext uri="{FF2B5EF4-FFF2-40B4-BE49-F238E27FC236}">
-                <a16:creationId xmlns:a16="http://schemas.microsoft.com/office/drawing/2014/main" id="{51392ED8-C8DC-46B5-950B-34092FBA88BF}"/>
+                <a16:creationId xmlns:a16="http://schemas.microsoft.com/office/drawing/2014/main" id="{014B246D-1816-4FE2-8D0F-AEA8BC76569B}"/>
               </a:ext>
             </a:extLst>
           </p:cNvPr>
@@ -11965,7 +11965,7 @@
           <p:cNvPr id="88" name="">
             <a:extLst xmlns:a="http://schemas.openxmlformats.org/drawingml/2006/main">
               <a:ext uri="{FF2B5EF4-FFF2-40B4-BE49-F238E27FC236}">
-                <a16:creationId xmlns:a16="http://schemas.microsoft.com/office/drawing/2014/main" id="{ED258931-FC6D-449D-9693-9A60A4D3BB1B}"/>
+                <a16:creationId xmlns:a16="http://schemas.microsoft.com/office/drawing/2014/main" id="{5BB193C1-4AFE-4391-928A-3D2579B91861}"/>
               </a:ext>
             </a:extLst>
           </p:cNvPr>
@@ -12017,7 +12017,7 @@
           <p:cNvPr id="89" name="">
             <a:extLst xmlns:a="http://schemas.openxmlformats.org/drawingml/2006/main">
               <a:ext uri="{FF2B5EF4-FFF2-40B4-BE49-F238E27FC236}">
-                <a16:creationId xmlns:a16="http://schemas.microsoft.com/office/drawing/2014/main" id="{AA0A72EC-D3AC-4F49-A700-4DD82522BA03}"/>
+                <a16:creationId xmlns:a16="http://schemas.microsoft.com/office/drawing/2014/main" id="{A55B8342-30ED-4891-8189-57230A9D92C1}"/>
               </a:ext>
             </a:extLst>
           </p:cNvPr>
@@ -12069,7 +12069,7 @@
           <p:cNvPr id="90" name="">
             <a:extLst xmlns:a="http://schemas.openxmlformats.org/drawingml/2006/main">
               <a:ext uri="{FF2B5EF4-FFF2-40B4-BE49-F238E27FC236}">
-                <a16:creationId xmlns:a16="http://schemas.microsoft.com/office/drawing/2014/main" id="{72659279-B731-47A4-8741-9EE0DE98CC1A}"/>
+                <a16:creationId xmlns:a16="http://schemas.microsoft.com/office/drawing/2014/main" id="{D18144A6-EDA0-4D3C-BAA5-68AD4965C20D}"/>
               </a:ext>
             </a:extLst>
           </p:cNvPr>
@@ -12121,7 +12121,7 @@
           <p:cNvPr id="91" name="">
             <a:extLst xmlns:a="http://schemas.openxmlformats.org/drawingml/2006/main">
               <a:ext uri="{FF2B5EF4-FFF2-40B4-BE49-F238E27FC236}">
-                <a16:creationId xmlns:a16="http://schemas.microsoft.com/office/drawing/2014/main" id="{322025D9-4476-4E2C-96F9-2CF14C1BB469}"/>
+                <a16:creationId xmlns:a16="http://schemas.microsoft.com/office/drawing/2014/main" id="{DBF4E8CB-F40F-4ADB-A522-AA88039C4BAF}"/>
               </a:ext>
             </a:extLst>
           </p:cNvPr>
@@ -12152,7 +12152,7 @@
           <p:cNvPr id="92" name="">
             <a:extLst xmlns:a="http://schemas.openxmlformats.org/drawingml/2006/main">
               <a:ext uri="{FF2B5EF4-FFF2-40B4-BE49-F238E27FC236}">
-                <a16:creationId xmlns:a16="http://schemas.microsoft.com/office/drawing/2014/main" id="{96312578-4292-444B-8CD1-7B989FA31549}"/>
+                <a16:creationId xmlns:a16="http://schemas.microsoft.com/office/drawing/2014/main" id="{5BBB3B44-5F82-427E-A0BA-D673314DB16B}"/>
               </a:ext>
             </a:extLst>
           </p:cNvPr>
@@ -12183,7 +12183,7 @@
           <p:cNvPr id="93" name="">
             <a:extLst xmlns:a="http://schemas.openxmlformats.org/drawingml/2006/main">
               <a:ext uri="{FF2B5EF4-FFF2-40B4-BE49-F238E27FC236}">
-                <a16:creationId xmlns:a16="http://schemas.microsoft.com/office/drawing/2014/main" id="{CC71FD02-2563-455A-A047-8C7740CA895A}"/>
+                <a16:creationId xmlns:a16="http://schemas.microsoft.com/office/drawing/2014/main" id="{E937B8FB-E045-45BE-A8AE-0741072E4935}"/>
               </a:ext>
             </a:extLst>
           </p:cNvPr>
@@ -12235,7 +12235,7 @@
           <p:cNvPr id="94" name="">
             <a:extLst xmlns:a="http://schemas.openxmlformats.org/drawingml/2006/main">
               <a:ext uri="{FF2B5EF4-FFF2-40B4-BE49-F238E27FC236}">
-                <a16:creationId xmlns:a16="http://schemas.microsoft.com/office/drawing/2014/main" id="{07ADA980-EF34-45AA-97C2-2B0D6CDF7428}"/>
+                <a16:creationId xmlns:a16="http://schemas.microsoft.com/office/drawing/2014/main" id="{37D7D5E6-2DC8-42F1-B64A-D081FFC5A5F5}"/>
               </a:ext>
             </a:extLst>
           </p:cNvPr>
@@ -12287,7 +12287,7 @@
           <p:cNvPr id="95" name="">
             <a:extLst xmlns:a="http://schemas.openxmlformats.org/drawingml/2006/main">
               <a:ext uri="{FF2B5EF4-FFF2-40B4-BE49-F238E27FC236}">
-                <a16:creationId xmlns:a16="http://schemas.microsoft.com/office/drawing/2014/main" id="{9BF5E333-56BB-4C44-9FD7-A5A2B3F56F6B}"/>
+                <a16:creationId xmlns:a16="http://schemas.microsoft.com/office/drawing/2014/main" id="{495D4952-7E8C-45CC-BE1A-26488E4F6173}"/>
               </a:ext>
             </a:extLst>
           </p:cNvPr>
@@ -12339,7 +12339,7 @@
           <p:cNvPr id="96" name="">
             <a:extLst xmlns:a="http://schemas.openxmlformats.org/drawingml/2006/main">
               <a:ext uri="{FF2B5EF4-FFF2-40B4-BE49-F238E27FC236}">
-                <a16:creationId xmlns:a16="http://schemas.microsoft.com/office/drawing/2014/main" id="{0542C915-B49E-486A-897C-3AC103CA0445}"/>
+                <a16:creationId xmlns:a16="http://schemas.microsoft.com/office/drawing/2014/main" id="{78BE730C-D942-40F2-96AB-AC8D7E001FA5}"/>
               </a:ext>
             </a:extLst>
           </p:cNvPr>
@@ -12391,7 +12391,7 @@
           <p:cNvPr id="97" name="">
             <a:extLst xmlns:a="http://schemas.openxmlformats.org/drawingml/2006/main">
               <a:ext uri="{FF2B5EF4-FFF2-40B4-BE49-F238E27FC236}">
-                <a16:creationId xmlns:a16="http://schemas.microsoft.com/office/drawing/2014/main" id="{5413B966-4FDA-4DBB-B4F8-240A0C5EA0C9}"/>
+                <a16:creationId xmlns:a16="http://schemas.microsoft.com/office/drawing/2014/main" id="{84CC09CC-4180-486E-95DC-0814E3210D25}"/>
               </a:ext>
             </a:extLst>
           </p:cNvPr>
@@ -12441,7 +12441,7 @@
     </p:spTree>
     <p:extLst>
       <p:ext uri="{BB962C8B-B14F-4D97-AF65-F5344CB8AC3E}">
-        <p14:creationId xmlns:p14="http://schemas.microsoft.com/office/powerpoint/2010/main" val="94917291"/>
+        <p14:creationId xmlns:p14="http://schemas.microsoft.com/office/powerpoint/2010/main" val="1352578920"/>
       </p:ext>
     </p:extLst>
   </p:cSld>
@@ -12472,7 +12472,7 @@
           <p:cNvPr id="102" name="">
             <a:extLst xmlns:a="http://schemas.openxmlformats.org/drawingml/2006/main">
               <a:ext uri="{FF2B5EF4-FFF2-40B4-BE49-F238E27FC236}">
-                <a16:creationId xmlns:a16="http://schemas.microsoft.com/office/drawing/2014/main" id="{CCAD26E2-BA68-4F76-B996-072986DAABAB}"/>
+                <a16:creationId xmlns:a16="http://schemas.microsoft.com/office/drawing/2014/main" id="{F2922829-16B7-47F0-8230-E5BCFB4D5DDF}"/>
               </a:ext>
             </a:extLst>
           </p:cNvPr>
@@ -12505,7 +12505,7 @@
           <p:cNvPr id="2" name="">
             <a:extLst xmlns:a="http://schemas.openxmlformats.org/drawingml/2006/main">
               <a:ext uri="{FF2B5EF4-FFF2-40B4-BE49-F238E27FC236}">
-                <a16:creationId xmlns:a16="http://schemas.microsoft.com/office/drawing/2014/main" id="{F79FA583-E168-44E7-87F2-4FF9296D3511}"/>
+                <a16:creationId xmlns:a16="http://schemas.microsoft.com/office/drawing/2014/main" id="{E35669BF-FEAC-4A69-ABB7-BBE4B4D704DF}"/>
               </a:ext>
             </a:extLst>
           </p:cNvPr>
@@ -12536,7 +12536,7 @@
           <p:cNvPr id="3" name="">
             <a:extLst xmlns:a="http://schemas.openxmlformats.org/drawingml/2006/main">
               <a:ext uri="{FF2B5EF4-FFF2-40B4-BE49-F238E27FC236}">
-                <a16:creationId xmlns:a16="http://schemas.microsoft.com/office/drawing/2014/main" id="{9F3347E4-95AE-4954-AE44-4570C626E18A}"/>
+                <a16:creationId xmlns:a16="http://schemas.microsoft.com/office/drawing/2014/main" id="{D0E4D4DF-B3FA-4A17-8D77-403EF1DBBFB0}"/>
               </a:ext>
             </a:extLst>
           </p:cNvPr>
@@ -12588,7 +12588,7 @@
           <p:cNvPr id="4" name="">
             <a:extLst xmlns:a="http://schemas.openxmlformats.org/drawingml/2006/main">
               <a:ext uri="{FF2B5EF4-FFF2-40B4-BE49-F238E27FC236}">
-                <a16:creationId xmlns:a16="http://schemas.microsoft.com/office/drawing/2014/main" id="{E3AC8F04-FF97-4FD8-AE86-74E0BD0B7CAA}"/>
+                <a16:creationId xmlns:a16="http://schemas.microsoft.com/office/drawing/2014/main" id="{9641588E-F571-4F9A-B591-01D55D303FF8}"/>
               </a:ext>
             </a:extLst>
           </p:cNvPr>
@@ -12640,7 +12640,7 @@
           <p:cNvPr id="5" name="">
             <a:extLst xmlns:a="http://schemas.openxmlformats.org/drawingml/2006/main">
               <a:ext uri="{FF2B5EF4-FFF2-40B4-BE49-F238E27FC236}">
-                <a16:creationId xmlns:a16="http://schemas.microsoft.com/office/drawing/2014/main" id="{2B313454-2AF4-492D-A0AC-B4410CCD9CC7}"/>
+                <a16:creationId xmlns:a16="http://schemas.microsoft.com/office/drawing/2014/main" id="{D2E5B1BD-42EA-40EB-9721-C608FDFA95C2}"/>
               </a:ext>
             </a:extLst>
           </p:cNvPr>
@@ -12675,7 +12675,7 @@
           <p:nvPr/>
         </p:nvPicPr>
         <p:blipFill>
-          <a:blip xmlns:r="http://schemas.openxmlformats.org/officeDocument/2006/relationships" xmlns:a="http://schemas.openxmlformats.org/drawingml/2006/main" r:embed="R2e5cdc003c6d403f"/>
+          <a:blip xmlns:r="http://schemas.openxmlformats.org/officeDocument/2006/relationships" xmlns:a="http://schemas.openxmlformats.org/drawingml/2006/main" r:embed="R13a8ad26ad6845bd"/>
           <a:stretch xmlns:a="http://schemas.openxmlformats.org/drawingml/2006/main"/>
         </p:blipFill>
         <p:spPr>
@@ -12693,7 +12693,7 @@
           <p:cNvPr id="7" name="">
             <a:extLst xmlns:a="http://schemas.openxmlformats.org/drawingml/2006/main">
               <a:ext uri="{FF2B5EF4-FFF2-40B4-BE49-F238E27FC236}">
-                <a16:creationId xmlns:a16="http://schemas.microsoft.com/office/drawing/2014/main" id="{A465983F-65F3-4D41-8DB7-2A60E9F29FF2}"/>
+                <a16:creationId xmlns:a16="http://schemas.microsoft.com/office/drawing/2014/main" id="{C067BB13-1973-4A31-B77E-BA46150C7F02}"/>
               </a:ext>
             </a:extLst>
           </p:cNvPr>
@@ -12745,7 +12745,7 @@
           <p:cNvPr id="8" name="">
             <a:extLst xmlns:a="http://schemas.openxmlformats.org/drawingml/2006/main">
               <a:ext uri="{FF2B5EF4-FFF2-40B4-BE49-F238E27FC236}">
-                <a16:creationId xmlns:a16="http://schemas.microsoft.com/office/drawing/2014/main" id="{6E32001A-1065-4F08-95D5-99767AC25C7A}"/>
+                <a16:creationId xmlns:a16="http://schemas.microsoft.com/office/drawing/2014/main" id="{8228FD46-9B88-4F79-B29E-F0499749E259}"/>
               </a:ext>
             </a:extLst>
           </p:cNvPr>
@@ -12797,7 +12797,7 @@
           <p:cNvPr id="9" name="">
             <a:extLst xmlns:a="http://schemas.openxmlformats.org/drawingml/2006/main">
               <a:ext uri="{FF2B5EF4-FFF2-40B4-BE49-F238E27FC236}">
-                <a16:creationId xmlns:a16="http://schemas.microsoft.com/office/drawing/2014/main" id="{42516893-62DF-493D-947B-36E278608769}"/>
+                <a16:creationId xmlns:a16="http://schemas.microsoft.com/office/drawing/2014/main" id="{04A74497-1EAE-4585-9B2E-AA6F50B9A417}"/>
               </a:ext>
             </a:extLst>
           </p:cNvPr>
@@ -12849,7 +12849,7 @@
           <p:cNvPr id="10" name="">
             <a:extLst xmlns:a="http://schemas.openxmlformats.org/drawingml/2006/main">
               <a:ext uri="{FF2B5EF4-FFF2-40B4-BE49-F238E27FC236}">
-                <a16:creationId xmlns:a16="http://schemas.microsoft.com/office/drawing/2014/main" id="{2998B228-03B9-452A-A8B6-861C78302F7C}"/>
+                <a16:creationId xmlns:a16="http://schemas.microsoft.com/office/drawing/2014/main" id="{6D1C07DA-8512-4412-9BC3-655F11D8C612}"/>
               </a:ext>
             </a:extLst>
           </p:cNvPr>
@@ -12901,7 +12901,7 @@
           <p:cNvPr id="11" name="">
             <a:extLst xmlns:a="http://schemas.openxmlformats.org/drawingml/2006/main">
               <a:ext uri="{FF2B5EF4-FFF2-40B4-BE49-F238E27FC236}">
-                <a16:creationId xmlns:a16="http://schemas.microsoft.com/office/drawing/2014/main" id="{78E4409C-2459-4528-AABE-6855A311199C}"/>
+                <a16:creationId xmlns:a16="http://schemas.microsoft.com/office/drawing/2014/main" id="{CCB0529B-42DD-4162-B749-3BA2DD89C85B}"/>
               </a:ext>
             </a:extLst>
           </p:cNvPr>
@@ -12932,7 +12932,7 @@
           <p:cNvPr id="12" name="">
             <a:extLst xmlns:a="http://schemas.openxmlformats.org/drawingml/2006/main">
               <a:ext uri="{FF2B5EF4-FFF2-40B4-BE49-F238E27FC236}">
-                <a16:creationId xmlns:a16="http://schemas.microsoft.com/office/drawing/2014/main" id="{A8644630-9219-43C7-9FF0-79DB2A0DCD56}"/>
+                <a16:creationId xmlns:a16="http://schemas.microsoft.com/office/drawing/2014/main" id="{D895F3BD-901A-4669-AB30-7700C381AEDC}"/>
               </a:ext>
             </a:extLst>
           </p:cNvPr>
@@ -12963,7 +12963,7 @@
           <p:cNvPr id="13" name="">
             <a:extLst xmlns:a="http://schemas.openxmlformats.org/drawingml/2006/main">
               <a:ext uri="{FF2B5EF4-FFF2-40B4-BE49-F238E27FC236}">
-                <a16:creationId xmlns:a16="http://schemas.microsoft.com/office/drawing/2014/main" id="{F154A428-7E76-44E5-A045-313FF96E7C8E}"/>
+                <a16:creationId xmlns:a16="http://schemas.microsoft.com/office/drawing/2014/main" id="{4D631FF7-8E59-45D7-B365-2B8DE802ADB4}"/>
               </a:ext>
             </a:extLst>
           </p:cNvPr>
@@ -13015,7 +13015,7 @@
           <p:cNvPr id="14" name="">
             <a:extLst xmlns:a="http://schemas.openxmlformats.org/drawingml/2006/main">
               <a:ext uri="{FF2B5EF4-FFF2-40B4-BE49-F238E27FC236}">
-                <a16:creationId xmlns:a16="http://schemas.microsoft.com/office/drawing/2014/main" id="{40279272-6AE8-4A5A-B660-8AA3A6B5CE38}"/>
+                <a16:creationId xmlns:a16="http://schemas.microsoft.com/office/drawing/2014/main" id="{81CDD301-BDEA-4145-9F73-E3DAD95FB9BF}"/>
               </a:ext>
             </a:extLst>
           </p:cNvPr>
@@ -13067,7 +13067,7 @@
           <p:cNvPr id="15" name="">
             <a:extLst xmlns:a="http://schemas.openxmlformats.org/drawingml/2006/main">
               <a:ext uri="{FF2B5EF4-FFF2-40B4-BE49-F238E27FC236}">
-                <a16:creationId xmlns:a16="http://schemas.microsoft.com/office/drawing/2014/main" id="{6CA02A95-0DEC-416D-AE37-67C42D5254DA}"/>
+                <a16:creationId xmlns:a16="http://schemas.microsoft.com/office/drawing/2014/main" id="{5B1D8E4B-07E8-4B4B-97C3-2399633B2CCF}"/>
               </a:ext>
             </a:extLst>
           </p:cNvPr>
@@ -13119,7 +13119,7 @@
           <p:cNvPr id="16" name="">
             <a:extLst xmlns:a="http://schemas.openxmlformats.org/drawingml/2006/main">
               <a:ext uri="{FF2B5EF4-FFF2-40B4-BE49-F238E27FC236}">
-                <a16:creationId xmlns:a16="http://schemas.microsoft.com/office/drawing/2014/main" id="{F1A0F62C-8BFA-4BFB-BFA0-BE7CE0DE1A48}"/>
+                <a16:creationId xmlns:a16="http://schemas.microsoft.com/office/drawing/2014/main" id="{E9EED3CE-F404-4E93-AC74-F33E4E687DED}"/>
               </a:ext>
             </a:extLst>
           </p:cNvPr>
@@ -13171,7 +13171,7 @@
           <p:cNvPr id="17" name="">
             <a:extLst xmlns:a="http://schemas.openxmlformats.org/drawingml/2006/main">
               <a:ext uri="{FF2B5EF4-FFF2-40B4-BE49-F238E27FC236}">
-                <a16:creationId xmlns:a16="http://schemas.microsoft.com/office/drawing/2014/main" id="{F1513E58-653A-4CE8-B408-5B6BA2BB80C7}"/>
+                <a16:creationId xmlns:a16="http://schemas.microsoft.com/office/drawing/2014/main" id="{5290C33C-0F91-46A1-8632-43645F95DEC3}"/>
               </a:ext>
             </a:extLst>
           </p:cNvPr>
@@ -13223,7 +13223,7 @@
           <p:cNvPr id="18" name="">
             <a:extLst xmlns:a="http://schemas.openxmlformats.org/drawingml/2006/main">
               <a:ext uri="{FF2B5EF4-FFF2-40B4-BE49-F238E27FC236}">
-                <a16:creationId xmlns:a16="http://schemas.microsoft.com/office/drawing/2014/main" id="{4F3FEC9B-E347-4DD6-A573-6FB5934D312E}"/>
+                <a16:creationId xmlns:a16="http://schemas.microsoft.com/office/drawing/2014/main" id="{36462787-3A14-482B-B143-BBB1B8B67B75}"/>
               </a:ext>
             </a:extLst>
           </p:cNvPr>
@@ -13254,7 +13254,7 @@
           <p:cNvPr id="19" name="">
             <a:extLst xmlns:a="http://schemas.openxmlformats.org/drawingml/2006/main">
               <a:ext uri="{FF2B5EF4-FFF2-40B4-BE49-F238E27FC236}">
-                <a16:creationId xmlns:a16="http://schemas.microsoft.com/office/drawing/2014/main" id="{DA534D1A-0E20-4C53-9786-448E33405F95}"/>
+                <a16:creationId xmlns:a16="http://schemas.microsoft.com/office/drawing/2014/main" id="{04FB72C5-6E7C-4485-B0E9-E0DD443969ED}"/>
               </a:ext>
             </a:extLst>
           </p:cNvPr>
@@ -13306,7 +13306,7 @@
           <p:cNvPr id="20" name="">
             <a:extLst xmlns:a="http://schemas.openxmlformats.org/drawingml/2006/main">
               <a:ext uri="{FF2B5EF4-FFF2-40B4-BE49-F238E27FC236}">
-                <a16:creationId xmlns:a16="http://schemas.microsoft.com/office/drawing/2014/main" id="{7ED2CD2A-58BE-469E-B42A-491E6A96B7EF}"/>
+                <a16:creationId xmlns:a16="http://schemas.microsoft.com/office/drawing/2014/main" id="{2F984E05-5A6E-48D2-B7FE-5BC627A9E45A}"/>
               </a:ext>
             </a:extLst>
           </p:cNvPr>
@@ -13358,7 +13358,7 @@
           <p:cNvPr id="21" name="">
             <a:extLst xmlns:a="http://schemas.openxmlformats.org/drawingml/2006/main">
               <a:ext uri="{FF2B5EF4-FFF2-40B4-BE49-F238E27FC236}">
-                <a16:creationId xmlns:a16="http://schemas.microsoft.com/office/drawing/2014/main" id="{ED5D98BB-0E22-4594-9FB1-19D117D6936D}"/>
+                <a16:creationId xmlns:a16="http://schemas.microsoft.com/office/drawing/2014/main" id="{D64D9C9F-507B-40A7-94D7-63ED56806820}"/>
               </a:ext>
             </a:extLst>
           </p:cNvPr>
@@ -13410,7 +13410,7 @@
           <p:cNvPr id="22" name="">
             <a:extLst xmlns:a="http://schemas.openxmlformats.org/drawingml/2006/main">
               <a:ext uri="{FF2B5EF4-FFF2-40B4-BE49-F238E27FC236}">
-                <a16:creationId xmlns:a16="http://schemas.microsoft.com/office/drawing/2014/main" id="{7FC66B0C-036C-43E0-A6AB-C843071C4987}"/>
+                <a16:creationId xmlns:a16="http://schemas.microsoft.com/office/drawing/2014/main" id="{2DBA1FD9-65D6-4093-B3FA-24277A12EA37}"/>
               </a:ext>
             </a:extLst>
           </p:cNvPr>
@@ -13462,7 +13462,7 @@
           <p:cNvPr id="23" name="">
             <a:extLst xmlns:a="http://schemas.openxmlformats.org/drawingml/2006/main">
               <a:ext uri="{FF2B5EF4-FFF2-40B4-BE49-F238E27FC236}">
-                <a16:creationId xmlns:a16="http://schemas.microsoft.com/office/drawing/2014/main" id="{DB5BE148-033B-43E5-9F71-199911500387}"/>
+                <a16:creationId xmlns:a16="http://schemas.microsoft.com/office/drawing/2014/main" id="{76627FF5-9C5A-4425-9EBF-A119362C41CF}"/>
               </a:ext>
             </a:extLst>
           </p:cNvPr>
@@ -13514,7 +13514,7 @@
           <p:cNvPr id="24" name="">
             <a:extLst xmlns:a="http://schemas.openxmlformats.org/drawingml/2006/main">
               <a:ext uri="{FF2B5EF4-FFF2-40B4-BE49-F238E27FC236}">
-                <a16:creationId xmlns:a16="http://schemas.microsoft.com/office/drawing/2014/main" id="{C395ABF3-C073-4878-AE9A-DEDF211AE96C}"/>
+                <a16:creationId xmlns:a16="http://schemas.microsoft.com/office/drawing/2014/main" id="{20042A14-70B5-42F2-BF7B-D38885F21D0D}"/>
               </a:ext>
             </a:extLst>
           </p:cNvPr>
@@ -13545,7 +13545,7 @@
           <p:cNvPr id="25" name="">
             <a:extLst xmlns:a="http://schemas.openxmlformats.org/drawingml/2006/main">
               <a:ext uri="{FF2B5EF4-FFF2-40B4-BE49-F238E27FC236}">
-                <a16:creationId xmlns:a16="http://schemas.microsoft.com/office/drawing/2014/main" id="{45EB4652-B887-4471-8D14-C18CB2CDC9CB}"/>
+                <a16:creationId xmlns:a16="http://schemas.microsoft.com/office/drawing/2014/main" id="{D9795CD8-3DA8-4CE8-8E88-0D41BD5E8E4E}"/>
               </a:ext>
             </a:extLst>
           </p:cNvPr>
@@ -13576,7 +13576,7 @@
           <p:cNvPr id="26" name="">
             <a:extLst xmlns:a="http://schemas.openxmlformats.org/drawingml/2006/main">
               <a:ext uri="{FF2B5EF4-FFF2-40B4-BE49-F238E27FC236}">
-                <a16:creationId xmlns:a16="http://schemas.microsoft.com/office/drawing/2014/main" id="{DD0A0845-69F5-41FF-9A6B-2E2A7929DB1B}"/>
+                <a16:creationId xmlns:a16="http://schemas.microsoft.com/office/drawing/2014/main" id="{979C5EA8-C901-4291-B145-14A398CBFDA6}"/>
               </a:ext>
             </a:extLst>
           </p:cNvPr>
@@ -13628,7 +13628,7 @@
           <p:cNvPr id="27" name="">
             <a:extLst xmlns:a="http://schemas.openxmlformats.org/drawingml/2006/main">
               <a:ext uri="{FF2B5EF4-FFF2-40B4-BE49-F238E27FC236}">
-                <a16:creationId xmlns:a16="http://schemas.microsoft.com/office/drawing/2014/main" id="{87EF7944-E6DB-4982-83E0-37BEA1BFC369}"/>
+                <a16:creationId xmlns:a16="http://schemas.microsoft.com/office/drawing/2014/main" id="{A7B05712-96CD-4C32-8B0E-0DAD79598B70}"/>
               </a:ext>
             </a:extLst>
           </p:cNvPr>
@@ -13680,7 +13680,7 @@
           <p:cNvPr id="28" name="">
             <a:extLst xmlns:a="http://schemas.openxmlformats.org/drawingml/2006/main">
               <a:ext uri="{FF2B5EF4-FFF2-40B4-BE49-F238E27FC236}">
-                <a16:creationId xmlns:a16="http://schemas.microsoft.com/office/drawing/2014/main" id="{29029FE9-8C19-4037-8106-38BBB9A79E5E}"/>
+                <a16:creationId xmlns:a16="http://schemas.microsoft.com/office/drawing/2014/main" id="{A165403E-FB22-446A-8680-09EE2237B67A}"/>
               </a:ext>
             </a:extLst>
           </p:cNvPr>
@@ -13732,7 +13732,7 @@
           <p:cNvPr id="29" name="">
             <a:extLst xmlns:a="http://schemas.openxmlformats.org/drawingml/2006/main">
               <a:ext uri="{FF2B5EF4-FFF2-40B4-BE49-F238E27FC236}">
-                <a16:creationId xmlns:a16="http://schemas.microsoft.com/office/drawing/2014/main" id="{81E42212-D49F-468C-9E03-7552D10FAD3E}"/>
+                <a16:creationId xmlns:a16="http://schemas.microsoft.com/office/drawing/2014/main" id="{66FA7907-F008-440A-8F6F-42A6D5142230}"/>
               </a:ext>
             </a:extLst>
           </p:cNvPr>
@@ -13784,7 +13784,7 @@
           <p:cNvPr id="30" name="">
             <a:extLst xmlns:a="http://schemas.openxmlformats.org/drawingml/2006/main">
               <a:ext uri="{FF2B5EF4-FFF2-40B4-BE49-F238E27FC236}">
-                <a16:creationId xmlns:a16="http://schemas.microsoft.com/office/drawing/2014/main" id="{49104446-3CA2-4F3E-9472-2E3F6D90F8A5}"/>
+                <a16:creationId xmlns:a16="http://schemas.microsoft.com/office/drawing/2014/main" id="{D3FBD7C4-2080-40DD-B0E5-17D15E1F4AA5}"/>
               </a:ext>
             </a:extLst>
           </p:cNvPr>
@@ -13836,7 +13836,7 @@
           <p:cNvPr id="31" name="">
             <a:extLst xmlns:a="http://schemas.openxmlformats.org/drawingml/2006/main">
               <a:ext uri="{FF2B5EF4-FFF2-40B4-BE49-F238E27FC236}">
-                <a16:creationId xmlns:a16="http://schemas.microsoft.com/office/drawing/2014/main" id="{206BB14E-483E-4AB1-8A47-DDC19102A113}"/>
+                <a16:creationId xmlns:a16="http://schemas.microsoft.com/office/drawing/2014/main" id="{ADCFD48E-B784-4188-B40C-7CDC6D392F66}"/>
               </a:ext>
             </a:extLst>
           </p:cNvPr>
@@ -13867,7 +13867,7 @@
           <p:cNvPr id="32" name="">
             <a:extLst xmlns:a="http://schemas.openxmlformats.org/drawingml/2006/main">
               <a:ext uri="{FF2B5EF4-FFF2-40B4-BE49-F238E27FC236}">
-                <a16:creationId xmlns:a16="http://schemas.microsoft.com/office/drawing/2014/main" id="{C5075B16-7F1A-4E16-8F18-E48103C804D1}"/>
+                <a16:creationId xmlns:a16="http://schemas.microsoft.com/office/drawing/2014/main" id="{805C8BFE-7CDE-4D12-91A0-FD9C2AAF1245}"/>
               </a:ext>
             </a:extLst>
           </p:cNvPr>
@@ -13919,7 +13919,7 @@
           <p:cNvPr id="33" name="">
             <a:extLst xmlns:a="http://schemas.openxmlformats.org/drawingml/2006/main">
               <a:ext uri="{FF2B5EF4-FFF2-40B4-BE49-F238E27FC236}">
-                <a16:creationId xmlns:a16="http://schemas.microsoft.com/office/drawing/2014/main" id="{A5BF752B-AD59-4D85-BFFC-1B802272E4C5}"/>
+                <a16:creationId xmlns:a16="http://schemas.microsoft.com/office/drawing/2014/main" id="{84C61FFC-F08B-4957-84B6-D20D8F23E8F4}"/>
               </a:ext>
             </a:extLst>
           </p:cNvPr>
@@ -13971,7 +13971,7 @@
           <p:cNvPr id="34" name="">
             <a:extLst xmlns:a="http://schemas.openxmlformats.org/drawingml/2006/main">
               <a:ext uri="{FF2B5EF4-FFF2-40B4-BE49-F238E27FC236}">
-                <a16:creationId xmlns:a16="http://schemas.microsoft.com/office/drawing/2014/main" id="{719BF7CA-6746-488C-A119-ED4B368CBDAB}"/>
+                <a16:creationId xmlns:a16="http://schemas.microsoft.com/office/drawing/2014/main" id="{8F3621C8-1857-4FEA-BC3E-6A35697EC610}"/>
               </a:ext>
             </a:extLst>
           </p:cNvPr>
@@ -14023,7 +14023,7 @@
           <p:cNvPr id="35" name="">
             <a:extLst xmlns:a="http://schemas.openxmlformats.org/drawingml/2006/main">
               <a:ext uri="{FF2B5EF4-FFF2-40B4-BE49-F238E27FC236}">
-                <a16:creationId xmlns:a16="http://schemas.microsoft.com/office/drawing/2014/main" id="{FE4EF6B7-BE61-4250-9041-ACB39868C91E}"/>
+                <a16:creationId xmlns:a16="http://schemas.microsoft.com/office/drawing/2014/main" id="{611ADC83-CF0F-4E7E-A474-8E81BE3C9484}"/>
               </a:ext>
             </a:extLst>
           </p:cNvPr>
@@ -14075,7 +14075,7 @@
           <p:cNvPr id="36" name="">
             <a:extLst xmlns:a="http://schemas.openxmlformats.org/drawingml/2006/main">
               <a:ext uri="{FF2B5EF4-FFF2-40B4-BE49-F238E27FC236}">
-                <a16:creationId xmlns:a16="http://schemas.microsoft.com/office/drawing/2014/main" id="{CBA25D67-AB75-4448-9D64-C37BC6B5E8E5}"/>
+                <a16:creationId xmlns:a16="http://schemas.microsoft.com/office/drawing/2014/main" id="{3A8E22BD-B9EC-4A63-ACA8-B8DFE3B41300}"/>
               </a:ext>
             </a:extLst>
           </p:cNvPr>
@@ -14127,7 +14127,7 @@
           <p:cNvPr id="37" name="">
             <a:extLst xmlns:a="http://schemas.openxmlformats.org/drawingml/2006/main">
               <a:ext uri="{FF2B5EF4-FFF2-40B4-BE49-F238E27FC236}">
-                <a16:creationId xmlns:a16="http://schemas.microsoft.com/office/drawing/2014/main" id="{3E773378-A08D-4603-AB67-7BDF18028930}"/>
+                <a16:creationId xmlns:a16="http://schemas.microsoft.com/office/drawing/2014/main" id="{818F6979-DE16-4C0A-8FF7-11C9145F8728}"/>
               </a:ext>
             </a:extLst>
           </p:cNvPr>
@@ -14158,7 +14158,7 @@
           <p:cNvPr id="38" name="">
             <a:extLst xmlns:a="http://schemas.openxmlformats.org/drawingml/2006/main">
               <a:ext uri="{FF2B5EF4-FFF2-40B4-BE49-F238E27FC236}">
-                <a16:creationId xmlns:a16="http://schemas.microsoft.com/office/drawing/2014/main" id="{8DBBD249-CACE-4CF8-BF0B-2B4CFC09EE4A}"/>
+                <a16:creationId xmlns:a16="http://schemas.microsoft.com/office/drawing/2014/main" id="{F29E7D81-41D3-42A6-8485-71600BC50A69}"/>
               </a:ext>
             </a:extLst>
           </p:cNvPr>
@@ -14189,7 +14189,7 @@
           <p:cNvPr id="39" name="">
             <a:extLst xmlns:a="http://schemas.openxmlformats.org/drawingml/2006/main">
               <a:ext uri="{FF2B5EF4-FFF2-40B4-BE49-F238E27FC236}">
-                <a16:creationId xmlns:a16="http://schemas.microsoft.com/office/drawing/2014/main" id="{EDD17280-1201-4531-87BE-3A44EAE95FA7}"/>
+                <a16:creationId xmlns:a16="http://schemas.microsoft.com/office/drawing/2014/main" id="{CEBB36F1-2975-4EBF-9858-7BB1F7300259}"/>
               </a:ext>
             </a:extLst>
           </p:cNvPr>
@@ -14241,7 +14241,7 @@
           <p:cNvPr id="40" name="">
             <a:extLst xmlns:a="http://schemas.openxmlformats.org/drawingml/2006/main">
               <a:ext uri="{FF2B5EF4-FFF2-40B4-BE49-F238E27FC236}">
-                <a16:creationId xmlns:a16="http://schemas.microsoft.com/office/drawing/2014/main" id="{76F6DE18-6F21-41FA-A78F-C29971FA169D}"/>
+                <a16:creationId xmlns:a16="http://schemas.microsoft.com/office/drawing/2014/main" id="{CB2E9205-D312-47B5-942D-E3E5C1609C84}"/>
               </a:ext>
             </a:extLst>
           </p:cNvPr>
@@ -14293,7 +14293,7 @@
           <p:cNvPr id="41" name="">
             <a:extLst xmlns:a="http://schemas.openxmlformats.org/drawingml/2006/main">
               <a:ext uri="{FF2B5EF4-FFF2-40B4-BE49-F238E27FC236}">
-                <a16:creationId xmlns:a16="http://schemas.microsoft.com/office/drawing/2014/main" id="{EA5F48DB-B2CF-43BB-8275-5B0B30035D90}"/>
+                <a16:creationId xmlns:a16="http://schemas.microsoft.com/office/drawing/2014/main" id="{96C789CE-C4E6-45D6-9FD1-33AB3104D61C}"/>
               </a:ext>
             </a:extLst>
           </p:cNvPr>
@@ -14345,7 +14345,7 @@
           <p:cNvPr id="42" name="">
             <a:extLst xmlns:a="http://schemas.openxmlformats.org/drawingml/2006/main">
               <a:ext uri="{FF2B5EF4-FFF2-40B4-BE49-F238E27FC236}">
-                <a16:creationId xmlns:a16="http://schemas.microsoft.com/office/drawing/2014/main" id="{E56297BC-7E4C-4144-94FC-91D8605FD225}"/>
+                <a16:creationId xmlns:a16="http://schemas.microsoft.com/office/drawing/2014/main" id="{4E4211F3-F003-4422-9D73-A03FE9745E77}"/>
               </a:ext>
             </a:extLst>
           </p:cNvPr>
@@ -14397,7 +14397,7 @@
           <p:cNvPr id="43" name="">
             <a:extLst xmlns:a="http://schemas.openxmlformats.org/drawingml/2006/main">
               <a:ext uri="{FF2B5EF4-FFF2-40B4-BE49-F238E27FC236}">
-                <a16:creationId xmlns:a16="http://schemas.microsoft.com/office/drawing/2014/main" id="{D1927ACC-19F7-44EE-B997-3E0F2F05D145}"/>
+                <a16:creationId xmlns:a16="http://schemas.microsoft.com/office/drawing/2014/main" id="{862555F0-394E-406D-96D9-AE8D05DA70F1}"/>
               </a:ext>
             </a:extLst>
           </p:cNvPr>
@@ -14449,7 +14449,7 @@
           <p:cNvPr id="44" name="">
             <a:extLst xmlns:a="http://schemas.openxmlformats.org/drawingml/2006/main">
               <a:ext uri="{FF2B5EF4-FFF2-40B4-BE49-F238E27FC236}">
-                <a16:creationId xmlns:a16="http://schemas.microsoft.com/office/drawing/2014/main" id="{65630BE8-3B1B-49EE-92DD-C00D47C652AD}"/>
+                <a16:creationId xmlns:a16="http://schemas.microsoft.com/office/drawing/2014/main" id="{D24F9D66-C2E9-4B77-8599-2809C70ACB00}"/>
               </a:ext>
             </a:extLst>
           </p:cNvPr>
@@ -14480,7 +14480,7 @@
           <p:cNvPr id="45" name="">
             <a:extLst xmlns:a="http://schemas.openxmlformats.org/drawingml/2006/main">
               <a:ext uri="{FF2B5EF4-FFF2-40B4-BE49-F238E27FC236}">
-                <a16:creationId xmlns:a16="http://schemas.microsoft.com/office/drawing/2014/main" id="{43564440-C93E-47DF-A02F-042684756E38}"/>
+                <a16:creationId xmlns:a16="http://schemas.microsoft.com/office/drawing/2014/main" id="{354C9DDF-80D0-407E-BA17-099CEF252F97}"/>
               </a:ext>
             </a:extLst>
           </p:cNvPr>
@@ -14532,7 +14532,7 @@
           <p:cNvPr id="46" name="">
             <a:extLst xmlns:a="http://schemas.openxmlformats.org/drawingml/2006/main">
               <a:ext uri="{FF2B5EF4-FFF2-40B4-BE49-F238E27FC236}">
-                <a16:creationId xmlns:a16="http://schemas.microsoft.com/office/drawing/2014/main" id="{B69413E6-1827-4506-828F-4857321EBF66}"/>
+                <a16:creationId xmlns:a16="http://schemas.microsoft.com/office/drawing/2014/main" id="{9C9561A7-A42C-452E-94E8-CCD38DD99D19}"/>
               </a:ext>
             </a:extLst>
           </p:cNvPr>
@@ -14584,7 +14584,7 @@
           <p:cNvPr id="47" name="">
             <a:extLst xmlns:a="http://schemas.openxmlformats.org/drawingml/2006/main">
               <a:ext uri="{FF2B5EF4-FFF2-40B4-BE49-F238E27FC236}">
-                <a16:creationId xmlns:a16="http://schemas.microsoft.com/office/drawing/2014/main" id="{CAB4B5EA-82AE-477F-B1CA-C146C824D9AC}"/>
+                <a16:creationId xmlns:a16="http://schemas.microsoft.com/office/drawing/2014/main" id="{19037960-765E-4C1C-B1F2-B5A245C034DB}"/>
               </a:ext>
             </a:extLst>
           </p:cNvPr>
@@ -14636,7 +14636,7 @@
           <p:cNvPr id="48" name="">
             <a:extLst xmlns:a="http://schemas.openxmlformats.org/drawingml/2006/main">
               <a:ext uri="{FF2B5EF4-FFF2-40B4-BE49-F238E27FC236}">
-                <a16:creationId xmlns:a16="http://schemas.microsoft.com/office/drawing/2014/main" id="{C7E9E18E-AEF6-499D-B0B3-F68DBEDFBFFC}"/>
+                <a16:creationId xmlns:a16="http://schemas.microsoft.com/office/drawing/2014/main" id="{0D80ED69-C86F-4400-9D12-FDD34E2583AC}"/>
               </a:ext>
             </a:extLst>
           </p:cNvPr>
@@ -14688,7 +14688,7 @@
           <p:cNvPr id="49" name="">
             <a:extLst xmlns:a="http://schemas.openxmlformats.org/drawingml/2006/main">
               <a:ext uri="{FF2B5EF4-FFF2-40B4-BE49-F238E27FC236}">
-                <a16:creationId xmlns:a16="http://schemas.microsoft.com/office/drawing/2014/main" id="{3BD2BD31-1609-4D2D-A60A-BFA2AB85AECF}"/>
+                <a16:creationId xmlns:a16="http://schemas.microsoft.com/office/drawing/2014/main" id="{71E02033-AB67-4A80-875D-C995187014E6}"/>
               </a:ext>
             </a:extLst>
           </p:cNvPr>
@@ -14740,7 +14740,7 @@
           <p:cNvPr id="50" name="">
             <a:extLst xmlns:a="http://schemas.openxmlformats.org/drawingml/2006/main">
               <a:ext uri="{FF2B5EF4-FFF2-40B4-BE49-F238E27FC236}">
-                <a16:creationId xmlns:a16="http://schemas.microsoft.com/office/drawing/2014/main" id="{3EE97E89-CFB9-48F4-924F-4E4F5052A454}"/>
+                <a16:creationId xmlns:a16="http://schemas.microsoft.com/office/drawing/2014/main" id="{E880DA35-7534-41DA-AF1C-2E7C7CFD08AF}"/>
               </a:ext>
             </a:extLst>
           </p:cNvPr>
@@ -14771,7 +14771,7 @@
           <p:cNvPr id="51" name="">
             <a:extLst xmlns:a="http://schemas.openxmlformats.org/drawingml/2006/main">
               <a:ext uri="{FF2B5EF4-FFF2-40B4-BE49-F238E27FC236}">
-                <a16:creationId xmlns:a16="http://schemas.microsoft.com/office/drawing/2014/main" id="{ED20E3B9-4969-4E24-BBA3-FCBA62F77CB9}"/>
+                <a16:creationId xmlns:a16="http://schemas.microsoft.com/office/drawing/2014/main" id="{56723C7D-3396-4E7B-843C-C7C0EF8553DD}"/>
               </a:ext>
             </a:extLst>
           </p:cNvPr>
@@ -14802,7 +14802,7 @@
           <p:cNvPr id="52" name="">
             <a:extLst xmlns:a="http://schemas.openxmlformats.org/drawingml/2006/main">
               <a:ext uri="{FF2B5EF4-FFF2-40B4-BE49-F238E27FC236}">
-                <a16:creationId xmlns:a16="http://schemas.microsoft.com/office/drawing/2014/main" id="{407B825C-2DA5-4895-98E6-F2C4355038DA}"/>
+                <a16:creationId xmlns:a16="http://schemas.microsoft.com/office/drawing/2014/main" id="{5D619429-C905-44FD-BCB1-09EFBFC8B4CB}"/>
               </a:ext>
             </a:extLst>
           </p:cNvPr>
@@ -14854,7 +14854,7 @@
           <p:cNvPr id="53" name="">
             <a:extLst xmlns:a="http://schemas.openxmlformats.org/drawingml/2006/main">
               <a:ext uri="{FF2B5EF4-FFF2-40B4-BE49-F238E27FC236}">
-                <a16:creationId xmlns:a16="http://schemas.microsoft.com/office/drawing/2014/main" id="{1B0DD3AF-503A-4712-911D-FF680161545D}"/>
+                <a16:creationId xmlns:a16="http://schemas.microsoft.com/office/drawing/2014/main" id="{599EB84E-7F2D-45D7-8316-5BDFE1B3D8BF}"/>
               </a:ext>
             </a:extLst>
           </p:cNvPr>
@@ -14906,7 +14906,7 @@
           <p:cNvPr id="54" name="">
             <a:extLst xmlns:a="http://schemas.openxmlformats.org/drawingml/2006/main">
               <a:ext uri="{FF2B5EF4-FFF2-40B4-BE49-F238E27FC236}">
-                <a16:creationId xmlns:a16="http://schemas.microsoft.com/office/drawing/2014/main" id="{4DEDEE70-BACF-468A-B761-E18298C60D6D}"/>
+                <a16:creationId xmlns:a16="http://schemas.microsoft.com/office/drawing/2014/main" id="{80F7A9CC-CF45-4992-8E3A-DBB28D13F8DD}"/>
               </a:ext>
             </a:extLst>
           </p:cNvPr>
@@ -14958,7 +14958,7 @@
           <p:cNvPr id="55" name="">
             <a:extLst xmlns:a="http://schemas.openxmlformats.org/drawingml/2006/main">
               <a:ext uri="{FF2B5EF4-FFF2-40B4-BE49-F238E27FC236}">
-                <a16:creationId xmlns:a16="http://schemas.microsoft.com/office/drawing/2014/main" id="{C3FAE01A-8893-4A9A-910C-2BE4D39FCCCE}"/>
+                <a16:creationId xmlns:a16="http://schemas.microsoft.com/office/drawing/2014/main" id="{C86F62A2-AFC1-4DC3-9FC2-24598317EC0D}"/>
               </a:ext>
             </a:extLst>
           </p:cNvPr>
@@ -15010,7 +15010,7 @@
           <p:cNvPr id="56" name="">
             <a:extLst xmlns:a="http://schemas.openxmlformats.org/drawingml/2006/main">
               <a:ext uri="{FF2B5EF4-FFF2-40B4-BE49-F238E27FC236}">
-                <a16:creationId xmlns:a16="http://schemas.microsoft.com/office/drawing/2014/main" id="{BC156286-414B-490D-8683-4286DF4EC5F3}"/>
+                <a16:creationId xmlns:a16="http://schemas.microsoft.com/office/drawing/2014/main" id="{7C56F6B9-98B5-4326-A733-8C130D973436}"/>
               </a:ext>
             </a:extLst>
           </p:cNvPr>
@@ -15062,7 +15062,7 @@
           <p:cNvPr id="57" name="">
             <a:extLst xmlns:a="http://schemas.openxmlformats.org/drawingml/2006/main">
               <a:ext uri="{FF2B5EF4-FFF2-40B4-BE49-F238E27FC236}">
-                <a16:creationId xmlns:a16="http://schemas.microsoft.com/office/drawing/2014/main" id="{2B41DD9E-1B51-4915-A781-182C582DD42D}"/>
+                <a16:creationId xmlns:a16="http://schemas.microsoft.com/office/drawing/2014/main" id="{B7626F04-C6DE-42E5-9E4D-69E0BE181D65}"/>
               </a:ext>
             </a:extLst>
           </p:cNvPr>
@@ -15093,7 +15093,7 @@
           <p:cNvPr id="58" name="">
             <a:extLst xmlns:a="http://schemas.openxmlformats.org/drawingml/2006/main">
               <a:ext uri="{FF2B5EF4-FFF2-40B4-BE49-F238E27FC236}">
-                <a16:creationId xmlns:a16="http://schemas.microsoft.com/office/drawing/2014/main" id="{42BDE5F4-8CA2-431C-8442-B4D37D495CE7}"/>
+                <a16:creationId xmlns:a16="http://schemas.microsoft.com/office/drawing/2014/main" id="{CD489433-28E4-4EDE-8A5A-5981C8E0755A}"/>
               </a:ext>
             </a:extLst>
           </p:cNvPr>
@@ -15145,7 +15145,7 @@
           <p:cNvPr id="59" name="">
             <a:extLst xmlns:a="http://schemas.openxmlformats.org/drawingml/2006/main">
               <a:ext uri="{FF2B5EF4-FFF2-40B4-BE49-F238E27FC236}">
-                <a16:creationId xmlns:a16="http://schemas.microsoft.com/office/drawing/2014/main" id="{F09B92AF-4291-4B65-B416-11EFE1DBE0FB}"/>
+                <a16:creationId xmlns:a16="http://schemas.microsoft.com/office/drawing/2014/main" id="{50CE20E0-6CE9-445F-808C-B879276375B3}"/>
               </a:ext>
             </a:extLst>
           </p:cNvPr>
@@ -15197,7 +15197,7 @@
           <p:cNvPr id="60" name="">
             <a:extLst xmlns:a="http://schemas.openxmlformats.org/drawingml/2006/main">
               <a:ext uri="{FF2B5EF4-FFF2-40B4-BE49-F238E27FC236}">
-                <a16:creationId xmlns:a16="http://schemas.microsoft.com/office/drawing/2014/main" id="{0C1D8CD6-E1BC-40FF-A5F3-B68EA7C9BCEF}"/>
+                <a16:creationId xmlns:a16="http://schemas.microsoft.com/office/drawing/2014/main" id="{7858446B-1C06-4EA0-B389-3BE770360374}"/>
               </a:ext>
             </a:extLst>
           </p:cNvPr>
@@ -15249,7 +15249,7 @@
           <p:cNvPr id="61" name="">
             <a:extLst xmlns:a="http://schemas.openxmlformats.org/drawingml/2006/main">
               <a:ext uri="{FF2B5EF4-FFF2-40B4-BE49-F238E27FC236}">
-                <a16:creationId xmlns:a16="http://schemas.microsoft.com/office/drawing/2014/main" id="{F7AA6792-1F03-4FE8-B8A3-AFBE7A389811}"/>
+                <a16:creationId xmlns:a16="http://schemas.microsoft.com/office/drawing/2014/main" id="{8FF2FDE2-E7BA-4576-8FD9-7EFD98A0AA1B}"/>
               </a:ext>
             </a:extLst>
           </p:cNvPr>
@@ -15301,7 +15301,7 @@
           <p:cNvPr id="62" name="">
             <a:extLst xmlns:a="http://schemas.openxmlformats.org/drawingml/2006/main">
               <a:ext uri="{FF2B5EF4-FFF2-40B4-BE49-F238E27FC236}">
-                <a16:creationId xmlns:a16="http://schemas.microsoft.com/office/drawing/2014/main" id="{A315E5EC-970D-4F21-951E-DDB90D21B1B6}"/>
+                <a16:creationId xmlns:a16="http://schemas.microsoft.com/office/drawing/2014/main" id="{6168C931-09AC-4793-811A-4C789005BCC7}"/>
               </a:ext>
             </a:extLst>
           </p:cNvPr>
@@ -15353,7 +15353,7 @@
           <p:cNvPr id="63" name="">
             <a:extLst xmlns:a="http://schemas.openxmlformats.org/drawingml/2006/main">
               <a:ext uri="{FF2B5EF4-FFF2-40B4-BE49-F238E27FC236}">
-                <a16:creationId xmlns:a16="http://schemas.microsoft.com/office/drawing/2014/main" id="{72790346-8798-4B11-87FB-576C1DB30183}"/>
+                <a16:creationId xmlns:a16="http://schemas.microsoft.com/office/drawing/2014/main" id="{543DEC78-B250-41CC-8D3E-1FAB8DE39D96}"/>
               </a:ext>
             </a:extLst>
           </p:cNvPr>
@@ -15384,7 +15384,7 @@
           <p:cNvPr id="64" name="">
             <a:extLst xmlns:a="http://schemas.openxmlformats.org/drawingml/2006/main">
               <a:ext uri="{FF2B5EF4-FFF2-40B4-BE49-F238E27FC236}">
-                <a16:creationId xmlns:a16="http://schemas.microsoft.com/office/drawing/2014/main" id="{2872781D-C67C-42ED-B696-FDD661EA121F}"/>
+                <a16:creationId xmlns:a16="http://schemas.microsoft.com/office/drawing/2014/main" id="{A2868A7C-1C4B-43E8-968F-50B1005888A4}"/>
               </a:ext>
             </a:extLst>
           </p:cNvPr>
@@ -15415,7 +15415,7 @@
           <p:cNvPr id="65" name="">
             <a:extLst xmlns:a="http://schemas.openxmlformats.org/drawingml/2006/main">
               <a:ext uri="{FF2B5EF4-FFF2-40B4-BE49-F238E27FC236}">
-                <a16:creationId xmlns:a16="http://schemas.microsoft.com/office/drawing/2014/main" id="{48A0D430-703E-43A0-9DC0-C1059FC64F2E}"/>
+                <a16:creationId xmlns:a16="http://schemas.microsoft.com/office/drawing/2014/main" id="{50AB63A6-2D50-4114-BF75-5B397FA1B086}"/>
               </a:ext>
             </a:extLst>
           </p:cNvPr>
@@ -15467,7 +15467,7 @@
           <p:cNvPr id="66" name="">
             <a:extLst xmlns:a="http://schemas.openxmlformats.org/drawingml/2006/main">
               <a:ext uri="{FF2B5EF4-FFF2-40B4-BE49-F238E27FC236}">
-                <a16:creationId xmlns:a16="http://schemas.microsoft.com/office/drawing/2014/main" id="{E99B23AC-4F93-412B-9244-F95487D2D991}"/>
+                <a16:creationId xmlns:a16="http://schemas.microsoft.com/office/drawing/2014/main" id="{A8D1A5AE-1E34-489D-BC52-E871FC7E3E0E}"/>
               </a:ext>
             </a:extLst>
           </p:cNvPr>
@@ -15519,7 +15519,7 @@
           <p:cNvPr id="67" name="">
             <a:extLst xmlns:a="http://schemas.openxmlformats.org/drawingml/2006/main">
               <a:ext uri="{FF2B5EF4-FFF2-40B4-BE49-F238E27FC236}">
-                <a16:creationId xmlns:a16="http://schemas.microsoft.com/office/drawing/2014/main" id="{A9732D12-075C-45F6-ACA2-962E04CFE311}"/>
+                <a16:creationId xmlns:a16="http://schemas.microsoft.com/office/drawing/2014/main" id="{07F3735D-031F-4A5E-B9DE-F951CF0D97B7}"/>
               </a:ext>
             </a:extLst>
           </p:cNvPr>
@@ -15571,7 +15571,7 @@
           <p:cNvPr id="68" name="">
             <a:extLst xmlns:a="http://schemas.openxmlformats.org/drawingml/2006/main">
               <a:ext uri="{FF2B5EF4-FFF2-40B4-BE49-F238E27FC236}">
-                <a16:creationId xmlns:a16="http://schemas.microsoft.com/office/drawing/2014/main" id="{11254B85-39E1-4E4C-B45F-3660308A96A1}"/>
+                <a16:creationId xmlns:a16="http://schemas.microsoft.com/office/drawing/2014/main" id="{464ADA4B-3429-48FF-AC74-D7D9641DD137}"/>
               </a:ext>
             </a:extLst>
           </p:cNvPr>
@@ -15623,7 +15623,7 @@
           <p:cNvPr id="69" name="">
             <a:extLst xmlns:a="http://schemas.openxmlformats.org/drawingml/2006/main">
               <a:ext uri="{FF2B5EF4-FFF2-40B4-BE49-F238E27FC236}">
-                <a16:creationId xmlns:a16="http://schemas.microsoft.com/office/drawing/2014/main" id="{5AE8EB66-4F64-4D6F-B415-810D72F086D1}"/>
+                <a16:creationId xmlns:a16="http://schemas.microsoft.com/office/drawing/2014/main" id="{CD30DFDE-F1B9-44EB-B1A9-209301FC0BB3}"/>
               </a:ext>
             </a:extLst>
           </p:cNvPr>
@@ -15675,7 +15675,7 @@
           <p:cNvPr id="70" name="">
             <a:extLst xmlns:a="http://schemas.openxmlformats.org/drawingml/2006/main">
               <a:ext uri="{FF2B5EF4-FFF2-40B4-BE49-F238E27FC236}">
-                <a16:creationId xmlns:a16="http://schemas.microsoft.com/office/drawing/2014/main" id="{5F9D5967-7BF6-43DE-8C23-AF49FA004920}"/>
+                <a16:creationId xmlns:a16="http://schemas.microsoft.com/office/drawing/2014/main" id="{17F76A9F-EF15-4321-9393-6AA313EA27DE}"/>
               </a:ext>
             </a:extLst>
           </p:cNvPr>
@@ -15706,7 +15706,7 @@
           <p:cNvPr id="71" name="">
             <a:extLst xmlns:a="http://schemas.openxmlformats.org/drawingml/2006/main">
               <a:ext uri="{FF2B5EF4-FFF2-40B4-BE49-F238E27FC236}">
-                <a16:creationId xmlns:a16="http://schemas.microsoft.com/office/drawing/2014/main" id="{4767D999-3B87-4036-9342-C8F21E5B6676}"/>
+                <a16:creationId xmlns:a16="http://schemas.microsoft.com/office/drawing/2014/main" id="{4E602AB5-B827-4F3E-842D-62679A17C465}"/>
               </a:ext>
             </a:extLst>
           </p:cNvPr>
@@ -15758,7 +15758,7 @@
           <p:cNvPr id="72" name="">
             <a:extLst xmlns:a="http://schemas.openxmlformats.org/drawingml/2006/main">
               <a:ext uri="{FF2B5EF4-FFF2-40B4-BE49-F238E27FC236}">
-                <a16:creationId xmlns:a16="http://schemas.microsoft.com/office/drawing/2014/main" id="{234D6472-A2D6-49E7-A78C-C78143ACC782}"/>
+                <a16:creationId xmlns:a16="http://schemas.microsoft.com/office/drawing/2014/main" id="{CC705E2F-99C4-4A19-9D4D-E0F6FD19079D}"/>
               </a:ext>
             </a:extLst>
           </p:cNvPr>
@@ -15810,7 +15810,7 @@
           <p:cNvPr id="73" name="">
             <a:extLst xmlns:a="http://schemas.openxmlformats.org/drawingml/2006/main">
               <a:ext uri="{FF2B5EF4-FFF2-40B4-BE49-F238E27FC236}">
-                <a16:creationId xmlns:a16="http://schemas.microsoft.com/office/drawing/2014/main" id="{D3C98274-E07A-45BF-B8A8-585B671BC558}"/>
+                <a16:creationId xmlns:a16="http://schemas.microsoft.com/office/drawing/2014/main" id="{FDB6AD86-0FDC-4444-99EF-A3E4B97346A8}"/>
               </a:ext>
             </a:extLst>
           </p:cNvPr>
@@ -15862,7 +15862,7 @@
           <p:cNvPr id="74" name="">
             <a:extLst xmlns:a="http://schemas.openxmlformats.org/drawingml/2006/main">
               <a:ext uri="{FF2B5EF4-FFF2-40B4-BE49-F238E27FC236}">
-                <a16:creationId xmlns:a16="http://schemas.microsoft.com/office/drawing/2014/main" id="{BABF71C0-48C1-48E7-BEB9-A222FB00A442}"/>
+                <a16:creationId xmlns:a16="http://schemas.microsoft.com/office/drawing/2014/main" id="{503FAE74-EA32-4E4E-8656-D73F5DEDA576}"/>
               </a:ext>
             </a:extLst>
           </p:cNvPr>
@@ -15914,7 +15914,7 @@
           <p:cNvPr id="75" name="">
             <a:extLst xmlns:a="http://schemas.openxmlformats.org/drawingml/2006/main">
               <a:ext uri="{FF2B5EF4-FFF2-40B4-BE49-F238E27FC236}">
-                <a16:creationId xmlns:a16="http://schemas.microsoft.com/office/drawing/2014/main" id="{E58E1592-4C93-4C3E-9090-7EDF953158D7}"/>
+                <a16:creationId xmlns:a16="http://schemas.microsoft.com/office/drawing/2014/main" id="{82A77613-36F6-4ABE-8704-E89F9C7B2FEF}"/>
               </a:ext>
             </a:extLst>
           </p:cNvPr>
@@ -15966,7 +15966,7 @@
           <p:cNvPr id="76" name="">
             <a:extLst xmlns:a="http://schemas.openxmlformats.org/drawingml/2006/main">
               <a:ext uri="{FF2B5EF4-FFF2-40B4-BE49-F238E27FC236}">
-                <a16:creationId xmlns:a16="http://schemas.microsoft.com/office/drawing/2014/main" id="{9BE5CBA0-DC3F-4D02-83AC-A19EB84CF417}"/>
+                <a16:creationId xmlns:a16="http://schemas.microsoft.com/office/drawing/2014/main" id="{07E8C822-DEF1-47CC-9EEB-9505DDFCEA42}"/>
               </a:ext>
             </a:extLst>
           </p:cNvPr>
@@ -15997,7 +15997,7 @@
           <p:cNvPr id="77" name="">
             <a:extLst xmlns:a="http://schemas.openxmlformats.org/drawingml/2006/main">
               <a:ext uri="{FF2B5EF4-FFF2-40B4-BE49-F238E27FC236}">
-                <a16:creationId xmlns:a16="http://schemas.microsoft.com/office/drawing/2014/main" id="{C31A6AEB-2E5B-4F9F-B0CB-376090D3A7E8}"/>
+                <a16:creationId xmlns:a16="http://schemas.microsoft.com/office/drawing/2014/main" id="{B3BE3656-8FA5-4E64-B877-B65F9843AE85}"/>
               </a:ext>
             </a:extLst>
           </p:cNvPr>
@@ -16028,7 +16028,7 @@
           <p:cNvPr id="78" name="">
             <a:extLst xmlns:a="http://schemas.openxmlformats.org/drawingml/2006/main">
               <a:ext uri="{FF2B5EF4-FFF2-40B4-BE49-F238E27FC236}">
-                <a16:creationId xmlns:a16="http://schemas.microsoft.com/office/drawing/2014/main" id="{B0C1F4A1-788A-4560-B2E5-9A3ED966F2EC}"/>
+                <a16:creationId xmlns:a16="http://schemas.microsoft.com/office/drawing/2014/main" id="{6AEF55B0-3DAB-40C2-BF66-A2310CB50149}"/>
               </a:ext>
             </a:extLst>
           </p:cNvPr>
@@ -16080,7 +16080,7 @@
           <p:cNvPr id="79" name="">
             <a:extLst xmlns:a="http://schemas.openxmlformats.org/drawingml/2006/main">
               <a:ext uri="{FF2B5EF4-FFF2-40B4-BE49-F238E27FC236}">
-                <a16:creationId xmlns:a16="http://schemas.microsoft.com/office/drawing/2014/main" id="{0895F5D4-F375-42D9-A0C7-6FD200FBE677}"/>
+                <a16:creationId xmlns:a16="http://schemas.microsoft.com/office/drawing/2014/main" id="{05C24E11-5034-48D1-9145-AEC4FAB455E8}"/>
               </a:ext>
             </a:extLst>
           </p:cNvPr>
@@ -16132,7 +16132,7 @@
           <p:cNvPr id="80" name="">
             <a:extLst xmlns:a="http://schemas.openxmlformats.org/drawingml/2006/main">
               <a:ext uri="{FF2B5EF4-FFF2-40B4-BE49-F238E27FC236}">
-                <a16:creationId xmlns:a16="http://schemas.microsoft.com/office/drawing/2014/main" id="{1723FACF-635E-4643-9641-44259A375EBA}"/>
+                <a16:creationId xmlns:a16="http://schemas.microsoft.com/office/drawing/2014/main" id="{988F010C-AD92-467A-89CE-88618A850284}"/>
               </a:ext>
             </a:extLst>
           </p:cNvPr>
@@ -16184,7 +16184,7 @@
           <p:cNvPr id="81" name="">
             <a:extLst xmlns:a="http://schemas.openxmlformats.org/drawingml/2006/main">
               <a:ext uri="{FF2B5EF4-FFF2-40B4-BE49-F238E27FC236}">
-                <a16:creationId xmlns:a16="http://schemas.microsoft.com/office/drawing/2014/main" id="{EA769560-92E9-4FB5-BBAC-E0CA9A5275FD}"/>
+                <a16:creationId xmlns:a16="http://schemas.microsoft.com/office/drawing/2014/main" id="{F35E58F8-7658-425C-B85A-62D100F88068}"/>
               </a:ext>
             </a:extLst>
           </p:cNvPr>
@@ -16236,7 +16236,7 @@
           <p:cNvPr id="82" name="">
             <a:extLst xmlns:a="http://schemas.openxmlformats.org/drawingml/2006/main">
               <a:ext uri="{FF2B5EF4-FFF2-40B4-BE49-F238E27FC236}">
-                <a16:creationId xmlns:a16="http://schemas.microsoft.com/office/drawing/2014/main" id="{75D2839B-8252-45AF-84A2-04F9650999B2}"/>
+                <a16:creationId xmlns:a16="http://schemas.microsoft.com/office/drawing/2014/main" id="{20F8690B-D0B8-4742-BE21-F74E918DEC9A}"/>
               </a:ext>
             </a:extLst>
           </p:cNvPr>
@@ -16288,7 +16288,7 @@
           <p:cNvPr id="83" name="">
             <a:extLst xmlns:a="http://schemas.openxmlformats.org/drawingml/2006/main">
               <a:ext uri="{FF2B5EF4-FFF2-40B4-BE49-F238E27FC236}">
-                <a16:creationId xmlns:a16="http://schemas.microsoft.com/office/drawing/2014/main" id="{5737E8D0-CED1-417D-AAB6-0DD5A4B2C31F}"/>
+                <a16:creationId xmlns:a16="http://schemas.microsoft.com/office/drawing/2014/main" id="{93CA7F6F-726C-43C9-B945-1596A35D5E3E}"/>
               </a:ext>
             </a:extLst>
           </p:cNvPr>
@@ -16319,7 +16319,7 @@
           <p:cNvPr id="84" name="">
             <a:extLst xmlns:a="http://schemas.openxmlformats.org/drawingml/2006/main">
               <a:ext uri="{FF2B5EF4-FFF2-40B4-BE49-F238E27FC236}">
-                <a16:creationId xmlns:a16="http://schemas.microsoft.com/office/drawing/2014/main" id="{DFB72CC5-E52C-45A3-B2DF-0F5E2E6A473E}"/>
+                <a16:creationId xmlns:a16="http://schemas.microsoft.com/office/drawing/2014/main" id="{E55D8BAF-96A0-4E55-9FA7-6AD2AF43109C}"/>
               </a:ext>
             </a:extLst>
           </p:cNvPr>
@@ -16371,7 +16371,7 @@
           <p:cNvPr id="85" name="">
             <a:extLst xmlns:a="http://schemas.openxmlformats.org/drawingml/2006/main">
               <a:ext uri="{FF2B5EF4-FFF2-40B4-BE49-F238E27FC236}">
-                <a16:creationId xmlns:a16="http://schemas.microsoft.com/office/drawing/2014/main" id="{5327CAE8-AED6-4229-935F-625F8CF2D2A8}"/>
+                <a16:creationId xmlns:a16="http://schemas.microsoft.com/office/drawing/2014/main" id="{3551175B-68F3-4BEB-9088-FD4EAE959E2D}"/>
               </a:ext>
             </a:extLst>
           </p:cNvPr>
@@ -16423,7 +16423,7 @@
           <p:cNvPr id="86" name="">
             <a:extLst xmlns:a="http://schemas.openxmlformats.org/drawingml/2006/main">
               <a:ext uri="{FF2B5EF4-FFF2-40B4-BE49-F238E27FC236}">
-                <a16:creationId xmlns:a16="http://schemas.microsoft.com/office/drawing/2014/main" id="{46A0F21B-6CB6-4816-9525-97CBA7580050}"/>
+                <a16:creationId xmlns:a16="http://schemas.microsoft.com/office/drawing/2014/main" id="{6D2F5C96-61F2-4082-AC9D-750F22E2085C}"/>
               </a:ext>
             </a:extLst>
           </p:cNvPr>
@@ -16475,7 +16475,7 @@
           <p:cNvPr id="87" name="">
             <a:extLst xmlns:a="http://schemas.openxmlformats.org/drawingml/2006/main">
               <a:ext uri="{FF2B5EF4-FFF2-40B4-BE49-F238E27FC236}">
-                <a16:creationId xmlns:a16="http://schemas.microsoft.com/office/drawing/2014/main" id="{5175395D-C731-474C-AEB7-DEFC4231B4F7}"/>
+                <a16:creationId xmlns:a16="http://schemas.microsoft.com/office/drawing/2014/main" id="{92E36763-92B8-405D-B086-453C9B0B02F7}"/>
               </a:ext>
             </a:extLst>
           </p:cNvPr>
@@ -16527,7 +16527,7 @@
           <p:cNvPr id="88" name="">
             <a:extLst xmlns:a="http://schemas.openxmlformats.org/drawingml/2006/main">
               <a:ext uri="{FF2B5EF4-FFF2-40B4-BE49-F238E27FC236}">
-                <a16:creationId xmlns:a16="http://schemas.microsoft.com/office/drawing/2014/main" id="{6F362073-635E-4723-90B3-6FDDA587BF1A}"/>
+                <a16:creationId xmlns:a16="http://schemas.microsoft.com/office/drawing/2014/main" id="{9B1CFF0B-1AFF-4B00-9D62-C95C474D4B84}"/>
               </a:ext>
             </a:extLst>
           </p:cNvPr>
@@ -16579,7 +16579,7 @@
           <p:cNvPr id="89" name="">
             <a:extLst xmlns:a="http://schemas.openxmlformats.org/drawingml/2006/main">
               <a:ext uri="{FF2B5EF4-FFF2-40B4-BE49-F238E27FC236}">
-                <a16:creationId xmlns:a16="http://schemas.microsoft.com/office/drawing/2014/main" id="{06A1F13E-88A2-46CE-9BE0-767DCFFF9A1A}"/>
+                <a16:creationId xmlns:a16="http://schemas.microsoft.com/office/drawing/2014/main" id="{04453E56-5D56-4BEA-B217-BE129D361EE2}"/>
               </a:ext>
             </a:extLst>
           </p:cNvPr>
@@ -16610,7 +16610,7 @@
           <p:cNvPr id="90" name="">
             <a:extLst xmlns:a="http://schemas.openxmlformats.org/drawingml/2006/main">
               <a:ext uri="{FF2B5EF4-FFF2-40B4-BE49-F238E27FC236}">
-                <a16:creationId xmlns:a16="http://schemas.microsoft.com/office/drawing/2014/main" id="{5E65255E-9F4B-4AC1-974C-091FEDCB451D}"/>
+                <a16:creationId xmlns:a16="http://schemas.microsoft.com/office/drawing/2014/main" id="{E73CAEEC-AFD3-453C-95C8-1433FFE79C48}"/>
               </a:ext>
             </a:extLst>
           </p:cNvPr>
@@ -16641,7 +16641,7 @@
           <p:cNvPr id="91" name="">
             <a:extLst xmlns:a="http://schemas.openxmlformats.org/drawingml/2006/main">
               <a:ext uri="{FF2B5EF4-FFF2-40B4-BE49-F238E27FC236}">
-                <a16:creationId xmlns:a16="http://schemas.microsoft.com/office/drawing/2014/main" id="{FBA1CC1E-85FD-4F31-BFCC-B89860115252}"/>
+                <a16:creationId xmlns:a16="http://schemas.microsoft.com/office/drawing/2014/main" id="{5E870ED4-AA46-4592-A2C7-B8B218A437F9}"/>
               </a:ext>
             </a:extLst>
           </p:cNvPr>
@@ -16693,7 +16693,7 @@
           <p:cNvPr id="92" name="">
             <a:extLst xmlns:a="http://schemas.openxmlformats.org/drawingml/2006/main">
               <a:ext uri="{FF2B5EF4-FFF2-40B4-BE49-F238E27FC236}">
-                <a16:creationId xmlns:a16="http://schemas.microsoft.com/office/drawing/2014/main" id="{8CD028A6-8F82-4AEB-AB09-7C2517C9610D}"/>
+                <a16:creationId xmlns:a16="http://schemas.microsoft.com/office/drawing/2014/main" id="{7FE40795-94C3-4952-9DC6-5F12296AA045}"/>
               </a:ext>
             </a:extLst>
           </p:cNvPr>
@@ -16745,7 +16745,7 @@
           <p:cNvPr id="93" name="">
             <a:extLst xmlns:a="http://schemas.openxmlformats.org/drawingml/2006/main">
               <a:ext uri="{FF2B5EF4-FFF2-40B4-BE49-F238E27FC236}">
-                <a16:creationId xmlns:a16="http://schemas.microsoft.com/office/drawing/2014/main" id="{15DCA6FE-9CDB-40C5-B7D0-11172D2FAA1A}"/>
+                <a16:creationId xmlns:a16="http://schemas.microsoft.com/office/drawing/2014/main" id="{07BE4ED1-FF72-4C63-AB1B-D28654253BAF}"/>
               </a:ext>
             </a:extLst>
           </p:cNvPr>
@@ -16797,7 +16797,7 @@
           <p:cNvPr id="94" name="">
             <a:extLst xmlns:a="http://schemas.openxmlformats.org/drawingml/2006/main">
               <a:ext uri="{FF2B5EF4-FFF2-40B4-BE49-F238E27FC236}">
-                <a16:creationId xmlns:a16="http://schemas.microsoft.com/office/drawing/2014/main" id="{B15FAA33-0039-4518-A1AA-4B122BA06A45}"/>
+                <a16:creationId xmlns:a16="http://schemas.microsoft.com/office/drawing/2014/main" id="{B62596B1-8224-4E2C-8746-32D19CF57148}"/>
               </a:ext>
             </a:extLst>
           </p:cNvPr>
@@ -16849,7 +16849,7 @@
           <p:cNvPr id="95" name="">
             <a:extLst xmlns:a="http://schemas.openxmlformats.org/drawingml/2006/main">
               <a:ext uri="{FF2B5EF4-FFF2-40B4-BE49-F238E27FC236}">
-                <a16:creationId xmlns:a16="http://schemas.microsoft.com/office/drawing/2014/main" id="{64FC96F2-C8E1-42A8-B0A9-E5DFC4493121}"/>
+                <a16:creationId xmlns:a16="http://schemas.microsoft.com/office/drawing/2014/main" id="{326D9DA2-642D-4090-9523-C7F67E7FFF2B}"/>
               </a:ext>
             </a:extLst>
           </p:cNvPr>
@@ -16901,7 +16901,7 @@
           <p:cNvPr id="96" name="">
             <a:extLst xmlns:a="http://schemas.openxmlformats.org/drawingml/2006/main">
               <a:ext uri="{FF2B5EF4-FFF2-40B4-BE49-F238E27FC236}">
-                <a16:creationId xmlns:a16="http://schemas.microsoft.com/office/drawing/2014/main" id="{BD3D6FB6-45BF-4B03-B7CF-6D1542958DDD}"/>
+                <a16:creationId xmlns:a16="http://schemas.microsoft.com/office/drawing/2014/main" id="{B864EF54-77CC-4344-915E-7489C89E61EC}"/>
               </a:ext>
             </a:extLst>
           </p:cNvPr>
@@ -16932,7 +16932,7 @@
           <p:cNvPr id="97" name="">
             <a:extLst xmlns:a="http://schemas.openxmlformats.org/drawingml/2006/main">
               <a:ext uri="{FF2B5EF4-FFF2-40B4-BE49-F238E27FC236}">
-                <a16:creationId xmlns:a16="http://schemas.microsoft.com/office/drawing/2014/main" id="{6A6B866B-9740-4645-856D-9476B4C0B938}"/>
+                <a16:creationId xmlns:a16="http://schemas.microsoft.com/office/drawing/2014/main" id="{75EC03F0-AEE0-4199-A979-C4BEB79E5455}"/>
               </a:ext>
             </a:extLst>
           </p:cNvPr>
@@ -16984,7 +16984,7 @@
           <p:cNvPr id="98" name="">
             <a:extLst xmlns:a="http://schemas.openxmlformats.org/drawingml/2006/main">
               <a:ext uri="{FF2B5EF4-FFF2-40B4-BE49-F238E27FC236}">
-                <a16:creationId xmlns:a16="http://schemas.microsoft.com/office/drawing/2014/main" id="{3AE11981-87D9-4E35-A2DD-D17B342EFE63}"/>
+                <a16:creationId xmlns:a16="http://schemas.microsoft.com/office/drawing/2014/main" id="{D0C9EF4F-2FAF-410A-AB06-AB106F8C4A15}"/>
               </a:ext>
             </a:extLst>
           </p:cNvPr>
@@ -17036,7 +17036,7 @@
           <p:cNvPr id="99" name="">
             <a:extLst xmlns:a="http://schemas.openxmlformats.org/drawingml/2006/main">
               <a:ext uri="{FF2B5EF4-FFF2-40B4-BE49-F238E27FC236}">
-                <a16:creationId xmlns:a16="http://schemas.microsoft.com/office/drawing/2014/main" id="{E2BB96C4-9133-41C8-9B68-C4943E7CA0F3}"/>
+                <a16:creationId xmlns:a16="http://schemas.microsoft.com/office/drawing/2014/main" id="{2E37D56E-1627-4D63-8E87-E070E423A4A1}"/>
               </a:ext>
             </a:extLst>
           </p:cNvPr>
@@ -17088,7 +17088,7 @@
           <p:cNvPr id="100" name="">
             <a:extLst xmlns:a="http://schemas.openxmlformats.org/drawingml/2006/main">
               <a:ext uri="{FF2B5EF4-FFF2-40B4-BE49-F238E27FC236}">
-                <a16:creationId xmlns:a16="http://schemas.microsoft.com/office/drawing/2014/main" id="{E5F0484A-5F8C-458B-960A-28A5F1BB759F}"/>
+                <a16:creationId xmlns:a16="http://schemas.microsoft.com/office/drawing/2014/main" id="{C926CDDB-8649-4968-9316-882D331A0579}"/>
               </a:ext>
             </a:extLst>
           </p:cNvPr>
@@ -17140,7 +17140,7 @@
           <p:cNvPr id="101" name="">
             <a:extLst xmlns:a="http://schemas.openxmlformats.org/drawingml/2006/main">
               <a:ext uri="{FF2B5EF4-FFF2-40B4-BE49-F238E27FC236}">
-                <a16:creationId xmlns:a16="http://schemas.microsoft.com/office/drawing/2014/main" id="{75F4925C-1A86-44A4-BE99-0633E009520B}"/>
+                <a16:creationId xmlns:a16="http://schemas.microsoft.com/office/drawing/2014/main" id="{7A81AE2E-9039-4DA3-8CA5-4B9CB2944650}"/>
               </a:ext>
             </a:extLst>
           </p:cNvPr>
@@ -17190,7 +17190,7 @@
     </p:spTree>
     <p:extLst>
       <p:ext uri="{BB962C8B-B14F-4D97-AF65-F5344CB8AC3E}">
-        <p14:creationId xmlns:p14="http://schemas.microsoft.com/office/powerpoint/2010/main" val="1696256314"/>
+        <p14:creationId xmlns:p14="http://schemas.microsoft.com/office/powerpoint/2010/main" val="1072071864"/>
       </p:ext>
     </p:extLst>
   </p:cSld>
@@ -17221,7 +17221,7 @@
           <p:cNvPr id="96" name="">
             <a:extLst xmlns:a="http://schemas.openxmlformats.org/drawingml/2006/main">
               <a:ext uri="{FF2B5EF4-FFF2-40B4-BE49-F238E27FC236}">
-                <a16:creationId xmlns:a16="http://schemas.microsoft.com/office/drawing/2014/main" id="{5446B7D8-7E8C-4698-87B2-9C9CC5C9F1DD}"/>
+                <a16:creationId xmlns:a16="http://schemas.microsoft.com/office/drawing/2014/main" id="{1D73EFA0-520F-40D9-BC6E-5AE3B609F251}"/>
               </a:ext>
             </a:extLst>
           </p:cNvPr>
@@ -17254,7 +17254,7 @@
           <p:cNvPr id="2" name="">
             <a:extLst xmlns:a="http://schemas.openxmlformats.org/drawingml/2006/main">
               <a:ext uri="{FF2B5EF4-FFF2-40B4-BE49-F238E27FC236}">
-                <a16:creationId xmlns:a16="http://schemas.microsoft.com/office/drawing/2014/main" id="{D87FF096-D6BA-4D9B-B716-B13EFEAE890D}"/>
+                <a16:creationId xmlns:a16="http://schemas.microsoft.com/office/drawing/2014/main" id="{EFE04782-E9F2-4599-8E0D-FA6FC98C8935}"/>
               </a:ext>
             </a:extLst>
           </p:cNvPr>
@@ -17285,7 +17285,7 @@
           <p:cNvPr id="3" name="">
             <a:extLst xmlns:a="http://schemas.openxmlformats.org/drawingml/2006/main">
               <a:ext uri="{FF2B5EF4-FFF2-40B4-BE49-F238E27FC236}">
-                <a16:creationId xmlns:a16="http://schemas.microsoft.com/office/drawing/2014/main" id="{082B3D51-EC7A-4B06-9F51-DAC65E5FDF5D}"/>
+                <a16:creationId xmlns:a16="http://schemas.microsoft.com/office/drawing/2014/main" id="{E8C55CFE-E25C-4D77-98D7-373316573C2D}"/>
               </a:ext>
             </a:extLst>
           </p:cNvPr>
@@ -17337,7 +17337,7 @@
           <p:cNvPr id="4" name="">
             <a:extLst xmlns:a="http://schemas.openxmlformats.org/drawingml/2006/main">
               <a:ext uri="{FF2B5EF4-FFF2-40B4-BE49-F238E27FC236}">
-                <a16:creationId xmlns:a16="http://schemas.microsoft.com/office/drawing/2014/main" id="{78D844A8-E189-47F3-8B67-A41A7EF6715C}"/>
+                <a16:creationId xmlns:a16="http://schemas.microsoft.com/office/drawing/2014/main" id="{9A5048EB-F5A2-46AF-A950-5DA8D80DBB2E}"/>
               </a:ext>
             </a:extLst>
           </p:cNvPr>
@@ -17389,7 +17389,7 @@
           <p:cNvPr id="5" name="">
             <a:extLst xmlns:a="http://schemas.openxmlformats.org/drawingml/2006/main">
               <a:ext uri="{FF2B5EF4-FFF2-40B4-BE49-F238E27FC236}">
-                <a16:creationId xmlns:a16="http://schemas.microsoft.com/office/drawing/2014/main" id="{15B0AA28-7E99-44A2-844F-E95D2FF94F55}"/>
+                <a16:creationId xmlns:a16="http://schemas.microsoft.com/office/drawing/2014/main" id="{3EDFEC2D-DDB1-49EE-A670-16361C8BF8FA}"/>
               </a:ext>
             </a:extLst>
           </p:cNvPr>
@@ -17424,7 +17424,7 @@
           <p:nvPr/>
         </p:nvPicPr>
         <p:blipFill>
-          <a:blip xmlns:r="http://schemas.openxmlformats.org/officeDocument/2006/relationships" xmlns:a="http://schemas.openxmlformats.org/drawingml/2006/main" r:embed="R6697556606954fa0"/>
+          <a:blip xmlns:r="http://schemas.openxmlformats.org/officeDocument/2006/relationships" xmlns:a="http://schemas.openxmlformats.org/drawingml/2006/main" r:embed="Ra536e9c67a3249d7"/>
           <a:stretch xmlns:a="http://schemas.openxmlformats.org/drawingml/2006/main"/>
         </p:blipFill>
         <p:spPr>
@@ -17442,7 +17442,7 @@
           <p:cNvPr id="7" name="">
             <a:extLst xmlns:a="http://schemas.openxmlformats.org/drawingml/2006/main">
               <a:ext uri="{FF2B5EF4-FFF2-40B4-BE49-F238E27FC236}">
-                <a16:creationId xmlns:a16="http://schemas.microsoft.com/office/drawing/2014/main" id="{8B3B178B-56DF-4FF9-931D-F0AD3859048F}"/>
+                <a16:creationId xmlns:a16="http://schemas.microsoft.com/office/drawing/2014/main" id="{237D68BF-B1D7-4D40-B0A5-DC16364D00EB}"/>
               </a:ext>
             </a:extLst>
           </p:cNvPr>
@@ -17494,7 +17494,7 @@
           <p:cNvPr id="8" name="">
             <a:extLst xmlns:a="http://schemas.openxmlformats.org/drawingml/2006/main">
               <a:ext uri="{FF2B5EF4-FFF2-40B4-BE49-F238E27FC236}">
-                <a16:creationId xmlns:a16="http://schemas.microsoft.com/office/drawing/2014/main" id="{10F10293-07C1-4A44-B0D5-312465A539AB}"/>
+                <a16:creationId xmlns:a16="http://schemas.microsoft.com/office/drawing/2014/main" id="{9916A14F-EDCA-4FD0-A5DE-1B5C63A3020D}"/>
               </a:ext>
             </a:extLst>
           </p:cNvPr>
@@ -17546,7 +17546,7 @@
           <p:cNvPr id="9" name="">
             <a:extLst xmlns:a="http://schemas.openxmlformats.org/drawingml/2006/main">
               <a:ext uri="{FF2B5EF4-FFF2-40B4-BE49-F238E27FC236}">
-                <a16:creationId xmlns:a16="http://schemas.microsoft.com/office/drawing/2014/main" id="{14B15488-7536-432B-9E17-C1067C5BC860}"/>
+                <a16:creationId xmlns:a16="http://schemas.microsoft.com/office/drawing/2014/main" id="{6593C955-C74D-4178-B559-1F6BBE417485}"/>
               </a:ext>
             </a:extLst>
           </p:cNvPr>
@@ -17598,7 +17598,7 @@
           <p:cNvPr id="10" name="">
             <a:extLst xmlns:a="http://schemas.openxmlformats.org/drawingml/2006/main">
               <a:ext uri="{FF2B5EF4-FFF2-40B4-BE49-F238E27FC236}">
-                <a16:creationId xmlns:a16="http://schemas.microsoft.com/office/drawing/2014/main" id="{53BCB3F0-870C-4DF8-88A7-E6FAC85A142B}"/>
+                <a16:creationId xmlns:a16="http://schemas.microsoft.com/office/drawing/2014/main" id="{2343D6A5-39DB-468F-984D-0B84DFB1F45D}"/>
               </a:ext>
             </a:extLst>
           </p:cNvPr>
@@ -17650,7 +17650,7 @@
           <p:cNvPr id="11" name="">
             <a:extLst xmlns:a="http://schemas.openxmlformats.org/drawingml/2006/main">
               <a:ext uri="{FF2B5EF4-FFF2-40B4-BE49-F238E27FC236}">
-                <a16:creationId xmlns:a16="http://schemas.microsoft.com/office/drawing/2014/main" id="{168C8D28-FCAA-40C3-A959-796C20FC3CAE}"/>
+                <a16:creationId xmlns:a16="http://schemas.microsoft.com/office/drawing/2014/main" id="{81297875-9177-4F4A-9381-E443DE964359}"/>
               </a:ext>
             </a:extLst>
           </p:cNvPr>
@@ -17681,7 +17681,7 @@
           <p:cNvPr id="12" name="">
             <a:extLst xmlns:a="http://schemas.openxmlformats.org/drawingml/2006/main">
               <a:ext uri="{FF2B5EF4-FFF2-40B4-BE49-F238E27FC236}">
-                <a16:creationId xmlns:a16="http://schemas.microsoft.com/office/drawing/2014/main" id="{71BC14DC-90BA-4B7B-B7B1-F06A1D5C4119}"/>
+                <a16:creationId xmlns:a16="http://schemas.microsoft.com/office/drawing/2014/main" id="{3665BAA7-4B11-4695-99FC-5128AEA3AC70}"/>
               </a:ext>
             </a:extLst>
           </p:cNvPr>
@@ -17712,7 +17712,7 @@
           <p:cNvPr id="13" name="">
             <a:extLst xmlns:a="http://schemas.openxmlformats.org/drawingml/2006/main">
               <a:ext uri="{FF2B5EF4-FFF2-40B4-BE49-F238E27FC236}">
-                <a16:creationId xmlns:a16="http://schemas.microsoft.com/office/drawing/2014/main" id="{61AD5D6D-A76C-4B45-A855-C2AD5E22621A}"/>
+                <a16:creationId xmlns:a16="http://schemas.microsoft.com/office/drawing/2014/main" id="{7B31837A-DD25-4869-AE4D-17C3D2AB5A97}"/>
               </a:ext>
             </a:extLst>
           </p:cNvPr>
@@ -17764,7 +17764,7 @@
           <p:cNvPr id="14" name="">
             <a:extLst xmlns:a="http://schemas.openxmlformats.org/drawingml/2006/main">
               <a:ext uri="{FF2B5EF4-FFF2-40B4-BE49-F238E27FC236}">
-                <a16:creationId xmlns:a16="http://schemas.microsoft.com/office/drawing/2014/main" id="{2F5ABA65-BE9F-4C20-B215-BF9B9751B163}"/>
+                <a16:creationId xmlns:a16="http://schemas.microsoft.com/office/drawing/2014/main" id="{B5466580-7D46-43BB-B2E9-A9B55E71C681}"/>
               </a:ext>
             </a:extLst>
           </p:cNvPr>
@@ -17816,7 +17816,7 @@
           <p:cNvPr id="15" name="">
             <a:extLst xmlns:a="http://schemas.openxmlformats.org/drawingml/2006/main">
               <a:ext uri="{FF2B5EF4-FFF2-40B4-BE49-F238E27FC236}">
-                <a16:creationId xmlns:a16="http://schemas.microsoft.com/office/drawing/2014/main" id="{0A39A15D-B920-4FD6-9A09-1AF3AE917565}"/>
+                <a16:creationId xmlns:a16="http://schemas.microsoft.com/office/drawing/2014/main" id="{69A1B3B3-DCA4-4714-9A3E-65088F4A48C6}"/>
               </a:ext>
             </a:extLst>
           </p:cNvPr>
@@ -17868,7 +17868,7 @@
           <p:cNvPr id="16" name="">
             <a:extLst xmlns:a="http://schemas.openxmlformats.org/drawingml/2006/main">
               <a:ext uri="{FF2B5EF4-FFF2-40B4-BE49-F238E27FC236}">
-                <a16:creationId xmlns:a16="http://schemas.microsoft.com/office/drawing/2014/main" id="{3BA20911-1F8E-47F0-921F-E7D38C9A2EBF}"/>
+                <a16:creationId xmlns:a16="http://schemas.microsoft.com/office/drawing/2014/main" id="{D62B7B8A-1727-454C-B476-4D2C692B2629}"/>
               </a:ext>
             </a:extLst>
           </p:cNvPr>
@@ -17920,7 +17920,7 @@
           <p:cNvPr id="17" name="">
             <a:extLst xmlns:a="http://schemas.openxmlformats.org/drawingml/2006/main">
               <a:ext uri="{FF2B5EF4-FFF2-40B4-BE49-F238E27FC236}">
-                <a16:creationId xmlns:a16="http://schemas.microsoft.com/office/drawing/2014/main" id="{7E642900-F8DA-46AC-9962-3E7EC21F73A9}"/>
+                <a16:creationId xmlns:a16="http://schemas.microsoft.com/office/drawing/2014/main" id="{D38CB791-A05C-4E57-B84E-D9A77DD0C975}"/>
               </a:ext>
             </a:extLst>
           </p:cNvPr>
@@ -17972,7 +17972,7 @@
           <p:cNvPr id="18" name="">
             <a:extLst xmlns:a="http://schemas.openxmlformats.org/drawingml/2006/main">
               <a:ext uri="{FF2B5EF4-FFF2-40B4-BE49-F238E27FC236}">
-                <a16:creationId xmlns:a16="http://schemas.microsoft.com/office/drawing/2014/main" id="{B7DD40A0-CCDE-4E07-AAF2-F672EF9E0999}"/>
+                <a16:creationId xmlns:a16="http://schemas.microsoft.com/office/drawing/2014/main" id="{675AC2E8-A0CF-46B9-84B6-EE1D982B2A47}"/>
               </a:ext>
             </a:extLst>
           </p:cNvPr>
@@ -18003,7 +18003,7 @@
           <p:cNvPr id="19" name="">
             <a:extLst xmlns:a="http://schemas.openxmlformats.org/drawingml/2006/main">
               <a:ext uri="{FF2B5EF4-FFF2-40B4-BE49-F238E27FC236}">
-                <a16:creationId xmlns:a16="http://schemas.microsoft.com/office/drawing/2014/main" id="{42C51ECF-8A2C-460A-A1DB-E7AEE8BAFD97}"/>
+                <a16:creationId xmlns:a16="http://schemas.microsoft.com/office/drawing/2014/main" id="{9935F396-AEB2-4B3B-81BC-1F7EC43C0B9D}"/>
               </a:ext>
             </a:extLst>
           </p:cNvPr>
@@ -18034,7 +18034,7 @@
           <p:cNvPr id="20" name="">
             <a:extLst xmlns:a="http://schemas.openxmlformats.org/drawingml/2006/main">
               <a:ext uri="{FF2B5EF4-FFF2-40B4-BE49-F238E27FC236}">
-                <a16:creationId xmlns:a16="http://schemas.microsoft.com/office/drawing/2014/main" id="{AA2B3A96-857F-4C15-8263-3049C5DFD522}"/>
+                <a16:creationId xmlns:a16="http://schemas.microsoft.com/office/drawing/2014/main" id="{7CCD3B9B-7276-43A1-AB36-B730B876F00C}"/>
               </a:ext>
             </a:extLst>
           </p:cNvPr>
@@ -18086,7 +18086,7 @@
           <p:cNvPr id="21" name="">
             <a:extLst xmlns:a="http://schemas.openxmlformats.org/drawingml/2006/main">
               <a:ext uri="{FF2B5EF4-FFF2-40B4-BE49-F238E27FC236}">
-                <a16:creationId xmlns:a16="http://schemas.microsoft.com/office/drawing/2014/main" id="{68F067D9-BD21-4D04-9C50-8F7C66F4A117}"/>
+                <a16:creationId xmlns:a16="http://schemas.microsoft.com/office/drawing/2014/main" id="{465E01BB-65F5-465B-8E52-47517A3E0FCE}"/>
               </a:ext>
             </a:extLst>
           </p:cNvPr>
@@ -18138,7 +18138,7 @@
           <p:cNvPr id="22" name="">
             <a:extLst xmlns:a="http://schemas.openxmlformats.org/drawingml/2006/main">
               <a:ext uri="{FF2B5EF4-FFF2-40B4-BE49-F238E27FC236}">
-                <a16:creationId xmlns:a16="http://schemas.microsoft.com/office/drawing/2014/main" id="{26AC8CD6-C16D-43DF-A561-5B609AF90838}"/>
+                <a16:creationId xmlns:a16="http://schemas.microsoft.com/office/drawing/2014/main" id="{4D843479-D4AA-44A9-A752-9898B3A0383D}"/>
               </a:ext>
             </a:extLst>
           </p:cNvPr>
@@ -18190,7 +18190,7 @@
           <p:cNvPr id="23" name="">
             <a:extLst xmlns:a="http://schemas.openxmlformats.org/drawingml/2006/main">
               <a:ext uri="{FF2B5EF4-FFF2-40B4-BE49-F238E27FC236}">
-                <a16:creationId xmlns:a16="http://schemas.microsoft.com/office/drawing/2014/main" id="{67E3D1BC-794A-451F-8A62-34B2BCCF76AE}"/>
+                <a16:creationId xmlns:a16="http://schemas.microsoft.com/office/drawing/2014/main" id="{C2D45393-4CDF-4027-A08A-1124CBED5A41}"/>
               </a:ext>
             </a:extLst>
           </p:cNvPr>
@@ -18242,7 +18242,7 @@
           <p:cNvPr id="24" name="">
             <a:extLst xmlns:a="http://schemas.openxmlformats.org/drawingml/2006/main">
               <a:ext uri="{FF2B5EF4-FFF2-40B4-BE49-F238E27FC236}">
-                <a16:creationId xmlns:a16="http://schemas.microsoft.com/office/drawing/2014/main" id="{D7319E7A-049F-44D6-BD98-A384631450C6}"/>
+                <a16:creationId xmlns:a16="http://schemas.microsoft.com/office/drawing/2014/main" id="{198E41E3-F998-49A2-802F-501CE3AC79B7}"/>
               </a:ext>
             </a:extLst>
           </p:cNvPr>
@@ -18294,7 +18294,7 @@
           <p:cNvPr id="25" name="">
             <a:extLst xmlns:a="http://schemas.openxmlformats.org/drawingml/2006/main">
               <a:ext uri="{FF2B5EF4-FFF2-40B4-BE49-F238E27FC236}">
-                <a16:creationId xmlns:a16="http://schemas.microsoft.com/office/drawing/2014/main" id="{B9040383-C86A-44C2-9BCB-152BD99008B2}"/>
+                <a16:creationId xmlns:a16="http://schemas.microsoft.com/office/drawing/2014/main" id="{7D45A809-19A1-4313-9DEC-B31E3B2A2B95}"/>
               </a:ext>
             </a:extLst>
           </p:cNvPr>
@@ -18325,7 +18325,7 @@
           <p:cNvPr id="26" name="">
             <a:extLst xmlns:a="http://schemas.openxmlformats.org/drawingml/2006/main">
               <a:ext uri="{FF2B5EF4-FFF2-40B4-BE49-F238E27FC236}">
-                <a16:creationId xmlns:a16="http://schemas.microsoft.com/office/drawing/2014/main" id="{BB405B01-913F-42A8-8755-CE9905D53E60}"/>
+                <a16:creationId xmlns:a16="http://schemas.microsoft.com/office/drawing/2014/main" id="{F2C9B7E1-3F6A-429A-8113-CD3CCE909153}"/>
               </a:ext>
             </a:extLst>
           </p:cNvPr>
@@ -18377,7 +18377,7 @@
           <p:cNvPr id="27" name="">
             <a:extLst xmlns:a="http://schemas.openxmlformats.org/drawingml/2006/main">
               <a:ext uri="{FF2B5EF4-FFF2-40B4-BE49-F238E27FC236}">
-                <a16:creationId xmlns:a16="http://schemas.microsoft.com/office/drawing/2014/main" id="{F456E6A6-BD1E-44B0-BF12-53A192C55AD0}"/>
+                <a16:creationId xmlns:a16="http://schemas.microsoft.com/office/drawing/2014/main" id="{71E84071-BA85-48E7-AB10-26CE50A97893}"/>
               </a:ext>
             </a:extLst>
           </p:cNvPr>
@@ -18429,7 +18429,7 @@
           <p:cNvPr id="28" name="">
             <a:extLst xmlns:a="http://schemas.openxmlformats.org/drawingml/2006/main">
               <a:ext uri="{FF2B5EF4-FFF2-40B4-BE49-F238E27FC236}">
-                <a16:creationId xmlns:a16="http://schemas.microsoft.com/office/drawing/2014/main" id="{6442F3BA-D904-4096-9E4C-3DAF9DE93E28}"/>
+                <a16:creationId xmlns:a16="http://schemas.microsoft.com/office/drawing/2014/main" id="{E5F54B96-0787-430E-B521-862C9838AE12}"/>
               </a:ext>
             </a:extLst>
           </p:cNvPr>
@@ -18481,7 +18481,7 @@
           <p:cNvPr id="29" name="">
             <a:extLst xmlns:a="http://schemas.openxmlformats.org/drawingml/2006/main">
               <a:ext uri="{FF2B5EF4-FFF2-40B4-BE49-F238E27FC236}">
-                <a16:creationId xmlns:a16="http://schemas.microsoft.com/office/drawing/2014/main" id="{38B14B82-7751-4185-A8F7-B0990E9D8DA3}"/>
+                <a16:creationId xmlns:a16="http://schemas.microsoft.com/office/drawing/2014/main" id="{1D49580E-6522-48A7-AEAD-FC04099280A5}"/>
               </a:ext>
             </a:extLst>
           </p:cNvPr>
@@ -18533,7 +18533,7 @@
           <p:cNvPr id="30" name="">
             <a:extLst xmlns:a="http://schemas.openxmlformats.org/drawingml/2006/main">
               <a:ext uri="{FF2B5EF4-FFF2-40B4-BE49-F238E27FC236}">
-                <a16:creationId xmlns:a16="http://schemas.microsoft.com/office/drawing/2014/main" id="{BF94A8ED-8228-4BC4-BD90-432E880238DD}"/>
+                <a16:creationId xmlns:a16="http://schemas.microsoft.com/office/drawing/2014/main" id="{5F949FB3-A34C-4B45-AD3D-33AB1BDEBDAF}"/>
               </a:ext>
             </a:extLst>
           </p:cNvPr>
@@ -18585,7 +18585,7 @@
           <p:cNvPr id="31" name="">
             <a:extLst xmlns:a="http://schemas.openxmlformats.org/drawingml/2006/main">
               <a:ext uri="{FF2B5EF4-FFF2-40B4-BE49-F238E27FC236}">
-                <a16:creationId xmlns:a16="http://schemas.microsoft.com/office/drawing/2014/main" id="{E898BEC5-2CD5-4138-B586-45FCF4944197}"/>
+                <a16:creationId xmlns:a16="http://schemas.microsoft.com/office/drawing/2014/main" id="{0774E533-602F-41AA-992F-32CA2CE261F2}"/>
               </a:ext>
             </a:extLst>
           </p:cNvPr>
@@ -18616,7 +18616,7 @@
           <p:cNvPr id="32" name="">
             <a:extLst xmlns:a="http://schemas.openxmlformats.org/drawingml/2006/main">
               <a:ext uri="{FF2B5EF4-FFF2-40B4-BE49-F238E27FC236}">
-                <a16:creationId xmlns:a16="http://schemas.microsoft.com/office/drawing/2014/main" id="{338913C4-2536-4F0F-864E-563EF866CB56}"/>
+                <a16:creationId xmlns:a16="http://schemas.microsoft.com/office/drawing/2014/main" id="{EA9F96D3-59D8-40E0-880A-2BACE0B4DCDB}"/>
               </a:ext>
             </a:extLst>
           </p:cNvPr>
@@ -18647,7 +18647,7 @@
           <p:cNvPr id="33" name="">
             <a:extLst xmlns:a="http://schemas.openxmlformats.org/drawingml/2006/main">
               <a:ext uri="{FF2B5EF4-FFF2-40B4-BE49-F238E27FC236}">
-                <a16:creationId xmlns:a16="http://schemas.microsoft.com/office/drawing/2014/main" id="{E448EF42-97BE-47CA-92DF-EA499D2B36E6}"/>
+                <a16:creationId xmlns:a16="http://schemas.microsoft.com/office/drawing/2014/main" id="{DCCA7F99-4D63-4F9A-B684-70E815AF6A27}"/>
               </a:ext>
             </a:extLst>
           </p:cNvPr>
@@ -18699,7 +18699,7 @@
           <p:cNvPr id="34" name="">
             <a:extLst xmlns:a="http://schemas.openxmlformats.org/drawingml/2006/main">
               <a:ext uri="{FF2B5EF4-FFF2-40B4-BE49-F238E27FC236}">
-                <a16:creationId xmlns:a16="http://schemas.microsoft.com/office/drawing/2014/main" id="{42F73784-EA2C-4A34-BA03-B85481700C12}"/>
+                <a16:creationId xmlns:a16="http://schemas.microsoft.com/office/drawing/2014/main" id="{21BF118B-8958-4951-8626-9E72C9BC3E72}"/>
               </a:ext>
             </a:extLst>
           </p:cNvPr>
@@ -18751,7 +18751,7 @@
           <p:cNvPr id="35" name="">
             <a:extLst xmlns:a="http://schemas.openxmlformats.org/drawingml/2006/main">
               <a:ext uri="{FF2B5EF4-FFF2-40B4-BE49-F238E27FC236}">
-                <a16:creationId xmlns:a16="http://schemas.microsoft.com/office/drawing/2014/main" id="{E4C0049C-6B70-4DC1-B79F-AD384B059548}"/>
+                <a16:creationId xmlns:a16="http://schemas.microsoft.com/office/drawing/2014/main" id="{CF1373C0-D798-4F4E-AF7E-2258850C344E}"/>
               </a:ext>
             </a:extLst>
           </p:cNvPr>
@@ -18803,7 +18803,7 @@
           <p:cNvPr id="36" name="">
             <a:extLst xmlns:a="http://schemas.openxmlformats.org/drawingml/2006/main">
               <a:ext uri="{FF2B5EF4-FFF2-40B4-BE49-F238E27FC236}">
-                <a16:creationId xmlns:a16="http://schemas.microsoft.com/office/drawing/2014/main" id="{029F4D83-6623-4AD5-A83B-0FFF0966D300}"/>
+                <a16:creationId xmlns:a16="http://schemas.microsoft.com/office/drawing/2014/main" id="{12C3C4FE-02EA-4916-A118-FAB139070029}"/>
               </a:ext>
             </a:extLst>
           </p:cNvPr>
@@ -18855,7 +18855,7 @@
           <p:cNvPr id="37" name="">
             <a:extLst xmlns:a="http://schemas.openxmlformats.org/drawingml/2006/main">
               <a:ext uri="{FF2B5EF4-FFF2-40B4-BE49-F238E27FC236}">
-                <a16:creationId xmlns:a16="http://schemas.microsoft.com/office/drawing/2014/main" id="{EFEF5741-ED7C-47D8-89D2-2FC4983DDABD}"/>
+                <a16:creationId xmlns:a16="http://schemas.microsoft.com/office/drawing/2014/main" id="{AA64C3CE-571C-476C-A4AF-494AEEDA0C35}"/>
               </a:ext>
             </a:extLst>
           </p:cNvPr>
@@ -18907,7 +18907,7 @@
           <p:cNvPr id="38" name="">
             <a:extLst xmlns:a="http://schemas.openxmlformats.org/drawingml/2006/main">
               <a:ext uri="{FF2B5EF4-FFF2-40B4-BE49-F238E27FC236}">
-                <a16:creationId xmlns:a16="http://schemas.microsoft.com/office/drawing/2014/main" id="{9C842E54-FFB9-4FB6-BFE7-A035E1C7894A}"/>
+                <a16:creationId xmlns:a16="http://schemas.microsoft.com/office/drawing/2014/main" id="{2B54D2D8-007D-4F24-B823-93976860778F}"/>
               </a:ext>
             </a:extLst>
           </p:cNvPr>
@@ -18938,7 +18938,7 @@
           <p:cNvPr id="39" name="">
             <a:extLst xmlns:a="http://schemas.openxmlformats.org/drawingml/2006/main">
               <a:ext uri="{FF2B5EF4-FFF2-40B4-BE49-F238E27FC236}">
-                <a16:creationId xmlns:a16="http://schemas.microsoft.com/office/drawing/2014/main" id="{0BB3C530-8F87-4855-9EA3-C00361384514}"/>
+                <a16:creationId xmlns:a16="http://schemas.microsoft.com/office/drawing/2014/main" id="{B46B1856-9F4E-4644-B215-36601A80D0F8}"/>
               </a:ext>
             </a:extLst>
           </p:cNvPr>
@@ -18990,7 +18990,7 @@
           <p:cNvPr id="40" name="">
             <a:extLst xmlns:a="http://schemas.openxmlformats.org/drawingml/2006/main">
               <a:ext uri="{FF2B5EF4-FFF2-40B4-BE49-F238E27FC236}">
-                <a16:creationId xmlns:a16="http://schemas.microsoft.com/office/drawing/2014/main" id="{2A337D85-8766-45F3-A064-989825956D61}"/>
+                <a16:creationId xmlns:a16="http://schemas.microsoft.com/office/drawing/2014/main" id="{F45D87DA-B479-483F-ADD4-A07CE4E042F3}"/>
               </a:ext>
             </a:extLst>
           </p:cNvPr>
@@ -19042,7 +19042,7 @@
           <p:cNvPr id="41" name="">
             <a:extLst xmlns:a="http://schemas.openxmlformats.org/drawingml/2006/main">
               <a:ext uri="{FF2B5EF4-FFF2-40B4-BE49-F238E27FC236}">
-                <a16:creationId xmlns:a16="http://schemas.microsoft.com/office/drawing/2014/main" id="{7C1E0C1A-E563-40A5-9563-F65AF572ABD4}"/>
+                <a16:creationId xmlns:a16="http://schemas.microsoft.com/office/drawing/2014/main" id="{E1A0D8AD-41C4-4EE8-ABB2-BC19997C9567}"/>
               </a:ext>
             </a:extLst>
           </p:cNvPr>
@@ -19094,7 +19094,7 @@
           <p:cNvPr id="42" name="">
             <a:extLst xmlns:a="http://schemas.openxmlformats.org/drawingml/2006/main">
               <a:ext uri="{FF2B5EF4-FFF2-40B4-BE49-F238E27FC236}">
-                <a16:creationId xmlns:a16="http://schemas.microsoft.com/office/drawing/2014/main" id="{C407A250-71E2-4002-BCC7-BAD30517C4D8}"/>
+                <a16:creationId xmlns:a16="http://schemas.microsoft.com/office/drawing/2014/main" id="{15CBA8A7-742E-4F53-9730-0984E623DAFF}"/>
               </a:ext>
             </a:extLst>
           </p:cNvPr>
@@ -19146,7 +19146,7 @@
           <p:cNvPr id="43" name="">
             <a:extLst xmlns:a="http://schemas.openxmlformats.org/drawingml/2006/main">
               <a:ext uri="{FF2B5EF4-FFF2-40B4-BE49-F238E27FC236}">
-                <a16:creationId xmlns:a16="http://schemas.microsoft.com/office/drawing/2014/main" id="{1EABE1A5-4718-4398-BD00-91F2507C7765}"/>
+                <a16:creationId xmlns:a16="http://schemas.microsoft.com/office/drawing/2014/main" id="{5EA37597-34BC-4378-A286-A1FA6A7A54E6}"/>
               </a:ext>
             </a:extLst>
           </p:cNvPr>
@@ -19198,7 +19198,7 @@
           <p:cNvPr id="44" name="">
             <a:extLst xmlns:a="http://schemas.openxmlformats.org/drawingml/2006/main">
               <a:ext uri="{FF2B5EF4-FFF2-40B4-BE49-F238E27FC236}">
-                <a16:creationId xmlns:a16="http://schemas.microsoft.com/office/drawing/2014/main" id="{B312590C-7B9F-4878-B936-187833FDCA65}"/>
+                <a16:creationId xmlns:a16="http://schemas.microsoft.com/office/drawing/2014/main" id="{7C88281F-6666-4E60-A462-EBB15965D99D}"/>
               </a:ext>
             </a:extLst>
           </p:cNvPr>
@@ -19229,7 +19229,7 @@
           <p:cNvPr id="45" name="">
             <a:extLst xmlns:a="http://schemas.openxmlformats.org/drawingml/2006/main">
               <a:ext uri="{FF2B5EF4-FFF2-40B4-BE49-F238E27FC236}">
-                <a16:creationId xmlns:a16="http://schemas.microsoft.com/office/drawing/2014/main" id="{F178164B-91EF-4E13-9ADA-C41AD7EAA9C6}"/>
+                <a16:creationId xmlns:a16="http://schemas.microsoft.com/office/drawing/2014/main" id="{AA0FC0D3-21C4-4962-972B-5AD2628F2BFA}"/>
               </a:ext>
             </a:extLst>
           </p:cNvPr>
@@ -19260,7 +19260,7 @@
           <p:cNvPr id="46" name="">
             <a:extLst xmlns:a="http://schemas.openxmlformats.org/drawingml/2006/main">
               <a:ext uri="{FF2B5EF4-FFF2-40B4-BE49-F238E27FC236}">
-                <a16:creationId xmlns:a16="http://schemas.microsoft.com/office/drawing/2014/main" id="{5DF80666-FCC9-47FE-9D61-E88C44BEC38E}"/>
+                <a16:creationId xmlns:a16="http://schemas.microsoft.com/office/drawing/2014/main" id="{7914DF8E-F6AE-4167-92C0-67E91668C1B3}"/>
               </a:ext>
             </a:extLst>
           </p:cNvPr>
@@ -19312,7 +19312,7 @@
           <p:cNvPr id="47" name="">
             <a:extLst xmlns:a="http://schemas.openxmlformats.org/drawingml/2006/main">
               <a:ext uri="{FF2B5EF4-FFF2-40B4-BE49-F238E27FC236}">
-                <a16:creationId xmlns:a16="http://schemas.microsoft.com/office/drawing/2014/main" id="{9B31BCEC-A540-4CD2-B7EA-9CBA5C850E57}"/>
+                <a16:creationId xmlns:a16="http://schemas.microsoft.com/office/drawing/2014/main" id="{60EB44B1-59D3-4BAB-AB20-946F713421A3}"/>
               </a:ext>
             </a:extLst>
           </p:cNvPr>
@@ -19364,7 +19364,7 @@
           <p:cNvPr id="48" name="">
             <a:extLst xmlns:a="http://schemas.openxmlformats.org/drawingml/2006/main">
               <a:ext uri="{FF2B5EF4-FFF2-40B4-BE49-F238E27FC236}">
-                <a16:creationId xmlns:a16="http://schemas.microsoft.com/office/drawing/2014/main" id="{8DB00CA3-77E5-4C4B-A594-DF751D024097}"/>
+                <a16:creationId xmlns:a16="http://schemas.microsoft.com/office/drawing/2014/main" id="{6F63FAFD-E16F-49DD-8BDA-BC558AAFBBDC}"/>
               </a:ext>
             </a:extLst>
           </p:cNvPr>
@@ -19416,7 +19416,7 @@
           <p:cNvPr id="49" name="">
             <a:extLst xmlns:a="http://schemas.openxmlformats.org/drawingml/2006/main">
               <a:ext uri="{FF2B5EF4-FFF2-40B4-BE49-F238E27FC236}">
-                <a16:creationId xmlns:a16="http://schemas.microsoft.com/office/drawing/2014/main" id="{37B59903-AE3B-4382-99BF-CC1150EA646D}"/>
+                <a16:creationId xmlns:a16="http://schemas.microsoft.com/office/drawing/2014/main" id="{DCED864B-A03E-4031-9E56-627756A9F8F9}"/>
               </a:ext>
             </a:extLst>
           </p:cNvPr>
@@ -19468,7 +19468,7 @@
           <p:cNvPr id="50" name="">
             <a:extLst xmlns:a="http://schemas.openxmlformats.org/drawingml/2006/main">
               <a:ext uri="{FF2B5EF4-FFF2-40B4-BE49-F238E27FC236}">
-                <a16:creationId xmlns:a16="http://schemas.microsoft.com/office/drawing/2014/main" id="{A9DFC6C6-62D2-40CC-A47A-0930D50AB66B}"/>
+                <a16:creationId xmlns:a16="http://schemas.microsoft.com/office/drawing/2014/main" id="{1E955E63-A7AE-4B78-83B2-57975E701C60}"/>
               </a:ext>
             </a:extLst>
           </p:cNvPr>
@@ -19520,7 +19520,7 @@
           <p:cNvPr id="51" name="">
             <a:extLst xmlns:a="http://schemas.openxmlformats.org/drawingml/2006/main">
               <a:ext uri="{FF2B5EF4-FFF2-40B4-BE49-F238E27FC236}">
-                <a16:creationId xmlns:a16="http://schemas.microsoft.com/office/drawing/2014/main" id="{DEA72DB6-A7ED-4529-A970-04D76464DE29}"/>
+                <a16:creationId xmlns:a16="http://schemas.microsoft.com/office/drawing/2014/main" id="{DCA7A213-6443-486B-8569-5B9796A33440}"/>
               </a:ext>
             </a:extLst>
           </p:cNvPr>
@@ -19551,7 +19551,7 @@
           <p:cNvPr id="52" name="">
             <a:extLst xmlns:a="http://schemas.openxmlformats.org/drawingml/2006/main">
               <a:ext uri="{FF2B5EF4-FFF2-40B4-BE49-F238E27FC236}">
-                <a16:creationId xmlns:a16="http://schemas.microsoft.com/office/drawing/2014/main" id="{FFAA40E0-2BCE-4888-A2D0-4B6DA10E8B58}"/>
+                <a16:creationId xmlns:a16="http://schemas.microsoft.com/office/drawing/2014/main" id="{B9403158-B2CB-402D-8D53-908A79926DFC}"/>
               </a:ext>
             </a:extLst>
           </p:cNvPr>
@@ -19603,7 +19603,7 @@
           <p:cNvPr id="53" name="">
             <a:extLst xmlns:a="http://schemas.openxmlformats.org/drawingml/2006/main">
               <a:ext uri="{FF2B5EF4-FFF2-40B4-BE49-F238E27FC236}">
-                <a16:creationId xmlns:a16="http://schemas.microsoft.com/office/drawing/2014/main" id="{F0601830-B56F-444F-AC1D-6AB73E852308}"/>
+                <a16:creationId xmlns:a16="http://schemas.microsoft.com/office/drawing/2014/main" id="{D3D27ED9-294F-4B02-95BA-C8975ADFEC49}"/>
               </a:ext>
             </a:extLst>
           </p:cNvPr>
@@ -19655,7 +19655,7 @@
           <p:cNvPr id="54" name="">
             <a:extLst xmlns:a="http://schemas.openxmlformats.org/drawingml/2006/main">
               <a:ext uri="{FF2B5EF4-FFF2-40B4-BE49-F238E27FC236}">
-                <a16:creationId xmlns:a16="http://schemas.microsoft.com/office/drawing/2014/main" id="{D692DD57-BB6A-48DD-8ED1-E8BA57631B09}"/>
+                <a16:creationId xmlns:a16="http://schemas.microsoft.com/office/drawing/2014/main" id="{2733D738-82B4-46AA-88FE-654ADD03173D}"/>
               </a:ext>
             </a:extLst>
           </p:cNvPr>
@@ -19707,7 +19707,7 @@
           <p:cNvPr id="55" name="">
             <a:extLst xmlns:a="http://schemas.openxmlformats.org/drawingml/2006/main">
               <a:ext uri="{FF2B5EF4-FFF2-40B4-BE49-F238E27FC236}">
-                <a16:creationId xmlns:a16="http://schemas.microsoft.com/office/drawing/2014/main" id="{A057C13D-133C-43D6-AB3F-6DEAB4F9A826}"/>
+                <a16:creationId xmlns:a16="http://schemas.microsoft.com/office/drawing/2014/main" id="{2E9227D5-6AE8-451F-8BCE-236141B6F1F6}"/>
               </a:ext>
             </a:extLst>
           </p:cNvPr>
@@ -19759,7 +19759,7 @@
           <p:cNvPr id="56" name="">
             <a:extLst xmlns:a="http://schemas.openxmlformats.org/drawingml/2006/main">
               <a:ext uri="{FF2B5EF4-FFF2-40B4-BE49-F238E27FC236}">
-                <a16:creationId xmlns:a16="http://schemas.microsoft.com/office/drawing/2014/main" id="{A9F7A045-32C3-48D2-A1BA-A9907953861D}"/>
+                <a16:creationId xmlns:a16="http://schemas.microsoft.com/office/drawing/2014/main" id="{595E622A-CF1B-468F-999B-3CA1019A7B96}"/>
               </a:ext>
             </a:extLst>
           </p:cNvPr>
@@ -19811,7 +19811,7 @@
           <p:cNvPr id="57" name="">
             <a:extLst xmlns:a="http://schemas.openxmlformats.org/drawingml/2006/main">
               <a:ext uri="{FF2B5EF4-FFF2-40B4-BE49-F238E27FC236}">
-                <a16:creationId xmlns:a16="http://schemas.microsoft.com/office/drawing/2014/main" id="{0BFC92D6-08C1-43C8-9EE6-9F5531975731}"/>
+                <a16:creationId xmlns:a16="http://schemas.microsoft.com/office/drawing/2014/main" id="{694B10D1-2542-4AED-BC2E-16AA176B6C71}"/>
               </a:ext>
             </a:extLst>
           </p:cNvPr>
@@ -19842,7 +19842,7 @@
           <p:cNvPr id="58" name="">
             <a:extLst xmlns:a="http://schemas.openxmlformats.org/drawingml/2006/main">
               <a:ext uri="{FF2B5EF4-FFF2-40B4-BE49-F238E27FC236}">
-                <a16:creationId xmlns:a16="http://schemas.microsoft.com/office/drawing/2014/main" id="{A11C20F2-1F39-4E65-8A7E-CE7A63BD32F2}"/>
+                <a16:creationId xmlns:a16="http://schemas.microsoft.com/office/drawing/2014/main" id="{C1673336-25AA-4BE1-8BD1-F7ABD6DDB87A}"/>
               </a:ext>
             </a:extLst>
           </p:cNvPr>
@@ -19873,7 +19873,7 @@
           <p:cNvPr id="59" name="">
             <a:extLst xmlns:a="http://schemas.openxmlformats.org/drawingml/2006/main">
               <a:ext uri="{FF2B5EF4-FFF2-40B4-BE49-F238E27FC236}">
-                <a16:creationId xmlns:a16="http://schemas.microsoft.com/office/drawing/2014/main" id="{B21F0DD3-234A-4A5B-8E8F-22B7BD62DB40}"/>
+                <a16:creationId xmlns:a16="http://schemas.microsoft.com/office/drawing/2014/main" id="{FC5CACC9-5FCF-4AB6-BDA1-7379B2946287}"/>
               </a:ext>
             </a:extLst>
           </p:cNvPr>
@@ -19925,7 +19925,7 @@
           <p:cNvPr id="60" name="">
             <a:extLst xmlns:a="http://schemas.openxmlformats.org/drawingml/2006/main">
               <a:ext uri="{FF2B5EF4-FFF2-40B4-BE49-F238E27FC236}">
-                <a16:creationId xmlns:a16="http://schemas.microsoft.com/office/drawing/2014/main" id="{BC1A1C84-47E4-4AD1-B8E5-8C86F3D4DACE}"/>
+                <a16:creationId xmlns:a16="http://schemas.microsoft.com/office/drawing/2014/main" id="{C73C7E78-9770-4CF4-A473-274FA48905E2}"/>
               </a:ext>
             </a:extLst>
           </p:cNvPr>
@@ -19977,7 +19977,7 @@
           <p:cNvPr id="61" name="">
             <a:extLst xmlns:a="http://schemas.openxmlformats.org/drawingml/2006/main">
               <a:ext uri="{FF2B5EF4-FFF2-40B4-BE49-F238E27FC236}">
-                <a16:creationId xmlns:a16="http://schemas.microsoft.com/office/drawing/2014/main" id="{3F5DC856-AF0B-46CB-B318-6CD291E1D7D9}"/>
+                <a16:creationId xmlns:a16="http://schemas.microsoft.com/office/drawing/2014/main" id="{BBBC5B4C-A45E-45FE-8B73-2F45D939E719}"/>
               </a:ext>
             </a:extLst>
           </p:cNvPr>
@@ -20029,7 +20029,7 @@
           <p:cNvPr id="62" name="">
             <a:extLst xmlns:a="http://schemas.openxmlformats.org/drawingml/2006/main">
               <a:ext uri="{FF2B5EF4-FFF2-40B4-BE49-F238E27FC236}">
-                <a16:creationId xmlns:a16="http://schemas.microsoft.com/office/drawing/2014/main" id="{A9B5EC02-D648-477B-9E21-10A91BDD1746}"/>
+                <a16:creationId xmlns:a16="http://schemas.microsoft.com/office/drawing/2014/main" id="{C9E84DCE-EA24-4921-B6DF-92B8764C6C4F}"/>
               </a:ext>
             </a:extLst>
           </p:cNvPr>
@@ -20081,7 +20081,7 @@
           <p:cNvPr id="63" name="">
             <a:extLst xmlns:a="http://schemas.openxmlformats.org/drawingml/2006/main">
               <a:ext uri="{FF2B5EF4-FFF2-40B4-BE49-F238E27FC236}">
-                <a16:creationId xmlns:a16="http://schemas.microsoft.com/office/drawing/2014/main" id="{7ECA35D6-3EC2-4EF7-9FE6-41077609B5D1}"/>
+                <a16:creationId xmlns:a16="http://schemas.microsoft.com/office/drawing/2014/main" id="{35819590-17E6-47FD-BE1B-1EDA8C4FDCC8}"/>
               </a:ext>
             </a:extLst>
           </p:cNvPr>
@@ -20133,7 +20133,7 @@
           <p:cNvPr id="64" name="">
             <a:extLst xmlns:a="http://schemas.openxmlformats.org/drawingml/2006/main">
               <a:ext uri="{FF2B5EF4-FFF2-40B4-BE49-F238E27FC236}">
-                <a16:creationId xmlns:a16="http://schemas.microsoft.com/office/drawing/2014/main" id="{EAF7F67C-DA68-468B-A248-32B988296B5B}"/>
+                <a16:creationId xmlns:a16="http://schemas.microsoft.com/office/drawing/2014/main" id="{866627B2-0F21-412A-9ACB-43AA7F6DE26F}"/>
               </a:ext>
             </a:extLst>
           </p:cNvPr>
@@ -20164,7 +20164,7 @@
           <p:cNvPr id="65" name="">
             <a:extLst xmlns:a="http://schemas.openxmlformats.org/drawingml/2006/main">
               <a:ext uri="{FF2B5EF4-FFF2-40B4-BE49-F238E27FC236}">
-                <a16:creationId xmlns:a16="http://schemas.microsoft.com/office/drawing/2014/main" id="{1BD6B1F1-DE66-4D1A-B91B-D0061B23268D}"/>
+                <a16:creationId xmlns:a16="http://schemas.microsoft.com/office/drawing/2014/main" id="{70F2AD7F-E5CA-47C7-ABBC-BE09596C6E89}"/>
               </a:ext>
             </a:extLst>
           </p:cNvPr>
@@ -20216,7 +20216,7 @@
           <p:cNvPr id="66" name="">
             <a:extLst xmlns:a="http://schemas.openxmlformats.org/drawingml/2006/main">
               <a:ext uri="{FF2B5EF4-FFF2-40B4-BE49-F238E27FC236}">
-                <a16:creationId xmlns:a16="http://schemas.microsoft.com/office/drawing/2014/main" id="{F0845F20-A903-4E08-A016-6F63AE9F56E4}"/>
+                <a16:creationId xmlns:a16="http://schemas.microsoft.com/office/drawing/2014/main" id="{1C2D0C6A-AF48-450B-A440-5F34FE1B78C2}"/>
               </a:ext>
             </a:extLst>
           </p:cNvPr>
@@ -20268,7 +20268,7 @@
           <p:cNvPr id="67" name="">
             <a:extLst xmlns:a="http://schemas.openxmlformats.org/drawingml/2006/main">
               <a:ext uri="{FF2B5EF4-FFF2-40B4-BE49-F238E27FC236}">
-                <a16:creationId xmlns:a16="http://schemas.microsoft.com/office/drawing/2014/main" id="{4ACC9EFF-61E7-4AB5-83BF-174CD0BFC813}"/>
+                <a16:creationId xmlns:a16="http://schemas.microsoft.com/office/drawing/2014/main" id="{5A313DA8-331E-498A-8532-0BA18EC5A892}"/>
               </a:ext>
             </a:extLst>
           </p:cNvPr>
@@ -20320,7 +20320,7 @@
           <p:cNvPr id="68" name="">
             <a:extLst xmlns:a="http://schemas.openxmlformats.org/drawingml/2006/main">
               <a:ext uri="{FF2B5EF4-FFF2-40B4-BE49-F238E27FC236}">
-                <a16:creationId xmlns:a16="http://schemas.microsoft.com/office/drawing/2014/main" id="{894F4E5B-CA42-4B33-A752-51373CD6132D}"/>
+                <a16:creationId xmlns:a16="http://schemas.microsoft.com/office/drawing/2014/main" id="{C9B515E8-4076-4DFB-BA84-2D7028BC6897}"/>
               </a:ext>
             </a:extLst>
           </p:cNvPr>
@@ -20372,7 +20372,7 @@
           <p:cNvPr id="69" name="">
             <a:extLst xmlns:a="http://schemas.openxmlformats.org/drawingml/2006/main">
               <a:ext uri="{FF2B5EF4-FFF2-40B4-BE49-F238E27FC236}">
-                <a16:creationId xmlns:a16="http://schemas.microsoft.com/office/drawing/2014/main" id="{E25CF123-E3A7-4F63-9D33-82FD4DA02325}"/>
+                <a16:creationId xmlns:a16="http://schemas.microsoft.com/office/drawing/2014/main" id="{BFE13D49-B65C-4B41-AA54-1B233B01BB2C}"/>
               </a:ext>
             </a:extLst>
           </p:cNvPr>
@@ -20424,7 +20424,7 @@
           <p:cNvPr id="70" name="">
             <a:extLst xmlns:a="http://schemas.openxmlformats.org/drawingml/2006/main">
               <a:ext uri="{FF2B5EF4-FFF2-40B4-BE49-F238E27FC236}">
-                <a16:creationId xmlns:a16="http://schemas.microsoft.com/office/drawing/2014/main" id="{E4991CB5-D85F-4069-9886-FC291D0CB7E5}"/>
+                <a16:creationId xmlns:a16="http://schemas.microsoft.com/office/drawing/2014/main" id="{76884151-76A1-4DF1-B1B7-3FBF414EB428}"/>
               </a:ext>
             </a:extLst>
           </p:cNvPr>
@@ -20455,7 +20455,7 @@
           <p:cNvPr id="71" name="">
             <a:extLst xmlns:a="http://schemas.openxmlformats.org/drawingml/2006/main">
               <a:ext uri="{FF2B5EF4-FFF2-40B4-BE49-F238E27FC236}">
-                <a16:creationId xmlns:a16="http://schemas.microsoft.com/office/drawing/2014/main" id="{001A7F83-FA9E-4293-A2DE-4E4DDEFC4091}"/>
+                <a16:creationId xmlns:a16="http://schemas.microsoft.com/office/drawing/2014/main" id="{7F491036-B433-4776-BD5B-DB168CB60BCD}"/>
               </a:ext>
             </a:extLst>
           </p:cNvPr>
@@ -20486,7 +20486,7 @@
           <p:cNvPr id="72" name="">
             <a:extLst xmlns:a="http://schemas.openxmlformats.org/drawingml/2006/main">
               <a:ext uri="{FF2B5EF4-FFF2-40B4-BE49-F238E27FC236}">
-                <a16:creationId xmlns:a16="http://schemas.microsoft.com/office/drawing/2014/main" id="{0D005F6A-E853-4FAE-9157-821FB3336F5C}"/>
+                <a16:creationId xmlns:a16="http://schemas.microsoft.com/office/drawing/2014/main" id="{171A3828-A39F-4A83-9C14-EE57F1CB0430}"/>
               </a:ext>
             </a:extLst>
           </p:cNvPr>
@@ -20538,7 +20538,7 @@
           <p:cNvPr id="73" name="">
             <a:extLst xmlns:a="http://schemas.openxmlformats.org/drawingml/2006/main">
               <a:ext uri="{FF2B5EF4-FFF2-40B4-BE49-F238E27FC236}">
-                <a16:creationId xmlns:a16="http://schemas.microsoft.com/office/drawing/2014/main" id="{1987246B-9CE1-498D-9104-28B300D12604}"/>
+                <a16:creationId xmlns:a16="http://schemas.microsoft.com/office/drawing/2014/main" id="{53A27BD3-1416-4788-95D9-98DA86926B40}"/>
               </a:ext>
             </a:extLst>
           </p:cNvPr>
@@ -20590,7 +20590,7 @@
           <p:cNvPr id="74" name="">
             <a:extLst xmlns:a="http://schemas.openxmlformats.org/drawingml/2006/main">
               <a:ext uri="{FF2B5EF4-FFF2-40B4-BE49-F238E27FC236}">
-                <a16:creationId xmlns:a16="http://schemas.microsoft.com/office/drawing/2014/main" id="{3FA33210-E6D4-4DC4-92FB-4B8B939F8FA0}"/>
+                <a16:creationId xmlns:a16="http://schemas.microsoft.com/office/drawing/2014/main" id="{B2E3414C-40CA-4BB1-B951-DB05B3C12A8F}"/>
               </a:ext>
             </a:extLst>
           </p:cNvPr>
@@ -20642,7 +20642,7 @@
           <p:cNvPr id="75" name="">
             <a:extLst xmlns:a="http://schemas.openxmlformats.org/drawingml/2006/main">
               <a:ext uri="{FF2B5EF4-FFF2-40B4-BE49-F238E27FC236}">
-                <a16:creationId xmlns:a16="http://schemas.microsoft.com/office/drawing/2014/main" id="{B2216390-1826-4CC8-9FA2-9A4F2A13BADD}"/>
+                <a16:creationId xmlns:a16="http://schemas.microsoft.com/office/drawing/2014/main" id="{0E500F3C-5B1C-433F-9871-59D6D558D415}"/>
               </a:ext>
             </a:extLst>
           </p:cNvPr>
@@ -20694,7 +20694,7 @@
           <p:cNvPr id="76" name="">
             <a:extLst xmlns:a="http://schemas.openxmlformats.org/drawingml/2006/main">
               <a:ext uri="{FF2B5EF4-FFF2-40B4-BE49-F238E27FC236}">
-                <a16:creationId xmlns:a16="http://schemas.microsoft.com/office/drawing/2014/main" id="{CE3F6BA8-FCD4-4FDF-BD7F-8DB45E689B92}"/>
+                <a16:creationId xmlns:a16="http://schemas.microsoft.com/office/drawing/2014/main" id="{599C8DAF-732C-4200-9E2B-F577352FBF0A}"/>
               </a:ext>
             </a:extLst>
           </p:cNvPr>
@@ -20746,7 +20746,7 @@
           <p:cNvPr id="77" name="">
             <a:extLst xmlns:a="http://schemas.openxmlformats.org/drawingml/2006/main">
               <a:ext uri="{FF2B5EF4-FFF2-40B4-BE49-F238E27FC236}">
-                <a16:creationId xmlns:a16="http://schemas.microsoft.com/office/drawing/2014/main" id="{B2321045-82D7-44BD-A863-416F1B6852AB}"/>
+                <a16:creationId xmlns:a16="http://schemas.microsoft.com/office/drawing/2014/main" id="{21F7FD4C-6B09-4665-AD10-800639502621}"/>
               </a:ext>
             </a:extLst>
           </p:cNvPr>
@@ -20777,7 +20777,7 @@
           <p:cNvPr id="78" name="">
             <a:extLst xmlns:a="http://schemas.openxmlformats.org/drawingml/2006/main">
               <a:ext uri="{FF2B5EF4-FFF2-40B4-BE49-F238E27FC236}">
-                <a16:creationId xmlns:a16="http://schemas.microsoft.com/office/drawing/2014/main" id="{4A17489B-04BE-4190-9CC9-34FAAC04AF74}"/>
+                <a16:creationId xmlns:a16="http://schemas.microsoft.com/office/drawing/2014/main" id="{092237CC-7F22-47DE-ADD3-66D38DED8E80}"/>
               </a:ext>
             </a:extLst>
           </p:cNvPr>
@@ -20829,7 +20829,7 @@
           <p:cNvPr id="79" name="">
             <a:extLst xmlns:a="http://schemas.openxmlformats.org/drawingml/2006/main">
               <a:ext uri="{FF2B5EF4-FFF2-40B4-BE49-F238E27FC236}">
-                <a16:creationId xmlns:a16="http://schemas.microsoft.com/office/drawing/2014/main" id="{3979D519-BA5C-4F80-8EE1-5DD77EDC665F}"/>
+                <a16:creationId xmlns:a16="http://schemas.microsoft.com/office/drawing/2014/main" id="{220CAE38-9DD3-4F21-A56C-1ECB05F8725B}"/>
               </a:ext>
             </a:extLst>
           </p:cNvPr>
@@ -20881,7 +20881,7 @@
           <p:cNvPr id="80" name="">
             <a:extLst xmlns:a="http://schemas.openxmlformats.org/drawingml/2006/main">
               <a:ext uri="{FF2B5EF4-FFF2-40B4-BE49-F238E27FC236}">
-                <a16:creationId xmlns:a16="http://schemas.microsoft.com/office/drawing/2014/main" id="{EA6A9C53-61BC-48B4-AA3A-5F3F5E08C86B}"/>
+                <a16:creationId xmlns:a16="http://schemas.microsoft.com/office/drawing/2014/main" id="{04E8FE12-AB90-40AE-AF55-C7EE694D5BC8}"/>
               </a:ext>
             </a:extLst>
           </p:cNvPr>
@@ -20933,7 +20933,7 @@
           <p:cNvPr id="81" name="">
             <a:extLst xmlns:a="http://schemas.openxmlformats.org/drawingml/2006/main">
               <a:ext uri="{FF2B5EF4-FFF2-40B4-BE49-F238E27FC236}">
-                <a16:creationId xmlns:a16="http://schemas.microsoft.com/office/drawing/2014/main" id="{57C41E18-F976-4168-9645-06B4FEDB16EB}"/>
+                <a16:creationId xmlns:a16="http://schemas.microsoft.com/office/drawing/2014/main" id="{E2B7EB09-9EED-42D5-BF87-C52D574B2743}"/>
               </a:ext>
             </a:extLst>
           </p:cNvPr>
@@ -20985,7 +20985,7 @@
           <p:cNvPr id="82" name="">
             <a:extLst xmlns:a="http://schemas.openxmlformats.org/drawingml/2006/main">
               <a:ext uri="{FF2B5EF4-FFF2-40B4-BE49-F238E27FC236}">
-                <a16:creationId xmlns:a16="http://schemas.microsoft.com/office/drawing/2014/main" id="{831EE77F-865C-4C02-AD7A-21DB52224935}"/>
+                <a16:creationId xmlns:a16="http://schemas.microsoft.com/office/drawing/2014/main" id="{8E0226CF-EA66-402E-AB4B-06ABABD55747}"/>
               </a:ext>
             </a:extLst>
           </p:cNvPr>
@@ -21037,7 +21037,7 @@
           <p:cNvPr id="83" name="">
             <a:extLst xmlns:a="http://schemas.openxmlformats.org/drawingml/2006/main">
               <a:ext uri="{FF2B5EF4-FFF2-40B4-BE49-F238E27FC236}">
-                <a16:creationId xmlns:a16="http://schemas.microsoft.com/office/drawing/2014/main" id="{D7F5B763-F746-4949-826A-B0660F27DA3F}"/>
+                <a16:creationId xmlns:a16="http://schemas.microsoft.com/office/drawing/2014/main" id="{869AEFE3-5F57-42D0-B563-92C5B97FD2E4}"/>
               </a:ext>
             </a:extLst>
           </p:cNvPr>
@@ -21068,7 +21068,7 @@
           <p:cNvPr id="84" name="">
             <a:extLst xmlns:a="http://schemas.openxmlformats.org/drawingml/2006/main">
               <a:ext uri="{FF2B5EF4-FFF2-40B4-BE49-F238E27FC236}">
-                <a16:creationId xmlns:a16="http://schemas.microsoft.com/office/drawing/2014/main" id="{0D8E72DA-A21F-4185-BE23-AEAE8DFFCA18}"/>
+                <a16:creationId xmlns:a16="http://schemas.microsoft.com/office/drawing/2014/main" id="{D085E515-EF91-482C-B7CD-767BA34DF7D5}"/>
               </a:ext>
             </a:extLst>
           </p:cNvPr>
@@ -21120,7 +21120,7 @@
           <p:cNvPr id="85" name="">
             <a:extLst xmlns:a="http://schemas.openxmlformats.org/drawingml/2006/main">
               <a:ext uri="{FF2B5EF4-FFF2-40B4-BE49-F238E27FC236}">
-                <a16:creationId xmlns:a16="http://schemas.microsoft.com/office/drawing/2014/main" id="{407A75AC-5CFB-40A8-8357-266B1C206926}"/>
+                <a16:creationId xmlns:a16="http://schemas.microsoft.com/office/drawing/2014/main" id="{7BFEEC8F-4EF1-4FA0-A7CD-0CB43EF1E8B4}"/>
               </a:ext>
             </a:extLst>
           </p:cNvPr>
@@ -21172,7 +21172,7 @@
           <p:cNvPr id="86" name="">
             <a:extLst xmlns:a="http://schemas.openxmlformats.org/drawingml/2006/main">
               <a:ext uri="{FF2B5EF4-FFF2-40B4-BE49-F238E27FC236}">
-                <a16:creationId xmlns:a16="http://schemas.microsoft.com/office/drawing/2014/main" id="{A6A7ED6F-39F9-4125-9D10-E045C97732AA}"/>
+                <a16:creationId xmlns:a16="http://schemas.microsoft.com/office/drawing/2014/main" id="{6F39704F-6CD0-405F-B75B-BE1EA889E3F2}"/>
               </a:ext>
             </a:extLst>
           </p:cNvPr>
@@ -21224,7 +21224,7 @@
           <p:cNvPr id="87" name="">
             <a:extLst xmlns:a="http://schemas.openxmlformats.org/drawingml/2006/main">
               <a:ext uri="{FF2B5EF4-FFF2-40B4-BE49-F238E27FC236}">
-                <a16:creationId xmlns:a16="http://schemas.microsoft.com/office/drawing/2014/main" id="{9ABA6796-6FEE-4A68-AAAA-A25F6024A657}"/>
+                <a16:creationId xmlns:a16="http://schemas.microsoft.com/office/drawing/2014/main" id="{AECE184D-9E61-4503-9E17-36858B12B4DD}"/>
               </a:ext>
             </a:extLst>
           </p:cNvPr>
@@ -21276,7 +21276,7 @@
           <p:cNvPr id="88" name="">
             <a:extLst xmlns:a="http://schemas.openxmlformats.org/drawingml/2006/main">
               <a:ext uri="{FF2B5EF4-FFF2-40B4-BE49-F238E27FC236}">
-                <a16:creationId xmlns:a16="http://schemas.microsoft.com/office/drawing/2014/main" id="{B4BFE437-F4DF-4671-8BFD-7974B193D72D}"/>
+                <a16:creationId xmlns:a16="http://schemas.microsoft.com/office/drawing/2014/main" id="{521F0C57-4253-462E-B340-505070676288}"/>
               </a:ext>
             </a:extLst>
           </p:cNvPr>
@@ -21328,7 +21328,7 @@
           <p:cNvPr id="89" name="">
             <a:extLst xmlns:a="http://schemas.openxmlformats.org/drawingml/2006/main">
               <a:ext uri="{FF2B5EF4-FFF2-40B4-BE49-F238E27FC236}">
-                <a16:creationId xmlns:a16="http://schemas.microsoft.com/office/drawing/2014/main" id="{CE686D32-CBEC-4188-AB61-EC2072517516}"/>
+                <a16:creationId xmlns:a16="http://schemas.microsoft.com/office/drawing/2014/main" id="{4EF2801C-901D-4622-A0A6-36A28BC6278A}"/>
               </a:ext>
             </a:extLst>
           </p:cNvPr>
@@ -21359,7 +21359,7 @@
           <p:cNvPr id="90" name="">
             <a:extLst xmlns:a="http://schemas.openxmlformats.org/drawingml/2006/main">
               <a:ext uri="{FF2B5EF4-FFF2-40B4-BE49-F238E27FC236}">
-                <a16:creationId xmlns:a16="http://schemas.microsoft.com/office/drawing/2014/main" id="{98872324-57EA-4EDD-BAA7-CFAAB3E0053B}"/>
+                <a16:creationId xmlns:a16="http://schemas.microsoft.com/office/drawing/2014/main" id="{B07E296D-D59E-418C-B609-852F45579841}"/>
               </a:ext>
             </a:extLst>
           </p:cNvPr>
@@ -21390,7 +21390,7 @@
           <p:cNvPr id="91" name="">
             <a:extLst xmlns:a="http://schemas.openxmlformats.org/drawingml/2006/main">
               <a:ext uri="{FF2B5EF4-FFF2-40B4-BE49-F238E27FC236}">
-                <a16:creationId xmlns:a16="http://schemas.microsoft.com/office/drawing/2014/main" id="{D5D0F250-1414-4364-AB2A-EE70E5FEAF3E}"/>
+                <a16:creationId xmlns:a16="http://schemas.microsoft.com/office/drawing/2014/main" id="{412D8604-AA0A-4B36-8206-D62D0C0350C4}"/>
               </a:ext>
             </a:extLst>
           </p:cNvPr>
@@ -21442,7 +21442,7 @@
           <p:cNvPr id="92" name="">
             <a:extLst xmlns:a="http://schemas.openxmlformats.org/drawingml/2006/main">
               <a:ext uri="{FF2B5EF4-FFF2-40B4-BE49-F238E27FC236}">
-                <a16:creationId xmlns:a16="http://schemas.microsoft.com/office/drawing/2014/main" id="{4D9D1E14-F3DA-44CE-9B51-842072EDE826}"/>
+                <a16:creationId xmlns:a16="http://schemas.microsoft.com/office/drawing/2014/main" id="{FFAFD77D-71C0-4EB7-82A7-70D4203307D6}"/>
               </a:ext>
             </a:extLst>
           </p:cNvPr>
@@ -21494,7 +21494,7 @@
           <p:cNvPr id="93" name="">
             <a:extLst xmlns:a="http://schemas.openxmlformats.org/drawingml/2006/main">
               <a:ext uri="{FF2B5EF4-FFF2-40B4-BE49-F238E27FC236}">
-                <a16:creationId xmlns:a16="http://schemas.microsoft.com/office/drawing/2014/main" id="{A1513774-268F-41EB-B9CA-1CA6589563F6}"/>
+                <a16:creationId xmlns:a16="http://schemas.microsoft.com/office/drawing/2014/main" id="{5CCAB1B8-DB34-4C0C-899A-FA80092794E7}"/>
               </a:ext>
             </a:extLst>
           </p:cNvPr>
@@ -21546,7 +21546,7 @@
           <p:cNvPr id="94" name="">
             <a:extLst xmlns:a="http://schemas.openxmlformats.org/drawingml/2006/main">
               <a:ext uri="{FF2B5EF4-FFF2-40B4-BE49-F238E27FC236}">
-                <a16:creationId xmlns:a16="http://schemas.microsoft.com/office/drawing/2014/main" id="{FDFB859D-067B-41D5-90AF-B055EC13C171}"/>
+                <a16:creationId xmlns:a16="http://schemas.microsoft.com/office/drawing/2014/main" id="{D6A57791-08AF-4D21-ACFA-0CAA62A60E13}"/>
               </a:ext>
             </a:extLst>
           </p:cNvPr>
@@ -21598,7 +21598,7 @@
           <p:cNvPr id="95" name="">
             <a:extLst xmlns:a="http://schemas.openxmlformats.org/drawingml/2006/main">
               <a:ext uri="{FF2B5EF4-FFF2-40B4-BE49-F238E27FC236}">
-                <a16:creationId xmlns:a16="http://schemas.microsoft.com/office/drawing/2014/main" id="{5DE414ED-7241-433D-AB5E-F477A2BD3225}"/>
+                <a16:creationId xmlns:a16="http://schemas.microsoft.com/office/drawing/2014/main" id="{7A099FE7-8047-4E87-BAA7-7EDD2359E123}"/>
               </a:ext>
             </a:extLst>
           </p:cNvPr>
@@ -21648,7 +21648,7 @@
     </p:spTree>
     <p:extLst>
       <p:ext uri="{BB962C8B-B14F-4D97-AF65-F5344CB8AC3E}">
-        <p14:creationId xmlns:p14="http://schemas.microsoft.com/office/powerpoint/2010/main" val="467518454"/>
+        <p14:creationId xmlns:p14="http://schemas.microsoft.com/office/powerpoint/2010/main" val="1471596144"/>
       </p:ext>
     </p:extLst>
   </p:cSld>
@@ -21679,7 +21679,7 @@
           <p:cNvPr id="122" name="">
             <a:extLst xmlns:a="http://schemas.openxmlformats.org/drawingml/2006/main">
               <a:ext uri="{FF2B5EF4-FFF2-40B4-BE49-F238E27FC236}">
-                <a16:creationId xmlns:a16="http://schemas.microsoft.com/office/drawing/2014/main" id="{BE753160-8EE5-41B4-B70A-B3EDC661DF20}"/>
+                <a16:creationId xmlns:a16="http://schemas.microsoft.com/office/drawing/2014/main" id="{33AD5BB1-4A6A-4EF2-9458-E29867E89D26}"/>
               </a:ext>
             </a:extLst>
           </p:cNvPr>
@@ -21712,7 +21712,7 @@
           <p:cNvPr id="2" name="">
             <a:extLst xmlns:a="http://schemas.openxmlformats.org/drawingml/2006/main">
               <a:ext uri="{FF2B5EF4-FFF2-40B4-BE49-F238E27FC236}">
-                <a16:creationId xmlns:a16="http://schemas.microsoft.com/office/drawing/2014/main" id="{4589CE5C-1ACF-424B-AC0F-0D6C30DC20D9}"/>
+                <a16:creationId xmlns:a16="http://schemas.microsoft.com/office/drawing/2014/main" id="{62B54A74-F6A0-4C8F-B6D2-BDB5B10BD339}"/>
               </a:ext>
             </a:extLst>
           </p:cNvPr>
@@ -21743,7 +21743,7 @@
           <p:cNvPr id="3" name="">
             <a:extLst xmlns:a="http://schemas.openxmlformats.org/drawingml/2006/main">
               <a:ext uri="{FF2B5EF4-FFF2-40B4-BE49-F238E27FC236}">
-                <a16:creationId xmlns:a16="http://schemas.microsoft.com/office/drawing/2014/main" id="{36087A67-58AA-4D86-9681-5F36DE970CE2}"/>
+                <a16:creationId xmlns:a16="http://schemas.microsoft.com/office/drawing/2014/main" id="{10BDFC9F-87DC-423A-9969-60771331367F}"/>
               </a:ext>
             </a:extLst>
           </p:cNvPr>
@@ -21795,7 +21795,7 @@
           <p:cNvPr id="4" name="">
             <a:extLst xmlns:a="http://schemas.openxmlformats.org/drawingml/2006/main">
               <a:ext uri="{FF2B5EF4-FFF2-40B4-BE49-F238E27FC236}">
-                <a16:creationId xmlns:a16="http://schemas.microsoft.com/office/drawing/2014/main" id="{C007D6DF-18B3-452F-BDA3-AAC71891C16F}"/>
+                <a16:creationId xmlns:a16="http://schemas.microsoft.com/office/drawing/2014/main" id="{257FC788-9CFA-40F5-85EA-67B92C08D37C}"/>
               </a:ext>
             </a:extLst>
           </p:cNvPr>
@@ -21847,7 +21847,7 @@
           <p:cNvPr id="5" name="">
             <a:extLst xmlns:a="http://schemas.openxmlformats.org/drawingml/2006/main">
               <a:ext uri="{FF2B5EF4-FFF2-40B4-BE49-F238E27FC236}">
-                <a16:creationId xmlns:a16="http://schemas.microsoft.com/office/drawing/2014/main" id="{9F13BD37-8E06-4BCC-B870-5D7DA382143B}"/>
+                <a16:creationId xmlns:a16="http://schemas.microsoft.com/office/drawing/2014/main" id="{F408D0D2-5F48-4E41-8DB6-0B48D55BA15A}"/>
               </a:ext>
             </a:extLst>
           </p:cNvPr>
@@ -21882,7 +21882,7 @@
           <p:nvPr/>
         </p:nvPicPr>
         <p:blipFill>
-          <a:blip xmlns:r="http://schemas.openxmlformats.org/officeDocument/2006/relationships" xmlns:a="http://schemas.openxmlformats.org/drawingml/2006/main" r:embed="R60bc3f85a4c34f43"/>
+          <a:blip xmlns:r="http://schemas.openxmlformats.org/officeDocument/2006/relationships" xmlns:a="http://schemas.openxmlformats.org/drawingml/2006/main" r:embed="R27894c3a7d674ff6"/>
           <a:stretch xmlns:a="http://schemas.openxmlformats.org/drawingml/2006/main"/>
         </p:blipFill>
         <p:spPr>
@@ -21900,7 +21900,7 @@
           <p:cNvPr id="7" name="">
             <a:extLst xmlns:a="http://schemas.openxmlformats.org/drawingml/2006/main">
               <a:ext uri="{FF2B5EF4-FFF2-40B4-BE49-F238E27FC236}">
-                <a16:creationId xmlns:a16="http://schemas.microsoft.com/office/drawing/2014/main" id="{EBA85391-D9F3-4520-A2F3-84BA9DB682BB}"/>
+                <a16:creationId xmlns:a16="http://schemas.microsoft.com/office/drawing/2014/main" id="{E46D5860-1026-49E9-B623-616527D1AA85}"/>
               </a:ext>
             </a:extLst>
           </p:cNvPr>
@@ -21952,7 +21952,7 @@
           <p:cNvPr id="8" name="">
             <a:extLst xmlns:a="http://schemas.openxmlformats.org/drawingml/2006/main">
               <a:ext uri="{FF2B5EF4-FFF2-40B4-BE49-F238E27FC236}">
-                <a16:creationId xmlns:a16="http://schemas.microsoft.com/office/drawing/2014/main" id="{BD660ABE-E670-4E31-85A3-7AC00D9E8D4B}"/>
+                <a16:creationId xmlns:a16="http://schemas.microsoft.com/office/drawing/2014/main" id="{46C5348A-D4C8-41AD-82FC-327268823E79}"/>
               </a:ext>
             </a:extLst>
           </p:cNvPr>
@@ -22004,7 +22004,7 @@
           <p:cNvPr id="9" name="">
             <a:extLst xmlns:a="http://schemas.openxmlformats.org/drawingml/2006/main">
               <a:ext uri="{FF2B5EF4-FFF2-40B4-BE49-F238E27FC236}">
-                <a16:creationId xmlns:a16="http://schemas.microsoft.com/office/drawing/2014/main" id="{F3AD448B-B5D9-4788-A6AA-A04C9A883468}"/>
+                <a16:creationId xmlns:a16="http://schemas.microsoft.com/office/drawing/2014/main" id="{01AB35E2-568A-418F-BA87-984B33595549}"/>
               </a:ext>
             </a:extLst>
           </p:cNvPr>
@@ -22056,7 +22056,7 @@
           <p:cNvPr id="10" name="">
             <a:extLst xmlns:a="http://schemas.openxmlformats.org/drawingml/2006/main">
               <a:ext uri="{FF2B5EF4-FFF2-40B4-BE49-F238E27FC236}">
-                <a16:creationId xmlns:a16="http://schemas.microsoft.com/office/drawing/2014/main" id="{B7FD9350-8D5F-42C4-8C01-1EC126098A7F}"/>
+                <a16:creationId xmlns:a16="http://schemas.microsoft.com/office/drawing/2014/main" id="{2E29597F-4020-4F77-8BA1-76D7C38E77D2}"/>
               </a:ext>
             </a:extLst>
           </p:cNvPr>
@@ -22108,7 +22108,7 @@
           <p:cNvPr id="11" name="">
             <a:extLst xmlns:a="http://schemas.openxmlformats.org/drawingml/2006/main">
               <a:ext uri="{FF2B5EF4-FFF2-40B4-BE49-F238E27FC236}">
-                <a16:creationId xmlns:a16="http://schemas.microsoft.com/office/drawing/2014/main" id="{53A0C538-03EA-4B92-AF9C-0062A775D223}"/>
+                <a16:creationId xmlns:a16="http://schemas.microsoft.com/office/drawing/2014/main" id="{81E7B665-F71B-47CD-A92E-E914A9922AE2}"/>
               </a:ext>
             </a:extLst>
           </p:cNvPr>
@@ -22139,7 +22139,7 @@
           <p:cNvPr id="12" name="">
             <a:extLst xmlns:a="http://schemas.openxmlformats.org/drawingml/2006/main">
               <a:ext uri="{FF2B5EF4-FFF2-40B4-BE49-F238E27FC236}">
-                <a16:creationId xmlns:a16="http://schemas.microsoft.com/office/drawing/2014/main" id="{E1ADCC29-CFFE-499A-9886-3DA678675CBD}"/>
+                <a16:creationId xmlns:a16="http://schemas.microsoft.com/office/drawing/2014/main" id="{BDBACAB2-C093-4F6D-BE26-290714297D80}"/>
               </a:ext>
             </a:extLst>
           </p:cNvPr>
@@ -22170,7 +22170,7 @@
           <p:cNvPr id="13" name="">
             <a:extLst xmlns:a="http://schemas.openxmlformats.org/drawingml/2006/main">
               <a:ext uri="{FF2B5EF4-FFF2-40B4-BE49-F238E27FC236}">
-                <a16:creationId xmlns:a16="http://schemas.microsoft.com/office/drawing/2014/main" id="{32770088-A99F-4F32-8984-C1DF39EDA343}"/>
+                <a16:creationId xmlns:a16="http://schemas.microsoft.com/office/drawing/2014/main" id="{C5647D07-E519-44D1-AF1E-73CC9635C5B1}"/>
               </a:ext>
             </a:extLst>
           </p:cNvPr>
@@ -22222,7 +22222,7 @@
           <p:cNvPr id="14" name="">
             <a:extLst xmlns:a="http://schemas.openxmlformats.org/drawingml/2006/main">
               <a:ext uri="{FF2B5EF4-FFF2-40B4-BE49-F238E27FC236}">
-                <a16:creationId xmlns:a16="http://schemas.microsoft.com/office/drawing/2014/main" id="{A746BA01-5A6C-46E4-862D-C2ECF63B32CB}"/>
+                <a16:creationId xmlns:a16="http://schemas.microsoft.com/office/drawing/2014/main" id="{C837A909-6FA2-4DF7-83F7-9131AF54F065}"/>
               </a:ext>
             </a:extLst>
           </p:cNvPr>
@@ -22274,7 +22274,7 @@
           <p:cNvPr id="15" name="">
             <a:extLst xmlns:a="http://schemas.openxmlformats.org/drawingml/2006/main">
               <a:ext uri="{FF2B5EF4-FFF2-40B4-BE49-F238E27FC236}">
-                <a16:creationId xmlns:a16="http://schemas.microsoft.com/office/drawing/2014/main" id="{CCE3E588-C427-46FC-A7FC-2425CDED915B}"/>
+                <a16:creationId xmlns:a16="http://schemas.microsoft.com/office/drawing/2014/main" id="{56A2E958-24A4-4DD1-B624-564DE8C9D01B}"/>
               </a:ext>
             </a:extLst>
           </p:cNvPr>
@@ -22326,7 +22326,7 @@
           <p:cNvPr id="16" name="">
             <a:extLst xmlns:a="http://schemas.openxmlformats.org/drawingml/2006/main">
               <a:ext uri="{FF2B5EF4-FFF2-40B4-BE49-F238E27FC236}">
-                <a16:creationId xmlns:a16="http://schemas.microsoft.com/office/drawing/2014/main" id="{00DFD669-AAD5-4785-8F6A-317F790EA4F0}"/>
+                <a16:creationId xmlns:a16="http://schemas.microsoft.com/office/drawing/2014/main" id="{1E68C09C-0DAB-4F38-986A-8E2182D0E76B}"/>
               </a:ext>
             </a:extLst>
           </p:cNvPr>
@@ -22378,7 +22378,7 @@
           <p:cNvPr id="17" name="">
             <a:extLst xmlns:a="http://schemas.openxmlformats.org/drawingml/2006/main">
               <a:ext uri="{FF2B5EF4-FFF2-40B4-BE49-F238E27FC236}">
-                <a16:creationId xmlns:a16="http://schemas.microsoft.com/office/drawing/2014/main" id="{7B7E05F1-4F03-474F-B398-EF0403FD8ECD}"/>
+                <a16:creationId xmlns:a16="http://schemas.microsoft.com/office/drawing/2014/main" id="{31B14C9F-72BE-4C7A-8995-535BC663FB10}"/>
               </a:ext>
             </a:extLst>
           </p:cNvPr>
@@ -22430,7 +22430,7 @@
           <p:cNvPr id="18" name="">
             <a:extLst xmlns:a="http://schemas.openxmlformats.org/drawingml/2006/main">
               <a:ext uri="{FF2B5EF4-FFF2-40B4-BE49-F238E27FC236}">
-                <a16:creationId xmlns:a16="http://schemas.microsoft.com/office/drawing/2014/main" id="{6CF2E2F0-670C-4933-AFF7-BCC29C5925AB}"/>
+                <a16:creationId xmlns:a16="http://schemas.microsoft.com/office/drawing/2014/main" id="{AEDF0917-5CCF-4F39-BAC4-ADB916D44321}"/>
               </a:ext>
             </a:extLst>
           </p:cNvPr>
@@ -22482,7 +22482,7 @@
           <p:cNvPr id="19" name="">
             <a:extLst xmlns:a="http://schemas.openxmlformats.org/drawingml/2006/main">
               <a:ext uri="{FF2B5EF4-FFF2-40B4-BE49-F238E27FC236}">
-                <a16:creationId xmlns:a16="http://schemas.microsoft.com/office/drawing/2014/main" id="{A07A4F94-243E-4F73-9A9E-0C6E21000C27}"/>
+                <a16:creationId xmlns:a16="http://schemas.microsoft.com/office/drawing/2014/main" id="{2E0DB788-3D0B-4E5F-B856-49C0AB760B71}"/>
               </a:ext>
             </a:extLst>
           </p:cNvPr>
@@ -22534,7 +22534,7 @@
           <p:cNvPr id="20" name="">
             <a:extLst xmlns:a="http://schemas.openxmlformats.org/drawingml/2006/main">
               <a:ext uri="{FF2B5EF4-FFF2-40B4-BE49-F238E27FC236}">
-                <a16:creationId xmlns:a16="http://schemas.microsoft.com/office/drawing/2014/main" id="{1877F5C7-423B-414D-8AC7-93787C10A37D}"/>
+                <a16:creationId xmlns:a16="http://schemas.microsoft.com/office/drawing/2014/main" id="{60FC4F95-1B39-4F7F-90EC-2B702F5A5087}"/>
               </a:ext>
             </a:extLst>
           </p:cNvPr>
@@ -22565,7 +22565,7 @@
           <p:cNvPr id="21" name="">
             <a:extLst xmlns:a="http://schemas.openxmlformats.org/drawingml/2006/main">
               <a:ext uri="{FF2B5EF4-FFF2-40B4-BE49-F238E27FC236}">
-                <a16:creationId xmlns:a16="http://schemas.microsoft.com/office/drawing/2014/main" id="{ADAC244F-BB4D-41E1-913C-816A98508A1A}"/>
+                <a16:creationId xmlns:a16="http://schemas.microsoft.com/office/drawing/2014/main" id="{A742DC43-7EDE-410C-ACEE-97C8947F247C}"/>
               </a:ext>
             </a:extLst>
           </p:cNvPr>
@@ -22617,7 +22617,7 @@
           <p:cNvPr id="22" name="">
             <a:extLst xmlns:a="http://schemas.openxmlformats.org/drawingml/2006/main">
               <a:ext uri="{FF2B5EF4-FFF2-40B4-BE49-F238E27FC236}">
-                <a16:creationId xmlns:a16="http://schemas.microsoft.com/office/drawing/2014/main" id="{70CF9693-B4AD-4DEC-B93E-41265A218C90}"/>
+                <a16:creationId xmlns:a16="http://schemas.microsoft.com/office/drawing/2014/main" id="{DB6B86F3-4747-42D0-8568-CFF3B42DF059}"/>
               </a:ext>
             </a:extLst>
           </p:cNvPr>
@@ -22669,7 +22669,7 @@
           <p:cNvPr id="23" name="">
             <a:extLst xmlns:a="http://schemas.openxmlformats.org/drawingml/2006/main">
               <a:ext uri="{FF2B5EF4-FFF2-40B4-BE49-F238E27FC236}">
-                <a16:creationId xmlns:a16="http://schemas.microsoft.com/office/drawing/2014/main" id="{BEB5BA9A-7489-469B-81A5-B89A1F2D8CB7}"/>
+                <a16:creationId xmlns:a16="http://schemas.microsoft.com/office/drawing/2014/main" id="{460EFC5C-8A77-423E-87FB-E7DFEDA5BDA9}"/>
               </a:ext>
             </a:extLst>
           </p:cNvPr>
@@ -22721,7 +22721,7 @@
           <p:cNvPr id="24" name="">
             <a:extLst xmlns:a="http://schemas.openxmlformats.org/drawingml/2006/main">
               <a:ext uri="{FF2B5EF4-FFF2-40B4-BE49-F238E27FC236}">
-                <a16:creationId xmlns:a16="http://schemas.microsoft.com/office/drawing/2014/main" id="{86430A6F-49DC-4CA3-AE28-9B5C91DE3B31}"/>
+                <a16:creationId xmlns:a16="http://schemas.microsoft.com/office/drawing/2014/main" id="{06DA975C-FB03-4096-9E1F-A86F2B478E21}"/>
               </a:ext>
             </a:extLst>
           </p:cNvPr>
@@ -22773,7 +22773,7 @@
           <p:cNvPr id="25" name="">
             <a:extLst xmlns:a="http://schemas.openxmlformats.org/drawingml/2006/main">
               <a:ext uri="{FF2B5EF4-FFF2-40B4-BE49-F238E27FC236}">
-                <a16:creationId xmlns:a16="http://schemas.microsoft.com/office/drawing/2014/main" id="{2C918262-8089-4F9C-B8AC-3A71CDB93E85}"/>
+                <a16:creationId xmlns:a16="http://schemas.microsoft.com/office/drawing/2014/main" id="{E23E4EB0-BFC0-4BC2-B2FC-F7A5A7BDCED2}"/>
               </a:ext>
             </a:extLst>
           </p:cNvPr>
@@ -22825,7 +22825,7 @@
           <p:cNvPr id="26" name="">
             <a:extLst xmlns:a="http://schemas.openxmlformats.org/drawingml/2006/main">
               <a:ext uri="{FF2B5EF4-FFF2-40B4-BE49-F238E27FC236}">
-                <a16:creationId xmlns:a16="http://schemas.microsoft.com/office/drawing/2014/main" id="{1DD34A31-EB16-47DE-8738-B74AA9AB9297}"/>
+                <a16:creationId xmlns:a16="http://schemas.microsoft.com/office/drawing/2014/main" id="{96DB3ACD-77D2-4D68-A256-89431044D6AB}"/>
               </a:ext>
             </a:extLst>
           </p:cNvPr>
@@ -22877,7 +22877,7 @@
           <p:cNvPr id="27" name="">
             <a:extLst xmlns:a="http://schemas.openxmlformats.org/drawingml/2006/main">
               <a:ext uri="{FF2B5EF4-FFF2-40B4-BE49-F238E27FC236}">
-                <a16:creationId xmlns:a16="http://schemas.microsoft.com/office/drawing/2014/main" id="{212BB84B-B7EE-43E0-8526-D13C232A2BDA}"/>
+                <a16:creationId xmlns:a16="http://schemas.microsoft.com/office/drawing/2014/main" id="{AF03F2E4-0501-4C9C-9595-7F7F54235AD6}"/>
               </a:ext>
             </a:extLst>
           </p:cNvPr>
@@ -22929,7 +22929,7 @@
           <p:cNvPr id="28" name="">
             <a:extLst xmlns:a="http://schemas.openxmlformats.org/drawingml/2006/main">
               <a:ext uri="{FF2B5EF4-FFF2-40B4-BE49-F238E27FC236}">
-                <a16:creationId xmlns:a16="http://schemas.microsoft.com/office/drawing/2014/main" id="{B738D1E4-669F-4EE4-BBA5-9149F9061660}"/>
+                <a16:creationId xmlns:a16="http://schemas.microsoft.com/office/drawing/2014/main" id="{5F4D0495-9249-41DF-9CBD-2490BB1F5903}"/>
               </a:ext>
             </a:extLst>
           </p:cNvPr>
@@ -22960,7 +22960,7 @@
           <p:cNvPr id="29" name="">
             <a:extLst xmlns:a="http://schemas.openxmlformats.org/drawingml/2006/main">
               <a:ext uri="{FF2B5EF4-FFF2-40B4-BE49-F238E27FC236}">
-                <a16:creationId xmlns:a16="http://schemas.microsoft.com/office/drawing/2014/main" id="{816E4213-7D1B-4A1D-BC3E-7BC55C0933A2}"/>
+                <a16:creationId xmlns:a16="http://schemas.microsoft.com/office/drawing/2014/main" id="{61958489-0647-4A15-A07A-6B830C2142D6}"/>
               </a:ext>
             </a:extLst>
           </p:cNvPr>
@@ -22991,7 +22991,7 @@
           <p:cNvPr id="30" name="">
             <a:extLst xmlns:a="http://schemas.openxmlformats.org/drawingml/2006/main">
               <a:ext uri="{FF2B5EF4-FFF2-40B4-BE49-F238E27FC236}">
-                <a16:creationId xmlns:a16="http://schemas.microsoft.com/office/drawing/2014/main" id="{CA5E5EE0-AB39-4F85-BD8E-E13C6BE77771}"/>
+                <a16:creationId xmlns:a16="http://schemas.microsoft.com/office/drawing/2014/main" id="{EF49E2E1-4FF2-4F80-9C37-EA1CD8905344}"/>
               </a:ext>
             </a:extLst>
           </p:cNvPr>
@@ -23043,7 +23043,7 @@
           <p:cNvPr id="31" name="">
             <a:extLst xmlns:a="http://schemas.openxmlformats.org/drawingml/2006/main">
               <a:ext uri="{FF2B5EF4-FFF2-40B4-BE49-F238E27FC236}">
-                <a16:creationId xmlns:a16="http://schemas.microsoft.com/office/drawing/2014/main" id="{43FC5A14-108D-4DB7-81A2-EDCB946F5D26}"/>
+                <a16:creationId xmlns:a16="http://schemas.microsoft.com/office/drawing/2014/main" id="{EA4E27C1-C330-4364-89E4-C02C52A9F25D}"/>
               </a:ext>
             </a:extLst>
           </p:cNvPr>
@@ -23095,7 +23095,7 @@
           <p:cNvPr id="32" name="">
             <a:extLst xmlns:a="http://schemas.openxmlformats.org/drawingml/2006/main">
               <a:ext uri="{FF2B5EF4-FFF2-40B4-BE49-F238E27FC236}">
-                <a16:creationId xmlns:a16="http://schemas.microsoft.com/office/drawing/2014/main" id="{BFB5E18F-0263-4079-8F2C-2188A8FFF000}"/>
+                <a16:creationId xmlns:a16="http://schemas.microsoft.com/office/drawing/2014/main" id="{FA46091E-7E97-4BDD-BC3D-EE37FAE77924}"/>
               </a:ext>
             </a:extLst>
           </p:cNvPr>
@@ -23147,7 +23147,7 @@
           <p:cNvPr id="33" name="">
             <a:extLst xmlns:a="http://schemas.openxmlformats.org/drawingml/2006/main">
               <a:ext uri="{FF2B5EF4-FFF2-40B4-BE49-F238E27FC236}">
-                <a16:creationId xmlns:a16="http://schemas.microsoft.com/office/drawing/2014/main" id="{B09939C1-897B-4D03-B159-73D3A557642A}"/>
+                <a16:creationId xmlns:a16="http://schemas.microsoft.com/office/drawing/2014/main" id="{5A940B41-59C6-4147-98D7-C2457F8A7CAA}"/>
               </a:ext>
             </a:extLst>
           </p:cNvPr>
@@ -23199,7 +23199,7 @@
           <p:cNvPr id="34" name="">
             <a:extLst xmlns:a="http://schemas.openxmlformats.org/drawingml/2006/main">
               <a:ext uri="{FF2B5EF4-FFF2-40B4-BE49-F238E27FC236}">
-                <a16:creationId xmlns:a16="http://schemas.microsoft.com/office/drawing/2014/main" id="{4C40BD20-878F-4360-BD39-AB8EBB10DD2F}"/>
+                <a16:creationId xmlns:a16="http://schemas.microsoft.com/office/drawing/2014/main" id="{1CFAD276-4EB3-4235-8116-01E94F2BCDF5}"/>
               </a:ext>
             </a:extLst>
           </p:cNvPr>
@@ -23251,7 +23251,7 @@
           <p:cNvPr id="35" name="">
             <a:extLst xmlns:a="http://schemas.openxmlformats.org/drawingml/2006/main">
               <a:ext uri="{FF2B5EF4-FFF2-40B4-BE49-F238E27FC236}">
-                <a16:creationId xmlns:a16="http://schemas.microsoft.com/office/drawing/2014/main" id="{99DE7100-7CEF-4BF6-B913-0B1F62EAC885}"/>
+                <a16:creationId xmlns:a16="http://schemas.microsoft.com/office/drawing/2014/main" id="{D2E0442B-F354-4836-94FF-78341014BBE7}"/>
               </a:ext>
             </a:extLst>
           </p:cNvPr>
@@ -23303,7 +23303,7 @@
           <p:cNvPr id="36" name="">
             <a:extLst xmlns:a="http://schemas.openxmlformats.org/drawingml/2006/main">
               <a:ext uri="{FF2B5EF4-FFF2-40B4-BE49-F238E27FC236}">
-                <a16:creationId xmlns:a16="http://schemas.microsoft.com/office/drawing/2014/main" id="{14B8B9B2-A97E-4EA6-A5F9-61BF1D2BBA64}"/>
+                <a16:creationId xmlns:a16="http://schemas.microsoft.com/office/drawing/2014/main" id="{36655049-88E2-4DE0-8844-1A9CBF04693E}"/>
               </a:ext>
             </a:extLst>
           </p:cNvPr>
@@ -23355,7 +23355,7 @@
           <p:cNvPr id="37" name="">
             <a:extLst xmlns:a="http://schemas.openxmlformats.org/drawingml/2006/main">
               <a:ext uri="{FF2B5EF4-FFF2-40B4-BE49-F238E27FC236}">
-                <a16:creationId xmlns:a16="http://schemas.microsoft.com/office/drawing/2014/main" id="{B6FC6714-BF34-465A-95CB-35B794D8FFB9}"/>
+                <a16:creationId xmlns:a16="http://schemas.microsoft.com/office/drawing/2014/main" id="{85E23D1A-8A95-4570-B95E-BB5001CAE5E9}"/>
               </a:ext>
             </a:extLst>
           </p:cNvPr>
@@ -23386,7 +23386,7 @@
           <p:cNvPr id="38" name="">
             <a:extLst xmlns:a="http://schemas.openxmlformats.org/drawingml/2006/main">
               <a:ext uri="{FF2B5EF4-FFF2-40B4-BE49-F238E27FC236}">
-                <a16:creationId xmlns:a16="http://schemas.microsoft.com/office/drawing/2014/main" id="{2A1D4DCF-E096-47C2-9F12-62B3A93E70A0}"/>
+                <a16:creationId xmlns:a16="http://schemas.microsoft.com/office/drawing/2014/main" id="{177B0657-3CCA-45D3-8F26-521E89160CCE}"/>
               </a:ext>
             </a:extLst>
           </p:cNvPr>
@@ -23438,7 +23438,7 @@
           <p:cNvPr id="39" name="">
             <a:extLst xmlns:a="http://schemas.openxmlformats.org/drawingml/2006/main">
               <a:ext uri="{FF2B5EF4-FFF2-40B4-BE49-F238E27FC236}">
-                <a16:creationId xmlns:a16="http://schemas.microsoft.com/office/drawing/2014/main" id="{4DC6AE74-F8AA-4F89-837A-668484955374}"/>
+                <a16:creationId xmlns:a16="http://schemas.microsoft.com/office/drawing/2014/main" id="{BDDB7302-768D-42BB-9EF7-0D43F2EC390D}"/>
               </a:ext>
             </a:extLst>
           </p:cNvPr>
@@ -23490,7 +23490,7 @@
           <p:cNvPr id="40" name="">
             <a:extLst xmlns:a="http://schemas.openxmlformats.org/drawingml/2006/main">
               <a:ext uri="{FF2B5EF4-FFF2-40B4-BE49-F238E27FC236}">
-                <a16:creationId xmlns:a16="http://schemas.microsoft.com/office/drawing/2014/main" id="{1D1017E4-E37A-48F9-933E-5AED64DE6DB4}"/>
+                <a16:creationId xmlns:a16="http://schemas.microsoft.com/office/drawing/2014/main" id="{A6D344C0-5EEF-413E-8380-38CC1B2282E7}"/>
               </a:ext>
             </a:extLst>
           </p:cNvPr>
@@ -23542,7 +23542,7 @@
           <p:cNvPr id="41" name="">
             <a:extLst xmlns:a="http://schemas.openxmlformats.org/drawingml/2006/main">
               <a:ext uri="{FF2B5EF4-FFF2-40B4-BE49-F238E27FC236}">
-                <a16:creationId xmlns:a16="http://schemas.microsoft.com/office/drawing/2014/main" id="{EFEFD3BB-D9DD-43BA-8FEE-436CD0195584}"/>
+                <a16:creationId xmlns:a16="http://schemas.microsoft.com/office/drawing/2014/main" id="{BCFCCA52-50F4-4CD7-8270-13B684AFFC94}"/>
               </a:ext>
             </a:extLst>
           </p:cNvPr>
@@ -23594,7 +23594,7 @@
           <p:cNvPr id="42" name="">
             <a:extLst xmlns:a="http://schemas.openxmlformats.org/drawingml/2006/main">
               <a:ext uri="{FF2B5EF4-FFF2-40B4-BE49-F238E27FC236}">
-                <a16:creationId xmlns:a16="http://schemas.microsoft.com/office/drawing/2014/main" id="{5A3ED756-0EC3-4EE0-A4F1-FF3459C5CC84}"/>
+                <a16:creationId xmlns:a16="http://schemas.microsoft.com/office/drawing/2014/main" id="{118C9A5E-308D-474F-9D26-1B17DEDB8C92}"/>
               </a:ext>
             </a:extLst>
           </p:cNvPr>
@@ -23646,7 +23646,7 @@
           <p:cNvPr id="43" name="">
             <a:extLst xmlns:a="http://schemas.openxmlformats.org/drawingml/2006/main">
               <a:ext uri="{FF2B5EF4-FFF2-40B4-BE49-F238E27FC236}">
-                <a16:creationId xmlns:a16="http://schemas.microsoft.com/office/drawing/2014/main" id="{7A78EAFD-E008-4E7F-81B0-0C69E2DE1DEF}"/>
+                <a16:creationId xmlns:a16="http://schemas.microsoft.com/office/drawing/2014/main" id="{CDDA20A1-1D3B-4E10-83EE-CCE45886086F}"/>
               </a:ext>
             </a:extLst>
           </p:cNvPr>
@@ -23698,7 +23698,7 @@
           <p:cNvPr id="44" name="">
             <a:extLst xmlns:a="http://schemas.openxmlformats.org/drawingml/2006/main">
               <a:ext uri="{FF2B5EF4-FFF2-40B4-BE49-F238E27FC236}">
-                <a16:creationId xmlns:a16="http://schemas.microsoft.com/office/drawing/2014/main" id="{BE8E1F70-7476-4058-9740-2835F5E23798}"/>
+                <a16:creationId xmlns:a16="http://schemas.microsoft.com/office/drawing/2014/main" id="{628AF4C6-5FA5-4E3F-A744-8148C53EEDF9}"/>
               </a:ext>
             </a:extLst>
           </p:cNvPr>
@@ -23750,7 +23750,7 @@
           <p:cNvPr id="45" name="">
             <a:extLst xmlns:a="http://schemas.openxmlformats.org/drawingml/2006/main">
               <a:ext uri="{FF2B5EF4-FFF2-40B4-BE49-F238E27FC236}">
-                <a16:creationId xmlns:a16="http://schemas.microsoft.com/office/drawing/2014/main" id="{C667EA1B-FC81-455E-80F6-0C2E9E682575}"/>
+                <a16:creationId xmlns:a16="http://schemas.microsoft.com/office/drawing/2014/main" id="{C04B38C9-367E-484E-B769-028075055712}"/>
               </a:ext>
             </a:extLst>
           </p:cNvPr>
@@ -23781,7 +23781,7 @@
           <p:cNvPr id="46" name="">
             <a:extLst xmlns:a="http://schemas.openxmlformats.org/drawingml/2006/main">
               <a:ext uri="{FF2B5EF4-FFF2-40B4-BE49-F238E27FC236}">
-                <a16:creationId xmlns:a16="http://schemas.microsoft.com/office/drawing/2014/main" id="{BDFE09FF-B342-4420-A96C-51EA20720BFB}"/>
+                <a16:creationId xmlns:a16="http://schemas.microsoft.com/office/drawing/2014/main" id="{D3A5244F-09FD-4060-B730-270AFAABF595}"/>
               </a:ext>
             </a:extLst>
           </p:cNvPr>
@@ -23812,7 +23812,7 @@
           <p:cNvPr id="47" name="">
             <a:extLst xmlns:a="http://schemas.openxmlformats.org/drawingml/2006/main">
               <a:ext uri="{FF2B5EF4-FFF2-40B4-BE49-F238E27FC236}">
-                <a16:creationId xmlns:a16="http://schemas.microsoft.com/office/drawing/2014/main" id="{930709E5-6580-4476-BBE2-A2B7A0C21881}"/>
+                <a16:creationId xmlns:a16="http://schemas.microsoft.com/office/drawing/2014/main" id="{D6FFF806-38A0-42D6-A509-74C7B04BA8FE}"/>
               </a:ext>
             </a:extLst>
           </p:cNvPr>
@@ -23864,7 +23864,7 @@
           <p:cNvPr id="48" name="">
             <a:extLst xmlns:a="http://schemas.openxmlformats.org/drawingml/2006/main">
               <a:ext uri="{FF2B5EF4-FFF2-40B4-BE49-F238E27FC236}">
-                <a16:creationId xmlns:a16="http://schemas.microsoft.com/office/drawing/2014/main" id="{A6D72A94-0FAA-49B1-8291-63010D5C722E}"/>
+                <a16:creationId xmlns:a16="http://schemas.microsoft.com/office/drawing/2014/main" id="{AC8F80A6-ED2E-4556-A547-0BCF5B19E962}"/>
               </a:ext>
             </a:extLst>
           </p:cNvPr>
@@ -23916,7 +23916,7 @@
           <p:cNvPr id="49" name="">
             <a:extLst xmlns:a="http://schemas.openxmlformats.org/drawingml/2006/main">
               <a:ext uri="{FF2B5EF4-FFF2-40B4-BE49-F238E27FC236}">
-                <a16:creationId xmlns:a16="http://schemas.microsoft.com/office/drawing/2014/main" id="{09E20191-5789-4813-86EB-20E5FFEECF94}"/>
+                <a16:creationId xmlns:a16="http://schemas.microsoft.com/office/drawing/2014/main" id="{4770A9DA-ED62-44F0-9CA2-322FCA9D27E3}"/>
               </a:ext>
             </a:extLst>
           </p:cNvPr>
@@ -23968,7 +23968,7 @@
           <p:cNvPr id="50" name="">
             <a:extLst xmlns:a="http://schemas.openxmlformats.org/drawingml/2006/main">
               <a:ext uri="{FF2B5EF4-FFF2-40B4-BE49-F238E27FC236}">
-                <a16:creationId xmlns:a16="http://schemas.microsoft.com/office/drawing/2014/main" id="{1E5ED63B-9752-45E1-8831-3BD04833F551}"/>
+                <a16:creationId xmlns:a16="http://schemas.microsoft.com/office/drawing/2014/main" id="{AC630440-57BC-4243-8AEF-A5FB935385CD}"/>
               </a:ext>
             </a:extLst>
           </p:cNvPr>
@@ -24020,7 +24020,7 @@
           <p:cNvPr id="51" name="">
             <a:extLst xmlns:a="http://schemas.openxmlformats.org/drawingml/2006/main">
               <a:ext uri="{FF2B5EF4-FFF2-40B4-BE49-F238E27FC236}">
-                <a16:creationId xmlns:a16="http://schemas.microsoft.com/office/drawing/2014/main" id="{09FA00FD-D7BE-4BED-83C6-060EBF0DBF73}"/>
+                <a16:creationId xmlns:a16="http://schemas.microsoft.com/office/drawing/2014/main" id="{4DDC2A9A-5B46-458D-B8A3-D29B706338B8}"/>
               </a:ext>
             </a:extLst>
           </p:cNvPr>
@@ -24072,7 +24072,7 @@
           <p:cNvPr id="52" name="">
             <a:extLst xmlns:a="http://schemas.openxmlformats.org/drawingml/2006/main">
               <a:ext uri="{FF2B5EF4-FFF2-40B4-BE49-F238E27FC236}">
-                <a16:creationId xmlns:a16="http://schemas.microsoft.com/office/drawing/2014/main" id="{E581FF38-3C1B-45D6-9273-8A3206750035}"/>
+                <a16:creationId xmlns:a16="http://schemas.microsoft.com/office/drawing/2014/main" id="{2349836B-EB3F-4EB5-A590-8FD9D4A1C9BD}"/>
               </a:ext>
             </a:extLst>
           </p:cNvPr>
@@ -24124,7 +24124,7 @@
           <p:cNvPr id="53" name="">
             <a:extLst xmlns:a="http://schemas.openxmlformats.org/drawingml/2006/main">
               <a:ext uri="{FF2B5EF4-FFF2-40B4-BE49-F238E27FC236}">
-                <a16:creationId xmlns:a16="http://schemas.microsoft.com/office/drawing/2014/main" id="{DA757F83-3742-464C-AC3A-CDA3406B3874}"/>
+                <a16:creationId xmlns:a16="http://schemas.microsoft.com/office/drawing/2014/main" id="{C5603AA2-9A2E-4A65-B950-E1FF72728227}"/>
               </a:ext>
             </a:extLst>
           </p:cNvPr>
@@ -24176,7 +24176,7 @@
           <p:cNvPr id="54" name="">
             <a:extLst xmlns:a="http://schemas.openxmlformats.org/drawingml/2006/main">
               <a:ext uri="{FF2B5EF4-FFF2-40B4-BE49-F238E27FC236}">
-                <a16:creationId xmlns:a16="http://schemas.microsoft.com/office/drawing/2014/main" id="{C1FE33A4-4B15-48A5-9152-7A3A52516CAE}"/>
+                <a16:creationId xmlns:a16="http://schemas.microsoft.com/office/drawing/2014/main" id="{07908833-3AE6-47C1-9CFA-628051C8778B}"/>
               </a:ext>
             </a:extLst>
           </p:cNvPr>
@@ -24207,7 +24207,7 @@
           <p:cNvPr id="55" name="">
             <a:extLst xmlns:a="http://schemas.openxmlformats.org/drawingml/2006/main">
               <a:ext uri="{FF2B5EF4-FFF2-40B4-BE49-F238E27FC236}">
-                <a16:creationId xmlns:a16="http://schemas.microsoft.com/office/drawing/2014/main" id="{76631FAB-8308-4FAA-A581-32451F1E6665}"/>
+                <a16:creationId xmlns:a16="http://schemas.microsoft.com/office/drawing/2014/main" id="{EC4B5282-FBE6-461D-8FC5-D6DF3BBFE881}"/>
               </a:ext>
             </a:extLst>
           </p:cNvPr>
@@ -24259,7 +24259,7 @@
           <p:cNvPr id="56" name="">
             <a:extLst xmlns:a="http://schemas.openxmlformats.org/drawingml/2006/main">
               <a:ext uri="{FF2B5EF4-FFF2-40B4-BE49-F238E27FC236}">
-                <a16:creationId xmlns:a16="http://schemas.microsoft.com/office/drawing/2014/main" id="{AE0DF750-C965-4625-BAC5-FF6B20774897}"/>
+                <a16:creationId xmlns:a16="http://schemas.microsoft.com/office/drawing/2014/main" id="{C48E2AA0-12F3-4081-BB18-94B2C12078B8}"/>
               </a:ext>
             </a:extLst>
           </p:cNvPr>
@@ -24311,7 +24311,7 @@
           <p:cNvPr id="57" name="">
             <a:extLst xmlns:a="http://schemas.openxmlformats.org/drawingml/2006/main">
               <a:ext uri="{FF2B5EF4-FFF2-40B4-BE49-F238E27FC236}">
-                <a16:creationId xmlns:a16="http://schemas.microsoft.com/office/drawing/2014/main" id="{EB4ABE1A-DC15-4FB6-86AD-16E4D3145B24}"/>
+                <a16:creationId xmlns:a16="http://schemas.microsoft.com/office/drawing/2014/main" id="{2996EFE9-CC43-4D86-971E-48EB8D89B41D}"/>
               </a:ext>
             </a:extLst>
           </p:cNvPr>
@@ -24363,7 +24363,7 @@
           <p:cNvPr id="58" name="">
             <a:extLst xmlns:a="http://schemas.openxmlformats.org/drawingml/2006/main">
               <a:ext uri="{FF2B5EF4-FFF2-40B4-BE49-F238E27FC236}">
-                <a16:creationId xmlns:a16="http://schemas.microsoft.com/office/drawing/2014/main" id="{DF585545-AC0F-4DF4-9BE4-26B23A22CB79}"/>
+                <a16:creationId xmlns:a16="http://schemas.microsoft.com/office/drawing/2014/main" id="{860B434F-0BA0-4DCB-BB27-302B5A705A4C}"/>
               </a:ext>
             </a:extLst>
           </p:cNvPr>
@@ -24415,7 +24415,7 @@
           <p:cNvPr id="59" name="">
             <a:extLst xmlns:a="http://schemas.openxmlformats.org/drawingml/2006/main">
               <a:ext uri="{FF2B5EF4-FFF2-40B4-BE49-F238E27FC236}">
-                <a16:creationId xmlns:a16="http://schemas.microsoft.com/office/drawing/2014/main" id="{A22277DE-535D-4677-A87A-3C298B5CBB90}"/>
+                <a16:creationId xmlns:a16="http://schemas.microsoft.com/office/drawing/2014/main" id="{1C53989B-80EC-4C21-AE9C-95021BF9EB70}"/>
               </a:ext>
             </a:extLst>
           </p:cNvPr>
@@ -24467,7 +24467,7 @@
           <p:cNvPr id="60" name="">
             <a:extLst xmlns:a="http://schemas.openxmlformats.org/drawingml/2006/main">
               <a:ext uri="{FF2B5EF4-FFF2-40B4-BE49-F238E27FC236}">
-                <a16:creationId xmlns:a16="http://schemas.microsoft.com/office/drawing/2014/main" id="{DA5C0BFF-E628-4B4E-9FA1-E58E0C921751}"/>
+                <a16:creationId xmlns:a16="http://schemas.microsoft.com/office/drawing/2014/main" id="{F62F14A3-882E-42BC-905F-403506314921}"/>
               </a:ext>
             </a:extLst>
           </p:cNvPr>
@@ -24519,7 +24519,7 @@
           <p:cNvPr id="61" name="">
             <a:extLst xmlns:a="http://schemas.openxmlformats.org/drawingml/2006/main">
               <a:ext uri="{FF2B5EF4-FFF2-40B4-BE49-F238E27FC236}">
-                <a16:creationId xmlns:a16="http://schemas.microsoft.com/office/drawing/2014/main" id="{A9CBB37F-3B50-48BD-9A75-45EA4CB69C7E}"/>
+                <a16:creationId xmlns:a16="http://schemas.microsoft.com/office/drawing/2014/main" id="{8CC10431-B0DB-43AA-9F2F-47470C694D3D}"/>
               </a:ext>
             </a:extLst>
           </p:cNvPr>
@@ -24571,7 +24571,7 @@
           <p:cNvPr id="62" name="">
             <a:extLst xmlns:a="http://schemas.openxmlformats.org/drawingml/2006/main">
               <a:ext uri="{FF2B5EF4-FFF2-40B4-BE49-F238E27FC236}">
-                <a16:creationId xmlns:a16="http://schemas.microsoft.com/office/drawing/2014/main" id="{22B87F5D-F7D5-4677-B10B-22F6402906D4}"/>
+                <a16:creationId xmlns:a16="http://schemas.microsoft.com/office/drawing/2014/main" id="{C91BFB30-5E95-4589-B9FE-B52ECCB173CE}"/>
               </a:ext>
             </a:extLst>
           </p:cNvPr>
@@ -24602,7 +24602,7 @@
           <p:cNvPr id="63" name="">
             <a:extLst xmlns:a="http://schemas.openxmlformats.org/drawingml/2006/main">
               <a:ext uri="{FF2B5EF4-FFF2-40B4-BE49-F238E27FC236}">
-                <a16:creationId xmlns:a16="http://schemas.microsoft.com/office/drawing/2014/main" id="{3969C0FC-F5E9-4A7C-9AA1-9C19B4A1AAEA}"/>
+                <a16:creationId xmlns:a16="http://schemas.microsoft.com/office/drawing/2014/main" id="{BA78B189-25AB-4FDD-9C20-C22F00288BE0}"/>
               </a:ext>
             </a:extLst>
           </p:cNvPr>
@@ -24633,7 +24633,7 @@
           <p:cNvPr id="64" name="">
             <a:extLst xmlns:a="http://schemas.openxmlformats.org/drawingml/2006/main">
               <a:ext uri="{FF2B5EF4-FFF2-40B4-BE49-F238E27FC236}">
-                <a16:creationId xmlns:a16="http://schemas.microsoft.com/office/drawing/2014/main" id="{D3454BC0-BB96-469C-BBAD-62A5FBDE77CE}"/>
+                <a16:creationId xmlns:a16="http://schemas.microsoft.com/office/drawing/2014/main" id="{1FED3D7A-E063-4421-B677-C7FD70270D2D}"/>
               </a:ext>
             </a:extLst>
           </p:cNvPr>
@@ -24685,7 +24685,7 @@
           <p:cNvPr id="65" name="">
             <a:extLst xmlns:a="http://schemas.openxmlformats.org/drawingml/2006/main">
               <a:ext uri="{FF2B5EF4-FFF2-40B4-BE49-F238E27FC236}">
-                <a16:creationId xmlns:a16="http://schemas.microsoft.com/office/drawing/2014/main" id="{C200A68C-7071-43F1-ABAF-BDB6CE8945F1}"/>
+                <a16:creationId xmlns:a16="http://schemas.microsoft.com/office/drawing/2014/main" id="{49169890-11F0-451A-A6A7-0833AC756C71}"/>
               </a:ext>
             </a:extLst>
           </p:cNvPr>
@@ -24737,7 +24737,7 @@
           <p:cNvPr id="66" name="">
             <a:extLst xmlns:a="http://schemas.openxmlformats.org/drawingml/2006/main">
               <a:ext uri="{FF2B5EF4-FFF2-40B4-BE49-F238E27FC236}">
-                <a16:creationId xmlns:a16="http://schemas.microsoft.com/office/drawing/2014/main" id="{A3FCF35D-5EE4-4BFB-8A6C-1CA9A6508153}"/>
+                <a16:creationId xmlns:a16="http://schemas.microsoft.com/office/drawing/2014/main" id="{BB645968-7FCB-487C-97B9-03133C77EFF7}"/>
               </a:ext>
             </a:extLst>
           </p:cNvPr>
@@ -24789,7 +24789,7 @@
           <p:cNvPr id="67" name="">
             <a:extLst xmlns:a="http://schemas.openxmlformats.org/drawingml/2006/main">
               <a:ext uri="{FF2B5EF4-FFF2-40B4-BE49-F238E27FC236}">
-                <a16:creationId xmlns:a16="http://schemas.microsoft.com/office/drawing/2014/main" id="{6D5D23F5-1656-47E5-A3D1-2DB83D2C2380}"/>
+                <a16:creationId xmlns:a16="http://schemas.microsoft.com/office/drawing/2014/main" id="{A0A533D3-E9B5-4624-855B-897EA9B35662}"/>
               </a:ext>
             </a:extLst>
           </p:cNvPr>
@@ -24841,7 +24841,7 @@
           <p:cNvPr id="68" name="">
             <a:extLst xmlns:a="http://schemas.openxmlformats.org/drawingml/2006/main">
               <a:ext uri="{FF2B5EF4-FFF2-40B4-BE49-F238E27FC236}">
-                <a16:creationId xmlns:a16="http://schemas.microsoft.com/office/drawing/2014/main" id="{9B743B8D-DFAE-48FB-A6E7-5DDC93F419F7}"/>
+                <a16:creationId xmlns:a16="http://schemas.microsoft.com/office/drawing/2014/main" id="{408887E0-B177-4C5A-8DB0-549BD1EDCCFC}"/>
               </a:ext>
             </a:extLst>
           </p:cNvPr>
@@ -24893,7 +24893,7 @@
           <p:cNvPr id="69" name="">
             <a:extLst xmlns:a="http://schemas.openxmlformats.org/drawingml/2006/main">
               <a:ext uri="{FF2B5EF4-FFF2-40B4-BE49-F238E27FC236}">
-                <a16:creationId xmlns:a16="http://schemas.microsoft.com/office/drawing/2014/main" id="{4C109972-0C0F-48D0-ACB5-CE8B285C1728}"/>
+                <a16:creationId xmlns:a16="http://schemas.microsoft.com/office/drawing/2014/main" id="{6713CA74-90A1-4F2A-91E7-1A05848AC4C1}"/>
               </a:ext>
             </a:extLst>
           </p:cNvPr>
@@ -24945,7 +24945,7 @@
           <p:cNvPr id="70" name="">
             <a:extLst xmlns:a="http://schemas.openxmlformats.org/drawingml/2006/main">
               <a:ext uri="{FF2B5EF4-FFF2-40B4-BE49-F238E27FC236}">
-                <a16:creationId xmlns:a16="http://schemas.microsoft.com/office/drawing/2014/main" id="{53DF229B-EA1E-4FAB-AA4D-04BC32270B09}"/>
+                <a16:creationId xmlns:a16="http://schemas.microsoft.com/office/drawing/2014/main" id="{2036F7A2-B241-4FE0-A1A9-1177D036D486}"/>
               </a:ext>
             </a:extLst>
           </p:cNvPr>
@@ -24997,7 +24997,7 @@
           <p:cNvPr id="71" name="">
             <a:extLst xmlns:a="http://schemas.openxmlformats.org/drawingml/2006/main">
               <a:ext uri="{FF2B5EF4-FFF2-40B4-BE49-F238E27FC236}">
-                <a16:creationId xmlns:a16="http://schemas.microsoft.com/office/drawing/2014/main" id="{3CB2455D-822E-4FF2-B7B3-8FEBF3966D41}"/>
+                <a16:creationId xmlns:a16="http://schemas.microsoft.com/office/drawing/2014/main" id="{66B5BF87-80B9-4E58-8F04-32C6AFF241AB}"/>
               </a:ext>
             </a:extLst>
           </p:cNvPr>
@@ -25028,7 +25028,7 @@
           <p:cNvPr id="72" name="">
             <a:extLst xmlns:a="http://schemas.openxmlformats.org/drawingml/2006/main">
               <a:ext uri="{FF2B5EF4-FFF2-40B4-BE49-F238E27FC236}">
-                <a16:creationId xmlns:a16="http://schemas.microsoft.com/office/drawing/2014/main" id="{C133441F-32EA-4CD8-B5D8-F6F9F5CE97F5}"/>
+                <a16:creationId xmlns:a16="http://schemas.microsoft.com/office/drawing/2014/main" id="{859BD73B-FA65-4246-AECF-2E05928E7702}"/>
               </a:ext>
             </a:extLst>
           </p:cNvPr>
@@ -25080,7 +25080,7 @@
           <p:cNvPr id="73" name="">
             <a:extLst xmlns:a="http://schemas.openxmlformats.org/drawingml/2006/main">
               <a:ext uri="{FF2B5EF4-FFF2-40B4-BE49-F238E27FC236}">
-                <a16:creationId xmlns:a16="http://schemas.microsoft.com/office/drawing/2014/main" id="{2675D4E5-165C-4F32-BD37-F2A74D8416E6}"/>
+                <a16:creationId xmlns:a16="http://schemas.microsoft.com/office/drawing/2014/main" id="{32DAF8B4-F153-41C2-AD57-DA3A78880E0F}"/>
               </a:ext>
             </a:extLst>
           </p:cNvPr>
@@ -25132,7 +25132,7 @@
           <p:cNvPr id="74" name="">
             <a:extLst xmlns:a="http://schemas.openxmlformats.org/drawingml/2006/main">
               <a:ext uri="{FF2B5EF4-FFF2-40B4-BE49-F238E27FC236}">
-                <a16:creationId xmlns:a16="http://schemas.microsoft.com/office/drawing/2014/main" id="{BA21A749-BDA8-4E8F-9D46-783D63F53EEE}"/>
+                <a16:creationId xmlns:a16="http://schemas.microsoft.com/office/drawing/2014/main" id="{CC69D390-C9A7-4949-9267-9498003E2D2B}"/>
               </a:ext>
             </a:extLst>
           </p:cNvPr>
@@ -25184,7 +25184,7 @@
           <p:cNvPr id="75" name="">
             <a:extLst xmlns:a="http://schemas.openxmlformats.org/drawingml/2006/main">
               <a:ext uri="{FF2B5EF4-FFF2-40B4-BE49-F238E27FC236}">
-                <a16:creationId xmlns:a16="http://schemas.microsoft.com/office/drawing/2014/main" id="{3CF72B68-3AD9-47DB-A1EE-1AECC13028C6}"/>
+                <a16:creationId xmlns:a16="http://schemas.microsoft.com/office/drawing/2014/main" id="{885F8DF1-AA60-4210-A82C-15E93C3F85DD}"/>
               </a:ext>
             </a:extLst>
           </p:cNvPr>
@@ -25236,7 +25236,7 @@
           <p:cNvPr id="76" name="">
             <a:extLst xmlns:a="http://schemas.openxmlformats.org/drawingml/2006/main">
               <a:ext uri="{FF2B5EF4-FFF2-40B4-BE49-F238E27FC236}">
-                <a16:creationId xmlns:a16="http://schemas.microsoft.com/office/drawing/2014/main" id="{ED54A43E-C239-4096-8FC5-528CA2862D7A}"/>
+                <a16:creationId xmlns:a16="http://schemas.microsoft.com/office/drawing/2014/main" id="{AAB37842-681F-4E88-A445-EAD06C5AFD20}"/>
               </a:ext>
             </a:extLst>
           </p:cNvPr>
@@ -25288,7 +25288,7 @@
           <p:cNvPr id="77" name="">
             <a:extLst xmlns:a="http://schemas.openxmlformats.org/drawingml/2006/main">
               <a:ext uri="{FF2B5EF4-FFF2-40B4-BE49-F238E27FC236}">
-                <a16:creationId xmlns:a16="http://schemas.microsoft.com/office/drawing/2014/main" id="{35E75461-1B4D-4DD3-8D21-A842408BC10C}"/>
+                <a16:creationId xmlns:a16="http://schemas.microsoft.com/office/drawing/2014/main" id="{12D05178-2A9B-4CF3-8FA4-3B76F0EF6E6A}"/>
               </a:ext>
             </a:extLst>
           </p:cNvPr>
@@ -25340,7 +25340,7 @@
           <p:cNvPr id="78" name="">
             <a:extLst xmlns:a="http://schemas.openxmlformats.org/drawingml/2006/main">
               <a:ext uri="{FF2B5EF4-FFF2-40B4-BE49-F238E27FC236}">
-                <a16:creationId xmlns:a16="http://schemas.microsoft.com/office/drawing/2014/main" id="{4C86022E-E765-43F9-A97C-9717FCA16310}"/>
+                <a16:creationId xmlns:a16="http://schemas.microsoft.com/office/drawing/2014/main" id="{6381F164-EB15-455F-9406-CD6E749BE2EF}"/>
               </a:ext>
             </a:extLst>
           </p:cNvPr>
@@ -25392,7 +25392,7 @@
           <p:cNvPr id="79" name="">
             <a:extLst xmlns:a="http://schemas.openxmlformats.org/drawingml/2006/main">
               <a:ext uri="{FF2B5EF4-FFF2-40B4-BE49-F238E27FC236}">
-                <a16:creationId xmlns:a16="http://schemas.microsoft.com/office/drawing/2014/main" id="{FD32CD5C-98A1-43C2-909F-300B62704934}"/>
+                <a16:creationId xmlns:a16="http://schemas.microsoft.com/office/drawing/2014/main" id="{B9B7989A-CBAA-4FC3-B8AD-4E1CD2B9F763}"/>
               </a:ext>
             </a:extLst>
           </p:cNvPr>
@@ -25423,7 +25423,7 @@
           <p:cNvPr id="80" name="">
             <a:extLst xmlns:a="http://schemas.openxmlformats.org/drawingml/2006/main">
               <a:ext uri="{FF2B5EF4-FFF2-40B4-BE49-F238E27FC236}">
-                <a16:creationId xmlns:a16="http://schemas.microsoft.com/office/drawing/2014/main" id="{59F56BD8-CC3B-4FAB-997B-051909414361}"/>
+                <a16:creationId xmlns:a16="http://schemas.microsoft.com/office/drawing/2014/main" id="{E8D1377B-8238-4B82-8770-1E86EB71C688}"/>
               </a:ext>
             </a:extLst>
           </p:cNvPr>
@@ -25454,7 +25454,7 @@
           <p:cNvPr id="81" name="">
             <a:extLst xmlns:a="http://schemas.openxmlformats.org/drawingml/2006/main">
               <a:ext uri="{FF2B5EF4-FFF2-40B4-BE49-F238E27FC236}">
-                <a16:creationId xmlns:a16="http://schemas.microsoft.com/office/drawing/2014/main" id="{ACFFDABD-2CCC-47EB-A192-215C4C1DF096}"/>
+                <a16:creationId xmlns:a16="http://schemas.microsoft.com/office/drawing/2014/main" id="{64C771CE-C5D6-43D7-AF4F-1C5CD62E7202}"/>
               </a:ext>
             </a:extLst>
           </p:cNvPr>
@@ -25506,7 +25506,7 @@
           <p:cNvPr id="82" name="">
             <a:extLst xmlns:a="http://schemas.openxmlformats.org/drawingml/2006/main">
               <a:ext uri="{FF2B5EF4-FFF2-40B4-BE49-F238E27FC236}">
-                <a16:creationId xmlns:a16="http://schemas.microsoft.com/office/drawing/2014/main" id="{D644D56E-5DDE-4E16-B331-BE3827FD3E63}"/>
+                <a16:creationId xmlns:a16="http://schemas.microsoft.com/office/drawing/2014/main" id="{C0A548B8-2C8A-4169-AB1A-238109916FC2}"/>
               </a:ext>
             </a:extLst>
           </p:cNvPr>
@@ -25558,7 +25558,7 @@
           <p:cNvPr id="83" name="">
             <a:extLst xmlns:a="http://schemas.openxmlformats.org/drawingml/2006/main">
               <a:ext uri="{FF2B5EF4-FFF2-40B4-BE49-F238E27FC236}">
-                <a16:creationId xmlns:a16="http://schemas.microsoft.com/office/drawing/2014/main" id="{0ED4EF3F-FA5D-4249-9451-AF6D96A1DC07}"/>
+                <a16:creationId xmlns:a16="http://schemas.microsoft.com/office/drawing/2014/main" id="{0CEB7CD1-677E-4C43-8334-C41A8C380D35}"/>
               </a:ext>
             </a:extLst>
           </p:cNvPr>
@@ -25610,7 +25610,7 @@
           <p:cNvPr id="84" name="">
             <a:extLst xmlns:a="http://schemas.openxmlformats.org/drawingml/2006/main">
               <a:ext uri="{FF2B5EF4-FFF2-40B4-BE49-F238E27FC236}">
-                <a16:creationId xmlns:a16="http://schemas.microsoft.com/office/drawing/2014/main" id="{85F04C97-B57B-4E5D-81A2-E7864F00B428}"/>
+                <a16:creationId xmlns:a16="http://schemas.microsoft.com/office/drawing/2014/main" id="{2DE30069-839C-4CE4-924F-BEF89B66842F}"/>
               </a:ext>
             </a:extLst>
           </p:cNvPr>
@@ -25662,7 +25662,7 @@
           <p:cNvPr id="85" name="">
             <a:extLst xmlns:a="http://schemas.openxmlformats.org/drawingml/2006/main">
               <a:ext uri="{FF2B5EF4-FFF2-40B4-BE49-F238E27FC236}">
-                <a16:creationId xmlns:a16="http://schemas.microsoft.com/office/drawing/2014/main" id="{EEC6C6A1-E87A-4820-83EA-FF0767C05A3D}"/>
+                <a16:creationId xmlns:a16="http://schemas.microsoft.com/office/drawing/2014/main" id="{A242CA3B-3CF1-4ADF-ADF3-7BDF0A20F5FE}"/>
               </a:ext>
             </a:extLst>
           </p:cNvPr>
@@ -25714,7 +25714,7 @@
           <p:cNvPr id="86" name="">
             <a:extLst xmlns:a="http://schemas.openxmlformats.org/drawingml/2006/main">
               <a:ext uri="{FF2B5EF4-FFF2-40B4-BE49-F238E27FC236}">
-                <a16:creationId xmlns:a16="http://schemas.microsoft.com/office/drawing/2014/main" id="{1670DE36-FE7B-4B7C-9032-B82DBAA19C41}"/>
+                <a16:creationId xmlns:a16="http://schemas.microsoft.com/office/drawing/2014/main" id="{CDAD33ED-4C56-416C-AA84-3E97777EB140}"/>
               </a:ext>
             </a:extLst>
           </p:cNvPr>
@@ -25766,7 +25766,7 @@
           <p:cNvPr id="87" name="">
             <a:extLst xmlns:a="http://schemas.openxmlformats.org/drawingml/2006/main">
               <a:ext uri="{FF2B5EF4-FFF2-40B4-BE49-F238E27FC236}">
-                <a16:creationId xmlns:a16="http://schemas.microsoft.com/office/drawing/2014/main" id="{5C24F6D4-E1EA-4C79-AEB5-7559DE5353F3}"/>
+                <a16:creationId xmlns:a16="http://schemas.microsoft.com/office/drawing/2014/main" id="{055CE78B-F816-4F22-8247-28E7122A8AAD}"/>
               </a:ext>
             </a:extLst>
           </p:cNvPr>
@@ -25818,7 +25818,7 @@
           <p:cNvPr id="88" name="">
             <a:extLst xmlns:a="http://schemas.openxmlformats.org/drawingml/2006/main">
               <a:ext uri="{FF2B5EF4-FFF2-40B4-BE49-F238E27FC236}">
-                <a16:creationId xmlns:a16="http://schemas.microsoft.com/office/drawing/2014/main" id="{B859A92D-5A9F-4966-843A-9814550CD221}"/>
+                <a16:creationId xmlns:a16="http://schemas.microsoft.com/office/drawing/2014/main" id="{491D2BAC-4A3B-4442-A5AE-35C7D1CA6674}"/>
               </a:ext>
             </a:extLst>
           </p:cNvPr>
@@ -25849,7 +25849,7 @@
           <p:cNvPr id="89" name="">
             <a:extLst xmlns:a="http://schemas.openxmlformats.org/drawingml/2006/main">
               <a:ext uri="{FF2B5EF4-FFF2-40B4-BE49-F238E27FC236}">
-                <a16:creationId xmlns:a16="http://schemas.microsoft.com/office/drawing/2014/main" id="{F63D03D6-4BF6-4C61-91CE-37A7DFE4EE2E}"/>
+                <a16:creationId xmlns:a16="http://schemas.microsoft.com/office/drawing/2014/main" id="{A205796C-22EC-44E8-AAF8-112F9A3CD906}"/>
               </a:ext>
             </a:extLst>
           </p:cNvPr>
@@ -25901,7 +25901,7 @@
           <p:cNvPr id="90" name="">
             <a:extLst xmlns:a="http://schemas.openxmlformats.org/drawingml/2006/main">
               <a:ext uri="{FF2B5EF4-FFF2-40B4-BE49-F238E27FC236}">
-                <a16:creationId xmlns:a16="http://schemas.microsoft.com/office/drawing/2014/main" id="{27731D56-A9D9-428F-A6BC-8A144422B2A9}"/>
+                <a16:creationId xmlns:a16="http://schemas.microsoft.com/office/drawing/2014/main" id="{4A98A778-40F8-4245-A0E5-7A6750103B18}"/>
               </a:ext>
             </a:extLst>
           </p:cNvPr>
@@ -25953,7 +25953,7 @@
           <p:cNvPr id="91" name="">
             <a:extLst xmlns:a="http://schemas.openxmlformats.org/drawingml/2006/main">
               <a:ext uri="{FF2B5EF4-FFF2-40B4-BE49-F238E27FC236}">
-                <a16:creationId xmlns:a16="http://schemas.microsoft.com/office/drawing/2014/main" id="{A6552D0B-037C-48D9-88D2-B4E942577A17}"/>
+                <a16:creationId xmlns:a16="http://schemas.microsoft.com/office/drawing/2014/main" id="{6DE55623-947F-4ECD-9814-3573673A9F08}"/>
               </a:ext>
             </a:extLst>
           </p:cNvPr>
@@ -26005,7 +26005,7 @@
           <p:cNvPr id="92" name="">
             <a:extLst xmlns:a="http://schemas.openxmlformats.org/drawingml/2006/main">
               <a:ext uri="{FF2B5EF4-FFF2-40B4-BE49-F238E27FC236}">
-                <a16:creationId xmlns:a16="http://schemas.microsoft.com/office/drawing/2014/main" id="{284FB9A7-D8D8-4536-B2C1-99C975A95097}"/>
+                <a16:creationId xmlns:a16="http://schemas.microsoft.com/office/drawing/2014/main" id="{45B32EE4-44DE-4E5B-A21A-9FA454589C81}"/>
               </a:ext>
             </a:extLst>
           </p:cNvPr>
@@ -26057,7 +26057,7 @@
           <p:cNvPr id="93" name="">
             <a:extLst xmlns:a="http://schemas.openxmlformats.org/drawingml/2006/main">
               <a:ext uri="{FF2B5EF4-FFF2-40B4-BE49-F238E27FC236}">
-                <a16:creationId xmlns:a16="http://schemas.microsoft.com/office/drawing/2014/main" id="{AC0E0C29-8257-447A-9D67-525E8BE9FC4C}"/>
+                <a16:creationId xmlns:a16="http://schemas.microsoft.com/office/drawing/2014/main" id="{836EAB57-43CF-420F-9123-2ED54270B8DA}"/>
               </a:ext>
             </a:extLst>
           </p:cNvPr>
@@ -26109,7 +26109,7 @@
           <p:cNvPr id="94" name="">
             <a:extLst xmlns:a="http://schemas.openxmlformats.org/drawingml/2006/main">
               <a:ext uri="{FF2B5EF4-FFF2-40B4-BE49-F238E27FC236}">
-                <a16:creationId xmlns:a16="http://schemas.microsoft.com/office/drawing/2014/main" id="{EEE3B7B2-FF73-42BA-B505-93B879C8A825}"/>
+                <a16:creationId xmlns:a16="http://schemas.microsoft.com/office/drawing/2014/main" id="{74D8A890-AF0C-420B-8FA1-0A8E7A767FED}"/>
               </a:ext>
             </a:extLst>
           </p:cNvPr>
@@ -26161,7 +26161,7 @@
           <p:cNvPr id="95" name="">
             <a:extLst xmlns:a="http://schemas.openxmlformats.org/drawingml/2006/main">
               <a:ext uri="{FF2B5EF4-FFF2-40B4-BE49-F238E27FC236}">
-                <a16:creationId xmlns:a16="http://schemas.microsoft.com/office/drawing/2014/main" id="{140FA60D-8F78-4D97-8ED8-6DD2C52798DB}"/>
+                <a16:creationId xmlns:a16="http://schemas.microsoft.com/office/drawing/2014/main" id="{45E0A1F2-AE0A-4349-AC25-CBDFB46430ED}"/>
               </a:ext>
             </a:extLst>
           </p:cNvPr>
@@ -26213,7 +26213,7 @@
           <p:cNvPr id="96" name="">
             <a:extLst xmlns:a="http://schemas.openxmlformats.org/drawingml/2006/main">
               <a:ext uri="{FF2B5EF4-FFF2-40B4-BE49-F238E27FC236}">
-                <a16:creationId xmlns:a16="http://schemas.microsoft.com/office/drawing/2014/main" id="{6A322FBC-2A0D-4DF8-8D21-E6531ACBD700}"/>
+                <a16:creationId xmlns:a16="http://schemas.microsoft.com/office/drawing/2014/main" id="{405736D6-E1A1-493B-A0EA-A3CFD453D2BD}"/>
               </a:ext>
             </a:extLst>
           </p:cNvPr>
@@ -26244,7 +26244,7 @@
           <p:cNvPr id="97" name="">
             <a:extLst xmlns:a="http://schemas.openxmlformats.org/drawingml/2006/main">
               <a:ext uri="{FF2B5EF4-FFF2-40B4-BE49-F238E27FC236}">
-                <a16:creationId xmlns:a16="http://schemas.microsoft.com/office/drawing/2014/main" id="{C8DCD00E-6BA7-41D9-B998-B39B7B767837}"/>
+                <a16:creationId xmlns:a16="http://schemas.microsoft.com/office/drawing/2014/main" id="{B4127051-3C03-4DDC-B97C-1917FB6EC4C2}"/>
               </a:ext>
             </a:extLst>
           </p:cNvPr>
@@ -26275,7 +26275,7 @@
           <p:cNvPr id="98" name="">
             <a:extLst xmlns:a="http://schemas.openxmlformats.org/drawingml/2006/main">
               <a:ext uri="{FF2B5EF4-FFF2-40B4-BE49-F238E27FC236}">
-                <a16:creationId xmlns:a16="http://schemas.microsoft.com/office/drawing/2014/main" id="{3110C32D-0565-4E2B-A02E-5BFAF258EC8C}"/>
+                <a16:creationId xmlns:a16="http://schemas.microsoft.com/office/drawing/2014/main" id="{09B5FFD6-CCC3-40A1-95C2-AE267C00B793}"/>
               </a:ext>
             </a:extLst>
           </p:cNvPr>
@@ -26327,7 +26327,7 @@
           <p:cNvPr id="99" name="">
             <a:extLst xmlns:a="http://schemas.openxmlformats.org/drawingml/2006/main">
               <a:ext uri="{FF2B5EF4-FFF2-40B4-BE49-F238E27FC236}">
-                <a16:creationId xmlns:a16="http://schemas.microsoft.com/office/drawing/2014/main" id="{AB048CB7-F41A-4506-80A0-58693E35421C}"/>
+                <a16:creationId xmlns:a16="http://schemas.microsoft.com/office/drawing/2014/main" id="{FA8C68E1-C86B-44E3-921A-A8E5C4C0AC94}"/>
               </a:ext>
             </a:extLst>
           </p:cNvPr>
@@ -26379,7 +26379,7 @@
           <p:cNvPr id="100" name="">
             <a:extLst xmlns:a="http://schemas.openxmlformats.org/drawingml/2006/main">
               <a:ext uri="{FF2B5EF4-FFF2-40B4-BE49-F238E27FC236}">
-                <a16:creationId xmlns:a16="http://schemas.microsoft.com/office/drawing/2014/main" id="{A7D112A2-303C-467A-BACD-9D41A4A7F6F1}"/>
+                <a16:creationId xmlns:a16="http://schemas.microsoft.com/office/drawing/2014/main" id="{3B9A2A46-8300-4438-B456-0AB7832E254D}"/>
               </a:ext>
             </a:extLst>
           </p:cNvPr>
@@ -26431,7 +26431,7 @@
           <p:cNvPr id="101" name="">
             <a:extLst xmlns:a="http://schemas.openxmlformats.org/drawingml/2006/main">
               <a:ext uri="{FF2B5EF4-FFF2-40B4-BE49-F238E27FC236}">
-                <a16:creationId xmlns:a16="http://schemas.microsoft.com/office/drawing/2014/main" id="{67094F17-4A9C-4F79-8561-D33BC8077293}"/>
+                <a16:creationId xmlns:a16="http://schemas.microsoft.com/office/drawing/2014/main" id="{D57641C3-D0DC-44D4-895C-78BD982ADF06}"/>
               </a:ext>
             </a:extLst>
           </p:cNvPr>
@@ -26483,7 +26483,7 @@
           <p:cNvPr id="102" name="">
             <a:extLst xmlns:a="http://schemas.openxmlformats.org/drawingml/2006/main">
               <a:ext uri="{FF2B5EF4-FFF2-40B4-BE49-F238E27FC236}">
-                <a16:creationId xmlns:a16="http://schemas.microsoft.com/office/drawing/2014/main" id="{BD85AC49-E6D0-4D0B-9CFD-25D8EC6E3404}"/>
+                <a16:creationId xmlns:a16="http://schemas.microsoft.com/office/drawing/2014/main" id="{59EB60D5-A4C5-49B8-9D67-E4292D470CF8}"/>
               </a:ext>
             </a:extLst>
           </p:cNvPr>
@@ -26535,7 +26535,7 @@
           <p:cNvPr id="103" name="">
             <a:extLst xmlns:a="http://schemas.openxmlformats.org/drawingml/2006/main">
               <a:ext uri="{FF2B5EF4-FFF2-40B4-BE49-F238E27FC236}">
-                <a16:creationId xmlns:a16="http://schemas.microsoft.com/office/drawing/2014/main" id="{8F243E1D-8A96-4F11-B7B9-38F2F1FF7A23}"/>
+                <a16:creationId xmlns:a16="http://schemas.microsoft.com/office/drawing/2014/main" id="{0C834A33-5BD5-462D-92A3-BE9AE99388F1}"/>
               </a:ext>
             </a:extLst>
           </p:cNvPr>
@@ -26587,7 +26587,7 @@
           <p:cNvPr id="104" name="">
             <a:extLst xmlns:a="http://schemas.openxmlformats.org/drawingml/2006/main">
               <a:ext uri="{FF2B5EF4-FFF2-40B4-BE49-F238E27FC236}">
-                <a16:creationId xmlns:a16="http://schemas.microsoft.com/office/drawing/2014/main" id="{E23FEF1E-23FF-4BC2-BA50-C9438E67D12F}"/>
+                <a16:creationId xmlns:a16="http://schemas.microsoft.com/office/drawing/2014/main" id="{87B8DF49-C81F-4944-9DBF-5189FE518BC5}"/>
               </a:ext>
             </a:extLst>
           </p:cNvPr>
@@ -26639,7 +26639,7 @@
           <p:cNvPr id="105" name="">
             <a:extLst xmlns:a="http://schemas.openxmlformats.org/drawingml/2006/main">
               <a:ext uri="{FF2B5EF4-FFF2-40B4-BE49-F238E27FC236}">
-                <a16:creationId xmlns:a16="http://schemas.microsoft.com/office/drawing/2014/main" id="{0E2C3B18-D2ED-4C1E-AA7A-DF3A32712A0C}"/>
+                <a16:creationId xmlns:a16="http://schemas.microsoft.com/office/drawing/2014/main" id="{16FBA091-CFF8-46C9-8FF1-8038176B1B07}"/>
               </a:ext>
             </a:extLst>
           </p:cNvPr>
@@ -26670,7 +26670,7 @@
           <p:cNvPr id="106" name="">
             <a:extLst xmlns:a="http://schemas.openxmlformats.org/drawingml/2006/main">
               <a:ext uri="{FF2B5EF4-FFF2-40B4-BE49-F238E27FC236}">
-                <a16:creationId xmlns:a16="http://schemas.microsoft.com/office/drawing/2014/main" id="{FE428BB6-1E2D-423C-9ECC-BC60DB52D2D1}"/>
+                <a16:creationId xmlns:a16="http://schemas.microsoft.com/office/drawing/2014/main" id="{1B44B8A9-AF3F-4735-BC6D-04B4A1973525}"/>
               </a:ext>
             </a:extLst>
           </p:cNvPr>
@@ -26722,7 +26722,7 @@
           <p:cNvPr id="107" name="">
             <a:extLst xmlns:a="http://schemas.openxmlformats.org/drawingml/2006/main">
               <a:ext uri="{FF2B5EF4-FFF2-40B4-BE49-F238E27FC236}">
-                <a16:creationId xmlns:a16="http://schemas.microsoft.com/office/drawing/2014/main" id="{521D3DC4-23CD-4D5D-8242-5D15B3D3D9FF}"/>
+                <a16:creationId xmlns:a16="http://schemas.microsoft.com/office/drawing/2014/main" id="{25FC0AA8-ACF6-45DA-8F66-17EF1AD9CDF5}"/>
               </a:ext>
             </a:extLst>
           </p:cNvPr>
@@ -26774,7 +26774,7 @@
           <p:cNvPr id="108" name="">
             <a:extLst xmlns:a="http://schemas.openxmlformats.org/drawingml/2006/main">
               <a:ext uri="{FF2B5EF4-FFF2-40B4-BE49-F238E27FC236}">
-                <a16:creationId xmlns:a16="http://schemas.microsoft.com/office/drawing/2014/main" id="{E050518E-460B-4750-8B37-55BE9507E793}"/>
+                <a16:creationId xmlns:a16="http://schemas.microsoft.com/office/drawing/2014/main" id="{AE74435E-CFA3-4BFA-99F8-A50D04EBF242}"/>
               </a:ext>
             </a:extLst>
           </p:cNvPr>
@@ -26826,7 +26826,7 @@
           <p:cNvPr id="109" name="">
             <a:extLst xmlns:a="http://schemas.openxmlformats.org/drawingml/2006/main">
               <a:ext uri="{FF2B5EF4-FFF2-40B4-BE49-F238E27FC236}">
-                <a16:creationId xmlns:a16="http://schemas.microsoft.com/office/drawing/2014/main" id="{D6D631C3-8F98-43E3-92D4-118FAC52C977}"/>
+                <a16:creationId xmlns:a16="http://schemas.microsoft.com/office/drawing/2014/main" id="{31AC3302-E06B-4E44-B9AC-682D2869AD71}"/>
               </a:ext>
             </a:extLst>
           </p:cNvPr>
@@ -26878,7 +26878,7 @@
           <p:cNvPr id="110" name="">
             <a:extLst xmlns:a="http://schemas.openxmlformats.org/drawingml/2006/main">
               <a:ext uri="{FF2B5EF4-FFF2-40B4-BE49-F238E27FC236}">
-                <a16:creationId xmlns:a16="http://schemas.microsoft.com/office/drawing/2014/main" id="{0AA2A1C2-07F0-4785-9668-8293F7270DFE}"/>
+                <a16:creationId xmlns:a16="http://schemas.microsoft.com/office/drawing/2014/main" id="{129F8A6B-EE45-4A0B-AA25-04ED83DD3790}"/>
               </a:ext>
             </a:extLst>
           </p:cNvPr>
@@ -26930,7 +26930,7 @@
           <p:cNvPr id="111" name="">
             <a:extLst xmlns:a="http://schemas.openxmlformats.org/drawingml/2006/main">
               <a:ext uri="{FF2B5EF4-FFF2-40B4-BE49-F238E27FC236}">
-                <a16:creationId xmlns:a16="http://schemas.microsoft.com/office/drawing/2014/main" id="{8D69CB97-D183-43B9-86F8-04B508FAA513}"/>
+                <a16:creationId xmlns:a16="http://schemas.microsoft.com/office/drawing/2014/main" id="{9DC36569-6F87-424A-BCC7-A8803D39DB9A}"/>
               </a:ext>
             </a:extLst>
           </p:cNvPr>
@@ -26982,7 +26982,7 @@
           <p:cNvPr id="112" name="">
             <a:extLst xmlns:a="http://schemas.openxmlformats.org/drawingml/2006/main">
               <a:ext uri="{FF2B5EF4-FFF2-40B4-BE49-F238E27FC236}">
-                <a16:creationId xmlns:a16="http://schemas.microsoft.com/office/drawing/2014/main" id="{A4865216-18D1-4EB3-A9B9-2EF37AFAC673}"/>
+                <a16:creationId xmlns:a16="http://schemas.microsoft.com/office/drawing/2014/main" id="{29721C32-3EC7-4586-A185-D5C190F00D00}"/>
               </a:ext>
             </a:extLst>
           </p:cNvPr>
@@ -27034,7 +27034,7 @@
           <p:cNvPr id="113" name="">
             <a:extLst xmlns:a="http://schemas.openxmlformats.org/drawingml/2006/main">
               <a:ext uri="{FF2B5EF4-FFF2-40B4-BE49-F238E27FC236}">
-                <a16:creationId xmlns:a16="http://schemas.microsoft.com/office/drawing/2014/main" id="{6D98CAD6-D972-498B-8CB6-135EF454AE2C}"/>
+                <a16:creationId xmlns:a16="http://schemas.microsoft.com/office/drawing/2014/main" id="{9B54965F-22C8-4A79-9E74-CCC15E3E1E05}"/>
               </a:ext>
             </a:extLst>
           </p:cNvPr>
@@ -27065,7 +27065,7 @@
           <p:cNvPr id="114" name="">
             <a:extLst xmlns:a="http://schemas.openxmlformats.org/drawingml/2006/main">
               <a:ext uri="{FF2B5EF4-FFF2-40B4-BE49-F238E27FC236}">
-                <a16:creationId xmlns:a16="http://schemas.microsoft.com/office/drawing/2014/main" id="{B4B0406A-8ABB-4BFE-B20C-0D1AF6928788}"/>
+                <a16:creationId xmlns:a16="http://schemas.microsoft.com/office/drawing/2014/main" id="{0A61A95B-F6B5-44E3-9C3C-92B21ABAB9BD}"/>
               </a:ext>
             </a:extLst>
           </p:cNvPr>
@@ -27096,7 +27096,7 @@
           <p:cNvPr id="115" name="">
             <a:extLst xmlns:a="http://schemas.openxmlformats.org/drawingml/2006/main">
               <a:ext uri="{FF2B5EF4-FFF2-40B4-BE49-F238E27FC236}">
-                <a16:creationId xmlns:a16="http://schemas.microsoft.com/office/drawing/2014/main" id="{5A3CE0EF-7C79-4FF4-8AD9-5073852227AA}"/>
+                <a16:creationId xmlns:a16="http://schemas.microsoft.com/office/drawing/2014/main" id="{89915A1E-E7CF-4C5E-9DA1-D283B16B0C78}"/>
               </a:ext>
             </a:extLst>
           </p:cNvPr>
@@ -27148,7 +27148,7 @@
           <p:cNvPr id="116" name="">
             <a:extLst xmlns:a="http://schemas.openxmlformats.org/drawingml/2006/main">
               <a:ext uri="{FF2B5EF4-FFF2-40B4-BE49-F238E27FC236}">
-                <a16:creationId xmlns:a16="http://schemas.microsoft.com/office/drawing/2014/main" id="{1836F138-D1BA-49B2-ACEB-D72795386911}"/>
+                <a16:creationId xmlns:a16="http://schemas.microsoft.com/office/drawing/2014/main" id="{BA8D80D5-0143-4F07-AAD1-D9E8418DD8EE}"/>
               </a:ext>
             </a:extLst>
           </p:cNvPr>
@@ -27200,7 +27200,7 @@
           <p:cNvPr id="117" name="">
             <a:extLst xmlns:a="http://schemas.openxmlformats.org/drawingml/2006/main">
               <a:ext uri="{FF2B5EF4-FFF2-40B4-BE49-F238E27FC236}">
-                <a16:creationId xmlns:a16="http://schemas.microsoft.com/office/drawing/2014/main" id="{0C96B99E-C14F-43B4-89C8-86FA4F151693}"/>
+                <a16:creationId xmlns:a16="http://schemas.microsoft.com/office/drawing/2014/main" id="{A207E9A1-B398-4CF9-A214-0820784FA038}"/>
               </a:ext>
             </a:extLst>
           </p:cNvPr>
@@ -27252,7 +27252,7 @@
           <p:cNvPr id="118" name="">
             <a:extLst xmlns:a="http://schemas.openxmlformats.org/drawingml/2006/main">
               <a:ext uri="{FF2B5EF4-FFF2-40B4-BE49-F238E27FC236}">
-                <a16:creationId xmlns:a16="http://schemas.microsoft.com/office/drawing/2014/main" id="{0C0AEB24-D104-4943-A953-653384F7E35E}"/>
+                <a16:creationId xmlns:a16="http://schemas.microsoft.com/office/drawing/2014/main" id="{B8477134-69C3-473A-80DA-E694C0640C6B}"/>
               </a:ext>
             </a:extLst>
           </p:cNvPr>
@@ -27304,7 +27304,7 @@
           <p:cNvPr id="119" name="">
             <a:extLst xmlns:a="http://schemas.openxmlformats.org/drawingml/2006/main">
               <a:ext uri="{FF2B5EF4-FFF2-40B4-BE49-F238E27FC236}">
-                <a16:creationId xmlns:a16="http://schemas.microsoft.com/office/drawing/2014/main" id="{FD0CA4BC-7272-4A16-BE89-830847736C74}"/>
+                <a16:creationId xmlns:a16="http://schemas.microsoft.com/office/drawing/2014/main" id="{CECE1B54-9E78-4857-9407-9D4409AC2824}"/>
               </a:ext>
             </a:extLst>
           </p:cNvPr>
@@ -27356,7 +27356,7 @@
           <p:cNvPr id="120" name="">
             <a:extLst xmlns:a="http://schemas.openxmlformats.org/drawingml/2006/main">
               <a:ext uri="{FF2B5EF4-FFF2-40B4-BE49-F238E27FC236}">
-                <a16:creationId xmlns:a16="http://schemas.microsoft.com/office/drawing/2014/main" id="{3DB130E3-5E09-4AD3-B72E-70616CB22E3A}"/>
+                <a16:creationId xmlns:a16="http://schemas.microsoft.com/office/drawing/2014/main" id="{A8DCD9A7-B8EA-4763-8D24-7834D5C43719}"/>
               </a:ext>
             </a:extLst>
           </p:cNvPr>
@@ -27408,7 +27408,7 @@
           <p:cNvPr id="121" name="">
             <a:extLst xmlns:a="http://schemas.openxmlformats.org/drawingml/2006/main">
               <a:ext uri="{FF2B5EF4-FFF2-40B4-BE49-F238E27FC236}">
-                <a16:creationId xmlns:a16="http://schemas.microsoft.com/office/drawing/2014/main" id="{6E138FE4-E065-4B5B-8730-F8CD5448ABDC}"/>
+                <a16:creationId xmlns:a16="http://schemas.microsoft.com/office/drawing/2014/main" id="{B9CD5FAE-E972-4902-BFF1-461B65957E88}"/>
               </a:ext>
             </a:extLst>
           </p:cNvPr>
@@ -27458,7 +27458,7 @@
     </p:spTree>
     <p:extLst>
       <p:ext uri="{BB962C8B-B14F-4D97-AF65-F5344CB8AC3E}">
-        <p14:creationId xmlns:p14="http://schemas.microsoft.com/office/powerpoint/2010/main" val="159645422"/>
+        <p14:creationId xmlns:p14="http://schemas.microsoft.com/office/powerpoint/2010/main" val="775263628"/>
       </p:ext>
     </p:extLst>
   </p:cSld>
@@ -27489,7 +27489,7 @@
           <p:cNvPr id="9" name="">
             <a:extLst xmlns:a="http://schemas.openxmlformats.org/drawingml/2006/main">
               <a:ext uri="{FF2B5EF4-FFF2-40B4-BE49-F238E27FC236}">
-                <a16:creationId xmlns:a16="http://schemas.microsoft.com/office/drawing/2014/main" id="{076F5128-DE9A-433D-ADB2-BD848C804D29}"/>
+                <a16:creationId xmlns:a16="http://schemas.microsoft.com/office/drawing/2014/main" id="{30F009F2-8525-4D1D-96D5-3AE37CFCB8DA}"/>
               </a:ext>
             </a:extLst>
           </p:cNvPr>
@@ -27522,7 +27522,7 @@
           <p:cNvPr id="2" name="">
             <a:extLst xmlns:a="http://schemas.openxmlformats.org/drawingml/2006/main">
               <a:ext uri="{FF2B5EF4-FFF2-40B4-BE49-F238E27FC236}">
-                <a16:creationId xmlns:a16="http://schemas.microsoft.com/office/drawing/2014/main" id="{DB62B703-A072-4255-9F29-06EA25CE2694}"/>
+                <a16:creationId xmlns:a16="http://schemas.microsoft.com/office/drawing/2014/main" id="{F2E02C8E-C0C7-4218-A151-6F4BF6932D94}"/>
               </a:ext>
             </a:extLst>
           </p:cNvPr>
@@ -27553,7 +27553,7 @@
           <p:cNvPr id="3" name="">
             <a:extLst xmlns:a="http://schemas.openxmlformats.org/drawingml/2006/main">
               <a:ext uri="{FF2B5EF4-FFF2-40B4-BE49-F238E27FC236}">
-                <a16:creationId xmlns:a16="http://schemas.microsoft.com/office/drawing/2014/main" id="{1E0FB31F-70C7-46A3-BC9D-33EEB66C56AB}"/>
+                <a16:creationId xmlns:a16="http://schemas.microsoft.com/office/drawing/2014/main" id="{662C1382-407C-4396-89E5-7E8622172D9C}"/>
               </a:ext>
             </a:extLst>
           </p:cNvPr>
@@ -27605,7 +27605,7 @@
           <p:cNvPr id="4" name="">
             <a:extLst xmlns:a="http://schemas.openxmlformats.org/drawingml/2006/main">
               <a:ext uri="{FF2B5EF4-FFF2-40B4-BE49-F238E27FC236}">
-                <a16:creationId xmlns:a16="http://schemas.microsoft.com/office/drawing/2014/main" id="{AECB6A4F-9C30-42A2-9D8F-C2342F31208A}"/>
+                <a16:creationId xmlns:a16="http://schemas.microsoft.com/office/drawing/2014/main" id="{E7A839CB-7583-4F89-AD92-7C13CEEC1DF6}"/>
               </a:ext>
             </a:extLst>
           </p:cNvPr>
@@ -27640,7 +27640,7 @@
           <p:nvPr/>
         </p:nvPicPr>
         <p:blipFill>
-          <a:blip xmlns:r="http://schemas.openxmlformats.org/officeDocument/2006/relationships" xmlns:a="http://schemas.openxmlformats.org/drawingml/2006/main" r:embed="R9a64c161442443a9"/>
+          <a:blip xmlns:r="http://schemas.openxmlformats.org/officeDocument/2006/relationships" xmlns:a="http://schemas.openxmlformats.org/drawingml/2006/main" r:embed="Rdf760d429aab4de8"/>
           <a:stretch xmlns:a="http://schemas.openxmlformats.org/drawingml/2006/main"/>
         </p:blipFill>
         <p:spPr>
@@ -27658,7 +27658,7 @@
           <p:cNvPr id="6" name="">
             <a:extLst xmlns:a="http://schemas.openxmlformats.org/drawingml/2006/main">
               <a:ext uri="{FF2B5EF4-FFF2-40B4-BE49-F238E27FC236}">
-                <a16:creationId xmlns:a16="http://schemas.microsoft.com/office/drawing/2014/main" id="{B2DE6E6B-A27E-4671-8462-03C69C6468A3}"/>
+                <a16:creationId xmlns:a16="http://schemas.microsoft.com/office/drawing/2014/main" id="{20EED939-CD88-4FCC-8467-4601F65466BB}"/>
               </a:ext>
             </a:extLst>
           </p:cNvPr>
@@ -27710,7 +27710,7 @@
           <p:cNvPr id="7" name="">
             <a:extLst xmlns:a="http://schemas.openxmlformats.org/drawingml/2006/main">
               <a:ext uri="{FF2B5EF4-FFF2-40B4-BE49-F238E27FC236}">
-                <a16:creationId xmlns:a16="http://schemas.microsoft.com/office/drawing/2014/main" id="{FFBDDE51-B6CC-42B1-AE60-C9A84ECE6650}"/>
+                <a16:creationId xmlns:a16="http://schemas.microsoft.com/office/drawing/2014/main" id="{3E8E9498-9256-40D0-8980-858525383235}"/>
               </a:ext>
             </a:extLst>
           </p:cNvPr>
@@ -27766,7 +27766,7 @@
           <p:nvPr/>
         </p:nvPicPr>
         <p:blipFill>
-          <a:blip xmlns:r="http://schemas.openxmlformats.org/officeDocument/2006/relationships" xmlns:a="http://schemas.openxmlformats.org/drawingml/2006/main" r:embed="R3d0591811fe8405a"/>
+          <a:blip xmlns:r="http://schemas.openxmlformats.org/officeDocument/2006/relationships" xmlns:a="http://schemas.openxmlformats.org/drawingml/2006/main" r:embed="Rc9a8f6176fd44c6d"/>
           <a:stretch xmlns:a="http://schemas.openxmlformats.org/drawingml/2006/main"/>
         </p:blipFill>
         <p:spPr>
@@ -27782,7 +27782,7 @@
     </p:spTree>
     <p:extLst>
       <p:ext uri="{BB962C8B-B14F-4D97-AF65-F5344CB8AC3E}">
-        <p14:creationId xmlns:p14="http://schemas.microsoft.com/office/powerpoint/2010/main" val="1937786306"/>
+        <p14:creationId xmlns:p14="http://schemas.microsoft.com/office/powerpoint/2010/main" val="1654927669"/>
       </p:ext>
     </p:extLst>
   </p:cSld>
@@ -27813,7 +27813,7 @@
           <p:cNvPr id="42" name="">
             <a:extLst xmlns:a="http://schemas.openxmlformats.org/drawingml/2006/main">
               <a:ext uri="{FF2B5EF4-FFF2-40B4-BE49-F238E27FC236}">
-                <a16:creationId xmlns:a16="http://schemas.microsoft.com/office/drawing/2014/main" id="{0DB130A1-55A0-4A73-9E2C-A70764D0D8A0}"/>
+                <a16:creationId xmlns:a16="http://schemas.microsoft.com/office/drawing/2014/main" id="{6288F0CB-99BC-4074-A25E-1DCB1A55FED8}"/>
               </a:ext>
             </a:extLst>
           </p:cNvPr>
@@ -27846,7 +27846,7 @@
           <p:cNvPr id="2" name="">
             <a:extLst xmlns:a="http://schemas.openxmlformats.org/drawingml/2006/main">
               <a:ext uri="{FF2B5EF4-FFF2-40B4-BE49-F238E27FC236}">
-                <a16:creationId xmlns:a16="http://schemas.microsoft.com/office/drawing/2014/main" id="{6B42EB89-4909-480D-B1B4-940C322FFE4F}"/>
+                <a16:creationId xmlns:a16="http://schemas.microsoft.com/office/drawing/2014/main" id="{4B7BC27D-6796-4A2B-8896-D5FEF10C095C}"/>
               </a:ext>
             </a:extLst>
           </p:cNvPr>
@@ -27877,7 +27877,7 @@
           <p:cNvPr id="3" name="">
             <a:extLst xmlns:a="http://schemas.openxmlformats.org/drawingml/2006/main">
               <a:ext uri="{FF2B5EF4-FFF2-40B4-BE49-F238E27FC236}">
-                <a16:creationId xmlns:a16="http://schemas.microsoft.com/office/drawing/2014/main" id="{93865AA4-6EAB-4517-9E6D-19B4EFE1702F}"/>
+                <a16:creationId xmlns:a16="http://schemas.microsoft.com/office/drawing/2014/main" id="{AD7392B3-A9AC-4F8B-81DD-BA00A3A29139}"/>
               </a:ext>
             </a:extLst>
           </p:cNvPr>
@@ -27929,7 +27929,7 @@
           <p:cNvPr id="4" name="">
             <a:extLst xmlns:a="http://schemas.openxmlformats.org/drawingml/2006/main">
               <a:ext uri="{FF2B5EF4-FFF2-40B4-BE49-F238E27FC236}">
-                <a16:creationId xmlns:a16="http://schemas.microsoft.com/office/drawing/2014/main" id="{F5C89EF9-9D3C-463C-9BF2-D29E5483DF8A}"/>
+                <a16:creationId xmlns:a16="http://schemas.microsoft.com/office/drawing/2014/main" id="{4F7D592C-1542-4F9C-B931-BDC5E50DB3BF}"/>
               </a:ext>
             </a:extLst>
           </p:cNvPr>
@@ -27981,7 +27981,7 @@
           <p:cNvPr id="5" name="">
             <a:extLst xmlns:a="http://schemas.openxmlformats.org/drawingml/2006/main">
               <a:ext uri="{FF2B5EF4-FFF2-40B4-BE49-F238E27FC236}">
-                <a16:creationId xmlns:a16="http://schemas.microsoft.com/office/drawing/2014/main" id="{B10CEB7B-6359-4B91-B285-62D939F1CFDF}"/>
+                <a16:creationId xmlns:a16="http://schemas.microsoft.com/office/drawing/2014/main" id="{7F7BDCA1-02B6-4B1E-9077-E14FD3FCE4E5}"/>
               </a:ext>
             </a:extLst>
           </p:cNvPr>
@@ -28016,7 +28016,7 @@
           <p:nvPr/>
         </p:nvPicPr>
         <p:blipFill>
-          <a:blip xmlns:r="http://schemas.openxmlformats.org/officeDocument/2006/relationships" xmlns:a="http://schemas.openxmlformats.org/drawingml/2006/main" r:embed="R01bc10f6ed3847b4"/>
+          <a:blip xmlns:r="http://schemas.openxmlformats.org/officeDocument/2006/relationships" xmlns:a="http://schemas.openxmlformats.org/drawingml/2006/main" r:embed="R054f246c907e4bcb"/>
           <a:stretch xmlns:a="http://schemas.openxmlformats.org/drawingml/2006/main"/>
         </p:blipFill>
         <p:spPr>
@@ -28034,7 +28034,7 @@
           <p:cNvPr id="7" name="">
             <a:extLst xmlns:a="http://schemas.openxmlformats.org/drawingml/2006/main">
               <a:ext uri="{FF2B5EF4-FFF2-40B4-BE49-F238E27FC236}">
-                <a16:creationId xmlns:a16="http://schemas.microsoft.com/office/drawing/2014/main" id="{EBFEF479-271B-4EFF-A9D2-FC4E33DC42B9}"/>
+                <a16:creationId xmlns:a16="http://schemas.microsoft.com/office/drawing/2014/main" id="{C2C38783-64F8-42F5-929B-8527D717C761}"/>
               </a:ext>
             </a:extLst>
           </p:cNvPr>
@@ -28086,7 +28086,7 @@
           <p:cNvPr id="8" name="">
             <a:extLst xmlns:a="http://schemas.openxmlformats.org/drawingml/2006/main">
               <a:ext uri="{FF2B5EF4-FFF2-40B4-BE49-F238E27FC236}">
-                <a16:creationId xmlns:a16="http://schemas.microsoft.com/office/drawing/2014/main" id="{96D9BD70-B880-4F30-BEDB-675A47DE1BF5}"/>
+                <a16:creationId xmlns:a16="http://schemas.microsoft.com/office/drawing/2014/main" id="{70819E56-5F5D-4ADF-AAE3-8E3E90A3C6C8}"/>
               </a:ext>
             </a:extLst>
           </p:cNvPr>
@@ -28138,7 +28138,7 @@
           <p:cNvPr id="9" name="">
             <a:extLst xmlns:a="http://schemas.openxmlformats.org/drawingml/2006/main">
               <a:ext uri="{FF2B5EF4-FFF2-40B4-BE49-F238E27FC236}">
-                <a16:creationId xmlns:a16="http://schemas.microsoft.com/office/drawing/2014/main" id="{439B2B8D-E0CC-46CB-8ACD-874D38161B2B}"/>
+                <a16:creationId xmlns:a16="http://schemas.microsoft.com/office/drawing/2014/main" id="{42D09DC0-8710-4BA1-AF31-535302F3BD63}"/>
               </a:ext>
             </a:extLst>
           </p:cNvPr>
@@ -28190,7 +28190,7 @@
           <p:cNvPr id="10" name="">
             <a:extLst xmlns:a="http://schemas.openxmlformats.org/drawingml/2006/main">
               <a:ext uri="{FF2B5EF4-FFF2-40B4-BE49-F238E27FC236}">
-                <a16:creationId xmlns:a16="http://schemas.microsoft.com/office/drawing/2014/main" id="{64367E34-8CD8-414D-9EC5-E309523344C4}"/>
+                <a16:creationId xmlns:a16="http://schemas.microsoft.com/office/drawing/2014/main" id="{3515A3A9-FC8C-4045-8412-5AAE3E8248A3}"/>
               </a:ext>
             </a:extLst>
           </p:cNvPr>
@@ -28221,7 +28221,7 @@
           <p:cNvPr id="11" name="">
             <a:extLst xmlns:a="http://schemas.openxmlformats.org/drawingml/2006/main">
               <a:ext uri="{FF2B5EF4-FFF2-40B4-BE49-F238E27FC236}">
-                <a16:creationId xmlns:a16="http://schemas.microsoft.com/office/drawing/2014/main" id="{DB47EFA0-2529-494A-AADC-66FD53304CB7}"/>
+                <a16:creationId xmlns:a16="http://schemas.microsoft.com/office/drawing/2014/main" id="{87A5E1A6-1BE1-46FC-A4CE-8A11460B35F7}"/>
               </a:ext>
             </a:extLst>
           </p:cNvPr>
@@ -28273,7 +28273,7 @@
           <p:cNvPr id="12" name="">
             <a:extLst xmlns:a="http://schemas.openxmlformats.org/drawingml/2006/main">
               <a:ext uri="{FF2B5EF4-FFF2-40B4-BE49-F238E27FC236}">
-                <a16:creationId xmlns:a16="http://schemas.microsoft.com/office/drawing/2014/main" id="{64F3BEBF-7526-4019-8F3B-68212FD99FC0}"/>
+                <a16:creationId xmlns:a16="http://schemas.microsoft.com/office/drawing/2014/main" id="{A480A12D-D7B1-4815-8CBC-AA613C897FCA}"/>
               </a:ext>
             </a:extLst>
           </p:cNvPr>
@@ -28325,7 +28325,7 @@
           <p:cNvPr id="13" name="">
             <a:extLst xmlns:a="http://schemas.openxmlformats.org/drawingml/2006/main">
               <a:ext uri="{FF2B5EF4-FFF2-40B4-BE49-F238E27FC236}">
-                <a16:creationId xmlns:a16="http://schemas.microsoft.com/office/drawing/2014/main" id="{9CC9423C-E1C3-4BE2-B70D-9F364E884BFA}"/>
+                <a16:creationId xmlns:a16="http://schemas.microsoft.com/office/drawing/2014/main" id="{D9D2F459-A162-4666-8AEC-412D071E22A7}"/>
               </a:ext>
             </a:extLst>
           </p:cNvPr>
@@ -28377,7 +28377,7 @@
           <p:cNvPr id="14" name="">
             <a:extLst xmlns:a="http://schemas.openxmlformats.org/drawingml/2006/main">
               <a:ext uri="{FF2B5EF4-FFF2-40B4-BE49-F238E27FC236}">
-                <a16:creationId xmlns:a16="http://schemas.microsoft.com/office/drawing/2014/main" id="{778EF323-94BD-49C4-9EEF-097604CFE148}"/>
+                <a16:creationId xmlns:a16="http://schemas.microsoft.com/office/drawing/2014/main" id="{7AA67AF7-B8DE-435A-A2F3-EAB39B6C70CE}"/>
               </a:ext>
             </a:extLst>
           </p:cNvPr>
@@ -28408,7 +28408,7 @@
           <p:cNvPr id="15" name="">
             <a:extLst xmlns:a="http://schemas.openxmlformats.org/drawingml/2006/main">
               <a:ext uri="{FF2B5EF4-FFF2-40B4-BE49-F238E27FC236}">
-                <a16:creationId xmlns:a16="http://schemas.microsoft.com/office/drawing/2014/main" id="{603EBCB5-FE96-4EA4-9798-88BB89CF8C65}"/>
+                <a16:creationId xmlns:a16="http://schemas.microsoft.com/office/drawing/2014/main" id="{A5B23E28-E88F-4375-A80E-23E859DD5DCA}"/>
               </a:ext>
             </a:extLst>
           </p:cNvPr>
@@ -28460,7 +28460,7 @@
           <p:cNvPr id="16" name="">
             <a:extLst xmlns:a="http://schemas.openxmlformats.org/drawingml/2006/main">
               <a:ext uri="{FF2B5EF4-FFF2-40B4-BE49-F238E27FC236}">
-                <a16:creationId xmlns:a16="http://schemas.microsoft.com/office/drawing/2014/main" id="{91107148-3153-4827-A7C1-44D6E744B178}"/>
+                <a16:creationId xmlns:a16="http://schemas.microsoft.com/office/drawing/2014/main" id="{256371D9-A5AC-4338-A214-6ABD67533571}"/>
               </a:ext>
             </a:extLst>
           </p:cNvPr>
@@ -28512,7 +28512,7 @@
           <p:cNvPr id="17" name="">
             <a:extLst xmlns:a="http://schemas.openxmlformats.org/drawingml/2006/main">
               <a:ext uri="{FF2B5EF4-FFF2-40B4-BE49-F238E27FC236}">
-                <a16:creationId xmlns:a16="http://schemas.microsoft.com/office/drawing/2014/main" id="{DBFDFBB3-75FF-4920-B4BD-2CDDBA178B74}"/>
+                <a16:creationId xmlns:a16="http://schemas.microsoft.com/office/drawing/2014/main" id="{E066F3E5-0BFE-4F09-8C12-91262A35CBB8}"/>
               </a:ext>
             </a:extLst>
           </p:cNvPr>
@@ -28564,7 +28564,7 @@
           <p:cNvPr id="18" name="">
             <a:extLst xmlns:a="http://schemas.openxmlformats.org/drawingml/2006/main">
               <a:ext uri="{FF2B5EF4-FFF2-40B4-BE49-F238E27FC236}">
-                <a16:creationId xmlns:a16="http://schemas.microsoft.com/office/drawing/2014/main" id="{639FC776-54E4-4C4F-9632-89486C5A38B9}"/>
+                <a16:creationId xmlns:a16="http://schemas.microsoft.com/office/drawing/2014/main" id="{B32F52BD-5D41-43CE-9260-798DB1CF89FE}"/>
               </a:ext>
             </a:extLst>
           </p:cNvPr>
@@ -28595,7 +28595,7 @@
           <p:cNvPr id="19" name="">
             <a:extLst xmlns:a="http://schemas.openxmlformats.org/drawingml/2006/main">
               <a:ext uri="{FF2B5EF4-FFF2-40B4-BE49-F238E27FC236}">
-                <a16:creationId xmlns:a16="http://schemas.microsoft.com/office/drawing/2014/main" id="{98309A3C-FADC-4523-8478-87B95DFFAA42}"/>
+                <a16:creationId xmlns:a16="http://schemas.microsoft.com/office/drawing/2014/main" id="{1E024BB9-0239-4F1D-B269-AB30DDC16D53}"/>
               </a:ext>
             </a:extLst>
           </p:cNvPr>
@@ -28647,7 +28647,7 @@
           <p:cNvPr id="20" name="">
             <a:extLst xmlns:a="http://schemas.openxmlformats.org/drawingml/2006/main">
               <a:ext uri="{FF2B5EF4-FFF2-40B4-BE49-F238E27FC236}">
-                <a16:creationId xmlns:a16="http://schemas.microsoft.com/office/drawing/2014/main" id="{A2065B4A-2BBE-4431-A2D8-B934EDBB8C7A}"/>
+                <a16:creationId xmlns:a16="http://schemas.microsoft.com/office/drawing/2014/main" id="{0AEDCC6A-4ED6-483C-BCC4-3DD1E36CF2B0}"/>
               </a:ext>
             </a:extLst>
           </p:cNvPr>
@@ -28699,7 +28699,7 @@
           <p:cNvPr id="21" name="">
             <a:extLst xmlns:a="http://schemas.openxmlformats.org/drawingml/2006/main">
               <a:ext uri="{FF2B5EF4-FFF2-40B4-BE49-F238E27FC236}">
-                <a16:creationId xmlns:a16="http://schemas.microsoft.com/office/drawing/2014/main" id="{6735872C-AE52-4B63-9A76-37C13F6D5582}"/>
+                <a16:creationId xmlns:a16="http://schemas.microsoft.com/office/drawing/2014/main" id="{98A433B4-604B-4081-B4D0-7500D295F484}"/>
               </a:ext>
             </a:extLst>
           </p:cNvPr>
@@ -28751,7 +28751,7 @@
           <p:cNvPr id="22" name="">
             <a:extLst xmlns:a="http://schemas.openxmlformats.org/drawingml/2006/main">
               <a:ext uri="{FF2B5EF4-FFF2-40B4-BE49-F238E27FC236}">
-                <a16:creationId xmlns:a16="http://schemas.microsoft.com/office/drawing/2014/main" id="{8BDFDA8A-E730-4D8F-9C26-7554EDEDCED9}"/>
+                <a16:creationId xmlns:a16="http://schemas.microsoft.com/office/drawing/2014/main" id="{51EDF9E4-5477-4312-AB5D-107F772D2D3E}"/>
               </a:ext>
             </a:extLst>
           </p:cNvPr>
@@ -28782,7 +28782,7 @@
           <p:cNvPr id="23" name="">
             <a:extLst xmlns:a="http://schemas.openxmlformats.org/drawingml/2006/main">
               <a:ext uri="{FF2B5EF4-FFF2-40B4-BE49-F238E27FC236}">
-                <a16:creationId xmlns:a16="http://schemas.microsoft.com/office/drawing/2014/main" id="{02A09AAE-3837-4736-94A5-6D8D08C4E6A7}"/>
+                <a16:creationId xmlns:a16="http://schemas.microsoft.com/office/drawing/2014/main" id="{4C703E9F-A9EC-4B25-A957-705C11CB9F75}"/>
               </a:ext>
             </a:extLst>
           </p:cNvPr>
@@ -28834,7 +28834,7 @@
           <p:cNvPr id="24" name="">
             <a:extLst xmlns:a="http://schemas.openxmlformats.org/drawingml/2006/main">
               <a:ext uri="{FF2B5EF4-FFF2-40B4-BE49-F238E27FC236}">
-                <a16:creationId xmlns:a16="http://schemas.microsoft.com/office/drawing/2014/main" id="{9CD179E8-8850-4DE4-83DA-B14FF1557C1C}"/>
+                <a16:creationId xmlns:a16="http://schemas.microsoft.com/office/drawing/2014/main" id="{748CDEBE-2DFE-4B0C-B197-916B8DFA69CB}"/>
               </a:ext>
             </a:extLst>
           </p:cNvPr>
@@ -28886,7 +28886,7 @@
           <p:cNvPr id="25" name="">
             <a:extLst xmlns:a="http://schemas.openxmlformats.org/drawingml/2006/main">
               <a:ext uri="{FF2B5EF4-FFF2-40B4-BE49-F238E27FC236}">
-                <a16:creationId xmlns:a16="http://schemas.microsoft.com/office/drawing/2014/main" id="{8474BCD9-2F83-4EF3-9473-35CD28F927C4}"/>
+                <a16:creationId xmlns:a16="http://schemas.microsoft.com/office/drawing/2014/main" id="{8B3028B3-A2A3-4CB0-A2C3-E33EB285C59F}"/>
               </a:ext>
             </a:extLst>
           </p:cNvPr>
@@ -28938,7 +28938,7 @@
           <p:cNvPr id="26" name="">
             <a:extLst xmlns:a="http://schemas.openxmlformats.org/drawingml/2006/main">
               <a:ext uri="{FF2B5EF4-FFF2-40B4-BE49-F238E27FC236}">
-                <a16:creationId xmlns:a16="http://schemas.microsoft.com/office/drawing/2014/main" id="{FEABED4F-824C-4324-9CDA-CE7A0F483726}"/>
+                <a16:creationId xmlns:a16="http://schemas.microsoft.com/office/drawing/2014/main" id="{D4B51EF2-01E8-4CF5-8E2C-87AB389F470B}"/>
               </a:ext>
             </a:extLst>
           </p:cNvPr>
@@ -28969,7 +28969,7 @@
           <p:cNvPr id="27" name="">
             <a:extLst xmlns:a="http://schemas.openxmlformats.org/drawingml/2006/main">
               <a:ext uri="{FF2B5EF4-FFF2-40B4-BE49-F238E27FC236}">
-                <a16:creationId xmlns:a16="http://schemas.microsoft.com/office/drawing/2014/main" id="{9B1D4A0F-6056-4314-AFBA-1CB54358494B}"/>
+                <a16:creationId xmlns:a16="http://schemas.microsoft.com/office/drawing/2014/main" id="{D9850873-6D6C-4728-AF59-F369FB1E7072}"/>
               </a:ext>
             </a:extLst>
           </p:cNvPr>
@@ -29021,7 +29021,7 @@
           <p:cNvPr id="28" name="">
             <a:extLst xmlns:a="http://schemas.openxmlformats.org/drawingml/2006/main">
               <a:ext uri="{FF2B5EF4-FFF2-40B4-BE49-F238E27FC236}">
-                <a16:creationId xmlns:a16="http://schemas.microsoft.com/office/drawing/2014/main" id="{69C89644-690F-4A2E-A284-8BCC202FE5A5}"/>
+                <a16:creationId xmlns:a16="http://schemas.microsoft.com/office/drawing/2014/main" id="{8970113A-BAF2-4324-96BE-34CFD7517F04}"/>
               </a:ext>
             </a:extLst>
           </p:cNvPr>
@@ -29073,7 +29073,7 @@
           <p:cNvPr id="29" name="">
             <a:extLst xmlns:a="http://schemas.openxmlformats.org/drawingml/2006/main">
               <a:ext uri="{FF2B5EF4-FFF2-40B4-BE49-F238E27FC236}">
-                <a16:creationId xmlns:a16="http://schemas.microsoft.com/office/drawing/2014/main" id="{6350EB9C-8DF5-4004-85BE-5AA43D916AA4}"/>
+                <a16:creationId xmlns:a16="http://schemas.microsoft.com/office/drawing/2014/main" id="{9C3DC70F-0599-45C6-A705-5251895C6ABF}"/>
               </a:ext>
             </a:extLst>
           </p:cNvPr>
@@ -29125,7 +29125,7 @@
           <p:cNvPr id="30" name="">
             <a:extLst xmlns:a="http://schemas.openxmlformats.org/drawingml/2006/main">
               <a:ext uri="{FF2B5EF4-FFF2-40B4-BE49-F238E27FC236}">
-                <a16:creationId xmlns:a16="http://schemas.microsoft.com/office/drawing/2014/main" id="{4ECFF258-BE8C-45C4-9D75-730DE9B001F3}"/>
+                <a16:creationId xmlns:a16="http://schemas.microsoft.com/office/drawing/2014/main" id="{599715B9-AA72-4C6B-85E4-F2AEE3EFBBB6}"/>
               </a:ext>
             </a:extLst>
           </p:cNvPr>
@@ -29156,7 +29156,7 @@
           <p:cNvPr id="31" name="">
             <a:extLst xmlns:a="http://schemas.openxmlformats.org/drawingml/2006/main">
               <a:ext uri="{FF2B5EF4-FFF2-40B4-BE49-F238E27FC236}">
-                <a16:creationId xmlns:a16="http://schemas.microsoft.com/office/drawing/2014/main" id="{BC77CF24-DCB4-4993-86BB-EABD3CBA6F55}"/>
+                <a16:creationId xmlns:a16="http://schemas.microsoft.com/office/drawing/2014/main" id="{44D87107-37CE-4F6E-928A-257610BF4697}"/>
               </a:ext>
             </a:extLst>
           </p:cNvPr>
@@ -29208,7 +29208,7 @@
           <p:cNvPr id="32" name="">
             <a:extLst xmlns:a="http://schemas.openxmlformats.org/drawingml/2006/main">
               <a:ext uri="{FF2B5EF4-FFF2-40B4-BE49-F238E27FC236}">
-                <a16:creationId xmlns:a16="http://schemas.microsoft.com/office/drawing/2014/main" id="{A59F4D1A-9365-444C-B7ED-D5A60A191437}"/>
+                <a16:creationId xmlns:a16="http://schemas.microsoft.com/office/drawing/2014/main" id="{5F5F370A-D7AB-45D6-AB95-EC644D9182D6}"/>
               </a:ext>
             </a:extLst>
           </p:cNvPr>
@@ -29260,7 +29260,7 @@
           <p:cNvPr id="33" name="">
             <a:extLst xmlns:a="http://schemas.openxmlformats.org/drawingml/2006/main">
               <a:ext uri="{FF2B5EF4-FFF2-40B4-BE49-F238E27FC236}">
-                <a16:creationId xmlns:a16="http://schemas.microsoft.com/office/drawing/2014/main" id="{A083C8F9-FDF2-41E2-9A29-7A062D36181B}"/>
+                <a16:creationId xmlns:a16="http://schemas.microsoft.com/office/drawing/2014/main" id="{7584C8B9-4BEA-4A1B-849E-81269A6DB745}"/>
               </a:ext>
             </a:extLst>
           </p:cNvPr>
@@ -29312,7 +29312,7 @@
           <p:cNvPr id="34" name="">
             <a:extLst xmlns:a="http://schemas.openxmlformats.org/drawingml/2006/main">
               <a:ext uri="{FF2B5EF4-FFF2-40B4-BE49-F238E27FC236}">
-                <a16:creationId xmlns:a16="http://schemas.microsoft.com/office/drawing/2014/main" id="{80763B14-3C30-4CF5-ADE5-C689E9CC80B8}"/>
+                <a16:creationId xmlns:a16="http://schemas.microsoft.com/office/drawing/2014/main" id="{D4699662-D18E-4E4D-8DAF-123B3FE2A749}"/>
               </a:ext>
             </a:extLst>
           </p:cNvPr>
@@ -29343,7 +29343,7 @@
           <p:cNvPr id="35" name="">
             <a:extLst xmlns:a="http://schemas.openxmlformats.org/drawingml/2006/main">
               <a:ext uri="{FF2B5EF4-FFF2-40B4-BE49-F238E27FC236}">
-                <a16:creationId xmlns:a16="http://schemas.microsoft.com/office/drawing/2014/main" id="{2AF9C398-A688-4CBF-8963-B3CC9363E4DE}"/>
+                <a16:creationId xmlns:a16="http://schemas.microsoft.com/office/drawing/2014/main" id="{832891CD-75AA-4C7A-8EBB-305CEEA032DF}"/>
               </a:ext>
             </a:extLst>
           </p:cNvPr>
@@ -29395,7 +29395,7 @@
           <p:cNvPr id="36" name="">
             <a:extLst xmlns:a="http://schemas.openxmlformats.org/drawingml/2006/main">
               <a:ext uri="{FF2B5EF4-FFF2-40B4-BE49-F238E27FC236}">
-                <a16:creationId xmlns:a16="http://schemas.microsoft.com/office/drawing/2014/main" id="{799EB5F6-AF9E-4428-9050-C0D52AB3E29E}"/>
+                <a16:creationId xmlns:a16="http://schemas.microsoft.com/office/drawing/2014/main" id="{747E83B6-F509-4BBC-BEE3-A9310E4C7228}"/>
               </a:ext>
             </a:extLst>
           </p:cNvPr>
@@ -29447,7 +29447,7 @@
           <p:cNvPr id="37" name="">
             <a:extLst xmlns:a="http://schemas.openxmlformats.org/drawingml/2006/main">
               <a:ext uri="{FF2B5EF4-FFF2-40B4-BE49-F238E27FC236}">
-                <a16:creationId xmlns:a16="http://schemas.microsoft.com/office/drawing/2014/main" id="{F898EA6B-7B34-4F68-AB23-25EF33ECB6EC}"/>
+                <a16:creationId xmlns:a16="http://schemas.microsoft.com/office/drawing/2014/main" id="{F2D05AFA-E00D-4C99-9617-5B0A6CC2FB58}"/>
               </a:ext>
             </a:extLst>
           </p:cNvPr>
@@ -29499,7 +29499,7 @@
           <p:cNvPr id="38" name="">
             <a:extLst xmlns:a="http://schemas.openxmlformats.org/drawingml/2006/main">
               <a:ext uri="{FF2B5EF4-FFF2-40B4-BE49-F238E27FC236}">
-                <a16:creationId xmlns:a16="http://schemas.microsoft.com/office/drawing/2014/main" id="{FC5E8834-AC9D-4BBE-8403-1C071049EE3F}"/>
+                <a16:creationId xmlns:a16="http://schemas.microsoft.com/office/drawing/2014/main" id="{2E95A535-C14C-4283-B4FD-255E6A03A76C}"/>
               </a:ext>
             </a:extLst>
           </p:cNvPr>
@@ -29530,7 +29530,7 @@
           <p:cNvPr id="39" name="">
             <a:extLst xmlns:a="http://schemas.openxmlformats.org/drawingml/2006/main">
               <a:ext uri="{FF2B5EF4-FFF2-40B4-BE49-F238E27FC236}">
-                <a16:creationId xmlns:a16="http://schemas.microsoft.com/office/drawing/2014/main" id="{F287F46C-7D83-495D-A89D-29D2E0805CC1}"/>
+                <a16:creationId xmlns:a16="http://schemas.microsoft.com/office/drawing/2014/main" id="{3BE69CDB-0A03-477D-87A5-1CF0679278B5}"/>
               </a:ext>
             </a:extLst>
           </p:cNvPr>
@@ -29582,7 +29582,7 @@
           <p:cNvPr id="40" name="">
             <a:extLst xmlns:a="http://schemas.openxmlformats.org/drawingml/2006/main">
               <a:ext uri="{FF2B5EF4-FFF2-40B4-BE49-F238E27FC236}">
-                <a16:creationId xmlns:a16="http://schemas.microsoft.com/office/drawing/2014/main" id="{7FBE3719-079C-47F2-AE5A-26D6D6117077}"/>
+                <a16:creationId xmlns:a16="http://schemas.microsoft.com/office/drawing/2014/main" id="{061BCF9E-D272-48DB-AB48-5F01A07C951D}"/>
               </a:ext>
             </a:extLst>
           </p:cNvPr>
@@ -29634,7 +29634,7 @@
           <p:cNvPr id="41" name="">
             <a:extLst xmlns:a="http://schemas.openxmlformats.org/drawingml/2006/main">
               <a:ext uri="{FF2B5EF4-FFF2-40B4-BE49-F238E27FC236}">
-                <a16:creationId xmlns:a16="http://schemas.microsoft.com/office/drawing/2014/main" id="{83D35601-593B-47FF-AA81-A1D1C8E1E986}"/>
+                <a16:creationId xmlns:a16="http://schemas.microsoft.com/office/drawing/2014/main" id="{627AE86F-3408-44C5-B181-EDD1CD9C5AB3}"/>
               </a:ext>
             </a:extLst>
           </p:cNvPr>
@@ -29684,7 +29684,7 @@
     </p:spTree>
     <p:extLst>
       <p:ext uri="{BB962C8B-B14F-4D97-AF65-F5344CB8AC3E}">
-        <p14:creationId xmlns:p14="http://schemas.microsoft.com/office/powerpoint/2010/main" val="1596936863"/>
+        <p14:creationId xmlns:p14="http://schemas.microsoft.com/office/powerpoint/2010/main" val="1521212706"/>
       </p:ext>
     </p:extLst>
   </p:cSld>
@@ -29715,7 +29715,7 @@
           <p:cNvPr id="76" name="">
             <a:extLst xmlns:a="http://schemas.openxmlformats.org/drawingml/2006/main">
               <a:ext uri="{FF2B5EF4-FFF2-40B4-BE49-F238E27FC236}">
-                <a16:creationId xmlns:a16="http://schemas.microsoft.com/office/drawing/2014/main" id="{891DD64D-F46D-4B6A-8ECC-6551382AC9AD}"/>
+                <a16:creationId xmlns:a16="http://schemas.microsoft.com/office/drawing/2014/main" id="{3A5564ED-749F-46B6-96C4-546A10D670FF}"/>
               </a:ext>
             </a:extLst>
           </p:cNvPr>
@@ -29748,7 +29748,7 @@
           <p:cNvPr id="2" name="">
             <a:extLst xmlns:a="http://schemas.openxmlformats.org/drawingml/2006/main">
               <a:ext uri="{FF2B5EF4-FFF2-40B4-BE49-F238E27FC236}">
-                <a16:creationId xmlns:a16="http://schemas.microsoft.com/office/drawing/2014/main" id="{21ADD064-3384-43B0-A2C3-6E5E83D52441}"/>
+                <a16:creationId xmlns:a16="http://schemas.microsoft.com/office/drawing/2014/main" id="{57991EFA-F62E-407E-9788-7F1EF2F0266E}"/>
               </a:ext>
             </a:extLst>
           </p:cNvPr>
@@ -29779,7 +29779,7 @@
           <p:cNvPr id="3" name="">
             <a:extLst xmlns:a="http://schemas.openxmlformats.org/drawingml/2006/main">
               <a:ext uri="{FF2B5EF4-FFF2-40B4-BE49-F238E27FC236}">
-                <a16:creationId xmlns:a16="http://schemas.microsoft.com/office/drawing/2014/main" id="{1E1B2103-B086-42A4-87D4-A370ACDB209D}"/>
+                <a16:creationId xmlns:a16="http://schemas.microsoft.com/office/drawing/2014/main" id="{D026A2CE-19B3-48BD-B52E-B91D3E6396A1}"/>
               </a:ext>
             </a:extLst>
           </p:cNvPr>
@@ -29831,7 +29831,7 @@
           <p:cNvPr id="4" name="">
             <a:extLst xmlns:a="http://schemas.openxmlformats.org/drawingml/2006/main">
               <a:ext uri="{FF2B5EF4-FFF2-40B4-BE49-F238E27FC236}">
-                <a16:creationId xmlns:a16="http://schemas.microsoft.com/office/drawing/2014/main" id="{3F5DF970-12FB-441E-A246-1B3122529603}"/>
+                <a16:creationId xmlns:a16="http://schemas.microsoft.com/office/drawing/2014/main" id="{F75D6DE0-BA31-47CD-BDE6-92A096B9CDC8}"/>
               </a:ext>
             </a:extLst>
           </p:cNvPr>
@@ -29883,7 +29883,7 @@
           <p:cNvPr id="5" name="">
             <a:extLst xmlns:a="http://schemas.openxmlformats.org/drawingml/2006/main">
               <a:ext uri="{FF2B5EF4-FFF2-40B4-BE49-F238E27FC236}">
-                <a16:creationId xmlns:a16="http://schemas.microsoft.com/office/drawing/2014/main" id="{0E51AAAB-D7E7-4C5B-AEF7-5361AA1CE420}"/>
+                <a16:creationId xmlns:a16="http://schemas.microsoft.com/office/drawing/2014/main" id="{9CD484C6-5CBD-4AE9-8D0B-10B28022C383}"/>
               </a:ext>
             </a:extLst>
           </p:cNvPr>
@@ -29918,7 +29918,7 @@
           <p:nvPr/>
         </p:nvPicPr>
         <p:blipFill>
-          <a:blip xmlns:r="http://schemas.openxmlformats.org/officeDocument/2006/relationships" xmlns:a="http://schemas.openxmlformats.org/drawingml/2006/main" r:embed="R710ba44bc6e64b34"/>
+          <a:blip xmlns:r="http://schemas.openxmlformats.org/officeDocument/2006/relationships" xmlns:a="http://schemas.openxmlformats.org/drawingml/2006/main" r:embed="R113a4b61580e40a0"/>
           <a:stretch xmlns:a="http://schemas.openxmlformats.org/drawingml/2006/main"/>
         </p:blipFill>
         <p:spPr>
@@ -29936,7 +29936,7 @@
           <p:cNvPr id="7" name="">
             <a:extLst xmlns:a="http://schemas.openxmlformats.org/drawingml/2006/main">
               <a:ext uri="{FF2B5EF4-FFF2-40B4-BE49-F238E27FC236}">
-                <a16:creationId xmlns:a16="http://schemas.microsoft.com/office/drawing/2014/main" id="{5D8E6080-280A-4DB1-B839-B30479FBE539}"/>
+                <a16:creationId xmlns:a16="http://schemas.microsoft.com/office/drawing/2014/main" id="{1D06868C-84DD-40F3-89A0-0AF96F0B9FDE}"/>
               </a:ext>
             </a:extLst>
           </p:cNvPr>
@@ -29988,7 +29988,7 @@
           <p:cNvPr id="8" name="">
             <a:extLst xmlns:a="http://schemas.openxmlformats.org/drawingml/2006/main">
               <a:ext uri="{FF2B5EF4-FFF2-40B4-BE49-F238E27FC236}">
-                <a16:creationId xmlns:a16="http://schemas.microsoft.com/office/drawing/2014/main" id="{ED87B3F2-2BE6-4715-A322-2F091F543461}"/>
+                <a16:creationId xmlns:a16="http://schemas.microsoft.com/office/drawing/2014/main" id="{4F262B9A-D059-4C10-8E4B-C62D994F105D}"/>
               </a:ext>
             </a:extLst>
           </p:cNvPr>
@@ -30040,7 +30040,7 @@
           <p:cNvPr id="9" name="">
             <a:extLst xmlns:a="http://schemas.openxmlformats.org/drawingml/2006/main">
               <a:ext uri="{FF2B5EF4-FFF2-40B4-BE49-F238E27FC236}">
-                <a16:creationId xmlns:a16="http://schemas.microsoft.com/office/drawing/2014/main" id="{2E6074C4-575B-40A7-BFB5-2A88F9AFC183}"/>
+                <a16:creationId xmlns:a16="http://schemas.microsoft.com/office/drawing/2014/main" id="{EA3640B5-16BD-4019-846D-825D3FDFB4FC}"/>
               </a:ext>
             </a:extLst>
           </p:cNvPr>
@@ -30092,7 +30092,7 @@
           <p:cNvPr id="10" name="">
             <a:extLst xmlns:a="http://schemas.openxmlformats.org/drawingml/2006/main">
               <a:ext uri="{FF2B5EF4-FFF2-40B4-BE49-F238E27FC236}">
-                <a16:creationId xmlns:a16="http://schemas.microsoft.com/office/drawing/2014/main" id="{761FBC0E-F144-44BB-8D87-1B8AE26CACB9}"/>
+                <a16:creationId xmlns:a16="http://schemas.microsoft.com/office/drawing/2014/main" id="{A329ADED-6AA9-4645-AD89-6C5A9D497E7A}"/>
               </a:ext>
             </a:extLst>
           </p:cNvPr>
@@ -30144,7 +30144,7 @@
           <p:cNvPr id="11" name="">
             <a:extLst xmlns:a="http://schemas.openxmlformats.org/drawingml/2006/main">
               <a:ext uri="{FF2B5EF4-FFF2-40B4-BE49-F238E27FC236}">
-                <a16:creationId xmlns:a16="http://schemas.microsoft.com/office/drawing/2014/main" id="{9644FCE5-7C12-45F1-9AE9-42B7D9D261CA}"/>
+                <a16:creationId xmlns:a16="http://schemas.microsoft.com/office/drawing/2014/main" id="{93F64277-38EA-4FD2-87BA-E3C5F8E181FD}"/>
               </a:ext>
             </a:extLst>
           </p:cNvPr>
@@ -30187,7 +30187,7 @@
           <p:cNvPr id="12" name="">
             <a:extLst xmlns:a="http://schemas.openxmlformats.org/drawingml/2006/main">
               <a:ext uri="{FF2B5EF4-FFF2-40B4-BE49-F238E27FC236}">
-                <a16:creationId xmlns:a16="http://schemas.microsoft.com/office/drawing/2014/main" id="{529FD1B1-46F9-4147-B9DC-4F8836594B7F}"/>
+                <a16:creationId xmlns:a16="http://schemas.microsoft.com/office/drawing/2014/main" id="{D8B48F06-A04D-4E30-B512-227A7A918757}"/>
               </a:ext>
             </a:extLst>
           </p:cNvPr>
@@ -30218,7 +30218,7 @@
           <p:cNvPr id="13" name="">
             <a:extLst xmlns:a="http://schemas.openxmlformats.org/drawingml/2006/main">
               <a:ext uri="{FF2B5EF4-FFF2-40B4-BE49-F238E27FC236}">
-                <a16:creationId xmlns:a16="http://schemas.microsoft.com/office/drawing/2014/main" id="{D30092C0-8C5D-4053-84DD-6E75B4ACD115}"/>
+                <a16:creationId xmlns:a16="http://schemas.microsoft.com/office/drawing/2014/main" id="{31B6E010-4E32-49C1-87A9-CD77C639A5EC}"/>
               </a:ext>
             </a:extLst>
           </p:cNvPr>
@@ -30249,7 +30249,7 @@
           <p:cNvPr id="14" name="">
             <a:extLst xmlns:a="http://schemas.openxmlformats.org/drawingml/2006/main">
               <a:ext uri="{FF2B5EF4-FFF2-40B4-BE49-F238E27FC236}">
-                <a16:creationId xmlns:a16="http://schemas.microsoft.com/office/drawing/2014/main" id="{4BA30988-B375-4059-A723-88CC9F207430}"/>
+                <a16:creationId xmlns:a16="http://schemas.microsoft.com/office/drawing/2014/main" id="{D65B69D9-8A42-4282-A0EC-E329A6B20264}"/>
               </a:ext>
             </a:extLst>
           </p:cNvPr>
@@ -30292,7 +30292,7 @@
           <p:cNvPr id="15" name="">
             <a:extLst xmlns:a="http://schemas.openxmlformats.org/drawingml/2006/main">
               <a:ext uri="{FF2B5EF4-FFF2-40B4-BE49-F238E27FC236}">
-                <a16:creationId xmlns:a16="http://schemas.microsoft.com/office/drawing/2014/main" id="{ABD04D0E-8B2B-4477-9BFC-FAD276D37847}"/>
+                <a16:creationId xmlns:a16="http://schemas.microsoft.com/office/drawing/2014/main" id="{B48E2AF9-8FC9-4245-9633-6D4D421045BA}"/>
               </a:ext>
             </a:extLst>
           </p:cNvPr>
@@ -30323,7 +30323,7 @@
           <p:cNvPr id="16" name="">
             <a:extLst xmlns:a="http://schemas.openxmlformats.org/drawingml/2006/main">
               <a:ext uri="{FF2B5EF4-FFF2-40B4-BE49-F238E27FC236}">
-                <a16:creationId xmlns:a16="http://schemas.microsoft.com/office/drawing/2014/main" id="{0520E8A7-36D0-4B28-886B-32B997B4FFB1}"/>
+                <a16:creationId xmlns:a16="http://schemas.microsoft.com/office/drawing/2014/main" id="{C2ED3206-5538-47D6-8D3A-03AD5B2126C4}"/>
               </a:ext>
             </a:extLst>
           </p:cNvPr>
@@ -30354,7 +30354,7 @@
           <p:cNvPr id="17" name="">
             <a:extLst xmlns:a="http://schemas.openxmlformats.org/drawingml/2006/main">
               <a:ext uri="{FF2B5EF4-FFF2-40B4-BE49-F238E27FC236}">
-                <a16:creationId xmlns:a16="http://schemas.microsoft.com/office/drawing/2014/main" id="{A72EC4C1-DD2F-488F-B571-39C41FFF722A}"/>
+                <a16:creationId xmlns:a16="http://schemas.microsoft.com/office/drawing/2014/main" id="{3CC4D8E6-D52F-4BB3-BD47-2CA4D1D1D770}"/>
               </a:ext>
             </a:extLst>
           </p:cNvPr>
@@ -30406,7 +30406,7 @@
           <p:cNvPr id="18" name="">
             <a:extLst xmlns:a="http://schemas.openxmlformats.org/drawingml/2006/main">
               <a:ext uri="{FF2B5EF4-FFF2-40B4-BE49-F238E27FC236}">
-                <a16:creationId xmlns:a16="http://schemas.microsoft.com/office/drawing/2014/main" id="{90B94F66-6DC6-4CA4-B7CD-A90F157E3AD7}"/>
+                <a16:creationId xmlns:a16="http://schemas.microsoft.com/office/drawing/2014/main" id="{5DB665BF-9391-4425-8E3A-A0181E3198CE}"/>
               </a:ext>
             </a:extLst>
           </p:cNvPr>
@@ -30458,7 +30458,7 @@
           <p:cNvPr id="19" name="">
             <a:extLst xmlns:a="http://schemas.openxmlformats.org/drawingml/2006/main">
               <a:ext uri="{FF2B5EF4-FFF2-40B4-BE49-F238E27FC236}">
-                <a16:creationId xmlns:a16="http://schemas.microsoft.com/office/drawing/2014/main" id="{674CD22D-75E7-4117-B659-8E58A4CD8F6E}"/>
+                <a16:creationId xmlns:a16="http://schemas.microsoft.com/office/drawing/2014/main" id="{973465AD-FACA-40C0-8571-7FA4280401E4}"/>
               </a:ext>
             </a:extLst>
           </p:cNvPr>
@@ -30510,7 +30510,7 @@
           <p:cNvPr id="20" name="">
             <a:extLst xmlns:a="http://schemas.openxmlformats.org/drawingml/2006/main">
               <a:ext uri="{FF2B5EF4-FFF2-40B4-BE49-F238E27FC236}">
-                <a16:creationId xmlns:a16="http://schemas.microsoft.com/office/drawing/2014/main" id="{8812C02F-0AB5-4148-AD33-4AEF9A0234CD}"/>
+                <a16:creationId xmlns:a16="http://schemas.microsoft.com/office/drawing/2014/main" id="{03717B73-D8B1-4617-9161-8A873353B29C}"/>
               </a:ext>
             </a:extLst>
           </p:cNvPr>
@@ -30553,7 +30553,7 @@
           <p:cNvPr id="21" name="">
             <a:extLst xmlns:a="http://schemas.openxmlformats.org/drawingml/2006/main">
               <a:ext uri="{FF2B5EF4-FFF2-40B4-BE49-F238E27FC236}">
-                <a16:creationId xmlns:a16="http://schemas.microsoft.com/office/drawing/2014/main" id="{5E136AB4-4F0E-49F7-B1DD-691B0F247DF4}"/>
+                <a16:creationId xmlns:a16="http://schemas.microsoft.com/office/drawing/2014/main" id="{8A5EEBEB-C7C7-4E89-AC1D-576D346C9AA6}"/>
               </a:ext>
             </a:extLst>
           </p:cNvPr>
@@ -30584,7 +30584,7 @@
           <p:cNvPr id="22" name="">
             <a:extLst xmlns:a="http://schemas.openxmlformats.org/drawingml/2006/main">
               <a:ext uri="{FF2B5EF4-FFF2-40B4-BE49-F238E27FC236}">
-                <a16:creationId xmlns:a16="http://schemas.microsoft.com/office/drawing/2014/main" id="{EF78E227-8E98-4090-BE92-DFEFBE720F17}"/>
+                <a16:creationId xmlns:a16="http://schemas.microsoft.com/office/drawing/2014/main" id="{DB2E0029-9EEB-4301-A669-928E4929C3F8}"/>
               </a:ext>
             </a:extLst>
           </p:cNvPr>
@@ -30615,7 +30615,7 @@
           <p:cNvPr id="23" name="">
             <a:extLst xmlns:a="http://schemas.openxmlformats.org/drawingml/2006/main">
               <a:ext uri="{FF2B5EF4-FFF2-40B4-BE49-F238E27FC236}">
-                <a16:creationId xmlns:a16="http://schemas.microsoft.com/office/drawing/2014/main" id="{0826C740-02EA-4EBD-90C7-4B8C3B068D65}"/>
+                <a16:creationId xmlns:a16="http://schemas.microsoft.com/office/drawing/2014/main" id="{E63211F2-12D0-46C0-8E22-1D6F4827D1AA}"/>
               </a:ext>
             </a:extLst>
           </p:cNvPr>
@@ -30667,7 +30667,7 @@
           <p:cNvPr id="24" name="">
             <a:extLst xmlns:a="http://schemas.openxmlformats.org/drawingml/2006/main">
               <a:ext uri="{FF2B5EF4-FFF2-40B4-BE49-F238E27FC236}">
-                <a16:creationId xmlns:a16="http://schemas.microsoft.com/office/drawing/2014/main" id="{A961AE0D-33FD-403D-BE90-6FBC5A92A169}"/>
+                <a16:creationId xmlns:a16="http://schemas.microsoft.com/office/drawing/2014/main" id="{D6E5C193-96E4-41DE-A7CA-EC3FCBFF0E2D}"/>
               </a:ext>
             </a:extLst>
           </p:cNvPr>
@@ -30719,7 +30719,7 @@
           <p:cNvPr id="25" name="">
             <a:extLst xmlns:a="http://schemas.openxmlformats.org/drawingml/2006/main">
               <a:ext uri="{FF2B5EF4-FFF2-40B4-BE49-F238E27FC236}">
-                <a16:creationId xmlns:a16="http://schemas.microsoft.com/office/drawing/2014/main" id="{AA8C920F-7A27-496F-9600-F14C48DA4A9D}"/>
+                <a16:creationId xmlns:a16="http://schemas.microsoft.com/office/drawing/2014/main" id="{04917B6E-AC75-4B15-A6C9-C7C517F8E277}"/>
               </a:ext>
             </a:extLst>
           </p:cNvPr>
@@ -30771,7 +30771,7 @@
           <p:cNvPr id="26" name="">
             <a:extLst xmlns:a="http://schemas.openxmlformats.org/drawingml/2006/main">
               <a:ext uri="{FF2B5EF4-FFF2-40B4-BE49-F238E27FC236}">
-                <a16:creationId xmlns:a16="http://schemas.microsoft.com/office/drawing/2014/main" id="{71A89CE4-A237-4C07-87FD-4D1F2ADD3F66}"/>
+                <a16:creationId xmlns:a16="http://schemas.microsoft.com/office/drawing/2014/main" id="{09813807-3FD0-4EFB-91C8-12A791819FC5}"/>
               </a:ext>
             </a:extLst>
           </p:cNvPr>
@@ -30814,7 +30814,7 @@
           <p:cNvPr id="27" name="">
             <a:extLst xmlns:a="http://schemas.openxmlformats.org/drawingml/2006/main">
               <a:ext uri="{FF2B5EF4-FFF2-40B4-BE49-F238E27FC236}">
-                <a16:creationId xmlns:a16="http://schemas.microsoft.com/office/drawing/2014/main" id="{6C227B6C-4207-4BC9-B0B6-B5DCE94EF33E}"/>
+                <a16:creationId xmlns:a16="http://schemas.microsoft.com/office/drawing/2014/main" id="{0F97F793-C065-443C-8CB0-655CA12F931A}"/>
               </a:ext>
             </a:extLst>
           </p:cNvPr>
@@ -30845,7 +30845,7 @@
           <p:cNvPr id="28" name="">
             <a:extLst xmlns:a="http://schemas.openxmlformats.org/drawingml/2006/main">
               <a:ext uri="{FF2B5EF4-FFF2-40B4-BE49-F238E27FC236}">
-                <a16:creationId xmlns:a16="http://schemas.microsoft.com/office/drawing/2014/main" id="{083E2264-7E91-44E0-A3B6-D3913A324265}"/>
+                <a16:creationId xmlns:a16="http://schemas.microsoft.com/office/drawing/2014/main" id="{BB23B199-F81B-4815-9E6B-B3AE9DE3565F}"/>
               </a:ext>
             </a:extLst>
           </p:cNvPr>
@@ -30876,7 +30876,7 @@
           <p:cNvPr id="29" name="">
             <a:extLst xmlns:a="http://schemas.openxmlformats.org/drawingml/2006/main">
               <a:ext uri="{FF2B5EF4-FFF2-40B4-BE49-F238E27FC236}">
-                <a16:creationId xmlns:a16="http://schemas.microsoft.com/office/drawing/2014/main" id="{992B25BD-E9BC-417E-97C3-EEBE8BECA78F}"/>
+                <a16:creationId xmlns:a16="http://schemas.microsoft.com/office/drawing/2014/main" id="{23D7B900-6C49-4AC1-A47D-AA36716552EE}"/>
               </a:ext>
             </a:extLst>
           </p:cNvPr>
@@ -30928,7 +30928,7 @@
           <p:cNvPr id="30" name="">
             <a:extLst xmlns:a="http://schemas.openxmlformats.org/drawingml/2006/main">
               <a:ext uri="{FF2B5EF4-FFF2-40B4-BE49-F238E27FC236}">
-                <a16:creationId xmlns:a16="http://schemas.microsoft.com/office/drawing/2014/main" id="{64F13353-FB8B-415F-8980-0CA974A32369}"/>
+                <a16:creationId xmlns:a16="http://schemas.microsoft.com/office/drawing/2014/main" id="{311F1055-3865-4A82-A22B-4004196817DA}"/>
               </a:ext>
             </a:extLst>
           </p:cNvPr>
@@ -30980,7 +30980,7 @@
           <p:cNvPr id="31" name="">
             <a:extLst xmlns:a="http://schemas.openxmlformats.org/drawingml/2006/main">
               <a:ext uri="{FF2B5EF4-FFF2-40B4-BE49-F238E27FC236}">
-                <a16:creationId xmlns:a16="http://schemas.microsoft.com/office/drawing/2014/main" id="{A705C3F4-6F23-407F-A07A-D2FB721D401A}"/>
+                <a16:creationId xmlns:a16="http://schemas.microsoft.com/office/drawing/2014/main" id="{5BA5ED0C-0397-49AA-BD58-7F06B147C8C6}"/>
               </a:ext>
             </a:extLst>
           </p:cNvPr>
@@ -31032,7 +31032,7 @@
           <p:cNvPr id="32" name="">
             <a:extLst xmlns:a="http://schemas.openxmlformats.org/drawingml/2006/main">
               <a:ext uri="{FF2B5EF4-FFF2-40B4-BE49-F238E27FC236}">
-                <a16:creationId xmlns:a16="http://schemas.microsoft.com/office/drawing/2014/main" id="{3FC1B6D6-52CB-4BDD-84F7-A01237D2C8F7}"/>
+                <a16:creationId xmlns:a16="http://schemas.microsoft.com/office/drawing/2014/main" id="{280FD15D-09D0-4CB9-831D-F90946E0C946}"/>
               </a:ext>
             </a:extLst>
           </p:cNvPr>
@@ -31075,7 +31075,7 @@
           <p:cNvPr id="33" name="">
             <a:extLst xmlns:a="http://schemas.openxmlformats.org/drawingml/2006/main">
               <a:ext uri="{FF2B5EF4-FFF2-40B4-BE49-F238E27FC236}">
-                <a16:creationId xmlns:a16="http://schemas.microsoft.com/office/drawing/2014/main" id="{8A090F54-263F-4F6E-B61E-1FA60D5A8D3D}"/>
+                <a16:creationId xmlns:a16="http://schemas.microsoft.com/office/drawing/2014/main" id="{CC69A568-4A83-425D-86EE-49B83A18F0A2}"/>
               </a:ext>
             </a:extLst>
           </p:cNvPr>
@@ -31106,7 +31106,7 @@
           <p:cNvPr id="34" name="">
             <a:extLst xmlns:a="http://schemas.openxmlformats.org/drawingml/2006/main">
               <a:ext uri="{FF2B5EF4-FFF2-40B4-BE49-F238E27FC236}">
-                <a16:creationId xmlns:a16="http://schemas.microsoft.com/office/drawing/2014/main" id="{9F7CE0E4-5768-4554-9188-43DFBB246F9A}"/>
+                <a16:creationId xmlns:a16="http://schemas.microsoft.com/office/drawing/2014/main" id="{BF5CDB17-9749-4ABF-BA9F-C491E05015A5}"/>
               </a:ext>
             </a:extLst>
           </p:cNvPr>
@@ -31137,7 +31137,7 @@
           <p:cNvPr id="35" name="">
             <a:extLst xmlns:a="http://schemas.openxmlformats.org/drawingml/2006/main">
               <a:ext uri="{FF2B5EF4-FFF2-40B4-BE49-F238E27FC236}">
-                <a16:creationId xmlns:a16="http://schemas.microsoft.com/office/drawing/2014/main" id="{E5325532-46B5-4327-8FA8-67E417494E95}"/>
+                <a16:creationId xmlns:a16="http://schemas.microsoft.com/office/drawing/2014/main" id="{A105ACF2-8B46-4227-8401-6148BB292718}"/>
               </a:ext>
             </a:extLst>
           </p:cNvPr>
@@ -31189,7 +31189,7 @@
           <p:cNvPr id="36" name="">
             <a:extLst xmlns:a="http://schemas.openxmlformats.org/drawingml/2006/main">
               <a:ext uri="{FF2B5EF4-FFF2-40B4-BE49-F238E27FC236}">
-                <a16:creationId xmlns:a16="http://schemas.microsoft.com/office/drawing/2014/main" id="{92F08980-D9A3-4C19-85C4-81A4CA901CBD}"/>
+                <a16:creationId xmlns:a16="http://schemas.microsoft.com/office/drawing/2014/main" id="{0BD3B0DE-693D-4B51-A54D-30E84CD808C0}"/>
               </a:ext>
             </a:extLst>
           </p:cNvPr>
@@ -31241,7 +31241,7 @@
           <p:cNvPr id="37" name="">
             <a:extLst xmlns:a="http://schemas.openxmlformats.org/drawingml/2006/main">
               <a:ext uri="{FF2B5EF4-FFF2-40B4-BE49-F238E27FC236}">
-                <a16:creationId xmlns:a16="http://schemas.microsoft.com/office/drawing/2014/main" id="{8E87AEEB-4669-4CA4-8889-F2F91F6E0034}"/>
+                <a16:creationId xmlns:a16="http://schemas.microsoft.com/office/drawing/2014/main" id="{B91E5F87-8EDE-4436-A198-CDE1459463D6}"/>
               </a:ext>
             </a:extLst>
           </p:cNvPr>
@@ -31297,10 +31297,10 @@
           <p:nvPr/>
         </p:nvPicPr>
         <p:blipFill>
-          <a:blip xmlns:r="http://schemas.openxmlformats.org/officeDocument/2006/relationships" xmlns:a="http://schemas.openxmlformats.org/drawingml/2006/main" r:embed="R174d70c600f94a50">
+          <a:blip xmlns:r="http://schemas.openxmlformats.org/officeDocument/2006/relationships" xmlns:a="http://schemas.openxmlformats.org/drawingml/2006/main" r:embed="R3e67d932567242e5">
             <a:extLst>
               <a:ext uri="{96DAC541-7B7A-43D3-8B79-37D633B846F1}">
-                <asvg:svgBlip xmlns:asvg="http://schemas.microsoft.com/office/drawing/2016/SVG/main" r:embed="Rec4729cb58aa4d76"/>
+                <asvg:svgBlip xmlns:asvg="http://schemas.microsoft.com/office/drawing/2016/SVG/main" r:embed="Rbf423caca320488f"/>
               </a:ext>
             </a:extLst>
           </a:blip>
@@ -31321,7 +31321,7 @@
           <p:cNvPr id="39" name="">
             <a:extLst xmlns:a="http://schemas.openxmlformats.org/drawingml/2006/main">
               <a:ext uri="{FF2B5EF4-FFF2-40B4-BE49-F238E27FC236}">
-                <a16:creationId xmlns:a16="http://schemas.microsoft.com/office/drawing/2014/main" id="{A997BE34-6485-4C35-A75E-318EEA952FA5}"/>
+                <a16:creationId xmlns:a16="http://schemas.microsoft.com/office/drawing/2014/main" id="{613F6E8C-0B8E-454E-9704-E1B3FF317301}"/>
               </a:ext>
             </a:extLst>
           </p:cNvPr>
@@ -31373,7 +31373,7 @@
           <p:cNvPr id="40" name="">
             <a:extLst xmlns:a="http://schemas.openxmlformats.org/drawingml/2006/main">
               <a:ext uri="{FF2B5EF4-FFF2-40B4-BE49-F238E27FC236}">
-                <a16:creationId xmlns:a16="http://schemas.microsoft.com/office/drawing/2014/main" id="{1B0E64FD-840E-4ABA-B577-D9F104FC14A0}"/>
+                <a16:creationId xmlns:a16="http://schemas.microsoft.com/office/drawing/2014/main" id="{30FB1CFE-6264-47B1-A450-8305122DDD98}"/>
               </a:ext>
             </a:extLst>
           </p:cNvPr>
@@ -31425,7 +31425,7 @@
           <p:cNvPr id="41" name="">
             <a:extLst xmlns:a="http://schemas.openxmlformats.org/drawingml/2006/main">
               <a:ext uri="{FF2B5EF4-FFF2-40B4-BE49-F238E27FC236}">
-                <a16:creationId xmlns:a16="http://schemas.microsoft.com/office/drawing/2014/main" id="{037F9183-C3F5-4EB2-8E9A-D4F3569BE582}"/>
+                <a16:creationId xmlns:a16="http://schemas.microsoft.com/office/drawing/2014/main" id="{FEC6C106-1983-42A4-B858-3454131B33EC}"/>
               </a:ext>
             </a:extLst>
           </p:cNvPr>
@@ -31468,7 +31468,7 @@
           <p:cNvPr id="42" name="">
             <a:extLst xmlns:a="http://schemas.openxmlformats.org/drawingml/2006/main">
               <a:ext uri="{FF2B5EF4-FFF2-40B4-BE49-F238E27FC236}">
-                <a16:creationId xmlns:a16="http://schemas.microsoft.com/office/drawing/2014/main" id="{95DB6292-9CFD-472C-A778-1110C1EE2AA8}"/>
+                <a16:creationId xmlns:a16="http://schemas.microsoft.com/office/drawing/2014/main" id="{A8117BE6-B7FE-42FF-8D4E-66DEEF7D7817}"/>
               </a:ext>
             </a:extLst>
           </p:cNvPr>
@@ -31499,7 +31499,7 @@
           <p:cNvPr id="43" name="">
             <a:extLst xmlns:a="http://schemas.openxmlformats.org/drawingml/2006/main">
               <a:ext uri="{FF2B5EF4-FFF2-40B4-BE49-F238E27FC236}">
-                <a16:creationId xmlns:a16="http://schemas.microsoft.com/office/drawing/2014/main" id="{D4F31BBE-D735-4664-B683-978302F50969}"/>
+                <a16:creationId xmlns:a16="http://schemas.microsoft.com/office/drawing/2014/main" id="{0A3194B5-8C95-410F-BF0D-B6E04683B6DE}"/>
               </a:ext>
             </a:extLst>
           </p:cNvPr>
@@ -31530,7 +31530,7 @@
           <p:cNvPr id="44" name="">
             <a:extLst xmlns:a="http://schemas.openxmlformats.org/drawingml/2006/main">
               <a:ext uri="{FF2B5EF4-FFF2-40B4-BE49-F238E27FC236}">
-                <a16:creationId xmlns:a16="http://schemas.microsoft.com/office/drawing/2014/main" id="{9F997B99-9472-453D-8236-0127F1570BB0}"/>
+                <a16:creationId xmlns:a16="http://schemas.microsoft.com/office/drawing/2014/main" id="{1FF44BC8-286E-4C1B-B37B-078BAAD2DF98}"/>
               </a:ext>
             </a:extLst>
           </p:cNvPr>
@@ -31573,7 +31573,7 @@
           <p:cNvPr id="45" name="">
             <a:extLst xmlns:a="http://schemas.openxmlformats.org/drawingml/2006/main">
               <a:ext uri="{FF2B5EF4-FFF2-40B4-BE49-F238E27FC236}">
-                <a16:creationId xmlns:a16="http://schemas.microsoft.com/office/drawing/2014/main" id="{EAD9644D-4F57-44CA-A729-5E96CD57B05C}"/>
+                <a16:creationId xmlns:a16="http://schemas.microsoft.com/office/drawing/2014/main" id="{B2EFEFB3-09A5-48A3-8DEA-327984744B67}"/>
               </a:ext>
             </a:extLst>
           </p:cNvPr>
@@ -31604,7 +31604,7 @@
           <p:cNvPr id="46" name="">
             <a:extLst xmlns:a="http://schemas.openxmlformats.org/drawingml/2006/main">
               <a:ext uri="{FF2B5EF4-FFF2-40B4-BE49-F238E27FC236}">
-                <a16:creationId xmlns:a16="http://schemas.microsoft.com/office/drawing/2014/main" id="{C336CDF2-5A0A-49D6-ABC4-189824F96F7C}"/>
+                <a16:creationId xmlns:a16="http://schemas.microsoft.com/office/drawing/2014/main" id="{22345B08-5CEF-4EEA-ADB0-A7991FA17315}"/>
               </a:ext>
             </a:extLst>
           </p:cNvPr>
@@ -31635,7 +31635,7 @@
           <p:cNvPr id="47" name="">
             <a:extLst xmlns:a="http://schemas.openxmlformats.org/drawingml/2006/main">
               <a:ext uri="{FF2B5EF4-FFF2-40B4-BE49-F238E27FC236}">
-                <a16:creationId xmlns:a16="http://schemas.microsoft.com/office/drawing/2014/main" id="{40F94E93-5B67-4784-A461-63ACB779AEFC}"/>
+                <a16:creationId xmlns:a16="http://schemas.microsoft.com/office/drawing/2014/main" id="{3FDACC61-B99B-4961-AE0C-9ACC99EA3BCF}"/>
               </a:ext>
             </a:extLst>
           </p:cNvPr>
@@ -31687,7 +31687,7 @@
           <p:cNvPr id="48" name="">
             <a:extLst xmlns:a="http://schemas.openxmlformats.org/drawingml/2006/main">
               <a:ext uri="{FF2B5EF4-FFF2-40B4-BE49-F238E27FC236}">
-                <a16:creationId xmlns:a16="http://schemas.microsoft.com/office/drawing/2014/main" id="{B3AC0F84-419E-4EC3-8E51-0E86C1899990}"/>
+                <a16:creationId xmlns:a16="http://schemas.microsoft.com/office/drawing/2014/main" id="{F277DD54-BD4D-426B-9C43-27521B6C3992}"/>
               </a:ext>
             </a:extLst>
           </p:cNvPr>
@@ -31720,7 +31720,7 @@
           <p:cNvPr id="49" name="">
             <a:extLst xmlns:a="http://schemas.openxmlformats.org/drawingml/2006/main">
               <a:ext uri="{FF2B5EF4-FFF2-40B4-BE49-F238E27FC236}">
-                <a16:creationId xmlns:a16="http://schemas.microsoft.com/office/drawing/2014/main" id="{C24D47FA-DB4A-4A20-A1A7-7EA6C787AB24}"/>
+                <a16:creationId xmlns:a16="http://schemas.microsoft.com/office/drawing/2014/main" id="{1C71C3D8-8656-4AB4-88E1-F3347BBF120B}"/>
               </a:ext>
             </a:extLst>
           </p:cNvPr>
@@ -31772,7 +31772,7 @@
           <p:cNvPr id="50" name="">
             <a:extLst xmlns:a="http://schemas.openxmlformats.org/drawingml/2006/main">
               <a:ext uri="{FF2B5EF4-FFF2-40B4-BE49-F238E27FC236}">
-                <a16:creationId xmlns:a16="http://schemas.microsoft.com/office/drawing/2014/main" id="{C09E39E4-0E1D-4677-9FA3-E3FA2693E546}"/>
+                <a16:creationId xmlns:a16="http://schemas.microsoft.com/office/drawing/2014/main" id="{FDF46703-9E88-4E1F-897C-B8908081FCA0}"/>
               </a:ext>
             </a:extLst>
           </p:cNvPr>
@@ -31824,7 +31824,7 @@
           <p:cNvPr id="51" name="">
             <a:extLst xmlns:a="http://schemas.openxmlformats.org/drawingml/2006/main">
               <a:ext uri="{FF2B5EF4-FFF2-40B4-BE49-F238E27FC236}">
-                <a16:creationId xmlns:a16="http://schemas.microsoft.com/office/drawing/2014/main" id="{84AF2AB2-F08A-467B-9B60-293DB6BE6C3A}"/>
+                <a16:creationId xmlns:a16="http://schemas.microsoft.com/office/drawing/2014/main" id="{C70395FE-C1AD-4473-AEC7-47F8CF1D80A7}"/>
               </a:ext>
             </a:extLst>
           </p:cNvPr>
@@ -31876,7 +31876,7 @@
           <p:cNvPr id="52" name="">
             <a:extLst xmlns:a="http://schemas.openxmlformats.org/drawingml/2006/main">
               <a:ext uri="{FF2B5EF4-FFF2-40B4-BE49-F238E27FC236}">
-                <a16:creationId xmlns:a16="http://schemas.microsoft.com/office/drawing/2014/main" id="{042D552B-9F61-43EE-AD3F-93A27DAF7E5B}"/>
+                <a16:creationId xmlns:a16="http://schemas.microsoft.com/office/drawing/2014/main" id="{2AD19CDE-0A43-4876-9EFF-36BE74292A92}"/>
               </a:ext>
             </a:extLst>
           </p:cNvPr>
@@ -31919,7 +31919,7 @@
           <p:cNvPr id="53" name="">
             <a:extLst xmlns:a="http://schemas.openxmlformats.org/drawingml/2006/main">
               <a:ext uri="{FF2B5EF4-FFF2-40B4-BE49-F238E27FC236}">
-                <a16:creationId xmlns:a16="http://schemas.microsoft.com/office/drawing/2014/main" id="{DF622290-54ED-4D02-9C2C-122B58520634}"/>
+                <a16:creationId xmlns:a16="http://schemas.microsoft.com/office/drawing/2014/main" id="{560DFCA1-14AE-4F44-AAF3-60AE1C4B42A3}"/>
               </a:ext>
             </a:extLst>
           </p:cNvPr>
@@ -31950,7 +31950,7 @@
           <p:cNvPr id="54" name="">
             <a:extLst xmlns:a="http://schemas.openxmlformats.org/drawingml/2006/main">
               <a:ext uri="{FF2B5EF4-FFF2-40B4-BE49-F238E27FC236}">
-                <a16:creationId xmlns:a16="http://schemas.microsoft.com/office/drawing/2014/main" id="{7BF300DA-21A7-40F1-9DA5-D0814AF0AECA}"/>
+                <a16:creationId xmlns:a16="http://schemas.microsoft.com/office/drawing/2014/main" id="{16B25C9C-FC4A-4847-8ADF-D806F71090DA}"/>
               </a:ext>
             </a:extLst>
           </p:cNvPr>
@@ -31981,7 +31981,7 @@
           <p:cNvPr id="55" name="">
             <a:extLst xmlns:a="http://schemas.openxmlformats.org/drawingml/2006/main">
               <a:ext uri="{FF2B5EF4-FFF2-40B4-BE49-F238E27FC236}">
-                <a16:creationId xmlns:a16="http://schemas.microsoft.com/office/drawing/2014/main" id="{CEBBD94D-CF83-43A5-9D46-D513609574F4}"/>
+                <a16:creationId xmlns:a16="http://schemas.microsoft.com/office/drawing/2014/main" id="{DAC201D8-B9F6-447E-BC8F-0A9F3C2C740A}"/>
               </a:ext>
             </a:extLst>
           </p:cNvPr>
@@ -32033,7 +32033,7 @@
           <p:cNvPr id="56" name="">
             <a:extLst xmlns:a="http://schemas.openxmlformats.org/drawingml/2006/main">
               <a:ext uri="{FF2B5EF4-FFF2-40B4-BE49-F238E27FC236}">
-                <a16:creationId xmlns:a16="http://schemas.microsoft.com/office/drawing/2014/main" id="{DD77A5DC-6F93-4FF3-9248-A98CA0394196}"/>
+                <a16:creationId xmlns:a16="http://schemas.microsoft.com/office/drawing/2014/main" id="{01B7C994-C613-47E2-871A-01C3B9993A65}"/>
               </a:ext>
             </a:extLst>
           </p:cNvPr>
@@ -32066,7 +32066,7 @@
           <p:cNvPr id="57" name="">
             <a:extLst xmlns:a="http://schemas.openxmlformats.org/drawingml/2006/main">
               <a:ext uri="{FF2B5EF4-FFF2-40B4-BE49-F238E27FC236}">
-                <a16:creationId xmlns:a16="http://schemas.microsoft.com/office/drawing/2014/main" id="{ABB53B22-2BD9-46A0-8E7B-5289AA41047C}"/>
+                <a16:creationId xmlns:a16="http://schemas.microsoft.com/office/drawing/2014/main" id="{F52F0B10-8C43-469C-9CAF-22246FF9B81A}"/>
               </a:ext>
             </a:extLst>
           </p:cNvPr>
@@ -32118,7 +32118,7 @@
           <p:cNvPr id="58" name="">
             <a:extLst xmlns:a="http://schemas.openxmlformats.org/drawingml/2006/main">
               <a:ext uri="{FF2B5EF4-FFF2-40B4-BE49-F238E27FC236}">
-                <a16:creationId xmlns:a16="http://schemas.microsoft.com/office/drawing/2014/main" id="{D93CD1CD-6FB9-435C-A6D4-1405361270A7}"/>
+                <a16:creationId xmlns:a16="http://schemas.microsoft.com/office/drawing/2014/main" id="{6D204133-B04D-4E71-B79A-08408421E11A}"/>
               </a:ext>
             </a:extLst>
           </p:cNvPr>
@@ -32170,7 +32170,7 @@
           <p:cNvPr id="59" name="">
             <a:extLst xmlns:a="http://schemas.openxmlformats.org/drawingml/2006/main">
               <a:ext uri="{FF2B5EF4-FFF2-40B4-BE49-F238E27FC236}">
-                <a16:creationId xmlns:a16="http://schemas.microsoft.com/office/drawing/2014/main" id="{685B9177-D600-4108-BABC-28B20E9DB760}"/>
+                <a16:creationId xmlns:a16="http://schemas.microsoft.com/office/drawing/2014/main" id="{60C4D050-70F1-4185-BA03-19CBB2594134}"/>
               </a:ext>
             </a:extLst>
           </p:cNvPr>
@@ -32222,7 +32222,7 @@
           <p:cNvPr id="60" name="">
             <a:extLst xmlns:a="http://schemas.openxmlformats.org/drawingml/2006/main">
               <a:ext uri="{FF2B5EF4-FFF2-40B4-BE49-F238E27FC236}">
-                <a16:creationId xmlns:a16="http://schemas.microsoft.com/office/drawing/2014/main" id="{971FC622-4030-4ABF-8E06-51CE9FFE3687}"/>
+                <a16:creationId xmlns:a16="http://schemas.microsoft.com/office/drawing/2014/main" id="{A26E9812-5079-480C-BC72-25E14E2D6A4E}"/>
               </a:ext>
             </a:extLst>
           </p:cNvPr>
@@ -32265,7 +32265,7 @@
           <p:cNvPr id="61" name="">
             <a:extLst xmlns:a="http://schemas.openxmlformats.org/drawingml/2006/main">
               <a:ext uri="{FF2B5EF4-FFF2-40B4-BE49-F238E27FC236}">
-                <a16:creationId xmlns:a16="http://schemas.microsoft.com/office/drawing/2014/main" id="{663CC04C-5112-4CB3-AD71-8B9E0553074E}"/>
+                <a16:creationId xmlns:a16="http://schemas.microsoft.com/office/drawing/2014/main" id="{2E21F79F-BFFF-4064-8D24-255CA51A98C0}"/>
               </a:ext>
             </a:extLst>
           </p:cNvPr>
@@ -32296,7 +32296,7 @@
           <p:cNvPr id="62" name="">
             <a:extLst xmlns:a="http://schemas.openxmlformats.org/drawingml/2006/main">
               <a:ext uri="{FF2B5EF4-FFF2-40B4-BE49-F238E27FC236}">
-                <a16:creationId xmlns:a16="http://schemas.microsoft.com/office/drawing/2014/main" id="{CD024BAC-1C91-4CE3-BD4B-8072F30A63F4}"/>
+                <a16:creationId xmlns:a16="http://schemas.microsoft.com/office/drawing/2014/main" id="{43D3026A-05DD-4E20-9EE5-49D9E45E1660}"/>
               </a:ext>
             </a:extLst>
           </p:cNvPr>
@@ -32327,7 +32327,7 @@
           <p:cNvPr id="63" name="">
             <a:extLst xmlns:a="http://schemas.openxmlformats.org/drawingml/2006/main">
               <a:ext uri="{FF2B5EF4-FFF2-40B4-BE49-F238E27FC236}">
-                <a16:creationId xmlns:a16="http://schemas.microsoft.com/office/drawing/2014/main" id="{971E0E0B-017B-4148-9BE2-D4F9C0E6A47D}"/>
+                <a16:creationId xmlns:a16="http://schemas.microsoft.com/office/drawing/2014/main" id="{59045321-9048-40AE-8C65-1FFF2D69FDCC}"/>
               </a:ext>
             </a:extLst>
           </p:cNvPr>
@@ -32379,7 +32379,7 @@
           <p:cNvPr id="64" name="">
             <a:extLst xmlns:a="http://schemas.openxmlformats.org/drawingml/2006/main">
               <a:ext uri="{FF2B5EF4-FFF2-40B4-BE49-F238E27FC236}">
-                <a16:creationId xmlns:a16="http://schemas.microsoft.com/office/drawing/2014/main" id="{F8752C55-A2AA-4C18-8786-82DB489E967D}"/>
+                <a16:creationId xmlns:a16="http://schemas.microsoft.com/office/drawing/2014/main" id="{8B8D260D-88DF-43DD-9CC8-BFBCE3A1BD4F}"/>
               </a:ext>
             </a:extLst>
           </p:cNvPr>
@@ -32412,7 +32412,7 @@
           <p:cNvPr id="65" name="">
             <a:extLst xmlns:a="http://schemas.openxmlformats.org/drawingml/2006/main">
               <a:ext uri="{FF2B5EF4-FFF2-40B4-BE49-F238E27FC236}">
-                <a16:creationId xmlns:a16="http://schemas.microsoft.com/office/drawing/2014/main" id="{EAEBD205-EFF1-42F1-90D8-C6170F99E366}"/>
+                <a16:creationId xmlns:a16="http://schemas.microsoft.com/office/drawing/2014/main" id="{BD7C40EE-EE02-4EB6-B865-296276897FD2}"/>
               </a:ext>
             </a:extLst>
           </p:cNvPr>
@@ -32464,7 +32464,7 @@
           <p:cNvPr id="66" name="">
             <a:extLst xmlns:a="http://schemas.openxmlformats.org/drawingml/2006/main">
               <a:ext uri="{FF2B5EF4-FFF2-40B4-BE49-F238E27FC236}">
-                <a16:creationId xmlns:a16="http://schemas.microsoft.com/office/drawing/2014/main" id="{7E7D4C0A-B9D7-43AF-80DD-B2A8F4CF405E}"/>
+                <a16:creationId xmlns:a16="http://schemas.microsoft.com/office/drawing/2014/main" id="{5DF612EF-AD3A-4508-9652-DA65E37017BE}"/>
               </a:ext>
             </a:extLst>
           </p:cNvPr>
@@ -32516,7 +32516,7 @@
           <p:cNvPr id="67" name="">
             <a:extLst xmlns:a="http://schemas.openxmlformats.org/drawingml/2006/main">
               <a:ext uri="{FF2B5EF4-FFF2-40B4-BE49-F238E27FC236}">
-                <a16:creationId xmlns:a16="http://schemas.microsoft.com/office/drawing/2014/main" id="{C7F854C1-5069-43F0-8926-5CE0B1C1D5E0}"/>
+                <a16:creationId xmlns:a16="http://schemas.microsoft.com/office/drawing/2014/main" id="{18495210-6AD5-4D7F-B4E6-2833FE3A1E6D}"/>
               </a:ext>
             </a:extLst>
           </p:cNvPr>
@@ -32568,7 +32568,7 @@
           <p:cNvPr id="68" name="">
             <a:extLst xmlns:a="http://schemas.openxmlformats.org/drawingml/2006/main">
               <a:ext uri="{FF2B5EF4-FFF2-40B4-BE49-F238E27FC236}">
-                <a16:creationId xmlns:a16="http://schemas.microsoft.com/office/drawing/2014/main" id="{1BD6F82C-1876-45D6-BD1E-2F24282AB449}"/>
+                <a16:creationId xmlns:a16="http://schemas.microsoft.com/office/drawing/2014/main" id="{22A348FB-382C-4394-8428-FC142338D53E}"/>
               </a:ext>
             </a:extLst>
           </p:cNvPr>
@@ -32611,7 +32611,7 @@
           <p:cNvPr id="69" name="">
             <a:extLst xmlns:a="http://schemas.openxmlformats.org/drawingml/2006/main">
               <a:ext uri="{FF2B5EF4-FFF2-40B4-BE49-F238E27FC236}">
-                <a16:creationId xmlns:a16="http://schemas.microsoft.com/office/drawing/2014/main" id="{B45C8DE7-8C15-4BF9-BD12-B95A8EC34494}"/>
+                <a16:creationId xmlns:a16="http://schemas.microsoft.com/office/drawing/2014/main" id="{CA0F4D7E-D0A7-4A72-B7F0-03C2A6F4DE38}"/>
               </a:ext>
             </a:extLst>
           </p:cNvPr>
@@ -32642,7 +32642,7 @@
           <p:cNvPr id="70" name="">
             <a:extLst xmlns:a="http://schemas.openxmlformats.org/drawingml/2006/main">
               <a:ext uri="{FF2B5EF4-FFF2-40B4-BE49-F238E27FC236}">
-                <a16:creationId xmlns:a16="http://schemas.microsoft.com/office/drawing/2014/main" id="{B9DD852E-A4A6-4BCF-8C54-32A2920712FA}"/>
+                <a16:creationId xmlns:a16="http://schemas.microsoft.com/office/drawing/2014/main" id="{E7879618-9C13-4A09-8248-8D472C05860C}"/>
               </a:ext>
             </a:extLst>
           </p:cNvPr>
@@ -32673,7 +32673,7 @@
           <p:cNvPr id="71" name="">
             <a:extLst xmlns:a="http://schemas.openxmlformats.org/drawingml/2006/main">
               <a:ext uri="{FF2B5EF4-FFF2-40B4-BE49-F238E27FC236}">
-                <a16:creationId xmlns:a16="http://schemas.microsoft.com/office/drawing/2014/main" id="{BDFC6920-F55F-4691-B302-456FF7797CAF}"/>
+                <a16:creationId xmlns:a16="http://schemas.microsoft.com/office/drawing/2014/main" id="{9222C27C-2CC8-42B6-B649-B2F30EECD9FD}"/>
               </a:ext>
             </a:extLst>
           </p